--- a/Наработки/диздоки/Марокко/Марокко.pptx
+++ b/Наработки/диздоки/Марокко/Марокко.pptx
@@ -209,7 +209,7 @@
             <a:fld id="{33E3D7F9-E251-484C-A6FF-FA958879DF69}" type="datetimeFigureOut">
               <a:rPr lang="ru-RU" smtClean="0"/>
               <a:pPr/>
-              <a:t>19.11.2025</a:t>
+              <a:t>09.06.2026</a:t>
             </a:fld>
             <a:endParaRPr lang="ru-RU"/>
           </a:p>
@@ -699,7 +699,7 @@
             <a:fld id="{85A5DE44-605B-4D3B-B2B7-94543DF81A36}" type="datetimeFigureOut">
               <a:rPr lang="ru-RU" smtClean="0"/>
               <a:pPr/>
-              <a:t>19.11.2025</a:t>
+              <a:t>09.06.2026</a:t>
             </a:fld>
             <a:endParaRPr lang="ru-RU"/>
           </a:p>
@@ -871,7 +871,7 @@
             <a:fld id="{85A5DE44-605B-4D3B-B2B7-94543DF81A36}" type="datetimeFigureOut">
               <a:rPr lang="ru-RU" smtClean="0"/>
               <a:pPr/>
-              <a:t>19.11.2025</a:t>
+              <a:t>09.06.2026</a:t>
             </a:fld>
             <a:endParaRPr lang="ru-RU"/>
           </a:p>
@@ -1053,7 +1053,7 @@
             <a:fld id="{85A5DE44-605B-4D3B-B2B7-94543DF81A36}" type="datetimeFigureOut">
               <a:rPr lang="ru-RU" smtClean="0"/>
               <a:pPr/>
-              <a:t>19.11.2025</a:t>
+              <a:t>09.06.2026</a:t>
             </a:fld>
             <a:endParaRPr lang="ru-RU"/>
           </a:p>
@@ -1225,7 +1225,7 @@
             <a:fld id="{85A5DE44-605B-4D3B-B2B7-94543DF81A36}" type="datetimeFigureOut">
               <a:rPr lang="ru-RU" smtClean="0"/>
               <a:pPr/>
-              <a:t>19.11.2025</a:t>
+              <a:t>09.06.2026</a:t>
             </a:fld>
             <a:endParaRPr lang="ru-RU"/>
           </a:p>
@@ -1473,7 +1473,7 @@
             <a:fld id="{85A5DE44-605B-4D3B-B2B7-94543DF81A36}" type="datetimeFigureOut">
               <a:rPr lang="ru-RU" smtClean="0"/>
               <a:pPr/>
-              <a:t>19.11.2025</a:t>
+              <a:t>09.06.2026</a:t>
             </a:fld>
             <a:endParaRPr lang="ru-RU"/>
           </a:p>
@@ -1707,7 +1707,7 @@
             <a:fld id="{85A5DE44-605B-4D3B-B2B7-94543DF81A36}" type="datetimeFigureOut">
               <a:rPr lang="ru-RU" smtClean="0"/>
               <a:pPr/>
-              <a:t>19.11.2025</a:t>
+              <a:t>09.06.2026</a:t>
             </a:fld>
             <a:endParaRPr lang="ru-RU"/>
           </a:p>
@@ -2076,7 +2076,7 @@
             <a:fld id="{85A5DE44-605B-4D3B-B2B7-94543DF81A36}" type="datetimeFigureOut">
               <a:rPr lang="ru-RU" smtClean="0"/>
               <a:pPr/>
-              <a:t>19.11.2025</a:t>
+              <a:t>09.06.2026</a:t>
             </a:fld>
             <a:endParaRPr lang="ru-RU"/>
           </a:p>
@@ -2196,7 +2196,7 @@
             <a:fld id="{85A5DE44-605B-4D3B-B2B7-94543DF81A36}" type="datetimeFigureOut">
               <a:rPr lang="ru-RU" smtClean="0"/>
               <a:pPr/>
-              <a:t>19.11.2025</a:t>
+              <a:t>09.06.2026</a:t>
             </a:fld>
             <a:endParaRPr lang="ru-RU"/>
           </a:p>
@@ -2293,7 +2293,7 @@
             <a:fld id="{85A5DE44-605B-4D3B-B2B7-94543DF81A36}" type="datetimeFigureOut">
               <a:rPr lang="ru-RU" smtClean="0"/>
               <a:pPr/>
-              <a:t>19.11.2025</a:t>
+              <a:t>09.06.2026</a:t>
             </a:fld>
             <a:endParaRPr lang="ru-RU"/>
           </a:p>
@@ -2572,7 +2572,7 @@
             <a:fld id="{85A5DE44-605B-4D3B-B2B7-94543DF81A36}" type="datetimeFigureOut">
               <a:rPr lang="ru-RU" smtClean="0"/>
               <a:pPr/>
-              <a:t>19.11.2025</a:t>
+              <a:t>09.06.2026</a:t>
             </a:fld>
             <a:endParaRPr lang="ru-RU"/>
           </a:p>
@@ -2831,7 +2831,7 @@
             <a:fld id="{85A5DE44-605B-4D3B-B2B7-94543DF81A36}" type="datetimeFigureOut">
               <a:rPr lang="ru-RU" smtClean="0"/>
               <a:pPr/>
-              <a:t>19.11.2025</a:t>
+              <a:t>09.06.2026</a:t>
             </a:fld>
             <a:endParaRPr lang="ru-RU"/>
           </a:p>
@@ -3046,7 +3046,7 @@
             <a:fld id="{85A5DE44-605B-4D3B-B2B7-94543DF81A36}" type="datetimeFigureOut">
               <a:rPr lang="ru-RU" smtClean="0"/>
               <a:pPr/>
-              <a:t>19.11.2025</a:t>
+              <a:t>09.06.2026</a:t>
             </a:fld>
             <a:endParaRPr lang="ru-RU"/>
           </a:p>
@@ -3460,7 +3460,7 @@
         </p:nvSpPr>
         <p:spPr>
           <a:xfrm>
-            <a:off x="24534685" y="1369129"/>
+            <a:off x="23915543" y="1417144"/>
             <a:ext cx="926325" cy="540000"/>
           </a:xfrm>
           <a:prstGeom prst="rect">
@@ -3492,208 +3492,21 @@
             <a:pPr algn="ctr"/>
             <a:r>
               <a:rPr lang="ru-RU" sz="700" dirty="0"/>
-              <a:t>Создать институт </a:t>
-            </a:r>
-            <a:r>
-              <a:rPr lang="ru-RU" sz="700" dirty="0" err="1"/>
-              <a:t>гумов</a:t>
-            </a:r>
-            <a:r>
-              <a:rPr lang="ru-RU" sz="700" dirty="0"/>
-              <a:t> вспомогательной службы (1937) </a:t>
+              <a:t>Модернизация лагерей в Фесе (1936) </a:t>
             </a:r>
             <a:r>
               <a:rPr lang="ru-RU" sz="100" dirty="0"/>
-              <a:t>(Стандартный </a:t>
+              <a:t>(В 1936 году Франция усиливала гарнизоны, опасаясь, что испанский хаос перекинется на их часть </a:t>
             </a:r>
             <a:r>
               <a:rPr lang="ru-RU" sz="100" dirty="0" err="1"/>
-              <a:t>гум</a:t>
+              <a:t>Марокко.Эффект</a:t>
             </a:r>
             <a:r>
               <a:rPr lang="ru-RU" sz="100" dirty="0"/>
-              <a:t> представлял собой конно-стрелковое подразделение, эквивалентное роте. В его составе имелся верховой взвод (на лошадях или верблюдах), вьючный взвод, а также 3-4 стрелковых взвода. Такая организация позволяла </a:t>
-            </a:r>
-            <a:r>
-              <a:rPr lang="ru-RU" sz="100" dirty="0" err="1"/>
-              <a:t>гумам</a:t>
-            </a:r>
-            <a:r>
-              <a:rPr lang="ru-RU" sz="100" dirty="0"/>
-              <a:t> вести автономные боевые действия в условиях горно-пустынной </a:t>
-            </a:r>
-            <a:r>
-              <a:rPr lang="ru-RU" sz="100" dirty="0" err="1"/>
-              <a:t>местности.Первый</a:t>
-            </a:r>
-            <a:r>
-              <a:rPr lang="ru-RU" sz="100" dirty="0"/>
-              <a:t> марокканский </a:t>
-            </a:r>
-            <a:r>
-              <a:rPr lang="ru-RU" sz="100" dirty="0" err="1"/>
-              <a:t>гум</a:t>
-            </a:r>
-            <a:r>
-              <a:rPr lang="ru-RU" sz="100" dirty="0"/>
-              <a:t> был сформирован 5 ноября 1908 г. В дальнейшем их число постоянно росло. Если в 1914 г. в армии протектората насчитывалось 15 </a:t>
-            </a:r>
-            <a:r>
-              <a:rPr lang="ru-RU" sz="100" dirty="0" err="1"/>
-              <a:t>гумов</a:t>
-            </a:r>
-            <a:r>
-              <a:rPr lang="ru-RU" sz="100" dirty="0"/>
-              <a:t>, к 1934 г. — году, связываемому французами с завершением операции по “примирению” Марокко — их насчитывалось уже 51. Как правило, каждым </a:t>
-            </a:r>
-            <a:r>
-              <a:rPr lang="ru-RU" sz="100" dirty="0" err="1"/>
-              <a:t>гумом</a:t>
-            </a:r>
-            <a:r>
-              <a:rPr lang="ru-RU" sz="100" dirty="0"/>
-              <a:t> командовал французский офицер из состава Службы туземных дел. В 1937 г. был создан институт </a:t>
-            </a:r>
-            <a:r>
-              <a:rPr lang="ru-RU" sz="100" dirty="0" err="1"/>
-              <a:t>тумов</a:t>
-            </a:r>
-            <a:r>
-              <a:rPr lang="ru-RU" sz="100" dirty="0"/>
-              <a:t> вспомогательной службы. Забегая вперед, необходимо отметить, что к началу Второй мировой войны в войсках протектората насчитывалось 57 действующих </a:t>
-            </a:r>
-            <a:r>
-              <a:rPr lang="ru-RU" sz="100" dirty="0" err="1"/>
-              <a:t>гумов</a:t>
-            </a:r>
-            <a:r>
-              <a:rPr lang="ru-RU" sz="100" dirty="0"/>
-              <a:t> и 64 вспомогательных)</a:t>
+              <a:t> в HOI 4: Добавляет 2 военные фабрики и 1 инфраструктуру в регион Фес.</a:t>
             </a:r>
             <a:endParaRPr lang="ru-RU" sz="700" dirty="0"/>
-          </a:p>
-        </p:txBody>
-      </p:sp>
-      <p:sp>
-        <p:nvSpPr>
-          <p:cNvPr id="1027" name="Прямоугольник 1026">
-            <a:extLst>
-              <a:ext uri="{FF2B5EF4-FFF2-40B4-BE49-F238E27FC236}">
-                <a16:creationId xmlns:a16="http://schemas.microsoft.com/office/drawing/2014/main" id="{DB1631C9-91EC-471F-8438-3881EA858FD4}"/>
-              </a:ext>
-            </a:extLst>
-          </p:cNvPr>
-          <p:cNvSpPr/>
-          <p:nvPr/>
-        </p:nvSpPr>
-        <p:spPr>
-          <a:xfrm>
-            <a:off x="23385340" y="2178545"/>
-            <a:ext cx="926325" cy="540000"/>
-          </a:xfrm>
-          <a:prstGeom prst="rect">
-            <a:avLst/>
-          </a:prstGeom>
-          <a:solidFill>
-            <a:schemeClr val="bg1"/>
-          </a:solidFill>
-          <a:ln w="19050"/>
-        </p:spPr>
-        <p:style>
-          <a:lnRef idx="2">
-            <a:schemeClr val="accent1"/>
-          </a:lnRef>
-          <a:fillRef idx="1">
-            <a:schemeClr val="lt1"/>
-          </a:fillRef>
-          <a:effectRef idx="0">
-            <a:schemeClr val="accent1"/>
-          </a:effectRef>
-          <a:fontRef idx="minor">
-            <a:schemeClr val="dk1"/>
-          </a:fontRef>
-        </p:style>
-        <p:txBody>
-          <a:bodyPr lIns="124733" tIns="62367" rIns="124733" bIns="62367" rtlCol="0" anchor="ctr"/>
-          <a:lstStyle/>
-          <a:p>
-            <a:pPr algn="ctr"/>
-            <a:r>
-              <a:rPr lang="ru-RU" sz="700" dirty="0"/>
-              <a:t>Мобилизация </a:t>
-            </a:r>
-            <a:r>
-              <a:rPr lang="ru-RU" sz="700" dirty="0" err="1"/>
-              <a:t>гумов</a:t>
-            </a:r>
-            <a:r>
-              <a:rPr lang="ru-RU" sz="700" dirty="0"/>
-              <a:t> </a:t>
-            </a:r>
-            <a:r>
-              <a:rPr lang="ru-RU" sz="300" dirty="0"/>
-              <a:t>(После мобилизации число первых было доведено до 121. К апрелю 1940 г. они были сведены в 16 таборов (батальонов) по 4-5 </a:t>
-            </a:r>
-            <a:r>
-              <a:rPr lang="ru-RU" sz="300" dirty="0" err="1"/>
-              <a:t>гумов</a:t>
-            </a:r>
-            <a:r>
-              <a:rPr lang="ru-RU" sz="300" dirty="0"/>
-              <a:t> в каждом.)</a:t>
-            </a:r>
-            <a:endParaRPr lang="ru-RU" sz="700" dirty="0"/>
-          </a:p>
-        </p:txBody>
-      </p:sp>
-      <p:sp>
-        <p:nvSpPr>
-          <p:cNvPr id="1028" name="Прямоугольник 1027">
-            <a:extLst>
-              <a:ext uri="{FF2B5EF4-FFF2-40B4-BE49-F238E27FC236}">
-                <a16:creationId xmlns:a16="http://schemas.microsoft.com/office/drawing/2014/main" id="{D6E92AC8-0AE9-46F9-A924-784EB6A3DC97}"/>
-              </a:ext>
-            </a:extLst>
-          </p:cNvPr>
-          <p:cNvSpPr/>
-          <p:nvPr/>
-        </p:nvSpPr>
-        <p:spPr>
-          <a:xfrm>
-            <a:off x="25676239" y="2184428"/>
-            <a:ext cx="926325" cy="540000"/>
-          </a:xfrm>
-          <a:prstGeom prst="rect">
-            <a:avLst/>
-          </a:prstGeom>
-          <a:solidFill>
-            <a:schemeClr val="bg1"/>
-          </a:solidFill>
-          <a:ln w="19050"/>
-        </p:spPr>
-        <p:style>
-          <a:lnRef idx="2">
-            <a:schemeClr val="accent1"/>
-          </a:lnRef>
-          <a:fillRef idx="1">
-            <a:schemeClr val="lt1"/>
-          </a:fillRef>
-          <a:effectRef idx="0">
-            <a:schemeClr val="accent1"/>
-          </a:effectRef>
-          <a:fontRef idx="minor">
-            <a:schemeClr val="dk1"/>
-          </a:fontRef>
-        </p:style>
-        <p:txBody>
-          <a:bodyPr lIns="124733" tIns="62367" rIns="124733" bIns="62367" rtlCol="0" anchor="ctr"/>
-          <a:lstStyle/>
-          <a:p>
-            <a:pPr algn="ctr"/>
-            <a:r>
-              <a:rPr lang="ru-RU" sz="700" dirty="0"/>
-              <a:t>Продолжить политику дефляции</a:t>
-            </a:r>
           </a:p>
         </p:txBody>
       </p:sp>
@@ -3709,14 +3522,14 @@
           <p:cNvCxnSpPr>
             <a:cxnSpLocks/>
             <a:stCxn id="582" idx="2"/>
-            <a:endCxn id="1027" idx="0"/>
+            <a:endCxn id="15" idx="0"/>
           </p:cNvCxnSpPr>
           <p:nvPr/>
         </p:nvCxnSpPr>
         <p:spPr>
           <a:xfrm rot="5400000">
-            <a:off x="24288468" y="1469165"/>
-            <a:ext cx="269416" cy="1149345"/>
+            <a:off x="23586435" y="1502819"/>
+            <a:ext cx="337946" cy="1246596"/>
           </a:xfrm>
           <a:prstGeom prst="bentConnector3">
             <a:avLst>
@@ -3754,14 +3567,14 @@
           <p:cNvCxnSpPr>
             <a:cxnSpLocks/>
             <a:stCxn id="582" idx="2"/>
-            <a:endCxn id="1028" idx="0"/>
+            <a:endCxn id="17" idx="0"/>
           </p:cNvCxnSpPr>
           <p:nvPr/>
         </p:nvCxnSpPr>
         <p:spPr>
           <a:xfrm rot="16200000" flipH="1">
-            <a:off x="25430976" y="1476001"/>
-            <a:ext cx="275299" cy="1141554"/>
+            <a:off x="24869363" y="1466487"/>
+            <a:ext cx="337947" cy="1319260"/>
           </a:xfrm>
           <a:prstGeom prst="bentConnector3">
             <a:avLst>
@@ -3801,7 +3614,7 @@
         </p:nvSpPr>
         <p:spPr>
           <a:xfrm>
-            <a:off x="24534684" y="2183802"/>
+            <a:off x="24534685" y="3102340"/>
             <a:ext cx="926325" cy="540000"/>
           </a:xfrm>
           <a:prstGeom prst="rect">
@@ -3838,29 +3651,1661 @@
           </a:p>
         </p:txBody>
       </p:sp>
+      <p:sp>
+        <p:nvSpPr>
+          <p:cNvPr id="9" name="Прямоугольник 8">
+            <a:extLst>
+              <a:ext uri="{FF2B5EF4-FFF2-40B4-BE49-F238E27FC236}">
+                <a16:creationId xmlns:a16="http://schemas.microsoft.com/office/drawing/2014/main" id="{740C665A-13D9-4E14-8780-8AA990DA62F9}"/>
+              </a:ext>
+            </a:extLst>
+          </p:cNvPr>
+          <p:cNvSpPr/>
+          <p:nvPr/>
+        </p:nvSpPr>
+        <p:spPr>
+          <a:xfrm>
+            <a:off x="27529848" y="1215093"/>
+            <a:ext cx="926325" cy="540000"/>
+          </a:xfrm>
+          <a:prstGeom prst="rect">
+            <a:avLst/>
+          </a:prstGeom>
+          <a:solidFill>
+            <a:schemeClr val="bg1"/>
+          </a:solidFill>
+          <a:ln w="19050"/>
+        </p:spPr>
+        <p:style>
+          <a:lnRef idx="2">
+            <a:schemeClr val="accent1"/>
+          </a:lnRef>
+          <a:fillRef idx="1">
+            <a:schemeClr val="lt1"/>
+          </a:fillRef>
+          <a:effectRef idx="0">
+            <a:schemeClr val="accent1"/>
+          </a:effectRef>
+          <a:fontRef idx="minor">
+            <a:schemeClr val="dk1"/>
+          </a:fontRef>
+        </p:style>
+        <p:txBody>
+          <a:bodyPr lIns="124733" tIns="62367" rIns="124733" bIns="62367" rtlCol="0" anchor="ctr"/>
+          <a:lstStyle/>
+          <a:p>
+            <a:pPr algn="ctr"/>
+            <a:r>
+              <a:rPr lang="ru-RU" sz="700" dirty="0"/>
+              <a:t>Продолжить политику дефляции</a:t>
+            </a:r>
+          </a:p>
+        </p:txBody>
+      </p:sp>
+      <p:sp>
+        <p:nvSpPr>
+          <p:cNvPr id="15" name="Прямоугольник 14">
+            <a:extLst>
+              <a:ext uri="{FF2B5EF4-FFF2-40B4-BE49-F238E27FC236}">
+                <a16:creationId xmlns:a16="http://schemas.microsoft.com/office/drawing/2014/main" id="{486BD42C-E6E8-4E9A-972F-66E45C5E9F5A}"/>
+              </a:ext>
+            </a:extLst>
+          </p:cNvPr>
+          <p:cNvSpPr/>
+          <p:nvPr/>
+        </p:nvSpPr>
+        <p:spPr>
+          <a:xfrm>
+            <a:off x="22668947" y="2295090"/>
+            <a:ext cx="926325" cy="540000"/>
+          </a:xfrm>
+          <a:prstGeom prst="rect">
+            <a:avLst/>
+          </a:prstGeom>
+          <a:solidFill>
+            <a:schemeClr val="bg1"/>
+          </a:solidFill>
+          <a:ln w="19050"/>
+        </p:spPr>
+        <p:style>
+          <a:lnRef idx="2">
+            <a:schemeClr val="accent1"/>
+          </a:lnRef>
+          <a:fillRef idx="1">
+            <a:schemeClr val="lt1"/>
+          </a:fillRef>
+          <a:effectRef idx="0">
+            <a:schemeClr val="accent1"/>
+          </a:effectRef>
+          <a:fontRef idx="minor">
+            <a:schemeClr val="dk1"/>
+          </a:fontRef>
+        </p:style>
+        <p:txBody>
+          <a:bodyPr lIns="124733" tIns="62367" rIns="124733" bIns="62367" rtlCol="0" anchor="ctr"/>
+          <a:lstStyle/>
+          <a:p>
+            <a:pPr algn="ctr"/>
+            <a:r>
+              <a:rPr lang="ru-RU" sz="700" dirty="0"/>
+              <a:t>Продолжить опираться на племенные войска</a:t>
+            </a:r>
+          </a:p>
+        </p:txBody>
+      </p:sp>
+      <p:sp>
+        <p:nvSpPr>
+          <p:cNvPr id="17" name="Прямоугольник 16">
+            <a:extLst>
+              <a:ext uri="{FF2B5EF4-FFF2-40B4-BE49-F238E27FC236}">
+                <a16:creationId xmlns:a16="http://schemas.microsoft.com/office/drawing/2014/main" id="{E1A641D6-0384-4A0F-A884-6A52826677FD}"/>
+              </a:ext>
+            </a:extLst>
+          </p:cNvPr>
+          <p:cNvSpPr/>
+          <p:nvPr/>
+        </p:nvSpPr>
+        <p:spPr>
+          <a:xfrm>
+            <a:off x="25234803" y="2295091"/>
+            <a:ext cx="926325" cy="540000"/>
+          </a:xfrm>
+          <a:prstGeom prst="rect">
+            <a:avLst/>
+          </a:prstGeom>
+          <a:solidFill>
+            <a:schemeClr val="bg1"/>
+          </a:solidFill>
+          <a:ln w="19050"/>
+        </p:spPr>
+        <p:style>
+          <a:lnRef idx="2">
+            <a:schemeClr val="accent1"/>
+          </a:lnRef>
+          <a:fillRef idx="1">
+            <a:schemeClr val="lt1"/>
+          </a:fillRef>
+          <a:effectRef idx="0">
+            <a:schemeClr val="accent1"/>
+          </a:effectRef>
+          <a:fontRef idx="minor">
+            <a:schemeClr val="dk1"/>
+          </a:fontRef>
+        </p:style>
+        <p:txBody>
+          <a:bodyPr lIns="124733" tIns="62367" rIns="124733" bIns="62367" rtlCol="0" anchor="ctr"/>
+          <a:lstStyle/>
+          <a:p>
+            <a:pPr algn="ctr"/>
+            <a:r>
+              <a:rPr lang="ru-RU" sz="700" dirty="0"/>
+              <a:t>Сформировать регулярные войска</a:t>
+            </a:r>
+          </a:p>
+        </p:txBody>
+      </p:sp>
       <p:cxnSp>
         <p:nvCxnSpPr>
-          <p:cNvPr id="360" name="Прямая со стрелкой 359">
+          <p:cNvPr id="24" name="Прямая соединительная линия 23">
             <a:extLst>
               <a:ext uri="{FF2B5EF4-FFF2-40B4-BE49-F238E27FC236}">
-                <a16:creationId xmlns:a16="http://schemas.microsoft.com/office/drawing/2014/main" id="{221D054B-9808-4236-9164-66FCDDBC0B23}"/>
+                <a16:creationId xmlns:a16="http://schemas.microsoft.com/office/drawing/2014/main" id="{C5EB57FB-243F-45A9-A62E-8A1DC06BD87A}"/>
               </a:ext>
             </a:extLst>
           </p:cNvPr>
           <p:cNvCxnSpPr>
             <a:cxnSpLocks/>
-            <a:stCxn id="582" idx="2"/>
+            <a:stCxn id="17" idx="1"/>
+            <a:endCxn id="15" idx="3"/>
+          </p:cNvCxnSpPr>
+          <p:nvPr/>
+        </p:nvCxnSpPr>
+        <p:spPr>
+          <a:xfrm flipH="1" flipV="1">
+            <a:off x="23595272" y="2565090"/>
+            <a:ext cx="1639531" cy="1"/>
+          </a:xfrm>
+          <a:prstGeom prst="line">
+            <a:avLst/>
+          </a:prstGeom>
+          <a:ln w="38100">
+            <a:solidFill>
+              <a:srgbClr val="C00000"/>
+            </a:solidFill>
+          </a:ln>
+        </p:spPr>
+        <p:style>
+          <a:lnRef idx="1">
+            <a:schemeClr val="accent1"/>
+          </a:lnRef>
+          <a:fillRef idx="0">
+            <a:schemeClr val="accent1"/>
+          </a:fillRef>
+          <a:effectRef idx="0">
+            <a:schemeClr val="accent1"/>
+          </a:effectRef>
+          <a:fontRef idx="minor">
+            <a:schemeClr val="tx1"/>
+          </a:fontRef>
+        </p:style>
+      </p:cxnSp>
+      <p:cxnSp>
+        <p:nvCxnSpPr>
+          <p:cNvPr id="28" name="Соединительная линия уступом 620">
+            <a:extLst>
+              <a:ext uri="{FF2B5EF4-FFF2-40B4-BE49-F238E27FC236}">
+                <a16:creationId xmlns:a16="http://schemas.microsoft.com/office/drawing/2014/main" id="{CBC1F065-34F6-4123-81AC-C7D623B89A58}"/>
+              </a:ext>
+            </a:extLst>
+          </p:cNvPr>
+          <p:cNvCxnSpPr>
+            <a:cxnSpLocks/>
+            <a:stCxn id="17" idx="2"/>
             <a:endCxn id="350" idx="0"/>
           </p:cNvCxnSpPr>
           <p:nvPr/>
         </p:nvCxnSpPr>
         <p:spPr>
-          <a:xfrm flipH="1">
-            <a:off x="24997847" y="1909129"/>
-            <a:ext cx="1" cy="274673"/>
-          </a:xfrm>
-          <a:prstGeom prst="straightConnector1">
+          <a:xfrm rot="5400000">
+            <a:off x="25214283" y="2618656"/>
+            <a:ext cx="267249" cy="700118"/>
+          </a:xfrm>
+          <a:prstGeom prst="bentConnector3">
+            <a:avLst>
+              <a:gd name="adj1" fmla="val 50000"/>
+            </a:avLst>
+          </a:prstGeom>
+          <a:ln w="19050">
+            <a:prstDash val="dash"/>
+            <a:tailEnd type="arrow"/>
+          </a:ln>
+        </p:spPr>
+        <p:style>
+          <a:lnRef idx="1">
+            <a:schemeClr val="accent1"/>
+          </a:lnRef>
+          <a:fillRef idx="0">
+            <a:schemeClr val="accent1"/>
+          </a:fillRef>
+          <a:effectRef idx="0">
+            <a:schemeClr val="accent1"/>
+          </a:effectRef>
+          <a:fontRef idx="minor">
+            <a:schemeClr val="tx1"/>
+          </a:fontRef>
+        </p:style>
+      </p:cxnSp>
+      <p:cxnSp>
+        <p:nvCxnSpPr>
+          <p:cNvPr id="32" name="Соединительная линия уступом 620">
+            <a:extLst>
+              <a:ext uri="{FF2B5EF4-FFF2-40B4-BE49-F238E27FC236}">
+                <a16:creationId xmlns:a16="http://schemas.microsoft.com/office/drawing/2014/main" id="{DEC2AC59-3F71-42F7-A646-3D9EBC9EDE81}"/>
+              </a:ext>
+            </a:extLst>
+          </p:cNvPr>
+          <p:cNvCxnSpPr>
+            <a:cxnSpLocks/>
+            <a:stCxn id="15" idx="2"/>
+            <a:endCxn id="350" idx="0"/>
+          </p:cNvCxnSpPr>
+          <p:nvPr/>
+        </p:nvCxnSpPr>
+        <p:spPr>
+          <a:xfrm rot="16200000" flipH="1">
+            <a:off x="23931354" y="2035846"/>
+            <a:ext cx="267250" cy="1865738"/>
+          </a:xfrm>
+          <a:prstGeom prst="bentConnector3">
+            <a:avLst>
+              <a:gd name="adj1" fmla="val 50000"/>
+            </a:avLst>
+          </a:prstGeom>
+          <a:ln w="19050">
+            <a:prstDash val="dash"/>
+            <a:tailEnd type="arrow"/>
+          </a:ln>
+        </p:spPr>
+        <p:style>
+          <a:lnRef idx="1">
+            <a:schemeClr val="accent1"/>
+          </a:lnRef>
+          <a:fillRef idx="0">
+            <a:schemeClr val="accent1"/>
+          </a:fillRef>
+          <a:effectRef idx="0">
+            <a:schemeClr val="accent1"/>
+          </a:effectRef>
+          <a:fontRef idx="minor">
+            <a:schemeClr val="tx1"/>
+          </a:fontRef>
+        </p:style>
+      </p:cxnSp>
+      <p:cxnSp>
+        <p:nvCxnSpPr>
+          <p:cNvPr id="42" name="Соединительная линия уступом 620">
+            <a:extLst>
+              <a:ext uri="{FF2B5EF4-FFF2-40B4-BE49-F238E27FC236}">
+                <a16:creationId xmlns:a16="http://schemas.microsoft.com/office/drawing/2014/main" id="{964FE8F6-6759-4708-9BBE-3D1603C20D2D}"/>
+              </a:ext>
+            </a:extLst>
+          </p:cNvPr>
+          <p:cNvCxnSpPr>
+            <a:cxnSpLocks/>
+            <a:stCxn id="15" idx="2"/>
+            <a:endCxn id="47" idx="0"/>
+          </p:cNvCxnSpPr>
+          <p:nvPr/>
+        </p:nvCxnSpPr>
+        <p:spPr>
+          <a:xfrm rot="5400000">
+            <a:off x="22690430" y="2658280"/>
+            <a:ext cx="264871" cy="618491"/>
+          </a:xfrm>
+          <a:prstGeom prst="bentConnector3">
+            <a:avLst>
+              <a:gd name="adj1" fmla="val 50000"/>
+            </a:avLst>
+          </a:prstGeom>
+          <a:ln w="19050">
+            <a:tailEnd type="arrow"/>
+          </a:ln>
+        </p:spPr>
+        <p:style>
+          <a:lnRef idx="1">
+            <a:schemeClr val="accent1"/>
+          </a:lnRef>
+          <a:fillRef idx="0">
+            <a:schemeClr val="accent1"/>
+          </a:fillRef>
+          <a:effectRef idx="0">
+            <a:schemeClr val="accent1"/>
+          </a:effectRef>
+          <a:fontRef idx="minor">
+            <a:schemeClr val="tx1"/>
+          </a:fontRef>
+        </p:style>
+      </p:cxnSp>
+      <p:sp>
+        <p:nvSpPr>
+          <p:cNvPr id="45" name="Прямоугольник 44">
+            <a:extLst>
+              <a:ext uri="{FF2B5EF4-FFF2-40B4-BE49-F238E27FC236}">
+                <a16:creationId xmlns:a16="http://schemas.microsoft.com/office/drawing/2014/main" id="{4616A96A-22CB-4BD3-B3D1-BCF1717A972F}"/>
+              </a:ext>
+            </a:extLst>
+          </p:cNvPr>
+          <p:cNvSpPr/>
+          <p:nvPr/>
+        </p:nvSpPr>
+        <p:spPr>
+          <a:xfrm>
+            <a:off x="25924173" y="3099255"/>
+            <a:ext cx="926325" cy="540000"/>
+          </a:xfrm>
+          <a:prstGeom prst="rect">
             <a:avLst/>
+          </a:prstGeom>
+          <a:solidFill>
+            <a:schemeClr val="bg1"/>
+          </a:solidFill>
+          <a:ln w="19050"/>
+        </p:spPr>
+        <p:style>
+          <a:lnRef idx="2">
+            <a:schemeClr val="accent1"/>
+          </a:lnRef>
+          <a:fillRef idx="1">
+            <a:schemeClr val="lt1"/>
+          </a:fillRef>
+          <a:effectRef idx="0">
+            <a:schemeClr val="accent1"/>
+          </a:effectRef>
+          <a:fontRef idx="minor">
+            <a:schemeClr val="dk1"/>
+          </a:fontRef>
+        </p:style>
+        <p:txBody>
+          <a:bodyPr lIns="124733" tIns="62367" rIns="124733" bIns="62367" rtlCol="0" anchor="ctr"/>
+          <a:lstStyle/>
+          <a:p>
+            <a:pPr algn="ctr"/>
+            <a:r>
+              <a:rPr lang="ru-RU" sz="700" dirty="0"/>
+              <a:t>Реформировать армию</a:t>
+            </a:r>
+          </a:p>
+        </p:txBody>
+      </p:sp>
+      <p:sp>
+        <p:nvSpPr>
+          <p:cNvPr id="46" name="Прямоугольник 45">
+            <a:extLst>
+              <a:ext uri="{FF2B5EF4-FFF2-40B4-BE49-F238E27FC236}">
+                <a16:creationId xmlns:a16="http://schemas.microsoft.com/office/drawing/2014/main" id="{CA213E93-BDA8-42EF-B23B-768B74394534}"/>
+              </a:ext>
+            </a:extLst>
+          </p:cNvPr>
+          <p:cNvSpPr/>
+          <p:nvPr/>
+        </p:nvSpPr>
+        <p:spPr>
+          <a:xfrm>
+            <a:off x="26677840" y="1317381"/>
+            <a:ext cx="926325" cy="540000"/>
+          </a:xfrm>
+          <a:prstGeom prst="rect">
+            <a:avLst/>
+          </a:prstGeom>
+          <a:solidFill>
+            <a:schemeClr val="bg1"/>
+          </a:solidFill>
+          <a:ln w="19050"/>
+        </p:spPr>
+        <p:style>
+          <a:lnRef idx="2">
+            <a:schemeClr val="accent1"/>
+          </a:lnRef>
+          <a:fillRef idx="1">
+            <a:schemeClr val="lt1"/>
+          </a:fillRef>
+          <a:effectRef idx="0">
+            <a:schemeClr val="accent1"/>
+          </a:effectRef>
+          <a:fontRef idx="minor">
+            <a:schemeClr val="dk1"/>
+          </a:fontRef>
+        </p:style>
+        <p:txBody>
+          <a:bodyPr lIns="124733" tIns="62367" rIns="124733" bIns="62367" rtlCol="0" anchor="ctr"/>
+          <a:lstStyle/>
+          <a:p>
+            <a:pPr algn="ctr"/>
+            <a:r>
+              <a:rPr lang="ru-RU" sz="700" dirty="0"/>
+              <a:t>Продолжить политику дефляции</a:t>
+            </a:r>
+          </a:p>
+        </p:txBody>
+      </p:sp>
+      <p:sp>
+        <p:nvSpPr>
+          <p:cNvPr id="47" name="Прямоугольник 46">
+            <a:extLst>
+              <a:ext uri="{FF2B5EF4-FFF2-40B4-BE49-F238E27FC236}">
+                <a16:creationId xmlns:a16="http://schemas.microsoft.com/office/drawing/2014/main" id="{FE5B1A21-6DBA-4A86-A4D1-6624A5F82543}"/>
+              </a:ext>
+            </a:extLst>
+          </p:cNvPr>
+          <p:cNvSpPr/>
+          <p:nvPr/>
+        </p:nvSpPr>
+        <p:spPr>
+          <a:xfrm>
+            <a:off x="22050456" y="3099961"/>
+            <a:ext cx="926325" cy="540000"/>
+          </a:xfrm>
+          <a:prstGeom prst="rect">
+            <a:avLst/>
+          </a:prstGeom>
+          <a:solidFill>
+            <a:schemeClr val="bg1"/>
+          </a:solidFill>
+          <a:ln w="19050"/>
+        </p:spPr>
+        <p:style>
+          <a:lnRef idx="2">
+            <a:schemeClr val="accent1"/>
+          </a:lnRef>
+          <a:fillRef idx="1">
+            <a:schemeClr val="lt1"/>
+          </a:fillRef>
+          <a:effectRef idx="0">
+            <a:schemeClr val="accent1"/>
+          </a:effectRef>
+          <a:fontRef idx="minor">
+            <a:schemeClr val="dk1"/>
+          </a:fontRef>
+        </p:style>
+        <p:txBody>
+          <a:bodyPr lIns="124733" tIns="62367" rIns="124733" bIns="62367" rtlCol="0" anchor="ctr"/>
+          <a:lstStyle/>
+          <a:p>
+            <a:pPr algn="ctr"/>
+            <a:r>
+              <a:rPr lang="ru-RU" sz="700" dirty="0"/>
+              <a:t>Создать институт </a:t>
+            </a:r>
+            <a:r>
+              <a:rPr lang="ru-RU" sz="700" dirty="0" err="1"/>
+              <a:t>гумов</a:t>
+            </a:r>
+            <a:r>
+              <a:rPr lang="ru-RU" sz="700" dirty="0"/>
+              <a:t> вспомогательной службы (1937) </a:t>
+            </a:r>
+            <a:r>
+              <a:rPr lang="ru-RU" sz="100" dirty="0"/>
+              <a:t>(Стандартный </a:t>
+            </a:r>
+            <a:r>
+              <a:rPr lang="ru-RU" sz="100" dirty="0" err="1"/>
+              <a:t>гум</a:t>
+            </a:r>
+            <a:r>
+              <a:rPr lang="ru-RU" sz="100" dirty="0"/>
+              <a:t> представлял собой конно-стрелковое подразделение, эквивалентное роте. В его составе имелся верховой взвод (на лошадях или верблюдах), вьючный взвод, а также 3-4 стрелковых взвода. Такая организация позволяла </a:t>
+            </a:r>
+            <a:r>
+              <a:rPr lang="ru-RU" sz="100" dirty="0" err="1"/>
+              <a:t>гумам</a:t>
+            </a:r>
+            <a:r>
+              <a:rPr lang="ru-RU" sz="100" dirty="0"/>
+              <a:t> вести автономные боевые действия в условиях горно-пустынной </a:t>
+            </a:r>
+            <a:r>
+              <a:rPr lang="ru-RU" sz="100" dirty="0" err="1"/>
+              <a:t>местности.Первый</a:t>
+            </a:r>
+            <a:r>
+              <a:rPr lang="ru-RU" sz="100" dirty="0"/>
+              <a:t> марокканский </a:t>
+            </a:r>
+            <a:r>
+              <a:rPr lang="ru-RU" sz="100" dirty="0" err="1"/>
+              <a:t>гум</a:t>
+            </a:r>
+            <a:r>
+              <a:rPr lang="ru-RU" sz="100" dirty="0"/>
+              <a:t> был сформирован 5 ноября 1908 г. В дальнейшем их число постоянно росло. Если в 1914 г. в армии протектората насчитывалось 15 </a:t>
+            </a:r>
+            <a:r>
+              <a:rPr lang="ru-RU" sz="100" dirty="0" err="1"/>
+              <a:t>гумов</a:t>
+            </a:r>
+            <a:r>
+              <a:rPr lang="ru-RU" sz="100" dirty="0"/>
+              <a:t>, к 1934 г. — году, связываемому французами с завершением операции по “примирению” Марокко — их насчитывалось уже 51. Как правило, каждым </a:t>
+            </a:r>
+            <a:r>
+              <a:rPr lang="ru-RU" sz="100" dirty="0" err="1"/>
+              <a:t>гумом</a:t>
+            </a:r>
+            <a:r>
+              <a:rPr lang="ru-RU" sz="100" dirty="0"/>
+              <a:t> командовал французский офицер из состава Службы туземных дел. В 1937 г. был создан институт </a:t>
+            </a:r>
+            <a:r>
+              <a:rPr lang="ru-RU" sz="100" dirty="0" err="1"/>
+              <a:t>тумов</a:t>
+            </a:r>
+            <a:r>
+              <a:rPr lang="ru-RU" sz="100" dirty="0"/>
+              <a:t> вспомогательной службы. Забегая вперед, необходимо отметить, что к началу Второй мировой войны в войсках протектората насчитывалось 57 действующих </a:t>
+            </a:r>
+            <a:r>
+              <a:rPr lang="ru-RU" sz="100" dirty="0" err="1"/>
+              <a:t>гумов</a:t>
+            </a:r>
+            <a:r>
+              <a:rPr lang="ru-RU" sz="100" dirty="0"/>
+              <a:t> и 64 вспомогательных)</a:t>
+            </a:r>
+            <a:endParaRPr lang="ru-RU" sz="700" dirty="0"/>
+          </a:p>
+        </p:txBody>
+      </p:sp>
+      <p:sp>
+        <p:nvSpPr>
+          <p:cNvPr id="48" name="Прямоугольник 47">
+            <a:extLst>
+              <a:ext uri="{FF2B5EF4-FFF2-40B4-BE49-F238E27FC236}">
+                <a16:creationId xmlns:a16="http://schemas.microsoft.com/office/drawing/2014/main" id="{2C1738C5-A41E-4331-A29C-50F11F29894B}"/>
+              </a:ext>
+            </a:extLst>
+          </p:cNvPr>
+          <p:cNvSpPr/>
+          <p:nvPr/>
+        </p:nvSpPr>
+        <p:spPr>
+          <a:xfrm>
+            <a:off x="22049808" y="3917890"/>
+            <a:ext cx="926325" cy="540000"/>
+          </a:xfrm>
+          <a:prstGeom prst="rect">
+            <a:avLst/>
+          </a:prstGeom>
+          <a:solidFill>
+            <a:schemeClr val="bg1"/>
+          </a:solidFill>
+          <a:ln w="19050"/>
+        </p:spPr>
+        <p:style>
+          <a:lnRef idx="2">
+            <a:schemeClr val="accent1"/>
+          </a:lnRef>
+          <a:fillRef idx="1">
+            <a:schemeClr val="lt1"/>
+          </a:fillRef>
+          <a:effectRef idx="0">
+            <a:schemeClr val="accent1"/>
+          </a:effectRef>
+          <a:fontRef idx="minor">
+            <a:schemeClr val="dk1"/>
+          </a:fontRef>
+        </p:style>
+        <p:txBody>
+          <a:bodyPr lIns="124733" tIns="62367" rIns="124733" bIns="62367" rtlCol="0" anchor="ctr"/>
+          <a:lstStyle/>
+          <a:p>
+            <a:pPr algn="ctr"/>
+            <a:r>
+              <a:rPr lang="ru-RU" sz="700" dirty="0"/>
+              <a:t>Мобилизация </a:t>
+            </a:r>
+            <a:r>
+              <a:rPr lang="ru-RU" sz="700" dirty="0" err="1"/>
+              <a:t>гумов</a:t>
+            </a:r>
+            <a:r>
+              <a:rPr lang="ru-RU" sz="700" dirty="0"/>
+              <a:t> (1940) </a:t>
+            </a:r>
+            <a:r>
+              <a:rPr lang="ru-RU" sz="300" dirty="0"/>
+              <a:t>(После мобилизации число первых было доведено до 121. К апрелю 1940 г. они были сведены в 16 таборов (батальонов) по 4-5 </a:t>
+            </a:r>
+            <a:r>
+              <a:rPr lang="ru-RU" sz="300" dirty="0" err="1"/>
+              <a:t>гумов</a:t>
+            </a:r>
+            <a:r>
+              <a:rPr lang="ru-RU" sz="300" dirty="0"/>
+              <a:t> в каждом.)</a:t>
+            </a:r>
+            <a:endParaRPr lang="ru-RU" sz="700" dirty="0"/>
+          </a:p>
+        </p:txBody>
+      </p:sp>
+      <p:sp>
+        <p:nvSpPr>
+          <p:cNvPr id="50" name="Прямоугольник 49">
+            <a:extLst>
+              <a:ext uri="{FF2B5EF4-FFF2-40B4-BE49-F238E27FC236}">
+                <a16:creationId xmlns:a16="http://schemas.microsoft.com/office/drawing/2014/main" id="{714B254A-36D5-4290-AB41-31D23B38DA78}"/>
+              </a:ext>
+            </a:extLst>
+          </p:cNvPr>
+          <p:cNvSpPr/>
+          <p:nvPr/>
+        </p:nvSpPr>
+        <p:spPr>
+          <a:xfrm>
+            <a:off x="20807424" y="3099255"/>
+            <a:ext cx="926325" cy="540000"/>
+          </a:xfrm>
+          <a:prstGeom prst="rect">
+            <a:avLst/>
+          </a:prstGeom>
+          <a:solidFill>
+            <a:schemeClr val="bg1"/>
+          </a:solidFill>
+          <a:ln w="19050"/>
+        </p:spPr>
+        <p:style>
+          <a:lnRef idx="2">
+            <a:schemeClr val="accent1"/>
+          </a:lnRef>
+          <a:fillRef idx="1">
+            <a:schemeClr val="lt1"/>
+          </a:fillRef>
+          <a:effectRef idx="0">
+            <a:schemeClr val="accent1"/>
+          </a:effectRef>
+          <a:fontRef idx="minor">
+            <a:schemeClr val="dk1"/>
+          </a:fontRef>
+        </p:style>
+        <p:txBody>
+          <a:bodyPr lIns="124733" tIns="62367" rIns="124733" bIns="62367" rtlCol="0" anchor="ctr"/>
+          <a:lstStyle/>
+          <a:p>
+            <a:pPr algn="ctr"/>
+            <a:r>
+              <a:rPr lang="ru-RU" sz="700" dirty="0"/>
+              <a:t>Директива </a:t>
+            </a:r>
+            <a:r>
+              <a:rPr lang="ru-RU" sz="700" dirty="0" err="1"/>
+              <a:t>Ногеса</a:t>
+            </a:r>
+            <a:r>
+              <a:rPr lang="ru-RU" sz="700" dirty="0"/>
+              <a:t>: Мобилизация племен Атласа </a:t>
+            </a:r>
+            <a:r>
+              <a:rPr lang="ru-RU" sz="100" dirty="0"/>
+              <a:t>(С 1936 года Франция резко увеличила набор коренных марокканцев (арабов и берберов) в ряды регулярных частей — </a:t>
+            </a:r>
+            <a:r>
+              <a:rPr lang="ru-RU" sz="100" dirty="0" err="1"/>
+              <a:t>Тиральеров</a:t>
+            </a:r>
+            <a:r>
+              <a:rPr lang="ru-RU" sz="100" dirty="0"/>
+              <a:t> (Тайлеров) и </a:t>
+            </a:r>
+            <a:r>
+              <a:rPr lang="ru-RU" sz="100" dirty="0" err="1"/>
+              <a:t>Гумьеров</a:t>
+            </a:r>
+            <a:r>
+              <a:rPr lang="ru-RU" sz="100" dirty="0"/>
+              <a:t>. К 1939 году </a:t>
+            </a:r>
+            <a:r>
+              <a:rPr lang="ru-RU" sz="100" dirty="0" err="1"/>
+              <a:t>Ногесу</a:t>
+            </a:r>
+            <a:r>
+              <a:rPr lang="ru-RU" sz="100" dirty="0"/>
+              <a:t> удалось поставить под ружье невиданное для колонии число местных </a:t>
+            </a:r>
+            <a:r>
+              <a:rPr lang="ru-RU" sz="100" dirty="0" err="1"/>
+              <a:t>жителей.Эффект</a:t>
+            </a:r>
+            <a:r>
+              <a:rPr lang="ru-RU" sz="100" dirty="0"/>
+              <a:t> в HOI 4: Дает постоянный бонус к призывному населению (</a:t>
+            </a:r>
+            <a:r>
+              <a:rPr lang="ru-RU" sz="100" dirty="0" err="1"/>
+              <a:t>Manpower</a:t>
+            </a:r>
+            <a:r>
+              <a:rPr lang="ru-RU" sz="100" dirty="0"/>
+              <a:t>) +2.50% на национальных территориях. Снижает время подготовки пехотных дивизий на 10%.)</a:t>
+            </a:r>
+            <a:endParaRPr lang="ru-RU" sz="700" dirty="0"/>
+          </a:p>
+        </p:txBody>
+      </p:sp>
+      <p:sp>
+        <p:nvSpPr>
+          <p:cNvPr id="64" name="Прямоугольник 63">
+            <a:extLst>
+              <a:ext uri="{FF2B5EF4-FFF2-40B4-BE49-F238E27FC236}">
+                <a16:creationId xmlns:a16="http://schemas.microsoft.com/office/drawing/2014/main" id="{E2A84C2C-9F41-4511-B24F-8A024E481F7E}"/>
+              </a:ext>
+            </a:extLst>
+          </p:cNvPr>
+          <p:cNvSpPr/>
+          <p:nvPr/>
+        </p:nvSpPr>
+        <p:spPr>
+          <a:xfrm>
+            <a:off x="23291653" y="3105088"/>
+            <a:ext cx="926325" cy="540000"/>
+          </a:xfrm>
+          <a:prstGeom prst="rect">
+            <a:avLst/>
+          </a:prstGeom>
+          <a:solidFill>
+            <a:schemeClr val="bg1"/>
+          </a:solidFill>
+          <a:ln w="19050"/>
+        </p:spPr>
+        <p:style>
+          <a:lnRef idx="2">
+            <a:schemeClr val="accent1"/>
+          </a:lnRef>
+          <a:fillRef idx="1">
+            <a:schemeClr val="lt1"/>
+          </a:fillRef>
+          <a:effectRef idx="0">
+            <a:schemeClr val="accent1"/>
+          </a:effectRef>
+          <a:fontRef idx="minor">
+            <a:schemeClr val="dk1"/>
+          </a:fontRef>
+        </p:style>
+        <p:txBody>
+          <a:bodyPr lIns="124733" tIns="62367" rIns="124733" bIns="62367" rtlCol="0" anchor="ctr"/>
+          <a:lstStyle/>
+          <a:p>
+            <a:pPr algn="ctr"/>
+            <a:r>
+              <a:rPr lang="ru-RU" sz="700" dirty="0"/>
+              <a:t>Развертывание 1-й и 3-й Марокканских пехотных дивизий </a:t>
+            </a:r>
+            <a:r>
+              <a:rPr lang="ru-RU" sz="100" dirty="0"/>
+              <a:t>(В конце 1930-х годов в Марокко были сформированы и доукомплектованы элитные марокканские пулеметные и пехотные дивизии (</a:t>
+            </a:r>
+            <a:r>
+              <a:rPr lang="ru-RU" sz="100" dirty="0" err="1"/>
+              <a:t>Division</a:t>
+            </a:r>
+            <a:r>
+              <a:rPr lang="ru-RU" sz="100" dirty="0"/>
+              <a:t> </a:t>
+            </a:r>
+            <a:r>
+              <a:rPr lang="ru-RU" sz="100" dirty="0" err="1"/>
+              <a:t>d'Infanterie</a:t>
+            </a:r>
+            <a:r>
+              <a:rPr lang="ru-RU" sz="100" dirty="0"/>
+              <a:t> </a:t>
+            </a:r>
+            <a:r>
+              <a:rPr lang="ru-RU" sz="100" dirty="0" err="1"/>
+              <a:t>Marocaine</a:t>
+            </a:r>
+            <a:r>
+              <a:rPr lang="ru-RU" sz="100" dirty="0"/>
+              <a:t>). В 1939 году их перебросили во Францию, где они героически проявили себя в боях 1940 года (например, при </a:t>
+            </a:r>
+            <a:r>
+              <a:rPr lang="ru-RU" sz="100" dirty="0" err="1"/>
+              <a:t>Жамблу</a:t>
+            </a:r>
+            <a:r>
+              <a:rPr lang="ru-RU" sz="100" dirty="0"/>
+              <a:t>).Эффект в HOI 4: </a:t>
+            </a:r>
+            <a:r>
+              <a:rPr lang="ru-RU" sz="100" dirty="0" err="1"/>
+              <a:t>Спавнит</a:t>
+            </a:r>
+            <a:r>
+              <a:rPr lang="ru-RU" sz="100" dirty="0"/>
+              <a:t> в Касабланке 2 пехотные дивизии с полной организацией, оснащенные уникальным батальоном поддержки (усиленная ПВО/противотанковое оружие).)</a:t>
+            </a:r>
+            <a:endParaRPr lang="ru-RU" sz="700" dirty="0"/>
+          </a:p>
+        </p:txBody>
+      </p:sp>
+      <p:cxnSp>
+        <p:nvCxnSpPr>
+          <p:cNvPr id="66" name="Соединительная линия уступом 620">
+            <a:extLst>
+              <a:ext uri="{FF2B5EF4-FFF2-40B4-BE49-F238E27FC236}">
+                <a16:creationId xmlns:a16="http://schemas.microsoft.com/office/drawing/2014/main" id="{775EF59B-92BB-448D-9060-1020657DAE50}"/>
+              </a:ext>
+            </a:extLst>
+          </p:cNvPr>
+          <p:cNvCxnSpPr>
+            <a:cxnSpLocks/>
+            <a:stCxn id="15" idx="2"/>
+            <a:endCxn id="50" idx="0"/>
+          </p:cNvCxnSpPr>
+          <p:nvPr/>
+        </p:nvCxnSpPr>
+        <p:spPr>
+          <a:xfrm rot="5400000">
+            <a:off x="22069267" y="2036411"/>
+            <a:ext cx="264165" cy="1861523"/>
+          </a:xfrm>
+          <a:prstGeom prst="bentConnector3">
+            <a:avLst>
+              <a:gd name="adj1" fmla="val 50000"/>
+            </a:avLst>
+          </a:prstGeom>
+          <a:ln w="19050">
+            <a:tailEnd type="arrow"/>
+          </a:ln>
+        </p:spPr>
+        <p:style>
+          <a:lnRef idx="1">
+            <a:schemeClr val="accent1"/>
+          </a:lnRef>
+          <a:fillRef idx="0">
+            <a:schemeClr val="accent1"/>
+          </a:fillRef>
+          <a:effectRef idx="0">
+            <a:schemeClr val="accent1"/>
+          </a:effectRef>
+          <a:fontRef idx="minor">
+            <a:schemeClr val="tx1"/>
+          </a:fontRef>
+        </p:style>
+      </p:cxnSp>
+      <p:cxnSp>
+        <p:nvCxnSpPr>
+          <p:cNvPr id="115" name="Соединительная линия уступом 620">
+            <a:extLst>
+              <a:ext uri="{FF2B5EF4-FFF2-40B4-BE49-F238E27FC236}">
+                <a16:creationId xmlns:a16="http://schemas.microsoft.com/office/drawing/2014/main" id="{9347027B-3953-4C7C-87D7-9E28155E8A97}"/>
+              </a:ext>
+            </a:extLst>
+          </p:cNvPr>
+          <p:cNvCxnSpPr>
+            <a:cxnSpLocks/>
+            <a:stCxn id="47" idx="2"/>
+            <a:endCxn id="48" idx="0"/>
+          </p:cNvCxnSpPr>
+          <p:nvPr/>
+        </p:nvCxnSpPr>
+        <p:spPr>
+          <a:xfrm rot="5400000">
+            <a:off x="22374331" y="3778601"/>
+            <a:ext cx="277929" cy="648"/>
+          </a:xfrm>
+          <a:prstGeom prst="bentConnector3">
+            <a:avLst>
+              <a:gd name="adj1" fmla="val 50000"/>
+            </a:avLst>
+          </a:prstGeom>
+          <a:ln w="19050">
+            <a:tailEnd type="arrow"/>
+          </a:ln>
+        </p:spPr>
+        <p:style>
+          <a:lnRef idx="1">
+            <a:schemeClr val="accent1"/>
+          </a:lnRef>
+          <a:fillRef idx="0">
+            <a:schemeClr val="accent1"/>
+          </a:fillRef>
+          <a:effectRef idx="0">
+            <a:schemeClr val="accent1"/>
+          </a:effectRef>
+          <a:fontRef idx="minor">
+            <a:schemeClr val="tx1"/>
+          </a:fontRef>
+        </p:style>
+      </p:cxnSp>
+      <p:sp>
+        <p:nvSpPr>
+          <p:cNvPr id="119" name="Прямоугольник 118">
+            <a:extLst>
+              <a:ext uri="{FF2B5EF4-FFF2-40B4-BE49-F238E27FC236}">
+                <a16:creationId xmlns:a16="http://schemas.microsoft.com/office/drawing/2014/main" id="{3CF48485-A290-42AB-9C6F-E8084039BD49}"/>
+              </a:ext>
+            </a:extLst>
+          </p:cNvPr>
+          <p:cNvSpPr/>
+          <p:nvPr/>
+        </p:nvSpPr>
+        <p:spPr>
+          <a:xfrm>
+            <a:off x="23291652" y="3917890"/>
+            <a:ext cx="926325" cy="540000"/>
+          </a:xfrm>
+          <a:prstGeom prst="rect">
+            <a:avLst/>
+          </a:prstGeom>
+          <a:solidFill>
+            <a:schemeClr val="bg1"/>
+          </a:solidFill>
+          <a:ln w="19050"/>
+        </p:spPr>
+        <p:style>
+          <a:lnRef idx="2">
+            <a:schemeClr val="accent1"/>
+          </a:lnRef>
+          <a:fillRef idx="1">
+            <a:schemeClr val="lt1"/>
+          </a:fillRef>
+          <a:effectRef idx="0">
+            <a:schemeClr val="accent1"/>
+          </a:effectRef>
+          <a:fontRef idx="minor">
+            <a:schemeClr val="dk1"/>
+          </a:fontRef>
+        </p:style>
+        <p:txBody>
+          <a:bodyPr lIns="124733" tIns="62367" rIns="124733" bIns="62367" rtlCol="0" anchor="ctr"/>
+          <a:lstStyle/>
+          <a:p>
+            <a:pPr algn="ctr"/>
+            <a:r>
+              <a:rPr lang="ru-RU" sz="700" dirty="0"/>
+              <a:t>Интеграция Иностранного легиона в гарнизон Феса </a:t>
+            </a:r>
+            <a:r>
+              <a:rPr lang="ru-RU" sz="100" dirty="0"/>
+              <a:t>(2-й иностранный пехотный полк (2e REI) Иностранного легиона базировался в Марокко и в этот период активно укреплял внутренние рубежи протектората для предотвращения диверсий </a:t>
+            </a:r>
+            <a:r>
+              <a:rPr lang="ru-RU" sz="100" dirty="0" err="1"/>
+              <a:t>Оси.Эффект</a:t>
+            </a:r>
+            <a:r>
+              <a:rPr lang="ru-RU" sz="100" dirty="0"/>
+              <a:t> в HOI 4: Добавляет 1 элитную дивизию Иностранного легиона. Дает национальный дух «Жесткий колониальный порядок» (-15% к скорости роста сопротивления в североафриканских регионах).)</a:t>
+            </a:r>
+            <a:endParaRPr lang="ru-RU" sz="700" dirty="0"/>
+          </a:p>
+        </p:txBody>
+      </p:sp>
+      <p:cxnSp>
+        <p:nvCxnSpPr>
+          <p:cNvPr id="120" name="Соединительная линия уступом 620">
+            <a:extLst>
+              <a:ext uri="{FF2B5EF4-FFF2-40B4-BE49-F238E27FC236}">
+                <a16:creationId xmlns:a16="http://schemas.microsoft.com/office/drawing/2014/main" id="{1C49954F-9A8C-47CD-A07F-8EACC55803D6}"/>
+              </a:ext>
+            </a:extLst>
+          </p:cNvPr>
+          <p:cNvCxnSpPr>
+            <a:cxnSpLocks/>
+            <a:stCxn id="64" idx="2"/>
+            <a:endCxn id="119" idx="0"/>
+          </p:cNvCxnSpPr>
+          <p:nvPr/>
+        </p:nvCxnSpPr>
+        <p:spPr>
+          <a:xfrm rot="5400000">
+            <a:off x="23618415" y="3781489"/>
+            <a:ext cx="272802" cy="1"/>
+          </a:xfrm>
+          <a:prstGeom prst="bentConnector3">
+            <a:avLst>
+              <a:gd name="adj1" fmla="val 50000"/>
+            </a:avLst>
+          </a:prstGeom>
+          <a:ln w="19050">
+            <a:tailEnd type="arrow"/>
+          </a:ln>
+        </p:spPr>
+        <p:style>
+          <a:lnRef idx="1">
+            <a:schemeClr val="accent1"/>
+          </a:lnRef>
+          <a:fillRef idx="0">
+            <a:schemeClr val="accent1"/>
+          </a:fillRef>
+          <a:effectRef idx="0">
+            <a:schemeClr val="accent1"/>
+          </a:effectRef>
+          <a:fontRef idx="minor">
+            <a:schemeClr val="tx1"/>
+          </a:fontRef>
+        </p:style>
+      </p:cxnSp>
+      <p:sp>
+        <p:nvSpPr>
+          <p:cNvPr id="126" name="Прямоугольник 125">
+            <a:extLst>
+              <a:ext uri="{FF2B5EF4-FFF2-40B4-BE49-F238E27FC236}">
+                <a16:creationId xmlns:a16="http://schemas.microsoft.com/office/drawing/2014/main" id="{A64226DA-F307-4AD4-868A-E3263905A7C0}"/>
+              </a:ext>
+            </a:extLst>
+          </p:cNvPr>
+          <p:cNvSpPr/>
+          <p:nvPr/>
+        </p:nvSpPr>
+        <p:spPr>
+          <a:xfrm>
+            <a:off x="24532851" y="3920152"/>
+            <a:ext cx="926325" cy="540000"/>
+          </a:xfrm>
+          <a:prstGeom prst="rect">
+            <a:avLst/>
+          </a:prstGeom>
+          <a:solidFill>
+            <a:schemeClr val="bg1"/>
+          </a:solidFill>
+          <a:ln w="19050"/>
+        </p:spPr>
+        <p:style>
+          <a:lnRef idx="2">
+            <a:schemeClr val="accent1"/>
+          </a:lnRef>
+          <a:fillRef idx="1">
+            <a:schemeClr val="lt1"/>
+          </a:fillRef>
+          <a:effectRef idx="0">
+            <a:schemeClr val="accent1"/>
+          </a:effectRef>
+          <a:fontRef idx="minor">
+            <a:schemeClr val="dk1"/>
+          </a:fontRef>
+        </p:style>
+        <p:txBody>
+          <a:bodyPr lIns="124733" tIns="62367" rIns="124733" bIns="62367" rtlCol="0" anchor="ctr"/>
+          <a:lstStyle/>
+          <a:p>
+            <a:pPr algn="ctr"/>
+            <a:r>
+              <a:rPr lang="ru-RU" sz="700" dirty="0"/>
+              <a:t>План обороны Марокканской Сахары </a:t>
+            </a:r>
+            <a:r>
+              <a:rPr lang="ru-RU" sz="100" dirty="0"/>
+              <a:t>(Французское командование опасалось, что профашистские силы из Испанского Сахары или итальянские войска из Ливии могут нанести удар через пустыню во фланг. Были созданы специальные мобильные дозоры (</a:t>
+            </a:r>
+            <a:r>
+              <a:rPr lang="ru-RU" sz="100" dirty="0" err="1"/>
+              <a:t>Compagnies</a:t>
+            </a:r>
+            <a:r>
+              <a:rPr lang="ru-RU" sz="100" dirty="0"/>
+              <a:t> </a:t>
+            </a:r>
+            <a:r>
+              <a:rPr lang="ru-RU" sz="100" dirty="0" err="1"/>
+              <a:t>Sahariennes</a:t>
+            </a:r>
+            <a:r>
+              <a:rPr lang="ru-RU" sz="100" dirty="0"/>
+              <a:t>).Эффект в HOI 4: Дает войскам национальный дух «Адаптация к пустыне» (+15% к защите и -10% к истощению (</a:t>
+            </a:r>
+            <a:r>
+              <a:rPr lang="ru-RU" sz="100" dirty="0" err="1"/>
+              <a:t>Attrition</a:t>
+            </a:r>
+            <a:r>
+              <a:rPr lang="ru-RU" sz="100" dirty="0"/>
+              <a:t>) в пустынных регионах).)</a:t>
+            </a:r>
+            <a:endParaRPr lang="ru-RU" sz="700" dirty="0"/>
+          </a:p>
+        </p:txBody>
+      </p:sp>
+      <p:sp>
+        <p:nvSpPr>
+          <p:cNvPr id="127" name="Прямоугольник 126">
+            <a:extLst>
+              <a:ext uri="{FF2B5EF4-FFF2-40B4-BE49-F238E27FC236}">
+                <a16:creationId xmlns:a16="http://schemas.microsoft.com/office/drawing/2014/main" id="{3617F385-549C-4202-8FFA-47012C570CE6}"/>
+              </a:ext>
+            </a:extLst>
+          </p:cNvPr>
+          <p:cNvSpPr/>
+          <p:nvPr/>
+        </p:nvSpPr>
+        <p:spPr>
+          <a:xfrm>
+            <a:off x="24532851" y="4737964"/>
+            <a:ext cx="926325" cy="540000"/>
+          </a:xfrm>
+          <a:prstGeom prst="rect">
+            <a:avLst/>
+          </a:prstGeom>
+          <a:solidFill>
+            <a:schemeClr val="bg1"/>
+          </a:solidFill>
+          <a:ln w="19050"/>
+        </p:spPr>
+        <p:style>
+          <a:lnRef idx="2">
+            <a:schemeClr val="accent1"/>
+          </a:lnRef>
+          <a:fillRef idx="1">
+            <a:schemeClr val="lt1"/>
+          </a:fillRef>
+          <a:effectRef idx="0">
+            <a:schemeClr val="accent1"/>
+          </a:effectRef>
+          <a:fontRef idx="minor">
+            <a:schemeClr val="dk1"/>
+          </a:fontRef>
+        </p:style>
+        <p:txBody>
+          <a:bodyPr lIns="124733" tIns="62367" rIns="124733" bIns="62367" rtlCol="0" anchor="ctr"/>
+          <a:lstStyle/>
+          <a:p>
+            <a:pPr algn="ctr"/>
+            <a:r>
+              <a:rPr lang="ru-RU" sz="700" dirty="0"/>
+              <a:t>Фортификация прохода Таза </a:t>
+            </a:r>
+            <a:r>
+              <a:rPr lang="ru-RU" sz="200" dirty="0"/>
+              <a:t>(Проход Таза — стратегический коридор между горами Риф и Атлас, связывающий Марокко с Алжиром. В 1938–1939 годах </a:t>
+            </a:r>
+            <a:r>
+              <a:rPr lang="ru-RU" sz="200" dirty="0" err="1"/>
+              <a:t>Ногес</a:t>
+            </a:r>
+            <a:r>
+              <a:rPr lang="ru-RU" sz="200" dirty="0"/>
+              <a:t> укрепил этот проход на случай прорыва испанских войск Франко на </a:t>
+            </a:r>
+            <a:r>
+              <a:rPr lang="ru-RU" sz="200" dirty="0" err="1"/>
+              <a:t>восток.Эффект</a:t>
+            </a:r>
+            <a:r>
+              <a:rPr lang="ru-RU" sz="200" dirty="0"/>
+              <a:t> в HOI 4: Строит сухопутные укрепления (</a:t>
+            </a:r>
+            <a:r>
+              <a:rPr lang="ru-RU" sz="200" dirty="0" err="1"/>
+              <a:t>Land</a:t>
+            </a:r>
+            <a:r>
+              <a:rPr lang="ru-RU" sz="200" dirty="0"/>
+              <a:t> </a:t>
+            </a:r>
+            <a:r>
+              <a:rPr lang="ru-RU" sz="200" dirty="0" err="1"/>
+              <a:t>Fort</a:t>
+            </a:r>
+            <a:r>
+              <a:rPr lang="ru-RU" sz="200" dirty="0"/>
+              <a:t>) 3-го уровня в провинции Таза.)</a:t>
+            </a:r>
+            <a:endParaRPr lang="ru-RU" sz="700" dirty="0"/>
+          </a:p>
+        </p:txBody>
+      </p:sp>
+      <p:cxnSp>
+        <p:nvCxnSpPr>
+          <p:cNvPr id="128" name="Соединительная линия уступом 620">
+            <a:extLst>
+              <a:ext uri="{FF2B5EF4-FFF2-40B4-BE49-F238E27FC236}">
+                <a16:creationId xmlns:a16="http://schemas.microsoft.com/office/drawing/2014/main" id="{B56A252E-000F-46D9-8A67-9B4FFEF6E95A}"/>
+              </a:ext>
+            </a:extLst>
+          </p:cNvPr>
+          <p:cNvCxnSpPr>
+            <a:cxnSpLocks/>
+            <a:stCxn id="350" idx="2"/>
+            <a:endCxn id="126" idx="0"/>
+          </p:cNvCxnSpPr>
+          <p:nvPr/>
+        </p:nvCxnSpPr>
+        <p:spPr>
+          <a:xfrm rot="5400000">
+            <a:off x="24858025" y="3780329"/>
+            <a:ext cx="277812" cy="1834"/>
+          </a:xfrm>
+          <a:prstGeom prst="bentConnector3">
+            <a:avLst>
+              <a:gd name="adj1" fmla="val 50000"/>
+            </a:avLst>
+          </a:prstGeom>
+          <a:ln w="19050">
+            <a:tailEnd type="arrow"/>
+          </a:ln>
+        </p:spPr>
+        <p:style>
+          <a:lnRef idx="1">
+            <a:schemeClr val="accent1"/>
+          </a:lnRef>
+          <a:fillRef idx="0">
+            <a:schemeClr val="accent1"/>
+          </a:fillRef>
+          <a:effectRef idx="0">
+            <a:schemeClr val="accent1"/>
+          </a:effectRef>
+          <a:fontRef idx="minor">
+            <a:schemeClr val="tx1"/>
+          </a:fontRef>
+        </p:style>
+      </p:cxnSp>
+      <p:cxnSp>
+        <p:nvCxnSpPr>
+          <p:cNvPr id="131" name="Соединительная линия уступом 620">
+            <a:extLst>
+              <a:ext uri="{FF2B5EF4-FFF2-40B4-BE49-F238E27FC236}">
+                <a16:creationId xmlns:a16="http://schemas.microsoft.com/office/drawing/2014/main" id="{DA899D96-1E1A-4363-AB63-73A3D0E880CA}"/>
+              </a:ext>
+            </a:extLst>
+          </p:cNvPr>
+          <p:cNvCxnSpPr>
+            <a:cxnSpLocks/>
+            <a:stCxn id="126" idx="2"/>
+            <a:endCxn id="127" idx="0"/>
+          </p:cNvCxnSpPr>
+          <p:nvPr/>
+        </p:nvCxnSpPr>
+        <p:spPr>
+          <a:xfrm rot="5400000">
+            <a:off x="24857108" y="4599058"/>
+            <a:ext cx="277812" cy="12700"/>
+          </a:xfrm>
+          <a:prstGeom prst="bentConnector3">
+            <a:avLst>
+              <a:gd name="adj1" fmla="val 50000"/>
+            </a:avLst>
+          </a:prstGeom>
+          <a:ln w="19050">
+            <a:tailEnd type="arrow"/>
+          </a:ln>
+        </p:spPr>
+        <p:style>
+          <a:lnRef idx="1">
+            <a:schemeClr val="accent1"/>
+          </a:lnRef>
+          <a:fillRef idx="0">
+            <a:schemeClr val="accent1"/>
+          </a:fillRef>
+          <a:effectRef idx="0">
+            <a:schemeClr val="accent1"/>
+          </a:effectRef>
+          <a:fontRef idx="minor">
+            <a:schemeClr val="tx1"/>
+          </a:fontRef>
+        </p:style>
+      </p:cxnSp>
+      <p:cxnSp>
+        <p:nvCxnSpPr>
+          <p:cNvPr id="135" name="Соединительная линия уступом 620">
+            <a:extLst>
+              <a:ext uri="{FF2B5EF4-FFF2-40B4-BE49-F238E27FC236}">
+                <a16:creationId xmlns:a16="http://schemas.microsoft.com/office/drawing/2014/main" id="{427284D2-5073-49BB-80E8-8CBFE6818061}"/>
+              </a:ext>
+            </a:extLst>
+          </p:cNvPr>
+          <p:cNvCxnSpPr>
+            <a:cxnSpLocks/>
+            <a:stCxn id="15" idx="2"/>
+            <a:endCxn id="64" idx="0"/>
+          </p:cNvCxnSpPr>
+          <p:nvPr/>
+        </p:nvCxnSpPr>
+        <p:spPr>
+          <a:xfrm rot="16200000" flipH="1">
+            <a:off x="23308464" y="2658736"/>
+            <a:ext cx="269998" cy="622706"/>
+          </a:xfrm>
+          <a:prstGeom prst="bentConnector3">
+            <a:avLst>
+              <a:gd name="adj1" fmla="val 50000"/>
+            </a:avLst>
+          </a:prstGeom>
+          <a:ln w="19050">
+            <a:prstDash val="dash"/>
+            <a:tailEnd type="arrow"/>
+          </a:ln>
+        </p:spPr>
+        <p:style>
+          <a:lnRef idx="1">
+            <a:schemeClr val="accent1"/>
+          </a:lnRef>
+          <a:fillRef idx="0">
+            <a:schemeClr val="accent1"/>
+          </a:fillRef>
+          <a:effectRef idx="0">
+            <a:schemeClr val="accent1"/>
+          </a:effectRef>
+          <a:fontRef idx="minor">
+            <a:schemeClr val="tx1"/>
+          </a:fontRef>
+        </p:style>
+      </p:cxnSp>
+      <p:cxnSp>
+        <p:nvCxnSpPr>
+          <p:cNvPr id="138" name="Соединительная линия уступом 620">
+            <a:extLst>
+              <a:ext uri="{FF2B5EF4-FFF2-40B4-BE49-F238E27FC236}">
+                <a16:creationId xmlns:a16="http://schemas.microsoft.com/office/drawing/2014/main" id="{AA1582C5-1439-4397-8237-B28164A1D826}"/>
+              </a:ext>
+            </a:extLst>
+          </p:cNvPr>
+          <p:cNvCxnSpPr>
+            <a:cxnSpLocks/>
+            <a:stCxn id="17" idx="2"/>
+            <a:endCxn id="64" idx="0"/>
+          </p:cNvCxnSpPr>
+          <p:nvPr/>
+        </p:nvCxnSpPr>
+        <p:spPr>
+          <a:xfrm rot="5400000">
+            <a:off x="24591393" y="1998514"/>
+            <a:ext cx="269997" cy="1943150"/>
+          </a:xfrm>
+          <a:prstGeom prst="bentConnector3">
+            <a:avLst>
+              <a:gd name="adj1" fmla="val 50000"/>
+            </a:avLst>
+          </a:prstGeom>
+          <a:ln w="19050">
+            <a:prstDash val="dash"/>
+            <a:tailEnd type="arrow"/>
+          </a:ln>
+        </p:spPr>
+        <p:style>
+          <a:lnRef idx="1">
+            <a:schemeClr val="accent1"/>
+          </a:lnRef>
+          <a:fillRef idx="0">
+            <a:schemeClr val="accent1"/>
+          </a:fillRef>
+          <a:effectRef idx="0">
+            <a:schemeClr val="accent1"/>
+          </a:effectRef>
+          <a:fontRef idx="minor">
+            <a:schemeClr val="tx1"/>
+          </a:fontRef>
+        </p:style>
+      </p:cxnSp>
+      <p:sp>
+        <p:nvSpPr>
+          <p:cNvPr id="141" name="Прямоугольник 140">
+            <a:extLst>
+              <a:ext uri="{FF2B5EF4-FFF2-40B4-BE49-F238E27FC236}">
+                <a16:creationId xmlns:a16="http://schemas.microsoft.com/office/drawing/2014/main" id="{59C925C4-EA08-4209-962F-46E8265830B6}"/>
+              </a:ext>
+            </a:extLst>
+          </p:cNvPr>
+          <p:cNvSpPr/>
+          <p:nvPr/>
+        </p:nvSpPr>
+        <p:spPr>
+          <a:xfrm>
+            <a:off x="20807423" y="3925229"/>
+            <a:ext cx="926325" cy="540000"/>
+          </a:xfrm>
+          <a:prstGeom prst="rect">
+            <a:avLst/>
+          </a:prstGeom>
+          <a:solidFill>
+            <a:schemeClr val="bg1"/>
+          </a:solidFill>
+          <a:ln w="19050"/>
+        </p:spPr>
+        <p:style>
+          <a:lnRef idx="2">
+            <a:schemeClr val="accent1"/>
+          </a:lnRef>
+          <a:fillRef idx="1">
+            <a:schemeClr val="lt1"/>
+          </a:fillRef>
+          <a:effectRef idx="0">
+            <a:schemeClr val="accent1"/>
+          </a:effectRef>
+          <a:fontRef idx="minor">
+            <a:schemeClr val="dk1"/>
+          </a:fontRef>
+        </p:style>
+        <p:txBody>
+          <a:bodyPr lIns="124733" tIns="62367" rIns="124733" bIns="62367" rtlCol="0" anchor="ctr"/>
+          <a:lstStyle/>
+          <a:p>
+            <a:pPr algn="ctr"/>
+            <a:r>
+              <a:rPr lang="ru-RU" sz="700" dirty="0"/>
+              <a:t>Марокканские спаги: Рождение моторизованной кавалерии (Полки марокканских </a:t>
+            </a:r>
+            <a:r>
+              <a:rPr lang="ru-RU" sz="700" dirty="0" err="1"/>
+              <a:t>спагов</a:t>
+            </a:r>
+            <a:r>
+              <a:rPr lang="ru-RU" sz="700" dirty="0"/>
+              <a:t> </a:t>
+            </a:r>
+            <a:r>
+              <a:rPr lang="ru-RU" sz="100" dirty="0"/>
+              <a:t>(элитная туземная кавалерия) славились своей стремительностью. В 1937–1938 годах 1-й и 2-й полки </a:t>
+            </a:r>
+            <a:r>
+              <a:rPr lang="ru-RU" sz="100" dirty="0" err="1"/>
+              <a:t>спагов</a:t>
+            </a:r>
+            <a:r>
+              <a:rPr lang="ru-RU" sz="100" dirty="0"/>
+              <a:t> начали частично пересаживать на мотоциклы и легкие бронеавтомобили, создавая разведывательные группы (GRDI).Эффект в HOI 4: Дает скидку 50% на исследование бронеавтомобилей (</a:t>
+            </a:r>
+            <a:r>
+              <a:rPr lang="ru-RU" sz="100" dirty="0" err="1"/>
+              <a:t>Armored</a:t>
+            </a:r>
+            <a:r>
+              <a:rPr lang="ru-RU" sz="100" dirty="0"/>
+              <a:t> </a:t>
+            </a:r>
+            <a:r>
+              <a:rPr lang="ru-RU" sz="100" dirty="0" err="1"/>
+              <a:t>Cars</a:t>
+            </a:r>
+            <a:r>
+              <a:rPr lang="ru-RU" sz="100" dirty="0"/>
+              <a:t>) или моторизованной пехоты. Увеличивает максимальную скорость кавалерийских и моторизованных шаблонов на +10%.)</a:t>
+            </a:r>
+            <a:endParaRPr lang="ru-RU" sz="700" dirty="0"/>
+          </a:p>
+        </p:txBody>
+      </p:sp>
+      <p:sp>
+        <p:nvSpPr>
+          <p:cNvPr id="142" name="Прямоугольник 141">
+            <a:extLst>
+              <a:ext uri="{FF2B5EF4-FFF2-40B4-BE49-F238E27FC236}">
+                <a16:creationId xmlns:a16="http://schemas.microsoft.com/office/drawing/2014/main" id="{3A5FD517-775F-41FA-954E-4997092012D0}"/>
+              </a:ext>
+            </a:extLst>
+          </p:cNvPr>
+          <p:cNvSpPr/>
+          <p:nvPr/>
+        </p:nvSpPr>
+        <p:spPr>
+          <a:xfrm>
+            <a:off x="23915544" y="5747614"/>
+            <a:ext cx="926325" cy="540000"/>
+          </a:xfrm>
+          <a:prstGeom prst="rect">
+            <a:avLst/>
+          </a:prstGeom>
+          <a:solidFill>
+            <a:schemeClr val="bg1"/>
+          </a:solidFill>
+          <a:ln w="19050"/>
+        </p:spPr>
+        <p:style>
+          <a:lnRef idx="2">
+            <a:schemeClr val="accent1"/>
+          </a:lnRef>
+          <a:fillRef idx="1">
+            <a:schemeClr val="lt1"/>
+          </a:fillRef>
+          <a:effectRef idx="0">
+            <a:schemeClr val="accent1"/>
+          </a:effectRef>
+          <a:fontRef idx="minor">
+            <a:schemeClr val="dk1"/>
+          </a:fontRef>
+        </p:style>
+        <p:txBody>
+          <a:bodyPr lIns="124733" tIns="62367" rIns="124733" bIns="62367" rtlCol="0" anchor="ctr"/>
+          <a:lstStyle/>
+          <a:p>
+            <a:pPr algn="ctr"/>
+            <a:r>
+              <a:rPr lang="ru-RU" sz="700" dirty="0"/>
+              <a:t>Арсенал в Касабланке </a:t>
+            </a:r>
+            <a:r>
+              <a:rPr lang="ru-RU" sz="100" dirty="0"/>
+              <a:t>(Понимая уязвимость морских путей из метрополии, французское командование в 1937 году начало расширять склады боеприпасов и ремонтные мастерские в Марокко, чтобы армия могла воевать автономно как минимум 6 </a:t>
+            </a:r>
+            <a:r>
+              <a:rPr lang="ru-RU" sz="100" dirty="0" err="1"/>
+              <a:t>месяцев.Эффект</a:t>
+            </a:r>
+            <a:r>
+              <a:rPr lang="ru-RU" sz="100" dirty="0"/>
+              <a:t> в HOI 4: Добавляет 1 военную фабрику в Касабланку. Увеличивает максимальную емкость региональных складов снабжения на +20%.)</a:t>
+            </a:r>
+            <a:endParaRPr lang="ru-RU" sz="700" dirty="0"/>
+          </a:p>
+        </p:txBody>
+      </p:sp>
+      <p:cxnSp>
+        <p:nvCxnSpPr>
+          <p:cNvPr id="145" name="Соединительная линия уступом 620">
+            <a:extLst>
+              <a:ext uri="{FF2B5EF4-FFF2-40B4-BE49-F238E27FC236}">
+                <a16:creationId xmlns:a16="http://schemas.microsoft.com/office/drawing/2014/main" id="{BF25CA53-BF7B-46EB-B789-F78E5EBDB9E6}"/>
+              </a:ext>
+            </a:extLst>
+          </p:cNvPr>
+          <p:cNvCxnSpPr>
+            <a:cxnSpLocks/>
+            <a:stCxn id="17" idx="2"/>
+            <a:endCxn id="142" idx="0"/>
+          </p:cNvCxnSpPr>
+          <p:nvPr/>
+        </p:nvCxnSpPr>
+        <p:spPr>
+          <a:xfrm rot="5400000">
+            <a:off x="23582076" y="3631723"/>
+            <a:ext cx="2912523" cy="1319259"/>
+          </a:xfrm>
+          <a:prstGeom prst="bentConnector3">
+            <a:avLst>
+              <a:gd name="adj1" fmla="val 4706"/>
+            </a:avLst>
+          </a:prstGeom>
+          <a:ln w="19050">
+            <a:prstDash val="dash"/>
+            <a:tailEnd type="arrow"/>
+          </a:ln>
+        </p:spPr>
+        <p:style>
+          <a:lnRef idx="1">
+            <a:schemeClr val="accent1"/>
+          </a:lnRef>
+          <a:fillRef idx="0">
+            <a:schemeClr val="accent1"/>
+          </a:fillRef>
+          <a:effectRef idx="0">
+            <a:schemeClr val="accent1"/>
+          </a:effectRef>
+          <a:fontRef idx="minor">
+            <a:schemeClr val="tx1"/>
+          </a:fontRef>
+        </p:style>
+      </p:cxnSp>
+      <p:cxnSp>
+        <p:nvCxnSpPr>
+          <p:cNvPr id="152" name="Соединительная линия уступом 620">
+            <a:extLst>
+              <a:ext uri="{FF2B5EF4-FFF2-40B4-BE49-F238E27FC236}">
+                <a16:creationId xmlns:a16="http://schemas.microsoft.com/office/drawing/2014/main" id="{01D1BF9F-D513-46C7-908C-5B4C91A12224}"/>
+              </a:ext>
+            </a:extLst>
+          </p:cNvPr>
+          <p:cNvCxnSpPr>
+            <a:cxnSpLocks/>
+            <a:stCxn id="15" idx="2"/>
+            <a:endCxn id="142" idx="0"/>
+          </p:cNvCxnSpPr>
+          <p:nvPr/>
+        </p:nvCxnSpPr>
+        <p:spPr>
+          <a:xfrm rot="16200000" flipH="1">
+            <a:off x="22299146" y="3668053"/>
+            <a:ext cx="2912524" cy="1246597"/>
+          </a:xfrm>
+          <a:prstGeom prst="bentConnector3">
+            <a:avLst>
+              <a:gd name="adj1" fmla="val 4542"/>
+            </a:avLst>
+          </a:prstGeom>
+          <a:ln w="19050">
+            <a:prstDash val="dash"/>
+            <a:tailEnd type="arrow"/>
+          </a:ln>
+        </p:spPr>
+        <p:style>
+          <a:lnRef idx="1">
+            <a:schemeClr val="accent1"/>
+          </a:lnRef>
+          <a:fillRef idx="0">
+            <a:schemeClr val="accent1"/>
+          </a:fillRef>
+          <a:effectRef idx="0">
+            <a:schemeClr val="accent1"/>
+          </a:effectRef>
+          <a:fontRef idx="minor">
+            <a:schemeClr val="tx1"/>
+          </a:fontRef>
+        </p:style>
+      </p:cxnSp>
+      <p:cxnSp>
+        <p:nvCxnSpPr>
+          <p:cNvPr id="157" name="Соединительная линия уступом 620">
+            <a:extLst>
+              <a:ext uri="{FF2B5EF4-FFF2-40B4-BE49-F238E27FC236}">
+                <a16:creationId xmlns:a16="http://schemas.microsoft.com/office/drawing/2014/main" id="{0257675D-9D87-4013-A4B3-21AC7CEB9172}"/>
+              </a:ext>
+            </a:extLst>
+          </p:cNvPr>
+          <p:cNvCxnSpPr>
+            <a:cxnSpLocks/>
+            <a:stCxn id="50" idx="2"/>
+            <a:endCxn id="141" idx="0"/>
+          </p:cNvCxnSpPr>
+          <p:nvPr/>
+        </p:nvCxnSpPr>
+        <p:spPr>
+          <a:xfrm rot="5400000">
+            <a:off x="21127600" y="3782242"/>
+            <a:ext cx="285974" cy="1"/>
+          </a:xfrm>
+          <a:prstGeom prst="bentConnector3">
+            <a:avLst>
+              <a:gd name="adj1" fmla="val 50000"/>
+            </a:avLst>
           </a:prstGeom>
           <a:ln w="19050">
             <a:tailEnd type="arrow"/>

--- a/Наработки/диздоки/Марокко/Марокко.pptx
+++ b/Наработки/диздоки/Марокко/Марокко.pptx
@@ -209,7 +209,7 @@
             <a:fld id="{33E3D7F9-E251-484C-A6FF-FA958879DF69}" type="datetimeFigureOut">
               <a:rPr lang="ru-RU" smtClean="0"/>
               <a:pPr/>
-              <a:t>09.06.2026</a:t>
+              <a:t>10.06.2026</a:t>
             </a:fld>
             <a:endParaRPr lang="ru-RU"/>
           </a:p>
@@ -699,7 +699,7 @@
             <a:fld id="{85A5DE44-605B-4D3B-B2B7-94543DF81A36}" type="datetimeFigureOut">
               <a:rPr lang="ru-RU" smtClean="0"/>
               <a:pPr/>
-              <a:t>09.06.2026</a:t>
+              <a:t>10.06.2026</a:t>
             </a:fld>
             <a:endParaRPr lang="ru-RU"/>
           </a:p>
@@ -871,7 +871,7 @@
             <a:fld id="{85A5DE44-605B-4D3B-B2B7-94543DF81A36}" type="datetimeFigureOut">
               <a:rPr lang="ru-RU" smtClean="0"/>
               <a:pPr/>
-              <a:t>09.06.2026</a:t>
+              <a:t>10.06.2026</a:t>
             </a:fld>
             <a:endParaRPr lang="ru-RU"/>
           </a:p>
@@ -1053,7 +1053,7 @@
             <a:fld id="{85A5DE44-605B-4D3B-B2B7-94543DF81A36}" type="datetimeFigureOut">
               <a:rPr lang="ru-RU" smtClean="0"/>
               <a:pPr/>
-              <a:t>09.06.2026</a:t>
+              <a:t>10.06.2026</a:t>
             </a:fld>
             <a:endParaRPr lang="ru-RU"/>
           </a:p>
@@ -1225,7 +1225,7 @@
             <a:fld id="{85A5DE44-605B-4D3B-B2B7-94543DF81A36}" type="datetimeFigureOut">
               <a:rPr lang="ru-RU" smtClean="0"/>
               <a:pPr/>
-              <a:t>09.06.2026</a:t>
+              <a:t>10.06.2026</a:t>
             </a:fld>
             <a:endParaRPr lang="ru-RU"/>
           </a:p>
@@ -1473,7 +1473,7 @@
             <a:fld id="{85A5DE44-605B-4D3B-B2B7-94543DF81A36}" type="datetimeFigureOut">
               <a:rPr lang="ru-RU" smtClean="0"/>
               <a:pPr/>
-              <a:t>09.06.2026</a:t>
+              <a:t>10.06.2026</a:t>
             </a:fld>
             <a:endParaRPr lang="ru-RU"/>
           </a:p>
@@ -1707,7 +1707,7 @@
             <a:fld id="{85A5DE44-605B-4D3B-B2B7-94543DF81A36}" type="datetimeFigureOut">
               <a:rPr lang="ru-RU" smtClean="0"/>
               <a:pPr/>
-              <a:t>09.06.2026</a:t>
+              <a:t>10.06.2026</a:t>
             </a:fld>
             <a:endParaRPr lang="ru-RU"/>
           </a:p>
@@ -2076,7 +2076,7 @@
             <a:fld id="{85A5DE44-605B-4D3B-B2B7-94543DF81A36}" type="datetimeFigureOut">
               <a:rPr lang="ru-RU" smtClean="0"/>
               <a:pPr/>
-              <a:t>09.06.2026</a:t>
+              <a:t>10.06.2026</a:t>
             </a:fld>
             <a:endParaRPr lang="ru-RU"/>
           </a:p>
@@ -2196,7 +2196,7 @@
             <a:fld id="{85A5DE44-605B-4D3B-B2B7-94543DF81A36}" type="datetimeFigureOut">
               <a:rPr lang="ru-RU" smtClean="0"/>
               <a:pPr/>
-              <a:t>09.06.2026</a:t>
+              <a:t>10.06.2026</a:t>
             </a:fld>
             <a:endParaRPr lang="ru-RU"/>
           </a:p>
@@ -2293,7 +2293,7 @@
             <a:fld id="{85A5DE44-605B-4D3B-B2B7-94543DF81A36}" type="datetimeFigureOut">
               <a:rPr lang="ru-RU" smtClean="0"/>
               <a:pPr/>
-              <a:t>09.06.2026</a:t>
+              <a:t>10.06.2026</a:t>
             </a:fld>
             <a:endParaRPr lang="ru-RU"/>
           </a:p>
@@ -2572,7 +2572,7 @@
             <a:fld id="{85A5DE44-605B-4D3B-B2B7-94543DF81A36}" type="datetimeFigureOut">
               <a:rPr lang="ru-RU" smtClean="0"/>
               <a:pPr/>
-              <a:t>09.06.2026</a:t>
+              <a:t>10.06.2026</a:t>
             </a:fld>
             <a:endParaRPr lang="ru-RU"/>
           </a:p>
@@ -2831,7 +2831,7 @@
             <a:fld id="{85A5DE44-605B-4D3B-B2B7-94543DF81A36}" type="datetimeFigureOut">
               <a:rPr lang="ru-RU" smtClean="0"/>
               <a:pPr/>
-              <a:t>09.06.2026</a:t>
+              <a:t>10.06.2026</a:t>
             </a:fld>
             <a:endParaRPr lang="ru-RU"/>
           </a:p>
@@ -3046,7 +3046,7 @@
             <a:fld id="{85A5DE44-605B-4D3B-B2B7-94543DF81A36}" type="datetimeFigureOut">
               <a:rPr lang="ru-RU" smtClean="0"/>
               <a:pPr/>
-              <a:t>09.06.2026</a:t>
+              <a:t>10.06.2026</a:t>
             </a:fld>
             <a:endParaRPr lang="ru-RU"/>
           </a:p>
@@ -3460,7 +3460,7 @@
         </p:nvSpPr>
         <p:spPr>
           <a:xfrm>
-            <a:off x="23915543" y="1417144"/>
+            <a:off x="46698778" y="23093895"/>
             <a:ext cx="926325" cy="540000"/>
           </a:xfrm>
           <a:prstGeom prst="rect">
@@ -3528,7 +3528,7 @@
         </p:nvCxnSpPr>
         <p:spPr>
           <a:xfrm rot="5400000">
-            <a:off x="23586435" y="1502819"/>
+            <a:off x="46369670" y="23179570"/>
             <a:ext cx="337946" cy="1246596"/>
           </a:xfrm>
           <a:prstGeom prst="bentConnector3">
@@ -3573,8 +3573,8 @@
         </p:nvCxnSpPr>
         <p:spPr>
           <a:xfrm rot="16200000" flipH="1">
-            <a:off x="24869363" y="1466487"/>
-            <a:ext cx="337947" cy="1319260"/>
+            <a:off x="47605215" y="23190621"/>
+            <a:ext cx="337947" cy="1224494"/>
           </a:xfrm>
           <a:prstGeom prst="bentConnector3">
             <a:avLst>
@@ -3614,7 +3614,7 @@
         </p:nvSpPr>
         <p:spPr>
           <a:xfrm>
-            <a:off x="24534685" y="3102340"/>
+            <a:off x="47317920" y="24779091"/>
             <a:ext cx="926325" cy="540000"/>
           </a:xfrm>
           <a:prstGeom prst="rect">
@@ -3653,10 +3653,10 @@
       </p:sp>
       <p:sp>
         <p:nvSpPr>
-          <p:cNvPr id="9" name="Прямоугольник 8">
-            <a:extLst>
-              <a:ext uri="{FF2B5EF4-FFF2-40B4-BE49-F238E27FC236}">
-                <a16:creationId xmlns:a16="http://schemas.microsoft.com/office/drawing/2014/main" id="{740C665A-13D9-4E14-8780-8AA990DA62F9}"/>
+          <p:cNvPr id="15" name="Прямоугольник 14">
+            <a:extLst>
+              <a:ext uri="{FF2B5EF4-FFF2-40B4-BE49-F238E27FC236}">
+                <a16:creationId xmlns:a16="http://schemas.microsoft.com/office/drawing/2014/main" id="{486BD42C-E6E8-4E9A-972F-66E45C5E9F5A}"/>
               </a:ext>
             </a:extLst>
           </p:cNvPr>
@@ -3665,7 +3665,7 @@
         </p:nvSpPr>
         <p:spPr>
           <a:xfrm>
-            <a:off x="27529848" y="1215093"/>
+            <a:off x="45452182" y="23971841"/>
             <a:ext cx="926325" cy="540000"/>
           </a:xfrm>
           <a:prstGeom prst="rect">
@@ -3697,17 +3697,17 @@
             <a:pPr algn="ctr"/>
             <a:r>
               <a:rPr lang="ru-RU" sz="700" dirty="0"/>
-              <a:t>Продолжить политику дефляции</a:t>
-            </a:r>
-          </a:p>
-        </p:txBody>
-      </p:sp>
-      <p:sp>
-        <p:nvSpPr>
-          <p:cNvPr id="15" name="Прямоугольник 14">
-            <a:extLst>
-              <a:ext uri="{FF2B5EF4-FFF2-40B4-BE49-F238E27FC236}">
-                <a16:creationId xmlns:a16="http://schemas.microsoft.com/office/drawing/2014/main" id="{486BD42C-E6E8-4E9A-972F-66E45C5E9F5A}"/>
+              <a:t>Продолжить опираться на племенные войска</a:t>
+            </a:r>
+          </a:p>
+        </p:txBody>
+      </p:sp>
+      <p:sp>
+        <p:nvSpPr>
+          <p:cNvPr id="17" name="Прямоугольник 16">
+            <a:extLst>
+              <a:ext uri="{FF2B5EF4-FFF2-40B4-BE49-F238E27FC236}">
+                <a16:creationId xmlns:a16="http://schemas.microsoft.com/office/drawing/2014/main" id="{E1A641D6-0384-4A0F-A884-6A52826677FD}"/>
               </a:ext>
             </a:extLst>
           </p:cNvPr>
@@ -3716,7 +3716,7 @@
         </p:nvSpPr>
         <p:spPr>
           <a:xfrm>
-            <a:off x="22668947" y="2295090"/>
+            <a:off x="47923272" y="23971842"/>
             <a:ext cx="926325" cy="540000"/>
           </a:xfrm>
           <a:prstGeom prst="rect">
@@ -3748,58 +3748,7 @@
             <a:pPr algn="ctr"/>
             <a:r>
               <a:rPr lang="ru-RU" sz="700" dirty="0"/>
-              <a:t>Продолжить опираться на племенные войска</a:t>
-            </a:r>
-          </a:p>
-        </p:txBody>
-      </p:sp>
-      <p:sp>
-        <p:nvSpPr>
-          <p:cNvPr id="17" name="Прямоугольник 16">
-            <a:extLst>
-              <a:ext uri="{FF2B5EF4-FFF2-40B4-BE49-F238E27FC236}">
-                <a16:creationId xmlns:a16="http://schemas.microsoft.com/office/drawing/2014/main" id="{E1A641D6-0384-4A0F-A884-6A52826677FD}"/>
-              </a:ext>
-            </a:extLst>
-          </p:cNvPr>
-          <p:cNvSpPr/>
-          <p:nvPr/>
-        </p:nvSpPr>
-        <p:spPr>
-          <a:xfrm>
-            <a:off x="25234803" y="2295091"/>
-            <a:ext cx="926325" cy="540000"/>
-          </a:xfrm>
-          <a:prstGeom prst="rect">
-            <a:avLst/>
-          </a:prstGeom>
-          <a:solidFill>
-            <a:schemeClr val="bg1"/>
-          </a:solidFill>
-          <a:ln w="19050"/>
-        </p:spPr>
-        <p:style>
-          <a:lnRef idx="2">
-            <a:schemeClr val="accent1"/>
-          </a:lnRef>
-          <a:fillRef idx="1">
-            <a:schemeClr val="lt1"/>
-          </a:fillRef>
-          <a:effectRef idx="0">
-            <a:schemeClr val="accent1"/>
-          </a:effectRef>
-          <a:fontRef idx="minor">
-            <a:schemeClr val="dk1"/>
-          </a:fontRef>
-        </p:style>
-        <p:txBody>
-          <a:bodyPr lIns="124733" tIns="62367" rIns="124733" bIns="62367" rtlCol="0" anchor="ctr"/>
-          <a:lstStyle/>
-          <a:p>
-            <a:pPr algn="ctr"/>
-            <a:r>
-              <a:rPr lang="ru-RU" sz="700" dirty="0"/>
-              <a:t>Сформировать регулярные войска</a:t>
+              <a:t>Отказаться от иррегулярных формирований</a:t>
             </a:r>
           </a:p>
         </p:txBody>
@@ -3822,8 +3771,8 @@
         </p:nvCxnSpPr>
         <p:spPr>
           <a:xfrm flipH="1" flipV="1">
-            <a:off x="23595272" y="2565090"/>
-            <a:ext cx="1639531" cy="1"/>
+            <a:off x="46378507" y="24241841"/>
+            <a:ext cx="1544765" cy="1"/>
           </a:xfrm>
           <a:prstGeom prst="line">
             <a:avLst/>
@@ -3867,8 +3816,8 @@
         </p:nvCxnSpPr>
         <p:spPr>
           <a:xfrm rot="5400000">
-            <a:off x="25214283" y="2618656"/>
-            <a:ext cx="267249" cy="700118"/>
+            <a:off x="47950135" y="24342790"/>
+            <a:ext cx="267249" cy="605352"/>
           </a:xfrm>
           <a:prstGeom prst="bentConnector3">
             <a:avLst>
@@ -3913,7 +3862,7 @@
         </p:nvCxnSpPr>
         <p:spPr>
           <a:xfrm rot="16200000" flipH="1">
-            <a:off x="23931354" y="2035846"/>
+            <a:off x="46714589" y="23712597"/>
             <a:ext cx="267250" cy="1865738"/>
           </a:xfrm>
           <a:prstGeom prst="bentConnector3">
@@ -3959,7 +3908,7 @@
         </p:nvCxnSpPr>
         <p:spPr>
           <a:xfrm rot="5400000">
-            <a:off x="22690430" y="2658280"/>
+            <a:off x="45473665" y="24335031"/>
             <a:ext cx="264871" cy="618491"/>
           </a:xfrm>
           <a:prstGeom prst="bentConnector3">
@@ -4000,7 +3949,7 @@
         </p:nvSpPr>
         <p:spPr>
           <a:xfrm>
-            <a:off x="25924173" y="3099255"/>
+            <a:off x="48540579" y="24776006"/>
             <a:ext cx="926325" cy="540000"/>
           </a:xfrm>
           <a:prstGeom prst="rect">
@@ -4032,17 +3981,17 @@
             <a:pPr algn="ctr"/>
             <a:r>
               <a:rPr lang="ru-RU" sz="700" dirty="0"/>
-              <a:t>Реформировать армию</a:t>
-            </a:r>
-          </a:p>
-        </p:txBody>
-      </p:sp>
-      <p:sp>
-        <p:nvSpPr>
-          <p:cNvPr id="46" name="Прямоугольник 45">
-            <a:extLst>
-              <a:ext uri="{FF2B5EF4-FFF2-40B4-BE49-F238E27FC236}">
-                <a16:creationId xmlns:a16="http://schemas.microsoft.com/office/drawing/2014/main" id="{CA213E93-BDA8-42EF-B23B-768B74394534}"/>
+              <a:t>Набрать марокканцев в генералитет</a:t>
+            </a:r>
+          </a:p>
+        </p:txBody>
+      </p:sp>
+      <p:sp>
+        <p:nvSpPr>
+          <p:cNvPr id="47" name="Прямоугольник 46">
+            <a:extLst>
+              <a:ext uri="{FF2B5EF4-FFF2-40B4-BE49-F238E27FC236}">
+                <a16:creationId xmlns:a16="http://schemas.microsoft.com/office/drawing/2014/main" id="{FE5B1A21-6DBA-4A86-A4D1-6624A5F82543}"/>
               </a:ext>
             </a:extLst>
           </p:cNvPr>
@@ -4051,7 +4000,7 @@
         </p:nvSpPr>
         <p:spPr>
           <a:xfrm>
-            <a:off x="26677840" y="1317381"/>
+            <a:off x="44833691" y="24776712"/>
             <a:ext cx="926325" cy="540000"/>
           </a:xfrm>
           <a:prstGeom prst="rect">
@@ -4083,17 +4032,94 @@
             <a:pPr algn="ctr"/>
             <a:r>
               <a:rPr lang="ru-RU" sz="700" dirty="0"/>
-              <a:t>Продолжить политику дефляции</a:t>
-            </a:r>
-          </a:p>
-        </p:txBody>
-      </p:sp>
-      <p:sp>
-        <p:nvSpPr>
-          <p:cNvPr id="47" name="Прямоугольник 46">
-            <a:extLst>
-              <a:ext uri="{FF2B5EF4-FFF2-40B4-BE49-F238E27FC236}">
-                <a16:creationId xmlns:a16="http://schemas.microsoft.com/office/drawing/2014/main" id="{FE5B1A21-6DBA-4A86-A4D1-6624A5F82543}"/>
+              <a:t>Создать институт </a:t>
+            </a:r>
+            <a:r>
+              <a:rPr lang="ru-RU" sz="700" dirty="0" err="1"/>
+              <a:t>гумов</a:t>
+            </a:r>
+            <a:r>
+              <a:rPr lang="ru-RU" sz="700" dirty="0"/>
+              <a:t> вспомогательной службы (1937) </a:t>
+            </a:r>
+            <a:r>
+              <a:rPr lang="ru-RU" sz="100" dirty="0"/>
+              <a:t>(Стандартный </a:t>
+            </a:r>
+            <a:r>
+              <a:rPr lang="ru-RU" sz="100" dirty="0" err="1"/>
+              <a:t>гум</a:t>
+            </a:r>
+            <a:r>
+              <a:rPr lang="ru-RU" sz="100" dirty="0"/>
+              <a:t> представлял собой конно-стрелковое подразделение, эквивалентное роте. В его составе имелся верховой взвод (на лошадях или верблюдах), вьючный взвод, а также 3-4 стрелковых взвода. Такая организация позволяла </a:t>
+            </a:r>
+            <a:r>
+              <a:rPr lang="ru-RU" sz="100" dirty="0" err="1"/>
+              <a:t>гумам</a:t>
+            </a:r>
+            <a:r>
+              <a:rPr lang="ru-RU" sz="100" dirty="0"/>
+              <a:t> вести автономные боевые действия в условиях горно-пустынной </a:t>
+            </a:r>
+            <a:r>
+              <a:rPr lang="ru-RU" sz="100" dirty="0" err="1"/>
+              <a:t>местности.Первый</a:t>
+            </a:r>
+            <a:r>
+              <a:rPr lang="ru-RU" sz="100" dirty="0"/>
+              <a:t> марокканский </a:t>
+            </a:r>
+            <a:r>
+              <a:rPr lang="ru-RU" sz="100" dirty="0" err="1"/>
+              <a:t>гум</a:t>
+            </a:r>
+            <a:r>
+              <a:rPr lang="ru-RU" sz="100" dirty="0"/>
+              <a:t> был сформирован 5 ноября 1908 г. В дальнейшем их число постоянно росло. Если в 1914 г. в армии протектората насчитывалось 15 </a:t>
+            </a:r>
+            <a:r>
+              <a:rPr lang="ru-RU" sz="100" dirty="0" err="1"/>
+              <a:t>гумов</a:t>
+            </a:r>
+            <a:r>
+              <a:rPr lang="ru-RU" sz="100" dirty="0"/>
+              <a:t>, к 1934 г. — году, связываемому французами с завершением операции по “примирению” Марокко — их насчитывалось уже 51. Как правило, каждым </a:t>
+            </a:r>
+            <a:r>
+              <a:rPr lang="ru-RU" sz="100" dirty="0" err="1"/>
+              <a:t>гумом</a:t>
+            </a:r>
+            <a:r>
+              <a:rPr lang="ru-RU" sz="100" dirty="0"/>
+              <a:t> командовал французский офицер из состава Службы туземных дел. В 1937 г. был создан институт </a:t>
+            </a:r>
+            <a:r>
+              <a:rPr lang="ru-RU" sz="100" dirty="0" err="1"/>
+              <a:t>тумов</a:t>
+            </a:r>
+            <a:r>
+              <a:rPr lang="ru-RU" sz="100" dirty="0"/>
+              <a:t> вспомогательной службы. Забегая вперед, необходимо отметить, что к началу Второй мировой войны в войсках протектората насчитывалось 57 действующих </a:t>
+            </a:r>
+            <a:r>
+              <a:rPr lang="ru-RU" sz="100" dirty="0" err="1"/>
+              <a:t>гумов</a:t>
+            </a:r>
+            <a:r>
+              <a:rPr lang="ru-RU" sz="100" dirty="0"/>
+              <a:t> и 64 вспомогательных)</a:t>
+            </a:r>
+            <a:endParaRPr lang="ru-RU" sz="700" dirty="0"/>
+          </a:p>
+        </p:txBody>
+      </p:sp>
+      <p:sp>
+        <p:nvSpPr>
+          <p:cNvPr id="48" name="Прямоугольник 47">
+            <a:extLst>
+              <a:ext uri="{FF2B5EF4-FFF2-40B4-BE49-F238E27FC236}">
+                <a16:creationId xmlns:a16="http://schemas.microsoft.com/office/drawing/2014/main" id="{2C1738C5-A41E-4331-A29C-50F11F29894B}"/>
               </a:ext>
             </a:extLst>
           </p:cNvPr>
@@ -4102,7 +4128,7 @@
         </p:nvSpPr>
         <p:spPr>
           <a:xfrm>
-            <a:off x="22050456" y="3099961"/>
+            <a:off x="44833043" y="25594641"/>
             <a:ext cx="926325" cy="540000"/>
           </a:xfrm>
           <a:prstGeom prst="rect">
@@ -4134,7 +4160,7 @@
             <a:pPr algn="ctr"/>
             <a:r>
               <a:rPr lang="ru-RU" sz="700" dirty="0"/>
-              <a:t>Создать институт </a:t>
+              <a:t>Мобилизация </a:t>
             </a:r>
             <a:r>
               <a:rPr lang="ru-RU" sz="700" dirty="0" err="1"/>
@@ -4142,75 +4168,19 @@
             </a:r>
             <a:r>
               <a:rPr lang="ru-RU" sz="700" dirty="0"/>
-              <a:t> вспомогательной службы (1937) </a:t>
-            </a:r>
-            <a:r>
-              <a:rPr lang="ru-RU" sz="100" dirty="0"/>
-              <a:t>(Стандартный </a:t>
-            </a:r>
-            <a:r>
-              <a:rPr lang="ru-RU" sz="100" dirty="0" err="1"/>
-              <a:t>гум</a:t>
-            </a:r>
-            <a:r>
-              <a:rPr lang="ru-RU" sz="100" dirty="0"/>
-              <a:t> представлял собой конно-стрелковое подразделение, эквивалентное роте. В его составе имелся верховой взвод (на лошадях или верблюдах), вьючный взвод, а также 3-4 стрелковых взвода. Такая организация позволяла </a:t>
-            </a:r>
-            <a:r>
-              <a:rPr lang="ru-RU" sz="100" dirty="0" err="1"/>
-              <a:t>гумам</a:t>
-            </a:r>
-            <a:r>
-              <a:rPr lang="ru-RU" sz="100" dirty="0"/>
-              <a:t> вести автономные боевые действия в условиях горно-пустынной </a:t>
-            </a:r>
-            <a:r>
-              <a:rPr lang="ru-RU" sz="100" dirty="0" err="1"/>
-              <a:t>местности.Первый</a:t>
-            </a:r>
-            <a:r>
-              <a:rPr lang="ru-RU" sz="100" dirty="0"/>
-              <a:t> марокканский </a:t>
-            </a:r>
-            <a:r>
-              <a:rPr lang="ru-RU" sz="100" dirty="0" err="1"/>
-              <a:t>гум</a:t>
-            </a:r>
-            <a:r>
-              <a:rPr lang="ru-RU" sz="100" dirty="0"/>
-              <a:t> был сформирован 5 ноября 1908 г. В дальнейшем их число постоянно росло. Если в 1914 г. в армии протектората насчитывалось 15 </a:t>
-            </a:r>
-            <a:r>
-              <a:rPr lang="ru-RU" sz="100" dirty="0" err="1"/>
+              <a:t> (1940) </a:t>
+            </a:r>
+            <a:r>
+              <a:rPr lang="ru-RU" sz="300" dirty="0"/>
+              <a:t>(После мобилизации число первых было доведено до 121. К апрелю 1940 г. они были сведены в 16 таборов (батальонов) по 4-5 </a:t>
+            </a:r>
+            <a:r>
+              <a:rPr lang="ru-RU" sz="300" dirty="0" err="1"/>
               <a:t>гумов</a:t>
             </a:r>
             <a:r>
-              <a:rPr lang="ru-RU" sz="100" dirty="0"/>
-              <a:t>, к 1934 г. — году, связываемому французами с завершением операции по “примирению” Марокко — их насчитывалось уже 51. Как правило, каждым </a:t>
-            </a:r>
-            <a:r>
-              <a:rPr lang="ru-RU" sz="100" dirty="0" err="1"/>
-              <a:t>гумом</a:t>
-            </a:r>
-            <a:r>
-              <a:rPr lang="ru-RU" sz="100" dirty="0"/>
-              <a:t> командовал французский офицер из состава Службы туземных дел. В 1937 г. был создан институт </a:t>
-            </a:r>
-            <a:r>
-              <a:rPr lang="ru-RU" sz="100" dirty="0" err="1"/>
-              <a:t>тумов</a:t>
-            </a:r>
-            <a:r>
-              <a:rPr lang="ru-RU" sz="100" dirty="0"/>
-              <a:t> вспомогательной службы. Забегая вперед, необходимо отметить, что к началу Второй мировой войны в войсках протектората насчитывалось 57 действующих </a:t>
-            </a:r>
-            <a:r>
-              <a:rPr lang="ru-RU" sz="100" dirty="0" err="1"/>
-              <a:t>гумов</a:t>
-            </a:r>
-            <a:r>
-              <a:rPr lang="ru-RU" sz="100" dirty="0"/>
-              <a:t> и 64 вспомогательных)</a:t>
+              <a:rPr lang="ru-RU" sz="300" dirty="0"/>
+              <a:t> в каждом.)</a:t>
             </a:r>
             <a:endParaRPr lang="ru-RU" sz="700" dirty="0"/>
           </a:p>
@@ -4218,10 +4188,10 @@
       </p:sp>
       <p:sp>
         <p:nvSpPr>
-          <p:cNvPr id="48" name="Прямоугольник 47">
-            <a:extLst>
-              <a:ext uri="{FF2B5EF4-FFF2-40B4-BE49-F238E27FC236}">
-                <a16:creationId xmlns:a16="http://schemas.microsoft.com/office/drawing/2014/main" id="{2C1738C5-A41E-4331-A29C-50F11F29894B}"/>
+          <p:cNvPr id="50" name="Прямоугольник 49">
+            <a:extLst>
+              <a:ext uri="{FF2B5EF4-FFF2-40B4-BE49-F238E27FC236}">
+                <a16:creationId xmlns:a16="http://schemas.microsoft.com/office/drawing/2014/main" id="{714B254A-36D5-4290-AB41-31D23B38DA78}"/>
               </a:ext>
             </a:extLst>
           </p:cNvPr>
@@ -4230,7 +4200,7 @@
         </p:nvSpPr>
         <p:spPr>
           <a:xfrm>
-            <a:off x="22049808" y="3917890"/>
+            <a:off x="43590659" y="24776006"/>
             <a:ext cx="926325" cy="540000"/>
           </a:xfrm>
           <a:prstGeom prst="rect">
@@ -4262,78 +4232,6 @@
             <a:pPr algn="ctr"/>
             <a:r>
               <a:rPr lang="ru-RU" sz="700" dirty="0"/>
-              <a:t>Мобилизация </a:t>
-            </a:r>
-            <a:r>
-              <a:rPr lang="ru-RU" sz="700" dirty="0" err="1"/>
-              <a:t>гумов</a:t>
-            </a:r>
-            <a:r>
-              <a:rPr lang="ru-RU" sz="700" dirty="0"/>
-              <a:t> (1940) </a:t>
-            </a:r>
-            <a:r>
-              <a:rPr lang="ru-RU" sz="300" dirty="0"/>
-              <a:t>(После мобилизации число первых было доведено до 121. К апрелю 1940 г. они были сведены в 16 таборов (батальонов) по 4-5 </a:t>
-            </a:r>
-            <a:r>
-              <a:rPr lang="ru-RU" sz="300" dirty="0" err="1"/>
-              <a:t>гумов</a:t>
-            </a:r>
-            <a:r>
-              <a:rPr lang="ru-RU" sz="300" dirty="0"/>
-              <a:t> в каждом.)</a:t>
-            </a:r>
-            <a:endParaRPr lang="ru-RU" sz="700" dirty="0"/>
-          </a:p>
-        </p:txBody>
-      </p:sp>
-      <p:sp>
-        <p:nvSpPr>
-          <p:cNvPr id="50" name="Прямоугольник 49">
-            <a:extLst>
-              <a:ext uri="{FF2B5EF4-FFF2-40B4-BE49-F238E27FC236}">
-                <a16:creationId xmlns:a16="http://schemas.microsoft.com/office/drawing/2014/main" id="{714B254A-36D5-4290-AB41-31D23B38DA78}"/>
-              </a:ext>
-            </a:extLst>
-          </p:cNvPr>
-          <p:cNvSpPr/>
-          <p:nvPr/>
-        </p:nvSpPr>
-        <p:spPr>
-          <a:xfrm>
-            <a:off x="20807424" y="3099255"/>
-            <a:ext cx="926325" cy="540000"/>
-          </a:xfrm>
-          <a:prstGeom prst="rect">
-            <a:avLst/>
-          </a:prstGeom>
-          <a:solidFill>
-            <a:schemeClr val="bg1"/>
-          </a:solidFill>
-          <a:ln w="19050"/>
-        </p:spPr>
-        <p:style>
-          <a:lnRef idx="2">
-            <a:schemeClr val="accent1"/>
-          </a:lnRef>
-          <a:fillRef idx="1">
-            <a:schemeClr val="lt1"/>
-          </a:fillRef>
-          <a:effectRef idx="0">
-            <a:schemeClr val="accent1"/>
-          </a:effectRef>
-          <a:fontRef idx="minor">
-            <a:schemeClr val="dk1"/>
-          </a:fontRef>
-        </p:style>
-        <p:txBody>
-          <a:bodyPr lIns="124733" tIns="62367" rIns="124733" bIns="62367" rtlCol="0" anchor="ctr"/>
-          <a:lstStyle/>
-          <a:p>
-            <a:pPr algn="ctr"/>
-            <a:r>
-              <a:rPr lang="ru-RU" sz="700" dirty="0"/>
               <a:t>Директива </a:t>
             </a:r>
             <a:r>
@@ -4406,7 +4304,7 @@
         </p:nvSpPr>
         <p:spPr>
           <a:xfrm>
-            <a:off x="23291653" y="3105088"/>
+            <a:off x="46074888" y="24781839"/>
             <a:ext cx="926325" cy="540000"/>
           </a:xfrm>
           <a:prstGeom prst="rect">
@@ -4506,7 +4404,7 @@
         </p:nvCxnSpPr>
         <p:spPr>
           <a:xfrm rot="5400000">
-            <a:off x="22069267" y="2036411"/>
+            <a:off x="44852502" y="23713162"/>
             <a:ext cx="264165" cy="1861523"/>
           </a:xfrm>
           <a:prstGeom prst="bentConnector3">
@@ -4551,7 +4449,7 @@
         </p:nvCxnSpPr>
         <p:spPr>
           <a:xfrm rot="5400000">
-            <a:off x="22374331" y="3778601"/>
+            <a:off x="45157566" y="25455352"/>
             <a:ext cx="277929" cy="648"/>
           </a:xfrm>
           <a:prstGeom prst="bentConnector3">
@@ -4592,7 +4490,7 @@
         </p:nvSpPr>
         <p:spPr>
           <a:xfrm>
-            <a:off x="23291652" y="3917890"/>
+            <a:off x="46074887" y="25594641"/>
             <a:ext cx="926325" cy="540000"/>
           </a:xfrm>
           <a:prstGeom prst="rect">
@@ -4660,7 +4558,7 @@
         </p:nvCxnSpPr>
         <p:spPr>
           <a:xfrm rot="5400000">
-            <a:off x="23618415" y="3781489"/>
+            <a:off x="46401650" y="25458240"/>
             <a:ext cx="272802" cy="1"/>
           </a:xfrm>
           <a:prstGeom prst="bentConnector3">
@@ -4701,7 +4599,7 @@
         </p:nvSpPr>
         <p:spPr>
           <a:xfrm>
-            <a:off x="24532851" y="3920152"/>
+            <a:off x="47316086" y="25596903"/>
             <a:ext cx="926325" cy="540000"/>
           </a:xfrm>
           <a:prstGeom prst="rect">
@@ -4781,7 +4679,7 @@
         </p:nvSpPr>
         <p:spPr>
           <a:xfrm>
-            <a:off x="24532851" y="4737964"/>
+            <a:off x="47317919" y="26414715"/>
             <a:ext cx="926325" cy="540000"/>
           </a:xfrm>
           <a:prstGeom prst="rect">
@@ -4873,7 +4771,7 @@
         </p:nvCxnSpPr>
         <p:spPr>
           <a:xfrm rot="5400000">
-            <a:off x="24858025" y="3780329"/>
+            <a:off x="47641260" y="25457080"/>
             <a:ext cx="277812" cy="1834"/>
           </a:xfrm>
           <a:prstGeom prst="bentConnector3">
@@ -4917,9 +4815,9 @@
           <p:nvPr/>
         </p:nvCxnSpPr>
         <p:spPr>
-          <a:xfrm rot="5400000">
-            <a:off x="24857108" y="4599058"/>
-            <a:ext cx="277812" cy="12700"/>
+          <a:xfrm rot="16200000" flipH="1">
+            <a:off x="47641259" y="26274892"/>
+            <a:ext cx="277812" cy="1833"/>
           </a:xfrm>
           <a:prstGeom prst="bentConnector3">
             <a:avLst>
@@ -4963,7 +4861,7 @@
         </p:nvCxnSpPr>
         <p:spPr>
           <a:xfrm rot="16200000" flipH="1">
-            <a:off x="23308464" y="2658736"/>
+            <a:off x="46091699" y="24335487"/>
             <a:ext cx="269998" cy="622706"/>
           </a:xfrm>
           <a:prstGeom prst="bentConnector3">
@@ -5009,8 +4907,8 @@
         </p:nvCxnSpPr>
         <p:spPr>
           <a:xfrm rot="5400000">
-            <a:off x="24591393" y="1998514"/>
-            <a:ext cx="269997" cy="1943150"/>
+            <a:off x="47327245" y="23722648"/>
+            <a:ext cx="269997" cy="1848384"/>
           </a:xfrm>
           <a:prstGeom prst="bentConnector3">
             <a:avLst>
@@ -5039,10 +4937,10 @@
       </p:cxnSp>
       <p:sp>
         <p:nvSpPr>
-          <p:cNvPr id="141" name="Прямоугольник 140">
-            <a:extLst>
-              <a:ext uri="{FF2B5EF4-FFF2-40B4-BE49-F238E27FC236}">
-                <a16:creationId xmlns:a16="http://schemas.microsoft.com/office/drawing/2014/main" id="{59C925C4-EA08-4209-962F-46E8265830B6}"/>
+          <p:cNvPr id="142" name="Прямоугольник 141">
+            <a:extLst>
+              <a:ext uri="{FF2B5EF4-FFF2-40B4-BE49-F238E27FC236}">
+                <a16:creationId xmlns:a16="http://schemas.microsoft.com/office/drawing/2014/main" id="{3A5FD517-775F-41FA-954E-4997092012D0}"/>
               </a:ext>
             </a:extLst>
           </p:cNvPr>
@@ -5051,95 +4949,7 @@
         </p:nvSpPr>
         <p:spPr>
           <a:xfrm>
-            <a:off x="20807423" y="3925229"/>
-            <a:ext cx="926325" cy="540000"/>
-          </a:xfrm>
-          <a:prstGeom prst="rect">
-            <a:avLst/>
-          </a:prstGeom>
-          <a:solidFill>
-            <a:schemeClr val="bg1"/>
-          </a:solidFill>
-          <a:ln w="19050"/>
-        </p:spPr>
-        <p:style>
-          <a:lnRef idx="2">
-            <a:schemeClr val="accent1"/>
-          </a:lnRef>
-          <a:fillRef idx="1">
-            <a:schemeClr val="lt1"/>
-          </a:fillRef>
-          <a:effectRef idx="0">
-            <a:schemeClr val="accent1"/>
-          </a:effectRef>
-          <a:fontRef idx="minor">
-            <a:schemeClr val="dk1"/>
-          </a:fontRef>
-        </p:style>
-        <p:txBody>
-          <a:bodyPr lIns="124733" tIns="62367" rIns="124733" bIns="62367" rtlCol="0" anchor="ctr"/>
-          <a:lstStyle/>
-          <a:p>
-            <a:pPr algn="ctr"/>
-            <a:r>
-              <a:rPr lang="ru-RU" sz="700" dirty="0"/>
-              <a:t>Марокканские спаги: Рождение моторизованной кавалерии (Полки марокканских </a:t>
-            </a:r>
-            <a:r>
-              <a:rPr lang="ru-RU" sz="700" dirty="0" err="1"/>
-              <a:t>спагов</a:t>
-            </a:r>
-            <a:r>
-              <a:rPr lang="ru-RU" sz="700" dirty="0"/>
-              <a:t> </a:t>
-            </a:r>
-            <a:r>
-              <a:rPr lang="ru-RU" sz="100" dirty="0"/>
-              <a:t>(элитная туземная кавалерия) славились своей стремительностью. В 1937–1938 годах 1-й и 2-й полки </a:t>
-            </a:r>
-            <a:r>
-              <a:rPr lang="ru-RU" sz="100" dirty="0" err="1"/>
-              <a:t>спагов</a:t>
-            </a:r>
-            <a:r>
-              <a:rPr lang="ru-RU" sz="100" dirty="0"/>
-              <a:t> начали частично пересаживать на мотоциклы и легкие бронеавтомобили, создавая разведывательные группы (GRDI).Эффект в HOI 4: Дает скидку 50% на исследование бронеавтомобилей (</a:t>
-            </a:r>
-            <a:r>
-              <a:rPr lang="ru-RU" sz="100" dirty="0" err="1"/>
-              <a:t>Armored</a:t>
-            </a:r>
-            <a:r>
-              <a:rPr lang="ru-RU" sz="100" dirty="0"/>
-              <a:t> </a:t>
-            </a:r>
-            <a:r>
-              <a:rPr lang="ru-RU" sz="100" dirty="0" err="1"/>
-              <a:t>Cars</a:t>
-            </a:r>
-            <a:r>
-              <a:rPr lang="ru-RU" sz="100" dirty="0"/>
-              <a:t>) или моторизованной пехоты. Увеличивает максимальную скорость кавалерийских и моторизованных шаблонов на +10%.)</a:t>
-            </a:r>
-            <a:endParaRPr lang="ru-RU" sz="700" dirty="0"/>
-          </a:p>
-        </p:txBody>
-      </p:sp>
-      <p:sp>
-        <p:nvSpPr>
-          <p:cNvPr id="142" name="Прямоугольник 141">
-            <a:extLst>
-              <a:ext uri="{FF2B5EF4-FFF2-40B4-BE49-F238E27FC236}">
-                <a16:creationId xmlns:a16="http://schemas.microsoft.com/office/drawing/2014/main" id="{3A5FD517-775F-41FA-954E-4997092012D0}"/>
-              </a:ext>
-            </a:extLst>
-          </p:cNvPr>
-          <p:cNvSpPr/>
-          <p:nvPr/>
-        </p:nvSpPr>
-        <p:spPr>
-          <a:xfrm>
-            <a:off x="23915544" y="5747614"/>
+            <a:off x="46698779" y="27424365"/>
             <a:ext cx="926325" cy="540000"/>
           </a:xfrm>
           <a:prstGeom prst="rect">
@@ -5207,12 +5017,12 @@
         </p:nvCxnSpPr>
         <p:spPr>
           <a:xfrm rot="5400000">
-            <a:off x="23582076" y="3631723"/>
-            <a:ext cx="2912523" cy="1319259"/>
+            <a:off x="46317928" y="25355857"/>
+            <a:ext cx="2912523" cy="1224493"/>
           </a:xfrm>
           <a:prstGeom prst="bentConnector3">
             <a:avLst>
-              <a:gd name="adj1" fmla="val 4706"/>
+              <a:gd name="adj1" fmla="val 4908"/>
             </a:avLst>
           </a:prstGeom>
           <a:ln w="19050">
@@ -5253,7 +5063,7 @@
         </p:nvCxnSpPr>
         <p:spPr>
           <a:xfrm rot="16200000" flipH="1">
-            <a:off x="22299146" y="3668053"/>
+            <a:off x="45082381" y="25344804"/>
             <a:ext cx="2912524" cy="1246597"/>
           </a:xfrm>
           <a:prstGeom prst="bentConnector3">
@@ -5293,14 +5103,6126 @@
           <p:cNvCxnSpPr>
             <a:cxnSpLocks/>
             <a:stCxn id="50" idx="2"/>
-            <a:endCxn id="141" idx="0"/>
+            <a:endCxn id="67" idx="0"/>
           </p:cNvCxnSpPr>
           <p:nvPr/>
         </p:nvCxnSpPr>
         <p:spPr>
           <a:xfrm rot="5400000">
-            <a:off x="21127600" y="3782242"/>
-            <a:ext cx="285974" cy="1"/>
+            <a:off x="43914858" y="25454970"/>
+            <a:ext cx="277929" cy="1"/>
+          </a:xfrm>
+          <a:prstGeom prst="bentConnector3">
+            <a:avLst>
+              <a:gd name="adj1" fmla="val 50000"/>
+            </a:avLst>
+          </a:prstGeom>
+          <a:ln w="19050">
+            <a:tailEnd type="arrow"/>
+          </a:ln>
+        </p:spPr>
+        <p:style>
+          <a:lnRef idx="1">
+            <a:schemeClr val="accent1"/>
+          </a:lnRef>
+          <a:fillRef idx="0">
+            <a:schemeClr val="accent1"/>
+          </a:fillRef>
+          <a:effectRef idx="0">
+            <a:schemeClr val="accent1"/>
+          </a:effectRef>
+          <a:fontRef idx="minor">
+            <a:schemeClr val="tx1"/>
+          </a:fontRef>
+        </p:style>
+      </p:cxnSp>
+      <p:sp>
+        <p:nvSpPr>
+          <p:cNvPr id="34" name="Прямоугольник 33">
+            <a:extLst>
+              <a:ext uri="{FF2B5EF4-FFF2-40B4-BE49-F238E27FC236}">
+                <a16:creationId xmlns:a16="http://schemas.microsoft.com/office/drawing/2014/main" id="{A3C38FDA-FE76-4414-9665-A87A38A404AB}"/>
+              </a:ext>
+            </a:extLst>
+          </p:cNvPr>
+          <p:cNvSpPr/>
+          <p:nvPr/>
+        </p:nvSpPr>
+        <p:spPr>
+          <a:xfrm>
+            <a:off x="46074886" y="26414715"/>
+            <a:ext cx="926325" cy="540000"/>
+          </a:xfrm>
+          <a:prstGeom prst="rect">
+            <a:avLst/>
+          </a:prstGeom>
+          <a:solidFill>
+            <a:schemeClr val="bg1"/>
+          </a:solidFill>
+          <a:ln w="19050"/>
+        </p:spPr>
+        <p:style>
+          <a:lnRef idx="2">
+            <a:schemeClr val="accent1"/>
+          </a:lnRef>
+          <a:fillRef idx="1">
+            <a:schemeClr val="lt1"/>
+          </a:fillRef>
+          <a:effectRef idx="0">
+            <a:schemeClr val="accent1"/>
+          </a:effectRef>
+          <a:fontRef idx="minor">
+            <a:schemeClr val="dk1"/>
+          </a:fontRef>
+        </p:style>
+        <p:txBody>
+          <a:bodyPr lIns="124733" tIns="62367" rIns="124733" bIns="62367" rtlCol="0" anchor="ctr"/>
+          <a:lstStyle/>
+          <a:p>
+            <a:pPr algn="ctr"/>
+            <a:r>
+              <a:rPr lang="ru-RU" sz="700" dirty="0"/>
+              <a:t>Обучение местных офицеров французской школе</a:t>
+            </a:r>
+          </a:p>
+        </p:txBody>
+      </p:sp>
+      <p:sp>
+        <p:nvSpPr>
+          <p:cNvPr id="43" name="Прямоугольник 42">
+            <a:extLst>
+              <a:ext uri="{FF2B5EF4-FFF2-40B4-BE49-F238E27FC236}">
+                <a16:creationId xmlns:a16="http://schemas.microsoft.com/office/drawing/2014/main" id="{FCAE2352-9C3C-4C3B-ABF6-0C9820D5E2E7}"/>
+              </a:ext>
+            </a:extLst>
+          </p:cNvPr>
+          <p:cNvSpPr/>
+          <p:nvPr/>
+        </p:nvSpPr>
+        <p:spPr>
+          <a:xfrm>
+            <a:off x="44218725" y="26412570"/>
+            <a:ext cx="926325" cy="540000"/>
+          </a:xfrm>
+          <a:prstGeom prst="rect">
+            <a:avLst/>
+          </a:prstGeom>
+          <a:solidFill>
+            <a:schemeClr val="bg1"/>
+          </a:solidFill>
+          <a:ln w="19050"/>
+        </p:spPr>
+        <p:style>
+          <a:lnRef idx="2">
+            <a:schemeClr val="accent1"/>
+          </a:lnRef>
+          <a:fillRef idx="1">
+            <a:schemeClr val="lt1"/>
+          </a:fillRef>
+          <a:effectRef idx="0">
+            <a:schemeClr val="accent1"/>
+          </a:effectRef>
+          <a:fontRef idx="minor">
+            <a:schemeClr val="dk1"/>
+          </a:fontRef>
+        </p:style>
+        <p:txBody>
+          <a:bodyPr lIns="124733" tIns="62367" rIns="124733" bIns="62367" rtlCol="0" anchor="ctr"/>
+          <a:lstStyle/>
+          <a:p>
+            <a:pPr algn="ctr"/>
+            <a:r>
+              <a:rPr lang="ru-RU" sz="700" dirty="0"/>
+              <a:t>Ужесточить контроль над племенами</a:t>
+            </a:r>
+          </a:p>
+        </p:txBody>
+      </p:sp>
+      <p:cxnSp>
+        <p:nvCxnSpPr>
+          <p:cNvPr id="44" name="Соединительная линия уступом 620">
+            <a:extLst>
+              <a:ext uri="{FF2B5EF4-FFF2-40B4-BE49-F238E27FC236}">
+                <a16:creationId xmlns:a16="http://schemas.microsoft.com/office/drawing/2014/main" id="{69B81608-81C7-4019-91A2-1B383072EED4}"/>
+              </a:ext>
+            </a:extLst>
+          </p:cNvPr>
+          <p:cNvCxnSpPr>
+            <a:cxnSpLocks/>
+            <a:stCxn id="48" idx="2"/>
+            <a:endCxn id="43" idx="0"/>
+          </p:cNvCxnSpPr>
+          <p:nvPr/>
+        </p:nvCxnSpPr>
+        <p:spPr>
+          <a:xfrm rot="5400000">
+            <a:off x="44850083" y="25966446"/>
+            <a:ext cx="277929" cy="614318"/>
+          </a:xfrm>
+          <a:prstGeom prst="bentConnector3">
+            <a:avLst>
+              <a:gd name="adj1" fmla="val 50000"/>
+            </a:avLst>
+          </a:prstGeom>
+          <a:ln w="19050">
+            <a:tailEnd type="arrow"/>
+          </a:ln>
+        </p:spPr>
+        <p:style>
+          <a:lnRef idx="1">
+            <a:schemeClr val="accent1"/>
+          </a:lnRef>
+          <a:fillRef idx="0">
+            <a:schemeClr val="accent1"/>
+          </a:fillRef>
+          <a:effectRef idx="0">
+            <a:schemeClr val="accent1"/>
+          </a:effectRef>
+          <a:fontRef idx="minor">
+            <a:schemeClr val="tx1"/>
+          </a:fontRef>
+        </p:style>
+      </p:cxnSp>
+      <p:cxnSp>
+        <p:nvCxnSpPr>
+          <p:cNvPr id="49" name="Соединительная линия уступом 620">
+            <a:extLst>
+              <a:ext uri="{FF2B5EF4-FFF2-40B4-BE49-F238E27FC236}">
+                <a16:creationId xmlns:a16="http://schemas.microsoft.com/office/drawing/2014/main" id="{CD7FE15A-1A35-4AA9-ADAF-3D870341CBB3}"/>
+              </a:ext>
+            </a:extLst>
+          </p:cNvPr>
+          <p:cNvCxnSpPr>
+            <a:cxnSpLocks/>
+            <a:stCxn id="50" idx="2"/>
+            <a:endCxn id="43" idx="0"/>
+          </p:cNvCxnSpPr>
+          <p:nvPr/>
+        </p:nvCxnSpPr>
+        <p:spPr>
+          <a:xfrm rot="16200000" flipH="1">
+            <a:off x="43819573" y="25550255"/>
+            <a:ext cx="1096564" cy="628066"/>
+          </a:xfrm>
+          <a:prstGeom prst="bentConnector3">
+            <a:avLst>
+              <a:gd name="adj1" fmla="val 11433"/>
+            </a:avLst>
+          </a:prstGeom>
+          <a:ln w="19050">
+            <a:tailEnd type="arrow"/>
+          </a:ln>
+        </p:spPr>
+        <p:style>
+          <a:lnRef idx="1">
+            <a:schemeClr val="accent1"/>
+          </a:lnRef>
+          <a:fillRef idx="0">
+            <a:schemeClr val="accent1"/>
+          </a:fillRef>
+          <a:effectRef idx="0">
+            <a:schemeClr val="accent1"/>
+          </a:effectRef>
+          <a:fontRef idx="minor">
+            <a:schemeClr val="tx1"/>
+          </a:fontRef>
+        </p:style>
+      </p:cxnSp>
+      <p:cxnSp>
+        <p:nvCxnSpPr>
+          <p:cNvPr id="51" name="Соединительная линия уступом 620">
+            <a:extLst>
+              <a:ext uri="{FF2B5EF4-FFF2-40B4-BE49-F238E27FC236}">
+                <a16:creationId xmlns:a16="http://schemas.microsoft.com/office/drawing/2014/main" id="{5CB7E9BC-A998-4582-8577-A7B4D3E86F93}"/>
+              </a:ext>
+            </a:extLst>
+          </p:cNvPr>
+          <p:cNvCxnSpPr>
+            <a:cxnSpLocks/>
+            <a:stCxn id="119" idx="2"/>
+            <a:endCxn id="34" idx="0"/>
+          </p:cNvCxnSpPr>
+          <p:nvPr/>
+        </p:nvCxnSpPr>
+        <p:spPr>
+          <a:xfrm rot="5400000">
+            <a:off x="46398013" y="26274678"/>
+            <a:ext cx="280074" cy="1"/>
+          </a:xfrm>
+          <a:prstGeom prst="bentConnector3">
+            <a:avLst>
+              <a:gd name="adj1" fmla="val 50000"/>
+            </a:avLst>
+          </a:prstGeom>
+          <a:ln w="19050">
+            <a:tailEnd type="arrow"/>
+          </a:ln>
+        </p:spPr>
+        <p:style>
+          <a:lnRef idx="1">
+            <a:schemeClr val="accent1"/>
+          </a:lnRef>
+          <a:fillRef idx="0">
+            <a:schemeClr val="accent1"/>
+          </a:fillRef>
+          <a:effectRef idx="0">
+            <a:schemeClr val="accent1"/>
+          </a:effectRef>
+          <a:fontRef idx="minor">
+            <a:schemeClr val="tx1"/>
+          </a:fontRef>
+        </p:style>
+      </p:cxnSp>
+      <p:cxnSp>
+        <p:nvCxnSpPr>
+          <p:cNvPr id="53" name="Соединительная линия уступом 620">
+            <a:extLst>
+              <a:ext uri="{FF2B5EF4-FFF2-40B4-BE49-F238E27FC236}">
+                <a16:creationId xmlns:a16="http://schemas.microsoft.com/office/drawing/2014/main" id="{1516A531-E45C-47DC-8EC6-CF2565E937C1}"/>
+              </a:ext>
+            </a:extLst>
+          </p:cNvPr>
+          <p:cNvCxnSpPr>
+            <a:cxnSpLocks/>
+            <a:stCxn id="17" idx="2"/>
+            <a:endCxn id="45" idx="0"/>
+          </p:cNvCxnSpPr>
+          <p:nvPr/>
+        </p:nvCxnSpPr>
+        <p:spPr>
+          <a:xfrm rot="16200000" flipH="1">
+            <a:off x="48563006" y="24335270"/>
+            <a:ext cx="264164" cy="617307"/>
+          </a:xfrm>
+          <a:prstGeom prst="bentConnector3">
+            <a:avLst>
+              <a:gd name="adj1" fmla="val 50000"/>
+            </a:avLst>
+          </a:prstGeom>
+          <a:ln w="19050">
+            <a:tailEnd type="arrow"/>
+          </a:ln>
+        </p:spPr>
+        <p:style>
+          <a:lnRef idx="1">
+            <a:schemeClr val="accent1"/>
+          </a:lnRef>
+          <a:fillRef idx="0">
+            <a:schemeClr val="accent1"/>
+          </a:fillRef>
+          <a:effectRef idx="0">
+            <a:schemeClr val="accent1"/>
+          </a:effectRef>
+          <a:fontRef idx="minor">
+            <a:schemeClr val="tx1"/>
+          </a:fontRef>
+        </p:style>
+      </p:cxnSp>
+      <p:sp>
+        <p:nvSpPr>
+          <p:cNvPr id="56" name="Прямоугольник 55">
+            <a:extLst>
+              <a:ext uri="{FF2B5EF4-FFF2-40B4-BE49-F238E27FC236}">
+                <a16:creationId xmlns:a16="http://schemas.microsoft.com/office/drawing/2014/main" id="{96D625CF-709C-45A4-8F67-B38EF72340EB}"/>
+              </a:ext>
+            </a:extLst>
+          </p:cNvPr>
+          <p:cNvSpPr/>
+          <p:nvPr/>
+        </p:nvSpPr>
+        <p:spPr>
+          <a:xfrm>
+            <a:off x="49779430" y="24776006"/>
+            <a:ext cx="926325" cy="540000"/>
+          </a:xfrm>
+          <a:prstGeom prst="rect">
+            <a:avLst/>
+          </a:prstGeom>
+          <a:solidFill>
+            <a:schemeClr val="bg1"/>
+          </a:solidFill>
+          <a:ln w="19050"/>
+        </p:spPr>
+        <p:style>
+          <a:lnRef idx="2">
+            <a:schemeClr val="accent1"/>
+          </a:lnRef>
+          <a:fillRef idx="1">
+            <a:schemeClr val="lt1"/>
+          </a:fillRef>
+          <a:effectRef idx="0">
+            <a:schemeClr val="accent1"/>
+          </a:effectRef>
+          <a:fontRef idx="minor">
+            <a:schemeClr val="dk1"/>
+          </a:fontRef>
+        </p:style>
+        <p:txBody>
+          <a:bodyPr lIns="124733" tIns="62367" rIns="124733" bIns="62367" rtlCol="0" anchor="ctr"/>
+          <a:lstStyle/>
+          <a:p>
+            <a:pPr algn="ctr"/>
+            <a:r>
+              <a:rPr lang="ru-RU" sz="700" dirty="0"/>
+              <a:t>Регулярные войска из племенных солдат</a:t>
+            </a:r>
+          </a:p>
+        </p:txBody>
+      </p:sp>
+      <p:cxnSp>
+        <p:nvCxnSpPr>
+          <p:cNvPr id="57" name="Соединительная линия уступом 620">
+            <a:extLst>
+              <a:ext uri="{FF2B5EF4-FFF2-40B4-BE49-F238E27FC236}">
+                <a16:creationId xmlns:a16="http://schemas.microsoft.com/office/drawing/2014/main" id="{5D641075-D3D8-4219-B7E7-A761E6C0A7DF}"/>
+              </a:ext>
+            </a:extLst>
+          </p:cNvPr>
+          <p:cNvCxnSpPr>
+            <a:cxnSpLocks/>
+            <a:stCxn id="17" idx="2"/>
+            <a:endCxn id="56" idx="0"/>
+          </p:cNvCxnSpPr>
+          <p:nvPr/>
+        </p:nvCxnSpPr>
+        <p:spPr>
+          <a:xfrm rot="16200000" flipH="1">
+            <a:off x="49182432" y="23715845"/>
+            <a:ext cx="264164" cy="1856158"/>
+          </a:xfrm>
+          <a:prstGeom prst="bentConnector3">
+            <a:avLst>
+              <a:gd name="adj1" fmla="val 50000"/>
+            </a:avLst>
+          </a:prstGeom>
+          <a:ln w="19050">
+            <a:tailEnd type="arrow"/>
+          </a:ln>
+        </p:spPr>
+        <p:style>
+          <a:lnRef idx="1">
+            <a:schemeClr val="accent1"/>
+          </a:lnRef>
+          <a:fillRef idx="0">
+            <a:schemeClr val="accent1"/>
+          </a:fillRef>
+          <a:effectRef idx="0">
+            <a:schemeClr val="accent1"/>
+          </a:effectRef>
+          <a:fontRef idx="minor">
+            <a:schemeClr val="tx1"/>
+          </a:fontRef>
+        </p:style>
+      </p:cxnSp>
+      <p:sp>
+        <p:nvSpPr>
+          <p:cNvPr id="60" name="Прямоугольник 59">
+            <a:extLst>
+              <a:ext uri="{FF2B5EF4-FFF2-40B4-BE49-F238E27FC236}">
+                <a16:creationId xmlns:a16="http://schemas.microsoft.com/office/drawing/2014/main" id="{2406E51A-589D-4271-952F-39105A27CEFF}"/>
+              </a:ext>
+            </a:extLst>
+          </p:cNvPr>
+          <p:cNvSpPr/>
+          <p:nvPr/>
+        </p:nvSpPr>
+        <p:spPr>
+          <a:xfrm>
+            <a:off x="47316086" y="28237168"/>
+            <a:ext cx="926325" cy="540000"/>
+          </a:xfrm>
+          <a:prstGeom prst="rect">
+            <a:avLst/>
+          </a:prstGeom>
+          <a:solidFill>
+            <a:schemeClr val="bg1"/>
+          </a:solidFill>
+          <a:ln w="19050"/>
+        </p:spPr>
+        <p:style>
+          <a:lnRef idx="2">
+            <a:schemeClr val="accent1"/>
+          </a:lnRef>
+          <a:fillRef idx="1">
+            <a:schemeClr val="lt1"/>
+          </a:fillRef>
+          <a:effectRef idx="0">
+            <a:schemeClr val="accent1"/>
+          </a:effectRef>
+          <a:fontRef idx="minor">
+            <a:schemeClr val="dk1"/>
+          </a:fontRef>
+        </p:style>
+        <p:txBody>
+          <a:bodyPr lIns="124733" tIns="62367" rIns="124733" bIns="62367" rtlCol="0" anchor="ctr"/>
+          <a:lstStyle/>
+          <a:p>
+            <a:pPr algn="ctr"/>
+            <a:r>
+              <a:rPr lang="ru-RU" sz="700" dirty="0"/>
+              <a:t>Создание нового генерального штаба</a:t>
+            </a:r>
+          </a:p>
+        </p:txBody>
+      </p:sp>
+      <p:sp>
+        <p:nvSpPr>
+          <p:cNvPr id="67" name="Прямоугольник 66">
+            <a:extLst>
+              <a:ext uri="{FF2B5EF4-FFF2-40B4-BE49-F238E27FC236}">
+                <a16:creationId xmlns:a16="http://schemas.microsoft.com/office/drawing/2014/main" id="{A0D2DCD8-B96C-4D26-9B7E-0AB17D422E33}"/>
+              </a:ext>
+            </a:extLst>
+          </p:cNvPr>
+          <p:cNvSpPr/>
+          <p:nvPr/>
+        </p:nvSpPr>
+        <p:spPr>
+          <a:xfrm>
+            <a:off x="43590658" y="25593935"/>
+            <a:ext cx="926325" cy="540000"/>
+          </a:xfrm>
+          <a:prstGeom prst="rect">
+            <a:avLst/>
+          </a:prstGeom>
+          <a:solidFill>
+            <a:schemeClr val="bg1"/>
+          </a:solidFill>
+          <a:ln w="19050"/>
+        </p:spPr>
+        <p:style>
+          <a:lnRef idx="2">
+            <a:schemeClr val="accent1"/>
+          </a:lnRef>
+          <a:fillRef idx="1">
+            <a:schemeClr val="lt1"/>
+          </a:fillRef>
+          <a:effectRef idx="0">
+            <a:schemeClr val="accent1"/>
+          </a:effectRef>
+          <a:fontRef idx="minor">
+            <a:schemeClr val="dk1"/>
+          </a:fontRef>
+        </p:style>
+        <p:txBody>
+          <a:bodyPr lIns="124733" tIns="62367" rIns="124733" bIns="62367" rtlCol="0" anchor="ctr"/>
+          <a:lstStyle/>
+          <a:p>
+            <a:pPr algn="ctr"/>
+            <a:r>
+              <a:rPr lang="ru-RU" sz="700" dirty="0"/>
+              <a:t>Реформирование Марокканских стрелков </a:t>
+            </a:r>
+            <a:r>
+              <a:rPr lang="ru-RU" sz="100" dirty="0"/>
+              <a:t>(С 1936 года Франция резко увеличила набор коренных марокканцев (арабов и берберов) в ряды регулярных частей — </a:t>
+            </a:r>
+            <a:r>
+              <a:rPr lang="ru-RU" sz="100" dirty="0" err="1"/>
+              <a:t>Тиральеров</a:t>
+            </a:r>
+            <a:r>
+              <a:rPr lang="ru-RU" sz="100" dirty="0"/>
+              <a:t> (Тайлеров) и </a:t>
+            </a:r>
+            <a:r>
+              <a:rPr lang="ru-RU" sz="100" dirty="0" err="1"/>
+              <a:t>Гумьеров</a:t>
+            </a:r>
+            <a:r>
+              <a:rPr lang="ru-RU" sz="100" dirty="0"/>
+              <a:t>. К 1939 году </a:t>
+            </a:r>
+            <a:r>
+              <a:rPr lang="ru-RU" sz="100" dirty="0" err="1"/>
+              <a:t>Ногесу</a:t>
+            </a:r>
+            <a:r>
+              <a:rPr lang="ru-RU" sz="100" dirty="0"/>
+              <a:t> удалось поставить под ружье невиданное для колонии число местных </a:t>
+            </a:r>
+            <a:r>
+              <a:rPr lang="ru-RU" sz="100" dirty="0" err="1"/>
+              <a:t>жителей.Эффект</a:t>
+            </a:r>
+            <a:r>
+              <a:rPr lang="ru-RU" sz="100" dirty="0"/>
+              <a:t> в HOI 4: Дает постоянный бонус к призывному населению (</a:t>
+            </a:r>
+            <a:r>
+              <a:rPr lang="ru-RU" sz="100" dirty="0" err="1"/>
+              <a:t>Manpower</a:t>
+            </a:r>
+            <a:r>
+              <a:rPr lang="ru-RU" sz="100" dirty="0"/>
+              <a:t>) +2.50% на национальных территориях. Снижает время подготовки пехотных дивизий на 10%.)</a:t>
+            </a:r>
+            <a:endParaRPr lang="ru-RU" sz="700" dirty="0"/>
+          </a:p>
+        </p:txBody>
+      </p:sp>
+      <p:cxnSp>
+        <p:nvCxnSpPr>
+          <p:cNvPr id="68" name="Соединительная линия уступом 620">
+            <a:extLst>
+              <a:ext uri="{FF2B5EF4-FFF2-40B4-BE49-F238E27FC236}">
+                <a16:creationId xmlns:a16="http://schemas.microsoft.com/office/drawing/2014/main" id="{641849B0-CEFB-44B3-9377-BE36AEA44928}"/>
+              </a:ext>
+            </a:extLst>
+          </p:cNvPr>
+          <p:cNvCxnSpPr>
+            <a:cxnSpLocks/>
+            <a:stCxn id="142" idx="2"/>
+            <a:endCxn id="60" idx="0"/>
+          </p:cNvCxnSpPr>
+          <p:nvPr/>
+        </p:nvCxnSpPr>
+        <p:spPr>
+          <a:xfrm rot="16200000" flipH="1">
+            <a:off x="47334194" y="27792112"/>
+            <a:ext cx="272803" cy="617307"/>
+          </a:xfrm>
+          <a:prstGeom prst="bentConnector3">
+            <a:avLst>
+              <a:gd name="adj1" fmla="val 50000"/>
+            </a:avLst>
+          </a:prstGeom>
+          <a:ln w="19050">
+            <a:tailEnd type="arrow"/>
+          </a:ln>
+        </p:spPr>
+        <p:style>
+          <a:lnRef idx="1">
+            <a:schemeClr val="accent1"/>
+          </a:lnRef>
+          <a:fillRef idx="0">
+            <a:schemeClr val="accent1"/>
+          </a:fillRef>
+          <a:effectRef idx="0">
+            <a:schemeClr val="accent1"/>
+          </a:effectRef>
+          <a:fontRef idx="minor">
+            <a:schemeClr val="tx1"/>
+          </a:fontRef>
+        </p:style>
+      </p:cxnSp>
+      <p:sp>
+        <p:nvSpPr>
+          <p:cNvPr id="72" name="Прямоугольник 71">
+            <a:extLst>
+              <a:ext uri="{FF2B5EF4-FFF2-40B4-BE49-F238E27FC236}">
+                <a16:creationId xmlns:a16="http://schemas.microsoft.com/office/drawing/2014/main" id="{27032395-622E-45E8-8B35-5FB7A32F4FFC}"/>
+              </a:ext>
+            </a:extLst>
+          </p:cNvPr>
+          <p:cNvSpPr/>
+          <p:nvPr/>
+        </p:nvSpPr>
+        <p:spPr>
+          <a:xfrm>
+            <a:off x="43594468" y="27424365"/>
+            <a:ext cx="926325" cy="540000"/>
+          </a:xfrm>
+          <a:prstGeom prst="rect">
+            <a:avLst/>
+          </a:prstGeom>
+          <a:solidFill>
+            <a:schemeClr val="bg1"/>
+          </a:solidFill>
+          <a:ln w="19050"/>
+        </p:spPr>
+        <p:style>
+          <a:lnRef idx="2">
+            <a:schemeClr val="accent1"/>
+          </a:lnRef>
+          <a:fillRef idx="1">
+            <a:schemeClr val="lt1"/>
+          </a:fillRef>
+          <a:effectRef idx="0">
+            <a:schemeClr val="accent1"/>
+          </a:effectRef>
+          <a:fontRef idx="minor">
+            <a:schemeClr val="dk1"/>
+          </a:fontRef>
+        </p:style>
+        <p:txBody>
+          <a:bodyPr lIns="124733" tIns="62367" rIns="124733" bIns="62367" rtlCol="0" anchor="ctr"/>
+          <a:lstStyle/>
+          <a:p>
+            <a:pPr algn="ctr"/>
+            <a:r>
+              <a:rPr lang="ru-RU" sz="700" dirty="0"/>
+              <a:t>Марокканские спаги: Рождение моторизованной кавалерии (Полки марокканских </a:t>
+            </a:r>
+            <a:r>
+              <a:rPr lang="ru-RU" sz="700" dirty="0" err="1"/>
+              <a:t>спагов</a:t>
+            </a:r>
+            <a:r>
+              <a:rPr lang="ru-RU" sz="700" dirty="0"/>
+              <a:t> </a:t>
+            </a:r>
+            <a:r>
+              <a:rPr lang="ru-RU" sz="100" dirty="0"/>
+              <a:t>(элитная туземная кавалерия) славились своей стремительностью. В 1937–1938 годах 1-й и 2-й полки </a:t>
+            </a:r>
+            <a:r>
+              <a:rPr lang="ru-RU" sz="100" dirty="0" err="1"/>
+              <a:t>спагов</a:t>
+            </a:r>
+            <a:r>
+              <a:rPr lang="ru-RU" sz="100" dirty="0"/>
+              <a:t> начали частично пересаживать на мотоциклы и легкие бронеавтомобили, создавая разведывательные группы (GRDI).Эффект в HOI 4: Дает скидку 50% на исследование бронеавтомобилей (</a:t>
+            </a:r>
+            <a:r>
+              <a:rPr lang="ru-RU" sz="100" dirty="0" err="1"/>
+              <a:t>Armored</a:t>
+            </a:r>
+            <a:r>
+              <a:rPr lang="ru-RU" sz="100" dirty="0"/>
+              <a:t> </a:t>
+            </a:r>
+            <a:r>
+              <a:rPr lang="ru-RU" sz="100" dirty="0" err="1"/>
+              <a:t>Cars</a:t>
+            </a:r>
+            <a:r>
+              <a:rPr lang="ru-RU" sz="100" dirty="0"/>
+              <a:t>) или моторизованной пехоты. Увеличивает максимальную скорость кавалерийских и моторизованных шаблонов на +10%.)</a:t>
+            </a:r>
+            <a:endParaRPr lang="ru-RU" sz="700" dirty="0"/>
+          </a:p>
+        </p:txBody>
+      </p:sp>
+      <p:cxnSp>
+        <p:nvCxnSpPr>
+          <p:cNvPr id="77" name="Соединительная линия уступом 620">
+            <a:extLst>
+              <a:ext uri="{FF2B5EF4-FFF2-40B4-BE49-F238E27FC236}">
+                <a16:creationId xmlns:a16="http://schemas.microsoft.com/office/drawing/2014/main" id="{0E212735-8577-4146-B210-5DB708FB93DE}"/>
+              </a:ext>
+            </a:extLst>
+          </p:cNvPr>
+          <p:cNvCxnSpPr>
+            <a:cxnSpLocks/>
+            <a:stCxn id="67" idx="2"/>
+            <a:endCxn id="72" idx="0"/>
+          </p:cNvCxnSpPr>
+          <p:nvPr/>
+        </p:nvCxnSpPr>
+        <p:spPr>
+          <a:xfrm rot="16200000" flipH="1">
+            <a:off x="43410511" y="26777245"/>
+            <a:ext cx="1290430" cy="3810"/>
+          </a:xfrm>
+          <a:prstGeom prst="bentConnector3">
+            <a:avLst>
+              <a:gd name="adj1" fmla="val 50000"/>
+            </a:avLst>
+          </a:prstGeom>
+          <a:ln w="19050">
+            <a:tailEnd type="arrow"/>
+          </a:ln>
+        </p:spPr>
+        <p:style>
+          <a:lnRef idx="1">
+            <a:schemeClr val="accent1"/>
+          </a:lnRef>
+          <a:fillRef idx="0">
+            <a:schemeClr val="accent1"/>
+          </a:fillRef>
+          <a:effectRef idx="0">
+            <a:schemeClr val="accent1"/>
+          </a:effectRef>
+          <a:fontRef idx="minor">
+            <a:schemeClr val="tx1"/>
+          </a:fontRef>
+        </p:style>
+      </p:cxnSp>
+      <p:sp>
+        <p:nvSpPr>
+          <p:cNvPr id="83" name="Прямоугольник 82">
+            <a:extLst>
+              <a:ext uri="{FF2B5EF4-FFF2-40B4-BE49-F238E27FC236}">
+                <a16:creationId xmlns:a16="http://schemas.microsoft.com/office/drawing/2014/main" id="{AAF920FF-6295-4D24-8F2C-081D365110E2}"/>
+              </a:ext>
+            </a:extLst>
+          </p:cNvPr>
+          <p:cNvSpPr/>
+          <p:nvPr/>
+        </p:nvSpPr>
+        <p:spPr>
+          <a:xfrm>
+            <a:off x="49779429" y="25593935"/>
+            <a:ext cx="926325" cy="540000"/>
+          </a:xfrm>
+          <a:prstGeom prst="rect">
+            <a:avLst/>
+          </a:prstGeom>
+          <a:solidFill>
+            <a:schemeClr val="bg1"/>
+          </a:solidFill>
+          <a:ln w="19050"/>
+        </p:spPr>
+        <p:style>
+          <a:lnRef idx="2">
+            <a:schemeClr val="accent1"/>
+          </a:lnRef>
+          <a:fillRef idx="1">
+            <a:schemeClr val="lt1"/>
+          </a:fillRef>
+          <a:effectRef idx="0">
+            <a:schemeClr val="accent1"/>
+          </a:effectRef>
+          <a:fontRef idx="minor">
+            <a:schemeClr val="dk1"/>
+          </a:fontRef>
+        </p:style>
+        <p:txBody>
+          <a:bodyPr lIns="124733" tIns="62367" rIns="124733" bIns="62367" rtlCol="0" anchor="ctr"/>
+          <a:lstStyle/>
+          <a:p>
+            <a:pPr algn="ctr"/>
+            <a:r>
+              <a:rPr lang="ru-RU" sz="700" dirty="0"/>
+              <a:t>Уроки Атласских гор (+в горах и горняки)</a:t>
+            </a:r>
+          </a:p>
+        </p:txBody>
+      </p:sp>
+      <p:cxnSp>
+        <p:nvCxnSpPr>
+          <p:cNvPr id="84" name="Соединительная линия уступом 620">
+            <a:extLst>
+              <a:ext uri="{FF2B5EF4-FFF2-40B4-BE49-F238E27FC236}">
+                <a16:creationId xmlns:a16="http://schemas.microsoft.com/office/drawing/2014/main" id="{0A94EED3-3573-4BCE-B9D5-0A1985395146}"/>
+              </a:ext>
+            </a:extLst>
+          </p:cNvPr>
+          <p:cNvCxnSpPr>
+            <a:cxnSpLocks/>
+            <a:stCxn id="56" idx="2"/>
+            <a:endCxn id="83" idx="0"/>
+          </p:cNvCxnSpPr>
+          <p:nvPr/>
+        </p:nvCxnSpPr>
+        <p:spPr>
+          <a:xfrm rot="5400000">
+            <a:off x="50103629" y="25454970"/>
+            <a:ext cx="277929" cy="1"/>
+          </a:xfrm>
+          <a:prstGeom prst="bentConnector3">
+            <a:avLst>
+              <a:gd name="adj1" fmla="val 50000"/>
+            </a:avLst>
+          </a:prstGeom>
+          <a:ln w="19050">
+            <a:tailEnd type="arrow"/>
+          </a:ln>
+        </p:spPr>
+        <p:style>
+          <a:lnRef idx="1">
+            <a:schemeClr val="accent1"/>
+          </a:lnRef>
+          <a:fillRef idx="0">
+            <a:schemeClr val="accent1"/>
+          </a:fillRef>
+          <a:effectRef idx="0">
+            <a:schemeClr val="accent1"/>
+          </a:effectRef>
+          <a:fontRef idx="minor">
+            <a:schemeClr val="tx1"/>
+          </a:fontRef>
+        </p:style>
+      </p:cxnSp>
+      <p:sp>
+        <p:nvSpPr>
+          <p:cNvPr id="87" name="Прямоугольник 86">
+            <a:extLst>
+              <a:ext uri="{FF2B5EF4-FFF2-40B4-BE49-F238E27FC236}">
+                <a16:creationId xmlns:a16="http://schemas.microsoft.com/office/drawing/2014/main" id="{FFA5A51C-91CE-46B7-9AE4-E05DEBBD456D}"/>
+              </a:ext>
+            </a:extLst>
+          </p:cNvPr>
+          <p:cNvSpPr/>
+          <p:nvPr/>
+        </p:nvSpPr>
+        <p:spPr>
+          <a:xfrm>
+            <a:off x="48542412" y="25594109"/>
+            <a:ext cx="926325" cy="540000"/>
+          </a:xfrm>
+          <a:prstGeom prst="rect">
+            <a:avLst/>
+          </a:prstGeom>
+          <a:solidFill>
+            <a:schemeClr val="bg1"/>
+          </a:solidFill>
+          <a:ln w="19050"/>
+        </p:spPr>
+        <p:style>
+          <a:lnRef idx="2">
+            <a:schemeClr val="accent1"/>
+          </a:lnRef>
+          <a:fillRef idx="1">
+            <a:schemeClr val="lt1"/>
+          </a:fillRef>
+          <a:effectRef idx="0">
+            <a:schemeClr val="accent1"/>
+          </a:effectRef>
+          <a:fontRef idx="minor">
+            <a:schemeClr val="dk1"/>
+          </a:fontRef>
+        </p:style>
+        <p:txBody>
+          <a:bodyPr lIns="124733" tIns="62367" rIns="124733" bIns="62367" rtlCol="0" anchor="ctr"/>
+          <a:lstStyle/>
+          <a:p>
+            <a:pPr algn="ctr"/>
+            <a:r>
+              <a:rPr lang="ru-RU" sz="700" dirty="0"/>
+              <a:t>Заменить Французских офицеров Марокканцами</a:t>
+            </a:r>
+          </a:p>
+        </p:txBody>
+      </p:sp>
+      <p:sp>
+        <p:nvSpPr>
+          <p:cNvPr id="90" name="Прямоугольник 89">
+            <a:extLst>
+              <a:ext uri="{FF2B5EF4-FFF2-40B4-BE49-F238E27FC236}">
+                <a16:creationId xmlns:a16="http://schemas.microsoft.com/office/drawing/2014/main" id="{4D3A332D-0695-445F-8EF4-63F5B567A6E2}"/>
+              </a:ext>
+            </a:extLst>
+          </p:cNvPr>
+          <p:cNvSpPr/>
+          <p:nvPr/>
+        </p:nvSpPr>
+        <p:spPr>
+          <a:xfrm>
+            <a:off x="48542674" y="26412570"/>
+            <a:ext cx="926325" cy="540000"/>
+          </a:xfrm>
+          <a:prstGeom prst="rect">
+            <a:avLst/>
+          </a:prstGeom>
+          <a:solidFill>
+            <a:schemeClr val="bg1"/>
+          </a:solidFill>
+          <a:ln w="19050"/>
+        </p:spPr>
+        <p:style>
+          <a:lnRef idx="2">
+            <a:schemeClr val="accent1"/>
+          </a:lnRef>
+          <a:fillRef idx="1">
+            <a:schemeClr val="lt1"/>
+          </a:fillRef>
+          <a:effectRef idx="0">
+            <a:schemeClr val="accent1"/>
+          </a:effectRef>
+          <a:fontRef idx="minor">
+            <a:schemeClr val="dk1"/>
+          </a:fontRef>
+        </p:style>
+        <p:txBody>
+          <a:bodyPr lIns="124733" tIns="62367" rIns="124733" bIns="62367" rtlCol="0" anchor="ctr"/>
+          <a:lstStyle/>
+          <a:p>
+            <a:pPr algn="ctr"/>
+            <a:r>
+              <a:rPr lang="ru-RU" sz="700" dirty="0"/>
+              <a:t>Заменить Французских офицеров Марокканцами</a:t>
+            </a:r>
+          </a:p>
+        </p:txBody>
+      </p:sp>
+      <p:cxnSp>
+        <p:nvCxnSpPr>
+          <p:cNvPr id="91" name="Соединительная линия уступом 620">
+            <a:extLst>
+              <a:ext uri="{FF2B5EF4-FFF2-40B4-BE49-F238E27FC236}">
+                <a16:creationId xmlns:a16="http://schemas.microsoft.com/office/drawing/2014/main" id="{35502416-1FB7-4107-8234-9BD737F2F667}"/>
+              </a:ext>
+            </a:extLst>
+          </p:cNvPr>
+          <p:cNvCxnSpPr>
+            <a:cxnSpLocks/>
+            <a:stCxn id="90" idx="2"/>
+            <a:endCxn id="60" idx="0"/>
+          </p:cNvCxnSpPr>
+          <p:nvPr/>
+        </p:nvCxnSpPr>
+        <p:spPr>
+          <a:xfrm rot="5400000">
+            <a:off x="47750244" y="26981575"/>
+            <a:ext cx="1284598" cy="1226588"/>
+          </a:xfrm>
+          <a:prstGeom prst="bentConnector3">
+            <a:avLst>
+              <a:gd name="adj1" fmla="val 14409"/>
+            </a:avLst>
+          </a:prstGeom>
+          <a:ln w="19050">
+            <a:tailEnd type="arrow"/>
+          </a:ln>
+        </p:spPr>
+        <p:style>
+          <a:lnRef idx="1">
+            <a:schemeClr val="accent1"/>
+          </a:lnRef>
+          <a:fillRef idx="0">
+            <a:schemeClr val="accent1"/>
+          </a:fillRef>
+          <a:effectRef idx="0">
+            <a:schemeClr val="accent1"/>
+          </a:effectRef>
+          <a:fontRef idx="minor">
+            <a:schemeClr val="tx1"/>
+          </a:fontRef>
+        </p:style>
+      </p:cxnSp>
+      <p:sp>
+        <p:nvSpPr>
+          <p:cNvPr id="95" name="Прямоугольник 94">
+            <a:extLst>
+              <a:ext uri="{FF2B5EF4-FFF2-40B4-BE49-F238E27FC236}">
+                <a16:creationId xmlns:a16="http://schemas.microsoft.com/office/drawing/2014/main" id="{000671E6-9ACB-4797-81EA-7FFB4B3C9776}"/>
+              </a:ext>
+            </a:extLst>
+          </p:cNvPr>
+          <p:cNvSpPr/>
+          <p:nvPr/>
+        </p:nvSpPr>
+        <p:spPr>
+          <a:xfrm>
+            <a:off x="46074885" y="28237167"/>
+            <a:ext cx="926325" cy="540000"/>
+          </a:xfrm>
+          <a:prstGeom prst="rect">
+            <a:avLst/>
+          </a:prstGeom>
+          <a:solidFill>
+            <a:schemeClr val="bg1"/>
+          </a:solidFill>
+          <a:ln w="19050"/>
+        </p:spPr>
+        <p:style>
+          <a:lnRef idx="2">
+            <a:schemeClr val="accent1"/>
+          </a:lnRef>
+          <a:fillRef idx="1">
+            <a:schemeClr val="lt1"/>
+          </a:fillRef>
+          <a:effectRef idx="0">
+            <a:schemeClr val="accent1"/>
+          </a:effectRef>
+          <a:fontRef idx="minor">
+            <a:schemeClr val="dk1"/>
+          </a:fontRef>
+        </p:style>
+        <p:txBody>
+          <a:bodyPr lIns="124733" tIns="62367" rIns="124733" bIns="62367" rtlCol="0" anchor="ctr"/>
+          <a:lstStyle/>
+          <a:p>
+            <a:pPr algn="ctr"/>
+            <a:r>
+              <a:rPr lang="ru-RU" sz="700" dirty="0"/>
+              <a:t>Создание собственных ВПК</a:t>
+            </a:r>
+          </a:p>
+        </p:txBody>
+      </p:sp>
+      <p:cxnSp>
+        <p:nvCxnSpPr>
+          <p:cNvPr id="96" name="Соединительная линия уступом 620">
+            <a:extLst>
+              <a:ext uri="{FF2B5EF4-FFF2-40B4-BE49-F238E27FC236}">
+                <a16:creationId xmlns:a16="http://schemas.microsoft.com/office/drawing/2014/main" id="{D0FDB751-EAC9-49EC-BA49-353FA06B40AB}"/>
+              </a:ext>
+            </a:extLst>
+          </p:cNvPr>
+          <p:cNvCxnSpPr>
+            <a:cxnSpLocks/>
+            <a:stCxn id="45" idx="2"/>
+            <a:endCxn id="87" idx="0"/>
+          </p:cNvCxnSpPr>
+          <p:nvPr/>
+        </p:nvCxnSpPr>
+        <p:spPr>
+          <a:xfrm rot="16200000" flipH="1">
+            <a:off x="48865607" y="25454140"/>
+            <a:ext cx="278103" cy="1833"/>
+          </a:xfrm>
+          <a:prstGeom prst="bentConnector3">
+            <a:avLst>
+              <a:gd name="adj1" fmla="val 50000"/>
+            </a:avLst>
+          </a:prstGeom>
+          <a:ln w="19050">
+            <a:tailEnd type="arrow"/>
+          </a:ln>
+        </p:spPr>
+        <p:style>
+          <a:lnRef idx="1">
+            <a:schemeClr val="accent1"/>
+          </a:lnRef>
+          <a:fillRef idx="0">
+            <a:schemeClr val="accent1"/>
+          </a:fillRef>
+          <a:effectRef idx="0">
+            <a:schemeClr val="accent1"/>
+          </a:effectRef>
+          <a:fontRef idx="minor">
+            <a:schemeClr val="tx1"/>
+          </a:fontRef>
+        </p:style>
+      </p:cxnSp>
+      <p:cxnSp>
+        <p:nvCxnSpPr>
+          <p:cNvPr id="100" name="Соединительная линия уступом 620">
+            <a:extLst>
+              <a:ext uri="{FF2B5EF4-FFF2-40B4-BE49-F238E27FC236}">
+                <a16:creationId xmlns:a16="http://schemas.microsoft.com/office/drawing/2014/main" id="{1D3BB680-7BC6-4E4D-93B0-5693659E5A26}"/>
+              </a:ext>
+            </a:extLst>
+          </p:cNvPr>
+          <p:cNvCxnSpPr>
+            <a:cxnSpLocks/>
+            <a:stCxn id="87" idx="2"/>
+            <a:endCxn id="90" idx="0"/>
+          </p:cNvCxnSpPr>
+          <p:nvPr/>
+        </p:nvCxnSpPr>
+        <p:spPr>
+          <a:xfrm rot="16200000" flipH="1">
+            <a:off x="48866476" y="26273208"/>
+            <a:ext cx="278461" cy="262"/>
+          </a:xfrm>
+          <a:prstGeom prst="bentConnector3">
+            <a:avLst>
+              <a:gd name="adj1" fmla="val 50000"/>
+            </a:avLst>
+          </a:prstGeom>
+          <a:ln w="19050">
+            <a:tailEnd type="arrow"/>
+          </a:ln>
+        </p:spPr>
+        <p:style>
+          <a:lnRef idx="1">
+            <a:schemeClr val="accent1"/>
+          </a:lnRef>
+          <a:fillRef idx="0">
+            <a:schemeClr val="accent1"/>
+          </a:fillRef>
+          <a:effectRef idx="0">
+            <a:schemeClr val="accent1"/>
+          </a:effectRef>
+          <a:fontRef idx="minor">
+            <a:schemeClr val="tx1"/>
+          </a:fontRef>
+        </p:style>
+      </p:cxnSp>
+      <p:cxnSp>
+        <p:nvCxnSpPr>
+          <p:cNvPr id="112" name="Соединительная линия уступом 620">
+            <a:extLst>
+              <a:ext uri="{FF2B5EF4-FFF2-40B4-BE49-F238E27FC236}">
+                <a16:creationId xmlns:a16="http://schemas.microsoft.com/office/drawing/2014/main" id="{44B3E05F-84E6-4CD9-9732-9187DD92FD5C}"/>
+              </a:ext>
+            </a:extLst>
+          </p:cNvPr>
+          <p:cNvCxnSpPr>
+            <a:cxnSpLocks/>
+            <a:stCxn id="142" idx="2"/>
+            <a:endCxn id="95" idx="0"/>
+          </p:cNvCxnSpPr>
+          <p:nvPr/>
+        </p:nvCxnSpPr>
+        <p:spPr>
+          <a:xfrm rot="5400000">
+            <a:off x="46713594" y="27788819"/>
+            <a:ext cx="272802" cy="623894"/>
+          </a:xfrm>
+          <a:prstGeom prst="bentConnector3">
+            <a:avLst>
+              <a:gd name="adj1" fmla="val 50000"/>
+            </a:avLst>
+          </a:prstGeom>
+          <a:ln w="19050">
+            <a:tailEnd type="arrow"/>
+          </a:ln>
+        </p:spPr>
+        <p:style>
+          <a:lnRef idx="1">
+            <a:schemeClr val="accent1"/>
+          </a:lnRef>
+          <a:fillRef idx="0">
+            <a:schemeClr val="accent1"/>
+          </a:fillRef>
+          <a:effectRef idx="0">
+            <a:schemeClr val="accent1"/>
+          </a:effectRef>
+          <a:fontRef idx="minor">
+            <a:schemeClr val="tx1"/>
+          </a:fontRef>
+        </p:style>
+      </p:cxnSp>
+      <p:sp>
+        <p:nvSpPr>
+          <p:cNvPr id="116" name="Прямоугольник 115">
+            <a:extLst>
+              <a:ext uri="{FF2B5EF4-FFF2-40B4-BE49-F238E27FC236}">
+                <a16:creationId xmlns:a16="http://schemas.microsoft.com/office/drawing/2014/main" id="{6C923ED8-0C6F-4BDA-A9DA-A14DE820EC4E}"/>
+              </a:ext>
+            </a:extLst>
+          </p:cNvPr>
+          <p:cNvSpPr/>
+          <p:nvPr/>
+        </p:nvSpPr>
+        <p:spPr>
+          <a:xfrm>
+            <a:off x="46074885" y="29170618"/>
+            <a:ext cx="926325" cy="540000"/>
+          </a:xfrm>
+          <a:prstGeom prst="rect">
+            <a:avLst/>
+          </a:prstGeom>
+          <a:solidFill>
+            <a:schemeClr val="bg1"/>
+          </a:solidFill>
+          <a:ln w="19050"/>
+        </p:spPr>
+        <p:style>
+          <a:lnRef idx="2">
+            <a:schemeClr val="accent1"/>
+          </a:lnRef>
+          <a:fillRef idx="1">
+            <a:schemeClr val="lt1"/>
+          </a:fillRef>
+          <a:effectRef idx="0">
+            <a:schemeClr val="accent1"/>
+          </a:effectRef>
+          <a:fontRef idx="minor">
+            <a:schemeClr val="dk1"/>
+          </a:fontRef>
+        </p:style>
+        <p:txBody>
+          <a:bodyPr lIns="124733" tIns="62367" rIns="124733" bIns="62367" rtlCol="0" anchor="ctr"/>
+          <a:lstStyle/>
+          <a:p>
+            <a:pPr algn="ctr"/>
+            <a:r>
+              <a:rPr lang="ru-RU" sz="700" dirty="0"/>
+              <a:t>Организовать ВВС Марокко</a:t>
+            </a:r>
+          </a:p>
+        </p:txBody>
+      </p:sp>
+      <p:sp>
+        <p:nvSpPr>
+          <p:cNvPr id="117" name="Прямоугольник 116">
+            <a:extLst>
+              <a:ext uri="{FF2B5EF4-FFF2-40B4-BE49-F238E27FC236}">
+                <a16:creationId xmlns:a16="http://schemas.microsoft.com/office/drawing/2014/main" id="{989C3CAC-2E57-4936-AE42-8D1347A1FF71}"/>
+              </a:ext>
+            </a:extLst>
+          </p:cNvPr>
+          <p:cNvSpPr/>
+          <p:nvPr/>
+        </p:nvSpPr>
+        <p:spPr>
+          <a:xfrm>
+            <a:off x="48534750" y="29170215"/>
+            <a:ext cx="926325" cy="540000"/>
+          </a:xfrm>
+          <a:prstGeom prst="rect">
+            <a:avLst/>
+          </a:prstGeom>
+          <a:solidFill>
+            <a:schemeClr val="bg1"/>
+          </a:solidFill>
+          <a:ln w="19050"/>
+        </p:spPr>
+        <p:style>
+          <a:lnRef idx="2">
+            <a:schemeClr val="accent1"/>
+          </a:lnRef>
+          <a:fillRef idx="1">
+            <a:schemeClr val="lt1"/>
+          </a:fillRef>
+          <a:effectRef idx="0">
+            <a:schemeClr val="accent1"/>
+          </a:effectRef>
+          <a:fontRef idx="minor">
+            <a:schemeClr val="dk1"/>
+          </a:fontRef>
+        </p:style>
+        <p:txBody>
+          <a:bodyPr lIns="124733" tIns="62367" rIns="124733" bIns="62367" rtlCol="0" anchor="ctr"/>
+          <a:lstStyle/>
+          <a:p>
+            <a:pPr algn="ctr"/>
+            <a:r>
+              <a:rPr lang="ru-RU" sz="700" dirty="0"/>
+              <a:t>Основать ВМФ Марокко</a:t>
+            </a:r>
+          </a:p>
+        </p:txBody>
+      </p:sp>
+      <p:cxnSp>
+        <p:nvCxnSpPr>
+          <p:cNvPr id="122" name="Соединительная линия уступом 620">
+            <a:extLst>
+              <a:ext uri="{FF2B5EF4-FFF2-40B4-BE49-F238E27FC236}">
+                <a16:creationId xmlns:a16="http://schemas.microsoft.com/office/drawing/2014/main" id="{AF5CC368-C69C-4F49-A3A5-D2D665957A34}"/>
+              </a:ext>
+            </a:extLst>
+          </p:cNvPr>
+          <p:cNvCxnSpPr>
+            <a:cxnSpLocks/>
+            <a:stCxn id="60" idx="2"/>
+            <a:endCxn id="116" idx="0"/>
+          </p:cNvCxnSpPr>
+          <p:nvPr/>
+        </p:nvCxnSpPr>
+        <p:spPr>
+          <a:xfrm rot="5400000">
+            <a:off x="46961924" y="28353293"/>
+            <a:ext cx="393450" cy="1241201"/>
+          </a:xfrm>
+          <a:prstGeom prst="bentConnector3">
+            <a:avLst>
+              <a:gd name="adj1" fmla="val 50000"/>
+            </a:avLst>
+          </a:prstGeom>
+          <a:ln w="19050">
+            <a:tailEnd type="arrow"/>
+          </a:ln>
+        </p:spPr>
+        <p:style>
+          <a:lnRef idx="1">
+            <a:schemeClr val="accent1"/>
+          </a:lnRef>
+          <a:fillRef idx="0">
+            <a:schemeClr val="accent1"/>
+          </a:fillRef>
+          <a:effectRef idx="0">
+            <a:schemeClr val="accent1"/>
+          </a:effectRef>
+          <a:fontRef idx="minor">
+            <a:schemeClr val="tx1"/>
+          </a:fontRef>
+        </p:style>
+      </p:cxnSp>
+      <p:cxnSp>
+        <p:nvCxnSpPr>
+          <p:cNvPr id="123" name="Соединительная линия уступом 620">
+            <a:extLst>
+              <a:ext uri="{FF2B5EF4-FFF2-40B4-BE49-F238E27FC236}">
+                <a16:creationId xmlns:a16="http://schemas.microsoft.com/office/drawing/2014/main" id="{D5615A50-0893-4183-9AB3-0F88CC013A32}"/>
+              </a:ext>
+            </a:extLst>
+          </p:cNvPr>
+          <p:cNvCxnSpPr>
+            <a:cxnSpLocks/>
+            <a:stCxn id="60" idx="2"/>
+            <a:endCxn id="117" idx="0"/>
+          </p:cNvCxnSpPr>
+          <p:nvPr/>
+        </p:nvCxnSpPr>
+        <p:spPr>
+          <a:xfrm rot="16200000" flipH="1">
+            <a:off x="48192058" y="28364359"/>
+            <a:ext cx="393047" cy="1218664"/>
+          </a:xfrm>
+          <a:prstGeom prst="bentConnector3">
+            <a:avLst>
+              <a:gd name="adj1" fmla="val 50000"/>
+            </a:avLst>
+          </a:prstGeom>
+          <a:ln w="19050">
+            <a:tailEnd type="arrow"/>
+          </a:ln>
+        </p:spPr>
+        <p:style>
+          <a:lnRef idx="1">
+            <a:schemeClr val="accent1"/>
+          </a:lnRef>
+          <a:fillRef idx="0">
+            <a:schemeClr val="accent1"/>
+          </a:fillRef>
+          <a:effectRef idx="0">
+            <a:schemeClr val="accent1"/>
+          </a:effectRef>
+          <a:fontRef idx="minor">
+            <a:schemeClr val="tx1"/>
+          </a:fontRef>
+        </p:style>
+      </p:cxnSp>
+      <p:sp>
+        <p:nvSpPr>
+          <p:cNvPr id="61" name="Прямоугольник 60">
+            <a:extLst>
+              <a:ext uri="{FF2B5EF4-FFF2-40B4-BE49-F238E27FC236}">
+                <a16:creationId xmlns:a16="http://schemas.microsoft.com/office/drawing/2014/main" id="{1BDF08AB-F681-45B6-B5CD-61E85C8BCE61}"/>
+              </a:ext>
+            </a:extLst>
+          </p:cNvPr>
+          <p:cNvSpPr/>
+          <p:nvPr/>
+        </p:nvSpPr>
+        <p:spPr>
+          <a:xfrm>
+            <a:off x="41115911" y="23093894"/>
+            <a:ext cx="926325" cy="540000"/>
+          </a:xfrm>
+          <a:prstGeom prst="rect">
+            <a:avLst/>
+          </a:prstGeom>
+          <a:solidFill>
+            <a:schemeClr val="bg1"/>
+          </a:solidFill>
+          <a:ln w="19050"/>
+        </p:spPr>
+        <p:style>
+          <a:lnRef idx="2">
+            <a:schemeClr val="accent1"/>
+          </a:lnRef>
+          <a:fillRef idx="1">
+            <a:schemeClr val="lt1"/>
+          </a:fillRef>
+          <a:effectRef idx="0">
+            <a:schemeClr val="accent1"/>
+          </a:effectRef>
+          <a:fontRef idx="minor">
+            <a:schemeClr val="dk1"/>
+          </a:fontRef>
+        </p:style>
+        <p:txBody>
+          <a:bodyPr lIns="124733" tIns="62367" rIns="124733" bIns="62367" rtlCol="0" anchor="ctr"/>
+          <a:lstStyle/>
+          <a:p>
+            <a:pPr algn="ctr"/>
+            <a:r>
+              <a:rPr lang="ru-RU" sz="700" dirty="0"/>
+              <a:t>Лишить власти халифа</a:t>
+            </a:r>
+          </a:p>
+        </p:txBody>
+      </p:sp>
+      <p:sp>
+        <p:nvSpPr>
+          <p:cNvPr id="62" name="Прямоугольник 61">
+            <a:extLst>
+              <a:ext uri="{FF2B5EF4-FFF2-40B4-BE49-F238E27FC236}">
+                <a16:creationId xmlns:a16="http://schemas.microsoft.com/office/drawing/2014/main" id="{F01E357F-2538-4F42-A508-D7C977E20E3E}"/>
+              </a:ext>
+            </a:extLst>
+          </p:cNvPr>
+          <p:cNvSpPr/>
+          <p:nvPr/>
+        </p:nvSpPr>
+        <p:spPr>
+          <a:xfrm>
+            <a:off x="42351808" y="24776004"/>
+            <a:ext cx="926325" cy="540000"/>
+          </a:xfrm>
+          <a:prstGeom prst="rect">
+            <a:avLst/>
+          </a:prstGeom>
+          <a:solidFill>
+            <a:schemeClr val="bg1"/>
+          </a:solidFill>
+          <a:ln w="19050"/>
+        </p:spPr>
+        <p:style>
+          <a:lnRef idx="2">
+            <a:schemeClr val="accent1"/>
+          </a:lnRef>
+          <a:fillRef idx="1">
+            <a:schemeClr val="lt1"/>
+          </a:fillRef>
+          <a:effectRef idx="0">
+            <a:schemeClr val="accent1"/>
+          </a:effectRef>
+          <a:fontRef idx="minor">
+            <a:schemeClr val="dk1"/>
+          </a:fontRef>
+        </p:style>
+        <p:txBody>
+          <a:bodyPr lIns="124733" tIns="62367" rIns="124733" bIns="62367" rtlCol="0" anchor="ctr"/>
+          <a:lstStyle/>
+          <a:p>
+            <a:pPr algn="ctr"/>
+            <a:r>
+              <a:rPr lang="ru-RU" sz="700" dirty="0"/>
+              <a:t>Вернуть железные рудники Эль-Рифа к работе</a:t>
+            </a:r>
+          </a:p>
+        </p:txBody>
+      </p:sp>
+      <p:sp>
+        <p:nvSpPr>
+          <p:cNvPr id="63" name="Прямоугольник 62">
+            <a:extLst>
+              <a:ext uri="{FF2B5EF4-FFF2-40B4-BE49-F238E27FC236}">
+                <a16:creationId xmlns:a16="http://schemas.microsoft.com/office/drawing/2014/main" id="{6AED1E57-3209-4749-B8A1-832D75242D7D}"/>
+              </a:ext>
+            </a:extLst>
+          </p:cNvPr>
+          <p:cNvSpPr/>
+          <p:nvPr/>
+        </p:nvSpPr>
+        <p:spPr>
+          <a:xfrm>
+            <a:off x="41115912" y="24776004"/>
+            <a:ext cx="926325" cy="540000"/>
+          </a:xfrm>
+          <a:prstGeom prst="rect">
+            <a:avLst/>
+          </a:prstGeom>
+          <a:solidFill>
+            <a:schemeClr val="bg1"/>
+          </a:solidFill>
+          <a:ln w="19050"/>
+        </p:spPr>
+        <p:style>
+          <a:lnRef idx="2">
+            <a:schemeClr val="accent1"/>
+          </a:lnRef>
+          <a:fillRef idx="1">
+            <a:schemeClr val="lt1"/>
+          </a:fillRef>
+          <a:effectRef idx="0">
+            <a:schemeClr val="accent1"/>
+          </a:effectRef>
+          <a:fontRef idx="minor">
+            <a:schemeClr val="dk1"/>
+          </a:fontRef>
+        </p:style>
+        <p:txBody>
+          <a:bodyPr lIns="124733" tIns="62367" rIns="124733" bIns="62367" rtlCol="0" anchor="ctr"/>
+          <a:lstStyle/>
+          <a:p>
+            <a:pPr algn="ctr"/>
+            <a:r>
+              <a:rPr lang="ru-RU" sz="700" dirty="0"/>
+              <a:t>Репрессировать членов Партии Марокканского Единства </a:t>
+            </a:r>
+            <a:r>
+              <a:rPr lang="ru-RU" sz="100" dirty="0"/>
+              <a:t>(Опасаясь влияния Торреса, верховный комиссар генерал </a:t>
+            </a:r>
+            <a:r>
+              <a:rPr lang="ru-RU" sz="100" dirty="0" err="1"/>
+              <a:t>Бейгбедер</a:t>
+            </a:r>
+            <a:r>
+              <a:rPr lang="ru-RU" sz="100" dirty="0"/>
+              <a:t> противопоставил ему другого националистического деятеля - Мекки </a:t>
+            </a:r>
+            <a:r>
+              <a:rPr lang="ru-RU" sz="100" dirty="0" err="1"/>
+              <a:t>Насыри</a:t>
+            </a:r>
+            <a:r>
+              <a:rPr lang="ru-RU" sz="100" dirty="0"/>
+              <a:t>. Последний снискал популярность </a:t>
+            </a:r>
+            <a:r>
+              <a:rPr lang="ru-RU" sz="100" dirty="0" err="1"/>
+              <a:t>реча¬ми</a:t>
+            </a:r>
+            <a:r>
+              <a:rPr lang="ru-RU" sz="100" dirty="0"/>
+              <a:t> в Большой мечети о национальных чаяниях марокканского народа. Верховный комиссар помог </a:t>
+            </a:r>
+            <a:r>
+              <a:rPr lang="ru-RU" sz="100" dirty="0" err="1"/>
+              <a:t>Насыри</a:t>
+            </a:r>
+            <a:r>
+              <a:rPr lang="ru-RU" sz="100" dirty="0"/>
+              <a:t> создать Партию </a:t>
+            </a:r>
+            <a:r>
+              <a:rPr lang="ru-RU" sz="100" dirty="0" err="1"/>
+              <a:t>ма¬рокканского</a:t>
+            </a:r>
+            <a:r>
+              <a:rPr lang="ru-RU" sz="100" dirty="0"/>
+              <a:t> единства (ПМЕ). Лидеры обеих партий представляли одни н те же социальные слои, выдвигали практически </a:t>
+            </a:r>
+            <a:r>
+              <a:rPr lang="ru-RU" sz="100" dirty="0" err="1"/>
+              <a:t>идентич¬ные</a:t>
+            </a:r>
+            <a:r>
+              <a:rPr lang="ru-RU" sz="100" dirty="0"/>
+              <a:t> требования. Но для арабского населения партия </a:t>
+            </a:r>
+            <a:r>
+              <a:rPr lang="ru-RU" sz="100" dirty="0" err="1"/>
+              <a:t>Насыри</a:t>
+            </a:r>
+            <a:r>
+              <a:rPr lang="ru-RU" sz="100" dirty="0"/>
+              <a:t> была более привлекательной вследствие ее приверженности </a:t>
+            </a:r>
+            <a:r>
+              <a:rPr lang="ru-RU" sz="100" dirty="0" err="1"/>
+              <a:t>ара¬бизму</a:t>
+            </a:r>
+            <a:r>
+              <a:rPr lang="ru-RU" sz="100" dirty="0"/>
+              <a:t>: ПМЕ выступала за то, чтобы арабский язык был объявлен единственным официальным языком мусульманского Марокко. Обе партии первоначально не ставили перед собой конкретных задач по изменению положения в испанской зоне.)</a:t>
+            </a:r>
+            <a:endParaRPr lang="ru-RU" sz="700" dirty="0"/>
+          </a:p>
+        </p:txBody>
+      </p:sp>
+      <p:sp>
+        <p:nvSpPr>
+          <p:cNvPr id="65" name="Прямоугольник 64">
+            <a:extLst>
+              <a:ext uri="{FF2B5EF4-FFF2-40B4-BE49-F238E27FC236}">
+                <a16:creationId xmlns:a16="http://schemas.microsoft.com/office/drawing/2014/main" id="{874692AA-CCE2-4AB8-9FED-C4FEB6AED264}"/>
+              </a:ext>
+            </a:extLst>
+          </p:cNvPr>
+          <p:cNvSpPr/>
+          <p:nvPr/>
+        </p:nvSpPr>
+        <p:spPr>
+          <a:xfrm>
+            <a:off x="41724922" y="23971841"/>
+            <a:ext cx="926325" cy="540000"/>
+          </a:xfrm>
+          <a:prstGeom prst="rect">
+            <a:avLst/>
+          </a:prstGeom>
+          <a:solidFill>
+            <a:schemeClr val="bg1"/>
+          </a:solidFill>
+          <a:ln w="19050"/>
+        </p:spPr>
+        <p:style>
+          <a:lnRef idx="2">
+            <a:schemeClr val="accent1"/>
+          </a:lnRef>
+          <a:fillRef idx="1">
+            <a:schemeClr val="lt1"/>
+          </a:fillRef>
+          <a:effectRef idx="0">
+            <a:schemeClr val="accent1"/>
+          </a:effectRef>
+          <a:fontRef idx="minor">
+            <a:schemeClr val="dk1"/>
+          </a:fontRef>
+        </p:style>
+        <p:txBody>
+          <a:bodyPr lIns="124733" tIns="62367" rIns="124733" bIns="62367" rtlCol="0" anchor="ctr"/>
+          <a:lstStyle/>
+          <a:p>
+            <a:pPr algn="ctr"/>
+            <a:r>
+              <a:rPr lang="ru-RU" sz="700" dirty="0"/>
+              <a:t>Подчинить власти </a:t>
+            </a:r>
+            <a:r>
+              <a:rPr lang="ru-RU" sz="700" dirty="0" err="1"/>
+              <a:t>Рифские</a:t>
+            </a:r>
+            <a:r>
+              <a:rPr lang="ru-RU" sz="700" dirty="0"/>
+              <a:t> племена</a:t>
+            </a:r>
+          </a:p>
+        </p:txBody>
+      </p:sp>
+      <p:sp>
+        <p:nvSpPr>
+          <p:cNvPr id="69" name="Прямоугольник 68">
+            <a:extLst>
+              <a:ext uri="{FF2B5EF4-FFF2-40B4-BE49-F238E27FC236}">
+                <a16:creationId xmlns:a16="http://schemas.microsoft.com/office/drawing/2014/main" id="{4E0BC902-F193-41B5-9412-7B2908EC0C4D}"/>
+              </a:ext>
+            </a:extLst>
+          </p:cNvPr>
+          <p:cNvSpPr/>
+          <p:nvPr/>
+        </p:nvSpPr>
+        <p:spPr>
+          <a:xfrm>
+            <a:off x="39877061" y="24776004"/>
+            <a:ext cx="926325" cy="540000"/>
+          </a:xfrm>
+          <a:prstGeom prst="rect">
+            <a:avLst/>
+          </a:prstGeom>
+          <a:solidFill>
+            <a:schemeClr val="bg1"/>
+          </a:solidFill>
+          <a:ln w="19050"/>
+        </p:spPr>
+        <p:style>
+          <a:lnRef idx="2">
+            <a:schemeClr val="accent1"/>
+          </a:lnRef>
+          <a:fillRef idx="1">
+            <a:schemeClr val="lt1"/>
+          </a:fillRef>
+          <a:effectRef idx="0">
+            <a:schemeClr val="accent1"/>
+          </a:effectRef>
+          <a:fontRef idx="minor">
+            <a:schemeClr val="dk1"/>
+          </a:fontRef>
+        </p:style>
+        <p:txBody>
+          <a:bodyPr lIns="124733" tIns="62367" rIns="124733" bIns="62367" rtlCol="0" anchor="ctr"/>
+          <a:lstStyle/>
+          <a:p>
+            <a:pPr algn="ctr"/>
+            <a:r>
+              <a:rPr lang="ru-RU" sz="700" dirty="0"/>
+              <a:t>Интегрировать националистов из Испанского протектората в систему</a:t>
+            </a:r>
+          </a:p>
+        </p:txBody>
+      </p:sp>
+      <p:sp>
+        <p:nvSpPr>
+          <p:cNvPr id="70" name="Прямоугольник 69">
+            <a:extLst>
+              <a:ext uri="{FF2B5EF4-FFF2-40B4-BE49-F238E27FC236}">
+                <a16:creationId xmlns:a16="http://schemas.microsoft.com/office/drawing/2014/main" id="{83D56CB7-8E45-4830-9F6B-4811EE5F5515}"/>
+              </a:ext>
+            </a:extLst>
+          </p:cNvPr>
+          <p:cNvSpPr/>
+          <p:nvPr/>
+        </p:nvSpPr>
+        <p:spPr>
+          <a:xfrm>
+            <a:off x="40486071" y="23971841"/>
+            <a:ext cx="926325" cy="540000"/>
+          </a:xfrm>
+          <a:prstGeom prst="rect">
+            <a:avLst/>
+          </a:prstGeom>
+          <a:solidFill>
+            <a:schemeClr val="bg1"/>
+          </a:solidFill>
+          <a:ln w="19050"/>
+        </p:spPr>
+        <p:style>
+          <a:lnRef idx="2">
+            <a:schemeClr val="accent1"/>
+          </a:lnRef>
+          <a:fillRef idx="1">
+            <a:schemeClr val="lt1"/>
+          </a:fillRef>
+          <a:effectRef idx="0">
+            <a:schemeClr val="accent1"/>
+          </a:effectRef>
+          <a:fontRef idx="minor">
+            <a:schemeClr val="dk1"/>
+          </a:fontRef>
+        </p:style>
+        <p:txBody>
+          <a:bodyPr lIns="124733" tIns="62367" rIns="124733" bIns="62367" rtlCol="0" anchor="ctr"/>
+          <a:lstStyle/>
+          <a:p>
+            <a:pPr algn="ctr"/>
+            <a:r>
+              <a:rPr lang="ru-RU" sz="700" dirty="0"/>
+              <a:t>Набрать испанских </a:t>
+            </a:r>
+            <a:r>
+              <a:rPr lang="ru-RU" sz="700" dirty="0" err="1"/>
+              <a:t>регулярисов</a:t>
+            </a:r>
+            <a:r>
+              <a:rPr lang="ru-RU" sz="700" dirty="0"/>
+              <a:t> в армию</a:t>
+            </a:r>
+          </a:p>
+        </p:txBody>
+      </p:sp>
+      <p:cxnSp>
+        <p:nvCxnSpPr>
+          <p:cNvPr id="71" name="Соединительная линия уступом 620">
+            <a:extLst>
+              <a:ext uri="{FF2B5EF4-FFF2-40B4-BE49-F238E27FC236}">
+                <a16:creationId xmlns:a16="http://schemas.microsoft.com/office/drawing/2014/main" id="{FC503326-F9EF-430D-9DFB-5A12F33842F7}"/>
+              </a:ext>
+            </a:extLst>
+          </p:cNvPr>
+          <p:cNvCxnSpPr>
+            <a:cxnSpLocks/>
+            <a:stCxn id="61" idx="2"/>
+            <a:endCxn id="70" idx="0"/>
+          </p:cNvCxnSpPr>
+          <p:nvPr/>
+        </p:nvCxnSpPr>
+        <p:spPr>
+          <a:xfrm rot="5400000">
+            <a:off x="41095181" y="23487947"/>
+            <a:ext cx="337947" cy="629840"/>
+          </a:xfrm>
+          <a:prstGeom prst="bentConnector3">
+            <a:avLst>
+              <a:gd name="adj1" fmla="val 50000"/>
+            </a:avLst>
+          </a:prstGeom>
+          <a:ln w="19050">
+            <a:tailEnd type="arrow"/>
+          </a:ln>
+        </p:spPr>
+        <p:style>
+          <a:lnRef idx="1">
+            <a:schemeClr val="accent1"/>
+          </a:lnRef>
+          <a:fillRef idx="0">
+            <a:schemeClr val="accent1"/>
+          </a:fillRef>
+          <a:effectRef idx="0">
+            <a:schemeClr val="accent1"/>
+          </a:effectRef>
+          <a:fontRef idx="minor">
+            <a:schemeClr val="tx1"/>
+          </a:fontRef>
+        </p:style>
+      </p:cxnSp>
+      <p:cxnSp>
+        <p:nvCxnSpPr>
+          <p:cNvPr id="73" name="Соединительная линия уступом 620">
+            <a:extLst>
+              <a:ext uri="{FF2B5EF4-FFF2-40B4-BE49-F238E27FC236}">
+                <a16:creationId xmlns:a16="http://schemas.microsoft.com/office/drawing/2014/main" id="{A7450548-355A-4BD6-802F-F779613A5B27}"/>
+              </a:ext>
+            </a:extLst>
+          </p:cNvPr>
+          <p:cNvCxnSpPr>
+            <a:cxnSpLocks/>
+            <a:stCxn id="61" idx="2"/>
+            <a:endCxn id="65" idx="0"/>
+          </p:cNvCxnSpPr>
+          <p:nvPr/>
+        </p:nvCxnSpPr>
+        <p:spPr>
+          <a:xfrm rot="16200000" flipH="1">
+            <a:off x="41714606" y="23498361"/>
+            <a:ext cx="337947" cy="609011"/>
+          </a:xfrm>
+          <a:prstGeom prst="bentConnector3">
+            <a:avLst>
+              <a:gd name="adj1" fmla="val 50000"/>
+            </a:avLst>
+          </a:prstGeom>
+          <a:ln w="19050">
+            <a:tailEnd type="arrow"/>
+          </a:ln>
+        </p:spPr>
+        <p:style>
+          <a:lnRef idx="1">
+            <a:schemeClr val="accent1"/>
+          </a:lnRef>
+          <a:fillRef idx="0">
+            <a:schemeClr val="accent1"/>
+          </a:fillRef>
+          <a:effectRef idx="0">
+            <a:schemeClr val="accent1"/>
+          </a:effectRef>
+          <a:fontRef idx="minor">
+            <a:schemeClr val="tx1"/>
+          </a:fontRef>
+        </p:style>
+      </p:cxnSp>
+      <p:cxnSp>
+        <p:nvCxnSpPr>
+          <p:cNvPr id="82" name="Соединительная линия уступом 620">
+            <a:extLst>
+              <a:ext uri="{FF2B5EF4-FFF2-40B4-BE49-F238E27FC236}">
+                <a16:creationId xmlns:a16="http://schemas.microsoft.com/office/drawing/2014/main" id="{78C7FACD-A76A-4290-A8B6-AA4949ACE264}"/>
+              </a:ext>
+            </a:extLst>
+          </p:cNvPr>
+          <p:cNvCxnSpPr>
+            <a:cxnSpLocks/>
+            <a:stCxn id="70" idx="2"/>
+            <a:endCxn id="63" idx="0"/>
+          </p:cNvCxnSpPr>
+          <p:nvPr/>
+        </p:nvCxnSpPr>
+        <p:spPr>
+          <a:xfrm rot="16200000" flipH="1">
+            <a:off x="41132073" y="24329001"/>
+            <a:ext cx="264163" cy="629841"/>
+          </a:xfrm>
+          <a:prstGeom prst="bentConnector3">
+            <a:avLst>
+              <a:gd name="adj1" fmla="val 50000"/>
+            </a:avLst>
+          </a:prstGeom>
+          <a:ln w="19050">
+            <a:prstDash val="dash"/>
+            <a:tailEnd type="arrow"/>
+          </a:ln>
+        </p:spPr>
+        <p:style>
+          <a:lnRef idx="1">
+            <a:schemeClr val="accent1"/>
+          </a:lnRef>
+          <a:fillRef idx="0">
+            <a:schemeClr val="accent1"/>
+          </a:fillRef>
+          <a:effectRef idx="0">
+            <a:schemeClr val="accent1"/>
+          </a:effectRef>
+          <a:fontRef idx="minor">
+            <a:schemeClr val="tx1"/>
+          </a:fontRef>
+        </p:style>
+      </p:cxnSp>
+      <p:cxnSp>
+        <p:nvCxnSpPr>
+          <p:cNvPr id="85" name="Соединительная линия уступом 620">
+            <a:extLst>
+              <a:ext uri="{FF2B5EF4-FFF2-40B4-BE49-F238E27FC236}">
+                <a16:creationId xmlns:a16="http://schemas.microsoft.com/office/drawing/2014/main" id="{628A329A-99EE-44F7-B1A4-82DAB3BC0CE4}"/>
+              </a:ext>
+            </a:extLst>
+          </p:cNvPr>
+          <p:cNvCxnSpPr>
+            <a:cxnSpLocks/>
+            <a:stCxn id="65" idx="2"/>
+            <a:endCxn id="63" idx="0"/>
+          </p:cNvCxnSpPr>
+          <p:nvPr/>
+        </p:nvCxnSpPr>
+        <p:spPr>
+          <a:xfrm rot="5400000">
+            <a:off x="41751499" y="24339417"/>
+            <a:ext cx="264163" cy="609010"/>
+          </a:xfrm>
+          <a:prstGeom prst="bentConnector3">
+            <a:avLst>
+              <a:gd name="adj1" fmla="val 50000"/>
+            </a:avLst>
+          </a:prstGeom>
+          <a:ln w="19050">
+            <a:prstDash val="dash"/>
+            <a:tailEnd type="arrow"/>
+          </a:ln>
+        </p:spPr>
+        <p:style>
+          <a:lnRef idx="1">
+            <a:schemeClr val="accent1"/>
+          </a:lnRef>
+          <a:fillRef idx="0">
+            <a:schemeClr val="accent1"/>
+          </a:fillRef>
+          <a:effectRef idx="0">
+            <a:schemeClr val="accent1"/>
+          </a:effectRef>
+          <a:fontRef idx="minor">
+            <a:schemeClr val="tx1"/>
+          </a:fontRef>
+        </p:style>
+      </p:cxnSp>
+      <p:cxnSp>
+        <p:nvCxnSpPr>
+          <p:cNvPr id="88" name="Соединительная линия уступом 620">
+            <a:extLst>
+              <a:ext uri="{FF2B5EF4-FFF2-40B4-BE49-F238E27FC236}">
+                <a16:creationId xmlns:a16="http://schemas.microsoft.com/office/drawing/2014/main" id="{A1BFEAB3-7700-47A8-97C5-F33E5DF32541}"/>
+              </a:ext>
+            </a:extLst>
+          </p:cNvPr>
+          <p:cNvCxnSpPr>
+            <a:cxnSpLocks/>
+            <a:stCxn id="65" idx="2"/>
+            <a:endCxn id="62" idx="0"/>
+          </p:cNvCxnSpPr>
+          <p:nvPr/>
+        </p:nvCxnSpPr>
+        <p:spPr>
+          <a:xfrm rot="16200000" flipH="1">
+            <a:off x="42369447" y="24330479"/>
+            <a:ext cx="264163" cy="626886"/>
+          </a:xfrm>
+          <a:prstGeom prst="bentConnector3">
+            <a:avLst>
+              <a:gd name="adj1" fmla="val 50000"/>
+            </a:avLst>
+          </a:prstGeom>
+          <a:ln w="19050">
+            <a:tailEnd type="arrow"/>
+          </a:ln>
+        </p:spPr>
+        <p:style>
+          <a:lnRef idx="1">
+            <a:schemeClr val="accent1"/>
+          </a:lnRef>
+          <a:fillRef idx="0">
+            <a:schemeClr val="accent1"/>
+          </a:fillRef>
+          <a:effectRef idx="0">
+            <a:schemeClr val="accent1"/>
+          </a:effectRef>
+          <a:fontRef idx="minor">
+            <a:schemeClr val="tx1"/>
+          </a:fontRef>
+        </p:style>
+      </p:cxnSp>
+      <p:cxnSp>
+        <p:nvCxnSpPr>
+          <p:cNvPr id="92" name="Соединительная линия уступом 620">
+            <a:extLst>
+              <a:ext uri="{FF2B5EF4-FFF2-40B4-BE49-F238E27FC236}">
+                <a16:creationId xmlns:a16="http://schemas.microsoft.com/office/drawing/2014/main" id="{96F05825-E7D9-467F-B987-1D4CE8BB13E2}"/>
+              </a:ext>
+            </a:extLst>
+          </p:cNvPr>
+          <p:cNvCxnSpPr>
+            <a:cxnSpLocks/>
+            <a:stCxn id="70" idx="2"/>
+            <a:endCxn id="69" idx="0"/>
+          </p:cNvCxnSpPr>
+          <p:nvPr/>
+        </p:nvCxnSpPr>
+        <p:spPr>
+          <a:xfrm rot="5400000">
+            <a:off x="40512648" y="24339417"/>
+            <a:ext cx="264163" cy="609010"/>
+          </a:xfrm>
+          <a:prstGeom prst="bentConnector3">
+            <a:avLst>
+              <a:gd name="adj1" fmla="val 50000"/>
+            </a:avLst>
+          </a:prstGeom>
+          <a:ln w="19050">
+            <a:prstDash val="dash"/>
+            <a:tailEnd type="arrow"/>
+          </a:ln>
+        </p:spPr>
+        <p:style>
+          <a:lnRef idx="1">
+            <a:schemeClr val="accent1"/>
+          </a:lnRef>
+          <a:fillRef idx="0">
+            <a:schemeClr val="accent1"/>
+          </a:fillRef>
+          <a:effectRef idx="0">
+            <a:schemeClr val="accent1"/>
+          </a:effectRef>
+          <a:fontRef idx="minor">
+            <a:schemeClr val="tx1"/>
+          </a:fontRef>
+        </p:style>
+      </p:cxnSp>
+      <p:cxnSp>
+        <p:nvCxnSpPr>
+          <p:cNvPr id="94" name="Соединительная линия уступом 620">
+            <a:extLst>
+              <a:ext uri="{FF2B5EF4-FFF2-40B4-BE49-F238E27FC236}">
+                <a16:creationId xmlns:a16="http://schemas.microsoft.com/office/drawing/2014/main" id="{167B7C7B-C300-4E14-8725-ADB1B931CB98}"/>
+              </a:ext>
+            </a:extLst>
+          </p:cNvPr>
+          <p:cNvCxnSpPr>
+            <a:cxnSpLocks/>
+            <a:stCxn id="65" idx="2"/>
+            <a:endCxn id="69" idx="0"/>
+          </p:cNvCxnSpPr>
+          <p:nvPr/>
+        </p:nvCxnSpPr>
+        <p:spPr>
+          <a:xfrm rot="5400000">
+            <a:off x="41132074" y="23719992"/>
+            <a:ext cx="264163" cy="1847861"/>
+          </a:xfrm>
+          <a:prstGeom prst="bentConnector3">
+            <a:avLst>
+              <a:gd name="adj1" fmla="val 50000"/>
+            </a:avLst>
+          </a:prstGeom>
+          <a:ln w="19050">
+            <a:prstDash val="dash"/>
+            <a:tailEnd type="arrow"/>
+          </a:ln>
+        </p:spPr>
+        <p:style>
+          <a:lnRef idx="1">
+            <a:schemeClr val="accent1"/>
+          </a:lnRef>
+          <a:fillRef idx="0">
+            <a:schemeClr val="accent1"/>
+          </a:fillRef>
+          <a:effectRef idx="0">
+            <a:schemeClr val="accent1"/>
+          </a:effectRef>
+          <a:fontRef idx="minor">
+            <a:schemeClr val="tx1"/>
+          </a:fontRef>
+        </p:style>
+      </p:cxnSp>
+      <p:cxnSp>
+        <p:nvCxnSpPr>
+          <p:cNvPr id="97" name="Прямая соединительная линия 96">
+            <a:extLst>
+              <a:ext uri="{FF2B5EF4-FFF2-40B4-BE49-F238E27FC236}">
+                <a16:creationId xmlns:a16="http://schemas.microsoft.com/office/drawing/2014/main" id="{3B9A9F20-E65F-4A9E-BCC9-9DAC8EB1342A}"/>
+              </a:ext>
+            </a:extLst>
+          </p:cNvPr>
+          <p:cNvCxnSpPr>
+            <a:cxnSpLocks/>
+            <a:stCxn id="63" idx="1"/>
+            <a:endCxn id="69" idx="3"/>
+          </p:cNvCxnSpPr>
+          <p:nvPr/>
+        </p:nvCxnSpPr>
+        <p:spPr>
+          <a:xfrm flipH="1">
+            <a:off x="40803386" y="25046004"/>
+            <a:ext cx="312526" cy="0"/>
+          </a:xfrm>
+          <a:prstGeom prst="line">
+            <a:avLst/>
+          </a:prstGeom>
+          <a:ln w="38100">
+            <a:solidFill>
+              <a:srgbClr val="C00000"/>
+            </a:solidFill>
+          </a:ln>
+        </p:spPr>
+        <p:style>
+          <a:lnRef idx="1">
+            <a:schemeClr val="accent1"/>
+          </a:lnRef>
+          <a:fillRef idx="0">
+            <a:schemeClr val="accent1"/>
+          </a:fillRef>
+          <a:effectRef idx="0">
+            <a:schemeClr val="accent1"/>
+          </a:effectRef>
+          <a:fontRef idx="minor">
+            <a:schemeClr val="tx1"/>
+          </a:fontRef>
+        </p:style>
+      </p:cxnSp>
+      <p:sp>
+        <p:nvSpPr>
+          <p:cNvPr id="101" name="Прямоугольник 100">
+            <a:extLst>
+              <a:ext uri="{FF2B5EF4-FFF2-40B4-BE49-F238E27FC236}">
+                <a16:creationId xmlns:a16="http://schemas.microsoft.com/office/drawing/2014/main" id="{1F14AB13-F1EA-4B81-8451-4DDA8E257BA4}"/>
+              </a:ext>
+            </a:extLst>
+          </p:cNvPr>
+          <p:cNvSpPr/>
+          <p:nvPr/>
+        </p:nvSpPr>
+        <p:spPr>
+          <a:xfrm>
+            <a:off x="41115911" y="25593934"/>
+            <a:ext cx="926325" cy="540000"/>
+          </a:xfrm>
+          <a:prstGeom prst="rect">
+            <a:avLst/>
+          </a:prstGeom>
+          <a:solidFill>
+            <a:schemeClr val="bg1"/>
+          </a:solidFill>
+          <a:ln w="19050"/>
+        </p:spPr>
+        <p:style>
+          <a:lnRef idx="2">
+            <a:schemeClr val="accent1"/>
+          </a:lnRef>
+          <a:fillRef idx="1">
+            <a:schemeClr val="lt1"/>
+          </a:fillRef>
+          <a:effectRef idx="0">
+            <a:schemeClr val="accent1"/>
+          </a:effectRef>
+          <a:fontRef idx="minor">
+            <a:schemeClr val="dk1"/>
+          </a:fontRef>
+        </p:style>
+        <p:txBody>
+          <a:bodyPr lIns="124733" tIns="62367" rIns="124733" bIns="62367" rtlCol="0" anchor="ctr"/>
+          <a:lstStyle/>
+          <a:p>
+            <a:pPr algn="ctr"/>
+            <a:r>
+              <a:rPr lang="ru-RU" sz="700" dirty="0"/>
+              <a:t>Лишить влияния партию Национальных Реформ</a:t>
+            </a:r>
+          </a:p>
+        </p:txBody>
+      </p:sp>
+      <p:sp>
+        <p:nvSpPr>
+          <p:cNvPr id="102" name="Прямоугольник 101">
+            <a:extLst>
+              <a:ext uri="{FF2B5EF4-FFF2-40B4-BE49-F238E27FC236}">
+                <a16:creationId xmlns:a16="http://schemas.microsoft.com/office/drawing/2014/main" id="{ECE50FB2-31E6-46C4-9D3A-104FC81239E8}"/>
+              </a:ext>
+            </a:extLst>
+          </p:cNvPr>
+          <p:cNvSpPr/>
+          <p:nvPr/>
+        </p:nvSpPr>
+        <p:spPr>
+          <a:xfrm>
+            <a:off x="42349367" y="25593934"/>
+            <a:ext cx="926325" cy="540000"/>
+          </a:xfrm>
+          <a:prstGeom prst="rect">
+            <a:avLst/>
+          </a:prstGeom>
+          <a:solidFill>
+            <a:schemeClr val="bg1"/>
+          </a:solidFill>
+          <a:ln w="19050"/>
+        </p:spPr>
+        <p:style>
+          <a:lnRef idx="2">
+            <a:schemeClr val="accent1"/>
+          </a:lnRef>
+          <a:fillRef idx="1">
+            <a:schemeClr val="lt1"/>
+          </a:fillRef>
+          <a:effectRef idx="0">
+            <a:schemeClr val="accent1"/>
+          </a:effectRef>
+          <a:fontRef idx="minor">
+            <a:schemeClr val="dk1"/>
+          </a:fontRef>
+        </p:style>
+        <p:txBody>
+          <a:bodyPr lIns="124733" tIns="62367" rIns="124733" bIns="62367" rtlCol="0" anchor="ctr"/>
+          <a:lstStyle/>
+          <a:p>
+            <a:pPr algn="ctr"/>
+            <a:r>
+              <a:rPr lang="ru-RU" sz="700" dirty="0"/>
+              <a:t>Развить промышленность севера</a:t>
+            </a:r>
+          </a:p>
+        </p:txBody>
+      </p:sp>
+      <p:cxnSp>
+        <p:nvCxnSpPr>
+          <p:cNvPr id="103" name="Соединительная линия уступом 620">
+            <a:extLst>
+              <a:ext uri="{FF2B5EF4-FFF2-40B4-BE49-F238E27FC236}">
+                <a16:creationId xmlns:a16="http://schemas.microsoft.com/office/drawing/2014/main" id="{0F770443-4F5C-4EEA-BC82-45096A8FC7CF}"/>
+              </a:ext>
+            </a:extLst>
+          </p:cNvPr>
+          <p:cNvCxnSpPr>
+            <a:cxnSpLocks/>
+            <a:stCxn id="63" idx="2"/>
+            <a:endCxn id="101" idx="0"/>
+          </p:cNvCxnSpPr>
+          <p:nvPr/>
+        </p:nvCxnSpPr>
+        <p:spPr>
+          <a:xfrm rot="5400000">
+            <a:off x="41440110" y="25454969"/>
+            <a:ext cx="277930" cy="1"/>
+          </a:xfrm>
+          <a:prstGeom prst="bentConnector3">
+            <a:avLst>
+              <a:gd name="adj1" fmla="val 50000"/>
+            </a:avLst>
+          </a:prstGeom>
+          <a:ln w="19050">
+            <a:tailEnd type="arrow"/>
+          </a:ln>
+        </p:spPr>
+        <p:style>
+          <a:lnRef idx="1">
+            <a:schemeClr val="accent1"/>
+          </a:lnRef>
+          <a:fillRef idx="0">
+            <a:schemeClr val="accent1"/>
+          </a:fillRef>
+          <a:effectRef idx="0">
+            <a:schemeClr val="accent1"/>
+          </a:effectRef>
+          <a:fontRef idx="minor">
+            <a:schemeClr val="tx1"/>
+          </a:fontRef>
+        </p:style>
+      </p:cxnSp>
+      <p:cxnSp>
+        <p:nvCxnSpPr>
+          <p:cNvPr id="105" name="Соединительная линия уступом 620">
+            <a:extLst>
+              <a:ext uri="{FF2B5EF4-FFF2-40B4-BE49-F238E27FC236}">
+                <a16:creationId xmlns:a16="http://schemas.microsoft.com/office/drawing/2014/main" id="{4F310D0C-26BE-453B-8C9B-905C2BDEA260}"/>
+              </a:ext>
+            </a:extLst>
+          </p:cNvPr>
+          <p:cNvCxnSpPr>
+            <a:cxnSpLocks/>
+            <a:stCxn id="62" idx="2"/>
+            <a:endCxn id="102" idx="0"/>
+          </p:cNvCxnSpPr>
+          <p:nvPr/>
+        </p:nvCxnSpPr>
+        <p:spPr>
+          <a:xfrm rot="5400000">
+            <a:off x="42674786" y="25453749"/>
+            <a:ext cx="277930" cy="2441"/>
+          </a:xfrm>
+          <a:prstGeom prst="bentConnector3">
+            <a:avLst>
+              <a:gd name="adj1" fmla="val 50000"/>
+            </a:avLst>
+          </a:prstGeom>
+          <a:ln w="19050">
+            <a:tailEnd type="arrow"/>
+          </a:ln>
+        </p:spPr>
+        <p:style>
+          <a:lnRef idx="1">
+            <a:schemeClr val="accent1"/>
+          </a:lnRef>
+          <a:fillRef idx="0">
+            <a:schemeClr val="accent1"/>
+          </a:fillRef>
+          <a:effectRef idx="0">
+            <a:schemeClr val="accent1"/>
+          </a:effectRef>
+          <a:fontRef idx="minor">
+            <a:schemeClr val="tx1"/>
+          </a:fontRef>
+        </p:style>
+      </p:cxnSp>
+      <p:sp>
+        <p:nvSpPr>
+          <p:cNvPr id="113" name="Прямоугольник 112">
+            <a:extLst>
+              <a:ext uri="{FF2B5EF4-FFF2-40B4-BE49-F238E27FC236}">
+                <a16:creationId xmlns:a16="http://schemas.microsoft.com/office/drawing/2014/main" id="{BC31CCD4-CC55-4D34-8E0A-40DB584DBBBF}"/>
+              </a:ext>
+            </a:extLst>
+          </p:cNvPr>
+          <p:cNvSpPr/>
+          <p:nvPr/>
+        </p:nvSpPr>
+        <p:spPr>
+          <a:xfrm>
+            <a:off x="42974576" y="26411863"/>
+            <a:ext cx="926325" cy="540000"/>
+          </a:xfrm>
+          <a:prstGeom prst="rect">
+            <a:avLst/>
+          </a:prstGeom>
+          <a:solidFill>
+            <a:schemeClr val="bg1"/>
+          </a:solidFill>
+          <a:ln w="19050"/>
+        </p:spPr>
+        <p:style>
+          <a:lnRef idx="2">
+            <a:schemeClr val="accent1"/>
+          </a:lnRef>
+          <a:fillRef idx="1">
+            <a:schemeClr val="lt1"/>
+          </a:fillRef>
+          <a:effectRef idx="0">
+            <a:schemeClr val="accent1"/>
+          </a:effectRef>
+          <a:fontRef idx="minor">
+            <a:schemeClr val="dk1"/>
+          </a:fontRef>
+        </p:style>
+        <p:txBody>
+          <a:bodyPr lIns="124733" tIns="62367" rIns="124733" bIns="62367" rtlCol="0" anchor="ctr"/>
+          <a:lstStyle/>
+          <a:p>
+            <a:pPr algn="ctr"/>
+            <a:r>
+              <a:rPr lang="ru-RU" sz="700" dirty="0"/>
+              <a:t>Вернуться к активной торговле мандаринами</a:t>
+            </a:r>
+          </a:p>
+        </p:txBody>
+      </p:sp>
+      <p:cxnSp>
+        <p:nvCxnSpPr>
+          <p:cNvPr id="132" name="Соединительная линия уступом 620">
+            <a:extLst>
+              <a:ext uri="{FF2B5EF4-FFF2-40B4-BE49-F238E27FC236}">
+                <a16:creationId xmlns:a16="http://schemas.microsoft.com/office/drawing/2014/main" id="{AEF2F215-C881-4F8A-8CAA-796991A31A9B}"/>
+              </a:ext>
+            </a:extLst>
+          </p:cNvPr>
+          <p:cNvCxnSpPr>
+            <a:cxnSpLocks/>
+            <a:stCxn id="62" idx="2"/>
+            <a:endCxn id="113" idx="0"/>
+          </p:cNvCxnSpPr>
+          <p:nvPr/>
+        </p:nvCxnSpPr>
+        <p:spPr>
+          <a:xfrm rot="16200000" flipH="1">
+            <a:off x="42578426" y="25552549"/>
+            <a:ext cx="1095859" cy="622768"/>
+          </a:xfrm>
+          <a:prstGeom prst="bentConnector3">
+            <a:avLst>
+              <a:gd name="adj1" fmla="val 11988"/>
+            </a:avLst>
+          </a:prstGeom>
+          <a:ln w="19050">
+            <a:tailEnd type="arrow"/>
+          </a:ln>
+        </p:spPr>
+        <p:style>
+          <a:lnRef idx="1">
+            <a:schemeClr val="accent1"/>
+          </a:lnRef>
+          <a:fillRef idx="0">
+            <a:schemeClr val="accent1"/>
+          </a:fillRef>
+          <a:effectRef idx="0">
+            <a:schemeClr val="accent1"/>
+          </a:effectRef>
+          <a:fontRef idx="minor">
+            <a:schemeClr val="tx1"/>
+          </a:fontRef>
+        </p:style>
+      </p:cxnSp>
+      <p:sp>
+        <p:nvSpPr>
+          <p:cNvPr id="133" name="Прямоугольник 132">
+            <a:extLst>
+              <a:ext uri="{FF2B5EF4-FFF2-40B4-BE49-F238E27FC236}">
+                <a16:creationId xmlns:a16="http://schemas.microsoft.com/office/drawing/2014/main" id="{F8E638F8-87A1-42A3-B0B5-E2866ADB6525}"/>
+              </a:ext>
+            </a:extLst>
+          </p:cNvPr>
+          <p:cNvSpPr/>
+          <p:nvPr/>
+        </p:nvSpPr>
+        <p:spPr>
+          <a:xfrm>
+            <a:off x="46667851" y="19163104"/>
+            <a:ext cx="926325" cy="540000"/>
+          </a:xfrm>
+          <a:prstGeom prst="rect">
+            <a:avLst/>
+          </a:prstGeom>
+          <a:solidFill>
+            <a:schemeClr val="bg1"/>
+          </a:solidFill>
+          <a:ln w="19050"/>
+        </p:spPr>
+        <p:style>
+          <a:lnRef idx="2">
+            <a:schemeClr val="accent1"/>
+          </a:lnRef>
+          <a:fillRef idx="1">
+            <a:schemeClr val="lt1"/>
+          </a:fillRef>
+          <a:effectRef idx="0">
+            <a:schemeClr val="accent1"/>
+          </a:effectRef>
+          <a:fontRef idx="minor">
+            <a:schemeClr val="dk1"/>
+          </a:fontRef>
+        </p:style>
+        <p:txBody>
+          <a:bodyPr lIns="124733" tIns="62367" rIns="124733" bIns="62367" rtlCol="0" anchor="ctr"/>
+          <a:lstStyle/>
+          <a:p>
+            <a:pPr algn="ctr"/>
+            <a:r>
+              <a:rPr lang="ru-RU" sz="700" dirty="0"/>
+              <a:t>Создать государственный банк Марокко</a:t>
+            </a:r>
+          </a:p>
+        </p:txBody>
+      </p:sp>
+      <p:sp>
+        <p:nvSpPr>
+          <p:cNvPr id="134" name="Прямоугольник 133">
+            <a:extLst>
+              <a:ext uri="{FF2B5EF4-FFF2-40B4-BE49-F238E27FC236}">
+                <a16:creationId xmlns:a16="http://schemas.microsoft.com/office/drawing/2014/main" id="{35CD4D2E-02FD-40F3-9B79-AC32C4F387A4}"/>
+              </a:ext>
+            </a:extLst>
+          </p:cNvPr>
+          <p:cNvSpPr/>
+          <p:nvPr/>
+        </p:nvSpPr>
+        <p:spPr>
+          <a:xfrm>
+            <a:off x="46667850" y="20763913"/>
+            <a:ext cx="926325" cy="540000"/>
+          </a:xfrm>
+          <a:prstGeom prst="rect">
+            <a:avLst/>
+          </a:prstGeom>
+          <a:solidFill>
+            <a:schemeClr val="bg1"/>
+          </a:solidFill>
+          <a:ln w="19050"/>
+        </p:spPr>
+        <p:style>
+          <a:lnRef idx="2">
+            <a:schemeClr val="accent1"/>
+          </a:lnRef>
+          <a:fillRef idx="1">
+            <a:schemeClr val="lt1"/>
+          </a:fillRef>
+          <a:effectRef idx="0">
+            <a:schemeClr val="accent1"/>
+          </a:effectRef>
+          <a:fontRef idx="minor">
+            <a:schemeClr val="dk1"/>
+          </a:fontRef>
+        </p:style>
+        <p:txBody>
+          <a:bodyPr lIns="124733" tIns="62367" rIns="124733" bIns="62367" rtlCol="0" anchor="ctr"/>
+          <a:lstStyle/>
+          <a:p>
+            <a:pPr algn="ctr"/>
+            <a:r>
+              <a:rPr lang="ru-RU" sz="700" dirty="0"/>
+              <a:t>Интегрировать Французские школы в новую систему образования </a:t>
+            </a:r>
+            <a:r>
+              <a:rPr lang="ru-RU" sz="100" dirty="0"/>
+              <a:t>(Доступ к аттестату о среднем образовании был предоставлен марокканскому мусульманскому населению в 1930 году, но доступ к элитным французским школам ( лицеям ) был предоставлен мусульманскому населению только после окончания войны. [ 11 ] Около девяноста процентов мусульманского населения Марокко были неграмотны во время Второй мировой войны. [)</a:t>
+            </a:r>
+            <a:endParaRPr lang="ru-RU" sz="700" dirty="0"/>
+          </a:p>
+        </p:txBody>
+      </p:sp>
+      <p:sp>
+        <p:nvSpPr>
+          <p:cNvPr id="136" name="Прямоугольник 135">
+            <a:extLst>
+              <a:ext uri="{FF2B5EF4-FFF2-40B4-BE49-F238E27FC236}">
+                <a16:creationId xmlns:a16="http://schemas.microsoft.com/office/drawing/2014/main" id="{3FDAFDBE-96D8-45C2-BC5D-878BC9F8B7F2}"/>
+              </a:ext>
+            </a:extLst>
+          </p:cNvPr>
+          <p:cNvSpPr/>
+          <p:nvPr/>
+        </p:nvSpPr>
+        <p:spPr>
+          <a:xfrm>
+            <a:off x="46050630" y="19963204"/>
+            <a:ext cx="926325" cy="540000"/>
+          </a:xfrm>
+          <a:prstGeom prst="rect">
+            <a:avLst/>
+          </a:prstGeom>
+          <a:solidFill>
+            <a:schemeClr val="bg1"/>
+          </a:solidFill>
+          <a:ln w="19050"/>
+        </p:spPr>
+        <p:style>
+          <a:lnRef idx="2">
+            <a:schemeClr val="accent1"/>
+          </a:lnRef>
+          <a:fillRef idx="1">
+            <a:schemeClr val="lt1"/>
+          </a:fillRef>
+          <a:effectRef idx="0">
+            <a:schemeClr val="accent1"/>
+          </a:effectRef>
+          <a:fontRef idx="minor">
+            <a:schemeClr val="dk1"/>
+          </a:fontRef>
+        </p:style>
+        <p:txBody>
+          <a:bodyPr lIns="124733" tIns="62367" rIns="124733" bIns="62367" rtlCol="0" anchor="ctr"/>
+          <a:lstStyle/>
+          <a:p>
+            <a:pPr algn="ctr"/>
+            <a:r>
+              <a:rPr lang="ru-RU" sz="700" dirty="0"/>
+              <a:t>Внедрить светское образование</a:t>
+            </a:r>
+          </a:p>
+        </p:txBody>
+      </p:sp>
+      <p:sp>
+        <p:nvSpPr>
+          <p:cNvPr id="137" name="Прямоугольник 136">
+            <a:extLst>
+              <a:ext uri="{FF2B5EF4-FFF2-40B4-BE49-F238E27FC236}">
+                <a16:creationId xmlns:a16="http://schemas.microsoft.com/office/drawing/2014/main" id="{F3E0C390-3D96-483F-B3EC-2211AC86D036}"/>
+              </a:ext>
+            </a:extLst>
+          </p:cNvPr>
+          <p:cNvSpPr/>
+          <p:nvPr/>
+        </p:nvSpPr>
+        <p:spPr>
+          <a:xfrm>
+            <a:off x="47292690" y="19963204"/>
+            <a:ext cx="926325" cy="540000"/>
+          </a:xfrm>
+          <a:prstGeom prst="rect">
+            <a:avLst/>
+          </a:prstGeom>
+          <a:solidFill>
+            <a:schemeClr val="bg1"/>
+          </a:solidFill>
+          <a:ln w="19050"/>
+        </p:spPr>
+        <p:style>
+          <a:lnRef idx="2">
+            <a:schemeClr val="accent1"/>
+          </a:lnRef>
+          <a:fillRef idx="1">
+            <a:schemeClr val="lt1"/>
+          </a:fillRef>
+          <a:effectRef idx="0">
+            <a:schemeClr val="accent1"/>
+          </a:effectRef>
+          <a:fontRef idx="minor">
+            <a:schemeClr val="dk1"/>
+          </a:fontRef>
+        </p:style>
+        <p:txBody>
+          <a:bodyPr lIns="124733" tIns="62367" rIns="124733" bIns="62367" rtlCol="0" anchor="ctr"/>
+          <a:lstStyle/>
+          <a:p>
+            <a:pPr algn="ctr"/>
+            <a:r>
+              <a:rPr lang="ru-RU" sz="700" dirty="0"/>
+              <a:t>Расширить религиозные школы</a:t>
+            </a:r>
+          </a:p>
+        </p:txBody>
+      </p:sp>
+      <p:cxnSp>
+        <p:nvCxnSpPr>
+          <p:cNvPr id="140" name="Прямая соединительная линия 139">
+            <a:extLst>
+              <a:ext uri="{FF2B5EF4-FFF2-40B4-BE49-F238E27FC236}">
+                <a16:creationId xmlns:a16="http://schemas.microsoft.com/office/drawing/2014/main" id="{08D9148F-FD7B-49BC-A4DA-251ACA054636}"/>
+              </a:ext>
+            </a:extLst>
+          </p:cNvPr>
+          <p:cNvCxnSpPr>
+            <a:cxnSpLocks/>
+            <a:stCxn id="137" idx="1"/>
+            <a:endCxn id="136" idx="3"/>
+          </p:cNvCxnSpPr>
+          <p:nvPr/>
+        </p:nvCxnSpPr>
+        <p:spPr>
+          <a:xfrm flipH="1">
+            <a:off x="46976955" y="20233204"/>
+            <a:ext cx="315735" cy="0"/>
+          </a:xfrm>
+          <a:prstGeom prst="line">
+            <a:avLst/>
+          </a:prstGeom>
+          <a:ln w="38100">
+            <a:solidFill>
+              <a:srgbClr val="C00000"/>
+            </a:solidFill>
+          </a:ln>
+        </p:spPr>
+        <p:style>
+          <a:lnRef idx="1">
+            <a:schemeClr val="accent1"/>
+          </a:lnRef>
+          <a:fillRef idx="0">
+            <a:schemeClr val="accent1"/>
+          </a:fillRef>
+          <a:effectRef idx="0">
+            <a:schemeClr val="accent1"/>
+          </a:effectRef>
+          <a:fontRef idx="minor">
+            <a:schemeClr val="tx1"/>
+          </a:fontRef>
+        </p:style>
+      </p:cxnSp>
+      <p:cxnSp>
+        <p:nvCxnSpPr>
+          <p:cNvPr id="141" name="Соединительная линия уступом 620">
+            <a:extLst>
+              <a:ext uri="{FF2B5EF4-FFF2-40B4-BE49-F238E27FC236}">
+                <a16:creationId xmlns:a16="http://schemas.microsoft.com/office/drawing/2014/main" id="{851DA87B-FC5F-4219-B97B-2D0AC6314594}"/>
+              </a:ext>
+            </a:extLst>
+          </p:cNvPr>
+          <p:cNvCxnSpPr>
+            <a:cxnSpLocks/>
+            <a:stCxn id="133" idx="2"/>
+            <a:endCxn id="136" idx="0"/>
+          </p:cNvCxnSpPr>
+          <p:nvPr/>
+        </p:nvCxnSpPr>
+        <p:spPr>
+          <a:xfrm rot="5400000">
+            <a:off x="46692354" y="19524544"/>
+            <a:ext cx="260100" cy="617221"/>
+          </a:xfrm>
+          <a:prstGeom prst="bentConnector3">
+            <a:avLst>
+              <a:gd name="adj1" fmla="val 50000"/>
+            </a:avLst>
+          </a:prstGeom>
+          <a:ln w="19050">
+            <a:tailEnd type="arrow"/>
+          </a:ln>
+        </p:spPr>
+        <p:style>
+          <a:lnRef idx="1">
+            <a:schemeClr val="accent1"/>
+          </a:lnRef>
+          <a:fillRef idx="0">
+            <a:schemeClr val="accent1"/>
+          </a:fillRef>
+          <a:effectRef idx="0">
+            <a:schemeClr val="accent1"/>
+          </a:effectRef>
+          <a:fontRef idx="minor">
+            <a:schemeClr val="tx1"/>
+          </a:fontRef>
+        </p:style>
+      </p:cxnSp>
+      <p:cxnSp>
+        <p:nvCxnSpPr>
+          <p:cNvPr id="143" name="Соединительная линия уступом 620">
+            <a:extLst>
+              <a:ext uri="{FF2B5EF4-FFF2-40B4-BE49-F238E27FC236}">
+                <a16:creationId xmlns:a16="http://schemas.microsoft.com/office/drawing/2014/main" id="{0F472F40-02E6-490C-AF0B-15FF503A319E}"/>
+              </a:ext>
+            </a:extLst>
+          </p:cNvPr>
+          <p:cNvCxnSpPr>
+            <a:cxnSpLocks/>
+            <a:stCxn id="133" idx="2"/>
+            <a:endCxn id="137" idx="0"/>
+          </p:cNvCxnSpPr>
+          <p:nvPr/>
+        </p:nvCxnSpPr>
+        <p:spPr>
+          <a:xfrm rot="16200000" flipH="1">
+            <a:off x="47313383" y="19520734"/>
+            <a:ext cx="260100" cy="624839"/>
+          </a:xfrm>
+          <a:prstGeom prst="bentConnector3">
+            <a:avLst>
+              <a:gd name="adj1" fmla="val 50000"/>
+            </a:avLst>
+          </a:prstGeom>
+          <a:ln w="19050">
+            <a:tailEnd type="arrow"/>
+          </a:ln>
+        </p:spPr>
+        <p:style>
+          <a:lnRef idx="1">
+            <a:schemeClr val="accent1"/>
+          </a:lnRef>
+          <a:fillRef idx="0">
+            <a:schemeClr val="accent1"/>
+          </a:fillRef>
+          <a:effectRef idx="0">
+            <a:schemeClr val="accent1"/>
+          </a:effectRef>
+          <a:fontRef idx="minor">
+            <a:schemeClr val="tx1"/>
+          </a:fontRef>
+        </p:style>
+      </p:cxnSp>
+      <p:cxnSp>
+        <p:nvCxnSpPr>
+          <p:cNvPr id="144" name="Соединительная линия уступом 620">
+            <a:extLst>
+              <a:ext uri="{FF2B5EF4-FFF2-40B4-BE49-F238E27FC236}">
+                <a16:creationId xmlns:a16="http://schemas.microsoft.com/office/drawing/2014/main" id="{01DB8A97-03F6-49A6-8100-7A59ACF12FEA}"/>
+              </a:ext>
+            </a:extLst>
+          </p:cNvPr>
+          <p:cNvCxnSpPr>
+            <a:cxnSpLocks/>
+            <a:stCxn id="136" idx="2"/>
+            <a:endCxn id="134" idx="0"/>
+          </p:cNvCxnSpPr>
+          <p:nvPr/>
+        </p:nvCxnSpPr>
+        <p:spPr>
+          <a:xfrm rot="16200000" flipH="1">
+            <a:off x="46692049" y="20324948"/>
+            <a:ext cx="260709" cy="617220"/>
+          </a:xfrm>
+          <a:prstGeom prst="bentConnector3">
+            <a:avLst>
+              <a:gd name="adj1" fmla="val 50000"/>
+            </a:avLst>
+          </a:prstGeom>
+          <a:ln w="19050">
+            <a:prstDash val="dash"/>
+            <a:tailEnd type="arrow"/>
+          </a:ln>
+        </p:spPr>
+        <p:style>
+          <a:lnRef idx="1">
+            <a:schemeClr val="accent1"/>
+          </a:lnRef>
+          <a:fillRef idx="0">
+            <a:schemeClr val="accent1"/>
+          </a:fillRef>
+          <a:effectRef idx="0">
+            <a:schemeClr val="accent1"/>
+          </a:effectRef>
+          <a:fontRef idx="minor">
+            <a:schemeClr val="tx1"/>
+          </a:fontRef>
+        </p:style>
+      </p:cxnSp>
+      <p:cxnSp>
+        <p:nvCxnSpPr>
+          <p:cNvPr id="146" name="Соединительная линия уступом 620">
+            <a:extLst>
+              <a:ext uri="{FF2B5EF4-FFF2-40B4-BE49-F238E27FC236}">
+                <a16:creationId xmlns:a16="http://schemas.microsoft.com/office/drawing/2014/main" id="{419368A3-9936-4226-A921-A5B7276F6845}"/>
+              </a:ext>
+            </a:extLst>
+          </p:cNvPr>
+          <p:cNvCxnSpPr>
+            <a:cxnSpLocks/>
+            <a:stCxn id="137" idx="2"/>
+            <a:endCxn id="134" idx="0"/>
+          </p:cNvCxnSpPr>
+          <p:nvPr/>
+        </p:nvCxnSpPr>
+        <p:spPr>
+          <a:xfrm rot="5400000">
+            <a:off x="47313079" y="20321138"/>
+            <a:ext cx="260709" cy="624840"/>
+          </a:xfrm>
+          <a:prstGeom prst="bentConnector3">
+            <a:avLst>
+              <a:gd name="adj1" fmla="val 50000"/>
+            </a:avLst>
+          </a:prstGeom>
+          <a:ln w="19050">
+            <a:prstDash val="dash"/>
+            <a:tailEnd type="arrow"/>
+          </a:ln>
+        </p:spPr>
+        <p:style>
+          <a:lnRef idx="1">
+            <a:schemeClr val="accent1"/>
+          </a:lnRef>
+          <a:fillRef idx="0">
+            <a:schemeClr val="accent1"/>
+          </a:fillRef>
+          <a:effectRef idx="0">
+            <a:schemeClr val="accent1"/>
+          </a:effectRef>
+          <a:fontRef idx="minor">
+            <a:schemeClr val="tx1"/>
+          </a:fontRef>
+        </p:style>
+      </p:cxnSp>
+      <p:sp>
+        <p:nvSpPr>
+          <p:cNvPr id="147" name="Прямоугольник 146">
+            <a:extLst>
+              <a:ext uri="{FF2B5EF4-FFF2-40B4-BE49-F238E27FC236}">
+                <a16:creationId xmlns:a16="http://schemas.microsoft.com/office/drawing/2014/main" id="{F8CB37AF-4F05-4087-86D6-C449AB4BD77B}"/>
+              </a:ext>
+            </a:extLst>
+          </p:cNvPr>
+          <p:cNvSpPr/>
+          <p:nvPr/>
+        </p:nvSpPr>
+        <p:spPr>
+          <a:xfrm>
+            <a:off x="48534749" y="20763913"/>
+            <a:ext cx="926325" cy="540000"/>
+          </a:xfrm>
+          <a:prstGeom prst="rect">
+            <a:avLst/>
+          </a:prstGeom>
+          <a:solidFill>
+            <a:schemeClr val="bg1"/>
+          </a:solidFill>
+          <a:ln w="19050"/>
+        </p:spPr>
+        <p:style>
+          <a:lnRef idx="2">
+            <a:schemeClr val="accent1"/>
+          </a:lnRef>
+          <a:fillRef idx="1">
+            <a:schemeClr val="lt1"/>
+          </a:fillRef>
+          <a:effectRef idx="0">
+            <a:schemeClr val="accent1"/>
+          </a:effectRef>
+          <a:fontRef idx="minor">
+            <a:schemeClr val="dk1"/>
+          </a:fontRef>
+        </p:style>
+        <p:txBody>
+          <a:bodyPr lIns="124733" tIns="62367" rIns="124733" bIns="62367" rtlCol="0" anchor="ctr"/>
+          <a:lstStyle/>
+          <a:p>
+            <a:pPr algn="ctr"/>
+            <a:r>
+              <a:rPr lang="ru-RU" sz="700" dirty="0"/>
+              <a:t>Пустить иностранные банки в страну</a:t>
+            </a:r>
+          </a:p>
+        </p:txBody>
+      </p:sp>
+      <p:sp>
+        <p:nvSpPr>
+          <p:cNvPr id="148" name="Прямоугольник 147">
+            <a:extLst>
+              <a:ext uri="{FF2B5EF4-FFF2-40B4-BE49-F238E27FC236}">
+                <a16:creationId xmlns:a16="http://schemas.microsoft.com/office/drawing/2014/main" id="{753471EF-1556-4020-A5BF-12D16F8965A5}"/>
+              </a:ext>
+            </a:extLst>
+          </p:cNvPr>
+          <p:cNvSpPr/>
+          <p:nvPr/>
+        </p:nvSpPr>
+        <p:spPr>
+          <a:xfrm>
+            <a:off x="48534750" y="19963203"/>
+            <a:ext cx="926325" cy="540000"/>
+          </a:xfrm>
+          <a:prstGeom prst="rect">
+            <a:avLst/>
+          </a:prstGeom>
+          <a:solidFill>
+            <a:schemeClr val="bg1"/>
+          </a:solidFill>
+          <a:ln w="19050"/>
+        </p:spPr>
+        <p:style>
+          <a:lnRef idx="2">
+            <a:schemeClr val="accent1"/>
+          </a:lnRef>
+          <a:fillRef idx="1">
+            <a:schemeClr val="lt1"/>
+          </a:fillRef>
+          <a:effectRef idx="0">
+            <a:schemeClr val="accent1"/>
+          </a:effectRef>
+          <a:fontRef idx="minor">
+            <a:schemeClr val="dk1"/>
+          </a:fontRef>
+        </p:style>
+        <p:txBody>
+          <a:bodyPr lIns="124733" tIns="62367" rIns="124733" bIns="62367" rtlCol="0" anchor="ctr"/>
+          <a:lstStyle/>
+          <a:p>
+            <a:pPr algn="ctr"/>
+            <a:r>
+              <a:rPr lang="ru-RU" sz="700" dirty="0"/>
+              <a:t>Внедрить Марокканский дирхам</a:t>
+            </a:r>
+          </a:p>
+        </p:txBody>
+      </p:sp>
+      <p:cxnSp>
+        <p:nvCxnSpPr>
+          <p:cNvPr id="149" name="Соединительная линия уступом 620">
+            <a:extLst>
+              <a:ext uri="{FF2B5EF4-FFF2-40B4-BE49-F238E27FC236}">
+                <a16:creationId xmlns:a16="http://schemas.microsoft.com/office/drawing/2014/main" id="{0026C1BB-50CA-4518-B86F-14EC51070B51}"/>
+              </a:ext>
+            </a:extLst>
+          </p:cNvPr>
+          <p:cNvCxnSpPr>
+            <a:cxnSpLocks/>
+            <a:stCxn id="133" idx="2"/>
+            <a:endCxn id="148" idx="0"/>
+          </p:cNvCxnSpPr>
+          <p:nvPr/>
+        </p:nvCxnSpPr>
+        <p:spPr>
+          <a:xfrm rot="16200000" flipH="1">
+            <a:off x="47934414" y="18899703"/>
+            <a:ext cx="260099" cy="1866899"/>
+          </a:xfrm>
+          <a:prstGeom prst="bentConnector3">
+            <a:avLst>
+              <a:gd name="adj1" fmla="val 50000"/>
+            </a:avLst>
+          </a:prstGeom>
+          <a:ln w="19050">
+            <a:tailEnd type="arrow"/>
+          </a:ln>
+        </p:spPr>
+        <p:style>
+          <a:lnRef idx="1">
+            <a:schemeClr val="accent1"/>
+          </a:lnRef>
+          <a:fillRef idx="0">
+            <a:schemeClr val="accent1"/>
+          </a:fillRef>
+          <a:effectRef idx="0">
+            <a:schemeClr val="accent1"/>
+          </a:effectRef>
+          <a:fontRef idx="minor">
+            <a:schemeClr val="tx1"/>
+          </a:fontRef>
+        </p:style>
+      </p:cxnSp>
+      <p:cxnSp>
+        <p:nvCxnSpPr>
+          <p:cNvPr id="150" name="Соединительная линия уступом 620">
+            <a:extLst>
+              <a:ext uri="{FF2B5EF4-FFF2-40B4-BE49-F238E27FC236}">
+                <a16:creationId xmlns:a16="http://schemas.microsoft.com/office/drawing/2014/main" id="{3E1962AF-9446-4D47-8B98-FE2EAB3657D4}"/>
+              </a:ext>
+            </a:extLst>
+          </p:cNvPr>
+          <p:cNvCxnSpPr>
+            <a:cxnSpLocks/>
+            <a:stCxn id="148" idx="2"/>
+            <a:endCxn id="147" idx="0"/>
+          </p:cNvCxnSpPr>
+          <p:nvPr/>
+        </p:nvCxnSpPr>
+        <p:spPr>
+          <a:xfrm rot="5400000">
+            <a:off x="48867558" y="20633558"/>
+            <a:ext cx="260710" cy="1"/>
+          </a:xfrm>
+          <a:prstGeom prst="bentConnector3">
+            <a:avLst>
+              <a:gd name="adj1" fmla="val 50000"/>
+            </a:avLst>
+          </a:prstGeom>
+          <a:ln w="19050">
+            <a:tailEnd type="arrow"/>
+          </a:ln>
+        </p:spPr>
+        <p:style>
+          <a:lnRef idx="1">
+            <a:schemeClr val="accent1"/>
+          </a:lnRef>
+          <a:fillRef idx="0">
+            <a:schemeClr val="accent1"/>
+          </a:fillRef>
+          <a:effectRef idx="0">
+            <a:schemeClr val="accent1"/>
+          </a:effectRef>
+          <a:fontRef idx="minor">
+            <a:schemeClr val="tx1"/>
+          </a:fontRef>
+        </p:style>
+      </p:cxnSp>
+      <p:sp>
+        <p:nvSpPr>
+          <p:cNvPr id="151" name="Прямоугольник 150">
+            <a:extLst>
+              <a:ext uri="{FF2B5EF4-FFF2-40B4-BE49-F238E27FC236}">
+                <a16:creationId xmlns:a16="http://schemas.microsoft.com/office/drawing/2014/main" id="{DD7427AF-80D0-408A-B81F-77375D5490CB}"/>
+              </a:ext>
+            </a:extLst>
+          </p:cNvPr>
+          <p:cNvSpPr/>
+          <p:nvPr/>
+        </p:nvSpPr>
+        <p:spPr>
+          <a:xfrm>
+            <a:off x="44808570" y="19963202"/>
+            <a:ext cx="926325" cy="540000"/>
+          </a:xfrm>
+          <a:prstGeom prst="rect">
+            <a:avLst/>
+          </a:prstGeom>
+          <a:solidFill>
+            <a:schemeClr val="bg1"/>
+          </a:solidFill>
+          <a:ln w="19050"/>
+        </p:spPr>
+        <p:style>
+          <a:lnRef idx="2">
+            <a:schemeClr val="accent1"/>
+          </a:lnRef>
+          <a:fillRef idx="1">
+            <a:schemeClr val="lt1"/>
+          </a:fillRef>
+          <a:effectRef idx="0">
+            <a:schemeClr val="accent1"/>
+          </a:effectRef>
+          <a:fontRef idx="minor">
+            <a:schemeClr val="dk1"/>
+          </a:fontRef>
+        </p:style>
+        <p:txBody>
+          <a:bodyPr lIns="124733" tIns="62367" rIns="124733" bIns="62367" rtlCol="0" anchor="ctr"/>
+          <a:lstStyle/>
+          <a:p>
+            <a:pPr algn="ctr"/>
+            <a:r>
+              <a:rPr lang="ru-RU" sz="700" dirty="0"/>
+              <a:t>Дать толчок тяжёлой промышленности</a:t>
+            </a:r>
+          </a:p>
+        </p:txBody>
+      </p:sp>
+      <p:cxnSp>
+        <p:nvCxnSpPr>
+          <p:cNvPr id="153" name="Соединительная линия уступом 620">
+            <a:extLst>
+              <a:ext uri="{FF2B5EF4-FFF2-40B4-BE49-F238E27FC236}">
+                <a16:creationId xmlns:a16="http://schemas.microsoft.com/office/drawing/2014/main" id="{C480C53B-A2DF-4046-A686-033B9D079831}"/>
+              </a:ext>
+            </a:extLst>
+          </p:cNvPr>
+          <p:cNvCxnSpPr>
+            <a:cxnSpLocks/>
+            <a:stCxn id="133" idx="2"/>
+            <a:endCxn id="151" idx="0"/>
+          </p:cNvCxnSpPr>
+          <p:nvPr/>
+        </p:nvCxnSpPr>
+        <p:spPr>
+          <a:xfrm rot="5400000">
+            <a:off x="46071325" y="18903513"/>
+            <a:ext cx="260098" cy="1859281"/>
+          </a:xfrm>
+          <a:prstGeom prst="bentConnector3">
+            <a:avLst>
+              <a:gd name="adj1" fmla="val 50000"/>
+            </a:avLst>
+          </a:prstGeom>
+          <a:ln w="19050">
+            <a:tailEnd type="arrow"/>
+          </a:ln>
+        </p:spPr>
+        <p:style>
+          <a:lnRef idx="1">
+            <a:schemeClr val="accent1"/>
+          </a:lnRef>
+          <a:fillRef idx="0">
+            <a:schemeClr val="accent1"/>
+          </a:fillRef>
+          <a:effectRef idx="0">
+            <a:schemeClr val="accent1"/>
+          </a:effectRef>
+          <a:fontRef idx="minor">
+            <a:schemeClr val="tx1"/>
+          </a:fontRef>
+        </p:style>
+      </p:cxnSp>
+      <p:sp>
+        <p:nvSpPr>
+          <p:cNvPr id="154" name="Прямоугольник 153">
+            <a:extLst>
+              <a:ext uri="{FF2B5EF4-FFF2-40B4-BE49-F238E27FC236}">
+                <a16:creationId xmlns:a16="http://schemas.microsoft.com/office/drawing/2014/main" id="{3C51ADB6-A21D-4C68-AE41-8BE2E1853373}"/>
+              </a:ext>
+            </a:extLst>
+          </p:cNvPr>
+          <p:cNvSpPr/>
+          <p:nvPr/>
+        </p:nvSpPr>
+        <p:spPr>
+          <a:xfrm>
+            <a:off x="44810998" y="20763913"/>
+            <a:ext cx="926325" cy="540000"/>
+          </a:xfrm>
+          <a:prstGeom prst="rect">
+            <a:avLst/>
+          </a:prstGeom>
+          <a:solidFill>
+            <a:schemeClr val="bg1"/>
+          </a:solidFill>
+          <a:ln w="19050"/>
+        </p:spPr>
+        <p:style>
+          <a:lnRef idx="2">
+            <a:schemeClr val="accent1"/>
+          </a:lnRef>
+          <a:fillRef idx="1">
+            <a:schemeClr val="lt1"/>
+          </a:fillRef>
+          <a:effectRef idx="0">
+            <a:schemeClr val="accent1"/>
+          </a:effectRef>
+          <a:fontRef idx="minor">
+            <a:schemeClr val="dk1"/>
+          </a:fontRef>
+        </p:style>
+        <p:txBody>
+          <a:bodyPr lIns="124733" tIns="62367" rIns="124733" bIns="62367" rtlCol="0" anchor="ctr"/>
+          <a:lstStyle/>
+          <a:p>
+            <a:pPr algn="ctr"/>
+            <a:r>
+              <a:rPr lang="ru-RU" sz="700" dirty="0"/>
+              <a:t>Начать путь индустриализации Марокко</a:t>
+            </a:r>
+          </a:p>
+        </p:txBody>
+      </p:sp>
+      <p:cxnSp>
+        <p:nvCxnSpPr>
+          <p:cNvPr id="155" name="Соединительная линия уступом 620">
+            <a:extLst>
+              <a:ext uri="{FF2B5EF4-FFF2-40B4-BE49-F238E27FC236}">
+                <a16:creationId xmlns:a16="http://schemas.microsoft.com/office/drawing/2014/main" id="{466D1665-8F86-44FC-AC03-61547B4F4895}"/>
+              </a:ext>
+            </a:extLst>
+          </p:cNvPr>
+          <p:cNvCxnSpPr>
+            <a:cxnSpLocks/>
+            <a:stCxn id="151" idx="2"/>
+            <a:endCxn id="154" idx="0"/>
+          </p:cNvCxnSpPr>
+          <p:nvPr/>
+        </p:nvCxnSpPr>
+        <p:spPr>
+          <a:xfrm rot="16200000" flipH="1">
+            <a:off x="45142592" y="20632343"/>
+            <a:ext cx="260711" cy="2428"/>
+          </a:xfrm>
+          <a:prstGeom prst="bentConnector3">
+            <a:avLst>
+              <a:gd name="adj1" fmla="val 50000"/>
+            </a:avLst>
+          </a:prstGeom>
+          <a:ln w="19050">
+            <a:tailEnd type="arrow"/>
+          </a:ln>
+        </p:spPr>
+        <p:style>
+          <a:lnRef idx="1">
+            <a:schemeClr val="accent1"/>
+          </a:lnRef>
+          <a:fillRef idx="0">
+            <a:schemeClr val="accent1"/>
+          </a:fillRef>
+          <a:effectRef idx="0">
+            <a:schemeClr val="accent1"/>
+          </a:effectRef>
+          <a:fontRef idx="minor">
+            <a:schemeClr val="tx1"/>
+          </a:fontRef>
+        </p:style>
+      </p:cxnSp>
+      <p:sp>
+        <p:nvSpPr>
+          <p:cNvPr id="161" name="Прямоугольник 160">
+            <a:extLst>
+              <a:ext uri="{FF2B5EF4-FFF2-40B4-BE49-F238E27FC236}">
+                <a16:creationId xmlns:a16="http://schemas.microsoft.com/office/drawing/2014/main" id="{FE9EC9A5-C1C1-4A0E-B8B7-F01A783C17F6}"/>
+              </a:ext>
+            </a:extLst>
+          </p:cNvPr>
+          <p:cNvSpPr/>
+          <p:nvPr/>
+        </p:nvSpPr>
+        <p:spPr>
+          <a:xfrm>
+            <a:off x="47292690" y="16760327"/>
+            <a:ext cx="926325" cy="540000"/>
+          </a:xfrm>
+          <a:prstGeom prst="rect">
+            <a:avLst/>
+          </a:prstGeom>
+          <a:solidFill>
+            <a:schemeClr val="bg1"/>
+          </a:solidFill>
+          <a:ln w="19050"/>
+        </p:spPr>
+        <p:style>
+          <a:lnRef idx="2">
+            <a:schemeClr val="accent1"/>
+          </a:lnRef>
+          <a:fillRef idx="1">
+            <a:schemeClr val="lt1"/>
+          </a:fillRef>
+          <a:effectRef idx="0">
+            <a:schemeClr val="accent1"/>
+          </a:effectRef>
+          <a:fontRef idx="minor">
+            <a:schemeClr val="dk1"/>
+          </a:fontRef>
+        </p:style>
+        <p:txBody>
+          <a:bodyPr lIns="124733" tIns="62367" rIns="124733" bIns="62367" rtlCol="0" anchor="ctr"/>
+          <a:lstStyle/>
+          <a:p>
+            <a:pPr algn="ctr"/>
+            <a:r>
+              <a:rPr lang="ru-RU" sz="700" dirty="0"/>
+              <a:t>Запуск программы «Службы общественного труда»</a:t>
+            </a:r>
+          </a:p>
+          <a:p>
+            <a:pPr algn="ctr"/>
+            <a:r>
+              <a:rPr lang="ru-RU" sz="100" dirty="0"/>
+              <a:t>(Чтобы занять сотни тысяч разорившихся крестьян, бежавших в города и создававших первые трущобы (бидонвили) Касабланки и Рабата, французы скопировали американские методы «Нового курса» </a:t>
+            </a:r>
+            <a:r>
+              <a:rPr lang="ru-RU" sz="100" dirty="0" err="1"/>
+              <a:t>Рузвельта:Инфраструктурные</a:t>
+            </a:r>
+            <a:r>
+              <a:rPr lang="ru-RU" sz="100" dirty="0"/>
+              <a:t> фокусы: Марокканцев массово нанимали за минимальную оплату и паёк на ручной труд — строительство дорог, прокладку телефонных линий и ирригационных </a:t>
+            </a:r>
+            <a:r>
+              <a:rPr lang="ru-RU" sz="100" dirty="0" err="1"/>
+              <a:t>каналов.Форсирование</a:t>
+            </a:r>
+            <a:r>
+              <a:rPr lang="ru-RU" sz="100" dirty="0"/>
+              <a:t> строительства плотины Эль-</a:t>
+            </a:r>
+            <a:r>
+              <a:rPr lang="ru-RU" sz="100" dirty="0" err="1"/>
+              <a:t>Кансера</a:t>
+            </a:r>
+            <a:r>
+              <a:rPr lang="ru-RU" sz="100" dirty="0"/>
+              <a:t>: В 1937 году были брошены колоссальные человеческие ресурсы на ускорение строительства этой ГЭС на реке </a:t>
+            </a:r>
+            <a:r>
+              <a:rPr lang="ru-RU" sz="100" dirty="0" err="1"/>
+              <a:t>Бех</a:t>
+            </a:r>
+            <a:r>
+              <a:rPr lang="ru-RU" sz="100" dirty="0"/>
+              <a:t> для обеспечения водой Новых городов.)</a:t>
+            </a:r>
+            <a:endParaRPr lang="ru-RU" sz="700" dirty="0"/>
+          </a:p>
+        </p:txBody>
+      </p:sp>
+      <p:sp>
+        <p:nvSpPr>
+          <p:cNvPr id="160" name="Прямоугольник 159">
+            <a:extLst>
+              <a:ext uri="{FF2B5EF4-FFF2-40B4-BE49-F238E27FC236}">
+                <a16:creationId xmlns:a16="http://schemas.microsoft.com/office/drawing/2014/main" id="{5E653D53-D3EB-4C36-8E90-451A3AF33803}"/>
+              </a:ext>
+            </a:extLst>
+          </p:cNvPr>
+          <p:cNvSpPr/>
+          <p:nvPr/>
+        </p:nvSpPr>
+        <p:spPr>
+          <a:xfrm>
+            <a:off x="46667849" y="17561670"/>
+            <a:ext cx="926325" cy="540000"/>
+          </a:xfrm>
+          <a:prstGeom prst="rect">
+            <a:avLst/>
+          </a:prstGeom>
+          <a:solidFill>
+            <a:schemeClr val="bg1"/>
+          </a:solidFill>
+          <a:ln w="19050"/>
+        </p:spPr>
+        <p:style>
+          <a:lnRef idx="2">
+            <a:schemeClr val="accent1"/>
+          </a:lnRef>
+          <a:fillRef idx="1">
+            <a:schemeClr val="lt1"/>
+          </a:fillRef>
+          <a:effectRef idx="0">
+            <a:schemeClr val="accent1"/>
+          </a:effectRef>
+          <a:fontRef idx="minor">
+            <a:schemeClr val="dk1"/>
+          </a:fontRef>
+        </p:style>
+        <p:txBody>
+          <a:bodyPr lIns="124733" tIns="62367" rIns="124733" bIns="62367" rtlCol="0" anchor="ctr"/>
+          <a:lstStyle/>
+          <a:p>
+            <a:pPr algn="ctr"/>
+            <a:r>
+              <a:rPr lang="ru-RU" sz="700" dirty="0"/>
+              <a:t>Развитие консервной промышленности</a:t>
+            </a:r>
+          </a:p>
+          <a:p>
+            <a:pPr algn="ctr"/>
+            <a:r>
+              <a:rPr lang="ru-RU" sz="100" dirty="0"/>
+              <a:t>(В 1938 году в </a:t>
+            </a:r>
+            <a:r>
+              <a:rPr lang="ru-RU" sz="100" dirty="0" err="1"/>
+              <a:t>Сафи</a:t>
+            </a:r>
+            <a:r>
+              <a:rPr lang="ru-RU" sz="100" dirty="0"/>
+              <a:t> и </a:t>
+            </a:r>
+            <a:r>
+              <a:rPr lang="ru-RU" sz="100" dirty="0" err="1"/>
+              <a:t>Агадире</a:t>
+            </a:r>
+            <a:r>
+              <a:rPr lang="ru-RU" sz="100" dirty="0"/>
+              <a:t> начался бум строительства заводов по производству рыбных консервов (сардин). Это было сделано для долгосрочного снабжения французской армии </a:t>
+            </a:r>
+            <a:r>
+              <a:rPr lang="ru-RU" sz="100" dirty="0" err="1"/>
+              <a:t>сухпайками</a:t>
+            </a:r>
+            <a:r>
+              <a:rPr lang="ru-RU" sz="100" dirty="0"/>
+              <a:t>.) Продовольственный мост: Вся консервная промышленность </a:t>
+            </a:r>
+            <a:r>
+              <a:rPr lang="ru-RU" sz="100" dirty="0" err="1"/>
+              <a:t>Сафи</a:t>
+            </a:r>
+            <a:r>
+              <a:rPr lang="ru-RU" sz="100" dirty="0"/>
+              <a:t> и </a:t>
+            </a:r>
+            <a:r>
+              <a:rPr lang="ru-RU" sz="100" dirty="0" err="1"/>
+              <a:t>Агадира</a:t>
+            </a:r>
+            <a:r>
+              <a:rPr lang="ru-RU" sz="100" dirty="0"/>
+              <a:t> (производство рыбных и мясных консервов) работала исключительно на французскую армию. Поставки цитрусовых и ранних овощей частным лицам в Европу прекратились — всё уходило на нужды госпиталей и воинских частей.</a:t>
+            </a:r>
+            <a:endParaRPr lang="ru-RU" sz="700" dirty="0"/>
+          </a:p>
+        </p:txBody>
+      </p:sp>
+      <p:sp>
+        <p:nvSpPr>
+          <p:cNvPr id="162" name="Прямоугольник 161">
+            <a:extLst>
+              <a:ext uri="{FF2B5EF4-FFF2-40B4-BE49-F238E27FC236}">
+                <a16:creationId xmlns:a16="http://schemas.microsoft.com/office/drawing/2014/main" id="{D61DE4B7-57E6-4E8C-BD46-A2F477B184A2}"/>
+              </a:ext>
+            </a:extLst>
+          </p:cNvPr>
+          <p:cNvSpPr/>
+          <p:nvPr/>
+        </p:nvSpPr>
+        <p:spPr>
+          <a:xfrm>
+            <a:off x="46667847" y="21565255"/>
+            <a:ext cx="926325" cy="540000"/>
+          </a:xfrm>
+          <a:prstGeom prst="rect">
+            <a:avLst/>
+          </a:prstGeom>
+          <a:solidFill>
+            <a:schemeClr val="bg1"/>
+          </a:solidFill>
+          <a:ln w="19050"/>
+        </p:spPr>
+        <p:style>
+          <a:lnRef idx="2">
+            <a:schemeClr val="accent1"/>
+          </a:lnRef>
+          <a:fillRef idx="1">
+            <a:schemeClr val="lt1"/>
+          </a:fillRef>
+          <a:effectRef idx="0">
+            <a:schemeClr val="accent1"/>
+          </a:effectRef>
+          <a:fontRef idx="minor">
+            <a:schemeClr val="dk1"/>
+          </a:fontRef>
+        </p:style>
+        <p:txBody>
+          <a:bodyPr lIns="124733" tIns="62367" rIns="124733" bIns="62367" rtlCol="0" anchor="ctr"/>
+          <a:lstStyle/>
+          <a:p>
+            <a:pPr algn="ctr"/>
+            <a:r>
+              <a:rPr lang="ru-RU" sz="700" dirty="0"/>
+              <a:t>Реформа Аль-</a:t>
+            </a:r>
+            <a:r>
+              <a:rPr lang="ru-RU" sz="700" dirty="0" err="1"/>
+              <a:t>Карауина</a:t>
+            </a:r>
+            <a:r>
+              <a:rPr lang="ru-RU" sz="700" dirty="0"/>
+              <a:t> </a:t>
+            </a:r>
+            <a:r>
+              <a:rPr lang="ru-RU" sz="200" dirty="0"/>
+              <a:t>(Параллельно в Марокко шла реформа старейшего исламского центра — Аль-</a:t>
+            </a:r>
+            <a:r>
+              <a:rPr lang="ru-RU" sz="200" dirty="0" err="1"/>
+              <a:t>Карауина</a:t>
+            </a:r>
+            <a:r>
+              <a:rPr lang="ru-RU" sz="200" dirty="0"/>
+              <a:t> в Фесе, основанного еще в 859 </a:t>
+            </a:r>
+            <a:r>
+              <a:rPr lang="ru-RU" sz="200" dirty="0" err="1"/>
+              <a:t>году.В</a:t>
+            </a:r>
+            <a:r>
+              <a:rPr lang="ru-RU" sz="200" dirty="0"/>
+              <a:t> 1947 году его частично интегрировали в систему государственного </a:t>
+            </a:r>
+            <a:r>
+              <a:rPr lang="ru-RU" sz="200" dirty="0" err="1"/>
+              <a:t>образования.Полноценным</a:t>
+            </a:r>
+            <a:r>
+              <a:rPr lang="ru-RU" sz="200" dirty="0"/>
+              <a:t> государственным современным светским университетом по европейским стандартам (с выдачей дипломов единого образца) Аль-</a:t>
+            </a:r>
+            <a:r>
+              <a:rPr lang="ru-RU" sz="200" dirty="0" err="1"/>
+              <a:t>Карауин</a:t>
+            </a:r>
+            <a:r>
+              <a:rPr lang="ru-RU" sz="200" dirty="0"/>
+              <a:t> официально стал только в 1963 году специальным королевским указом)</a:t>
+            </a:r>
+            <a:endParaRPr lang="ru-RU" sz="700" dirty="0"/>
+          </a:p>
+        </p:txBody>
+      </p:sp>
+      <p:sp>
+        <p:nvSpPr>
+          <p:cNvPr id="163" name="Прямоугольник 162">
+            <a:extLst>
+              <a:ext uri="{FF2B5EF4-FFF2-40B4-BE49-F238E27FC236}">
+                <a16:creationId xmlns:a16="http://schemas.microsoft.com/office/drawing/2014/main" id="{D0BB93EC-C765-4576-A338-1A004324E439}"/>
+              </a:ext>
+            </a:extLst>
+          </p:cNvPr>
+          <p:cNvSpPr/>
+          <p:nvPr/>
+        </p:nvSpPr>
+        <p:spPr>
+          <a:xfrm>
+            <a:off x="44814922" y="15950951"/>
+            <a:ext cx="926325" cy="540000"/>
+          </a:xfrm>
+          <a:prstGeom prst="rect">
+            <a:avLst/>
+          </a:prstGeom>
+          <a:solidFill>
+            <a:schemeClr val="bg1"/>
+          </a:solidFill>
+          <a:ln w="19050"/>
+        </p:spPr>
+        <p:style>
+          <a:lnRef idx="2">
+            <a:schemeClr val="accent1"/>
+          </a:lnRef>
+          <a:fillRef idx="1">
+            <a:schemeClr val="lt1"/>
+          </a:fillRef>
+          <a:effectRef idx="0">
+            <a:schemeClr val="accent1"/>
+          </a:effectRef>
+          <a:fontRef idx="minor">
+            <a:schemeClr val="dk1"/>
+          </a:fontRef>
+        </p:style>
+        <p:txBody>
+          <a:bodyPr lIns="124733" tIns="62367" rIns="124733" bIns="62367" rtlCol="0" anchor="ctr"/>
+          <a:lstStyle/>
+          <a:p>
+            <a:pPr algn="ctr"/>
+            <a:r>
+              <a:rPr lang="ru-RU" sz="700" dirty="0"/>
+              <a:t>Девальвировать Марокканский франк</a:t>
+            </a:r>
+          </a:p>
+          <a:p>
+            <a:pPr algn="ctr"/>
+            <a:r>
+              <a:rPr lang="ru-RU" sz="100" dirty="0"/>
+              <a:t>(В сентябре 1936 года Франция провела девальвацию французского франка. Вслед за ним колониальный Банк Марокко (</a:t>
+            </a:r>
+            <a:r>
+              <a:rPr lang="ru-RU" sz="100" dirty="0" err="1"/>
+              <a:t>Banque</a:t>
+            </a:r>
+            <a:r>
+              <a:rPr lang="ru-RU" sz="100" dirty="0"/>
+              <a:t> </a:t>
+            </a:r>
+            <a:r>
+              <a:rPr lang="ru-RU" sz="100" dirty="0" err="1"/>
+              <a:t>d’Etat</a:t>
+            </a:r>
+            <a:r>
+              <a:rPr lang="ru-RU" sz="100" dirty="0"/>
+              <a:t> </a:t>
+            </a:r>
+            <a:r>
+              <a:rPr lang="ru-RU" sz="100" dirty="0" err="1"/>
+              <a:t>du</a:t>
+            </a:r>
+            <a:r>
+              <a:rPr lang="ru-RU" sz="100" dirty="0"/>
+              <a:t> </a:t>
+            </a:r>
+            <a:r>
+              <a:rPr lang="ru-RU" sz="100" dirty="0" err="1"/>
+              <a:t>Maroc</a:t>
+            </a:r>
+            <a:r>
+              <a:rPr lang="ru-RU" sz="100" dirty="0"/>
+              <a:t>) был вынужден девальвировать марокканский франк на 25–35%.Результат: Это сделало марокканские экспортные товары (фосфаты, зерно, металлы) значительно дешевле и привлекательнее на мировом рынке, что резко стимулировало экспорт и увеличило доходы протектората)</a:t>
+            </a:r>
+            <a:endParaRPr lang="ru-RU" sz="600" dirty="0"/>
+          </a:p>
+        </p:txBody>
+      </p:sp>
+      <p:sp>
+        <p:nvSpPr>
+          <p:cNvPr id="159" name="Прямоугольник 158">
+            <a:extLst>
+              <a:ext uri="{FF2B5EF4-FFF2-40B4-BE49-F238E27FC236}">
+                <a16:creationId xmlns:a16="http://schemas.microsoft.com/office/drawing/2014/main" id="{89E81C15-521A-467F-B686-27E0D558A9BF}"/>
+              </a:ext>
+            </a:extLst>
+          </p:cNvPr>
+          <p:cNvSpPr/>
+          <p:nvPr/>
+        </p:nvSpPr>
+        <p:spPr>
+          <a:xfrm>
+            <a:off x="46667850" y="18362387"/>
+            <a:ext cx="926325" cy="540000"/>
+          </a:xfrm>
+          <a:prstGeom prst="rect">
+            <a:avLst/>
+          </a:prstGeom>
+          <a:solidFill>
+            <a:schemeClr val="bg1"/>
+          </a:solidFill>
+          <a:ln w="19050"/>
+        </p:spPr>
+        <p:style>
+          <a:lnRef idx="2">
+            <a:schemeClr val="accent1"/>
+          </a:lnRef>
+          <a:fillRef idx="1">
+            <a:schemeClr val="lt1"/>
+          </a:fillRef>
+          <a:effectRef idx="0">
+            <a:schemeClr val="accent1"/>
+          </a:effectRef>
+          <a:fontRef idx="minor">
+            <a:schemeClr val="dk1"/>
+          </a:fontRef>
+        </p:style>
+        <p:txBody>
+          <a:bodyPr lIns="124733" tIns="62367" rIns="124733" bIns="62367" rtlCol="0" anchor="ctr"/>
+          <a:lstStyle/>
+          <a:p>
+            <a:pPr algn="ctr"/>
+            <a:r>
+              <a:rPr lang="ru-RU" sz="700" dirty="0"/>
+              <a:t>Запуск ГЭС Эль-</a:t>
+            </a:r>
+            <a:r>
+              <a:rPr lang="ru-RU" sz="700" dirty="0" err="1"/>
+              <a:t>Кансера</a:t>
+            </a:r>
+            <a:r>
+              <a:rPr lang="ru-RU" sz="700" dirty="0"/>
+              <a:t> </a:t>
+            </a:r>
+            <a:r>
+              <a:rPr lang="ru-RU" sz="100" dirty="0"/>
+              <a:t>(В 1939 году была официально введена в строй крупная гидроэлектростанция на реке </a:t>
+            </a:r>
+            <a:r>
+              <a:rPr lang="ru-RU" sz="100" dirty="0" err="1"/>
+              <a:t>Бех</a:t>
+            </a:r>
+            <a:r>
+              <a:rPr lang="ru-RU" sz="100" dirty="0"/>
+              <a:t>. Она дала промышленную электроэнергию военным заводам и мастерским </a:t>
+            </a:r>
+            <a:r>
+              <a:rPr lang="ru-RU" sz="100" dirty="0" err="1"/>
+              <a:t>Мекнеса</a:t>
+            </a:r>
+            <a:r>
+              <a:rPr lang="ru-RU" sz="100" dirty="0"/>
+              <a:t> и Рабата.)</a:t>
+            </a:r>
+            <a:endParaRPr lang="ru-RU" sz="700" dirty="0"/>
+          </a:p>
+        </p:txBody>
+      </p:sp>
+      <p:sp>
+        <p:nvSpPr>
+          <p:cNvPr id="165" name="Прямоугольник 164">
+            <a:extLst>
+              <a:ext uri="{FF2B5EF4-FFF2-40B4-BE49-F238E27FC236}">
+                <a16:creationId xmlns:a16="http://schemas.microsoft.com/office/drawing/2014/main" id="{47BF9C19-F6CD-4ECB-BE1F-55F72B77F001}"/>
+              </a:ext>
+            </a:extLst>
+          </p:cNvPr>
+          <p:cNvSpPr/>
+          <p:nvPr/>
+        </p:nvSpPr>
+        <p:spPr>
+          <a:xfrm>
+            <a:off x="47909909" y="18362384"/>
+            <a:ext cx="926325" cy="540000"/>
+          </a:xfrm>
+          <a:prstGeom prst="rect">
+            <a:avLst/>
+          </a:prstGeom>
+          <a:solidFill>
+            <a:schemeClr val="bg1"/>
+          </a:solidFill>
+          <a:ln w="19050"/>
+        </p:spPr>
+        <p:style>
+          <a:lnRef idx="2">
+            <a:schemeClr val="accent1"/>
+          </a:lnRef>
+          <a:fillRef idx="1">
+            <a:schemeClr val="lt1"/>
+          </a:fillRef>
+          <a:effectRef idx="0">
+            <a:schemeClr val="accent1"/>
+          </a:effectRef>
+          <a:fontRef idx="minor">
+            <a:schemeClr val="dk1"/>
+          </a:fontRef>
+        </p:style>
+        <p:txBody>
+          <a:bodyPr lIns="124733" tIns="62367" rIns="124733" bIns="62367" rtlCol="0" anchor="ctr"/>
+          <a:lstStyle/>
+          <a:p>
+            <a:pPr algn="ctr"/>
+            <a:r>
+              <a:rPr lang="ru-RU" sz="700" dirty="0"/>
+              <a:t>Перевести добычу на военные рельсы</a:t>
+            </a:r>
+          </a:p>
+          <a:p>
+            <a:pPr algn="ctr"/>
+            <a:r>
+              <a:rPr lang="ru-RU" sz="100" dirty="0"/>
+              <a:t>(Марокко превратилось в ключевого сырьевого донора французского ВПК, который лихорадочно наращивал производство </a:t>
+            </a:r>
+            <a:r>
+              <a:rPr lang="ru-RU" sz="100" dirty="0" err="1"/>
+              <a:t>оружия.Экспортные</a:t>
+            </a:r>
+            <a:r>
+              <a:rPr lang="ru-RU" sz="100" dirty="0"/>
+              <a:t> квоты: В 1938 году был введен жесткий контроль над экспортом стратегического сырья. Весь объем добычи кобальта (месторождение </a:t>
+            </a:r>
+            <a:r>
+              <a:rPr lang="ru-RU" sz="100" dirty="0" err="1"/>
+              <a:t>Бу-Аззер</a:t>
+            </a:r>
+            <a:r>
+              <a:rPr lang="ru-RU" sz="100" dirty="0"/>
+              <a:t>) и марганца (</a:t>
+            </a:r>
+            <a:r>
+              <a:rPr lang="ru-RU" sz="100" dirty="0" err="1"/>
+              <a:t>Бу</a:t>
+            </a:r>
+            <a:r>
+              <a:rPr lang="ru-RU" sz="100" dirty="0"/>
+              <a:t>-Арфа) теперь принудительно направлялся на металлургические заводы Франции для производства броневой стали. Фокус «Сырьевой донор Метрополии»: Добавляет в регионы Марокко дополнительные единицы хрома/стали (имитирующих марганец и кобальт) и увеличивает скорость их добычи на +10%, но направляет часть ресурсов Франции.) Перевести всю экономику на военные рельсы (Переход на режим военной экономики и </a:t>
+            </a:r>
+            <a:r>
+              <a:rPr lang="ru-RU" sz="100" dirty="0" err="1"/>
+              <a:t>нормированияС</a:t>
+            </a:r>
+            <a:r>
+              <a:rPr lang="ru-RU" sz="100" dirty="0"/>
+              <a:t> началом войны в сентябре 1939 года свободный рынок в Марокко фактически перестал </a:t>
+            </a:r>
+            <a:r>
+              <a:rPr lang="ru-RU" sz="100" dirty="0" err="1"/>
+              <a:t>существовать.Введение</a:t>
+            </a:r>
+            <a:r>
+              <a:rPr lang="ru-RU" sz="100" dirty="0"/>
+              <a:t> карточной системы: Французская администрация ввела жесткое нормирование и купоны на базовые товары: сахар, чай, ткани, горючее и </a:t>
+            </a:r>
+            <a:r>
+              <a:rPr lang="ru-RU" sz="100" dirty="0" err="1"/>
+              <a:t>мыло.Контроль</a:t>
+            </a:r>
+            <a:r>
+              <a:rPr lang="ru-RU" sz="100" dirty="0"/>
+              <a:t> цен и конфискации: Были введены суровые наказания за спекуляцию. Специальные экономические патрули имели право конфисковать «излишки» зерна у крупных землевладельцев для нужд </a:t>
+            </a:r>
+            <a:r>
+              <a:rPr lang="ru-RU" sz="100" dirty="0" err="1"/>
+              <a:t>армии.Замораживание</a:t>
+            </a:r>
+            <a:r>
+              <a:rPr lang="ru-RU" sz="100" dirty="0"/>
+              <a:t> капиталов: Были введены жесткие ограничения на вывоз валюты и золота из протектората, чтобы предотвратить панику и бегство европейских капиталов.)</a:t>
+            </a:r>
+          </a:p>
+          <a:p>
+            <a:pPr algn="ctr"/>
+            <a:endParaRPr lang="ru-RU" sz="100" dirty="0"/>
+          </a:p>
+        </p:txBody>
+      </p:sp>
+      <p:sp>
+        <p:nvSpPr>
+          <p:cNvPr id="166" name="Прямоугольник 165">
+            <a:extLst>
+              <a:ext uri="{FF2B5EF4-FFF2-40B4-BE49-F238E27FC236}">
+                <a16:creationId xmlns:a16="http://schemas.microsoft.com/office/drawing/2014/main" id="{1A8EE704-11C7-46AB-81B1-C8C4620EDDE1}"/>
+              </a:ext>
+            </a:extLst>
+          </p:cNvPr>
+          <p:cNvSpPr/>
+          <p:nvPr/>
+        </p:nvSpPr>
+        <p:spPr>
+          <a:xfrm>
+            <a:off x="47909910" y="17561670"/>
+            <a:ext cx="926325" cy="540000"/>
+          </a:xfrm>
+          <a:prstGeom prst="rect">
+            <a:avLst/>
+          </a:prstGeom>
+          <a:solidFill>
+            <a:schemeClr val="bg1"/>
+          </a:solidFill>
+          <a:ln w="19050"/>
+        </p:spPr>
+        <p:style>
+          <a:lnRef idx="2">
+            <a:schemeClr val="accent1"/>
+          </a:lnRef>
+          <a:fillRef idx="1">
+            <a:schemeClr val="lt1"/>
+          </a:fillRef>
+          <a:effectRef idx="0">
+            <a:schemeClr val="accent1"/>
+          </a:effectRef>
+          <a:fontRef idx="minor">
+            <a:schemeClr val="dk1"/>
+          </a:fontRef>
+        </p:style>
+        <p:txBody>
+          <a:bodyPr lIns="124733" tIns="62367" rIns="124733" bIns="62367" rtlCol="0" anchor="ctr"/>
+          <a:lstStyle/>
+          <a:p>
+            <a:pPr algn="ctr"/>
+            <a:r>
+              <a:rPr lang="ru-RU" sz="700" dirty="0"/>
+              <a:t>Модернизация фосфатных конвейеров </a:t>
+            </a:r>
+            <a:r>
+              <a:rPr lang="ru-RU" sz="100" dirty="0"/>
+              <a:t>(Выход фосфатной промышленности на пик </a:t>
+            </a:r>
+            <a:r>
+              <a:rPr lang="ru-RU" sz="100" dirty="0" err="1"/>
+              <a:t>производстваНесмотря</a:t>
+            </a:r>
+            <a:r>
+              <a:rPr lang="ru-RU" sz="100" dirty="0"/>
+              <a:t> на кризис в сельском хозяйстве, промышленный сектор показал рекордный </a:t>
+            </a:r>
+            <a:r>
+              <a:rPr lang="ru-RU" sz="100" dirty="0" err="1"/>
+              <a:t>рост.Валютный</a:t>
+            </a:r>
+            <a:r>
+              <a:rPr lang="ru-RU" sz="100" dirty="0"/>
+              <a:t> донор: Государственная OCP (</a:t>
+            </a:r>
+            <a:r>
+              <a:rPr lang="ru-RU" sz="100" dirty="0" err="1"/>
+              <a:t>Office</a:t>
+            </a:r>
+            <a:r>
+              <a:rPr lang="ru-RU" sz="100" dirty="0"/>
+              <a:t> </a:t>
+            </a:r>
+            <a:r>
+              <a:rPr lang="ru-RU" sz="100" dirty="0" err="1"/>
+              <a:t>Chérifien</a:t>
+            </a:r>
+            <a:r>
+              <a:rPr lang="ru-RU" sz="100" dirty="0"/>
+              <a:t> </a:t>
+            </a:r>
+            <a:r>
+              <a:rPr lang="ru-RU" sz="100" dirty="0" err="1"/>
+              <a:t>des</a:t>
+            </a:r>
+            <a:r>
+              <a:rPr lang="ru-RU" sz="100" dirty="0"/>
+              <a:t> </a:t>
+            </a:r>
+            <a:r>
+              <a:rPr lang="ru-RU" sz="100" dirty="0" err="1"/>
+              <a:t>Phosphates</a:t>
+            </a:r>
+            <a:r>
+              <a:rPr lang="ru-RU" sz="100" dirty="0"/>
+              <a:t>) в </a:t>
+            </a:r>
+            <a:r>
+              <a:rPr lang="ru-RU" sz="100" dirty="0" err="1"/>
+              <a:t>Хурибге</a:t>
+            </a:r>
+            <a:r>
+              <a:rPr lang="ru-RU" sz="100" dirty="0"/>
+              <a:t> в 1937 году полностью модернизировала конвейерные линии и увеличила добычу фосфатов до исторического максимума. Это позволило Франции перекрыть дефицит бюджета протектората, возникший из-за засухи.)</a:t>
+            </a:r>
+            <a:endParaRPr lang="ru-RU" sz="700" dirty="0"/>
+          </a:p>
+        </p:txBody>
+      </p:sp>
+      <p:sp>
+        <p:nvSpPr>
+          <p:cNvPr id="167" name="Прямоугольник 166">
+            <a:extLst>
+              <a:ext uri="{FF2B5EF4-FFF2-40B4-BE49-F238E27FC236}">
+                <a16:creationId xmlns:a16="http://schemas.microsoft.com/office/drawing/2014/main" id="{4C01390C-3604-44AF-B95C-E19422D133EE}"/>
+              </a:ext>
+            </a:extLst>
+          </p:cNvPr>
+          <p:cNvSpPr/>
+          <p:nvPr/>
+        </p:nvSpPr>
+        <p:spPr>
+          <a:xfrm>
+            <a:off x="46049854" y="16760952"/>
+            <a:ext cx="926325" cy="540000"/>
+          </a:xfrm>
+          <a:prstGeom prst="rect">
+            <a:avLst/>
+          </a:prstGeom>
+          <a:solidFill>
+            <a:schemeClr val="bg1"/>
+          </a:solidFill>
+          <a:ln w="19050"/>
+        </p:spPr>
+        <p:style>
+          <a:lnRef idx="2">
+            <a:schemeClr val="accent1"/>
+          </a:lnRef>
+          <a:fillRef idx="1">
+            <a:schemeClr val="lt1"/>
+          </a:fillRef>
+          <a:effectRef idx="0">
+            <a:schemeClr val="accent1"/>
+          </a:effectRef>
+          <a:fontRef idx="minor">
+            <a:schemeClr val="dk1"/>
+          </a:fontRef>
+        </p:style>
+        <p:txBody>
+          <a:bodyPr lIns="124733" tIns="62367" rIns="124733" bIns="62367" rtlCol="0" anchor="ctr"/>
+          <a:lstStyle/>
+          <a:p>
+            <a:pPr algn="ctr"/>
+            <a:r>
+              <a:rPr lang="ru-RU" sz="700" dirty="0"/>
+              <a:t>Строительство Южной железной дороги</a:t>
+            </a:r>
+          </a:p>
+          <a:p>
+            <a:pPr algn="ctr"/>
+            <a:r>
+              <a:rPr lang="ru-RU" sz="200" dirty="0"/>
+              <a:t>В 1936 году шло форсированное расширение узкоколейной ветки в Сахару до города </a:t>
+            </a:r>
+            <a:r>
+              <a:rPr lang="ru-RU" sz="200" dirty="0" err="1"/>
+              <a:t>Бу</a:t>
+            </a:r>
+            <a:r>
+              <a:rPr lang="ru-RU" sz="200" dirty="0"/>
+              <a:t>-Арфа для вывоза стратегического марганца из рудников </a:t>
+            </a:r>
+            <a:r>
+              <a:rPr lang="ru-RU" sz="200" dirty="0" err="1"/>
+              <a:t>Бу-Аззер</a:t>
+            </a:r>
+            <a:r>
+              <a:rPr lang="ru-RU" sz="200" dirty="0"/>
+              <a:t>. Это была подготовка к созданию </a:t>
+            </a:r>
+            <a:r>
+              <a:rPr lang="ru-RU" sz="200" dirty="0" err="1"/>
+              <a:t>Транссахарской</a:t>
+            </a:r>
+            <a:r>
+              <a:rPr lang="ru-RU" sz="200" dirty="0"/>
+              <a:t> магистрали.</a:t>
+            </a:r>
+            <a:endParaRPr lang="ru-RU" sz="600" dirty="0"/>
+          </a:p>
+        </p:txBody>
+      </p:sp>
+      <p:sp>
+        <p:nvSpPr>
+          <p:cNvPr id="168" name="Прямоугольник 167">
+            <a:extLst>
+              <a:ext uri="{FF2B5EF4-FFF2-40B4-BE49-F238E27FC236}">
+                <a16:creationId xmlns:a16="http://schemas.microsoft.com/office/drawing/2014/main" id="{C86CE29A-CB8F-4444-A22F-6E9A6F234F55}"/>
+              </a:ext>
+            </a:extLst>
+          </p:cNvPr>
+          <p:cNvSpPr/>
+          <p:nvPr/>
+        </p:nvSpPr>
+        <p:spPr>
+          <a:xfrm>
+            <a:off x="45423909" y="17561669"/>
+            <a:ext cx="926325" cy="540000"/>
+          </a:xfrm>
+          <a:prstGeom prst="rect">
+            <a:avLst/>
+          </a:prstGeom>
+          <a:solidFill>
+            <a:schemeClr val="bg1"/>
+          </a:solidFill>
+          <a:ln w="19050"/>
+        </p:spPr>
+        <p:style>
+          <a:lnRef idx="2">
+            <a:schemeClr val="accent1"/>
+          </a:lnRef>
+          <a:fillRef idx="1">
+            <a:schemeClr val="lt1"/>
+          </a:fillRef>
+          <a:effectRef idx="0">
+            <a:schemeClr val="accent1"/>
+          </a:effectRef>
+          <a:fontRef idx="minor">
+            <a:schemeClr val="dk1"/>
+          </a:fontRef>
+        </p:style>
+        <p:txBody>
+          <a:bodyPr lIns="124733" tIns="62367" rIns="124733" bIns="62367" rtlCol="0" anchor="ctr"/>
+          <a:lstStyle/>
+          <a:p>
+            <a:pPr algn="ctr"/>
+            <a:r>
+              <a:rPr lang="ru-RU" sz="700" dirty="0"/>
+              <a:t>Поддержать проект «свободных школ»</a:t>
+            </a:r>
+          </a:p>
+          <a:p>
+            <a:pPr algn="ctr"/>
+            <a:r>
+              <a:rPr lang="ru-RU" sz="100" dirty="0"/>
+              <a:t>(Поскольку государственное образование искусственно сдерживало марокканцев (в 1945 году в школах училось всего около 35 000 местных детей), марокканское национальное движение и буржуазия начали массово открывать «Свободные школы» (</a:t>
+            </a:r>
+            <a:r>
+              <a:rPr lang="ru-RU" sz="100" dirty="0" err="1"/>
+              <a:t>Ecoles</a:t>
+            </a:r>
+            <a:r>
+              <a:rPr lang="ru-RU" sz="100" dirty="0"/>
+              <a:t> </a:t>
+            </a:r>
+            <a:r>
+              <a:rPr lang="ru-RU" sz="100" dirty="0" err="1"/>
+              <a:t>Libres</a:t>
+            </a:r>
+            <a:r>
+              <a:rPr lang="ru-RU" sz="100" dirty="0"/>
+              <a:t>).В период 1936–1939 годов эти частные школы пережили </a:t>
+            </a:r>
+            <a:r>
+              <a:rPr lang="ru-RU" sz="100" dirty="0" err="1"/>
+              <a:t>бум.Их</a:t>
+            </a:r>
+            <a:r>
+              <a:rPr lang="ru-RU" sz="100" dirty="0"/>
+              <a:t> главная реформа заключалась в модернизации учебного плана: в отличие от традиционных коранических школ (</a:t>
+            </a:r>
+            <a:r>
+              <a:rPr lang="ru-RU" sz="100" dirty="0" err="1"/>
+              <a:t>мсid</a:t>
+            </a:r>
+            <a:r>
+              <a:rPr lang="ru-RU" sz="100" dirty="0"/>
+              <a:t>), где тексты зазубривались, здесь преподавали математику, историю и географию на арабском языке, воспитывая будущих лидеров борьбы за независимость.)</a:t>
+            </a:r>
+            <a:endParaRPr lang="ru-RU" sz="700" dirty="0"/>
+          </a:p>
+        </p:txBody>
+      </p:sp>
+      <p:sp>
+        <p:nvSpPr>
+          <p:cNvPr id="169" name="Прямоугольник 168">
+            <a:extLst>
+              <a:ext uri="{FF2B5EF4-FFF2-40B4-BE49-F238E27FC236}">
+                <a16:creationId xmlns:a16="http://schemas.microsoft.com/office/drawing/2014/main" id="{965735E6-9298-480D-AE1F-E6C4CFFDD1A1}"/>
+              </a:ext>
+            </a:extLst>
+          </p:cNvPr>
+          <p:cNvSpPr/>
+          <p:nvPr/>
+        </p:nvSpPr>
+        <p:spPr>
+          <a:xfrm>
+            <a:off x="45423910" y="19158670"/>
+            <a:ext cx="926325" cy="540000"/>
+          </a:xfrm>
+          <a:prstGeom prst="rect">
+            <a:avLst/>
+          </a:prstGeom>
+          <a:solidFill>
+            <a:schemeClr val="bg1"/>
+          </a:solidFill>
+          <a:ln w="19050"/>
+        </p:spPr>
+        <p:style>
+          <a:lnRef idx="2">
+            <a:schemeClr val="accent1"/>
+          </a:lnRef>
+          <a:fillRef idx="1">
+            <a:schemeClr val="lt1"/>
+          </a:fillRef>
+          <a:effectRef idx="0">
+            <a:schemeClr val="accent1"/>
+          </a:effectRef>
+          <a:fontRef idx="minor">
+            <a:schemeClr val="dk1"/>
+          </a:fontRef>
+        </p:style>
+        <p:txBody>
+          <a:bodyPr lIns="124733" tIns="62367" rIns="124733" bIns="62367" rtlCol="0" anchor="ctr"/>
+          <a:lstStyle/>
+          <a:p>
+            <a:pPr algn="ctr"/>
+            <a:r>
+              <a:rPr lang="ru-RU" sz="700" dirty="0"/>
+              <a:t>Санитарные реформы</a:t>
+            </a:r>
+          </a:p>
+          <a:p>
+            <a:pPr algn="ctr"/>
+            <a:r>
+              <a:rPr lang="ru-RU" sz="100" dirty="0"/>
+              <a:t>(Голод спровоцировал эпидемии среди населения и массовый падеж скота, который был основой экономики </a:t>
+            </a:r>
+            <a:r>
+              <a:rPr lang="ru-RU" sz="100" dirty="0" err="1"/>
+              <a:t>берберов.«Операция</a:t>
+            </a:r>
+            <a:r>
+              <a:rPr lang="ru-RU" sz="100" dirty="0"/>
+              <a:t> ветеринарии»: Колониальные власти организовали принудительную бесплатную вакцинацию оставшегося скота от ящура и </a:t>
+            </a:r>
+            <a:r>
+              <a:rPr lang="ru-RU" sz="100" dirty="0" err="1"/>
+              <a:t>чумы.Мобильные</a:t>
+            </a:r>
+            <a:r>
+              <a:rPr lang="ru-RU" sz="100" dirty="0"/>
+              <a:t> госпитали: Для борьбы с сыпным тифом и чумой в 1937 году французы создали сеть мобильных медицинских отрядов, которые перемещались по Сахаре и Атласу, вакцинируя местных жителей.)</a:t>
+            </a:r>
+            <a:endParaRPr lang="ru-RU" sz="700" dirty="0"/>
+          </a:p>
+        </p:txBody>
+      </p:sp>
+      <p:sp>
+        <p:nvSpPr>
+          <p:cNvPr id="170" name="Прямоугольник 169">
+            <a:extLst>
+              <a:ext uri="{FF2B5EF4-FFF2-40B4-BE49-F238E27FC236}">
+                <a16:creationId xmlns:a16="http://schemas.microsoft.com/office/drawing/2014/main" id="{0EA51F14-395B-4668-B146-4C4161B7EABF}"/>
+              </a:ext>
+            </a:extLst>
+          </p:cNvPr>
+          <p:cNvSpPr/>
+          <p:nvPr/>
+        </p:nvSpPr>
+        <p:spPr>
+          <a:xfrm>
+            <a:off x="45423909" y="18362384"/>
+            <a:ext cx="926325" cy="540000"/>
+          </a:xfrm>
+          <a:prstGeom prst="rect">
+            <a:avLst/>
+          </a:prstGeom>
+          <a:solidFill>
+            <a:schemeClr val="bg1"/>
+          </a:solidFill>
+          <a:ln w="19050"/>
+        </p:spPr>
+        <p:style>
+          <a:lnRef idx="2">
+            <a:schemeClr val="accent1"/>
+          </a:lnRef>
+          <a:fillRef idx="1">
+            <a:schemeClr val="lt1"/>
+          </a:fillRef>
+          <a:effectRef idx="0">
+            <a:schemeClr val="accent1"/>
+          </a:effectRef>
+          <a:fontRef idx="minor">
+            <a:schemeClr val="dk1"/>
+          </a:fontRef>
+        </p:style>
+        <p:txBody>
+          <a:bodyPr lIns="124733" tIns="62367" rIns="124733" bIns="62367" rtlCol="0" anchor="ctr"/>
+          <a:lstStyle/>
+          <a:p>
+            <a:pPr algn="ctr"/>
+            <a:r>
+              <a:rPr lang="ru-RU" sz="800" dirty="0"/>
+              <a:t>Французские дотации для феллахов</a:t>
+            </a:r>
+          </a:p>
+          <a:p>
+            <a:pPr algn="ctr"/>
+            <a:r>
+              <a:rPr lang="ru-RU" sz="100" dirty="0"/>
+              <a:t>(Из-за сильного неурожая зерновых в предыдущие годы администрация ввела жесткое регулирование цен на хлеб и муку для предотвращения спекуляций. Султан Мухаммед V добился от французов выделения дотаций и посевного зерна для беднейших марокканских крестьян (феллахов).) Из-за полного отсутствия дождей в начале 1937 года урожай зерна в южных и центральных регионах Марокко погиб. Надвигался массовый голод среди коренного населения (феллахов).Создание «Фонда солидарности»: Администрация </a:t>
+            </a:r>
+            <a:r>
+              <a:rPr lang="ru-RU" sz="100" dirty="0" err="1"/>
+              <a:t>Ногеса</a:t>
+            </a:r>
+            <a:r>
+              <a:rPr lang="ru-RU" sz="100" dirty="0"/>
+              <a:t> ввела чрезвычайный налог на сверхприбыли крупных европейских компаний для закупки </a:t>
+            </a:r>
+            <a:r>
+              <a:rPr lang="ru-RU" sz="100" dirty="0" err="1"/>
+              <a:t>зерна.Экстренный</a:t>
+            </a:r>
+            <a:r>
+              <a:rPr lang="ru-RU" sz="100" dirty="0"/>
+              <a:t> импорт и бесплатная раздача: Были отменены пошлины на ввоз пшеницы из Алжира и Франции. В пострадавших регионах (Марракеш, </a:t>
+            </a:r>
+            <a:r>
+              <a:rPr lang="ru-RU" sz="100" dirty="0" err="1"/>
+              <a:t>Сус</a:t>
+            </a:r>
+            <a:r>
+              <a:rPr lang="ru-RU" sz="100" dirty="0"/>
+              <a:t>) французы открыли пункты бесплатной раздачи супа и зерна, чтобы остановить голодные марши на </a:t>
+            </a:r>
+            <a:r>
+              <a:rPr lang="ru-RU" sz="100" dirty="0" err="1"/>
+              <a:t>Касабланку.Запрет</a:t>
+            </a:r>
+            <a:r>
+              <a:rPr lang="ru-RU" sz="100" dirty="0"/>
+              <a:t> на вывоз хлеба: Весной 1937 года был введен полный запрет на экспорт марокканского зерна в Европу, чтобы удержать внутренние цены.</a:t>
+            </a:r>
+            <a:endParaRPr lang="ru-RU" sz="600" dirty="0"/>
+          </a:p>
+        </p:txBody>
+      </p:sp>
+      <p:sp>
+        <p:nvSpPr>
+          <p:cNvPr id="171" name="Прямоугольник 170">
+            <a:extLst>
+              <a:ext uri="{FF2B5EF4-FFF2-40B4-BE49-F238E27FC236}">
+                <a16:creationId xmlns:a16="http://schemas.microsoft.com/office/drawing/2014/main" id="{F581326F-C887-4214-A377-CCD739D3F382}"/>
+              </a:ext>
+            </a:extLst>
+          </p:cNvPr>
+          <p:cNvSpPr/>
+          <p:nvPr/>
+        </p:nvSpPr>
+        <p:spPr>
+          <a:xfrm>
+            <a:off x="44814921" y="16765383"/>
+            <a:ext cx="926325" cy="540000"/>
+          </a:xfrm>
+          <a:prstGeom prst="rect">
+            <a:avLst/>
+          </a:prstGeom>
+          <a:solidFill>
+            <a:schemeClr val="bg1"/>
+          </a:solidFill>
+          <a:ln w="19050"/>
+        </p:spPr>
+        <p:style>
+          <a:lnRef idx="2">
+            <a:schemeClr val="accent1"/>
+          </a:lnRef>
+          <a:fillRef idx="1">
+            <a:schemeClr val="lt1"/>
+          </a:fillRef>
+          <a:effectRef idx="0">
+            <a:schemeClr val="accent1"/>
+          </a:effectRef>
+          <a:fontRef idx="minor">
+            <a:schemeClr val="dk1"/>
+          </a:fontRef>
+        </p:style>
+        <p:txBody>
+          <a:bodyPr lIns="124733" tIns="62367" rIns="124733" bIns="62367" rtlCol="0" anchor="ctr"/>
+          <a:lstStyle/>
+          <a:p>
+            <a:pPr algn="ctr"/>
+            <a:r>
+              <a:rPr lang="ru-RU" sz="700" dirty="0"/>
+              <a:t>Построить плотину </a:t>
+            </a:r>
+            <a:r>
+              <a:rPr lang="ru-RU" sz="700" dirty="0" err="1"/>
+              <a:t>Касба-Тадла</a:t>
+            </a:r>
+            <a:endParaRPr lang="ru-RU" sz="700" dirty="0"/>
+          </a:p>
+          <a:p>
+            <a:pPr algn="ctr"/>
+            <a:r>
+              <a:rPr lang="ru-RU" sz="100" dirty="0"/>
+              <a:t>(Для борьбы с безработицей среди коренного населения и решения проблемы засух в 1936 году было выделено целевое государственное финансирование на новые инфраструктурные объекты. В частности, активизировалось финансирование строительства плотины </a:t>
+            </a:r>
+            <a:r>
+              <a:rPr lang="ru-RU" sz="100" dirty="0" err="1"/>
+              <a:t>Касба-Тадла</a:t>
+            </a:r>
+            <a:r>
+              <a:rPr lang="ru-RU" sz="100" dirty="0"/>
+              <a:t> и гидротехнических сооружений на ключевой реке </a:t>
+            </a:r>
+            <a:r>
+              <a:rPr lang="ru-RU" sz="100" dirty="0" err="1"/>
+              <a:t>Умм</a:t>
+            </a:r>
+            <a:r>
+              <a:rPr lang="ru-RU" sz="100" dirty="0"/>
+              <a:t>-эр-</a:t>
+            </a:r>
+            <a:r>
+              <a:rPr lang="ru-RU" sz="100" dirty="0" err="1"/>
+              <a:t>Рбия</a:t>
+            </a:r>
+            <a:r>
+              <a:rPr lang="ru-RU" sz="100" dirty="0"/>
+              <a:t>. Это дало сильный толчок строительному сектору.)</a:t>
+            </a:r>
+            <a:endParaRPr lang="ru-RU" sz="700" dirty="0"/>
+          </a:p>
+        </p:txBody>
+      </p:sp>
+      <p:sp>
+        <p:nvSpPr>
+          <p:cNvPr id="172" name="Прямоугольник 171">
+            <a:extLst>
+              <a:ext uri="{FF2B5EF4-FFF2-40B4-BE49-F238E27FC236}">
+                <a16:creationId xmlns:a16="http://schemas.microsoft.com/office/drawing/2014/main" id="{7D0BC22F-B057-40C4-8EBE-37521534682D}"/>
+              </a:ext>
+            </a:extLst>
+          </p:cNvPr>
+          <p:cNvSpPr/>
+          <p:nvPr/>
+        </p:nvSpPr>
+        <p:spPr>
+          <a:xfrm>
+            <a:off x="47292690" y="15950952"/>
+            <a:ext cx="926325" cy="540000"/>
+          </a:xfrm>
+          <a:prstGeom prst="rect">
+            <a:avLst/>
+          </a:prstGeom>
+          <a:solidFill>
+            <a:schemeClr val="bg1"/>
+          </a:solidFill>
+          <a:ln w="19050"/>
+        </p:spPr>
+        <p:style>
+          <a:lnRef idx="2">
+            <a:schemeClr val="accent1"/>
+          </a:lnRef>
+          <a:fillRef idx="1">
+            <a:schemeClr val="lt1"/>
+          </a:fillRef>
+          <a:effectRef idx="0">
+            <a:schemeClr val="accent1"/>
+          </a:effectRef>
+          <a:fontRef idx="minor">
+            <a:schemeClr val="dk1"/>
+          </a:fontRef>
+        </p:style>
+        <p:txBody>
+          <a:bodyPr lIns="124733" tIns="62367" rIns="124733" bIns="62367" rtlCol="0" anchor="ctr"/>
+          <a:lstStyle/>
+          <a:p>
+            <a:pPr algn="ctr"/>
+            <a:r>
+              <a:rPr lang="ru-RU" sz="700" dirty="0"/>
+              <a:t>Провести трудовые реформы</a:t>
+            </a:r>
+          </a:p>
+          <a:p>
+            <a:pPr algn="ctr"/>
+            <a:r>
+              <a:rPr lang="ru-RU" sz="100" dirty="0"/>
+              <a:t>(После прихода к власти левых во Франции летом 1936 года по всему Марокко прокатилась волна рабочих протестов. Крупнейшие забастовки вспыхнули на фосфатных рудниках </a:t>
+            </a:r>
+            <a:r>
+              <a:rPr lang="ru-RU" sz="100" dirty="0" err="1"/>
+              <a:t>Хурибги</a:t>
+            </a:r>
+            <a:r>
+              <a:rPr lang="ru-RU" sz="100" dirty="0"/>
+              <a:t>. Французский генеральный резидент Шарль </a:t>
+            </a:r>
+            <a:r>
+              <a:rPr lang="ru-RU" sz="100" dirty="0" err="1"/>
+              <a:t>Ногес</a:t>
+            </a:r>
+            <a:r>
+              <a:rPr lang="ru-RU" sz="100" dirty="0"/>
+              <a:t> был вынужден пойти на экономические уступки местному </a:t>
+            </a:r>
+            <a:r>
+              <a:rPr lang="ru-RU" sz="100" dirty="0" err="1"/>
+              <a:t>населению:Была</a:t>
+            </a:r>
+            <a:r>
+              <a:rPr lang="ru-RU" sz="100" dirty="0"/>
+              <a:t> законодательно увеличена минимальная заработная плата для марокканских </a:t>
+            </a:r>
+            <a:r>
+              <a:rPr lang="ru-RU" sz="100" dirty="0" err="1"/>
+              <a:t>рабочих.Была</a:t>
+            </a:r>
+            <a:r>
+              <a:rPr lang="ru-RU" sz="100" dirty="0"/>
+              <a:t> введена официальная 40-часовая рабочая неделя (для европейских специалистов) и сокращен рабочий день для местных шахтеров.)</a:t>
+            </a:r>
+            <a:endParaRPr lang="ru-RU" sz="600" dirty="0"/>
+          </a:p>
+        </p:txBody>
+      </p:sp>
+      <p:cxnSp>
+        <p:nvCxnSpPr>
+          <p:cNvPr id="174" name="Соединительная линия уступом 620">
+            <a:extLst>
+              <a:ext uri="{FF2B5EF4-FFF2-40B4-BE49-F238E27FC236}">
+                <a16:creationId xmlns:a16="http://schemas.microsoft.com/office/drawing/2014/main" id="{94BD342C-0CA0-4ADE-8B26-47E1657800A2}"/>
+              </a:ext>
+            </a:extLst>
+          </p:cNvPr>
+          <p:cNvCxnSpPr>
+            <a:cxnSpLocks/>
+            <a:stCxn id="163" idx="2"/>
+            <a:endCxn id="171" idx="0"/>
+          </p:cNvCxnSpPr>
+          <p:nvPr/>
+        </p:nvCxnSpPr>
+        <p:spPr>
+          <a:xfrm rot="5400000">
+            <a:off x="45140869" y="16628167"/>
+            <a:ext cx="274432" cy="1"/>
+          </a:xfrm>
+          <a:prstGeom prst="bentConnector3">
+            <a:avLst>
+              <a:gd name="adj1" fmla="val 50000"/>
+            </a:avLst>
+          </a:prstGeom>
+          <a:ln w="19050">
+            <a:tailEnd type="arrow"/>
+          </a:ln>
+        </p:spPr>
+        <p:style>
+          <a:lnRef idx="1">
+            <a:schemeClr val="accent1"/>
+          </a:lnRef>
+          <a:fillRef idx="0">
+            <a:schemeClr val="accent1"/>
+          </a:fillRef>
+          <a:effectRef idx="0">
+            <a:schemeClr val="accent1"/>
+          </a:effectRef>
+          <a:fontRef idx="minor">
+            <a:schemeClr val="tx1"/>
+          </a:fontRef>
+        </p:style>
+      </p:cxnSp>
+      <p:sp>
+        <p:nvSpPr>
+          <p:cNvPr id="164" name="Прямоугольник 163">
+            <a:extLst>
+              <a:ext uri="{FF2B5EF4-FFF2-40B4-BE49-F238E27FC236}">
+                <a16:creationId xmlns:a16="http://schemas.microsoft.com/office/drawing/2014/main" id="{CB3D1342-AF6F-45C2-8B29-2D66C97503EB}"/>
+              </a:ext>
+            </a:extLst>
+          </p:cNvPr>
+          <p:cNvSpPr/>
+          <p:nvPr/>
+        </p:nvSpPr>
+        <p:spPr>
+          <a:xfrm>
+            <a:off x="47909908" y="19163101"/>
+            <a:ext cx="926325" cy="540000"/>
+          </a:xfrm>
+          <a:prstGeom prst="rect">
+            <a:avLst/>
+          </a:prstGeom>
+          <a:solidFill>
+            <a:schemeClr val="bg1"/>
+          </a:solidFill>
+          <a:ln w="19050"/>
+        </p:spPr>
+        <p:style>
+          <a:lnRef idx="2">
+            <a:schemeClr val="accent1"/>
+          </a:lnRef>
+          <a:fillRef idx="1">
+            <a:schemeClr val="lt1"/>
+          </a:fillRef>
+          <a:effectRef idx="0">
+            <a:schemeClr val="accent1"/>
+          </a:effectRef>
+          <a:fontRef idx="minor">
+            <a:schemeClr val="dk1"/>
+          </a:fontRef>
+        </p:style>
+        <p:txBody>
+          <a:bodyPr lIns="124733" tIns="62367" rIns="124733" bIns="62367" rtlCol="0" anchor="ctr"/>
+          <a:lstStyle/>
+          <a:p>
+            <a:pPr algn="ctr"/>
+            <a:r>
+              <a:rPr lang="ru-RU" sz="700" dirty="0"/>
+              <a:t>Запустить военные заводы и мастерские в </a:t>
+            </a:r>
+            <a:r>
+              <a:rPr lang="ru-RU" sz="700" dirty="0" err="1"/>
+              <a:t>Макнесе</a:t>
+            </a:r>
+            <a:r>
+              <a:rPr lang="ru-RU" sz="700" dirty="0"/>
+              <a:t> и </a:t>
+            </a:r>
+            <a:r>
+              <a:rPr lang="ru-RU" sz="700" dirty="0" err="1"/>
+              <a:t>Ребате</a:t>
+            </a:r>
+            <a:endParaRPr lang="ru-RU" sz="700" dirty="0"/>
+          </a:p>
+        </p:txBody>
+      </p:sp>
+      <p:cxnSp>
+        <p:nvCxnSpPr>
+          <p:cNvPr id="180" name="Соединительная линия уступом 620">
+            <a:extLst>
+              <a:ext uri="{FF2B5EF4-FFF2-40B4-BE49-F238E27FC236}">
+                <a16:creationId xmlns:a16="http://schemas.microsoft.com/office/drawing/2014/main" id="{10DC8736-A3A3-4600-A289-6DCEADA27B6F}"/>
+              </a:ext>
+            </a:extLst>
+          </p:cNvPr>
+          <p:cNvCxnSpPr>
+            <a:cxnSpLocks/>
+            <a:stCxn id="172" idx="2"/>
+            <a:endCxn id="161" idx="0"/>
+          </p:cNvCxnSpPr>
+          <p:nvPr/>
+        </p:nvCxnSpPr>
+        <p:spPr>
+          <a:xfrm rot="5400000">
+            <a:off x="47621166" y="16625639"/>
+            <a:ext cx="269375" cy="12700"/>
+          </a:xfrm>
+          <a:prstGeom prst="bentConnector3">
+            <a:avLst>
+              <a:gd name="adj1" fmla="val 50000"/>
+            </a:avLst>
+          </a:prstGeom>
+          <a:ln w="19050">
+            <a:tailEnd type="arrow"/>
+          </a:ln>
+        </p:spPr>
+        <p:style>
+          <a:lnRef idx="1">
+            <a:schemeClr val="accent1"/>
+          </a:lnRef>
+          <a:fillRef idx="0">
+            <a:schemeClr val="accent1"/>
+          </a:fillRef>
+          <a:effectRef idx="0">
+            <a:schemeClr val="accent1"/>
+          </a:effectRef>
+          <a:fontRef idx="minor">
+            <a:schemeClr val="tx1"/>
+          </a:fontRef>
+        </p:style>
+      </p:cxnSp>
+      <p:cxnSp>
+        <p:nvCxnSpPr>
+          <p:cNvPr id="189" name="Соединительная линия уступом 620">
+            <a:extLst>
+              <a:ext uri="{FF2B5EF4-FFF2-40B4-BE49-F238E27FC236}">
+                <a16:creationId xmlns:a16="http://schemas.microsoft.com/office/drawing/2014/main" id="{7C686C0B-B75D-4F52-8561-05F2CAD940FD}"/>
+              </a:ext>
+            </a:extLst>
+          </p:cNvPr>
+          <p:cNvCxnSpPr>
+            <a:cxnSpLocks/>
+            <a:stCxn id="170" idx="2"/>
+            <a:endCxn id="169" idx="0"/>
+          </p:cNvCxnSpPr>
+          <p:nvPr/>
+        </p:nvCxnSpPr>
+        <p:spPr>
+          <a:xfrm rot="16200000" flipH="1">
+            <a:off x="45758929" y="19030526"/>
+            <a:ext cx="256286" cy="1"/>
+          </a:xfrm>
+          <a:prstGeom prst="bentConnector3">
+            <a:avLst>
+              <a:gd name="adj1" fmla="val 50000"/>
+            </a:avLst>
+          </a:prstGeom>
+          <a:ln w="19050">
+            <a:tailEnd type="arrow"/>
+          </a:ln>
+        </p:spPr>
+        <p:style>
+          <a:lnRef idx="1">
+            <a:schemeClr val="accent1"/>
+          </a:lnRef>
+          <a:fillRef idx="0">
+            <a:schemeClr val="accent1"/>
+          </a:fillRef>
+          <a:effectRef idx="0">
+            <a:schemeClr val="accent1"/>
+          </a:effectRef>
+          <a:fontRef idx="minor">
+            <a:schemeClr val="tx1"/>
+          </a:fontRef>
+        </p:style>
+      </p:cxnSp>
+      <p:cxnSp>
+        <p:nvCxnSpPr>
+          <p:cNvPr id="211" name="Соединительная линия уступом 620">
+            <a:extLst>
+              <a:ext uri="{FF2B5EF4-FFF2-40B4-BE49-F238E27FC236}">
+                <a16:creationId xmlns:a16="http://schemas.microsoft.com/office/drawing/2014/main" id="{2366AF65-0D98-447C-B7A5-6E3A72161930}"/>
+              </a:ext>
+            </a:extLst>
+          </p:cNvPr>
+          <p:cNvCxnSpPr>
+            <a:cxnSpLocks/>
+            <a:stCxn id="166" idx="2"/>
+            <a:endCxn id="165" idx="0"/>
+          </p:cNvCxnSpPr>
+          <p:nvPr/>
+        </p:nvCxnSpPr>
+        <p:spPr>
+          <a:xfrm rot="5400000">
+            <a:off x="48242716" y="18232027"/>
+            <a:ext cx="260714" cy="1"/>
+          </a:xfrm>
+          <a:prstGeom prst="bentConnector3">
+            <a:avLst>
+              <a:gd name="adj1" fmla="val 50000"/>
+            </a:avLst>
+          </a:prstGeom>
+          <a:ln w="19050">
+            <a:tailEnd type="arrow"/>
+          </a:ln>
+        </p:spPr>
+        <p:style>
+          <a:lnRef idx="1">
+            <a:schemeClr val="accent1"/>
+          </a:lnRef>
+          <a:fillRef idx="0">
+            <a:schemeClr val="accent1"/>
+          </a:fillRef>
+          <a:effectRef idx="0">
+            <a:schemeClr val="accent1"/>
+          </a:effectRef>
+          <a:fontRef idx="minor">
+            <a:schemeClr val="tx1"/>
+          </a:fontRef>
+        </p:style>
+      </p:cxnSp>
+      <p:cxnSp>
+        <p:nvCxnSpPr>
+          <p:cNvPr id="217" name="Соединительная линия уступом 620">
+            <a:extLst>
+              <a:ext uri="{FF2B5EF4-FFF2-40B4-BE49-F238E27FC236}">
+                <a16:creationId xmlns:a16="http://schemas.microsoft.com/office/drawing/2014/main" id="{E7C08983-8D44-4498-99BD-254BF64E7274}"/>
+              </a:ext>
+            </a:extLst>
+          </p:cNvPr>
+          <p:cNvCxnSpPr>
+            <a:cxnSpLocks/>
+            <a:stCxn id="165" idx="2"/>
+            <a:endCxn id="164" idx="0"/>
+          </p:cNvCxnSpPr>
+          <p:nvPr/>
+        </p:nvCxnSpPr>
+        <p:spPr>
+          <a:xfrm rot="5400000">
+            <a:off x="48242714" y="19032742"/>
+            <a:ext cx="260717" cy="1"/>
+          </a:xfrm>
+          <a:prstGeom prst="bentConnector3">
+            <a:avLst>
+              <a:gd name="adj1" fmla="val 50000"/>
+            </a:avLst>
+          </a:prstGeom>
+          <a:ln w="19050">
+            <a:tailEnd type="arrow"/>
+          </a:ln>
+        </p:spPr>
+        <p:style>
+          <a:lnRef idx="1">
+            <a:schemeClr val="accent1"/>
+          </a:lnRef>
+          <a:fillRef idx="0">
+            <a:schemeClr val="accent1"/>
+          </a:fillRef>
+          <a:effectRef idx="0">
+            <a:schemeClr val="accent1"/>
+          </a:effectRef>
+          <a:fontRef idx="minor">
+            <a:schemeClr val="tx1"/>
+          </a:fontRef>
+        </p:style>
+      </p:cxnSp>
+      <p:cxnSp>
+        <p:nvCxnSpPr>
+          <p:cNvPr id="224" name="Соединительная линия уступом 620">
+            <a:extLst>
+              <a:ext uri="{FF2B5EF4-FFF2-40B4-BE49-F238E27FC236}">
+                <a16:creationId xmlns:a16="http://schemas.microsoft.com/office/drawing/2014/main" id="{28E6A8E6-7749-40BE-8958-4DEE2DD96DE3}"/>
+              </a:ext>
+            </a:extLst>
+          </p:cNvPr>
+          <p:cNvCxnSpPr>
+            <a:cxnSpLocks/>
+            <a:stCxn id="160" idx="2"/>
+            <a:endCxn id="159" idx="0"/>
+          </p:cNvCxnSpPr>
+          <p:nvPr/>
+        </p:nvCxnSpPr>
+        <p:spPr>
+          <a:xfrm rot="16200000" flipH="1">
+            <a:off x="47000654" y="18232027"/>
+            <a:ext cx="260717" cy="1"/>
+          </a:xfrm>
+          <a:prstGeom prst="bentConnector3">
+            <a:avLst>
+              <a:gd name="adj1" fmla="val 50000"/>
+            </a:avLst>
+          </a:prstGeom>
+          <a:ln w="19050">
+            <a:prstDash val="dash"/>
+            <a:tailEnd type="arrow"/>
+          </a:ln>
+        </p:spPr>
+        <p:style>
+          <a:lnRef idx="1">
+            <a:schemeClr val="accent1"/>
+          </a:lnRef>
+          <a:fillRef idx="0">
+            <a:schemeClr val="accent1"/>
+          </a:fillRef>
+          <a:effectRef idx="0">
+            <a:schemeClr val="accent1"/>
+          </a:effectRef>
+          <a:fontRef idx="minor">
+            <a:schemeClr val="tx1"/>
+          </a:fontRef>
+        </p:style>
+      </p:cxnSp>
+      <p:cxnSp>
+        <p:nvCxnSpPr>
+          <p:cNvPr id="227" name="Соединительная линия уступом 620">
+            <a:extLst>
+              <a:ext uri="{FF2B5EF4-FFF2-40B4-BE49-F238E27FC236}">
+                <a16:creationId xmlns:a16="http://schemas.microsoft.com/office/drawing/2014/main" id="{4A75F75A-BDCF-494C-A9E3-E29F4988BF22}"/>
+              </a:ext>
+            </a:extLst>
+          </p:cNvPr>
+          <p:cNvCxnSpPr>
+            <a:cxnSpLocks/>
+            <a:stCxn id="166" idx="2"/>
+            <a:endCxn id="159" idx="0"/>
+          </p:cNvCxnSpPr>
+          <p:nvPr/>
+        </p:nvCxnSpPr>
+        <p:spPr>
+          <a:xfrm rot="5400000">
+            <a:off x="47621685" y="17610998"/>
+            <a:ext cx="260717" cy="1242060"/>
+          </a:xfrm>
+          <a:prstGeom prst="bentConnector3">
+            <a:avLst>
+              <a:gd name="adj1" fmla="val 50000"/>
+            </a:avLst>
+          </a:prstGeom>
+          <a:ln w="19050">
+            <a:prstDash val="dash"/>
+            <a:tailEnd type="arrow"/>
+          </a:ln>
+        </p:spPr>
+        <p:style>
+          <a:lnRef idx="1">
+            <a:schemeClr val="accent1"/>
+          </a:lnRef>
+          <a:fillRef idx="0">
+            <a:schemeClr val="accent1"/>
+          </a:fillRef>
+          <a:effectRef idx="0">
+            <a:schemeClr val="accent1"/>
+          </a:effectRef>
+          <a:fontRef idx="minor">
+            <a:schemeClr val="tx1"/>
+          </a:fontRef>
+        </p:style>
+      </p:cxnSp>
+      <p:cxnSp>
+        <p:nvCxnSpPr>
+          <p:cNvPr id="230" name="Соединительная линия уступом 620">
+            <a:extLst>
+              <a:ext uri="{FF2B5EF4-FFF2-40B4-BE49-F238E27FC236}">
+                <a16:creationId xmlns:a16="http://schemas.microsoft.com/office/drawing/2014/main" id="{20B6CC3A-7999-4202-8709-65A70E605078}"/>
+              </a:ext>
+            </a:extLst>
+          </p:cNvPr>
+          <p:cNvCxnSpPr>
+            <a:cxnSpLocks/>
+            <a:stCxn id="165" idx="2"/>
+            <a:endCxn id="133" idx="0"/>
+          </p:cNvCxnSpPr>
+          <p:nvPr/>
+        </p:nvCxnSpPr>
+        <p:spPr>
+          <a:xfrm rot="5400000">
+            <a:off x="47621683" y="18411715"/>
+            <a:ext cx="260720" cy="1242058"/>
+          </a:xfrm>
+          <a:prstGeom prst="bentConnector3">
+            <a:avLst>
+              <a:gd name="adj1" fmla="val 50000"/>
+            </a:avLst>
+          </a:prstGeom>
+          <a:ln w="19050">
+            <a:prstDash val="dash"/>
+            <a:tailEnd type="arrow"/>
+          </a:ln>
+        </p:spPr>
+        <p:style>
+          <a:lnRef idx="1">
+            <a:schemeClr val="accent1"/>
+          </a:lnRef>
+          <a:fillRef idx="0">
+            <a:schemeClr val="accent1"/>
+          </a:fillRef>
+          <a:effectRef idx="0">
+            <a:schemeClr val="accent1"/>
+          </a:effectRef>
+          <a:fontRef idx="minor">
+            <a:schemeClr val="tx1"/>
+          </a:fontRef>
+        </p:style>
+      </p:cxnSp>
+      <p:cxnSp>
+        <p:nvCxnSpPr>
+          <p:cNvPr id="236" name="Соединительная линия уступом 620">
+            <a:extLst>
+              <a:ext uri="{FF2B5EF4-FFF2-40B4-BE49-F238E27FC236}">
+                <a16:creationId xmlns:a16="http://schemas.microsoft.com/office/drawing/2014/main" id="{5B8091A2-FEB0-4588-A97C-712582A9CFE4}"/>
+              </a:ext>
+            </a:extLst>
+          </p:cNvPr>
+          <p:cNvCxnSpPr>
+            <a:cxnSpLocks/>
+            <a:stCxn id="159" idx="2"/>
+            <a:endCxn id="133" idx="0"/>
+          </p:cNvCxnSpPr>
+          <p:nvPr/>
+        </p:nvCxnSpPr>
+        <p:spPr>
+          <a:xfrm rot="16200000" flipH="1">
+            <a:off x="47000655" y="19032744"/>
+            <a:ext cx="260717" cy="1"/>
+          </a:xfrm>
+          <a:prstGeom prst="bentConnector3">
+            <a:avLst>
+              <a:gd name="adj1" fmla="val 50000"/>
+            </a:avLst>
+          </a:prstGeom>
+          <a:ln w="19050">
+            <a:prstDash val="dash"/>
+            <a:tailEnd type="arrow"/>
+          </a:ln>
+        </p:spPr>
+        <p:style>
+          <a:lnRef idx="1">
+            <a:schemeClr val="accent1"/>
+          </a:lnRef>
+          <a:fillRef idx="0">
+            <a:schemeClr val="accent1"/>
+          </a:fillRef>
+          <a:effectRef idx="0">
+            <a:schemeClr val="accent1"/>
+          </a:effectRef>
+          <a:fontRef idx="minor">
+            <a:schemeClr val="tx1"/>
+          </a:fontRef>
+        </p:style>
+      </p:cxnSp>
+      <p:sp>
+        <p:nvSpPr>
+          <p:cNvPr id="245" name="Прямоугольник 244">
+            <a:extLst>
+              <a:ext uri="{FF2B5EF4-FFF2-40B4-BE49-F238E27FC236}">
+                <a16:creationId xmlns:a16="http://schemas.microsoft.com/office/drawing/2014/main" id="{1ED3E070-7793-4DFC-9262-57A19B08DA47}"/>
+              </a:ext>
+            </a:extLst>
+          </p:cNvPr>
+          <p:cNvSpPr/>
+          <p:nvPr/>
+        </p:nvSpPr>
+        <p:spPr>
+          <a:xfrm>
+            <a:off x="44179969" y="17561669"/>
+            <a:ext cx="926325" cy="540000"/>
+          </a:xfrm>
+          <a:prstGeom prst="rect">
+            <a:avLst/>
+          </a:prstGeom>
+          <a:solidFill>
+            <a:schemeClr val="bg1"/>
+          </a:solidFill>
+          <a:ln w="19050"/>
+        </p:spPr>
+        <p:style>
+          <a:lnRef idx="2">
+            <a:schemeClr val="accent1"/>
+          </a:lnRef>
+          <a:fillRef idx="1">
+            <a:schemeClr val="lt1"/>
+          </a:fillRef>
+          <a:effectRef idx="0">
+            <a:schemeClr val="accent1"/>
+          </a:effectRef>
+          <a:fontRef idx="minor">
+            <a:schemeClr val="dk1"/>
+          </a:fontRef>
+        </p:style>
+        <p:txBody>
+          <a:bodyPr lIns="124733" tIns="62367" rIns="124733" bIns="62367" rtlCol="0" anchor="ctr"/>
+          <a:lstStyle/>
+          <a:p>
+            <a:pPr algn="ctr"/>
+            <a:r>
+              <a:rPr lang="ru-RU" sz="700" dirty="0"/>
+              <a:t>Франко-берберские школы</a:t>
+            </a:r>
+          </a:p>
+          <a:p>
+            <a:pPr algn="ctr"/>
+            <a:r>
+              <a:rPr lang="ru-RU" sz="100" dirty="0"/>
+              <a:t>(</a:t>
+            </a:r>
+            <a:r>
+              <a:rPr lang="ru-RU" sz="100" b="1" dirty="0"/>
+              <a:t>Франко-берберские школы:</a:t>
+            </a:r>
+            <a:r>
+              <a:rPr lang="ru-RU" sz="100" dirty="0"/>
+              <a:t> В горах Атласа </a:t>
+            </a:r>
+            <a:r>
+              <a:rPr lang="ru-RU" sz="100" dirty="0" err="1"/>
+              <a:t>Ногес</a:t>
+            </a:r>
+            <a:r>
+              <a:rPr lang="ru-RU" sz="100" dirty="0"/>
+              <a:t> продолжил развивать сеть школ, где обучение велось исключительно на французском языке, а арабский язык и исламское право были полностью исключены. Это делалось для того, чтобы оторвать берберов от арабского большинства страны.)</a:t>
+            </a:r>
+            <a:endParaRPr lang="ru-RU" sz="700" dirty="0"/>
+          </a:p>
+        </p:txBody>
+      </p:sp>
+      <p:cxnSp>
+        <p:nvCxnSpPr>
+          <p:cNvPr id="258" name="Прямая соединительная линия 257">
+            <a:extLst>
+              <a:ext uri="{FF2B5EF4-FFF2-40B4-BE49-F238E27FC236}">
+                <a16:creationId xmlns:a16="http://schemas.microsoft.com/office/drawing/2014/main" id="{2C4F37CE-664B-436A-B255-CCE3A2F068A8}"/>
+              </a:ext>
+            </a:extLst>
+          </p:cNvPr>
+          <p:cNvCxnSpPr>
+            <a:cxnSpLocks/>
+            <a:stCxn id="168" idx="1"/>
+            <a:endCxn id="245" idx="3"/>
+          </p:cNvCxnSpPr>
+          <p:nvPr/>
+        </p:nvCxnSpPr>
+        <p:spPr>
+          <a:xfrm flipH="1">
+            <a:off x="45106294" y="17831669"/>
+            <a:ext cx="317615" cy="0"/>
+          </a:xfrm>
+          <a:prstGeom prst="line">
+            <a:avLst/>
+          </a:prstGeom>
+          <a:ln w="38100">
+            <a:solidFill>
+              <a:srgbClr val="C00000"/>
+            </a:solidFill>
+          </a:ln>
+        </p:spPr>
+        <p:style>
+          <a:lnRef idx="1">
+            <a:schemeClr val="accent1"/>
+          </a:lnRef>
+          <a:fillRef idx="0">
+            <a:schemeClr val="accent1"/>
+          </a:fillRef>
+          <a:effectRef idx="0">
+            <a:schemeClr val="accent1"/>
+          </a:effectRef>
+          <a:fontRef idx="minor">
+            <a:schemeClr val="tx1"/>
+          </a:fontRef>
+        </p:style>
+      </p:cxnSp>
+      <p:sp>
+        <p:nvSpPr>
+          <p:cNvPr id="266" name="Прямоугольник 265">
+            <a:extLst>
+              <a:ext uri="{FF2B5EF4-FFF2-40B4-BE49-F238E27FC236}">
+                <a16:creationId xmlns:a16="http://schemas.microsoft.com/office/drawing/2014/main" id="{68B1E117-0997-408B-8E5D-B6D54012F4BC}"/>
+              </a:ext>
+            </a:extLst>
+          </p:cNvPr>
+          <p:cNvSpPr/>
+          <p:nvPr/>
+        </p:nvSpPr>
+        <p:spPr>
+          <a:xfrm>
+            <a:off x="44179968" y="18362793"/>
+            <a:ext cx="926325" cy="540000"/>
+          </a:xfrm>
+          <a:prstGeom prst="rect">
+            <a:avLst/>
+          </a:prstGeom>
+          <a:solidFill>
+            <a:schemeClr val="bg1"/>
+          </a:solidFill>
+          <a:ln w="19050"/>
+        </p:spPr>
+        <p:style>
+          <a:lnRef idx="2">
+            <a:schemeClr val="accent1"/>
+          </a:lnRef>
+          <a:fillRef idx="1">
+            <a:schemeClr val="lt1"/>
+          </a:fillRef>
+          <a:effectRef idx="0">
+            <a:schemeClr val="accent1"/>
+          </a:effectRef>
+          <a:fontRef idx="minor">
+            <a:schemeClr val="dk1"/>
+          </a:fontRef>
+        </p:style>
+        <p:txBody>
+          <a:bodyPr lIns="124733" tIns="62367" rIns="124733" bIns="62367" rtlCol="0" anchor="ctr"/>
+          <a:lstStyle/>
+          <a:p>
+            <a:pPr algn="ctr"/>
+            <a:r>
+              <a:rPr lang="ru-RU" sz="700" dirty="0"/>
+              <a:t>Создать колледжи для женщин </a:t>
+            </a:r>
+            <a:r>
+              <a:rPr lang="ru-RU" sz="200" dirty="0"/>
+              <a:t>(Ближе к концу Второй мировой войны, под давлением модернизационных процессов, колониальные власти пошли на историческую уступку и заложили базу для женского среднего образования. Были созданы первые специализированные колледжи для мусульманских девушек (в частности, в Рабате и Фесе), что стало революционным шагом для традиционного марокканского общества того времени.)</a:t>
+            </a:r>
+            <a:endParaRPr lang="ru-RU" sz="700" dirty="0"/>
+          </a:p>
+        </p:txBody>
+      </p:sp>
+      <p:cxnSp>
+        <p:nvCxnSpPr>
+          <p:cNvPr id="267" name="Соединительная линия уступом 620">
+            <a:extLst>
+              <a:ext uri="{FF2B5EF4-FFF2-40B4-BE49-F238E27FC236}">
+                <a16:creationId xmlns:a16="http://schemas.microsoft.com/office/drawing/2014/main" id="{840FDEEB-F3AE-4C87-A93A-2D8E549CDC61}"/>
+              </a:ext>
+            </a:extLst>
+          </p:cNvPr>
+          <p:cNvCxnSpPr>
+            <a:cxnSpLocks/>
+            <a:stCxn id="171" idx="2"/>
+            <a:endCxn id="245" idx="0"/>
+          </p:cNvCxnSpPr>
+          <p:nvPr/>
+        </p:nvCxnSpPr>
+        <p:spPr>
+          <a:xfrm rot="5400000">
+            <a:off x="44832465" y="17116050"/>
+            <a:ext cx="256286" cy="634952"/>
+          </a:xfrm>
+          <a:prstGeom prst="bentConnector3">
+            <a:avLst>
+              <a:gd name="adj1" fmla="val 50000"/>
+            </a:avLst>
+          </a:prstGeom>
+          <a:ln w="19050">
+            <a:tailEnd type="arrow"/>
+          </a:ln>
+        </p:spPr>
+        <p:style>
+          <a:lnRef idx="1">
+            <a:schemeClr val="accent1"/>
+          </a:lnRef>
+          <a:fillRef idx="0">
+            <a:schemeClr val="accent1"/>
+          </a:fillRef>
+          <a:effectRef idx="0">
+            <a:schemeClr val="accent1"/>
+          </a:effectRef>
+          <a:fontRef idx="minor">
+            <a:schemeClr val="tx1"/>
+          </a:fontRef>
+        </p:style>
+      </p:cxnSp>
+      <p:cxnSp>
+        <p:nvCxnSpPr>
+          <p:cNvPr id="272" name="Соединительная линия уступом 620">
+            <a:extLst>
+              <a:ext uri="{FF2B5EF4-FFF2-40B4-BE49-F238E27FC236}">
+                <a16:creationId xmlns:a16="http://schemas.microsoft.com/office/drawing/2014/main" id="{C42987BF-3C90-4273-8578-F4ECAA730943}"/>
+              </a:ext>
+            </a:extLst>
+          </p:cNvPr>
+          <p:cNvCxnSpPr>
+            <a:cxnSpLocks/>
+            <a:stCxn id="171" idx="2"/>
+            <a:endCxn id="168" idx="0"/>
+          </p:cNvCxnSpPr>
+          <p:nvPr/>
+        </p:nvCxnSpPr>
+        <p:spPr>
+          <a:xfrm rot="16200000" flipH="1">
+            <a:off x="45454435" y="17129032"/>
+            <a:ext cx="256286" cy="608988"/>
+          </a:xfrm>
+          <a:prstGeom prst="bentConnector3">
+            <a:avLst>
+              <a:gd name="adj1" fmla="val 50000"/>
+            </a:avLst>
+          </a:prstGeom>
+          <a:ln w="19050">
+            <a:tailEnd type="arrow"/>
+          </a:ln>
+        </p:spPr>
+        <p:style>
+          <a:lnRef idx="1">
+            <a:schemeClr val="accent1"/>
+          </a:lnRef>
+          <a:fillRef idx="0">
+            <a:schemeClr val="accent1"/>
+          </a:fillRef>
+          <a:effectRef idx="0">
+            <a:schemeClr val="accent1"/>
+          </a:effectRef>
+          <a:fontRef idx="minor">
+            <a:schemeClr val="tx1"/>
+          </a:fontRef>
+        </p:style>
+      </p:cxnSp>
+      <p:cxnSp>
+        <p:nvCxnSpPr>
+          <p:cNvPr id="276" name="Соединительная линия уступом 620">
+            <a:extLst>
+              <a:ext uri="{FF2B5EF4-FFF2-40B4-BE49-F238E27FC236}">
+                <a16:creationId xmlns:a16="http://schemas.microsoft.com/office/drawing/2014/main" id="{CC9C22C5-0599-4A63-A76A-3E6E9BB2C8AF}"/>
+              </a:ext>
+            </a:extLst>
+          </p:cNvPr>
+          <p:cNvCxnSpPr>
+            <a:cxnSpLocks/>
+            <a:stCxn id="168" idx="2"/>
+            <a:endCxn id="266" idx="0"/>
+          </p:cNvCxnSpPr>
+          <p:nvPr/>
+        </p:nvCxnSpPr>
+        <p:spPr>
+          <a:xfrm rot="5400000">
+            <a:off x="45134540" y="17610261"/>
+            <a:ext cx="261124" cy="1243941"/>
+          </a:xfrm>
+          <a:prstGeom prst="bentConnector3">
+            <a:avLst>
+              <a:gd name="adj1" fmla="val 50000"/>
+            </a:avLst>
+          </a:prstGeom>
+          <a:ln w="19050">
+            <a:prstDash val="dash"/>
+            <a:tailEnd type="arrow"/>
+          </a:ln>
+        </p:spPr>
+        <p:style>
+          <a:lnRef idx="1">
+            <a:schemeClr val="accent1"/>
+          </a:lnRef>
+          <a:fillRef idx="0">
+            <a:schemeClr val="accent1"/>
+          </a:fillRef>
+          <a:effectRef idx="0">
+            <a:schemeClr val="accent1"/>
+          </a:effectRef>
+          <a:fontRef idx="minor">
+            <a:schemeClr val="tx1"/>
+          </a:fontRef>
+        </p:style>
+      </p:cxnSp>
+      <p:cxnSp>
+        <p:nvCxnSpPr>
+          <p:cNvPr id="279" name="Соединительная линия уступом 620">
+            <a:extLst>
+              <a:ext uri="{FF2B5EF4-FFF2-40B4-BE49-F238E27FC236}">
+                <a16:creationId xmlns:a16="http://schemas.microsoft.com/office/drawing/2014/main" id="{B37C4214-5DF9-4BB7-87F6-3E8E0886C3AC}"/>
+              </a:ext>
+            </a:extLst>
+          </p:cNvPr>
+          <p:cNvCxnSpPr>
+            <a:cxnSpLocks/>
+            <a:stCxn id="245" idx="2"/>
+            <a:endCxn id="266" idx="0"/>
+          </p:cNvCxnSpPr>
+          <p:nvPr/>
+        </p:nvCxnSpPr>
+        <p:spPr>
+          <a:xfrm rot="5400000">
+            <a:off x="44512570" y="18232231"/>
+            <a:ext cx="261124" cy="1"/>
+          </a:xfrm>
+          <a:prstGeom prst="bentConnector3">
+            <a:avLst>
+              <a:gd name="adj1" fmla="val 50000"/>
+            </a:avLst>
+          </a:prstGeom>
+          <a:ln w="19050">
+            <a:prstDash val="dash"/>
+            <a:tailEnd type="arrow"/>
+          </a:ln>
+        </p:spPr>
+        <p:style>
+          <a:lnRef idx="1">
+            <a:schemeClr val="accent1"/>
+          </a:lnRef>
+          <a:fillRef idx="0">
+            <a:schemeClr val="accent1"/>
+          </a:fillRef>
+          <a:effectRef idx="0">
+            <a:schemeClr val="accent1"/>
+          </a:effectRef>
+          <a:fontRef idx="minor">
+            <a:schemeClr val="tx1"/>
+          </a:fontRef>
+        </p:style>
+      </p:cxnSp>
+      <p:cxnSp>
+        <p:nvCxnSpPr>
+          <p:cNvPr id="291" name="Соединительная линия уступом 620">
+            <a:extLst>
+              <a:ext uri="{FF2B5EF4-FFF2-40B4-BE49-F238E27FC236}">
+                <a16:creationId xmlns:a16="http://schemas.microsoft.com/office/drawing/2014/main" id="{066864E5-04F4-434A-9229-08D47A32E87B}"/>
+              </a:ext>
+            </a:extLst>
+          </p:cNvPr>
+          <p:cNvCxnSpPr>
+            <a:cxnSpLocks/>
+            <a:stCxn id="245" idx="2"/>
+            <a:endCxn id="170" idx="0"/>
+          </p:cNvCxnSpPr>
+          <p:nvPr/>
+        </p:nvCxnSpPr>
+        <p:spPr>
+          <a:xfrm rot="16200000" flipH="1">
+            <a:off x="45134745" y="17610056"/>
+            <a:ext cx="260715" cy="1243940"/>
+          </a:xfrm>
+          <a:prstGeom prst="bentConnector3">
+            <a:avLst>
+              <a:gd name="adj1" fmla="val 50000"/>
+            </a:avLst>
+          </a:prstGeom>
+          <a:ln w="19050">
+            <a:prstDash val="dash"/>
+            <a:tailEnd type="arrow"/>
+          </a:ln>
+        </p:spPr>
+        <p:style>
+          <a:lnRef idx="1">
+            <a:schemeClr val="accent1"/>
+          </a:lnRef>
+          <a:fillRef idx="0">
+            <a:schemeClr val="accent1"/>
+          </a:fillRef>
+          <a:effectRef idx="0">
+            <a:schemeClr val="accent1"/>
+          </a:effectRef>
+          <a:fontRef idx="minor">
+            <a:schemeClr val="tx1"/>
+          </a:fontRef>
+        </p:style>
+      </p:cxnSp>
+      <p:cxnSp>
+        <p:nvCxnSpPr>
+          <p:cNvPr id="294" name="Соединительная линия уступом 620">
+            <a:extLst>
+              <a:ext uri="{FF2B5EF4-FFF2-40B4-BE49-F238E27FC236}">
+                <a16:creationId xmlns:a16="http://schemas.microsoft.com/office/drawing/2014/main" id="{C7785B8F-424F-443D-A8C2-43EC2C92A8DF}"/>
+              </a:ext>
+            </a:extLst>
+          </p:cNvPr>
+          <p:cNvCxnSpPr>
+            <a:cxnSpLocks/>
+            <a:stCxn id="168" idx="2"/>
+            <a:endCxn id="170" idx="0"/>
+          </p:cNvCxnSpPr>
+          <p:nvPr/>
+        </p:nvCxnSpPr>
+        <p:spPr>
+          <a:xfrm rot="5400000">
+            <a:off x="45756715" y="18232026"/>
+            <a:ext cx="260715" cy="12700"/>
+          </a:xfrm>
+          <a:prstGeom prst="bentConnector3">
+            <a:avLst>
+              <a:gd name="adj1" fmla="val 50000"/>
+            </a:avLst>
+          </a:prstGeom>
+          <a:ln w="19050">
+            <a:prstDash val="dash"/>
+            <a:tailEnd type="arrow"/>
+          </a:ln>
+        </p:spPr>
+        <p:style>
+          <a:lnRef idx="1">
+            <a:schemeClr val="accent1"/>
+          </a:lnRef>
+          <a:fillRef idx="0">
+            <a:schemeClr val="accent1"/>
+          </a:fillRef>
+          <a:effectRef idx="0">
+            <a:schemeClr val="accent1"/>
+          </a:effectRef>
+          <a:fontRef idx="minor">
+            <a:schemeClr val="tx1"/>
+          </a:fontRef>
+        </p:style>
+      </p:cxnSp>
+      <p:cxnSp>
+        <p:nvCxnSpPr>
+          <p:cNvPr id="297" name="Соединительная линия уступом 620">
+            <a:extLst>
+              <a:ext uri="{FF2B5EF4-FFF2-40B4-BE49-F238E27FC236}">
+                <a16:creationId xmlns:a16="http://schemas.microsoft.com/office/drawing/2014/main" id="{E78ABD49-6846-4088-9270-5DAE8DC72206}"/>
+              </a:ext>
+            </a:extLst>
+          </p:cNvPr>
+          <p:cNvCxnSpPr>
+            <a:cxnSpLocks/>
+            <a:stCxn id="163" idx="2"/>
+            <a:endCxn id="167" idx="0"/>
+          </p:cNvCxnSpPr>
+          <p:nvPr/>
+        </p:nvCxnSpPr>
+        <p:spPr>
+          <a:xfrm rot="16200000" flipH="1">
+            <a:off x="45760551" y="16008485"/>
+            <a:ext cx="270001" cy="1234932"/>
+          </a:xfrm>
+          <a:prstGeom prst="bentConnector3">
+            <a:avLst>
+              <a:gd name="adj1" fmla="val 50000"/>
+            </a:avLst>
+          </a:prstGeom>
+          <a:ln w="19050">
+            <a:prstDash val="dash"/>
+            <a:tailEnd type="arrow"/>
+          </a:ln>
+        </p:spPr>
+        <p:style>
+          <a:lnRef idx="1">
+            <a:schemeClr val="accent1"/>
+          </a:lnRef>
+          <a:fillRef idx="0">
+            <a:schemeClr val="accent1"/>
+          </a:fillRef>
+          <a:effectRef idx="0">
+            <a:schemeClr val="accent1"/>
+          </a:effectRef>
+          <a:fontRef idx="minor">
+            <a:schemeClr val="tx1"/>
+          </a:fontRef>
+        </p:style>
+      </p:cxnSp>
+      <p:cxnSp>
+        <p:nvCxnSpPr>
+          <p:cNvPr id="302" name="Соединительная линия уступом 620">
+            <a:extLst>
+              <a:ext uri="{FF2B5EF4-FFF2-40B4-BE49-F238E27FC236}">
+                <a16:creationId xmlns:a16="http://schemas.microsoft.com/office/drawing/2014/main" id="{7BEE4F34-8379-47D8-8C0B-4D8DE22A0B97}"/>
+              </a:ext>
+            </a:extLst>
+          </p:cNvPr>
+          <p:cNvCxnSpPr>
+            <a:cxnSpLocks/>
+            <a:stCxn id="172" idx="2"/>
+            <a:endCxn id="167" idx="0"/>
+          </p:cNvCxnSpPr>
+          <p:nvPr/>
+        </p:nvCxnSpPr>
+        <p:spPr>
+          <a:xfrm rot="5400000">
+            <a:off x="46999435" y="16004534"/>
+            <a:ext cx="270000" cy="1242836"/>
+          </a:xfrm>
+          <a:prstGeom prst="bentConnector3">
+            <a:avLst>
+              <a:gd name="adj1" fmla="val 50000"/>
+            </a:avLst>
+          </a:prstGeom>
+          <a:ln w="19050">
+            <a:prstDash val="dash"/>
+            <a:tailEnd type="arrow"/>
+          </a:ln>
+        </p:spPr>
+        <p:style>
+          <a:lnRef idx="1">
+            <a:schemeClr val="accent1"/>
+          </a:lnRef>
+          <a:fillRef idx="0">
+            <a:schemeClr val="accent1"/>
+          </a:fillRef>
+          <a:effectRef idx="0">
+            <a:schemeClr val="accent1"/>
+          </a:effectRef>
+          <a:fontRef idx="minor">
+            <a:schemeClr val="tx1"/>
+          </a:fontRef>
+        </p:style>
+      </p:cxnSp>
+      <p:cxnSp>
+        <p:nvCxnSpPr>
+          <p:cNvPr id="306" name="Соединительная линия уступом 620">
+            <a:extLst>
+              <a:ext uri="{FF2B5EF4-FFF2-40B4-BE49-F238E27FC236}">
+                <a16:creationId xmlns:a16="http://schemas.microsoft.com/office/drawing/2014/main" id="{7BAF9731-AEDE-4588-8E73-E99D5DAF63CC}"/>
+              </a:ext>
+            </a:extLst>
+          </p:cNvPr>
+          <p:cNvCxnSpPr>
+            <a:cxnSpLocks/>
+            <a:stCxn id="167" idx="2"/>
+            <a:endCxn id="160" idx="0"/>
+          </p:cNvCxnSpPr>
+          <p:nvPr/>
+        </p:nvCxnSpPr>
+        <p:spPr>
+          <a:xfrm rot="16200000" flipH="1">
+            <a:off x="46691655" y="17122313"/>
+            <a:ext cx="260718" cy="617995"/>
+          </a:xfrm>
+          <a:prstGeom prst="bentConnector3">
+            <a:avLst>
+              <a:gd name="adj1" fmla="val 50000"/>
+            </a:avLst>
+          </a:prstGeom>
+          <a:ln w="19050">
+            <a:prstDash val="dash"/>
+            <a:tailEnd type="arrow"/>
+          </a:ln>
+        </p:spPr>
+        <p:style>
+          <a:lnRef idx="1">
+            <a:schemeClr val="accent1"/>
+          </a:lnRef>
+          <a:fillRef idx="0">
+            <a:schemeClr val="accent1"/>
+          </a:fillRef>
+          <a:effectRef idx="0">
+            <a:schemeClr val="accent1"/>
+          </a:effectRef>
+          <a:fontRef idx="minor">
+            <a:schemeClr val="tx1"/>
+          </a:fontRef>
+        </p:style>
+      </p:cxnSp>
+      <p:cxnSp>
+        <p:nvCxnSpPr>
+          <p:cNvPr id="309" name="Соединительная линия уступом 620">
+            <a:extLst>
+              <a:ext uri="{FF2B5EF4-FFF2-40B4-BE49-F238E27FC236}">
+                <a16:creationId xmlns:a16="http://schemas.microsoft.com/office/drawing/2014/main" id="{EB1802D9-6AEF-43B0-8B61-D88E8CD70023}"/>
+              </a:ext>
+            </a:extLst>
+          </p:cNvPr>
+          <p:cNvCxnSpPr>
+            <a:cxnSpLocks/>
+            <a:stCxn id="161" idx="2"/>
+            <a:endCxn id="160" idx="0"/>
+          </p:cNvCxnSpPr>
+          <p:nvPr/>
+        </p:nvCxnSpPr>
+        <p:spPr>
+          <a:xfrm rot="5400000">
+            <a:off x="47312762" y="17118578"/>
+            <a:ext cx="261343" cy="624841"/>
+          </a:xfrm>
+          <a:prstGeom prst="bentConnector3">
+            <a:avLst>
+              <a:gd name="adj1" fmla="val 50000"/>
+            </a:avLst>
+          </a:prstGeom>
+          <a:ln w="19050">
+            <a:prstDash val="dash"/>
+            <a:tailEnd type="arrow"/>
+          </a:ln>
+        </p:spPr>
+        <p:style>
+          <a:lnRef idx="1">
+            <a:schemeClr val="accent1"/>
+          </a:lnRef>
+          <a:fillRef idx="0">
+            <a:schemeClr val="accent1"/>
+          </a:fillRef>
+          <a:effectRef idx="0">
+            <a:schemeClr val="accent1"/>
+          </a:effectRef>
+          <a:fontRef idx="minor">
+            <a:schemeClr val="tx1"/>
+          </a:fontRef>
+        </p:style>
+      </p:cxnSp>
+      <p:cxnSp>
+        <p:nvCxnSpPr>
+          <p:cNvPr id="312" name="Соединительная линия уступом 620">
+            <a:extLst>
+              <a:ext uri="{FF2B5EF4-FFF2-40B4-BE49-F238E27FC236}">
+                <a16:creationId xmlns:a16="http://schemas.microsoft.com/office/drawing/2014/main" id="{8A4CC061-E820-4B91-8265-908A117C76F1}"/>
+              </a:ext>
+            </a:extLst>
+          </p:cNvPr>
+          <p:cNvCxnSpPr>
+            <a:cxnSpLocks/>
+            <a:stCxn id="161" idx="2"/>
+            <a:endCxn id="166" idx="0"/>
+          </p:cNvCxnSpPr>
+          <p:nvPr/>
+        </p:nvCxnSpPr>
+        <p:spPr>
+          <a:xfrm rot="16200000" flipH="1">
+            <a:off x="47933792" y="17122388"/>
+            <a:ext cx="261343" cy="617220"/>
+          </a:xfrm>
+          <a:prstGeom prst="bentConnector3">
+            <a:avLst>
+              <a:gd name="adj1" fmla="val 50000"/>
+            </a:avLst>
+          </a:prstGeom>
+          <a:ln w="19050">
+            <a:tailEnd type="arrow"/>
+          </a:ln>
+        </p:spPr>
+        <p:style>
+          <a:lnRef idx="1">
+            <a:schemeClr val="accent1"/>
+          </a:lnRef>
+          <a:fillRef idx="0">
+            <a:schemeClr val="accent1"/>
+          </a:fillRef>
+          <a:effectRef idx="0">
+            <a:schemeClr val="accent1"/>
+          </a:effectRef>
+          <a:fontRef idx="minor">
+            <a:schemeClr val="tx1"/>
+          </a:fontRef>
+        </p:style>
+      </p:cxnSp>
+      <p:cxnSp>
+        <p:nvCxnSpPr>
+          <p:cNvPr id="315" name="Соединительная линия уступом 620">
+            <a:extLst>
+              <a:ext uri="{FF2B5EF4-FFF2-40B4-BE49-F238E27FC236}">
+                <a16:creationId xmlns:a16="http://schemas.microsoft.com/office/drawing/2014/main" id="{5ACF4EDF-5A7A-4565-8335-9607E0AC4C9F}"/>
+              </a:ext>
+            </a:extLst>
+          </p:cNvPr>
+          <p:cNvCxnSpPr>
+            <a:cxnSpLocks/>
+            <a:stCxn id="245" idx="2"/>
+            <a:endCxn id="136" idx="0"/>
+          </p:cNvCxnSpPr>
+          <p:nvPr/>
+        </p:nvCxnSpPr>
+        <p:spPr>
+          <a:xfrm rot="16200000" flipH="1">
+            <a:off x="44647695" y="18097105"/>
+            <a:ext cx="1861535" cy="1870661"/>
+          </a:xfrm>
+          <a:prstGeom prst="bentConnector3">
+            <a:avLst>
+              <a:gd name="adj1" fmla="val 7019"/>
+            </a:avLst>
+          </a:prstGeom>
+          <a:ln w="19050">
+            <a:prstDash val="dash"/>
+            <a:tailEnd type="arrow"/>
+          </a:ln>
+        </p:spPr>
+        <p:style>
+          <a:lnRef idx="1">
+            <a:schemeClr val="accent1"/>
+          </a:lnRef>
+          <a:fillRef idx="0">
+            <a:schemeClr val="accent1"/>
+          </a:fillRef>
+          <a:effectRef idx="0">
+            <a:schemeClr val="accent1"/>
+          </a:effectRef>
+          <a:fontRef idx="minor">
+            <a:schemeClr val="tx1"/>
+          </a:fontRef>
+        </p:style>
+      </p:cxnSp>
+      <p:cxnSp>
+        <p:nvCxnSpPr>
+          <p:cNvPr id="319" name="Соединительная линия уступом 620">
+            <a:extLst>
+              <a:ext uri="{FF2B5EF4-FFF2-40B4-BE49-F238E27FC236}">
+                <a16:creationId xmlns:a16="http://schemas.microsoft.com/office/drawing/2014/main" id="{EEADD502-DF21-435B-AB40-628C775C396B}"/>
+              </a:ext>
+            </a:extLst>
+          </p:cNvPr>
+          <p:cNvCxnSpPr>
+            <a:cxnSpLocks/>
+            <a:stCxn id="168" idx="2"/>
+            <a:endCxn id="136" idx="0"/>
+          </p:cNvCxnSpPr>
+          <p:nvPr/>
+        </p:nvCxnSpPr>
+        <p:spPr>
+          <a:xfrm rot="16200000" flipH="1">
+            <a:off x="45269665" y="18719075"/>
+            <a:ext cx="1861535" cy="626721"/>
+          </a:xfrm>
+          <a:prstGeom prst="bentConnector3">
+            <a:avLst>
+              <a:gd name="adj1" fmla="val 7019"/>
+            </a:avLst>
+          </a:prstGeom>
+          <a:ln w="19050">
+            <a:prstDash val="dash"/>
+            <a:tailEnd type="arrow"/>
+          </a:ln>
+        </p:spPr>
+        <p:style>
+          <a:lnRef idx="1">
+            <a:schemeClr val="accent1"/>
+          </a:lnRef>
+          <a:fillRef idx="0">
+            <a:schemeClr val="accent1"/>
+          </a:fillRef>
+          <a:effectRef idx="0">
+            <a:schemeClr val="accent1"/>
+          </a:effectRef>
+          <a:fontRef idx="minor">
+            <a:schemeClr val="tx1"/>
+          </a:fontRef>
+        </p:style>
+      </p:cxnSp>
+      <p:cxnSp>
+        <p:nvCxnSpPr>
+          <p:cNvPr id="323" name="Соединительная линия уступом 620">
+            <a:extLst>
+              <a:ext uri="{FF2B5EF4-FFF2-40B4-BE49-F238E27FC236}">
+                <a16:creationId xmlns:a16="http://schemas.microsoft.com/office/drawing/2014/main" id="{FBF4967B-DC3B-4838-96A4-4D328C5EB6C2}"/>
+              </a:ext>
+            </a:extLst>
+          </p:cNvPr>
+          <p:cNvCxnSpPr>
+            <a:cxnSpLocks/>
+            <a:stCxn id="245" idx="2"/>
+            <a:endCxn id="137" idx="0"/>
+          </p:cNvCxnSpPr>
+          <p:nvPr/>
+        </p:nvCxnSpPr>
+        <p:spPr>
+          <a:xfrm rot="16200000" flipH="1">
+            <a:off x="45268725" y="17476075"/>
+            <a:ext cx="1861535" cy="3112721"/>
+          </a:xfrm>
+          <a:prstGeom prst="bentConnector3">
+            <a:avLst>
+              <a:gd name="adj1" fmla="val 7019"/>
+            </a:avLst>
+          </a:prstGeom>
+          <a:ln w="19050">
+            <a:prstDash val="dash"/>
+            <a:tailEnd type="arrow"/>
+          </a:ln>
+        </p:spPr>
+        <p:style>
+          <a:lnRef idx="1">
+            <a:schemeClr val="accent1"/>
+          </a:lnRef>
+          <a:fillRef idx="0">
+            <a:schemeClr val="accent1"/>
+          </a:fillRef>
+          <a:effectRef idx="0">
+            <a:schemeClr val="accent1"/>
+          </a:effectRef>
+          <a:fontRef idx="minor">
+            <a:schemeClr val="tx1"/>
+          </a:fontRef>
+        </p:style>
+      </p:cxnSp>
+      <p:cxnSp>
+        <p:nvCxnSpPr>
+          <p:cNvPr id="327" name="Соединительная линия уступом 620">
+            <a:extLst>
+              <a:ext uri="{FF2B5EF4-FFF2-40B4-BE49-F238E27FC236}">
+                <a16:creationId xmlns:a16="http://schemas.microsoft.com/office/drawing/2014/main" id="{46EC63F1-0538-4C28-BA2B-A65FEC33ACED}"/>
+              </a:ext>
+            </a:extLst>
+          </p:cNvPr>
+          <p:cNvCxnSpPr>
+            <a:cxnSpLocks/>
+            <a:stCxn id="168" idx="2"/>
+            <a:endCxn id="137" idx="0"/>
+          </p:cNvCxnSpPr>
+          <p:nvPr/>
+        </p:nvCxnSpPr>
+        <p:spPr>
+          <a:xfrm rot="16200000" flipH="1">
+            <a:off x="45890695" y="18098045"/>
+            <a:ext cx="1861535" cy="1868781"/>
+          </a:xfrm>
+          <a:prstGeom prst="bentConnector3">
+            <a:avLst>
+              <a:gd name="adj1" fmla="val 7019"/>
+            </a:avLst>
+          </a:prstGeom>
+          <a:ln w="19050">
+            <a:prstDash val="dash"/>
+            <a:tailEnd type="arrow"/>
+          </a:ln>
+        </p:spPr>
+        <p:style>
+          <a:lnRef idx="1">
+            <a:schemeClr val="accent1"/>
+          </a:lnRef>
+          <a:fillRef idx="0">
+            <a:schemeClr val="accent1"/>
+          </a:fillRef>
+          <a:effectRef idx="0">
+            <a:schemeClr val="accent1"/>
+          </a:effectRef>
+          <a:fontRef idx="minor">
+            <a:schemeClr val="tx1"/>
+          </a:fontRef>
+        </p:style>
+      </p:cxnSp>
+      <p:cxnSp>
+        <p:nvCxnSpPr>
+          <p:cNvPr id="333" name="Соединительная линия уступом 620">
+            <a:extLst>
+              <a:ext uri="{FF2B5EF4-FFF2-40B4-BE49-F238E27FC236}">
+                <a16:creationId xmlns:a16="http://schemas.microsoft.com/office/drawing/2014/main" id="{4AB5D48F-D0AA-4EBC-BF72-566D53293AF6}"/>
+              </a:ext>
+            </a:extLst>
+          </p:cNvPr>
+          <p:cNvCxnSpPr>
+            <a:cxnSpLocks/>
+            <a:stCxn id="134" idx="2"/>
+            <a:endCxn id="162" idx="0"/>
+          </p:cNvCxnSpPr>
+          <p:nvPr/>
+        </p:nvCxnSpPr>
+        <p:spPr>
+          <a:xfrm rot="5400000">
+            <a:off x="47000341" y="21434583"/>
+            <a:ext cx="261342" cy="3"/>
+          </a:xfrm>
+          <a:prstGeom prst="bentConnector3">
+            <a:avLst>
+              <a:gd name="adj1" fmla="val 50000"/>
+            </a:avLst>
+          </a:prstGeom>
+          <a:ln w="19050">
+            <a:tailEnd type="arrow"/>
+          </a:ln>
+        </p:spPr>
+        <p:style>
+          <a:lnRef idx="1">
+            <a:schemeClr val="accent1"/>
+          </a:lnRef>
+          <a:fillRef idx="0">
+            <a:schemeClr val="accent1"/>
+          </a:fillRef>
+          <a:effectRef idx="0">
+            <a:schemeClr val="accent1"/>
+          </a:effectRef>
+          <a:fontRef idx="minor">
+            <a:schemeClr val="tx1"/>
+          </a:fontRef>
+        </p:style>
+      </p:cxnSp>
+      <p:sp>
+        <p:nvSpPr>
+          <p:cNvPr id="348" name="Прямоугольник 347">
+            <a:extLst>
+              <a:ext uri="{FF2B5EF4-FFF2-40B4-BE49-F238E27FC236}">
+                <a16:creationId xmlns:a16="http://schemas.microsoft.com/office/drawing/2014/main" id="{96EF85BB-BE9E-4122-8899-B2A2E5D8A2E8}"/>
+              </a:ext>
+            </a:extLst>
+          </p:cNvPr>
+          <p:cNvSpPr/>
+          <p:nvPr/>
+        </p:nvSpPr>
+        <p:spPr>
+          <a:xfrm>
+            <a:off x="6931766" y="1436019"/>
+            <a:ext cx="926325" cy="540000"/>
+          </a:xfrm>
+          <a:prstGeom prst="rect">
+            <a:avLst/>
+          </a:prstGeom>
+          <a:solidFill>
+            <a:schemeClr val="bg1"/>
+          </a:solidFill>
+          <a:ln w="19050"/>
+        </p:spPr>
+        <p:style>
+          <a:lnRef idx="2">
+            <a:schemeClr val="accent1"/>
+          </a:lnRef>
+          <a:fillRef idx="1">
+            <a:schemeClr val="lt1"/>
+          </a:fillRef>
+          <a:effectRef idx="0">
+            <a:schemeClr val="accent1"/>
+          </a:effectRef>
+          <a:fontRef idx="minor">
+            <a:schemeClr val="dk1"/>
+          </a:fontRef>
+        </p:style>
+        <p:txBody>
+          <a:bodyPr lIns="124733" tIns="62367" rIns="124733" bIns="62367" rtlCol="0" anchor="ctr"/>
+          <a:lstStyle/>
+          <a:p>
+            <a:pPr algn="ctr"/>
+            <a:r>
+              <a:rPr lang="ru-RU" sz="700" dirty="0"/>
+              <a:t>Интегрировать Французские школы в новую систему образования </a:t>
+            </a:r>
+            <a:r>
+              <a:rPr lang="ru-RU" sz="100" dirty="0"/>
+              <a:t>(Доступ к аттестату о среднем образовании был предоставлен марокканскому мусульманскому населению в 1930 году, но доступ к элитным французским школам ( лицеям ) был предоставлен мусульманскому населению только после окончания войны. [ 11 ] Около девяноста процентов мусульманского населения Марокко были неграмотны во время Второй мировой войны. [)</a:t>
+            </a:r>
+            <a:endParaRPr lang="ru-RU" sz="700" dirty="0"/>
+          </a:p>
+        </p:txBody>
+      </p:sp>
+      <p:sp>
+        <p:nvSpPr>
+          <p:cNvPr id="349" name="Прямоугольник 348">
+            <a:extLst>
+              <a:ext uri="{FF2B5EF4-FFF2-40B4-BE49-F238E27FC236}">
+                <a16:creationId xmlns:a16="http://schemas.microsoft.com/office/drawing/2014/main" id="{4CA8FC15-8BD7-44C7-B0F7-E64D65C693AC}"/>
+              </a:ext>
+            </a:extLst>
+          </p:cNvPr>
+          <p:cNvSpPr/>
+          <p:nvPr/>
+        </p:nvSpPr>
+        <p:spPr>
+          <a:xfrm>
+            <a:off x="6314546" y="635310"/>
+            <a:ext cx="926325" cy="540000"/>
+          </a:xfrm>
+          <a:prstGeom prst="rect">
+            <a:avLst/>
+          </a:prstGeom>
+          <a:solidFill>
+            <a:schemeClr val="bg1"/>
+          </a:solidFill>
+          <a:ln w="19050"/>
+        </p:spPr>
+        <p:style>
+          <a:lnRef idx="2">
+            <a:schemeClr val="accent1"/>
+          </a:lnRef>
+          <a:fillRef idx="1">
+            <a:schemeClr val="lt1"/>
+          </a:fillRef>
+          <a:effectRef idx="0">
+            <a:schemeClr val="accent1"/>
+          </a:effectRef>
+          <a:fontRef idx="minor">
+            <a:schemeClr val="dk1"/>
+          </a:fontRef>
+        </p:style>
+        <p:txBody>
+          <a:bodyPr lIns="124733" tIns="62367" rIns="124733" bIns="62367" rtlCol="0" anchor="ctr"/>
+          <a:lstStyle/>
+          <a:p>
+            <a:pPr algn="ctr"/>
+            <a:r>
+              <a:rPr lang="ru-RU" sz="700" dirty="0"/>
+              <a:t>Внедрить светское образование</a:t>
+            </a:r>
+          </a:p>
+        </p:txBody>
+      </p:sp>
+      <p:sp>
+        <p:nvSpPr>
+          <p:cNvPr id="351" name="Прямоугольник 350">
+            <a:extLst>
+              <a:ext uri="{FF2B5EF4-FFF2-40B4-BE49-F238E27FC236}">
+                <a16:creationId xmlns:a16="http://schemas.microsoft.com/office/drawing/2014/main" id="{81001C44-0901-492A-8AC5-FE2786AEA7B3}"/>
+              </a:ext>
+            </a:extLst>
+          </p:cNvPr>
+          <p:cNvSpPr/>
+          <p:nvPr/>
+        </p:nvSpPr>
+        <p:spPr>
+          <a:xfrm>
+            <a:off x="7556606" y="635310"/>
+            <a:ext cx="926325" cy="540000"/>
+          </a:xfrm>
+          <a:prstGeom prst="rect">
+            <a:avLst/>
+          </a:prstGeom>
+          <a:solidFill>
+            <a:schemeClr val="bg1"/>
+          </a:solidFill>
+          <a:ln w="19050"/>
+        </p:spPr>
+        <p:style>
+          <a:lnRef idx="2">
+            <a:schemeClr val="accent1"/>
+          </a:lnRef>
+          <a:fillRef idx="1">
+            <a:schemeClr val="lt1"/>
+          </a:fillRef>
+          <a:effectRef idx="0">
+            <a:schemeClr val="accent1"/>
+          </a:effectRef>
+          <a:fontRef idx="minor">
+            <a:schemeClr val="dk1"/>
+          </a:fontRef>
+        </p:style>
+        <p:txBody>
+          <a:bodyPr lIns="124733" tIns="62367" rIns="124733" bIns="62367" rtlCol="0" anchor="ctr"/>
+          <a:lstStyle/>
+          <a:p>
+            <a:pPr algn="ctr"/>
+            <a:r>
+              <a:rPr lang="ru-RU" sz="700" dirty="0"/>
+              <a:t>Расширить религиозные школы</a:t>
+            </a:r>
+          </a:p>
+        </p:txBody>
+      </p:sp>
+      <p:cxnSp>
+        <p:nvCxnSpPr>
+          <p:cNvPr id="352" name="Прямая соединительная линия 351">
+            <a:extLst>
+              <a:ext uri="{FF2B5EF4-FFF2-40B4-BE49-F238E27FC236}">
+                <a16:creationId xmlns:a16="http://schemas.microsoft.com/office/drawing/2014/main" id="{1CE47EEF-D77B-4B21-8647-CDBA028F81B3}"/>
+              </a:ext>
+            </a:extLst>
+          </p:cNvPr>
+          <p:cNvCxnSpPr>
+            <a:cxnSpLocks/>
+            <a:stCxn id="351" idx="1"/>
+            <a:endCxn id="349" idx="3"/>
+          </p:cNvCxnSpPr>
+          <p:nvPr/>
+        </p:nvCxnSpPr>
+        <p:spPr>
+          <a:xfrm flipH="1">
+            <a:off x="7240871" y="905310"/>
+            <a:ext cx="315735" cy="0"/>
+          </a:xfrm>
+          <a:prstGeom prst="line">
+            <a:avLst/>
+          </a:prstGeom>
+          <a:ln w="38100">
+            <a:solidFill>
+              <a:srgbClr val="C00000"/>
+            </a:solidFill>
+          </a:ln>
+        </p:spPr>
+        <p:style>
+          <a:lnRef idx="1">
+            <a:schemeClr val="accent1"/>
+          </a:lnRef>
+          <a:fillRef idx="0">
+            <a:schemeClr val="accent1"/>
+          </a:fillRef>
+          <a:effectRef idx="0">
+            <a:schemeClr val="accent1"/>
+          </a:effectRef>
+          <a:fontRef idx="minor">
+            <a:schemeClr val="tx1"/>
+          </a:fontRef>
+        </p:style>
+      </p:cxnSp>
+      <p:cxnSp>
+        <p:nvCxnSpPr>
+          <p:cNvPr id="353" name="Соединительная линия уступом 620">
+            <a:extLst>
+              <a:ext uri="{FF2B5EF4-FFF2-40B4-BE49-F238E27FC236}">
+                <a16:creationId xmlns:a16="http://schemas.microsoft.com/office/drawing/2014/main" id="{E0DD6A66-BBE5-472E-9058-C725ABAFA56D}"/>
+              </a:ext>
+            </a:extLst>
+          </p:cNvPr>
+          <p:cNvCxnSpPr>
+            <a:cxnSpLocks/>
+            <a:stCxn id="349" idx="2"/>
+            <a:endCxn id="348" idx="0"/>
+          </p:cNvCxnSpPr>
+          <p:nvPr/>
+        </p:nvCxnSpPr>
+        <p:spPr>
+          <a:xfrm rot="16200000" flipH="1">
+            <a:off x="6955965" y="997054"/>
+            <a:ext cx="260709" cy="617220"/>
+          </a:xfrm>
+          <a:prstGeom prst="bentConnector3">
+            <a:avLst>
+              <a:gd name="adj1" fmla="val 50000"/>
+            </a:avLst>
+          </a:prstGeom>
+          <a:ln w="19050">
+            <a:prstDash val="dash"/>
+            <a:tailEnd type="arrow"/>
+          </a:ln>
+        </p:spPr>
+        <p:style>
+          <a:lnRef idx="1">
+            <a:schemeClr val="accent1"/>
+          </a:lnRef>
+          <a:fillRef idx="0">
+            <a:schemeClr val="accent1"/>
+          </a:fillRef>
+          <a:effectRef idx="0">
+            <a:schemeClr val="accent1"/>
+          </a:effectRef>
+          <a:fontRef idx="minor">
+            <a:schemeClr val="tx1"/>
+          </a:fontRef>
+        </p:style>
+      </p:cxnSp>
+      <p:cxnSp>
+        <p:nvCxnSpPr>
+          <p:cNvPr id="354" name="Соединительная линия уступом 620">
+            <a:extLst>
+              <a:ext uri="{FF2B5EF4-FFF2-40B4-BE49-F238E27FC236}">
+                <a16:creationId xmlns:a16="http://schemas.microsoft.com/office/drawing/2014/main" id="{36138E5C-EE6A-49E1-BF94-C6EF03975FF7}"/>
+              </a:ext>
+            </a:extLst>
+          </p:cNvPr>
+          <p:cNvCxnSpPr>
+            <a:cxnSpLocks/>
+            <a:stCxn id="351" idx="2"/>
+            <a:endCxn id="348" idx="0"/>
+          </p:cNvCxnSpPr>
+          <p:nvPr/>
+        </p:nvCxnSpPr>
+        <p:spPr>
+          <a:xfrm rot="5400000">
+            <a:off x="7576995" y="993244"/>
+            <a:ext cx="260709" cy="624840"/>
+          </a:xfrm>
+          <a:prstGeom prst="bentConnector3">
+            <a:avLst>
+              <a:gd name="adj1" fmla="val 50000"/>
+            </a:avLst>
+          </a:prstGeom>
+          <a:ln w="19050">
+            <a:prstDash val="dash"/>
+            <a:tailEnd type="arrow"/>
+          </a:ln>
+        </p:spPr>
+        <p:style>
+          <a:lnRef idx="1">
+            <a:schemeClr val="accent1"/>
+          </a:lnRef>
+          <a:fillRef idx="0">
+            <a:schemeClr val="accent1"/>
+          </a:fillRef>
+          <a:effectRef idx="0">
+            <a:schemeClr val="accent1"/>
+          </a:effectRef>
+          <a:fontRef idx="minor">
+            <a:schemeClr val="tx1"/>
+          </a:fontRef>
+        </p:style>
+      </p:cxnSp>
+      <p:cxnSp>
+        <p:nvCxnSpPr>
+          <p:cNvPr id="355" name="Соединительная линия уступом 620">
+            <a:extLst>
+              <a:ext uri="{FF2B5EF4-FFF2-40B4-BE49-F238E27FC236}">
+                <a16:creationId xmlns:a16="http://schemas.microsoft.com/office/drawing/2014/main" id="{7C251E4A-3D3C-47B2-8576-73040B029DB0}"/>
+              </a:ext>
+            </a:extLst>
+          </p:cNvPr>
+          <p:cNvCxnSpPr>
+            <a:cxnSpLocks/>
+          </p:cNvCxnSpPr>
+          <p:nvPr/>
+        </p:nvCxnSpPr>
+        <p:spPr>
+          <a:xfrm rot="5400000">
+            <a:off x="6335241" y="-424381"/>
+            <a:ext cx="260098" cy="1859281"/>
           </a:xfrm>
           <a:prstGeom prst="bentConnector3">
             <a:avLst>

--- a/Наработки/диздоки/Марокко/Марокко.pptx
+++ b/Наработки/диздоки/Марокко/Марокко.pptx
@@ -209,7 +209,7 @@
             <a:fld id="{33E3D7F9-E251-484C-A6FF-FA958879DF69}" type="datetimeFigureOut">
               <a:rPr lang="ru-RU" smtClean="0"/>
               <a:pPr/>
-              <a:t>10.06.2026</a:t>
+              <a:t>11.06.2026</a:t>
             </a:fld>
             <a:endParaRPr lang="ru-RU"/>
           </a:p>
@@ -699,7 +699,7 @@
             <a:fld id="{85A5DE44-605B-4D3B-B2B7-94543DF81A36}" type="datetimeFigureOut">
               <a:rPr lang="ru-RU" smtClean="0"/>
               <a:pPr/>
-              <a:t>10.06.2026</a:t>
+              <a:t>11.06.2026</a:t>
             </a:fld>
             <a:endParaRPr lang="ru-RU"/>
           </a:p>
@@ -871,7 +871,7 @@
             <a:fld id="{85A5DE44-605B-4D3B-B2B7-94543DF81A36}" type="datetimeFigureOut">
               <a:rPr lang="ru-RU" smtClean="0"/>
               <a:pPr/>
-              <a:t>10.06.2026</a:t>
+              <a:t>11.06.2026</a:t>
             </a:fld>
             <a:endParaRPr lang="ru-RU"/>
           </a:p>
@@ -1053,7 +1053,7 @@
             <a:fld id="{85A5DE44-605B-4D3B-B2B7-94543DF81A36}" type="datetimeFigureOut">
               <a:rPr lang="ru-RU" smtClean="0"/>
               <a:pPr/>
-              <a:t>10.06.2026</a:t>
+              <a:t>11.06.2026</a:t>
             </a:fld>
             <a:endParaRPr lang="ru-RU"/>
           </a:p>
@@ -1225,7 +1225,7 @@
             <a:fld id="{85A5DE44-605B-4D3B-B2B7-94543DF81A36}" type="datetimeFigureOut">
               <a:rPr lang="ru-RU" smtClean="0"/>
               <a:pPr/>
-              <a:t>10.06.2026</a:t>
+              <a:t>11.06.2026</a:t>
             </a:fld>
             <a:endParaRPr lang="ru-RU"/>
           </a:p>
@@ -1473,7 +1473,7 @@
             <a:fld id="{85A5DE44-605B-4D3B-B2B7-94543DF81A36}" type="datetimeFigureOut">
               <a:rPr lang="ru-RU" smtClean="0"/>
               <a:pPr/>
-              <a:t>10.06.2026</a:t>
+              <a:t>11.06.2026</a:t>
             </a:fld>
             <a:endParaRPr lang="ru-RU"/>
           </a:p>
@@ -1707,7 +1707,7 @@
             <a:fld id="{85A5DE44-605B-4D3B-B2B7-94543DF81A36}" type="datetimeFigureOut">
               <a:rPr lang="ru-RU" smtClean="0"/>
               <a:pPr/>
-              <a:t>10.06.2026</a:t>
+              <a:t>11.06.2026</a:t>
             </a:fld>
             <a:endParaRPr lang="ru-RU"/>
           </a:p>
@@ -2076,7 +2076,7 @@
             <a:fld id="{85A5DE44-605B-4D3B-B2B7-94543DF81A36}" type="datetimeFigureOut">
               <a:rPr lang="ru-RU" smtClean="0"/>
               <a:pPr/>
-              <a:t>10.06.2026</a:t>
+              <a:t>11.06.2026</a:t>
             </a:fld>
             <a:endParaRPr lang="ru-RU"/>
           </a:p>
@@ -2196,7 +2196,7 @@
             <a:fld id="{85A5DE44-605B-4D3B-B2B7-94543DF81A36}" type="datetimeFigureOut">
               <a:rPr lang="ru-RU" smtClean="0"/>
               <a:pPr/>
-              <a:t>10.06.2026</a:t>
+              <a:t>11.06.2026</a:t>
             </a:fld>
             <a:endParaRPr lang="ru-RU"/>
           </a:p>
@@ -2293,7 +2293,7 @@
             <a:fld id="{85A5DE44-605B-4D3B-B2B7-94543DF81A36}" type="datetimeFigureOut">
               <a:rPr lang="ru-RU" smtClean="0"/>
               <a:pPr/>
-              <a:t>10.06.2026</a:t>
+              <a:t>11.06.2026</a:t>
             </a:fld>
             <a:endParaRPr lang="ru-RU"/>
           </a:p>
@@ -2572,7 +2572,7 @@
             <a:fld id="{85A5DE44-605B-4D3B-B2B7-94543DF81A36}" type="datetimeFigureOut">
               <a:rPr lang="ru-RU" smtClean="0"/>
               <a:pPr/>
-              <a:t>10.06.2026</a:t>
+              <a:t>11.06.2026</a:t>
             </a:fld>
             <a:endParaRPr lang="ru-RU"/>
           </a:p>
@@ -2831,7 +2831,7 @@
             <a:fld id="{85A5DE44-605B-4D3B-B2B7-94543DF81A36}" type="datetimeFigureOut">
               <a:rPr lang="ru-RU" smtClean="0"/>
               <a:pPr/>
-              <a:t>10.06.2026</a:t>
+              <a:t>11.06.2026</a:t>
             </a:fld>
             <a:endParaRPr lang="ru-RU"/>
           </a:p>
@@ -3046,7 +3046,7 @@
             <a:fld id="{85A5DE44-605B-4D3B-B2B7-94543DF81A36}" type="datetimeFigureOut">
               <a:rPr lang="ru-RU" smtClean="0"/>
               <a:pPr/>
-              <a:t>10.06.2026</a:t>
+              <a:t>11.06.2026</a:t>
             </a:fld>
             <a:endParaRPr lang="ru-RU"/>
           </a:p>
@@ -8623,7 +8623,7 @@
         </p:nvSpPr>
         <p:spPr>
           <a:xfrm>
-            <a:off x="44814922" y="15950951"/>
+            <a:off x="46049853" y="15944514"/>
             <a:ext cx="926325" cy="540000"/>
           </a:xfrm>
           <a:prstGeom prst="rect">
@@ -9452,7 +9452,100 @@
         </p:nvSpPr>
         <p:spPr>
           <a:xfrm>
-            <a:off x="47292690" y="15950952"/>
+            <a:off x="6468606" y="1807655"/>
+            <a:ext cx="926325" cy="540000"/>
+          </a:xfrm>
+          <a:prstGeom prst="rect">
+            <a:avLst/>
+          </a:prstGeom>
+          <a:solidFill>
+            <a:schemeClr val="bg1">
+              <a:lumMod val="50000"/>
+            </a:schemeClr>
+          </a:solidFill>
+          <a:ln w="19050"/>
+        </p:spPr>
+        <p:style>
+          <a:lnRef idx="2">
+            <a:schemeClr val="accent1"/>
+          </a:lnRef>
+          <a:fillRef idx="1">
+            <a:schemeClr val="lt1"/>
+          </a:fillRef>
+          <a:effectRef idx="0">
+            <a:schemeClr val="accent1"/>
+          </a:effectRef>
+          <a:fontRef idx="minor">
+            <a:schemeClr val="dk1"/>
+          </a:fontRef>
+        </p:style>
+        <p:txBody>
+          <a:bodyPr lIns="124733" tIns="62367" rIns="124733" bIns="62367" rtlCol="0" anchor="ctr"/>
+          <a:lstStyle/>
+          <a:p>
+            <a:pPr algn="ctr"/>
+            <a:r>
+              <a:rPr lang="ru-RU" sz="700" dirty="0"/>
+              <a:t>Провести трудовые реформы</a:t>
+            </a:r>
+          </a:p>
+          <a:p>
+            <a:pPr algn="ctr"/>
+            <a:r>
+              <a:rPr lang="ru-RU" sz="100" dirty="0"/>
+              <a:t>(После прихода к власти левых во Франции летом 1936 года по всему Марокко прокатилась волна рабочих протестов. Крупнейшие забастовки вспыхнули на фосфатных рудниках </a:t>
+            </a:r>
+            <a:r>
+              <a:rPr lang="ru-RU" sz="100" dirty="0" err="1"/>
+              <a:t>Хурибги</a:t>
+            </a:r>
+            <a:r>
+              <a:rPr lang="ru-RU" sz="100" dirty="0"/>
+              <a:t>. Французский генеральный резидент Шарль </a:t>
+            </a:r>
+            <a:r>
+              <a:rPr lang="ru-RU" sz="100" dirty="0" err="1"/>
+              <a:t>Ногес</a:t>
+            </a:r>
+            <a:r>
+              <a:rPr lang="ru-RU" sz="100" dirty="0"/>
+              <a:t> был вынужден пойти на экономические уступки местному </a:t>
+            </a:r>
+            <a:r>
+              <a:rPr lang="ru-RU" sz="100" dirty="0" err="1"/>
+              <a:t>населению:Была</a:t>
+            </a:r>
+            <a:r>
+              <a:rPr lang="ru-RU" sz="100" dirty="0"/>
+              <a:t> законодательно увеличена минимальная заработная плата для марокканских </a:t>
+            </a:r>
+            <a:r>
+              <a:rPr lang="ru-RU" sz="100" dirty="0" err="1"/>
+              <a:t>рабочих.Была</a:t>
+            </a:r>
+            <a:r>
+              <a:rPr lang="ru-RU" sz="100" dirty="0"/>
+              <a:t> введена официальная 40-часовая рабочая неделя (для европейских специалистов) и сокращен рабочий день для местных шахтеров.)</a:t>
+            </a:r>
+            <a:endParaRPr lang="ru-RU" sz="600" dirty="0"/>
+          </a:p>
+        </p:txBody>
+      </p:sp>
+      <p:sp>
+        <p:nvSpPr>
+          <p:cNvPr id="164" name="Прямоугольник 163">
+            <a:extLst>
+              <a:ext uri="{FF2B5EF4-FFF2-40B4-BE49-F238E27FC236}">
+                <a16:creationId xmlns:a16="http://schemas.microsoft.com/office/drawing/2014/main" id="{CB3D1342-AF6F-45C2-8B29-2D66C97503EB}"/>
+              </a:ext>
+            </a:extLst>
+          </p:cNvPr>
+          <p:cNvSpPr/>
+          <p:nvPr/>
+        </p:nvSpPr>
+        <p:spPr>
+          <a:xfrm>
+            <a:off x="47909908" y="19163101"/>
             <a:ext cx="926325" cy="540000"/>
           </a:xfrm>
           <a:prstGeom prst="rect">
@@ -9484,22 +9577,405 @@
             <a:pPr algn="ctr"/>
             <a:r>
               <a:rPr lang="ru-RU" sz="700" dirty="0"/>
-              <a:t>Провести трудовые реформы</a:t>
-            </a:r>
-          </a:p>
+              <a:t>Запустить военные заводы и мастерские в </a:t>
+            </a:r>
+            <a:r>
+              <a:rPr lang="ru-RU" sz="700" dirty="0" err="1"/>
+              <a:t>Макнесе</a:t>
+            </a:r>
+            <a:r>
+              <a:rPr lang="ru-RU" sz="700" dirty="0"/>
+              <a:t> и </a:t>
+            </a:r>
+            <a:r>
+              <a:rPr lang="ru-RU" sz="700" dirty="0" err="1"/>
+              <a:t>Ребате</a:t>
+            </a:r>
+            <a:endParaRPr lang="ru-RU" sz="700" dirty="0"/>
+          </a:p>
+        </p:txBody>
+      </p:sp>
+      <p:cxnSp>
+        <p:nvCxnSpPr>
+          <p:cNvPr id="189" name="Соединительная линия уступом 620">
+            <a:extLst>
+              <a:ext uri="{FF2B5EF4-FFF2-40B4-BE49-F238E27FC236}">
+                <a16:creationId xmlns:a16="http://schemas.microsoft.com/office/drawing/2014/main" id="{7C686C0B-B75D-4F52-8561-05F2CAD940FD}"/>
+              </a:ext>
+            </a:extLst>
+          </p:cNvPr>
+          <p:cNvCxnSpPr>
+            <a:cxnSpLocks/>
+            <a:stCxn id="170" idx="2"/>
+            <a:endCxn id="169" idx="0"/>
+          </p:cNvCxnSpPr>
+          <p:nvPr/>
+        </p:nvCxnSpPr>
+        <p:spPr>
+          <a:xfrm rot="16200000" flipH="1">
+            <a:off x="45758929" y="19030526"/>
+            <a:ext cx="256286" cy="1"/>
+          </a:xfrm>
+          <a:prstGeom prst="bentConnector3">
+            <a:avLst>
+              <a:gd name="adj1" fmla="val 50000"/>
+            </a:avLst>
+          </a:prstGeom>
+          <a:ln w="19050">
+            <a:tailEnd type="arrow"/>
+          </a:ln>
+        </p:spPr>
+        <p:style>
+          <a:lnRef idx="1">
+            <a:schemeClr val="accent1"/>
+          </a:lnRef>
+          <a:fillRef idx="0">
+            <a:schemeClr val="accent1"/>
+          </a:fillRef>
+          <a:effectRef idx="0">
+            <a:schemeClr val="accent1"/>
+          </a:effectRef>
+          <a:fontRef idx="minor">
+            <a:schemeClr val="tx1"/>
+          </a:fontRef>
+        </p:style>
+      </p:cxnSp>
+      <p:cxnSp>
+        <p:nvCxnSpPr>
+          <p:cNvPr id="211" name="Соединительная линия уступом 620">
+            <a:extLst>
+              <a:ext uri="{FF2B5EF4-FFF2-40B4-BE49-F238E27FC236}">
+                <a16:creationId xmlns:a16="http://schemas.microsoft.com/office/drawing/2014/main" id="{2366AF65-0D98-447C-B7A5-6E3A72161930}"/>
+              </a:ext>
+            </a:extLst>
+          </p:cNvPr>
+          <p:cNvCxnSpPr>
+            <a:cxnSpLocks/>
+            <a:stCxn id="166" idx="2"/>
+            <a:endCxn id="165" idx="0"/>
+          </p:cNvCxnSpPr>
+          <p:nvPr/>
+        </p:nvCxnSpPr>
+        <p:spPr>
+          <a:xfrm rot="5400000">
+            <a:off x="48242716" y="18232027"/>
+            <a:ext cx="260714" cy="1"/>
+          </a:xfrm>
+          <a:prstGeom prst="bentConnector3">
+            <a:avLst>
+              <a:gd name="adj1" fmla="val 50000"/>
+            </a:avLst>
+          </a:prstGeom>
+          <a:ln w="19050">
+            <a:tailEnd type="arrow"/>
+          </a:ln>
+        </p:spPr>
+        <p:style>
+          <a:lnRef idx="1">
+            <a:schemeClr val="accent1"/>
+          </a:lnRef>
+          <a:fillRef idx="0">
+            <a:schemeClr val="accent1"/>
+          </a:fillRef>
+          <a:effectRef idx="0">
+            <a:schemeClr val="accent1"/>
+          </a:effectRef>
+          <a:fontRef idx="minor">
+            <a:schemeClr val="tx1"/>
+          </a:fontRef>
+        </p:style>
+      </p:cxnSp>
+      <p:cxnSp>
+        <p:nvCxnSpPr>
+          <p:cNvPr id="217" name="Соединительная линия уступом 620">
+            <a:extLst>
+              <a:ext uri="{FF2B5EF4-FFF2-40B4-BE49-F238E27FC236}">
+                <a16:creationId xmlns:a16="http://schemas.microsoft.com/office/drawing/2014/main" id="{E7C08983-8D44-4498-99BD-254BF64E7274}"/>
+              </a:ext>
+            </a:extLst>
+          </p:cNvPr>
+          <p:cNvCxnSpPr>
+            <a:cxnSpLocks/>
+            <a:stCxn id="165" idx="2"/>
+            <a:endCxn id="164" idx="0"/>
+          </p:cNvCxnSpPr>
+          <p:nvPr/>
+        </p:nvCxnSpPr>
+        <p:spPr>
+          <a:xfrm rot="5400000">
+            <a:off x="48242714" y="19032742"/>
+            <a:ext cx="260717" cy="1"/>
+          </a:xfrm>
+          <a:prstGeom prst="bentConnector3">
+            <a:avLst>
+              <a:gd name="adj1" fmla="val 50000"/>
+            </a:avLst>
+          </a:prstGeom>
+          <a:ln w="19050">
+            <a:tailEnd type="arrow"/>
+          </a:ln>
+        </p:spPr>
+        <p:style>
+          <a:lnRef idx="1">
+            <a:schemeClr val="accent1"/>
+          </a:lnRef>
+          <a:fillRef idx="0">
+            <a:schemeClr val="accent1"/>
+          </a:fillRef>
+          <a:effectRef idx="0">
+            <a:schemeClr val="accent1"/>
+          </a:effectRef>
+          <a:fontRef idx="minor">
+            <a:schemeClr val="tx1"/>
+          </a:fontRef>
+        </p:style>
+      </p:cxnSp>
+      <p:cxnSp>
+        <p:nvCxnSpPr>
+          <p:cNvPr id="224" name="Соединительная линия уступом 620">
+            <a:extLst>
+              <a:ext uri="{FF2B5EF4-FFF2-40B4-BE49-F238E27FC236}">
+                <a16:creationId xmlns:a16="http://schemas.microsoft.com/office/drawing/2014/main" id="{28E6A8E6-7749-40BE-8958-4DEE2DD96DE3}"/>
+              </a:ext>
+            </a:extLst>
+          </p:cNvPr>
+          <p:cNvCxnSpPr>
+            <a:cxnSpLocks/>
+            <a:stCxn id="160" idx="2"/>
+            <a:endCxn id="159" idx="0"/>
+          </p:cNvCxnSpPr>
+          <p:nvPr/>
+        </p:nvCxnSpPr>
+        <p:spPr>
+          <a:xfrm rot="16200000" flipH="1">
+            <a:off x="47000654" y="18232027"/>
+            <a:ext cx="260717" cy="1"/>
+          </a:xfrm>
+          <a:prstGeom prst="bentConnector3">
+            <a:avLst>
+              <a:gd name="adj1" fmla="val 50000"/>
+            </a:avLst>
+          </a:prstGeom>
+          <a:ln w="19050">
+            <a:prstDash val="dash"/>
+            <a:tailEnd type="arrow"/>
+          </a:ln>
+        </p:spPr>
+        <p:style>
+          <a:lnRef idx="1">
+            <a:schemeClr val="accent1"/>
+          </a:lnRef>
+          <a:fillRef idx="0">
+            <a:schemeClr val="accent1"/>
+          </a:fillRef>
+          <a:effectRef idx="0">
+            <a:schemeClr val="accent1"/>
+          </a:effectRef>
+          <a:fontRef idx="minor">
+            <a:schemeClr val="tx1"/>
+          </a:fontRef>
+        </p:style>
+      </p:cxnSp>
+      <p:cxnSp>
+        <p:nvCxnSpPr>
+          <p:cNvPr id="227" name="Соединительная линия уступом 620">
+            <a:extLst>
+              <a:ext uri="{FF2B5EF4-FFF2-40B4-BE49-F238E27FC236}">
+                <a16:creationId xmlns:a16="http://schemas.microsoft.com/office/drawing/2014/main" id="{4A75F75A-BDCF-494C-A9E3-E29F4988BF22}"/>
+              </a:ext>
+            </a:extLst>
+          </p:cNvPr>
+          <p:cNvCxnSpPr>
+            <a:cxnSpLocks/>
+            <a:stCxn id="166" idx="2"/>
+            <a:endCxn id="159" idx="0"/>
+          </p:cNvCxnSpPr>
+          <p:nvPr/>
+        </p:nvCxnSpPr>
+        <p:spPr>
+          <a:xfrm rot="5400000">
+            <a:off x="47621685" y="17610998"/>
+            <a:ext cx="260717" cy="1242060"/>
+          </a:xfrm>
+          <a:prstGeom prst="bentConnector3">
+            <a:avLst>
+              <a:gd name="adj1" fmla="val 50000"/>
+            </a:avLst>
+          </a:prstGeom>
+          <a:ln w="19050">
+            <a:prstDash val="dash"/>
+            <a:tailEnd type="arrow"/>
+          </a:ln>
+        </p:spPr>
+        <p:style>
+          <a:lnRef idx="1">
+            <a:schemeClr val="accent1"/>
+          </a:lnRef>
+          <a:fillRef idx="0">
+            <a:schemeClr val="accent1"/>
+          </a:fillRef>
+          <a:effectRef idx="0">
+            <a:schemeClr val="accent1"/>
+          </a:effectRef>
+          <a:fontRef idx="minor">
+            <a:schemeClr val="tx1"/>
+          </a:fontRef>
+        </p:style>
+      </p:cxnSp>
+      <p:cxnSp>
+        <p:nvCxnSpPr>
+          <p:cNvPr id="230" name="Соединительная линия уступом 620">
+            <a:extLst>
+              <a:ext uri="{FF2B5EF4-FFF2-40B4-BE49-F238E27FC236}">
+                <a16:creationId xmlns:a16="http://schemas.microsoft.com/office/drawing/2014/main" id="{20B6CC3A-7999-4202-8709-65A70E605078}"/>
+              </a:ext>
+            </a:extLst>
+          </p:cNvPr>
+          <p:cNvCxnSpPr>
+            <a:cxnSpLocks/>
+            <a:stCxn id="165" idx="2"/>
+            <a:endCxn id="133" idx="0"/>
+          </p:cNvCxnSpPr>
+          <p:nvPr/>
+        </p:nvCxnSpPr>
+        <p:spPr>
+          <a:xfrm rot="5400000">
+            <a:off x="47621683" y="18411715"/>
+            <a:ext cx="260720" cy="1242058"/>
+          </a:xfrm>
+          <a:prstGeom prst="bentConnector3">
+            <a:avLst>
+              <a:gd name="adj1" fmla="val 50000"/>
+            </a:avLst>
+          </a:prstGeom>
+          <a:ln w="19050">
+            <a:prstDash val="dash"/>
+            <a:tailEnd type="arrow"/>
+          </a:ln>
+        </p:spPr>
+        <p:style>
+          <a:lnRef idx="1">
+            <a:schemeClr val="accent1"/>
+          </a:lnRef>
+          <a:fillRef idx="0">
+            <a:schemeClr val="accent1"/>
+          </a:fillRef>
+          <a:effectRef idx="0">
+            <a:schemeClr val="accent1"/>
+          </a:effectRef>
+          <a:fontRef idx="minor">
+            <a:schemeClr val="tx1"/>
+          </a:fontRef>
+        </p:style>
+      </p:cxnSp>
+      <p:cxnSp>
+        <p:nvCxnSpPr>
+          <p:cNvPr id="236" name="Соединительная линия уступом 620">
+            <a:extLst>
+              <a:ext uri="{FF2B5EF4-FFF2-40B4-BE49-F238E27FC236}">
+                <a16:creationId xmlns:a16="http://schemas.microsoft.com/office/drawing/2014/main" id="{5B8091A2-FEB0-4588-A97C-712582A9CFE4}"/>
+              </a:ext>
+            </a:extLst>
+          </p:cNvPr>
+          <p:cNvCxnSpPr>
+            <a:cxnSpLocks/>
+            <a:stCxn id="159" idx="2"/>
+            <a:endCxn id="133" idx="0"/>
+          </p:cNvCxnSpPr>
+          <p:nvPr/>
+        </p:nvCxnSpPr>
+        <p:spPr>
+          <a:xfrm rot="16200000" flipH="1">
+            <a:off x="47000655" y="19032744"/>
+            <a:ext cx="260717" cy="1"/>
+          </a:xfrm>
+          <a:prstGeom prst="bentConnector3">
+            <a:avLst>
+              <a:gd name="adj1" fmla="val 50000"/>
+            </a:avLst>
+          </a:prstGeom>
+          <a:ln w="19050">
+            <a:prstDash val="dash"/>
+            <a:tailEnd type="arrow"/>
+          </a:ln>
+        </p:spPr>
+        <p:style>
+          <a:lnRef idx="1">
+            <a:schemeClr val="accent1"/>
+          </a:lnRef>
+          <a:fillRef idx="0">
+            <a:schemeClr val="accent1"/>
+          </a:fillRef>
+          <a:effectRef idx="0">
+            <a:schemeClr val="accent1"/>
+          </a:effectRef>
+          <a:fontRef idx="minor">
+            <a:schemeClr val="tx1"/>
+          </a:fontRef>
+        </p:style>
+      </p:cxnSp>
+      <p:sp>
+        <p:nvSpPr>
+          <p:cNvPr id="245" name="Прямоугольник 244">
+            <a:extLst>
+              <a:ext uri="{FF2B5EF4-FFF2-40B4-BE49-F238E27FC236}">
+                <a16:creationId xmlns:a16="http://schemas.microsoft.com/office/drawing/2014/main" id="{1ED3E070-7793-4DFC-9262-57A19B08DA47}"/>
+              </a:ext>
+            </a:extLst>
+          </p:cNvPr>
+          <p:cNvSpPr/>
+          <p:nvPr/>
+        </p:nvSpPr>
+        <p:spPr>
+          <a:xfrm>
+            <a:off x="44179969" y="17561669"/>
+            <a:ext cx="926325" cy="540000"/>
+          </a:xfrm>
+          <a:prstGeom prst="rect">
+            <a:avLst/>
+          </a:prstGeom>
+          <a:solidFill>
+            <a:schemeClr val="bg1"/>
+          </a:solidFill>
+          <a:ln w="19050"/>
+        </p:spPr>
+        <p:style>
+          <a:lnRef idx="2">
+            <a:schemeClr val="accent1"/>
+          </a:lnRef>
+          <a:fillRef idx="1">
+            <a:schemeClr val="lt1"/>
+          </a:fillRef>
+          <a:effectRef idx="0">
+            <a:schemeClr val="accent1"/>
+          </a:effectRef>
+          <a:fontRef idx="minor">
+            <a:schemeClr val="dk1"/>
+          </a:fontRef>
+        </p:style>
+        <p:txBody>
+          <a:bodyPr lIns="124733" tIns="62367" rIns="124733" bIns="62367" rtlCol="0" anchor="ctr"/>
+          <a:lstStyle/>
           <a:p>
             <a:pPr algn="ctr"/>
             <a:r>
+              <a:rPr lang="ru-RU" sz="700" dirty="0"/>
+              <a:t>Франко-берберские школы</a:t>
+            </a:r>
+          </a:p>
+          <a:p>
+            <a:pPr algn="ctr"/>
+            <a:r>
               <a:rPr lang="ru-RU" sz="100" dirty="0"/>
-              <a:t>(После прихода к власти левых во Франции летом 1936 года по всему Марокко прокатилась волна рабочих протестов. Крупнейшие забастовки вспыхнули на фосфатных рудниках </a:t>
-            </a:r>
-            <a:r>
-              <a:rPr lang="ru-RU" sz="100" dirty="0" err="1"/>
-              <a:t>Хурибги</a:t>
+              <a:t>(</a:t>
+            </a:r>
+            <a:r>
+              <a:rPr lang="ru-RU" sz="100" b="1" dirty="0"/>
+              <a:t>Франко-берберские школы:</a:t>
             </a:r>
             <a:r>
               <a:rPr lang="ru-RU" sz="100" dirty="0"/>
-              <a:t>. Французский генеральный резидент Шарль </a:t>
+              <a:t> В горах Атласа </a:t>
             </a:r>
             <a:r>
               <a:rPr lang="ru-RU" sz="100" dirty="0" err="1"/>
@@ -9507,34 +9983,1017 @@
             </a:r>
             <a:r>
               <a:rPr lang="ru-RU" sz="100" dirty="0"/>
-              <a:t> был вынужден пойти на экономические уступки местному </a:t>
-            </a:r>
-            <a:r>
-              <a:rPr lang="ru-RU" sz="100" dirty="0" err="1"/>
-              <a:t>населению:Была</a:t>
-            </a:r>
-            <a:r>
-              <a:rPr lang="ru-RU" sz="100" dirty="0"/>
-              <a:t> законодательно увеличена минимальная заработная плата для марокканских </a:t>
-            </a:r>
-            <a:r>
-              <a:rPr lang="ru-RU" sz="100" dirty="0" err="1"/>
-              <a:t>рабочих.Была</a:t>
-            </a:r>
-            <a:r>
-              <a:rPr lang="ru-RU" sz="100" dirty="0"/>
-              <a:t> введена официальная 40-часовая рабочая неделя (для европейских специалистов) и сокращен рабочий день для местных шахтеров.)</a:t>
-            </a:r>
-            <a:endParaRPr lang="ru-RU" sz="600" dirty="0"/>
+              <a:t> продолжил развивать сеть школ, где обучение велось исключительно на французском языке, а арабский язык и исламское право были полностью исключены. Это делалось для того, чтобы оторвать берберов от арабского большинства страны.)</a:t>
+            </a:r>
+            <a:endParaRPr lang="ru-RU" sz="700" dirty="0"/>
           </a:p>
         </p:txBody>
       </p:sp>
       <p:cxnSp>
         <p:nvCxnSpPr>
-          <p:cNvPr id="174" name="Соединительная линия уступом 620">
-            <a:extLst>
-              <a:ext uri="{FF2B5EF4-FFF2-40B4-BE49-F238E27FC236}">
-                <a16:creationId xmlns:a16="http://schemas.microsoft.com/office/drawing/2014/main" id="{94BD342C-0CA0-4ADE-8B26-47E1657800A2}"/>
+          <p:cNvPr id="258" name="Прямая соединительная линия 257">
+            <a:extLst>
+              <a:ext uri="{FF2B5EF4-FFF2-40B4-BE49-F238E27FC236}">
+                <a16:creationId xmlns:a16="http://schemas.microsoft.com/office/drawing/2014/main" id="{2C4F37CE-664B-436A-B255-CCE3A2F068A8}"/>
+              </a:ext>
+            </a:extLst>
+          </p:cNvPr>
+          <p:cNvCxnSpPr>
+            <a:cxnSpLocks/>
+            <a:stCxn id="168" idx="1"/>
+            <a:endCxn id="245" idx="3"/>
+          </p:cNvCxnSpPr>
+          <p:nvPr/>
+        </p:nvCxnSpPr>
+        <p:spPr>
+          <a:xfrm flipH="1">
+            <a:off x="45106294" y="17831669"/>
+            <a:ext cx="317615" cy="0"/>
+          </a:xfrm>
+          <a:prstGeom prst="line">
+            <a:avLst/>
+          </a:prstGeom>
+          <a:ln w="38100">
+            <a:solidFill>
+              <a:srgbClr val="C00000"/>
+            </a:solidFill>
+          </a:ln>
+        </p:spPr>
+        <p:style>
+          <a:lnRef idx="1">
+            <a:schemeClr val="accent1"/>
+          </a:lnRef>
+          <a:fillRef idx="0">
+            <a:schemeClr val="accent1"/>
+          </a:fillRef>
+          <a:effectRef idx="0">
+            <a:schemeClr val="accent1"/>
+          </a:effectRef>
+          <a:fontRef idx="minor">
+            <a:schemeClr val="tx1"/>
+          </a:fontRef>
+        </p:style>
+      </p:cxnSp>
+      <p:sp>
+        <p:nvSpPr>
+          <p:cNvPr id="266" name="Прямоугольник 265">
+            <a:extLst>
+              <a:ext uri="{FF2B5EF4-FFF2-40B4-BE49-F238E27FC236}">
+                <a16:creationId xmlns:a16="http://schemas.microsoft.com/office/drawing/2014/main" id="{68B1E117-0997-408B-8E5D-B6D54012F4BC}"/>
+              </a:ext>
+            </a:extLst>
+          </p:cNvPr>
+          <p:cNvSpPr/>
+          <p:nvPr/>
+        </p:nvSpPr>
+        <p:spPr>
+          <a:xfrm>
+            <a:off x="44179968" y="18362793"/>
+            <a:ext cx="926325" cy="540000"/>
+          </a:xfrm>
+          <a:prstGeom prst="rect">
+            <a:avLst/>
+          </a:prstGeom>
+          <a:solidFill>
+            <a:schemeClr val="bg1"/>
+          </a:solidFill>
+          <a:ln w="19050"/>
+        </p:spPr>
+        <p:style>
+          <a:lnRef idx="2">
+            <a:schemeClr val="accent1"/>
+          </a:lnRef>
+          <a:fillRef idx="1">
+            <a:schemeClr val="lt1"/>
+          </a:fillRef>
+          <a:effectRef idx="0">
+            <a:schemeClr val="accent1"/>
+          </a:effectRef>
+          <a:fontRef idx="minor">
+            <a:schemeClr val="dk1"/>
+          </a:fontRef>
+        </p:style>
+        <p:txBody>
+          <a:bodyPr lIns="124733" tIns="62367" rIns="124733" bIns="62367" rtlCol="0" anchor="ctr"/>
+          <a:lstStyle/>
+          <a:p>
+            <a:pPr algn="ctr"/>
+            <a:r>
+              <a:rPr lang="ru-RU" sz="700" dirty="0"/>
+              <a:t>Создать колледжи для женщин </a:t>
+            </a:r>
+            <a:r>
+              <a:rPr lang="ru-RU" sz="200" dirty="0"/>
+              <a:t>(Ближе к концу Второй мировой войны, под давлением модернизационных процессов, колониальные власти пошли на историческую уступку и заложили базу для женского среднего образования. Были созданы первые специализированные колледжи для мусульманских девушек (в частности, в Рабате и Фесе), что стало революционным шагом для традиционного марокканского общества того времени.)</a:t>
+            </a:r>
+            <a:endParaRPr lang="ru-RU" sz="700" dirty="0"/>
+          </a:p>
+        </p:txBody>
+      </p:sp>
+      <p:cxnSp>
+        <p:nvCxnSpPr>
+          <p:cNvPr id="267" name="Соединительная линия уступом 620">
+            <a:extLst>
+              <a:ext uri="{FF2B5EF4-FFF2-40B4-BE49-F238E27FC236}">
+                <a16:creationId xmlns:a16="http://schemas.microsoft.com/office/drawing/2014/main" id="{840FDEEB-F3AE-4C87-A93A-2D8E549CDC61}"/>
+              </a:ext>
+            </a:extLst>
+          </p:cNvPr>
+          <p:cNvCxnSpPr>
+            <a:cxnSpLocks/>
+            <a:stCxn id="171" idx="2"/>
+            <a:endCxn id="245" idx="0"/>
+          </p:cNvCxnSpPr>
+          <p:nvPr/>
+        </p:nvCxnSpPr>
+        <p:spPr>
+          <a:xfrm rot="5400000">
+            <a:off x="44832465" y="17116050"/>
+            <a:ext cx="256286" cy="634952"/>
+          </a:xfrm>
+          <a:prstGeom prst="bentConnector3">
+            <a:avLst>
+              <a:gd name="adj1" fmla="val 50000"/>
+            </a:avLst>
+          </a:prstGeom>
+          <a:ln w="19050">
+            <a:tailEnd type="arrow"/>
+          </a:ln>
+        </p:spPr>
+        <p:style>
+          <a:lnRef idx="1">
+            <a:schemeClr val="accent1"/>
+          </a:lnRef>
+          <a:fillRef idx="0">
+            <a:schemeClr val="accent1"/>
+          </a:fillRef>
+          <a:effectRef idx="0">
+            <a:schemeClr val="accent1"/>
+          </a:effectRef>
+          <a:fontRef idx="minor">
+            <a:schemeClr val="tx1"/>
+          </a:fontRef>
+        </p:style>
+      </p:cxnSp>
+      <p:cxnSp>
+        <p:nvCxnSpPr>
+          <p:cNvPr id="272" name="Соединительная линия уступом 620">
+            <a:extLst>
+              <a:ext uri="{FF2B5EF4-FFF2-40B4-BE49-F238E27FC236}">
+                <a16:creationId xmlns:a16="http://schemas.microsoft.com/office/drawing/2014/main" id="{C42987BF-3C90-4273-8578-F4ECAA730943}"/>
+              </a:ext>
+            </a:extLst>
+          </p:cNvPr>
+          <p:cNvCxnSpPr>
+            <a:cxnSpLocks/>
+            <a:stCxn id="171" idx="2"/>
+            <a:endCxn id="168" idx="0"/>
+          </p:cNvCxnSpPr>
+          <p:nvPr/>
+        </p:nvCxnSpPr>
+        <p:spPr>
+          <a:xfrm rot="16200000" flipH="1">
+            <a:off x="45454435" y="17129032"/>
+            <a:ext cx="256286" cy="608988"/>
+          </a:xfrm>
+          <a:prstGeom prst="bentConnector3">
+            <a:avLst>
+              <a:gd name="adj1" fmla="val 50000"/>
+            </a:avLst>
+          </a:prstGeom>
+          <a:ln w="19050">
+            <a:tailEnd type="arrow"/>
+          </a:ln>
+        </p:spPr>
+        <p:style>
+          <a:lnRef idx="1">
+            <a:schemeClr val="accent1"/>
+          </a:lnRef>
+          <a:fillRef idx="0">
+            <a:schemeClr val="accent1"/>
+          </a:fillRef>
+          <a:effectRef idx="0">
+            <a:schemeClr val="accent1"/>
+          </a:effectRef>
+          <a:fontRef idx="minor">
+            <a:schemeClr val="tx1"/>
+          </a:fontRef>
+        </p:style>
+      </p:cxnSp>
+      <p:cxnSp>
+        <p:nvCxnSpPr>
+          <p:cNvPr id="276" name="Соединительная линия уступом 620">
+            <a:extLst>
+              <a:ext uri="{FF2B5EF4-FFF2-40B4-BE49-F238E27FC236}">
+                <a16:creationId xmlns:a16="http://schemas.microsoft.com/office/drawing/2014/main" id="{CC9C22C5-0599-4A63-A76A-3E6E9BB2C8AF}"/>
+              </a:ext>
+            </a:extLst>
+          </p:cNvPr>
+          <p:cNvCxnSpPr>
+            <a:cxnSpLocks/>
+            <a:stCxn id="168" idx="2"/>
+            <a:endCxn id="266" idx="0"/>
+          </p:cNvCxnSpPr>
+          <p:nvPr/>
+        </p:nvCxnSpPr>
+        <p:spPr>
+          <a:xfrm rot="5400000">
+            <a:off x="45134540" y="17610261"/>
+            <a:ext cx="261124" cy="1243941"/>
+          </a:xfrm>
+          <a:prstGeom prst="bentConnector3">
+            <a:avLst>
+              <a:gd name="adj1" fmla="val 50000"/>
+            </a:avLst>
+          </a:prstGeom>
+          <a:ln w="19050">
+            <a:prstDash val="dash"/>
+            <a:tailEnd type="arrow"/>
+          </a:ln>
+        </p:spPr>
+        <p:style>
+          <a:lnRef idx="1">
+            <a:schemeClr val="accent1"/>
+          </a:lnRef>
+          <a:fillRef idx="0">
+            <a:schemeClr val="accent1"/>
+          </a:fillRef>
+          <a:effectRef idx="0">
+            <a:schemeClr val="accent1"/>
+          </a:effectRef>
+          <a:fontRef idx="minor">
+            <a:schemeClr val="tx1"/>
+          </a:fontRef>
+        </p:style>
+      </p:cxnSp>
+      <p:cxnSp>
+        <p:nvCxnSpPr>
+          <p:cNvPr id="279" name="Соединительная линия уступом 620">
+            <a:extLst>
+              <a:ext uri="{FF2B5EF4-FFF2-40B4-BE49-F238E27FC236}">
+                <a16:creationId xmlns:a16="http://schemas.microsoft.com/office/drawing/2014/main" id="{B37C4214-5DF9-4BB7-87F6-3E8E0886C3AC}"/>
+              </a:ext>
+            </a:extLst>
+          </p:cNvPr>
+          <p:cNvCxnSpPr>
+            <a:cxnSpLocks/>
+            <a:stCxn id="245" idx="2"/>
+            <a:endCxn id="266" idx="0"/>
+          </p:cNvCxnSpPr>
+          <p:nvPr/>
+        </p:nvCxnSpPr>
+        <p:spPr>
+          <a:xfrm rot="5400000">
+            <a:off x="44512570" y="18232231"/>
+            <a:ext cx="261124" cy="1"/>
+          </a:xfrm>
+          <a:prstGeom prst="bentConnector3">
+            <a:avLst>
+              <a:gd name="adj1" fmla="val 50000"/>
+            </a:avLst>
+          </a:prstGeom>
+          <a:ln w="19050">
+            <a:prstDash val="dash"/>
+            <a:tailEnd type="arrow"/>
+          </a:ln>
+        </p:spPr>
+        <p:style>
+          <a:lnRef idx="1">
+            <a:schemeClr val="accent1"/>
+          </a:lnRef>
+          <a:fillRef idx="0">
+            <a:schemeClr val="accent1"/>
+          </a:fillRef>
+          <a:effectRef idx="0">
+            <a:schemeClr val="accent1"/>
+          </a:effectRef>
+          <a:fontRef idx="minor">
+            <a:schemeClr val="tx1"/>
+          </a:fontRef>
+        </p:style>
+      </p:cxnSp>
+      <p:cxnSp>
+        <p:nvCxnSpPr>
+          <p:cNvPr id="291" name="Соединительная линия уступом 620">
+            <a:extLst>
+              <a:ext uri="{FF2B5EF4-FFF2-40B4-BE49-F238E27FC236}">
+                <a16:creationId xmlns:a16="http://schemas.microsoft.com/office/drawing/2014/main" id="{066864E5-04F4-434A-9229-08D47A32E87B}"/>
+              </a:ext>
+            </a:extLst>
+          </p:cNvPr>
+          <p:cNvCxnSpPr>
+            <a:cxnSpLocks/>
+            <a:stCxn id="245" idx="2"/>
+            <a:endCxn id="170" idx="0"/>
+          </p:cNvCxnSpPr>
+          <p:nvPr/>
+        </p:nvCxnSpPr>
+        <p:spPr>
+          <a:xfrm rot="16200000" flipH="1">
+            <a:off x="45134745" y="17610056"/>
+            <a:ext cx="260715" cy="1243940"/>
+          </a:xfrm>
+          <a:prstGeom prst="bentConnector3">
+            <a:avLst>
+              <a:gd name="adj1" fmla="val 50000"/>
+            </a:avLst>
+          </a:prstGeom>
+          <a:ln w="19050">
+            <a:prstDash val="dash"/>
+            <a:tailEnd type="arrow"/>
+          </a:ln>
+        </p:spPr>
+        <p:style>
+          <a:lnRef idx="1">
+            <a:schemeClr val="accent1"/>
+          </a:lnRef>
+          <a:fillRef idx="0">
+            <a:schemeClr val="accent1"/>
+          </a:fillRef>
+          <a:effectRef idx="0">
+            <a:schemeClr val="accent1"/>
+          </a:effectRef>
+          <a:fontRef idx="minor">
+            <a:schemeClr val="tx1"/>
+          </a:fontRef>
+        </p:style>
+      </p:cxnSp>
+      <p:cxnSp>
+        <p:nvCxnSpPr>
+          <p:cNvPr id="294" name="Соединительная линия уступом 620">
+            <a:extLst>
+              <a:ext uri="{FF2B5EF4-FFF2-40B4-BE49-F238E27FC236}">
+                <a16:creationId xmlns:a16="http://schemas.microsoft.com/office/drawing/2014/main" id="{C7785B8F-424F-443D-A8C2-43EC2C92A8DF}"/>
+              </a:ext>
+            </a:extLst>
+          </p:cNvPr>
+          <p:cNvCxnSpPr>
+            <a:cxnSpLocks/>
+            <a:stCxn id="168" idx="2"/>
+            <a:endCxn id="170" idx="0"/>
+          </p:cNvCxnSpPr>
+          <p:nvPr/>
+        </p:nvCxnSpPr>
+        <p:spPr>
+          <a:xfrm rot="5400000">
+            <a:off x="45756715" y="18232026"/>
+            <a:ext cx="260715" cy="12700"/>
+          </a:xfrm>
+          <a:prstGeom prst="bentConnector3">
+            <a:avLst>
+              <a:gd name="adj1" fmla="val 50000"/>
+            </a:avLst>
+          </a:prstGeom>
+          <a:ln w="19050">
+            <a:prstDash val="dash"/>
+            <a:tailEnd type="arrow"/>
+          </a:ln>
+        </p:spPr>
+        <p:style>
+          <a:lnRef idx="1">
+            <a:schemeClr val="accent1"/>
+          </a:lnRef>
+          <a:fillRef idx="0">
+            <a:schemeClr val="accent1"/>
+          </a:fillRef>
+          <a:effectRef idx="0">
+            <a:schemeClr val="accent1"/>
+          </a:effectRef>
+          <a:fontRef idx="minor">
+            <a:schemeClr val="tx1"/>
+          </a:fontRef>
+        </p:style>
+      </p:cxnSp>
+      <p:cxnSp>
+        <p:nvCxnSpPr>
+          <p:cNvPr id="297" name="Соединительная линия уступом 620">
+            <a:extLst>
+              <a:ext uri="{FF2B5EF4-FFF2-40B4-BE49-F238E27FC236}">
+                <a16:creationId xmlns:a16="http://schemas.microsoft.com/office/drawing/2014/main" id="{E78ABD49-6846-4088-9270-5DAE8DC72206}"/>
+              </a:ext>
+            </a:extLst>
+          </p:cNvPr>
+          <p:cNvCxnSpPr>
+            <a:cxnSpLocks/>
+            <a:stCxn id="163" idx="2"/>
+            <a:endCxn id="167" idx="0"/>
+          </p:cNvCxnSpPr>
+          <p:nvPr/>
+        </p:nvCxnSpPr>
+        <p:spPr>
+          <a:xfrm rot="16200000" flipH="1">
+            <a:off x="46374797" y="16622732"/>
+            <a:ext cx="276438" cy="1"/>
+          </a:xfrm>
+          <a:prstGeom prst="bentConnector3">
+            <a:avLst>
+              <a:gd name="adj1" fmla="val 50000"/>
+            </a:avLst>
+          </a:prstGeom>
+          <a:ln w="19050">
+            <a:prstDash val="dash"/>
+            <a:tailEnd type="arrow"/>
+          </a:ln>
+        </p:spPr>
+        <p:style>
+          <a:lnRef idx="1">
+            <a:schemeClr val="accent1"/>
+          </a:lnRef>
+          <a:fillRef idx="0">
+            <a:schemeClr val="accent1"/>
+          </a:fillRef>
+          <a:effectRef idx="0">
+            <a:schemeClr val="accent1"/>
+          </a:effectRef>
+          <a:fontRef idx="minor">
+            <a:schemeClr val="tx1"/>
+          </a:fontRef>
+        </p:style>
+      </p:cxnSp>
+      <p:cxnSp>
+        <p:nvCxnSpPr>
+          <p:cNvPr id="306" name="Соединительная линия уступом 620">
+            <a:extLst>
+              <a:ext uri="{FF2B5EF4-FFF2-40B4-BE49-F238E27FC236}">
+                <a16:creationId xmlns:a16="http://schemas.microsoft.com/office/drawing/2014/main" id="{7BAF9731-AEDE-4588-8E73-E99D5DAF63CC}"/>
+              </a:ext>
+            </a:extLst>
+          </p:cNvPr>
+          <p:cNvCxnSpPr>
+            <a:cxnSpLocks/>
+            <a:stCxn id="167" idx="2"/>
+            <a:endCxn id="160" idx="0"/>
+          </p:cNvCxnSpPr>
+          <p:nvPr/>
+        </p:nvCxnSpPr>
+        <p:spPr>
+          <a:xfrm rot="16200000" flipH="1">
+            <a:off x="46691655" y="17122313"/>
+            <a:ext cx="260718" cy="617995"/>
+          </a:xfrm>
+          <a:prstGeom prst="bentConnector3">
+            <a:avLst>
+              <a:gd name="adj1" fmla="val 50000"/>
+            </a:avLst>
+          </a:prstGeom>
+          <a:ln w="19050">
+            <a:prstDash val="dash"/>
+            <a:tailEnd type="arrow"/>
+          </a:ln>
+        </p:spPr>
+        <p:style>
+          <a:lnRef idx="1">
+            <a:schemeClr val="accent1"/>
+          </a:lnRef>
+          <a:fillRef idx="0">
+            <a:schemeClr val="accent1"/>
+          </a:fillRef>
+          <a:effectRef idx="0">
+            <a:schemeClr val="accent1"/>
+          </a:effectRef>
+          <a:fontRef idx="minor">
+            <a:schemeClr val="tx1"/>
+          </a:fontRef>
+        </p:style>
+      </p:cxnSp>
+      <p:cxnSp>
+        <p:nvCxnSpPr>
+          <p:cNvPr id="309" name="Соединительная линия уступом 620">
+            <a:extLst>
+              <a:ext uri="{FF2B5EF4-FFF2-40B4-BE49-F238E27FC236}">
+                <a16:creationId xmlns:a16="http://schemas.microsoft.com/office/drawing/2014/main" id="{EB1802D9-6AEF-43B0-8B61-D88E8CD70023}"/>
+              </a:ext>
+            </a:extLst>
+          </p:cNvPr>
+          <p:cNvCxnSpPr>
+            <a:cxnSpLocks/>
+            <a:stCxn id="161" idx="2"/>
+            <a:endCxn id="160" idx="0"/>
+          </p:cNvCxnSpPr>
+          <p:nvPr/>
+        </p:nvCxnSpPr>
+        <p:spPr>
+          <a:xfrm rot="5400000">
+            <a:off x="47312762" y="17118578"/>
+            <a:ext cx="261343" cy="624841"/>
+          </a:xfrm>
+          <a:prstGeom prst="bentConnector3">
+            <a:avLst>
+              <a:gd name="adj1" fmla="val 50000"/>
+            </a:avLst>
+          </a:prstGeom>
+          <a:ln w="19050">
+            <a:prstDash val="dash"/>
+            <a:tailEnd type="arrow"/>
+          </a:ln>
+        </p:spPr>
+        <p:style>
+          <a:lnRef idx="1">
+            <a:schemeClr val="accent1"/>
+          </a:lnRef>
+          <a:fillRef idx="0">
+            <a:schemeClr val="accent1"/>
+          </a:fillRef>
+          <a:effectRef idx="0">
+            <a:schemeClr val="accent1"/>
+          </a:effectRef>
+          <a:fontRef idx="minor">
+            <a:schemeClr val="tx1"/>
+          </a:fontRef>
+        </p:style>
+      </p:cxnSp>
+      <p:cxnSp>
+        <p:nvCxnSpPr>
+          <p:cNvPr id="312" name="Соединительная линия уступом 620">
+            <a:extLst>
+              <a:ext uri="{FF2B5EF4-FFF2-40B4-BE49-F238E27FC236}">
+                <a16:creationId xmlns:a16="http://schemas.microsoft.com/office/drawing/2014/main" id="{8A4CC061-E820-4B91-8265-908A117C76F1}"/>
+              </a:ext>
+            </a:extLst>
+          </p:cNvPr>
+          <p:cNvCxnSpPr>
+            <a:cxnSpLocks/>
+            <a:stCxn id="161" idx="2"/>
+            <a:endCxn id="166" idx="0"/>
+          </p:cNvCxnSpPr>
+          <p:nvPr/>
+        </p:nvCxnSpPr>
+        <p:spPr>
+          <a:xfrm rot="16200000" flipH="1">
+            <a:off x="47933792" y="17122388"/>
+            <a:ext cx="261343" cy="617220"/>
+          </a:xfrm>
+          <a:prstGeom prst="bentConnector3">
+            <a:avLst>
+              <a:gd name="adj1" fmla="val 50000"/>
+            </a:avLst>
+          </a:prstGeom>
+          <a:ln w="19050">
+            <a:tailEnd type="arrow"/>
+          </a:ln>
+        </p:spPr>
+        <p:style>
+          <a:lnRef idx="1">
+            <a:schemeClr val="accent1"/>
+          </a:lnRef>
+          <a:fillRef idx="0">
+            <a:schemeClr val="accent1"/>
+          </a:fillRef>
+          <a:effectRef idx="0">
+            <a:schemeClr val="accent1"/>
+          </a:effectRef>
+          <a:fontRef idx="minor">
+            <a:schemeClr val="tx1"/>
+          </a:fontRef>
+        </p:style>
+      </p:cxnSp>
+      <p:cxnSp>
+        <p:nvCxnSpPr>
+          <p:cNvPr id="315" name="Соединительная линия уступом 620">
+            <a:extLst>
+              <a:ext uri="{FF2B5EF4-FFF2-40B4-BE49-F238E27FC236}">
+                <a16:creationId xmlns:a16="http://schemas.microsoft.com/office/drawing/2014/main" id="{5ACF4EDF-5A7A-4565-8335-9607E0AC4C9F}"/>
+              </a:ext>
+            </a:extLst>
+          </p:cNvPr>
+          <p:cNvCxnSpPr>
+            <a:cxnSpLocks/>
+            <a:stCxn id="245" idx="2"/>
+            <a:endCxn id="136" idx="0"/>
+          </p:cNvCxnSpPr>
+          <p:nvPr/>
+        </p:nvCxnSpPr>
+        <p:spPr>
+          <a:xfrm rot="16200000" flipH="1">
+            <a:off x="44647695" y="18097105"/>
+            <a:ext cx="1861535" cy="1870661"/>
+          </a:xfrm>
+          <a:prstGeom prst="bentConnector3">
+            <a:avLst>
+              <a:gd name="adj1" fmla="val 7019"/>
+            </a:avLst>
+          </a:prstGeom>
+          <a:ln w="19050">
+            <a:prstDash val="dash"/>
+            <a:tailEnd type="arrow"/>
+          </a:ln>
+        </p:spPr>
+        <p:style>
+          <a:lnRef idx="1">
+            <a:schemeClr val="accent1"/>
+          </a:lnRef>
+          <a:fillRef idx="0">
+            <a:schemeClr val="accent1"/>
+          </a:fillRef>
+          <a:effectRef idx="0">
+            <a:schemeClr val="accent1"/>
+          </a:effectRef>
+          <a:fontRef idx="minor">
+            <a:schemeClr val="tx1"/>
+          </a:fontRef>
+        </p:style>
+      </p:cxnSp>
+      <p:cxnSp>
+        <p:nvCxnSpPr>
+          <p:cNvPr id="319" name="Соединительная линия уступом 620">
+            <a:extLst>
+              <a:ext uri="{FF2B5EF4-FFF2-40B4-BE49-F238E27FC236}">
+                <a16:creationId xmlns:a16="http://schemas.microsoft.com/office/drawing/2014/main" id="{EEADD502-DF21-435B-AB40-628C775C396B}"/>
+              </a:ext>
+            </a:extLst>
+          </p:cNvPr>
+          <p:cNvCxnSpPr>
+            <a:cxnSpLocks/>
+            <a:stCxn id="168" idx="2"/>
+            <a:endCxn id="136" idx="0"/>
+          </p:cNvCxnSpPr>
+          <p:nvPr/>
+        </p:nvCxnSpPr>
+        <p:spPr>
+          <a:xfrm rot="16200000" flipH="1">
+            <a:off x="45269665" y="18719075"/>
+            <a:ext cx="1861535" cy="626721"/>
+          </a:xfrm>
+          <a:prstGeom prst="bentConnector3">
+            <a:avLst>
+              <a:gd name="adj1" fmla="val 7019"/>
+            </a:avLst>
+          </a:prstGeom>
+          <a:ln w="19050">
+            <a:prstDash val="dash"/>
+            <a:tailEnd type="arrow"/>
+          </a:ln>
+        </p:spPr>
+        <p:style>
+          <a:lnRef idx="1">
+            <a:schemeClr val="accent1"/>
+          </a:lnRef>
+          <a:fillRef idx="0">
+            <a:schemeClr val="accent1"/>
+          </a:fillRef>
+          <a:effectRef idx="0">
+            <a:schemeClr val="accent1"/>
+          </a:effectRef>
+          <a:fontRef idx="minor">
+            <a:schemeClr val="tx1"/>
+          </a:fontRef>
+        </p:style>
+      </p:cxnSp>
+      <p:cxnSp>
+        <p:nvCxnSpPr>
+          <p:cNvPr id="323" name="Соединительная линия уступом 620">
+            <a:extLst>
+              <a:ext uri="{FF2B5EF4-FFF2-40B4-BE49-F238E27FC236}">
+                <a16:creationId xmlns:a16="http://schemas.microsoft.com/office/drawing/2014/main" id="{FBF4967B-DC3B-4838-96A4-4D328C5EB6C2}"/>
+              </a:ext>
+            </a:extLst>
+          </p:cNvPr>
+          <p:cNvCxnSpPr>
+            <a:cxnSpLocks/>
+            <a:stCxn id="245" idx="2"/>
+            <a:endCxn id="137" idx="0"/>
+          </p:cNvCxnSpPr>
+          <p:nvPr/>
+        </p:nvCxnSpPr>
+        <p:spPr>
+          <a:xfrm rot="16200000" flipH="1">
+            <a:off x="45268725" y="17476075"/>
+            <a:ext cx="1861535" cy="3112721"/>
+          </a:xfrm>
+          <a:prstGeom prst="bentConnector3">
+            <a:avLst>
+              <a:gd name="adj1" fmla="val 7019"/>
+            </a:avLst>
+          </a:prstGeom>
+          <a:ln w="19050">
+            <a:prstDash val="dash"/>
+            <a:tailEnd type="arrow"/>
+          </a:ln>
+        </p:spPr>
+        <p:style>
+          <a:lnRef idx="1">
+            <a:schemeClr val="accent1"/>
+          </a:lnRef>
+          <a:fillRef idx="0">
+            <a:schemeClr val="accent1"/>
+          </a:fillRef>
+          <a:effectRef idx="0">
+            <a:schemeClr val="accent1"/>
+          </a:effectRef>
+          <a:fontRef idx="minor">
+            <a:schemeClr val="tx1"/>
+          </a:fontRef>
+        </p:style>
+      </p:cxnSp>
+      <p:cxnSp>
+        <p:nvCxnSpPr>
+          <p:cNvPr id="327" name="Соединительная линия уступом 620">
+            <a:extLst>
+              <a:ext uri="{FF2B5EF4-FFF2-40B4-BE49-F238E27FC236}">
+                <a16:creationId xmlns:a16="http://schemas.microsoft.com/office/drawing/2014/main" id="{46EC63F1-0538-4C28-BA2B-A65FEC33ACED}"/>
+              </a:ext>
+            </a:extLst>
+          </p:cNvPr>
+          <p:cNvCxnSpPr>
+            <a:cxnSpLocks/>
+            <a:stCxn id="168" idx="2"/>
+            <a:endCxn id="137" idx="0"/>
+          </p:cNvCxnSpPr>
+          <p:nvPr/>
+        </p:nvCxnSpPr>
+        <p:spPr>
+          <a:xfrm rot="16200000" flipH="1">
+            <a:off x="45890695" y="18098045"/>
+            <a:ext cx="1861535" cy="1868781"/>
+          </a:xfrm>
+          <a:prstGeom prst="bentConnector3">
+            <a:avLst>
+              <a:gd name="adj1" fmla="val 7019"/>
+            </a:avLst>
+          </a:prstGeom>
+          <a:ln w="19050">
+            <a:prstDash val="dash"/>
+            <a:tailEnd type="arrow"/>
+          </a:ln>
+        </p:spPr>
+        <p:style>
+          <a:lnRef idx="1">
+            <a:schemeClr val="accent1"/>
+          </a:lnRef>
+          <a:fillRef idx="0">
+            <a:schemeClr val="accent1"/>
+          </a:fillRef>
+          <a:effectRef idx="0">
+            <a:schemeClr val="accent1"/>
+          </a:effectRef>
+          <a:fontRef idx="minor">
+            <a:schemeClr val="tx1"/>
+          </a:fontRef>
+        </p:style>
+      </p:cxnSp>
+      <p:cxnSp>
+        <p:nvCxnSpPr>
+          <p:cNvPr id="333" name="Соединительная линия уступом 620">
+            <a:extLst>
+              <a:ext uri="{FF2B5EF4-FFF2-40B4-BE49-F238E27FC236}">
+                <a16:creationId xmlns:a16="http://schemas.microsoft.com/office/drawing/2014/main" id="{4AB5D48F-D0AA-4EBC-BF72-566D53293AF6}"/>
+              </a:ext>
+            </a:extLst>
+          </p:cNvPr>
+          <p:cNvCxnSpPr>
+            <a:cxnSpLocks/>
+            <a:stCxn id="134" idx="2"/>
+            <a:endCxn id="162" idx="0"/>
+          </p:cNvCxnSpPr>
+          <p:nvPr/>
+        </p:nvCxnSpPr>
+        <p:spPr>
+          <a:xfrm rot="5400000">
+            <a:off x="47000341" y="21434583"/>
+            <a:ext cx="261342" cy="3"/>
+          </a:xfrm>
+          <a:prstGeom prst="bentConnector3">
+            <a:avLst>
+              <a:gd name="adj1" fmla="val 50000"/>
+            </a:avLst>
+          </a:prstGeom>
+          <a:ln w="19050">
+            <a:tailEnd type="arrow"/>
+          </a:ln>
+        </p:spPr>
+        <p:style>
+          <a:lnRef idx="1">
+            <a:schemeClr val="accent1"/>
+          </a:lnRef>
+          <a:fillRef idx="0">
+            <a:schemeClr val="accent1"/>
+          </a:fillRef>
+          <a:effectRef idx="0">
+            <a:schemeClr val="accent1"/>
+          </a:effectRef>
+          <a:fontRef idx="minor">
+            <a:schemeClr val="tx1"/>
+          </a:fontRef>
+        </p:style>
+      </p:cxnSp>
+      <p:cxnSp>
+        <p:nvCxnSpPr>
+          <p:cNvPr id="352" name="Прямая соединительная линия 351">
+            <a:extLst>
+              <a:ext uri="{FF2B5EF4-FFF2-40B4-BE49-F238E27FC236}">
+                <a16:creationId xmlns:a16="http://schemas.microsoft.com/office/drawing/2014/main" id="{1CE47EEF-D77B-4B21-8647-CDBA028F81B3}"/>
+              </a:ext>
+            </a:extLst>
+          </p:cNvPr>
+          <p:cNvCxnSpPr>
+            <a:cxnSpLocks/>
+            <a:stCxn id="178" idx="1"/>
+            <a:endCxn id="172" idx="3"/>
+          </p:cNvCxnSpPr>
+          <p:nvPr/>
+        </p:nvCxnSpPr>
+        <p:spPr>
+          <a:xfrm flipH="1">
+            <a:off x="7394931" y="2077655"/>
+            <a:ext cx="5970604" cy="0"/>
+          </a:xfrm>
+          <a:prstGeom prst="line">
+            <a:avLst/>
+          </a:prstGeom>
+          <a:ln w="38100">
+            <a:solidFill>
+              <a:srgbClr val="C00000"/>
+            </a:solidFill>
+          </a:ln>
+        </p:spPr>
+        <p:style>
+          <a:lnRef idx="1">
+            <a:schemeClr val="accent1"/>
+          </a:lnRef>
+          <a:fillRef idx="0">
+            <a:schemeClr val="accent1"/>
+          </a:fillRef>
+          <a:effectRef idx="0">
+            <a:schemeClr val="accent1"/>
+          </a:effectRef>
+          <a:fontRef idx="minor">
+            <a:schemeClr val="tx1"/>
+          </a:fontRef>
+        </p:style>
+      </p:cxnSp>
+      <p:sp>
+        <p:nvSpPr>
+          <p:cNvPr id="156" name="Прямоугольник 155">
+            <a:extLst>
+              <a:ext uri="{FF2B5EF4-FFF2-40B4-BE49-F238E27FC236}">
+                <a16:creationId xmlns:a16="http://schemas.microsoft.com/office/drawing/2014/main" id="{BD9685A5-0F5B-46E4-B9C4-11EF0AFB73FB}"/>
+              </a:ext>
+            </a:extLst>
+          </p:cNvPr>
+          <p:cNvSpPr/>
+          <p:nvPr/>
+        </p:nvSpPr>
+        <p:spPr>
+          <a:xfrm>
+            <a:off x="44179967" y="19153202"/>
+            <a:ext cx="926325" cy="540000"/>
+          </a:xfrm>
+          <a:prstGeom prst="rect">
+            <a:avLst/>
+          </a:prstGeom>
+          <a:solidFill>
+            <a:schemeClr val="bg1"/>
+          </a:solidFill>
+          <a:ln w="19050"/>
+        </p:spPr>
+        <p:style>
+          <a:lnRef idx="2">
+            <a:schemeClr val="accent1"/>
+          </a:lnRef>
+          <a:fillRef idx="1">
+            <a:schemeClr val="lt1"/>
+          </a:fillRef>
+          <a:effectRef idx="0">
+            <a:schemeClr val="accent1"/>
+          </a:effectRef>
+          <a:fontRef idx="minor">
+            <a:schemeClr val="dk1"/>
+          </a:fontRef>
+        </p:style>
+        <p:txBody>
+          <a:bodyPr lIns="124733" tIns="62367" rIns="124733" bIns="62367" rtlCol="0" anchor="ctr"/>
+          <a:lstStyle/>
+          <a:p>
+            <a:pPr algn="ctr"/>
+            <a:r>
+              <a:rPr lang="ru-RU" sz="700" dirty="0"/>
+              <a:t>Секторы модернизации сельской местности</a:t>
+            </a:r>
+          </a:p>
+          <a:p>
+            <a:pPr algn="ctr"/>
+            <a:r>
+              <a:rPr lang="ru-RU" sz="100" dirty="0"/>
+              <a:t>(Еще одним проявлением государственного социального планирования стали сельские районы. Наиболее заметной из этих новых государственных социальных программ стала «Секторы модернизации сельской местности» (СМП), план развития сельских районов, запущенный в 1946 году новым генеральным резидентом Эриком </a:t>
+            </a:r>
+            <a:r>
+              <a:rPr lang="ru-RU" sz="100" dirty="0" err="1"/>
+              <a:t>Лабонном</a:t>
+            </a:r>
+            <a:r>
+              <a:rPr lang="ru-RU" sz="100" dirty="0"/>
+              <a:t>, профессиональным дипломатом-реформатором, сменившим Габриэля </a:t>
+            </a:r>
+            <a:r>
+              <a:rPr lang="ru-RU" sz="100" dirty="0" err="1"/>
+              <a:t>Пуо</a:t>
+            </a:r>
+            <a:r>
+              <a:rPr lang="ru-RU" sz="100" dirty="0"/>
+              <a:t> после окончания войны. Будучи сторонником «мягкого» подхода, предполагающего использование экономического развития, а не грубой силы для сдерживания давления в целях перемен, </a:t>
+            </a:r>
+            <a:r>
+              <a:rPr lang="ru-RU" sz="100" dirty="0" err="1"/>
+              <a:t>Лабонн</a:t>
+            </a:r>
+            <a:r>
+              <a:rPr lang="ru-RU" sz="100" dirty="0"/>
+              <a:t> осуждал сорок лет «стагнации», навязанной режимом Протектората, и предлагал «новый курс» для Марокко. Представленная как начальный этап новой французской социальной политики, СМП привлекла к работе французских социологов, проникнутых эгалитарными идеалами, таких как молодой Жак </a:t>
+            </a:r>
+            <a:r>
+              <a:rPr lang="ru-RU" sz="100" dirty="0" err="1"/>
+              <a:t>Берк</a:t>
+            </a:r>
+            <a:r>
+              <a:rPr lang="ru-RU" sz="100" dirty="0"/>
+              <a:t>, который впоследствии сделал карьеру выдающегося социолога ислама. Эти идеалистически настроенные молодые люди помогли создать программы, направленные на модернизацию методов ведения сельского хозяйства, которые имитировали советскую модель колхоза, сельскохозяйственного кооператива. Несколько факторов сорвали планы </a:t>
+            </a:r>
+            <a:r>
+              <a:rPr lang="ru-RU" sz="100" dirty="0" err="1"/>
+              <a:t>Лабонна</a:t>
+            </a:r>
+            <a:r>
+              <a:rPr lang="ru-RU" sz="100" dirty="0"/>
+              <a:t>: политика упорного отказа от сотрудничества со стороны </a:t>
+            </a:r>
+            <a:r>
+              <a:rPr lang="ru-RU" sz="100" dirty="0" err="1"/>
+              <a:t>Истикляля</a:t>
+            </a:r>
+            <a:r>
+              <a:rPr lang="ru-RU" sz="100" dirty="0"/>
+              <a:t>, медлительная бюрократия Протектората и резкое возмущение крупных землевладельцев, непримиримо выступавших против ориентированного на рабочих подхода </a:t>
+            </a:r>
+            <a:r>
+              <a:rPr lang="ru-RU" sz="100" dirty="0" err="1"/>
+              <a:t>Лабонна</a:t>
+            </a:r>
+            <a:r>
+              <a:rPr lang="ru-RU" sz="100" dirty="0"/>
+              <a:t>. В совокупности эти факторы вынудили </a:t>
+            </a:r>
+            <a:r>
+              <a:rPr lang="ru-RU" sz="100" dirty="0" err="1"/>
+              <a:t>Лабонна</a:t>
+            </a:r>
+            <a:r>
+              <a:rPr lang="ru-RU" sz="100" dirty="0"/>
+              <a:t> отступить и распустить свои кадры, что привело к тому, что проект стал практически неэффективным.¬44)</a:t>
+            </a:r>
+          </a:p>
+        </p:txBody>
+      </p:sp>
+      <p:cxnSp>
+        <p:nvCxnSpPr>
+          <p:cNvPr id="158" name="Соединительная линия уступом 620">
+            <a:extLst>
+              <a:ext uri="{FF2B5EF4-FFF2-40B4-BE49-F238E27FC236}">
+                <a16:creationId xmlns:a16="http://schemas.microsoft.com/office/drawing/2014/main" id="{2C19DE1B-1420-4A75-9AEA-95F5D82E5583}"/>
+              </a:ext>
+            </a:extLst>
+          </p:cNvPr>
+          <p:cNvCxnSpPr>
+            <a:cxnSpLocks/>
+            <a:stCxn id="170" idx="2"/>
+            <a:endCxn id="156" idx="0"/>
+          </p:cNvCxnSpPr>
+          <p:nvPr/>
+        </p:nvCxnSpPr>
+        <p:spPr>
+          <a:xfrm rot="5400000">
+            <a:off x="45139692" y="18405822"/>
+            <a:ext cx="250818" cy="1243942"/>
+          </a:xfrm>
+          <a:prstGeom prst="bentConnector3">
+            <a:avLst>
+              <a:gd name="adj1" fmla="val 50000"/>
+            </a:avLst>
+          </a:prstGeom>
+          <a:ln w="19050">
+            <a:tailEnd type="arrow"/>
+          </a:ln>
+        </p:spPr>
+        <p:style>
+          <a:lnRef idx="1">
+            <a:schemeClr val="accent1"/>
+          </a:lnRef>
+          <a:fillRef idx="0">
+            <a:schemeClr val="accent1"/>
+          </a:fillRef>
+          <a:effectRef idx="0">
+            <a:schemeClr val="accent1"/>
+          </a:effectRef>
+          <a:fontRef idx="minor">
+            <a:schemeClr val="tx1"/>
+          </a:fontRef>
+        </p:style>
+      </p:cxnSp>
+      <p:cxnSp>
+        <p:nvCxnSpPr>
+          <p:cNvPr id="176" name="Соединительная линия уступом 620">
+            <a:extLst>
+              <a:ext uri="{FF2B5EF4-FFF2-40B4-BE49-F238E27FC236}">
+                <a16:creationId xmlns:a16="http://schemas.microsoft.com/office/drawing/2014/main" id="{73562267-8A4D-4264-8436-A6E73CEB01B1}"/>
               </a:ext>
             </a:extLst>
           </p:cNvPr>
@@ -9547,8 +11006,8 @@
         </p:nvCxnSpPr>
         <p:spPr>
           <a:xfrm rot="5400000">
-            <a:off x="45140869" y="16628167"/>
-            <a:ext cx="274432" cy="1"/>
+            <a:off x="45755116" y="16007482"/>
+            <a:ext cx="280869" cy="1234932"/>
           </a:xfrm>
           <a:prstGeom prst="bentConnector3">
             <a:avLst>
@@ -9556,6 +11015,7 @@
             </a:avLst>
           </a:prstGeom>
           <a:ln w="19050">
+            <a:prstDash val="dash"/>
             <a:tailEnd type="arrow"/>
           </a:ln>
         </p:spPr>
@@ -9574,90 +11034,26 @@
           </a:fontRef>
         </p:style>
       </p:cxnSp>
-      <p:sp>
-        <p:nvSpPr>
-          <p:cNvPr id="164" name="Прямоугольник 163">
-            <a:extLst>
-              <a:ext uri="{FF2B5EF4-FFF2-40B4-BE49-F238E27FC236}">
-                <a16:creationId xmlns:a16="http://schemas.microsoft.com/office/drawing/2014/main" id="{CB3D1342-AF6F-45C2-8B29-2D66C97503EB}"/>
-              </a:ext>
-            </a:extLst>
-          </p:cNvPr>
-          <p:cNvSpPr/>
-          <p:nvPr/>
-        </p:nvSpPr>
-        <p:spPr>
-          <a:xfrm>
-            <a:off x="47909908" y="19163101"/>
-            <a:ext cx="926325" cy="540000"/>
-          </a:xfrm>
-          <a:prstGeom prst="rect">
-            <a:avLst/>
-          </a:prstGeom>
-          <a:solidFill>
-            <a:schemeClr val="bg1"/>
-          </a:solidFill>
-          <a:ln w="19050"/>
-        </p:spPr>
-        <p:style>
-          <a:lnRef idx="2">
-            <a:schemeClr val="accent1"/>
-          </a:lnRef>
-          <a:fillRef idx="1">
-            <a:schemeClr val="lt1"/>
-          </a:fillRef>
-          <a:effectRef idx="0">
-            <a:schemeClr val="accent1"/>
-          </a:effectRef>
-          <a:fontRef idx="minor">
-            <a:schemeClr val="dk1"/>
-          </a:fontRef>
-        </p:style>
-        <p:txBody>
-          <a:bodyPr lIns="124733" tIns="62367" rIns="124733" bIns="62367" rtlCol="0" anchor="ctr"/>
-          <a:lstStyle/>
-          <a:p>
-            <a:pPr algn="ctr"/>
-            <a:r>
-              <a:rPr lang="ru-RU" sz="700" dirty="0"/>
-              <a:t>Запустить военные заводы и мастерские в </a:t>
-            </a:r>
-            <a:r>
-              <a:rPr lang="ru-RU" sz="700" dirty="0" err="1"/>
-              <a:t>Макнесе</a:t>
-            </a:r>
-            <a:r>
-              <a:rPr lang="ru-RU" sz="700" dirty="0"/>
-              <a:t> и </a:t>
-            </a:r>
-            <a:r>
-              <a:rPr lang="ru-RU" sz="700" dirty="0" err="1"/>
-              <a:t>Ребате</a:t>
-            </a:r>
-            <a:endParaRPr lang="ru-RU" sz="700" dirty="0"/>
-          </a:p>
-        </p:txBody>
-      </p:sp>
       <p:cxnSp>
         <p:nvCxnSpPr>
-          <p:cNvPr id="180" name="Соединительная линия уступом 620">
-            <a:extLst>
-              <a:ext uri="{FF2B5EF4-FFF2-40B4-BE49-F238E27FC236}">
-                <a16:creationId xmlns:a16="http://schemas.microsoft.com/office/drawing/2014/main" id="{10DC8736-A3A3-4600-A289-6DCEADA27B6F}"/>
+          <p:cNvPr id="177" name="Соединительная линия уступом 620">
+            <a:extLst>
+              <a:ext uri="{FF2B5EF4-FFF2-40B4-BE49-F238E27FC236}">
+                <a16:creationId xmlns:a16="http://schemas.microsoft.com/office/drawing/2014/main" id="{00ED7BF8-0741-478A-8257-53724D844C8D}"/>
               </a:ext>
             </a:extLst>
           </p:cNvPr>
           <p:cNvCxnSpPr>
             <a:cxnSpLocks/>
-            <a:stCxn id="172" idx="2"/>
+            <a:stCxn id="163" idx="2"/>
             <a:endCxn id="161" idx="0"/>
           </p:cNvCxnSpPr>
           <p:nvPr/>
         </p:nvCxnSpPr>
         <p:spPr>
-          <a:xfrm rot="5400000">
-            <a:off x="47621166" y="16625639"/>
-            <a:ext cx="269375" cy="12700"/>
+          <a:xfrm rot="16200000" flipH="1">
+            <a:off x="46996528" y="16001001"/>
+            <a:ext cx="275813" cy="1242837"/>
           </a:xfrm>
           <a:prstGeom prst="bentConnector3">
             <a:avLst>
@@ -9665,6 +11061,7 @@
             </a:avLst>
           </a:prstGeom>
           <a:ln w="19050">
+            <a:prstDash val="dash"/>
             <a:tailEnd type="arrow"/>
           </a:ln>
         </p:spPr>
@@ -9683,26 +11080,332 @@
           </a:fontRef>
         </p:style>
       </p:cxnSp>
+      <p:sp>
+        <p:nvSpPr>
+          <p:cNvPr id="178" name="Прямоугольник 177">
+            <a:extLst>
+              <a:ext uri="{FF2B5EF4-FFF2-40B4-BE49-F238E27FC236}">
+                <a16:creationId xmlns:a16="http://schemas.microsoft.com/office/drawing/2014/main" id="{B4B88F2F-4EFD-4A52-B891-709773C0E63B}"/>
+              </a:ext>
+            </a:extLst>
+          </p:cNvPr>
+          <p:cNvSpPr/>
+          <p:nvPr/>
+        </p:nvSpPr>
+        <p:spPr>
+          <a:xfrm>
+            <a:off x="13365535" y="1807655"/>
+            <a:ext cx="926325" cy="540000"/>
+          </a:xfrm>
+          <a:prstGeom prst="rect">
+            <a:avLst/>
+          </a:prstGeom>
+          <a:solidFill>
+            <a:srgbClr val="FF0000"/>
+          </a:solidFill>
+          <a:ln w="19050"/>
+        </p:spPr>
+        <p:style>
+          <a:lnRef idx="2">
+            <a:schemeClr val="accent1"/>
+          </a:lnRef>
+          <a:fillRef idx="1">
+            <a:schemeClr val="lt1"/>
+          </a:fillRef>
+          <a:effectRef idx="0">
+            <a:schemeClr val="accent1"/>
+          </a:effectRef>
+          <a:fontRef idx="minor">
+            <a:schemeClr val="dk1"/>
+          </a:fontRef>
+        </p:style>
+        <p:txBody>
+          <a:bodyPr lIns="124733" tIns="62367" rIns="124733" bIns="62367" rtlCol="0" anchor="ctr"/>
+          <a:lstStyle/>
+          <a:p>
+            <a:pPr algn="ctr"/>
+            <a:r>
+              <a:rPr lang="ru-RU" sz="700" dirty="0"/>
+              <a:t>Пороховая бочка красного июня</a:t>
+            </a:r>
+          </a:p>
+        </p:txBody>
+      </p:sp>
+      <p:sp>
+        <p:nvSpPr>
+          <p:cNvPr id="181" name="Прямоугольник 180">
+            <a:extLst>
+              <a:ext uri="{FF2B5EF4-FFF2-40B4-BE49-F238E27FC236}">
+                <a16:creationId xmlns:a16="http://schemas.microsoft.com/office/drawing/2014/main" id="{F7376C2C-9CEE-4C5F-B577-5679B2784641}"/>
+              </a:ext>
+            </a:extLst>
+          </p:cNvPr>
+          <p:cNvSpPr/>
+          <p:nvPr/>
+        </p:nvSpPr>
+        <p:spPr>
+          <a:xfrm>
+            <a:off x="13953869" y="2617655"/>
+            <a:ext cx="926325" cy="540000"/>
+          </a:xfrm>
+          <a:prstGeom prst="rect">
+            <a:avLst/>
+          </a:prstGeom>
+          <a:solidFill>
+            <a:srgbClr val="FF0000"/>
+          </a:solidFill>
+          <a:ln w="19050"/>
+        </p:spPr>
+        <p:style>
+          <a:lnRef idx="2">
+            <a:schemeClr val="accent1"/>
+          </a:lnRef>
+          <a:fillRef idx="1">
+            <a:schemeClr val="lt1"/>
+          </a:fillRef>
+          <a:effectRef idx="0">
+            <a:schemeClr val="accent1"/>
+          </a:effectRef>
+          <a:fontRef idx="minor">
+            <a:schemeClr val="dk1"/>
+          </a:fontRef>
+        </p:style>
+        <p:txBody>
+          <a:bodyPr lIns="124733" tIns="62367" rIns="124733" bIns="62367" rtlCol="0" anchor="ctr"/>
+          <a:lstStyle/>
+          <a:p>
+            <a:pPr algn="ctr"/>
+            <a:r>
+              <a:rPr lang="ru-RU" sz="700" dirty="0"/>
+              <a:t>Искать компромисс с новой Францией</a:t>
+            </a:r>
+          </a:p>
+        </p:txBody>
+      </p:sp>
+      <p:sp>
+        <p:nvSpPr>
+          <p:cNvPr id="182" name="Прямоугольник 181">
+            <a:extLst>
+              <a:ext uri="{FF2B5EF4-FFF2-40B4-BE49-F238E27FC236}">
+                <a16:creationId xmlns:a16="http://schemas.microsoft.com/office/drawing/2014/main" id="{55B2DC33-8CEE-4512-B070-84F26EE25CE0}"/>
+              </a:ext>
+            </a:extLst>
+          </p:cNvPr>
+          <p:cNvSpPr/>
+          <p:nvPr/>
+        </p:nvSpPr>
+        <p:spPr>
+          <a:xfrm>
+            <a:off x="12766565" y="2617655"/>
+            <a:ext cx="926325" cy="540000"/>
+          </a:xfrm>
+          <a:prstGeom prst="rect">
+            <a:avLst/>
+          </a:prstGeom>
+          <a:solidFill>
+            <a:srgbClr val="FF0000"/>
+          </a:solidFill>
+          <a:ln w="19050"/>
+        </p:spPr>
+        <p:style>
+          <a:lnRef idx="2">
+            <a:schemeClr val="accent1"/>
+          </a:lnRef>
+          <a:fillRef idx="1">
+            <a:schemeClr val="lt1"/>
+          </a:fillRef>
+          <a:effectRef idx="0">
+            <a:schemeClr val="accent1"/>
+          </a:effectRef>
+          <a:fontRef idx="minor">
+            <a:schemeClr val="dk1"/>
+          </a:fontRef>
+        </p:style>
+        <p:txBody>
+          <a:bodyPr lIns="124733" tIns="62367" rIns="124733" bIns="62367" rtlCol="0" anchor="ctr"/>
+          <a:lstStyle/>
+          <a:p>
+            <a:pPr algn="ctr"/>
+            <a:r>
+              <a:rPr lang="ru-RU" sz="700" dirty="0"/>
+              <a:t>Искать помощи у Коминтерна</a:t>
+            </a:r>
+          </a:p>
+        </p:txBody>
+      </p:sp>
+      <p:sp>
+        <p:nvSpPr>
+          <p:cNvPr id="183" name="Прямоугольник 182">
+            <a:extLst>
+              <a:ext uri="{FF2B5EF4-FFF2-40B4-BE49-F238E27FC236}">
+                <a16:creationId xmlns:a16="http://schemas.microsoft.com/office/drawing/2014/main" id="{4A8E4594-12D1-4A9F-BC83-2A7912C7E9C1}"/>
+              </a:ext>
+            </a:extLst>
+          </p:cNvPr>
+          <p:cNvSpPr/>
+          <p:nvPr/>
+        </p:nvSpPr>
+        <p:spPr>
+          <a:xfrm>
+            <a:off x="13365533" y="3427655"/>
+            <a:ext cx="926325" cy="540000"/>
+          </a:xfrm>
+          <a:prstGeom prst="rect">
+            <a:avLst/>
+          </a:prstGeom>
+          <a:solidFill>
+            <a:srgbClr val="FF0000"/>
+          </a:solidFill>
+          <a:ln w="19050"/>
+        </p:spPr>
+        <p:style>
+          <a:lnRef idx="2">
+            <a:schemeClr val="accent1"/>
+          </a:lnRef>
+          <a:fillRef idx="1">
+            <a:schemeClr val="lt1"/>
+          </a:fillRef>
+          <a:effectRef idx="0">
+            <a:schemeClr val="accent1"/>
+          </a:effectRef>
+          <a:fontRef idx="minor">
+            <a:schemeClr val="dk1"/>
+          </a:fontRef>
+        </p:style>
+        <p:txBody>
+          <a:bodyPr lIns="124733" tIns="62367" rIns="124733" bIns="62367" rtlCol="0" anchor="ctr"/>
+          <a:lstStyle/>
+          <a:p>
+            <a:pPr algn="ctr"/>
+            <a:r>
+              <a:rPr lang="ru-RU" sz="700" dirty="0"/>
+              <a:t>Провести «взрывные работы» шахтёров</a:t>
+            </a:r>
+          </a:p>
+        </p:txBody>
+      </p:sp>
+      <p:sp>
+        <p:nvSpPr>
+          <p:cNvPr id="184" name="Прямоугольник 183">
+            <a:extLst>
+              <a:ext uri="{FF2B5EF4-FFF2-40B4-BE49-F238E27FC236}">
+                <a16:creationId xmlns:a16="http://schemas.microsoft.com/office/drawing/2014/main" id="{9DC3C11A-ED8D-4111-8F88-E8E38E2BC526}"/>
+              </a:ext>
+            </a:extLst>
+          </p:cNvPr>
+          <p:cNvSpPr/>
+          <p:nvPr/>
+        </p:nvSpPr>
+        <p:spPr>
+          <a:xfrm>
+            <a:off x="14554608" y="3427655"/>
+            <a:ext cx="926325" cy="540000"/>
+          </a:xfrm>
+          <a:prstGeom prst="rect">
+            <a:avLst/>
+          </a:prstGeom>
+          <a:solidFill>
+            <a:srgbClr val="FF0000"/>
+          </a:solidFill>
+          <a:ln w="19050"/>
+        </p:spPr>
+        <p:style>
+          <a:lnRef idx="2">
+            <a:schemeClr val="accent1"/>
+          </a:lnRef>
+          <a:fillRef idx="1">
+            <a:schemeClr val="lt1"/>
+          </a:fillRef>
+          <a:effectRef idx="0">
+            <a:schemeClr val="accent1"/>
+          </a:effectRef>
+          <a:fontRef idx="minor">
+            <a:schemeClr val="dk1"/>
+          </a:fontRef>
+        </p:style>
+        <p:txBody>
+          <a:bodyPr lIns="124733" tIns="62367" rIns="124733" bIns="62367" rtlCol="0" anchor="ctr"/>
+          <a:lstStyle/>
+          <a:p>
+            <a:pPr algn="ctr"/>
+            <a:r>
+              <a:rPr lang="ru-RU" sz="700" dirty="0"/>
+              <a:t>Вооружить отряды красной гвардии</a:t>
+            </a:r>
+          </a:p>
+        </p:txBody>
+      </p:sp>
+      <p:sp>
+        <p:nvSpPr>
+          <p:cNvPr id="185" name="Прямоугольник 184">
+            <a:extLst>
+              <a:ext uri="{FF2B5EF4-FFF2-40B4-BE49-F238E27FC236}">
+                <a16:creationId xmlns:a16="http://schemas.microsoft.com/office/drawing/2014/main" id="{DA8DB325-2F64-4AE2-83F8-F3166E26E271}"/>
+              </a:ext>
+            </a:extLst>
+          </p:cNvPr>
+          <p:cNvSpPr/>
+          <p:nvPr/>
+        </p:nvSpPr>
+        <p:spPr>
+          <a:xfrm>
+            <a:off x="12176458" y="3427654"/>
+            <a:ext cx="926325" cy="540000"/>
+          </a:xfrm>
+          <a:prstGeom prst="rect">
+            <a:avLst/>
+          </a:prstGeom>
+          <a:solidFill>
+            <a:srgbClr val="FF0000"/>
+          </a:solidFill>
+          <a:ln w="19050"/>
+        </p:spPr>
+        <p:style>
+          <a:lnRef idx="2">
+            <a:schemeClr val="accent1"/>
+          </a:lnRef>
+          <a:fillRef idx="1">
+            <a:schemeClr val="lt1"/>
+          </a:fillRef>
+          <a:effectRef idx="0">
+            <a:schemeClr val="accent1"/>
+          </a:effectRef>
+          <a:fontRef idx="minor">
+            <a:schemeClr val="dk1"/>
+          </a:fontRef>
+        </p:style>
+        <p:txBody>
+          <a:bodyPr lIns="124733" tIns="62367" rIns="124733" bIns="62367" rtlCol="0" anchor="ctr"/>
+          <a:lstStyle/>
+          <a:p>
+            <a:pPr algn="ctr"/>
+            <a:r>
+              <a:rPr lang="ru-RU" sz="700" dirty="0"/>
+              <a:t>Мобилизовать племена Атласа</a:t>
+            </a:r>
+          </a:p>
+        </p:txBody>
+      </p:sp>
       <p:cxnSp>
         <p:nvCxnSpPr>
-          <p:cNvPr id="189" name="Соединительная линия уступом 620">
-            <a:extLst>
-              <a:ext uri="{FF2B5EF4-FFF2-40B4-BE49-F238E27FC236}">
-                <a16:creationId xmlns:a16="http://schemas.microsoft.com/office/drawing/2014/main" id="{7C686C0B-B75D-4F52-8561-05F2CAD940FD}"/>
+          <p:cNvPr id="186" name="Соединительная линия уступом 620">
+            <a:extLst>
+              <a:ext uri="{FF2B5EF4-FFF2-40B4-BE49-F238E27FC236}">
+                <a16:creationId xmlns:a16="http://schemas.microsoft.com/office/drawing/2014/main" id="{613ABB53-6376-41CF-897F-500F98B80A66}"/>
               </a:ext>
             </a:extLst>
           </p:cNvPr>
           <p:cNvCxnSpPr>
             <a:cxnSpLocks/>
-            <a:stCxn id="170" idx="2"/>
-            <a:endCxn id="169" idx="0"/>
+            <a:stCxn id="178" idx="2"/>
+            <a:endCxn id="182" idx="0"/>
           </p:cNvCxnSpPr>
           <p:nvPr/>
         </p:nvCxnSpPr>
         <p:spPr>
-          <a:xfrm rot="16200000" flipH="1">
-            <a:off x="45758929" y="19030526"/>
-            <a:ext cx="256286" cy="1"/>
+          <a:xfrm rot="5400000">
+            <a:off x="13394213" y="2183170"/>
+            <a:ext cx="270000" cy="598970"/>
           </a:xfrm>
           <a:prstGeom prst="bentConnector3">
             <a:avLst>
@@ -9730,24 +11433,24 @@
       </p:cxnSp>
       <p:cxnSp>
         <p:nvCxnSpPr>
-          <p:cNvPr id="211" name="Соединительная линия уступом 620">
-            <a:extLst>
-              <a:ext uri="{FF2B5EF4-FFF2-40B4-BE49-F238E27FC236}">
-                <a16:creationId xmlns:a16="http://schemas.microsoft.com/office/drawing/2014/main" id="{2366AF65-0D98-447C-B7A5-6E3A72161930}"/>
+          <p:cNvPr id="187" name="Соединительная линия уступом 620">
+            <a:extLst>
+              <a:ext uri="{FF2B5EF4-FFF2-40B4-BE49-F238E27FC236}">
+                <a16:creationId xmlns:a16="http://schemas.microsoft.com/office/drawing/2014/main" id="{270265E6-88D6-4986-81F8-E9F04325F57A}"/>
               </a:ext>
             </a:extLst>
           </p:cNvPr>
           <p:cNvCxnSpPr>
             <a:cxnSpLocks/>
-            <a:stCxn id="166" idx="2"/>
-            <a:endCxn id="165" idx="0"/>
+            <a:stCxn id="178" idx="2"/>
+            <a:endCxn id="181" idx="0"/>
           </p:cNvCxnSpPr>
           <p:nvPr/>
         </p:nvCxnSpPr>
         <p:spPr>
-          <a:xfrm rot="5400000">
-            <a:off x="48242716" y="18232027"/>
-            <a:ext cx="260714" cy="1"/>
+          <a:xfrm rot="16200000" flipH="1">
+            <a:off x="13987865" y="2188488"/>
+            <a:ext cx="270000" cy="588334"/>
           </a:xfrm>
           <a:prstGeom prst="bentConnector3">
             <a:avLst>
@@ -9775,328 +11478,24 @@
       </p:cxnSp>
       <p:cxnSp>
         <p:nvCxnSpPr>
-          <p:cNvPr id="217" name="Соединительная линия уступом 620">
-            <a:extLst>
-              <a:ext uri="{FF2B5EF4-FFF2-40B4-BE49-F238E27FC236}">
-                <a16:creationId xmlns:a16="http://schemas.microsoft.com/office/drawing/2014/main" id="{E7C08983-8D44-4498-99BD-254BF64E7274}"/>
+          <p:cNvPr id="188" name="Прямая соединительная линия 187">
+            <a:extLst>
+              <a:ext uri="{FF2B5EF4-FFF2-40B4-BE49-F238E27FC236}">
+                <a16:creationId xmlns:a16="http://schemas.microsoft.com/office/drawing/2014/main" id="{F79F1BE0-6109-4625-9C29-E6A8D1F422DC}"/>
               </a:ext>
             </a:extLst>
           </p:cNvPr>
           <p:cNvCxnSpPr>
             <a:cxnSpLocks/>
-            <a:stCxn id="165" idx="2"/>
-            <a:endCxn id="164" idx="0"/>
+            <a:stCxn id="181" idx="1"/>
+            <a:endCxn id="182" idx="3"/>
           </p:cNvCxnSpPr>
           <p:nvPr/>
         </p:nvCxnSpPr>
         <p:spPr>
-          <a:xfrm rot="5400000">
-            <a:off x="48242714" y="19032742"/>
-            <a:ext cx="260717" cy="1"/>
-          </a:xfrm>
-          <a:prstGeom prst="bentConnector3">
-            <a:avLst>
-              <a:gd name="adj1" fmla="val 50000"/>
-            </a:avLst>
-          </a:prstGeom>
-          <a:ln w="19050">
-            <a:tailEnd type="arrow"/>
-          </a:ln>
-        </p:spPr>
-        <p:style>
-          <a:lnRef idx="1">
-            <a:schemeClr val="accent1"/>
-          </a:lnRef>
-          <a:fillRef idx="0">
-            <a:schemeClr val="accent1"/>
-          </a:fillRef>
-          <a:effectRef idx="0">
-            <a:schemeClr val="accent1"/>
-          </a:effectRef>
-          <a:fontRef idx="minor">
-            <a:schemeClr val="tx1"/>
-          </a:fontRef>
-        </p:style>
-      </p:cxnSp>
-      <p:cxnSp>
-        <p:nvCxnSpPr>
-          <p:cNvPr id="224" name="Соединительная линия уступом 620">
-            <a:extLst>
-              <a:ext uri="{FF2B5EF4-FFF2-40B4-BE49-F238E27FC236}">
-                <a16:creationId xmlns:a16="http://schemas.microsoft.com/office/drawing/2014/main" id="{28E6A8E6-7749-40BE-8958-4DEE2DD96DE3}"/>
-              </a:ext>
-            </a:extLst>
-          </p:cNvPr>
-          <p:cNvCxnSpPr>
-            <a:cxnSpLocks/>
-            <a:stCxn id="160" idx="2"/>
-            <a:endCxn id="159" idx="0"/>
-          </p:cNvCxnSpPr>
-          <p:nvPr/>
-        </p:nvCxnSpPr>
-        <p:spPr>
-          <a:xfrm rot="16200000" flipH="1">
-            <a:off x="47000654" y="18232027"/>
-            <a:ext cx="260717" cy="1"/>
-          </a:xfrm>
-          <a:prstGeom prst="bentConnector3">
-            <a:avLst>
-              <a:gd name="adj1" fmla="val 50000"/>
-            </a:avLst>
-          </a:prstGeom>
-          <a:ln w="19050">
-            <a:prstDash val="dash"/>
-            <a:tailEnd type="arrow"/>
-          </a:ln>
-        </p:spPr>
-        <p:style>
-          <a:lnRef idx="1">
-            <a:schemeClr val="accent1"/>
-          </a:lnRef>
-          <a:fillRef idx="0">
-            <a:schemeClr val="accent1"/>
-          </a:fillRef>
-          <a:effectRef idx="0">
-            <a:schemeClr val="accent1"/>
-          </a:effectRef>
-          <a:fontRef idx="minor">
-            <a:schemeClr val="tx1"/>
-          </a:fontRef>
-        </p:style>
-      </p:cxnSp>
-      <p:cxnSp>
-        <p:nvCxnSpPr>
-          <p:cNvPr id="227" name="Соединительная линия уступом 620">
-            <a:extLst>
-              <a:ext uri="{FF2B5EF4-FFF2-40B4-BE49-F238E27FC236}">
-                <a16:creationId xmlns:a16="http://schemas.microsoft.com/office/drawing/2014/main" id="{4A75F75A-BDCF-494C-A9E3-E29F4988BF22}"/>
-              </a:ext>
-            </a:extLst>
-          </p:cNvPr>
-          <p:cNvCxnSpPr>
-            <a:cxnSpLocks/>
-            <a:stCxn id="166" idx="2"/>
-            <a:endCxn id="159" idx="0"/>
-          </p:cNvCxnSpPr>
-          <p:nvPr/>
-        </p:nvCxnSpPr>
-        <p:spPr>
-          <a:xfrm rot="5400000">
-            <a:off x="47621685" y="17610998"/>
-            <a:ext cx="260717" cy="1242060"/>
-          </a:xfrm>
-          <a:prstGeom prst="bentConnector3">
-            <a:avLst>
-              <a:gd name="adj1" fmla="val 50000"/>
-            </a:avLst>
-          </a:prstGeom>
-          <a:ln w="19050">
-            <a:prstDash val="dash"/>
-            <a:tailEnd type="arrow"/>
-          </a:ln>
-        </p:spPr>
-        <p:style>
-          <a:lnRef idx="1">
-            <a:schemeClr val="accent1"/>
-          </a:lnRef>
-          <a:fillRef idx="0">
-            <a:schemeClr val="accent1"/>
-          </a:fillRef>
-          <a:effectRef idx="0">
-            <a:schemeClr val="accent1"/>
-          </a:effectRef>
-          <a:fontRef idx="minor">
-            <a:schemeClr val="tx1"/>
-          </a:fontRef>
-        </p:style>
-      </p:cxnSp>
-      <p:cxnSp>
-        <p:nvCxnSpPr>
-          <p:cNvPr id="230" name="Соединительная линия уступом 620">
-            <a:extLst>
-              <a:ext uri="{FF2B5EF4-FFF2-40B4-BE49-F238E27FC236}">
-                <a16:creationId xmlns:a16="http://schemas.microsoft.com/office/drawing/2014/main" id="{20B6CC3A-7999-4202-8709-65A70E605078}"/>
-              </a:ext>
-            </a:extLst>
-          </p:cNvPr>
-          <p:cNvCxnSpPr>
-            <a:cxnSpLocks/>
-            <a:stCxn id="165" idx="2"/>
-            <a:endCxn id="133" idx="0"/>
-          </p:cNvCxnSpPr>
-          <p:nvPr/>
-        </p:nvCxnSpPr>
-        <p:spPr>
-          <a:xfrm rot="5400000">
-            <a:off x="47621683" y="18411715"/>
-            <a:ext cx="260720" cy="1242058"/>
-          </a:xfrm>
-          <a:prstGeom prst="bentConnector3">
-            <a:avLst>
-              <a:gd name="adj1" fmla="val 50000"/>
-            </a:avLst>
-          </a:prstGeom>
-          <a:ln w="19050">
-            <a:prstDash val="dash"/>
-            <a:tailEnd type="arrow"/>
-          </a:ln>
-        </p:spPr>
-        <p:style>
-          <a:lnRef idx="1">
-            <a:schemeClr val="accent1"/>
-          </a:lnRef>
-          <a:fillRef idx="0">
-            <a:schemeClr val="accent1"/>
-          </a:fillRef>
-          <a:effectRef idx="0">
-            <a:schemeClr val="accent1"/>
-          </a:effectRef>
-          <a:fontRef idx="minor">
-            <a:schemeClr val="tx1"/>
-          </a:fontRef>
-        </p:style>
-      </p:cxnSp>
-      <p:cxnSp>
-        <p:nvCxnSpPr>
-          <p:cNvPr id="236" name="Соединительная линия уступом 620">
-            <a:extLst>
-              <a:ext uri="{FF2B5EF4-FFF2-40B4-BE49-F238E27FC236}">
-                <a16:creationId xmlns:a16="http://schemas.microsoft.com/office/drawing/2014/main" id="{5B8091A2-FEB0-4588-A97C-712582A9CFE4}"/>
-              </a:ext>
-            </a:extLst>
-          </p:cNvPr>
-          <p:cNvCxnSpPr>
-            <a:cxnSpLocks/>
-            <a:stCxn id="159" idx="2"/>
-            <a:endCxn id="133" idx="0"/>
-          </p:cNvCxnSpPr>
-          <p:nvPr/>
-        </p:nvCxnSpPr>
-        <p:spPr>
-          <a:xfrm rot="16200000" flipH="1">
-            <a:off x="47000655" y="19032744"/>
-            <a:ext cx="260717" cy="1"/>
-          </a:xfrm>
-          <a:prstGeom prst="bentConnector3">
-            <a:avLst>
-              <a:gd name="adj1" fmla="val 50000"/>
-            </a:avLst>
-          </a:prstGeom>
-          <a:ln w="19050">
-            <a:prstDash val="dash"/>
-            <a:tailEnd type="arrow"/>
-          </a:ln>
-        </p:spPr>
-        <p:style>
-          <a:lnRef idx="1">
-            <a:schemeClr val="accent1"/>
-          </a:lnRef>
-          <a:fillRef idx="0">
-            <a:schemeClr val="accent1"/>
-          </a:fillRef>
-          <a:effectRef idx="0">
-            <a:schemeClr val="accent1"/>
-          </a:effectRef>
-          <a:fontRef idx="minor">
-            <a:schemeClr val="tx1"/>
-          </a:fontRef>
-        </p:style>
-      </p:cxnSp>
-      <p:sp>
-        <p:nvSpPr>
-          <p:cNvPr id="245" name="Прямоугольник 244">
-            <a:extLst>
-              <a:ext uri="{FF2B5EF4-FFF2-40B4-BE49-F238E27FC236}">
-                <a16:creationId xmlns:a16="http://schemas.microsoft.com/office/drawing/2014/main" id="{1ED3E070-7793-4DFC-9262-57A19B08DA47}"/>
-              </a:ext>
-            </a:extLst>
-          </p:cNvPr>
-          <p:cNvSpPr/>
-          <p:nvPr/>
-        </p:nvSpPr>
-        <p:spPr>
-          <a:xfrm>
-            <a:off x="44179969" y="17561669"/>
-            <a:ext cx="926325" cy="540000"/>
-          </a:xfrm>
-          <a:prstGeom prst="rect">
-            <a:avLst/>
-          </a:prstGeom>
-          <a:solidFill>
-            <a:schemeClr val="bg1"/>
-          </a:solidFill>
-          <a:ln w="19050"/>
-        </p:spPr>
-        <p:style>
-          <a:lnRef idx="2">
-            <a:schemeClr val="accent1"/>
-          </a:lnRef>
-          <a:fillRef idx="1">
-            <a:schemeClr val="lt1"/>
-          </a:fillRef>
-          <a:effectRef idx="0">
-            <a:schemeClr val="accent1"/>
-          </a:effectRef>
-          <a:fontRef idx="minor">
-            <a:schemeClr val="dk1"/>
-          </a:fontRef>
-        </p:style>
-        <p:txBody>
-          <a:bodyPr lIns="124733" tIns="62367" rIns="124733" bIns="62367" rtlCol="0" anchor="ctr"/>
-          <a:lstStyle/>
-          <a:p>
-            <a:pPr algn="ctr"/>
-            <a:r>
-              <a:rPr lang="ru-RU" sz="700" dirty="0"/>
-              <a:t>Франко-берберские школы</a:t>
-            </a:r>
-          </a:p>
-          <a:p>
-            <a:pPr algn="ctr"/>
-            <a:r>
-              <a:rPr lang="ru-RU" sz="100" dirty="0"/>
-              <a:t>(</a:t>
-            </a:r>
-            <a:r>
-              <a:rPr lang="ru-RU" sz="100" b="1" dirty="0"/>
-              <a:t>Франко-берберские школы:</a:t>
-            </a:r>
-            <a:r>
-              <a:rPr lang="ru-RU" sz="100" dirty="0"/>
-              <a:t> В горах Атласа </a:t>
-            </a:r>
-            <a:r>
-              <a:rPr lang="ru-RU" sz="100" dirty="0" err="1"/>
-              <a:t>Ногес</a:t>
-            </a:r>
-            <a:r>
-              <a:rPr lang="ru-RU" sz="100" dirty="0"/>
-              <a:t> продолжил развивать сеть школ, где обучение велось исключительно на французском языке, а арабский язык и исламское право были полностью исключены. Это делалось для того, чтобы оторвать берберов от арабского большинства страны.)</a:t>
-            </a:r>
-            <a:endParaRPr lang="ru-RU" sz="700" dirty="0"/>
-          </a:p>
-        </p:txBody>
-      </p:sp>
-      <p:cxnSp>
-        <p:nvCxnSpPr>
-          <p:cNvPr id="258" name="Прямая соединительная линия 257">
-            <a:extLst>
-              <a:ext uri="{FF2B5EF4-FFF2-40B4-BE49-F238E27FC236}">
-                <a16:creationId xmlns:a16="http://schemas.microsoft.com/office/drawing/2014/main" id="{2C4F37CE-664B-436A-B255-CCE3A2F068A8}"/>
-              </a:ext>
-            </a:extLst>
-          </p:cNvPr>
-          <p:cNvCxnSpPr>
-            <a:cxnSpLocks/>
-            <a:stCxn id="168" idx="1"/>
-            <a:endCxn id="245" idx="3"/>
-          </p:cNvCxnSpPr>
-          <p:nvPr/>
-        </p:nvCxnSpPr>
-        <p:spPr>
           <a:xfrm flipH="1">
-            <a:off x="45106294" y="17831669"/>
-            <a:ext cx="317615" cy="0"/>
+            <a:off x="13692890" y="2887655"/>
+            <a:ext cx="260979" cy="0"/>
           </a:xfrm>
           <a:prstGeom prst="line">
             <a:avLst/>
@@ -10122,82 +11521,116 @@
           </a:fontRef>
         </p:style>
       </p:cxnSp>
-      <p:sp>
-        <p:nvSpPr>
-          <p:cNvPr id="266" name="Прямоугольник 265">
-            <a:extLst>
-              <a:ext uri="{FF2B5EF4-FFF2-40B4-BE49-F238E27FC236}">
-                <a16:creationId xmlns:a16="http://schemas.microsoft.com/office/drawing/2014/main" id="{68B1E117-0997-408B-8E5D-B6D54012F4BC}"/>
-              </a:ext>
-            </a:extLst>
-          </p:cNvPr>
-          <p:cNvSpPr/>
-          <p:nvPr/>
-        </p:nvSpPr>
-        <p:spPr>
-          <a:xfrm>
-            <a:off x="44179968" y="18362793"/>
-            <a:ext cx="926325" cy="540000"/>
-          </a:xfrm>
-          <a:prstGeom prst="rect">
-            <a:avLst/>
-          </a:prstGeom>
-          <a:solidFill>
-            <a:schemeClr val="bg1"/>
-          </a:solidFill>
-          <a:ln w="19050"/>
-        </p:spPr>
-        <p:style>
-          <a:lnRef idx="2">
-            <a:schemeClr val="accent1"/>
-          </a:lnRef>
-          <a:fillRef idx="1">
-            <a:schemeClr val="lt1"/>
-          </a:fillRef>
-          <a:effectRef idx="0">
-            <a:schemeClr val="accent1"/>
-          </a:effectRef>
-          <a:fontRef idx="minor">
-            <a:schemeClr val="dk1"/>
-          </a:fontRef>
-        </p:style>
-        <p:txBody>
-          <a:bodyPr lIns="124733" tIns="62367" rIns="124733" bIns="62367" rtlCol="0" anchor="ctr"/>
-          <a:lstStyle/>
-          <a:p>
-            <a:pPr algn="ctr"/>
-            <a:r>
-              <a:rPr lang="ru-RU" sz="700" dirty="0"/>
-              <a:t>Создать колледжи для женщин </a:t>
-            </a:r>
-            <a:r>
-              <a:rPr lang="ru-RU" sz="200" dirty="0"/>
-              <a:t>(Ближе к концу Второй мировой войны, под давлением модернизационных процессов, колониальные власти пошли на историческую уступку и заложили базу для женского среднего образования. Были созданы первые специализированные колледжи для мусульманских девушек (в частности, в Рабате и Фесе), что стало революционным шагом для традиционного марокканского общества того времени.)</a:t>
-            </a:r>
-            <a:endParaRPr lang="ru-RU" sz="700" dirty="0"/>
-          </a:p>
-        </p:txBody>
-      </p:sp>
       <p:cxnSp>
         <p:nvCxnSpPr>
-          <p:cNvPr id="267" name="Соединительная линия уступом 620">
-            <a:extLst>
-              <a:ext uri="{FF2B5EF4-FFF2-40B4-BE49-F238E27FC236}">
-                <a16:creationId xmlns:a16="http://schemas.microsoft.com/office/drawing/2014/main" id="{840FDEEB-F3AE-4C87-A93A-2D8E549CDC61}"/>
+          <p:cNvPr id="190" name="Соединительная линия уступом 620">
+            <a:extLst>
+              <a:ext uri="{FF2B5EF4-FFF2-40B4-BE49-F238E27FC236}">
+                <a16:creationId xmlns:a16="http://schemas.microsoft.com/office/drawing/2014/main" id="{355C520A-9137-49BB-B3DE-B42F47010ADA}"/>
               </a:ext>
             </a:extLst>
           </p:cNvPr>
           <p:cNvCxnSpPr>
             <a:cxnSpLocks/>
-            <a:stCxn id="171" idx="2"/>
-            <a:endCxn id="245" idx="0"/>
+            <a:stCxn id="178" idx="2"/>
+            <a:endCxn id="185" idx="0"/>
           </p:cNvCxnSpPr>
           <p:nvPr/>
         </p:nvCxnSpPr>
         <p:spPr>
           <a:xfrm rot="5400000">
-            <a:off x="44832465" y="17116050"/>
-            <a:ext cx="256286" cy="634952"/>
+            <a:off x="12694161" y="2293116"/>
+            <a:ext cx="1079999" cy="1189077"/>
+          </a:xfrm>
+          <a:prstGeom prst="bentConnector3">
+            <a:avLst>
+              <a:gd name="adj1" fmla="val 12097"/>
+            </a:avLst>
+          </a:prstGeom>
+          <a:ln w="19050">
+            <a:tailEnd type="arrow"/>
+          </a:ln>
+        </p:spPr>
+        <p:style>
+          <a:lnRef idx="1">
+            <a:schemeClr val="accent1"/>
+          </a:lnRef>
+          <a:fillRef idx="0">
+            <a:schemeClr val="accent1"/>
+          </a:fillRef>
+          <a:effectRef idx="0">
+            <a:schemeClr val="accent1"/>
+          </a:effectRef>
+          <a:fontRef idx="minor">
+            <a:schemeClr val="tx1"/>
+          </a:fontRef>
+        </p:style>
+      </p:cxnSp>
+      <p:cxnSp>
+        <p:nvCxnSpPr>
+          <p:cNvPr id="191" name="Соединительная линия уступом 620">
+            <a:extLst>
+              <a:ext uri="{FF2B5EF4-FFF2-40B4-BE49-F238E27FC236}">
+                <a16:creationId xmlns:a16="http://schemas.microsoft.com/office/drawing/2014/main" id="{2BE64C25-E8F0-401C-BA1C-5549B15D2E5B}"/>
+              </a:ext>
+            </a:extLst>
+          </p:cNvPr>
+          <p:cNvCxnSpPr>
+            <a:cxnSpLocks/>
+            <a:stCxn id="178" idx="2"/>
+            <a:endCxn id="184" idx="0"/>
+          </p:cNvCxnSpPr>
+          <p:nvPr/>
+        </p:nvCxnSpPr>
+        <p:spPr>
+          <a:xfrm rot="16200000" flipH="1">
+            <a:off x="13883234" y="2293118"/>
+            <a:ext cx="1080000" cy="1189073"/>
+          </a:xfrm>
+          <a:prstGeom prst="bentConnector3">
+            <a:avLst>
+              <a:gd name="adj1" fmla="val 12096"/>
+            </a:avLst>
+          </a:prstGeom>
+          <a:ln w="19050">
+            <a:tailEnd type="arrow"/>
+          </a:ln>
+        </p:spPr>
+        <p:style>
+          <a:lnRef idx="1">
+            <a:schemeClr val="accent1"/>
+          </a:lnRef>
+          <a:fillRef idx="0">
+            <a:schemeClr val="accent1"/>
+          </a:fillRef>
+          <a:effectRef idx="0">
+            <a:schemeClr val="accent1"/>
+          </a:effectRef>
+          <a:fontRef idx="minor">
+            <a:schemeClr val="tx1"/>
+          </a:fontRef>
+        </p:style>
+      </p:cxnSp>
+      <p:cxnSp>
+        <p:nvCxnSpPr>
+          <p:cNvPr id="192" name="Соединительная линия уступом 620">
+            <a:extLst>
+              <a:ext uri="{FF2B5EF4-FFF2-40B4-BE49-F238E27FC236}">
+                <a16:creationId xmlns:a16="http://schemas.microsoft.com/office/drawing/2014/main" id="{971C1CBF-A3AA-408F-A1D2-9C9D75D41B8F}"/>
+              </a:ext>
+            </a:extLst>
+          </p:cNvPr>
+          <p:cNvCxnSpPr>
+            <a:cxnSpLocks/>
+            <a:stCxn id="178" idx="2"/>
+            <a:endCxn id="183" idx="0"/>
+          </p:cNvCxnSpPr>
+          <p:nvPr/>
+        </p:nvCxnSpPr>
+        <p:spPr>
+          <a:xfrm rot="5400000">
+            <a:off x="13288697" y="2887654"/>
+            <a:ext cx="1080000" cy="2"/>
           </a:xfrm>
           <a:prstGeom prst="bentConnector3">
             <a:avLst>
@@ -10223,26 +11656,269 @@
           </a:fontRef>
         </p:style>
       </p:cxnSp>
+      <p:sp>
+        <p:nvSpPr>
+          <p:cNvPr id="193" name="Прямоугольник 192">
+            <a:extLst>
+              <a:ext uri="{FF2B5EF4-FFF2-40B4-BE49-F238E27FC236}">
+                <a16:creationId xmlns:a16="http://schemas.microsoft.com/office/drawing/2014/main" id="{CEBD78CE-17CE-43A0-BD37-6E227DB122CD}"/>
+              </a:ext>
+            </a:extLst>
+          </p:cNvPr>
+          <p:cNvSpPr/>
+          <p:nvPr/>
+        </p:nvSpPr>
+        <p:spPr>
+          <a:xfrm>
+            <a:off x="12766565" y="4237653"/>
+            <a:ext cx="926325" cy="540000"/>
+          </a:xfrm>
+          <a:prstGeom prst="rect">
+            <a:avLst/>
+          </a:prstGeom>
+          <a:solidFill>
+            <a:srgbClr val="FF0000"/>
+          </a:solidFill>
+          <a:ln w="19050"/>
+        </p:spPr>
+        <p:style>
+          <a:lnRef idx="2">
+            <a:schemeClr val="accent1"/>
+          </a:lnRef>
+          <a:fillRef idx="1">
+            <a:schemeClr val="lt1"/>
+          </a:fillRef>
+          <a:effectRef idx="0">
+            <a:schemeClr val="accent1"/>
+          </a:effectRef>
+          <a:fontRef idx="minor">
+            <a:schemeClr val="dk1"/>
+          </a:fontRef>
+        </p:style>
+        <p:txBody>
+          <a:bodyPr lIns="124733" tIns="62367" rIns="124733" bIns="62367" rtlCol="0" anchor="ctr"/>
+          <a:lstStyle/>
+          <a:p>
+            <a:pPr algn="ctr"/>
+            <a:r>
+              <a:rPr lang="ru-RU" sz="700" dirty="0"/>
+              <a:t>Искать помощи среди националистов</a:t>
+            </a:r>
+          </a:p>
+        </p:txBody>
+      </p:sp>
+      <p:sp>
+        <p:nvSpPr>
+          <p:cNvPr id="194" name="Прямоугольник 193">
+            <a:extLst>
+              <a:ext uri="{FF2B5EF4-FFF2-40B4-BE49-F238E27FC236}">
+                <a16:creationId xmlns:a16="http://schemas.microsoft.com/office/drawing/2014/main" id="{DE354935-DCCA-4E3F-BE40-654491151E16}"/>
+              </a:ext>
+            </a:extLst>
+          </p:cNvPr>
+          <p:cNvSpPr/>
+          <p:nvPr/>
+        </p:nvSpPr>
+        <p:spPr>
+          <a:xfrm>
+            <a:off x="13953868" y="4237653"/>
+            <a:ext cx="926325" cy="540000"/>
+          </a:xfrm>
+          <a:prstGeom prst="rect">
+            <a:avLst/>
+          </a:prstGeom>
+          <a:solidFill>
+            <a:srgbClr val="FF0000"/>
+          </a:solidFill>
+          <a:ln w="19050"/>
+        </p:spPr>
+        <p:style>
+          <a:lnRef idx="2">
+            <a:schemeClr val="accent1"/>
+          </a:lnRef>
+          <a:fillRef idx="1">
+            <a:schemeClr val="lt1"/>
+          </a:fillRef>
+          <a:effectRef idx="0">
+            <a:schemeClr val="accent1"/>
+          </a:effectRef>
+          <a:fontRef idx="minor">
+            <a:schemeClr val="dk1"/>
+          </a:fontRef>
+        </p:style>
+        <p:txBody>
+          <a:bodyPr lIns="124733" tIns="62367" rIns="124733" bIns="62367" rtlCol="0" anchor="ctr"/>
+          <a:lstStyle/>
+          <a:p>
+            <a:pPr algn="ctr"/>
+            <a:r>
+              <a:rPr lang="ru-RU" sz="700" dirty="0"/>
+              <a:t>Переманить остатки марокканцев из армии</a:t>
+            </a:r>
+          </a:p>
+        </p:txBody>
+      </p:sp>
       <p:cxnSp>
         <p:nvCxnSpPr>
-          <p:cNvPr id="272" name="Соединительная линия уступом 620">
-            <a:extLst>
-              <a:ext uri="{FF2B5EF4-FFF2-40B4-BE49-F238E27FC236}">
-                <a16:creationId xmlns:a16="http://schemas.microsoft.com/office/drawing/2014/main" id="{C42987BF-3C90-4273-8578-F4ECAA730943}"/>
+          <p:cNvPr id="195" name="Соединительная линия уступом 620">
+            <a:extLst>
+              <a:ext uri="{FF2B5EF4-FFF2-40B4-BE49-F238E27FC236}">
+                <a16:creationId xmlns:a16="http://schemas.microsoft.com/office/drawing/2014/main" id="{EFBD37AD-79FE-4447-8A69-147D52878238}"/>
               </a:ext>
             </a:extLst>
           </p:cNvPr>
           <p:cNvCxnSpPr>
             <a:cxnSpLocks/>
-            <a:stCxn id="171" idx="2"/>
-            <a:endCxn id="168" idx="0"/>
+            <a:stCxn id="181" idx="2"/>
+            <a:endCxn id="229" idx="0"/>
           </p:cNvCxnSpPr>
           <p:nvPr/>
         </p:nvCxnSpPr>
         <p:spPr>
           <a:xfrm rot="16200000" flipH="1">
-            <a:off x="45454435" y="17129032"/>
-            <a:ext cx="256286" cy="608988"/>
+            <a:off x="14066985" y="3507701"/>
+            <a:ext cx="1887395" cy="1187301"/>
+          </a:xfrm>
+          <a:prstGeom prst="bentConnector3">
+            <a:avLst>
+              <a:gd name="adj1" fmla="val 6904"/>
+            </a:avLst>
+          </a:prstGeom>
+          <a:ln w="19050">
+            <a:tailEnd type="arrow"/>
+          </a:ln>
+        </p:spPr>
+        <p:style>
+          <a:lnRef idx="1">
+            <a:schemeClr val="accent1"/>
+          </a:lnRef>
+          <a:fillRef idx="0">
+            <a:schemeClr val="accent1"/>
+          </a:fillRef>
+          <a:effectRef idx="0">
+            <a:schemeClr val="accent1"/>
+          </a:effectRef>
+          <a:fontRef idx="minor">
+            <a:schemeClr val="tx1"/>
+          </a:fontRef>
+        </p:style>
+      </p:cxnSp>
+      <p:cxnSp>
+        <p:nvCxnSpPr>
+          <p:cNvPr id="196" name="Соединительная линия уступом 620">
+            <a:extLst>
+              <a:ext uri="{FF2B5EF4-FFF2-40B4-BE49-F238E27FC236}">
+                <a16:creationId xmlns:a16="http://schemas.microsoft.com/office/drawing/2014/main" id="{E9EB3CF6-3D48-4724-B19F-D706D559FC5D}"/>
+              </a:ext>
+            </a:extLst>
+          </p:cNvPr>
+          <p:cNvCxnSpPr>
+            <a:cxnSpLocks/>
+            <a:stCxn id="182" idx="2"/>
+            <a:endCxn id="231" idx="0"/>
+          </p:cNvCxnSpPr>
+          <p:nvPr/>
+        </p:nvCxnSpPr>
+        <p:spPr>
+          <a:xfrm rot="5400000">
+            <a:off x="11692379" y="3507700"/>
+            <a:ext cx="1887395" cy="1187304"/>
+          </a:xfrm>
+          <a:prstGeom prst="bentConnector3">
+            <a:avLst>
+              <a:gd name="adj1" fmla="val 7186"/>
+            </a:avLst>
+          </a:prstGeom>
+          <a:ln w="19050">
+            <a:tailEnd type="arrow"/>
+          </a:ln>
+        </p:spPr>
+        <p:style>
+          <a:lnRef idx="1">
+            <a:schemeClr val="accent1"/>
+          </a:lnRef>
+          <a:fillRef idx="0">
+            <a:schemeClr val="accent1"/>
+          </a:fillRef>
+          <a:effectRef idx="0">
+            <a:schemeClr val="accent1"/>
+          </a:effectRef>
+          <a:fontRef idx="minor">
+            <a:schemeClr val="tx1"/>
+          </a:fontRef>
+        </p:style>
+      </p:cxnSp>
+      <p:sp>
+        <p:nvSpPr>
+          <p:cNvPr id="198" name="Прямоугольник 197">
+            <a:extLst>
+              <a:ext uri="{FF2B5EF4-FFF2-40B4-BE49-F238E27FC236}">
+                <a16:creationId xmlns:a16="http://schemas.microsoft.com/office/drawing/2014/main" id="{01483DFB-5720-4EC7-82D0-9CC2FB45BAFB}"/>
+              </a:ext>
+            </a:extLst>
+          </p:cNvPr>
+          <p:cNvSpPr/>
+          <p:nvPr/>
+        </p:nvSpPr>
+        <p:spPr>
+          <a:xfrm>
+            <a:off x="13360215" y="5852447"/>
+            <a:ext cx="926325" cy="540000"/>
+          </a:xfrm>
+          <a:prstGeom prst="rect">
+            <a:avLst/>
+          </a:prstGeom>
+          <a:solidFill>
+            <a:srgbClr val="FF0000"/>
+          </a:solidFill>
+          <a:ln w="19050"/>
+        </p:spPr>
+        <p:style>
+          <a:lnRef idx="2">
+            <a:schemeClr val="accent1"/>
+          </a:lnRef>
+          <a:fillRef idx="1">
+            <a:schemeClr val="lt1"/>
+          </a:fillRef>
+          <a:effectRef idx="0">
+            <a:schemeClr val="accent1"/>
+          </a:effectRef>
+          <a:fontRef idx="minor">
+            <a:schemeClr val="dk1"/>
+          </a:fontRef>
+        </p:style>
+        <p:txBody>
+          <a:bodyPr lIns="124733" tIns="62367" rIns="124733" bIns="62367" rtlCol="0" anchor="ctr"/>
+          <a:lstStyle/>
+          <a:p>
+            <a:pPr algn="ctr"/>
+            <a:r>
+              <a:rPr lang="ru-RU" sz="700" dirty="0"/>
+              <a:t>Судьба короля?</a:t>
+            </a:r>
+          </a:p>
+        </p:txBody>
+      </p:sp>
+      <p:cxnSp>
+        <p:nvCxnSpPr>
+          <p:cNvPr id="199" name="Соединительная линия уступом 620">
+            <a:extLst>
+              <a:ext uri="{FF2B5EF4-FFF2-40B4-BE49-F238E27FC236}">
+                <a16:creationId xmlns:a16="http://schemas.microsoft.com/office/drawing/2014/main" id="{7D3CB62A-02A1-45FC-8FBA-E15235435620}"/>
+              </a:ext>
+            </a:extLst>
+          </p:cNvPr>
+          <p:cNvCxnSpPr>
+            <a:cxnSpLocks/>
+            <a:stCxn id="183" idx="2"/>
+            <a:endCxn id="194" idx="0"/>
+          </p:cNvCxnSpPr>
+          <p:nvPr/>
+        </p:nvCxnSpPr>
+        <p:spPr>
+          <a:xfrm rot="16200000" flipH="1">
+            <a:off x="13987864" y="3808486"/>
+            <a:ext cx="269998" cy="588335"/>
           </a:xfrm>
           <a:prstGeom prst="bentConnector3">
             <a:avLst>
@@ -10250,6 +11926,7 @@
             </a:avLst>
           </a:prstGeom>
           <a:ln w="19050">
+            <a:prstDash val="dash"/>
             <a:tailEnd type="arrow"/>
           </a:ln>
         </p:spPr>
@@ -10270,24 +11947,24 @@
       </p:cxnSp>
       <p:cxnSp>
         <p:nvCxnSpPr>
-          <p:cNvPr id="276" name="Соединительная линия уступом 620">
-            <a:extLst>
-              <a:ext uri="{FF2B5EF4-FFF2-40B4-BE49-F238E27FC236}">
-                <a16:creationId xmlns:a16="http://schemas.microsoft.com/office/drawing/2014/main" id="{CC9C22C5-0599-4A63-A76A-3E6E9BB2C8AF}"/>
+          <p:cNvPr id="200" name="Соединительная линия уступом 620">
+            <a:extLst>
+              <a:ext uri="{FF2B5EF4-FFF2-40B4-BE49-F238E27FC236}">
+                <a16:creationId xmlns:a16="http://schemas.microsoft.com/office/drawing/2014/main" id="{521B31FB-7CFF-4558-AB1E-BEC09F2E040D}"/>
               </a:ext>
             </a:extLst>
           </p:cNvPr>
           <p:cNvCxnSpPr>
             <a:cxnSpLocks/>
-            <a:stCxn id="168" idx="2"/>
-            <a:endCxn id="266" idx="0"/>
+            <a:stCxn id="184" idx="2"/>
+            <a:endCxn id="194" idx="0"/>
           </p:cNvCxnSpPr>
           <p:nvPr/>
         </p:nvCxnSpPr>
         <p:spPr>
           <a:xfrm rot="5400000">
-            <a:off x="45134540" y="17610261"/>
-            <a:ext cx="261124" cy="1243941"/>
+            <a:off x="14582402" y="3802284"/>
+            <a:ext cx="269998" cy="600740"/>
           </a:xfrm>
           <a:prstGeom prst="bentConnector3">
             <a:avLst>
@@ -10316,24 +11993,24 @@
       </p:cxnSp>
       <p:cxnSp>
         <p:nvCxnSpPr>
-          <p:cNvPr id="279" name="Соединительная линия уступом 620">
-            <a:extLst>
-              <a:ext uri="{FF2B5EF4-FFF2-40B4-BE49-F238E27FC236}">
-                <a16:creationId xmlns:a16="http://schemas.microsoft.com/office/drawing/2014/main" id="{B37C4214-5DF9-4BB7-87F6-3E8E0886C3AC}"/>
+          <p:cNvPr id="205" name="Соединительная линия уступом 620">
+            <a:extLst>
+              <a:ext uri="{FF2B5EF4-FFF2-40B4-BE49-F238E27FC236}">
+                <a16:creationId xmlns:a16="http://schemas.microsoft.com/office/drawing/2014/main" id="{964295CE-967D-4989-94F2-12B863910B48}"/>
               </a:ext>
             </a:extLst>
           </p:cNvPr>
           <p:cNvCxnSpPr>
             <a:cxnSpLocks/>
-            <a:stCxn id="245" idx="2"/>
-            <a:endCxn id="266" idx="0"/>
+            <a:stCxn id="185" idx="2"/>
+            <a:endCxn id="194" idx="0"/>
           </p:cNvCxnSpPr>
           <p:nvPr/>
         </p:nvCxnSpPr>
         <p:spPr>
-          <a:xfrm rot="5400000">
-            <a:off x="44512570" y="18232231"/>
-            <a:ext cx="261124" cy="1"/>
+          <a:xfrm rot="16200000" flipH="1">
+            <a:off x="13393327" y="3213948"/>
+            <a:ext cx="269999" cy="1777410"/>
           </a:xfrm>
           <a:prstGeom prst="bentConnector3">
             <a:avLst>
@@ -10362,24 +12039,24 @@
       </p:cxnSp>
       <p:cxnSp>
         <p:nvCxnSpPr>
-          <p:cNvPr id="291" name="Соединительная линия уступом 620">
-            <a:extLst>
-              <a:ext uri="{FF2B5EF4-FFF2-40B4-BE49-F238E27FC236}">
-                <a16:creationId xmlns:a16="http://schemas.microsoft.com/office/drawing/2014/main" id="{066864E5-04F4-434A-9229-08D47A32E87B}"/>
+          <p:cNvPr id="212" name="Соединительная линия уступом 620">
+            <a:extLst>
+              <a:ext uri="{FF2B5EF4-FFF2-40B4-BE49-F238E27FC236}">
+                <a16:creationId xmlns:a16="http://schemas.microsoft.com/office/drawing/2014/main" id="{633F4767-5E0F-4CAE-AE5A-3F79227A395D}"/>
               </a:ext>
             </a:extLst>
           </p:cNvPr>
           <p:cNvCxnSpPr>
             <a:cxnSpLocks/>
-            <a:stCxn id="245" idx="2"/>
-            <a:endCxn id="170" idx="0"/>
+            <a:stCxn id="185" idx="2"/>
+            <a:endCxn id="193" idx="0"/>
           </p:cNvCxnSpPr>
           <p:nvPr/>
         </p:nvCxnSpPr>
         <p:spPr>
           <a:xfrm rot="16200000" flipH="1">
-            <a:off x="45134745" y="17610056"/>
-            <a:ext cx="260715" cy="1243940"/>
+            <a:off x="12799675" y="3807599"/>
+            <a:ext cx="269999" cy="590107"/>
           </a:xfrm>
           <a:prstGeom prst="bentConnector3">
             <a:avLst>
@@ -10408,24 +12085,24 @@
       </p:cxnSp>
       <p:cxnSp>
         <p:nvCxnSpPr>
-          <p:cNvPr id="294" name="Соединительная линия уступом 620">
-            <a:extLst>
-              <a:ext uri="{FF2B5EF4-FFF2-40B4-BE49-F238E27FC236}">
-                <a16:creationId xmlns:a16="http://schemas.microsoft.com/office/drawing/2014/main" id="{C7785B8F-424F-443D-A8C2-43EC2C92A8DF}"/>
+          <p:cNvPr id="214" name="Соединительная линия уступом 620">
+            <a:extLst>
+              <a:ext uri="{FF2B5EF4-FFF2-40B4-BE49-F238E27FC236}">
+                <a16:creationId xmlns:a16="http://schemas.microsoft.com/office/drawing/2014/main" id="{4ADDAB24-CD5B-4FA7-9434-90B11D5F66B0}"/>
               </a:ext>
             </a:extLst>
           </p:cNvPr>
           <p:cNvCxnSpPr>
             <a:cxnSpLocks/>
-            <a:stCxn id="168" idx="2"/>
-            <a:endCxn id="170" idx="0"/>
+            <a:stCxn id="183" idx="2"/>
+            <a:endCxn id="193" idx="0"/>
           </p:cNvCxnSpPr>
           <p:nvPr/>
         </p:nvCxnSpPr>
         <p:spPr>
           <a:xfrm rot="5400000">
-            <a:off x="45756715" y="18232026"/>
-            <a:ext cx="260715" cy="12700"/>
+            <a:off x="13394213" y="3803170"/>
+            <a:ext cx="269998" cy="598968"/>
           </a:xfrm>
           <a:prstGeom prst="bentConnector3">
             <a:avLst>
@@ -10454,24 +12131,24 @@
       </p:cxnSp>
       <p:cxnSp>
         <p:nvCxnSpPr>
-          <p:cNvPr id="297" name="Соединительная линия уступом 620">
-            <a:extLst>
-              <a:ext uri="{FF2B5EF4-FFF2-40B4-BE49-F238E27FC236}">
-                <a16:creationId xmlns:a16="http://schemas.microsoft.com/office/drawing/2014/main" id="{E78ABD49-6846-4088-9270-5DAE8DC72206}"/>
+          <p:cNvPr id="218" name="Соединительная линия уступом 620">
+            <a:extLst>
+              <a:ext uri="{FF2B5EF4-FFF2-40B4-BE49-F238E27FC236}">
+                <a16:creationId xmlns:a16="http://schemas.microsoft.com/office/drawing/2014/main" id="{07BCE0E3-BBFB-4A99-9140-F3998272FA21}"/>
               </a:ext>
             </a:extLst>
           </p:cNvPr>
           <p:cNvCxnSpPr>
             <a:cxnSpLocks/>
-            <a:stCxn id="163" idx="2"/>
-            <a:endCxn id="167" idx="0"/>
+            <a:stCxn id="184" idx="2"/>
+            <a:endCxn id="193" idx="0"/>
           </p:cNvCxnSpPr>
           <p:nvPr/>
         </p:nvCxnSpPr>
         <p:spPr>
-          <a:xfrm rot="16200000" flipH="1">
-            <a:off x="45760551" y="16008485"/>
-            <a:ext cx="270001" cy="1234932"/>
+          <a:xfrm rot="5400000">
+            <a:off x="13988751" y="3208633"/>
+            <a:ext cx="269998" cy="1788043"/>
           </a:xfrm>
           <a:prstGeom prst="bentConnector3">
             <a:avLst>
@@ -10498,596 +12175,128 @@
           </a:fontRef>
         </p:style>
       </p:cxnSp>
+      <p:sp>
+        <p:nvSpPr>
+          <p:cNvPr id="229" name="Прямоугольник 228">
+            <a:extLst>
+              <a:ext uri="{FF2B5EF4-FFF2-40B4-BE49-F238E27FC236}">
+                <a16:creationId xmlns:a16="http://schemas.microsoft.com/office/drawing/2014/main" id="{4F0ACAB2-A532-4A4A-BE2B-6DD898A778A6}"/>
+              </a:ext>
+            </a:extLst>
+          </p:cNvPr>
+          <p:cNvSpPr/>
+          <p:nvPr/>
+        </p:nvSpPr>
+        <p:spPr>
+          <a:xfrm>
+            <a:off x="15141170" y="5045050"/>
+            <a:ext cx="926325" cy="540000"/>
+          </a:xfrm>
+          <a:prstGeom prst="rect">
+            <a:avLst/>
+          </a:prstGeom>
+          <a:solidFill>
+            <a:srgbClr val="FF0000"/>
+          </a:solidFill>
+          <a:ln w="19050"/>
+        </p:spPr>
+        <p:style>
+          <a:lnRef idx="2">
+            <a:schemeClr val="accent1"/>
+          </a:lnRef>
+          <a:fillRef idx="1">
+            <a:schemeClr val="lt1"/>
+          </a:fillRef>
+          <a:effectRef idx="0">
+            <a:schemeClr val="accent1"/>
+          </a:effectRef>
+          <a:fontRef idx="minor">
+            <a:schemeClr val="dk1"/>
+          </a:fontRef>
+        </p:style>
+        <p:txBody>
+          <a:bodyPr lIns="124733" tIns="62367" rIns="124733" bIns="62367" rtlCol="0" anchor="ctr"/>
+          <a:lstStyle/>
+          <a:p>
+            <a:pPr algn="ctr"/>
+            <a:r>
+              <a:rPr lang="ru-RU" sz="700" dirty="0"/>
+              <a:t>Согласовать новое правительство Марокко</a:t>
+            </a:r>
+          </a:p>
+        </p:txBody>
+      </p:sp>
+      <p:sp>
+        <p:nvSpPr>
+          <p:cNvPr id="231" name="Прямоугольник 230">
+            <a:extLst>
+              <a:ext uri="{FF2B5EF4-FFF2-40B4-BE49-F238E27FC236}">
+                <a16:creationId xmlns:a16="http://schemas.microsoft.com/office/drawing/2014/main" id="{1FF530F6-3A49-4FDD-B396-8F8B8659BA04}"/>
+              </a:ext>
+            </a:extLst>
+          </p:cNvPr>
+          <p:cNvSpPr/>
+          <p:nvPr/>
+        </p:nvSpPr>
+        <p:spPr>
+          <a:xfrm>
+            <a:off x="11579261" y="5045050"/>
+            <a:ext cx="926325" cy="540000"/>
+          </a:xfrm>
+          <a:prstGeom prst="rect">
+            <a:avLst/>
+          </a:prstGeom>
+          <a:solidFill>
+            <a:srgbClr val="FF0000"/>
+          </a:solidFill>
+          <a:ln w="19050"/>
+        </p:spPr>
+        <p:style>
+          <a:lnRef idx="2">
+            <a:schemeClr val="accent1"/>
+          </a:lnRef>
+          <a:fillRef idx="1">
+            <a:schemeClr val="lt1"/>
+          </a:fillRef>
+          <a:effectRef idx="0">
+            <a:schemeClr val="accent1"/>
+          </a:effectRef>
+          <a:fontRef idx="minor">
+            <a:schemeClr val="dk1"/>
+          </a:fontRef>
+        </p:style>
+        <p:txBody>
+          <a:bodyPr lIns="124733" tIns="62367" rIns="124733" bIns="62367" rtlCol="0" anchor="ctr"/>
+          <a:lstStyle/>
+          <a:p>
+            <a:pPr algn="ctr"/>
+            <a:r>
+              <a:rPr lang="ru-RU" sz="700" dirty="0"/>
+              <a:t>Новая страна рабочих!</a:t>
+            </a:r>
+          </a:p>
+        </p:txBody>
+      </p:sp>
       <p:cxnSp>
         <p:nvCxnSpPr>
-          <p:cNvPr id="302" name="Соединительная линия уступом 620">
-            <a:extLst>
-              <a:ext uri="{FF2B5EF4-FFF2-40B4-BE49-F238E27FC236}">
-                <a16:creationId xmlns:a16="http://schemas.microsoft.com/office/drawing/2014/main" id="{7BEE4F34-8379-47D8-8C0B-4D8DE22A0B97}"/>
+          <p:cNvPr id="237" name="Прямая соединительная линия 236">
+            <a:extLst>
+              <a:ext uri="{FF2B5EF4-FFF2-40B4-BE49-F238E27FC236}">
+                <a16:creationId xmlns:a16="http://schemas.microsoft.com/office/drawing/2014/main" id="{71C9DE65-C59A-4802-9A6D-6EAE192DEEAD}"/>
               </a:ext>
             </a:extLst>
           </p:cNvPr>
           <p:cNvCxnSpPr>
             <a:cxnSpLocks/>
-            <a:stCxn id="172" idx="2"/>
-            <a:endCxn id="167" idx="0"/>
+            <a:stCxn id="229" idx="1"/>
+            <a:endCxn id="231" idx="3"/>
           </p:cNvCxnSpPr>
           <p:nvPr/>
         </p:nvCxnSpPr>
         <p:spPr>
-          <a:xfrm rot="5400000">
-            <a:off x="46999435" y="16004534"/>
-            <a:ext cx="270000" cy="1242836"/>
-          </a:xfrm>
-          <a:prstGeom prst="bentConnector3">
-            <a:avLst>
-              <a:gd name="adj1" fmla="val 50000"/>
-            </a:avLst>
-          </a:prstGeom>
-          <a:ln w="19050">
-            <a:prstDash val="dash"/>
-            <a:tailEnd type="arrow"/>
-          </a:ln>
-        </p:spPr>
-        <p:style>
-          <a:lnRef idx="1">
-            <a:schemeClr val="accent1"/>
-          </a:lnRef>
-          <a:fillRef idx="0">
-            <a:schemeClr val="accent1"/>
-          </a:fillRef>
-          <a:effectRef idx="0">
-            <a:schemeClr val="accent1"/>
-          </a:effectRef>
-          <a:fontRef idx="minor">
-            <a:schemeClr val="tx1"/>
-          </a:fontRef>
-        </p:style>
-      </p:cxnSp>
-      <p:cxnSp>
-        <p:nvCxnSpPr>
-          <p:cNvPr id="306" name="Соединительная линия уступом 620">
-            <a:extLst>
-              <a:ext uri="{FF2B5EF4-FFF2-40B4-BE49-F238E27FC236}">
-                <a16:creationId xmlns:a16="http://schemas.microsoft.com/office/drawing/2014/main" id="{7BAF9731-AEDE-4588-8E73-E99D5DAF63CC}"/>
-              </a:ext>
-            </a:extLst>
-          </p:cNvPr>
-          <p:cNvCxnSpPr>
-            <a:cxnSpLocks/>
-            <a:stCxn id="167" idx="2"/>
-            <a:endCxn id="160" idx="0"/>
-          </p:cNvCxnSpPr>
-          <p:nvPr/>
-        </p:nvCxnSpPr>
-        <p:spPr>
-          <a:xfrm rot="16200000" flipH="1">
-            <a:off x="46691655" y="17122313"/>
-            <a:ext cx="260718" cy="617995"/>
-          </a:xfrm>
-          <a:prstGeom prst="bentConnector3">
-            <a:avLst>
-              <a:gd name="adj1" fmla="val 50000"/>
-            </a:avLst>
-          </a:prstGeom>
-          <a:ln w="19050">
-            <a:prstDash val="dash"/>
-            <a:tailEnd type="arrow"/>
-          </a:ln>
-        </p:spPr>
-        <p:style>
-          <a:lnRef idx="1">
-            <a:schemeClr val="accent1"/>
-          </a:lnRef>
-          <a:fillRef idx="0">
-            <a:schemeClr val="accent1"/>
-          </a:fillRef>
-          <a:effectRef idx="0">
-            <a:schemeClr val="accent1"/>
-          </a:effectRef>
-          <a:fontRef idx="minor">
-            <a:schemeClr val="tx1"/>
-          </a:fontRef>
-        </p:style>
-      </p:cxnSp>
-      <p:cxnSp>
-        <p:nvCxnSpPr>
-          <p:cNvPr id="309" name="Соединительная линия уступом 620">
-            <a:extLst>
-              <a:ext uri="{FF2B5EF4-FFF2-40B4-BE49-F238E27FC236}">
-                <a16:creationId xmlns:a16="http://schemas.microsoft.com/office/drawing/2014/main" id="{EB1802D9-6AEF-43B0-8B61-D88E8CD70023}"/>
-              </a:ext>
-            </a:extLst>
-          </p:cNvPr>
-          <p:cNvCxnSpPr>
-            <a:cxnSpLocks/>
-            <a:stCxn id="161" idx="2"/>
-            <a:endCxn id="160" idx="0"/>
-          </p:cNvCxnSpPr>
-          <p:nvPr/>
-        </p:nvCxnSpPr>
-        <p:spPr>
-          <a:xfrm rot="5400000">
-            <a:off x="47312762" y="17118578"/>
-            <a:ext cx="261343" cy="624841"/>
-          </a:xfrm>
-          <a:prstGeom prst="bentConnector3">
-            <a:avLst>
-              <a:gd name="adj1" fmla="val 50000"/>
-            </a:avLst>
-          </a:prstGeom>
-          <a:ln w="19050">
-            <a:prstDash val="dash"/>
-            <a:tailEnd type="arrow"/>
-          </a:ln>
-        </p:spPr>
-        <p:style>
-          <a:lnRef idx="1">
-            <a:schemeClr val="accent1"/>
-          </a:lnRef>
-          <a:fillRef idx="0">
-            <a:schemeClr val="accent1"/>
-          </a:fillRef>
-          <a:effectRef idx="0">
-            <a:schemeClr val="accent1"/>
-          </a:effectRef>
-          <a:fontRef idx="minor">
-            <a:schemeClr val="tx1"/>
-          </a:fontRef>
-        </p:style>
-      </p:cxnSp>
-      <p:cxnSp>
-        <p:nvCxnSpPr>
-          <p:cNvPr id="312" name="Соединительная линия уступом 620">
-            <a:extLst>
-              <a:ext uri="{FF2B5EF4-FFF2-40B4-BE49-F238E27FC236}">
-                <a16:creationId xmlns:a16="http://schemas.microsoft.com/office/drawing/2014/main" id="{8A4CC061-E820-4B91-8265-908A117C76F1}"/>
-              </a:ext>
-            </a:extLst>
-          </p:cNvPr>
-          <p:cNvCxnSpPr>
-            <a:cxnSpLocks/>
-            <a:stCxn id="161" idx="2"/>
-            <a:endCxn id="166" idx="0"/>
-          </p:cNvCxnSpPr>
-          <p:nvPr/>
-        </p:nvCxnSpPr>
-        <p:spPr>
-          <a:xfrm rot="16200000" flipH="1">
-            <a:off x="47933792" y="17122388"/>
-            <a:ext cx="261343" cy="617220"/>
-          </a:xfrm>
-          <a:prstGeom prst="bentConnector3">
-            <a:avLst>
-              <a:gd name="adj1" fmla="val 50000"/>
-            </a:avLst>
-          </a:prstGeom>
-          <a:ln w="19050">
-            <a:tailEnd type="arrow"/>
-          </a:ln>
-        </p:spPr>
-        <p:style>
-          <a:lnRef idx="1">
-            <a:schemeClr val="accent1"/>
-          </a:lnRef>
-          <a:fillRef idx="0">
-            <a:schemeClr val="accent1"/>
-          </a:fillRef>
-          <a:effectRef idx="0">
-            <a:schemeClr val="accent1"/>
-          </a:effectRef>
-          <a:fontRef idx="minor">
-            <a:schemeClr val="tx1"/>
-          </a:fontRef>
-        </p:style>
-      </p:cxnSp>
-      <p:cxnSp>
-        <p:nvCxnSpPr>
-          <p:cNvPr id="315" name="Соединительная линия уступом 620">
-            <a:extLst>
-              <a:ext uri="{FF2B5EF4-FFF2-40B4-BE49-F238E27FC236}">
-                <a16:creationId xmlns:a16="http://schemas.microsoft.com/office/drawing/2014/main" id="{5ACF4EDF-5A7A-4565-8335-9607E0AC4C9F}"/>
-              </a:ext>
-            </a:extLst>
-          </p:cNvPr>
-          <p:cNvCxnSpPr>
-            <a:cxnSpLocks/>
-            <a:stCxn id="245" idx="2"/>
-            <a:endCxn id="136" idx="0"/>
-          </p:cNvCxnSpPr>
-          <p:nvPr/>
-        </p:nvCxnSpPr>
-        <p:spPr>
-          <a:xfrm rot="16200000" flipH="1">
-            <a:off x="44647695" y="18097105"/>
-            <a:ext cx="1861535" cy="1870661"/>
-          </a:xfrm>
-          <a:prstGeom prst="bentConnector3">
-            <a:avLst>
-              <a:gd name="adj1" fmla="val 7019"/>
-            </a:avLst>
-          </a:prstGeom>
-          <a:ln w="19050">
-            <a:prstDash val="dash"/>
-            <a:tailEnd type="arrow"/>
-          </a:ln>
-        </p:spPr>
-        <p:style>
-          <a:lnRef idx="1">
-            <a:schemeClr val="accent1"/>
-          </a:lnRef>
-          <a:fillRef idx="0">
-            <a:schemeClr val="accent1"/>
-          </a:fillRef>
-          <a:effectRef idx="0">
-            <a:schemeClr val="accent1"/>
-          </a:effectRef>
-          <a:fontRef idx="minor">
-            <a:schemeClr val="tx1"/>
-          </a:fontRef>
-        </p:style>
-      </p:cxnSp>
-      <p:cxnSp>
-        <p:nvCxnSpPr>
-          <p:cNvPr id="319" name="Соединительная линия уступом 620">
-            <a:extLst>
-              <a:ext uri="{FF2B5EF4-FFF2-40B4-BE49-F238E27FC236}">
-                <a16:creationId xmlns:a16="http://schemas.microsoft.com/office/drawing/2014/main" id="{EEADD502-DF21-435B-AB40-628C775C396B}"/>
-              </a:ext>
-            </a:extLst>
-          </p:cNvPr>
-          <p:cNvCxnSpPr>
-            <a:cxnSpLocks/>
-            <a:stCxn id="168" idx="2"/>
-            <a:endCxn id="136" idx="0"/>
-          </p:cNvCxnSpPr>
-          <p:nvPr/>
-        </p:nvCxnSpPr>
-        <p:spPr>
-          <a:xfrm rot="16200000" flipH="1">
-            <a:off x="45269665" y="18719075"/>
-            <a:ext cx="1861535" cy="626721"/>
-          </a:xfrm>
-          <a:prstGeom prst="bentConnector3">
-            <a:avLst>
-              <a:gd name="adj1" fmla="val 7019"/>
-            </a:avLst>
-          </a:prstGeom>
-          <a:ln w="19050">
-            <a:prstDash val="dash"/>
-            <a:tailEnd type="arrow"/>
-          </a:ln>
-        </p:spPr>
-        <p:style>
-          <a:lnRef idx="1">
-            <a:schemeClr val="accent1"/>
-          </a:lnRef>
-          <a:fillRef idx="0">
-            <a:schemeClr val="accent1"/>
-          </a:fillRef>
-          <a:effectRef idx="0">
-            <a:schemeClr val="accent1"/>
-          </a:effectRef>
-          <a:fontRef idx="minor">
-            <a:schemeClr val="tx1"/>
-          </a:fontRef>
-        </p:style>
-      </p:cxnSp>
-      <p:cxnSp>
-        <p:nvCxnSpPr>
-          <p:cNvPr id="323" name="Соединительная линия уступом 620">
-            <a:extLst>
-              <a:ext uri="{FF2B5EF4-FFF2-40B4-BE49-F238E27FC236}">
-                <a16:creationId xmlns:a16="http://schemas.microsoft.com/office/drawing/2014/main" id="{FBF4967B-DC3B-4838-96A4-4D328C5EB6C2}"/>
-              </a:ext>
-            </a:extLst>
-          </p:cNvPr>
-          <p:cNvCxnSpPr>
-            <a:cxnSpLocks/>
-            <a:stCxn id="245" idx="2"/>
-            <a:endCxn id="137" idx="0"/>
-          </p:cNvCxnSpPr>
-          <p:nvPr/>
-        </p:nvCxnSpPr>
-        <p:spPr>
-          <a:xfrm rot="16200000" flipH="1">
-            <a:off x="45268725" y="17476075"/>
-            <a:ext cx="1861535" cy="3112721"/>
-          </a:xfrm>
-          <a:prstGeom prst="bentConnector3">
-            <a:avLst>
-              <a:gd name="adj1" fmla="val 7019"/>
-            </a:avLst>
-          </a:prstGeom>
-          <a:ln w="19050">
-            <a:prstDash val="dash"/>
-            <a:tailEnd type="arrow"/>
-          </a:ln>
-        </p:spPr>
-        <p:style>
-          <a:lnRef idx="1">
-            <a:schemeClr val="accent1"/>
-          </a:lnRef>
-          <a:fillRef idx="0">
-            <a:schemeClr val="accent1"/>
-          </a:fillRef>
-          <a:effectRef idx="0">
-            <a:schemeClr val="accent1"/>
-          </a:effectRef>
-          <a:fontRef idx="minor">
-            <a:schemeClr val="tx1"/>
-          </a:fontRef>
-        </p:style>
-      </p:cxnSp>
-      <p:cxnSp>
-        <p:nvCxnSpPr>
-          <p:cNvPr id="327" name="Соединительная линия уступом 620">
-            <a:extLst>
-              <a:ext uri="{FF2B5EF4-FFF2-40B4-BE49-F238E27FC236}">
-                <a16:creationId xmlns:a16="http://schemas.microsoft.com/office/drawing/2014/main" id="{46EC63F1-0538-4C28-BA2B-A65FEC33ACED}"/>
-              </a:ext>
-            </a:extLst>
-          </p:cNvPr>
-          <p:cNvCxnSpPr>
-            <a:cxnSpLocks/>
-            <a:stCxn id="168" idx="2"/>
-            <a:endCxn id="137" idx="0"/>
-          </p:cNvCxnSpPr>
-          <p:nvPr/>
-        </p:nvCxnSpPr>
-        <p:spPr>
-          <a:xfrm rot="16200000" flipH="1">
-            <a:off x="45890695" y="18098045"/>
-            <a:ext cx="1861535" cy="1868781"/>
-          </a:xfrm>
-          <a:prstGeom prst="bentConnector3">
-            <a:avLst>
-              <a:gd name="adj1" fmla="val 7019"/>
-            </a:avLst>
-          </a:prstGeom>
-          <a:ln w="19050">
-            <a:prstDash val="dash"/>
-            <a:tailEnd type="arrow"/>
-          </a:ln>
-        </p:spPr>
-        <p:style>
-          <a:lnRef idx="1">
-            <a:schemeClr val="accent1"/>
-          </a:lnRef>
-          <a:fillRef idx="0">
-            <a:schemeClr val="accent1"/>
-          </a:fillRef>
-          <a:effectRef idx="0">
-            <a:schemeClr val="accent1"/>
-          </a:effectRef>
-          <a:fontRef idx="minor">
-            <a:schemeClr val="tx1"/>
-          </a:fontRef>
-        </p:style>
-      </p:cxnSp>
-      <p:cxnSp>
-        <p:nvCxnSpPr>
-          <p:cNvPr id="333" name="Соединительная линия уступом 620">
-            <a:extLst>
-              <a:ext uri="{FF2B5EF4-FFF2-40B4-BE49-F238E27FC236}">
-                <a16:creationId xmlns:a16="http://schemas.microsoft.com/office/drawing/2014/main" id="{4AB5D48F-D0AA-4EBC-BF72-566D53293AF6}"/>
-              </a:ext>
-            </a:extLst>
-          </p:cNvPr>
-          <p:cNvCxnSpPr>
-            <a:cxnSpLocks/>
-            <a:stCxn id="134" idx="2"/>
-            <a:endCxn id="162" idx="0"/>
-          </p:cNvCxnSpPr>
-          <p:nvPr/>
-        </p:nvCxnSpPr>
-        <p:spPr>
-          <a:xfrm rot="5400000">
-            <a:off x="47000341" y="21434583"/>
-            <a:ext cx="261342" cy="3"/>
-          </a:xfrm>
-          <a:prstGeom prst="bentConnector3">
-            <a:avLst>
-              <a:gd name="adj1" fmla="val 50000"/>
-            </a:avLst>
-          </a:prstGeom>
-          <a:ln w="19050">
-            <a:tailEnd type="arrow"/>
-          </a:ln>
-        </p:spPr>
-        <p:style>
-          <a:lnRef idx="1">
-            <a:schemeClr val="accent1"/>
-          </a:lnRef>
-          <a:fillRef idx="0">
-            <a:schemeClr val="accent1"/>
-          </a:fillRef>
-          <a:effectRef idx="0">
-            <a:schemeClr val="accent1"/>
-          </a:effectRef>
-          <a:fontRef idx="minor">
-            <a:schemeClr val="tx1"/>
-          </a:fontRef>
-        </p:style>
-      </p:cxnSp>
-      <p:sp>
-        <p:nvSpPr>
-          <p:cNvPr id="348" name="Прямоугольник 347">
-            <a:extLst>
-              <a:ext uri="{FF2B5EF4-FFF2-40B4-BE49-F238E27FC236}">
-                <a16:creationId xmlns:a16="http://schemas.microsoft.com/office/drawing/2014/main" id="{96EF85BB-BE9E-4122-8899-B2A2E5D8A2E8}"/>
-              </a:ext>
-            </a:extLst>
-          </p:cNvPr>
-          <p:cNvSpPr/>
-          <p:nvPr/>
-        </p:nvSpPr>
-        <p:spPr>
-          <a:xfrm>
-            <a:off x="6931766" y="1436019"/>
-            <a:ext cx="926325" cy="540000"/>
-          </a:xfrm>
-          <a:prstGeom prst="rect">
-            <a:avLst/>
-          </a:prstGeom>
-          <a:solidFill>
-            <a:schemeClr val="bg1"/>
-          </a:solidFill>
-          <a:ln w="19050"/>
-        </p:spPr>
-        <p:style>
-          <a:lnRef idx="2">
-            <a:schemeClr val="accent1"/>
-          </a:lnRef>
-          <a:fillRef idx="1">
-            <a:schemeClr val="lt1"/>
-          </a:fillRef>
-          <a:effectRef idx="0">
-            <a:schemeClr val="accent1"/>
-          </a:effectRef>
-          <a:fontRef idx="minor">
-            <a:schemeClr val="dk1"/>
-          </a:fontRef>
-        </p:style>
-        <p:txBody>
-          <a:bodyPr lIns="124733" tIns="62367" rIns="124733" bIns="62367" rtlCol="0" anchor="ctr"/>
-          <a:lstStyle/>
-          <a:p>
-            <a:pPr algn="ctr"/>
-            <a:r>
-              <a:rPr lang="ru-RU" sz="700" dirty="0"/>
-              <a:t>Интегрировать Французские школы в новую систему образования </a:t>
-            </a:r>
-            <a:r>
-              <a:rPr lang="ru-RU" sz="100" dirty="0"/>
-              <a:t>(Доступ к аттестату о среднем образовании был предоставлен марокканскому мусульманскому населению в 1930 году, но доступ к элитным французским школам ( лицеям ) был предоставлен мусульманскому населению только после окончания войны. [ 11 ] Около девяноста процентов мусульманского населения Марокко были неграмотны во время Второй мировой войны. [)</a:t>
-            </a:r>
-            <a:endParaRPr lang="ru-RU" sz="700" dirty="0"/>
-          </a:p>
-        </p:txBody>
-      </p:sp>
-      <p:sp>
-        <p:nvSpPr>
-          <p:cNvPr id="349" name="Прямоугольник 348">
-            <a:extLst>
-              <a:ext uri="{FF2B5EF4-FFF2-40B4-BE49-F238E27FC236}">
-                <a16:creationId xmlns:a16="http://schemas.microsoft.com/office/drawing/2014/main" id="{4CA8FC15-8BD7-44C7-B0F7-E64D65C693AC}"/>
-              </a:ext>
-            </a:extLst>
-          </p:cNvPr>
-          <p:cNvSpPr/>
-          <p:nvPr/>
-        </p:nvSpPr>
-        <p:spPr>
-          <a:xfrm>
-            <a:off x="6314546" y="635310"/>
-            <a:ext cx="926325" cy="540000"/>
-          </a:xfrm>
-          <a:prstGeom prst="rect">
-            <a:avLst/>
-          </a:prstGeom>
-          <a:solidFill>
-            <a:schemeClr val="bg1"/>
-          </a:solidFill>
-          <a:ln w="19050"/>
-        </p:spPr>
-        <p:style>
-          <a:lnRef idx="2">
-            <a:schemeClr val="accent1"/>
-          </a:lnRef>
-          <a:fillRef idx="1">
-            <a:schemeClr val="lt1"/>
-          </a:fillRef>
-          <a:effectRef idx="0">
-            <a:schemeClr val="accent1"/>
-          </a:effectRef>
-          <a:fontRef idx="minor">
-            <a:schemeClr val="dk1"/>
-          </a:fontRef>
-        </p:style>
-        <p:txBody>
-          <a:bodyPr lIns="124733" tIns="62367" rIns="124733" bIns="62367" rtlCol="0" anchor="ctr"/>
-          <a:lstStyle/>
-          <a:p>
-            <a:pPr algn="ctr"/>
-            <a:r>
-              <a:rPr lang="ru-RU" sz="700" dirty="0"/>
-              <a:t>Внедрить светское образование</a:t>
-            </a:r>
-          </a:p>
-        </p:txBody>
-      </p:sp>
-      <p:sp>
-        <p:nvSpPr>
-          <p:cNvPr id="351" name="Прямоугольник 350">
-            <a:extLst>
-              <a:ext uri="{FF2B5EF4-FFF2-40B4-BE49-F238E27FC236}">
-                <a16:creationId xmlns:a16="http://schemas.microsoft.com/office/drawing/2014/main" id="{81001C44-0901-492A-8AC5-FE2786AEA7B3}"/>
-              </a:ext>
-            </a:extLst>
-          </p:cNvPr>
-          <p:cNvSpPr/>
-          <p:nvPr/>
-        </p:nvSpPr>
-        <p:spPr>
-          <a:xfrm>
-            <a:off x="7556606" y="635310"/>
-            <a:ext cx="926325" cy="540000"/>
-          </a:xfrm>
-          <a:prstGeom prst="rect">
-            <a:avLst/>
-          </a:prstGeom>
-          <a:solidFill>
-            <a:schemeClr val="bg1"/>
-          </a:solidFill>
-          <a:ln w="19050"/>
-        </p:spPr>
-        <p:style>
-          <a:lnRef idx="2">
-            <a:schemeClr val="accent1"/>
-          </a:lnRef>
-          <a:fillRef idx="1">
-            <a:schemeClr val="lt1"/>
-          </a:fillRef>
-          <a:effectRef idx="0">
-            <a:schemeClr val="accent1"/>
-          </a:effectRef>
-          <a:fontRef idx="minor">
-            <a:schemeClr val="dk1"/>
-          </a:fontRef>
-        </p:style>
-        <p:txBody>
-          <a:bodyPr lIns="124733" tIns="62367" rIns="124733" bIns="62367" rtlCol="0" anchor="ctr"/>
-          <a:lstStyle/>
-          <a:p>
-            <a:pPr algn="ctr"/>
-            <a:r>
-              <a:rPr lang="ru-RU" sz="700" dirty="0"/>
-              <a:t>Расширить религиозные школы</a:t>
-            </a:r>
-          </a:p>
-        </p:txBody>
-      </p:sp>
-      <p:cxnSp>
-        <p:nvCxnSpPr>
-          <p:cNvPr id="352" name="Прямая соединительная линия 351">
-            <a:extLst>
-              <a:ext uri="{FF2B5EF4-FFF2-40B4-BE49-F238E27FC236}">
-                <a16:creationId xmlns:a16="http://schemas.microsoft.com/office/drawing/2014/main" id="{1CE47EEF-D77B-4B21-8647-CDBA028F81B3}"/>
-              </a:ext>
-            </a:extLst>
-          </p:cNvPr>
-          <p:cNvCxnSpPr>
-            <a:cxnSpLocks/>
-            <a:stCxn id="351" idx="1"/>
-            <a:endCxn id="349" idx="3"/>
-          </p:cNvCxnSpPr>
-          <p:nvPr/>
-        </p:nvCxnSpPr>
-        <p:spPr>
           <a:xfrm flipH="1">
-            <a:off x="7240871" y="905310"/>
-            <a:ext cx="315735" cy="0"/>
+            <a:off x="12505586" y="5315050"/>
+            <a:ext cx="2635584" cy="0"/>
           </a:xfrm>
           <a:prstGeom prst="line">
             <a:avLst/>
@@ -11115,24 +12324,24 @@
       </p:cxnSp>
       <p:cxnSp>
         <p:nvCxnSpPr>
-          <p:cNvPr id="353" name="Соединительная линия уступом 620">
-            <a:extLst>
-              <a:ext uri="{FF2B5EF4-FFF2-40B4-BE49-F238E27FC236}">
-                <a16:creationId xmlns:a16="http://schemas.microsoft.com/office/drawing/2014/main" id="{E0DD6A66-BBE5-472E-9058-C725ABAFA56D}"/>
+          <p:cNvPr id="249" name="Соединительная линия уступом 620">
+            <a:extLst>
+              <a:ext uri="{FF2B5EF4-FFF2-40B4-BE49-F238E27FC236}">
+                <a16:creationId xmlns:a16="http://schemas.microsoft.com/office/drawing/2014/main" id="{E9DDE346-6CA1-4730-80E4-589129037BCE}"/>
               </a:ext>
             </a:extLst>
           </p:cNvPr>
           <p:cNvCxnSpPr>
             <a:cxnSpLocks/>
-            <a:stCxn id="349" idx="2"/>
-            <a:endCxn id="348" idx="0"/>
+            <a:stCxn id="229" idx="2"/>
+            <a:endCxn id="198" idx="0"/>
           </p:cNvCxnSpPr>
           <p:nvPr/>
         </p:nvCxnSpPr>
         <p:spPr>
-          <a:xfrm rot="16200000" flipH="1">
-            <a:off x="6955965" y="997054"/>
-            <a:ext cx="260709" cy="617220"/>
+          <a:xfrm rot="5400000">
+            <a:off x="14580158" y="4828271"/>
+            <a:ext cx="267397" cy="1780955"/>
           </a:xfrm>
           <a:prstGeom prst="bentConnector3">
             <a:avLst>
@@ -11161,24 +12370,24 @@
       </p:cxnSp>
       <p:cxnSp>
         <p:nvCxnSpPr>
-          <p:cNvPr id="354" name="Соединительная линия уступом 620">
-            <a:extLst>
-              <a:ext uri="{FF2B5EF4-FFF2-40B4-BE49-F238E27FC236}">
-                <a16:creationId xmlns:a16="http://schemas.microsoft.com/office/drawing/2014/main" id="{36138E5C-EE6A-49E1-BF94-C6EF03975FF7}"/>
+          <p:cNvPr id="252" name="Соединительная линия уступом 620">
+            <a:extLst>
+              <a:ext uri="{FF2B5EF4-FFF2-40B4-BE49-F238E27FC236}">
+                <a16:creationId xmlns:a16="http://schemas.microsoft.com/office/drawing/2014/main" id="{98A83083-FD9A-4D4D-BF49-0BDA5EAC70FC}"/>
               </a:ext>
             </a:extLst>
           </p:cNvPr>
           <p:cNvCxnSpPr>
             <a:cxnSpLocks/>
-            <a:stCxn id="351" idx="2"/>
-            <a:endCxn id="348" idx="0"/>
+            <a:stCxn id="231" idx="2"/>
+            <a:endCxn id="198" idx="0"/>
           </p:cNvCxnSpPr>
           <p:nvPr/>
         </p:nvCxnSpPr>
         <p:spPr>
-          <a:xfrm rot="5400000">
-            <a:off x="7576995" y="993244"/>
-            <a:ext cx="260709" cy="624840"/>
+          <a:xfrm rot="16200000" flipH="1">
+            <a:off x="12799203" y="4828271"/>
+            <a:ext cx="267397" cy="1780954"/>
           </a:xfrm>
           <a:prstGeom prst="bentConnector3">
             <a:avLst>
@@ -11205,24 +12414,3612 @@
           </a:fontRef>
         </p:style>
       </p:cxnSp>
+      <p:sp>
+        <p:nvSpPr>
+          <p:cNvPr id="259" name="Прямоугольник 258">
+            <a:extLst>
+              <a:ext uri="{FF2B5EF4-FFF2-40B4-BE49-F238E27FC236}">
+                <a16:creationId xmlns:a16="http://schemas.microsoft.com/office/drawing/2014/main" id="{0F5E597A-C48B-4749-B709-20BB7A4E003E}"/>
+              </a:ext>
+            </a:extLst>
+          </p:cNvPr>
+          <p:cNvSpPr/>
+          <p:nvPr/>
+        </p:nvSpPr>
+        <p:spPr>
+          <a:xfrm>
+            <a:off x="7059827" y="3427653"/>
+            <a:ext cx="926325" cy="540000"/>
+          </a:xfrm>
+          <a:prstGeom prst="rect">
+            <a:avLst/>
+          </a:prstGeom>
+          <a:solidFill>
+            <a:schemeClr val="bg1"/>
+          </a:solidFill>
+          <a:ln w="19050"/>
+        </p:spPr>
+        <p:style>
+          <a:lnRef idx="2">
+            <a:schemeClr val="accent1"/>
+          </a:lnRef>
+          <a:fillRef idx="1">
+            <a:schemeClr val="lt1"/>
+          </a:fillRef>
+          <a:effectRef idx="0">
+            <a:schemeClr val="accent1"/>
+          </a:effectRef>
+          <a:fontRef idx="minor">
+            <a:schemeClr val="dk1"/>
+          </a:fontRef>
+        </p:style>
+        <p:txBody>
+          <a:bodyPr lIns="124733" tIns="62367" rIns="124733" bIns="62367" rtlCol="0" anchor="ctr"/>
+          <a:lstStyle/>
+          <a:p>
+            <a:pPr algn="ctr"/>
+            <a:r>
+              <a:rPr lang="ru-RU" sz="700" dirty="0"/>
+              <a:t>Принять французские инвестиции</a:t>
+            </a:r>
+          </a:p>
+        </p:txBody>
+      </p:sp>
+      <p:sp>
+        <p:nvSpPr>
+          <p:cNvPr id="263" name="Прямоугольник 262">
+            <a:extLst>
+              <a:ext uri="{FF2B5EF4-FFF2-40B4-BE49-F238E27FC236}">
+                <a16:creationId xmlns:a16="http://schemas.microsoft.com/office/drawing/2014/main" id="{970C5735-49A0-4EC6-85CF-24E9FB4CD637}"/>
+              </a:ext>
+            </a:extLst>
+          </p:cNvPr>
+          <p:cNvSpPr/>
+          <p:nvPr/>
+        </p:nvSpPr>
+        <p:spPr>
+          <a:xfrm>
+            <a:off x="7652593" y="2617654"/>
+            <a:ext cx="926325" cy="540000"/>
+          </a:xfrm>
+          <a:prstGeom prst="rect">
+            <a:avLst/>
+          </a:prstGeom>
+          <a:solidFill>
+            <a:schemeClr val="accent1">
+              <a:lumMod val="60000"/>
+              <a:lumOff val="40000"/>
+            </a:schemeClr>
+          </a:solidFill>
+          <a:ln w="19050"/>
+        </p:spPr>
+        <p:style>
+          <a:lnRef idx="2">
+            <a:schemeClr val="accent1"/>
+          </a:lnRef>
+          <a:fillRef idx="1">
+            <a:schemeClr val="lt1"/>
+          </a:fillRef>
+          <a:effectRef idx="0">
+            <a:schemeClr val="accent1"/>
+          </a:effectRef>
+          <a:fontRef idx="minor">
+            <a:schemeClr val="dk1"/>
+          </a:fontRef>
+        </p:style>
+        <p:txBody>
+          <a:bodyPr lIns="124733" tIns="62367" rIns="124733" bIns="62367" rtlCol="0" anchor="ctr"/>
+          <a:lstStyle/>
+          <a:p>
+            <a:pPr algn="ctr"/>
+            <a:r>
+              <a:rPr lang="ru-RU" sz="700" dirty="0"/>
+              <a:t>Оказать поддержку Марокканскому комитету действий</a:t>
+            </a:r>
+          </a:p>
+        </p:txBody>
+      </p:sp>
+      <p:sp>
+        <p:nvSpPr>
+          <p:cNvPr id="264" name="Прямоугольник 263">
+            <a:extLst>
+              <a:ext uri="{FF2B5EF4-FFF2-40B4-BE49-F238E27FC236}">
+                <a16:creationId xmlns:a16="http://schemas.microsoft.com/office/drawing/2014/main" id="{E9D86B21-BA50-4EED-8AF3-33349A7A2289}"/>
+              </a:ext>
+            </a:extLst>
+          </p:cNvPr>
+          <p:cNvSpPr/>
+          <p:nvPr/>
+        </p:nvSpPr>
+        <p:spPr>
+          <a:xfrm>
+            <a:off x="5872525" y="3427653"/>
+            <a:ext cx="926325" cy="540000"/>
+          </a:xfrm>
+          <a:prstGeom prst="rect">
+            <a:avLst/>
+          </a:prstGeom>
+          <a:solidFill>
+            <a:schemeClr val="bg1"/>
+          </a:solidFill>
+          <a:ln w="19050"/>
+        </p:spPr>
+        <p:style>
+          <a:lnRef idx="2">
+            <a:schemeClr val="accent1"/>
+          </a:lnRef>
+          <a:fillRef idx="1">
+            <a:schemeClr val="lt1"/>
+          </a:fillRef>
+          <a:effectRef idx="0">
+            <a:schemeClr val="accent1"/>
+          </a:effectRef>
+          <a:fontRef idx="minor">
+            <a:schemeClr val="dk1"/>
+          </a:fontRef>
+        </p:style>
+        <p:txBody>
+          <a:bodyPr lIns="124733" tIns="62367" rIns="124733" bIns="62367" rtlCol="0" anchor="ctr"/>
+          <a:lstStyle/>
+          <a:p>
+            <a:pPr algn="ctr"/>
+            <a:r>
+              <a:rPr lang="ru-RU" sz="700" dirty="0"/>
+              <a:t>Запросить оружие для гарнизонов</a:t>
+            </a:r>
+          </a:p>
+        </p:txBody>
+      </p:sp>
+      <p:sp>
+        <p:nvSpPr>
+          <p:cNvPr id="265" name="Прямоугольник 264">
+            <a:extLst>
+              <a:ext uri="{FF2B5EF4-FFF2-40B4-BE49-F238E27FC236}">
+                <a16:creationId xmlns:a16="http://schemas.microsoft.com/office/drawing/2014/main" id="{CA5A524B-95E8-4622-98BC-8DEB6F253FBB}"/>
+              </a:ext>
+            </a:extLst>
+          </p:cNvPr>
+          <p:cNvSpPr/>
+          <p:nvPr/>
+        </p:nvSpPr>
+        <p:spPr>
+          <a:xfrm>
+            <a:off x="5277986" y="2617654"/>
+            <a:ext cx="926325" cy="540000"/>
+          </a:xfrm>
+          <a:prstGeom prst="rect">
+            <a:avLst/>
+          </a:prstGeom>
+          <a:solidFill>
+            <a:schemeClr val="bg1">
+              <a:lumMod val="50000"/>
+            </a:schemeClr>
+          </a:solidFill>
+          <a:ln w="19050"/>
+        </p:spPr>
+        <p:style>
+          <a:lnRef idx="2">
+            <a:schemeClr val="accent1"/>
+          </a:lnRef>
+          <a:fillRef idx="1">
+            <a:schemeClr val="lt1"/>
+          </a:fillRef>
+          <a:effectRef idx="0">
+            <a:schemeClr val="accent1"/>
+          </a:effectRef>
+          <a:fontRef idx="minor">
+            <a:schemeClr val="dk1"/>
+          </a:fontRef>
+        </p:style>
+        <p:txBody>
+          <a:bodyPr lIns="124733" tIns="62367" rIns="124733" bIns="62367" rtlCol="0" anchor="ctr"/>
+          <a:lstStyle/>
+          <a:p>
+            <a:pPr algn="ctr"/>
+            <a:r>
+              <a:rPr lang="ru-RU" sz="700" dirty="0"/>
+              <a:t>Противостоять Марокканскому комитету действий</a:t>
+            </a:r>
+          </a:p>
+        </p:txBody>
+      </p:sp>
       <p:cxnSp>
         <p:nvCxnSpPr>
-          <p:cNvPr id="355" name="Соединительная линия уступом 620">
-            <a:extLst>
-              <a:ext uri="{FF2B5EF4-FFF2-40B4-BE49-F238E27FC236}">
-                <a16:creationId xmlns:a16="http://schemas.microsoft.com/office/drawing/2014/main" id="{7C251E4A-3D3C-47B2-8576-73040B029DB0}"/>
+          <p:cNvPr id="268" name="Прямая соединительная линия 267">
+            <a:extLst>
+              <a:ext uri="{FF2B5EF4-FFF2-40B4-BE49-F238E27FC236}">
+                <a16:creationId xmlns:a16="http://schemas.microsoft.com/office/drawing/2014/main" id="{FABFED8D-A35E-4FC6-A3E3-47325AA7A5E2}"/>
               </a:ext>
             </a:extLst>
           </p:cNvPr>
           <p:cNvCxnSpPr>
             <a:cxnSpLocks/>
+            <a:stCxn id="263" idx="1"/>
+            <a:endCxn id="265" idx="3"/>
           </p:cNvCxnSpPr>
           <p:nvPr/>
         </p:nvCxnSpPr>
         <p:spPr>
+          <a:xfrm flipH="1">
+            <a:off x="6204311" y="2887654"/>
+            <a:ext cx="1448282" cy="0"/>
+          </a:xfrm>
+          <a:prstGeom prst="line">
+            <a:avLst/>
+          </a:prstGeom>
+          <a:ln w="38100">
+            <a:solidFill>
+              <a:srgbClr val="C00000"/>
+            </a:solidFill>
+          </a:ln>
+        </p:spPr>
+        <p:style>
+          <a:lnRef idx="1">
+            <a:schemeClr val="accent1"/>
+          </a:lnRef>
+          <a:fillRef idx="0">
+            <a:schemeClr val="accent1"/>
+          </a:fillRef>
+          <a:effectRef idx="0">
+            <a:schemeClr val="accent1"/>
+          </a:effectRef>
+          <a:fontRef idx="minor">
+            <a:schemeClr val="tx1"/>
+          </a:fontRef>
+        </p:style>
+      </p:cxnSp>
+      <p:cxnSp>
+        <p:nvCxnSpPr>
+          <p:cNvPr id="269" name="Соединительная линия уступом 620">
+            <a:extLst>
+              <a:ext uri="{FF2B5EF4-FFF2-40B4-BE49-F238E27FC236}">
+                <a16:creationId xmlns:a16="http://schemas.microsoft.com/office/drawing/2014/main" id="{29A1668A-421E-4114-AEFA-F23A40594868}"/>
+              </a:ext>
+            </a:extLst>
+          </p:cNvPr>
+          <p:cNvCxnSpPr>
+            <a:cxnSpLocks/>
+            <a:stCxn id="172" idx="2"/>
+            <a:endCxn id="265" idx="0"/>
+          </p:cNvCxnSpPr>
+          <p:nvPr/>
+        </p:nvCxnSpPr>
+        <p:spPr>
           <a:xfrm rot="5400000">
-            <a:off x="6335241" y="-424381"/>
-            <a:ext cx="260098" cy="1859281"/>
+            <a:off x="6201460" y="1887344"/>
+            <a:ext cx="269999" cy="1190620"/>
+          </a:xfrm>
+          <a:prstGeom prst="bentConnector3">
+            <a:avLst>
+              <a:gd name="adj1" fmla="val 50000"/>
+            </a:avLst>
+          </a:prstGeom>
+          <a:ln w="19050">
+            <a:tailEnd type="arrow"/>
+          </a:ln>
+        </p:spPr>
+        <p:style>
+          <a:lnRef idx="1">
+            <a:schemeClr val="accent1"/>
+          </a:lnRef>
+          <a:fillRef idx="0">
+            <a:schemeClr val="accent1"/>
+          </a:fillRef>
+          <a:effectRef idx="0">
+            <a:schemeClr val="accent1"/>
+          </a:effectRef>
+          <a:fontRef idx="minor">
+            <a:schemeClr val="tx1"/>
+          </a:fontRef>
+        </p:style>
+      </p:cxnSp>
+      <p:cxnSp>
+        <p:nvCxnSpPr>
+          <p:cNvPr id="273" name="Соединительная линия уступом 620">
+            <a:extLst>
+              <a:ext uri="{FF2B5EF4-FFF2-40B4-BE49-F238E27FC236}">
+                <a16:creationId xmlns:a16="http://schemas.microsoft.com/office/drawing/2014/main" id="{81A345AD-C194-4185-B40E-0B46A19DE726}"/>
+              </a:ext>
+            </a:extLst>
+          </p:cNvPr>
+          <p:cNvCxnSpPr>
+            <a:cxnSpLocks/>
+            <a:stCxn id="172" idx="2"/>
+            <a:endCxn id="263" idx="0"/>
+          </p:cNvCxnSpPr>
+          <p:nvPr/>
+        </p:nvCxnSpPr>
+        <p:spPr>
+          <a:xfrm rot="16200000" flipH="1">
+            <a:off x="7388763" y="1890660"/>
+            <a:ext cx="269999" cy="1183987"/>
+          </a:xfrm>
+          <a:prstGeom prst="bentConnector3">
+            <a:avLst>
+              <a:gd name="adj1" fmla="val 50000"/>
+            </a:avLst>
+          </a:prstGeom>
+          <a:ln w="19050">
+            <a:tailEnd type="arrow"/>
+          </a:ln>
+        </p:spPr>
+        <p:style>
+          <a:lnRef idx="1">
+            <a:schemeClr val="accent1"/>
+          </a:lnRef>
+          <a:fillRef idx="0">
+            <a:schemeClr val="accent1"/>
+          </a:fillRef>
+          <a:effectRef idx="0">
+            <a:schemeClr val="accent1"/>
+          </a:effectRef>
+          <a:fontRef idx="minor">
+            <a:schemeClr val="tx1"/>
+          </a:fontRef>
+        </p:style>
+      </p:cxnSp>
+      <p:sp>
+        <p:nvSpPr>
+          <p:cNvPr id="275" name="Прямоугольник 274">
+            <a:extLst>
+              <a:ext uri="{FF2B5EF4-FFF2-40B4-BE49-F238E27FC236}">
+                <a16:creationId xmlns:a16="http://schemas.microsoft.com/office/drawing/2014/main" id="{FF6787D9-3183-4E89-AAFC-1047F965FF62}"/>
+              </a:ext>
+            </a:extLst>
+          </p:cNvPr>
+          <p:cNvSpPr/>
+          <p:nvPr/>
+        </p:nvSpPr>
+        <p:spPr>
+          <a:xfrm>
+            <a:off x="8827977" y="4237649"/>
+            <a:ext cx="926325" cy="540000"/>
+          </a:xfrm>
+          <a:prstGeom prst="rect">
+            <a:avLst/>
+          </a:prstGeom>
+          <a:solidFill>
+            <a:schemeClr val="accent1">
+              <a:lumMod val="60000"/>
+              <a:lumOff val="40000"/>
+            </a:schemeClr>
+          </a:solidFill>
+          <a:ln w="19050"/>
+        </p:spPr>
+        <p:style>
+          <a:lnRef idx="2">
+            <a:schemeClr val="accent1"/>
+          </a:lnRef>
+          <a:fillRef idx="1">
+            <a:schemeClr val="lt1"/>
+          </a:fillRef>
+          <a:effectRef idx="0">
+            <a:schemeClr val="accent1"/>
+          </a:effectRef>
+          <a:fontRef idx="minor">
+            <a:schemeClr val="dk1"/>
+          </a:fontRef>
+        </p:style>
+        <p:txBody>
+          <a:bodyPr lIns="124733" tIns="62367" rIns="124733" bIns="62367" rtlCol="0" anchor="ctr"/>
+          <a:lstStyle/>
+          <a:p>
+            <a:pPr algn="ctr"/>
+            <a:r>
+              <a:rPr lang="ru-RU" sz="700" dirty="0"/>
+              <a:t>Заменить великого визиря премьер-министром</a:t>
+            </a:r>
+          </a:p>
+        </p:txBody>
+      </p:sp>
+      <p:sp>
+        <p:nvSpPr>
+          <p:cNvPr id="277" name="Прямоугольник 276">
+            <a:extLst>
+              <a:ext uri="{FF2B5EF4-FFF2-40B4-BE49-F238E27FC236}">
+                <a16:creationId xmlns:a16="http://schemas.microsoft.com/office/drawing/2014/main" id="{68726DA4-BAC3-461E-B250-5516F4FA7E80}"/>
+              </a:ext>
+            </a:extLst>
+          </p:cNvPr>
+          <p:cNvSpPr/>
+          <p:nvPr/>
+        </p:nvSpPr>
+        <p:spPr>
+          <a:xfrm>
+            <a:off x="5277985" y="4237653"/>
+            <a:ext cx="926325" cy="540000"/>
+          </a:xfrm>
+          <a:prstGeom prst="rect">
+            <a:avLst/>
+          </a:prstGeom>
+          <a:solidFill>
+            <a:srgbClr val="7030A0"/>
+          </a:solidFill>
+          <a:ln w="19050"/>
+        </p:spPr>
+        <p:style>
+          <a:lnRef idx="2">
+            <a:schemeClr val="accent1"/>
+          </a:lnRef>
+          <a:fillRef idx="1">
+            <a:schemeClr val="lt1"/>
+          </a:fillRef>
+          <a:effectRef idx="0">
+            <a:schemeClr val="accent1"/>
+          </a:effectRef>
+          <a:fontRef idx="minor">
+            <a:schemeClr val="dk1"/>
+          </a:fontRef>
+        </p:style>
+        <p:txBody>
+          <a:bodyPr lIns="124733" tIns="62367" rIns="124733" bIns="62367" rtlCol="0" anchor="ctr"/>
+          <a:lstStyle/>
+          <a:p>
+            <a:pPr algn="ctr"/>
+            <a:r>
+              <a:rPr lang="ru-RU" sz="700" dirty="0"/>
+              <a:t>Начать ослабление колониальных институтов</a:t>
+            </a:r>
+          </a:p>
+          <a:p>
+            <a:pPr algn="ctr"/>
+            <a:r>
+              <a:rPr lang="ru-RU" sz="200" dirty="0"/>
+              <a:t>(должны быть послабления </a:t>
+            </a:r>
+            <a:r>
+              <a:rPr lang="ru-RU" sz="200" dirty="0" err="1"/>
+              <a:t>ответки</a:t>
+            </a:r>
+            <a:r>
+              <a:rPr lang="ru-RU" sz="200" dirty="0"/>
+              <a:t> если франция в ГВ)</a:t>
+            </a:r>
+            <a:endParaRPr lang="ru-RU" sz="700" dirty="0"/>
+          </a:p>
+        </p:txBody>
+      </p:sp>
+      <p:cxnSp>
+        <p:nvCxnSpPr>
+          <p:cNvPr id="282" name="Соединительная линия уступом 620">
+            <a:extLst>
+              <a:ext uri="{FF2B5EF4-FFF2-40B4-BE49-F238E27FC236}">
+                <a16:creationId xmlns:a16="http://schemas.microsoft.com/office/drawing/2014/main" id="{51EA453B-083C-4FEF-80CA-54AD8C1C3055}"/>
+              </a:ext>
+            </a:extLst>
+          </p:cNvPr>
+          <p:cNvCxnSpPr>
+            <a:cxnSpLocks/>
+            <a:stCxn id="172" idx="2"/>
+            <a:endCxn id="264" idx="0"/>
+          </p:cNvCxnSpPr>
+          <p:nvPr/>
+        </p:nvCxnSpPr>
+        <p:spPr>
+          <a:xfrm rot="5400000">
+            <a:off x="6093730" y="2589614"/>
+            <a:ext cx="1079998" cy="596081"/>
+          </a:xfrm>
+          <a:prstGeom prst="bentConnector3">
+            <a:avLst>
+              <a:gd name="adj1" fmla="val 12589"/>
+            </a:avLst>
+          </a:prstGeom>
+          <a:ln w="19050">
+            <a:prstDash val="dash"/>
+            <a:tailEnd type="arrow"/>
+          </a:ln>
+        </p:spPr>
+        <p:style>
+          <a:lnRef idx="1">
+            <a:schemeClr val="accent1"/>
+          </a:lnRef>
+          <a:fillRef idx="0">
+            <a:schemeClr val="accent1"/>
+          </a:fillRef>
+          <a:effectRef idx="0">
+            <a:schemeClr val="accent1"/>
+          </a:effectRef>
+          <a:fontRef idx="minor">
+            <a:schemeClr val="tx1"/>
+          </a:fontRef>
+        </p:style>
+      </p:cxnSp>
+      <p:sp>
+        <p:nvSpPr>
+          <p:cNvPr id="283" name="Прямоугольник 282">
+            <a:extLst>
+              <a:ext uri="{FF2B5EF4-FFF2-40B4-BE49-F238E27FC236}">
+                <a16:creationId xmlns:a16="http://schemas.microsoft.com/office/drawing/2014/main" id="{886D9F6F-BB87-4A90-BB75-348AA8E44D4C}"/>
+              </a:ext>
+            </a:extLst>
+          </p:cNvPr>
+          <p:cNvSpPr/>
+          <p:nvPr/>
+        </p:nvSpPr>
+        <p:spPr>
+          <a:xfrm>
+            <a:off x="4685223" y="3427653"/>
+            <a:ext cx="926325" cy="540000"/>
+          </a:xfrm>
+          <a:prstGeom prst="rect">
+            <a:avLst/>
+          </a:prstGeom>
+          <a:solidFill>
+            <a:schemeClr val="bg1">
+              <a:lumMod val="50000"/>
+            </a:schemeClr>
+          </a:solidFill>
+          <a:ln w="19050"/>
+        </p:spPr>
+        <p:style>
+          <a:lnRef idx="2">
+            <a:schemeClr val="accent1"/>
+          </a:lnRef>
+          <a:fillRef idx="1">
+            <a:schemeClr val="lt1"/>
+          </a:fillRef>
+          <a:effectRef idx="0">
+            <a:schemeClr val="accent1"/>
+          </a:effectRef>
+          <a:fontRef idx="minor">
+            <a:schemeClr val="dk1"/>
+          </a:fontRef>
+        </p:style>
+        <p:txBody>
+          <a:bodyPr lIns="124733" tIns="62367" rIns="124733" bIns="62367" rtlCol="0" anchor="ctr"/>
+          <a:lstStyle/>
+          <a:p>
+            <a:pPr algn="ctr"/>
+            <a:r>
+              <a:rPr lang="ru-RU" sz="700" dirty="0"/>
+              <a:t>Распустить Марокканский комитет действий</a:t>
+            </a:r>
+          </a:p>
+        </p:txBody>
+      </p:sp>
+      <p:cxnSp>
+        <p:nvCxnSpPr>
+          <p:cNvPr id="284" name="Соединительная линия уступом 620">
+            <a:extLst>
+              <a:ext uri="{FF2B5EF4-FFF2-40B4-BE49-F238E27FC236}">
+                <a16:creationId xmlns:a16="http://schemas.microsoft.com/office/drawing/2014/main" id="{2030DA18-5BAC-48F1-9A6A-7E9A18C9AA51}"/>
+              </a:ext>
+            </a:extLst>
+          </p:cNvPr>
+          <p:cNvCxnSpPr>
+            <a:cxnSpLocks/>
+            <a:stCxn id="265" idx="2"/>
+            <a:endCxn id="283" idx="0"/>
+          </p:cNvCxnSpPr>
+          <p:nvPr/>
+        </p:nvCxnSpPr>
+        <p:spPr>
+          <a:xfrm rot="5400000">
+            <a:off x="5309769" y="2996272"/>
+            <a:ext cx="269999" cy="592763"/>
+          </a:xfrm>
+          <a:prstGeom prst="bentConnector3">
+            <a:avLst>
+              <a:gd name="adj1" fmla="val 50000"/>
+            </a:avLst>
+          </a:prstGeom>
+          <a:ln w="19050">
+            <a:tailEnd type="arrow"/>
+          </a:ln>
+        </p:spPr>
+        <p:style>
+          <a:lnRef idx="1">
+            <a:schemeClr val="accent1"/>
+          </a:lnRef>
+          <a:fillRef idx="0">
+            <a:schemeClr val="accent1"/>
+          </a:fillRef>
+          <a:effectRef idx="0">
+            <a:schemeClr val="accent1"/>
+          </a:effectRef>
+          <a:fontRef idx="minor">
+            <a:schemeClr val="tx1"/>
+          </a:fontRef>
+        </p:style>
+      </p:cxnSp>
+      <p:sp>
+        <p:nvSpPr>
+          <p:cNvPr id="287" name="Прямоугольник 286">
+            <a:extLst>
+              <a:ext uri="{FF2B5EF4-FFF2-40B4-BE49-F238E27FC236}">
+                <a16:creationId xmlns:a16="http://schemas.microsoft.com/office/drawing/2014/main" id="{7C057171-F376-4B82-B319-CBAB78F0889F}"/>
+              </a:ext>
+            </a:extLst>
+          </p:cNvPr>
+          <p:cNvSpPr/>
+          <p:nvPr/>
+        </p:nvSpPr>
+        <p:spPr>
+          <a:xfrm>
+            <a:off x="8247130" y="3427653"/>
+            <a:ext cx="926325" cy="540000"/>
+          </a:xfrm>
+          <a:prstGeom prst="rect">
+            <a:avLst/>
+          </a:prstGeom>
+          <a:solidFill>
+            <a:schemeClr val="accent1">
+              <a:lumMod val="60000"/>
+              <a:lumOff val="40000"/>
+            </a:schemeClr>
+          </a:solidFill>
+          <a:ln w="19050"/>
+        </p:spPr>
+        <p:style>
+          <a:lnRef idx="2">
+            <a:schemeClr val="accent1"/>
+          </a:lnRef>
+          <a:fillRef idx="1">
+            <a:schemeClr val="lt1"/>
+          </a:fillRef>
+          <a:effectRef idx="0">
+            <a:schemeClr val="accent1"/>
+          </a:effectRef>
+          <a:fontRef idx="minor">
+            <a:schemeClr val="dk1"/>
+          </a:fontRef>
+        </p:style>
+        <p:txBody>
+          <a:bodyPr lIns="124733" tIns="62367" rIns="124733" bIns="62367" rtlCol="0" anchor="ctr"/>
+          <a:lstStyle/>
+          <a:p>
+            <a:pPr algn="ctr"/>
+            <a:r>
+              <a:rPr lang="ru-RU" sz="700" dirty="0"/>
+              <a:t>Начать пересмотр «плана реформ»</a:t>
+            </a:r>
+          </a:p>
+        </p:txBody>
+      </p:sp>
+      <p:cxnSp>
+        <p:nvCxnSpPr>
+          <p:cNvPr id="288" name="Соединительная линия уступом 620">
+            <a:extLst>
+              <a:ext uri="{FF2B5EF4-FFF2-40B4-BE49-F238E27FC236}">
+                <a16:creationId xmlns:a16="http://schemas.microsoft.com/office/drawing/2014/main" id="{2D45B470-7110-45BE-A426-4B5C553565C5}"/>
+              </a:ext>
+            </a:extLst>
+          </p:cNvPr>
+          <p:cNvCxnSpPr>
+            <a:cxnSpLocks/>
+            <a:stCxn id="263" idx="2"/>
+            <a:endCxn id="287" idx="0"/>
+          </p:cNvCxnSpPr>
+          <p:nvPr/>
+        </p:nvCxnSpPr>
+        <p:spPr>
+          <a:xfrm rot="16200000" flipH="1">
+            <a:off x="8278025" y="2995384"/>
+            <a:ext cx="269999" cy="594537"/>
+          </a:xfrm>
+          <a:prstGeom prst="bentConnector3">
+            <a:avLst>
+              <a:gd name="adj1" fmla="val 50000"/>
+            </a:avLst>
+          </a:prstGeom>
+          <a:ln w="19050">
+            <a:tailEnd type="arrow"/>
+          </a:ln>
+        </p:spPr>
+        <p:style>
+          <a:lnRef idx="1">
+            <a:schemeClr val="accent1"/>
+          </a:lnRef>
+          <a:fillRef idx="0">
+            <a:schemeClr val="accent1"/>
+          </a:fillRef>
+          <a:effectRef idx="0">
+            <a:schemeClr val="accent1"/>
+          </a:effectRef>
+          <a:fontRef idx="minor">
+            <a:schemeClr val="tx1"/>
+          </a:fontRef>
+        </p:style>
+      </p:cxnSp>
+      <p:sp>
+        <p:nvSpPr>
+          <p:cNvPr id="292" name="Прямоугольник 291">
+            <a:extLst>
+              <a:ext uri="{FF2B5EF4-FFF2-40B4-BE49-F238E27FC236}">
+                <a16:creationId xmlns:a16="http://schemas.microsoft.com/office/drawing/2014/main" id="{E32E2B1C-B462-4241-B5AE-DEE569675EFC}"/>
+              </a:ext>
+            </a:extLst>
+          </p:cNvPr>
+          <p:cNvSpPr/>
+          <p:nvPr/>
+        </p:nvSpPr>
+        <p:spPr>
+          <a:xfrm>
+            <a:off x="4098299" y="4237653"/>
+            <a:ext cx="926325" cy="540000"/>
+          </a:xfrm>
+          <a:prstGeom prst="rect">
+            <a:avLst/>
+          </a:prstGeom>
+          <a:solidFill>
+            <a:schemeClr val="bg1">
+              <a:lumMod val="50000"/>
+            </a:schemeClr>
+          </a:solidFill>
+          <a:ln w="19050"/>
+        </p:spPr>
+        <p:style>
+          <a:lnRef idx="2">
+            <a:schemeClr val="accent1"/>
+          </a:lnRef>
+          <a:fillRef idx="1">
+            <a:schemeClr val="lt1"/>
+          </a:fillRef>
+          <a:effectRef idx="0">
+            <a:schemeClr val="accent1"/>
+          </a:effectRef>
+          <a:fontRef idx="minor">
+            <a:schemeClr val="dk1"/>
+          </a:fontRef>
+        </p:style>
+        <p:txBody>
+          <a:bodyPr lIns="124733" tIns="62367" rIns="124733" bIns="62367" rtlCol="0" anchor="ctr"/>
+          <a:lstStyle/>
+          <a:p>
+            <a:pPr algn="ctr"/>
+            <a:r>
+              <a:rPr lang="ru-RU" sz="700" dirty="0"/>
+              <a:t>Довериться Франции</a:t>
+            </a:r>
+          </a:p>
+        </p:txBody>
+      </p:sp>
+      <p:cxnSp>
+        <p:nvCxnSpPr>
+          <p:cNvPr id="293" name="Соединительная линия уступом 620">
+            <a:extLst>
+              <a:ext uri="{FF2B5EF4-FFF2-40B4-BE49-F238E27FC236}">
+                <a16:creationId xmlns:a16="http://schemas.microsoft.com/office/drawing/2014/main" id="{757590F4-BC4D-4C90-A3CA-F02D4812C7C9}"/>
+              </a:ext>
+            </a:extLst>
+          </p:cNvPr>
+          <p:cNvCxnSpPr>
+            <a:cxnSpLocks/>
+            <a:stCxn id="283" idx="2"/>
+            <a:endCxn id="292" idx="0"/>
+          </p:cNvCxnSpPr>
+          <p:nvPr/>
+        </p:nvCxnSpPr>
+        <p:spPr>
+          <a:xfrm rot="5400000">
+            <a:off x="4719924" y="3809191"/>
+            <a:ext cx="270000" cy="586924"/>
+          </a:xfrm>
+          <a:prstGeom prst="bentConnector3">
+            <a:avLst>
+              <a:gd name="adj1" fmla="val 50000"/>
+            </a:avLst>
+          </a:prstGeom>
+          <a:ln w="19050">
+            <a:tailEnd type="arrow"/>
+          </a:ln>
+        </p:spPr>
+        <p:style>
+          <a:lnRef idx="1">
+            <a:schemeClr val="accent1"/>
+          </a:lnRef>
+          <a:fillRef idx="0">
+            <a:schemeClr val="accent1"/>
+          </a:fillRef>
+          <a:effectRef idx="0">
+            <a:schemeClr val="accent1"/>
+          </a:effectRef>
+          <a:fontRef idx="minor">
+            <a:schemeClr val="tx1"/>
+          </a:fontRef>
+        </p:style>
+      </p:cxnSp>
+      <p:cxnSp>
+        <p:nvCxnSpPr>
+          <p:cNvPr id="295" name="Соединительная линия уступом 620">
+            <a:extLst>
+              <a:ext uri="{FF2B5EF4-FFF2-40B4-BE49-F238E27FC236}">
+                <a16:creationId xmlns:a16="http://schemas.microsoft.com/office/drawing/2014/main" id="{2EB205CF-39BF-49B2-8AF4-7BC15DEB704A}"/>
+              </a:ext>
+            </a:extLst>
+          </p:cNvPr>
+          <p:cNvCxnSpPr>
+            <a:cxnSpLocks/>
+            <a:stCxn id="283" idx="2"/>
+            <a:endCxn id="277" idx="0"/>
+          </p:cNvCxnSpPr>
+          <p:nvPr/>
+        </p:nvCxnSpPr>
+        <p:spPr>
+          <a:xfrm rot="16200000" flipH="1">
+            <a:off x="5309767" y="3806272"/>
+            <a:ext cx="270000" cy="592762"/>
+          </a:xfrm>
+          <a:prstGeom prst="bentConnector3">
+            <a:avLst>
+              <a:gd name="adj1" fmla="val 50000"/>
+            </a:avLst>
+          </a:prstGeom>
+          <a:ln w="19050">
+            <a:tailEnd type="arrow"/>
+          </a:ln>
+        </p:spPr>
+        <p:style>
+          <a:lnRef idx="1">
+            <a:schemeClr val="accent1"/>
+          </a:lnRef>
+          <a:fillRef idx="0">
+            <a:schemeClr val="accent1"/>
+          </a:fillRef>
+          <a:effectRef idx="0">
+            <a:schemeClr val="accent1"/>
+          </a:effectRef>
+          <a:fontRef idx="minor">
+            <a:schemeClr val="tx1"/>
+          </a:fontRef>
+        </p:style>
+      </p:cxnSp>
+      <p:cxnSp>
+        <p:nvCxnSpPr>
+          <p:cNvPr id="298" name="Прямая соединительная линия 297">
+            <a:extLst>
+              <a:ext uri="{FF2B5EF4-FFF2-40B4-BE49-F238E27FC236}">
+                <a16:creationId xmlns:a16="http://schemas.microsoft.com/office/drawing/2014/main" id="{3CAB4662-0790-4AAE-8D4D-1D72F1CE9B23}"/>
+              </a:ext>
+            </a:extLst>
+          </p:cNvPr>
+          <p:cNvCxnSpPr>
+            <a:cxnSpLocks/>
+            <a:stCxn id="277" idx="1"/>
+            <a:endCxn id="292" idx="3"/>
+          </p:cNvCxnSpPr>
+          <p:nvPr/>
+        </p:nvCxnSpPr>
+        <p:spPr>
+          <a:xfrm flipH="1">
+            <a:off x="5024624" y="4507653"/>
+            <a:ext cx="253361" cy="0"/>
+          </a:xfrm>
+          <a:prstGeom prst="line">
+            <a:avLst/>
+          </a:prstGeom>
+          <a:ln w="38100">
+            <a:solidFill>
+              <a:srgbClr val="C00000"/>
+            </a:solidFill>
+          </a:ln>
+        </p:spPr>
+        <p:style>
+          <a:lnRef idx="1">
+            <a:schemeClr val="accent1"/>
+          </a:lnRef>
+          <a:fillRef idx="0">
+            <a:schemeClr val="accent1"/>
+          </a:fillRef>
+          <a:effectRef idx="0">
+            <a:schemeClr val="accent1"/>
+          </a:effectRef>
+          <a:fontRef idx="minor">
+            <a:schemeClr val="tx1"/>
+          </a:fontRef>
+        </p:style>
+      </p:cxnSp>
+      <p:cxnSp>
+        <p:nvCxnSpPr>
+          <p:cNvPr id="304" name="Соединительная линия уступом 620">
+            <a:extLst>
+              <a:ext uri="{FF2B5EF4-FFF2-40B4-BE49-F238E27FC236}">
+                <a16:creationId xmlns:a16="http://schemas.microsoft.com/office/drawing/2014/main" id="{4C914DD9-8594-48D4-B2A0-6839CED41856}"/>
+              </a:ext>
+            </a:extLst>
+          </p:cNvPr>
+          <p:cNvCxnSpPr>
+            <a:cxnSpLocks/>
+            <a:stCxn id="172" idx="2"/>
+            <a:endCxn id="259" idx="0"/>
+          </p:cNvCxnSpPr>
+          <p:nvPr/>
+        </p:nvCxnSpPr>
+        <p:spPr>
+          <a:xfrm rot="16200000" flipH="1">
+            <a:off x="6687380" y="2592043"/>
+            <a:ext cx="1079998" cy="591221"/>
+          </a:xfrm>
+          <a:prstGeom prst="bentConnector3">
+            <a:avLst>
+              <a:gd name="adj1" fmla="val 12097"/>
+            </a:avLst>
+          </a:prstGeom>
+          <a:ln w="19050">
+            <a:prstDash val="dash"/>
+            <a:tailEnd type="arrow"/>
+          </a:ln>
+        </p:spPr>
+        <p:style>
+          <a:lnRef idx="1">
+            <a:schemeClr val="accent1"/>
+          </a:lnRef>
+          <a:fillRef idx="0">
+            <a:schemeClr val="accent1"/>
+          </a:fillRef>
+          <a:effectRef idx="0">
+            <a:schemeClr val="accent1"/>
+          </a:effectRef>
+          <a:fontRef idx="minor">
+            <a:schemeClr val="tx1"/>
+          </a:fontRef>
+        </p:style>
+      </p:cxnSp>
+      <p:sp>
+        <p:nvSpPr>
+          <p:cNvPr id="310" name="Прямоугольник 309">
+            <a:extLst>
+              <a:ext uri="{FF2B5EF4-FFF2-40B4-BE49-F238E27FC236}">
+                <a16:creationId xmlns:a16="http://schemas.microsoft.com/office/drawing/2014/main" id="{8BEE4877-4A35-41B0-BA5E-CEC9F21FB8DF}"/>
+              </a:ext>
+            </a:extLst>
+          </p:cNvPr>
+          <p:cNvSpPr/>
+          <p:nvPr/>
+        </p:nvSpPr>
+        <p:spPr>
+          <a:xfrm>
+            <a:off x="6468606" y="5045049"/>
+            <a:ext cx="926325" cy="540000"/>
+          </a:xfrm>
+          <a:prstGeom prst="rect">
+            <a:avLst/>
+          </a:prstGeom>
+          <a:gradFill flip="none" rotWithShape="1">
+            <a:gsLst>
+              <a:gs pos="0">
+                <a:srgbClr val="7030A0"/>
+              </a:gs>
+              <a:gs pos="100000">
+                <a:schemeClr val="accent1">
+                  <a:lumMod val="60000"/>
+                  <a:lumOff val="40000"/>
+                </a:schemeClr>
+              </a:gs>
+            </a:gsLst>
+            <a:lin ang="0" scaled="1"/>
+            <a:tileRect/>
+          </a:gradFill>
+          <a:ln w="19050"/>
+        </p:spPr>
+        <p:style>
+          <a:lnRef idx="2">
+            <a:schemeClr val="accent1"/>
+          </a:lnRef>
+          <a:fillRef idx="1">
+            <a:schemeClr val="lt1"/>
+          </a:fillRef>
+          <a:effectRef idx="0">
+            <a:schemeClr val="accent1"/>
+          </a:effectRef>
+          <a:fontRef idx="minor">
+            <a:schemeClr val="dk1"/>
+          </a:fontRef>
+        </p:style>
+        <p:txBody>
+          <a:bodyPr lIns="124733" tIns="62367" rIns="124733" bIns="62367" rtlCol="0" anchor="ctr"/>
+          <a:lstStyle/>
+          <a:p>
+            <a:pPr algn="ctr"/>
+            <a:r>
+              <a:rPr lang="ru-RU" sz="700" dirty="0"/>
+              <a:t>Объявить «Малый джихад»</a:t>
+            </a:r>
+          </a:p>
+        </p:txBody>
+      </p:sp>
+      <p:cxnSp>
+        <p:nvCxnSpPr>
+          <p:cNvPr id="313" name="Соединительная линия уступом 620">
+            <a:extLst>
+              <a:ext uri="{FF2B5EF4-FFF2-40B4-BE49-F238E27FC236}">
+                <a16:creationId xmlns:a16="http://schemas.microsoft.com/office/drawing/2014/main" id="{FE4788D6-0F79-41C1-B670-7498A365E880}"/>
+              </a:ext>
+            </a:extLst>
+          </p:cNvPr>
+          <p:cNvCxnSpPr>
+            <a:cxnSpLocks/>
+            <a:stCxn id="277" idx="2"/>
+            <a:endCxn id="310" idx="0"/>
+          </p:cNvCxnSpPr>
+          <p:nvPr/>
+        </p:nvCxnSpPr>
+        <p:spPr>
+          <a:xfrm rot="16200000" flipH="1">
+            <a:off x="6202760" y="4316040"/>
+            <a:ext cx="267396" cy="1190621"/>
+          </a:xfrm>
+          <a:prstGeom prst="bentConnector3">
+            <a:avLst>
+              <a:gd name="adj1" fmla="val 50000"/>
+            </a:avLst>
+          </a:prstGeom>
+          <a:ln w="19050">
+            <a:prstDash val="dash"/>
+            <a:tailEnd type="arrow"/>
+          </a:ln>
+        </p:spPr>
+        <p:style>
+          <a:lnRef idx="1">
+            <a:schemeClr val="accent1"/>
+          </a:lnRef>
+          <a:fillRef idx="0">
+            <a:schemeClr val="accent1"/>
+          </a:fillRef>
+          <a:effectRef idx="0">
+            <a:schemeClr val="accent1"/>
+          </a:effectRef>
+          <a:fontRef idx="minor">
+            <a:schemeClr val="tx1"/>
+          </a:fontRef>
+        </p:style>
+      </p:cxnSp>
+      <p:sp>
+        <p:nvSpPr>
+          <p:cNvPr id="316" name="Прямоугольник 315">
+            <a:extLst>
+              <a:ext uri="{FF2B5EF4-FFF2-40B4-BE49-F238E27FC236}">
+                <a16:creationId xmlns:a16="http://schemas.microsoft.com/office/drawing/2014/main" id="{450BAB95-3D2C-4E8B-A24B-34A46E093A03}"/>
+              </a:ext>
+            </a:extLst>
+          </p:cNvPr>
+          <p:cNvSpPr/>
+          <p:nvPr/>
+        </p:nvSpPr>
+        <p:spPr>
+          <a:xfrm>
+            <a:off x="7648292" y="4237649"/>
+            <a:ext cx="926325" cy="540000"/>
+          </a:xfrm>
+          <a:prstGeom prst="rect">
+            <a:avLst/>
+          </a:prstGeom>
+          <a:solidFill>
+            <a:schemeClr val="accent1">
+              <a:lumMod val="60000"/>
+              <a:lumOff val="40000"/>
+            </a:schemeClr>
+          </a:solidFill>
+          <a:ln w="19050"/>
+        </p:spPr>
+        <p:style>
+          <a:lnRef idx="2">
+            <a:schemeClr val="accent1"/>
+          </a:lnRef>
+          <a:fillRef idx="1">
+            <a:schemeClr val="lt1"/>
+          </a:fillRef>
+          <a:effectRef idx="0">
+            <a:schemeClr val="accent1"/>
+          </a:effectRef>
+          <a:fontRef idx="minor">
+            <a:schemeClr val="dk1"/>
+          </a:fontRef>
+        </p:style>
+        <p:txBody>
+          <a:bodyPr lIns="124733" tIns="62367" rIns="124733" bIns="62367" rtlCol="0" anchor="ctr"/>
+          <a:lstStyle/>
+          <a:p>
+            <a:pPr algn="ctr"/>
+            <a:r>
+              <a:rPr lang="ru-RU" sz="700" dirty="0"/>
+              <a:t>Подготовить замену </a:t>
+            </a:r>
+            <a:r>
+              <a:rPr lang="ru-RU" sz="700" dirty="0" err="1"/>
+              <a:t>мехзену</a:t>
+            </a:r>
+            <a:r>
+              <a:rPr lang="ru-RU" sz="700" dirty="0"/>
+              <a:t> </a:t>
+            </a:r>
+          </a:p>
+        </p:txBody>
+      </p:sp>
+      <p:cxnSp>
+        <p:nvCxnSpPr>
+          <p:cNvPr id="317" name="Соединительная линия уступом 620">
+            <a:extLst>
+              <a:ext uri="{FF2B5EF4-FFF2-40B4-BE49-F238E27FC236}">
+                <a16:creationId xmlns:a16="http://schemas.microsoft.com/office/drawing/2014/main" id="{371B4126-1CF1-4719-8DCD-4617820F982D}"/>
+              </a:ext>
+            </a:extLst>
+          </p:cNvPr>
+          <p:cNvCxnSpPr>
+            <a:cxnSpLocks/>
+            <a:stCxn id="287" idx="2"/>
+            <a:endCxn id="316" idx="0"/>
+          </p:cNvCxnSpPr>
+          <p:nvPr/>
+        </p:nvCxnSpPr>
+        <p:spPr>
+          <a:xfrm rot="5400000">
+            <a:off x="8275876" y="3803232"/>
+            <a:ext cx="269996" cy="598838"/>
+          </a:xfrm>
+          <a:prstGeom prst="bentConnector3">
+            <a:avLst>
+              <a:gd name="adj1" fmla="val 50000"/>
+            </a:avLst>
+          </a:prstGeom>
+          <a:ln w="19050">
+            <a:tailEnd type="arrow"/>
+          </a:ln>
+        </p:spPr>
+        <p:style>
+          <a:lnRef idx="1">
+            <a:schemeClr val="accent1"/>
+          </a:lnRef>
+          <a:fillRef idx="0">
+            <a:schemeClr val="accent1"/>
+          </a:fillRef>
+          <a:effectRef idx="0">
+            <a:schemeClr val="accent1"/>
+          </a:effectRef>
+          <a:fontRef idx="minor">
+            <a:schemeClr val="tx1"/>
+          </a:fontRef>
+        </p:style>
+      </p:cxnSp>
+      <p:sp>
+        <p:nvSpPr>
+          <p:cNvPr id="320" name="Прямоугольник 319">
+            <a:extLst>
+              <a:ext uri="{FF2B5EF4-FFF2-40B4-BE49-F238E27FC236}">
+                <a16:creationId xmlns:a16="http://schemas.microsoft.com/office/drawing/2014/main" id="{CEEF7E01-23D9-406A-B51B-D4B10D6D4533}"/>
+              </a:ext>
+            </a:extLst>
+          </p:cNvPr>
+          <p:cNvSpPr/>
+          <p:nvPr/>
+        </p:nvSpPr>
+        <p:spPr>
+          <a:xfrm>
+            <a:off x="7648291" y="5852447"/>
+            <a:ext cx="926325" cy="540000"/>
+          </a:xfrm>
+          <a:prstGeom prst="rect">
+            <a:avLst/>
+          </a:prstGeom>
+          <a:solidFill>
+            <a:schemeClr val="accent1">
+              <a:lumMod val="60000"/>
+              <a:lumOff val="40000"/>
+            </a:schemeClr>
+          </a:solidFill>
+          <a:ln w="19050"/>
+        </p:spPr>
+        <p:style>
+          <a:lnRef idx="2">
+            <a:schemeClr val="accent1"/>
+          </a:lnRef>
+          <a:fillRef idx="1">
+            <a:schemeClr val="lt1"/>
+          </a:fillRef>
+          <a:effectRef idx="0">
+            <a:schemeClr val="accent1"/>
+          </a:effectRef>
+          <a:fontRef idx="minor">
+            <a:schemeClr val="dk1"/>
+          </a:fontRef>
+        </p:style>
+        <p:txBody>
+          <a:bodyPr lIns="124733" tIns="62367" rIns="124733" bIns="62367" rtlCol="0" anchor="ctr"/>
+          <a:lstStyle/>
+          <a:p>
+            <a:pPr algn="ctr"/>
+            <a:r>
+              <a:rPr lang="ru-RU" sz="700" dirty="0"/>
+              <a:t>Заключить пакт с Комитетом антифашистских милиций Каталонии</a:t>
+            </a:r>
+          </a:p>
+        </p:txBody>
+      </p:sp>
+      <p:cxnSp>
+        <p:nvCxnSpPr>
+          <p:cNvPr id="321" name="Соединительная линия уступом 620">
+            <a:extLst>
+              <a:ext uri="{FF2B5EF4-FFF2-40B4-BE49-F238E27FC236}">
+                <a16:creationId xmlns:a16="http://schemas.microsoft.com/office/drawing/2014/main" id="{A4F65A7D-8CC9-4225-8C23-9C065F3ED477}"/>
+              </a:ext>
+            </a:extLst>
+          </p:cNvPr>
+          <p:cNvCxnSpPr>
+            <a:cxnSpLocks/>
+            <a:stCxn id="316" idx="2"/>
+            <a:endCxn id="310" idx="0"/>
+          </p:cNvCxnSpPr>
+          <p:nvPr/>
+        </p:nvCxnSpPr>
+        <p:spPr>
+          <a:xfrm rot="5400000">
+            <a:off x="7387912" y="4321506"/>
+            <a:ext cx="267400" cy="1179686"/>
+          </a:xfrm>
+          <a:prstGeom prst="bentConnector3">
+            <a:avLst>
+              <a:gd name="adj1" fmla="val 50000"/>
+            </a:avLst>
+          </a:prstGeom>
+          <a:ln w="19050">
+            <a:prstDash val="dash"/>
+            <a:tailEnd type="arrow"/>
+          </a:ln>
+        </p:spPr>
+        <p:style>
+          <a:lnRef idx="1">
+            <a:schemeClr val="accent1"/>
+          </a:lnRef>
+          <a:fillRef idx="0">
+            <a:schemeClr val="accent1"/>
+          </a:fillRef>
+          <a:effectRef idx="0">
+            <a:schemeClr val="accent1"/>
+          </a:effectRef>
+          <a:fontRef idx="minor">
+            <a:schemeClr val="tx1"/>
+          </a:fontRef>
+        </p:style>
+      </p:cxnSp>
+      <p:cxnSp>
+        <p:nvCxnSpPr>
+          <p:cNvPr id="324" name="Соединительная линия уступом 620">
+            <a:extLst>
+              <a:ext uri="{FF2B5EF4-FFF2-40B4-BE49-F238E27FC236}">
+                <a16:creationId xmlns:a16="http://schemas.microsoft.com/office/drawing/2014/main" id="{8AD15B03-422B-4B56-81F0-F9F3269CE8EC}"/>
+              </a:ext>
+            </a:extLst>
+          </p:cNvPr>
+          <p:cNvCxnSpPr>
+            <a:cxnSpLocks/>
+            <a:stCxn id="316" idx="2"/>
+            <a:endCxn id="332" idx="0"/>
+          </p:cNvCxnSpPr>
+          <p:nvPr/>
+        </p:nvCxnSpPr>
+        <p:spPr>
+          <a:xfrm rot="16200000" flipH="1">
+            <a:off x="8277173" y="4611930"/>
+            <a:ext cx="267400" cy="598837"/>
+          </a:xfrm>
+          <a:prstGeom prst="bentConnector3">
+            <a:avLst>
+              <a:gd name="adj1" fmla="val 50000"/>
+            </a:avLst>
+          </a:prstGeom>
+          <a:ln w="19050">
+            <a:tailEnd type="arrow"/>
+          </a:ln>
+        </p:spPr>
+        <p:style>
+          <a:lnRef idx="1">
+            <a:schemeClr val="accent1"/>
+          </a:lnRef>
+          <a:fillRef idx="0">
+            <a:schemeClr val="accent1"/>
+          </a:fillRef>
+          <a:effectRef idx="0">
+            <a:schemeClr val="accent1"/>
+          </a:effectRef>
+          <a:fontRef idx="minor">
+            <a:schemeClr val="tx1"/>
+          </a:fontRef>
+        </p:style>
+      </p:cxnSp>
+      <p:cxnSp>
+        <p:nvCxnSpPr>
+          <p:cNvPr id="328" name="Соединительная линия уступом 620">
+            <a:extLst>
+              <a:ext uri="{FF2B5EF4-FFF2-40B4-BE49-F238E27FC236}">
+                <a16:creationId xmlns:a16="http://schemas.microsoft.com/office/drawing/2014/main" id="{A39DDDD4-0444-47AF-A895-5B138AC5F7BD}"/>
+              </a:ext>
+            </a:extLst>
+          </p:cNvPr>
+          <p:cNvCxnSpPr>
+            <a:cxnSpLocks/>
+            <a:stCxn id="287" idx="2"/>
+            <a:endCxn id="275" idx="0"/>
+          </p:cNvCxnSpPr>
+          <p:nvPr/>
+        </p:nvCxnSpPr>
+        <p:spPr>
+          <a:xfrm rot="16200000" flipH="1">
+            <a:off x="8865718" y="3812227"/>
+            <a:ext cx="269996" cy="580847"/>
+          </a:xfrm>
+          <a:prstGeom prst="bentConnector3">
+            <a:avLst>
+              <a:gd name="adj1" fmla="val 50000"/>
+            </a:avLst>
+          </a:prstGeom>
+          <a:ln w="19050">
+            <a:tailEnd type="arrow"/>
+          </a:ln>
+        </p:spPr>
+        <p:style>
+          <a:lnRef idx="1">
+            <a:schemeClr val="accent1"/>
+          </a:lnRef>
+          <a:fillRef idx="0">
+            <a:schemeClr val="accent1"/>
+          </a:fillRef>
+          <a:effectRef idx="0">
+            <a:schemeClr val="accent1"/>
+          </a:effectRef>
+          <a:fontRef idx="minor">
+            <a:schemeClr val="tx1"/>
+          </a:fontRef>
+        </p:style>
+      </p:cxnSp>
+      <p:sp>
+        <p:nvSpPr>
+          <p:cNvPr id="330" name="Прямоугольник 329">
+            <a:extLst>
+              <a:ext uri="{FF2B5EF4-FFF2-40B4-BE49-F238E27FC236}">
+                <a16:creationId xmlns:a16="http://schemas.microsoft.com/office/drawing/2014/main" id="{77CC4BAF-A75D-4EBC-BE28-A54D5A61B12F}"/>
+              </a:ext>
+            </a:extLst>
+          </p:cNvPr>
+          <p:cNvSpPr/>
+          <p:nvPr/>
+        </p:nvSpPr>
+        <p:spPr>
+          <a:xfrm>
+            <a:off x="6465288" y="6659845"/>
+            <a:ext cx="926325" cy="540000"/>
+          </a:xfrm>
+          <a:prstGeom prst="rect">
+            <a:avLst/>
+          </a:prstGeom>
+          <a:gradFill flip="none" rotWithShape="1">
+            <a:gsLst>
+              <a:gs pos="0">
+                <a:srgbClr val="7030A0"/>
+              </a:gs>
+              <a:gs pos="100000">
+                <a:schemeClr val="accent1">
+                  <a:lumMod val="60000"/>
+                  <a:lumOff val="40000"/>
+                </a:schemeClr>
+              </a:gs>
+            </a:gsLst>
+            <a:lin ang="0" scaled="1"/>
+            <a:tileRect/>
+          </a:gradFill>
+          <a:ln w="19050"/>
+        </p:spPr>
+        <p:style>
+          <a:lnRef idx="2">
+            <a:schemeClr val="accent1"/>
+          </a:lnRef>
+          <a:fillRef idx="1">
+            <a:schemeClr val="lt1"/>
+          </a:fillRef>
+          <a:effectRef idx="0">
+            <a:schemeClr val="accent1"/>
+          </a:effectRef>
+          <a:fontRef idx="minor">
+            <a:schemeClr val="dk1"/>
+          </a:fontRef>
+        </p:style>
+        <p:txBody>
+          <a:bodyPr lIns="124733" tIns="62367" rIns="124733" bIns="62367" rtlCol="0" anchor="ctr"/>
+          <a:lstStyle/>
+          <a:p>
+            <a:pPr algn="ctr"/>
+            <a:r>
+              <a:rPr lang="ru-RU" sz="700" dirty="0"/>
+              <a:t>Объявить «Большой джихад»</a:t>
+            </a:r>
+          </a:p>
+        </p:txBody>
+      </p:sp>
+      <p:sp>
+        <p:nvSpPr>
+          <p:cNvPr id="331" name="Прямоугольник 330">
+            <a:extLst>
+              <a:ext uri="{FF2B5EF4-FFF2-40B4-BE49-F238E27FC236}">
+                <a16:creationId xmlns:a16="http://schemas.microsoft.com/office/drawing/2014/main" id="{878086EF-A044-4910-9A7E-6DCF7A246FAE}"/>
+              </a:ext>
+            </a:extLst>
+          </p:cNvPr>
+          <p:cNvSpPr/>
+          <p:nvPr/>
+        </p:nvSpPr>
+        <p:spPr>
+          <a:xfrm>
+            <a:off x="5281301" y="5045049"/>
+            <a:ext cx="926325" cy="540000"/>
+          </a:xfrm>
+          <a:prstGeom prst="rect">
+            <a:avLst/>
+          </a:prstGeom>
+          <a:solidFill>
+            <a:srgbClr val="7030A0"/>
+          </a:solidFill>
+          <a:ln w="19050"/>
+        </p:spPr>
+        <p:style>
+          <a:lnRef idx="2">
+            <a:schemeClr val="accent1"/>
+          </a:lnRef>
+          <a:fillRef idx="1">
+            <a:schemeClr val="lt1"/>
+          </a:fillRef>
+          <a:effectRef idx="0">
+            <a:schemeClr val="accent1"/>
+          </a:effectRef>
+          <a:fontRef idx="minor">
+            <a:schemeClr val="dk1"/>
+          </a:fontRef>
+        </p:style>
+        <p:txBody>
+          <a:bodyPr lIns="124733" tIns="62367" rIns="124733" bIns="62367" rtlCol="0" anchor="ctr"/>
+          <a:lstStyle/>
+          <a:p>
+            <a:pPr algn="ctr"/>
+            <a:r>
+              <a:rPr lang="ru-RU" sz="700" dirty="0"/>
+              <a:t>Реформировать </a:t>
+            </a:r>
+            <a:r>
+              <a:rPr lang="ru-RU" sz="700" dirty="0" err="1"/>
+              <a:t>мехзен</a:t>
+            </a:r>
+            <a:endParaRPr lang="ru-RU" sz="700" dirty="0"/>
+          </a:p>
+        </p:txBody>
+      </p:sp>
+      <p:sp>
+        <p:nvSpPr>
+          <p:cNvPr id="332" name="Прямоугольник 331">
+            <a:extLst>
+              <a:ext uri="{FF2B5EF4-FFF2-40B4-BE49-F238E27FC236}">
+                <a16:creationId xmlns:a16="http://schemas.microsoft.com/office/drawing/2014/main" id="{C0D52A2B-0B1A-46DA-A360-649D00FE7B0D}"/>
+              </a:ext>
+            </a:extLst>
+          </p:cNvPr>
+          <p:cNvSpPr/>
+          <p:nvPr/>
+        </p:nvSpPr>
+        <p:spPr>
+          <a:xfrm>
+            <a:off x="8247129" y="5045049"/>
+            <a:ext cx="926325" cy="540000"/>
+          </a:xfrm>
+          <a:prstGeom prst="rect">
+            <a:avLst/>
+          </a:prstGeom>
+          <a:solidFill>
+            <a:schemeClr val="accent1">
+              <a:lumMod val="60000"/>
+              <a:lumOff val="40000"/>
+            </a:schemeClr>
+          </a:solidFill>
+          <a:ln w="19050"/>
+        </p:spPr>
+        <p:style>
+          <a:lnRef idx="2">
+            <a:schemeClr val="accent1"/>
+          </a:lnRef>
+          <a:fillRef idx="1">
+            <a:schemeClr val="lt1"/>
+          </a:fillRef>
+          <a:effectRef idx="0">
+            <a:schemeClr val="accent1"/>
+          </a:effectRef>
+          <a:fontRef idx="minor">
+            <a:schemeClr val="dk1"/>
+          </a:fontRef>
+        </p:style>
+        <p:txBody>
+          <a:bodyPr lIns="124733" tIns="62367" rIns="124733" bIns="62367" rtlCol="0" anchor="ctr"/>
+          <a:lstStyle/>
+          <a:p>
+            <a:pPr algn="ctr"/>
+            <a:r>
+              <a:rPr lang="ru-RU" sz="700" dirty="0"/>
+              <a:t>Сформировать правительство</a:t>
+            </a:r>
+          </a:p>
+        </p:txBody>
+      </p:sp>
+      <p:cxnSp>
+        <p:nvCxnSpPr>
+          <p:cNvPr id="335" name="Соединительная линия уступом 620">
+            <a:extLst>
+              <a:ext uri="{FF2B5EF4-FFF2-40B4-BE49-F238E27FC236}">
+                <a16:creationId xmlns:a16="http://schemas.microsoft.com/office/drawing/2014/main" id="{149F6E81-6649-4A6F-B521-8A1C2DEE6A33}"/>
+              </a:ext>
+            </a:extLst>
+          </p:cNvPr>
+          <p:cNvCxnSpPr>
+            <a:cxnSpLocks/>
+            <a:stCxn id="275" idx="2"/>
+            <a:endCxn id="332" idx="0"/>
+          </p:cNvCxnSpPr>
+          <p:nvPr/>
+        </p:nvCxnSpPr>
+        <p:spPr>
+          <a:xfrm rot="5400000">
+            <a:off x="8867016" y="4620925"/>
+            <a:ext cx="267400" cy="580848"/>
+          </a:xfrm>
+          <a:prstGeom prst="bentConnector3">
+            <a:avLst>
+              <a:gd name="adj1" fmla="val 50000"/>
+            </a:avLst>
+          </a:prstGeom>
+          <a:ln w="19050">
+            <a:tailEnd type="arrow"/>
+          </a:ln>
+        </p:spPr>
+        <p:style>
+          <a:lnRef idx="1">
+            <a:schemeClr val="accent1"/>
+          </a:lnRef>
+          <a:fillRef idx="0">
+            <a:schemeClr val="accent1"/>
+          </a:fillRef>
+          <a:effectRef idx="0">
+            <a:schemeClr val="accent1"/>
+          </a:effectRef>
+          <a:fontRef idx="minor">
+            <a:schemeClr val="tx1"/>
+          </a:fontRef>
+        </p:style>
+      </p:cxnSp>
+      <p:cxnSp>
+        <p:nvCxnSpPr>
+          <p:cNvPr id="338" name="Соединительная линия уступом 620">
+            <a:extLst>
+              <a:ext uri="{FF2B5EF4-FFF2-40B4-BE49-F238E27FC236}">
+                <a16:creationId xmlns:a16="http://schemas.microsoft.com/office/drawing/2014/main" id="{55839570-C70C-41BC-BDA6-2CFAC066CB63}"/>
+              </a:ext>
+            </a:extLst>
+          </p:cNvPr>
+          <p:cNvCxnSpPr>
+            <a:cxnSpLocks/>
+            <a:stCxn id="332" idx="2"/>
+            <a:endCxn id="320" idx="0"/>
+          </p:cNvCxnSpPr>
+          <p:nvPr/>
+        </p:nvCxnSpPr>
+        <p:spPr>
+          <a:xfrm rot="5400000">
+            <a:off x="8277174" y="5419329"/>
+            <a:ext cx="267398" cy="598838"/>
+          </a:xfrm>
+          <a:prstGeom prst="bentConnector3">
+            <a:avLst>
+              <a:gd name="adj1" fmla="val 50000"/>
+            </a:avLst>
+          </a:prstGeom>
+          <a:ln w="19050">
+            <a:tailEnd type="arrow"/>
+          </a:ln>
+        </p:spPr>
+        <p:style>
+          <a:lnRef idx="1">
+            <a:schemeClr val="accent1"/>
+          </a:lnRef>
+          <a:fillRef idx="0">
+            <a:schemeClr val="accent1"/>
+          </a:fillRef>
+          <a:effectRef idx="0">
+            <a:schemeClr val="accent1"/>
+          </a:effectRef>
+          <a:fontRef idx="minor">
+            <a:schemeClr val="tx1"/>
+          </a:fontRef>
+        </p:style>
+      </p:cxnSp>
+      <p:cxnSp>
+        <p:nvCxnSpPr>
+          <p:cNvPr id="341" name="Соединительная линия уступом 620">
+            <a:extLst>
+              <a:ext uri="{FF2B5EF4-FFF2-40B4-BE49-F238E27FC236}">
+                <a16:creationId xmlns:a16="http://schemas.microsoft.com/office/drawing/2014/main" id="{4F35E016-15D4-4BF5-9230-F6A9AE9CBB50}"/>
+              </a:ext>
+            </a:extLst>
+          </p:cNvPr>
+          <p:cNvCxnSpPr>
+            <a:cxnSpLocks/>
+            <a:stCxn id="310" idx="2"/>
+            <a:endCxn id="320" idx="0"/>
+          </p:cNvCxnSpPr>
+          <p:nvPr/>
+        </p:nvCxnSpPr>
+        <p:spPr>
+          <a:xfrm rot="16200000" flipH="1">
+            <a:off x="7387912" y="5128905"/>
+            <a:ext cx="267398" cy="1179685"/>
+          </a:xfrm>
+          <a:prstGeom prst="bentConnector3">
+            <a:avLst>
+              <a:gd name="adj1" fmla="val 50000"/>
+            </a:avLst>
+          </a:prstGeom>
+          <a:ln w="19050">
+            <a:tailEnd type="arrow"/>
+          </a:ln>
+        </p:spPr>
+        <p:style>
+          <a:lnRef idx="1">
+            <a:schemeClr val="accent1"/>
+          </a:lnRef>
+          <a:fillRef idx="0">
+            <a:schemeClr val="accent1"/>
+          </a:fillRef>
+          <a:effectRef idx="0">
+            <a:schemeClr val="accent1"/>
+          </a:effectRef>
+          <a:fontRef idx="minor">
+            <a:schemeClr val="tx1"/>
+          </a:fontRef>
+        </p:style>
+      </p:cxnSp>
+      <p:sp>
+        <p:nvSpPr>
+          <p:cNvPr id="344" name="Прямоугольник 343">
+            <a:extLst>
+              <a:ext uri="{FF2B5EF4-FFF2-40B4-BE49-F238E27FC236}">
+                <a16:creationId xmlns:a16="http://schemas.microsoft.com/office/drawing/2014/main" id="{827062AB-206B-4E55-A24F-66815255E901}"/>
+              </a:ext>
+            </a:extLst>
+          </p:cNvPr>
+          <p:cNvSpPr/>
+          <p:nvPr/>
+        </p:nvSpPr>
+        <p:spPr>
+          <a:xfrm>
+            <a:off x="6465289" y="5852447"/>
+            <a:ext cx="926325" cy="540000"/>
+          </a:xfrm>
+          <a:prstGeom prst="rect">
+            <a:avLst/>
+          </a:prstGeom>
+          <a:gradFill flip="none" rotWithShape="1">
+            <a:gsLst>
+              <a:gs pos="0">
+                <a:srgbClr val="7030A0"/>
+              </a:gs>
+              <a:gs pos="100000">
+                <a:schemeClr val="accent1">
+                  <a:lumMod val="60000"/>
+                  <a:lumOff val="40000"/>
+                </a:schemeClr>
+              </a:gs>
+            </a:gsLst>
+            <a:lin ang="0" scaled="1"/>
+            <a:tileRect/>
+          </a:gradFill>
+          <a:ln w="19050"/>
+        </p:spPr>
+        <p:style>
+          <a:lnRef idx="2">
+            <a:schemeClr val="accent1"/>
+          </a:lnRef>
+          <a:fillRef idx="1">
+            <a:schemeClr val="lt1"/>
+          </a:fillRef>
+          <a:effectRef idx="0">
+            <a:schemeClr val="accent1"/>
+          </a:effectRef>
+          <a:fontRef idx="minor">
+            <a:schemeClr val="dk1"/>
+          </a:fontRef>
+        </p:style>
+        <p:txBody>
+          <a:bodyPr lIns="124733" tIns="62367" rIns="124733" bIns="62367" rtlCol="0" anchor="ctr"/>
+          <a:lstStyle/>
+          <a:p>
+            <a:pPr algn="ctr"/>
+            <a:r>
+              <a:rPr lang="ru-RU" sz="700" dirty="0"/>
+              <a:t>Поддержать волнения в Алжире</a:t>
+            </a:r>
+          </a:p>
+        </p:txBody>
+      </p:sp>
+      <p:sp>
+        <p:nvSpPr>
+          <p:cNvPr id="346" name="Прямоугольник 345">
+            <a:extLst>
+              <a:ext uri="{FF2B5EF4-FFF2-40B4-BE49-F238E27FC236}">
+                <a16:creationId xmlns:a16="http://schemas.microsoft.com/office/drawing/2014/main" id="{214E4ECB-84D6-4EEF-A3D3-FFCF70AB74ED}"/>
+              </a:ext>
+            </a:extLst>
+          </p:cNvPr>
+          <p:cNvSpPr/>
+          <p:nvPr/>
+        </p:nvSpPr>
+        <p:spPr>
+          <a:xfrm>
+            <a:off x="6468605" y="4240251"/>
+            <a:ext cx="926325" cy="540000"/>
+          </a:xfrm>
+          <a:prstGeom prst="rect">
+            <a:avLst/>
+          </a:prstGeom>
+          <a:solidFill>
+            <a:schemeClr val="bg1"/>
+          </a:solidFill>
+          <a:ln w="19050"/>
+        </p:spPr>
+        <p:style>
+          <a:lnRef idx="2">
+            <a:schemeClr val="accent1"/>
+          </a:lnRef>
+          <a:fillRef idx="1">
+            <a:schemeClr val="lt1"/>
+          </a:fillRef>
+          <a:effectRef idx="0">
+            <a:schemeClr val="accent1"/>
+          </a:effectRef>
+          <a:fontRef idx="minor">
+            <a:schemeClr val="dk1"/>
+          </a:fontRef>
+        </p:style>
+        <p:txBody>
+          <a:bodyPr lIns="124733" tIns="62367" rIns="124733" bIns="62367" rtlCol="0" anchor="ctr"/>
+          <a:lstStyle/>
+          <a:p>
+            <a:pPr algn="ctr"/>
+            <a:r>
+              <a:rPr lang="ru-RU" sz="700" dirty="0"/>
+              <a:t>Запретить любые сходки рабочих</a:t>
+            </a:r>
+          </a:p>
+        </p:txBody>
+      </p:sp>
+      <p:cxnSp>
+        <p:nvCxnSpPr>
+          <p:cNvPr id="357" name="Соединительная линия уступом 620">
+            <a:extLst>
+              <a:ext uri="{FF2B5EF4-FFF2-40B4-BE49-F238E27FC236}">
+                <a16:creationId xmlns:a16="http://schemas.microsoft.com/office/drawing/2014/main" id="{4BAE7453-0BAF-47A0-808F-1B5A718A074E}"/>
+              </a:ext>
+            </a:extLst>
+          </p:cNvPr>
+          <p:cNvCxnSpPr>
+            <a:cxnSpLocks/>
+            <a:stCxn id="172" idx="2"/>
+            <a:endCxn id="346" idx="0"/>
+          </p:cNvCxnSpPr>
+          <p:nvPr/>
+        </p:nvCxnSpPr>
+        <p:spPr>
+          <a:xfrm rot="5400000">
+            <a:off x="5985471" y="3293953"/>
+            <a:ext cx="1892596" cy="1"/>
+          </a:xfrm>
+          <a:prstGeom prst="bentConnector3">
+            <a:avLst>
+              <a:gd name="adj1" fmla="val 50000"/>
+            </a:avLst>
+          </a:prstGeom>
+          <a:ln w="19050">
+            <a:tailEnd type="arrow"/>
+          </a:ln>
+        </p:spPr>
+        <p:style>
+          <a:lnRef idx="1">
+            <a:schemeClr val="accent1"/>
+          </a:lnRef>
+          <a:fillRef idx="0">
+            <a:schemeClr val="accent1"/>
+          </a:fillRef>
+          <a:effectRef idx="0">
+            <a:schemeClr val="accent1"/>
+          </a:effectRef>
+          <a:fontRef idx="minor">
+            <a:schemeClr val="tx1"/>
+          </a:fontRef>
+        </p:style>
+      </p:cxnSp>
+      <p:sp>
+        <p:nvSpPr>
+          <p:cNvPr id="202" name="Прямоугольник 201">
+            <a:extLst>
+              <a:ext uri="{FF2B5EF4-FFF2-40B4-BE49-F238E27FC236}">
+                <a16:creationId xmlns:a16="http://schemas.microsoft.com/office/drawing/2014/main" id="{DB4B7EC3-52CB-4281-940E-582336AE03DB}"/>
+              </a:ext>
+            </a:extLst>
+          </p:cNvPr>
+          <p:cNvSpPr/>
+          <p:nvPr/>
+        </p:nvSpPr>
+        <p:spPr>
+          <a:xfrm>
+            <a:off x="14554608" y="5852447"/>
+            <a:ext cx="926325" cy="540000"/>
+          </a:xfrm>
+          <a:prstGeom prst="rect">
+            <a:avLst/>
+          </a:prstGeom>
+          <a:solidFill>
+            <a:srgbClr val="FF0000"/>
+          </a:solidFill>
+          <a:ln w="19050"/>
+        </p:spPr>
+        <p:style>
+          <a:lnRef idx="2">
+            <a:schemeClr val="accent1"/>
+          </a:lnRef>
+          <a:fillRef idx="1">
+            <a:schemeClr val="lt1"/>
+          </a:fillRef>
+          <a:effectRef idx="0">
+            <a:schemeClr val="accent1"/>
+          </a:effectRef>
+          <a:fontRef idx="minor">
+            <a:schemeClr val="dk1"/>
+          </a:fontRef>
+        </p:style>
+        <p:txBody>
+          <a:bodyPr lIns="124733" tIns="62367" rIns="124733" bIns="62367" rtlCol="0" anchor="ctr"/>
+          <a:lstStyle/>
+          <a:p>
+            <a:pPr algn="ctr"/>
+            <a:r>
+              <a:rPr lang="ru-RU" sz="700" dirty="0"/>
+              <a:t>Активная поддержка профсоюзов</a:t>
+            </a:r>
+          </a:p>
+        </p:txBody>
+      </p:sp>
+      <p:sp>
+        <p:nvSpPr>
+          <p:cNvPr id="203" name="Прямоугольник 202">
+            <a:extLst>
+              <a:ext uri="{FF2B5EF4-FFF2-40B4-BE49-F238E27FC236}">
+                <a16:creationId xmlns:a16="http://schemas.microsoft.com/office/drawing/2014/main" id="{AF793957-B76C-43EC-9B76-00309BBA6C74}"/>
+              </a:ext>
+            </a:extLst>
+          </p:cNvPr>
+          <p:cNvSpPr/>
+          <p:nvPr/>
+        </p:nvSpPr>
+        <p:spPr>
+          <a:xfrm>
+            <a:off x="15749001" y="5852447"/>
+            <a:ext cx="926325" cy="540000"/>
+          </a:xfrm>
+          <a:prstGeom prst="rect">
+            <a:avLst/>
+          </a:prstGeom>
+          <a:solidFill>
+            <a:srgbClr val="FF0000"/>
+          </a:solidFill>
+          <a:ln w="19050"/>
+        </p:spPr>
+        <p:style>
+          <a:lnRef idx="2">
+            <a:schemeClr val="accent1"/>
+          </a:lnRef>
+          <a:fillRef idx="1">
+            <a:schemeClr val="lt1"/>
+          </a:fillRef>
+          <a:effectRef idx="0">
+            <a:schemeClr val="accent1"/>
+          </a:effectRef>
+          <a:fontRef idx="minor">
+            <a:schemeClr val="dk1"/>
+          </a:fontRef>
+        </p:style>
+        <p:txBody>
+          <a:bodyPr lIns="124733" tIns="62367" rIns="124733" bIns="62367" rtlCol="0" anchor="ctr"/>
+          <a:lstStyle/>
+          <a:p>
+            <a:pPr algn="ctr"/>
+            <a:r>
+              <a:rPr lang="ru-RU" sz="700" dirty="0"/>
+              <a:t>Оказать поддержку альянсу Народного фронта</a:t>
+            </a:r>
+          </a:p>
+        </p:txBody>
+      </p:sp>
+      <p:cxnSp>
+        <p:nvCxnSpPr>
+          <p:cNvPr id="204" name="Соединительная линия уступом 620">
+            <a:extLst>
+              <a:ext uri="{FF2B5EF4-FFF2-40B4-BE49-F238E27FC236}">
+                <a16:creationId xmlns:a16="http://schemas.microsoft.com/office/drawing/2014/main" id="{CDBF821E-249F-43E7-8D63-C79A65A58854}"/>
+              </a:ext>
+            </a:extLst>
+          </p:cNvPr>
+          <p:cNvCxnSpPr>
+            <a:cxnSpLocks/>
+            <a:stCxn id="229" idx="2"/>
+            <a:endCxn id="203" idx="0"/>
+          </p:cNvCxnSpPr>
+          <p:nvPr/>
+        </p:nvCxnSpPr>
+        <p:spPr>
+          <a:xfrm rot="16200000" flipH="1">
+            <a:off x="15774550" y="5414832"/>
+            <a:ext cx="267397" cy="607831"/>
+          </a:xfrm>
+          <a:prstGeom prst="bentConnector3">
+            <a:avLst>
+              <a:gd name="adj1" fmla="val 50000"/>
+            </a:avLst>
+          </a:prstGeom>
+          <a:ln w="19050">
+            <a:tailEnd type="arrow"/>
+          </a:ln>
+        </p:spPr>
+        <p:style>
+          <a:lnRef idx="1">
+            <a:schemeClr val="accent1"/>
+          </a:lnRef>
+          <a:fillRef idx="0">
+            <a:schemeClr val="accent1"/>
+          </a:fillRef>
+          <a:effectRef idx="0">
+            <a:schemeClr val="accent1"/>
+          </a:effectRef>
+          <a:fontRef idx="minor">
+            <a:schemeClr val="tx1"/>
+          </a:fontRef>
+        </p:style>
+      </p:cxnSp>
+      <p:sp>
+        <p:nvSpPr>
+          <p:cNvPr id="207" name="Прямоугольник 206">
+            <a:extLst>
+              <a:ext uri="{FF2B5EF4-FFF2-40B4-BE49-F238E27FC236}">
+                <a16:creationId xmlns:a16="http://schemas.microsoft.com/office/drawing/2014/main" id="{5B03BA2E-7382-48A4-9DA3-E043F9F67F46}"/>
+              </a:ext>
+            </a:extLst>
+          </p:cNvPr>
+          <p:cNvSpPr/>
+          <p:nvPr/>
+        </p:nvSpPr>
+        <p:spPr>
+          <a:xfrm>
+            <a:off x="15749000" y="6659845"/>
+            <a:ext cx="926325" cy="540000"/>
+          </a:xfrm>
+          <a:prstGeom prst="rect">
+            <a:avLst/>
+          </a:prstGeom>
+          <a:solidFill>
+            <a:srgbClr val="FF0000"/>
+          </a:solidFill>
+          <a:ln w="19050"/>
+        </p:spPr>
+        <p:style>
+          <a:lnRef idx="2">
+            <a:schemeClr val="accent1"/>
+          </a:lnRef>
+          <a:fillRef idx="1">
+            <a:schemeClr val="lt1"/>
+          </a:fillRef>
+          <a:effectRef idx="0">
+            <a:schemeClr val="accent1"/>
+          </a:effectRef>
+          <a:fontRef idx="minor">
+            <a:schemeClr val="dk1"/>
+          </a:fontRef>
+        </p:style>
+        <p:txBody>
+          <a:bodyPr lIns="124733" tIns="62367" rIns="124733" bIns="62367" rtlCol="0" anchor="ctr"/>
+          <a:lstStyle/>
+          <a:p>
+            <a:pPr algn="ctr"/>
+            <a:r>
+              <a:rPr lang="ru-RU" sz="700" dirty="0"/>
+              <a:t>Нанести удар по Испанскому Марокко</a:t>
+            </a:r>
+          </a:p>
+        </p:txBody>
+      </p:sp>
+      <p:cxnSp>
+        <p:nvCxnSpPr>
+          <p:cNvPr id="208" name="Соединительная линия уступом 620">
+            <a:extLst>
+              <a:ext uri="{FF2B5EF4-FFF2-40B4-BE49-F238E27FC236}">
+                <a16:creationId xmlns:a16="http://schemas.microsoft.com/office/drawing/2014/main" id="{D2CA9DBC-2BFF-4366-AFF1-D3F844CBCC78}"/>
+              </a:ext>
+            </a:extLst>
+          </p:cNvPr>
+          <p:cNvCxnSpPr>
+            <a:cxnSpLocks/>
+            <a:stCxn id="203" idx="2"/>
+            <a:endCxn id="207" idx="0"/>
+          </p:cNvCxnSpPr>
+          <p:nvPr/>
+        </p:nvCxnSpPr>
+        <p:spPr>
+          <a:xfrm rot="5400000">
+            <a:off x="16078465" y="6526146"/>
+            <a:ext cx="267398" cy="1"/>
+          </a:xfrm>
+          <a:prstGeom prst="bentConnector3">
+            <a:avLst>
+              <a:gd name="adj1" fmla="val 50000"/>
+            </a:avLst>
+          </a:prstGeom>
+          <a:ln w="19050">
+            <a:tailEnd type="arrow"/>
+          </a:ln>
+        </p:spPr>
+        <p:style>
+          <a:lnRef idx="1">
+            <a:schemeClr val="accent1"/>
+          </a:lnRef>
+          <a:fillRef idx="0">
+            <a:schemeClr val="accent1"/>
+          </a:fillRef>
+          <a:effectRef idx="0">
+            <a:schemeClr val="accent1"/>
+          </a:effectRef>
+          <a:fontRef idx="minor">
+            <a:schemeClr val="tx1"/>
+          </a:fontRef>
+        </p:style>
+      </p:cxnSp>
+      <p:sp>
+        <p:nvSpPr>
+          <p:cNvPr id="215" name="Прямоугольник 214">
+            <a:extLst>
+              <a:ext uri="{FF2B5EF4-FFF2-40B4-BE49-F238E27FC236}">
+                <a16:creationId xmlns:a16="http://schemas.microsoft.com/office/drawing/2014/main" id="{51F9863C-20E0-4A0E-9B2D-06939B1023ED}"/>
+              </a:ext>
+            </a:extLst>
+          </p:cNvPr>
+          <p:cNvSpPr/>
+          <p:nvPr/>
+        </p:nvSpPr>
+        <p:spPr>
+          <a:xfrm>
+            <a:off x="12165822" y="5854963"/>
+            <a:ext cx="926325" cy="540000"/>
+          </a:xfrm>
+          <a:prstGeom prst="rect">
+            <a:avLst/>
+          </a:prstGeom>
+          <a:solidFill>
+            <a:srgbClr val="FF0000"/>
+          </a:solidFill>
+          <a:ln w="19050"/>
+        </p:spPr>
+        <p:style>
+          <a:lnRef idx="2">
+            <a:schemeClr val="accent1"/>
+          </a:lnRef>
+          <a:fillRef idx="1">
+            <a:schemeClr val="lt1"/>
+          </a:fillRef>
+          <a:effectRef idx="0">
+            <a:schemeClr val="accent1"/>
+          </a:effectRef>
+          <a:fontRef idx="minor">
+            <a:schemeClr val="dk1"/>
+          </a:fontRef>
+        </p:style>
+        <p:txBody>
+          <a:bodyPr lIns="124733" tIns="62367" rIns="124733" bIns="62367" rtlCol="0" anchor="ctr"/>
+          <a:lstStyle/>
+          <a:p>
+            <a:pPr algn="ctr"/>
+            <a:r>
+              <a:rPr lang="ru-RU" sz="700" dirty="0"/>
+              <a:t>Организация коммунальной ассамблеи</a:t>
+            </a:r>
+          </a:p>
+        </p:txBody>
+      </p:sp>
+      <p:sp>
+        <p:nvSpPr>
+          <p:cNvPr id="216" name="Прямоугольник 215">
+            <a:extLst>
+              <a:ext uri="{FF2B5EF4-FFF2-40B4-BE49-F238E27FC236}">
+                <a16:creationId xmlns:a16="http://schemas.microsoft.com/office/drawing/2014/main" id="{3C0D6112-C225-4972-BEC8-F100926161FC}"/>
+              </a:ext>
+            </a:extLst>
+          </p:cNvPr>
+          <p:cNvSpPr/>
+          <p:nvPr/>
+        </p:nvSpPr>
+        <p:spPr>
+          <a:xfrm>
+            <a:off x="13360214" y="6659844"/>
+            <a:ext cx="926325" cy="540000"/>
+          </a:xfrm>
+          <a:prstGeom prst="rect">
+            <a:avLst/>
+          </a:prstGeom>
+          <a:solidFill>
+            <a:srgbClr val="FF0000"/>
+          </a:solidFill>
+          <a:ln w="19050"/>
+        </p:spPr>
+        <p:style>
+          <a:lnRef idx="2">
+            <a:schemeClr val="accent1"/>
+          </a:lnRef>
+          <a:fillRef idx="1">
+            <a:schemeClr val="lt1"/>
+          </a:fillRef>
+          <a:effectRef idx="0">
+            <a:schemeClr val="accent1"/>
+          </a:effectRef>
+          <a:fontRef idx="minor">
+            <a:schemeClr val="dk1"/>
+          </a:fontRef>
+        </p:style>
+        <p:txBody>
+          <a:bodyPr lIns="124733" tIns="62367" rIns="124733" bIns="62367" rtlCol="0" anchor="ctr"/>
+          <a:lstStyle/>
+          <a:p>
+            <a:pPr algn="ctr"/>
+            <a:r>
+              <a:rPr lang="ru-RU" sz="700" dirty="0"/>
+              <a:t>Установка минимальных зарплат на заводах</a:t>
+            </a:r>
+          </a:p>
+        </p:txBody>
+      </p:sp>
+      <p:sp>
+        <p:nvSpPr>
+          <p:cNvPr id="219" name="Прямоугольник 218">
+            <a:extLst>
+              <a:ext uri="{FF2B5EF4-FFF2-40B4-BE49-F238E27FC236}">
+                <a16:creationId xmlns:a16="http://schemas.microsoft.com/office/drawing/2014/main" id="{F1F67AB4-5D6F-47D3-90A9-15EC729958DB}"/>
+              </a:ext>
+            </a:extLst>
+          </p:cNvPr>
+          <p:cNvSpPr/>
+          <p:nvPr/>
+        </p:nvSpPr>
+        <p:spPr>
+          <a:xfrm>
+            <a:off x="12165821" y="6657240"/>
+            <a:ext cx="926325" cy="540000"/>
+          </a:xfrm>
+          <a:prstGeom prst="rect">
+            <a:avLst/>
+          </a:prstGeom>
+          <a:solidFill>
+            <a:srgbClr val="FF0000"/>
+          </a:solidFill>
+          <a:ln w="19050"/>
+        </p:spPr>
+        <p:style>
+          <a:lnRef idx="2">
+            <a:schemeClr val="accent1"/>
+          </a:lnRef>
+          <a:fillRef idx="1">
+            <a:schemeClr val="lt1"/>
+          </a:fillRef>
+          <a:effectRef idx="0">
+            <a:schemeClr val="accent1"/>
+          </a:effectRef>
+          <a:fontRef idx="minor">
+            <a:schemeClr val="dk1"/>
+          </a:fontRef>
+        </p:style>
+        <p:txBody>
+          <a:bodyPr lIns="124733" tIns="62367" rIns="124733" bIns="62367" rtlCol="0" anchor="ctr"/>
+          <a:lstStyle/>
+          <a:p>
+            <a:pPr algn="ctr"/>
+            <a:r>
+              <a:rPr lang="ru-RU" sz="700" dirty="0"/>
+              <a:t>Аграрная реформа</a:t>
+            </a:r>
+          </a:p>
+        </p:txBody>
+      </p:sp>
+      <p:sp>
+        <p:nvSpPr>
+          <p:cNvPr id="220" name="Прямоугольник 219">
+            <a:extLst>
+              <a:ext uri="{FF2B5EF4-FFF2-40B4-BE49-F238E27FC236}">
+                <a16:creationId xmlns:a16="http://schemas.microsoft.com/office/drawing/2014/main" id="{6CCFB3F7-5D43-43AF-8632-E264B55AB257}"/>
+              </a:ext>
+            </a:extLst>
+          </p:cNvPr>
+          <p:cNvSpPr/>
+          <p:nvPr/>
+        </p:nvSpPr>
+        <p:spPr>
+          <a:xfrm>
+            <a:off x="12766565" y="7469757"/>
+            <a:ext cx="926325" cy="540000"/>
+          </a:xfrm>
+          <a:prstGeom prst="rect">
+            <a:avLst/>
+          </a:prstGeom>
+          <a:solidFill>
+            <a:srgbClr val="FF0000"/>
+          </a:solidFill>
+          <a:ln w="19050"/>
+        </p:spPr>
+        <p:style>
+          <a:lnRef idx="2">
+            <a:schemeClr val="accent1"/>
+          </a:lnRef>
+          <a:fillRef idx="1">
+            <a:schemeClr val="lt1"/>
+          </a:fillRef>
+          <a:effectRef idx="0">
+            <a:schemeClr val="accent1"/>
+          </a:effectRef>
+          <a:fontRef idx="minor">
+            <a:schemeClr val="dk1"/>
+          </a:fontRef>
+        </p:style>
+        <p:txBody>
+          <a:bodyPr lIns="124733" tIns="62367" rIns="124733" bIns="62367" rtlCol="0" anchor="ctr"/>
+          <a:lstStyle/>
+          <a:p>
+            <a:pPr algn="ctr"/>
+            <a:r>
+              <a:rPr lang="ru-RU" sz="700" dirty="0"/>
+              <a:t>Национализация тканевых и сахарных фабрик</a:t>
+            </a:r>
+          </a:p>
+        </p:txBody>
+      </p:sp>
+      <p:sp>
+        <p:nvSpPr>
+          <p:cNvPr id="221" name="Прямоугольник 220">
+            <a:extLst>
+              <a:ext uri="{FF2B5EF4-FFF2-40B4-BE49-F238E27FC236}">
+                <a16:creationId xmlns:a16="http://schemas.microsoft.com/office/drawing/2014/main" id="{2267C2D4-A1F2-44C3-A2B4-B9EB2D105F40}"/>
+              </a:ext>
+            </a:extLst>
+          </p:cNvPr>
+          <p:cNvSpPr/>
+          <p:nvPr/>
+        </p:nvSpPr>
+        <p:spPr>
+          <a:xfrm>
+            <a:off x="13953867" y="7467241"/>
+            <a:ext cx="926325" cy="540000"/>
+          </a:xfrm>
+          <a:prstGeom prst="rect">
+            <a:avLst/>
+          </a:prstGeom>
+          <a:solidFill>
+            <a:srgbClr val="FF0000"/>
+          </a:solidFill>
+          <a:ln w="19050"/>
+        </p:spPr>
+        <p:style>
+          <a:lnRef idx="2">
+            <a:schemeClr val="accent1"/>
+          </a:lnRef>
+          <a:fillRef idx="1">
+            <a:schemeClr val="lt1"/>
+          </a:fillRef>
+          <a:effectRef idx="0">
+            <a:schemeClr val="accent1"/>
+          </a:effectRef>
+          <a:fontRef idx="minor">
+            <a:schemeClr val="dk1"/>
+          </a:fontRef>
+        </p:style>
+        <p:txBody>
+          <a:bodyPr lIns="124733" tIns="62367" rIns="124733" bIns="62367" rtlCol="0" anchor="ctr"/>
+          <a:lstStyle/>
+          <a:p>
+            <a:pPr algn="ctr"/>
+            <a:r>
+              <a:rPr lang="ru-RU" sz="700" dirty="0"/>
+              <a:t>Национализация фосфатных кампаний</a:t>
+            </a:r>
+          </a:p>
+        </p:txBody>
+      </p:sp>
+      <p:cxnSp>
+        <p:nvCxnSpPr>
+          <p:cNvPr id="222" name="Соединительная линия уступом 620">
+            <a:extLst>
+              <a:ext uri="{FF2B5EF4-FFF2-40B4-BE49-F238E27FC236}">
+                <a16:creationId xmlns:a16="http://schemas.microsoft.com/office/drawing/2014/main" id="{912FD209-02E6-41E4-8354-F8280F73C209}"/>
+              </a:ext>
+            </a:extLst>
+          </p:cNvPr>
+          <p:cNvCxnSpPr>
+            <a:cxnSpLocks/>
+            <a:stCxn id="229" idx="2"/>
+            <a:endCxn id="202" idx="0"/>
+          </p:cNvCxnSpPr>
+          <p:nvPr/>
+        </p:nvCxnSpPr>
+        <p:spPr>
+          <a:xfrm rot="5400000">
+            <a:off x="15177354" y="5425467"/>
+            <a:ext cx="267397" cy="586562"/>
+          </a:xfrm>
+          <a:prstGeom prst="bentConnector3">
+            <a:avLst>
+              <a:gd name="adj1" fmla="val 50000"/>
+            </a:avLst>
+          </a:prstGeom>
+          <a:ln w="19050">
+            <a:prstDash val="dash"/>
+            <a:tailEnd type="arrow"/>
+          </a:ln>
+        </p:spPr>
+        <p:style>
+          <a:lnRef idx="1">
+            <a:schemeClr val="accent1"/>
+          </a:lnRef>
+          <a:fillRef idx="0">
+            <a:schemeClr val="accent1"/>
+          </a:fillRef>
+          <a:effectRef idx="0">
+            <a:schemeClr val="accent1"/>
+          </a:effectRef>
+          <a:fontRef idx="minor">
+            <a:schemeClr val="tx1"/>
+          </a:fontRef>
+        </p:style>
+      </p:cxnSp>
+      <p:cxnSp>
+        <p:nvCxnSpPr>
+          <p:cNvPr id="223" name="Соединительная линия уступом 620">
+            <a:extLst>
+              <a:ext uri="{FF2B5EF4-FFF2-40B4-BE49-F238E27FC236}">
+                <a16:creationId xmlns:a16="http://schemas.microsoft.com/office/drawing/2014/main" id="{B36028A2-E427-4D95-96AB-B8A709A01839}"/>
+              </a:ext>
+            </a:extLst>
+          </p:cNvPr>
+          <p:cNvCxnSpPr>
+            <a:cxnSpLocks/>
+            <a:stCxn id="231" idx="2"/>
+            <a:endCxn id="202" idx="0"/>
+          </p:cNvCxnSpPr>
+          <p:nvPr/>
+        </p:nvCxnSpPr>
+        <p:spPr>
+          <a:xfrm rot="16200000" flipH="1">
+            <a:off x="13396399" y="4231074"/>
+            <a:ext cx="267397" cy="2975347"/>
+          </a:xfrm>
+          <a:prstGeom prst="bentConnector3">
+            <a:avLst>
+              <a:gd name="adj1" fmla="val 50000"/>
+            </a:avLst>
+          </a:prstGeom>
+          <a:ln w="19050">
+            <a:prstDash val="dash"/>
+            <a:tailEnd type="arrow"/>
+          </a:ln>
+        </p:spPr>
+        <p:style>
+          <a:lnRef idx="1">
+            <a:schemeClr val="accent1"/>
+          </a:lnRef>
+          <a:fillRef idx="0">
+            <a:schemeClr val="accent1"/>
+          </a:fillRef>
+          <a:effectRef idx="0">
+            <a:schemeClr val="accent1"/>
+          </a:effectRef>
+          <a:fontRef idx="minor">
+            <a:schemeClr val="tx1"/>
+          </a:fontRef>
+        </p:style>
+      </p:cxnSp>
+      <p:cxnSp>
+        <p:nvCxnSpPr>
+          <p:cNvPr id="225" name="Соединительная линия уступом 620">
+            <a:extLst>
+              <a:ext uri="{FF2B5EF4-FFF2-40B4-BE49-F238E27FC236}">
+                <a16:creationId xmlns:a16="http://schemas.microsoft.com/office/drawing/2014/main" id="{3D98D337-D917-45D8-8BF8-14F56B503905}"/>
+              </a:ext>
+            </a:extLst>
+          </p:cNvPr>
+          <p:cNvCxnSpPr>
+            <a:cxnSpLocks/>
+            <a:stCxn id="231" idx="2"/>
+            <a:endCxn id="215" idx="0"/>
+          </p:cNvCxnSpPr>
+          <p:nvPr/>
+        </p:nvCxnSpPr>
+        <p:spPr>
+          <a:xfrm rot="16200000" flipH="1">
+            <a:off x="12200748" y="5426725"/>
+            <a:ext cx="269913" cy="586561"/>
+          </a:xfrm>
+          <a:prstGeom prst="bentConnector3">
+            <a:avLst>
+              <a:gd name="adj1" fmla="val 50000"/>
+            </a:avLst>
+          </a:prstGeom>
+          <a:ln w="19050">
+            <a:prstDash val="dash"/>
+            <a:tailEnd type="arrow"/>
+          </a:ln>
+        </p:spPr>
+        <p:style>
+          <a:lnRef idx="1">
+            <a:schemeClr val="accent1"/>
+          </a:lnRef>
+          <a:fillRef idx="0">
+            <a:schemeClr val="accent1"/>
+          </a:fillRef>
+          <a:effectRef idx="0">
+            <a:schemeClr val="accent1"/>
+          </a:effectRef>
+          <a:fontRef idx="minor">
+            <a:schemeClr val="tx1"/>
+          </a:fontRef>
+        </p:style>
+      </p:cxnSp>
+      <p:cxnSp>
+        <p:nvCxnSpPr>
+          <p:cNvPr id="228" name="Соединительная линия уступом 620">
+            <a:extLst>
+              <a:ext uri="{FF2B5EF4-FFF2-40B4-BE49-F238E27FC236}">
+                <a16:creationId xmlns:a16="http://schemas.microsoft.com/office/drawing/2014/main" id="{1A69F510-F0C4-4EB4-84C3-E59AE76B0C40}"/>
+              </a:ext>
+            </a:extLst>
+          </p:cNvPr>
+          <p:cNvCxnSpPr>
+            <a:cxnSpLocks/>
+            <a:stCxn id="229" idx="2"/>
+            <a:endCxn id="215" idx="0"/>
+          </p:cNvCxnSpPr>
+          <p:nvPr/>
+        </p:nvCxnSpPr>
+        <p:spPr>
+          <a:xfrm rot="5400000">
+            <a:off x="13981703" y="4232332"/>
+            <a:ext cx="269913" cy="2975348"/>
+          </a:xfrm>
+          <a:prstGeom prst="bentConnector3">
+            <a:avLst>
+              <a:gd name="adj1" fmla="val 50000"/>
+            </a:avLst>
+          </a:prstGeom>
+          <a:ln w="19050">
+            <a:prstDash val="dash"/>
+            <a:tailEnd type="arrow"/>
+          </a:ln>
+        </p:spPr>
+        <p:style>
+          <a:lnRef idx="1">
+            <a:schemeClr val="accent1"/>
+          </a:lnRef>
+          <a:fillRef idx="0">
+            <a:schemeClr val="accent1"/>
+          </a:fillRef>
+          <a:effectRef idx="0">
+            <a:schemeClr val="accent1"/>
+          </a:effectRef>
+          <a:fontRef idx="minor">
+            <a:schemeClr val="tx1"/>
+          </a:fontRef>
+        </p:style>
+      </p:cxnSp>
+      <p:cxnSp>
+        <p:nvCxnSpPr>
+          <p:cNvPr id="232" name="Соединительная линия уступом 620">
+            <a:extLst>
+              <a:ext uri="{FF2B5EF4-FFF2-40B4-BE49-F238E27FC236}">
+                <a16:creationId xmlns:a16="http://schemas.microsoft.com/office/drawing/2014/main" id="{B03A89F1-681A-483E-AFD6-C51FFC56F472}"/>
+              </a:ext>
+            </a:extLst>
+          </p:cNvPr>
+          <p:cNvCxnSpPr>
+            <a:cxnSpLocks/>
+            <a:stCxn id="215" idx="2"/>
+            <a:endCxn id="219" idx="0"/>
+          </p:cNvCxnSpPr>
+          <p:nvPr/>
+        </p:nvCxnSpPr>
+        <p:spPr>
+          <a:xfrm rot="5400000">
+            <a:off x="12497847" y="6526101"/>
+            <a:ext cx="262277" cy="1"/>
+          </a:xfrm>
+          <a:prstGeom prst="bentConnector3">
+            <a:avLst>
+              <a:gd name="adj1" fmla="val 50000"/>
+            </a:avLst>
+          </a:prstGeom>
+          <a:ln w="19050">
+            <a:tailEnd type="arrow"/>
+          </a:ln>
+        </p:spPr>
+        <p:style>
+          <a:lnRef idx="1">
+            <a:schemeClr val="accent1"/>
+          </a:lnRef>
+          <a:fillRef idx="0">
+            <a:schemeClr val="accent1"/>
+          </a:fillRef>
+          <a:effectRef idx="0">
+            <a:schemeClr val="accent1"/>
+          </a:effectRef>
+          <a:fontRef idx="minor">
+            <a:schemeClr val="tx1"/>
+          </a:fontRef>
+        </p:style>
+      </p:cxnSp>
+      <p:cxnSp>
+        <p:nvCxnSpPr>
+          <p:cNvPr id="238" name="Соединительная линия уступом 620">
+            <a:extLst>
+              <a:ext uri="{FF2B5EF4-FFF2-40B4-BE49-F238E27FC236}">
+                <a16:creationId xmlns:a16="http://schemas.microsoft.com/office/drawing/2014/main" id="{0ADACAE7-2BC4-427A-BD0A-7593F9AAF2D0}"/>
+              </a:ext>
+            </a:extLst>
+          </p:cNvPr>
+          <p:cNvCxnSpPr>
+            <a:cxnSpLocks/>
+            <a:stCxn id="202" idx="2"/>
+            <a:endCxn id="216" idx="0"/>
+          </p:cNvCxnSpPr>
+          <p:nvPr/>
+        </p:nvCxnSpPr>
+        <p:spPr>
+          <a:xfrm rot="5400000">
+            <a:off x="14286876" y="5928948"/>
+            <a:ext cx="267397" cy="1194394"/>
+          </a:xfrm>
+          <a:prstGeom prst="bentConnector3">
+            <a:avLst>
+              <a:gd name="adj1" fmla="val 50000"/>
+            </a:avLst>
+          </a:prstGeom>
+          <a:ln w="19050">
+            <a:tailEnd type="arrow"/>
+          </a:ln>
+        </p:spPr>
+        <p:style>
+          <a:lnRef idx="1">
+            <a:schemeClr val="accent1"/>
+          </a:lnRef>
+          <a:fillRef idx="0">
+            <a:schemeClr val="accent1"/>
+          </a:fillRef>
+          <a:effectRef idx="0">
+            <a:schemeClr val="accent1"/>
+          </a:effectRef>
+          <a:fontRef idx="minor">
+            <a:schemeClr val="tx1"/>
+          </a:fontRef>
+        </p:style>
+      </p:cxnSp>
+      <p:cxnSp>
+        <p:nvCxnSpPr>
+          <p:cNvPr id="240" name="Соединительная линия уступом 620">
+            <a:extLst>
+              <a:ext uri="{FF2B5EF4-FFF2-40B4-BE49-F238E27FC236}">
+                <a16:creationId xmlns:a16="http://schemas.microsoft.com/office/drawing/2014/main" id="{C102A62D-F57D-4F82-A049-D207C1479D24}"/>
+              </a:ext>
+            </a:extLst>
+          </p:cNvPr>
+          <p:cNvCxnSpPr>
+            <a:cxnSpLocks/>
+            <a:stCxn id="215" idx="2"/>
+            <a:endCxn id="216" idx="0"/>
+          </p:cNvCxnSpPr>
+          <p:nvPr/>
+        </p:nvCxnSpPr>
+        <p:spPr>
+          <a:xfrm rot="16200000" flipH="1">
+            <a:off x="13093741" y="5930207"/>
+            <a:ext cx="264881" cy="1194392"/>
+          </a:xfrm>
+          <a:prstGeom prst="bentConnector3">
+            <a:avLst>
+              <a:gd name="adj1" fmla="val 50000"/>
+            </a:avLst>
+          </a:prstGeom>
+          <a:ln w="19050">
+            <a:tailEnd type="arrow"/>
+          </a:ln>
+        </p:spPr>
+        <p:style>
+          <a:lnRef idx="1">
+            <a:schemeClr val="accent1"/>
+          </a:lnRef>
+          <a:fillRef idx="0">
+            <a:schemeClr val="accent1"/>
+          </a:fillRef>
+          <a:effectRef idx="0">
+            <a:schemeClr val="accent1"/>
+          </a:effectRef>
+          <a:fontRef idx="minor">
+            <a:schemeClr val="tx1"/>
+          </a:fontRef>
+        </p:style>
+      </p:cxnSp>
+      <p:cxnSp>
+        <p:nvCxnSpPr>
+          <p:cNvPr id="243" name="Соединительная линия уступом 620">
+            <a:extLst>
+              <a:ext uri="{FF2B5EF4-FFF2-40B4-BE49-F238E27FC236}">
+                <a16:creationId xmlns:a16="http://schemas.microsoft.com/office/drawing/2014/main" id="{D1218FC0-8438-4146-8E3E-536B2DE9E441}"/>
+              </a:ext>
+            </a:extLst>
+          </p:cNvPr>
+          <p:cNvCxnSpPr>
+            <a:cxnSpLocks/>
+            <a:stCxn id="216" idx="2"/>
+            <a:endCxn id="221" idx="0"/>
+          </p:cNvCxnSpPr>
+          <p:nvPr/>
+        </p:nvCxnSpPr>
+        <p:spPr>
+          <a:xfrm rot="16200000" flipH="1">
+            <a:off x="13986505" y="7036715"/>
+            <a:ext cx="267397" cy="593653"/>
+          </a:xfrm>
+          <a:prstGeom prst="bentConnector3">
+            <a:avLst>
+              <a:gd name="adj1" fmla="val 50000"/>
+            </a:avLst>
+          </a:prstGeom>
+          <a:ln w="19050">
+            <a:tailEnd type="arrow"/>
+          </a:ln>
+        </p:spPr>
+        <p:style>
+          <a:lnRef idx="1">
+            <a:schemeClr val="accent1"/>
+          </a:lnRef>
+          <a:fillRef idx="0">
+            <a:schemeClr val="accent1"/>
+          </a:fillRef>
+          <a:effectRef idx="0">
+            <a:schemeClr val="accent1"/>
+          </a:effectRef>
+          <a:fontRef idx="minor">
+            <a:schemeClr val="tx1"/>
+          </a:fontRef>
+        </p:style>
+      </p:cxnSp>
+      <p:cxnSp>
+        <p:nvCxnSpPr>
+          <p:cNvPr id="246" name="Соединительная линия уступом 620">
+            <a:extLst>
+              <a:ext uri="{FF2B5EF4-FFF2-40B4-BE49-F238E27FC236}">
+                <a16:creationId xmlns:a16="http://schemas.microsoft.com/office/drawing/2014/main" id="{00A13E01-AD5E-4E3A-8064-0DCCEA40624C}"/>
+              </a:ext>
+            </a:extLst>
+          </p:cNvPr>
+          <p:cNvCxnSpPr>
+            <a:cxnSpLocks/>
+            <a:stCxn id="216" idx="2"/>
+            <a:endCxn id="220" idx="0"/>
+          </p:cNvCxnSpPr>
+          <p:nvPr/>
+        </p:nvCxnSpPr>
+        <p:spPr>
+          <a:xfrm rot="5400000">
+            <a:off x="13391597" y="7037976"/>
+            <a:ext cx="269913" cy="593649"/>
+          </a:xfrm>
+          <a:prstGeom prst="bentConnector3">
+            <a:avLst>
+              <a:gd name="adj1" fmla="val 50000"/>
+            </a:avLst>
+          </a:prstGeom>
+          <a:ln w="19050">
+            <a:tailEnd type="arrow"/>
+          </a:ln>
+        </p:spPr>
+        <p:style>
+          <a:lnRef idx="1">
+            <a:schemeClr val="accent1"/>
+          </a:lnRef>
+          <a:fillRef idx="0">
+            <a:schemeClr val="accent1"/>
+          </a:fillRef>
+          <a:effectRef idx="0">
+            <a:schemeClr val="accent1"/>
+          </a:effectRef>
+          <a:fontRef idx="minor">
+            <a:schemeClr val="tx1"/>
+          </a:fontRef>
+        </p:style>
+      </p:cxnSp>
+      <p:sp>
+        <p:nvSpPr>
+          <p:cNvPr id="250" name="Прямоугольник 249">
+            <a:extLst>
+              <a:ext uri="{FF2B5EF4-FFF2-40B4-BE49-F238E27FC236}">
+                <a16:creationId xmlns:a16="http://schemas.microsoft.com/office/drawing/2014/main" id="{6E361355-2C93-435B-B51A-06A915035B36}"/>
+              </a:ext>
+            </a:extLst>
+          </p:cNvPr>
+          <p:cNvSpPr/>
+          <p:nvPr/>
+        </p:nvSpPr>
+        <p:spPr>
+          <a:xfrm>
+            <a:off x="11579261" y="7457387"/>
+            <a:ext cx="926325" cy="540000"/>
+          </a:xfrm>
+          <a:prstGeom prst="rect">
+            <a:avLst/>
+          </a:prstGeom>
+          <a:solidFill>
+            <a:srgbClr val="FF0000"/>
+          </a:solidFill>
+          <a:ln w="19050"/>
+        </p:spPr>
+        <p:style>
+          <a:lnRef idx="2">
+            <a:schemeClr val="accent1"/>
+          </a:lnRef>
+          <a:fillRef idx="1">
+            <a:schemeClr val="lt1"/>
+          </a:fillRef>
+          <a:effectRef idx="0">
+            <a:schemeClr val="accent1"/>
+          </a:effectRef>
+          <a:fontRef idx="minor">
+            <a:schemeClr val="dk1"/>
+          </a:fontRef>
+        </p:style>
+        <p:txBody>
+          <a:bodyPr lIns="124733" tIns="62367" rIns="124733" bIns="62367" rtlCol="0" anchor="ctr"/>
+          <a:lstStyle/>
+          <a:p>
+            <a:pPr algn="ctr"/>
+            <a:r>
+              <a:rPr lang="ru-RU" sz="700" dirty="0"/>
+              <a:t>Увеличить кредиты феллахам</a:t>
+            </a:r>
+          </a:p>
+        </p:txBody>
+      </p:sp>
+      <p:cxnSp>
+        <p:nvCxnSpPr>
+          <p:cNvPr id="251" name="Соединительная линия уступом 620">
+            <a:extLst>
+              <a:ext uri="{FF2B5EF4-FFF2-40B4-BE49-F238E27FC236}">
+                <a16:creationId xmlns:a16="http://schemas.microsoft.com/office/drawing/2014/main" id="{F1CF458C-9D44-4FE9-9658-5EEA0EC4F89C}"/>
+              </a:ext>
+            </a:extLst>
+          </p:cNvPr>
+          <p:cNvCxnSpPr>
+            <a:cxnSpLocks/>
+            <a:stCxn id="219" idx="2"/>
+            <a:endCxn id="250" idx="0"/>
+          </p:cNvCxnSpPr>
+          <p:nvPr/>
+        </p:nvCxnSpPr>
+        <p:spPr>
+          <a:xfrm rot="5400000">
+            <a:off x="12205631" y="7034033"/>
+            <a:ext cx="260147" cy="586560"/>
+          </a:xfrm>
+          <a:prstGeom prst="bentConnector3">
+            <a:avLst>
+              <a:gd name="adj1" fmla="val 50000"/>
+            </a:avLst>
+          </a:prstGeom>
+          <a:ln w="19050">
+            <a:tailEnd type="arrow"/>
+          </a:ln>
+        </p:spPr>
+        <p:style>
+          <a:lnRef idx="1">
+            <a:schemeClr val="accent1"/>
+          </a:lnRef>
+          <a:fillRef idx="0">
+            <a:schemeClr val="accent1"/>
+          </a:fillRef>
+          <a:effectRef idx="0">
+            <a:schemeClr val="accent1"/>
+          </a:effectRef>
+          <a:fontRef idx="minor">
+            <a:schemeClr val="tx1"/>
+          </a:fontRef>
+        </p:style>
+      </p:cxnSp>
+      <p:sp>
+        <p:nvSpPr>
+          <p:cNvPr id="253" name="Прямоугольник 252">
+            <a:extLst>
+              <a:ext uri="{FF2B5EF4-FFF2-40B4-BE49-F238E27FC236}">
+                <a16:creationId xmlns:a16="http://schemas.microsoft.com/office/drawing/2014/main" id="{D02BCC77-E162-4C51-9B3A-5055FE880E72}"/>
+              </a:ext>
+            </a:extLst>
+          </p:cNvPr>
+          <p:cNvSpPr/>
+          <p:nvPr/>
+        </p:nvSpPr>
+        <p:spPr>
+          <a:xfrm>
+            <a:off x="14554606" y="6657240"/>
+            <a:ext cx="926325" cy="540000"/>
+          </a:xfrm>
+          <a:prstGeom prst="rect">
+            <a:avLst/>
+          </a:prstGeom>
+          <a:solidFill>
+            <a:srgbClr val="FF0000"/>
+          </a:solidFill>
+          <a:ln w="19050"/>
+        </p:spPr>
+        <p:style>
+          <a:lnRef idx="2">
+            <a:schemeClr val="accent1"/>
+          </a:lnRef>
+          <a:fillRef idx="1">
+            <a:schemeClr val="lt1"/>
+          </a:fillRef>
+          <a:effectRef idx="0">
+            <a:schemeClr val="accent1"/>
+          </a:effectRef>
+          <a:fontRef idx="minor">
+            <a:schemeClr val="dk1"/>
+          </a:fontRef>
+        </p:style>
+        <p:txBody>
+          <a:bodyPr lIns="124733" tIns="62367" rIns="124733" bIns="62367" rtlCol="0" anchor="ctr"/>
+          <a:lstStyle/>
+          <a:p>
+            <a:pPr algn="ctr"/>
+            <a:r>
+              <a:rPr lang="ru-RU" sz="700" dirty="0"/>
+              <a:t>Организовать социальную защиту</a:t>
+            </a:r>
+          </a:p>
+        </p:txBody>
+      </p:sp>
+      <p:cxnSp>
+        <p:nvCxnSpPr>
+          <p:cNvPr id="254" name="Соединительная линия уступом 620">
+            <a:extLst>
+              <a:ext uri="{FF2B5EF4-FFF2-40B4-BE49-F238E27FC236}">
+                <a16:creationId xmlns:a16="http://schemas.microsoft.com/office/drawing/2014/main" id="{1345971B-2793-47F1-8AC3-C60214E9857E}"/>
+              </a:ext>
+            </a:extLst>
+          </p:cNvPr>
+          <p:cNvCxnSpPr>
+            <a:cxnSpLocks/>
+            <a:stCxn id="202" idx="2"/>
+            <a:endCxn id="253" idx="0"/>
+          </p:cNvCxnSpPr>
+          <p:nvPr/>
+        </p:nvCxnSpPr>
+        <p:spPr>
+          <a:xfrm rot="5400000">
+            <a:off x="14885374" y="6524842"/>
+            <a:ext cx="264793" cy="2"/>
+          </a:xfrm>
+          <a:prstGeom prst="bentConnector3">
+            <a:avLst>
+              <a:gd name="adj1" fmla="val 50000"/>
+            </a:avLst>
+          </a:prstGeom>
+          <a:ln w="19050">
+            <a:tailEnd type="arrow"/>
+          </a:ln>
+        </p:spPr>
+        <p:style>
+          <a:lnRef idx="1">
+            <a:schemeClr val="accent1"/>
+          </a:lnRef>
+          <a:fillRef idx="0">
+            <a:schemeClr val="accent1"/>
+          </a:fillRef>
+          <a:effectRef idx="0">
+            <a:schemeClr val="accent1"/>
+          </a:effectRef>
+          <a:fontRef idx="minor">
+            <a:schemeClr val="tx1"/>
+          </a:fontRef>
+        </p:style>
+      </p:cxnSp>
+      <p:sp>
+        <p:nvSpPr>
+          <p:cNvPr id="257" name="Прямоугольник 256">
+            <a:extLst>
+              <a:ext uri="{FF2B5EF4-FFF2-40B4-BE49-F238E27FC236}">
+                <a16:creationId xmlns:a16="http://schemas.microsoft.com/office/drawing/2014/main" id="{9C8DBF37-84FD-4A37-AA9F-B532B66BAEA5}"/>
+              </a:ext>
+            </a:extLst>
+          </p:cNvPr>
+          <p:cNvSpPr/>
+          <p:nvPr/>
+        </p:nvSpPr>
+        <p:spPr>
+          <a:xfrm>
+            <a:off x="15141170" y="7457387"/>
+            <a:ext cx="926325" cy="540000"/>
+          </a:xfrm>
+          <a:prstGeom prst="rect">
+            <a:avLst/>
+          </a:prstGeom>
+          <a:solidFill>
+            <a:srgbClr val="FF0000"/>
+          </a:solidFill>
+          <a:ln w="19050"/>
+        </p:spPr>
+        <p:style>
+          <a:lnRef idx="2">
+            <a:schemeClr val="accent1"/>
+          </a:lnRef>
+          <a:fillRef idx="1">
+            <a:schemeClr val="lt1"/>
+          </a:fillRef>
+          <a:effectRef idx="0">
+            <a:schemeClr val="accent1"/>
+          </a:effectRef>
+          <a:fontRef idx="minor">
+            <a:schemeClr val="dk1"/>
+          </a:fontRef>
+        </p:style>
+        <p:txBody>
+          <a:bodyPr lIns="124733" tIns="62367" rIns="124733" bIns="62367" rtlCol="0" anchor="ctr"/>
+          <a:lstStyle/>
+          <a:p>
+            <a:pPr algn="ctr"/>
+            <a:r>
+              <a:rPr lang="ru-RU" sz="700" dirty="0"/>
+              <a:t>Открыть школы для феллахов</a:t>
+            </a:r>
+          </a:p>
+        </p:txBody>
+      </p:sp>
+      <p:cxnSp>
+        <p:nvCxnSpPr>
+          <p:cNvPr id="260" name="Соединительная линия уступом 620">
+            <a:extLst>
+              <a:ext uri="{FF2B5EF4-FFF2-40B4-BE49-F238E27FC236}">
+                <a16:creationId xmlns:a16="http://schemas.microsoft.com/office/drawing/2014/main" id="{2B9B7DB9-C3AC-4033-92B0-FDA2EF69BE71}"/>
+              </a:ext>
+            </a:extLst>
+          </p:cNvPr>
+          <p:cNvCxnSpPr>
+            <a:cxnSpLocks/>
+            <a:stCxn id="253" idx="2"/>
+            <a:endCxn id="257" idx="0"/>
+          </p:cNvCxnSpPr>
+          <p:nvPr/>
+        </p:nvCxnSpPr>
+        <p:spPr>
+          <a:xfrm rot="16200000" flipH="1">
+            <a:off x="15180978" y="7034031"/>
+            <a:ext cx="260147" cy="586564"/>
+          </a:xfrm>
+          <a:prstGeom prst="bentConnector3">
+            <a:avLst>
+              <a:gd name="adj1" fmla="val 50000"/>
+            </a:avLst>
+          </a:prstGeom>
+          <a:ln w="19050">
+            <a:tailEnd type="arrow"/>
+          </a:ln>
+        </p:spPr>
+        <p:style>
+          <a:lnRef idx="1">
+            <a:schemeClr val="accent1"/>
+          </a:lnRef>
+          <a:fillRef idx="0">
+            <a:schemeClr val="accent1"/>
+          </a:fillRef>
+          <a:effectRef idx="0">
+            <a:schemeClr val="accent1"/>
+          </a:effectRef>
+          <a:fontRef idx="minor">
+            <a:schemeClr val="tx1"/>
+          </a:fontRef>
+        </p:style>
+      </p:cxnSp>
+      <p:sp>
+        <p:nvSpPr>
+          <p:cNvPr id="261" name="Прямоугольник 260">
+            <a:extLst>
+              <a:ext uri="{FF2B5EF4-FFF2-40B4-BE49-F238E27FC236}">
+                <a16:creationId xmlns:a16="http://schemas.microsoft.com/office/drawing/2014/main" id="{E44D532E-23E4-4EB8-A246-095F67AB1A45}"/>
+              </a:ext>
+            </a:extLst>
+          </p:cNvPr>
+          <p:cNvSpPr/>
+          <p:nvPr/>
+        </p:nvSpPr>
+        <p:spPr>
+          <a:xfrm>
+            <a:off x="13360213" y="8274637"/>
+            <a:ext cx="926325" cy="540000"/>
+          </a:xfrm>
+          <a:prstGeom prst="rect">
+            <a:avLst/>
+          </a:prstGeom>
+          <a:solidFill>
+            <a:srgbClr val="FF0000"/>
+          </a:solidFill>
+          <a:ln w="19050"/>
+        </p:spPr>
+        <p:style>
+          <a:lnRef idx="2">
+            <a:schemeClr val="accent1"/>
+          </a:lnRef>
+          <a:fillRef idx="1">
+            <a:schemeClr val="lt1"/>
+          </a:fillRef>
+          <a:effectRef idx="0">
+            <a:schemeClr val="accent1"/>
+          </a:effectRef>
+          <a:fontRef idx="minor">
+            <a:schemeClr val="dk1"/>
+          </a:fontRef>
+        </p:style>
+        <p:txBody>
+          <a:bodyPr lIns="124733" tIns="62367" rIns="124733" bIns="62367" rtlCol="0" anchor="ctr"/>
+          <a:lstStyle/>
+          <a:p>
+            <a:pPr algn="ctr"/>
+            <a:r>
+              <a:rPr lang="ru-RU" sz="700" dirty="0"/>
+              <a:t>Ввести плановую экономику</a:t>
+            </a:r>
+          </a:p>
+        </p:txBody>
+      </p:sp>
+      <p:cxnSp>
+        <p:nvCxnSpPr>
+          <p:cNvPr id="262" name="Соединительная линия уступом 620">
+            <a:extLst>
+              <a:ext uri="{FF2B5EF4-FFF2-40B4-BE49-F238E27FC236}">
+                <a16:creationId xmlns:a16="http://schemas.microsoft.com/office/drawing/2014/main" id="{964B46D5-CE1E-4FA0-9D71-6D3884088506}"/>
+              </a:ext>
+            </a:extLst>
+          </p:cNvPr>
+          <p:cNvCxnSpPr>
+            <a:cxnSpLocks/>
+            <a:stCxn id="216" idx="2"/>
+            <a:endCxn id="261" idx="0"/>
+          </p:cNvCxnSpPr>
+          <p:nvPr/>
+        </p:nvCxnSpPr>
+        <p:spPr>
+          <a:xfrm rot="5400000">
+            <a:off x="13285981" y="7737240"/>
+            <a:ext cx="1074793" cy="1"/>
+          </a:xfrm>
+          <a:prstGeom prst="bentConnector3">
+            <a:avLst>
+              <a:gd name="adj1" fmla="val 50000"/>
+            </a:avLst>
+          </a:prstGeom>
+          <a:ln w="19050">
+            <a:tailEnd type="arrow"/>
+          </a:ln>
+        </p:spPr>
+        <p:style>
+          <a:lnRef idx="1">
+            <a:schemeClr val="accent1"/>
+          </a:lnRef>
+          <a:fillRef idx="0">
+            <a:schemeClr val="accent1"/>
+          </a:fillRef>
+          <a:effectRef idx="0">
+            <a:schemeClr val="accent1"/>
+          </a:effectRef>
+          <a:fontRef idx="minor">
+            <a:schemeClr val="tx1"/>
+          </a:fontRef>
+        </p:style>
+      </p:cxnSp>
+      <p:sp>
+        <p:nvSpPr>
+          <p:cNvPr id="270" name="Прямоугольник 269">
+            <a:extLst>
+              <a:ext uri="{FF2B5EF4-FFF2-40B4-BE49-F238E27FC236}">
+                <a16:creationId xmlns:a16="http://schemas.microsoft.com/office/drawing/2014/main" id="{4D251A9D-8A1C-4835-A529-5CFFA224CEFA}"/>
+              </a:ext>
+            </a:extLst>
+          </p:cNvPr>
+          <p:cNvSpPr/>
+          <p:nvPr/>
+        </p:nvSpPr>
+        <p:spPr>
+          <a:xfrm>
+            <a:off x="12164785" y="8269517"/>
+            <a:ext cx="926325" cy="540000"/>
+          </a:xfrm>
+          <a:prstGeom prst="rect">
+            <a:avLst/>
+          </a:prstGeom>
+          <a:solidFill>
+            <a:srgbClr val="FF0000"/>
+          </a:solidFill>
+          <a:ln w="19050"/>
+        </p:spPr>
+        <p:style>
+          <a:lnRef idx="2">
+            <a:schemeClr val="accent1"/>
+          </a:lnRef>
+          <a:fillRef idx="1">
+            <a:schemeClr val="lt1"/>
+          </a:fillRef>
+          <a:effectRef idx="0">
+            <a:schemeClr val="accent1"/>
+          </a:effectRef>
+          <a:fontRef idx="minor">
+            <a:schemeClr val="dk1"/>
+          </a:fontRef>
+        </p:style>
+        <p:txBody>
+          <a:bodyPr lIns="124733" tIns="62367" rIns="124733" bIns="62367" rtlCol="0" anchor="ctr"/>
+          <a:lstStyle/>
+          <a:p>
+            <a:pPr algn="ctr"/>
+            <a:r>
+              <a:rPr lang="ru-RU" sz="700" dirty="0"/>
+              <a:t>Коллективизация</a:t>
+            </a:r>
+          </a:p>
+        </p:txBody>
+      </p:sp>
+      <p:cxnSp>
+        <p:nvCxnSpPr>
+          <p:cNvPr id="271" name="Соединительная линия уступом 620">
+            <a:extLst>
+              <a:ext uri="{FF2B5EF4-FFF2-40B4-BE49-F238E27FC236}">
+                <a16:creationId xmlns:a16="http://schemas.microsoft.com/office/drawing/2014/main" id="{F637BBA0-9DDF-44D9-9BF3-FD42FF01036C}"/>
+              </a:ext>
+            </a:extLst>
+          </p:cNvPr>
+          <p:cNvCxnSpPr>
+            <a:cxnSpLocks/>
+            <a:stCxn id="219" idx="2"/>
+            <a:endCxn id="270" idx="0"/>
+          </p:cNvCxnSpPr>
+          <p:nvPr/>
+        </p:nvCxnSpPr>
+        <p:spPr>
+          <a:xfrm rot="5400000">
+            <a:off x="12092328" y="7732860"/>
+            <a:ext cx="1072277" cy="1036"/>
+          </a:xfrm>
+          <a:prstGeom prst="bentConnector3">
+            <a:avLst>
+              <a:gd name="adj1" fmla="val 50000"/>
+            </a:avLst>
+          </a:prstGeom>
+          <a:ln w="19050">
+            <a:tailEnd type="arrow"/>
+          </a:ln>
+        </p:spPr>
+        <p:style>
+          <a:lnRef idx="1">
+            <a:schemeClr val="accent1"/>
+          </a:lnRef>
+          <a:fillRef idx="0">
+            <a:schemeClr val="accent1"/>
+          </a:fillRef>
+          <a:effectRef idx="0">
+            <a:schemeClr val="accent1"/>
+          </a:effectRef>
+          <a:fontRef idx="minor">
+            <a:schemeClr val="tx1"/>
+          </a:fontRef>
+        </p:style>
+      </p:cxnSp>
+      <p:sp>
+        <p:nvSpPr>
+          <p:cNvPr id="274" name="Прямоугольник 273">
+            <a:extLst>
+              <a:ext uri="{FF2B5EF4-FFF2-40B4-BE49-F238E27FC236}">
+                <a16:creationId xmlns:a16="http://schemas.microsoft.com/office/drawing/2014/main" id="{EDCC40A8-AC99-442F-B0C1-B8F075BA3BBA}"/>
+              </a:ext>
+            </a:extLst>
+          </p:cNvPr>
+          <p:cNvSpPr/>
+          <p:nvPr/>
+        </p:nvSpPr>
+        <p:spPr>
+          <a:xfrm>
+            <a:off x="14554605" y="8277242"/>
+            <a:ext cx="926325" cy="540000"/>
+          </a:xfrm>
+          <a:prstGeom prst="rect">
+            <a:avLst/>
+          </a:prstGeom>
+          <a:solidFill>
+            <a:srgbClr val="FF0000"/>
+          </a:solidFill>
+          <a:ln w="19050"/>
+        </p:spPr>
+        <p:style>
+          <a:lnRef idx="2">
+            <a:schemeClr val="accent1"/>
+          </a:lnRef>
+          <a:fillRef idx="1">
+            <a:schemeClr val="lt1"/>
+          </a:fillRef>
+          <a:effectRef idx="0">
+            <a:schemeClr val="accent1"/>
+          </a:effectRef>
+          <a:fontRef idx="minor">
+            <a:schemeClr val="dk1"/>
+          </a:fontRef>
+        </p:style>
+        <p:txBody>
+          <a:bodyPr lIns="124733" tIns="62367" rIns="124733" bIns="62367" rtlCol="0" anchor="ctr"/>
+          <a:lstStyle/>
+          <a:p>
+            <a:pPr algn="ctr"/>
+            <a:r>
+              <a:rPr lang="ru-RU" sz="700" dirty="0"/>
+              <a:t>Реформировать армию по «современному» образцу</a:t>
+            </a:r>
+          </a:p>
+        </p:txBody>
+      </p:sp>
+      <p:cxnSp>
+        <p:nvCxnSpPr>
+          <p:cNvPr id="278" name="Соединительная линия уступом 620">
+            <a:extLst>
+              <a:ext uri="{FF2B5EF4-FFF2-40B4-BE49-F238E27FC236}">
+                <a16:creationId xmlns:a16="http://schemas.microsoft.com/office/drawing/2014/main" id="{75ED8A32-EBF6-4119-B63C-6489D7C5099E}"/>
+              </a:ext>
+            </a:extLst>
+          </p:cNvPr>
+          <p:cNvCxnSpPr>
+            <a:cxnSpLocks/>
+            <a:stCxn id="253" idx="2"/>
+            <a:endCxn id="274" idx="0"/>
+          </p:cNvCxnSpPr>
+          <p:nvPr/>
+        </p:nvCxnSpPr>
+        <p:spPr>
+          <a:xfrm rot="5400000">
+            <a:off x="14477768" y="7737241"/>
+            <a:ext cx="1080002" cy="1"/>
+          </a:xfrm>
+          <a:prstGeom prst="bentConnector3">
+            <a:avLst>
+              <a:gd name="adj1" fmla="val 50000"/>
+            </a:avLst>
+          </a:prstGeom>
+          <a:ln w="19050">
+            <a:tailEnd type="arrow"/>
+          </a:ln>
+        </p:spPr>
+        <p:style>
+          <a:lnRef idx="1">
+            <a:schemeClr val="accent1"/>
+          </a:lnRef>
+          <a:fillRef idx="0">
+            <a:schemeClr val="accent1"/>
+          </a:fillRef>
+          <a:effectRef idx="0">
+            <a:schemeClr val="accent1"/>
+          </a:effectRef>
+          <a:fontRef idx="minor">
+            <a:schemeClr val="tx1"/>
+          </a:fontRef>
+        </p:style>
+      </p:cxnSp>
+      <p:sp>
+        <p:nvSpPr>
+          <p:cNvPr id="280" name="Прямоугольник 279">
+            <a:extLst>
+              <a:ext uri="{FF2B5EF4-FFF2-40B4-BE49-F238E27FC236}">
+                <a16:creationId xmlns:a16="http://schemas.microsoft.com/office/drawing/2014/main" id="{B10AA670-8579-4DAF-8ADE-4CA098BEB21A}"/>
+              </a:ext>
+            </a:extLst>
+          </p:cNvPr>
+          <p:cNvSpPr/>
+          <p:nvPr/>
+        </p:nvSpPr>
+        <p:spPr>
+          <a:xfrm>
+            <a:off x="16962479" y="6652886"/>
+            <a:ext cx="926325" cy="540000"/>
+          </a:xfrm>
+          <a:prstGeom prst="rect">
+            <a:avLst/>
+          </a:prstGeom>
+          <a:solidFill>
+            <a:srgbClr val="FF0000"/>
+          </a:solidFill>
+          <a:ln w="19050"/>
+        </p:spPr>
+        <p:style>
+          <a:lnRef idx="2">
+            <a:schemeClr val="accent1"/>
+          </a:lnRef>
+          <a:fillRef idx="1">
+            <a:schemeClr val="lt1"/>
+          </a:fillRef>
+          <a:effectRef idx="0">
+            <a:schemeClr val="accent1"/>
+          </a:effectRef>
+          <a:fontRef idx="minor">
+            <a:schemeClr val="dk1"/>
+          </a:fontRef>
+        </p:style>
+        <p:txBody>
+          <a:bodyPr lIns="124733" tIns="62367" rIns="124733" bIns="62367" rtlCol="0" anchor="ctr"/>
+          <a:lstStyle/>
+          <a:p>
+            <a:pPr algn="ctr"/>
+            <a:r>
+              <a:rPr lang="ru-RU" sz="700" dirty="0"/>
+              <a:t>Поддержка в Европе</a:t>
+            </a:r>
+          </a:p>
+        </p:txBody>
+      </p:sp>
+      <p:cxnSp>
+        <p:nvCxnSpPr>
+          <p:cNvPr id="281" name="Соединительная линия уступом 620">
+            <a:extLst>
+              <a:ext uri="{FF2B5EF4-FFF2-40B4-BE49-F238E27FC236}">
+                <a16:creationId xmlns:a16="http://schemas.microsoft.com/office/drawing/2014/main" id="{C7BAECC2-8CE9-42E6-818F-3DCFB0BC736B}"/>
+              </a:ext>
+            </a:extLst>
+          </p:cNvPr>
+          <p:cNvCxnSpPr>
+            <a:cxnSpLocks/>
+            <a:stCxn id="203" idx="2"/>
+            <a:endCxn id="280" idx="0"/>
+          </p:cNvCxnSpPr>
+          <p:nvPr/>
+        </p:nvCxnSpPr>
+        <p:spPr>
+          <a:xfrm rot="16200000" flipH="1">
+            <a:off x="16688684" y="5915927"/>
+            <a:ext cx="260439" cy="1213478"/>
+          </a:xfrm>
+          <a:prstGeom prst="bentConnector3">
+            <a:avLst>
+              <a:gd name="adj1" fmla="val 50000"/>
+            </a:avLst>
+          </a:prstGeom>
+          <a:ln w="19050">
+            <a:tailEnd type="arrow"/>
+          </a:ln>
+        </p:spPr>
+        <p:style>
+          <a:lnRef idx="1">
+            <a:schemeClr val="accent1"/>
+          </a:lnRef>
+          <a:fillRef idx="0">
+            <a:schemeClr val="accent1"/>
+          </a:fillRef>
+          <a:effectRef idx="0">
+            <a:schemeClr val="accent1"/>
+          </a:effectRef>
+          <a:fontRef idx="minor">
+            <a:schemeClr val="tx1"/>
+          </a:fontRef>
+        </p:style>
+      </p:cxnSp>
+      <p:sp>
+        <p:nvSpPr>
+          <p:cNvPr id="289" name="Прямоугольник 288">
+            <a:extLst>
+              <a:ext uri="{FF2B5EF4-FFF2-40B4-BE49-F238E27FC236}">
+                <a16:creationId xmlns:a16="http://schemas.microsoft.com/office/drawing/2014/main" id="{3DE459D3-85E5-46CD-847C-3FDFF48BAE60}"/>
+              </a:ext>
+            </a:extLst>
+          </p:cNvPr>
+          <p:cNvSpPr/>
+          <p:nvPr/>
+        </p:nvSpPr>
+        <p:spPr>
+          <a:xfrm>
+            <a:off x="16355740" y="7460284"/>
+            <a:ext cx="926325" cy="540000"/>
+          </a:xfrm>
+          <a:prstGeom prst="rect">
+            <a:avLst/>
+          </a:prstGeom>
+          <a:solidFill>
+            <a:srgbClr val="FF0000"/>
+          </a:solidFill>
+          <a:ln w="19050"/>
+        </p:spPr>
+        <p:style>
+          <a:lnRef idx="2">
+            <a:schemeClr val="accent1"/>
+          </a:lnRef>
+          <a:fillRef idx="1">
+            <a:schemeClr val="lt1"/>
+          </a:fillRef>
+          <a:effectRef idx="0">
+            <a:schemeClr val="accent1"/>
+          </a:effectRef>
+          <a:fontRef idx="minor">
+            <a:schemeClr val="dk1"/>
+          </a:fontRef>
+        </p:style>
+        <p:txBody>
+          <a:bodyPr lIns="124733" tIns="62367" rIns="124733" bIns="62367" rtlCol="0" anchor="ctr"/>
+          <a:lstStyle/>
+          <a:p>
+            <a:pPr algn="ctr"/>
+            <a:r>
+              <a:rPr lang="ru-RU" sz="700" dirty="0"/>
+              <a:t>Переговоры о независимости</a:t>
+            </a:r>
+          </a:p>
+        </p:txBody>
+      </p:sp>
+      <p:cxnSp>
+        <p:nvCxnSpPr>
+          <p:cNvPr id="290" name="Соединительная линия уступом 620">
+            <a:extLst>
+              <a:ext uri="{FF2B5EF4-FFF2-40B4-BE49-F238E27FC236}">
+                <a16:creationId xmlns:a16="http://schemas.microsoft.com/office/drawing/2014/main" id="{B9478120-EBE8-4218-A7F8-471C9CA75102}"/>
+              </a:ext>
+            </a:extLst>
+          </p:cNvPr>
+          <p:cNvCxnSpPr>
+            <a:cxnSpLocks/>
+            <a:stCxn id="207" idx="2"/>
+            <a:endCxn id="289" idx="0"/>
+          </p:cNvCxnSpPr>
+          <p:nvPr/>
+        </p:nvCxnSpPr>
+        <p:spPr>
+          <a:xfrm rot="16200000" flipH="1">
+            <a:off x="16385314" y="7026694"/>
+            <a:ext cx="260439" cy="606740"/>
+          </a:xfrm>
+          <a:prstGeom prst="bentConnector3">
+            <a:avLst>
+              <a:gd name="adj1" fmla="val 50000"/>
+            </a:avLst>
+          </a:prstGeom>
+          <a:ln w="19050">
+            <a:tailEnd type="arrow"/>
+          </a:ln>
+        </p:spPr>
+        <p:style>
+          <a:lnRef idx="1">
+            <a:schemeClr val="accent1"/>
+          </a:lnRef>
+          <a:fillRef idx="0">
+            <a:schemeClr val="accent1"/>
+          </a:fillRef>
+          <a:effectRef idx="0">
+            <a:schemeClr val="accent1"/>
+          </a:effectRef>
+          <a:fontRef idx="minor">
+            <a:schemeClr val="tx1"/>
+          </a:fontRef>
+        </p:style>
+      </p:cxnSp>
+      <p:cxnSp>
+        <p:nvCxnSpPr>
+          <p:cNvPr id="296" name="Соединительная линия уступом 620">
+            <a:extLst>
+              <a:ext uri="{FF2B5EF4-FFF2-40B4-BE49-F238E27FC236}">
+                <a16:creationId xmlns:a16="http://schemas.microsoft.com/office/drawing/2014/main" id="{57CD163E-5033-4EE2-B625-AF4718E8D44C}"/>
+              </a:ext>
+            </a:extLst>
+          </p:cNvPr>
+          <p:cNvCxnSpPr>
+            <a:cxnSpLocks/>
+            <a:stCxn id="280" idx="2"/>
+            <a:endCxn id="289" idx="0"/>
+          </p:cNvCxnSpPr>
+          <p:nvPr/>
+        </p:nvCxnSpPr>
+        <p:spPr>
+          <a:xfrm rot="5400000">
+            <a:off x="16988574" y="7023216"/>
+            <a:ext cx="267398" cy="606739"/>
+          </a:xfrm>
+          <a:prstGeom prst="bentConnector3">
+            <a:avLst>
+              <a:gd name="adj1" fmla="val 50000"/>
+            </a:avLst>
+          </a:prstGeom>
+          <a:ln w="19050">
+            <a:tailEnd type="arrow"/>
+          </a:ln>
+        </p:spPr>
+        <p:style>
+          <a:lnRef idx="1">
+            <a:schemeClr val="accent1"/>
+          </a:lnRef>
+          <a:fillRef idx="0">
+            <a:schemeClr val="accent1"/>
+          </a:fillRef>
+          <a:effectRef idx="0">
+            <a:schemeClr val="accent1"/>
+          </a:effectRef>
+          <a:fontRef idx="minor">
+            <a:schemeClr val="tx1"/>
+          </a:fontRef>
+        </p:style>
+      </p:cxnSp>
+      <p:sp>
+        <p:nvSpPr>
+          <p:cNvPr id="239" name="Прямоугольник 238">
+            <a:extLst>
+              <a:ext uri="{FF2B5EF4-FFF2-40B4-BE49-F238E27FC236}">
+                <a16:creationId xmlns:a16="http://schemas.microsoft.com/office/drawing/2014/main" id="{64A45257-8F21-40BB-B44B-74B5E2E87EFF}"/>
+              </a:ext>
+            </a:extLst>
+          </p:cNvPr>
+          <p:cNvSpPr/>
+          <p:nvPr/>
+        </p:nvSpPr>
+        <p:spPr>
+          <a:xfrm>
+            <a:off x="10971429" y="5852446"/>
+            <a:ext cx="926325" cy="540000"/>
+          </a:xfrm>
+          <a:prstGeom prst="rect">
+            <a:avLst/>
+          </a:prstGeom>
+          <a:solidFill>
+            <a:srgbClr val="FF0000"/>
+          </a:solidFill>
+          <a:ln w="19050"/>
+        </p:spPr>
+        <p:style>
+          <a:lnRef idx="2">
+            <a:schemeClr val="accent1"/>
+          </a:lnRef>
+          <a:fillRef idx="1">
+            <a:schemeClr val="lt1"/>
+          </a:fillRef>
+          <a:effectRef idx="0">
+            <a:schemeClr val="accent1"/>
+          </a:effectRef>
+          <a:fontRef idx="minor">
+            <a:schemeClr val="dk1"/>
+          </a:fontRef>
+        </p:style>
+        <p:txBody>
+          <a:bodyPr lIns="124733" tIns="62367" rIns="124733" bIns="62367" rtlCol="0" anchor="ctr"/>
+          <a:lstStyle/>
+          <a:p>
+            <a:pPr algn="ctr"/>
+            <a:r>
+              <a:rPr lang="ru-RU" sz="700" dirty="0"/>
+              <a:t>Исключить французов из партии</a:t>
+            </a:r>
+          </a:p>
+        </p:txBody>
+      </p:sp>
+      <p:cxnSp>
+        <p:nvCxnSpPr>
+          <p:cNvPr id="241" name="Соединительная линия уступом 620">
+            <a:extLst>
+              <a:ext uri="{FF2B5EF4-FFF2-40B4-BE49-F238E27FC236}">
+                <a16:creationId xmlns:a16="http://schemas.microsoft.com/office/drawing/2014/main" id="{5488EBCC-733B-4DD5-8178-EE54CD215417}"/>
+              </a:ext>
+            </a:extLst>
+          </p:cNvPr>
+          <p:cNvCxnSpPr>
+            <a:cxnSpLocks/>
+            <a:stCxn id="231" idx="2"/>
+            <a:endCxn id="239" idx="0"/>
+          </p:cNvCxnSpPr>
+          <p:nvPr/>
+        </p:nvCxnSpPr>
+        <p:spPr>
+          <a:xfrm rot="5400000">
+            <a:off x="11604810" y="5414832"/>
+            <a:ext cx="267396" cy="607832"/>
           </a:xfrm>
           <a:prstGeom prst="bentConnector3">
             <a:avLst>

--- a/Наработки/диздоки/Марокко/Марокко.pptx
+++ b/Наработки/диздоки/Марокко/Марокко.pptx
@@ -209,7 +209,7 @@
             <a:fld id="{33E3D7F9-E251-484C-A6FF-FA958879DF69}" type="datetimeFigureOut">
               <a:rPr lang="ru-RU" smtClean="0"/>
               <a:pPr/>
-              <a:t>11.06.2026</a:t>
+              <a:t>15.06.2026</a:t>
             </a:fld>
             <a:endParaRPr lang="ru-RU"/>
           </a:p>
@@ -699,7 +699,7 @@
             <a:fld id="{85A5DE44-605B-4D3B-B2B7-94543DF81A36}" type="datetimeFigureOut">
               <a:rPr lang="ru-RU" smtClean="0"/>
               <a:pPr/>
-              <a:t>11.06.2026</a:t>
+              <a:t>15.06.2026</a:t>
             </a:fld>
             <a:endParaRPr lang="ru-RU"/>
           </a:p>
@@ -871,7 +871,7 @@
             <a:fld id="{85A5DE44-605B-4D3B-B2B7-94543DF81A36}" type="datetimeFigureOut">
               <a:rPr lang="ru-RU" smtClean="0"/>
               <a:pPr/>
-              <a:t>11.06.2026</a:t>
+              <a:t>15.06.2026</a:t>
             </a:fld>
             <a:endParaRPr lang="ru-RU"/>
           </a:p>
@@ -1053,7 +1053,7 @@
             <a:fld id="{85A5DE44-605B-4D3B-B2B7-94543DF81A36}" type="datetimeFigureOut">
               <a:rPr lang="ru-RU" smtClean="0"/>
               <a:pPr/>
-              <a:t>11.06.2026</a:t>
+              <a:t>15.06.2026</a:t>
             </a:fld>
             <a:endParaRPr lang="ru-RU"/>
           </a:p>
@@ -1225,7 +1225,7 @@
             <a:fld id="{85A5DE44-605B-4D3B-B2B7-94543DF81A36}" type="datetimeFigureOut">
               <a:rPr lang="ru-RU" smtClean="0"/>
               <a:pPr/>
-              <a:t>11.06.2026</a:t>
+              <a:t>15.06.2026</a:t>
             </a:fld>
             <a:endParaRPr lang="ru-RU"/>
           </a:p>
@@ -1473,7 +1473,7 @@
             <a:fld id="{85A5DE44-605B-4D3B-B2B7-94543DF81A36}" type="datetimeFigureOut">
               <a:rPr lang="ru-RU" smtClean="0"/>
               <a:pPr/>
-              <a:t>11.06.2026</a:t>
+              <a:t>15.06.2026</a:t>
             </a:fld>
             <a:endParaRPr lang="ru-RU"/>
           </a:p>
@@ -1707,7 +1707,7 @@
             <a:fld id="{85A5DE44-605B-4D3B-B2B7-94543DF81A36}" type="datetimeFigureOut">
               <a:rPr lang="ru-RU" smtClean="0"/>
               <a:pPr/>
-              <a:t>11.06.2026</a:t>
+              <a:t>15.06.2026</a:t>
             </a:fld>
             <a:endParaRPr lang="ru-RU"/>
           </a:p>
@@ -2076,7 +2076,7 @@
             <a:fld id="{85A5DE44-605B-4D3B-B2B7-94543DF81A36}" type="datetimeFigureOut">
               <a:rPr lang="ru-RU" smtClean="0"/>
               <a:pPr/>
-              <a:t>11.06.2026</a:t>
+              <a:t>15.06.2026</a:t>
             </a:fld>
             <a:endParaRPr lang="ru-RU"/>
           </a:p>
@@ -2196,7 +2196,7 @@
             <a:fld id="{85A5DE44-605B-4D3B-B2B7-94543DF81A36}" type="datetimeFigureOut">
               <a:rPr lang="ru-RU" smtClean="0"/>
               <a:pPr/>
-              <a:t>11.06.2026</a:t>
+              <a:t>15.06.2026</a:t>
             </a:fld>
             <a:endParaRPr lang="ru-RU"/>
           </a:p>
@@ -2293,7 +2293,7 @@
             <a:fld id="{85A5DE44-605B-4D3B-B2B7-94543DF81A36}" type="datetimeFigureOut">
               <a:rPr lang="ru-RU" smtClean="0"/>
               <a:pPr/>
-              <a:t>11.06.2026</a:t>
+              <a:t>15.06.2026</a:t>
             </a:fld>
             <a:endParaRPr lang="ru-RU"/>
           </a:p>
@@ -2572,7 +2572,7 @@
             <a:fld id="{85A5DE44-605B-4D3B-B2B7-94543DF81A36}" type="datetimeFigureOut">
               <a:rPr lang="ru-RU" smtClean="0"/>
               <a:pPr/>
-              <a:t>11.06.2026</a:t>
+              <a:t>15.06.2026</a:t>
             </a:fld>
             <a:endParaRPr lang="ru-RU"/>
           </a:p>
@@ -2831,7 +2831,7 @@
             <a:fld id="{85A5DE44-605B-4D3B-B2B7-94543DF81A36}" type="datetimeFigureOut">
               <a:rPr lang="ru-RU" smtClean="0"/>
               <a:pPr/>
-              <a:t>11.06.2026</a:t>
+              <a:t>15.06.2026</a:t>
             </a:fld>
             <a:endParaRPr lang="ru-RU"/>
           </a:p>
@@ -3046,7 +3046,7 @@
             <a:fld id="{85A5DE44-605B-4D3B-B2B7-94543DF81A36}" type="datetimeFigureOut">
               <a:rPr lang="ru-RU" smtClean="0"/>
               <a:pPr/>
-              <a:t>11.06.2026</a:t>
+              <a:t>15.06.2026</a:t>
             </a:fld>
             <a:endParaRPr lang="ru-RU"/>
           </a:p>
@@ -13621,8 +13621,68 @@
             <a:pPr algn="ctr"/>
             <a:r>
               <a:rPr lang="ru-RU" sz="700" dirty="0"/>
-              <a:t>Заключить пакт с Комитетом антифашистских милиций Каталонии</a:t>
-            </a:r>
+              <a:t>Заключить пакт с Комитетом антифашистских милиций </a:t>
+            </a:r>
+            <a:r>
+              <a:rPr lang="ru-RU" sz="100" dirty="0"/>
+              <a:t>Каталонии</a:t>
+            </a:r>
+            <a:br>
+              <a:rPr lang="ru-RU" sz="100" dirty="0"/>
+            </a:br>
+            <a:r>
+              <a:rPr lang="ru-RU" sz="100" dirty="0"/>
+              <a:t>(Секретный пакт с каталонскими анархистами против Франко (Август — Сентябрь 1936)Это один из самых захватывающих и малоизвестных сюжетов реальной </a:t>
+            </a:r>
+            <a:r>
+              <a:rPr lang="ru-RU" sz="100" dirty="0" err="1"/>
+              <a:t>истории:В</a:t>
+            </a:r>
+            <a:r>
+              <a:rPr lang="ru-RU" sz="100" dirty="0"/>
+              <a:t> июле 1936 года в Испанском Марокко вспыхнул фашистский мятеж генерала </a:t>
+            </a:r>
+            <a:r>
+              <a:rPr lang="ru-RU" sz="100" dirty="0" err="1"/>
+              <a:t>Франко.В</a:t>
+            </a:r>
+            <a:r>
+              <a:rPr lang="ru-RU" sz="100" dirty="0"/>
+              <a:t> августе в Марокко (в Фес) тайно прибыли французские и испанские левые активисты (включая Давида Руссе и внука Карла Маркса — Роберта-Жана Лонге), чтобы скоординировать действия.19 сентября 1936 года лидеры CAM (Мухаммед Хасан аль-</a:t>
+            </a:r>
+            <a:r>
+              <a:rPr lang="ru-RU" sz="100" dirty="0" err="1"/>
+              <a:t>Уаццани</a:t>
+            </a:r>
+            <a:r>
+              <a:rPr lang="ru-RU" sz="100" dirty="0"/>
+              <a:t> и Омар </a:t>
+            </a:r>
+            <a:r>
+              <a:rPr lang="ru-RU" sz="100" dirty="0" err="1"/>
+              <a:t>Абдельджалиль</a:t>
+            </a:r>
+            <a:r>
+              <a:rPr lang="ru-RU" sz="100" dirty="0"/>
+              <a:t>) подписали в Барселоне тайный пакт с Комитетом антифашистских милиций Каталонии (в лице знаменитого анархиста Хуана Гарсии Оливера). Каталонцы пообещали признать полную независимость Испанского Марокко, если CAM поднимет восстание в тылу у </a:t>
+            </a:r>
+            <a:r>
+              <a:rPr lang="ru-RU" sz="100" dirty="0" err="1"/>
+              <a:t>Франко.Итог</a:t>
+            </a:r>
+            <a:r>
+              <a:rPr lang="ru-RU" sz="100" dirty="0"/>
+              <a:t>: План сорвался, так как премьер-министр Испании Ларго Кабальеро и премьер Франции Леон Блюм испугались колониальных бунтов и наложили вето на соглашение. В октябре аль-</a:t>
+            </a:r>
+            <a:r>
+              <a:rPr lang="ru-RU" sz="100" dirty="0" err="1"/>
+              <a:t>Уаццани</a:t>
+            </a:r>
+            <a:r>
+              <a:rPr lang="ru-RU" sz="100" dirty="0"/>
+              <a:t> лично летал в Париж, но Леон Блюм отказался его принять.)</a:t>
+            </a:r>
+            <a:endParaRPr lang="ru-RU" sz="700" dirty="0"/>
           </a:p>
         </p:txBody>
       </p:sp>
@@ -16024,6 +16084,961 @@
           <a:prstGeom prst="bentConnector3">
             <a:avLst>
               <a:gd name="adj1" fmla="val 50000"/>
+            </a:avLst>
+          </a:prstGeom>
+          <a:ln w="19050">
+            <a:tailEnd type="arrow"/>
+          </a:ln>
+        </p:spPr>
+        <p:style>
+          <a:lnRef idx="1">
+            <a:schemeClr val="accent1"/>
+          </a:lnRef>
+          <a:fillRef idx="0">
+            <a:schemeClr val="accent1"/>
+          </a:fillRef>
+          <a:effectRef idx="0">
+            <a:schemeClr val="accent1"/>
+          </a:effectRef>
+          <a:fontRef idx="minor">
+            <a:schemeClr val="tx1"/>
+          </a:fontRef>
+        </p:style>
+      </p:cxnSp>
+      <p:sp>
+        <p:nvSpPr>
+          <p:cNvPr id="244" name="Прямоугольник 243">
+            <a:extLst>
+              <a:ext uri="{FF2B5EF4-FFF2-40B4-BE49-F238E27FC236}">
+                <a16:creationId xmlns:a16="http://schemas.microsoft.com/office/drawing/2014/main" id="{68301316-F113-43E2-BE8C-A421E8E8F476}"/>
+              </a:ext>
+            </a:extLst>
+          </p:cNvPr>
+          <p:cNvSpPr/>
+          <p:nvPr/>
+        </p:nvSpPr>
+        <p:spPr>
+          <a:xfrm>
+            <a:off x="39877061" y="25593933"/>
+            <a:ext cx="926325" cy="540000"/>
+          </a:xfrm>
+          <a:prstGeom prst="rect">
+            <a:avLst/>
+          </a:prstGeom>
+          <a:solidFill>
+            <a:schemeClr val="bg1"/>
+          </a:solidFill>
+          <a:ln w="19050"/>
+        </p:spPr>
+        <p:style>
+          <a:lnRef idx="2">
+            <a:schemeClr val="accent1"/>
+          </a:lnRef>
+          <a:fillRef idx="1">
+            <a:schemeClr val="lt1"/>
+          </a:fillRef>
+          <a:effectRef idx="0">
+            <a:schemeClr val="accent1"/>
+          </a:effectRef>
+          <a:fontRef idx="minor">
+            <a:schemeClr val="dk1"/>
+          </a:fontRef>
+        </p:style>
+        <p:txBody>
+          <a:bodyPr lIns="124733" tIns="62367" rIns="124733" bIns="62367" rtlCol="0" anchor="ctr"/>
+          <a:lstStyle/>
+          <a:p>
+            <a:pPr algn="ctr"/>
+            <a:r>
+              <a:rPr lang="ru-RU" sz="700" dirty="0"/>
+              <a:t>Создание муниципальных советов </a:t>
+            </a:r>
+            <a:r>
+              <a:rPr lang="ru-RU" sz="300" dirty="0"/>
+              <a:t>(позволяющих государству управлять своими внутренними делами)</a:t>
+            </a:r>
+            <a:endParaRPr lang="ru-RU" sz="700" dirty="0"/>
+          </a:p>
+        </p:txBody>
+      </p:sp>
+      <p:sp>
+        <p:nvSpPr>
+          <p:cNvPr id="247" name="Прямоугольник 246">
+            <a:extLst>
+              <a:ext uri="{FF2B5EF4-FFF2-40B4-BE49-F238E27FC236}">
+                <a16:creationId xmlns:a16="http://schemas.microsoft.com/office/drawing/2014/main" id="{EFB476FA-A8C6-4F25-A4F9-0EE18F513C6F}"/>
+              </a:ext>
+            </a:extLst>
+          </p:cNvPr>
+          <p:cNvSpPr/>
+          <p:nvPr/>
+        </p:nvSpPr>
+        <p:spPr>
+          <a:xfrm>
+            <a:off x="41199942" y="26406738"/>
+            <a:ext cx="926325" cy="540000"/>
+          </a:xfrm>
+          <a:prstGeom prst="rect">
+            <a:avLst/>
+          </a:prstGeom>
+          <a:solidFill>
+            <a:schemeClr val="bg1"/>
+          </a:solidFill>
+          <a:ln w="19050"/>
+        </p:spPr>
+        <p:style>
+          <a:lnRef idx="2">
+            <a:schemeClr val="accent1"/>
+          </a:lnRef>
+          <a:fillRef idx="1">
+            <a:schemeClr val="lt1"/>
+          </a:fillRef>
+          <a:effectRef idx="0">
+            <a:schemeClr val="accent1"/>
+          </a:effectRef>
+          <a:fontRef idx="minor">
+            <a:schemeClr val="dk1"/>
+          </a:fontRef>
+        </p:style>
+        <p:txBody>
+          <a:bodyPr lIns="124733" tIns="62367" rIns="124733" bIns="62367" rtlCol="0" anchor="ctr"/>
+          <a:lstStyle/>
+          <a:p>
+            <a:pPr algn="ctr"/>
+            <a:r>
+              <a:rPr lang="ru-RU" sz="700" dirty="0"/>
+              <a:t>Создание высшего совета</a:t>
+            </a:r>
+          </a:p>
+          <a:p>
+            <a:pPr algn="ctr"/>
+            <a:r>
+              <a:rPr lang="ru-RU" sz="200" dirty="0"/>
+              <a:t>(члены которого будут избираться марокканцами)</a:t>
+            </a:r>
+          </a:p>
+        </p:txBody>
+      </p:sp>
+      <p:sp>
+        <p:nvSpPr>
+          <p:cNvPr id="248" name="Прямоугольник 247">
+            <a:extLst>
+              <a:ext uri="{FF2B5EF4-FFF2-40B4-BE49-F238E27FC236}">
+                <a16:creationId xmlns:a16="http://schemas.microsoft.com/office/drawing/2014/main" id="{7497650B-E51E-4E55-B162-241FE2911556}"/>
+              </a:ext>
+            </a:extLst>
+          </p:cNvPr>
+          <p:cNvSpPr/>
+          <p:nvPr/>
+        </p:nvSpPr>
+        <p:spPr>
+          <a:xfrm>
+            <a:off x="39877061" y="26411862"/>
+            <a:ext cx="926325" cy="540000"/>
+          </a:xfrm>
+          <a:prstGeom prst="rect">
+            <a:avLst/>
+          </a:prstGeom>
+          <a:solidFill>
+            <a:schemeClr val="bg1"/>
+          </a:solidFill>
+          <a:ln w="19050"/>
+        </p:spPr>
+        <p:style>
+          <a:lnRef idx="2">
+            <a:schemeClr val="accent1"/>
+          </a:lnRef>
+          <a:fillRef idx="1">
+            <a:schemeClr val="lt1"/>
+          </a:fillRef>
+          <a:effectRef idx="0">
+            <a:schemeClr val="accent1"/>
+          </a:effectRef>
+          <a:fontRef idx="minor">
+            <a:schemeClr val="dk1"/>
+          </a:fontRef>
+        </p:style>
+        <p:txBody>
+          <a:bodyPr lIns="124733" tIns="62367" rIns="124733" bIns="62367" rtlCol="0" anchor="ctr"/>
+          <a:lstStyle/>
+          <a:p>
+            <a:pPr algn="ctr"/>
+            <a:r>
+              <a:rPr lang="ru-RU" sz="700" dirty="0"/>
+              <a:t>Свобода печати и выражения мнений</a:t>
+            </a:r>
+            <a:endParaRPr lang="en-US" sz="700" dirty="0"/>
+          </a:p>
+          <a:p>
+            <a:pPr algn="ctr"/>
+            <a:r>
+              <a:rPr lang="en-US" sz="200" dirty="0"/>
+              <a:t>(</a:t>
+            </a:r>
+            <a:r>
+              <a:rPr lang="ru-RU" sz="200" dirty="0"/>
+              <a:t>а также свобода создания ассоциаций, способствующих воспитанию населения в духе совести, общественного мнения и ценностей.</a:t>
+            </a:r>
+            <a:r>
+              <a:rPr lang="en-US" sz="200" dirty="0"/>
+              <a:t>)</a:t>
+            </a:r>
+            <a:endParaRPr lang="ru-RU" sz="700" dirty="0"/>
+          </a:p>
+        </p:txBody>
+      </p:sp>
+      <p:sp>
+        <p:nvSpPr>
+          <p:cNvPr id="255" name="Прямоугольник 254">
+            <a:extLst>
+              <a:ext uri="{FF2B5EF4-FFF2-40B4-BE49-F238E27FC236}">
+                <a16:creationId xmlns:a16="http://schemas.microsoft.com/office/drawing/2014/main" id="{016A7C84-CF77-40E7-9FFC-1F5482BC29C6}"/>
+              </a:ext>
+            </a:extLst>
+          </p:cNvPr>
+          <p:cNvSpPr/>
+          <p:nvPr/>
+        </p:nvSpPr>
+        <p:spPr>
+          <a:xfrm>
+            <a:off x="41195582" y="27419237"/>
+            <a:ext cx="926325" cy="540000"/>
+          </a:xfrm>
+          <a:prstGeom prst="rect">
+            <a:avLst/>
+          </a:prstGeom>
+          <a:solidFill>
+            <a:schemeClr val="bg1"/>
+          </a:solidFill>
+          <a:ln w="19050"/>
+        </p:spPr>
+        <p:style>
+          <a:lnRef idx="2">
+            <a:schemeClr val="accent1"/>
+          </a:lnRef>
+          <a:fillRef idx="1">
+            <a:schemeClr val="lt1"/>
+          </a:fillRef>
+          <a:effectRef idx="0">
+            <a:schemeClr val="accent1"/>
+          </a:effectRef>
+          <a:fontRef idx="minor">
+            <a:schemeClr val="dk1"/>
+          </a:fontRef>
+        </p:style>
+        <p:txBody>
+          <a:bodyPr lIns="124733" tIns="62367" rIns="124733" bIns="62367" rtlCol="0" anchor="ctr"/>
+          <a:lstStyle/>
+          <a:p>
+            <a:pPr algn="ctr"/>
+            <a:r>
+              <a:rPr lang="ru-RU" sz="700" dirty="0"/>
+              <a:t>Лишить влияния партию Национальных Реформ</a:t>
+            </a:r>
+          </a:p>
+        </p:txBody>
+      </p:sp>
+      <p:sp>
+        <p:nvSpPr>
+          <p:cNvPr id="286" name="Прямоугольник 285">
+            <a:extLst>
+              <a:ext uri="{FF2B5EF4-FFF2-40B4-BE49-F238E27FC236}">
+                <a16:creationId xmlns:a16="http://schemas.microsoft.com/office/drawing/2014/main" id="{C6D605BB-0F8F-4EBC-8939-EC314CF5EA5B}"/>
+              </a:ext>
+            </a:extLst>
+          </p:cNvPr>
+          <p:cNvSpPr/>
+          <p:nvPr/>
+        </p:nvSpPr>
+        <p:spPr>
+          <a:xfrm>
+            <a:off x="39877061" y="27424363"/>
+            <a:ext cx="926325" cy="540000"/>
+          </a:xfrm>
+          <a:prstGeom prst="rect">
+            <a:avLst/>
+          </a:prstGeom>
+          <a:solidFill>
+            <a:schemeClr val="bg1"/>
+          </a:solidFill>
+          <a:ln w="19050"/>
+        </p:spPr>
+        <p:style>
+          <a:lnRef idx="2">
+            <a:schemeClr val="accent1"/>
+          </a:lnRef>
+          <a:fillRef idx="1">
+            <a:schemeClr val="lt1"/>
+          </a:fillRef>
+          <a:effectRef idx="0">
+            <a:schemeClr val="accent1"/>
+          </a:effectRef>
+          <a:fontRef idx="minor">
+            <a:schemeClr val="dk1"/>
+          </a:fontRef>
+        </p:style>
+        <p:txBody>
+          <a:bodyPr lIns="124733" tIns="62367" rIns="124733" bIns="62367" rtlCol="0" anchor="ctr"/>
+          <a:lstStyle/>
+          <a:p>
+            <a:pPr algn="ctr"/>
+            <a:r>
+              <a:rPr lang="ru-RU" sz="700" dirty="0"/>
+              <a:t>Создание движения «</a:t>
+            </a:r>
+            <a:r>
+              <a:rPr lang="ru-RU" sz="700" dirty="0" err="1"/>
+              <a:t>Фитьян</a:t>
+            </a:r>
+            <a:r>
+              <a:rPr lang="ru-RU" sz="700" dirty="0"/>
+              <a:t>»</a:t>
+            </a:r>
+          </a:p>
+          <a:p>
+            <a:pPr algn="ctr"/>
+            <a:r>
+              <a:rPr lang="ru-RU" sz="200" dirty="0"/>
+              <a:t>(Движение «</a:t>
+            </a:r>
+            <a:r>
+              <a:rPr lang="ru-RU" sz="200" dirty="0" err="1"/>
+              <a:t>Фитьян</a:t>
+            </a:r>
+            <a:r>
+              <a:rPr lang="ru-RU" sz="200" dirty="0"/>
+              <a:t>» (араб. </a:t>
+            </a:r>
+            <a:r>
+              <a:rPr lang="ar-AE" sz="200" dirty="0"/>
+              <a:t>فتيان — «</a:t>
+            </a:r>
+            <a:r>
+              <a:rPr lang="ru-RU" sz="200" dirty="0"/>
+              <a:t>Юноши» или «Отроки») в контексте Испанского Марокко — это военизированная молодежная организация, созданная Партией национальных реформ </a:t>
+            </a:r>
+            <a:r>
+              <a:rPr lang="ru-RU" sz="200" dirty="0" err="1"/>
+              <a:t>Абд</a:t>
+            </a:r>
+            <a:r>
+              <a:rPr lang="ru-RU" sz="200" dirty="0"/>
+              <a:t> аль-</a:t>
+            </a:r>
+            <a:r>
+              <a:rPr lang="ru-RU" sz="200" dirty="0" err="1"/>
+              <a:t>Халика</a:t>
+            </a:r>
+            <a:r>
+              <a:rPr lang="ru-RU" sz="200" dirty="0"/>
+              <a:t> Торреса в конце 1930-х годов. На её создание и структуру оказали мощнейшее влияние европейские фашистские движения того времени, в особенности Испанская Фаланга)</a:t>
+            </a:r>
+            <a:endParaRPr lang="ru-RU" sz="700" dirty="0"/>
+          </a:p>
+        </p:txBody>
+      </p:sp>
+      <p:sp>
+        <p:nvSpPr>
+          <p:cNvPr id="299" name="Прямоугольник 298">
+            <a:extLst>
+              <a:ext uri="{FF2B5EF4-FFF2-40B4-BE49-F238E27FC236}">
+                <a16:creationId xmlns:a16="http://schemas.microsoft.com/office/drawing/2014/main" id="{3DAE6CB6-1F84-4263-8B95-FD8B316CCCD2}"/>
+              </a:ext>
+            </a:extLst>
+          </p:cNvPr>
+          <p:cNvSpPr/>
+          <p:nvPr/>
+        </p:nvSpPr>
+        <p:spPr>
+          <a:xfrm>
+            <a:off x="40493340" y="28237167"/>
+            <a:ext cx="926325" cy="540000"/>
+          </a:xfrm>
+          <a:prstGeom prst="rect">
+            <a:avLst/>
+          </a:prstGeom>
+          <a:solidFill>
+            <a:schemeClr val="bg1"/>
+          </a:solidFill>
+          <a:ln w="19050"/>
+        </p:spPr>
+        <p:style>
+          <a:lnRef idx="2">
+            <a:schemeClr val="accent1"/>
+          </a:lnRef>
+          <a:fillRef idx="1">
+            <a:schemeClr val="lt1"/>
+          </a:fillRef>
+          <a:effectRef idx="0">
+            <a:schemeClr val="accent1"/>
+          </a:effectRef>
+          <a:fontRef idx="minor">
+            <a:schemeClr val="dk1"/>
+          </a:fontRef>
+        </p:style>
+        <p:txBody>
+          <a:bodyPr lIns="124733" tIns="62367" rIns="124733" bIns="62367" rtlCol="0" anchor="ctr"/>
+          <a:lstStyle/>
+          <a:p>
+            <a:pPr algn="ctr"/>
+            <a:r>
+              <a:rPr lang="ru-RU" sz="700" dirty="0"/>
+              <a:t>Панарабизм и ислам</a:t>
+            </a:r>
+          </a:p>
+          <a:p>
+            <a:pPr algn="ctr"/>
+            <a:r>
+              <a:rPr lang="ru-RU" sz="200" dirty="0"/>
+              <a:t>Вместо католицизма и испанского империализма Фаланги, «</a:t>
+            </a:r>
+            <a:r>
+              <a:rPr lang="ru-RU" sz="200" dirty="0" err="1"/>
+              <a:t>Фитьян</a:t>
+            </a:r>
+            <a:r>
+              <a:rPr lang="ru-RU" sz="200" dirty="0"/>
+              <a:t>» воспитывали молодежь на ценностях арабского возрождения, защиты ислама и гордости за историю Марокко.</a:t>
+            </a:r>
+            <a:endParaRPr lang="ru-RU" sz="700" dirty="0"/>
+          </a:p>
+        </p:txBody>
+      </p:sp>
+      <p:sp>
+        <p:nvSpPr>
+          <p:cNvPr id="300" name="Прямоугольник 299">
+            <a:extLst>
+              <a:ext uri="{FF2B5EF4-FFF2-40B4-BE49-F238E27FC236}">
+                <a16:creationId xmlns:a16="http://schemas.microsoft.com/office/drawing/2014/main" id="{3857DF17-F437-4856-A8C3-2D2EE0D53C84}"/>
+              </a:ext>
+            </a:extLst>
+          </p:cNvPr>
+          <p:cNvSpPr/>
+          <p:nvPr/>
+        </p:nvSpPr>
+        <p:spPr>
+          <a:xfrm>
+            <a:off x="39335433" y="28237167"/>
+            <a:ext cx="926325" cy="540000"/>
+          </a:xfrm>
+          <a:prstGeom prst="rect">
+            <a:avLst/>
+          </a:prstGeom>
+          <a:solidFill>
+            <a:schemeClr val="bg1"/>
+          </a:solidFill>
+          <a:ln w="19050"/>
+        </p:spPr>
+        <p:style>
+          <a:lnRef idx="2">
+            <a:schemeClr val="accent1"/>
+          </a:lnRef>
+          <a:fillRef idx="1">
+            <a:schemeClr val="lt1"/>
+          </a:fillRef>
+          <a:effectRef idx="0">
+            <a:schemeClr val="accent1"/>
+          </a:effectRef>
+          <a:fontRef idx="minor">
+            <a:schemeClr val="dk1"/>
+          </a:fontRef>
+        </p:style>
+        <p:txBody>
+          <a:bodyPr lIns="124733" tIns="62367" rIns="124733" bIns="62367" rtlCol="0" anchor="ctr"/>
+          <a:lstStyle/>
+          <a:p>
+            <a:pPr algn="ctr"/>
+            <a:r>
+              <a:rPr lang="ru-RU" sz="700" dirty="0"/>
+              <a:t>Скрытый </a:t>
+            </a:r>
+            <a:r>
+              <a:rPr lang="ru-RU" sz="700" dirty="0" err="1"/>
+              <a:t>антиколониализм</a:t>
+            </a:r>
+            <a:endParaRPr lang="ru-RU" sz="700" dirty="0"/>
+          </a:p>
+          <a:p>
+            <a:pPr algn="ctr"/>
+            <a:r>
+              <a:rPr lang="ru-RU" sz="100" dirty="0"/>
+              <a:t>Для Торреса это была «кузница кадров». Молодые люди учились маршировать и подчиняться приказам не для того, чтобы вечно служить Мадриду, а чтобы в нужный момент составить костяк армии, которая потребует независимости Марокко.</a:t>
+            </a:r>
+            <a:endParaRPr lang="ru-RU" sz="700" dirty="0"/>
+          </a:p>
+        </p:txBody>
+      </p:sp>
+      <p:sp>
+        <p:nvSpPr>
+          <p:cNvPr id="301" name="Прямоугольник 300">
+            <a:extLst>
+              <a:ext uri="{FF2B5EF4-FFF2-40B4-BE49-F238E27FC236}">
+                <a16:creationId xmlns:a16="http://schemas.microsoft.com/office/drawing/2014/main" id="{19D409FE-ECD9-41F9-A78D-CBCA8C55DFC3}"/>
+              </a:ext>
+            </a:extLst>
+          </p:cNvPr>
+          <p:cNvSpPr/>
+          <p:nvPr/>
+        </p:nvSpPr>
+        <p:spPr>
+          <a:xfrm>
+            <a:off x="39270959" y="23971840"/>
+            <a:ext cx="926325" cy="540000"/>
+          </a:xfrm>
+          <a:prstGeom prst="rect">
+            <a:avLst/>
+          </a:prstGeom>
+          <a:solidFill>
+            <a:schemeClr val="bg1"/>
+          </a:solidFill>
+          <a:ln w="19050"/>
+        </p:spPr>
+        <p:style>
+          <a:lnRef idx="2">
+            <a:schemeClr val="accent1"/>
+          </a:lnRef>
+          <a:fillRef idx="1">
+            <a:schemeClr val="lt1"/>
+          </a:fillRef>
+          <a:effectRef idx="0">
+            <a:schemeClr val="accent1"/>
+          </a:effectRef>
+          <a:fontRef idx="minor">
+            <a:schemeClr val="dk1"/>
+          </a:fontRef>
+        </p:style>
+        <p:txBody>
+          <a:bodyPr lIns="124733" tIns="62367" rIns="124733" bIns="62367" rtlCol="0" anchor="ctr"/>
+          <a:lstStyle/>
+          <a:p>
+            <a:pPr algn="ctr"/>
+            <a:r>
+              <a:rPr lang="ru-RU" sz="700" dirty="0"/>
+              <a:t>Танжер 3</a:t>
+            </a:r>
+          </a:p>
+        </p:txBody>
+      </p:sp>
+      <p:sp>
+        <p:nvSpPr>
+          <p:cNvPr id="302" name="Прямоугольник 301">
+            <a:extLst>
+              <a:ext uri="{FF2B5EF4-FFF2-40B4-BE49-F238E27FC236}">
+                <a16:creationId xmlns:a16="http://schemas.microsoft.com/office/drawing/2014/main" id="{8C12AE9B-0635-435B-A726-FBA33BFD39E9}"/>
+              </a:ext>
+            </a:extLst>
+          </p:cNvPr>
+          <p:cNvSpPr/>
+          <p:nvPr/>
+        </p:nvSpPr>
+        <p:spPr>
+          <a:xfrm>
+            <a:off x="38030723" y="23971840"/>
+            <a:ext cx="926325" cy="540000"/>
+          </a:xfrm>
+          <a:prstGeom prst="rect">
+            <a:avLst/>
+          </a:prstGeom>
+          <a:solidFill>
+            <a:schemeClr val="bg1"/>
+          </a:solidFill>
+          <a:ln w="19050"/>
+        </p:spPr>
+        <p:style>
+          <a:lnRef idx="2">
+            <a:schemeClr val="accent1"/>
+          </a:lnRef>
+          <a:fillRef idx="1">
+            <a:schemeClr val="lt1"/>
+          </a:fillRef>
+          <a:effectRef idx="0">
+            <a:schemeClr val="accent1"/>
+          </a:effectRef>
+          <a:fontRef idx="minor">
+            <a:schemeClr val="dk1"/>
+          </a:fontRef>
+        </p:style>
+        <p:txBody>
+          <a:bodyPr lIns="124733" tIns="62367" rIns="124733" bIns="62367" rtlCol="0" anchor="ctr"/>
+          <a:lstStyle/>
+          <a:p>
+            <a:pPr algn="ctr"/>
+            <a:r>
+              <a:rPr lang="ru-RU" sz="700" dirty="0"/>
+              <a:t>Танжер 2</a:t>
+            </a:r>
+          </a:p>
+        </p:txBody>
+      </p:sp>
+      <p:sp>
+        <p:nvSpPr>
+          <p:cNvPr id="303" name="Прямоугольник 302">
+            <a:extLst>
+              <a:ext uri="{FF2B5EF4-FFF2-40B4-BE49-F238E27FC236}">
+                <a16:creationId xmlns:a16="http://schemas.microsoft.com/office/drawing/2014/main" id="{C6291CBF-A1B8-479E-8EB0-EC4A56B3830E}"/>
+              </a:ext>
+            </a:extLst>
+          </p:cNvPr>
+          <p:cNvSpPr/>
+          <p:nvPr/>
+        </p:nvSpPr>
+        <p:spPr>
+          <a:xfrm>
+            <a:off x="38636631" y="23093893"/>
+            <a:ext cx="926325" cy="540000"/>
+          </a:xfrm>
+          <a:prstGeom prst="rect">
+            <a:avLst/>
+          </a:prstGeom>
+          <a:solidFill>
+            <a:schemeClr val="bg1"/>
+          </a:solidFill>
+          <a:ln w="19050"/>
+        </p:spPr>
+        <p:style>
+          <a:lnRef idx="2">
+            <a:schemeClr val="accent1"/>
+          </a:lnRef>
+          <a:fillRef idx="1">
+            <a:schemeClr val="lt1"/>
+          </a:fillRef>
+          <a:effectRef idx="0">
+            <a:schemeClr val="accent1"/>
+          </a:effectRef>
+          <a:fontRef idx="minor">
+            <a:schemeClr val="dk1"/>
+          </a:fontRef>
+        </p:style>
+        <p:txBody>
+          <a:bodyPr lIns="124733" tIns="62367" rIns="124733" bIns="62367" rtlCol="0" anchor="ctr"/>
+          <a:lstStyle/>
+          <a:p>
+            <a:pPr algn="ctr"/>
+            <a:r>
+              <a:rPr lang="ru-RU" sz="700" dirty="0"/>
+              <a:t>Лишить Танжер международного статуса</a:t>
+            </a:r>
+          </a:p>
+        </p:txBody>
+      </p:sp>
+      <p:sp>
+        <p:nvSpPr>
+          <p:cNvPr id="307" name="Прямоугольник 306">
+            <a:extLst>
+              <a:ext uri="{FF2B5EF4-FFF2-40B4-BE49-F238E27FC236}">
+                <a16:creationId xmlns:a16="http://schemas.microsoft.com/office/drawing/2014/main" id="{2DAAD328-4716-45C4-8FE9-1418B0F0515A}"/>
+              </a:ext>
+            </a:extLst>
+          </p:cNvPr>
+          <p:cNvSpPr/>
+          <p:nvPr/>
+        </p:nvSpPr>
+        <p:spPr>
+          <a:xfrm>
+            <a:off x="36815611" y="23971840"/>
+            <a:ext cx="926325" cy="540000"/>
+          </a:xfrm>
+          <a:prstGeom prst="rect">
+            <a:avLst/>
+          </a:prstGeom>
+          <a:solidFill>
+            <a:schemeClr val="bg1"/>
+          </a:solidFill>
+          <a:ln w="19050"/>
+        </p:spPr>
+        <p:style>
+          <a:lnRef idx="2">
+            <a:schemeClr val="accent1"/>
+          </a:lnRef>
+          <a:fillRef idx="1">
+            <a:schemeClr val="lt1"/>
+          </a:fillRef>
+          <a:effectRef idx="0">
+            <a:schemeClr val="accent1"/>
+          </a:effectRef>
+          <a:fontRef idx="minor">
+            <a:schemeClr val="dk1"/>
+          </a:fontRef>
+        </p:style>
+        <p:txBody>
+          <a:bodyPr lIns="124733" tIns="62367" rIns="124733" bIns="62367" rtlCol="0" anchor="ctr"/>
+          <a:lstStyle/>
+          <a:p>
+            <a:pPr algn="ctr"/>
+            <a:r>
+              <a:rPr lang="ru-RU" sz="700" dirty="0"/>
+              <a:t>Мавритания 3</a:t>
+            </a:r>
+          </a:p>
+        </p:txBody>
+      </p:sp>
+      <p:sp>
+        <p:nvSpPr>
+          <p:cNvPr id="308" name="Прямоугольник 307">
+            <a:extLst>
+              <a:ext uri="{FF2B5EF4-FFF2-40B4-BE49-F238E27FC236}">
+                <a16:creationId xmlns:a16="http://schemas.microsoft.com/office/drawing/2014/main" id="{E64F2EC9-A188-4CC0-AF6A-2976F8412A3F}"/>
+              </a:ext>
+            </a:extLst>
+          </p:cNvPr>
+          <p:cNvSpPr/>
+          <p:nvPr/>
+        </p:nvSpPr>
+        <p:spPr>
+          <a:xfrm>
+            <a:off x="36157351" y="23093893"/>
+            <a:ext cx="926325" cy="540000"/>
+          </a:xfrm>
+          <a:prstGeom prst="rect">
+            <a:avLst/>
+          </a:prstGeom>
+          <a:solidFill>
+            <a:schemeClr val="bg1"/>
+          </a:solidFill>
+          <a:ln w="19050"/>
+        </p:spPr>
+        <p:style>
+          <a:lnRef idx="2">
+            <a:schemeClr val="accent1"/>
+          </a:lnRef>
+          <a:fillRef idx="1">
+            <a:schemeClr val="lt1"/>
+          </a:fillRef>
+          <a:effectRef idx="0">
+            <a:schemeClr val="accent1"/>
+          </a:effectRef>
+          <a:fontRef idx="minor">
+            <a:schemeClr val="dk1"/>
+          </a:fontRef>
+        </p:style>
+        <p:txBody>
+          <a:bodyPr lIns="124733" tIns="62367" rIns="124733" bIns="62367" rtlCol="0" anchor="ctr"/>
+          <a:lstStyle/>
+          <a:p>
+            <a:pPr algn="ctr"/>
+            <a:r>
+              <a:rPr lang="ru-RU" sz="700" dirty="0"/>
+              <a:t>Мавритания – южная провинция Марокко</a:t>
+            </a:r>
+          </a:p>
+        </p:txBody>
+      </p:sp>
+      <p:sp>
+        <p:nvSpPr>
+          <p:cNvPr id="311" name="Прямоугольник 310">
+            <a:extLst>
+              <a:ext uri="{FF2B5EF4-FFF2-40B4-BE49-F238E27FC236}">
+                <a16:creationId xmlns:a16="http://schemas.microsoft.com/office/drawing/2014/main" id="{B2273294-389F-4374-B952-FAAE7A098FFF}"/>
+              </a:ext>
+            </a:extLst>
+          </p:cNvPr>
+          <p:cNvSpPr/>
+          <p:nvPr/>
+        </p:nvSpPr>
+        <p:spPr>
+          <a:xfrm>
+            <a:off x="35602007" y="23971840"/>
+            <a:ext cx="926325" cy="540000"/>
+          </a:xfrm>
+          <a:prstGeom prst="rect">
+            <a:avLst/>
+          </a:prstGeom>
+          <a:solidFill>
+            <a:schemeClr val="bg1"/>
+          </a:solidFill>
+          <a:ln w="19050"/>
+        </p:spPr>
+        <p:style>
+          <a:lnRef idx="2">
+            <a:schemeClr val="accent1"/>
+          </a:lnRef>
+          <a:fillRef idx="1">
+            <a:schemeClr val="lt1"/>
+          </a:fillRef>
+          <a:effectRef idx="0">
+            <a:schemeClr val="accent1"/>
+          </a:effectRef>
+          <a:fontRef idx="minor">
+            <a:schemeClr val="dk1"/>
+          </a:fontRef>
+        </p:style>
+        <p:txBody>
+          <a:bodyPr lIns="124733" tIns="62367" rIns="124733" bIns="62367" rtlCol="0" anchor="ctr"/>
+          <a:lstStyle/>
+          <a:p>
+            <a:pPr algn="ctr"/>
+            <a:r>
+              <a:rPr lang="ru-RU" sz="700" dirty="0"/>
+              <a:t>Мавритания 2</a:t>
+            </a:r>
+          </a:p>
+        </p:txBody>
+      </p:sp>
+      <p:sp>
+        <p:nvSpPr>
+          <p:cNvPr id="314" name="Прямоугольник 313">
+            <a:extLst>
+              <a:ext uri="{FF2B5EF4-FFF2-40B4-BE49-F238E27FC236}">
+                <a16:creationId xmlns:a16="http://schemas.microsoft.com/office/drawing/2014/main" id="{F565E1AC-9406-408D-8DBA-69C401B5F39C}"/>
+              </a:ext>
+            </a:extLst>
+          </p:cNvPr>
+          <p:cNvSpPr/>
+          <p:nvPr/>
+        </p:nvSpPr>
+        <p:spPr>
+          <a:xfrm>
+            <a:off x="38636631" y="24776003"/>
+            <a:ext cx="926325" cy="540000"/>
+          </a:xfrm>
+          <a:prstGeom prst="rect">
+            <a:avLst/>
+          </a:prstGeom>
+          <a:solidFill>
+            <a:schemeClr val="bg1"/>
+          </a:solidFill>
+          <a:ln w="19050"/>
+        </p:spPr>
+        <p:style>
+          <a:lnRef idx="2">
+            <a:schemeClr val="accent1"/>
+          </a:lnRef>
+          <a:fillRef idx="1">
+            <a:schemeClr val="lt1"/>
+          </a:fillRef>
+          <a:effectRef idx="0">
+            <a:schemeClr val="accent1"/>
+          </a:effectRef>
+          <a:fontRef idx="minor">
+            <a:schemeClr val="dk1"/>
+          </a:fontRef>
+        </p:style>
+        <p:txBody>
+          <a:bodyPr lIns="124733" tIns="62367" rIns="124733" bIns="62367" rtlCol="0" anchor="ctr"/>
+          <a:lstStyle/>
+          <a:p>
+            <a:pPr algn="ctr"/>
+            <a:r>
+              <a:rPr lang="ru-RU" sz="700" dirty="0"/>
+              <a:t>Провозгласить Великое Марокко</a:t>
+            </a:r>
+          </a:p>
+        </p:txBody>
+      </p:sp>
+      <p:cxnSp>
+        <p:nvCxnSpPr>
+          <p:cNvPr id="318" name="Соединительная линия уступом 620">
+            <a:extLst>
+              <a:ext uri="{FF2B5EF4-FFF2-40B4-BE49-F238E27FC236}">
+                <a16:creationId xmlns:a16="http://schemas.microsoft.com/office/drawing/2014/main" id="{2CFC8DF2-68B2-47EE-BEBC-B56651373BE0}"/>
+              </a:ext>
+            </a:extLst>
+          </p:cNvPr>
+          <p:cNvCxnSpPr>
+            <a:cxnSpLocks/>
+            <a:stCxn id="61" idx="2"/>
+            <a:endCxn id="314" idx="0"/>
+          </p:cNvCxnSpPr>
+          <p:nvPr/>
+        </p:nvCxnSpPr>
+        <p:spPr>
+          <a:xfrm rot="5400000">
+            <a:off x="39768380" y="22965308"/>
+            <a:ext cx="1142109" cy="2479280"/>
+          </a:xfrm>
+          <a:prstGeom prst="bentConnector3">
+            <a:avLst>
+              <a:gd name="adj1" fmla="val 15306"/>
+            </a:avLst>
+          </a:prstGeom>
+          <a:ln w="19050">
+            <a:tailEnd type="arrow"/>
+          </a:ln>
+        </p:spPr>
+        <p:style>
+          <a:lnRef idx="1">
+            <a:schemeClr val="accent1"/>
+          </a:lnRef>
+          <a:fillRef idx="0">
+            <a:schemeClr val="accent1"/>
+          </a:fillRef>
+          <a:effectRef idx="0">
+            <a:schemeClr val="accent1"/>
+          </a:effectRef>
+          <a:fontRef idx="minor">
+            <a:schemeClr val="tx1"/>
+          </a:fontRef>
+        </p:style>
+      </p:cxnSp>
+      <p:cxnSp>
+        <p:nvCxnSpPr>
+          <p:cNvPr id="322" name="Соединительная линия уступом 620">
+            <a:extLst>
+              <a:ext uri="{FF2B5EF4-FFF2-40B4-BE49-F238E27FC236}">
+                <a16:creationId xmlns:a16="http://schemas.microsoft.com/office/drawing/2014/main" id="{C378D33D-192E-4BD8-8069-087FC625EAE0}"/>
+              </a:ext>
+            </a:extLst>
+          </p:cNvPr>
+          <p:cNvCxnSpPr>
+            <a:cxnSpLocks/>
+            <a:stCxn id="303" idx="2"/>
+            <a:endCxn id="314" idx="0"/>
+          </p:cNvCxnSpPr>
+          <p:nvPr/>
+        </p:nvCxnSpPr>
+        <p:spPr>
+          <a:xfrm rot="5400000">
+            <a:off x="38528739" y="24204948"/>
+            <a:ext cx="1142110" cy="12700"/>
+          </a:xfrm>
+          <a:prstGeom prst="bentConnector3">
+            <a:avLst>
+              <a:gd name="adj1" fmla="val 50000"/>
+            </a:avLst>
+          </a:prstGeom>
+          <a:ln w="19050">
+            <a:tailEnd type="arrow"/>
+          </a:ln>
+        </p:spPr>
+        <p:style>
+          <a:lnRef idx="1">
+            <a:schemeClr val="accent1"/>
+          </a:lnRef>
+          <a:fillRef idx="0">
+            <a:schemeClr val="accent1"/>
+          </a:fillRef>
+          <a:effectRef idx="0">
+            <a:schemeClr val="accent1"/>
+          </a:effectRef>
+          <a:fontRef idx="minor">
+            <a:schemeClr val="tx1"/>
+          </a:fontRef>
+        </p:style>
+      </p:cxnSp>
+      <p:cxnSp>
+        <p:nvCxnSpPr>
+          <p:cNvPr id="325" name="Соединительная линия уступом 620">
+            <a:extLst>
+              <a:ext uri="{FF2B5EF4-FFF2-40B4-BE49-F238E27FC236}">
+                <a16:creationId xmlns:a16="http://schemas.microsoft.com/office/drawing/2014/main" id="{A1640AFC-145F-4409-A48E-55ED68C9F902}"/>
+              </a:ext>
+            </a:extLst>
+          </p:cNvPr>
+          <p:cNvCxnSpPr>
+            <a:cxnSpLocks/>
+            <a:stCxn id="308" idx="2"/>
+            <a:endCxn id="314" idx="0"/>
+          </p:cNvCxnSpPr>
+          <p:nvPr/>
+        </p:nvCxnSpPr>
+        <p:spPr>
+          <a:xfrm rot="16200000" flipH="1">
+            <a:off x="37289099" y="22965308"/>
+            <a:ext cx="1142110" cy="2479280"/>
+          </a:xfrm>
+          <a:prstGeom prst="bentConnector3">
+            <a:avLst>
+              <a:gd name="adj1" fmla="val 15306"/>
             </a:avLst>
           </a:prstGeom>
           <a:ln w="19050">

--- a/Наработки/диздоки/Марокко/Марокко.pptx
+++ b/Наработки/диздоки/Марокко/Марокко.pptx
@@ -209,7 +209,7 @@
             <a:fld id="{33E3D7F9-E251-484C-A6FF-FA958879DF69}" type="datetimeFigureOut">
               <a:rPr lang="ru-RU" smtClean="0"/>
               <a:pPr/>
-              <a:t>15.06.2026</a:t>
+              <a:t>16.06.2026</a:t>
             </a:fld>
             <a:endParaRPr lang="ru-RU"/>
           </a:p>
@@ -699,7 +699,7 @@
             <a:fld id="{85A5DE44-605B-4D3B-B2B7-94543DF81A36}" type="datetimeFigureOut">
               <a:rPr lang="ru-RU" smtClean="0"/>
               <a:pPr/>
-              <a:t>15.06.2026</a:t>
+              <a:t>16.06.2026</a:t>
             </a:fld>
             <a:endParaRPr lang="ru-RU"/>
           </a:p>
@@ -871,7 +871,7 @@
             <a:fld id="{85A5DE44-605B-4D3B-B2B7-94543DF81A36}" type="datetimeFigureOut">
               <a:rPr lang="ru-RU" smtClean="0"/>
               <a:pPr/>
-              <a:t>15.06.2026</a:t>
+              <a:t>16.06.2026</a:t>
             </a:fld>
             <a:endParaRPr lang="ru-RU"/>
           </a:p>
@@ -1053,7 +1053,7 @@
             <a:fld id="{85A5DE44-605B-4D3B-B2B7-94543DF81A36}" type="datetimeFigureOut">
               <a:rPr lang="ru-RU" smtClean="0"/>
               <a:pPr/>
-              <a:t>15.06.2026</a:t>
+              <a:t>16.06.2026</a:t>
             </a:fld>
             <a:endParaRPr lang="ru-RU"/>
           </a:p>
@@ -1225,7 +1225,7 @@
             <a:fld id="{85A5DE44-605B-4D3B-B2B7-94543DF81A36}" type="datetimeFigureOut">
               <a:rPr lang="ru-RU" smtClean="0"/>
               <a:pPr/>
-              <a:t>15.06.2026</a:t>
+              <a:t>16.06.2026</a:t>
             </a:fld>
             <a:endParaRPr lang="ru-RU"/>
           </a:p>
@@ -1473,7 +1473,7 @@
             <a:fld id="{85A5DE44-605B-4D3B-B2B7-94543DF81A36}" type="datetimeFigureOut">
               <a:rPr lang="ru-RU" smtClean="0"/>
               <a:pPr/>
-              <a:t>15.06.2026</a:t>
+              <a:t>16.06.2026</a:t>
             </a:fld>
             <a:endParaRPr lang="ru-RU"/>
           </a:p>
@@ -1707,7 +1707,7 @@
             <a:fld id="{85A5DE44-605B-4D3B-B2B7-94543DF81A36}" type="datetimeFigureOut">
               <a:rPr lang="ru-RU" smtClean="0"/>
               <a:pPr/>
-              <a:t>15.06.2026</a:t>
+              <a:t>16.06.2026</a:t>
             </a:fld>
             <a:endParaRPr lang="ru-RU"/>
           </a:p>
@@ -2076,7 +2076,7 @@
             <a:fld id="{85A5DE44-605B-4D3B-B2B7-94543DF81A36}" type="datetimeFigureOut">
               <a:rPr lang="ru-RU" smtClean="0"/>
               <a:pPr/>
-              <a:t>15.06.2026</a:t>
+              <a:t>16.06.2026</a:t>
             </a:fld>
             <a:endParaRPr lang="ru-RU"/>
           </a:p>
@@ -2196,7 +2196,7 @@
             <a:fld id="{85A5DE44-605B-4D3B-B2B7-94543DF81A36}" type="datetimeFigureOut">
               <a:rPr lang="ru-RU" smtClean="0"/>
               <a:pPr/>
-              <a:t>15.06.2026</a:t>
+              <a:t>16.06.2026</a:t>
             </a:fld>
             <a:endParaRPr lang="ru-RU"/>
           </a:p>
@@ -2293,7 +2293,7 @@
             <a:fld id="{85A5DE44-605B-4D3B-B2B7-94543DF81A36}" type="datetimeFigureOut">
               <a:rPr lang="ru-RU" smtClean="0"/>
               <a:pPr/>
-              <a:t>15.06.2026</a:t>
+              <a:t>16.06.2026</a:t>
             </a:fld>
             <a:endParaRPr lang="ru-RU"/>
           </a:p>
@@ -2572,7 +2572,7 @@
             <a:fld id="{85A5DE44-605B-4D3B-B2B7-94543DF81A36}" type="datetimeFigureOut">
               <a:rPr lang="ru-RU" smtClean="0"/>
               <a:pPr/>
-              <a:t>15.06.2026</a:t>
+              <a:t>16.06.2026</a:t>
             </a:fld>
             <a:endParaRPr lang="ru-RU"/>
           </a:p>
@@ -2831,7 +2831,7 @@
             <a:fld id="{85A5DE44-605B-4D3B-B2B7-94543DF81A36}" type="datetimeFigureOut">
               <a:rPr lang="ru-RU" smtClean="0"/>
               <a:pPr/>
-              <a:t>15.06.2026</a:t>
+              <a:t>16.06.2026</a:t>
             </a:fld>
             <a:endParaRPr lang="ru-RU"/>
           </a:p>
@@ -3046,7 +3046,7 @@
             <a:fld id="{85A5DE44-605B-4D3B-B2B7-94543DF81A36}" type="datetimeFigureOut">
               <a:rPr lang="ru-RU" smtClean="0"/>
               <a:pPr/>
-              <a:t>15.06.2026</a:t>
+              <a:t>16.06.2026</a:t>
             </a:fld>
             <a:endParaRPr lang="ru-RU"/>
           </a:p>
@@ -11894,8 +11894,48 @@
             <a:pPr algn="ctr"/>
             <a:r>
               <a:rPr lang="ru-RU" sz="700" dirty="0"/>
-              <a:t>Судьба короля?</a:t>
-            </a:r>
+              <a:t>Судьба султана?</a:t>
+            </a:r>
+            <a:br>
+              <a:rPr lang="ru-RU" sz="700" dirty="0"/>
+            </a:br>
+            <a:r>
+              <a:rPr lang="ru-RU" sz="200" dirty="0"/>
+              <a:t>Ликвидатор феодализма (</a:t>
+            </a:r>
+            <a:r>
+              <a:rPr lang="ru-RU" sz="200" dirty="0" err="1"/>
+              <a:t>Liquidator</a:t>
+            </a:r>
+            <a:r>
+              <a:rPr lang="ru-RU" sz="200" dirty="0"/>
+              <a:t> </a:t>
+            </a:r>
+            <a:r>
+              <a:rPr lang="ru-RU" sz="200" dirty="0" err="1"/>
+              <a:t>of</a:t>
+            </a:r>
+            <a:r>
+              <a:rPr lang="ru-RU" sz="200" dirty="0"/>
+              <a:t> </a:t>
+            </a:r>
+            <a:r>
+              <a:rPr lang="ru-RU" sz="200" dirty="0" err="1"/>
+              <a:t>Feudalism</a:t>
+            </a:r>
+            <a:r>
+              <a:rPr lang="ru-RU" sz="200" dirty="0"/>
+              <a:t>)Активируется через фокус «Упразднить </a:t>
+            </a:r>
+            <a:r>
+              <a:rPr lang="ru-RU" sz="200" dirty="0" err="1"/>
+              <a:t>Махзен</a:t>
+            </a:r>
+            <a:r>
+              <a:rPr lang="ru-RU" sz="200" dirty="0"/>
+              <a:t> и Султанат».🛑 Популярность нейтральной (монархической) идеологии: -0.05 в день.🛠️ Скорость конверсии гражданских фабрик в военные заводы: +15%📉 Краткосрочный штраф к стабильности: -5.00% (из-за сопротивления роялистов).</a:t>
+            </a:r>
+            <a:endParaRPr lang="ru-RU" sz="700" dirty="0"/>
           </a:p>
         </p:txBody>
       </p:sp>

--- a/Наработки/диздоки/Марокко/Марокко.pptx
+++ b/Наработки/диздоки/Марокко/Марокко.pptx
@@ -209,7 +209,7 @@
             <a:fld id="{33E3D7F9-E251-484C-A6FF-FA958879DF69}" type="datetimeFigureOut">
               <a:rPr lang="ru-RU" smtClean="0"/>
               <a:pPr/>
-              <a:t>16.06.2026</a:t>
+              <a:t>17.06.2026</a:t>
             </a:fld>
             <a:endParaRPr lang="ru-RU"/>
           </a:p>
@@ -699,7 +699,7 @@
             <a:fld id="{85A5DE44-605B-4D3B-B2B7-94543DF81A36}" type="datetimeFigureOut">
               <a:rPr lang="ru-RU" smtClean="0"/>
               <a:pPr/>
-              <a:t>16.06.2026</a:t>
+              <a:t>17.06.2026</a:t>
             </a:fld>
             <a:endParaRPr lang="ru-RU"/>
           </a:p>
@@ -871,7 +871,7 @@
             <a:fld id="{85A5DE44-605B-4D3B-B2B7-94543DF81A36}" type="datetimeFigureOut">
               <a:rPr lang="ru-RU" smtClean="0"/>
               <a:pPr/>
-              <a:t>16.06.2026</a:t>
+              <a:t>17.06.2026</a:t>
             </a:fld>
             <a:endParaRPr lang="ru-RU"/>
           </a:p>
@@ -1053,7 +1053,7 @@
             <a:fld id="{85A5DE44-605B-4D3B-B2B7-94543DF81A36}" type="datetimeFigureOut">
               <a:rPr lang="ru-RU" smtClean="0"/>
               <a:pPr/>
-              <a:t>16.06.2026</a:t>
+              <a:t>17.06.2026</a:t>
             </a:fld>
             <a:endParaRPr lang="ru-RU"/>
           </a:p>
@@ -1225,7 +1225,7 @@
             <a:fld id="{85A5DE44-605B-4D3B-B2B7-94543DF81A36}" type="datetimeFigureOut">
               <a:rPr lang="ru-RU" smtClean="0"/>
               <a:pPr/>
-              <a:t>16.06.2026</a:t>
+              <a:t>17.06.2026</a:t>
             </a:fld>
             <a:endParaRPr lang="ru-RU"/>
           </a:p>
@@ -1473,7 +1473,7 @@
             <a:fld id="{85A5DE44-605B-4D3B-B2B7-94543DF81A36}" type="datetimeFigureOut">
               <a:rPr lang="ru-RU" smtClean="0"/>
               <a:pPr/>
-              <a:t>16.06.2026</a:t>
+              <a:t>17.06.2026</a:t>
             </a:fld>
             <a:endParaRPr lang="ru-RU"/>
           </a:p>
@@ -1707,7 +1707,7 @@
             <a:fld id="{85A5DE44-605B-4D3B-B2B7-94543DF81A36}" type="datetimeFigureOut">
               <a:rPr lang="ru-RU" smtClean="0"/>
               <a:pPr/>
-              <a:t>16.06.2026</a:t>
+              <a:t>17.06.2026</a:t>
             </a:fld>
             <a:endParaRPr lang="ru-RU"/>
           </a:p>
@@ -2076,7 +2076,7 @@
             <a:fld id="{85A5DE44-605B-4D3B-B2B7-94543DF81A36}" type="datetimeFigureOut">
               <a:rPr lang="ru-RU" smtClean="0"/>
               <a:pPr/>
-              <a:t>16.06.2026</a:t>
+              <a:t>17.06.2026</a:t>
             </a:fld>
             <a:endParaRPr lang="ru-RU"/>
           </a:p>
@@ -2196,7 +2196,7 @@
             <a:fld id="{85A5DE44-605B-4D3B-B2B7-94543DF81A36}" type="datetimeFigureOut">
               <a:rPr lang="ru-RU" smtClean="0"/>
               <a:pPr/>
-              <a:t>16.06.2026</a:t>
+              <a:t>17.06.2026</a:t>
             </a:fld>
             <a:endParaRPr lang="ru-RU"/>
           </a:p>
@@ -2293,7 +2293,7 @@
             <a:fld id="{85A5DE44-605B-4D3B-B2B7-94543DF81A36}" type="datetimeFigureOut">
               <a:rPr lang="ru-RU" smtClean="0"/>
               <a:pPr/>
-              <a:t>16.06.2026</a:t>
+              <a:t>17.06.2026</a:t>
             </a:fld>
             <a:endParaRPr lang="ru-RU"/>
           </a:p>
@@ -2572,7 +2572,7 @@
             <a:fld id="{85A5DE44-605B-4D3B-B2B7-94543DF81A36}" type="datetimeFigureOut">
               <a:rPr lang="ru-RU" smtClean="0"/>
               <a:pPr/>
-              <a:t>16.06.2026</a:t>
+              <a:t>17.06.2026</a:t>
             </a:fld>
             <a:endParaRPr lang="ru-RU"/>
           </a:p>
@@ -2831,7 +2831,7 @@
             <a:fld id="{85A5DE44-605B-4D3B-B2B7-94543DF81A36}" type="datetimeFigureOut">
               <a:rPr lang="ru-RU" smtClean="0"/>
               <a:pPr/>
-              <a:t>16.06.2026</a:t>
+              <a:t>17.06.2026</a:t>
             </a:fld>
             <a:endParaRPr lang="ru-RU"/>
           </a:p>
@@ -3046,7 +3046,7 @@
             <a:fld id="{85A5DE44-605B-4D3B-B2B7-94543DF81A36}" type="datetimeFigureOut">
               <a:rPr lang="ru-RU" smtClean="0"/>
               <a:pPr/>
-              <a:t>16.06.2026</a:t>
+              <a:t>17.06.2026</a:t>
             </a:fld>
             <a:endParaRPr lang="ru-RU"/>
           </a:p>
@@ -7549,8 +7549,13 @@
             <a:pPr algn="ctr"/>
             <a:r>
               <a:rPr lang="ru-RU" sz="700" dirty="0"/>
-              <a:t>Создать государственный банк Марокко</a:t>
-            </a:r>
+              <a:t>Создать государственный банк Марокко </a:t>
+            </a:r>
+            <a:r>
+              <a:rPr lang="ru-RU" sz="400" dirty="0"/>
+              <a:t>(После объявления большого джихада)</a:t>
+            </a:r>
+            <a:endParaRPr lang="ru-RU" sz="700" dirty="0"/>
           </a:p>
         </p:txBody>
       </p:sp>
@@ -10795,7 +10800,7 @@
         <p:spPr>
           <a:xfrm flipH="1">
             <a:off x="7394931" y="2077655"/>
-            <a:ext cx="5970604" cy="0"/>
+            <a:ext cx="8622364" cy="0"/>
           </a:xfrm>
           <a:prstGeom prst="line">
             <a:avLst/>
@@ -11094,7 +11099,7 @@
         </p:nvSpPr>
         <p:spPr>
           <a:xfrm>
-            <a:off x="13365535" y="1807655"/>
+            <a:off x="16017295" y="1807655"/>
             <a:ext cx="926325" cy="540000"/>
           </a:xfrm>
           <a:prstGeom prst="rect">
@@ -11145,7 +11150,7 @@
         </p:nvSpPr>
         <p:spPr>
           <a:xfrm>
-            <a:off x="13953869" y="2617655"/>
+            <a:off x="16605629" y="2617655"/>
             <a:ext cx="926325" cy="540000"/>
           </a:xfrm>
           <a:prstGeom prst="rect">
@@ -11196,7 +11201,7 @@
         </p:nvSpPr>
         <p:spPr>
           <a:xfrm>
-            <a:off x="12766565" y="2617655"/>
+            <a:off x="15418325" y="2617655"/>
             <a:ext cx="926325" cy="540000"/>
           </a:xfrm>
           <a:prstGeom prst="rect">
@@ -11247,7 +11252,7 @@
         </p:nvSpPr>
         <p:spPr>
           <a:xfrm>
-            <a:off x="13365533" y="3427655"/>
+            <a:off x="16017293" y="3427655"/>
             <a:ext cx="926325" cy="540000"/>
           </a:xfrm>
           <a:prstGeom prst="rect">
@@ -11298,7 +11303,7 @@
         </p:nvSpPr>
         <p:spPr>
           <a:xfrm>
-            <a:off x="14554608" y="3427655"/>
+            <a:off x="17206368" y="3427655"/>
             <a:ext cx="926325" cy="540000"/>
           </a:xfrm>
           <a:prstGeom prst="rect">
@@ -11349,7 +11354,7 @@
         </p:nvSpPr>
         <p:spPr>
           <a:xfrm>
-            <a:off x="12176458" y="3427654"/>
+            <a:off x="14828218" y="3427654"/>
             <a:ext cx="926325" cy="540000"/>
           </a:xfrm>
           <a:prstGeom prst="rect">
@@ -11404,7 +11409,7 @@
         </p:nvCxnSpPr>
         <p:spPr>
           <a:xfrm rot="5400000">
-            <a:off x="13394213" y="2183170"/>
+            <a:off x="16045973" y="2183170"/>
             <a:ext cx="270000" cy="598970"/>
           </a:xfrm>
           <a:prstGeom prst="bentConnector3">
@@ -11449,7 +11454,7 @@
         </p:nvCxnSpPr>
         <p:spPr>
           <a:xfrm rot="16200000" flipH="1">
-            <a:off x="13987865" y="2188488"/>
+            <a:off x="16639625" y="2188488"/>
             <a:ext cx="270000" cy="588334"/>
           </a:xfrm>
           <a:prstGeom prst="bentConnector3">
@@ -11494,7 +11499,7 @@
         </p:nvCxnSpPr>
         <p:spPr>
           <a:xfrm flipH="1">
-            <a:off x="13692890" y="2887655"/>
+            <a:off x="16344650" y="2887655"/>
             <a:ext cx="260979" cy="0"/>
           </a:xfrm>
           <a:prstGeom prst="line">
@@ -11539,7 +11544,7 @@
         </p:nvCxnSpPr>
         <p:spPr>
           <a:xfrm rot="5400000">
-            <a:off x="12694161" y="2293116"/>
+            <a:off x="15345921" y="2293116"/>
             <a:ext cx="1079999" cy="1189077"/>
           </a:xfrm>
           <a:prstGeom prst="bentConnector3">
@@ -11584,7 +11589,7 @@
         </p:nvCxnSpPr>
         <p:spPr>
           <a:xfrm rot="16200000" flipH="1">
-            <a:off x="13883234" y="2293118"/>
+            <a:off x="16534994" y="2293118"/>
             <a:ext cx="1080000" cy="1189073"/>
           </a:xfrm>
           <a:prstGeom prst="bentConnector3">
@@ -11629,7 +11634,7 @@
         </p:nvCxnSpPr>
         <p:spPr>
           <a:xfrm rot="5400000">
-            <a:off x="13288697" y="2887654"/>
+            <a:off x="15940457" y="2887654"/>
             <a:ext cx="1080000" cy="2"/>
           </a:xfrm>
           <a:prstGeom prst="bentConnector3">
@@ -11670,7 +11675,7 @@
         </p:nvSpPr>
         <p:spPr>
           <a:xfrm>
-            <a:off x="12766565" y="4237653"/>
+            <a:off x="15418325" y="4237653"/>
             <a:ext cx="926325" cy="540000"/>
           </a:xfrm>
           <a:prstGeom prst="rect">
@@ -11721,7 +11726,7 @@
         </p:nvSpPr>
         <p:spPr>
           <a:xfrm>
-            <a:off x="13953868" y="4237653"/>
+            <a:off x="16605628" y="4237653"/>
             <a:ext cx="926325" cy="540000"/>
           </a:xfrm>
           <a:prstGeom prst="rect">
@@ -11776,7 +11781,7 @@
         </p:nvCxnSpPr>
         <p:spPr>
           <a:xfrm rot="16200000" flipH="1">
-            <a:off x="14066985" y="3507701"/>
+            <a:off x="16718745" y="3507701"/>
             <a:ext cx="1887395" cy="1187301"/>
           </a:xfrm>
           <a:prstGeom prst="bentConnector3">
@@ -11821,7 +11826,7 @@
         </p:nvCxnSpPr>
         <p:spPr>
           <a:xfrm rot="5400000">
-            <a:off x="11692379" y="3507700"/>
+            <a:off x="14344139" y="3507700"/>
             <a:ext cx="1887395" cy="1187304"/>
           </a:xfrm>
           <a:prstGeom prst="bentConnector3">
@@ -11862,7 +11867,7 @@
         </p:nvSpPr>
         <p:spPr>
           <a:xfrm>
-            <a:off x="13360215" y="5852447"/>
+            <a:off x="16011975" y="5852447"/>
             <a:ext cx="926325" cy="540000"/>
           </a:xfrm>
           <a:prstGeom prst="rect">
@@ -11957,7 +11962,7 @@
         </p:nvCxnSpPr>
         <p:spPr>
           <a:xfrm rot="16200000" flipH="1">
-            <a:off x="13987864" y="3808486"/>
+            <a:off x="16639624" y="3808486"/>
             <a:ext cx="269998" cy="588335"/>
           </a:xfrm>
           <a:prstGeom prst="bentConnector3">
@@ -12003,7 +12008,7 @@
         </p:nvCxnSpPr>
         <p:spPr>
           <a:xfrm rot="5400000">
-            <a:off x="14582402" y="3802284"/>
+            <a:off x="17234162" y="3802284"/>
             <a:ext cx="269998" cy="600740"/>
           </a:xfrm>
           <a:prstGeom prst="bentConnector3">
@@ -12049,7 +12054,7 @@
         </p:nvCxnSpPr>
         <p:spPr>
           <a:xfrm rot="16200000" flipH="1">
-            <a:off x="13393327" y="3213948"/>
+            <a:off x="16045087" y="3213948"/>
             <a:ext cx="269999" cy="1777410"/>
           </a:xfrm>
           <a:prstGeom prst="bentConnector3">
@@ -12095,7 +12100,7 @@
         </p:nvCxnSpPr>
         <p:spPr>
           <a:xfrm rot="16200000" flipH="1">
-            <a:off x="12799675" y="3807599"/>
+            <a:off x="15451435" y="3807599"/>
             <a:ext cx="269999" cy="590107"/>
           </a:xfrm>
           <a:prstGeom prst="bentConnector3">
@@ -12141,7 +12146,7 @@
         </p:nvCxnSpPr>
         <p:spPr>
           <a:xfrm rot="5400000">
-            <a:off x="13394213" y="3803170"/>
+            <a:off x="16045973" y="3803170"/>
             <a:ext cx="269998" cy="598968"/>
           </a:xfrm>
           <a:prstGeom prst="bentConnector3">
@@ -12187,7 +12192,7 @@
         </p:nvCxnSpPr>
         <p:spPr>
           <a:xfrm rot="5400000">
-            <a:off x="13988751" y="3208633"/>
+            <a:off x="16640511" y="3208633"/>
             <a:ext cx="269998" cy="1788043"/>
           </a:xfrm>
           <a:prstGeom prst="bentConnector3">
@@ -12229,7 +12234,7 @@
         </p:nvSpPr>
         <p:spPr>
           <a:xfrm>
-            <a:off x="15141170" y="5045050"/>
+            <a:off x="17792930" y="5045050"/>
             <a:ext cx="926325" cy="540000"/>
           </a:xfrm>
           <a:prstGeom prst="rect">
@@ -12280,7 +12285,7 @@
         </p:nvSpPr>
         <p:spPr>
           <a:xfrm>
-            <a:off x="11579261" y="5045050"/>
+            <a:off x="14231021" y="5045050"/>
             <a:ext cx="926325" cy="540000"/>
           </a:xfrm>
           <a:prstGeom prst="rect">
@@ -12335,7 +12340,7 @@
         </p:nvCxnSpPr>
         <p:spPr>
           <a:xfrm flipH="1">
-            <a:off x="12505586" y="5315050"/>
+            <a:off x="15157346" y="5315050"/>
             <a:ext cx="2635584" cy="0"/>
           </a:xfrm>
           <a:prstGeom prst="line">
@@ -12380,7 +12385,7 @@
         </p:nvCxnSpPr>
         <p:spPr>
           <a:xfrm rot="5400000">
-            <a:off x="14580158" y="4828271"/>
+            <a:off x="17231918" y="4828271"/>
             <a:ext cx="267397" cy="1780955"/>
           </a:xfrm>
           <a:prstGeom prst="bentConnector3">
@@ -12426,7 +12431,7 @@
         </p:nvCxnSpPr>
         <p:spPr>
           <a:xfrm rot="16200000" flipH="1">
-            <a:off x="12799203" y="4828271"/>
+            <a:off x="15450963" y="4828271"/>
             <a:ext cx="267397" cy="1780954"/>
           </a:xfrm>
           <a:prstGeom prst="bentConnector3">
@@ -12519,7 +12524,7 @@
         </p:nvSpPr>
         <p:spPr>
           <a:xfrm>
-            <a:off x="7652593" y="2617654"/>
+            <a:off x="8242834" y="2603290"/>
             <a:ext cx="926325" cy="540000"/>
           </a:xfrm>
           <a:prstGeom prst="rect">
@@ -12554,7 +12559,7 @@
             <a:pPr algn="ctr"/>
             <a:r>
               <a:rPr lang="ru-RU" sz="700" dirty="0"/>
-              <a:t>Оказать поддержку Марокканскому комитету действий</a:t>
+              <a:t>Оказать поддержку Марокканскому Комитету Действий</a:t>
             </a:r>
           </a:p>
         </p:txBody>
@@ -12624,7 +12629,7 @@
         </p:nvSpPr>
         <p:spPr>
           <a:xfrm>
-            <a:off x="5277986" y="2617654"/>
+            <a:off x="4680775" y="2602759"/>
             <a:ext cx="926325" cy="540000"/>
           </a:xfrm>
           <a:prstGeom prst="rect">
@@ -12680,9 +12685,9 @@
           <p:nvPr/>
         </p:nvCxnSpPr>
         <p:spPr>
-          <a:xfrm flipH="1">
-            <a:off x="6204311" y="2887654"/>
-            <a:ext cx="1448282" cy="0"/>
+          <a:xfrm flipH="1" flipV="1">
+            <a:off x="5607100" y="2872759"/>
+            <a:ext cx="2635734" cy="531"/>
           </a:xfrm>
           <a:prstGeom prst="line">
             <a:avLst/>
@@ -12726,8 +12731,8 @@
         </p:nvCxnSpPr>
         <p:spPr>
           <a:xfrm rot="5400000">
-            <a:off x="6201460" y="1887344"/>
-            <a:ext cx="269999" cy="1190620"/>
+            <a:off x="5910302" y="1581292"/>
+            <a:ext cx="255104" cy="1787831"/>
           </a:xfrm>
           <a:prstGeom prst="bentConnector3">
             <a:avLst>
@@ -12771,8 +12776,8 @@
         </p:nvCxnSpPr>
         <p:spPr>
           <a:xfrm rot="16200000" flipH="1">
-            <a:off x="7388763" y="1890660"/>
-            <a:ext cx="269999" cy="1183987"/>
+            <a:off x="7691066" y="1588358"/>
+            <a:ext cx="255635" cy="1774228"/>
           </a:xfrm>
           <a:prstGeom prst="bentConnector3">
             <a:avLst>
@@ -12812,7 +12817,7 @@
         </p:nvSpPr>
         <p:spPr>
           <a:xfrm>
-            <a:off x="8827977" y="4237649"/>
+            <a:off x="8842200" y="4235046"/>
             <a:ext cx="926325" cy="540000"/>
           </a:xfrm>
           <a:prstGeom prst="rect">
@@ -12847,75 +12852,8 @@
             <a:pPr algn="ctr"/>
             <a:r>
               <a:rPr lang="ru-RU" sz="700" dirty="0"/>
-              <a:t>Заменить великого визиря премьер-министром</a:t>
-            </a:r>
-          </a:p>
-        </p:txBody>
-      </p:sp>
-      <p:sp>
-        <p:nvSpPr>
-          <p:cNvPr id="277" name="Прямоугольник 276">
-            <a:extLst>
-              <a:ext uri="{FF2B5EF4-FFF2-40B4-BE49-F238E27FC236}">
-                <a16:creationId xmlns:a16="http://schemas.microsoft.com/office/drawing/2014/main" id="{68726DA4-BAC3-461E-B250-5516F4FA7E80}"/>
-              </a:ext>
-            </a:extLst>
-          </p:cNvPr>
-          <p:cNvSpPr/>
-          <p:nvPr/>
-        </p:nvSpPr>
-        <p:spPr>
-          <a:xfrm>
-            <a:off x="5277985" y="4237653"/>
-            <a:ext cx="926325" cy="540000"/>
-          </a:xfrm>
-          <a:prstGeom prst="rect">
-            <a:avLst/>
-          </a:prstGeom>
-          <a:solidFill>
-            <a:srgbClr val="7030A0"/>
-          </a:solidFill>
-          <a:ln w="19050"/>
-        </p:spPr>
-        <p:style>
-          <a:lnRef idx="2">
-            <a:schemeClr val="accent1"/>
-          </a:lnRef>
-          <a:fillRef idx="1">
-            <a:schemeClr val="lt1"/>
-          </a:fillRef>
-          <a:effectRef idx="0">
-            <a:schemeClr val="accent1"/>
-          </a:effectRef>
-          <a:fontRef idx="minor">
-            <a:schemeClr val="dk1"/>
-          </a:fontRef>
-        </p:style>
-        <p:txBody>
-          <a:bodyPr lIns="124733" tIns="62367" rIns="124733" bIns="62367" rtlCol="0" anchor="ctr"/>
-          <a:lstStyle/>
-          <a:p>
-            <a:pPr algn="ctr"/>
-            <a:r>
-              <a:rPr lang="ru-RU" sz="700" dirty="0"/>
-              <a:t>Начать ослабление колониальных институтов</a:t>
-            </a:r>
-          </a:p>
-          <a:p>
-            <a:pPr algn="ctr"/>
-            <a:r>
-              <a:rPr lang="ru-RU" sz="200" dirty="0"/>
-              <a:t>(должны быть послабления </a:t>
-            </a:r>
-            <a:r>
-              <a:rPr lang="ru-RU" sz="200" dirty="0" err="1"/>
-              <a:t>ответки</a:t>
-            </a:r>
-            <a:r>
-              <a:rPr lang="ru-RU" sz="200" dirty="0"/>
-              <a:t> если франция в ГВ)</a:t>
-            </a:r>
-            <a:endParaRPr lang="ru-RU" sz="700" dirty="0"/>
+              <a:t>Заменить пост великого визиря премьер-министром</a:t>
+            </a:r>
           </a:p>
         </p:txBody>
       </p:sp>
@@ -12979,7 +12917,7 @@
         </p:nvSpPr>
         <p:spPr>
           <a:xfrm>
-            <a:off x="4685223" y="3427653"/>
+            <a:off x="4098299" y="3425128"/>
             <a:ext cx="926325" cy="540000"/>
           </a:xfrm>
           <a:prstGeom prst="rect">
@@ -13036,8 +12974,8 @@
         </p:nvCxnSpPr>
         <p:spPr>
           <a:xfrm rot="5400000">
-            <a:off x="5309769" y="2996272"/>
-            <a:ext cx="269999" cy="592763"/>
+            <a:off x="4711516" y="2992705"/>
+            <a:ext cx="282369" cy="582476"/>
           </a:xfrm>
           <a:prstGeom prst="bentConnector3">
             <a:avLst>
@@ -13077,7 +13015,7 @@
         </p:nvSpPr>
         <p:spPr>
           <a:xfrm>
-            <a:off x="8247130" y="3427653"/>
+            <a:off x="8838914" y="3431990"/>
             <a:ext cx="926325" cy="540000"/>
           </a:xfrm>
           <a:prstGeom prst="rect">
@@ -13112,8 +13050,120 @@
             <a:pPr algn="ctr"/>
             <a:r>
               <a:rPr lang="ru-RU" sz="700" dirty="0"/>
-              <a:t>Начать пересмотр «плана реформ»</a:t>
-            </a:r>
+              <a:t>Разрешить публикацию националистических газет</a:t>
+            </a:r>
+            <a:br>
+              <a:rPr lang="ru-RU" sz="700" dirty="0"/>
+            </a:br>
+            <a:r>
+              <a:rPr lang="ru-RU" sz="100" dirty="0"/>
+              <a:t>(В январе 1937 года генерал-резидент Шарль </a:t>
+            </a:r>
+            <a:r>
+              <a:rPr lang="ru-RU" sz="100" dirty="0" err="1"/>
+              <a:t>Ногес</a:t>
+            </a:r>
+            <a:r>
+              <a:rPr lang="ru-RU" sz="100" dirty="0"/>
+              <a:t> разрешил публикацию нескольких националистических газет, что способствовало ускорению раскола внутри CAM. 12 февраля 1937 года в Рабате вышел арабоязычный еженедельник «Эль Атлас » под редакцией </a:t>
+            </a:r>
+            <a:r>
+              <a:rPr lang="ru-RU" sz="100" dirty="0" err="1"/>
+              <a:t>Мохамеда</a:t>
+            </a:r>
+            <a:r>
+              <a:rPr lang="ru-RU" sz="100" dirty="0"/>
+              <a:t> </a:t>
+            </a:r>
+            <a:r>
+              <a:rPr lang="ru-RU" sz="100" dirty="0" err="1"/>
+              <a:t>Лязиди</a:t>
+            </a:r>
+            <a:r>
+              <a:rPr lang="ru-RU" sz="100" dirty="0"/>
+              <a:t>, а 27 февраля того же года в Рабате вышел первый номер франкоязычного еженедельника « </a:t>
+            </a:r>
+            <a:r>
+              <a:rPr lang="ru-RU" sz="100" dirty="0" err="1"/>
+              <a:t>L'Action</a:t>
+            </a:r>
+            <a:r>
+              <a:rPr lang="ru-RU" sz="100" dirty="0"/>
+              <a:t> </a:t>
+            </a:r>
+            <a:r>
+              <a:rPr lang="ru-RU" sz="100" dirty="0" err="1"/>
+              <a:t>Populaire</a:t>
+            </a:r>
+            <a:r>
+              <a:rPr lang="ru-RU" sz="100" dirty="0"/>
+              <a:t> » под редакцией </a:t>
+            </a:r>
+            <a:r>
+              <a:rPr lang="ru-RU" sz="100" dirty="0" err="1"/>
+              <a:t>Мохамеда</a:t>
+            </a:r>
+            <a:r>
+              <a:rPr lang="ru-RU" sz="100" dirty="0"/>
+              <a:t> </a:t>
+            </a:r>
+            <a:r>
+              <a:rPr lang="ru-RU" sz="100" dirty="0" err="1"/>
+              <a:t>Аллала</a:t>
+            </a:r>
+            <a:r>
+              <a:rPr lang="ru-RU" sz="100" dirty="0"/>
+              <a:t> </a:t>
+            </a:r>
+            <a:r>
+              <a:rPr lang="ru-RU" sz="100" dirty="0" err="1"/>
+              <a:t>Фасси</a:t>
+            </a:r>
+            <a:r>
+              <a:rPr lang="ru-RU" sz="100" dirty="0"/>
+              <a:t> . </a:t>
+            </a:r>
+            <a:r>
+              <a:rPr lang="ru-RU" sz="100" dirty="0" err="1"/>
+              <a:t>Мохамед</a:t>
+            </a:r>
+            <a:r>
+              <a:rPr lang="ru-RU" sz="100" dirty="0"/>
+              <a:t> Хасан </a:t>
+            </a:r>
+            <a:r>
+              <a:rPr lang="ru-RU" sz="100" dirty="0" err="1"/>
+              <a:t>Уаззани</a:t>
+            </a:r>
+            <a:r>
+              <a:rPr lang="ru-RU" sz="100" dirty="0"/>
+              <a:t> получил разрешение на возобновление публикации «</a:t>
+            </a:r>
+            <a:r>
+              <a:rPr lang="ru-RU" sz="100" dirty="0" err="1"/>
+              <a:t>L'Action</a:t>
+            </a:r>
+            <a:r>
+              <a:rPr lang="ru-RU" sz="100" dirty="0"/>
+              <a:t> </a:t>
+            </a:r>
+            <a:r>
+              <a:rPr lang="ru-RU" sz="100" dirty="0" err="1"/>
+              <a:t>du</a:t>
+            </a:r>
+            <a:r>
+              <a:rPr lang="ru-RU" sz="100" dirty="0"/>
+              <a:t> </a:t>
+            </a:r>
+            <a:r>
+              <a:rPr lang="ru-RU" sz="100" dirty="0" err="1"/>
+              <a:t>Peuple</a:t>
+            </a:r>
+            <a:r>
+              <a:rPr lang="ru-RU" sz="100" dirty="0"/>
+              <a:t>» , которая начала выходить в еженедельном формате в апреле 1937 года.)</a:t>
+            </a:r>
+            <a:endParaRPr lang="ru-RU" sz="700" dirty="0"/>
           </a:p>
         </p:txBody>
       </p:sp>
@@ -13135,8 +13185,8 @@
         </p:nvCxnSpPr>
         <p:spPr>
           <a:xfrm rot="16200000" flipH="1">
-            <a:off x="8278025" y="2995384"/>
-            <a:ext cx="269999" cy="594537"/>
+            <a:off x="8859687" y="2989600"/>
+            <a:ext cx="288700" cy="596080"/>
           </a:xfrm>
           <a:prstGeom prst="bentConnector3">
             <a:avLst>
@@ -13176,7 +13226,7 @@
         </p:nvSpPr>
         <p:spPr>
           <a:xfrm>
-            <a:off x="4098299" y="4237653"/>
+            <a:off x="4102345" y="4237644"/>
             <a:ext cx="926325" cy="540000"/>
           </a:xfrm>
           <a:prstGeom prst="rect">
@@ -13232,9 +13282,9 @@
           <p:nvPr/>
         </p:nvCxnSpPr>
         <p:spPr>
-          <a:xfrm rot="5400000">
-            <a:off x="4719924" y="3809191"/>
-            <a:ext cx="270000" cy="586924"/>
+          <a:xfrm rot="16200000" flipH="1">
+            <a:off x="4427227" y="4099363"/>
+            <a:ext cx="272516" cy="4046"/>
           </a:xfrm>
           <a:prstGeom prst="bentConnector3">
             <a:avLst>
@@ -13243,96 +13293,6 @@
           </a:prstGeom>
           <a:ln w="19050">
             <a:tailEnd type="arrow"/>
-          </a:ln>
-        </p:spPr>
-        <p:style>
-          <a:lnRef idx="1">
-            <a:schemeClr val="accent1"/>
-          </a:lnRef>
-          <a:fillRef idx="0">
-            <a:schemeClr val="accent1"/>
-          </a:fillRef>
-          <a:effectRef idx="0">
-            <a:schemeClr val="accent1"/>
-          </a:effectRef>
-          <a:fontRef idx="minor">
-            <a:schemeClr val="tx1"/>
-          </a:fontRef>
-        </p:style>
-      </p:cxnSp>
-      <p:cxnSp>
-        <p:nvCxnSpPr>
-          <p:cNvPr id="295" name="Соединительная линия уступом 620">
-            <a:extLst>
-              <a:ext uri="{FF2B5EF4-FFF2-40B4-BE49-F238E27FC236}">
-                <a16:creationId xmlns:a16="http://schemas.microsoft.com/office/drawing/2014/main" id="{2EB205CF-39BF-49B2-8AF4-7BC15DEB704A}"/>
-              </a:ext>
-            </a:extLst>
-          </p:cNvPr>
-          <p:cNvCxnSpPr>
-            <a:cxnSpLocks/>
-            <a:stCxn id="283" idx="2"/>
-            <a:endCxn id="277" idx="0"/>
-          </p:cNvCxnSpPr>
-          <p:nvPr/>
-        </p:nvCxnSpPr>
-        <p:spPr>
-          <a:xfrm rot="16200000" flipH="1">
-            <a:off x="5309767" y="3806272"/>
-            <a:ext cx="270000" cy="592762"/>
-          </a:xfrm>
-          <a:prstGeom prst="bentConnector3">
-            <a:avLst>
-              <a:gd name="adj1" fmla="val 50000"/>
-            </a:avLst>
-          </a:prstGeom>
-          <a:ln w="19050">
-            <a:tailEnd type="arrow"/>
-          </a:ln>
-        </p:spPr>
-        <p:style>
-          <a:lnRef idx="1">
-            <a:schemeClr val="accent1"/>
-          </a:lnRef>
-          <a:fillRef idx="0">
-            <a:schemeClr val="accent1"/>
-          </a:fillRef>
-          <a:effectRef idx="0">
-            <a:schemeClr val="accent1"/>
-          </a:effectRef>
-          <a:fontRef idx="minor">
-            <a:schemeClr val="tx1"/>
-          </a:fontRef>
-        </p:style>
-      </p:cxnSp>
-      <p:cxnSp>
-        <p:nvCxnSpPr>
-          <p:cNvPr id="298" name="Прямая соединительная линия 297">
-            <a:extLst>
-              <a:ext uri="{FF2B5EF4-FFF2-40B4-BE49-F238E27FC236}">
-                <a16:creationId xmlns:a16="http://schemas.microsoft.com/office/drawing/2014/main" id="{3CAB4662-0790-4AAE-8D4D-1D72F1CE9B23}"/>
-              </a:ext>
-            </a:extLst>
-          </p:cNvPr>
-          <p:cNvCxnSpPr>
-            <a:cxnSpLocks/>
-            <a:stCxn id="277" idx="1"/>
-            <a:endCxn id="292" idx="3"/>
-          </p:cNvCxnSpPr>
-          <p:nvPr/>
-        </p:nvCxnSpPr>
-        <p:spPr>
-          <a:xfrm flipH="1">
-            <a:off x="5024624" y="4507653"/>
-            <a:ext cx="253361" cy="0"/>
-          </a:xfrm>
-          <a:prstGeom prst="line">
-            <a:avLst/>
-          </a:prstGeom>
-          <a:ln w="38100">
-            <a:solidFill>
-              <a:srgbClr val="C00000"/>
-            </a:solidFill>
           </a:ln>
         </p:spPr>
         <p:style>
@@ -13459,52 +13419,6 @@
           </a:p>
         </p:txBody>
       </p:sp>
-      <p:cxnSp>
-        <p:nvCxnSpPr>
-          <p:cNvPr id="313" name="Соединительная линия уступом 620">
-            <a:extLst>
-              <a:ext uri="{FF2B5EF4-FFF2-40B4-BE49-F238E27FC236}">
-                <a16:creationId xmlns:a16="http://schemas.microsoft.com/office/drawing/2014/main" id="{FE4788D6-0F79-41C1-B670-7498A365E880}"/>
-              </a:ext>
-            </a:extLst>
-          </p:cNvPr>
-          <p:cNvCxnSpPr>
-            <a:cxnSpLocks/>
-            <a:stCxn id="277" idx="2"/>
-            <a:endCxn id="310" idx="0"/>
-          </p:cNvCxnSpPr>
-          <p:nvPr/>
-        </p:nvCxnSpPr>
-        <p:spPr>
-          <a:xfrm rot="16200000" flipH="1">
-            <a:off x="6202760" y="4316040"/>
-            <a:ext cx="267396" cy="1190621"/>
-          </a:xfrm>
-          <a:prstGeom prst="bentConnector3">
-            <a:avLst>
-              <a:gd name="adj1" fmla="val 50000"/>
-            </a:avLst>
-          </a:prstGeom>
-          <a:ln w="19050">
-            <a:prstDash val="dash"/>
-            <a:tailEnd type="arrow"/>
-          </a:ln>
-        </p:spPr>
-        <p:style>
-          <a:lnRef idx="1">
-            <a:schemeClr val="accent1"/>
-          </a:lnRef>
-          <a:fillRef idx="0">
-            <a:schemeClr val="accent1"/>
-          </a:fillRef>
-          <a:effectRef idx="0">
-            <a:schemeClr val="accent1"/>
-          </a:effectRef>
-          <a:fontRef idx="minor">
-            <a:schemeClr val="tx1"/>
-          </a:fontRef>
-        </p:style>
-      </p:cxnSp>
       <p:sp>
         <p:nvSpPr>
           <p:cNvPr id="316" name="Прямоугольник 315">
@@ -13519,7 +13433,7 @@
         </p:nvSpPr>
         <p:spPr>
           <a:xfrm>
-            <a:off x="7648292" y="4237649"/>
+            <a:off x="7655904" y="5042438"/>
             <a:ext cx="926325" cy="540000"/>
           </a:xfrm>
           <a:prstGeom prst="rect">
@@ -13579,14 +13493,14 @@
           <p:cNvCxnSpPr>
             <a:cxnSpLocks/>
             <a:stCxn id="287" idx="2"/>
-            <a:endCxn id="316" idx="0"/>
+            <a:endCxn id="285" idx="0"/>
           </p:cNvCxnSpPr>
           <p:nvPr/>
         </p:nvCxnSpPr>
         <p:spPr>
           <a:xfrm rot="5400000">
-            <a:off x="8275876" y="3803232"/>
-            <a:ext cx="269996" cy="598838"/>
+            <a:off x="8581376" y="3514345"/>
+            <a:ext cx="263056" cy="1178346"/>
           </a:xfrm>
           <a:prstGeom prst="bentConnector3">
             <a:avLst>
@@ -13626,257 +13540,7 @@
         </p:nvSpPr>
         <p:spPr>
           <a:xfrm>
-            <a:off x="7648291" y="5852447"/>
-            <a:ext cx="926325" cy="540000"/>
-          </a:xfrm>
-          <a:prstGeom prst="rect">
-            <a:avLst/>
-          </a:prstGeom>
-          <a:solidFill>
-            <a:schemeClr val="accent1">
-              <a:lumMod val="60000"/>
-              <a:lumOff val="40000"/>
-            </a:schemeClr>
-          </a:solidFill>
-          <a:ln w="19050"/>
-        </p:spPr>
-        <p:style>
-          <a:lnRef idx="2">
-            <a:schemeClr val="accent1"/>
-          </a:lnRef>
-          <a:fillRef idx="1">
-            <a:schemeClr val="lt1"/>
-          </a:fillRef>
-          <a:effectRef idx="0">
-            <a:schemeClr val="accent1"/>
-          </a:effectRef>
-          <a:fontRef idx="minor">
-            <a:schemeClr val="dk1"/>
-          </a:fontRef>
-        </p:style>
-        <p:txBody>
-          <a:bodyPr lIns="124733" tIns="62367" rIns="124733" bIns="62367" rtlCol="0" anchor="ctr"/>
-          <a:lstStyle/>
-          <a:p>
-            <a:pPr algn="ctr"/>
-            <a:r>
-              <a:rPr lang="ru-RU" sz="700" dirty="0"/>
-              <a:t>Заключить пакт с Комитетом антифашистских милиций </a:t>
-            </a:r>
-            <a:r>
-              <a:rPr lang="ru-RU" sz="100" dirty="0"/>
-              <a:t>Каталонии</a:t>
-            </a:r>
-            <a:br>
-              <a:rPr lang="ru-RU" sz="100" dirty="0"/>
-            </a:br>
-            <a:r>
-              <a:rPr lang="ru-RU" sz="100" dirty="0"/>
-              <a:t>(Секретный пакт с каталонскими анархистами против Франко (Август — Сентябрь 1936)Это один из самых захватывающих и малоизвестных сюжетов реальной </a:t>
-            </a:r>
-            <a:r>
-              <a:rPr lang="ru-RU" sz="100" dirty="0" err="1"/>
-              <a:t>истории:В</a:t>
-            </a:r>
-            <a:r>
-              <a:rPr lang="ru-RU" sz="100" dirty="0"/>
-              <a:t> июле 1936 года в Испанском Марокко вспыхнул фашистский мятеж генерала </a:t>
-            </a:r>
-            <a:r>
-              <a:rPr lang="ru-RU" sz="100" dirty="0" err="1"/>
-              <a:t>Франко.В</a:t>
-            </a:r>
-            <a:r>
-              <a:rPr lang="ru-RU" sz="100" dirty="0"/>
-              <a:t> августе в Марокко (в Фес) тайно прибыли французские и испанские левые активисты (включая Давида Руссе и внука Карла Маркса — Роберта-Жана Лонге), чтобы скоординировать действия.19 сентября 1936 года лидеры CAM (Мухаммед Хасан аль-</a:t>
-            </a:r>
-            <a:r>
-              <a:rPr lang="ru-RU" sz="100" dirty="0" err="1"/>
-              <a:t>Уаццани</a:t>
-            </a:r>
-            <a:r>
-              <a:rPr lang="ru-RU" sz="100" dirty="0"/>
-              <a:t> и Омар </a:t>
-            </a:r>
-            <a:r>
-              <a:rPr lang="ru-RU" sz="100" dirty="0" err="1"/>
-              <a:t>Абдельджалиль</a:t>
-            </a:r>
-            <a:r>
-              <a:rPr lang="ru-RU" sz="100" dirty="0"/>
-              <a:t>) подписали в Барселоне тайный пакт с Комитетом антифашистских милиций Каталонии (в лице знаменитого анархиста Хуана Гарсии Оливера). Каталонцы пообещали признать полную независимость Испанского Марокко, если CAM поднимет восстание в тылу у </a:t>
-            </a:r>
-            <a:r>
-              <a:rPr lang="ru-RU" sz="100" dirty="0" err="1"/>
-              <a:t>Франко.Итог</a:t>
-            </a:r>
-            <a:r>
-              <a:rPr lang="ru-RU" sz="100" dirty="0"/>
-              <a:t>: План сорвался, так как премьер-министр Испании Ларго Кабальеро и премьер Франции Леон Блюм испугались колониальных бунтов и наложили вето на соглашение. В октябре аль-</a:t>
-            </a:r>
-            <a:r>
-              <a:rPr lang="ru-RU" sz="100" dirty="0" err="1"/>
-              <a:t>Уаццани</a:t>
-            </a:r>
-            <a:r>
-              <a:rPr lang="ru-RU" sz="100" dirty="0"/>
-              <a:t> лично летал в Париж, но Леон Блюм отказался его принять.)</a:t>
-            </a:r>
-            <a:endParaRPr lang="ru-RU" sz="700" dirty="0"/>
-          </a:p>
-        </p:txBody>
-      </p:sp>
-      <p:cxnSp>
-        <p:nvCxnSpPr>
-          <p:cNvPr id="321" name="Соединительная линия уступом 620">
-            <a:extLst>
-              <a:ext uri="{FF2B5EF4-FFF2-40B4-BE49-F238E27FC236}">
-                <a16:creationId xmlns:a16="http://schemas.microsoft.com/office/drawing/2014/main" id="{A4F65A7D-8CC9-4225-8C23-9C065F3ED477}"/>
-              </a:ext>
-            </a:extLst>
-          </p:cNvPr>
-          <p:cNvCxnSpPr>
-            <a:cxnSpLocks/>
-            <a:stCxn id="316" idx="2"/>
-            <a:endCxn id="310" idx="0"/>
-          </p:cNvCxnSpPr>
-          <p:nvPr/>
-        </p:nvCxnSpPr>
-        <p:spPr>
-          <a:xfrm rot="5400000">
-            <a:off x="7387912" y="4321506"/>
-            <a:ext cx="267400" cy="1179686"/>
-          </a:xfrm>
-          <a:prstGeom prst="bentConnector3">
-            <a:avLst>
-              <a:gd name="adj1" fmla="val 50000"/>
-            </a:avLst>
-          </a:prstGeom>
-          <a:ln w="19050">
-            <a:prstDash val="dash"/>
-            <a:tailEnd type="arrow"/>
-          </a:ln>
-        </p:spPr>
-        <p:style>
-          <a:lnRef idx="1">
-            <a:schemeClr val="accent1"/>
-          </a:lnRef>
-          <a:fillRef idx="0">
-            <a:schemeClr val="accent1"/>
-          </a:fillRef>
-          <a:effectRef idx="0">
-            <a:schemeClr val="accent1"/>
-          </a:effectRef>
-          <a:fontRef idx="minor">
-            <a:schemeClr val="tx1"/>
-          </a:fontRef>
-        </p:style>
-      </p:cxnSp>
-      <p:cxnSp>
-        <p:nvCxnSpPr>
-          <p:cNvPr id="324" name="Соединительная линия уступом 620">
-            <a:extLst>
-              <a:ext uri="{FF2B5EF4-FFF2-40B4-BE49-F238E27FC236}">
-                <a16:creationId xmlns:a16="http://schemas.microsoft.com/office/drawing/2014/main" id="{8AD15B03-422B-4B56-81F0-F9F3269CE8EC}"/>
-              </a:ext>
-            </a:extLst>
-          </p:cNvPr>
-          <p:cNvCxnSpPr>
-            <a:cxnSpLocks/>
-            <a:stCxn id="316" idx="2"/>
-            <a:endCxn id="332" idx="0"/>
-          </p:cNvCxnSpPr>
-          <p:nvPr/>
-        </p:nvCxnSpPr>
-        <p:spPr>
-          <a:xfrm rot="16200000" flipH="1">
-            <a:off x="8277173" y="4611930"/>
-            <a:ext cx="267400" cy="598837"/>
-          </a:xfrm>
-          <a:prstGeom prst="bentConnector3">
-            <a:avLst>
-              <a:gd name="adj1" fmla="val 50000"/>
-            </a:avLst>
-          </a:prstGeom>
-          <a:ln w="19050">
-            <a:tailEnd type="arrow"/>
-          </a:ln>
-        </p:spPr>
-        <p:style>
-          <a:lnRef idx="1">
-            <a:schemeClr val="accent1"/>
-          </a:lnRef>
-          <a:fillRef idx="0">
-            <a:schemeClr val="accent1"/>
-          </a:fillRef>
-          <a:effectRef idx="0">
-            <a:schemeClr val="accent1"/>
-          </a:effectRef>
-          <a:fontRef idx="minor">
-            <a:schemeClr val="tx1"/>
-          </a:fontRef>
-        </p:style>
-      </p:cxnSp>
-      <p:cxnSp>
-        <p:nvCxnSpPr>
-          <p:cNvPr id="328" name="Соединительная линия уступом 620">
-            <a:extLst>
-              <a:ext uri="{FF2B5EF4-FFF2-40B4-BE49-F238E27FC236}">
-                <a16:creationId xmlns:a16="http://schemas.microsoft.com/office/drawing/2014/main" id="{A39DDDD4-0444-47AF-A895-5B138AC5F7BD}"/>
-              </a:ext>
-            </a:extLst>
-          </p:cNvPr>
-          <p:cNvCxnSpPr>
-            <a:cxnSpLocks/>
-            <a:stCxn id="287" idx="2"/>
-            <a:endCxn id="275" idx="0"/>
-          </p:cNvCxnSpPr>
-          <p:nvPr/>
-        </p:nvCxnSpPr>
-        <p:spPr>
-          <a:xfrm rot="16200000" flipH="1">
-            <a:off x="8865718" y="3812227"/>
-            <a:ext cx="269996" cy="580847"/>
-          </a:xfrm>
-          <a:prstGeom prst="bentConnector3">
-            <a:avLst>
-              <a:gd name="adj1" fmla="val 50000"/>
-            </a:avLst>
-          </a:prstGeom>
-          <a:ln w="19050">
-            <a:tailEnd type="arrow"/>
-          </a:ln>
-        </p:spPr>
-        <p:style>
-          <a:lnRef idx="1">
-            <a:schemeClr val="accent1"/>
-          </a:lnRef>
-          <a:fillRef idx="0">
-            <a:schemeClr val="accent1"/>
-          </a:fillRef>
-          <a:effectRef idx="0">
-            <a:schemeClr val="accent1"/>
-          </a:effectRef>
-          <a:fontRef idx="minor">
-            <a:schemeClr val="tx1"/>
-          </a:fontRef>
-        </p:style>
-      </p:cxnSp>
-      <p:sp>
-        <p:nvSpPr>
-          <p:cNvPr id="330" name="Прямоугольник 329">
-            <a:extLst>
-              <a:ext uri="{FF2B5EF4-FFF2-40B4-BE49-F238E27FC236}">
-                <a16:creationId xmlns:a16="http://schemas.microsoft.com/office/drawing/2014/main" id="{77CC4BAF-A75D-4EBC-BE28-A54D5A61B12F}"/>
-              </a:ext>
-            </a:extLst>
-          </p:cNvPr>
-          <p:cNvSpPr/>
-          <p:nvPr/>
-        </p:nvSpPr>
-        <p:spPr>
-          <a:xfrm>
-            <a:off x="6465288" y="6659845"/>
+            <a:off x="7660083" y="5849528"/>
             <a:ext cx="926325" cy="540000"/>
           </a:xfrm>
           <a:prstGeom prst="rect">
@@ -13920,141 +13584,91 @@
             <a:pPr algn="ctr"/>
             <a:r>
               <a:rPr lang="ru-RU" sz="700" dirty="0"/>
-              <a:t>Объявить «Большой джихад»</a:t>
-            </a:r>
-          </a:p>
-        </p:txBody>
-      </p:sp>
-      <p:sp>
-        <p:nvSpPr>
-          <p:cNvPr id="331" name="Прямоугольник 330">
-            <a:extLst>
-              <a:ext uri="{FF2B5EF4-FFF2-40B4-BE49-F238E27FC236}">
-                <a16:creationId xmlns:a16="http://schemas.microsoft.com/office/drawing/2014/main" id="{878086EF-A044-4910-9A7E-6DCF7A246FAE}"/>
-              </a:ext>
-            </a:extLst>
-          </p:cNvPr>
-          <p:cNvSpPr/>
-          <p:nvPr/>
-        </p:nvSpPr>
-        <p:spPr>
-          <a:xfrm>
-            <a:off x="5281301" y="5045049"/>
-            <a:ext cx="926325" cy="540000"/>
-          </a:xfrm>
-          <a:prstGeom prst="rect">
-            <a:avLst/>
-          </a:prstGeom>
-          <a:solidFill>
-            <a:srgbClr val="7030A0"/>
-          </a:solidFill>
-          <a:ln w="19050"/>
-        </p:spPr>
-        <p:style>
-          <a:lnRef idx="2">
-            <a:schemeClr val="accent1"/>
-          </a:lnRef>
-          <a:fillRef idx="1">
-            <a:schemeClr val="lt1"/>
-          </a:fillRef>
-          <a:effectRef idx="0">
-            <a:schemeClr val="accent1"/>
-          </a:effectRef>
-          <a:fontRef idx="minor">
-            <a:schemeClr val="dk1"/>
-          </a:fontRef>
-        </p:style>
-        <p:txBody>
-          <a:bodyPr lIns="124733" tIns="62367" rIns="124733" bIns="62367" rtlCol="0" anchor="ctr"/>
-          <a:lstStyle/>
-          <a:p>
-            <a:pPr algn="ctr"/>
-            <a:r>
-              <a:rPr lang="ru-RU" sz="700" dirty="0"/>
-              <a:t>Реформировать </a:t>
-            </a:r>
-            <a:r>
-              <a:rPr lang="ru-RU" sz="700" dirty="0" err="1"/>
-              <a:t>мехзен</a:t>
+              <a:t>Заключить пакт с Комитетом антифашистских милиций </a:t>
+            </a:r>
+            <a:r>
+              <a:rPr lang="ru-RU" sz="100" dirty="0"/>
+              <a:t>Каталонии</a:t>
+            </a:r>
+            <a:br>
+              <a:rPr lang="ru-RU" sz="100" dirty="0"/>
+            </a:br>
+            <a:r>
+              <a:rPr lang="ru-RU" sz="100" dirty="0"/>
+              <a:t>(Секретный пакт с каталонскими анархистами против Франко (Август — Сентябрь 1936)Это один из самых захватывающих и малоизвестных сюжетов реальной </a:t>
+            </a:r>
+            <a:r>
+              <a:rPr lang="ru-RU" sz="100" dirty="0" err="1"/>
+              <a:t>истории:В</a:t>
+            </a:r>
+            <a:r>
+              <a:rPr lang="ru-RU" sz="100" dirty="0"/>
+              <a:t> июле 1936 года в Испанском Марокко вспыхнул фашистский мятеж генерала </a:t>
+            </a:r>
+            <a:r>
+              <a:rPr lang="ru-RU" sz="100" dirty="0" err="1"/>
+              <a:t>Франко.В</a:t>
+            </a:r>
+            <a:r>
+              <a:rPr lang="ru-RU" sz="100" dirty="0"/>
+              <a:t> августе в Марокко (в Фес) тайно прибыли французские и испанские левые активисты (включая Давида Руссе и внука Карла Маркса — Роберта-Жана Лонге), чтобы скоординировать действия.19 сентября 1936 года лидеры CAM (Мухаммед Хасан аль-</a:t>
+            </a:r>
+            <a:r>
+              <a:rPr lang="ru-RU" sz="100" dirty="0" err="1"/>
+              <a:t>Уаццани</a:t>
+            </a:r>
+            <a:r>
+              <a:rPr lang="ru-RU" sz="100" dirty="0"/>
+              <a:t> и Омар </a:t>
+            </a:r>
+            <a:r>
+              <a:rPr lang="ru-RU" sz="100" dirty="0" err="1"/>
+              <a:t>Абдельджалиль</a:t>
+            </a:r>
+            <a:r>
+              <a:rPr lang="ru-RU" sz="100" dirty="0"/>
+              <a:t>) подписали в Барселоне тайный пакт с Комитетом антифашистских милиций Каталонии (в лице знаменитого анархиста Хуана Гарсии Оливера). Каталонцы пообещали признать полную независимость Испанского Марокко, если CAM поднимет восстание в тылу у </a:t>
+            </a:r>
+            <a:r>
+              <a:rPr lang="ru-RU" sz="100" dirty="0" err="1"/>
+              <a:t>Франко.Итог</a:t>
+            </a:r>
+            <a:r>
+              <a:rPr lang="ru-RU" sz="100" dirty="0"/>
+              <a:t>: План сорвался, так как премьер-министр Испании Ларго Кабальеро и премьер Франции Леон Блюм испугались колониальных бунтов и наложили вето на соглашение. В октябре аль-</a:t>
+            </a:r>
+            <a:r>
+              <a:rPr lang="ru-RU" sz="100" dirty="0" err="1"/>
+              <a:t>Уаццани</a:t>
+            </a:r>
+            <a:r>
+              <a:rPr lang="ru-RU" sz="100" dirty="0"/>
+              <a:t> лично летал в Париж, но Леон Блюм отказался его принять.)</a:t>
             </a:r>
             <a:endParaRPr lang="ru-RU" sz="700" dirty="0"/>
-          </a:p>
-        </p:txBody>
-      </p:sp>
-      <p:sp>
-        <p:nvSpPr>
-          <p:cNvPr id="332" name="Прямоугольник 331">
-            <a:extLst>
-              <a:ext uri="{FF2B5EF4-FFF2-40B4-BE49-F238E27FC236}">
-                <a16:creationId xmlns:a16="http://schemas.microsoft.com/office/drawing/2014/main" id="{C0D52A2B-0B1A-46DA-A360-649D00FE7B0D}"/>
-              </a:ext>
-            </a:extLst>
-          </p:cNvPr>
-          <p:cNvSpPr/>
-          <p:nvPr/>
-        </p:nvSpPr>
-        <p:spPr>
-          <a:xfrm>
-            <a:off x="8247129" y="5045049"/>
-            <a:ext cx="926325" cy="540000"/>
-          </a:xfrm>
-          <a:prstGeom prst="rect">
-            <a:avLst/>
-          </a:prstGeom>
-          <a:solidFill>
-            <a:schemeClr val="accent1">
-              <a:lumMod val="60000"/>
-              <a:lumOff val="40000"/>
-            </a:schemeClr>
-          </a:solidFill>
-          <a:ln w="19050"/>
-        </p:spPr>
-        <p:style>
-          <a:lnRef idx="2">
-            <a:schemeClr val="accent1"/>
-          </a:lnRef>
-          <a:fillRef idx="1">
-            <a:schemeClr val="lt1"/>
-          </a:fillRef>
-          <a:effectRef idx="0">
-            <a:schemeClr val="accent1"/>
-          </a:effectRef>
-          <a:fontRef idx="minor">
-            <a:schemeClr val="dk1"/>
-          </a:fontRef>
-        </p:style>
-        <p:txBody>
-          <a:bodyPr lIns="124733" tIns="62367" rIns="124733" bIns="62367" rtlCol="0" anchor="ctr"/>
-          <a:lstStyle/>
-          <a:p>
-            <a:pPr algn="ctr"/>
-            <a:r>
-              <a:rPr lang="ru-RU" sz="700" dirty="0"/>
-              <a:t>Сформировать правительство</a:t>
-            </a:r>
           </a:p>
         </p:txBody>
       </p:sp>
       <p:cxnSp>
         <p:nvCxnSpPr>
-          <p:cNvPr id="335" name="Соединительная линия уступом 620">
-            <a:extLst>
-              <a:ext uri="{FF2B5EF4-FFF2-40B4-BE49-F238E27FC236}">
-                <a16:creationId xmlns:a16="http://schemas.microsoft.com/office/drawing/2014/main" id="{149F6E81-6649-4A6F-B521-8A1C2DEE6A33}"/>
+          <p:cNvPr id="321" name="Соединительная линия уступом 620">
+            <a:extLst>
+              <a:ext uri="{FF2B5EF4-FFF2-40B4-BE49-F238E27FC236}">
+                <a16:creationId xmlns:a16="http://schemas.microsoft.com/office/drawing/2014/main" id="{A4F65A7D-8CC9-4225-8C23-9C065F3ED477}"/>
               </a:ext>
             </a:extLst>
           </p:cNvPr>
           <p:cNvCxnSpPr>
             <a:cxnSpLocks/>
-            <a:stCxn id="275" idx="2"/>
-            <a:endCxn id="332" idx="0"/>
+            <a:stCxn id="285" idx="2"/>
+            <a:endCxn id="310" idx="0"/>
           </p:cNvCxnSpPr>
           <p:nvPr/>
         </p:nvCxnSpPr>
         <p:spPr>
           <a:xfrm rot="5400000">
-            <a:off x="8867016" y="4620925"/>
-            <a:ext cx="267400" cy="580848"/>
+            <a:off x="7392749" y="4314066"/>
+            <a:ext cx="270003" cy="1191962"/>
           </a:xfrm>
           <a:prstGeom prst="bentConnector3">
             <a:avLst>
@@ -14062,6 +13676,7 @@
             </a:avLst>
           </a:prstGeom>
           <a:ln w="19050">
+            <a:prstDash val="dash"/>
             <a:tailEnd type="arrow"/>
           </a:ln>
         </p:spPr>
@@ -14082,24 +13697,24 @@
       </p:cxnSp>
       <p:cxnSp>
         <p:nvCxnSpPr>
-          <p:cNvPr id="338" name="Соединительная линия уступом 620">
-            <a:extLst>
-              <a:ext uri="{FF2B5EF4-FFF2-40B4-BE49-F238E27FC236}">
-                <a16:creationId xmlns:a16="http://schemas.microsoft.com/office/drawing/2014/main" id="{55839570-C70C-41BC-BDA6-2CFAC066CB63}"/>
+          <p:cNvPr id="328" name="Соединительная линия уступом 620">
+            <a:extLst>
+              <a:ext uri="{FF2B5EF4-FFF2-40B4-BE49-F238E27FC236}">
+                <a16:creationId xmlns:a16="http://schemas.microsoft.com/office/drawing/2014/main" id="{A39DDDD4-0444-47AF-A895-5B138AC5F7BD}"/>
               </a:ext>
             </a:extLst>
           </p:cNvPr>
           <p:cNvCxnSpPr>
             <a:cxnSpLocks/>
-            <a:stCxn id="332" idx="2"/>
-            <a:endCxn id="320" idx="0"/>
+            <a:stCxn id="287" idx="2"/>
+            <a:endCxn id="275" idx="0"/>
           </p:cNvCxnSpPr>
           <p:nvPr/>
         </p:nvCxnSpPr>
         <p:spPr>
-          <a:xfrm rot="5400000">
-            <a:off x="8277174" y="5419329"/>
-            <a:ext cx="267398" cy="598838"/>
+          <a:xfrm rot="16200000" flipH="1">
+            <a:off x="9172192" y="4101875"/>
+            <a:ext cx="263056" cy="3286"/>
           </a:xfrm>
           <a:prstGeom prst="bentConnector3">
             <a:avLst>
@@ -14125,57 +13740,12 @@
           </a:fontRef>
         </p:style>
       </p:cxnSp>
-      <p:cxnSp>
-        <p:nvCxnSpPr>
-          <p:cNvPr id="341" name="Соединительная линия уступом 620">
-            <a:extLst>
-              <a:ext uri="{FF2B5EF4-FFF2-40B4-BE49-F238E27FC236}">
-                <a16:creationId xmlns:a16="http://schemas.microsoft.com/office/drawing/2014/main" id="{4F35E016-15D4-4BF5-9230-F6A9AE9CBB50}"/>
-              </a:ext>
-            </a:extLst>
-          </p:cNvPr>
-          <p:cNvCxnSpPr>
-            <a:cxnSpLocks/>
-            <a:stCxn id="310" idx="2"/>
-            <a:endCxn id="320" idx="0"/>
-          </p:cNvCxnSpPr>
-          <p:nvPr/>
-        </p:nvCxnSpPr>
-        <p:spPr>
-          <a:xfrm rot="16200000" flipH="1">
-            <a:off x="7387912" y="5128905"/>
-            <a:ext cx="267398" cy="1179685"/>
-          </a:xfrm>
-          <a:prstGeom prst="bentConnector3">
-            <a:avLst>
-              <a:gd name="adj1" fmla="val 50000"/>
-            </a:avLst>
-          </a:prstGeom>
-          <a:ln w="19050">
-            <a:tailEnd type="arrow"/>
-          </a:ln>
-        </p:spPr>
-        <p:style>
-          <a:lnRef idx="1">
-            <a:schemeClr val="accent1"/>
-          </a:lnRef>
-          <a:fillRef idx="0">
-            <a:schemeClr val="accent1"/>
-          </a:fillRef>
-          <a:effectRef idx="0">
-            <a:schemeClr val="accent1"/>
-          </a:effectRef>
-          <a:fontRef idx="minor">
-            <a:schemeClr val="tx1"/>
-          </a:fontRef>
-        </p:style>
-      </p:cxnSp>
-      <p:sp>
-        <p:nvSpPr>
-          <p:cNvPr id="344" name="Прямоугольник 343">
-            <a:extLst>
-              <a:ext uri="{FF2B5EF4-FFF2-40B4-BE49-F238E27FC236}">
-                <a16:creationId xmlns:a16="http://schemas.microsoft.com/office/drawing/2014/main" id="{827062AB-206B-4E55-A24F-66815255E901}"/>
+      <p:sp>
+        <p:nvSpPr>
+          <p:cNvPr id="330" name="Прямоугольник 329">
+            <a:extLst>
+              <a:ext uri="{FF2B5EF4-FFF2-40B4-BE49-F238E27FC236}">
+                <a16:creationId xmlns:a16="http://schemas.microsoft.com/office/drawing/2014/main" id="{77CC4BAF-A75D-4EBC-BE28-A54D5A61B12F}"/>
               </a:ext>
             </a:extLst>
           </p:cNvPr>
@@ -14184,7 +13754,7 @@
         </p:nvSpPr>
         <p:spPr>
           <a:xfrm>
-            <a:off x="6465289" y="5852447"/>
+            <a:off x="6465287" y="9078900"/>
             <a:ext cx="926325" cy="540000"/>
           </a:xfrm>
           <a:prstGeom prst="rect">
@@ -14228,6 +13798,123 @@
             <a:pPr algn="ctr"/>
             <a:r>
               <a:rPr lang="ru-RU" sz="700" dirty="0"/>
+              <a:t>Объявить «Большой джихад»</a:t>
+            </a:r>
+          </a:p>
+        </p:txBody>
+      </p:sp>
+      <p:sp>
+        <p:nvSpPr>
+          <p:cNvPr id="332" name="Прямоугольник 331">
+            <a:extLst>
+              <a:ext uri="{FF2B5EF4-FFF2-40B4-BE49-F238E27FC236}">
+                <a16:creationId xmlns:a16="http://schemas.microsoft.com/office/drawing/2014/main" id="{C0D52A2B-0B1A-46DA-A360-649D00FE7B0D}"/>
+              </a:ext>
+            </a:extLst>
+          </p:cNvPr>
+          <p:cNvSpPr/>
+          <p:nvPr/>
+        </p:nvSpPr>
+        <p:spPr>
+          <a:xfrm>
+            <a:off x="8842199" y="5849830"/>
+            <a:ext cx="926325" cy="540000"/>
+          </a:xfrm>
+          <a:prstGeom prst="rect">
+            <a:avLst/>
+          </a:prstGeom>
+          <a:solidFill>
+            <a:schemeClr val="accent1">
+              <a:lumMod val="60000"/>
+              <a:lumOff val="40000"/>
+            </a:schemeClr>
+          </a:solidFill>
+          <a:ln w="19050"/>
+        </p:spPr>
+        <p:style>
+          <a:lnRef idx="2">
+            <a:schemeClr val="accent1"/>
+          </a:lnRef>
+          <a:fillRef idx="1">
+            <a:schemeClr val="lt1"/>
+          </a:fillRef>
+          <a:effectRef idx="0">
+            <a:schemeClr val="accent1"/>
+          </a:effectRef>
+          <a:fontRef idx="minor">
+            <a:schemeClr val="dk1"/>
+          </a:fontRef>
+        </p:style>
+        <p:txBody>
+          <a:bodyPr lIns="124733" tIns="62367" rIns="124733" bIns="62367" rtlCol="0" anchor="ctr"/>
+          <a:lstStyle/>
+          <a:p>
+            <a:pPr algn="ctr"/>
+            <a:r>
+              <a:rPr lang="ru-RU" sz="700" dirty="0"/>
+              <a:t>Сформировать правительство</a:t>
+            </a:r>
+          </a:p>
+        </p:txBody>
+      </p:sp>
+      <p:sp>
+        <p:nvSpPr>
+          <p:cNvPr id="344" name="Прямоугольник 343">
+            <a:extLst>
+              <a:ext uri="{FF2B5EF4-FFF2-40B4-BE49-F238E27FC236}">
+                <a16:creationId xmlns:a16="http://schemas.microsoft.com/office/drawing/2014/main" id="{827062AB-206B-4E55-A24F-66815255E901}"/>
+              </a:ext>
+            </a:extLst>
+          </p:cNvPr>
+          <p:cNvSpPr/>
+          <p:nvPr/>
+        </p:nvSpPr>
+        <p:spPr>
+          <a:xfrm>
+            <a:off x="6465289" y="5852447"/>
+            <a:ext cx="926325" cy="540000"/>
+          </a:xfrm>
+          <a:prstGeom prst="rect">
+            <a:avLst/>
+          </a:prstGeom>
+          <a:gradFill flip="none" rotWithShape="1">
+            <a:gsLst>
+              <a:gs pos="0">
+                <a:srgbClr val="7030A0"/>
+              </a:gs>
+              <a:gs pos="100000">
+                <a:schemeClr val="accent1">
+                  <a:lumMod val="60000"/>
+                  <a:lumOff val="40000"/>
+                </a:schemeClr>
+              </a:gs>
+            </a:gsLst>
+            <a:lin ang="0" scaled="1"/>
+            <a:tileRect/>
+          </a:gradFill>
+          <a:ln w="19050"/>
+        </p:spPr>
+        <p:style>
+          <a:lnRef idx="2">
+            <a:schemeClr val="accent1"/>
+          </a:lnRef>
+          <a:fillRef idx="1">
+            <a:schemeClr val="lt1"/>
+          </a:fillRef>
+          <a:effectRef idx="0">
+            <a:schemeClr val="accent1"/>
+          </a:effectRef>
+          <a:fontRef idx="minor">
+            <a:schemeClr val="dk1"/>
+          </a:fontRef>
+        </p:style>
+        <p:txBody>
+          <a:bodyPr lIns="124733" tIns="62367" rIns="124733" bIns="62367" rtlCol="0" anchor="ctr"/>
+          <a:lstStyle/>
+          <a:p>
+            <a:pPr algn="ctr"/>
+            <a:r>
+              <a:rPr lang="ru-RU" sz="700" dirty="0"/>
               <a:t>Поддержать волнения в Алжире</a:t>
             </a:r>
           </a:p>
@@ -14343,7 +14030,7 @@
         </p:nvSpPr>
         <p:spPr>
           <a:xfrm>
-            <a:off x="14554608" y="5852447"/>
+            <a:off x="17206368" y="5852447"/>
             <a:ext cx="926325" cy="540000"/>
           </a:xfrm>
           <a:prstGeom prst="rect">
@@ -14394,7 +14081,7 @@
         </p:nvSpPr>
         <p:spPr>
           <a:xfrm>
-            <a:off x="15749001" y="5852447"/>
+            <a:off x="18400761" y="5852447"/>
             <a:ext cx="926325" cy="540000"/>
           </a:xfrm>
           <a:prstGeom prst="rect">
@@ -14449,7 +14136,7 @@
         </p:nvCxnSpPr>
         <p:spPr>
           <a:xfrm rot="16200000" flipH="1">
-            <a:off x="15774550" y="5414832"/>
+            <a:off x="18426310" y="5414832"/>
             <a:ext cx="267397" cy="607831"/>
           </a:xfrm>
           <a:prstGeom prst="bentConnector3">
@@ -14490,7 +14177,7 @@
         </p:nvSpPr>
         <p:spPr>
           <a:xfrm>
-            <a:off x="15749000" y="6659845"/>
+            <a:off x="18400760" y="6659845"/>
             <a:ext cx="926325" cy="540000"/>
           </a:xfrm>
           <a:prstGeom prst="rect">
@@ -14545,7 +14232,7 @@
         </p:nvCxnSpPr>
         <p:spPr>
           <a:xfrm rot="5400000">
-            <a:off x="16078465" y="6526146"/>
+            <a:off x="18730225" y="6526146"/>
             <a:ext cx="267398" cy="1"/>
           </a:xfrm>
           <a:prstGeom prst="bentConnector3">
@@ -14586,7 +14273,7 @@
         </p:nvSpPr>
         <p:spPr>
           <a:xfrm>
-            <a:off x="12165822" y="5854963"/>
+            <a:off x="14817582" y="5854963"/>
             <a:ext cx="926325" cy="540000"/>
           </a:xfrm>
           <a:prstGeom prst="rect">
@@ -14637,7 +14324,7 @@
         </p:nvSpPr>
         <p:spPr>
           <a:xfrm>
-            <a:off x="13360214" y="6659844"/>
+            <a:off x="16011974" y="6659844"/>
             <a:ext cx="926325" cy="540000"/>
           </a:xfrm>
           <a:prstGeom prst="rect">
@@ -14688,7 +14375,7 @@
         </p:nvSpPr>
         <p:spPr>
           <a:xfrm>
-            <a:off x="12165821" y="6657240"/>
+            <a:off x="14817581" y="6657240"/>
             <a:ext cx="926325" cy="540000"/>
           </a:xfrm>
           <a:prstGeom prst="rect">
@@ -14739,7 +14426,7 @@
         </p:nvSpPr>
         <p:spPr>
           <a:xfrm>
-            <a:off x="12766565" y="7469757"/>
+            <a:off x="15418325" y="7469757"/>
             <a:ext cx="926325" cy="540000"/>
           </a:xfrm>
           <a:prstGeom prst="rect">
@@ -14790,7 +14477,7 @@
         </p:nvSpPr>
         <p:spPr>
           <a:xfrm>
-            <a:off x="13953867" y="7467241"/>
+            <a:off x="16605627" y="7467241"/>
             <a:ext cx="926325" cy="540000"/>
           </a:xfrm>
           <a:prstGeom prst="rect">
@@ -14845,7 +14532,7 @@
         </p:nvCxnSpPr>
         <p:spPr>
           <a:xfrm rot="5400000">
-            <a:off x="15177354" y="5425467"/>
+            <a:off x="17829114" y="5425467"/>
             <a:ext cx="267397" cy="586562"/>
           </a:xfrm>
           <a:prstGeom prst="bentConnector3">
@@ -14891,7 +14578,7 @@
         </p:nvCxnSpPr>
         <p:spPr>
           <a:xfrm rot="16200000" flipH="1">
-            <a:off x="13396399" y="4231074"/>
+            <a:off x="16048159" y="4231074"/>
             <a:ext cx="267397" cy="2975347"/>
           </a:xfrm>
           <a:prstGeom prst="bentConnector3">
@@ -14937,7 +14624,7 @@
         </p:nvCxnSpPr>
         <p:spPr>
           <a:xfrm rot="16200000" flipH="1">
-            <a:off x="12200748" y="5426725"/>
+            <a:off x="14852508" y="5426725"/>
             <a:ext cx="269913" cy="586561"/>
           </a:xfrm>
           <a:prstGeom prst="bentConnector3">
@@ -14983,7 +14670,7 @@
         </p:nvCxnSpPr>
         <p:spPr>
           <a:xfrm rot="5400000">
-            <a:off x="13981703" y="4232332"/>
+            <a:off x="16633463" y="4232332"/>
             <a:ext cx="269913" cy="2975348"/>
           </a:xfrm>
           <a:prstGeom prst="bentConnector3">
@@ -15029,7 +14716,7 @@
         </p:nvCxnSpPr>
         <p:spPr>
           <a:xfrm rot="5400000">
-            <a:off x="12497847" y="6526101"/>
+            <a:off x="15149607" y="6526101"/>
             <a:ext cx="262277" cy="1"/>
           </a:xfrm>
           <a:prstGeom prst="bentConnector3">
@@ -15074,7 +14761,7 @@
         </p:nvCxnSpPr>
         <p:spPr>
           <a:xfrm rot="5400000">
-            <a:off x="14286876" y="5928948"/>
+            <a:off x="16938636" y="5928948"/>
             <a:ext cx="267397" cy="1194394"/>
           </a:xfrm>
           <a:prstGeom prst="bentConnector3">
@@ -15119,7 +14806,7 @@
         </p:nvCxnSpPr>
         <p:spPr>
           <a:xfrm rot="16200000" flipH="1">
-            <a:off x="13093741" y="5930207"/>
+            <a:off x="15745501" y="5930207"/>
             <a:ext cx="264881" cy="1194392"/>
           </a:xfrm>
           <a:prstGeom prst="bentConnector3">
@@ -15164,7 +14851,7 @@
         </p:nvCxnSpPr>
         <p:spPr>
           <a:xfrm rot="16200000" flipH="1">
-            <a:off x="13986505" y="7036715"/>
+            <a:off x="16638265" y="7036715"/>
             <a:ext cx="267397" cy="593653"/>
           </a:xfrm>
           <a:prstGeom prst="bentConnector3">
@@ -15209,7 +14896,7 @@
         </p:nvCxnSpPr>
         <p:spPr>
           <a:xfrm rot="5400000">
-            <a:off x="13391597" y="7037976"/>
+            <a:off x="16043357" y="7037976"/>
             <a:ext cx="269913" cy="593649"/>
           </a:xfrm>
           <a:prstGeom prst="bentConnector3">
@@ -15250,7 +14937,7 @@
         </p:nvSpPr>
         <p:spPr>
           <a:xfrm>
-            <a:off x="11579261" y="7457387"/>
+            <a:off x="14231021" y="7457387"/>
             <a:ext cx="926325" cy="540000"/>
           </a:xfrm>
           <a:prstGeom prst="rect">
@@ -15305,7 +14992,7 @@
         </p:nvCxnSpPr>
         <p:spPr>
           <a:xfrm rot="5400000">
-            <a:off x="12205631" y="7034033"/>
+            <a:off x="14857391" y="7034033"/>
             <a:ext cx="260147" cy="586560"/>
           </a:xfrm>
           <a:prstGeom prst="bentConnector3">
@@ -15346,7 +15033,7 @@
         </p:nvSpPr>
         <p:spPr>
           <a:xfrm>
-            <a:off x="14554606" y="6657240"/>
+            <a:off x="17206366" y="6657240"/>
             <a:ext cx="926325" cy="540000"/>
           </a:xfrm>
           <a:prstGeom prst="rect">
@@ -15401,7 +15088,7 @@
         </p:nvCxnSpPr>
         <p:spPr>
           <a:xfrm rot="5400000">
-            <a:off x="14885374" y="6524842"/>
+            <a:off x="17537134" y="6524842"/>
             <a:ext cx="264793" cy="2"/>
           </a:xfrm>
           <a:prstGeom prst="bentConnector3">
@@ -15442,7 +15129,7 @@
         </p:nvSpPr>
         <p:spPr>
           <a:xfrm>
-            <a:off x="15141170" y="7457387"/>
+            <a:off x="17792930" y="7457387"/>
             <a:ext cx="926325" cy="540000"/>
           </a:xfrm>
           <a:prstGeom prst="rect">
@@ -15497,7 +15184,7 @@
         </p:nvCxnSpPr>
         <p:spPr>
           <a:xfrm rot="16200000" flipH="1">
-            <a:off x="15180978" y="7034031"/>
+            <a:off x="17832738" y="7034031"/>
             <a:ext cx="260147" cy="586564"/>
           </a:xfrm>
           <a:prstGeom prst="bentConnector3">
@@ -15538,7 +15225,7 @@
         </p:nvSpPr>
         <p:spPr>
           <a:xfrm>
-            <a:off x="13360213" y="8274637"/>
+            <a:off x="16011973" y="8274637"/>
             <a:ext cx="926325" cy="540000"/>
           </a:xfrm>
           <a:prstGeom prst="rect">
@@ -15593,7 +15280,7 @@
         </p:nvCxnSpPr>
         <p:spPr>
           <a:xfrm rot="5400000">
-            <a:off x="13285981" y="7737240"/>
+            <a:off x="15937741" y="7737240"/>
             <a:ext cx="1074793" cy="1"/>
           </a:xfrm>
           <a:prstGeom prst="bentConnector3">
@@ -15634,7 +15321,7 @@
         </p:nvSpPr>
         <p:spPr>
           <a:xfrm>
-            <a:off x="12164785" y="8269517"/>
+            <a:off x="14816545" y="8269517"/>
             <a:ext cx="926325" cy="540000"/>
           </a:xfrm>
           <a:prstGeom prst="rect">
@@ -15689,7 +15376,7 @@
         </p:nvCxnSpPr>
         <p:spPr>
           <a:xfrm rot="5400000">
-            <a:off x="12092328" y="7732860"/>
+            <a:off x="14744088" y="7732860"/>
             <a:ext cx="1072277" cy="1036"/>
           </a:xfrm>
           <a:prstGeom prst="bentConnector3">
@@ -15730,7 +15417,7 @@
         </p:nvSpPr>
         <p:spPr>
           <a:xfrm>
-            <a:off x="14554605" y="8277242"/>
+            <a:off x="17206365" y="8277242"/>
             <a:ext cx="926325" cy="540000"/>
           </a:xfrm>
           <a:prstGeom prst="rect">
@@ -15785,7 +15472,7 @@
         </p:nvCxnSpPr>
         <p:spPr>
           <a:xfrm rot="5400000">
-            <a:off x="14477768" y="7737241"/>
+            <a:off x="17129528" y="7737241"/>
             <a:ext cx="1080002" cy="1"/>
           </a:xfrm>
           <a:prstGeom prst="bentConnector3">
@@ -15826,7 +15513,7 @@
         </p:nvSpPr>
         <p:spPr>
           <a:xfrm>
-            <a:off x="16962479" y="6652886"/>
+            <a:off x="19614239" y="6652886"/>
             <a:ext cx="926325" cy="540000"/>
           </a:xfrm>
           <a:prstGeom prst="rect">
@@ -15881,7 +15568,7 @@
         </p:nvCxnSpPr>
         <p:spPr>
           <a:xfrm rot="16200000" flipH="1">
-            <a:off x="16688684" y="5915927"/>
+            <a:off x="19340444" y="5915927"/>
             <a:ext cx="260439" cy="1213478"/>
           </a:xfrm>
           <a:prstGeom prst="bentConnector3">
@@ -15922,7 +15609,7 @@
         </p:nvSpPr>
         <p:spPr>
           <a:xfrm>
-            <a:off x="16355740" y="7460284"/>
+            <a:off x="19007500" y="7460284"/>
             <a:ext cx="926325" cy="540000"/>
           </a:xfrm>
           <a:prstGeom prst="rect">
@@ -15977,7 +15664,7 @@
         </p:nvCxnSpPr>
         <p:spPr>
           <a:xfrm rot="16200000" flipH="1">
-            <a:off x="16385314" y="7026694"/>
+            <a:off x="19037074" y="7026694"/>
             <a:ext cx="260439" cy="606740"/>
           </a:xfrm>
           <a:prstGeom prst="bentConnector3">
@@ -16022,7 +15709,7 @@
         </p:nvCxnSpPr>
         <p:spPr>
           <a:xfrm rot="5400000">
-            <a:off x="16988574" y="7023216"/>
+            <a:off x="19640334" y="7023216"/>
             <a:ext cx="267398" cy="606739"/>
           </a:xfrm>
           <a:prstGeom prst="bentConnector3">
@@ -16063,7 +15750,7 @@
         </p:nvSpPr>
         <p:spPr>
           <a:xfrm>
-            <a:off x="10971429" y="5852446"/>
+            <a:off x="13623189" y="5852446"/>
             <a:ext cx="926325" cy="540000"/>
           </a:xfrm>
           <a:prstGeom prst="rect">
@@ -16118,7 +15805,7 @@
         </p:nvCxnSpPr>
         <p:spPr>
           <a:xfrm rot="5400000">
-            <a:off x="11604810" y="5414832"/>
+            <a:off x="14256570" y="5414832"/>
             <a:ext cx="267396" cy="607832"/>
           </a:xfrm>
           <a:prstGeom prst="bentConnector3">
@@ -17079,6 +16766,3880 @@
           <a:prstGeom prst="bentConnector3">
             <a:avLst>
               <a:gd name="adj1" fmla="val 15306"/>
+            </a:avLst>
+          </a:prstGeom>
+          <a:ln w="19050">
+            <a:tailEnd type="arrow"/>
+          </a:ln>
+        </p:spPr>
+        <p:style>
+          <a:lnRef idx="1">
+            <a:schemeClr val="accent1"/>
+          </a:lnRef>
+          <a:fillRef idx="0">
+            <a:schemeClr val="accent1"/>
+          </a:fillRef>
+          <a:effectRef idx="0">
+            <a:schemeClr val="accent1"/>
+          </a:effectRef>
+          <a:fontRef idx="minor">
+            <a:schemeClr val="tx1"/>
+          </a:fontRef>
+        </p:style>
+      </p:cxnSp>
+      <p:sp>
+        <p:nvSpPr>
+          <p:cNvPr id="285" name="Прямоугольник 284">
+            <a:extLst>
+              <a:ext uri="{FF2B5EF4-FFF2-40B4-BE49-F238E27FC236}">
+                <a16:creationId xmlns:a16="http://schemas.microsoft.com/office/drawing/2014/main" id="{A620BFC9-FA27-4D27-89FD-71123B8D4A03}"/>
+              </a:ext>
+            </a:extLst>
+          </p:cNvPr>
+          <p:cNvSpPr/>
+          <p:nvPr/>
+        </p:nvSpPr>
+        <p:spPr>
+          <a:xfrm>
+            <a:off x="7660568" y="4235046"/>
+            <a:ext cx="926325" cy="540000"/>
+          </a:xfrm>
+          <a:prstGeom prst="rect">
+            <a:avLst/>
+          </a:prstGeom>
+          <a:gradFill flip="none" rotWithShape="1">
+            <a:gsLst>
+              <a:gs pos="0">
+                <a:srgbClr val="7030A0"/>
+              </a:gs>
+              <a:gs pos="100000">
+                <a:schemeClr val="accent1">
+                  <a:lumMod val="60000"/>
+                  <a:lumOff val="40000"/>
+                </a:schemeClr>
+              </a:gs>
+            </a:gsLst>
+            <a:lin ang="0" scaled="1"/>
+            <a:tileRect/>
+          </a:gradFill>
+          <a:ln w="19050"/>
+        </p:spPr>
+        <p:style>
+          <a:lnRef idx="2">
+            <a:schemeClr val="accent1"/>
+          </a:lnRef>
+          <a:fillRef idx="1">
+            <a:schemeClr val="lt1"/>
+          </a:fillRef>
+          <a:effectRef idx="0">
+            <a:schemeClr val="accent1"/>
+          </a:effectRef>
+          <a:fontRef idx="minor">
+            <a:schemeClr val="dk1"/>
+          </a:fontRef>
+        </p:style>
+        <p:txBody>
+          <a:bodyPr lIns="124733" tIns="62367" rIns="124733" bIns="62367" rtlCol="0" anchor="ctr"/>
+          <a:lstStyle/>
+          <a:p>
+            <a:pPr algn="ctr"/>
+            <a:r>
+              <a:rPr lang="ru-RU" sz="700" dirty="0"/>
+              <a:t>Начать пересмотр «плана реформ»</a:t>
+            </a:r>
+          </a:p>
+        </p:txBody>
+      </p:sp>
+      <p:cxnSp>
+        <p:nvCxnSpPr>
+          <p:cNvPr id="305" name="Соединительная линия уступом 620">
+            <a:extLst>
+              <a:ext uri="{FF2B5EF4-FFF2-40B4-BE49-F238E27FC236}">
+                <a16:creationId xmlns:a16="http://schemas.microsoft.com/office/drawing/2014/main" id="{B2A15EBA-8AB6-452B-AD69-08380A8C0834}"/>
+              </a:ext>
+            </a:extLst>
+          </p:cNvPr>
+          <p:cNvCxnSpPr>
+            <a:cxnSpLocks/>
+            <a:stCxn id="285" idx="2"/>
+            <a:endCxn id="316" idx="0"/>
+          </p:cNvCxnSpPr>
+          <p:nvPr/>
+        </p:nvCxnSpPr>
+        <p:spPr>
+          <a:xfrm rot="5400000">
+            <a:off x="7987703" y="4906410"/>
+            <a:ext cx="267392" cy="4664"/>
+          </a:xfrm>
+          <a:prstGeom prst="bentConnector3">
+            <a:avLst>
+              <a:gd name="adj1" fmla="val 50000"/>
+            </a:avLst>
+          </a:prstGeom>
+          <a:ln w="19050">
+            <a:tailEnd type="arrow"/>
+          </a:ln>
+        </p:spPr>
+        <p:style>
+          <a:lnRef idx="1">
+            <a:schemeClr val="accent1"/>
+          </a:lnRef>
+          <a:fillRef idx="0">
+            <a:schemeClr val="accent1"/>
+          </a:fillRef>
+          <a:effectRef idx="0">
+            <a:schemeClr val="accent1"/>
+          </a:effectRef>
+          <a:fontRef idx="minor">
+            <a:schemeClr val="tx1"/>
+          </a:fontRef>
+        </p:style>
+      </p:cxnSp>
+      <p:cxnSp>
+        <p:nvCxnSpPr>
+          <p:cNvPr id="329" name="Соединительная линия уступом 620">
+            <a:extLst>
+              <a:ext uri="{FF2B5EF4-FFF2-40B4-BE49-F238E27FC236}">
+                <a16:creationId xmlns:a16="http://schemas.microsoft.com/office/drawing/2014/main" id="{B804F62F-B20E-4406-B10B-6AF6F0F673C7}"/>
+              </a:ext>
+            </a:extLst>
+          </p:cNvPr>
+          <p:cNvCxnSpPr>
+            <a:cxnSpLocks/>
+            <a:stCxn id="310" idx="2"/>
+            <a:endCxn id="341" idx="0"/>
+          </p:cNvCxnSpPr>
+          <p:nvPr/>
+        </p:nvCxnSpPr>
+        <p:spPr>
+          <a:xfrm rot="5400000">
+            <a:off x="6095832" y="5827548"/>
+            <a:ext cx="1078436" cy="593439"/>
+          </a:xfrm>
+          <a:prstGeom prst="bentConnector3">
+            <a:avLst>
+              <a:gd name="adj1" fmla="val 12316"/>
+            </a:avLst>
+          </a:prstGeom>
+          <a:ln w="19050">
+            <a:tailEnd type="arrow"/>
+          </a:ln>
+        </p:spPr>
+        <p:style>
+          <a:lnRef idx="1">
+            <a:schemeClr val="accent1"/>
+          </a:lnRef>
+          <a:fillRef idx="0">
+            <a:schemeClr val="accent1"/>
+          </a:fillRef>
+          <a:effectRef idx="0">
+            <a:schemeClr val="accent1"/>
+          </a:effectRef>
+          <a:fontRef idx="minor">
+            <a:schemeClr val="tx1"/>
+          </a:fontRef>
+        </p:style>
+      </p:cxnSp>
+      <p:cxnSp>
+        <p:nvCxnSpPr>
+          <p:cNvPr id="334" name="Соединительная линия уступом 620">
+            <a:extLst>
+              <a:ext uri="{FF2B5EF4-FFF2-40B4-BE49-F238E27FC236}">
+                <a16:creationId xmlns:a16="http://schemas.microsoft.com/office/drawing/2014/main" id="{D8862DE7-75C1-481F-A43A-1EDE0A9FC18C}"/>
+              </a:ext>
+            </a:extLst>
+          </p:cNvPr>
+          <p:cNvCxnSpPr>
+            <a:cxnSpLocks/>
+            <a:stCxn id="310" idx="2"/>
+            <a:endCxn id="344" idx="0"/>
+          </p:cNvCxnSpPr>
+          <p:nvPr/>
+        </p:nvCxnSpPr>
+        <p:spPr>
+          <a:xfrm rot="5400000">
+            <a:off x="6796412" y="5717090"/>
+            <a:ext cx="267398" cy="3317"/>
+          </a:xfrm>
+          <a:prstGeom prst="bentConnector3">
+            <a:avLst>
+              <a:gd name="adj1" fmla="val 50000"/>
+            </a:avLst>
+          </a:prstGeom>
+          <a:ln w="19050">
+            <a:tailEnd type="arrow"/>
+          </a:ln>
+        </p:spPr>
+        <p:style>
+          <a:lnRef idx="1">
+            <a:schemeClr val="accent1"/>
+          </a:lnRef>
+          <a:fillRef idx="0">
+            <a:schemeClr val="accent1"/>
+          </a:fillRef>
+          <a:effectRef idx="0">
+            <a:schemeClr val="accent1"/>
+          </a:effectRef>
+          <a:fontRef idx="minor">
+            <a:schemeClr val="tx1"/>
+          </a:fontRef>
+        </p:style>
+      </p:cxnSp>
+      <p:sp>
+        <p:nvSpPr>
+          <p:cNvPr id="337" name="Прямоугольник 336">
+            <a:extLst>
+              <a:ext uri="{FF2B5EF4-FFF2-40B4-BE49-F238E27FC236}">
+                <a16:creationId xmlns:a16="http://schemas.microsoft.com/office/drawing/2014/main" id="{BA4108B4-FADE-4200-9551-1CEDA6CCEBDD}"/>
+              </a:ext>
+            </a:extLst>
+          </p:cNvPr>
+          <p:cNvSpPr/>
+          <p:nvPr/>
+        </p:nvSpPr>
+        <p:spPr>
+          <a:xfrm>
+            <a:off x="6465288" y="7467240"/>
+            <a:ext cx="926325" cy="540000"/>
+          </a:xfrm>
+          <a:prstGeom prst="rect">
+            <a:avLst/>
+          </a:prstGeom>
+          <a:gradFill flip="none" rotWithShape="1">
+            <a:gsLst>
+              <a:gs pos="0">
+                <a:srgbClr val="7030A0"/>
+              </a:gs>
+              <a:gs pos="100000">
+                <a:schemeClr val="accent1">
+                  <a:lumMod val="60000"/>
+                  <a:lumOff val="40000"/>
+                </a:schemeClr>
+              </a:gs>
+            </a:gsLst>
+            <a:lin ang="0" scaled="1"/>
+            <a:tileRect/>
+          </a:gradFill>
+          <a:ln w="19050"/>
+        </p:spPr>
+        <p:style>
+          <a:lnRef idx="2">
+            <a:schemeClr val="accent1"/>
+          </a:lnRef>
+          <a:fillRef idx="1">
+            <a:schemeClr val="lt1"/>
+          </a:fillRef>
+          <a:effectRef idx="0">
+            <a:schemeClr val="accent1"/>
+          </a:effectRef>
+          <a:fontRef idx="minor">
+            <a:schemeClr val="dk1"/>
+          </a:fontRef>
+        </p:style>
+        <p:txBody>
+          <a:bodyPr lIns="124733" tIns="62367" rIns="124733" bIns="62367" rtlCol="0" anchor="ctr"/>
+          <a:lstStyle/>
+          <a:p>
+            <a:pPr algn="ctr"/>
+            <a:r>
+              <a:rPr lang="ru-RU" sz="700" dirty="0"/>
+              <a:t>Начать борьбу за нашу свободу</a:t>
+            </a:r>
+          </a:p>
+        </p:txBody>
+      </p:sp>
+      <p:cxnSp>
+        <p:nvCxnSpPr>
+          <p:cNvPr id="343" name="Соединительная линия уступом 620">
+            <a:extLst>
+              <a:ext uri="{FF2B5EF4-FFF2-40B4-BE49-F238E27FC236}">
+                <a16:creationId xmlns:a16="http://schemas.microsoft.com/office/drawing/2014/main" id="{428D6404-6AD3-4071-945C-AE9B9272A81E}"/>
+              </a:ext>
+            </a:extLst>
+          </p:cNvPr>
+          <p:cNvCxnSpPr>
+            <a:cxnSpLocks/>
+            <a:stCxn id="316" idx="2"/>
+            <a:endCxn id="332" idx="0"/>
+          </p:cNvCxnSpPr>
+          <p:nvPr/>
+        </p:nvCxnSpPr>
+        <p:spPr>
+          <a:xfrm rot="16200000" flipH="1">
+            <a:off x="8578518" y="5122986"/>
+            <a:ext cx="267392" cy="1186295"/>
+          </a:xfrm>
+          <a:prstGeom prst="bentConnector3">
+            <a:avLst>
+              <a:gd name="adj1" fmla="val 50000"/>
+            </a:avLst>
+          </a:prstGeom>
+          <a:ln w="19050">
+            <a:tailEnd type="arrow"/>
+          </a:ln>
+        </p:spPr>
+        <p:style>
+          <a:lnRef idx="1">
+            <a:schemeClr val="accent1"/>
+          </a:lnRef>
+          <a:fillRef idx="0">
+            <a:schemeClr val="accent1"/>
+          </a:fillRef>
+          <a:effectRef idx="0">
+            <a:schemeClr val="accent1"/>
+          </a:effectRef>
+          <a:fontRef idx="minor">
+            <a:schemeClr val="tx1"/>
+          </a:fontRef>
+        </p:style>
+      </p:cxnSp>
+      <p:cxnSp>
+        <p:nvCxnSpPr>
+          <p:cNvPr id="347" name="Соединительная линия уступом 620">
+            <a:extLst>
+              <a:ext uri="{FF2B5EF4-FFF2-40B4-BE49-F238E27FC236}">
+                <a16:creationId xmlns:a16="http://schemas.microsoft.com/office/drawing/2014/main" id="{044D3774-F822-48CC-947E-EF6B5C279EAA}"/>
+              </a:ext>
+            </a:extLst>
+          </p:cNvPr>
+          <p:cNvCxnSpPr>
+            <a:cxnSpLocks/>
+            <a:stCxn id="316" idx="2"/>
+          </p:cNvCxnSpPr>
+          <p:nvPr/>
+        </p:nvCxnSpPr>
+        <p:spPr>
+          <a:xfrm rot="16200000" flipH="1">
+            <a:off x="7984513" y="5716992"/>
+            <a:ext cx="274478" cy="5370"/>
+          </a:xfrm>
+          <a:prstGeom prst="bentConnector3">
+            <a:avLst>
+              <a:gd name="adj1" fmla="val 50000"/>
+            </a:avLst>
+          </a:prstGeom>
+          <a:ln w="19050">
+            <a:prstDash val="dash"/>
+            <a:tailEnd type="arrow"/>
+          </a:ln>
+        </p:spPr>
+        <p:style>
+          <a:lnRef idx="1">
+            <a:schemeClr val="accent1"/>
+          </a:lnRef>
+          <a:fillRef idx="0">
+            <a:schemeClr val="accent1"/>
+          </a:fillRef>
+          <a:effectRef idx="0">
+            <a:schemeClr val="accent1"/>
+          </a:effectRef>
+          <a:fontRef idx="minor">
+            <a:schemeClr val="tx1"/>
+          </a:fontRef>
+        </p:style>
+      </p:cxnSp>
+      <p:cxnSp>
+        <p:nvCxnSpPr>
+          <p:cNvPr id="348" name="Соединительная линия уступом 620">
+            <a:extLst>
+              <a:ext uri="{FF2B5EF4-FFF2-40B4-BE49-F238E27FC236}">
+                <a16:creationId xmlns:a16="http://schemas.microsoft.com/office/drawing/2014/main" id="{F04D2F1B-ED28-4083-8843-EC9AD7CBF2C8}"/>
+              </a:ext>
+            </a:extLst>
+          </p:cNvPr>
+          <p:cNvCxnSpPr>
+            <a:cxnSpLocks/>
+            <a:stCxn id="310" idx="2"/>
+            <a:endCxn id="320" idx="0"/>
+          </p:cNvCxnSpPr>
+          <p:nvPr/>
+        </p:nvCxnSpPr>
+        <p:spPr>
+          <a:xfrm rot="16200000" flipH="1">
+            <a:off x="7395268" y="5121549"/>
+            <a:ext cx="264479" cy="1191477"/>
+          </a:xfrm>
+          <a:prstGeom prst="bentConnector3">
+            <a:avLst>
+              <a:gd name="adj1" fmla="val 50000"/>
+            </a:avLst>
+          </a:prstGeom>
+          <a:ln w="19050">
+            <a:tailEnd type="arrow"/>
+          </a:ln>
+        </p:spPr>
+        <p:style>
+          <a:lnRef idx="1">
+            <a:schemeClr val="accent1"/>
+          </a:lnRef>
+          <a:fillRef idx="0">
+            <a:schemeClr val="accent1"/>
+          </a:fillRef>
+          <a:effectRef idx="0">
+            <a:schemeClr val="accent1"/>
+          </a:effectRef>
+          <a:fontRef idx="minor">
+            <a:schemeClr val="tx1"/>
+          </a:fontRef>
+        </p:style>
+      </p:cxnSp>
+      <p:sp>
+        <p:nvSpPr>
+          <p:cNvPr id="349" name="Прямоугольник 348">
+            <a:extLst>
+              <a:ext uri="{FF2B5EF4-FFF2-40B4-BE49-F238E27FC236}">
+                <a16:creationId xmlns:a16="http://schemas.microsoft.com/office/drawing/2014/main" id="{EE45BD45-0A53-4C5A-98EB-0640786C19EB}"/>
+              </a:ext>
+            </a:extLst>
+          </p:cNvPr>
+          <p:cNvSpPr/>
+          <p:nvPr/>
+        </p:nvSpPr>
+        <p:spPr>
+          <a:xfrm>
+            <a:off x="7054131" y="6657857"/>
+            <a:ext cx="926325" cy="540000"/>
+          </a:xfrm>
+          <a:prstGeom prst="rect">
+            <a:avLst/>
+          </a:prstGeom>
+          <a:gradFill flip="none" rotWithShape="1">
+            <a:gsLst>
+              <a:gs pos="0">
+                <a:srgbClr val="7030A0"/>
+              </a:gs>
+              <a:gs pos="100000">
+                <a:schemeClr val="accent1">
+                  <a:lumMod val="60000"/>
+                  <a:lumOff val="40000"/>
+                </a:schemeClr>
+              </a:gs>
+            </a:gsLst>
+            <a:lin ang="0" scaled="1"/>
+            <a:tileRect/>
+          </a:gradFill>
+          <a:ln w="19050"/>
+        </p:spPr>
+        <p:style>
+          <a:lnRef idx="2">
+            <a:schemeClr val="accent1"/>
+          </a:lnRef>
+          <a:fillRef idx="1">
+            <a:schemeClr val="lt1"/>
+          </a:fillRef>
+          <a:effectRef idx="0">
+            <a:schemeClr val="accent1"/>
+          </a:effectRef>
+          <a:fontRef idx="minor">
+            <a:schemeClr val="dk1"/>
+          </a:fontRef>
+        </p:style>
+        <p:txBody>
+          <a:bodyPr lIns="124733" tIns="62367" rIns="124733" bIns="62367" rtlCol="0" anchor="ctr"/>
+          <a:lstStyle/>
+          <a:p>
+            <a:pPr algn="ctr"/>
+            <a:r>
+              <a:rPr lang="ru-RU" sz="700" dirty="0"/>
+              <a:t>Поддержать волнения в Мавритании</a:t>
+            </a:r>
+          </a:p>
+        </p:txBody>
+      </p:sp>
+      <p:cxnSp>
+        <p:nvCxnSpPr>
+          <p:cNvPr id="351" name="Соединительная линия уступом 620">
+            <a:extLst>
+              <a:ext uri="{FF2B5EF4-FFF2-40B4-BE49-F238E27FC236}">
+                <a16:creationId xmlns:a16="http://schemas.microsoft.com/office/drawing/2014/main" id="{D82585BF-6BF8-48AC-9670-8E0C6E3EF98F}"/>
+              </a:ext>
+            </a:extLst>
+          </p:cNvPr>
+          <p:cNvCxnSpPr>
+            <a:cxnSpLocks/>
+            <a:stCxn id="310" idx="2"/>
+            <a:endCxn id="349" idx="0"/>
+          </p:cNvCxnSpPr>
+          <p:nvPr/>
+        </p:nvCxnSpPr>
+        <p:spPr>
+          <a:xfrm rot="16200000" flipH="1">
+            <a:off x="6688127" y="5828690"/>
+            <a:ext cx="1072808" cy="585525"/>
+          </a:xfrm>
+          <a:prstGeom prst="bentConnector3">
+            <a:avLst>
+              <a:gd name="adj1" fmla="val 12907"/>
+            </a:avLst>
+          </a:prstGeom>
+          <a:ln w="19050">
+            <a:tailEnd type="arrow"/>
+          </a:ln>
+        </p:spPr>
+        <p:style>
+          <a:lnRef idx="1">
+            <a:schemeClr val="accent1"/>
+          </a:lnRef>
+          <a:fillRef idx="0">
+            <a:schemeClr val="accent1"/>
+          </a:fillRef>
+          <a:effectRef idx="0">
+            <a:schemeClr val="accent1"/>
+          </a:effectRef>
+          <a:fontRef idx="minor">
+            <a:schemeClr val="tx1"/>
+          </a:fontRef>
+        </p:style>
+      </p:cxnSp>
+      <p:cxnSp>
+        <p:nvCxnSpPr>
+          <p:cNvPr id="354" name="Соединительная линия уступом 620">
+            <a:extLst>
+              <a:ext uri="{FF2B5EF4-FFF2-40B4-BE49-F238E27FC236}">
+                <a16:creationId xmlns:a16="http://schemas.microsoft.com/office/drawing/2014/main" id="{DB4DF8F9-78F8-41F8-B641-EBCF09C12118}"/>
+              </a:ext>
+            </a:extLst>
+          </p:cNvPr>
+          <p:cNvCxnSpPr>
+            <a:cxnSpLocks/>
+            <a:stCxn id="349" idx="2"/>
+            <a:endCxn id="337" idx="0"/>
+          </p:cNvCxnSpPr>
+          <p:nvPr/>
+        </p:nvCxnSpPr>
+        <p:spPr>
+          <a:xfrm rot="5400000">
+            <a:off x="7088182" y="7038127"/>
+            <a:ext cx="269383" cy="588843"/>
+          </a:xfrm>
+          <a:prstGeom prst="bentConnector3">
+            <a:avLst>
+              <a:gd name="adj1" fmla="val 50000"/>
+            </a:avLst>
+          </a:prstGeom>
+          <a:ln w="19050">
+            <a:prstDash val="dash"/>
+            <a:tailEnd type="arrow"/>
+          </a:ln>
+        </p:spPr>
+        <p:style>
+          <a:lnRef idx="1">
+            <a:schemeClr val="accent1"/>
+          </a:lnRef>
+          <a:fillRef idx="0">
+            <a:schemeClr val="accent1"/>
+          </a:fillRef>
+          <a:effectRef idx="0">
+            <a:schemeClr val="accent1"/>
+          </a:effectRef>
+          <a:fontRef idx="minor">
+            <a:schemeClr val="tx1"/>
+          </a:fontRef>
+        </p:style>
+      </p:cxnSp>
+      <p:cxnSp>
+        <p:nvCxnSpPr>
+          <p:cNvPr id="355" name="Соединительная линия уступом 620">
+            <a:extLst>
+              <a:ext uri="{FF2B5EF4-FFF2-40B4-BE49-F238E27FC236}">
+                <a16:creationId xmlns:a16="http://schemas.microsoft.com/office/drawing/2014/main" id="{6F4D3062-F5D9-497C-A88F-0DB499581427}"/>
+              </a:ext>
+            </a:extLst>
+          </p:cNvPr>
+          <p:cNvCxnSpPr>
+            <a:cxnSpLocks/>
+            <a:stCxn id="341" idx="2"/>
+            <a:endCxn id="337" idx="0"/>
+          </p:cNvCxnSpPr>
+          <p:nvPr/>
+        </p:nvCxnSpPr>
+        <p:spPr>
+          <a:xfrm rot="16200000" flipH="1">
+            <a:off x="6501513" y="7040301"/>
+            <a:ext cx="263755" cy="590121"/>
+          </a:xfrm>
+          <a:prstGeom prst="bentConnector3">
+            <a:avLst>
+              <a:gd name="adj1" fmla="val 50000"/>
+            </a:avLst>
+          </a:prstGeom>
+          <a:ln w="19050">
+            <a:prstDash val="dash"/>
+            <a:tailEnd type="arrow"/>
+          </a:ln>
+        </p:spPr>
+        <p:style>
+          <a:lnRef idx="1">
+            <a:schemeClr val="accent1"/>
+          </a:lnRef>
+          <a:fillRef idx="0">
+            <a:schemeClr val="accent1"/>
+          </a:fillRef>
+          <a:effectRef idx="0">
+            <a:schemeClr val="accent1"/>
+          </a:effectRef>
+          <a:fontRef idx="minor">
+            <a:schemeClr val="tx1"/>
+          </a:fontRef>
+        </p:style>
+      </p:cxnSp>
+      <p:cxnSp>
+        <p:nvCxnSpPr>
+          <p:cNvPr id="356" name="Соединительная линия уступом 620">
+            <a:extLst>
+              <a:ext uri="{FF2B5EF4-FFF2-40B4-BE49-F238E27FC236}">
+                <a16:creationId xmlns:a16="http://schemas.microsoft.com/office/drawing/2014/main" id="{121B70C5-1C4C-4CE5-A2C2-80B0E1D0927F}"/>
+              </a:ext>
+            </a:extLst>
+          </p:cNvPr>
+          <p:cNvCxnSpPr>
+            <a:cxnSpLocks/>
+            <a:stCxn id="344" idx="2"/>
+            <a:endCxn id="337" idx="0"/>
+          </p:cNvCxnSpPr>
+          <p:nvPr/>
+        </p:nvCxnSpPr>
+        <p:spPr>
+          <a:xfrm rot="5400000">
+            <a:off x="6391056" y="6929843"/>
+            <a:ext cx="1074793" cy="1"/>
+          </a:xfrm>
+          <a:prstGeom prst="bentConnector3">
+            <a:avLst>
+              <a:gd name="adj1" fmla="val 50000"/>
+            </a:avLst>
+          </a:prstGeom>
+          <a:ln w="19050">
+            <a:prstDash val="dash"/>
+            <a:tailEnd type="arrow"/>
+          </a:ln>
+        </p:spPr>
+        <p:style>
+          <a:lnRef idx="1">
+            <a:schemeClr val="accent1"/>
+          </a:lnRef>
+          <a:fillRef idx="0">
+            <a:schemeClr val="accent1"/>
+          </a:fillRef>
+          <a:effectRef idx="0">
+            <a:schemeClr val="accent1"/>
+          </a:effectRef>
+          <a:fontRef idx="minor">
+            <a:schemeClr val="tx1"/>
+          </a:fontRef>
+        </p:style>
+      </p:cxnSp>
+      <p:cxnSp>
+        <p:nvCxnSpPr>
+          <p:cNvPr id="360" name="Соединительная линия уступом 620">
+            <a:extLst>
+              <a:ext uri="{FF2B5EF4-FFF2-40B4-BE49-F238E27FC236}">
+                <a16:creationId xmlns:a16="http://schemas.microsoft.com/office/drawing/2014/main" id="{D29F1913-1493-438E-B71C-8B273ED51A15}"/>
+              </a:ext>
+            </a:extLst>
+          </p:cNvPr>
+          <p:cNvCxnSpPr>
+            <a:cxnSpLocks/>
+            <a:stCxn id="337" idx="2"/>
+            <a:endCxn id="330" idx="0"/>
+          </p:cNvCxnSpPr>
+          <p:nvPr/>
+        </p:nvCxnSpPr>
+        <p:spPr>
+          <a:xfrm rot="5400000">
+            <a:off x="6392621" y="8543070"/>
+            <a:ext cx="1071660" cy="1"/>
+          </a:xfrm>
+          <a:prstGeom prst="bentConnector3">
+            <a:avLst>
+              <a:gd name="adj1" fmla="val 50000"/>
+            </a:avLst>
+          </a:prstGeom>
+          <a:ln w="19050">
+            <a:tailEnd type="arrow"/>
+          </a:ln>
+        </p:spPr>
+        <p:style>
+          <a:lnRef idx="1">
+            <a:schemeClr val="accent1"/>
+          </a:lnRef>
+          <a:fillRef idx="0">
+            <a:schemeClr val="accent1"/>
+          </a:fillRef>
+          <a:effectRef idx="0">
+            <a:schemeClr val="accent1"/>
+          </a:effectRef>
+          <a:fontRef idx="minor">
+            <a:schemeClr val="tx1"/>
+          </a:fontRef>
+        </p:style>
+      </p:cxnSp>
+      <p:sp>
+        <p:nvSpPr>
+          <p:cNvPr id="361" name="Прямоугольник 360">
+            <a:extLst>
+              <a:ext uri="{FF2B5EF4-FFF2-40B4-BE49-F238E27FC236}">
+                <a16:creationId xmlns:a16="http://schemas.microsoft.com/office/drawing/2014/main" id="{12C9E2CA-67CA-4CAF-B79F-ADB9AA0C747B}"/>
+              </a:ext>
+            </a:extLst>
+          </p:cNvPr>
+          <p:cNvSpPr/>
+          <p:nvPr/>
+        </p:nvSpPr>
+        <p:spPr>
+          <a:xfrm>
+            <a:off x="8247130" y="6652886"/>
+            <a:ext cx="926325" cy="540000"/>
+          </a:xfrm>
+          <a:prstGeom prst="rect">
+            <a:avLst/>
+          </a:prstGeom>
+          <a:solidFill>
+            <a:schemeClr val="accent1">
+              <a:lumMod val="60000"/>
+              <a:lumOff val="40000"/>
+            </a:schemeClr>
+          </a:solidFill>
+          <a:ln w="19050"/>
+        </p:spPr>
+        <p:style>
+          <a:lnRef idx="2">
+            <a:schemeClr val="accent1"/>
+          </a:lnRef>
+          <a:fillRef idx="1">
+            <a:schemeClr val="lt1"/>
+          </a:fillRef>
+          <a:effectRef idx="0">
+            <a:schemeClr val="accent1"/>
+          </a:effectRef>
+          <a:fontRef idx="minor">
+            <a:schemeClr val="dk1"/>
+          </a:fontRef>
+        </p:style>
+        <p:txBody>
+          <a:bodyPr lIns="124733" tIns="62367" rIns="124733" bIns="62367" rtlCol="0" anchor="ctr"/>
+          <a:lstStyle/>
+          <a:p>
+            <a:pPr algn="ctr"/>
+            <a:r>
+              <a:rPr lang="ru-RU" sz="700" dirty="0"/>
+              <a:t>Партия национального движения </a:t>
+            </a:r>
+            <a:r>
+              <a:rPr lang="ru-RU" sz="700" dirty="0" err="1"/>
+              <a:t>Уаззани</a:t>
+            </a:r>
+            <a:endParaRPr lang="ru-RU" sz="700" dirty="0"/>
+          </a:p>
+        </p:txBody>
+      </p:sp>
+      <p:sp>
+        <p:nvSpPr>
+          <p:cNvPr id="362" name="Прямоугольник 361">
+            <a:extLst>
+              <a:ext uri="{FF2B5EF4-FFF2-40B4-BE49-F238E27FC236}">
+                <a16:creationId xmlns:a16="http://schemas.microsoft.com/office/drawing/2014/main" id="{E332E174-E0FF-4ADC-B062-DE062C25214B}"/>
+              </a:ext>
+            </a:extLst>
+          </p:cNvPr>
+          <p:cNvSpPr/>
+          <p:nvPr/>
+        </p:nvSpPr>
+        <p:spPr>
+          <a:xfrm>
+            <a:off x="9441520" y="6654111"/>
+            <a:ext cx="926325" cy="540000"/>
+          </a:xfrm>
+          <a:prstGeom prst="rect">
+            <a:avLst/>
+          </a:prstGeom>
+          <a:solidFill>
+            <a:schemeClr val="accent1">
+              <a:lumMod val="60000"/>
+              <a:lumOff val="40000"/>
+            </a:schemeClr>
+          </a:solidFill>
+          <a:ln w="19050"/>
+        </p:spPr>
+        <p:style>
+          <a:lnRef idx="2">
+            <a:schemeClr val="accent1"/>
+          </a:lnRef>
+          <a:fillRef idx="1">
+            <a:schemeClr val="lt1"/>
+          </a:fillRef>
+          <a:effectRef idx="0">
+            <a:schemeClr val="accent1"/>
+          </a:effectRef>
+          <a:fontRef idx="minor">
+            <a:schemeClr val="dk1"/>
+          </a:fontRef>
+        </p:style>
+        <p:txBody>
+          <a:bodyPr lIns="124733" tIns="62367" rIns="124733" bIns="62367" rtlCol="0" anchor="ctr"/>
+          <a:lstStyle/>
+          <a:p>
+            <a:pPr algn="ctr"/>
+            <a:r>
+              <a:rPr lang="ru-RU" sz="700" dirty="0"/>
+              <a:t>Партия национальных реформ </a:t>
+            </a:r>
+            <a:r>
+              <a:rPr lang="ru-RU" sz="700" dirty="0" err="1"/>
+              <a:t>Фасси</a:t>
+            </a:r>
+            <a:endParaRPr lang="ru-RU" sz="700" dirty="0"/>
+          </a:p>
+        </p:txBody>
+      </p:sp>
+      <p:cxnSp>
+        <p:nvCxnSpPr>
+          <p:cNvPr id="363" name="Прямая соединительная линия 362">
+            <a:extLst>
+              <a:ext uri="{FF2B5EF4-FFF2-40B4-BE49-F238E27FC236}">
+                <a16:creationId xmlns:a16="http://schemas.microsoft.com/office/drawing/2014/main" id="{11131FA6-1893-4E1D-9FE2-31413B226B68}"/>
+              </a:ext>
+            </a:extLst>
+          </p:cNvPr>
+          <p:cNvCxnSpPr>
+            <a:cxnSpLocks/>
+            <a:stCxn id="362" idx="1"/>
+            <a:endCxn id="361" idx="3"/>
+          </p:cNvCxnSpPr>
+          <p:nvPr/>
+        </p:nvCxnSpPr>
+        <p:spPr>
+          <a:xfrm flipH="1" flipV="1">
+            <a:off x="9173455" y="6922886"/>
+            <a:ext cx="268065" cy="1225"/>
+          </a:xfrm>
+          <a:prstGeom prst="line">
+            <a:avLst/>
+          </a:prstGeom>
+          <a:ln w="38100">
+            <a:solidFill>
+              <a:srgbClr val="C00000"/>
+            </a:solidFill>
+          </a:ln>
+        </p:spPr>
+        <p:style>
+          <a:lnRef idx="1">
+            <a:schemeClr val="accent1"/>
+          </a:lnRef>
+          <a:fillRef idx="0">
+            <a:schemeClr val="accent1"/>
+          </a:fillRef>
+          <a:effectRef idx="0">
+            <a:schemeClr val="accent1"/>
+          </a:effectRef>
+          <a:fontRef idx="minor">
+            <a:schemeClr val="tx1"/>
+          </a:fontRef>
+        </p:style>
+      </p:cxnSp>
+      <p:cxnSp>
+        <p:nvCxnSpPr>
+          <p:cNvPr id="364" name="Соединительная линия уступом 620">
+            <a:extLst>
+              <a:ext uri="{FF2B5EF4-FFF2-40B4-BE49-F238E27FC236}">
+                <a16:creationId xmlns:a16="http://schemas.microsoft.com/office/drawing/2014/main" id="{4EF28AF0-E3A8-4770-8BFE-B15B9DCC626E}"/>
+              </a:ext>
+            </a:extLst>
+          </p:cNvPr>
+          <p:cNvCxnSpPr>
+            <a:cxnSpLocks/>
+            <a:stCxn id="332" idx="2"/>
+            <a:endCxn id="362" idx="0"/>
+          </p:cNvCxnSpPr>
+          <p:nvPr/>
+        </p:nvCxnSpPr>
+        <p:spPr>
+          <a:xfrm rot="16200000" flipH="1">
+            <a:off x="9472882" y="6222309"/>
+            <a:ext cx="264281" cy="599321"/>
+          </a:xfrm>
+          <a:prstGeom prst="bentConnector3">
+            <a:avLst>
+              <a:gd name="adj1" fmla="val 50000"/>
+            </a:avLst>
+          </a:prstGeom>
+          <a:ln w="19050">
+            <a:tailEnd type="arrow"/>
+          </a:ln>
+        </p:spPr>
+        <p:style>
+          <a:lnRef idx="1">
+            <a:schemeClr val="accent1"/>
+          </a:lnRef>
+          <a:fillRef idx="0">
+            <a:schemeClr val="accent1"/>
+          </a:fillRef>
+          <a:effectRef idx="0">
+            <a:schemeClr val="accent1"/>
+          </a:effectRef>
+          <a:fontRef idx="minor">
+            <a:schemeClr val="tx1"/>
+          </a:fontRef>
+        </p:style>
+      </p:cxnSp>
+      <p:cxnSp>
+        <p:nvCxnSpPr>
+          <p:cNvPr id="365" name="Соединительная линия уступом 620">
+            <a:extLst>
+              <a:ext uri="{FF2B5EF4-FFF2-40B4-BE49-F238E27FC236}">
+                <a16:creationId xmlns:a16="http://schemas.microsoft.com/office/drawing/2014/main" id="{494C51AC-6E80-482F-9862-E6D4840FEA97}"/>
+              </a:ext>
+            </a:extLst>
+          </p:cNvPr>
+          <p:cNvCxnSpPr>
+            <a:cxnSpLocks/>
+            <a:stCxn id="332" idx="2"/>
+            <a:endCxn id="361" idx="0"/>
+          </p:cNvCxnSpPr>
+          <p:nvPr/>
+        </p:nvCxnSpPr>
+        <p:spPr>
+          <a:xfrm rot="5400000">
+            <a:off x="8876300" y="6223824"/>
+            <a:ext cx="263056" cy="595069"/>
+          </a:xfrm>
+          <a:prstGeom prst="bentConnector3">
+            <a:avLst>
+              <a:gd name="adj1" fmla="val 50000"/>
+            </a:avLst>
+          </a:prstGeom>
+          <a:ln w="19050">
+            <a:tailEnd type="arrow"/>
+          </a:ln>
+        </p:spPr>
+        <p:style>
+          <a:lnRef idx="1">
+            <a:schemeClr val="accent1"/>
+          </a:lnRef>
+          <a:fillRef idx="0">
+            <a:schemeClr val="accent1"/>
+          </a:fillRef>
+          <a:effectRef idx="0">
+            <a:schemeClr val="accent1"/>
+          </a:effectRef>
+          <a:fontRef idx="minor">
+            <a:schemeClr val="tx1"/>
+          </a:fontRef>
+        </p:style>
+      </p:cxnSp>
+      <p:cxnSp>
+        <p:nvCxnSpPr>
+          <p:cNvPr id="366" name="Соединительная линия уступом 620">
+            <a:extLst>
+              <a:ext uri="{FF2B5EF4-FFF2-40B4-BE49-F238E27FC236}">
+                <a16:creationId xmlns:a16="http://schemas.microsoft.com/office/drawing/2014/main" id="{B6A4BAC8-9B96-4AD1-9DC1-74B87318713D}"/>
+              </a:ext>
+            </a:extLst>
+          </p:cNvPr>
+          <p:cNvCxnSpPr>
+            <a:cxnSpLocks/>
+            <a:stCxn id="275" idx="2"/>
+            <a:endCxn id="332" idx="0"/>
+          </p:cNvCxnSpPr>
+          <p:nvPr/>
+        </p:nvCxnSpPr>
+        <p:spPr>
+          <a:xfrm rot="5400000">
+            <a:off x="8767971" y="5312438"/>
+            <a:ext cx="1074784" cy="1"/>
+          </a:xfrm>
+          <a:prstGeom prst="bentConnector3">
+            <a:avLst>
+              <a:gd name="adj1" fmla="val 50000"/>
+            </a:avLst>
+          </a:prstGeom>
+          <a:ln w="19050">
+            <a:tailEnd type="arrow"/>
+          </a:ln>
+        </p:spPr>
+        <p:style>
+          <a:lnRef idx="1">
+            <a:schemeClr val="accent1"/>
+          </a:lnRef>
+          <a:fillRef idx="0">
+            <a:schemeClr val="accent1"/>
+          </a:fillRef>
+          <a:effectRef idx="0">
+            <a:schemeClr val="accent1"/>
+          </a:effectRef>
+          <a:fontRef idx="minor">
+            <a:schemeClr val="tx1"/>
+          </a:fontRef>
+        </p:style>
+      </p:cxnSp>
+      <p:sp>
+        <p:nvSpPr>
+          <p:cNvPr id="367" name="Прямоугольник 366">
+            <a:extLst>
+              <a:ext uri="{FF2B5EF4-FFF2-40B4-BE49-F238E27FC236}">
+                <a16:creationId xmlns:a16="http://schemas.microsoft.com/office/drawing/2014/main" id="{1071E036-2CED-4B07-97A8-2333A262E453}"/>
+              </a:ext>
+            </a:extLst>
+          </p:cNvPr>
+          <p:cNvSpPr/>
+          <p:nvPr/>
+        </p:nvSpPr>
+        <p:spPr>
+          <a:xfrm>
+            <a:off x="4680775" y="6654346"/>
+            <a:ext cx="926325" cy="540000"/>
+          </a:xfrm>
+          <a:prstGeom prst="rect">
+            <a:avLst/>
+          </a:prstGeom>
+          <a:solidFill>
+            <a:schemeClr val="bg1">
+              <a:lumMod val="50000"/>
+            </a:schemeClr>
+          </a:solidFill>
+          <a:ln w="19050"/>
+        </p:spPr>
+        <p:style>
+          <a:lnRef idx="2">
+            <a:schemeClr val="accent1"/>
+          </a:lnRef>
+          <a:fillRef idx="1">
+            <a:schemeClr val="lt1"/>
+          </a:fillRef>
+          <a:effectRef idx="0">
+            <a:schemeClr val="accent1"/>
+          </a:effectRef>
+          <a:fontRef idx="minor">
+            <a:schemeClr val="dk1"/>
+          </a:fontRef>
+        </p:style>
+        <p:txBody>
+          <a:bodyPr lIns="124733" tIns="62367" rIns="124733" bIns="62367" rtlCol="0" anchor="ctr"/>
+          <a:lstStyle/>
+          <a:p>
+            <a:pPr algn="ctr"/>
+            <a:r>
+              <a:rPr lang="ru-RU" sz="700" dirty="0"/>
+              <a:t>Импровизированный аэропорт</a:t>
+            </a:r>
+          </a:p>
+        </p:txBody>
+      </p:sp>
+      <p:sp>
+        <p:nvSpPr>
+          <p:cNvPr id="368" name="Прямоугольник 367">
+            <a:extLst>
+              <a:ext uri="{FF2B5EF4-FFF2-40B4-BE49-F238E27FC236}">
+                <a16:creationId xmlns:a16="http://schemas.microsoft.com/office/drawing/2014/main" id="{6E3D4493-FF2E-4747-898D-4495A8488B71}"/>
+              </a:ext>
+            </a:extLst>
+          </p:cNvPr>
+          <p:cNvSpPr/>
+          <p:nvPr/>
+        </p:nvSpPr>
+        <p:spPr>
+          <a:xfrm>
+            <a:off x="3508501" y="5042438"/>
+            <a:ext cx="926325" cy="540000"/>
+          </a:xfrm>
+          <a:prstGeom prst="rect">
+            <a:avLst/>
+          </a:prstGeom>
+          <a:solidFill>
+            <a:schemeClr val="bg1">
+              <a:lumMod val="50000"/>
+            </a:schemeClr>
+          </a:solidFill>
+          <a:ln w="19050"/>
+        </p:spPr>
+        <p:style>
+          <a:lnRef idx="2">
+            <a:schemeClr val="accent1"/>
+          </a:lnRef>
+          <a:fillRef idx="1">
+            <a:schemeClr val="lt1"/>
+          </a:fillRef>
+          <a:effectRef idx="0">
+            <a:schemeClr val="accent1"/>
+          </a:effectRef>
+          <a:fontRef idx="minor">
+            <a:schemeClr val="dk1"/>
+          </a:fontRef>
+        </p:style>
+        <p:txBody>
+          <a:bodyPr lIns="124733" tIns="62367" rIns="124733" bIns="62367" rtlCol="0" anchor="ctr"/>
+          <a:lstStyle/>
+          <a:p>
+            <a:pPr algn="ctr"/>
+            <a:r>
+              <a:rPr lang="ru-RU" sz="700" dirty="0"/>
+              <a:t>Ввести меры военного времени</a:t>
+            </a:r>
+          </a:p>
+        </p:txBody>
+      </p:sp>
+      <p:sp>
+        <p:nvSpPr>
+          <p:cNvPr id="369" name="Прямоугольник 368">
+            <a:extLst>
+              <a:ext uri="{FF2B5EF4-FFF2-40B4-BE49-F238E27FC236}">
+                <a16:creationId xmlns:a16="http://schemas.microsoft.com/office/drawing/2014/main" id="{209D680D-DBA7-44F5-9390-4ACF118B1831}"/>
+              </a:ext>
+            </a:extLst>
+          </p:cNvPr>
+          <p:cNvSpPr/>
+          <p:nvPr/>
+        </p:nvSpPr>
+        <p:spPr>
+          <a:xfrm>
+            <a:off x="4092450" y="5854962"/>
+            <a:ext cx="926325" cy="540000"/>
+          </a:xfrm>
+          <a:prstGeom prst="rect">
+            <a:avLst/>
+          </a:prstGeom>
+          <a:solidFill>
+            <a:schemeClr val="bg1">
+              <a:lumMod val="50000"/>
+            </a:schemeClr>
+          </a:solidFill>
+          <a:ln w="19050"/>
+        </p:spPr>
+        <p:style>
+          <a:lnRef idx="2">
+            <a:schemeClr val="accent1"/>
+          </a:lnRef>
+          <a:fillRef idx="1">
+            <a:schemeClr val="lt1"/>
+          </a:fillRef>
+          <a:effectRef idx="0">
+            <a:schemeClr val="accent1"/>
+          </a:effectRef>
+          <a:fontRef idx="minor">
+            <a:schemeClr val="dk1"/>
+          </a:fontRef>
+        </p:style>
+        <p:txBody>
+          <a:bodyPr lIns="124733" tIns="62367" rIns="124733" bIns="62367" rtlCol="0" anchor="ctr"/>
+          <a:lstStyle/>
+          <a:p>
+            <a:pPr algn="ctr"/>
+            <a:r>
+              <a:rPr lang="ru-RU" sz="700" dirty="0"/>
+              <a:t>Экстренный порт для союзников</a:t>
+            </a:r>
+          </a:p>
+        </p:txBody>
+      </p:sp>
+      <p:sp>
+        <p:nvSpPr>
+          <p:cNvPr id="370" name="Прямоугольник 369">
+            <a:extLst>
+              <a:ext uri="{FF2B5EF4-FFF2-40B4-BE49-F238E27FC236}">
+                <a16:creationId xmlns:a16="http://schemas.microsoft.com/office/drawing/2014/main" id="{B2D85639-B01F-4996-BF83-EF0335E16D6E}"/>
+              </a:ext>
+            </a:extLst>
+          </p:cNvPr>
+          <p:cNvSpPr/>
+          <p:nvPr/>
+        </p:nvSpPr>
+        <p:spPr>
+          <a:xfrm>
+            <a:off x="3505885" y="6666310"/>
+            <a:ext cx="926325" cy="540000"/>
+          </a:xfrm>
+          <a:prstGeom prst="rect">
+            <a:avLst/>
+          </a:prstGeom>
+          <a:solidFill>
+            <a:schemeClr val="bg1">
+              <a:lumMod val="50000"/>
+            </a:schemeClr>
+          </a:solidFill>
+          <a:ln w="19050"/>
+        </p:spPr>
+        <p:style>
+          <a:lnRef idx="2">
+            <a:schemeClr val="accent1"/>
+          </a:lnRef>
+          <a:fillRef idx="1">
+            <a:schemeClr val="lt1"/>
+          </a:fillRef>
+          <a:effectRef idx="0">
+            <a:schemeClr val="accent1"/>
+          </a:effectRef>
+          <a:fontRef idx="minor">
+            <a:schemeClr val="dk1"/>
+          </a:fontRef>
+        </p:style>
+        <p:txBody>
+          <a:bodyPr lIns="124733" tIns="62367" rIns="124733" bIns="62367" rtlCol="0" anchor="ctr"/>
+          <a:lstStyle/>
+          <a:p>
+            <a:pPr algn="ctr"/>
+            <a:r>
+              <a:rPr lang="ru-RU" sz="700" dirty="0"/>
+              <a:t>Ремонтная верфь </a:t>
+            </a:r>
+          </a:p>
+        </p:txBody>
+      </p:sp>
+      <p:sp>
+        <p:nvSpPr>
+          <p:cNvPr id="371" name="Прямоугольник 370">
+            <a:extLst>
+              <a:ext uri="{FF2B5EF4-FFF2-40B4-BE49-F238E27FC236}">
+                <a16:creationId xmlns:a16="http://schemas.microsoft.com/office/drawing/2014/main" id="{8F135ABC-3BC0-43BB-BBED-4C8E0EB2515E}"/>
+              </a:ext>
+            </a:extLst>
+          </p:cNvPr>
+          <p:cNvSpPr/>
+          <p:nvPr/>
+        </p:nvSpPr>
+        <p:spPr>
+          <a:xfrm>
+            <a:off x="5274566" y="5845935"/>
+            <a:ext cx="926325" cy="540000"/>
+          </a:xfrm>
+          <a:prstGeom prst="rect">
+            <a:avLst/>
+          </a:prstGeom>
+          <a:solidFill>
+            <a:schemeClr val="bg1">
+              <a:lumMod val="50000"/>
+            </a:schemeClr>
+          </a:solidFill>
+          <a:ln w="19050"/>
+        </p:spPr>
+        <p:style>
+          <a:lnRef idx="2">
+            <a:schemeClr val="accent1"/>
+          </a:lnRef>
+          <a:fillRef idx="1">
+            <a:schemeClr val="lt1"/>
+          </a:fillRef>
+          <a:effectRef idx="0">
+            <a:schemeClr val="accent1"/>
+          </a:effectRef>
+          <a:fontRef idx="minor">
+            <a:schemeClr val="dk1"/>
+          </a:fontRef>
+        </p:style>
+        <p:txBody>
+          <a:bodyPr lIns="124733" tIns="62367" rIns="124733" bIns="62367" rtlCol="0" anchor="ctr"/>
+          <a:lstStyle/>
+          <a:p>
+            <a:pPr algn="ctr"/>
+            <a:r>
+              <a:rPr lang="ru-RU" sz="700" dirty="0"/>
+              <a:t>Запретить деятельность МКП</a:t>
+            </a:r>
+          </a:p>
+        </p:txBody>
+      </p:sp>
+      <p:sp>
+        <p:nvSpPr>
+          <p:cNvPr id="372" name="Прямоугольник 371">
+            <a:extLst>
+              <a:ext uri="{FF2B5EF4-FFF2-40B4-BE49-F238E27FC236}">
+                <a16:creationId xmlns:a16="http://schemas.microsoft.com/office/drawing/2014/main" id="{7DE89301-4366-4909-AA18-B24463FAB130}"/>
+              </a:ext>
+            </a:extLst>
+          </p:cNvPr>
+          <p:cNvSpPr/>
+          <p:nvPr/>
+        </p:nvSpPr>
+        <p:spPr>
+          <a:xfrm>
+            <a:off x="2911685" y="5852446"/>
+            <a:ext cx="926325" cy="540000"/>
+          </a:xfrm>
+          <a:prstGeom prst="rect">
+            <a:avLst/>
+          </a:prstGeom>
+          <a:solidFill>
+            <a:schemeClr val="bg1">
+              <a:lumMod val="50000"/>
+            </a:schemeClr>
+          </a:solidFill>
+          <a:ln w="19050"/>
+        </p:spPr>
+        <p:style>
+          <a:lnRef idx="2">
+            <a:schemeClr val="accent1"/>
+          </a:lnRef>
+          <a:fillRef idx="1">
+            <a:schemeClr val="lt1"/>
+          </a:fillRef>
+          <a:effectRef idx="0">
+            <a:schemeClr val="accent1"/>
+          </a:effectRef>
+          <a:fontRef idx="minor">
+            <a:schemeClr val="dk1"/>
+          </a:fontRef>
+        </p:style>
+        <p:txBody>
+          <a:bodyPr lIns="124733" tIns="62367" rIns="124733" bIns="62367" rtlCol="0" anchor="ctr"/>
+          <a:lstStyle/>
+          <a:p>
+            <a:pPr algn="ctr"/>
+            <a:r>
+              <a:rPr lang="ru-RU" sz="700" dirty="0"/>
+              <a:t>Поддержка США</a:t>
+            </a:r>
+          </a:p>
+        </p:txBody>
+      </p:sp>
+      <p:cxnSp>
+        <p:nvCxnSpPr>
+          <p:cNvPr id="373" name="Соединительная линия уступом 620">
+            <a:extLst>
+              <a:ext uri="{FF2B5EF4-FFF2-40B4-BE49-F238E27FC236}">
+                <a16:creationId xmlns:a16="http://schemas.microsoft.com/office/drawing/2014/main" id="{7E967D57-8385-4220-BDF1-7187168513C4}"/>
+              </a:ext>
+            </a:extLst>
+          </p:cNvPr>
+          <p:cNvCxnSpPr>
+            <a:cxnSpLocks/>
+            <a:stCxn id="292" idx="2"/>
+            <a:endCxn id="368" idx="0"/>
+          </p:cNvCxnSpPr>
+          <p:nvPr/>
+        </p:nvCxnSpPr>
+        <p:spPr>
+          <a:xfrm rot="5400000">
+            <a:off x="4136189" y="4613119"/>
+            <a:ext cx="264794" cy="593844"/>
+          </a:xfrm>
+          <a:prstGeom prst="bentConnector3">
+            <a:avLst>
+              <a:gd name="adj1" fmla="val 50000"/>
+            </a:avLst>
+          </a:prstGeom>
+          <a:ln w="19050">
+            <a:tailEnd type="arrow"/>
+          </a:ln>
+        </p:spPr>
+        <p:style>
+          <a:lnRef idx="1">
+            <a:schemeClr val="accent1"/>
+          </a:lnRef>
+          <a:fillRef idx="0">
+            <a:schemeClr val="accent1"/>
+          </a:fillRef>
+          <a:effectRef idx="0">
+            <a:schemeClr val="accent1"/>
+          </a:effectRef>
+          <a:fontRef idx="minor">
+            <a:schemeClr val="tx1"/>
+          </a:fontRef>
+        </p:style>
+      </p:cxnSp>
+      <p:sp>
+        <p:nvSpPr>
+          <p:cNvPr id="374" name="Прямоугольник 373">
+            <a:extLst>
+              <a:ext uri="{FF2B5EF4-FFF2-40B4-BE49-F238E27FC236}">
+                <a16:creationId xmlns:a16="http://schemas.microsoft.com/office/drawing/2014/main" id="{AA67ACCE-9C2A-4946-884C-805DF0C819AE}"/>
+              </a:ext>
+            </a:extLst>
+          </p:cNvPr>
+          <p:cNvSpPr/>
+          <p:nvPr/>
+        </p:nvSpPr>
+        <p:spPr>
+          <a:xfrm>
+            <a:off x="5273503" y="5034629"/>
+            <a:ext cx="926325" cy="540000"/>
+          </a:xfrm>
+          <a:prstGeom prst="rect">
+            <a:avLst/>
+          </a:prstGeom>
+          <a:solidFill>
+            <a:schemeClr val="bg1">
+              <a:lumMod val="50000"/>
+            </a:schemeClr>
+          </a:solidFill>
+          <a:ln w="19050"/>
+        </p:spPr>
+        <p:style>
+          <a:lnRef idx="2">
+            <a:schemeClr val="accent1"/>
+          </a:lnRef>
+          <a:fillRef idx="1">
+            <a:schemeClr val="lt1"/>
+          </a:fillRef>
+          <a:effectRef idx="0">
+            <a:schemeClr val="accent1"/>
+          </a:effectRef>
+          <a:fontRef idx="minor">
+            <a:schemeClr val="dk1"/>
+          </a:fontRef>
+        </p:style>
+        <p:txBody>
+          <a:bodyPr lIns="124733" tIns="62367" rIns="124733" bIns="62367" rtlCol="0" anchor="ctr"/>
+          <a:lstStyle/>
+          <a:p>
+            <a:pPr algn="ctr"/>
+            <a:r>
+              <a:rPr lang="ru-RU" sz="700" dirty="0"/>
+              <a:t>Довериться Франции</a:t>
+            </a:r>
+          </a:p>
+        </p:txBody>
+      </p:sp>
+      <p:cxnSp>
+        <p:nvCxnSpPr>
+          <p:cNvPr id="375" name="Соединительная линия уступом 620">
+            <a:extLst>
+              <a:ext uri="{FF2B5EF4-FFF2-40B4-BE49-F238E27FC236}">
+                <a16:creationId xmlns:a16="http://schemas.microsoft.com/office/drawing/2014/main" id="{A71C41DD-31B8-4DA1-B745-70B9E50E10AF}"/>
+              </a:ext>
+            </a:extLst>
+          </p:cNvPr>
+          <p:cNvCxnSpPr>
+            <a:cxnSpLocks/>
+            <a:stCxn id="292" idx="2"/>
+            <a:endCxn id="374" idx="0"/>
+          </p:cNvCxnSpPr>
+          <p:nvPr/>
+        </p:nvCxnSpPr>
+        <p:spPr>
+          <a:xfrm rot="16200000" flipH="1">
+            <a:off x="5022595" y="4320557"/>
+            <a:ext cx="256985" cy="1171158"/>
+          </a:xfrm>
+          <a:prstGeom prst="bentConnector3">
+            <a:avLst>
+              <a:gd name="adj1" fmla="val 50000"/>
+            </a:avLst>
+          </a:prstGeom>
+          <a:ln w="19050">
+            <a:tailEnd type="arrow"/>
+          </a:ln>
+        </p:spPr>
+        <p:style>
+          <a:lnRef idx="1">
+            <a:schemeClr val="accent1"/>
+          </a:lnRef>
+          <a:fillRef idx="0">
+            <a:schemeClr val="accent1"/>
+          </a:fillRef>
+          <a:effectRef idx="0">
+            <a:schemeClr val="accent1"/>
+          </a:effectRef>
+          <a:fontRef idx="minor">
+            <a:schemeClr val="tx1"/>
+          </a:fontRef>
+        </p:style>
+      </p:cxnSp>
+      <p:cxnSp>
+        <p:nvCxnSpPr>
+          <p:cNvPr id="376" name="Соединительная линия уступом 620">
+            <a:extLst>
+              <a:ext uri="{FF2B5EF4-FFF2-40B4-BE49-F238E27FC236}">
+                <a16:creationId xmlns:a16="http://schemas.microsoft.com/office/drawing/2014/main" id="{5267BC9B-273F-4E1F-9D74-30F24C0A212D}"/>
+              </a:ext>
+            </a:extLst>
+          </p:cNvPr>
+          <p:cNvCxnSpPr>
+            <a:cxnSpLocks/>
+            <a:stCxn id="374" idx="2"/>
+            <a:endCxn id="371" idx="0"/>
+          </p:cNvCxnSpPr>
+          <p:nvPr/>
+        </p:nvCxnSpPr>
+        <p:spPr>
+          <a:xfrm rot="16200000" flipH="1">
+            <a:off x="5601544" y="5709750"/>
+            <a:ext cx="271306" cy="1063"/>
+          </a:xfrm>
+          <a:prstGeom prst="bentConnector3">
+            <a:avLst>
+              <a:gd name="adj1" fmla="val 50000"/>
+            </a:avLst>
+          </a:prstGeom>
+          <a:ln w="19050">
+            <a:tailEnd type="arrow"/>
+          </a:ln>
+        </p:spPr>
+        <p:style>
+          <a:lnRef idx="1">
+            <a:schemeClr val="accent1"/>
+          </a:lnRef>
+          <a:fillRef idx="0">
+            <a:schemeClr val="accent1"/>
+          </a:fillRef>
+          <a:effectRef idx="0">
+            <a:schemeClr val="accent1"/>
+          </a:effectRef>
+          <a:fontRef idx="minor">
+            <a:schemeClr val="tx1"/>
+          </a:fontRef>
+        </p:style>
+      </p:cxnSp>
+      <p:cxnSp>
+        <p:nvCxnSpPr>
+          <p:cNvPr id="377" name="Соединительная линия уступом 620">
+            <a:extLst>
+              <a:ext uri="{FF2B5EF4-FFF2-40B4-BE49-F238E27FC236}">
+                <a16:creationId xmlns:a16="http://schemas.microsoft.com/office/drawing/2014/main" id="{A3E09B7C-51EF-4443-9AA4-513623C2BA81}"/>
+              </a:ext>
+            </a:extLst>
+          </p:cNvPr>
+          <p:cNvCxnSpPr>
+            <a:cxnSpLocks/>
+            <a:stCxn id="368" idx="2"/>
+            <a:endCxn id="369" idx="0"/>
+          </p:cNvCxnSpPr>
+          <p:nvPr/>
+        </p:nvCxnSpPr>
+        <p:spPr>
+          <a:xfrm rot="16200000" flipH="1">
+            <a:off x="4127376" y="5426725"/>
+            <a:ext cx="272524" cy="583949"/>
+          </a:xfrm>
+          <a:prstGeom prst="bentConnector3">
+            <a:avLst>
+              <a:gd name="adj1" fmla="val 50000"/>
+            </a:avLst>
+          </a:prstGeom>
+          <a:ln w="19050">
+            <a:tailEnd type="arrow"/>
+          </a:ln>
+        </p:spPr>
+        <p:style>
+          <a:lnRef idx="1">
+            <a:schemeClr val="accent1"/>
+          </a:lnRef>
+          <a:fillRef idx="0">
+            <a:schemeClr val="accent1"/>
+          </a:fillRef>
+          <a:effectRef idx="0">
+            <a:schemeClr val="accent1"/>
+          </a:effectRef>
+          <a:fontRef idx="minor">
+            <a:schemeClr val="tx1"/>
+          </a:fontRef>
+        </p:style>
+      </p:cxnSp>
+      <p:cxnSp>
+        <p:nvCxnSpPr>
+          <p:cNvPr id="378" name="Соединительная линия уступом 620">
+            <a:extLst>
+              <a:ext uri="{FF2B5EF4-FFF2-40B4-BE49-F238E27FC236}">
+                <a16:creationId xmlns:a16="http://schemas.microsoft.com/office/drawing/2014/main" id="{25A1021B-4BC5-4315-9D51-6B448B4600A3}"/>
+              </a:ext>
+            </a:extLst>
+          </p:cNvPr>
+          <p:cNvCxnSpPr>
+            <a:cxnSpLocks/>
+            <a:stCxn id="369" idx="2"/>
+            <a:endCxn id="370" idx="0"/>
+          </p:cNvCxnSpPr>
+          <p:nvPr/>
+        </p:nvCxnSpPr>
+        <p:spPr>
+          <a:xfrm rot="5400000">
+            <a:off x="4126657" y="6237354"/>
+            <a:ext cx="271348" cy="586565"/>
+          </a:xfrm>
+          <a:prstGeom prst="bentConnector3">
+            <a:avLst>
+              <a:gd name="adj1" fmla="val 50000"/>
+            </a:avLst>
+          </a:prstGeom>
+          <a:ln w="19050">
+            <a:tailEnd type="arrow"/>
+          </a:ln>
+        </p:spPr>
+        <p:style>
+          <a:lnRef idx="1">
+            <a:schemeClr val="accent1"/>
+          </a:lnRef>
+          <a:fillRef idx="0">
+            <a:schemeClr val="accent1"/>
+          </a:fillRef>
+          <a:effectRef idx="0">
+            <a:schemeClr val="accent1"/>
+          </a:effectRef>
+          <a:fontRef idx="minor">
+            <a:schemeClr val="tx1"/>
+          </a:fontRef>
+        </p:style>
+      </p:cxnSp>
+      <p:cxnSp>
+        <p:nvCxnSpPr>
+          <p:cNvPr id="379" name="Соединительная линия уступом 620">
+            <a:extLst>
+              <a:ext uri="{FF2B5EF4-FFF2-40B4-BE49-F238E27FC236}">
+                <a16:creationId xmlns:a16="http://schemas.microsoft.com/office/drawing/2014/main" id="{574416BF-FDBD-4D0F-8EA8-F0120218A565}"/>
+              </a:ext>
+            </a:extLst>
+          </p:cNvPr>
+          <p:cNvCxnSpPr>
+            <a:cxnSpLocks/>
+            <a:stCxn id="369" idx="2"/>
+            <a:endCxn id="367" idx="0"/>
+          </p:cNvCxnSpPr>
+          <p:nvPr/>
+        </p:nvCxnSpPr>
+        <p:spPr>
+          <a:xfrm rot="16200000" flipH="1">
+            <a:off x="4720083" y="6230491"/>
+            <a:ext cx="259384" cy="588325"/>
+          </a:xfrm>
+          <a:prstGeom prst="bentConnector3">
+            <a:avLst>
+              <a:gd name="adj1" fmla="val 50000"/>
+            </a:avLst>
+          </a:prstGeom>
+          <a:ln w="19050">
+            <a:tailEnd type="arrow"/>
+          </a:ln>
+        </p:spPr>
+        <p:style>
+          <a:lnRef idx="1">
+            <a:schemeClr val="accent1"/>
+          </a:lnRef>
+          <a:fillRef idx="0">
+            <a:schemeClr val="accent1"/>
+          </a:fillRef>
+          <a:effectRef idx="0">
+            <a:schemeClr val="accent1"/>
+          </a:effectRef>
+          <a:fontRef idx="minor">
+            <a:schemeClr val="tx1"/>
+          </a:fontRef>
+        </p:style>
+      </p:cxnSp>
+      <p:cxnSp>
+        <p:nvCxnSpPr>
+          <p:cNvPr id="380" name="Соединительная линия уступом 620">
+            <a:extLst>
+              <a:ext uri="{FF2B5EF4-FFF2-40B4-BE49-F238E27FC236}">
+                <a16:creationId xmlns:a16="http://schemas.microsoft.com/office/drawing/2014/main" id="{AB744B17-5B94-43C3-B7D2-82B5DDA82D2B}"/>
+              </a:ext>
+            </a:extLst>
+          </p:cNvPr>
+          <p:cNvCxnSpPr>
+            <a:cxnSpLocks/>
+            <a:stCxn id="368" idx="2"/>
+            <a:endCxn id="372" idx="0"/>
+          </p:cNvCxnSpPr>
+          <p:nvPr/>
+        </p:nvCxnSpPr>
+        <p:spPr>
+          <a:xfrm rot="5400000">
+            <a:off x="3538252" y="5419034"/>
+            <a:ext cx="270008" cy="596816"/>
+          </a:xfrm>
+          <a:prstGeom prst="bentConnector3">
+            <a:avLst>
+              <a:gd name="adj1" fmla="val 50000"/>
+            </a:avLst>
+          </a:prstGeom>
+          <a:ln w="19050">
+            <a:tailEnd type="arrow"/>
+          </a:ln>
+        </p:spPr>
+        <p:style>
+          <a:lnRef idx="1">
+            <a:schemeClr val="accent1"/>
+          </a:lnRef>
+          <a:fillRef idx="0">
+            <a:schemeClr val="accent1"/>
+          </a:fillRef>
+          <a:effectRef idx="0">
+            <a:schemeClr val="accent1"/>
+          </a:effectRef>
+          <a:fontRef idx="minor">
+            <a:schemeClr val="tx1"/>
+          </a:fontRef>
+        </p:style>
+      </p:cxnSp>
+      <p:sp>
+        <p:nvSpPr>
+          <p:cNvPr id="382" name="Прямоугольник 381">
+            <a:extLst>
+              <a:ext uri="{FF2B5EF4-FFF2-40B4-BE49-F238E27FC236}">
+                <a16:creationId xmlns:a16="http://schemas.microsoft.com/office/drawing/2014/main" id="{CA6EF80F-ACB8-4828-A350-5C84B0FCAB4F}"/>
+              </a:ext>
+            </a:extLst>
+          </p:cNvPr>
+          <p:cNvSpPr/>
+          <p:nvPr/>
+        </p:nvSpPr>
+        <p:spPr>
+          <a:xfrm>
+            <a:off x="5868093" y="8269517"/>
+            <a:ext cx="926325" cy="540000"/>
+          </a:xfrm>
+          <a:prstGeom prst="rect">
+            <a:avLst/>
+          </a:prstGeom>
+          <a:gradFill flip="none" rotWithShape="1">
+            <a:gsLst>
+              <a:gs pos="0">
+                <a:srgbClr val="7030A0"/>
+              </a:gs>
+              <a:gs pos="100000">
+                <a:schemeClr val="accent1">
+                  <a:lumMod val="60000"/>
+                  <a:lumOff val="40000"/>
+                </a:schemeClr>
+              </a:gs>
+            </a:gsLst>
+            <a:lin ang="0" scaled="1"/>
+            <a:tileRect/>
+          </a:gradFill>
+          <a:ln w="19050"/>
+        </p:spPr>
+        <p:style>
+          <a:lnRef idx="2">
+            <a:schemeClr val="accent1"/>
+          </a:lnRef>
+          <a:fillRef idx="1">
+            <a:schemeClr val="lt1"/>
+          </a:fillRef>
+          <a:effectRef idx="0">
+            <a:schemeClr val="accent1"/>
+          </a:effectRef>
+          <a:fontRef idx="minor">
+            <a:schemeClr val="dk1"/>
+          </a:fontRef>
+        </p:style>
+        <p:txBody>
+          <a:bodyPr lIns="124733" tIns="62367" rIns="124733" bIns="62367" rtlCol="0" anchor="ctr"/>
+          <a:lstStyle/>
+          <a:p>
+            <a:pPr algn="ctr"/>
+            <a:r>
+              <a:rPr lang="ru-RU" sz="700" dirty="0"/>
+              <a:t>Объявить о своих притязаниях на Мавританию</a:t>
+            </a:r>
+          </a:p>
+        </p:txBody>
+      </p:sp>
+      <p:cxnSp>
+        <p:nvCxnSpPr>
+          <p:cNvPr id="383" name="Соединительная линия уступом 620">
+            <a:extLst>
+              <a:ext uri="{FF2B5EF4-FFF2-40B4-BE49-F238E27FC236}">
+                <a16:creationId xmlns:a16="http://schemas.microsoft.com/office/drawing/2014/main" id="{B4E2BC96-252E-4E4D-B6DB-B7D7234E2CE9}"/>
+              </a:ext>
+            </a:extLst>
+          </p:cNvPr>
+          <p:cNvCxnSpPr>
+            <a:cxnSpLocks/>
+            <a:stCxn id="337" idx="2"/>
+            <a:endCxn id="382" idx="0"/>
+          </p:cNvCxnSpPr>
+          <p:nvPr/>
+        </p:nvCxnSpPr>
+        <p:spPr>
+          <a:xfrm rot="5400000">
+            <a:off x="6498716" y="7839781"/>
+            <a:ext cx="262277" cy="597195"/>
+          </a:xfrm>
+          <a:prstGeom prst="bentConnector3">
+            <a:avLst>
+              <a:gd name="adj1" fmla="val 50000"/>
+            </a:avLst>
+          </a:prstGeom>
+          <a:ln w="19050">
+            <a:tailEnd type="arrow"/>
+          </a:ln>
+        </p:spPr>
+        <p:style>
+          <a:lnRef idx="1">
+            <a:schemeClr val="accent1"/>
+          </a:lnRef>
+          <a:fillRef idx="0">
+            <a:schemeClr val="accent1"/>
+          </a:fillRef>
+          <a:effectRef idx="0">
+            <a:schemeClr val="accent1"/>
+          </a:effectRef>
+          <a:fontRef idx="minor">
+            <a:schemeClr val="tx1"/>
+          </a:fontRef>
+        </p:style>
+      </p:cxnSp>
+      <p:sp>
+        <p:nvSpPr>
+          <p:cNvPr id="386" name="Прямоугольник 385">
+            <a:extLst>
+              <a:ext uri="{FF2B5EF4-FFF2-40B4-BE49-F238E27FC236}">
+                <a16:creationId xmlns:a16="http://schemas.microsoft.com/office/drawing/2014/main" id="{99C6CA20-455E-4DD6-A5F1-4008035CBFB8}"/>
+              </a:ext>
+            </a:extLst>
+          </p:cNvPr>
+          <p:cNvSpPr/>
+          <p:nvPr/>
+        </p:nvSpPr>
+        <p:spPr>
+          <a:xfrm>
+            <a:off x="7053302" y="8269517"/>
+            <a:ext cx="926325" cy="540000"/>
+          </a:xfrm>
+          <a:prstGeom prst="rect">
+            <a:avLst/>
+          </a:prstGeom>
+          <a:gradFill flip="none" rotWithShape="1">
+            <a:gsLst>
+              <a:gs pos="0">
+                <a:srgbClr val="7030A0"/>
+              </a:gs>
+              <a:gs pos="100000">
+                <a:schemeClr val="accent1">
+                  <a:lumMod val="60000"/>
+                  <a:lumOff val="40000"/>
+                </a:schemeClr>
+              </a:gs>
+            </a:gsLst>
+            <a:lin ang="0" scaled="1"/>
+            <a:tileRect/>
+          </a:gradFill>
+          <a:ln w="19050"/>
+        </p:spPr>
+        <p:style>
+          <a:lnRef idx="2">
+            <a:schemeClr val="accent1"/>
+          </a:lnRef>
+          <a:fillRef idx="1">
+            <a:schemeClr val="lt1"/>
+          </a:fillRef>
+          <a:effectRef idx="0">
+            <a:schemeClr val="accent1"/>
+          </a:effectRef>
+          <a:fontRef idx="minor">
+            <a:schemeClr val="dk1"/>
+          </a:fontRef>
+        </p:style>
+        <p:txBody>
+          <a:bodyPr lIns="124733" tIns="62367" rIns="124733" bIns="62367" rtlCol="0" anchor="ctr"/>
+          <a:lstStyle/>
+          <a:p>
+            <a:pPr algn="ctr"/>
+            <a:r>
+              <a:rPr lang="ru-RU" sz="700" dirty="0"/>
+              <a:t>Вернуть Танжер под руку Султана</a:t>
+            </a:r>
+          </a:p>
+        </p:txBody>
+      </p:sp>
+      <p:cxnSp>
+        <p:nvCxnSpPr>
+          <p:cNvPr id="387" name="Соединительная линия уступом 620">
+            <a:extLst>
+              <a:ext uri="{FF2B5EF4-FFF2-40B4-BE49-F238E27FC236}">
+                <a16:creationId xmlns:a16="http://schemas.microsoft.com/office/drawing/2014/main" id="{F54D1FD9-F108-459A-BCAD-99AAA49543C5}"/>
+              </a:ext>
+            </a:extLst>
+          </p:cNvPr>
+          <p:cNvCxnSpPr>
+            <a:cxnSpLocks/>
+            <a:stCxn id="337" idx="2"/>
+            <a:endCxn id="386" idx="0"/>
+          </p:cNvCxnSpPr>
+          <p:nvPr/>
+        </p:nvCxnSpPr>
+        <p:spPr>
+          <a:xfrm rot="16200000" flipH="1">
+            <a:off x="7091320" y="7844371"/>
+            <a:ext cx="262277" cy="588014"/>
+          </a:xfrm>
+          <a:prstGeom prst="bentConnector3">
+            <a:avLst>
+              <a:gd name="adj1" fmla="val 50000"/>
+            </a:avLst>
+          </a:prstGeom>
+          <a:ln w="19050">
+            <a:tailEnd type="arrow"/>
+          </a:ln>
+        </p:spPr>
+        <p:style>
+          <a:lnRef idx="1">
+            <a:schemeClr val="accent1"/>
+          </a:lnRef>
+          <a:fillRef idx="0">
+            <a:schemeClr val="accent1"/>
+          </a:fillRef>
+          <a:effectRef idx="0">
+            <a:schemeClr val="accent1"/>
+          </a:effectRef>
+          <a:fontRef idx="minor">
+            <a:schemeClr val="tx1"/>
+          </a:fontRef>
+        </p:style>
+      </p:cxnSp>
+      <p:sp>
+        <p:nvSpPr>
+          <p:cNvPr id="394" name="Прямоугольник 393">
+            <a:extLst>
+              <a:ext uri="{FF2B5EF4-FFF2-40B4-BE49-F238E27FC236}">
+                <a16:creationId xmlns:a16="http://schemas.microsoft.com/office/drawing/2014/main" id="{9E7EDF23-23F6-4AB2-AC8C-CF5D5F9A6C52}"/>
+              </a:ext>
+            </a:extLst>
+          </p:cNvPr>
+          <p:cNvSpPr/>
+          <p:nvPr/>
+        </p:nvSpPr>
+        <p:spPr>
+          <a:xfrm>
+            <a:off x="8841776" y="7455942"/>
+            <a:ext cx="926325" cy="540000"/>
+          </a:xfrm>
+          <a:prstGeom prst="rect">
+            <a:avLst/>
+          </a:prstGeom>
+          <a:solidFill>
+            <a:schemeClr val="accent1">
+              <a:lumMod val="60000"/>
+              <a:lumOff val="40000"/>
+            </a:schemeClr>
+          </a:solidFill>
+          <a:ln w="19050"/>
+        </p:spPr>
+        <p:style>
+          <a:lnRef idx="2">
+            <a:schemeClr val="accent1"/>
+          </a:lnRef>
+          <a:fillRef idx="1">
+            <a:schemeClr val="lt1"/>
+          </a:fillRef>
+          <a:effectRef idx="0">
+            <a:schemeClr val="accent1"/>
+          </a:effectRef>
+          <a:fontRef idx="minor">
+            <a:schemeClr val="dk1"/>
+          </a:fontRef>
+        </p:style>
+        <p:txBody>
+          <a:bodyPr lIns="124733" tIns="62367" rIns="124733" bIns="62367" rtlCol="0" anchor="ctr"/>
+          <a:lstStyle/>
+          <a:p>
+            <a:pPr algn="ctr"/>
+            <a:r>
+              <a:rPr lang="ru-RU" sz="700" dirty="0"/>
+              <a:t>Разделить духовную и светскую власть</a:t>
+            </a:r>
+          </a:p>
+        </p:txBody>
+      </p:sp>
+      <p:sp>
+        <p:nvSpPr>
+          <p:cNvPr id="395" name="Прямоугольник 394">
+            <a:extLst>
+              <a:ext uri="{FF2B5EF4-FFF2-40B4-BE49-F238E27FC236}">
+                <a16:creationId xmlns:a16="http://schemas.microsoft.com/office/drawing/2014/main" id="{750E2224-5F10-44BD-8AC6-7D94ECEF7F8D}"/>
+              </a:ext>
+            </a:extLst>
+          </p:cNvPr>
+          <p:cNvSpPr/>
+          <p:nvPr/>
+        </p:nvSpPr>
+        <p:spPr>
+          <a:xfrm>
+            <a:off x="7652593" y="7455162"/>
+            <a:ext cx="926325" cy="540000"/>
+          </a:xfrm>
+          <a:prstGeom prst="rect">
+            <a:avLst/>
+          </a:prstGeom>
+          <a:solidFill>
+            <a:schemeClr val="accent1">
+              <a:lumMod val="60000"/>
+              <a:lumOff val="40000"/>
+            </a:schemeClr>
+          </a:solidFill>
+          <a:ln w="19050"/>
+        </p:spPr>
+        <p:style>
+          <a:lnRef idx="2">
+            <a:schemeClr val="accent1"/>
+          </a:lnRef>
+          <a:fillRef idx="1">
+            <a:schemeClr val="lt1"/>
+          </a:fillRef>
+          <a:effectRef idx="0">
+            <a:schemeClr val="accent1"/>
+          </a:effectRef>
+          <a:fontRef idx="minor">
+            <a:schemeClr val="dk1"/>
+          </a:fontRef>
+        </p:style>
+        <p:txBody>
+          <a:bodyPr lIns="124733" tIns="62367" rIns="124733" bIns="62367" rtlCol="0" anchor="ctr"/>
+          <a:lstStyle/>
+          <a:p>
+            <a:pPr algn="ctr"/>
+            <a:r>
+              <a:rPr lang="ru-RU" sz="700" dirty="0"/>
+              <a:t>Сформировать правительство</a:t>
+            </a:r>
+          </a:p>
+        </p:txBody>
+      </p:sp>
+      <p:sp>
+        <p:nvSpPr>
+          <p:cNvPr id="396" name="Прямоугольник 395">
+            <a:extLst>
+              <a:ext uri="{FF2B5EF4-FFF2-40B4-BE49-F238E27FC236}">
+                <a16:creationId xmlns:a16="http://schemas.microsoft.com/office/drawing/2014/main" id="{2F16B681-37C5-4564-B8D6-A0A2A5BCB920}"/>
+              </a:ext>
+            </a:extLst>
+          </p:cNvPr>
+          <p:cNvSpPr/>
+          <p:nvPr/>
+        </p:nvSpPr>
+        <p:spPr>
+          <a:xfrm>
+            <a:off x="10029081" y="7455162"/>
+            <a:ext cx="926325" cy="540000"/>
+          </a:xfrm>
+          <a:prstGeom prst="rect">
+            <a:avLst/>
+          </a:prstGeom>
+          <a:solidFill>
+            <a:schemeClr val="accent1">
+              <a:lumMod val="60000"/>
+              <a:lumOff val="40000"/>
+            </a:schemeClr>
+          </a:solidFill>
+          <a:ln w="19050"/>
+        </p:spPr>
+        <p:style>
+          <a:lnRef idx="2">
+            <a:schemeClr val="accent1"/>
+          </a:lnRef>
+          <a:fillRef idx="1">
+            <a:schemeClr val="lt1"/>
+          </a:fillRef>
+          <a:effectRef idx="0">
+            <a:schemeClr val="accent1"/>
+          </a:effectRef>
+          <a:fontRef idx="minor">
+            <a:schemeClr val="dk1"/>
+          </a:fontRef>
+        </p:style>
+        <p:txBody>
+          <a:bodyPr lIns="124733" tIns="62367" rIns="124733" bIns="62367" rtlCol="0" anchor="ctr"/>
+          <a:lstStyle/>
+          <a:p>
+            <a:pPr algn="ctr"/>
+            <a:r>
+              <a:rPr lang="ru-RU" sz="700" dirty="0"/>
+              <a:t>Сформировать правительство</a:t>
+            </a:r>
+          </a:p>
+        </p:txBody>
+      </p:sp>
+      <p:cxnSp>
+        <p:nvCxnSpPr>
+          <p:cNvPr id="397" name="Соединительная линия уступом 620">
+            <a:extLst>
+              <a:ext uri="{FF2B5EF4-FFF2-40B4-BE49-F238E27FC236}">
+                <a16:creationId xmlns:a16="http://schemas.microsoft.com/office/drawing/2014/main" id="{B017D1EC-332A-43A1-8281-0F6E0A856BC4}"/>
+              </a:ext>
+            </a:extLst>
+          </p:cNvPr>
+          <p:cNvCxnSpPr>
+            <a:cxnSpLocks/>
+            <a:stCxn id="361" idx="2"/>
+            <a:endCxn id="394" idx="0"/>
+          </p:cNvCxnSpPr>
+          <p:nvPr/>
+        </p:nvCxnSpPr>
+        <p:spPr>
+          <a:xfrm rot="16200000" flipH="1">
+            <a:off x="8876088" y="7027091"/>
+            <a:ext cx="263056" cy="594646"/>
+          </a:xfrm>
+          <a:prstGeom prst="bentConnector3">
+            <a:avLst>
+              <a:gd name="adj1" fmla="val 50000"/>
+            </a:avLst>
+          </a:prstGeom>
+          <a:ln w="19050">
+            <a:prstDash val="dash"/>
+            <a:tailEnd type="arrow"/>
+          </a:ln>
+        </p:spPr>
+        <p:style>
+          <a:lnRef idx="1">
+            <a:schemeClr val="accent1"/>
+          </a:lnRef>
+          <a:fillRef idx="0">
+            <a:schemeClr val="accent1"/>
+          </a:fillRef>
+          <a:effectRef idx="0">
+            <a:schemeClr val="accent1"/>
+          </a:effectRef>
+          <a:fontRef idx="minor">
+            <a:schemeClr val="tx1"/>
+          </a:fontRef>
+        </p:style>
+      </p:cxnSp>
+      <p:cxnSp>
+        <p:nvCxnSpPr>
+          <p:cNvPr id="400" name="Соединительная линия уступом 620">
+            <a:extLst>
+              <a:ext uri="{FF2B5EF4-FFF2-40B4-BE49-F238E27FC236}">
+                <a16:creationId xmlns:a16="http://schemas.microsoft.com/office/drawing/2014/main" id="{C9C933A2-E386-443A-AC73-3C26918CD7AB}"/>
+              </a:ext>
+            </a:extLst>
+          </p:cNvPr>
+          <p:cNvCxnSpPr>
+            <a:cxnSpLocks/>
+            <a:stCxn id="362" idx="2"/>
+            <a:endCxn id="394" idx="0"/>
+          </p:cNvCxnSpPr>
+          <p:nvPr/>
+        </p:nvCxnSpPr>
+        <p:spPr>
+          <a:xfrm rot="5400000">
+            <a:off x="9473896" y="7025154"/>
+            <a:ext cx="261831" cy="599744"/>
+          </a:xfrm>
+          <a:prstGeom prst="bentConnector3">
+            <a:avLst>
+              <a:gd name="adj1" fmla="val 50000"/>
+            </a:avLst>
+          </a:prstGeom>
+          <a:ln w="19050">
+            <a:prstDash val="dash"/>
+            <a:tailEnd type="arrow"/>
+          </a:ln>
+        </p:spPr>
+        <p:style>
+          <a:lnRef idx="1">
+            <a:schemeClr val="accent1"/>
+          </a:lnRef>
+          <a:fillRef idx="0">
+            <a:schemeClr val="accent1"/>
+          </a:fillRef>
+          <a:effectRef idx="0">
+            <a:schemeClr val="accent1"/>
+          </a:effectRef>
+          <a:fontRef idx="minor">
+            <a:schemeClr val="tx1"/>
+          </a:fontRef>
+        </p:style>
+      </p:cxnSp>
+      <p:cxnSp>
+        <p:nvCxnSpPr>
+          <p:cNvPr id="403" name="Соединительная линия уступом 620">
+            <a:extLst>
+              <a:ext uri="{FF2B5EF4-FFF2-40B4-BE49-F238E27FC236}">
+                <a16:creationId xmlns:a16="http://schemas.microsoft.com/office/drawing/2014/main" id="{83EEC453-E55A-451D-A2BB-02DAD9369566}"/>
+              </a:ext>
+            </a:extLst>
+          </p:cNvPr>
+          <p:cNvCxnSpPr>
+            <a:cxnSpLocks/>
+            <a:stCxn id="361" idx="2"/>
+            <a:endCxn id="395" idx="0"/>
+          </p:cNvCxnSpPr>
+          <p:nvPr/>
+        </p:nvCxnSpPr>
+        <p:spPr>
+          <a:xfrm rot="5400000">
+            <a:off x="8281887" y="7026756"/>
+            <a:ext cx="262276" cy="594537"/>
+          </a:xfrm>
+          <a:prstGeom prst="bentConnector3">
+            <a:avLst>
+              <a:gd name="adj1" fmla="val 50000"/>
+            </a:avLst>
+          </a:prstGeom>
+          <a:ln w="19050">
+            <a:tailEnd type="arrow"/>
+          </a:ln>
+        </p:spPr>
+        <p:style>
+          <a:lnRef idx="1">
+            <a:schemeClr val="accent1"/>
+          </a:lnRef>
+          <a:fillRef idx="0">
+            <a:schemeClr val="accent1"/>
+          </a:fillRef>
+          <a:effectRef idx="0">
+            <a:schemeClr val="accent1"/>
+          </a:effectRef>
+          <a:fontRef idx="minor">
+            <a:schemeClr val="tx1"/>
+          </a:fontRef>
+        </p:style>
+      </p:cxnSp>
+      <p:cxnSp>
+        <p:nvCxnSpPr>
+          <p:cNvPr id="406" name="Соединительная линия уступом 620">
+            <a:extLst>
+              <a:ext uri="{FF2B5EF4-FFF2-40B4-BE49-F238E27FC236}">
+                <a16:creationId xmlns:a16="http://schemas.microsoft.com/office/drawing/2014/main" id="{BDEF3D9D-C27F-4BFB-A9CB-84167E4DF3B3}"/>
+              </a:ext>
+            </a:extLst>
+          </p:cNvPr>
+          <p:cNvCxnSpPr>
+            <a:cxnSpLocks/>
+            <a:stCxn id="362" idx="2"/>
+            <a:endCxn id="396" idx="0"/>
+          </p:cNvCxnSpPr>
+          <p:nvPr/>
+        </p:nvCxnSpPr>
+        <p:spPr>
+          <a:xfrm rot="16200000" flipH="1">
+            <a:off x="10067938" y="7030855"/>
+            <a:ext cx="261051" cy="587561"/>
+          </a:xfrm>
+          <a:prstGeom prst="bentConnector3">
+            <a:avLst>
+              <a:gd name="adj1" fmla="val 50000"/>
+            </a:avLst>
+          </a:prstGeom>
+          <a:ln w="19050">
+            <a:tailEnd type="arrow"/>
+          </a:ln>
+        </p:spPr>
+        <p:style>
+          <a:lnRef idx="1">
+            <a:schemeClr val="accent1"/>
+          </a:lnRef>
+          <a:fillRef idx="0">
+            <a:schemeClr val="accent1"/>
+          </a:fillRef>
+          <a:effectRef idx="0">
+            <a:schemeClr val="accent1"/>
+          </a:effectRef>
+          <a:fontRef idx="minor">
+            <a:schemeClr val="tx1"/>
+          </a:fontRef>
+        </p:style>
+      </p:cxnSp>
+      <p:sp>
+        <p:nvSpPr>
+          <p:cNvPr id="336" name="Прямоугольник 335">
+            <a:extLst>
+              <a:ext uri="{FF2B5EF4-FFF2-40B4-BE49-F238E27FC236}">
+                <a16:creationId xmlns:a16="http://schemas.microsoft.com/office/drawing/2014/main" id="{AB16E4EB-5430-4CC3-8399-29F2F6AF61BF}"/>
+              </a:ext>
+            </a:extLst>
+          </p:cNvPr>
+          <p:cNvSpPr/>
+          <p:nvPr/>
+        </p:nvSpPr>
+        <p:spPr>
+          <a:xfrm>
+            <a:off x="10030978" y="5045586"/>
+            <a:ext cx="926325" cy="540000"/>
+          </a:xfrm>
+          <a:prstGeom prst="rect">
+            <a:avLst/>
+          </a:prstGeom>
+          <a:solidFill>
+            <a:srgbClr val="7030A0"/>
+          </a:solidFill>
+          <a:ln w="19050"/>
+        </p:spPr>
+        <p:style>
+          <a:lnRef idx="2">
+            <a:schemeClr val="accent1"/>
+          </a:lnRef>
+          <a:fillRef idx="1">
+            <a:schemeClr val="lt1"/>
+          </a:fillRef>
+          <a:effectRef idx="0">
+            <a:schemeClr val="accent1"/>
+          </a:effectRef>
+          <a:fontRef idx="minor">
+            <a:schemeClr val="dk1"/>
+          </a:fontRef>
+        </p:style>
+        <p:txBody>
+          <a:bodyPr lIns="124733" tIns="62367" rIns="124733" bIns="62367" rtlCol="0" anchor="ctr"/>
+          <a:lstStyle/>
+          <a:p>
+            <a:pPr algn="ctr"/>
+            <a:r>
+              <a:rPr lang="ru-RU" sz="700" dirty="0"/>
+              <a:t>Реформировать </a:t>
+            </a:r>
+            <a:r>
+              <a:rPr lang="ru-RU" sz="700" dirty="0" err="1"/>
+              <a:t>мехзен</a:t>
+            </a:r>
+            <a:endParaRPr lang="ru-RU" sz="700" dirty="0"/>
+          </a:p>
+        </p:txBody>
+      </p:sp>
+      <p:sp>
+        <p:nvSpPr>
+          <p:cNvPr id="339" name="Прямоугольник 338">
+            <a:extLst>
+              <a:ext uri="{FF2B5EF4-FFF2-40B4-BE49-F238E27FC236}">
+                <a16:creationId xmlns:a16="http://schemas.microsoft.com/office/drawing/2014/main" id="{5897BA98-1814-4172-A9D3-A31E1B1AD080}"/>
+              </a:ext>
+            </a:extLst>
+          </p:cNvPr>
+          <p:cNvSpPr/>
+          <p:nvPr/>
+        </p:nvSpPr>
+        <p:spPr>
+          <a:xfrm>
+            <a:off x="10029743" y="5844112"/>
+            <a:ext cx="926325" cy="540000"/>
+          </a:xfrm>
+          <a:prstGeom prst="rect">
+            <a:avLst/>
+          </a:prstGeom>
+          <a:solidFill>
+            <a:srgbClr val="7030A0"/>
+          </a:solidFill>
+          <a:ln w="19050"/>
+        </p:spPr>
+        <p:style>
+          <a:lnRef idx="2">
+            <a:schemeClr val="accent1"/>
+          </a:lnRef>
+          <a:fillRef idx="1">
+            <a:schemeClr val="lt1"/>
+          </a:fillRef>
+          <a:effectRef idx="0">
+            <a:schemeClr val="accent1"/>
+          </a:effectRef>
+          <a:fontRef idx="minor">
+            <a:schemeClr val="dk1"/>
+          </a:fontRef>
+        </p:style>
+        <p:txBody>
+          <a:bodyPr lIns="124733" tIns="62367" rIns="124733" bIns="62367" rtlCol="0" anchor="ctr"/>
+          <a:lstStyle/>
+          <a:p>
+            <a:pPr algn="ctr"/>
+            <a:r>
+              <a:rPr lang="ru-RU" sz="700" dirty="0"/>
+              <a:t>Принять титул короля</a:t>
+            </a:r>
+            <a:br>
+              <a:rPr lang="ru-RU" sz="700" dirty="0"/>
+            </a:br>
+            <a:r>
+              <a:rPr lang="ru-RU" sz="300" dirty="0"/>
+              <a:t>В 1957 году он принял титул короля Марокко , чтобы символизировать единство страны, несмотря на разногласия между арабами и берберами .</a:t>
+            </a:r>
+            <a:endParaRPr lang="ru-RU" sz="700" dirty="0"/>
+          </a:p>
+        </p:txBody>
+      </p:sp>
+      <p:sp>
+        <p:nvSpPr>
+          <p:cNvPr id="345" name="Прямоугольник 344">
+            <a:extLst>
+              <a:ext uri="{FF2B5EF4-FFF2-40B4-BE49-F238E27FC236}">
+                <a16:creationId xmlns:a16="http://schemas.microsoft.com/office/drawing/2014/main" id="{28323095-6A38-4E35-8C92-261E14205AE9}"/>
+              </a:ext>
+            </a:extLst>
+          </p:cNvPr>
+          <p:cNvSpPr/>
+          <p:nvPr/>
+        </p:nvSpPr>
+        <p:spPr>
+          <a:xfrm>
+            <a:off x="11213130" y="6652886"/>
+            <a:ext cx="926325" cy="540000"/>
+          </a:xfrm>
+          <a:prstGeom prst="rect">
+            <a:avLst/>
+          </a:prstGeom>
+          <a:solidFill>
+            <a:srgbClr val="7030A0"/>
+          </a:solidFill>
+          <a:ln w="19050"/>
+        </p:spPr>
+        <p:style>
+          <a:lnRef idx="2">
+            <a:schemeClr val="accent1"/>
+          </a:lnRef>
+          <a:fillRef idx="1">
+            <a:schemeClr val="lt1"/>
+          </a:fillRef>
+          <a:effectRef idx="0">
+            <a:schemeClr val="accent1"/>
+          </a:effectRef>
+          <a:fontRef idx="minor">
+            <a:schemeClr val="dk1"/>
+          </a:fontRef>
+        </p:style>
+        <p:txBody>
+          <a:bodyPr lIns="124733" tIns="62367" rIns="124733" bIns="62367" rtlCol="0" anchor="ctr"/>
+          <a:lstStyle/>
+          <a:p>
+            <a:pPr algn="ctr"/>
+            <a:r>
+              <a:rPr lang="ru-RU" sz="700" dirty="0"/>
+              <a:t>Сократить влияние националистов</a:t>
+            </a:r>
+          </a:p>
+        </p:txBody>
+      </p:sp>
+      <p:sp>
+        <p:nvSpPr>
+          <p:cNvPr id="385" name="Прямоугольник 384">
+            <a:extLst>
+              <a:ext uri="{FF2B5EF4-FFF2-40B4-BE49-F238E27FC236}">
+                <a16:creationId xmlns:a16="http://schemas.microsoft.com/office/drawing/2014/main" id="{56E8842A-823E-4F0E-9699-5B2927CC325E}"/>
+              </a:ext>
+            </a:extLst>
+          </p:cNvPr>
+          <p:cNvSpPr/>
+          <p:nvPr/>
+        </p:nvSpPr>
+        <p:spPr>
+          <a:xfrm>
+            <a:off x="7660083" y="9888283"/>
+            <a:ext cx="926325" cy="540000"/>
+          </a:xfrm>
+          <a:prstGeom prst="rect">
+            <a:avLst/>
+          </a:prstGeom>
+          <a:gradFill flip="none" rotWithShape="1">
+            <a:gsLst>
+              <a:gs pos="0">
+                <a:srgbClr val="7030A0"/>
+              </a:gs>
+              <a:gs pos="100000">
+                <a:schemeClr val="accent1">
+                  <a:lumMod val="60000"/>
+                  <a:lumOff val="40000"/>
+                </a:schemeClr>
+              </a:gs>
+            </a:gsLst>
+            <a:lin ang="0" scaled="1"/>
+            <a:tileRect/>
+          </a:gradFill>
+          <a:ln w="19050"/>
+        </p:spPr>
+        <p:style>
+          <a:lnRef idx="2">
+            <a:schemeClr val="accent1"/>
+          </a:lnRef>
+          <a:fillRef idx="1">
+            <a:schemeClr val="lt1"/>
+          </a:fillRef>
+          <a:effectRef idx="0">
+            <a:schemeClr val="accent1"/>
+          </a:effectRef>
+          <a:fontRef idx="minor">
+            <a:schemeClr val="dk1"/>
+          </a:fontRef>
+        </p:style>
+        <p:txBody>
+          <a:bodyPr lIns="124733" tIns="62367" rIns="124733" bIns="62367" rtlCol="0" anchor="ctr"/>
+          <a:lstStyle/>
+          <a:p>
+            <a:pPr algn="ctr"/>
+            <a:r>
+              <a:rPr lang="ru-RU" sz="700" dirty="0" err="1"/>
+              <a:t>Панарабисткие</a:t>
+            </a:r>
+            <a:r>
+              <a:rPr lang="ru-RU" sz="700" dirty="0"/>
+              <a:t> амбиции</a:t>
+            </a:r>
+          </a:p>
+        </p:txBody>
+      </p:sp>
+      <p:sp>
+        <p:nvSpPr>
+          <p:cNvPr id="388" name="Прямоугольник 387">
+            <a:extLst>
+              <a:ext uri="{FF2B5EF4-FFF2-40B4-BE49-F238E27FC236}">
+                <a16:creationId xmlns:a16="http://schemas.microsoft.com/office/drawing/2014/main" id="{F8854DA0-0A68-4978-AB1E-49C2999C31BA}"/>
+              </a:ext>
+            </a:extLst>
+          </p:cNvPr>
+          <p:cNvSpPr/>
+          <p:nvPr/>
+        </p:nvSpPr>
+        <p:spPr>
+          <a:xfrm>
+            <a:off x="5277983" y="9888283"/>
+            <a:ext cx="926325" cy="540000"/>
+          </a:xfrm>
+          <a:prstGeom prst="rect">
+            <a:avLst/>
+          </a:prstGeom>
+          <a:gradFill flip="none" rotWithShape="1">
+            <a:gsLst>
+              <a:gs pos="0">
+                <a:srgbClr val="7030A0"/>
+              </a:gs>
+              <a:gs pos="100000">
+                <a:schemeClr val="accent1">
+                  <a:lumMod val="60000"/>
+                  <a:lumOff val="40000"/>
+                </a:schemeClr>
+              </a:gs>
+            </a:gsLst>
+            <a:lin ang="0" scaled="1"/>
+            <a:tileRect/>
+          </a:gradFill>
+          <a:ln w="19050"/>
+        </p:spPr>
+        <p:style>
+          <a:lnRef idx="2">
+            <a:schemeClr val="accent1"/>
+          </a:lnRef>
+          <a:fillRef idx="1">
+            <a:schemeClr val="lt1"/>
+          </a:fillRef>
+          <a:effectRef idx="0">
+            <a:schemeClr val="accent1"/>
+          </a:effectRef>
+          <a:fontRef idx="minor">
+            <a:schemeClr val="dk1"/>
+          </a:fontRef>
+        </p:style>
+        <p:txBody>
+          <a:bodyPr lIns="124733" tIns="62367" rIns="124733" bIns="62367" rtlCol="0" anchor="ctr"/>
+          <a:lstStyle/>
+          <a:p>
+            <a:pPr algn="ctr"/>
+            <a:r>
+              <a:rPr lang="ru-RU" sz="700" dirty="0"/>
+              <a:t>Аль-Андалусские амбиции</a:t>
+            </a:r>
+          </a:p>
+        </p:txBody>
+      </p:sp>
+      <p:cxnSp>
+        <p:nvCxnSpPr>
+          <p:cNvPr id="389" name="Соединительная линия уступом 620">
+            <a:extLst>
+              <a:ext uri="{FF2B5EF4-FFF2-40B4-BE49-F238E27FC236}">
+                <a16:creationId xmlns:a16="http://schemas.microsoft.com/office/drawing/2014/main" id="{6939D681-CD5F-4237-8B2C-87DF6F68EDC8}"/>
+              </a:ext>
+            </a:extLst>
+          </p:cNvPr>
+          <p:cNvCxnSpPr>
+            <a:cxnSpLocks/>
+            <a:stCxn id="330" idx="2"/>
+            <a:endCxn id="385" idx="0"/>
+          </p:cNvCxnSpPr>
+          <p:nvPr/>
+        </p:nvCxnSpPr>
+        <p:spPr>
+          <a:xfrm rot="16200000" flipH="1">
+            <a:off x="7391157" y="9156193"/>
+            <a:ext cx="269383" cy="1194796"/>
+          </a:xfrm>
+          <a:prstGeom prst="bentConnector3">
+            <a:avLst>
+              <a:gd name="adj1" fmla="val 50000"/>
+            </a:avLst>
+          </a:prstGeom>
+          <a:ln w="19050">
+            <a:tailEnd type="arrow"/>
+          </a:ln>
+        </p:spPr>
+        <p:style>
+          <a:lnRef idx="1">
+            <a:schemeClr val="accent1"/>
+          </a:lnRef>
+          <a:fillRef idx="0">
+            <a:schemeClr val="accent1"/>
+          </a:fillRef>
+          <a:effectRef idx="0">
+            <a:schemeClr val="accent1"/>
+          </a:effectRef>
+          <a:fontRef idx="minor">
+            <a:schemeClr val="tx1"/>
+          </a:fontRef>
+        </p:style>
+      </p:cxnSp>
+      <p:cxnSp>
+        <p:nvCxnSpPr>
+          <p:cNvPr id="390" name="Соединительная линия уступом 620">
+            <a:extLst>
+              <a:ext uri="{FF2B5EF4-FFF2-40B4-BE49-F238E27FC236}">
+                <a16:creationId xmlns:a16="http://schemas.microsoft.com/office/drawing/2014/main" id="{58F98732-BFE8-4991-9A38-05C11FC04FDB}"/>
+              </a:ext>
+            </a:extLst>
+          </p:cNvPr>
+          <p:cNvCxnSpPr>
+            <a:cxnSpLocks/>
+            <a:stCxn id="330" idx="2"/>
+            <a:endCxn id="388" idx="0"/>
+          </p:cNvCxnSpPr>
+          <p:nvPr/>
+        </p:nvCxnSpPr>
+        <p:spPr>
+          <a:xfrm rot="5400000">
+            <a:off x="6200107" y="9159939"/>
+            <a:ext cx="269383" cy="1187304"/>
+          </a:xfrm>
+          <a:prstGeom prst="bentConnector3">
+            <a:avLst>
+              <a:gd name="adj1" fmla="val 50000"/>
+            </a:avLst>
+          </a:prstGeom>
+          <a:ln w="19050">
+            <a:tailEnd type="arrow"/>
+          </a:ln>
+        </p:spPr>
+        <p:style>
+          <a:lnRef idx="1">
+            <a:schemeClr val="accent1"/>
+          </a:lnRef>
+          <a:fillRef idx="0">
+            <a:schemeClr val="accent1"/>
+          </a:fillRef>
+          <a:effectRef idx="0">
+            <a:schemeClr val="accent1"/>
+          </a:effectRef>
+          <a:fontRef idx="minor">
+            <a:schemeClr val="tx1"/>
+          </a:fontRef>
+        </p:style>
+      </p:cxnSp>
+      <p:sp>
+        <p:nvSpPr>
+          <p:cNvPr id="391" name="Прямоугольник 390">
+            <a:extLst>
+              <a:ext uri="{FF2B5EF4-FFF2-40B4-BE49-F238E27FC236}">
+                <a16:creationId xmlns:a16="http://schemas.microsoft.com/office/drawing/2014/main" id="{F6324390-F8AE-4AB5-AD25-75C7A7634BC2}"/>
+              </a:ext>
+            </a:extLst>
+          </p:cNvPr>
+          <p:cNvSpPr/>
+          <p:nvPr/>
+        </p:nvSpPr>
+        <p:spPr>
+          <a:xfrm>
+            <a:off x="5874952" y="10688572"/>
+            <a:ext cx="926325" cy="540000"/>
+          </a:xfrm>
+          <a:prstGeom prst="rect">
+            <a:avLst/>
+          </a:prstGeom>
+          <a:gradFill flip="none" rotWithShape="1">
+            <a:gsLst>
+              <a:gs pos="0">
+                <a:srgbClr val="7030A0"/>
+              </a:gs>
+              <a:gs pos="100000">
+                <a:schemeClr val="accent1">
+                  <a:lumMod val="60000"/>
+                  <a:lumOff val="40000"/>
+                </a:schemeClr>
+              </a:gs>
+            </a:gsLst>
+            <a:lin ang="0" scaled="1"/>
+            <a:tileRect/>
+          </a:gradFill>
+          <a:ln w="19050"/>
+        </p:spPr>
+        <p:style>
+          <a:lnRef idx="2">
+            <a:schemeClr val="accent1"/>
+          </a:lnRef>
+          <a:fillRef idx="1">
+            <a:schemeClr val="lt1"/>
+          </a:fillRef>
+          <a:effectRef idx="0">
+            <a:schemeClr val="accent1"/>
+          </a:effectRef>
+          <a:fontRef idx="minor">
+            <a:schemeClr val="dk1"/>
+          </a:fontRef>
+        </p:style>
+        <p:txBody>
+          <a:bodyPr lIns="124733" tIns="62367" rIns="124733" bIns="62367" rtlCol="0" anchor="ctr"/>
+          <a:lstStyle/>
+          <a:p>
+            <a:pPr algn="ctr"/>
+            <a:r>
+              <a:rPr lang="ru-RU" sz="700" dirty="0"/>
+              <a:t>Земли Испании</a:t>
+            </a:r>
+          </a:p>
+        </p:txBody>
+      </p:sp>
+      <p:cxnSp>
+        <p:nvCxnSpPr>
+          <p:cNvPr id="392" name="Прямая соединительная линия 391">
+            <a:extLst>
+              <a:ext uri="{FF2B5EF4-FFF2-40B4-BE49-F238E27FC236}">
+                <a16:creationId xmlns:a16="http://schemas.microsoft.com/office/drawing/2014/main" id="{69363E1E-740B-4D79-AA3E-047239836AA0}"/>
+              </a:ext>
+            </a:extLst>
+          </p:cNvPr>
+          <p:cNvCxnSpPr>
+            <a:cxnSpLocks/>
+            <a:stCxn id="385" idx="1"/>
+            <a:endCxn id="388" idx="3"/>
+          </p:cNvCxnSpPr>
+          <p:nvPr/>
+        </p:nvCxnSpPr>
+        <p:spPr>
+          <a:xfrm flipH="1">
+            <a:off x="6204308" y="10158283"/>
+            <a:ext cx="1455775" cy="0"/>
+          </a:xfrm>
+          <a:prstGeom prst="line">
+            <a:avLst/>
+          </a:prstGeom>
+          <a:ln w="38100">
+            <a:solidFill>
+              <a:srgbClr val="C00000"/>
+            </a:solidFill>
+          </a:ln>
+        </p:spPr>
+        <p:style>
+          <a:lnRef idx="1">
+            <a:schemeClr val="accent1"/>
+          </a:lnRef>
+          <a:fillRef idx="0">
+            <a:schemeClr val="accent1"/>
+          </a:fillRef>
+          <a:effectRef idx="0">
+            <a:schemeClr val="accent1"/>
+          </a:effectRef>
+          <a:fontRef idx="minor">
+            <a:schemeClr val="tx1"/>
+          </a:fontRef>
+        </p:style>
+      </p:cxnSp>
+      <p:sp>
+        <p:nvSpPr>
+          <p:cNvPr id="393" name="Прямоугольник 392">
+            <a:extLst>
+              <a:ext uri="{FF2B5EF4-FFF2-40B4-BE49-F238E27FC236}">
+                <a16:creationId xmlns:a16="http://schemas.microsoft.com/office/drawing/2014/main" id="{05D0D326-25E7-4CF1-BC8E-9F64D542575B}"/>
+              </a:ext>
+            </a:extLst>
+          </p:cNvPr>
+          <p:cNvSpPr/>
+          <p:nvPr/>
+        </p:nvSpPr>
+        <p:spPr>
+          <a:xfrm>
+            <a:off x="4685222" y="10689102"/>
+            <a:ext cx="926325" cy="540000"/>
+          </a:xfrm>
+          <a:prstGeom prst="rect">
+            <a:avLst/>
+          </a:prstGeom>
+          <a:gradFill flip="none" rotWithShape="1">
+            <a:gsLst>
+              <a:gs pos="0">
+                <a:srgbClr val="7030A0"/>
+              </a:gs>
+              <a:gs pos="100000">
+                <a:schemeClr val="accent1">
+                  <a:lumMod val="60000"/>
+                  <a:lumOff val="40000"/>
+                </a:schemeClr>
+              </a:gs>
+            </a:gsLst>
+            <a:lin ang="0" scaled="1"/>
+            <a:tileRect/>
+          </a:gradFill>
+          <a:ln w="19050"/>
+        </p:spPr>
+        <p:style>
+          <a:lnRef idx="2">
+            <a:schemeClr val="accent1"/>
+          </a:lnRef>
+          <a:fillRef idx="1">
+            <a:schemeClr val="lt1"/>
+          </a:fillRef>
+          <a:effectRef idx="0">
+            <a:schemeClr val="accent1"/>
+          </a:effectRef>
+          <a:fontRef idx="minor">
+            <a:schemeClr val="dk1"/>
+          </a:fontRef>
+        </p:style>
+        <p:txBody>
+          <a:bodyPr lIns="124733" tIns="62367" rIns="124733" bIns="62367" rtlCol="0" anchor="ctr"/>
+          <a:lstStyle/>
+          <a:p>
+            <a:pPr algn="ctr"/>
+            <a:r>
+              <a:rPr lang="ru-RU" sz="700" dirty="0"/>
+              <a:t>Земли Португалии</a:t>
+            </a:r>
+          </a:p>
+        </p:txBody>
+      </p:sp>
+      <p:sp>
+        <p:nvSpPr>
+          <p:cNvPr id="398" name="Прямоугольник 397">
+            <a:extLst>
+              <a:ext uri="{FF2B5EF4-FFF2-40B4-BE49-F238E27FC236}">
+                <a16:creationId xmlns:a16="http://schemas.microsoft.com/office/drawing/2014/main" id="{28CEDD15-69A5-47C1-928C-D47DE891019A}"/>
+              </a:ext>
+            </a:extLst>
+          </p:cNvPr>
+          <p:cNvSpPr/>
+          <p:nvPr/>
+        </p:nvSpPr>
+        <p:spPr>
+          <a:xfrm>
+            <a:off x="5277982" y="11488860"/>
+            <a:ext cx="926325" cy="540000"/>
+          </a:xfrm>
+          <a:prstGeom prst="rect">
+            <a:avLst/>
+          </a:prstGeom>
+          <a:gradFill flip="none" rotWithShape="1">
+            <a:gsLst>
+              <a:gs pos="0">
+                <a:srgbClr val="7030A0"/>
+              </a:gs>
+              <a:gs pos="100000">
+                <a:schemeClr val="accent1">
+                  <a:lumMod val="60000"/>
+                  <a:lumOff val="40000"/>
+                </a:schemeClr>
+              </a:gs>
+            </a:gsLst>
+            <a:lin ang="0" scaled="1"/>
+            <a:tileRect/>
+          </a:gradFill>
+          <a:ln w="19050"/>
+        </p:spPr>
+        <p:style>
+          <a:lnRef idx="2">
+            <a:schemeClr val="accent1"/>
+          </a:lnRef>
+          <a:fillRef idx="1">
+            <a:schemeClr val="lt1"/>
+          </a:fillRef>
+          <a:effectRef idx="0">
+            <a:schemeClr val="accent1"/>
+          </a:effectRef>
+          <a:fontRef idx="minor">
+            <a:schemeClr val="dk1"/>
+          </a:fontRef>
+        </p:style>
+        <p:txBody>
+          <a:bodyPr lIns="124733" tIns="62367" rIns="124733" bIns="62367" rtlCol="0" anchor="ctr"/>
+          <a:lstStyle/>
+          <a:p>
+            <a:pPr algn="ctr"/>
+            <a:r>
+              <a:rPr lang="ru-RU" sz="700" dirty="0"/>
+              <a:t>Оккупировать Гибралтар</a:t>
+            </a:r>
+          </a:p>
+        </p:txBody>
+      </p:sp>
+      <p:sp>
+        <p:nvSpPr>
+          <p:cNvPr id="399" name="Прямоугольник 398">
+            <a:extLst>
+              <a:ext uri="{FF2B5EF4-FFF2-40B4-BE49-F238E27FC236}">
+                <a16:creationId xmlns:a16="http://schemas.microsoft.com/office/drawing/2014/main" id="{2757126F-767B-49BC-8A20-3EF2F6BAD339}"/>
+              </a:ext>
+            </a:extLst>
+          </p:cNvPr>
+          <p:cNvSpPr/>
+          <p:nvPr/>
+        </p:nvSpPr>
+        <p:spPr>
+          <a:xfrm>
+            <a:off x="5868092" y="12288618"/>
+            <a:ext cx="926325" cy="540000"/>
+          </a:xfrm>
+          <a:prstGeom prst="rect">
+            <a:avLst/>
+          </a:prstGeom>
+          <a:gradFill flip="none" rotWithShape="1">
+            <a:gsLst>
+              <a:gs pos="0">
+                <a:srgbClr val="7030A0"/>
+              </a:gs>
+              <a:gs pos="100000">
+                <a:schemeClr val="accent1">
+                  <a:lumMod val="60000"/>
+                  <a:lumOff val="40000"/>
+                </a:schemeClr>
+              </a:gs>
+            </a:gsLst>
+            <a:lin ang="0" scaled="1"/>
+            <a:tileRect/>
+          </a:gradFill>
+          <a:ln w="19050"/>
+        </p:spPr>
+        <p:style>
+          <a:lnRef idx="2">
+            <a:schemeClr val="accent1"/>
+          </a:lnRef>
+          <a:fillRef idx="1">
+            <a:schemeClr val="lt1"/>
+          </a:fillRef>
+          <a:effectRef idx="0">
+            <a:schemeClr val="accent1"/>
+          </a:effectRef>
+          <a:fontRef idx="minor">
+            <a:schemeClr val="dk1"/>
+          </a:fontRef>
+        </p:style>
+        <p:txBody>
+          <a:bodyPr lIns="124733" tIns="62367" rIns="124733" bIns="62367" rtlCol="0" anchor="ctr"/>
+          <a:lstStyle/>
+          <a:p>
+            <a:pPr algn="ctr"/>
+            <a:r>
+              <a:rPr lang="ru-RU" sz="700" dirty="0"/>
+              <a:t>Реформировать Иберийские провинции под эмираты</a:t>
+            </a:r>
+          </a:p>
+        </p:txBody>
+      </p:sp>
+      <p:sp>
+        <p:nvSpPr>
+          <p:cNvPr id="401" name="Прямоугольник 400">
+            <a:extLst>
+              <a:ext uri="{FF2B5EF4-FFF2-40B4-BE49-F238E27FC236}">
+                <a16:creationId xmlns:a16="http://schemas.microsoft.com/office/drawing/2014/main" id="{98F1BED1-5D08-4C89-AA68-C9EEB86A12A3}"/>
+              </a:ext>
+            </a:extLst>
+          </p:cNvPr>
+          <p:cNvSpPr/>
+          <p:nvPr/>
+        </p:nvSpPr>
+        <p:spPr>
+          <a:xfrm>
+            <a:off x="4685221" y="12288618"/>
+            <a:ext cx="926325" cy="540000"/>
+          </a:xfrm>
+          <a:prstGeom prst="rect">
+            <a:avLst/>
+          </a:prstGeom>
+          <a:gradFill flip="none" rotWithShape="1">
+            <a:gsLst>
+              <a:gs pos="0">
+                <a:srgbClr val="7030A0"/>
+              </a:gs>
+              <a:gs pos="100000">
+                <a:schemeClr val="accent1">
+                  <a:lumMod val="60000"/>
+                  <a:lumOff val="40000"/>
+                </a:schemeClr>
+              </a:gs>
+            </a:gsLst>
+            <a:lin ang="0" scaled="1"/>
+            <a:tileRect/>
+          </a:gradFill>
+          <a:ln w="19050"/>
+        </p:spPr>
+        <p:style>
+          <a:lnRef idx="2">
+            <a:schemeClr val="accent1"/>
+          </a:lnRef>
+          <a:fillRef idx="1">
+            <a:schemeClr val="lt1"/>
+          </a:fillRef>
+          <a:effectRef idx="0">
+            <a:schemeClr val="accent1"/>
+          </a:effectRef>
+          <a:fontRef idx="minor">
+            <a:schemeClr val="dk1"/>
+          </a:fontRef>
+        </p:style>
+        <p:txBody>
+          <a:bodyPr lIns="124733" tIns="62367" rIns="124733" bIns="62367" rtlCol="0" anchor="ctr"/>
+          <a:lstStyle/>
+          <a:p>
+            <a:pPr algn="ctr"/>
+            <a:r>
+              <a:rPr lang="ru-RU" sz="700" dirty="0"/>
+              <a:t>Продвижение ислама на Пиренейском полуострове</a:t>
+            </a:r>
+          </a:p>
+        </p:txBody>
+      </p:sp>
+      <p:cxnSp>
+        <p:nvCxnSpPr>
+          <p:cNvPr id="402" name="Соединительная линия уступом 620">
+            <a:extLst>
+              <a:ext uri="{FF2B5EF4-FFF2-40B4-BE49-F238E27FC236}">
+                <a16:creationId xmlns:a16="http://schemas.microsoft.com/office/drawing/2014/main" id="{2EF2ABD2-BA85-4697-AE78-CF7878ADA90D}"/>
+              </a:ext>
+            </a:extLst>
+          </p:cNvPr>
+          <p:cNvCxnSpPr>
+            <a:cxnSpLocks/>
+            <a:stCxn id="388" idx="2"/>
+            <a:endCxn id="393" idx="0"/>
+          </p:cNvCxnSpPr>
+          <p:nvPr/>
+        </p:nvCxnSpPr>
+        <p:spPr>
+          <a:xfrm rot="5400000">
+            <a:off x="5314357" y="10262312"/>
+            <a:ext cx="260819" cy="592761"/>
+          </a:xfrm>
+          <a:prstGeom prst="bentConnector3">
+            <a:avLst>
+              <a:gd name="adj1" fmla="val 50000"/>
+            </a:avLst>
+          </a:prstGeom>
+          <a:ln w="19050">
+            <a:tailEnd type="arrow"/>
+          </a:ln>
+        </p:spPr>
+        <p:style>
+          <a:lnRef idx="1">
+            <a:schemeClr val="accent1"/>
+          </a:lnRef>
+          <a:fillRef idx="0">
+            <a:schemeClr val="accent1"/>
+          </a:fillRef>
+          <a:effectRef idx="0">
+            <a:schemeClr val="accent1"/>
+          </a:effectRef>
+          <a:fontRef idx="minor">
+            <a:schemeClr val="tx1"/>
+          </a:fontRef>
+        </p:style>
+      </p:cxnSp>
+      <p:cxnSp>
+        <p:nvCxnSpPr>
+          <p:cNvPr id="404" name="Соединительная линия уступом 620">
+            <a:extLst>
+              <a:ext uri="{FF2B5EF4-FFF2-40B4-BE49-F238E27FC236}">
+                <a16:creationId xmlns:a16="http://schemas.microsoft.com/office/drawing/2014/main" id="{CA823A6B-39CF-47ED-A88F-0C536E2E29A6}"/>
+              </a:ext>
+            </a:extLst>
+          </p:cNvPr>
+          <p:cNvCxnSpPr>
+            <a:cxnSpLocks/>
+            <a:stCxn id="388" idx="2"/>
+            <a:endCxn id="391" idx="0"/>
+          </p:cNvCxnSpPr>
+          <p:nvPr/>
+        </p:nvCxnSpPr>
+        <p:spPr>
+          <a:xfrm rot="16200000" flipH="1">
+            <a:off x="5909486" y="10259942"/>
+            <a:ext cx="260289" cy="596969"/>
+          </a:xfrm>
+          <a:prstGeom prst="bentConnector3">
+            <a:avLst>
+              <a:gd name="adj1" fmla="val 50000"/>
+            </a:avLst>
+          </a:prstGeom>
+          <a:ln w="19050">
+            <a:tailEnd type="arrow"/>
+          </a:ln>
+        </p:spPr>
+        <p:style>
+          <a:lnRef idx="1">
+            <a:schemeClr val="accent1"/>
+          </a:lnRef>
+          <a:fillRef idx="0">
+            <a:schemeClr val="accent1"/>
+          </a:fillRef>
+          <a:effectRef idx="0">
+            <a:schemeClr val="accent1"/>
+          </a:effectRef>
+          <a:fontRef idx="minor">
+            <a:schemeClr val="tx1"/>
+          </a:fontRef>
+        </p:style>
+      </p:cxnSp>
+      <p:cxnSp>
+        <p:nvCxnSpPr>
+          <p:cNvPr id="405" name="Соединительная линия уступом 620">
+            <a:extLst>
+              <a:ext uri="{FF2B5EF4-FFF2-40B4-BE49-F238E27FC236}">
+                <a16:creationId xmlns:a16="http://schemas.microsoft.com/office/drawing/2014/main" id="{8C529540-B4D6-4BB9-92AD-DEE61AFB1831}"/>
+              </a:ext>
+            </a:extLst>
+          </p:cNvPr>
+          <p:cNvCxnSpPr>
+            <a:cxnSpLocks/>
+            <a:stCxn id="388" idx="2"/>
+            <a:endCxn id="398" idx="0"/>
+          </p:cNvCxnSpPr>
+          <p:nvPr/>
+        </p:nvCxnSpPr>
+        <p:spPr>
+          <a:xfrm rot="5400000">
+            <a:off x="5210858" y="10958571"/>
+            <a:ext cx="1060577" cy="1"/>
+          </a:xfrm>
+          <a:prstGeom prst="bentConnector3">
+            <a:avLst>
+              <a:gd name="adj1" fmla="val 50000"/>
+            </a:avLst>
+          </a:prstGeom>
+          <a:ln w="19050">
+            <a:tailEnd type="arrow"/>
+          </a:ln>
+        </p:spPr>
+        <p:style>
+          <a:lnRef idx="1">
+            <a:schemeClr val="accent1"/>
+          </a:lnRef>
+          <a:fillRef idx="0">
+            <a:schemeClr val="accent1"/>
+          </a:fillRef>
+          <a:effectRef idx="0">
+            <a:schemeClr val="accent1"/>
+          </a:effectRef>
+          <a:fontRef idx="minor">
+            <a:schemeClr val="tx1"/>
+          </a:fontRef>
+        </p:style>
+      </p:cxnSp>
+      <p:cxnSp>
+        <p:nvCxnSpPr>
+          <p:cNvPr id="407" name="Соединительная линия уступом 620">
+            <a:extLst>
+              <a:ext uri="{FF2B5EF4-FFF2-40B4-BE49-F238E27FC236}">
+                <a16:creationId xmlns:a16="http://schemas.microsoft.com/office/drawing/2014/main" id="{C222986D-1E4F-4588-B963-F7419387B849}"/>
+              </a:ext>
+            </a:extLst>
+          </p:cNvPr>
+          <p:cNvCxnSpPr>
+            <a:cxnSpLocks/>
+            <a:stCxn id="398" idx="2"/>
+            <a:endCxn id="401" idx="0"/>
+          </p:cNvCxnSpPr>
+          <p:nvPr/>
+        </p:nvCxnSpPr>
+        <p:spPr>
+          <a:xfrm rot="5400000">
+            <a:off x="5314886" y="11862359"/>
+            <a:ext cx="259758" cy="592761"/>
+          </a:xfrm>
+          <a:prstGeom prst="bentConnector3">
+            <a:avLst>
+              <a:gd name="adj1" fmla="val 50000"/>
+            </a:avLst>
+          </a:prstGeom>
+          <a:ln w="19050">
+            <a:tailEnd type="arrow"/>
+          </a:ln>
+        </p:spPr>
+        <p:style>
+          <a:lnRef idx="1">
+            <a:schemeClr val="accent1"/>
+          </a:lnRef>
+          <a:fillRef idx="0">
+            <a:schemeClr val="accent1"/>
+          </a:fillRef>
+          <a:effectRef idx="0">
+            <a:schemeClr val="accent1"/>
+          </a:effectRef>
+          <a:fontRef idx="minor">
+            <a:schemeClr val="tx1"/>
+          </a:fontRef>
+        </p:style>
+      </p:cxnSp>
+      <p:cxnSp>
+        <p:nvCxnSpPr>
+          <p:cNvPr id="408" name="Соединительная линия уступом 620">
+            <a:extLst>
+              <a:ext uri="{FF2B5EF4-FFF2-40B4-BE49-F238E27FC236}">
+                <a16:creationId xmlns:a16="http://schemas.microsoft.com/office/drawing/2014/main" id="{4C3C96C6-F2ED-4F21-9CE9-26F579EBDE06}"/>
+              </a:ext>
+            </a:extLst>
+          </p:cNvPr>
+          <p:cNvCxnSpPr>
+            <a:cxnSpLocks/>
+            <a:stCxn id="398" idx="2"/>
+            <a:endCxn id="399" idx="0"/>
+          </p:cNvCxnSpPr>
+          <p:nvPr/>
+        </p:nvCxnSpPr>
+        <p:spPr>
+          <a:xfrm rot="16200000" flipH="1">
+            <a:off x="5906321" y="11863684"/>
+            <a:ext cx="259758" cy="590110"/>
+          </a:xfrm>
+          <a:prstGeom prst="bentConnector3">
+            <a:avLst>
+              <a:gd name="adj1" fmla="val 50000"/>
+            </a:avLst>
+          </a:prstGeom>
+          <a:ln w="19050">
+            <a:tailEnd type="arrow"/>
+          </a:ln>
+        </p:spPr>
+        <p:style>
+          <a:lnRef idx="1">
+            <a:schemeClr val="accent1"/>
+          </a:lnRef>
+          <a:fillRef idx="0">
+            <a:schemeClr val="accent1"/>
+          </a:fillRef>
+          <a:effectRef idx="0">
+            <a:schemeClr val="accent1"/>
+          </a:effectRef>
+          <a:fontRef idx="minor">
+            <a:schemeClr val="tx1"/>
+          </a:fontRef>
+        </p:style>
+      </p:cxnSp>
+      <p:sp>
+        <p:nvSpPr>
+          <p:cNvPr id="341" name="Прямоугольник 340">
+            <a:extLst>
+              <a:ext uri="{FF2B5EF4-FFF2-40B4-BE49-F238E27FC236}">
+                <a16:creationId xmlns:a16="http://schemas.microsoft.com/office/drawing/2014/main" id="{3C2402F4-31AF-448C-B8FA-52B3ADC9CEE0}"/>
+              </a:ext>
+            </a:extLst>
+          </p:cNvPr>
+          <p:cNvSpPr/>
+          <p:nvPr/>
+        </p:nvSpPr>
+        <p:spPr>
+          <a:xfrm>
+            <a:off x="5875167" y="6663485"/>
+            <a:ext cx="926325" cy="540000"/>
+          </a:xfrm>
+          <a:prstGeom prst="rect">
+            <a:avLst/>
+          </a:prstGeom>
+          <a:gradFill flip="none" rotWithShape="1">
+            <a:gsLst>
+              <a:gs pos="0">
+                <a:srgbClr val="7030A0"/>
+              </a:gs>
+              <a:gs pos="100000">
+                <a:schemeClr val="accent1">
+                  <a:lumMod val="60000"/>
+                  <a:lumOff val="40000"/>
+                </a:schemeClr>
+              </a:gs>
+            </a:gsLst>
+            <a:lin ang="0" scaled="1"/>
+            <a:tileRect/>
+          </a:gradFill>
+          <a:ln w="19050"/>
+        </p:spPr>
+        <p:style>
+          <a:lnRef idx="2">
+            <a:schemeClr val="accent1"/>
+          </a:lnRef>
+          <a:fillRef idx="1">
+            <a:schemeClr val="lt1"/>
+          </a:fillRef>
+          <a:effectRef idx="0">
+            <a:schemeClr val="accent1"/>
+          </a:effectRef>
+          <a:fontRef idx="minor">
+            <a:schemeClr val="dk1"/>
+          </a:fontRef>
+        </p:style>
+        <p:txBody>
+          <a:bodyPr lIns="124733" tIns="62367" rIns="124733" bIns="62367" rtlCol="0" anchor="ctr"/>
+          <a:lstStyle/>
+          <a:p>
+            <a:pPr algn="ctr"/>
+            <a:r>
+              <a:rPr lang="ru-RU" sz="700" dirty="0"/>
+              <a:t>Поддержать волнения в Мавритании</a:t>
+            </a:r>
+          </a:p>
+        </p:txBody>
+      </p:sp>
+      <p:sp>
+        <p:nvSpPr>
+          <p:cNvPr id="411" name="Прямоугольник 410">
+            <a:extLst>
+              <a:ext uri="{FF2B5EF4-FFF2-40B4-BE49-F238E27FC236}">
+                <a16:creationId xmlns:a16="http://schemas.microsoft.com/office/drawing/2014/main" id="{C688C71C-1C36-4FD3-ADF8-83A350ED6574}"/>
+              </a:ext>
+            </a:extLst>
+          </p:cNvPr>
+          <p:cNvSpPr/>
+          <p:nvPr/>
+        </p:nvSpPr>
+        <p:spPr>
+          <a:xfrm>
+            <a:off x="10028508" y="4235046"/>
+            <a:ext cx="926325" cy="540000"/>
+          </a:xfrm>
+          <a:prstGeom prst="rect">
+            <a:avLst/>
+          </a:prstGeom>
+          <a:solidFill>
+            <a:srgbClr val="7030A0"/>
+          </a:solidFill>
+          <a:ln w="19050"/>
+        </p:spPr>
+        <p:style>
+          <a:lnRef idx="2">
+            <a:schemeClr val="accent1"/>
+          </a:lnRef>
+          <a:fillRef idx="1">
+            <a:schemeClr val="lt1"/>
+          </a:fillRef>
+          <a:effectRef idx="0">
+            <a:schemeClr val="accent1"/>
+          </a:effectRef>
+          <a:fontRef idx="minor">
+            <a:schemeClr val="dk1"/>
+          </a:fontRef>
+        </p:style>
+        <p:txBody>
+          <a:bodyPr lIns="124733" tIns="62367" rIns="124733" bIns="62367" rtlCol="0" anchor="ctr"/>
+          <a:lstStyle/>
+          <a:p>
+            <a:pPr algn="ctr"/>
+            <a:r>
+              <a:rPr lang="ru-RU" sz="700" dirty="0"/>
+              <a:t>Назначит лояльного королю визиря</a:t>
+            </a:r>
+          </a:p>
+        </p:txBody>
+      </p:sp>
+      <p:cxnSp>
+        <p:nvCxnSpPr>
+          <p:cNvPr id="412" name="Прямая соединительная линия 411">
+            <a:extLst>
+              <a:ext uri="{FF2B5EF4-FFF2-40B4-BE49-F238E27FC236}">
+                <a16:creationId xmlns:a16="http://schemas.microsoft.com/office/drawing/2014/main" id="{FE3D907B-C345-42EE-9CEE-AE0F130BD2FE}"/>
+              </a:ext>
+            </a:extLst>
+          </p:cNvPr>
+          <p:cNvCxnSpPr>
+            <a:cxnSpLocks/>
+            <a:stCxn id="411" idx="1"/>
+            <a:endCxn id="275" idx="3"/>
+          </p:cNvCxnSpPr>
+          <p:nvPr/>
+        </p:nvCxnSpPr>
+        <p:spPr>
+          <a:xfrm flipH="1">
+            <a:off x="9768525" y="4505046"/>
+            <a:ext cx="259983" cy="0"/>
+          </a:xfrm>
+          <a:prstGeom prst="line">
+            <a:avLst/>
+          </a:prstGeom>
+          <a:ln w="38100">
+            <a:solidFill>
+              <a:srgbClr val="C00000"/>
+            </a:solidFill>
+          </a:ln>
+        </p:spPr>
+        <p:style>
+          <a:lnRef idx="1">
+            <a:schemeClr val="accent1"/>
+          </a:lnRef>
+          <a:fillRef idx="0">
+            <a:schemeClr val="accent1"/>
+          </a:fillRef>
+          <a:effectRef idx="0">
+            <a:schemeClr val="accent1"/>
+          </a:effectRef>
+          <a:fontRef idx="minor">
+            <a:schemeClr val="tx1"/>
+          </a:fontRef>
+        </p:style>
+      </p:cxnSp>
+      <p:cxnSp>
+        <p:nvCxnSpPr>
+          <p:cNvPr id="413" name="Соединительная линия уступом 620">
+            <a:extLst>
+              <a:ext uri="{FF2B5EF4-FFF2-40B4-BE49-F238E27FC236}">
+                <a16:creationId xmlns:a16="http://schemas.microsoft.com/office/drawing/2014/main" id="{8B330FB8-FF98-4300-95FC-E9679674C672}"/>
+              </a:ext>
+            </a:extLst>
+          </p:cNvPr>
+          <p:cNvCxnSpPr>
+            <a:cxnSpLocks/>
+            <a:stCxn id="287" idx="2"/>
+            <a:endCxn id="411" idx="0"/>
+          </p:cNvCxnSpPr>
+          <p:nvPr/>
+        </p:nvCxnSpPr>
+        <p:spPr>
+          <a:xfrm rot="16200000" flipH="1">
+            <a:off x="9765346" y="3508721"/>
+            <a:ext cx="263056" cy="1189594"/>
+          </a:xfrm>
+          <a:prstGeom prst="bentConnector3">
+            <a:avLst>
+              <a:gd name="adj1" fmla="val 50000"/>
+            </a:avLst>
+          </a:prstGeom>
+          <a:ln w="19050">
+            <a:tailEnd type="arrow"/>
+          </a:ln>
+        </p:spPr>
+        <p:style>
+          <a:lnRef idx="1">
+            <a:schemeClr val="accent1"/>
+          </a:lnRef>
+          <a:fillRef idx="0">
+            <a:schemeClr val="accent1"/>
+          </a:fillRef>
+          <a:effectRef idx="0">
+            <a:schemeClr val="accent1"/>
+          </a:effectRef>
+          <a:fontRef idx="minor">
+            <a:schemeClr val="tx1"/>
+          </a:fontRef>
+        </p:style>
+      </p:cxnSp>
+      <p:cxnSp>
+        <p:nvCxnSpPr>
+          <p:cNvPr id="414" name="Соединительная линия уступом 620">
+            <a:extLst>
+              <a:ext uri="{FF2B5EF4-FFF2-40B4-BE49-F238E27FC236}">
+                <a16:creationId xmlns:a16="http://schemas.microsoft.com/office/drawing/2014/main" id="{6F7D6D57-CFAB-4E36-9036-A9781AB86AF9}"/>
+              </a:ext>
+            </a:extLst>
+          </p:cNvPr>
+          <p:cNvCxnSpPr>
+            <a:cxnSpLocks/>
+            <a:stCxn id="411" idx="2"/>
+            <a:endCxn id="336" idx="0"/>
+          </p:cNvCxnSpPr>
+          <p:nvPr/>
+        </p:nvCxnSpPr>
+        <p:spPr>
+          <a:xfrm rot="16200000" flipH="1">
+            <a:off x="10357636" y="4909081"/>
+            <a:ext cx="270540" cy="2470"/>
+          </a:xfrm>
+          <a:prstGeom prst="bentConnector3">
+            <a:avLst>
+              <a:gd name="adj1" fmla="val 50000"/>
+            </a:avLst>
+          </a:prstGeom>
+          <a:ln w="19050">
+            <a:tailEnd type="arrow"/>
+          </a:ln>
+        </p:spPr>
+        <p:style>
+          <a:lnRef idx="1">
+            <a:schemeClr val="accent1"/>
+          </a:lnRef>
+          <a:fillRef idx="0">
+            <a:schemeClr val="accent1"/>
+          </a:fillRef>
+          <a:effectRef idx="0">
+            <a:schemeClr val="accent1"/>
+          </a:effectRef>
+          <a:fontRef idx="minor">
+            <a:schemeClr val="tx1"/>
+          </a:fontRef>
+        </p:style>
+      </p:cxnSp>
+      <p:cxnSp>
+        <p:nvCxnSpPr>
+          <p:cNvPr id="416" name="Соединительная линия уступом 620">
+            <a:extLst>
+              <a:ext uri="{FF2B5EF4-FFF2-40B4-BE49-F238E27FC236}">
+                <a16:creationId xmlns:a16="http://schemas.microsoft.com/office/drawing/2014/main" id="{E4830A77-CFFB-4D97-BE75-3D5605CF1301}"/>
+              </a:ext>
+            </a:extLst>
+          </p:cNvPr>
+          <p:cNvCxnSpPr>
+            <a:cxnSpLocks/>
+            <a:stCxn id="336" idx="2"/>
+            <a:endCxn id="320" idx="0"/>
+          </p:cNvCxnSpPr>
+          <p:nvPr/>
+        </p:nvCxnSpPr>
+        <p:spPr>
+          <a:xfrm rot="5400000">
+            <a:off x="9176723" y="4532110"/>
+            <a:ext cx="263942" cy="2370895"/>
+          </a:xfrm>
+          <a:prstGeom prst="bentConnector3">
+            <a:avLst>
+              <a:gd name="adj1" fmla="val 50000"/>
+            </a:avLst>
+          </a:prstGeom>
+          <a:ln w="19050">
+            <a:prstDash val="dash"/>
+            <a:tailEnd type="arrow"/>
+          </a:ln>
+        </p:spPr>
+        <p:style>
+          <a:lnRef idx="1">
+            <a:schemeClr val="accent1"/>
+          </a:lnRef>
+          <a:fillRef idx="0">
+            <a:schemeClr val="accent1"/>
+          </a:fillRef>
+          <a:effectRef idx="0">
+            <a:schemeClr val="accent1"/>
+          </a:effectRef>
+          <a:fontRef idx="minor">
+            <a:schemeClr val="tx1"/>
+          </a:fontRef>
+        </p:style>
+      </p:cxnSp>
+      <p:cxnSp>
+        <p:nvCxnSpPr>
+          <p:cNvPr id="417" name="Прямая соединительная линия 416">
+            <a:extLst>
+              <a:ext uri="{FF2B5EF4-FFF2-40B4-BE49-F238E27FC236}">
+                <a16:creationId xmlns:a16="http://schemas.microsoft.com/office/drawing/2014/main" id="{1E429E6C-CAEA-4DE1-8529-074CBD4D666A}"/>
+              </a:ext>
+            </a:extLst>
+          </p:cNvPr>
+          <p:cNvCxnSpPr>
+            <a:cxnSpLocks/>
+            <a:stCxn id="336" idx="1"/>
+            <a:endCxn id="316" idx="3"/>
+          </p:cNvCxnSpPr>
+          <p:nvPr/>
+        </p:nvCxnSpPr>
+        <p:spPr>
+          <a:xfrm flipH="1" flipV="1">
+            <a:off x="8582229" y="5312438"/>
+            <a:ext cx="1448749" cy="3148"/>
+          </a:xfrm>
+          <a:prstGeom prst="line">
+            <a:avLst/>
+          </a:prstGeom>
+          <a:ln w="38100">
+            <a:solidFill>
+              <a:srgbClr val="C00000"/>
+            </a:solidFill>
+          </a:ln>
+        </p:spPr>
+        <p:style>
+          <a:lnRef idx="1">
+            <a:schemeClr val="accent1"/>
+          </a:lnRef>
+          <a:fillRef idx="0">
+            <a:schemeClr val="accent1"/>
+          </a:fillRef>
+          <a:effectRef idx="0">
+            <a:schemeClr val="accent1"/>
+          </a:effectRef>
+          <a:fontRef idx="minor">
+            <a:schemeClr val="tx1"/>
+          </a:fontRef>
+        </p:style>
+      </p:cxnSp>
+      <p:cxnSp>
+        <p:nvCxnSpPr>
+          <p:cNvPr id="418" name="Соединительная линия уступом 620">
+            <a:extLst>
+              <a:ext uri="{FF2B5EF4-FFF2-40B4-BE49-F238E27FC236}">
+                <a16:creationId xmlns:a16="http://schemas.microsoft.com/office/drawing/2014/main" id="{39F7F08E-601C-4E17-AA63-BAB3202D746A}"/>
+              </a:ext>
+            </a:extLst>
+          </p:cNvPr>
+          <p:cNvCxnSpPr>
+            <a:cxnSpLocks/>
+            <a:stCxn id="336" idx="2"/>
+            <a:endCxn id="339" idx="0"/>
+          </p:cNvCxnSpPr>
+          <p:nvPr/>
+        </p:nvCxnSpPr>
+        <p:spPr>
+          <a:xfrm rot="5400000">
+            <a:off x="10364261" y="5714232"/>
+            <a:ext cx="258526" cy="1235"/>
+          </a:xfrm>
+          <a:prstGeom prst="bentConnector3">
+            <a:avLst>
+              <a:gd name="adj1" fmla="val 50000"/>
+            </a:avLst>
+          </a:prstGeom>
+          <a:ln w="19050">
+            <a:tailEnd type="arrow"/>
+          </a:ln>
+        </p:spPr>
+        <p:style>
+          <a:lnRef idx="1">
+            <a:schemeClr val="accent1"/>
+          </a:lnRef>
+          <a:fillRef idx="0">
+            <a:schemeClr val="accent1"/>
+          </a:fillRef>
+          <a:effectRef idx="0">
+            <a:schemeClr val="accent1"/>
+          </a:effectRef>
+          <a:fontRef idx="minor">
+            <a:schemeClr val="tx1"/>
+          </a:fontRef>
+        </p:style>
+      </p:cxnSp>
+      <p:cxnSp>
+        <p:nvCxnSpPr>
+          <p:cNvPr id="419" name="Соединительная линия уступом 620">
+            <a:extLst>
+              <a:ext uri="{FF2B5EF4-FFF2-40B4-BE49-F238E27FC236}">
+                <a16:creationId xmlns:a16="http://schemas.microsoft.com/office/drawing/2014/main" id="{681E0FBA-1733-43B9-98CA-A4658882A5F5}"/>
+              </a:ext>
+            </a:extLst>
+          </p:cNvPr>
+          <p:cNvCxnSpPr>
+            <a:cxnSpLocks/>
+            <a:stCxn id="339" idx="2"/>
+            <a:endCxn id="345" idx="0"/>
+          </p:cNvCxnSpPr>
+          <p:nvPr/>
+        </p:nvCxnSpPr>
+        <p:spPr>
+          <a:xfrm rot="16200000" flipH="1">
+            <a:off x="10950212" y="5926805"/>
+            <a:ext cx="268774" cy="1183387"/>
+          </a:xfrm>
+          <a:prstGeom prst="bentConnector3">
+            <a:avLst>
+              <a:gd name="adj1" fmla="val 50000"/>
+            </a:avLst>
+          </a:prstGeom>
+          <a:ln w="19050">
+            <a:tailEnd type="arrow"/>
+          </a:ln>
+        </p:spPr>
+        <p:style>
+          <a:lnRef idx="1">
+            <a:schemeClr val="accent1"/>
+          </a:lnRef>
+          <a:fillRef idx="0">
+            <a:schemeClr val="accent1"/>
+          </a:fillRef>
+          <a:effectRef idx="0">
+            <a:schemeClr val="accent1"/>
+          </a:effectRef>
+          <a:fontRef idx="minor">
+            <a:schemeClr val="tx1"/>
+          </a:fontRef>
+        </p:style>
+      </p:cxnSp>
+      <p:sp>
+        <p:nvSpPr>
+          <p:cNvPr id="420" name="Прямоугольник 419">
+            <a:extLst>
+              <a:ext uri="{FF2B5EF4-FFF2-40B4-BE49-F238E27FC236}">
+                <a16:creationId xmlns:a16="http://schemas.microsoft.com/office/drawing/2014/main" id="{D1A6BCEA-858E-4D65-ACB7-0ADE35BB1A2A}"/>
+              </a:ext>
+            </a:extLst>
+          </p:cNvPr>
+          <p:cNvSpPr/>
+          <p:nvPr/>
+        </p:nvSpPr>
+        <p:spPr>
+          <a:xfrm>
+            <a:off x="11210970" y="5856916"/>
+            <a:ext cx="926325" cy="540000"/>
+          </a:xfrm>
+          <a:prstGeom prst="rect">
+            <a:avLst/>
+          </a:prstGeom>
+          <a:solidFill>
+            <a:srgbClr val="7030A0"/>
+          </a:solidFill>
+          <a:ln w="19050"/>
+        </p:spPr>
+        <p:style>
+          <a:lnRef idx="2">
+            <a:schemeClr val="accent1"/>
+          </a:lnRef>
+          <a:fillRef idx="1">
+            <a:schemeClr val="lt1"/>
+          </a:fillRef>
+          <a:effectRef idx="0">
+            <a:schemeClr val="accent1"/>
+          </a:effectRef>
+          <a:fontRef idx="minor">
+            <a:schemeClr val="dk1"/>
+          </a:fontRef>
+        </p:style>
+        <p:txBody>
+          <a:bodyPr lIns="124733" tIns="62367" rIns="124733" bIns="62367" rtlCol="0" anchor="ctr"/>
+          <a:lstStyle/>
+          <a:p>
+            <a:pPr algn="ctr"/>
+            <a:r>
+              <a:rPr lang="ru-RU" sz="700" dirty="0"/>
+              <a:t>Разрешить митинги и профсоюзы</a:t>
+            </a:r>
+          </a:p>
+        </p:txBody>
+      </p:sp>
+      <p:cxnSp>
+        <p:nvCxnSpPr>
+          <p:cNvPr id="421" name="Соединительная линия уступом 620">
+            <a:extLst>
+              <a:ext uri="{FF2B5EF4-FFF2-40B4-BE49-F238E27FC236}">
+                <a16:creationId xmlns:a16="http://schemas.microsoft.com/office/drawing/2014/main" id="{04418FFC-EF67-4950-A1E9-BF3730CDF1A8}"/>
+              </a:ext>
+            </a:extLst>
+          </p:cNvPr>
+          <p:cNvCxnSpPr>
+            <a:cxnSpLocks/>
+            <a:stCxn id="336" idx="2"/>
+            <a:endCxn id="420" idx="0"/>
+          </p:cNvCxnSpPr>
+          <p:nvPr/>
+        </p:nvCxnSpPr>
+        <p:spPr>
+          <a:xfrm rot="16200000" flipH="1">
+            <a:off x="10948472" y="5131255"/>
+            <a:ext cx="271330" cy="1179992"/>
+          </a:xfrm>
+          <a:prstGeom prst="bentConnector3">
+            <a:avLst>
+              <a:gd name="adj1" fmla="val 50000"/>
+            </a:avLst>
+          </a:prstGeom>
+          <a:ln w="19050">
+            <a:tailEnd type="arrow"/>
+          </a:ln>
+        </p:spPr>
+        <p:style>
+          <a:lnRef idx="1">
+            <a:schemeClr val="accent1"/>
+          </a:lnRef>
+          <a:fillRef idx="0">
+            <a:schemeClr val="accent1"/>
+          </a:fillRef>
+          <a:effectRef idx="0">
+            <a:schemeClr val="accent1"/>
+          </a:effectRef>
+          <a:fontRef idx="minor">
+            <a:schemeClr val="tx1"/>
+          </a:fontRef>
+        </p:style>
+      </p:cxnSp>
+      <p:sp>
+        <p:nvSpPr>
+          <p:cNvPr id="422" name="Прямоугольник 421">
+            <a:extLst>
+              <a:ext uri="{FF2B5EF4-FFF2-40B4-BE49-F238E27FC236}">
+                <a16:creationId xmlns:a16="http://schemas.microsoft.com/office/drawing/2014/main" id="{0CDAB3F3-F1D4-45E2-808F-9C0405D4348C}"/>
+              </a:ext>
+            </a:extLst>
+          </p:cNvPr>
+          <p:cNvSpPr/>
+          <p:nvPr/>
+        </p:nvSpPr>
+        <p:spPr>
+          <a:xfrm>
+            <a:off x="11216385" y="7448856"/>
+            <a:ext cx="926325" cy="540000"/>
+          </a:xfrm>
+          <a:prstGeom prst="rect">
+            <a:avLst/>
+          </a:prstGeom>
+          <a:solidFill>
+            <a:srgbClr val="7030A0"/>
+          </a:solidFill>
+          <a:ln w="19050"/>
+        </p:spPr>
+        <p:style>
+          <a:lnRef idx="2">
+            <a:schemeClr val="accent1"/>
+          </a:lnRef>
+          <a:fillRef idx="1">
+            <a:schemeClr val="lt1"/>
+          </a:fillRef>
+          <a:effectRef idx="0">
+            <a:schemeClr val="accent1"/>
+          </a:effectRef>
+          <a:fontRef idx="minor">
+            <a:schemeClr val="dk1"/>
+          </a:fontRef>
+        </p:style>
+        <p:txBody>
+          <a:bodyPr lIns="124733" tIns="62367" rIns="124733" bIns="62367" rtlCol="0" anchor="ctr"/>
+          <a:lstStyle/>
+          <a:p>
+            <a:pPr algn="ctr"/>
+            <a:r>
+              <a:rPr lang="ru-RU" sz="700" dirty="0"/>
+              <a:t>Единоличная власть Мухаммеда </a:t>
+            </a:r>
+            <a:r>
+              <a:rPr lang="en-US" sz="700" dirty="0"/>
+              <a:t>V</a:t>
+            </a:r>
+            <a:endParaRPr lang="ru-RU" sz="700" dirty="0"/>
+          </a:p>
+        </p:txBody>
+      </p:sp>
+      <p:cxnSp>
+        <p:nvCxnSpPr>
+          <p:cNvPr id="423" name="Соединительная линия уступом 620">
+            <a:extLst>
+              <a:ext uri="{FF2B5EF4-FFF2-40B4-BE49-F238E27FC236}">
+                <a16:creationId xmlns:a16="http://schemas.microsoft.com/office/drawing/2014/main" id="{B2211544-6FD5-4685-9C14-221F7049609B}"/>
+              </a:ext>
+            </a:extLst>
+          </p:cNvPr>
+          <p:cNvCxnSpPr>
+            <a:cxnSpLocks/>
+            <a:stCxn id="420" idx="2"/>
+            <a:endCxn id="345" idx="0"/>
+          </p:cNvCxnSpPr>
+          <p:nvPr/>
+        </p:nvCxnSpPr>
+        <p:spPr>
+          <a:xfrm rot="16200000" flipH="1">
+            <a:off x="11547228" y="6523821"/>
+            <a:ext cx="255970" cy="2160"/>
+          </a:xfrm>
+          <a:prstGeom prst="bentConnector3">
+            <a:avLst>
+              <a:gd name="adj1" fmla="val 50000"/>
+            </a:avLst>
+          </a:prstGeom>
+          <a:ln w="19050">
+            <a:tailEnd type="arrow"/>
+          </a:ln>
+        </p:spPr>
+        <p:style>
+          <a:lnRef idx="1">
+            <a:schemeClr val="accent1"/>
+          </a:lnRef>
+          <a:fillRef idx="0">
+            <a:schemeClr val="accent1"/>
+          </a:fillRef>
+          <a:effectRef idx="0">
+            <a:schemeClr val="accent1"/>
+          </a:effectRef>
+          <a:fontRef idx="minor">
+            <a:schemeClr val="tx1"/>
+          </a:fontRef>
+        </p:style>
+      </p:cxnSp>
+      <p:cxnSp>
+        <p:nvCxnSpPr>
+          <p:cNvPr id="424" name="Соединительная линия уступом 620">
+            <a:extLst>
+              <a:ext uri="{FF2B5EF4-FFF2-40B4-BE49-F238E27FC236}">
+                <a16:creationId xmlns:a16="http://schemas.microsoft.com/office/drawing/2014/main" id="{43B70F96-3D36-4946-9DC4-867C38D732EE}"/>
+              </a:ext>
+            </a:extLst>
+          </p:cNvPr>
+          <p:cNvCxnSpPr>
+            <a:cxnSpLocks/>
+            <a:stCxn id="345" idx="2"/>
+            <a:endCxn id="422" idx="0"/>
+          </p:cNvCxnSpPr>
+          <p:nvPr/>
+        </p:nvCxnSpPr>
+        <p:spPr>
+          <a:xfrm rot="16200000" flipH="1">
+            <a:off x="11549935" y="7319243"/>
+            <a:ext cx="255970" cy="3255"/>
+          </a:xfrm>
+          <a:prstGeom prst="bentConnector3">
+            <a:avLst>
+              <a:gd name="adj1" fmla="val 50000"/>
             </a:avLst>
           </a:prstGeom>
           <a:ln w="19050">

--- a/Наработки/диздоки/Марокко/Марокко.pptx
+++ b/Наработки/диздоки/Марокко/Марокко.pptx
@@ -209,7 +209,7 @@
             <a:fld id="{33E3D7F9-E251-484C-A6FF-FA958879DF69}" type="datetimeFigureOut">
               <a:rPr lang="ru-RU" smtClean="0"/>
               <a:pPr/>
-              <a:t>17.06.2026</a:t>
+              <a:t>18.06.2026</a:t>
             </a:fld>
             <a:endParaRPr lang="ru-RU"/>
           </a:p>
@@ -699,7 +699,7 @@
             <a:fld id="{85A5DE44-605B-4D3B-B2B7-94543DF81A36}" type="datetimeFigureOut">
               <a:rPr lang="ru-RU" smtClean="0"/>
               <a:pPr/>
-              <a:t>17.06.2026</a:t>
+              <a:t>18.06.2026</a:t>
             </a:fld>
             <a:endParaRPr lang="ru-RU"/>
           </a:p>
@@ -871,7 +871,7 @@
             <a:fld id="{85A5DE44-605B-4D3B-B2B7-94543DF81A36}" type="datetimeFigureOut">
               <a:rPr lang="ru-RU" smtClean="0"/>
               <a:pPr/>
-              <a:t>17.06.2026</a:t>
+              <a:t>18.06.2026</a:t>
             </a:fld>
             <a:endParaRPr lang="ru-RU"/>
           </a:p>
@@ -1053,7 +1053,7 @@
             <a:fld id="{85A5DE44-605B-4D3B-B2B7-94543DF81A36}" type="datetimeFigureOut">
               <a:rPr lang="ru-RU" smtClean="0"/>
               <a:pPr/>
-              <a:t>17.06.2026</a:t>
+              <a:t>18.06.2026</a:t>
             </a:fld>
             <a:endParaRPr lang="ru-RU"/>
           </a:p>
@@ -1225,7 +1225,7 @@
             <a:fld id="{85A5DE44-605B-4D3B-B2B7-94543DF81A36}" type="datetimeFigureOut">
               <a:rPr lang="ru-RU" smtClean="0"/>
               <a:pPr/>
-              <a:t>17.06.2026</a:t>
+              <a:t>18.06.2026</a:t>
             </a:fld>
             <a:endParaRPr lang="ru-RU"/>
           </a:p>
@@ -1473,7 +1473,7 @@
             <a:fld id="{85A5DE44-605B-4D3B-B2B7-94543DF81A36}" type="datetimeFigureOut">
               <a:rPr lang="ru-RU" smtClean="0"/>
               <a:pPr/>
-              <a:t>17.06.2026</a:t>
+              <a:t>18.06.2026</a:t>
             </a:fld>
             <a:endParaRPr lang="ru-RU"/>
           </a:p>
@@ -1707,7 +1707,7 @@
             <a:fld id="{85A5DE44-605B-4D3B-B2B7-94543DF81A36}" type="datetimeFigureOut">
               <a:rPr lang="ru-RU" smtClean="0"/>
               <a:pPr/>
-              <a:t>17.06.2026</a:t>
+              <a:t>18.06.2026</a:t>
             </a:fld>
             <a:endParaRPr lang="ru-RU"/>
           </a:p>
@@ -2076,7 +2076,7 @@
             <a:fld id="{85A5DE44-605B-4D3B-B2B7-94543DF81A36}" type="datetimeFigureOut">
               <a:rPr lang="ru-RU" smtClean="0"/>
               <a:pPr/>
-              <a:t>17.06.2026</a:t>
+              <a:t>18.06.2026</a:t>
             </a:fld>
             <a:endParaRPr lang="ru-RU"/>
           </a:p>
@@ -2196,7 +2196,7 @@
             <a:fld id="{85A5DE44-605B-4D3B-B2B7-94543DF81A36}" type="datetimeFigureOut">
               <a:rPr lang="ru-RU" smtClean="0"/>
               <a:pPr/>
-              <a:t>17.06.2026</a:t>
+              <a:t>18.06.2026</a:t>
             </a:fld>
             <a:endParaRPr lang="ru-RU"/>
           </a:p>
@@ -2293,7 +2293,7 @@
             <a:fld id="{85A5DE44-605B-4D3B-B2B7-94543DF81A36}" type="datetimeFigureOut">
               <a:rPr lang="ru-RU" smtClean="0"/>
               <a:pPr/>
-              <a:t>17.06.2026</a:t>
+              <a:t>18.06.2026</a:t>
             </a:fld>
             <a:endParaRPr lang="ru-RU"/>
           </a:p>
@@ -2572,7 +2572,7 @@
             <a:fld id="{85A5DE44-605B-4D3B-B2B7-94543DF81A36}" type="datetimeFigureOut">
               <a:rPr lang="ru-RU" smtClean="0"/>
               <a:pPr/>
-              <a:t>17.06.2026</a:t>
+              <a:t>18.06.2026</a:t>
             </a:fld>
             <a:endParaRPr lang="ru-RU"/>
           </a:p>
@@ -2831,7 +2831,7 @@
             <a:fld id="{85A5DE44-605B-4D3B-B2B7-94543DF81A36}" type="datetimeFigureOut">
               <a:rPr lang="ru-RU" smtClean="0"/>
               <a:pPr/>
-              <a:t>17.06.2026</a:t>
+              <a:t>18.06.2026</a:t>
             </a:fld>
             <a:endParaRPr lang="ru-RU"/>
           </a:p>
@@ -3046,7 +3046,7 @@
             <a:fld id="{85A5DE44-605B-4D3B-B2B7-94543DF81A36}" type="datetimeFigureOut">
               <a:rPr lang="ru-RU" smtClean="0"/>
               <a:pPr/>
-              <a:t>17.06.2026</a:t>
+              <a:t>18.06.2026</a:t>
             </a:fld>
             <a:endParaRPr lang="ru-RU"/>
           </a:p>
@@ -3460,7 +3460,7 @@
         </p:nvSpPr>
         <p:spPr>
           <a:xfrm>
-            <a:off x="46698778" y="23093895"/>
+            <a:off x="46820132" y="28885095"/>
             <a:ext cx="926325" cy="540000"/>
           </a:xfrm>
           <a:prstGeom prst="rect">
@@ -3528,7 +3528,7 @@
         </p:nvCxnSpPr>
         <p:spPr>
           <a:xfrm rot="5400000">
-            <a:off x="46369670" y="23179570"/>
+            <a:off x="46491024" y="28970770"/>
             <a:ext cx="337946" cy="1246596"/>
           </a:xfrm>
           <a:prstGeom prst="bentConnector3">
@@ -3573,7 +3573,7 @@
         </p:nvCxnSpPr>
         <p:spPr>
           <a:xfrm rot="16200000" flipH="1">
-            <a:off x="47605215" y="23190621"/>
+            <a:off x="47726569" y="28981821"/>
             <a:ext cx="337947" cy="1224494"/>
           </a:xfrm>
           <a:prstGeom prst="bentConnector3">
@@ -3614,7 +3614,7 @@
         </p:nvSpPr>
         <p:spPr>
           <a:xfrm>
-            <a:off x="47317920" y="24779091"/>
+            <a:off x="47439274" y="30570291"/>
             <a:ext cx="926325" cy="540000"/>
           </a:xfrm>
           <a:prstGeom prst="rect">
@@ -3665,7 +3665,7 @@
         </p:nvSpPr>
         <p:spPr>
           <a:xfrm>
-            <a:off x="45452182" y="23971841"/>
+            <a:off x="45573536" y="29763041"/>
             <a:ext cx="926325" cy="540000"/>
           </a:xfrm>
           <a:prstGeom prst="rect">
@@ -3716,7 +3716,7 @@
         </p:nvSpPr>
         <p:spPr>
           <a:xfrm>
-            <a:off x="47923272" y="23971842"/>
+            <a:off x="48044626" y="29763042"/>
             <a:ext cx="926325" cy="540000"/>
           </a:xfrm>
           <a:prstGeom prst="rect">
@@ -3771,7 +3771,7 @@
         </p:nvCxnSpPr>
         <p:spPr>
           <a:xfrm flipH="1" flipV="1">
-            <a:off x="46378507" y="24241841"/>
+            <a:off x="46499861" y="30033041"/>
             <a:ext cx="1544765" cy="1"/>
           </a:xfrm>
           <a:prstGeom prst="line">
@@ -3816,7 +3816,7 @@
         </p:nvCxnSpPr>
         <p:spPr>
           <a:xfrm rot="5400000">
-            <a:off x="47950135" y="24342790"/>
+            <a:off x="48071489" y="30133990"/>
             <a:ext cx="267249" cy="605352"/>
           </a:xfrm>
           <a:prstGeom prst="bentConnector3">
@@ -3862,7 +3862,7 @@
         </p:nvCxnSpPr>
         <p:spPr>
           <a:xfrm rot="16200000" flipH="1">
-            <a:off x="46714589" y="23712597"/>
+            <a:off x="46835943" y="29503797"/>
             <a:ext cx="267250" cy="1865738"/>
           </a:xfrm>
           <a:prstGeom prst="bentConnector3">
@@ -3908,7 +3908,7 @@
         </p:nvCxnSpPr>
         <p:spPr>
           <a:xfrm rot="5400000">
-            <a:off x="45473665" y="24335031"/>
+            <a:off x="45595019" y="30126231"/>
             <a:ext cx="264871" cy="618491"/>
           </a:xfrm>
           <a:prstGeom prst="bentConnector3">
@@ -3949,7 +3949,7 @@
         </p:nvSpPr>
         <p:spPr>
           <a:xfrm>
-            <a:off x="48540579" y="24776006"/>
+            <a:off x="48661933" y="30567206"/>
             <a:ext cx="926325" cy="540000"/>
           </a:xfrm>
           <a:prstGeom prst="rect">
@@ -4000,7 +4000,7 @@
         </p:nvSpPr>
         <p:spPr>
           <a:xfrm>
-            <a:off x="44833691" y="24776712"/>
+            <a:off x="44955045" y="30567912"/>
             <a:ext cx="926325" cy="540000"/>
           </a:xfrm>
           <a:prstGeom prst="rect">
@@ -4128,7 +4128,7 @@
         </p:nvSpPr>
         <p:spPr>
           <a:xfrm>
-            <a:off x="44833043" y="25594641"/>
+            <a:off x="44954397" y="31385841"/>
             <a:ext cx="926325" cy="540000"/>
           </a:xfrm>
           <a:prstGeom prst="rect">
@@ -4200,7 +4200,7 @@
         </p:nvSpPr>
         <p:spPr>
           <a:xfrm>
-            <a:off x="43590659" y="24776006"/>
+            <a:off x="43712013" y="30567206"/>
             <a:ext cx="926325" cy="540000"/>
           </a:xfrm>
           <a:prstGeom prst="rect">
@@ -4304,7 +4304,7 @@
         </p:nvSpPr>
         <p:spPr>
           <a:xfrm>
-            <a:off x="46074888" y="24781839"/>
+            <a:off x="46196242" y="30573039"/>
             <a:ext cx="926325" cy="540000"/>
           </a:xfrm>
           <a:prstGeom prst="rect">
@@ -4404,7 +4404,7 @@
         </p:nvCxnSpPr>
         <p:spPr>
           <a:xfrm rot="5400000">
-            <a:off x="44852502" y="23713162"/>
+            <a:off x="44973856" y="29504362"/>
             <a:ext cx="264165" cy="1861523"/>
           </a:xfrm>
           <a:prstGeom prst="bentConnector3">
@@ -4449,7 +4449,7 @@
         </p:nvCxnSpPr>
         <p:spPr>
           <a:xfrm rot="5400000">
-            <a:off x="45157566" y="25455352"/>
+            <a:off x="45278920" y="31246552"/>
             <a:ext cx="277929" cy="648"/>
           </a:xfrm>
           <a:prstGeom prst="bentConnector3">
@@ -4490,7 +4490,7 @@
         </p:nvSpPr>
         <p:spPr>
           <a:xfrm>
-            <a:off x="46074887" y="25594641"/>
+            <a:off x="46196241" y="31385841"/>
             <a:ext cx="926325" cy="540000"/>
           </a:xfrm>
           <a:prstGeom prst="rect">
@@ -4558,7 +4558,7 @@
         </p:nvCxnSpPr>
         <p:spPr>
           <a:xfrm rot="5400000">
-            <a:off x="46401650" y="25458240"/>
+            <a:off x="46523004" y="31249440"/>
             <a:ext cx="272802" cy="1"/>
           </a:xfrm>
           <a:prstGeom prst="bentConnector3">
@@ -4599,7 +4599,7 @@
         </p:nvSpPr>
         <p:spPr>
           <a:xfrm>
-            <a:off x="47316086" y="25596903"/>
+            <a:off x="47437440" y="31388103"/>
             <a:ext cx="926325" cy="540000"/>
           </a:xfrm>
           <a:prstGeom prst="rect">
@@ -4679,7 +4679,7 @@
         </p:nvSpPr>
         <p:spPr>
           <a:xfrm>
-            <a:off x="47317919" y="26414715"/>
+            <a:off x="47439273" y="32205915"/>
             <a:ext cx="926325" cy="540000"/>
           </a:xfrm>
           <a:prstGeom prst="rect">
@@ -4771,7 +4771,7 @@
         </p:nvCxnSpPr>
         <p:spPr>
           <a:xfrm rot="5400000">
-            <a:off x="47641260" y="25457080"/>
+            <a:off x="47762614" y="31248280"/>
             <a:ext cx="277812" cy="1834"/>
           </a:xfrm>
           <a:prstGeom prst="bentConnector3">
@@ -4816,7 +4816,7 @@
         </p:nvCxnSpPr>
         <p:spPr>
           <a:xfrm rot="16200000" flipH="1">
-            <a:off x="47641259" y="26274892"/>
+            <a:off x="47762613" y="32066092"/>
             <a:ext cx="277812" cy="1833"/>
           </a:xfrm>
           <a:prstGeom prst="bentConnector3">
@@ -4861,7 +4861,7 @@
         </p:nvCxnSpPr>
         <p:spPr>
           <a:xfrm rot="16200000" flipH="1">
-            <a:off x="46091699" y="24335487"/>
+            <a:off x="46213053" y="30126687"/>
             <a:ext cx="269998" cy="622706"/>
           </a:xfrm>
           <a:prstGeom prst="bentConnector3">
@@ -4907,7 +4907,7 @@
         </p:nvCxnSpPr>
         <p:spPr>
           <a:xfrm rot="5400000">
-            <a:off x="47327245" y="23722648"/>
+            <a:off x="47448599" y="29513848"/>
             <a:ext cx="269997" cy="1848384"/>
           </a:xfrm>
           <a:prstGeom prst="bentConnector3">
@@ -4949,7 +4949,7 @@
         </p:nvSpPr>
         <p:spPr>
           <a:xfrm>
-            <a:off x="46698779" y="27424365"/>
+            <a:off x="46820132" y="33007771"/>
             <a:ext cx="926325" cy="540000"/>
           </a:xfrm>
           <a:prstGeom prst="rect">
@@ -5017,12 +5017,12 @@
         </p:nvCxnSpPr>
         <p:spPr>
           <a:xfrm rot="5400000">
-            <a:off x="46317928" y="25355857"/>
-            <a:ext cx="2912523" cy="1224493"/>
+            <a:off x="46543178" y="31043159"/>
+            <a:ext cx="2704729" cy="1224494"/>
           </a:xfrm>
           <a:prstGeom prst="bentConnector3">
             <a:avLst>
-              <a:gd name="adj1" fmla="val 4908"/>
+              <a:gd name="adj1" fmla="val 50000"/>
             </a:avLst>
           </a:prstGeom>
           <a:ln w="19050">
@@ -5063,12 +5063,12 @@
         </p:nvCxnSpPr>
         <p:spPr>
           <a:xfrm rot="16200000" flipH="1">
-            <a:off x="45082381" y="25344804"/>
-            <a:ext cx="2912524" cy="1246597"/>
+            <a:off x="45307632" y="31032108"/>
+            <a:ext cx="2704730" cy="1246596"/>
           </a:xfrm>
           <a:prstGeom prst="bentConnector3">
             <a:avLst>
-              <a:gd name="adj1" fmla="val 4542"/>
+              <a:gd name="adj1" fmla="val 50000"/>
             </a:avLst>
           </a:prstGeom>
           <a:ln w="19050">
@@ -5109,7 +5109,7 @@
         </p:nvCxnSpPr>
         <p:spPr>
           <a:xfrm rot="5400000">
-            <a:off x="43914858" y="25454970"/>
+            <a:off x="44036212" y="31246170"/>
             <a:ext cx="277929" cy="1"/>
           </a:xfrm>
           <a:prstGeom prst="bentConnector3">
@@ -5150,7 +5150,7 @@
         </p:nvSpPr>
         <p:spPr>
           <a:xfrm>
-            <a:off x="46074886" y="26414715"/>
+            <a:off x="46196240" y="32205915"/>
             <a:ext cx="926325" cy="540000"/>
           </a:xfrm>
           <a:prstGeom prst="rect">
@@ -5201,7 +5201,7 @@
         </p:nvSpPr>
         <p:spPr>
           <a:xfrm>
-            <a:off x="44218725" y="26412570"/>
+            <a:off x="44340079" y="32203770"/>
             <a:ext cx="926325" cy="540000"/>
           </a:xfrm>
           <a:prstGeom prst="rect">
@@ -5256,7 +5256,7 @@
         </p:nvCxnSpPr>
         <p:spPr>
           <a:xfrm rot="5400000">
-            <a:off x="44850083" y="25966446"/>
+            <a:off x="44971437" y="31757646"/>
             <a:ext cx="277929" cy="614318"/>
           </a:xfrm>
           <a:prstGeom prst="bentConnector3">
@@ -5301,7 +5301,7 @@
         </p:nvCxnSpPr>
         <p:spPr>
           <a:xfrm rot="16200000" flipH="1">
-            <a:off x="43819573" y="25550255"/>
+            <a:off x="43940927" y="31341455"/>
             <a:ext cx="1096564" cy="628066"/>
           </a:xfrm>
           <a:prstGeom prst="bentConnector3">
@@ -5346,7 +5346,7 @@
         </p:nvCxnSpPr>
         <p:spPr>
           <a:xfrm rot="5400000">
-            <a:off x="46398013" y="26274678"/>
+            <a:off x="46519367" y="32065878"/>
             <a:ext cx="280074" cy="1"/>
           </a:xfrm>
           <a:prstGeom prst="bentConnector3">
@@ -5391,7 +5391,7 @@
         </p:nvCxnSpPr>
         <p:spPr>
           <a:xfrm rot="16200000" flipH="1">
-            <a:off x="48563006" y="24335270"/>
+            <a:off x="48684360" y="30126470"/>
             <a:ext cx="264164" cy="617307"/>
           </a:xfrm>
           <a:prstGeom prst="bentConnector3">
@@ -5432,7 +5432,7 @@
         </p:nvSpPr>
         <p:spPr>
           <a:xfrm>
-            <a:off x="49779430" y="24776006"/>
+            <a:off x="49900784" y="30567206"/>
             <a:ext cx="926325" cy="540000"/>
           </a:xfrm>
           <a:prstGeom prst="rect">
@@ -5487,7 +5487,7 @@
         </p:nvCxnSpPr>
         <p:spPr>
           <a:xfrm rot="16200000" flipH="1">
-            <a:off x="49182432" y="23715845"/>
+            <a:off x="49303786" y="29507045"/>
             <a:ext cx="264164" cy="1856158"/>
           </a:xfrm>
           <a:prstGeom prst="bentConnector3">
@@ -5528,7 +5528,7 @@
         </p:nvSpPr>
         <p:spPr>
           <a:xfrm>
-            <a:off x="47316086" y="28237168"/>
+            <a:off x="47437440" y="34028368"/>
             <a:ext cx="926325" cy="540000"/>
           </a:xfrm>
           <a:prstGeom prst="rect">
@@ -5579,7 +5579,7 @@
         </p:nvSpPr>
         <p:spPr>
           <a:xfrm>
-            <a:off x="43590658" y="25593935"/>
+            <a:off x="43712012" y="31385135"/>
             <a:ext cx="926325" cy="540000"/>
           </a:xfrm>
           <a:prstGeom prst="rect">
@@ -5679,8 +5679,8 @@
         </p:nvCxnSpPr>
         <p:spPr>
           <a:xfrm rot="16200000" flipH="1">
-            <a:off x="47334194" y="27792112"/>
-            <a:ext cx="272803" cy="617307"/>
+            <a:off x="47351651" y="33479415"/>
+            <a:ext cx="480597" cy="617308"/>
           </a:xfrm>
           <a:prstGeom prst="bentConnector3">
             <a:avLst>
@@ -5720,7 +5720,7 @@
         </p:nvSpPr>
         <p:spPr>
           <a:xfrm>
-            <a:off x="43594468" y="27424365"/>
+            <a:off x="43715822" y="33007771"/>
             <a:ext cx="926325" cy="540000"/>
           </a:xfrm>
           <a:prstGeom prst="rect">
@@ -5812,8 +5812,8 @@
         </p:nvCxnSpPr>
         <p:spPr>
           <a:xfrm rot="16200000" flipH="1">
-            <a:off x="43410511" y="26777245"/>
-            <a:ext cx="1290430" cy="3810"/>
+            <a:off x="43635762" y="32464548"/>
+            <a:ext cx="1082636" cy="3810"/>
           </a:xfrm>
           <a:prstGeom prst="bentConnector3">
             <a:avLst>
@@ -5853,7 +5853,7 @@
         </p:nvSpPr>
         <p:spPr>
           <a:xfrm>
-            <a:off x="49779429" y="25593935"/>
+            <a:off x="49900783" y="31385135"/>
             <a:ext cx="926325" cy="540000"/>
           </a:xfrm>
           <a:prstGeom prst="rect">
@@ -5908,7 +5908,7 @@
         </p:nvCxnSpPr>
         <p:spPr>
           <a:xfrm rot="5400000">
-            <a:off x="50103629" y="25454970"/>
+            <a:off x="50224983" y="31246170"/>
             <a:ext cx="277929" cy="1"/>
           </a:xfrm>
           <a:prstGeom prst="bentConnector3">
@@ -5949,7 +5949,7 @@
         </p:nvSpPr>
         <p:spPr>
           <a:xfrm>
-            <a:off x="48542412" y="25594109"/>
+            <a:off x="48663766" y="31385309"/>
             <a:ext cx="926325" cy="540000"/>
           </a:xfrm>
           <a:prstGeom prst="rect">
@@ -6000,7 +6000,7 @@
         </p:nvSpPr>
         <p:spPr>
           <a:xfrm>
-            <a:off x="48542674" y="26412570"/>
+            <a:off x="48664028" y="32203770"/>
             <a:ext cx="926325" cy="540000"/>
           </a:xfrm>
           <a:prstGeom prst="rect">
@@ -6055,7 +6055,7 @@
         </p:nvCxnSpPr>
         <p:spPr>
           <a:xfrm rot="5400000">
-            <a:off x="47750244" y="26981575"/>
+            <a:off x="47871598" y="32772775"/>
             <a:ext cx="1284598" cy="1226588"/>
           </a:xfrm>
           <a:prstGeom prst="bentConnector3">
@@ -6096,7 +6096,7 @@
         </p:nvSpPr>
         <p:spPr>
           <a:xfrm>
-            <a:off x="46074885" y="28237167"/>
+            <a:off x="46196239" y="34028367"/>
             <a:ext cx="926325" cy="540000"/>
           </a:xfrm>
           <a:prstGeom prst="rect">
@@ -6151,7 +6151,7 @@
         </p:nvCxnSpPr>
         <p:spPr>
           <a:xfrm rot="16200000" flipH="1">
-            <a:off x="48865607" y="25454140"/>
+            <a:off x="48986961" y="31245340"/>
             <a:ext cx="278103" cy="1833"/>
           </a:xfrm>
           <a:prstGeom prst="bentConnector3">
@@ -6196,7 +6196,7 @@
         </p:nvCxnSpPr>
         <p:spPr>
           <a:xfrm rot="16200000" flipH="1">
-            <a:off x="48866476" y="26273208"/>
+            <a:off x="48987830" y="32064408"/>
             <a:ext cx="278461" cy="262"/>
           </a:xfrm>
           <a:prstGeom prst="bentConnector3">
@@ -6241,8 +6241,8 @@
         </p:nvCxnSpPr>
         <p:spPr>
           <a:xfrm rot="5400000">
-            <a:off x="46713594" y="27788819"/>
-            <a:ext cx="272802" cy="623894"/>
+            <a:off x="46731051" y="33476123"/>
+            <a:ext cx="480596" cy="623893"/>
           </a:xfrm>
           <a:prstGeom prst="bentConnector3">
             <a:avLst>
@@ -6282,7 +6282,7 @@
         </p:nvSpPr>
         <p:spPr>
           <a:xfrm>
-            <a:off x="46074885" y="29170618"/>
+            <a:off x="46196239" y="34961818"/>
             <a:ext cx="926325" cy="540000"/>
           </a:xfrm>
           <a:prstGeom prst="rect">
@@ -6333,7 +6333,7 @@
         </p:nvSpPr>
         <p:spPr>
           <a:xfrm>
-            <a:off x="48534750" y="29170215"/>
+            <a:off x="48656104" y="34961415"/>
             <a:ext cx="926325" cy="540000"/>
           </a:xfrm>
           <a:prstGeom prst="rect">
@@ -6388,7 +6388,7 @@
         </p:nvCxnSpPr>
         <p:spPr>
           <a:xfrm rot="5400000">
-            <a:off x="46961924" y="28353293"/>
+            <a:off x="47083278" y="34144493"/>
             <a:ext cx="393450" cy="1241201"/>
           </a:xfrm>
           <a:prstGeom prst="bentConnector3">
@@ -6433,7 +6433,7 @@
         </p:nvCxnSpPr>
         <p:spPr>
           <a:xfrm rot="16200000" flipH="1">
-            <a:off x="48192058" y="28364359"/>
+            <a:off x="48313412" y="34155559"/>
             <a:ext cx="393047" cy="1218664"/>
           </a:xfrm>
           <a:prstGeom prst="bentConnector3">
@@ -6474,7 +6474,7 @@
         </p:nvSpPr>
         <p:spPr>
           <a:xfrm>
-            <a:off x="41115911" y="23093894"/>
+            <a:off x="47127139" y="19702809"/>
             <a:ext cx="926325" cy="540000"/>
           </a:xfrm>
           <a:prstGeom prst="rect">
@@ -6525,7 +6525,7 @@
         </p:nvSpPr>
         <p:spPr>
           <a:xfrm>
-            <a:off x="42351808" y="24776004"/>
+            <a:off x="48363036" y="21384919"/>
             <a:ext cx="926325" cy="540000"/>
           </a:xfrm>
           <a:prstGeom prst="rect">
@@ -6576,7 +6576,7 @@
         </p:nvSpPr>
         <p:spPr>
           <a:xfrm>
-            <a:off x="41115912" y="24776004"/>
+            <a:off x="47127140" y="21384919"/>
             <a:ext cx="926325" cy="540000"/>
           </a:xfrm>
           <a:prstGeom prst="rect">
@@ -6696,7 +6696,7 @@
         </p:nvSpPr>
         <p:spPr>
           <a:xfrm>
-            <a:off x="41724922" y="23971841"/>
+            <a:off x="47736150" y="20580756"/>
             <a:ext cx="926325" cy="540000"/>
           </a:xfrm>
           <a:prstGeom prst="rect">
@@ -6755,7 +6755,7 @@
         </p:nvSpPr>
         <p:spPr>
           <a:xfrm>
-            <a:off x="39877061" y="24776004"/>
+            <a:off x="45888289" y="21384919"/>
             <a:ext cx="926325" cy="540000"/>
           </a:xfrm>
           <a:prstGeom prst="rect">
@@ -6806,7 +6806,7 @@
         </p:nvSpPr>
         <p:spPr>
           <a:xfrm>
-            <a:off x="40486071" y="23971841"/>
+            <a:off x="46497299" y="20580756"/>
             <a:ext cx="926325" cy="540000"/>
           </a:xfrm>
           <a:prstGeom prst="rect">
@@ -6869,7 +6869,7 @@
         </p:nvCxnSpPr>
         <p:spPr>
           <a:xfrm rot="5400000">
-            <a:off x="41095181" y="23487947"/>
+            <a:off x="47106409" y="20096862"/>
             <a:ext cx="337947" cy="629840"/>
           </a:xfrm>
           <a:prstGeom prst="bentConnector3">
@@ -6914,7 +6914,7 @@
         </p:nvCxnSpPr>
         <p:spPr>
           <a:xfrm rot="16200000" flipH="1">
-            <a:off x="41714606" y="23498361"/>
+            <a:off x="47725834" y="20107276"/>
             <a:ext cx="337947" cy="609011"/>
           </a:xfrm>
           <a:prstGeom prst="bentConnector3">
@@ -6959,7 +6959,7 @@
         </p:nvCxnSpPr>
         <p:spPr>
           <a:xfrm rot="16200000" flipH="1">
-            <a:off x="41132073" y="24329001"/>
+            <a:off x="47143301" y="20937916"/>
             <a:ext cx="264163" cy="629841"/>
           </a:xfrm>
           <a:prstGeom prst="bentConnector3">
@@ -7005,7 +7005,7 @@
         </p:nvCxnSpPr>
         <p:spPr>
           <a:xfrm rot="5400000">
-            <a:off x="41751499" y="24339417"/>
+            <a:off x="47762727" y="20948332"/>
             <a:ext cx="264163" cy="609010"/>
           </a:xfrm>
           <a:prstGeom prst="bentConnector3">
@@ -7051,7 +7051,7 @@
         </p:nvCxnSpPr>
         <p:spPr>
           <a:xfrm rot="16200000" flipH="1">
-            <a:off x="42369447" y="24330479"/>
+            <a:off x="48380675" y="20939394"/>
             <a:ext cx="264163" cy="626886"/>
           </a:xfrm>
           <a:prstGeom prst="bentConnector3">
@@ -7096,7 +7096,7 @@
         </p:nvCxnSpPr>
         <p:spPr>
           <a:xfrm rot="5400000">
-            <a:off x="40512648" y="24339417"/>
+            <a:off x="46523876" y="20948332"/>
             <a:ext cx="264163" cy="609010"/>
           </a:xfrm>
           <a:prstGeom prst="bentConnector3">
@@ -7142,7 +7142,7 @@
         </p:nvCxnSpPr>
         <p:spPr>
           <a:xfrm rot="5400000">
-            <a:off x="41132074" y="23719992"/>
+            <a:off x="47143302" y="20328907"/>
             <a:ext cx="264163" cy="1847861"/>
           </a:xfrm>
           <a:prstGeom prst="bentConnector3">
@@ -7188,7 +7188,7 @@
         </p:nvCxnSpPr>
         <p:spPr>
           <a:xfrm flipH="1">
-            <a:off x="40803386" y="25046004"/>
+            <a:off x="46814614" y="21654919"/>
             <a:ext cx="312526" cy="0"/>
           </a:xfrm>
           <a:prstGeom prst="line">
@@ -7229,7 +7229,7 @@
         </p:nvSpPr>
         <p:spPr>
           <a:xfrm>
-            <a:off x="41115911" y="25593934"/>
+            <a:off x="47128671" y="22202848"/>
             <a:ext cx="926325" cy="540000"/>
           </a:xfrm>
           <a:prstGeom prst="rect">
@@ -7280,7 +7280,7 @@
         </p:nvSpPr>
         <p:spPr>
           <a:xfrm>
-            <a:off x="42349367" y="25593934"/>
+            <a:off x="48360595" y="22202849"/>
             <a:ext cx="926325" cy="540000"/>
           </a:xfrm>
           <a:prstGeom prst="rect">
@@ -7334,9 +7334,9 @@
           <p:nvPr/>
         </p:nvCxnSpPr>
         <p:spPr>
-          <a:xfrm rot="5400000">
-            <a:off x="41440110" y="25454969"/>
-            <a:ext cx="277930" cy="1"/>
+          <a:xfrm rot="16200000" flipH="1">
+            <a:off x="47452104" y="22063117"/>
+            <a:ext cx="277929" cy="1531"/>
           </a:xfrm>
           <a:prstGeom prst="bentConnector3">
             <a:avLst>
@@ -7380,7 +7380,7 @@
         </p:nvCxnSpPr>
         <p:spPr>
           <a:xfrm rot="5400000">
-            <a:off x="42674786" y="25453749"/>
+            <a:off x="48686014" y="22062664"/>
             <a:ext cx="277930" cy="2441"/>
           </a:xfrm>
           <a:prstGeom prst="bentConnector3">
@@ -7421,7 +7421,7 @@
         </p:nvSpPr>
         <p:spPr>
           <a:xfrm>
-            <a:off x="42974576" y="26411863"/>
+            <a:off x="48985804" y="23020778"/>
             <a:ext cx="926325" cy="540000"/>
           </a:xfrm>
           <a:prstGeom prst="rect">
@@ -7476,7 +7476,7 @@
         </p:nvCxnSpPr>
         <p:spPr>
           <a:xfrm rot="16200000" flipH="1">
-            <a:off x="42578426" y="25552549"/>
+            <a:off x="48589654" y="22161464"/>
             <a:ext cx="1095859" cy="622768"/>
           </a:xfrm>
           <a:prstGeom prst="bentConnector3">
@@ -7517,7 +7517,7 @@
         </p:nvSpPr>
         <p:spPr>
           <a:xfrm>
-            <a:off x="46667851" y="19163104"/>
+            <a:off x="40465253" y="32213672"/>
             <a:ext cx="926325" cy="540000"/>
           </a:xfrm>
           <a:prstGeom prst="rect">
@@ -7573,7 +7573,7 @@
         </p:nvSpPr>
         <p:spPr>
           <a:xfrm>
-            <a:off x="46667850" y="20763913"/>
+            <a:off x="40465252" y="33814481"/>
             <a:ext cx="926325" cy="540000"/>
           </a:xfrm>
           <a:prstGeom prst="rect">
@@ -7629,7 +7629,7 @@
         </p:nvSpPr>
         <p:spPr>
           <a:xfrm>
-            <a:off x="46050630" y="19963204"/>
+            <a:off x="39848032" y="33013772"/>
             <a:ext cx="926325" cy="540000"/>
           </a:xfrm>
           <a:prstGeom prst="rect">
@@ -7661,7 +7661,7 @@
             <a:pPr algn="ctr"/>
             <a:r>
               <a:rPr lang="ru-RU" sz="700" dirty="0"/>
-              <a:t>Внедрить светское образование</a:t>
+              <a:t>Обязательное начальное образование</a:t>
             </a:r>
           </a:p>
         </p:txBody>
@@ -7680,7 +7680,7 @@
         </p:nvSpPr>
         <p:spPr>
           <a:xfrm>
-            <a:off x="47292690" y="19963204"/>
+            <a:off x="41090092" y="33013772"/>
             <a:ext cx="926325" cy="540000"/>
           </a:xfrm>
           <a:prstGeom prst="rect">
@@ -7712,56 +7712,11 @@
             <a:pPr algn="ctr"/>
             <a:r>
               <a:rPr lang="ru-RU" sz="700" dirty="0"/>
-              <a:t>Расширить религиозные школы</a:t>
+              <a:t>Единая учебная программа</a:t>
             </a:r>
           </a:p>
         </p:txBody>
       </p:sp>
-      <p:cxnSp>
-        <p:nvCxnSpPr>
-          <p:cNvPr id="140" name="Прямая соединительная линия 139">
-            <a:extLst>
-              <a:ext uri="{FF2B5EF4-FFF2-40B4-BE49-F238E27FC236}">
-                <a16:creationId xmlns:a16="http://schemas.microsoft.com/office/drawing/2014/main" id="{08D9148F-FD7B-49BC-A4DA-251ACA054636}"/>
-              </a:ext>
-            </a:extLst>
-          </p:cNvPr>
-          <p:cNvCxnSpPr>
-            <a:cxnSpLocks/>
-            <a:stCxn id="137" idx="1"/>
-            <a:endCxn id="136" idx="3"/>
-          </p:cNvCxnSpPr>
-          <p:nvPr/>
-        </p:nvCxnSpPr>
-        <p:spPr>
-          <a:xfrm flipH="1">
-            <a:off x="46976955" y="20233204"/>
-            <a:ext cx="315735" cy="0"/>
-          </a:xfrm>
-          <a:prstGeom prst="line">
-            <a:avLst/>
-          </a:prstGeom>
-          <a:ln w="38100">
-            <a:solidFill>
-              <a:srgbClr val="C00000"/>
-            </a:solidFill>
-          </a:ln>
-        </p:spPr>
-        <p:style>
-          <a:lnRef idx="1">
-            <a:schemeClr val="accent1"/>
-          </a:lnRef>
-          <a:fillRef idx="0">
-            <a:schemeClr val="accent1"/>
-          </a:fillRef>
-          <a:effectRef idx="0">
-            <a:schemeClr val="accent1"/>
-          </a:effectRef>
-          <a:fontRef idx="minor">
-            <a:schemeClr val="tx1"/>
-          </a:fontRef>
-        </p:style>
-      </p:cxnSp>
       <p:cxnSp>
         <p:nvCxnSpPr>
           <p:cNvPr id="141" name="Соединительная линия уступом 620">
@@ -7780,7 +7735,7 @@
         </p:nvCxnSpPr>
         <p:spPr>
           <a:xfrm rot="5400000">
-            <a:off x="46692354" y="19524544"/>
+            <a:off x="40489756" y="32575112"/>
             <a:ext cx="260100" cy="617221"/>
           </a:xfrm>
           <a:prstGeom prst="bentConnector3">
@@ -7825,7 +7780,7 @@
         </p:nvCxnSpPr>
         <p:spPr>
           <a:xfrm rot="16200000" flipH="1">
-            <a:off x="47313383" y="19520734"/>
+            <a:off x="41110785" y="32571302"/>
             <a:ext cx="260100" cy="624839"/>
           </a:xfrm>
           <a:prstGeom prst="bentConnector3">
@@ -7852,98 +7807,6 @@
           </a:fontRef>
         </p:style>
       </p:cxnSp>
-      <p:cxnSp>
-        <p:nvCxnSpPr>
-          <p:cNvPr id="144" name="Соединительная линия уступом 620">
-            <a:extLst>
-              <a:ext uri="{FF2B5EF4-FFF2-40B4-BE49-F238E27FC236}">
-                <a16:creationId xmlns:a16="http://schemas.microsoft.com/office/drawing/2014/main" id="{01DB8A97-03F6-49A6-8100-7A59ACF12FEA}"/>
-              </a:ext>
-            </a:extLst>
-          </p:cNvPr>
-          <p:cNvCxnSpPr>
-            <a:cxnSpLocks/>
-            <a:stCxn id="136" idx="2"/>
-            <a:endCxn id="134" idx="0"/>
-          </p:cNvCxnSpPr>
-          <p:nvPr/>
-        </p:nvCxnSpPr>
-        <p:spPr>
-          <a:xfrm rot="16200000" flipH="1">
-            <a:off x="46692049" y="20324948"/>
-            <a:ext cx="260709" cy="617220"/>
-          </a:xfrm>
-          <a:prstGeom prst="bentConnector3">
-            <a:avLst>
-              <a:gd name="adj1" fmla="val 50000"/>
-            </a:avLst>
-          </a:prstGeom>
-          <a:ln w="19050">
-            <a:prstDash val="dash"/>
-            <a:tailEnd type="arrow"/>
-          </a:ln>
-        </p:spPr>
-        <p:style>
-          <a:lnRef idx="1">
-            <a:schemeClr val="accent1"/>
-          </a:lnRef>
-          <a:fillRef idx="0">
-            <a:schemeClr val="accent1"/>
-          </a:fillRef>
-          <a:effectRef idx="0">
-            <a:schemeClr val="accent1"/>
-          </a:effectRef>
-          <a:fontRef idx="minor">
-            <a:schemeClr val="tx1"/>
-          </a:fontRef>
-        </p:style>
-      </p:cxnSp>
-      <p:cxnSp>
-        <p:nvCxnSpPr>
-          <p:cNvPr id="146" name="Соединительная линия уступом 620">
-            <a:extLst>
-              <a:ext uri="{FF2B5EF4-FFF2-40B4-BE49-F238E27FC236}">
-                <a16:creationId xmlns:a16="http://schemas.microsoft.com/office/drawing/2014/main" id="{419368A3-9936-4226-A921-A5B7276F6845}"/>
-              </a:ext>
-            </a:extLst>
-          </p:cNvPr>
-          <p:cNvCxnSpPr>
-            <a:cxnSpLocks/>
-            <a:stCxn id="137" idx="2"/>
-            <a:endCxn id="134" idx="0"/>
-          </p:cNvCxnSpPr>
-          <p:nvPr/>
-        </p:nvCxnSpPr>
-        <p:spPr>
-          <a:xfrm rot="5400000">
-            <a:off x="47313079" y="20321138"/>
-            <a:ext cx="260709" cy="624840"/>
-          </a:xfrm>
-          <a:prstGeom prst="bentConnector3">
-            <a:avLst>
-              <a:gd name="adj1" fmla="val 50000"/>
-            </a:avLst>
-          </a:prstGeom>
-          <a:ln w="19050">
-            <a:prstDash val="dash"/>
-            <a:tailEnd type="arrow"/>
-          </a:ln>
-        </p:spPr>
-        <p:style>
-          <a:lnRef idx="1">
-            <a:schemeClr val="accent1"/>
-          </a:lnRef>
-          <a:fillRef idx="0">
-            <a:schemeClr val="accent1"/>
-          </a:fillRef>
-          <a:effectRef idx="0">
-            <a:schemeClr val="accent1"/>
-          </a:effectRef>
-          <a:fontRef idx="minor">
-            <a:schemeClr val="tx1"/>
-          </a:fontRef>
-        </p:style>
-      </p:cxnSp>
       <p:sp>
         <p:nvSpPr>
           <p:cNvPr id="147" name="Прямоугольник 146">
@@ -7958,7 +7821,7 @@
         </p:nvSpPr>
         <p:spPr>
           <a:xfrm>
-            <a:off x="48534749" y="20763913"/>
+            <a:off x="42332151" y="33814481"/>
             <a:ext cx="926325" cy="540000"/>
           </a:xfrm>
           <a:prstGeom prst="rect">
@@ -8009,7 +7872,7 @@
         </p:nvSpPr>
         <p:spPr>
           <a:xfrm>
-            <a:off x="48534750" y="19963203"/>
+            <a:off x="42332152" y="33013771"/>
             <a:ext cx="926325" cy="540000"/>
           </a:xfrm>
           <a:prstGeom prst="rect">
@@ -8064,7 +7927,7 @@
         </p:nvCxnSpPr>
         <p:spPr>
           <a:xfrm rot="16200000" flipH="1">
-            <a:off x="47934414" y="18899703"/>
+            <a:off x="41731816" y="31950271"/>
             <a:ext cx="260099" cy="1866899"/>
           </a:xfrm>
           <a:prstGeom prst="bentConnector3">
@@ -8109,7 +7972,7 @@
         </p:nvCxnSpPr>
         <p:spPr>
           <a:xfrm rot="5400000">
-            <a:off x="48867558" y="20633558"/>
+            <a:off x="42664960" y="33684126"/>
             <a:ext cx="260710" cy="1"/>
           </a:xfrm>
           <a:prstGeom prst="bentConnector3">
@@ -8150,7 +8013,7 @@
         </p:nvSpPr>
         <p:spPr>
           <a:xfrm>
-            <a:off x="44808570" y="19963202"/>
+            <a:off x="38605972" y="33013770"/>
             <a:ext cx="926325" cy="540000"/>
           </a:xfrm>
           <a:prstGeom prst="rect">
@@ -8205,7 +8068,7 @@
         </p:nvCxnSpPr>
         <p:spPr>
           <a:xfrm rot="5400000">
-            <a:off x="46071325" y="18903513"/>
+            <a:off x="39868727" y="31954081"/>
             <a:ext cx="260098" cy="1859281"/>
           </a:xfrm>
           <a:prstGeom prst="bentConnector3">
@@ -8246,7 +8109,7 @@
         </p:nvSpPr>
         <p:spPr>
           <a:xfrm>
-            <a:off x="44810998" y="20763913"/>
+            <a:off x="38608400" y="33814481"/>
             <a:ext cx="926325" cy="540000"/>
           </a:xfrm>
           <a:prstGeom prst="rect">
@@ -8301,7 +8164,7 @@
         </p:nvCxnSpPr>
         <p:spPr>
           <a:xfrm rot="16200000" flipH="1">
-            <a:off x="45142592" y="20632343"/>
+            <a:off x="38939994" y="33682911"/>
             <a:ext cx="260711" cy="2428"/>
           </a:xfrm>
           <a:prstGeom prst="bentConnector3">
@@ -8342,7 +8205,7 @@
         </p:nvSpPr>
         <p:spPr>
           <a:xfrm>
-            <a:off x="47292690" y="16760327"/>
+            <a:off x="41090092" y="29810895"/>
             <a:ext cx="926325" cy="540000"/>
           </a:xfrm>
           <a:prstGeom prst="rect">
@@ -8433,7 +8296,7 @@
         </p:nvSpPr>
         <p:spPr>
           <a:xfrm>
-            <a:off x="46667849" y="17561670"/>
+            <a:off x="40465251" y="30612238"/>
             <a:ext cx="926325" cy="540000"/>
           </a:xfrm>
           <a:prstGeom prst="rect">
@@ -8532,7 +8395,7 @@
         </p:nvSpPr>
         <p:spPr>
           <a:xfrm>
-            <a:off x="46667847" y="21565255"/>
+            <a:off x="39847255" y="34624480"/>
             <a:ext cx="926325" cy="540000"/>
           </a:xfrm>
           <a:prstGeom prst="rect">
@@ -8628,7 +8491,7 @@
         </p:nvSpPr>
         <p:spPr>
           <a:xfrm>
-            <a:off x="46049853" y="15944514"/>
+            <a:off x="39847255" y="28995082"/>
             <a:ext cx="926325" cy="540000"/>
           </a:xfrm>
           <a:prstGeom prst="rect">
@@ -8719,7 +8582,7 @@
         </p:nvSpPr>
         <p:spPr>
           <a:xfrm>
-            <a:off x="46667850" y="18362387"/>
+            <a:off x="40465252" y="31412955"/>
             <a:ext cx="926325" cy="540000"/>
           </a:xfrm>
           <a:prstGeom prst="rect">
@@ -8799,7 +8662,7 @@
         </p:nvSpPr>
         <p:spPr>
           <a:xfrm>
-            <a:off x="47909909" y="18362384"/>
+            <a:off x="41707311" y="31412952"/>
             <a:ext cx="926325" cy="540000"/>
           </a:xfrm>
           <a:prstGeom prst="rect">
@@ -8917,7 +8780,7 @@
         </p:nvSpPr>
         <p:spPr>
           <a:xfrm>
-            <a:off x="47909910" y="17561670"/>
+            <a:off x="41707312" y="30612238"/>
             <a:ext cx="926325" cy="540000"/>
           </a:xfrm>
           <a:prstGeom prst="rect">
@@ -9029,7 +8892,7 @@
         </p:nvSpPr>
         <p:spPr>
           <a:xfrm>
-            <a:off x="46049854" y="16760952"/>
+            <a:off x="39847256" y="29811520"/>
             <a:ext cx="926325" cy="540000"/>
           </a:xfrm>
           <a:prstGeom prst="rect">
@@ -9112,7 +8975,7 @@
         </p:nvSpPr>
         <p:spPr>
           <a:xfrm>
-            <a:off x="45423909" y="17561669"/>
+            <a:off x="39221311" y="30612237"/>
             <a:ext cx="926325" cy="540000"/>
           </a:xfrm>
           <a:prstGeom prst="rect">
@@ -9203,7 +9066,7 @@
         </p:nvSpPr>
         <p:spPr>
           <a:xfrm>
-            <a:off x="45423910" y="19158670"/>
+            <a:off x="39221312" y="32209238"/>
             <a:ext cx="926325" cy="540000"/>
           </a:xfrm>
           <a:prstGeom prst="rect">
@@ -9278,7 +9141,7 @@
         </p:nvSpPr>
         <p:spPr>
           <a:xfrm>
-            <a:off x="45423909" y="18362384"/>
+            <a:off x="39221311" y="31412952"/>
             <a:ext cx="926325" cy="540000"/>
           </a:xfrm>
           <a:prstGeom prst="rect">
@@ -9369,7 +9232,7 @@
         </p:nvSpPr>
         <p:spPr>
           <a:xfrm>
-            <a:off x="44814921" y="16765383"/>
+            <a:off x="38612323" y="29815951"/>
             <a:ext cx="926325" cy="540000"/>
           </a:xfrm>
           <a:prstGeom prst="rect">
@@ -9550,7 +9413,7 @@
         </p:nvSpPr>
         <p:spPr>
           <a:xfrm>
-            <a:off x="47909908" y="19163101"/>
+            <a:off x="41707310" y="32213669"/>
             <a:ext cx="926325" cy="540000"/>
           </a:xfrm>
           <a:prstGeom prst="rect">
@@ -9618,7 +9481,7 @@
         </p:nvCxnSpPr>
         <p:spPr>
           <a:xfrm rot="16200000" flipH="1">
-            <a:off x="45758929" y="19030526"/>
+            <a:off x="39556331" y="32081094"/>
             <a:ext cx="256286" cy="1"/>
           </a:xfrm>
           <a:prstGeom prst="bentConnector3">
@@ -9663,7 +9526,7 @@
         </p:nvCxnSpPr>
         <p:spPr>
           <a:xfrm rot="5400000">
-            <a:off x="48242716" y="18232027"/>
+            <a:off x="42040118" y="31282595"/>
             <a:ext cx="260714" cy="1"/>
           </a:xfrm>
           <a:prstGeom prst="bentConnector3">
@@ -9708,7 +9571,7 @@
         </p:nvCxnSpPr>
         <p:spPr>
           <a:xfrm rot="5400000">
-            <a:off x="48242714" y="19032742"/>
+            <a:off x="42040116" y="32083310"/>
             <a:ext cx="260717" cy="1"/>
           </a:xfrm>
           <a:prstGeom prst="bentConnector3">
@@ -9753,7 +9616,7 @@
         </p:nvCxnSpPr>
         <p:spPr>
           <a:xfrm rot="16200000" flipH="1">
-            <a:off x="47000654" y="18232027"/>
+            <a:off x="40798056" y="31282595"/>
             <a:ext cx="260717" cy="1"/>
           </a:xfrm>
           <a:prstGeom prst="bentConnector3">
@@ -9799,7 +9662,7 @@
         </p:nvCxnSpPr>
         <p:spPr>
           <a:xfrm rot="5400000">
-            <a:off x="47621685" y="17610998"/>
+            <a:off x="41419087" y="30661566"/>
             <a:ext cx="260717" cy="1242060"/>
           </a:xfrm>
           <a:prstGeom prst="bentConnector3">
@@ -9845,7 +9708,7 @@
         </p:nvCxnSpPr>
         <p:spPr>
           <a:xfrm rot="5400000">
-            <a:off x="47621683" y="18411715"/>
+            <a:off x="41419085" y="31462283"/>
             <a:ext cx="260720" cy="1242058"/>
           </a:xfrm>
           <a:prstGeom prst="bentConnector3">
@@ -9891,7 +9754,7 @@
         </p:nvCxnSpPr>
         <p:spPr>
           <a:xfrm rot="16200000" flipH="1">
-            <a:off x="47000655" y="19032744"/>
+            <a:off x="40798057" y="32083312"/>
             <a:ext cx="260717" cy="1"/>
           </a:xfrm>
           <a:prstGeom prst="bentConnector3">
@@ -9933,7 +9796,7 @@
         </p:nvSpPr>
         <p:spPr>
           <a:xfrm>
-            <a:off x="44179969" y="17561669"/>
+            <a:off x="37977371" y="30612237"/>
             <a:ext cx="926325" cy="540000"/>
           </a:xfrm>
           <a:prstGeom prst="rect">
@@ -10012,7 +9875,7 @@
         </p:nvCxnSpPr>
         <p:spPr>
           <a:xfrm flipH="1">
-            <a:off x="45106294" y="17831669"/>
+            <a:off x="38903696" y="30882237"/>
             <a:ext cx="317615" cy="0"/>
           </a:xfrm>
           <a:prstGeom prst="line">
@@ -10053,7 +9916,7 @@
         </p:nvSpPr>
         <p:spPr>
           <a:xfrm>
-            <a:off x="44179968" y="18362793"/>
+            <a:off x="37977370" y="31413361"/>
             <a:ext cx="926325" cy="540000"/>
           </a:xfrm>
           <a:prstGeom prst="rect">
@@ -10113,7 +9976,7 @@
         </p:nvCxnSpPr>
         <p:spPr>
           <a:xfrm rot="5400000">
-            <a:off x="44832465" y="17116050"/>
+            <a:off x="38629867" y="30166618"/>
             <a:ext cx="256286" cy="634952"/>
           </a:xfrm>
           <a:prstGeom prst="bentConnector3">
@@ -10158,7 +10021,7 @@
         </p:nvCxnSpPr>
         <p:spPr>
           <a:xfrm rot="16200000" flipH="1">
-            <a:off x="45454435" y="17129032"/>
+            <a:off x="39251837" y="30179600"/>
             <a:ext cx="256286" cy="608988"/>
           </a:xfrm>
           <a:prstGeom prst="bentConnector3">
@@ -10203,7 +10066,7 @@
         </p:nvCxnSpPr>
         <p:spPr>
           <a:xfrm rot="5400000">
-            <a:off x="45134540" y="17610261"/>
+            <a:off x="38931942" y="30660829"/>
             <a:ext cx="261124" cy="1243941"/>
           </a:xfrm>
           <a:prstGeom prst="bentConnector3">
@@ -10249,7 +10112,7 @@
         </p:nvCxnSpPr>
         <p:spPr>
           <a:xfrm rot="5400000">
-            <a:off x="44512570" y="18232231"/>
+            <a:off x="38309972" y="31282799"/>
             <a:ext cx="261124" cy="1"/>
           </a:xfrm>
           <a:prstGeom prst="bentConnector3">
@@ -10295,7 +10158,7 @@
         </p:nvCxnSpPr>
         <p:spPr>
           <a:xfrm rot="16200000" flipH="1">
-            <a:off x="45134745" y="17610056"/>
+            <a:off x="38932147" y="30660624"/>
             <a:ext cx="260715" cy="1243940"/>
           </a:xfrm>
           <a:prstGeom prst="bentConnector3">
@@ -10341,7 +10204,7 @@
         </p:nvCxnSpPr>
         <p:spPr>
           <a:xfrm rot="5400000">
-            <a:off x="45756715" y="18232026"/>
+            <a:off x="39554117" y="31282594"/>
             <a:ext cx="260715" cy="12700"/>
           </a:xfrm>
           <a:prstGeom prst="bentConnector3">
@@ -10387,7 +10250,7 @@
         </p:nvCxnSpPr>
         <p:spPr>
           <a:xfrm rot="16200000" flipH="1">
-            <a:off x="46374797" y="16622732"/>
+            <a:off x="40172199" y="29673300"/>
             <a:ext cx="276438" cy="1"/>
           </a:xfrm>
           <a:prstGeom prst="bentConnector3">
@@ -10433,7 +10296,7 @@
         </p:nvCxnSpPr>
         <p:spPr>
           <a:xfrm rot="16200000" flipH="1">
-            <a:off x="46691655" y="17122313"/>
+            <a:off x="40489057" y="30172881"/>
             <a:ext cx="260718" cy="617995"/>
           </a:xfrm>
           <a:prstGeom prst="bentConnector3">
@@ -10479,7 +10342,7 @@
         </p:nvCxnSpPr>
         <p:spPr>
           <a:xfrm rot="5400000">
-            <a:off x="47312762" y="17118578"/>
+            <a:off x="41110164" y="30169146"/>
             <a:ext cx="261343" cy="624841"/>
           </a:xfrm>
           <a:prstGeom prst="bentConnector3">
@@ -10525,7 +10388,7 @@
         </p:nvCxnSpPr>
         <p:spPr>
           <a:xfrm rot="16200000" flipH="1">
-            <a:off x="47933792" y="17122388"/>
+            <a:off x="41731194" y="30172956"/>
             <a:ext cx="261343" cy="617220"/>
           </a:xfrm>
           <a:prstGeom prst="bentConnector3">
@@ -10570,7 +10433,7 @@
         </p:nvCxnSpPr>
         <p:spPr>
           <a:xfrm rot="16200000" flipH="1">
-            <a:off x="44647695" y="18097105"/>
+            <a:off x="38445097" y="31147673"/>
             <a:ext cx="1861535" cy="1870661"/>
           </a:xfrm>
           <a:prstGeom prst="bentConnector3">
@@ -10616,7 +10479,7 @@
         </p:nvCxnSpPr>
         <p:spPr>
           <a:xfrm rot="16200000" flipH="1">
-            <a:off x="45269665" y="18719075"/>
+            <a:off x="39067067" y="31769643"/>
             <a:ext cx="1861535" cy="626721"/>
           </a:xfrm>
           <a:prstGeom prst="bentConnector3">
@@ -10662,7 +10525,7 @@
         </p:nvCxnSpPr>
         <p:spPr>
           <a:xfrm rot="16200000" flipH="1">
-            <a:off x="45268725" y="17476075"/>
+            <a:off x="39066127" y="30526643"/>
             <a:ext cx="1861535" cy="3112721"/>
           </a:xfrm>
           <a:prstGeom prst="bentConnector3">
@@ -10708,7 +10571,7 @@
         </p:nvCxnSpPr>
         <p:spPr>
           <a:xfrm rot="16200000" flipH="1">
-            <a:off x="45890695" y="18098045"/>
+            <a:off x="39688097" y="31148613"/>
             <a:ext cx="1861535" cy="1868781"/>
           </a:xfrm>
           <a:prstGeom prst="bentConnector3">
@@ -10754,8 +10617,8 @@
         </p:nvCxnSpPr>
         <p:spPr>
           <a:xfrm rot="5400000">
-            <a:off x="47000341" y="21434583"/>
-            <a:ext cx="261342" cy="3"/>
+            <a:off x="40484418" y="34180482"/>
+            <a:ext cx="269999" cy="617997"/>
           </a:xfrm>
           <a:prstGeom prst="bentConnector3">
             <a:avLst>
@@ -10840,7 +10703,7 @@
         </p:nvSpPr>
         <p:spPr>
           <a:xfrm>
-            <a:off x="44179967" y="19153202"/>
+            <a:off x="37977369" y="32203770"/>
             <a:ext cx="926325" cy="540000"/>
           </a:xfrm>
           <a:prstGeom prst="rect">
@@ -10966,7 +10829,7 @@
         </p:nvCxnSpPr>
         <p:spPr>
           <a:xfrm rot="5400000">
-            <a:off x="45139692" y="18405822"/>
+            <a:off x="38937094" y="31456390"/>
             <a:ext cx="250818" cy="1243942"/>
           </a:xfrm>
           <a:prstGeom prst="bentConnector3">
@@ -11011,7 +10874,7 @@
         </p:nvCxnSpPr>
         <p:spPr>
           <a:xfrm rot="5400000">
-            <a:off x="45755116" y="16007482"/>
+            <a:off x="39552518" y="29058050"/>
             <a:ext cx="280869" cy="1234932"/>
           </a:xfrm>
           <a:prstGeom prst="bentConnector3">
@@ -11057,7 +10920,7 @@
         </p:nvCxnSpPr>
         <p:spPr>
           <a:xfrm rot="16200000" flipH="1">
-            <a:off x="46996528" y="16001001"/>
+            <a:off x="40793930" y="29051569"/>
             <a:ext cx="275813" cy="1242837"/>
           </a:xfrm>
           <a:prstGeom prst="bentConnector3">
@@ -13433,7 +13296,7 @@
         </p:nvSpPr>
         <p:spPr>
           <a:xfrm>
-            <a:off x="7655904" y="5042438"/>
+            <a:off x="8251905" y="5042438"/>
             <a:ext cx="926325" cy="540000"/>
           </a:xfrm>
           <a:prstGeom prst="rect">
@@ -13917,6 +13780,14 @@
               <a:rPr lang="ru-RU" sz="700" dirty="0"/>
               <a:t>Поддержать волнения в Алжире</a:t>
             </a:r>
+            <a:br>
+              <a:rPr lang="ru-RU" sz="700" dirty="0"/>
+            </a:br>
+            <a:r>
+              <a:rPr lang="ru-RU" sz="200" dirty="0"/>
+              <a:t>(Создание мощной радиостанции для вещания на всю Африку и Ближний Восток (в реальности Мухаммед V финансировал «Голос Свободного Алжира»). Эффект: Увеличивает прирост популярности вашей идеологии в соседних странах.)</a:t>
+            </a:r>
+            <a:endParaRPr lang="ru-RU" sz="700" dirty="0"/>
           </a:p>
         </p:txBody>
       </p:sp>
@@ -15846,14 +15717,16 @@
         </p:nvSpPr>
         <p:spPr>
           <a:xfrm>
-            <a:off x="39877061" y="25593933"/>
+            <a:off x="45887498" y="23825486"/>
             <a:ext cx="926325" cy="540000"/>
           </a:xfrm>
           <a:prstGeom prst="rect">
             <a:avLst/>
           </a:prstGeom>
           <a:solidFill>
-            <a:schemeClr val="bg1"/>
+            <a:schemeClr val="accent2">
+              <a:lumMod val="75000"/>
+            </a:schemeClr>
           </a:solidFill>
           <a:ln w="19050"/>
         </p:spPr>
@@ -15902,14 +15775,16 @@
         </p:nvSpPr>
         <p:spPr>
           <a:xfrm>
-            <a:off x="41199942" y="26406738"/>
+            <a:off x="45887499" y="23015652"/>
             <a:ext cx="926325" cy="540000"/>
           </a:xfrm>
           <a:prstGeom prst="rect">
             <a:avLst/>
           </a:prstGeom>
           <a:solidFill>
-            <a:schemeClr val="bg1"/>
+            <a:schemeClr val="accent2">
+              <a:lumMod val="75000"/>
+            </a:schemeClr>
           </a:solidFill>
           <a:ln w="19050"/>
         </p:spPr>
@@ -15942,125 +15817,6 @@
             <a:r>
               <a:rPr lang="ru-RU" sz="200" dirty="0"/>
               <a:t>(члены которого будут избираться марокканцами)</a:t>
-            </a:r>
-          </a:p>
-        </p:txBody>
-      </p:sp>
-      <p:sp>
-        <p:nvSpPr>
-          <p:cNvPr id="248" name="Прямоугольник 247">
-            <a:extLst>
-              <a:ext uri="{FF2B5EF4-FFF2-40B4-BE49-F238E27FC236}">
-                <a16:creationId xmlns:a16="http://schemas.microsoft.com/office/drawing/2014/main" id="{7497650B-E51E-4E55-B162-241FE2911556}"/>
-              </a:ext>
-            </a:extLst>
-          </p:cNvPr>
-          <p:cNvSpPr/>
-          <p:nvPr/>
-        </p:nvSpPr>
-        <p:spPr>
-          <a:xfrm>
-            <a:off x="39877061" y="26411862"/>
-            <a:ext cx="926325" cy="540000"/>
-          </a:xfrm>
-          <a:prstGeom prst="rect">
-            <a:avLst/>
-          </a:prstGeom>
-          <a:solidFill>
-            <a:schemeClr val="bg1"/>
-          </a:solidFill>
-          <a:ln w="19050"/>
-        </p:spPr>
-        <p:style>
-          <a:lnRef idx="2">
-            <a:schemeClr val="accent1"/>
-          </a:lnRef>
-          <a:fillRef idx="1">
-            <a:schemeClr val="lt1"/>
-          </a:fillRef>
-          <a:effectRef idx="0">
-            <a:schemeClr val="accent1"/>
-          </a:effectRef>
-          <a:fontRef idx="minor">
-            <a:schemeClr val="dk1"/>
-          </a:fontRef>
-        </p:style>
-        <p:txBody>
-          <a:bodyPr lIns="124733" tIns="62367" rIns="124733" bIns="62367" rtlCol="0" anchor="ctr"/>
-          <a:lstStyle/>
-          <a:p>
-            <a:pPr algn="ctr"/>
-            <a:r>
-              <a:rPr lang="ru-RU" sz="700" dirty="0"/>
-              <a:t>Свобода печати и выражения мнений</a:t>
-            </a:r>
-            <a:endParaRPr lang="en-US" sz="700" dirty="0"/>
-          </a:p>
-          <a:p>
-            <a:pPr algn="ctr"/>
-            <a:r>
-              <a:rPr lang="en-US" sz="200" dirty="0"/>
-              <a:t>(</a:t>
-            </a:r>
-            <a:r>
-              <a:rPr lang="ru-RU" sz="200" dirty="0"/>
-              <a:t>а также свобода создания ассоциаций, способствующих воспитанию населения в духе совести, общественного мнения и ценностей.</a:t>
-            </a:r>
-            <a:r>
-              <a:rPr lang="en-US" sz="200" dirty="0"/>
-              <a:t>)</a:t>
-            </a:r>
-            <a:endParaRPr lang="ru-RU" sz="700" dirty="0"/>
-          </a:p>
-        </p:txBody>
-      </p:sp>
-      <p:sp>
-        <p:nvSpPr>
-          <p:cNvPr id="255" name="Прямоугольник 254">
-            <a:extLst>
-              <a:ext uri="{FF2B5EF4-FFF2-40B4-BE49-F238E27FC236}">
-                <a16:creationId xmlns:a16="http://schemas.microsoft.com/office/drawing/2014/main" id="{016A7C84-CF77-40E7-9FFC-1F5482BC29C6}"/>
-              </a:ext>
-            </a:extLst>
-          </p:cNvPr>
-          <p:cNvSpPr/>
-          <p:nvPr/>
-        </p:nvSpPr>
-        <p:spPr>
-          <a:xfrm>
-            <a:off x="41195582" y="27419237"/>
-            <a:ext cx="926325" cy="540000"/>
-          </a:xfrm>
-          <a:prstGeom prst="rect">
-            <a:avLst/>
-          </a:prstGeom>
-          <a:solidFill>
-            <a:schemeClr val="bg1"/>
-          </a:solidFill>
-          <a:ln w="19050"/>
-        </p:spPr>
-        <p:style>
-          <a:lnRef idx="2">
-            <a:schemeClr val="accent1"/>
-          </a:lnRef>
-          <a:fillRef idx="1">
-            <a:schemeClr val="lt1"/>
-          </a:fillRef>
-          <a:effectRef idx="0">
-            <a:schemeClr val="accent1"/>
-          </a:effectRef>
-          <a:fontRef idx="minor">
-            <a:schemeClr val="dk1"/>
-          </a:fontRef>
-        </p:style>
-        <p:txBody>
-          <a:bodyPr lIns="124733" tIns="62367" rIns="124733" bIns="62367" rtlCol="0" anchor="ctr"/>
-          <a:lstStyle/>
-          <a:p>
-            <a:pPr algn="ctr"/>
-            <a:r>
-              <a:rPr lang="ru-RU" sz="700" dirty="0"/>
-              <a:t>Лишить влияния партию Национальных Реформ</a:t>
             </a:r>
           </a:p>
         </p:txBody>
@@ -16079,14 +15835,16 @@
         </p:nvSpPr>
         <p:spPr>
           <a:xfrm>
-            <a:off x="39877061" y="27424363"/>
+            <a:off x="48355292" y="23825485"/>
             <a:ext cx="926325" cy="540000"/>
           </a:xfrm>
           <a:prstGeom prst="rect">
             <a:avLst/>
           </a:prstGeom>
           <a:solidFill>
-            <a:schemeClr val="bg1"/>
+            <a:schemeClr val="accent2">
+              <a:lumMod val="75000"/>
+            </a:schemeClr>
           </a:solidFill>
           <a:ln w="19050"/>
         </p:spPr>
@@ -16178,14 +15936,16 @@
         </p:nvSpPr>
         <p:spPr>
           <a:xfrm>
-            <a:off x="40493340" y="28237167"/>
+            <a:off x="47734372" y="24654842"/>
             <a:ext cx="926325" cy="540000"/>
           </a:xfrm>
           <a:prstGeom prst="rect">
             <a:avLst/>
           </a:prstGeom>
           <a:solidFill>
-            <a:schemeClr val="bg1"/>
+            <a:schemeClr val="accent2">
+              <a:lumMod val="75000"/>
+            </a:schemeClr>
           </a:solidFill>
           <a:ln w="19050"/>
         </p:spPr>
@@ -16226,70 +15986,6 @@
             <a:r>
               <a:rPr lang="ru-RU" sz="200" dirty="0"/>
               <a:t>» воспитывали молодежь на ценностях арабского возрождения, защиты ислама и гордости за историю Марокко.</a:t>
-            </a:r>
-            <a:endParaRPr lang="ru-RU" sz="700" dirty="0"/>
-          </a:p>
-        </p:txBody>
-      </p:sp>
-      <p:sp>
-        <p:nvSpPr>
-          <p:cNvPr id="300" name="Прямоугольник 299">
-            <a:extLst>
-              <a:ext uri="{FF2B5EF4-FFF2-40B4-BE49-F238E27FC236}">
-                <a16:creationId xmlns:a16="http://schemas.microsoft.com/office/drawing/2014/main" id="{3857DF17-F437-4856-A8C3-2D2EE0D53C84}"/>
-              </a:ext>
-            </a:extLst>
-          </p:cNvPr>
-          <p:cNvSpPr/>
-          <p:nvPr/>
-        </p:nvSpPr>
-        <p:spPr>
-          <a:xfrm>
-            <a:off x="39335433" y="28237167"/>
-            <a:ext cx="926325" cy="540000"/>
-          </a:xfrm>
-          <a:prstGeom prst="rect">
-            <a:avLst/>
-          </a:prstGeom>
-          <a:solidFill>
-            <a:schemeClr val="bg1"/>
-          </a:solidFill>
-          <a:ln w="19050"/>
-        </p:spPr>
-        <p:style>
-          <a:lnRef idx="2">
-            <a:schemeClr val="accent1"/>
-          </a:lnRef>
-          <a:fillRef idx="1">
-            <a:schemeClr val="lt1"/>
-          </a:fillRef>
-          <a:effectRef idx="0">
-            <a:schemeClr val="accent1"/>
-          </a:effectRef>
-          <a:fontRef idx="minor">
-            <a:schemeClr val="dk1"/>
-          </a:fontRef>
-        </p:style>
-        <p:txBody>
-          <a:bodyPr lIns="124733" tIns="62367" rIns="124733" bIns="62367" rtlCol="0" anchor="ctr"/>
-          <a:lstStyle/>
-          <a:p>
-            <a:pPr algn="ctr"/>
-            <a:r>
-              <a:rPr lang="ru-RU" sz="700" dirty="0"/>
-              <a:t>Скрытый </a:t>
-            </a:r>
-            <a:r>
-              <a:rPr lang="ru-RU" sz="700" dirty="0" err="1"/>
-              <a:t>антиколониализм</a:t>
-            </a:r>
-            <a:endParaRPr lang="ru-RU" sz="700" dirty="0"/>
-          </a:p>
-          <a:p>
-            <a:pPr algn="ctr"/>
-            <a:r>
-              <a:rPr lang="ru-RU" sz="100" dirty="0"/>
-              <a:t>Для Торреса это была «кузница кадров». Молодые люди учились маршировать и подчиняться приказам не для того, чтобы вечно служить Мадриду, а чтобы в нужный момент составить костяк армии, которая потребует независимости Марокко.</a:t>
             </a:r>
             <a:endParaRPr lang="ru-RU" sz="700" dirty="0"/>
           </a:p>
@@ -16309,7 +16005,7 @@
         </p:nvSpPr>
         <p:spPr>
           <a:xfrm>
-            <a:off x="39270959" y="23971840"/>
+            <a:off x="43770887" y="20580755"/>
             <a:ext cx="926325" cy="540000"/>
           </a:xfrm>
           <a:prstGeom prst="rect">
@@ -16341,8 +16037,16 @@
             <a:pPr algn="ctr"/>
             <a:r>
               <a:rPr lang="ru-RU" sz="700" dirty="0"/>
-              <a:t>Танжер 3</a:t>
-            </a:r>
+              <a:t>«Танжер — столица шпионажа</a:t>
+            </a:r>
+            <a:br>
+              <a:rPr lang="ru-RU" sz="700" dirty="0"/>
+            </a:br>
+            <a:r>
+              <a:rPr lang="ru-RU" sz="100" dirty="0"/>
+              <a:t>»: Использование уникального статуса Танжера (который долгое время был финансовой и шпионской «серой зоной»). Эффект: Дает +1 шпиона в агентство и ускоряет создание шпионской сети в Европе на 25%.</a:t>
+            </a:r>
+            <a:endParaRPr lang="ru-RU" sz="700" dirty="0"/>
           </a:p>
         </p:txBody>
       </p:sp>
@@ -16360,7 +16064,7 @@
         </p:nvSpPr>
         <p:spPr>
           <a:xfrm>
-            <a:off x="38030723" y="23971840"/>
+            <a:off x="42530651" y="20580755"/>
             <a:ext cx="926325" cy="540000"/>
           </a:xfrm>
           <a:prstGeom prst="rect">
@@ -16392,7 +16096,7 @@
             <a:pPr algn="ctr"/>
             <a:r>
               <a:rPr lang="ru-RU" sz="700" dirty="0"/>
-              <a:t>Танжер 2</a:t>
+              <a:t>Свободный порт Танжера</a:t>
             </a:r>
           </a:p>
         </p:txBody>
@@ -16411,7 +16115,7 @@
         </p:nvSpPr>
         <p:spPr>
           <a:xfrm>
-            <a:off x="38636631" y="23093893"/>
+            <a:off x="43136559" y="19702808"/>
             <a:ext cx="926325" cy="540000"/>
           </a:xfrm>
           <a:prstGeom prst="rect">
@@ -16462,7 +16166,7 @@
         </p:nvSpPr>
         <p:spPr>
           <a:xfrm>
-            <a:off x="36815611" y="23971840"/>
+            <a:off x="41315539" y="20580755"/>
             <a:ext cx="926325" cy="540000"/>
           </a:xfrm>
           <a:prstGeom prst="rect">
@@ -16513,7 +16217,7 @@
         </p:nvSpPr>
         <p:spPr>
           <a:xfrm>
-            <a:off x="36157351" y="23093893"/>
+            <a:off x="40657279" y="19702808"/>
             <a:ext cx="926325" cy="540000"/>
           </a:xfrm>
           <a:prstGeom prst="rect">
@@ -16564,7 +16268,7 @@
         </p:nvSpPr>
         <p:spPr>
           <a:xfrm>
-            <a:off x="35602007" y="23971840"/>
+            <a:off x="40101935" y="20580755"/>
             <a:ext cx="926325" cy="540000"/>
           </a:xfrm>
           <a:prstGeom prst="rect">
@@ -16615,7 +16319,7 @@
         </p:nvSpPr>
         <p:spPr>
           <a:xfrm>
-            <a:off x="38636631" y="24776003"/>
+            <a:off x="43136559" y="21384918"/>
             <a:ext cx="926325" cy="540000"/>
           </a:xfrm>
           <a:prstGeom prst="rect">
@@ -16670,12 +16374,12 @@
         </p:nvCxnSpPr>
         <p:spPr>
           <a:xfrm rot="5400000">
-            <a:off x="39768380" y="22965308"/>
-            <a:ext cx="1142109" cy="2479280"/>
+            <a:off x="45023958" y="18818573"/>
+            <a:ext cx="1142109" cy="3990580"/>
           </a:xfrm>
           <a:prstGeom prst="bentConnector3">
             <a:avLst>
-              <a:gd name="adj1" fmla="val 15306"/>
+              <a:gd name="adj1" fmla="val 14417"/>
             </a:avLst>
           </a:prstGeom>
           <a:ln w="19050">
@@ -16715,7 +16419,7 @@
         </p:nvCxnSpPr>
         <p:spPr>
           <a:xfrm rot="5400000">
-            <a:off x="38528739" y="24204948"/>
+            <a:off x="43028667" y="20813863"/>
             <a:ext cx="1142110" cy="12700"/>
           </a:xfrm>
           <a:prstGeom prst="bentConnector3">
@@ -16760,7 +16464,7 @@
         </p:nvCxnSpPr>
         <p:spPr>
           <a:xfrm rot="16200000" flipH="1">
-            <a:off x="37289099" y="22965308"/>
+            <a:off x="41789027" y="19574223"/>
             <a:ext cx="1142110" cy="2479280"/>
           </a:xfrm>
           <a:prstGeom prst="bentConnector3">
@@ -16867,9 +16571,9 @@
           <p:nvPr/>
         </p:nvCxnSpPr>
         <p:spPr>
-          <a:xfrm rot="5400000">
-            <a:off x="7987703" y="4906410"/>
-            <a:ext cx="267392" cy="4664"/>
+          <a:xfrm rot="16200000" flipH="1">
+            <a:off x="8285703" y="4613073"/>
+            <a:ext cx="267392" cy="591337"/>
           </a:xfrm>
           <a:prstGeom prst="bentConnector3">
             <a:avLst>
@@ -17066,8 +16770,8 @@
         </p:nvCxnSpPr>
         <p:spPr>
           <a:xfrm rot="16200000" flipH="1">
-            <a:off x="8578518" y="5122986"/>
-            <a:ext cx="267392" cy="1186295"/>
+            <a:off x="8876519" y="5420987"/>
+            <a:ext cx="267392" cy="590294"/>
           </a:xfrm>
           <a:prstGeom prst="bentConnector3">
             <a:avLst>
@@ -17105,13 +16809,14 @@
           <p:cNvCxnSpPr>
             <a:cxnSpLocks/>
             <a:stCxn id="316" idx="2"/>
+            <a:endCxn id="320" idx="0"/>
           </p:cNvCxnSpPr>
           <p:nvPr/>
         </p:nvCxnSpPr>
         <p:spPr>
-          <a:xfrm rot="16200000" flipH="1">
-            <a:off x="7984513" y="5716992"/>
-            <a:ext cx="274478" cy="5370"/>
+          <a:xfrm rot="5400000">
+            <a:off x="8285612" y="5420072"/>
+            <a:ext cx="267090" cy="591822"/>
           </a:xfrm>
           <a:prstGeom prst="bentConnector3">
             <a:avLst>
@@ -17241,7 +16946,7 @@
             <a:pPr algn="ctr"/>
             <a:r>
               <a:rPr lang="ru-RU" sz="700" dirty="0"/>
-              <a:t>Поддержать волнения в Мавритании</a:t>
+              <a:t>Поддержать волнения в Тунисе</a:t>
             </a:r>
           </a:p>
         </p:txBody>
@@ -17523,7 +17228,7 @@
             <a:pPr algn="ctr"/>
             <a:r>
               <a:rPr lang="ru-RU" sz="700" dirty="0"/>
-              <a:t>Партия национального движения </a:t>
+              <a:t>Патриотичное движение </a:t>
             </a:r>
             <a:r>
               <a:rPr lang="ru-RU" sz="700" dirty="0" err="1"/>
@@ -17581,12 +17286,8 @@
           <a:p>
             <a:pPr algn="ctr"/>
             <a:r>
-              <a:rPr lang="ru-RU" sz="700" dirty="0"/>
-              <a:t>Партия национальных реформ </a:t>
-            </a:r>
-            <a:r>
-              <a:rPr lang="ru-RU" sz="700" dirty="0" err="1"/>
-              <a:t>Фасси</a:t>
+              <a:rPr lang="ru-RU" sz="700"/>
+              <a:t>Национальная партия Фасси</a:t>
             </a:r>
             <a:endParaRPr lang="ru-RU" sz="700" dirty="0"/>
           </a:p>
@@ -17786,7 +17487,7 @@
         </p:nvSpPr>
         <p:spPr>
           <a:xfrm>
-            <a:off x="4680775" y="6654346"/>
+            <a:off x="4680775" y="6667046"/>
             <a:ext cx="926325" cy="540000"/>
           </a:xfrm>
           <a:prstGeom prst="rect">
@@ -17945,7 +17646,7 @@
         </p:nvSpPr>
         <p:spPr>
           <a:xfrm>
-            <a:off x="3505885" y="6666310"/>
+            <a:off x="5270896" y="7460627"/>
             <a:ext cx="926325" cy="540000"/>
           </a:xfrm>
           <a:prstGeom prst="rect">
@@ -18032,7 +17733,7 @@
             <a:pPr algn="ctr"/>
             <a:r>
               <a:rPr lang="ru-RU" sz="700" dirty="0"/>
-              <a:t>Запретить деятельность МКП</a:t>
+              <a:t>Запретить любые сходки и митинги</a:t>
             </a:r>
           </a:p>
         </p:txBody>
@@ -18051,7 +17752,7 @@
         </p:nvSpPr>
         <p:spPr>
           <a:xfrm>
-            <a:off x="2911685" y="5852446"/>
+            <a:off x="3508416" y="6668555"/>
             <a:ext cx="926325" cy="540000"/>
           </a:xfrm>
           <a:prstGeom prst="rect">
@@ -18183,7 +17884,7 @@
             <a:pPr algn="ctr"/>
             <a:r>
               <a:rPr lang="ru-RU" sz="700" dirty="0"/>
-              <a:t>Довериться Франции</a:t>
+              <a:t>Запретить деятельность МКП</a:t>
             </a:r>
           </a:p>
         </p:txBody>
@@ -18340,13 +18041,13 @@
           <p:nvPr/>
         </p:nvCxnSpPr>
         <p:spPr>
-          <a:xfrm rot="5400000">
-            <a:off x="4126657" y="6237354"/>
-            <a:ext cx="271348" cy="586565"/>
+          <a:xfrm rot="16200000" flipH="1">
+            <a:off x="4612004" y="6338571"/>
+            <a:ext cx="1065665" cy="1178446"/>
           </a:xfrm>
           <a:prstGeom prst="bentConnector3">
             <a:avLst>
-              <a:gd name="adj1" fmla="val 50000"/>
+              <a:gd name="adj1" fmla="val 12460"/>
             </a:avLst>
           </a:prstGeom>
           <a:ln w="19050">
@@ -18386,8 +18087,8 @@
         </p:nvCxnSpPr>
         <p:spPr>
           <a:xfrm rot="16200000" flipH="1">
-            <a:off x="4720083" y="6230491"/>
-            <a:ext cx="259384" cy="588325"/>
+            <a:off x="4713733" y="6236841"/>
+            <a:ext cx="272084" cy="588325"/>
           </a:xfrm>
           <a:prstGeom prst="bentConnector3">
             <a:avLst>
@@ -18431,8 +18132,8 @@
         </p:nvCxnSpPr>
         <p:spPr>
           <a:xfrm rot="5400000">
-            <a:off x="3538252" y="5419034"/>
-            <a:ext cx="270008" cy="596816"/>
+            <a:off x="3428564" y="6125454"/>
+            <a:ext cx="1086117" cy="85"/>
           </a:xfrm>
           <a:prstGeom prst="bentConnector3">
             <a:avLst>
@@ -18777,61 +18478,7 @@
             <a:pPr algn="ctr"/>
             <a:r>
               <a:rPr lang="ru-RU" sz="700" dirty="0"/>
-              <a:t>Сформировать правительство</a:t>
-            </a:r>
-          </a:p>
-        </p:txBody>
-      </p:sp>
-      <p:sp>
-        <p:nvSpPr>
-          <p:cNvPr id="396" name="Прямоугольник 395">
-            <a:extLst>
-              <a:ext uri="{FF2B5EF4-FFF2-40B4-BE49-F238E27FC236}">
-                <a16:creationId xmlns:a16="http://schemas.microsoft.com/office/drawing/2014/main" id="{2F16B681-37C5-4564-B8D6-A0A2A5BCB920}"/>
-              </a:ext>
-            </a:extLst>
-          </p:cNvPr>
-          <p:cNvSpPr/>
-          <p:nvPr/>
-        </p:nvSpPr>
-        <p:spPr>
-          <a:xfrm>
-            <a:off x="10029081" y="7455162"/>
-            <a:ext cx="926325" cy="540000"/>
-          </a:xfrm>
-          <a:prstGeom prst="rect">
-            <a:avLst/>
-          </a:prstGeom>
-          <a:solidFill>
-            <a:schemeClr val="accent1">
-              <a:lumMod val="60000"/>
-              <a:lumOff val="40000"/>
-            </a:schemeClr>
-          </a:solidFill>
-          <a:ln w="19050"/>
-        </p:spPr>
-        <p:style>
-          <a:lnRef idx="2">
-            <a:schemeClr val="accent1"/>
-          </a:lnRef>
-          <a:fillRef idx="1">
-            <a:schemeClr val="lt1"/>
-          </a:fillRef>
-          <a:effectRef idx="0">
-            <a:schemeClr val="accent1"/>
-          </a:effectRef>
-          <a:fontRef idx="minor">
-            <a:schemeClr val="dk1"/>
-          </a:fontRef>
-        </p:style>
-        <p:txBody>
-          <a:bodyPr lIns="124733" tIns="62367" rIns="124733" bIns="62367" rtlCol="0" anchor="ctr"/>
-          <a:lstStyle/>
-          <a:p>
-            <a:pPr algn="ctr"/>
-            <a:r>
-              <a:rPr lang="ru-RU" sz="700" dirty="0"/>
-              <a:t>Сформировать правительство</a:t>
+              <a:t>Модернизация по западному образцу</a:t>
             </a:r>
           </a:p>
         </p:txBody>
@@ -18973,51 +18620,6 @@
           </a:fontRef>
         </p:style>
       </p:cxnSp>
-      <p:cxnSp>
-        <p:nvCxnSpPr>
-          <p:cNvPr id="406" name="Соединительная линия уступом 620">
-            <a:extLst>
-              <a:ext uri="{FF2B5EF4-FFF2-40B4-BE49-F238E27FC236}">
-                <a16:creationId xmlns:a16="http://schemas.microsoft.com/office/drawing/2014/main" id="{BDEF3D9D-C27F-4BFB-A9CB-84167E4DF3B3}"/>
-              </a:ext>
-            </a:extLst>
-          </p:cNvPr>
-          <p:cNvCxnSpPr>
-            <a:cxnSpLocks/>
-            <a:stCxn id="362" idx="2"/>
-            <a:endCxn id="396" idx="0"/>
-          </p:cNvCxnSpPr>
-          <p:nvPr/>
-        </p:nvCxnSpPr>
-        <p:spPr>
-          <a:xfrm rot="16200000" flipH="1">
-            <a:off x="10067938" y="7030855"/>
-            <a:ext cx="261051" cy="587561"/>
-          </a:xfrm>
-          <a:prstGeom prst="bentConnector3">
-            <a:avLst>
-              <a:gd name="adj1" fmla="val 50000"/>
-            </a:avLst>
-          </a:prstGeom>
-          <a:ln w="19050">
-            <a:tailEnd type="arrow"/>
-          </a:ln>
-        </p:spPr>
-        <p:style>
-          <a:lnRef idx="1">
-            <a:schemeClr val="accent1"/>
-          </a:lnRef>
-          <a:fillRef idx="0">
-            <a:schemeClr val="accent1"/>
-          </a:fillRef>
-          <a:effectRef idx="0">
-            <a:schemeClr val="accent1"/>
-          </a:effectRef>
-          <a:fontRef idx="minor">
-            <a:schemeClr val="tx1"/>
-          </a:fontRef>
-        </p:style>
-      </p:cxnSp>
       <p:sp>
         <p:nvSpPr>
           <p:cNvPr id="336" name="Прямоугольник 335">
@@ -19127,7 +18729,7 @@
             </a:br>
             <a:r>
               <a:rPr lang="ru-RU" sz="300" dirty="0"/>
-              <a:t>В 1957 году он принял титул короля Марокко , чтобы символизировать единство страны, несмотря на разногласия между арабами и берберами .</a:t>
+              <a:t>В 1957 году он принял титул короля Марокко , чтобы символизировать единство страны, несмотря на разногласия между арабами и берберами . «Провозглашение Королевства»: Исторический шаг 1957 года. Мухаммед V меняет титул султана на короля, модернизируя образ монархии. Эффект: +15% к Стабильности, рост ежедневного прироста Политической власти (PP).</a:t>
             </a:r>
             <a:endParaRPr lang="ru-RU" sz="700" dirty="0"/>
           </a:p>
@@ -19198,7 +18800,7 @@
         </p:nvSpPr>
         <p:spPr>
           <a:xfrm>
-            <a:off x="7660083" y="9888283"/>
+            <a:off x="7053301" y="9888283"/>
             <a:ext cx="926325" cy="540000"/>
           </a:xfrm>
           <a:prstGeom prst="rect">
@@ -19246,8 +18848,21 @@
             </a:r>
             <a:r>
               <a:rPr lang="ru-RU" sz="700" dirty="0"/>
-              <a:t> амбиции</a:t>
-            </a:r>
+              <a:t> амбиции </a:t>
+            </a:r>
+            <a:r>
+              <a:rPr lang="ru-RU" sz="700" dirty="0" err="1"/>
+              <a:t>Муххамеда</a:t>
+            </a:r>
+            <a:r>
+              <a:rPr lang="ru-RU" sz="700" dirty="0"/>
+              <a:t> </a:t>
+            </a:r>
+            <a:r>
+              <a:rPr lang="en-US" sz="700" dirty="0"/>
+              <a:t>V</a:t>
+            </a:r>
+            <a:endParaRPr lang="ru-RU" sz="700" dirty="0"/>
           </a:p>
         </p:txBody>
       </p:sp>
@@ -19265,7 +18880,685 @@
         </p:nvSpPr>
         <p:spPr>
           <a:xfrm>
-            <a:off x="5277983" y="9888283"/>
+            <a:off x="45290529" y="24654313"/>
+            <a:ext cx="926325" cy="540000"/>
+          </a:xfrm>
+          <a:prstGeom prst="rect">
+            <a:avLst/>
+          </a:prstGeom>
+          <a:solidFill>
+            <a:schemeClr val="accent2">
+              <a:lumMod val="75000"/>
+            </a:schemeClr>
+          </a:solidFill>
+          <a:ln w="19050"/>
+        </p:spPr>
+        <p:style>
+          <a:lnRef idx="2">
+            <a:schemeClr val="accent1"/>
+          </a:lnRef>
+          <a:fillRef idx="1">
+            <a:schemeClr val="lt1"/>
+          </a:fillRef>
+          <a:effectRef idx="0">
+            <a:schemeClr val="accent1"/>
+          </a:effectRef>
+          <a:fontRef idx="minor">
+            <a:schemeClr val="dk1"/>
+          </a:fontRef>
+        </p:style>
+        <p:txBody>
+          <a:bodyPr lIns="124733" tIns="62367" rIns="124733" bIns="62367" rtlCol="0" anchor="ctr"/>
+          <a:lstStyle/>
+          <a:p>
+            <a:pPr algn="ctr"/>
+            <a:r>
+              <a:rPr lang="ru-RU" sz="700" dirty="0"/>
+              <a:t>Аль-Андалусские амбиции</a:t>
+            </a:r>
+          </a:p>
+        </p:txBody>
+      </p:sp>
+      <p:cxnSp>
+        <p:nvCxnSpPr>
+          <p:cNvPr id="389" name="Соединительная линия уступом 620">
+            <a:extLst>
+              <a:ext uri="{FF2B5EF4-FFF2-40B4-BE49-F238E27FC236}">
+                <a16:creationId xmlns:a16="http://schemas.microsoft.com/office/drawing/2014/main" id="{6939D681-CD5F-4237-8B2C-87DF6F68EDC8}"/>
+              </a:ext>
+            </a:extLst>
+          </p:cNvPr>
+          <p:cNvCxnSpPr>
+            <a:cxnSpLocks/>
+            <a:stCxn id="330" idx="2"/>
+            <a:endCxn id="385" idx="0"/>
+          </p:cNvCxnSpPr>
+          <p:nvPr/>
+        </p:nvCxnSpPr>
+        <p:spPr>
+          <a:xfrm rot="16200000" flipH="1">
+            <a:off x="7087766" y="9459584"/>
+            <a:ext cx="269383" cy="588014"/>
+          </a:xfrm>
+          <a:prstGeom prst="bentConnector3">
+            <a:avLst>
+              <a:gd name="adj1" fmla="val 50000"/>
+            </a:avLst>
+          </a:prstGeom>
+          <a:ln w="19050">
+            <a:tailEnd type="arrow"/>
+          </a:ln>
+        </p:spPr>
+        <p:style>
+          <a:lnRef idx="1">
+            <a:schemeClr val="accent1"/>
+          </a:lnRef>
+          <a:fillRef idx="0">
+            <a:schemeClr val="accent1"/>
+          </a:fillRef>
+          <a:effectRef idx="0">
+            <a:schemeClr val="accent1"/>
+          </a:effectRef>
+          <a:fontRef idx="minor">
+            <a:schemeClr val="tx1"/>
+          </a:fontRef>
+        </p:style>
+      </p:cxnSp>
+      <p:cxnSp>
+        <p:nvCxnSpPr>
+          <p:cNvPr id="390" name="Соединительная линия уступом 620">
+            <a:extLst>
+              <a:ext uri="{FF2B5EF4-FFF2-40B4-BE49-F238E27FC236}">
+                <a16:creationId xmlns:a16="http://schemas.microsoft.com/office/drawing/2014/main" id="{58F98732-BFE8-4991-9A38-05C11FC04FDB}"/>
+              </a:ext>
+            </a:extLst>
+          </p:cNvPr>
+          <p:cNvCxnSpPr>
+            <a:cxnSpLocks/>
+            <a:stCxn id="330" idx="2"/>
+            <a:endCxn id="435" idx="0"/>
+          </p:cNvCxnSpPr>
+          <p:nvPr/>
+        </p:nvCxnSpPr>
+        <p:spPr>
+          <a:xfrm rot="5400000">
+            <a:off x="6495162" y="9454994"/>
+            <a:ext cx="269383" cy="597194"/>
+          </a:xfrm>
+          <a:prstGeom prst="bentConnector3">
+            <a:avLst>
+              <a:gd name="adj1" fmla="val 50000"/>
+            </a:avLst>
+          </a:prstGeom>
+          <a:ln w="19050">
+            <a:tailEnd type="arrow"/>
+          </a:ln>
+        </p:spPr>
+        <p:style>
+          <a:lnRef idx="1">
+            <a:schemeClr val="accent1"/>
+          </a:lnRef>
+          <a:fillRef idx="0">
+            <a:schemeClr val="accent1"/>
+          </a:fillRef>
+          <a:effectRef idx="0">
+            <a:schemeClr val="accent1"/>
+          </a:effectRef>
+          <a:fontRef idx="minor">
+            <a:schemeClr val="tx1"/>
+          </a:fontRef>
+        </p:style>
+      </p:cxnSp>
+      <p:sp>
+        <p:nvSpPr>
+          <p:cNvPr id="391" name="Прямоугольник 390">
+            <a:extLst>
+              <a:ext uri="{FF2B5EF4-FFF2-40B4-BE49-F238E27FC236}">
+                <a16:creationId xmlns:a16="http://schemas.microsoft.com/office/drawing/2014/main" id="{F6324390-F8AE-4AB5-AD25-75C7A7634BC2}"/>
+              </a:ext>
+            </a:extLst>
+          </p:cNvPr>
+          <p:cNvSpPr/>
+          <p:nvPr/>
+        </p:nvSpPr>
+        <p:spPr>
+          <a:xfrm>
+            <a:off x="45887498" y="25454602"/>
+            <a:ext cx="926325" cy="540000"/>
+          </a:xfrm>
+          <a:prstGeom prst="rect">
+            <a:avLst/>
+          </a:prstGeom>
+          <a:solidFill>
+            <a:schemeClr val="accent2">
+              <a:lumMod val="75000"/>
+            </a:schemeClr>
+          </a:solidFill>
+          <a:ln w="19050"/>
+        </p:spPr>
+        <p:style>
+          <a:lnRef idx="2">
+            <a:schemeClr val="accent1"/>
+          </a:lnRef>
+          <a:fillRef idx="1">
+            <a:schemeClr val="lt1"/>
+          </a:fillRef>
+          <a:effectRef idx="0">
+            <a:schemeClr val="accent1"/>
+          </a:effectRef>
+          <a:fontRef idx="minor">
+            <a:schemeClr val="dk1"/>
+          </a:fontRef>
+        </p:style>
+        <p:txBody>
+          <a:bodyPr lIns="124733" tIns="62367" rIns="124733" bIns="62367" rtlCol="0" anchor="ctr"/>
+          <a:lstStyle/>
+          <a:p>
+            <a:pPr algn="ctr"/>
+            <a:r>
+              <a:rPr lang="ru-RU" sz="700" dirty="0"/>
+              <a:t>Земли Испании</a:t>
+            </a:r>
+          </a:p>
+        </p:txBody>
+      </p:sp>
+      <p:cxnSp>
+        <p:nvCxnSpPr>
+          <p:cNvPr id="392" name="Прямая соединительная линия 391">
+            <a:extLst>
+              <a:ext uri="{FF2B5EF4-FFF2-40B4-BE49-F238E27FC236}">
+                <a16:creationId xmlns:a16="http://schemas.microsoft.com/office/drawing/2014/main" id="{69363E1E-740B-4D79-AA3E-047239836AA0}"/>
+              </a:ext>
+            </a:extLst>
+          </p:cNvPr>
+          <p:cNvCxnSpPr>
+            <a:cxnSpLocks/>
+            <a:stCxn id="385" idx="1"/>
+            <a:endCxn id="435" idx="3"/>
+          </p:cNvCxnSpPr>
+          <p:nvPr/>
+        </p:nvCxnSpPr>
+        <p:spPr>
+          <a:xfrm flipH="1">
+            <a:off x="6794418" y="10158283"/>
+            <a:ext cx="258883" cy="0"/>
+          </a:xfrm>
+          <a:prstGeom prst="line">
+            <a:avLst/>
+          </a:prstGeom>
+          <a:ln w="38100">
+            <a:solidFill>
+              <a:srgbClr val="C00000"/>
+            </a:solidFill>
+          </a:ln>
+        </p:spPr>
+        <p:style>
+          <a:lnRef idx="1">
+            <a:schemeClr val="accent1"/>
+          </a:lnRef>
+          <a:fillRef idx="0">
+            <a:schemeClr val="accent1"/>
+          </a:fillRef>
+          <a:effectRef idx="0">
+            <a:schemeClr val="accent1"/>
+          </a:effectRef>
+          <a:fontRef idx="minor">
+            <a:schemeClr val="tx1"/>
+          </a:fontRef>
+        </p:style>
+      </p:cxnSp>
+      <p:sp>
+        <p:nvSpPr>
+          <p:cNvPr id="393" name="Прямоугольник 392">
+            <a:extLst>
+              <a:ext uri="{FF2B5EF4-FFF2-40B4-BE49-F238E27FC236}">
+                <a16:creationId xmlns:a16="http://schemas.microsoft.com/office/drawing/2014/main" id="{05D0D326-25E7-4CF1-BC8E-9F64D542575B}"/>
+              </a:ext>
+            </a:extLst>
+          </p:cNvPr>
+          <p:cNvSpPr/>
+          <p:nvPr/>
+        </p:nvSpPr>
+        <p:spPr>
+          <a:xfrm>
+            <a:off x="44697768" y="25455132"/>
+            <a:ext cx="926325" cy="540000"/>
+          </a:xfrm>
+          <a:prstGeom prst="rect">
+            <a:avLst/>
+          </a:prstGeom>
+          <a:solidFill>
+            <a:schemeClr val="accent2">
+              <a:lumMod val="75000"/>
+            </a:schemeClr>
+          </a:solidFill>
+          <a:ln w="19050"/>
+        </p:spPr>
+        <p:style>
+          <a:lnRef idx="2">
+            <a:schemeClr val="accent1"/>
+          </a:lnRef>
+          <a:fillRef idx="1">
+            <a:schemeClr val="lt1"/>
+          </a:fillRef>
+          <a:effectRef idx="0">
+            <a:schemeClr val="accent1"/>
+          </a:effectRef>
+          <a:fontRef idx="minor">
+            <a:schemeClr val="dk1"/>
+          </a:fontRef>
+        </p:style>
+        <p:txBody>
+          <a:bodyPr lIns="124733" tIns="62367" rIns="124733" bIns="62367" rtlCol="0" anchor="ctr"/>
+          <a:lstStyle/>
+          <a:p>
+            <a:pPr algn="ctr"/>
+            <a:r>
+              <a:rPr lang="ru-RU" sz="700" dirty="0"/>
+              <a:t>Земли Португалии</a:t>
+            </a:r>
+          </a:p>
+        </p:txBody>
+      </p:sp>
+      <p:sp>
+        <p:nvSpPr>
+          <p:cNvPr id="398" name="Прямоугольник 397">
+            <a:extLst>
+              <a:ext uri="{FF2B5EF4-FFF2-40B4-BE49-F238E27FC236}">
+                <a16:creationId xmlns:a16="http://schemas.microsoft.com/office/drawing/2014/main" id="{28CEDD15-69A5-47C1-928C-D47DE891019A}"/>
+              </a:ext>
+            </a:extLst>
+          </p:cNvPr>
+          <p:cNvSpPr/>
+          <p:nvPr/>
+        </p:nvSpPr>
+        <p:spPr>
+          <a:xfrm>
+            <a:off x="45290528" y="26254890"/>
+            <a:ext cx="926325" cy="540000"/>
+          </a:xfrm>
+          <a:prstGeom prst="rect">
+            <a:avLst/>
+          </a:prstGeom>
+          <a:solidFill>
+            <a:schemeClr val="accent2">
+              <a:lumMod val="75000"/>
+            </a:schemeClr>
+          </a:solidFill>
+          <a:ln w="19050"/>
+        </p:spPr>
+        <p:style>
+          <a:lnRef idx="2">
+            <a:schemeClr val="accent1"/>
+          </a:lnRef>
+          <a:fillRef idx="1">
+            <a:schemeClr val="lt1"/>
+          </a:fillRef>
+          <a:effectRef idx="0">
+            <a:schemeClr val="accent1"/>
+          </a:effectRef>
+          <a:fontRef idx="minor">
+            <a:schemeClr val="dk1"/>
+          </a:fontRef>
+        </p:style>
+        <p:txBody>
+          <a:bodyPr lIns="124733" tIns="62367" rIns="124733" bIns="62367" rtlCol="0" anchor="ctr"/>
+          <a:lstStyle/>
+          <a:p>
+            <a:pPr algn="ctr"/>
+            <a:r>
+              <a:rPr lang="ru-RU" sz="700" dirty="0"/>
+              <a:t>Оккупировать Гибралтар</a:t>
+            </a:r>
+          </a:p>
+        </p:txBody>
+      </p:sp>
+      <p:sp>
+        <p:nvSpPr>
+          <p:cNvPr id="399" name="Прямоугольник 398">
+            <a:extLst>
+              <a:ext uri="{FF2B5EF4-FFF2-40B4-BE49-F238E27FC236}">
+                <a16:creationId xmlns:a16="http://schemas.microsoft.com/office/drawing/2014/main" id="{2757126F-767B-49BC-8A20-3EF2F6BAD339}"/>
+              </a:ext>
+            </a:extLst>
+          </p:cNvPr>
+          <p:cNvSpPr/>
+          <p:nvPr/>
+        </p:nvSpPr>
+        <p:spPr>
+          <a:xfrm>
+            <a:off x="45880638" y="27054648"/>
+            <a:ext cx="926325" cy="540000"/>
+          </a:xfrm>
+          <a:prstGeom prst="rect">
+            <a:avLst/>
+          </a:prstGeom>
+          <a:solidFill>
+            <a:schemeClr val="accent2">
+              <a:lumMod val="75000"/>
+            </a:schemeClr>
+          </a:solidFill>
+          <a:ln w="19050"/>
+        </p:spPr>
+        <p:style>
+          <a:lnRef idx="2">
+            <a:schemeClr val="accent1"/>
+          </a:lnRef>
+          <a:fillRef idx="1">
+            <a:schemeClr val="lt1"/>
+          </a:fillRef>
+          <a:effectRef idx="0">
+            <a:schemeClr val="accent1"/>
+          </a:effectRef>
+          <a:fontRef idx="minor">
+            <a:schemeClr val="dk1"/>
+          </a:fontRef>
+        </p:style>
+        <p:txBody>
+          <a:bodyPr lIns="124733" tIns="62367" rIns="124733" bIns="62367" rtlCol="0" anchor="ctr"/>
+          <a:lstStyle/>
+          <a:p>
+            <a:pPr algn="ctr"/>
+            <a:r>
+              <a:rPr lang="ru-RU" sz="700" dirty="0"/>
+              <a:t>Реформировать Иберийские провинции под эмираты</a:t>
+            </a:r>
+          </a:p>
+        </p:txBody>
+      </p:sp>
+      <p:sp>
+        <p:nvSpPr>
+          <p:cNvPr id="401" name="Прямоугольник 400">
+            <a:extLst>
+              <a:ext uri="{FF2B5EF4-FFF2-40B4-BE49-F238E27FC236}">
+                <a16:creationId xmlns:a16="http://schemas.microsoft.com/office/drawing/2014/main" id="{98F1BED1-5D08-4C89-AA68-C9EEB86A12A3}"/>
+              </a:ext>
+            </a:extLst>
+          </p:cNvPr>
+          <p:cNvSpPr/>
+          <p:nvPr/>
+        </p:nvSpPr>
+        <p:spPr>
+          <a:xfrm>
+            <a:off x="44697767" y="27054648"/>
+            <a:ext cx="926325" cy="540000"/>
+          </a:xfrm>
+          <a:prstGeom prst="rect">
+            <a:avLst/>
+          </a:prstGeom>
+          <a:solidFill>
+            <a:schemeClr val="accent2">
+              <a:lumMod val="75000"/>
+            </a:schemeClr>
+          </a:solidFill>
+          <a:ln w="19050"/>
+        </p:spPr>
+        <p:style>
+          <a:lnRef idx="2">
+            <a:schemeClr val="accent1"/>
+          </a:lnRef>
+          <a:fillRef idx="1">
+            <a:schemeClr val="lt1"/>
+          </a:fillRef>
+          <a:effectRef idx="0">
+            <a:schemeClr val="accent1"/>
+          </a:effectRef>
+          <a:fontRef idx="minor">
+            <a:schemeClr val="dk1"/>
+          </a:fontRef>
+        </p:style>
+        <p:txBody>
+          <a:bodyPr lIns="124733" tIns="62367" rIns="124733" bIns="62367" rtlCol="0" anchor="ctr"/>
+          <a:lstStyle/>
+          <a:p>
+            <a:pPr algn="ctr"/>
+            <a:r>
+              <a:rPr lang="ru-RU" sz="700" dirty="0"/>
+              <a:t>Продвижение ислама на Пиренейском полуострове</a:t>
+            </a:r>
+          </a:p>
+        </p:txBody>
+      </p:sp>
+      <p:cxnSp>
+        <p:nvCxnSpPr>
+          <p:cNvPr id="402" name="Соединительная линия уступом 620">
+            <a:extLst>
+              <a:ext uri="{FF2B5EF4-FFF2-40B4-BE49-F238E27FC236}">
+                <a16:creationId xmlns:a16="http://schemas.microsoft.com/office/drawing/2014/main" id="{2EF2ABD2-BA85-4697-AE78-CF7878ADA90D}"/>
+              </a:ext>
+            </a:extLst>
+          </p:cNvPr>
+          <p:cNvCxnSpPr>
+            <a:cxnSpLocks/>
+            <a:stCxn id="388" idx="2"/>
+            <a:endCxn id="393" idx="0"/>
+          </p:cNvCxnSpPr>
+          <p:nvPr/>
+        </p:nvCxnSpPr>
+        <p:spPr>
+          <a:xfrm rot="5400000">
+            <a:off x="45326903" y="25028342"/>
+            <a:ext cx="260819" cy="592761"/>
+          </a:xfrm>
+          <a:prstGeom prst="bentConnector3">
+            <a:avLst>
+              <a:gd name="adj1" fmla="val 50000"/>
+            </a:avLst>
+          </a:prstGeom>
+          <a:ln w="19050">
+            <a:tailEnd type="arrow"/>
+          </a:ln>
+        </p:spPr>
+        <p:style>
+          <a:lnRef idx="1">
+            <a:schemeClr val="accent1"/>
+          </a:lnRef>
+          <a:fillRef idx="0">
+            <a:schemeClr val="accent1"/>
+          </a:fillRef>
+          <a:effectRef idx="0">
+            <a:schemeClr val="accent1"/>
+          </a:effectRef>
+          <a:fontRef idx="minor">
+            <a:schemeClr val="tx1"/>
+          </a:fontRef>
+        </p:style>
+      </p:cxnSp>
+      <p:cxnSp>
+        <p:nvCxnSpPr>
+          <p:cNvPr id="404" name="Соединительная линия уступом 620">
+            <a:extLst>
+              <a:ext uri="{FF2B5EF4-FFF2-40B4-BE49-F238E27FC236}">
+                <a16:creationId xmlns:a16="http://schemas.microsoft.com/office/drawing/2014/main" id="{CA823A6B-39CF-47ED-A88F-0C536E2E29A6}"/>
+              </a:ext>
+            </a:extLst>
+          </p:cNvPr>
+          <p:cNvCxnSpPr>
+            <a:cxnSpLocks/>
+            <a:stCxn id="388" idx="2"/>
+            <a:endCxn id="391" idx="0"/>
+          </p:cNvCxnSpPr>
+          <p:nvPr/>
+        </p:nvCxnSpPr>
+        <p:spPr>
+          <a:xfrm rot="16200000" flipH="1">
+            <a:off x="45922032" y="25025972"/>
+            <a:ext cx="260289" cy="596969"/>
+          </a:xfrm>
+          <a:prstGeom prst="bentConnector3">
+            <a:avLst>
+              <a:gd name="adj1" fmla="val 50000"/>
+            </a:avLst>
+          </a:prstGeom>
+          <a:ln w="19050">
+            <a:tailEnd type="arrow"/>
+          </a:ln>
+        </p:spPr>
+        <p:style>
+          <a:lnRef idx="1">
+            <a:schemeClr val="accent1"/>
+          </a:lnRef>
+          <a:fillRef idx="0">
+            <a:schemeClr val="accent1"/>
+          </a:fillRef>
+          <a:effectRef idx="0">
+            <a:schemeClr val="accent1"/>
+          </a:effectRef>
+          <a:fontRef idx="minor">
+            <a:schemeClr val="tx1"/>
+          </a:fontRef>
+        </p:style>
+      </p:cxnSp>
+      <p:cxnSp>
+        <p:nvCxnSpPr>
+          <p:cNvPr id="405" name="Соединительная линия уступом 620">
+            <a:extLst>
+              <a:ext uri="{FF2B5EF4-FFF2-40B4-BE49-F238E27FC236}">
+                <a16:creationId xmlns:a16="http://schemas.microsoft.com/office/drawing/2014/main" id="{8C529540-B4D6-4BB9-92AD-DEE61AFB1831}"/>
+              </a:ext>
+            </a:extLst>
+          </p:cNvPr>
+          <p:cNvCxnSpPr>
+            <a:cxnSpLocks/>
+            <a:stCxn id="388" idx="2"/>
+            <a:endCxn id="398" idx="0"/>
+          </p:cNvCxnSpPr>
+          <p:nvPr/>
+        </p:nvCxnSpPr>
+        <p:spPr>
+          <a:xfrm rot="5400000">
+            <a:off x="45223404" y="25724601"/>
+            <a:ext cx="1060577" cy="1"/>
+          </a:xfrm>
+          <a:prstGeom prst="bentConnector3">
+            <a:avLst>
+              <a:gd name="adj1" fmla="val 50000"/>
+            </a:avLst>
+          </a:prstGeom>
+          <a:ln w="19050">
+            <a:tailEnd type="arrow"/>
+          </a:ln>
+        </p:spPr>
+        <p:style>
+          <a:lnRef idx="1">
+            <a:schemeClr val="accent1"/>
+          </a:lnRef>
+          <a:fillRef idx="0">
+            <a:schemeClr val="accent1"/>
+          </a:fillRef>
+          <a:effectRef idx="0">
+            <a:schemeClr val="accent1"/>
+          </a:effectRef>
+          <a:fontRef idx="minor">
+            <a:schemeClr val="tx1"/>
+          </a:fontRef>
+        </p:style>
+      </p:cxnSp>
+      <p:cxnSp>
+        <p:nvCxnSpPr>
+          <p:cNvPr id="407" name="Соединительная линия уступом 620">
+            <a:extLst>
+              <a:ext uri="{FF2B5EF4-FFF2-40B4-BE49-F238E27FC236}">
+                <a16:creationId xmlns:a16="http://schemas.microsoft.com/office/drawing/2014/main" id="{C222986D-1E4F-4588-B963-F7419387B849}"/>
+              </a:ext>
+            </a:extLst>
+          </p:cNvPr>
+          <p:cNvCxnSpPr>
+            <a:cxnSpLocks/>
+            <a:stCxn id="398" idx="2"/>
+            <a:endCxn id="401" idx="0"/>
+          </p:cNvCxnSpPr>
+          <p:nvPr/>
+        </p:nvCxnSpPr>
+        <p:spPr>
+          <a:xfrm rot="5400000">
+            <a:off x="45327432" y="26628389"/>
+            <a:ext cx="259758" cy="592761"/>
+          </a:xfrm>
+          <a:prstGeom prst="bentConnector3">
+            <a:avLst>
+              <a:gd name="adj1" fmla="val 50000"/>
+            </a:avLst>
+          </a:prstGeom>
+          <a:ln w="19050">
+            <a:tailEnd type="arrow"/>
+          </a:ln>
+        </p:spPr>
+        <p:style>
+          <a:lnRef idx="1">
+            <a:schemeClr val="accent1"/>
+          </a:lnRef>
+          <a:fillRef idx="0">
+            <a:schemeClr val="accent1"/>
+          </a:fillRef>
+          <a:effectRef idx="0">
+            <a:schemeClr val="accent1"/>
+          </a:effectRef>
+          <a:fontRef idx="minor">
+            <a:schemeClr val="tx1"/>
+          </a:fontRef>
+        </p:style>
+      </p:cxnSp>
+      <p:cxnSp>
+        <p:nvCxnSpPr>
+          <p:cNvPr id="408" name="Соединительная линия уступом 620">
+            <a:extLst>
+              <a:ext uri="{FF2B5EF4-FFF2-40B4-BE49-F238E27FC236}">
+                <a16:creationId xmlns:a16="http://schemas.microsoft.com/office/drawing/2014/main" id="{4C3C96C6-F2ED-4F21-9CE9-26F579EBDE06}"/>
+              </a:ext>
+            </a:extLst>
+          </p:cNvPr>
+          <p:cNvCxnSpPr>
+            <a:cxnSpLocks/>
+            <a:stCxn id="398" idx="2"/>
+            <a:endCxn id="399" idx="0"/>
+          </p:cNvCxnSpPr>
+          <p:nvPr/>
+        </p:nvCxnSpPr>
+        <p:spPr>
+          <a:xfrm rot="16200000" flipH="1">
+            <a:off x="45918867" y="26629714"/>
+            <a:ext cx="259758" cy="590110"/>
+          </a:xfrm>
+          <a:prstGeom prst="bentConnector3">
+            <a:avLst>
+              <a:gd name="adj1" fmla="val 50000"/>
+            </a:avLst>
+          </a:prstGeom>
+          <a:ln w="19050">
+            <a:tailEnd type="arrow"/>
+          </a:ln>
+        </p:spPr>
+        <p:style>
+          <a:lnRef idx="1">
+            <a:schemeClr val="accent1"/>
+          </a:lnRef>
+          <a:fillRef idx="0">
+            <a:schemeClr val="accent1"/>
+          </a:fillRef>
+          <a:effectRef idx="0">
+            <a:schemeClr val="accent1"/>
+          </a:effectRef>
+          <a:fontRef idx="minor">
+            <a:schemeClr val="tx1"/>
+          </a:fontRef>
+        </p:style>
+      </p:cxnSp>
+      <p:sp>
+        <p:nvSpPr>
+          <p:cNvPr id="341" name="Прямоугольник 340">
+            <a:extLst>
+              <a:ext uri="{FF2B5EF4-FFF2-40B4-BE49-F238E27FC236}">
+                <a16:creationId xmlns:a16="http://schemas.microsoft.com/office/drawing/2014/main" id="{3C2402F4-31AF-448C-B8FA-52B3ADC9CEE0}"/>
+              </a:ext>
+            </a:extLst>
+          </p:cNvPr>
+          <p:cNvSpPr/>
+          <p:nvPr/>
+        </p:nvSpPr>
+        <p:spPr>
+          <a:xfrm>
+            <a:off x="5875167" y="6663485"/>
             <a:ext cx="926325" cy="540000"/>
           </a:xfrm>
           <a:prstGeom prst="rect">
@@ -19309,31 +19602,127 @@
             <a:pPr algn="ctr"/>
             <a:r>
               <a:rPr lang="ru-RU" sz="700" dirty="0"/>
-              <a:t>Аль-Андалусские амбиции</a:t>
+              <a:t>Поддержать волнения в Мавритании</a:t>
+            </a:r>
+          </a:p>
+        </p:txBody>
+      </p:sp>
+      <p:sp>
+        <p:nvSpPr>
+          <p:cNvPr id="411" name="Прямоугольник 410">
+            <a:extLst>
+              <a:ext uri="{FF2B5EF4-FFF2-40B4-BE49-F238E27FC236}">
+                <a16:creationId xmlns:a16="http://schemas.microsoft.com/office/drawing/2014/main" id="{C688C71C-1C36-4FD3-ADF8-83A350ED6574}"/>
+              </a:ext>
+            </a:extLst>
+          </p:cNvPr>
+          <p:cNvSpPr/>
+          <p:nvPr/>
+        </p:nvSpPr>
+        <p:spPr>
+          <a:xfrm>
+            <a:off x="10028508" y="4235046"/>
+            <a:ext cx="926325" cy="540000"/>
+          </a:xfrm>
+          <a:prstGeom prst="rect">
+            <a:avLst/>
+          </a:prstGeom>
+          <a:solidFill>
+            <a:srgbClr val="7030A0"/>
+          </a:solidFill>
+          <a:ln w="19050"/>
+        </p:spPr>
+        <p:style>
+          <a:lnRef idx="2">
+            <a:schemeClr val="accent1"/>
+          </a:lnRef>
+          <a:fillRef idx="1">
+            <a:schemeClr val="lt1"/>
+          </a:fillRef>
+          <a:effectRef idx="0">
+            <a:schemeClr val="accent1"/>
+          </a:effectRef>
+          <a:fontRef idx="minor">
+            <a:schemeClr val="dk1"/>
+          </a:fontRef>
+        </p:style>
+        <p:txBody>
+          <a:bodyPr lIns="124733" tIns="62367" rIns="124733" bIns="62367" rtlCol="0" anchor="ctr"/>
+          <a:lstStyle/>
+          <a:p>
+            <a:pPr algn="ctr"/>
+            <a:r>
+              <a:rPr lang="ru-RU" sz="700" dirty="0"/>
+              <a:t>Назначит лояльного королю визиря</a:t>
             </a:r>
           </a:p>
         </p:txBody>
       </p:sp>
       <p:cxnSp>
         <p:nvCxnSpPr>
-          <p:cNvPr id="389" name="Соединительная линия уступом 620">
-            <a:extLst>
-              <a:ext uri="{FF2B5EF4-FFF2-40B4-BE49-F238E27FC236}">
-                <a16:creationId xmlns:a16="http://schemas.microsoft.com/office/drawing/2014/main" id="{6939D681-CD5F-4237-8B2C-87DF6F68EDC8}"/>
+          <p:cNvPr id="412" name="Прямая соединительная линия 411">
+            <a:extLst>
+              <a:ext uri="{FF2B5EF4-FFF2-40B4-BE49-F238E27FC236}">
+                <a16:creationId xmlns:a16="http://schemas.microsoft.com/office/drawing/2014/main" id="{FE3D907B-C345-42EE-9CEE-AE0F130BD2FE}"/>
               </a:ext>
             </a:extLst>
           </p:cNvPr>
           <p:cNvCxnSpPr>
             <a:cxnSpLocks/>
-            <a:stCxn id="330" idx="2"/>
-            <a:endCxn id="385" idx="0"/>
+            <a:stCxn id="411" idx="1"/>
+            <a:endCxn id="275" idx="3"/>
           </p:cNvCxnSpPr>
           <p:nvPr/>
         </p:nvCxnSpPr>
         <p:spPr>
+          <a:xfrm flipH="1">
+            <a:off x="9768525" y="4505046"/>
+            <a:ext cx="259983" cy="0"/>
+          </a:xfrm>
+          <a:prstGeom prst="line">
+            <a:avLst/>
+          </a:prstGeom>
+          <a:ln w="38100">
+            <a:solidFill>
+              <a:srgbClr val="C00000"/>
+            </a:solidFill>
+          </a:ln>
+        </p:spPr>
+        <p:style>
+          <a:lnRef idx="1">
+            <a:schemeClr val="accent1"/>
+          </a:lnRef>
+          <a:fillRef idx="0">
+            <a:schemeClr val="accent1"/>
+          </a:fillRef>
+          <a:effectRef idx="0">
+            <a:schemeClr val="accent1"/>
+          </a:effectRef>
+          <a:fontRef idx="minor">
+            <a:schemeClr val="tx1"/>
+          </a:fontRef>
+        </p:style>
+      </p:cxnSp>
+      <p:cxnSp>
+        <p:nvCxnSpPr>
+          <p:cNvPr id="413" name="Соединительная линия уступом 620">
+            <a:extLst>
+              <a:ext uri="{FF2B5EF4-FFF2-40B4-BE49-F238E27FC236}">
+                <a16:creationId xmlns:a16="http://schemas.microsoft.com/office/drawing/2014/main" id="{8B330FB8-FF98-4300-95FC-E9679674C672}"/>
+              </a:ext>
+            </a:extLst>
+          </p:cNvPr>
+          <p:cNvCxnSpPr>
+            <a:cxnSpLocks/>
+            <a:stCxn id="287" idx="2"/>
+            <a:endCxn id="411" idx="0"/>
+          </p:cNvCxnSpPr>
+          <p:nvPr/>
+        </p:nvCxnSpPr>
+        <p:spPr>
           <a:xfrm rot="16200000" flipH="1">
-            <a:off x="7391157" y="9156193"/>
-            <a:ext cx="269383" cy="1194796"/>
+            <a:off x="9765346" y="3508721"/>
+            <a:ext cx="263056" cy="1189594"/>
           </a:xfrm>
           <a:prstGeom prst="bentConnector3">
             <a:avLst>
@@ -19361,24 +19750,24 @@
       </p:cxnSp>
       <p:cxnSp>
         <p:nvCxnSpPr>
-          <p:cNvPr id="390" name="Соединительная линия уступом 620">
-            <a:extLst>
-              <a:ext uri="{FF2B5EF4-FFF2-40B4-BE49-F238E27FC236}">
-                <a16:creationId xmlns:a16="http://schemas.microsoft.com/office/drawing/2014/main" id="{58F98732-BFE8-4991-9A38-05C11FC04FDB}"/>
+          <p:cNvPr id="414" name="Соединительная линия уступом 620">
+            <a:extLst>
+              <a:ext uri="{FF2B5EF4-FFF2-40B4-BE49-F238E27FC236}">
+                <a16:creationId xmlns:a16="http://schemas.microsoft.com/office/drawing/2014/main" id="{6F7D6D57-CFAB-4E36-9036-A9781AB86AF9}"/>
               </a:ext>
             </a:extLst>
           </p:cNvPr>
           <p:cNvCxnSpPr>
             <a:cxnSpLocks/>
-            <a:stCxn id="330" idx="2"/>
-            <a:endCxn id="388" idx="0"/>
+            <a:stCxn id="411" idx="2"/>
+            <a:endCxn id="336" idx="0"/>
           </p:cNvCxnSpPr>
           <p:nvPr/>
         </p:nvCxnSpPr>
         <p:spPr>
-          <a:xfrm rot="5400000">
-            <a:off x="6200107" y="9159939"/>
-            <a:ext cx="269383" cy="1187304"/>
+          <a:xfrm rot="16200000" flipH="1">
+            <a:off x="10357636" y="4909081"/>
+            <a:ext cx="270540" cy="2470"/>
           </a:xfrm>
           <a:prstGeom prst="bentConnector3">
             <a:avLst>
@@ -19404,12 +19793,148 @@
           </a:fontRef>
         </p:style>
       </p:cxnSp>
+      <p:cxnSp>
+        <p:nvCxnSpPr>
+          <p:cNvPr id="416" name="Соединительная линия уступом 620">
+            <a:extLst>
+              <a:ext uri="{FF2B5EF4-FFF2-40B4-BE49-F238E27FC236}">
+                <a16:creationId xmlns:a16="http://schemas.microsoft.com/office/drawing/2014/main" id="{E4830A77-CFFB-4D97-BE75-3D5605CF1301}"/>
+              </a:ext>
+            </a:extLst>
+          </p:cNvPr>
+          <p:cNvCxnSpPr>
+            <a:cxnSpLocks/>
+            <a:stCxn id="336" idx="2"/>
+            <a:endCxn id="320" idx="0"/>
+          </p:cNvCxnSpPr>
+          <p:nvPr/>
+        </p:nvCxnSpPr>
+        <p:spPr>
+          <a:xfrm rot="5400000">
+            <a:off x="9176723" y="4532110"/>
+            <a:ext cx="263942" cy="2370895"/>
+          </a:xfrm>
+          <a:prstGeom prst="bentConnector3">
+            <a:avLst>
+              <a:gd name="adj1" fmla="val 50000"/>
+            </a:avLst>
+          </a:prstGeom>
+          <a:ln w="19050">
+            <a:prstDash val="dash"/>
+            <a:tailEnd type="arrow"/>
+          </a:ln>
+        </p:spPr>
+        <p:style>
+          <a:lnRef idx="1">
+            <a:schemeClr val="accent1"/>
+          </a:lnRef>
+          <a:fillRef idx="0">
+            <a:schemeClr val="accent1"/>
+          </a:fillRef>
+          <a:effectRef idx="0">
+            <a:schemeClr val="accent1"/>
+          </a:effectRef>
+          <a:fontRef idx="minor">
+            <a:schemeClr val="tx1"/>
+          </a:fontRef>
+        </p:style>
+      </p:cxnSp>
+      <p:cxnSp>
+        <p:nvCxnSpPr>
+          <p:cNvPr id="418" name="Соединительная линия уступом 620">
+            <a:extLst>
+              <a:ext uri="{FF2B5EF4-FFF2-40B4-BE49-F238E27FC236}">
+                <a16:creationId xmlns:a16="http://schemas.microsoft.com/office/drawing/2014/main" id="{39F7F08E-601C-4E17-AA63-BAB3202D746A}"/>
+              </a:ext>
+            </a:extLst>
+          </p:cNvPr>
+          <p:cNvCxnSpPr>
+            <a:cxnSpLocks/>
+            <a:stCxn id="336" idx="2"/>
+            <a:endCxn id="339" idx="0"/>
+          </p:cNvCxnSpPr>
+          <p:nvPr/>
+        </p:nvCxnSpPr>
+        <p:spPr>
+          <a:xfrm rot="5400000">
+            <a:off x="10364261" y="5714232"/>
+            <a:ext cx="258526" cy="1235"/>
+          </a:xfrm>
+          <a:prstGeom prst="bentConnector3">
+            <a:avLst>
+              <a:gd name="adj1" fmla="val 50000"/>
+            </a:avLst>
+          </a:prstGeom>
+          <a:ln w="19050">
+            <a:tailEnd type="arrow"/>
+          </a:ln>
+        </p:spPr>
+        <p:style>
+          <a:lnRef idx="1">
+            <a:schemeClr val="accent1"/>
+          </a:lnRef>
+          <a:fillRef idx="0">
+            <a:schemeClr val="accent1"/>
+          </a:fillRef>
+          <a:effectRef idx="0">
+            <a:schemeClr val="accent1"/>
+          </a:effectRef>
+          <a:fontRef idx="minor">
+            <a:schemeClr val="tx1"/>
+          </a:fontRef>
+        </p:style>
+      </p:cxnSp>
+      <p:cxnSp>
+        <p:nvCxnSpPr>
+          <p:cNvPr id="419" name="Соединительная линия уступом 620">
+            <a:extLst>
+              <a:ext uri="{FF2B5EF4-FFF2-40B4-BE49-F238E27FC236}">
+                <a16:creationId xmlns:a16="http://schemas.microsoft.com/office/drawing/2014/main" id="{681E0FBA-1733-43B9-98CA-A4658882A5F5}"/>
+              </a:ext>
+            </a:extLst>
+          </p:cNvPr>
+          <p:cNvCxnSpPr>
+            <a:cxnSpLocks/>
+            <a:stCxn id="339" idx="2"/>
+            <a:endCxn id="345" idx="0"/>
+          </p:cNvCxnSpPr>
+          <p:nvPr/>
+        </p:nvCxnSpPr>
+        <p:spPr>
+          <a:xfrm rot="16200000" flipH="1">
+            <a:off x="10950212" y="5926805"/>
+            <a:ext cx="268774" cy="1183387"/>
+          </a:xfrm>
+          <a:prstGeom prst="bentConnector3">
+            <a:avLst>
+              <a:gd name="adj1" fmla="val 50000"/>
+            </a:avLst>
+          </a:prstGeom>
+          <a:ln w="19050">
+            <a:tailEnd type="arrow"/>
+          </a:ln>
+        </p:spPr>
+        <p:style>
+          <a:lnRef idx="1">
+            <a:schemeClr val="accent1"/>
+          </a:lnRef>
+          <a:fillRef idx="0">
+            <a:schemeClr val="accent1"/>
+          </a:fillRef>
+          <a:effectRef idx="0">
+            <a:schemeClr val="accent1"/>
+          </a:effectRef>
+          <a:fontRef idx="minor">
+            <a:schemeClr val="tx1"/>
+          </a:fontRef>
+        </p:style>
+      </p:cxnSp>
       <p:sp>
         <p:nvSpPr>
-          <p:cNvPr id="391" name="Прямоугольник 390">
-            <a:extLst>
-              <a:ext uri="{FF2B5EF4-FFF2-40B4-BE49-F238E27FC236}">
-                <a16:creationId xmlns:a16="http://schemas.microsoft.com/office/drawing/2014/main" id="{F6324390-F8AE-4AB5-AD25-75C7A7634BC2}"/>
+          <p:cNvPr id="420" name="Прямоугольник 419">
+            <a:extLst>
+              <a:ext uri="{FF2B5EF4-FFF2-40B4-BE49-F238E27FC236}">
+                <a16:creationId xmlns:a16="http://schemas.microsoft.com/office/drawing/2014/main" id="{D1A6BCEA-858E-4D65-ACB7-0ADE35BB1A2A}"/>
               </a:ext>
             </a:extLst>
           </p:cNvPr>
@@ -19418,7 +19943,1180 @@
         </p:nvSpPr>
         <p:spPr>
           <a:xfrm>
-            <a:off x="5874952" y="10688572"/>
+            <a:off x="11210970" y="5856916"/>
+            <a:ext cx="926325" cy="540000"/>
+          </a:xfrm>
+          <a:prstGeom prst="rect">
+            <a:avLst/>
+          </a:prstGeom>
+          <a:solidFill>
+            <a:srgbClr val="7030A0"/>
+          </a:solidFill>
+          <a:ln w="19050"/>
+        </p:spPr>
+        <p:style>
+          <a:lnRef idx="2">
+            <a:schemeClr val="accent1"/>
+          </a:lnRef>
+          <a:fillRef idx="1">
+            <a:schemeClr val="lt1"/>
+          </a:fillRef>
+          <a:effectRef idx="0">
+            <a:schemeClr val="accent1"/>
+          </a:effectRef>
+          <a:fontRef idx="minor">
+            <a:schemeClr val="dk1"/>
+          </a:fontRef>
+        </p:style>
+        <p:txBody>
+          <a:bodyPr lIns="124733" tIns="62367" rIns="124733" bIns="62367" rtlCol="0" anchor="ctr"/>
+          <a:lstStyle/>
+          <a:p>
+            <a:pPr algn="ctr"/>
+            <a:r>
+              <a:rPr lang="ru-RU" sz="700" dirty="0"/>
+              <a:t>Разрешить митинги и профсоюзы</a:t>
+            </a:r>
+          </a:p>
+        </p:txBody>
+      </p:sp>
+      <p:cxnSp>
+        <p:nvCxnSpPr>
+          <p:cNvPr id="421" name="Соединительная линия уступом 620">
+            <a:extLst>
+              <a:ext uri="{FF2B5EF4-FFF2-40B4-BE49-F238E27FC236}">
+                <a16:creationId xmlns:a16="http://schemas.microsoft.com/office/drawing/2014/main" id="{04418FFC-EF67-4950-A1E9-BF3730CDF1A8}"/>
+              </a:ext>
+            </a:extLst>
+          </p:cNvPr>
+          <p:cNvCxnSpPr>
+            <a:cxnSpLocks/>
+            <a:stCxn id="336" idx="2"/>
+            <a:endCxn id="420" idx="0"/>
+          </p:cNvCxnSpPr>
+          <p:nvPr/>
+        </p:nvCxnSpPr>
+        <p:spPr>
+          <a:xfrm rot="16200000" flipH="1">
+            <a:off x="10948472" y="5131255"/>
+            <a:ext cx="271330" cy="1179992"/>
+          </a:xfrm>
+          <a:prstGeom prst="bentConnector3">
+            <a:avLst>
+              <a:gd name="adj1" fmla="val 50000"/>
+            </a:avLst>
+          </a:prstGeom>
+          <a:ln w="19050">
+            <a:tailEnd type="arrow"/>
+          </a:ln>
+        </p:spPr>
+        <p:style>
+          <a:lnRef idx="1">
+            <a:schemeClr val="accent1"/>
+          </a:lnRef>
+          <a:fillRef idx="0">
+            <a:schemeClr val="accent1"/>
+          </a:fillRef>
+          <a:effectRef idx="0">
+            <a:schemeClr val="accent1"/>
+          </a:effectRef>
+          <a:fontRef idx="minor">
+            <a:schemeClr val="tx1"/>
+          </a:fontRef>
+        </p:style>
+      </p:cxnSp>
+      <p:sp>
+        <p:nvSpPr>
+          <p:cNvPr id="422" name="Прямоугольник 421">
+            <a:extLst>
+              <a:ext uri="{FF2B5EF4-FFF2-40B4-BE49-F238E27FC236}">
+                <a16:creationId xmlns:a16="http://schemas.microsoft.com/office/drawing/2014/main" id="{0CDAB3F3-F1D4-45E2-808F-9C0405D4348C}"/>
+              </a:ext>
+            </a:extLst>
+          </p:cNvPr>
+          <p:cNvSpPr/>
+          <p:nvPr/>
+        </p:nvSpPr>
+        <p:spPr>
+          <a:xfrm>
+            <a:off x="11216385" y="7448856"/>
+            <a:ext cx="926325" cy="540000"/>
+          </a:xfrm>
+          <a:prstGeom prst="rect">
+            <a:avLst/>
+          </a:prstGeom>
+          <a:solidFill>
+            <a:srgbClr val="7030A0"/>
+          </a:solidFill>
+          <a:ln w="19050"/>
+        </p:spPr>
+        <p:style>
+          <a:lnRef idx="2">
+            <a:schemeClr val="accent1"/>
+          </a:lnRef>
+          <a:fillRef idx="1">
+            <a:schemeClr val="lt1"/>
+          </a:fillRef>
+          <a:effectRef idx="0">
+            <a:schemeClr val="accent1"/>
+          </a:effectRef>
+          <a:fontRef idx="minor">
+            <a:schemeClr val="dk1"/>
+          </a:fontRef>
+        </p:style>
+        <p:txBody>
+          <a:bodyPr lIns="124733" tIns="62367" rIns="124733" bIns="62367" rtlCol="0" anchor="ctr"/>
+          <a:lstStyle/>
+          <a:p>
+            <a:pPr algn="ctr"/>
+            <a:r>
+              <a:rPr lang="ru-RU" sz="700" dirty="0"/>
+              <a:t>Единоличная власть Мухаммеда </a:t>
+            </a:r>
+            <a:r>
+              <a:rPr lang="en-US" sz="700" dirty="0"/>
+              <a:t>V</a:t>
+            </a:r>
+            <a:endParaRPr lang="ru-RU" sz="700" dirty="0"/>
+          </a:p>
+        </p:txBody>
+      </p:sp>
+      <p:cxnSp>
+        <p:nvCxnSpPr>
+          <p:cNvPr id="423" name="Соединительная линия уступом 620">
+            <a:extLst>
+              <a:ext uri="{FF2B5EF4-FFF2-40B4-BE49-F238E27FC236}">
+                <a16:creationId xmlns:a16="http://schemas.microsoft.com/office/drawing/2014/main" id="{B2211544-6FD5-4685-9C14-221F7049609B}"/>
+              </a:ext>
+            </a:extLst>
+          </p:cNvPr>
+          <p:cNvCxnSpPr>
+            <a:cxnSpLocks/>
+            <a:stCxn id="420" idx="2"/>
+            <a:endCxn id="345" idx="0"/>
+          </p:cNvCxnSpPr>
+          <p:nvPr/>
+        </p:nvCxnSpPr>
+        <p:spPr>
+          <a:xfrm rot="16200000" flipH="1">
+            <a:off x="11547228" y="6523821"/>
+            <a:ext cx="255970" cy="2160"/>
+          </a:xfrm>
+          <a:prstGeom prst="bentConnector3">
+            <a:avLst>
+              <a:gd name="adj1" fmla="val 50000"/>
+            </a:avLst>
+          </a:prstGeom>
+          <a:ln w="19050">
+            <a:tailEnd type="arrow"/>
+          </a:ln>
+        </p:spPr>
+        <p:style>
+          <a:lnRef idx="1">
+            <a:schemeClr val="accent1"/>
+          </a:lnRef>
+          <a:fillRef idx="0">
+            <a:schemeClr val="accent1"/>
+          </a:fillRef>
+          <a:effectRef idx="0">
+            <a:schemeClr val="accent1"/>
+          </a:effectRef>
+          <a:fontRef idx="minor">
+            <a:schemeClr val="tx1"/>
+          </a:fontRef>
+        </p:style>
+      </p:cxnSp>
+      <p:cxnSp>
+        <p:nvCxnSpPr>
+          <p:cNvPr id="424" name="Соединительная линия уступом 620">
+            <a:extLst>
+              <a:ext uri="{FF2B5EF4-FFF2-40B4-BE49-F238E27FC236}">
+                <a16:creationId xmlns:a16="http://schemas.microsoft.com/office/drawing/2014/main" id="{43B70F96-3D36-4946-9DC4-867C38D732EE}"/>
+              </a:ext>
+            </a:extLst>
+          </p:cNvPr>
+          <p:cNvCxnSpPr>
+            <a:cxnSpLocks/>
+            <a:stCxn id="345" idx="2"/>
+            <a:endCxn id="422" idx="0"/>
+          </p:cNvCxnSpPr>
+          <p:nvPr/>
+        </p:nvCxnSpPr>
+        <p:spPr>
+          <a:xfrm rot="16200000" flipH="1">
+            <a:off x="11549935" y="7319243"/>
+            <a:ext cx="255970" cy="3255"/>
+          </a:xfrm>
+          <a:prstGeom prst="bentConnector3">
+            <a:avLst>
+              <a:gd name="adj1" fmla="val 50000"/>
+            </a:avLst>
+          </a:prstGeom>
+          <a:ln w="19050">
+            <a:tailEnd type="arrow"/>
+          </a:ln>
+        </p:spPr>
+        <p:style>
+          <a:lnRef idx="1">
+            <a:schemeClr val="accent1"/>
+          </a:lnRef>
+          <a:fillRef idx="0">
+            <a:schemeClr val="accent1"/>
+          </a:fillRef>
+          <a:effectRef idx="0">
+            <a:schemeClr val="accent1"/>
+          </a:effectRef>
+          <a:fontRef idx="minor">
+            <a:schemeClr val="tx1"/>
+          </a:fontRef>
+        </p:style>
+      </p:cxnSp>
+      <p:cxnSp>
+        <p:nvCxnSpPr>
+          <p:cNvPr id="326" name="Соединительная линия уступом 620">
+            <a:extLst>
+              <a:ext uri="{FF2B5EF4-FFF2-40B4-BE49-F238E27FC236}">
+                <a16:creationId xmlns:a16="http://schemas.microsoft.com/office/drawing/2014/main" id="{6E4BE841-D644-4755-A037-32E5E51165D7}"/>
+              </a:ext>
+            </a:extLst>
+          </p:cNvPr>
+          <p:cNvCxnSpPr>
+            <a:cxnSpLocks/>
+            <a:stCxn id="275" idx="2"/>
+            <a:endCxn id="316" idx="0"/>
+          </p:cNvCxnSpPr>
+          <p:nvPr/>
+        </p:nvCxnSpPr>
+        <p:spPr>
+          <a:xfrm rot="5400000">
+            <a:off x="8876520" y="4613595"/>
+            <a:ext cx="267392" cy="590295"/>
+          </a:xfrm>
+          <a:prstGeom prst="bentConnector3">
+            <a:avLst>
+              <a:gd name="adj1" fmla="val 50000"/>
+            </a:avLst>
+          </a:prstGeom>
+          <a:ln w="19050">
+            <a:tailEnd type="arrow"/>
+          </a:ln>
+        </p:spPr>
+        <p:style>
+          <a:lnRef idx="1">
+            <a:schemeClr val="accent1"/>
+          </a:lnRef>
+          <a:fillRef idx="0">
+            <a:schemeClr val="accent1"/>
+          </a:fillRef>
+          <a:effectRef idx="0">
+            <a:schemeClr val="accent1"/>
+          </a:effectRef>
+          <a:fontRef idx="minor">
+            <a:schemeClr val="tx1"/>
+          </a:fontRef>
+        </p:style>
+      </p:cxnSp>
+      <p:sp>
+        <p:nvSpPr>
+          <p:cNvPr id="335" name="Прямоугольник 334">
+            <a:extLst>
+              <a:ext uri="{FF2B5EF4-FFF2-40B4-BE49-F238E27FC236}">
+                <a16:creationId xmlns:a16="http://schemas.microsoft.com/office/drawing/2014/main" id="{7EFCE7AB-5044-431F-82FE-324856B0B798}"/>
+              </a:ext>
+            </a:extLst>
+          </p:cNvPr>
+          <p:cNvSpPr/>
+          <p:nvPr/>
+        </p:nvSpPr>
+        <p:spPr>
+          <a:xfrm>
+            <a:off x="8838913" y="8275251"/>
+            <a:ext cx="926325" cy="540000"/>
+          </a:xfrm>
+          <a:prstGeom prst="rect">
+            <a:avLst/>
+          </a:prstGeom>
+          <a:solidFill>
+            <a:schemeClr val="accent1">
+              <a:lumMod val="60000"/>
+              <a:lumOff val="40000"/>
+            </a:schemeClr>
+          </a:solidFill>
+          <a:ln w="19050"/>
+        </p:spPr>
+        <p:style>
+          <a:lnRef idx="2">
+            <a:schemeClr val="accent1"/>
+          </a:lnRef>
+          <a:fillRef idx="1">
+            <a:schemeClr val="lt1"/>
+          </a:fillRef>
+          <a:effectRef idx="0">
+            <a:schemeClr val="accent1"/>
+          </a:effectRef>
+          <a:fontRef idx="minor">
+            <a:schemeClr val="dk1"/>
+          </a:fontRef>
+        </p:style>
+        <p:txBody>
+          <a:bodyPr lIns="124733" tIns="62367" rIns="124733" bIns="62367" rtlCol="0" anchor="ctr"/>
+          <a:lstStyle/>
+          <a:p>
+            <a:pPr algn="ctr"/>
+            <a:r>
+              <a:rPr lang="ru-RU" sz="700" dirty="0"/>
+              <a:t>Прогрессивная социальная политика</a:t>
+            </a:r>
+          </a:p>
+          <a:p>
+            <a:pPr algn="ctr"/>
+            <a:r>
+              <a:rPr lang="ru-RU" sz="200" dirty="0"/>
+              <a:t>(прогрессивная социальная политика в отношении пожилых людей и безработных;)</a:t>
+            </a:r>
+            <a:endParaRPr lang="ru-RU" sz="700" dirty="0"/>
+          </a:p>
+        </p:txBody>
+      </p:sp>
+      <p:sp>
+        <p:nvSpPr>
+          <p:cNvPr id="338" name="Прямоугольник 337">
+            <a:extLst>
+              <a:ext uri="{FF2B5EF4-FFF2-40B4-BE49-F238E27FC236}">
+                <a16:creationId xmlns:a16="http://schemas.microsoft.com/office/drawing/2014/main" id="{08169D63-F220-4099-A6E8-311745F7353C}"/>
+              </a:ext>
+            </a:extLst>
+          </p:cNvPr>
+          <p:cNvSpPr/>
+          <p:nvPr/>
+        </p:nvSpPr>
+        <p:spPr>
+          <a:xfrm>
+            <a:off x="8837351" y="9084771"/>
+            <a:ext cx="926325" cy="540000"/>
+          </a:xfrm>
+          <a:prstGeom prst="rect">
+            <a:avLst/>
+          </a:prstGeom>
+          <a:solidFill>
+            <a:schemeClr val="accent1">
+              <a:lumMod val="60000"/>
+              <a:lumOff val="40000"/>
+            </a:schemeClr>
+          </a:solidFill>
+          <a:ln w="19050"/>
+        </p:spPr>
+        <p:style>
+          <a:lnRef idx="2">
+            <a:schemeClr val="accent1"/>
+          </a:lnRef>
+          <a:fillRef idx="1">
+            <a:schemeClr val="lt1"/>
+          </a:fillRef>
+          <a:effectRef idx="0">
+            <a:schemeClr val="accent1"/>
+          </a:effectRef>
+          <a:fontRef idx="minor">
+            <a:schemeClr val="dk1"/>
+          </a:fontRef>
+        </p:style>
+        <p:txBody>
+          <a:bodyPr lIns="124733" tIns="62367" rIns="124733" bIns="62367" rtlCol="0" anchor="ctr"/>
+          <a:lstStyle/>
+          <a:p>
+            <a:pPr algn="ctr"/>
+            <a:r>
+              <a:rPr lang="ru-RU" sz="700" dirty="0"/>
+              <a:t>Пенитенциарная реформа</a:t>
+            </a:r>
+          </a:p>
+        </p:txBody>
+      </p:sp>
+      <p:cxnSp>
+        <p:nvCxnSpPr>
+          <p:cNvPr id="340" name="Соединительная линия уступом 620">
+            <a:extLst>
+              <a:ext uri="{FF2B5EF4-FFF2-40B4-BE49-F238E27FC236}">
+                <a16:creationId xmlns:a16="http://schemas.microsoft.com/office/drawing/2014/main" id="{D90A5ACA-BE43-4B65-8EB3-8DC53BDEF6A1}"/>
+              </a:ext>
+            </a:extLst>
+          </p:cNvPr>
+          <p:cNvCxnSpPr>
+            <a:cxnSpLocks/>
+            <a:stCxn id="137" idx="2"/>
+            <a:endCxn id="134" idx="0"/>
+          </p:cNvCxnSpPr>
+          <p:nvPr/>
+        </p:nvCxnSpPr>
+        <p:spPr>
+          <a:xfrm rot="5400000">
+            <a:off x="41110481" y="33371706"/>
+            <a:ext cx="260709" cy="624840"/>
+          </a:xfrm>
+          <a:prstGeom prst="bentConnector3">
+            <a:avLst>
+              <a:gd name="adj1" fmla="val 50000"/>
+            </a:avLst>
+          </a:prstGeom>
+          <a:ln w="19050">
+            <a:tailEnd type="arrow"/>
+          </a:ln>
+        </p:spPr>
+        <p:style>
+          <a:lnRef idx="1">
+            <a:schemeClr val="accent1"/>
+          </a:lnRef>
+          <a:fillRef idx="0">
+            <a:schemeClr val="accent1"/>
+          </a:fillRef>
+          <a:effectRef idx="0">
+            <a:schemeClr val="accent1"/>
+          </a:effectRef>
+          <a:fontRef idx="minor">
+            <a:schemeClr val="tx1"/>
+          </a:fontRef>
+        </p:style>
+      </p:cxnSp>
+      <p:cxnSp>
+        <p:nvCxnSpPr>
+          <p:cNvPr id="342" name="Соединительная линия уступом 620">
+            <a:extLst>
+              <a:ext uri="{FF2B5EF4-FFF2-40B4-BE49-F238E27FC236}">
+                <a16:creationId xmlns:a16="http://schemas.microsoft.com/office/drawing/2014/main" id="{9E03EC62-C4DD-4CA8-87AA-E384052482AA}"/>
+              </a:ext>
+            </a:extLst>
+          </p:cNvPr>
+          <p:cNvCxnSpPr>
+            <a:cxnSpLocks/>
+            <a:stCxn id="136" idx="2"/>
+            <a:endCxn id="134" idx="0"/>
+          </p:cNvCxnSpPr>
+          <p:nvPr/>
+        </p:nvCxnSpPr>
+        <p:spPr>
+          <a:xfrm rot="16200000" flipH="1">
+            <a:off x="40489451" y="33375516"/>
+            <a:ext cx="260709" cy="617220"/>
+          </a:xfrm>
+          <a:prstGeom prst="bentConnector3">
+            <a:avLst>
+              <a:gd name="adj1" fmla="val 50000"/>
+            </a:avLst>
+          </a:prstGeom>
+          <a:ln w="19050">
+            <a:tailEnd type="arrow"/>
+          </a:ln>
+        </p:spPr>
+        <p:style>
+          <a:lnRef idx="1">
+            <a:schemeClr val="accent1"/>
+          </a:lnRef>
+          <a:fillRef idx="0">
+            <a:schemeClr val="accent1"/>
+          </a:fillRef>
+          <a:effectRef idx="0">
+            <a:schemeClr val="accent1"/>
+          </a:effectRef>
+          <a:fontRef idx="minor">
+            <a:schemeClr val="tx1"/>
+          </a:fontRef>
+        </p:style>
+      </p:cxnSp>
+      <p:sp>
+        <p:nvSpPr>
+          <p:cNvPr id="353" name="Прямоугольник 352">
+            <a:extLst>
+              <a:ext uri="{FF2B5EF4-FFF2-40B4-BE49-F238E27FC236}">
+                <a16:creationId xmlns:a16="http://schemas.microsoft.com/office/drawing/2014/main" id="{46489E18-82A4-4C13-B5E3-665C40DCBD81}"/>
+              </a:ext>
+            </a:extLst>
+          </p:cNvPr>
+          <p:cNvSpPr/>
+          <p:nvPr/>
+        </p:nvSpPr>
+        <p:spPr>
+          <a:xfrm>
+            <a:off x="9441519" y="9888283"/>
+            <a:ext cx="926325" cy="540000"/>
+          </a:xfrm>
+          <a:prstGeom prst="rect">
+            <a:avLst/>
+          </a:prstGeom>
+          <a:solidFill>
+            <a:schemeClr val="accent1">
+              <a:lumMod val="60000"/>
+              <a:lumOff val="40000"/>
+            </a:schemeClr>
+          </a:solidFill>
+          <a:ln w="19050"/>
+        </p:spPr>
+        <p:style>
+          <a:lnRef idx="2">
+            <a:schemeClr val="accent1"/>
+          </a:lnRef>
+          <a:fillRef idx="1">
+            <a:schemeClr val="lt1"/>
+          </a:fillRef>
+          <a:effectRef idx="0">
+            <a:schemeClr val="accent1"/>
+          </a:effectRef>
+          <a:fontRef idx="minor">
+            <a:schemeClr val="dk1"/>
+          </a:fontRef>
+        </p:style>
+        <p:txBody>
+          <a:bodyPr lIns="124733" tIns="62367" rIns="124733" bIns="62367" rtlCol="0" anchor="ctr"/>
+          <a:lstStyle/>
+          <a:p>
+            <a:pPr algn="ctr"/>
+            <a:r>
+              <a:rPr lang="ru-RU" sz="700" dirty="0"/>
+              <a:t>Земельная реформа</a:t>
+            </a:r>
+            <a:br>
+              <a:rPr lang="ru-RU" sz="700" dirty="0"/>
+            </a:br>
+            <a:r>
+              <a:rPr lang="ru-RU" sz="200" dirty="0"/>
+              <a:t>(и, возможно, наиболее радикальный шаг — призыв к земельной реформе и прекращению феодальных связей между поселенцами и местными земледельцами.)</a:t>
+            </a:r>
+            <a:endParaRPr lang="ru-RU" sz="700" dirty="0"/>
+          </a:p>
+        </p:txBody>
+      </p:sp>
+      <p:sp>
+        <p:nvSpPr>
+          <p:cNvPr id="358" name="Прямоугольник 357">
+            <a:extLst>
+              <a:ext uri="{FF2B5EF4-FFF2-40B4-BE49-F238E27FC236}">
+                <a16:creationId xmlns:a16="http://schemas.microsoft.com/office/drawing/2014/main" id="{FD86CD52-56C1-4503-A47B-6517D32DD7A3}"/>
+              </a:ext>
+            </a:extLst>
+          </p:cNvPr>
+          <p:cNvSpPr/>
+          <p:nvPr/>
+        </p:nvSpPr>
+        <p:spPr>
+          <a:xfrm>
+            <a:off x="41090092" y="34620878"/>
+            <a:ext cx="926325" cy="540000"/>
+          </a:xfrm>
+          <a:prstGeom prst="rect">
+            <a:avLst/>
+          </a:prstGeom>
+          <a:solidFill>
+            <a:schemeClr val="bg1"/>
+          </a:solidFill>
+          <a:ln w="19050"/>
+        </p:spPr>
+        <p:style>
+          <a:lnRef idx="2">
+            <a:schemeClr val="accent1"/>
+          </a:lnRef>
+          <a:fillRef idx="1">
+            <a:schemeClr val="lt1"/>
+          </a:fillRef>
+          <a:effectRef idx="0">
+            <a:schemeClr val="accent1"/>
+          </a:effectRef>
+          <a:fontRef idx="minor">
+            <a:schemeClr val="dk1"/>
+          </a:fontRef>
+        </p:style>
+        <p:txBody>
+          <a:bodyPr lIns="124733" tIns="62367" rIns="124733" bIns="62367" rtlCol="0" anchor="ctr"/>
+          <a:lstStyle/>
+          <a:p>
+            <a:pPr algn="ctr"/>
+            <a:r>
+              <a:rPr lang="ru-RU" sz="700" dirty="0"/>
+              <a:t>Арабизация страны </a:t>
+            </a:r>
+            <a:r>
+              <a:rPr lang="ru-RU" sz="200" dirty="0"/>
+              <a:t>(В качестве предзнаменования будущего План требовал повсеместного использования арабского языка в общественном пространстве, включая железную дорогу, где «все билеты и квитанции, а также вывески в вагонах и на станциях должны быть напечатаны на арабском и французском языках».)</a:t>
+            </a:r>
+            <a:endParaRPr lang="ru-RU" sz="700" dirty="0"/>
+          </a:p>
+        </p:txBody>
+      </p:sp>
+      <p:cxnSp>
+        <p:nvCxnSpPr>
+          <p:cNvPr id="359" name="Соединительная линия уступом 620">
+            <a:extLst>
+              <a:ext uri="{FF2B5EF4-FFF2-40B4-BE49-F238E27FC236}">
+                <a16:creationId xmlns:a16="http://schemas.microsoft.com/office/drawing/2014/main" id="{16F75AB0-644E-41C4-AFB9-00A7652E2F4D}"/>
+              </a:ext>
+            </a:extLst>
+          </p:cNvPr>
+          <p:cNvCxnSpPr>
+            <a:cxnSpLocks/>
+            <a:stCxn id="134" idx="2"/>
+            <a:endCxn id="358" idx="0"/>
+          </p:cNvCxnSpPr>
+          <p:nvPr/>
+        </p:nvCxnSpPr>
+        <p:spPr>
+          <a:xfrm rot="16200000" flipH="1">
+            <a:off x="41107637" y="34175259"/>
+            <a:ext cx="266397" cy="624840"/>
+          </a:xfrm>
+          <a:prstGeom prst="bentConnector3">
+            <a:avLst>
+              <a:gd name="adj1" fmla="val 50000"/>
+            </a:avLst>
+          </a:prstGeom>
+          <a:ln w="19050">
+            <a:tailEnd type="arrow"/>
+          </a:ln>
+        </p:spPr>
+        <p:style>
+          <a:lnRef idx="1">
+            <a:schemeClr val="accent1"/>
+          </a:lnRef>
+          <a:fillRef idx="0">
+            <a:schemeClr val="accent1"/>
+          </a:fillRef>
+          <a:effectRef idx="0">
+            <a:schemeClr val="accent1"/>
+          </a:effectRef>
+          <a:fontRef idx="minor">
+            <a:schemeClr val="tx1"/>
+          </a:fontRef>
+        </p:style>
+      </p:cxnSp>
+      <p:cxnSp>
+        <p:nvCxnSpPr>
+          <p:cNvPr id="381" name="Соединительная линия уступом 620">
+            <a:extLst>
+              <a:ext uri="{FF2B5EF4-FFF2-40B4-BE49-F238E27FC236}">
+                <a16:creationId xmlns:a16="http://schemas.microsoft.com/office/drawing/2014/main" id="{C3D6C0F7-DD06-4EB7-9199-E1E9D14A3A3D}"/>
+              </a:ext>
+            </a:extLst>
+          </p:cNvPr>
+          <p:cNvCxnSpPr>
+            <a:cxnSpLocks/>
+            <a:stCxn id="394" idx="2"/>
+            <a:endCxn id="335" idx="0"/>
+          </p:cNvCxnSpPr>
+          <p:nvPr/>
+        </p:nvCxnSpPr>
+        <p:spPr>
+          <a:xfrm rot="5400000">
+            <a:off x="9163854" y="8134165"/>
+            <a:ext cx="279309" cy="2863"/>
+          </a:xfrm>
+          <a:prstGeom prst="bentConnector3">
+            <a:avLst>
+              <a:gd name="adj1" fmla="val 50000"/>
+            </a:avLst>
+          </a:prstGeom>
+          <a:ln w="19050">
+            <a:tailEnd type="arrow"/>
+          </a:ln>
+        </p:spPr>
+        <p:style>
+          <a:lnRef idx="1">
+            <a:schemeClr val="accent1"/>
+          </a:lnRef>
+          <a:fillRef idx="0">
+            <a:schemeClr val="accent1"/>
+          </a:fillRef>
+          <a:effectRef idx="0">
+            <a:schemeClr val="accent1"/>
+          </a:effectRef>
+          <a:fontRef idx="minor">
+            <a:schemeClr val="tx1"/>
+          </a:fontRef>
+        </p:style>
+      </p:cxnSp>
+      <p:cxnSp>
+        <p:nvCxnSpPr>
+          <p:cNvPr id="384" name="Соединительная линия уступом 620">
+            <a:extLst>
+              <a:ext uri="{FF2B5EF4-FFF2-40B4-BE49-F238E27FC236}">
+                <a16:creationId xmlns:a16="http://schemas.microsoft.com/office/drawing/2014/main" id="{583F77CA-19B7-4F81-B14D-F75296ED9C71}"/>
+              </a:ext>
+            </a:extLst>
+          </p:cNvPr>
+          <p:cNvCxnSpPr>
+            <a:cxnSpLocks/>
+            <a:stCxn id="335" idx="2"/>
+            <a:endCxn id="338" idx="0"/>
+          </p:cNvCxnSpPr>
+          <p:nvPr/>
+        </p:nvCxnSpPr>
+        <p:spPr>
+          <a:xfrm rot="5400000">
+            <a:off x="9166535" y="8949230"/>
+            <a:ext cx="269520" cy="1562"/>
+          </a:xfrm>
+          <a:prstGeom prst="bentConnector3">
+            <a:avLst>
+              <a:gd name="adj1" fmla="val 50000"/>
+            </a:avLst>
+          </a:prstGeom>
+          <a:ln w="19050">
+            <a:tailEnd type="arrow"/>
+          </a:ln>
+        </p:spPr>
+        <p:style>
+          <a:lnRef idx="1">
+            <a:schemeClr val="accent1"/>
+          </a:lnRef>
+          <a:fillRef idx="0">
+            <a:schemeClr val="accent1"/>
+          </a:fillRef>
+          <a:effectRef idx="0">
+            <a:schemeClr val="accent1"/>
+          </a:effectRef>
+          <a:fontRef idx="minor">
+            <a:schemeClr val="tx1"/>
+          </a:fontRef>
+        </p:style>
+      </p:cxnSp>
+      <p:sp>
+        <p:nvSpPr>
+          <p:cNvPr id="410" name="Прямоугольник 409">
+            <a:extLst>
+              <a:ext uri="{FF2B5EF4-FFF2-40B4-BE49-F238E27FC236}">
+                <a16:creationId xmlns:a16="http://schemas.microsoft.com/office/drawing/2014/main" id="{689FCD2C-74D8-4FA5-97DB-81ADE08D74B0}"/>
+              </a:ext>
+            </a:extLst>
+          </p:cNvPr>
+          <p:cNvSpPr/>
+          <p:nvPr/>
+        </p:nvSpPr>
+        <p:spPr>
+          <a:xfrm>
+            <a:off x="45889787" y="22202848"/>
+            <a:ext cx="926325" cy="540000"/>
+          </a:xfrm>
+          <a:prstGeom prst="rect">
+            <a:avLst/>
+          </a:prstGeom>
+          <a:solidFill>
+            <a:schemeClr val="accent2">
+              <a:lumMod val="75000"/>
+            </a:schemeClr>
+          </a:solidFill>
+          <a:ln w="19050"/>
+        </p:spPr>
+        <p:style>
+          <a:lnRef idx="2">
+            <a:schemeClr val="accent1"/>
+          </a:lnRef>
+          <a:fillRef idx="1">
+            <a:schemeClr val="lt1"/>
+          </a:fillRef>
+          <a:effectRef idx="0">
+            <a:schemeClr val="accent1"/>
+          </a:effectRef>
+          <a:fontRef idx="minor">
+            <a:schemeClr val="dk1"/>
+          </a:fontRef>
+        </p:style>
+        <p:txBody>
+          <a:bodyPr lIns="124733" tIns="62367" rIns="124733" bIns="62367" rtlCol="0" anchor="ctr"/>
+          <a:lstStyle/>
+          <a:p>
+            <a:pPr algn="ctr"/>
+            <a:r>
+              <a:rPr lang="ru-RU" sz="700" dirty="0"/>
+              <a:t>Переворот Торреса</a:t>
+            </a:r>
+          </a:p>
+        </p:txBody>
+      </p:sp>
+      <p:sp>
+        <p:nvSpPr>
+          <p:cNvPr id="415" name="Прямоугольник 414">
+            <a:extLst>
+              <a:ext uri="{FF2B5EF4-FFF2-40B4-BE49-F238E27FC236}">
+                <a16:creationId xmlns:a16="http://schemas.microsoft.com/office/drawing/2014/main" id="{390C7082-3773-4977-8DB9-3D7B82584170}"/>
+              </a:ext>
+            </a:extLst>
+          </p:cNvPr>
+          <p:cNvSpPr/>
+          <p:nvPr/>
+        </p:nvSpPr>
+        <p:spPr>
+          <a:xfrm>
+            <a:off x="44644589" y="22205818"/>
+            <a:ext cx="926325" cy="540000"/>
+          </a:xfrm>
+          <a:prstGeom prst="rect">
+            <a:avLst/>
+          </a:prstGeom>
+          <a:solidFill>
+            <a:schemeClr val="bg1"/>
+          </a:solidFill>
+          <a:ln w="19050"/>
+        </p:spPr>
+        <p:style>
+          <a:lnRef idx="2">
+            <a:schemeClr val="accent1"/>
+          </a:lnRef>
+          <a:fillRef idx="1">
+            <a:schemeClr val="lt1"/>
+          </a:fillRef>
+          <a:effectRef idx="0">
+            <a:schemeClr val="accent1"/>
+          </a:effectRef>
+          <a:fontRef idx="minor">
+            <a:schemeClr val="dk1"/>
+          </a:fontRef>
+        </p:style>
+        <p:txBody>
+          <a:bodyPr lIns="124733" tIns="62367" rIns="124733" bIns="62367" rtlCol="0" anchor="ctr"/>
+          <a:lstStyle/>
+          <a:p>
+            <a:pPr algn="ctr"/>
+            <a:r>
+              <a:rPr lang="ru-RU" sz="700" dirty="0"/>
+              <a:t>Заручиться поддержкой </a:t>
+            </a:r>
+            <a:r>
+              <a:rPr lang="ru-RU" sz="700" dirty="0" err="1"/>
+              <a:t>Фасси</a:t>
+            </a:r>
+            <a:r>
+              <a:rPr lang="ru-RU" sz="700" dirty="0"/>
+              <a:t> и потомками Аль-Андалусской знати</a:t>
+            </a:r>
+          </a:p>
+        </p:txBody>
+      </p:sp>
+      <p:cxnSp>
+        <p:nvCxnSpPr>
+          <p:cNvPr id="425" name="Соединительная линия уступом 620">
+            <a:extLst>
+              <a:ext uri="{FF2B5EF4-FFF2-40B4-BE49-F238E27FC236}">
+                <a16:creationId xmlns:a16="http://schemas.microsoft.com/office/drawing/2014/main" id="{1A6E50F0-61C8-4AFD-A6D6-B74CB66D7EED}"/>
+              </a:ext>
+            </a:extLst>
+          </p:cNvPr>
+          <p:cNvCxnSpPr>
+            <a:cxnSpLocks/>
+            <a:stCxn id="69" idx="2"/>
+            <a:endCxn id="415" idx="0"/>
+          </p:cNvCxnSpPr>
+          <p:nvPr/>
+        </p:nvCxnSpPr>
+        <p:spPr>
+          <a:xfrm rot="5400000">
+            <a:off x="45589153" y="21443518"/>
+            <a:ext cx="280899" cy="1243700"/>
+          </a:xfrm>
+          <a:prstGeom prst="bentConnector3">
+            <a:avLst>
+              <a:gd name="adj1" fmla="val 50000"/>
+            </a:avLst>
+          </a:prstGeom>
+          <a:ln w="19050">
+            <a:tailEnd type="arrow"/>
+          </a:ln>
+        </p:spPr>
+        <p:style>
+          <a:lnRef idx="1">
+            <a:schemeClr val="accent1"/>
+          </a:lnRef>
+          <a:fillRef idx="0">
+            <a:schemeClr val="accent1"/>
+          </a:fillRef>
+          <a:effectRef idx="0">
+            <a:schemeClr val="accent1"/>
+          </a:effectRef>
+          <a:fontRef idx="minor">
+            <a:schemeClr val="tx1"/>
+          </a:fontRef>
+        </p:style>
+      </p:cxnSp>
+      <p:cxnSp>
+        <p:nvCxnSpPr>
+          <p:cNvPr id="426" name="Соединительная линия уступом 620">
+            <a:extLst>
+              <a:ext uri="{FF2B5EF4-FFF2-40B4-BE49-F238E27FC236}">
+                <a16:creationId xmlns:a16="http://schemas.microsoft.com/office/drawing/2014/main" id="{77E7A6AB-9FCE-4B7E-BFF2-ABD83A544DF0}"/>
+              </a:ext>
+            </a:extLst>
+          </p:cNvPr>
+          <p:cNvCxnSpPr>
+            <a:cxnSpLocks/>
+            <a:stCxn id="69" idx="2"/>
+            <a:endCxn id="410" idx="0"/>
+          </p:cNvCxnSpPr>
+          <p:nvPr/>
+        </p:nvCxnSpPr>
+        <p:spPr>
+          <a:xfrm rot="16200000" flipH="1">
+            <a:off x="46213237" y="22063134"/>
+            <a:ext cx="277929" cy="1498"/>
+          </a:xfrm>
+          <a:prstGeom prst="bentConnector3">
+            <a:avLst>
+              <a:gd name="adj1" fmla="val 50000"/>
+            </a:avLst>
+          </a:prstGeom>
+          <a:ln w="19050">
+            <a:tailEnd type="arrow"/>
+          </a:ln>
+        </p:spPr>
+        <p:style>
+          <a:lnRef idx="1">
+            <a:schemeClr val="accent1"/>
+          </a:lnRef>
+          <a:fillRef idx="0">
+            <a:schemeClr val="accent1"/>
+          </a:fillRef>
+          <a:effectRef idx="0">
+            <a:schemeClr val="accent1"/>
+          </a:effectRef>
+          <a:fontRef idx="minor">
+            <a:schemeClr val="tx1"/>
+          </a:fontRef>
+        </p:style>
+      </p:cxnSp>
+      <p:cxnSp>
+        <p:nvCxnSpPr>
+          <p:cNvPr id="428" name="Соединительная линия уступом 620">
+            <a:extLst>
+              <a:ext uri="{FF2B5EF4-FFF2-40B4-BE49-F238E27FC236}">
+                <a16:creationId xmlns:a16="http://schemas.microsoft.com/office/drawing/2014/main" id="{9C6ECDC0-C4A4-41DB-A001-F0751FF81343}"/>
+              </a:ext>
+            </a:extLst>
+          </p:cNvPr>
+          <p:cNvCxnSpPr>
+            <a:cxnSpLocks/>
+            <a:stCxn id="415" idx="2"/>
+            <a:endCxn id="388" idx="0"/>
+          </p:cNvCxnSpPr>
+          <p:nvPr/>
+        </p:nvCxnSpPr>
+        <p:spPr>
+          <a:xfrm rot="16200000" flipH="1">
+            <a:off x="44476475" y="23377095"/>
+            <a:ext cx="1908495" cy="645940"/>
+          </a:xfrm>
+          <a:prstGeom prst="bentConnector3">
+            <a:avLst>
+              <a:gd name="adj1" fmla="val 7278"/>
+            </a:avLst>
+          </a:prstGeom>
+          <a:ln w="19050">
+            <a:tailEnd type="arrow"/>
+          </a:ln>
+        </p:spPr>
+        <p:style>
+          <a:lnRef idx="1">
+            <a:schemeClr val="accent1"/>
+          </a:lnRef>
+          <a:fillRef idx="0">
+            <a:schemeClr val="accent1"/>
+          </a:fillRef>
+          <a:effectRef idx="0">
+            <a:schemeClr val="accent1"/>
+          </a:effectRef>
+          <a:fontRef idx="minor">
+            <a:schemeClr val="tx1"/>
+          </a:fontRef>
+        </p:style>
+      </p:cxnSp>
+      <p:cxnSp>
+        <p:nvCxnSpPr>
+          <p:cNvPr id="429" name="Соединительная линия уступом 620">
+            <a:extLst>
+              <a:ext uri="{FF2B5EF4-FFF2-40B4-BE49-F238E27FC236}">
+                <a16:creationId xmlns:a16="http://schemas.microsoft.com/office/drawing/2014/main" id="{B2E45BDC-02B0-4EC0-A935-4E6F3506B92D}"/>
+              </a:ext>
+            </a:extLst>
+          </p:cNvPr>
+          <p:cNvCxnSpPr>
+            <a:cxnSpLocks/>
+            <a:stCxn id="410" idx="2"/>
+            <a:endCxn id="438" idx="0"/>
+          </p:cNvCxnSpPr>
+          <p:nvPr/>
+        </p:nvCxnSpPr>
+        <p:spPr>
+          <a:xfrm rot="16200000" flipH="1">
+            <a:off x="46836356" y="22259442"/>
+            <a:ext cx="277493" cy="1244304"/>
+          </a:xfrm>
+          <a:prstGeom prst="bentConnector3">
+            <a:avLst>
+              <a:gd name="adj1" fmla="val 50000"/>
+            </a:avLst>
+          </a:prstGeom>
+          <a:ln w="19050">
+            <a:tailEnd type="arrow"/>
+          </a:ln>
+        </p:spPr>
+        <p:style>
+          <a:lnRef idx="1">
+            <a:schemeClr val="accent1"/>
+          </a:lnRef>
+          <a:fillRef idx="0">
+            <a:schemeClr val="accent1"/>
+          </a:fillRef>
+          <a:effectRef idx="0">
+            <a:schemeClr val="accent1"/>
+          </a:effectRef>
+          <a:fontRef idx="minor">
+            <a:schemeClr val="tx1"/>
+          </a:fontRef>
+        </p:style>
+      </p:cxnSp>
+      <p:cxnSp>
+        <p:nvCxnSpPr>
+          <p:cNvPr id="430" name="Соединительная линия уступом 620">
+            <a:extLst>
+              <a:ext uri="{FF2B5EF4-FFF2-40B4-BE49-F238E27FC236}">
+                <a16:creationId xmlns:a16="http://schemas.microsoft.com/office/drawing/2014/main" id="{A388DD1F-4756-4F8F-9216-122006CB833A}"/>
+              </a:ext>
+            </a:extLst>
+          </p:cNvPr>
+          <p:cNvCxnSpPr>
+            <a:cxnSpLocks/>
+            <a:stCxn id="410" idx="2"/>
+            <a:endCxn id="247" idx="0"/>
+          </p:cNvCxnSpPr>
+          <p:nvPr/>
+        </p:nvCxnSpPr>
+        <p:spPr>
+          <a:xfrm rot="5400000">
+            <a:off x="46215404" y="22878106"/>
+            <a:ext cx="272804" cy="2288"/>
+          </a:xfrm>
+          <a:prstGeom prst="bentConnector3">
+            <a:avLst>
+              <a:gd name="adj1" fmla="val 50000"/>
+            </a:avLst>
+          </a:prstGeom>
+          <a:ln w="19050">
+            <a:tailEnd type="arrow"/>
+          </a:ln>
+        </p:spPr>
+        <p:style>
+          <a:lnRef idx="1">
+            <a:schemeClr val="accent1"/>
+          </a:lnRef>
+          <a:fillRef idx="0">
+            <a:schemeClr val="accent1"/>
+          </a:fillRef>
+          <a:effectRef idx="0">
+            <a:schemeClr val="accent1"/>
+          </a:effectRef>
+          <a:fontRef idx="minor">
+            <a:schemeClr val="tx1"/>
+          </a:fontRef>
+        </p:style>
+      </p:cxnSp>
+      <p:cxnSp>
+        <p:nvCxnSpPr>
+          <p:cNvPr id="431" name="Соединительная линия уступом 620">
+            <a:extLst>
+              <a:ext uri="{FF2B5EF4-FFF2-40B4-BE49-F238E27FC236}">
+                <a16:creationId xmlns:a16="http://schemas.microsoft.com/office/drawing/2014/main" id="{467A3C7A-10BB-4FE6-8683-12B1DB01A00A}"/>
+              </a:ext>
+            </a:extLst>
+          </p:cNvPr>
+          <p:cNvCxnSpPr>
+            <a:cxnSpLocks/>
+            <a:stCxn id="247" idx="2"/>
+            <a:endCxn id="244" idx="0"/>
+          </p:cNvCxnSpPr>
+          <p:nvPr/>
+        </p:nvCxnSpPr>
+        <p:spPr>
+          <a:xfrm rot="5400000">
+            <a:off x="46215745" y="23690569"/>
+            <a:ext cx="269834" cy="1"/>
+          </a:xfrm>
+          <a:prstGeom prst="bentConnector3">
+            <a:avLst>
+              <a:gd name="adj1" fmla="val 50000"/>
+            </a:avLst>
+          </a:prstGeom>
+          <a:ln w="19050">
+            <a:tailEnd type="arrow"/>
+          </a:ln>
+        </p:spPr>
+        <p:style>
+          <a:lnRef idx="1">
+            <a:schemeClr val="accent1"/>
+          </a:lnRef>
+          <a:fillRef idx="0">
+            <a:schemeClr val="accent1"/>
+          </a:fillRef>
+          <a:effectRef idx="0">
+            <a:schemeClr val="accent1"/>
+          </a:effectRef>
+          <a:fontRef idx="minor">
+            <a:schemeClr val="tx1"/>
+          </a:fontRef>
+        </p:style>
+      </p:cxnSp>
+      <p:cxnSp>
+        <p:nvCxnSpPr>
+          <p:cNvPr id="432" name="Соединительная линия уступом 620">
+            <a:extLst>
+              <a:ext uri="{FF2B5EF4-FFF2-40B4-BE49-F238E27FC236}">
+                <a16:creationId xmlns:a16="http://schemas.microsoft.com/office/drawing/2014/main" id="{2425C51C-549D-421C-BF11-B0F2EB50F05A}"/>
+              </a:ext>
+            </a:extLst>
+          </p:cNvPr>
+          <p:cNvCxnSpPr>
+            <a:cxnSpLocks/>
+            <a:stCxn id="244" idx="2"/>
+            <a:endCxn id="388" idx="0"/>
+          </p:cNvCxnSpPr>
+          <p:nvPr/>
+        </p:nvCxnSpPr>
+        <p:spPr>
+          <a:xfrm rot="5400000">
+            <a:off x="45907764" y="24211415"/>
+            <a:ext cx="288827" cy="596969"/>
+          </a:xfrm>
+          <a:prstGeom prst="bentConnector3">
+            <a:avLst>
+              <a:gd name="adj1" fmla="val 50000"/>
+            </a:avLst>
+          </a:prstGeom>
+          <a:ln w="19050">
+            <a:tailEnd type="arrow"/>
+          </a:ln>
+        </p:spPr>
+        <p:style>
+          <a:lnRef idx="1">
+            <a:schemeClr val="accent1"/>
+          </a:lnRef>
+          <a:fillRef idx="0">
+            <a:schemeClr val="accent1"/>
+          </a:fillRef>
+          <a:effectRef idx="0">
+            <a:schemeClr val="accent1"/>
+          </a:effectRef>
+          <a:fontRef idx="minor">
+            <a:schemeClr val="tx1"/>
+          </a:fontRef>
+        </p:style>
+      </p:cxnSp>
+      <p:sp>
+        <p:nvSpPr>
+          <p:cNvPr id="435" name="Прямоугольник 434">
+            <a:extLst>
+              <a:ext uri="{FF2B5EF4-FFF2-40B4-BE49-F238E27FC236}">
+                <a16:creationId xmlns:a16="http://schemas.microsoft.com/office/drawing/2014/main" id="{9053197E-3894-45BF-B5ED-B88D53E365F5}"/>
+              </a:ext>
+            </a:extLst>
+          </p:cNvPr>
+          <p:cNvSpPr/>
+          <p:nvPr/>
+        </p:nvSpPr>
+        <p:spPr>
+          <a:xfrm>
+            <a:off x="5868093" y="9888283"/>
             <a:ext cx="926325" cy="540000"/>
           </a:xfrm>
           <a:prstGeom prst="rect">
@@ -19462,31 +21160,1005 @@
             <a:pPr algn="ctr"/>
             <a:r>
               <a:rPr lang="ru-RU" sz="700" dirty="0"/>
-              <a:t>Земли Испании</a:t>
-            </a:r>
+              <a:t>Поддержать антиколониальные позиции в арабском мире</a:t>
+            </a:r>
+          </a:p>
+        </p:txBody>
+      </p:sp>
+      <p:sp>
+        <p:nvSpPr>
+          <p:cNvPr id="437" name="Прямоугольник 436">
+            <a:extLst>
+              <a:ext uri="{FF2B5EF4-FFF2-40B4-BE49-F238E27FC236}">
+                <a16:creationId xmlns:a16="http://schemas.microsoft.com/office/drawing/2014/main" id="{6739033B-01BE-4768-81A4-8CA2BD9F8CE9}"/>
+              </a:ext>
+            </a:extLst>
+          </p:cNvPr>
+          <p:cNvSpPr/>
+          <p:nvPr/>
+        </p:nvSpPr>
+        <p:spPr>
+          <a:xfrm>
+            <a:off x="44641509" y="23026398"/>
+            <a:ext cx="926325" cy="540000"/>
+          </a:xfrm>
+          <a:prstGeom prst="rect">
+            <a:avLst/>
+          </a:prstGeom>
+          <a:solidFill>
+            <a:schemeClr val="accent2">
+              <a:lumMod val="75000"/>
+            </a:schemeClr>
+          </a:solidFill>
+          <a:ln w="19050"/>
+        </p:spPr>
+        <p:style>
+          <a:lnRef idx="2">
+            <a:schemeClr val="accent1"/>
+          </a:lnRef>
+          <a:fillRef idx="1">
+            <a:schemeClr val="lt1"/>
+          </a:fillRef>
+          <a:effectRef idx="0">
+            <a:schemeClr val="accent1"/>
+          </a:effectRef>
+          <a:fontRef idx="minor">
+            <a:schemeClr val="dk1"/>
+          </a:fontRef>
+        </p:style>
+        <p:txBody>
+          <a:bodyPr lIns="124733" tIns="62367" rIns="124733" bIns="62367" rtlCol="0" anchor="ctr"/>
+          <a:lstStyle/>
+          <a:p>
+            <a:pPr algn="ctr"/>
+            <a:r>
+              <a:rPr lang="ru-RU" sz="700" dirty="0"/>
+              <a:t>Союз с Германией</a:t>
+            </a:r>
+            <a:endParaRPr lang="ru-RU" sz="200" dirty="0"/>
+          </a:p>
+        </p:txBody>
+      </p:sp>
+      <p:sp>
+        <p:nvSpPr>
+          <p:cNvPr id="438" name="Прямоугольник 437">
+            <a:extLst>
+              <a:ext uri="{FF2B5EF4-FFF2-40B4-BE49-F238E27FC236}">
+                <a16:creationId xmlns:a16="http://schemas.microsoft.com/office/drawing/2014/main" id="{6E327805-D803-4557-BD42-AA00A5D18919}"/>
+              </a:ext>
+            </a:extLst>
+          </p:cNvPr>
+          <p:cNvSpPr/>
+          <p:nvPr/>
+        </p:nvSpPr>
+        <p:spPr>
+          <a:xfrm>
+            <a:off x="47134091" y="23020341"/>
+            <a:ext cx="926325" cy="540000"/>
+          </a:xfrm>
+          <a:prstGeom prst="rect">
+            <a:avLst/>
+          </a:prstGeom>
+          <a:solidFill>
+            <a:schemeClr val="accent2">
+              <a:lumMod val="75000"/>
+            </a:schemeClr>
+          </a:solidFill>
+          <a:ln w="19050"/>
+        </p:spPr>
+        <p:style>
+          <a:lnRef idx="2">
+            <a:schemeClr val="accent1"/>
+          </a:lnRef>
+          <a:fillRef idx="1">
+            <a:schemeClr val="lt1"/>
+          </a:fillRef>
+          <a:effectRef idx="0">
+            <a:schemeClr val="accent1"/>
+          </a:effectRef>
+          <a:fontRef idx="minor">
+            <a:schemeClr val="dk1"/>
+          </a:fontRef>
+        </p:style>
+        <p:txBody>
+          <a:bodyPr lIns="124733" tIns="62367" rIns="124733" bIns="62367" rtlCol="0" anchor="ctr"/>
+          <a:lstStyle/>
+          <a:p>
+            <a:pPr algn="ctr"/>
+            <a:r>
+              <a:rPr lang="ru-RU" sz="700" dirty="0"/>
+              <a:t>Заручиться поддержкой муфтия Иерусалима</a:t>
+            </a:r>
+            <a:br>
+              <a:rPr lang="ru-RU" sz="700" dirty="0"/>
+            </a:br>
+            <a:r>
+              <a:rPr lang="ru-RU" sz="200" dirty="0"/>
+              <a:t>(Контакты между националистами на севере и личностями, вовлеченными в орбиту довоенного Берлина, такими как муфтий Иерусалима Хадж Амин аль-</a:t>
+            </a:r>
+            <a:r>
+              <a:rPr lang="ru-RU" sz="200" dirty="0" err="1"/>
+              <a:t>Хусейни</a:t>
+            </a:r>
+            <a:r>
+              <a:rPr lang="ru-RU" sz="200" dirty="0"/>
+              <a:t>, </a:t>
+            </a:r>
+            <a:r>
+              <a:rPr lang="ru-RU" sz="200" dirty="0" err="1"/>
+              <a:t>Шакиб</a:t>
+            </a:r>
+            <a:r>
+              <a:rPr lang="ru-RU" sz="200" dirty="0"/>
+              <a:t> Арслан и Рашид, также имели место.¬)</a:t>
+            </a:r>
+            <a:endParaRPr lang="ru-RU" sz="700" dirty="0"/>
+          </a:p>
+        </p:txBody>
+      </p:sp>
+      <p:sp>
+        <p:nvSpPr>
+          <p:cNvPr id="439" name="Прямоугольник 438">
+            <a:extLst>
+              <a:ext uri="{FF2B5EF4-FFF2-40B4-BE49-F238E27FC236}">
+                <a16:creationId xmlns:a16="http://schemas.microsoft.com/office/drawing/2014/main" id="{AFD50110-D9C3-4DE1-805E-DD1F4D0E74D7}"/>
+              </a:ext>
+            </a:extLst>
+          </p:cNvPr>
+          <p:cNvSpPr/>
+          <p:nvPr/>
+        </p:nvSpPr>
+        <p:spPr>
+          <a:xfrm>
+            <a:off x="44644589" y="23842829"/>
+            <a:ext cx="926325" cy="540000"/>
+          </a:xfrm>
+          <a:prstGeom prst="rect">
+            <a:avLst/>
+          </a:prstGeom>
+          <a:solidFill>
+            <a:schemeClr val="accent2">
+              <a:lumMod val="75000"/>
+            </a:schemeClr>
+          </a:solidFill>
+          <a:ln w="19050"/>
+        </p:spPr>
+        <p:style>
+          <a:lnRef idx="2">
+            <a:schemeClr val="accent1"/>
+          </a:lnRef>
+          <a:fillRef idx="1">
+            <a:schemeClr val="lt1"/>
+          </a:fillRef>
+          <a:effectRef idx="0">
+            <a:schemeClr val="accent1"/>
+          </a:effectRef>
+          <a:fontRef idx="minor">
+            <a:schemeClr val="dk1"/>
+          </a:fontRef>
+        </p:style>
+        <p:txBody>
+          <a:bodyPr lIns="124733" tIns="62367" rIns="124733" bIns="62367" rtlCol="0" anchor="ctr"/>
+          <a:lstStyle/>
+          <a:p>
+            <a:pPr algn="ctr"/>
+            <a:r>
+              <a:rPr lang="ru-RU" sz="700" dirty="0"/>
+              <a:t>Изгнать марокканских евреев</a:t>
+            </a:r>
+            <a:endParaRPr lang="ru-RU" sz="200" dirty="0"/>
           </a:p>
         </p:txBody>
       </p:sp>
       <p:cxnSp>
         <p:nvCxnSpPr>
-          <p:cNvPr id="392" name="Прямая соединительная линия 391">
-            <a:extLst>
-              <a:ext uri="{FF2B5EF4-FFF2-40B4-BE49-F238E27FC236}">
-                <a16:creationId xmlns:a16="http://schemas.microsoft.com/office/drawing/2014/main" id="{69363E1E-740B-4D79-AA3E-047239836AA0}"/>
+          <p:cNvPr id="440" name="Соединительная линия уступом 620">
+            <a:extLst>
+              <a:ext uri="{FF2B5EF4-FFF2-40B4-BE49-F238E27FC236}">
+                <a16:creationId xmlns:a16="http://schemas.microsoft.com/office/drawing/2014/main" id="{0F9320D7-0E9A-4E2F-A90D-D650D187FDEF}"/>
               </a:ext>
             </a:extLst>
           </p:cNvPr>
           <p:cNvCxnSpPr>
             <a:cxnSpLocks/>
-            <a:stCxn id="385" idx="1"/>
+            <a:stCxn id="410" idx="2"/>
+            <a:endCxn id="437" idx="0"/>
+          </p:cNvCxnSpPr>
+          <p:nvPr/>
+        </p:nvCxnSpPr>
+        <p:spPr>
+          <a:xfrm rot="5400000">
+            <a:off x="45587036" y="22260484"/>
+            <a:ext cx="283550" cy="1248278"/>
+          </a:xfrm>
+          <a:prstGeom prst="bentConnector3">
+            <a:avLst>
+              <a:gd name="adj1" fmla="val 50000"/>
+            </a:avLst>
+          </a:prstGeom>
+          <a:ln w="19050">
+            <a:tailEnd type="arrow"/>
+          </a:ln>
+        </p:spPr>
+        <p:style>
+          <a:lnRef idx="1">
+            <a:schemeClr val="accent1"/>
+          </a:lnRef>
+          <a:fillRef idx="0">
+            <a:schemeClr val="accent1"/>
+          </a:fillRef>
+          <a:effectRef idx="0">
+            <a:schemeClr val="accent1"/>
+          </a:effectRef>
+          <a:fontRef idx="minor">
+            <a:schemeClr val="tx1"/>
+          </a:fontRef>
+        </p:style>
+      </p:cxnSp>
+      <p:cxnSp>
+        <p:nvCxnSpPr>
+          <p:cNvPr id="441" name="Соединительная линия уступом 620">
+            <a:extLst>
+              <a:ext uri="{FF2B5EF4-FFF2-40B4-BE49-F238E27FC236}">
+                <a16:creationId xmlns:a16="http://schemas.microsoft.com/office/drawing/2014/main" id="{289F03FB-A37E-407B-85A7-A531665E0698}"/>
+              </a:ext>
+            </a:extLst>
+          </p:cNvPr>
+          <p:cNvCxnSpPr>
+            <a:cxnSpLocks/>
+            <a:stCxn id="437" idx="2"/>
+            <a:endCxn id="439" idx="0"/>
+          </p:cNvCxnSpPr>
+          <p:nvPr/>
+        </p:nvCxnSpPr>
+        <p:spPr>
+          <a:xfrm rot="16200000" flipH="1">
+            <a:off x="44967997" y="23703073"/>
+            <a:ext cx="276431" cy="3080"/>
+          </a:xfrm>
+          <a:prstGeom prst="bentConnector3">
+            <a:avLst>
+              <a:gd name="adj1" fmla="val 50000"/>
+            </a:avLst>
+          </a:prstGeom>
+          <a:ln w="19050">
+            <a:tailEnd type="arrow"/>
+          </a:ln>
+        </p:spPr>
+        <p:style>
+          <a:lnRef idx="1">
+            <a:schemeClr val="accent1"/>
+          </a:lnRef>
+          <a:fillRef idx="0">
+            <a:schemeClr val="accent1"/>
+          </a:fillRef>
+          <a:effectRef idx="0">
+            <a:schemeClr val="accent1"/>
+          </a:effectRef>
+          <a:fontRef idx="minor">
+            <a:schemeClr val="tx1"/>
+          </a:fontRef>
+        </p:style>
+      </p:cxnSp>
+      <p:sp>
+        <p:nvSpPr>
+          <p:cNvPr id="445" name="Прямоугольник 444">
+            <a:extLst>
+              <a:ext uri="{FF2B5EF4-FFF2-40B4-BE49-F238E27FC236}">
+                <a16:creationId xmlns:a16="http://schemas.microsoft.com/office/drawing/2014/main" id="{394C88E2-CFA8-4475-85DC-FEAC5A3AFFD9}"/>
+              </a:ext>
+            </a:extLst>
+          </p:cNvPr>
+          <p:cNvSpPr/>
+          <p:nvPr/>
+        </p:nvSpPr>
+        <p:spPr>
+          <a:xfrm>
+            <a:off x="47134092" y="23825485"/>
+            <a:ext cx="926325" cy="540000"/>
+          </a:xfrm>
+          <a:prstGeom prst="rect">
+            <a:avLst/>
+          </a:prstGeom>
+          <a:solidFill>
+            <a:schemeClr val="accent2">
+              <a:lumMod val="75000"/>
+            </a:schemeClr>
+          </a:solidFill>
+          <a:ln w="19050"/>
+        </p:spPr>
+        <p:style>
+          <a:lnRef idx="2">
+            <a:schemeClr val="accent1"/>
+          </a:lnRef>
+          <a:fillRef idx="1">
+            <a:schemeClr val="lt1"/>
+          </a:fillRef>
+          <a:effectRef idx="0">
+            <a:schemeClr val="accent1"/>
+          </a:effectRef>
+          <a:fontRef idx="minor">
+            <a:schemeClr val="dk1"/>
+          </a:fontRef>
+        </p:style>
+        <p:txBody>
+          <a:bodyPr lIns="124733" tIns="62367" rIns="124733" bIns="62367" rtlCol="0" anchor="ctr"/>
+          <a:lstStyle/>
+          <a:p>
+            <a:pPr algn="ctr"/>
+            <a:r>
+              <a:rPr lang="ru-RU" sz="700" dirty="0"/>
+              <a:t>Заручиться поддержкой королей</a:t>
+            </a:r>
+            <a:br>
+              <a:rPr lang="ru-RU" sz="700" dirty="0"/>
+            </a:br>
+            <a:r>
+              <a:rPr lang="ru-RU" sz="300" dirty="0"/>
+              <a:t>(Ливан и Рашид) (может </a:t>
+            </a:r>
+            <a:r>
+              <a:rPr lang="ru-RU" sz="300" dirty="0" err="1"/>
+              <a:t>гуи</a:t>
+            </a:r>
+            <a:r>
+              <a:rPr lang="ru-RU" sz="300" dirty="0"/>
+              <a:t> в виде карты Арабского Мира и портреты королей на странах)</a:t>
+            </a:r>
+            <a:endParaRPr lang="ru-RU" sz="700" dirty="0"/>
+          </a:p>
+        </p:txBody>
+      </p:sp>
+      <p:cxnSp>
+        <p:nvCxnSpPr>
+          <p:cNvPr id="446" name="Соединительная линия уступом 620">
+            <a:extLst>
+              <a:ext uri="{FF2B5EF4-FFF2-40B4-BE49-F238E27FC236}">
+                <a16:creationId xmlns:a16="http://schemas.microsoft.com/office/drawing/2014/main" id="{BAF22A48-0445-4910-9615-07B9C95F33BF}"/>
+              </a:ext>
+            </a:extLst>
+          </p:cNvPr>
+          <p:cNvCxnSpPr>
+            <a:cxnSpLocks/>
+            <a:stCxn id="410" idx="2"/>
+            <a:endCxn id="286" idx="0"/>
+          </p:cNvCxnSpPr>
+          <p:nvPr/>
+        </p:nvCxnSpPr>
+        <p:spPr>
+          <a:xfrm rot="16200000" flipH="1">
+            <a:off x="47044384" y="22051413"/>
+            <a:ext cx="1082637" cy="2465505"/>
+          </a:xfrm>
+          <a:prstGeom prst="bentConnector3">
+            <a:avLst>
+              <a:gd name="adj1" fmla="val 12462"/>
+            </a:avLst>
+          </a:prstGeom>
+          <a:ln w="19050">
+            <a:tailEnd type="arrow"/>
+          </a:ln>
+        </p:spPr>
+        <p:style>
+          <a:lnRef idx="1">
+            <a:schemeClr val="accent1"/>
+          </a:lnRef>
+          <a:fillRef idx="0">
+            <a:schemeClr val="accent1"/>
+          </a:fillRef>
+          <a:effectRef idx="0">
+            <a:schemeClr val="accent1"/>
+          </a:effectRef>
+          <a:fontRef idx="minor">
+            <a:schemeClr val="tx1"/>
+          </a:fontRef>
+        </p:style>
+      </p:cxnSp>
+      <p:cxnSp>
+        <p:nvCxnSpPr>
+          <p:cNvPr id="450" name="Соединительная линия уступом 620">
+            <a:extLst>
+              <a:ext uri="{FF2B5EF4-FFF2-40B4-BE49-F238E27FC236}">
+                <a16:creationId xmlns:a16="http://schemas.microsoft.com/office/drawing/2014/main" id="{6F3B8769-A8E1-474A-A422-7150A0893D26}"/>
+              </a:ext>
+            </a:extLst>
+          </p:cNvPr>
+          <p:cNvCxnSpPr>
+            <a:cxnSpLocks/>
+            <a:stCxn id="438" idx="2"/>
+            <a:endCxn id="445" idx="0"/>
+          </p:cNvCxnSpPr>
+          <p:nvPr/>
+        </p:nvCxnSpPr>
+        <p:spPr>
+          <a:xfrm rot="16200000" flipH="1">
+            <a:off x="47464682" y="23692912"/>
+            <a:ext cx="265144" cy="1"/>
+          </a:xfrm>
+          <a:prstGeom prst="bentConnector3">
+            <a:avLst>
+              <a:gd name="adj1" fmla="val 50000"/>
+            </a:avLst>
+          </a:prstGeom>
+          <a:ln w="19050">
+            <a:tailEnd type="arrow"/>
+          </a:ln>
+        </p:spPr>
+        <p:style>
+          <a:lnRef idx="1">
+            <a:schemeClr val="accent1"/>
+          </a:lnRef>
+          <a:fillRef idx="0">
+            <a:schemeClr val="accent1"/>
+          </a:fillRef>
+          <a:effectRef idx="0">
+            <a:schemeClr val="accent1"/>
+          </a:effectRef>
+          <a:fontRef idx="minor">
+            <a:schemeClr val="tx1"/>
+          </a:fontRef>
+        </p:style>
+      </p:cxnSp>
+      <p:cxnSp>
+        <p:nvCxnSpPr>
+          <p:cNvPr id="455" name="Соединительная линия уступом 620">
+            <a:extLst>
+              <a:ext uri="{FF2B5EF4-FFF2-40B4-BE49-F238E27FC236}">
+                <a16:creationId xmlns:a16="http://schemas.microsoft.com/office/drawing/2014/main" id="{2B98F768-D204-4604-B962-EA14A2C665C1}"/>
+              </a:ext>
+            </a:extLst>
+          </p:cNvPr>
+          <p:cNvCxnSpPr>
+            <a:cxnSpLocks/>
+            <a:stCxn id="244" idx="2"/>
+            <a:endCxn id="299" idx="0"/>
+          </p:cNvCxnSpPr>
+          <p:nvPr/>
+        </p:nvCxnSpPr>
+        <p:spPr>
+          <a:xfrm rot="16200000" flipH="1">
+            <a:off x="47129420" y="23586727"/>
+            <a:ext cx="289356" cy="1846874"/>
+          </a:xfrm>
+          <a:prstGeom prst="bentConnector3">
+            <a:avLst>
+              <a:gd name="adj1" fmla="val 50000"/>
+            </a:avLst>
+          </a:prstGeom>
+          <a:ln w="19050">
+            <a:tailEnd type="arrow"/>
+          </a:ln>
+        </p:spPr>
+        <p:style>
+          <a:lnRef idx="1">
+            <a:schemeClr val="accent1"/>
+          </a:lnRef>
+          <a:fillRef idx="0">
+            <a:schemeClr val="accent1"/>
+          </a:fillRef>
+          <a:effectRef idx="0">
+            <a:schemeClr val="accent1"/>
+          </a:effectRef>
+          <a:fontRef idx="minor">
+            <a:schemeClr val="tx1"/>
+          </a:fontRef>
+        </p:style>
+      </p:cxnSp>
+      <p:cxnSp>
+        <p:nvCxnSpPr>
+          <p:cNvPr id="458" name="Соединительная линия уступом 620">
+            <a:extLst>
+              <a:ext uri="{FF2B5EF4-FFF2-40B4-BE49-F238E27FC236}">
+                <a16:creationId xmlns:a16="http://schemas.microsoft.com/office/drawing/2014/main" id="{6FB6D578-DFA8-4CE8-937B-B828957F287F}"/>
+              </a:ext>
+            </a:extLst>
+          </p:cNvPr>
+          <p:cNvCxnSpPr>
+            <a:cxnSpLocks/>
+            <a:stCxn id="445" idx="2"/>
+            <a:endCxn id="299" idx="0"/>
+          </p:cNvCxnSpPr>
+          <p:nvPr/>
+        </p:nvCxnSpPr>
+        <p:spPr>
+          <a:xfrm rot="16200000" flipH="1">
+            <a:off x="47752717" y="24210023"/>
+            <a:ext cx="289357" cy="600280"/>
+          </a:xfrm>
+          <a:prstGeom prst="bentConnector3">
+            <a:avLst>
+              <a:gd name="adj1" fmla="val 50000"/>
+            </a:avLst>
+          </a:prstGeom>
+          <a:ln w="19050">
+            <a:tailEnd type="arrow"/>
+          </a:ln>
+        </p:spPr>
+        <p:style>
+          <a:lnRef idx="1">
+            <a:schemeClr val="accent1"/>
+          </a:lnRef>
+          <a:fillRef idx="0">
+            <a:schemeClr val="accent1"/>
+          </a:fillRef>
+          <a:effectRef idx="0">
+            <a:schemeClr val="accent1"/>
+          </a:effectRef>
+          <a:fontRef idx="minor">
+            <a:schemeClr val="tx1"/>
+          </a:fontRef>
+        </p:style>
+      </p:cxnSp>
+      <p:sp>
+        <p:nvSpPr>
+          <p:cNvPr id="463" name="Прямоугольник 462">
+            <a:extLst>
+              <a:ext uri="{FF2B5EF4-FFF2-40B4-BE49-F238E27FC236}">
+                <a16:creationId xmlns:a16="http://schemas.microsoft.com/office/drawing/2014/main" id="{650344BC-1870-4F0E-9E78-8868189D65F1}"/>
+              </a:ext>
+            </a:extLst>
+          </p:cNvPr>
+          <p:cNvSpPr/>
+          <p:nvPr/>
+        </p:nvSpPr>
+        <p:spPr>
+          <a:xfrm>
+            <a:off x="47134091" y="25454602"/>
+            <a:ext cx="926325" cy="540000"/>
+          </a:xfrm>
+          <a:prstGeom prst="rect">
+            <a:avLst/>
+          </a:prstGeom>
+          <a:solidFill>
+            <a:schemeClr val="accent2">
+              <a:lumMod val="75000"/>
+            </a:schemeClr>
+          </a:solidFill>
+          <a:ln w="19050"/>
+        </p:spPr>
+        <p:style>
+          <a:lnRef idx="2">
+            <a:schemeClr val="accent1"/>
+          </a:lnRef>
+          <a:fillRef idx="1">
+            <a:schemeClr val="lt1"/>
+          </a:fillRef>
+          <a:effectRef idx="0">
+            <a:schemeClr val="accent1"/>
+          </a:effectRef>
+          <a:fontRef idx="minor">
+            <a:schemeClr val="dk1"/>
+          </a:fontRef>
+        </p:style>
+        <p:txBody>
+          <a:bodyPr lIns="124733" tIns="62367" rIns="124733" bIns="62367" rtlCol="0" anchor="ctr"/>
+          <a:lstStyle/>
+          <a:p>
+            <a:pPr algn="ctr"/>
+            <a:r>
+              <a:rPr lang="ru-RU" sz="700" dirty="0"/>
+              <a:t>Освободить Бея Туниса от французского гнёта</a:t>
+            </a:r>
+          </a:p>
+        </p:txBody>
+      </p:sp>
+      <p:sp>
+        <p:nvSpPr>
+          <p:cNvPr id="464" name="Прямоугольник 463">
+            <a:extLst>
+              <a:ext uri="{FF2B5EF4-FFF2-40B4-BE49-F238E27FC236}">
+                <a16:creationId xmlns:a16="http://schemas.microsoft.com/office/drawing/2014/main" id="{B4C6028A-B393-4A8F-AB7E-AA61247C9DC7}"/>
+              </a:ext>
+            </a:extLst>
+          </p:cNvPr>
+          <p:cNvSpPr/>
+          <p:nvPr/>
+        </p:nvSpPr>
+        <p:spPr>
+          <a:xfrm>
+            <a:off x="46507714" y="26254889"/>
+            <a:ext cx="926325" cy="540000"/>
+          </a:xfrm>
+          <a:prstGeom prst="rect">
+            <a:avLst/>
+          </a:prstGeom>
+          <a:solidFill>
+            <a:schemeClr val="accent2">
+              <a:lumMod val="75000"/>
+            </a:schemeClr>
+          </a:solidFill>
+          <a:ln w="19050"/>
+        </p:spPr>
+        <p:style>
+          <a:lnRef idx="2">
+            <a:schemeClr val="accent1"/>
+          </a:lnRef>
+          <a:fillRef idx="1">
+            <a:schemeClr val="lt1"/>
+          </a:fillRef>
+          <a:effectRef idx="0">
+            <a:schemeClr val="accent1"/>
+          </a:effectRef>
+          <a:fontRef idx="minor">
+            <a:schemeClr val="dk1"/>
+          </a:fontRef>
+        </p:style>
+        <p:txBody>
+          <a:bodyPr lIns="124733" tIns="62367" rIns="124733" bIns="62367" rtlCol="0" anchor="ctr"/>
+          <a:lstStyle/>
+          <a:p>
+            <a:pPr algn="ctr"/>
+            <a:r>
+              <a:rPr lang="ru-RU" sz="700" dirty="0"/>
+              <a:t>Поделить Алжир между султаном и беем</a:t>
+            </a:r>
+          </a:p>
+        </p:txBody>
+      </p:sp>
+      <p:cxnSp>
+        <p:nvCxnSpPr>
+          <p:cNvPr id="465" name="Соединительная линия уступом 620">
+            <a:extLst>
+              <a:ext uri="{FF2B5EF4-FFF2-40B4-BE49-F238E27FC236}">
+                <a16:creationId xmlns:a16="http://schemas.microsoft.com/office/drawing/2014/main" id="{503A91C2-CF9E-4358-A873-96E06E5EDF6A}"/>
+              </a:ext>
+            </a:extLst>
+          </p:cNvPr>
+          <p:cNvCxnSpPr>
+            <a:cxnSpLocks/>
+            <a:stCxn id="299" idx="2"/>
+            <a:endCxn id="463" idx="0"/>
+          </p:cNvCxnSpPr>
+          <p:nvPr/>
+        </p:nvCxnSpPr>
+        <p:spPr>
+          <a:xfrm rot="5400000">
+            <a:off x="47767515" y="25024582"/>
+            <a:ext cx="259760" cy="600281"/>
+          </a:xfrm>
+          <a:prstGeom prst="bentConnector3">
+            <a:avLst>
+              <a:gd name="adj1" fmla="val 50000"/>
+            </a:avLst>
+          </a:prstGeom>
+          <a:ln w="19050">
+            <a:tailEnd type="arrow"/>
+          </a:ln>
+        </p:spPr>
+        <p:style>
+          <a:lnRef idx="1">
+            <a:schemeClr val="accent1"/>
+          </a:lnRef>
+          <a:fillRef idx="0">
+            <a:schemeClr val="accent1"/>
+          </a:fillRef>
+          <a:effectRef idx="0">
+            <a:schemeClr val="accent1"/>
+          </a:effectRef>
+          <a:fontRef idx="minor">
+            <a:schemeClr val="tx1"/>
+          </a:fontRef>
+        </p:style>
+      </p:cxnSp>
+      <p:cxnSp>
+        <p:nvCxnSpPr>
+          <p:cNvPr id="468" name="Соединительная линия уступом 620">
+            <a:extLst>
+              <a:ext uri="{FF2B5EF4-FFF2-40B4-BE49-F238E27FC236}">
+                <a16:creationId xmlns:a16="http://schemas.microsoft.com/office/drawing/2014/main" id="{B7A2BFAC-67D6-4305-95FF-2ED05C01E2FB}"/>
+              </a:ext>
+            </a:extLst>
+          </p:cNvPr>
+          <p:cNvCxnSpPr>
+            <a:cxnSpLocks/>
+            <a:stCxn id="463" idx="2"/>
+            <a:endCxn id="464" idx="0"/>
+          </p:cNvCxnSpPr>
+          <p:nvPr/>
+        </p:nvCxnSpPr>
+        <p:spPr>
+          <a:xfrm rot="5400000">
+            <a:off x="47153923" y="25811557"/>
+            <a:ext cx="260287" cy="626377"/>
+          </a:xfrm>
+          <a:prstGeom prst="bentConnector3">
+            <a:avLst>
+              <a:gd name="adj1" fmla="val 50000"/>
+            </a:avLst>
+          </a:prstGeom>
+          <a:ln w="19050">
+            <a:tailEnd type="arrow"/>
+          </a:ln>
+        </p:spPr>
+        <p:style>
+          <a:lnRef idx="1">
+            <a:schemeClr val="accent1"/>
+          </a:lnRef>
+          <a:fillRef idx="0">
+            <a:schemeClr val="accent1"/>
+          </a:fillRef>
+          <a:effectRef idx="0">
+            <a:schemeClr val="accent1"/>
+          </a:effectRef>
+          <a:fontRef idx="minor">
+            <a:schemeClr val="tx1"/>
+          </a:fontRef>
+        </p:style>
+      </p:cxnSp>
+      <p:sp>
+        <p:nvSpPr>
+          <p:cNvPr id="471" name="Прямоугольник 470">
+            <a:extLst>
+              <a:ext uri="{FF2B5EF4-FFF2-40B4-BE49-F238E27FC236}">
+                <a16:creationId xmlns:a16="http://schemas.microsoft.com/office/drawing/2014/main" id="{9FA1C022-691C-4F3D-B4B5-1D247E928869}"/>
+              </a:ext>
+            </a:extLst>
+          </p:cNvPr>
+          <p:cNvSpPr/>
+          <p:nvPr/>
+        </p:nvSpPr>
+        <p:spPr>
+          <a:xfrm>
+            <a:off x="47736149" y="26254889"/>
+            <a:ext cx="926325" cy="540000"/>
+          </a:xfrm>
+          <a:prstGeom prst="rect">
+            <a:avLst/>
+          </a:prstGeom>
+          <a:solidFill>
+            <a:schemeClr val="accent2">
+              <a:lumMod val="75000"/>
+            </a:schemeClr>
+          </a:solidFill>
+          <a:ln w="19050"/>
+        </p:spPr>
+        <p:style>
+          <a:lnRef idx="2">
+            <a:schemeClr val="accent1"/>
+          </a:lnRef>
+          <a:fillRef idx="1">
+            <a:schemeClr val="lt1"/>
+          </a:fillRef>
+          <a:effectRef idx="0">
+            <a:schemeClr val="accent1"/>
+          </a:effectRef>
+          <a:fontRef idx="minor">
+            <a:schemeClr val="dk1"/>
+          </a:fontRef>
+        </p:style>
+        <p:txBody>
+          <a:bodyPr lIns="124733" tIns="62367" rIns="124733" bIns="62367" rtlCol="0" anchor="ctr"/>
+          <a:lstStyle/>
+          <a:p>
+            <a:pPr algn="ctr"/>
+            <a:r>
+              <a:rPr lang="ru-RU" sz="700" dirty="0"/>
+              <a:t>Освободить королевство </a:t>
+            </a:r>
+            <a:r>
+              <a:rPr lang="ru-RU" sz="700" dirty="0" err="1"/>
+              <a:t>Сенуситов</a:t>
+            </a:r>
+            <a:endParaRPr lang="ru-RU" sz="700" dirty="0"/>
+          </a:p>
+        </p:txBody>
+      </p:sp>
+      <p:cxnSp>
+        <p:nvCxnSpPr>
+          <p:cNvPr id="473" name="Соединительная линия уступом 620">
+            <a:extLst>
+              <a:ext uri="{FF2B5EF4-FFF2-40B4-BE49-F238E27FC236}">
+                <a16:creationId xmlns:a16="http://schemas.microsoft.com/office/drawing/2014/main" id="{E20EFA4A-145D-49CC-98D7-D6C9C8DB6250}"/>
+              </a:ext>
+            </a:extLst>
+          </p:cNvPr>
+          <p:cNvCxnSpPr>
+            <a:cxnSpLocks/>
+            <a:stCxn id="463" idx="2"/>
+            <a:endCxn id="471" idx="0"/>
+          </p:cNvCxnSpPr>
+          <p:nvPr/>
+        </p:nvCxnSpPr>
+        <p:spPr>
+          <a:xfrm rot="16200000" flipH="1">
+            <a:off x="47768140" y="25823716"/>
+            <a:ext cx="260287" cy="602058"/>
+          </a:xfrm>
+          <a:prstGeom prst="bentConnector3">
+            <a:avLst>
+              <a:gd name="adj1" fmla="val 50000"/>
+            </a:avLst>
+          </a:prstGeom>
+          <a:ln w="19050">
+            <a:tailEnd type="arrow"/>
+          </a:ln>
+        </p:spPr>
+        <p:style>
+          <a:lnRef idx="1">
+            <a:schemeClr val="accent1"/>
+          </a:lnRef>
+          <a:fillRef idx="0">
+            <a:schemeClr val="accent1"/>
+          </a:fillRef>
+          <a:effectRef idx="0">
+            <a:schemeClr val="accent1"/>
+          </a:effectRef>
+          <a:fontRef idx="minor">
+            <a:schemeClr val="tx1"/>
+          </a:fontRef>
+        </p:style>
+      </p:cxnSp>
+      <p:sp>
+        <p:nvSpPr>
+          <p:cNvPr id="476" name="Прямоугольник 475">
+            <a:extLst>
+              <a:ext uri="{FF2B5EF4-FFF2-40B4-BE49-F238E27FC236}">
+                <a16:creationId xmlns:a16="http://schemas.microsoft.com/office/drawing/2014/main" id="{C4877405-2FC0-41D1-89B9-92A1CE16E115}"/>
+              </a:ext>
+            </a:extLst>
+          </p:cNvPr>
+          <p:cNvSpPr/>
+          <p:nvPr/>
+        </p:nvSpPr>
+        <p:spPr>
+          <a:xfrm>
+            <a:off x="48984277" y="24648382"/>
+            <a:ext cx="926325" cy="540000"/>
+          </a:xfrm>
+          <a:prstGeom prst="rect">
+            <a:avLst/>
+          </a:prstGeom>
+          <a:solidFill>
+            <a:schemeClr val="accent2">
+              <a:lumMod val="75000"/>
+            </a:schemeClr>
+          </a:solidFill>
+          <a:ln w="19050"/>
+        </p:spPr>
+        <p:style>
+          <a:lnRef idx="2">
+            <a:schemeClr val="accent1"/>
+          </a:lnRef>
+          <a:fillRef idx="1">
+            <a:schemeClr val="lt1"/>
+          </a:fillRef>
+          <a:effectRef idx="0">
+            <a:schemeClr val="accent1"/>
+          </a:effectRef>
+          <a:fontRef idx="minor">
+            <a:schemeClr val="dk1"/>
+          </a:fontRef>
+        </p:style>
+        <p:txBody>
+          <a:bodyPr lIns="124733" tIns="62367" rIns="124733" bIns="62367" rtlCol="0" anchor="ctr"/>
+          <a:lstStyle/>
+          <a:p>
+            <a:pPr algn="ctr"/>
+            <a:r>
+              <a:rPr lang="ru-RU" sz="700" dirty="0"/>
+              <a:t>Объединиться с королями арабов</a:t>
+            </a:r>
+          </a:p>
+        </p:txBody>
+      </p:sp>
+      <p:cxnSp>
+        <p:nvCxnSpPr>
+          <p:cNvPr id="477" name="Соединительная линия уступом 620">
+            <a:extLst>
+              <a:ext uri="{FF2B5EF4-FFF2-40B4-BE49-F238E27FC236}">
+                <a16:creationId xmlns:a16="http://schemas.microsoft.com/office/drawing/2014/main" id="{C65BA08B-A094-49AA-9B25-ADF84BAC3B08}"/>
+              </a:ext>
+            </a:extLst>
+          </p:cNvPr>
+          <p:cNvCxnSpPr>
+            <a:cxnSpLocks/>
+            <a:stCxn id="445" idx="2"/>
+            <a:endCxn id="476" idx="0"/>
+          </p:cNvCxnSpPr>
+          <p:nvPr/>
+        </p:nvCxnSpPr>
+        <p:spPr>
+          <a:xfrm rot="16200000" flipH="1">
+            <a:off x="48380899" y="23581840"/>
+            <a:ext cx="282897" cy="1850185"/>
+          </a:xfrm>
+          <a:prstGeom prst="bentConnector3">
+            <a:avLst>
+              <a:gd name="adj1" fmla="val 50000"/>
+            </a:avLst>
+          </a:prstGeom>
+          <a:ln w="19050">
+            <a:tailEnd type="arrow"/>
+          </a:ln>
+        </p:spPr>
+        <p:style>
+          <a:lnRef idx="1">
+            <a:schemeClr val="accent1"/>
+          </a:lnRef>
+          <a:fillRef idx="0">
+            <a:schemeClr val="accent1"/>
+          </a:fillRef>
+          <a:effectRef idx="0">
+            <a:schemeClr val="accent1"/>
+          </a:effectRef>
+          <a:fontRef idx="minor">
+            <a:schemeClr val="tx1"/>
+          </a:fontRef>
+        </p:style>
+      </p:cxnSp>
+      <p:sp>
+        <p:nvSpPr>
+          <p:cNvPr id="480" name="Прямоугольник 479">
+            <a:extLst>
+              <a:ext uri="{FF2B5EF4-FFF2-40B4-BE49-F238E27FC236}">
+                <a16:creationId xmlns:a16="http://schemas.microsoft.com/office/drawing/2014/main" id="{8C02F0DB-A2BB-4711-BC0F-339E3C4ED827}"/>
+              </a:ext>
+            </a:extLst>
+          </p:cNvPr>
+          <p:cNvSpPr/>
+          <p:nvPr/>
+        </p:nvSpPr>
+        <p:spPr>
+          <a:xfrm>
+            <a:off x="48361816" y="25471280"/>
+            <a:ext cx="926325" cy="540000"/>
+          </a:xfrm>
+          <a:prstGeom prst="rect">
+            <a:avLst/>
+          </a:prstGeom>
+          <a:solidFill>
+            <a:schemeClr val="accent2">
+              <a:lumMod val="75000"/>
+            </a:schemeClr>
+          </a:solidFill>
+          <a:ln w="19050"/>
+        </p:spPr>
+        <p:style>
+          <a:lnRef idx="2">
+            <a:schemeClr val="accent1"/>
+          </a:lnRef>
+          <a:fillRef idx="1">
+            <a:schemeClr val="lt1"/>
+          </a:fillRef>
+          <a:effectRef idx="0">
+            <a:schemeClr val="accent1"/>
+          </a:effectRef>
+          <a:fontRef idx="minor">
+            <a:schemeClr val="dk1"/>
+          </a:fontRef>
+        </p:style>
+        <p:txBody>
+          <a:bodyPr lIns="124733" tIns="62367" rIns="124733" bIns="62367" rtlCol="0" anchor="ctr"/>
+          <a:lstStyle/>
+          <a:p>
+            <a:pPr algn="ctr"/>
+            <a:r>
+              <a:rPr lang="ru-RU" sz="700" dirty="0"/>
+              <a:t>Спасти святые земли</a:t>
+            </a:r>
+          </a:p>
+        </p:txBody>
+      </p:sp>
+      <p:cxnSp>
+        <p:nvCxnSpPr>
+          <p:cNvPr id="481" name="Прямая соединительная линия 480">
+            <a:extLst>
+              <a:ext uri="{FF2B5EF4-FFF2-40B4-BE49-F238E27FC236}">
+                <a16:creationId xmlns:a16="http://schemas.microsoft.com/office/drawing/2014/main" id="{33A58044-D3D1-45D5-881C-2597CEC56D5B}"/>
+              </a:ext>
+            </a:extLst>
+          </p:cNvPr>
+          <p:cNvCxnSpPr>
+            <a:cxnSpLocks/>
+            <a:stCxn id="299" idx="1"/>
             <a:endCxn id="388" idx="3"/>
           </p:cNvCxnSpPr>
           <p:nvPr/>
         </p:nvCxnSpPr>
         <p:spPr>
-          <a:xfrm flipH="1">
-            <a:off x="6204308" y="10158283"/>
-            <a:ext cx="1455775" cy="0"/>
+          <a:xfrm flipH="1" flipV="1">
+            <a:off x="46216854" y="24924313"/>
+            <a:ext cx="1517518" cy="529"/>
           </a:xfrm>
           <a:prstGeom prst="line">
             <a:avLst/>
@@ -19512,12 +22184,57 @@
           </a:fontRef>
         </p:style>
       </p:cxnSp>
+      <p:cxnSp>
+        <p:nvCxnSpPr>
+          <p:cNvPr id="489" name="Соединительная линия уступом 620">
+            <a:extLst>
+              <a:ext uri="{FF2B5EF4-FFF2-40B4-BE49-F238E27FC236}">
+                <a16:creationId xmlns:a16="http://schemas.microsoft.com/office/drawing/2014/main" id="{D723A5DC-2D38-496C-831E-DD515F89FD92}"/>
+              </a:ext>
+            </a:extLst>
+          </p:cNvPr>
+          <p:cNvCxnSpPr>
+            <a:cxnSpLocks/>
+            <a:stCxn id="299" idx="2"/>
+            <a:endCxn id="480" idx="0"/>
+          </p:cNvCxnSpPr>
+          <p:nvPr/>
+        </p:nvCxnSpPr>
+        <p:spPr>
+          <a:xfrm rot="16200000" flipH="1">
+            <a:off x="48373038" y="25019339"/>
+            <a:ext cx="276438" cy="627444"/>
+          </a:xfrm>
+          <a:prstGeom prst="bentConnector3">
+            <a:avLst>
+              <a:gd name="adj1" fmla="val 50000"/>
+            </a:avLst>
+          </a:prstGeom>
+          <a:ln w="19050">
+            <a:tailEnd type="arrow"/>
+          </a:ln>
+        </p:spPr>
+        <p:style>
+          <a:lnRef idx="1">
+            <a:schemeClr val="accent1"/>
+          </a:lnRef>
+          <a:fillRef idx="0">
+            <a:schemeClr val="accent1"/>
+          </a:fillRef>
+          <a:effectRef idx="0">
+            <a:schemeClr val="accent1"/>
+          </a:effectRef>
+          <a:fontRef idx="minor">
+            <a:schemeClr val="tx1"/>
+          </a:fontRef>
+        </p:style>
+      </p:cxnSp>
       <p:sp>
         <p:nvSpPr>
-          <p:cNvPr id="393" name="Прямоугольник 392">
-            <a:extLst>
-              <a:ext uri="{FF2B5EF4-FFF2-40B4-BE49-F238E27FC236}">
-                <a16:creationId xmlns:a16="http://schemas.microsoft.com/office/drawing/2014/main" id="{05D0D326-25E7-4CF1-BC8E-9F64D542575B}"/>
+          <p:cNvPr id="495" name="Прямоугольник 494">
+            <a:extLst>
+              <a:ext uri="{FF2B5EF4-FFF2-40B4-BE49-F238E27FC236}">
+                <a16:creationId xmlns:a16="http://schemas.microsoft.com/office/drawing/2014/main" id="{B4EBCBB4-0F46-419E-B5D5-FC26FA0BF919}"/>
               </a:ext>
             </a:extLst>
           </p:cNvPr>
@@ -19526,7 +22243,935 @@
         </p:nvSpPr>
         <p:spPr>
           <a:xfrm>
-            <a:off x="4685222" y="10689102"/>
+            <a:off x="47736148" y="27054648"/>
+            <a:ext cx="926325" cy="540000"/>
+          </a:xfrm>
+          <a:prstGeom prst="rect">
+            <a:avLst/>
+          </a:prstGeom>
+          <a:solidFill>
+            <a:schemeClr val="accent2">
+              <a:lumMod val="75000"/>
+            </a:schemeClr>
+          </a:solidFill>
+          <a:ln w="19050"/>
+        </p:spPr>
+        <p:style>
+          <a:lnRef idx="2">
+            <a:schemeClr val="accent1"/>
+          </a:lnRef>
+          <a:fillRef idx="1">
+            <a:schemeClr val="lt1"/>
+          </a:fillRef>
+          <a:effectRef idx="0">
+            <a:schemeClr val="accent1"/>
+          </a:effectRef>
+          <a:fontRef idx="minor">
+            <a:schemeClr val="dk1"/>
+          </a:fontRef>
+        </p:style>
+        <p:txBody>
+          <a:bodyPr lIns="124733" tIns="62367" rIns="124733" bIns="62367" rtlCol="0" anchor="ctr"/>
+          <a:lstStyle/>
+          <a:p>
+            <a:pPr algn="ctr"/>
+            <a:r>
+              <a:rPr lang="ru-RU" sz="700" dirty="0"/>
+              <a:t>Сместить недостойного </a:t>
+            </a:r>
+            <a:r>
+              <a:rPr lang="ru-RU" sz="700" dirty="0" err="1"/>
+              <a:t>Фаррука</a:t>
+            </a:r>
+            <a:endParaRPr lang="ru-RU" sz="700" dirty="0"/>
+          </a:p>
+        </p:txBody>
+      </p:sp>
+      <p:cxnSp>
+        <p:nvCxnSpPr>
+          <p:cNvPr id="496" name="Соединительная линия уступом 620">
+            <a:extLst>
+              <a:ext uri="{FF2B5EF4-FFF2-40B4-BE49-F238E27FC236}">
+                <a16:creationId xmlns:a16="http://schemas.microsoft.com/office/drawing/2014/main" id="{92205E9D-8331-41D1-B409-CFD0984BFFFA}"/>
+              </a:ext>
+            </a:extLst>
+          </p:cNvPr>
+          <p:cNvCxnSpPr>
+            <a:cxnSpLocks/>
+            <a:stCxn id="471" idx="2"/>
+            <a:endCxn id="495" idx="0"/>
+          </p:cNvCxnSpPr>
+          <p:nvPr/>
+        </p:nvCxnSpPr>
+        <p:spPr>
+          <a:xfrm rot="5400000">
+            <a:off x="48069433" y="26924768"/>
+            <a:ext cx="259759" cy="1"/>
+          </a:xfrm>
+          <a:prstGeom prst="bentConnector3">
+            <a:avLst>
+              <a:gd name="adj1" fmla="val 50000"/>
+            </a:avLst>
+          </a:prstGeom>
+          <a:ln w="19050">
+            <a:tailEnd type="arrow"/>
+          </a:ln>
+        </p:spPr>
+        <p:style>
+          <a:lnRef idx="1">
+            <a:schemeClr val="accent1"/>
+          </a:lnRef>
+          <a:fillRef idx="0">
+            <a:schemeClr val="accent1"/>
+          </a:fillRef>
+          <a:effectRef idx="0">
+            <a:schemeClr val="accent1"/>
+          </a:effectRef>
+          <a:fontRef idx="minor">
+            <a:schemeClr val="tx1"/>
+          </a:fontRef>
+        </p:style>
+      </p:cxnSp>
+      <p:sp>
+        <p:nvSpPr>
+          <p:cNvPr id="499" name="Прямоугольник 498">
+            <a:extLst>
+              <a:ext uri="{FF2B5EF4-FFF2-40B4-BE49-F238E27FC236}">
+                <a16:creationId xmlns:a16="http://schemas.microsoft.com/office/drawing/2014/main" id="{8248E5C5-861C-4B3A-AB08-BEA35760CFE6}"/>
+              </a:ext>
+            </a:extLst>
+          </p:cNvPr>
+          <p:cNvSpPr/>
+          <p:nvPr/>
+        </p:nvSpPr>
+        <p:spPr>
+          <a:xfrm>
+            <a:off x="48984277" y="27051395"/>
+            <a:ext cx="926325" cy="540000"/>
+          </a:xfrm>
+          <a:prstGeom prst="rect">
+            <a:avLst/>
+          </a:prstGeom>
+          <a:solidFill>
+            <a:schemeClr val="accent2">
+              <a:lumMod val="75000"/>
+            </a:schemeClr>
+          </a:solidFill>
+          <a:ln w="19050"/>
+        </p:spPr>
+        <p:style>
+          <a:lnRef idx="2">
+            <a:schemeClr val="accent1"/>
+          </a:lnRef>
+          <a:fillRef idx="1">
+            <a:schemeClr val="lt1"/>
+          </a:fillRef>
+          <a:effectRef idx="0">
+            <a:schemeClr val="accent1"/>
+          </a:effectRef>
+          <a:fontRef idx="minor">
+            <a:schemeClr val="dk1"/>
+          </a:fontRef>
+        </p:style>
+        <p:txBody>
+          <a:bodyPr lIns="124733" tIns="62367" rIns="124733" bIns="62367" rtlCol="0" anchor="ctr"/>
+          <a:lstStyle/>
+          <a:p>
+            <a:pPr algn="ctr"/>
+            <a:r>
+              <a:rPr lang="ru-RU" sz="700" dirty="0"/>
+              <a:t>Вернуть Мекку</a:t>
+            </a:r>
+          </a:p>
+        </p:txBody>
+      </p:sp>
+      <p:sp>
+        <p:nvSpPr>
+          <p:cNvPr id="501" name="Прямоугольник 500">
+            <a:extLst>
+              <a:ext uri="{FF2B5EF4-FFF2-40B4-BE49-F238E27FC236}">
+                <a16:creationId xmlns:a16="http://schemas.microsoft.com/office/drawing/2014/main" id="{557FAF48-D874-470D-BE40-9E02258506A6}"/>
+              </a:ext>
+            </a:extLst>
+          </p:cNvPr>
+          <p:cNvSpPr/>
+          <p:nvPr/>
+        </p:nvSpPr>
+        <p:spPr>
+          <a:xfrm>
+            <a:off x="48984278" y="26254889"/>
+            <a:ext cx="926325" cy="540000"/>
+          </a:xfrm>
+          <a:prstGeom prst="rect">
+            <a:avLst/>
+          </a:prstGeom>
+          <a:solidFill>
+            <a:schemeClr val="accent2">
+              <a:lumMod val="75000"/>
+            </a:schemeClr>
+          </a:solidFill>
+          <a:ln w="19050"/>
+        </p:spPr>
+        <p:style>
+          <a:lnRef idx="2">
+            <a:schemeClr val="accent1"/>
+          </a:lnRef>
+          <a:fillRef idx="1">
+            <a:schemeClr val="lt1"/>
+          </a:fillRef>
+          <a:effectRef idx="0">
+            <a:schemeClr val="accent1"/>
+          </a:effectRef>
+          <a:fontRef idx="minor">
+            <a:schemeClr val="dk1"/>
+          </a:fontRef>
+        </p:style>
+        <p:txBody>
+          <a:bodyPr lIns="124733" tIns="62367" rIns="124733" bIns="62367" rtlCol="0" anchor="ctr"/>
+          <a:lstStyle/>
+          <a:p>
+            <a:pPr algn="ctr"/>
+            <a:r>
+              <a:rPr lang="ru-RU" sz="700" dirty="0"/>
+              <a:t>Совет королей</a:t>
+            </a:r>
+          </a:p>
+        </p:txBody>
+      </p:sp>
+      <p:cxnSp>
+        <p:nvCxnSpPr>
+          <p:cNvPr id="502" name="Соединительная линия уступом 620">
+            <a:extLst>
+              <a:ext uri="{FF2B5EF4-FFF2-40B4-BE49-F238E27FC236}">
+                <a16:creationId xmlns:a16="http://schemas.microsoft.com/office/drawing/2014/main" id="{46B695DF-0CE6-47C1-989E-ABB5C4051389}"/>
+              </a:ext>
+            </a:extLst>
+          </p:cNvPr>
+          <p:cNvCxnSpPr>
+            <a:cxnSpLocks/>
+            <a:stCxn id="480" idx="2"/>
+            <a:endCxn id="501" idx="0"/>
+          </p:cNvCxnSpPr>
+          <p:nvPr/>
+        </p:nvCxnSpPr>
+        <p:spPr>
+          <a:xfrm rot="16200000" flipH="1">
+            <a:off x="49014406" y="25821853"/>
+            <a:ext cx="243609" cy="622462"/>
+          </a:xfrm>
+          <a:prstGeom prst="bentConnector3">
+            <a:avLst>
+              <a:gd name="adj1" fmla="val 50000"/>
+            </a:avLst>
+          </a:prstGeom>
+          <a:ln w="19050">
+            <a:tailEnd type="arrow"/>
+          </a:ln>
+        </p:spPr>
+        <p:style>
+          <a:lnRef idx="1">
+            <a:schemeClr val="accent1"/>
+          </a:lnRef>
+          <a:fillRef idx="0">
+            <a:schemeClr val="accent1"/>
+          </a:fillRef>
+          <a:effectRef idx="0">
+            <a:schemeClr val="accent1"/>
+          </a:effectRef>
+          <a:fontRef idx="minor">
+            <a:schemeClr val="tx1"/>
+          </a:fontRef>
+        </p:style>
+      </p:cxnSp>
+      <p:cxnSp>
+        <p:nvCxnSpPr>
+          <p:cNvPr id="505" name="Соединительная линия уступом 620">
+            <a:extLst>
+              <a:ext uri="{FF2B5EF4-FFF2-40B4-BE49-F238E27FC236}">
+                <a16:creationId xmlns:a16="http://schemas.microsoft.com/office/drawing/2014/main" id="{4FFBC942-3FB4-4F84-9677-3EAA1CEDCA48}"/>
+              </a:ext>
+            </a:extLst>
+          </p:cNvPr>
+          <p:cNvCxnSpPr>
+            <a:cxnSpLocks/>
+            <a:stCxn id="476" idx="2"/>
+            <a:endCxn id="501" idx="0"/>
+          </p:cNvCxnSpPr>
+          <p:nvPr/>
+        </p:nvCxnSpPr>
+        <p:spPr>
+          <a:xfrm rot="16200000" flipH="1">
+            <a:off x="48914187" y="25721634"/>
+            <a:ext cx="1066507" cy="1"/>
+          </a:xfrm>
+          <a:prstGeom prst="bentConnector3">
+            <a:avLst>
+              <a:gd name="adj1" fmla="val 50000"/>
+            </a:avLst>
+          </a:prstGeom>
+          <a:ln w="19050">
+            <a:tailEnd type="arrow"/>
+          </a:ln>
+        </p:spPr>
+        <p:style>
+          <a:lnRef idx="1">
+            <a:schemeClr val="accent1"/>
+          </a:lnRef>
+          <a:fillRef idx="0">
+            <a:schemeClr val="accent1"/>
+          </a:fillRef>
+          <a:effectRef idx="0">
+            <a:schemeClr val="accent1"/>
+          </a:effectRef>
+          <a:fontRef idx="minor">
+            <a:schemeClr val="tx1"/>
+          </a:fontRef>
+        </p:style>
+      </p:cxnSp>
+      <p:sp>
+        <p:nvSpPr>
+          <p:cNvPr id="524" name="Прямоугольник 523">
+            <a:extLst>
+              <a:ext uri="{FF2B5EF4-FFF2-40B4-BE49-F238E27FC236}">
+                <a16:creationId xmlns:a16="http://schemas.microsoft.com/office/drawing/2014/main" id="{38845350-9EFD-4225-BF8E-4B28D856BAB0}"/>
+              </a:ext>
+            </a:extLst>
+          </p:cNvPr>
+          <p:cNvSpPr/>
+          <p:nvPr/>
+        </p:nvSpPr>
+        <p:spPr>
+          <a:xfrm>
+            <a:off x="45294762" y="27921782"/>
+            <a:ext cx="926325" cy="540000"/>
+          </a:xfrm>
+          <a:prstGeom prst="rect">
+            <a:avLst/>
+          </a:prstGeom>
+          <a:solidFill>
+            <a:schemeClr val="accent2">
+              <a:lumMod val="75000"/>
+            </a:schemeClr>
+          </a:solidFill>
+          <a:ln w="19050"/>
+        </p:spPr>
+        <p:style>
+          <a:lnRef idx="2">
+            <a:schemeClr val="accent1"/>
+          </a:lnRef>
+          <a:fillRef idx="1">
+            <a:schemeClr val="lt1"/>
+          </a:fillRef>
+          <a:effectRef idx="0">
+            <a:schemeClr val="accent1"/>
+          </a:effectRef>
+          <a:fontRef idx="minor">
+            <a:schemeClr val="dk1"/>
+          </a:fontRef>
+        </p:style>
+        <p:txBody>
+          <a:bodyPr lIns="124733" tIns="62367" rIns="124733" bIns="62367" rtlCol="0" anchor="ctr"/>
+          <a:lstStyle/>
+          <a:p>
+            <a:pPr algn="ctr"/>
+            <a:r>
+              <a:rPr lang="ru-RU" sz="700" dirty="0"/>
+              <a:t>Объявить о воссоздании Аль-</a:t>
+            </a:r>
+            <a:r>
+              <a:rPr lang="ru-RU" sz="700" dirty="0" err="1"/>
+              <a:t>Андулуса</a:t>
+            </a:r>
+            <a:endParaRPr lang="ru-RU" sz="700" dirty="0"/>
+          </a:p>
+        </p:txBody>
+      </p:sp>
+      <p:cxnSp>
+        <p:nvCxnSpPr>
+          <p:cNvPr id="525" name="Соединительная линия уступом 620">
+            <a:extLst>
+              <a:ext uri="{FF2B5EF4-FFF2-40B4-BE49-F238E27FC236}">
+                <a16:creationId xmlns:a16="http://schemas.microsoft.com/office/drawing/2014/main" id="{828CC0F5-AA67-4601-B98A-88020B70EA82}"/>
+              </a:ext>
+            </a:extLst>
+          </p:cNvPr>
+          <p:cNvCxnSpPr>
+            <a:cxnSpLocks/>
+            <a:stCxn id="501" idx="2"/>
+            <a:endCxn id="499" idx="0"/>
+          </p:cNvCxnSpPr>
+          <p:nvPr/>
+        </p:nvCxnSpPr>
+        <p:spPr>
+          <a:xfrm rot="5400000">
+            <a:off x="49319188" y="26923142"/>
+            <a:ext cx="256506" cy="1"/>
+          </a:xfrm>
+          <a:prstGeom prst="bentConnector3">
+            <a:avLst>
+              <a:gd name="adj1" fmla="val 50000"/>
+            </a:avLst>
+          </a:prstGeom>
+          <a:ln w="19050">
+            <a:tailEnd type="arrow"/>
+          </a:ln>
+        </p:spPr>
+        <p:style>
+          <a:lnRef idx="1">
+            <a:schemeClr val="accent1"/>
+          </a:lnRef>
+          <a:fillRef idx="0">
+            <a:schemeClr val="accent1"/>
+          </a:fillRef>
+          <a:effectRef idx="0">
+            <a:schemeClr val="accent1"/>
+          </a:effectRef>
+          <a:fontRef idx="minor">
+            <a:schemeClr val="tx1"/>
+          </a:fontRef>
+        </p:style>
+      </p:cxnSp>
+      <p:cxnSp>
+        <p:nvCxnSpPr>
+          <p:cNvPr id="529" name="Соединительная линия уступом 620">
+            <a:extLst>
+              <a:ext uri="{FF2B5EF4-FFF2-40B4-BE49-F238E27FC236}">
+                <a16:creationId xmlns:a16="http://schemas.microsoft.com/office/drawing/2014/main" id="{BD31974B-8C00-4D1B-8404-16ABC0BD6776}"/>
+              </a:ext>
+            </a:extLst>
+          </p:cNvPr>
+          <p:cNvCxnSpPr>
+            <a:cxnSpLocks/>
+            <a:stCxn id="399" idx="2"/>
+            <a:endCxn id="524" idx="0"/>
+          </p:cNvCxnSpPr>
+          <p:nvPr/>
+        </p:nvCxnSpPr>
+        <p:spPr>
+          <a:xfrm rot="5400000">
+            <a:off x="45887296" y="27465277"/>
+            <a:ext cx="327134" cy="585876"/>
+          </a:xfrm>
+          <a:prstGeom prst="bentConnector3">
+            <a:avLst>
+              <a:gd name="adj1" fmla="val 50000"/>
+            </a:avLst>
+          </a:prstGeom>
+          <a:ln w="19050">
+            <a:tailEnd type="arrow"/>
+          </a:ln>
+        </p:spPr>
+        <p:style>
+          <a:lnRef idx="1">
+            <a:schemeClr val="accent1"/>
+          </a:lnRef>
+          <a:fillRef idx="0">
+            <a:schemeClr val="accent1"/>
+          </a:fillRef>
+          <a:effectRef idx="0">
+            <a:schemeClr val="accent1"/>
+          </a:effectRef>
+          <a:fontRef idx="minor">
+            <a:schemeClr val="tx1"/>
+          </a:fontRef>
+        </p:style>
+      </p:cxnSp>
+      <p:cxnSp>
+        <p:nvCxnSpPr>
+          <p:cNvPr id="532" name="Соединительная линия уступом 620">
+            <a:extLst>
+              <a:ext uri="{FF2B5EF4-FFF2-40B4-BE49-F238E27FC236}">
+                <a16:creationId xmlns:a16="http://schemas.microsoft.com/office/drawing/2014/main" id="{062A1D1C-4E68-49B0-89B3-9869C6922BC4}"/>
+              </a:ext>
+            </a:extLst>
+          </p:cNvPr>
+          <p:cNvCxnSpPr>
+            <a:cxnSpLocks/>
+            <a:stCxn id="401" idx="2"/>
+            <a:endCxn id="524" idx="0"/>
+          </p:cNvCxnSpPr>
+          <p:nvPr/>
+        </p:nvCxnSpPr>
+        <p:spPr>
+          <a:xfrm rot="16200000" flipH="1">
+            <a:off x="45295860" y="27459717"/>
+            <a:ext cx="327134" cy="596995"/>
+          </a:xfrm>
+          <a:prstGeom prst="bentConnector3">
+            <a:avLst>
+              <a:gd name="adj1" fmla="val 50000"/>
+            </a:avLst>
+          </a:prstGeom>
+          <a:ln w="19050">
+            <a:tailEnd type="arrow"/>
+          </a:ln>
+        </p:spPr>
+        <p:style>
+          <a:lnRef idx="1">
+            <a:schemeClr val="accent1"/>
+          </a:lnRef>
+          <a:fillRef idx="0">
+            <a:schemeClr val="accent1"/>
+          </a:fillRef>
+          <a:effectRef idx="0">
+            <a:schemeClr val="accent1"/>
+          </a:effectRef>
+          <a:fontRef idx="minor">
+            <a:schemeClr val="tx1"/>
+          </a:fontRef>
+        </p:style>
+      </p:cxnSp>
+      <p:sp>
+        <p:nvSpPr>
+          <p:cNvPr id="535" name="Прямоугольник 534">
+            <a:extLst>
+              <a:ext uri="{FF2B5EF4-FFF2-40B4-BE49-F238E27FC236}">
+                <a16:creationId xmlns:a16="http://schemas.microsoft.com/office/drawing/2014/main" id="{0EF51C39-5CDB-4991-B859-6F3CB100F62B}"/>
+              </a:ext>
+            </a:extLst>
+          </p:cNvPr>
+          <p:cNvSpPr/>
+          <p:nvPr/>
+        </p:nvSpPr>
+        <p:spPr>
+          <a:xfrm>
+            <a:off x="48361816" y="27921782"/>
+            <a:ext cx="926325" cy="540000"/>
+          </a:xfrm>
+          <a:prstGeom prst="rect">
+            <a:avLst/>
+          </a:prstGeom>
+          <a:solidFill>
+            <a:schemeClr val="accent2">
+              <a:lumMod val="75000"/>
+            </a:schemeClr>
+          </a:solidFill>
+          <a:ln w="19050"/>
+        </p:spPr>
+        <p:style>
+          <a:lnRef idx="2">
+            <a:schemeClr val="accent1"/>
+          </a:lnRef>
+          <a:fillRef idx="1">
+            <a:schemeClr val="lt1"/>
+          </a:fillRef>
+          <a:effectRef idx="0">
+            <a:schemeClr val="accent1"/>
+          </a:effectRef>
+          <a:fontRef idx="minor">
+            <a:schemeClr val="dk1"/>
+          </a:fontRef>
+        </p:style>
+        <p:txBody>
+          <a:bodyPr lIns="124733" tIns="62367" rIns="124733" bIns="62367" rtlCol="0" anchor="ctr"/>
+          <a:lstStyle/>
+          <a:p>
+            <a:pPr algn="ctr"/>
+            <a:r>
+              <a:rPr lang="ru-RU" sz="700" dirty="0"/>
+              <a:t>Объявить о создании Федерации арабских королевств</a:t>
+            </a:r>
+          </a:p>
+        </p:txBody>
+      </p:sp>
+      <p:cxnSp>
+        <p:nvCxnSpPr>
+          <p:cNvPr id="536" name="Соединительная линия уступом 620">
+            <a:extLst>
+              <a:ext uri="{FF2B5EF4-FFF2-40B4-BE49-F238E27FC236}">
+                <a16:creationId xmlns:a16="http://schemas.microsoft.com/office/drawing/2014/main" id="{70499EFD-2CD6-4B5A-BCCE-FD0B9B26485B}"/>
+              </a:ext>
+            </a:extLst>
+          </p:cNvPr>
+          <p:cNvCxnSpPr>
+            <a:cxnSpLocks/>
+            <a:stCxn id="495" idx="2"/>
+            <a:endCxn id="535" idx="0"/>
+          </p:cNvCxnSpPr>
+          <p:nvPr/>
+        </p:nvCxnSpPr>
+        <p:spPr>
+          <a:xfrm rot="16200000" flipH="1">
+            <a:off x="48348578" y="27445381"/>
+            <a:ext cx="327134" cy="625668"/>
+          </a:xfrm>
+          <a:prstGeom prst="bentConnector3">
+            <a:avLst>
+              <a:gd name="adj1" fmla="val 50000"/>
+            </a:avLst>
+          </a:prstGeom>
+          <a:ln w="19050">
+            <a:tailEnd type="arrow"/>
+          </a:ln>
+        </p:spPr>
+        <p:style>
+          <a:lnRef idx="1">
+            <a:schemeClr val="accent1"/>
+          </a:lnRef>
+          <a:fillRef idx="0">
+            <a:schemeClr val="accent1"/>
+          </a:fillRef>
+          <a:effectRef idx="0">
+            <a:schemeClr val="accent1"/>
+          </a:effectRef>
+          <a:fontRef idx="minor">
+            <a:schemeClr val="tx1"/>
+          </a:fontRef>
+        </p:style>
+      </p:cxnSp>
+      <p:cxnSp>
+        <p:nvCxnSpPr>
+          <p:cNvPr id="539" name="Соединительная линия уступом 620">
+            <a:extLst>
+              <a:ext uri="{FF2B5EF4-FFF2-40B4-BE49-F238E27FC236}">
+                <a16:creationId xmlns:a16="http://schemas.microsoft.com/office/drawing/2014/main" id="{035D5408-D287-4FEE-B46A-9DAE78A1D826}"/>
+              </a:ext>
+            </a:extLst>
+          </p:cNvPr>
+          <p:cNvCxnSpPr>
+            <a:cxnSpLocks/>
+            <a:stCxn id="499" idx="2"/>
+            <a:endCxn id="535" idx="0"/>
+          </p:cNvCxnSpPr>
+          <p:nvPr/>
+        </p:nvCxnSpPr>
+        <p:spPr>
+          <a:xfrm rot="5400000">
+            <a:off x="48971017" y="27445358"/>
+            <a:ext cx="330387" cy="622461"/>
+          </a:xfrm>
+          <a:prstGeom prst="bentConnector3">
+            <a:avLst>
+              <a:gd name="adj1" fmla="val 50000"/>
+            </a:avLst>
+          </a:prstGeom>
+          <a:ln w="19050">
+            <a:tailEnd type="arrow"/>
+          </a:ln>
+        </p:spPr>
+        <p:style>
+          <a:lnRef idx="1">
+            <a:schemeClr val="accent1"/>
+          </a:lnRef>
+          <a:fillRef idx="0">
+            <a:schemeClr val="accent1"/>
+          </a:fillRef>
+          <a:effectRef idx="0">
+            <a:schemeClr val="accent1"/>
+          </a:effectRef>
+          <a:fontRef idx="minor">
+            <a:schemeClr val="tx1"/>
+          </a:fontRef>
+        </p:style>
+      </p:cxnSp>
+      <p:sp>
+        <p:nvSpPr>
+          <p:cNvPr id="545" name="Прямоугольник 544">
+            <a:extLst>
+              <a:ext uri="{FF2B5EF4-FFF2-40B4-BE49-F238E27FC236}">
+                <a16:creationId xmlns:a16="http://schemas.microsoft.com/office/drawing/2014/main" id="{2B28C5F6-F8C7-4394-AFCC-203AC1D50050}"/>
+              </a:ext>
+            </a:extLst>
+          </p:cNvPr>
+          <p:cNvSpPr/>
+          <p:nvPr/>
+        </p:nvSpPr>
+        <p:spPr>
+          <a:xfrm>
+            <a:off x="7653732" y="9084771"/>
+            <a:ext cx="926325" cy="540000"/>
+          </a:xfrm>
+          <a:prstGeom prst="rect">
+            <a:avLst/>
+          </a:prstGeom>
+          <a:solidFill>
+            <a:schemeClr val="accent1">
+              <a:lumMod val="60000"/>
+              <a:lumOff val="40000"/>
+            </a:schemeClr>
+          </a:solidFill>
+          <a:ln w="19050"/>
+        </p:spPr>
+        <p:style>
+          <a:lnRef idx="2">
+            <a:schemeClr val="accent1"/>
+          </a:lnRef>
+          <a:fillRef idx="1">
+            <a:schemeClr val="lt1"/>
+          </a:fillRef>
+          <a:effectRef idx="0">
+            <a:schemeClr val="accent1"/>
+          </a:effectRef>
+          <a:fontRef idx="minor">
+            <a:schemeClr val="dk1"/>
+          </a:fontRef>
+        </p:style>
+        <p:txBody>
+          <a:bodyPr lIns="124733" tIns="62367" rIns="124733" bIns="62367" rtlCol="0" anchor="ctr"/>
+          <a:lstStyle/>
+          <a:p>
+            <a:pPr algn="ctr"/>
+            <a:r>
+              <a:rPr lang="ru-RU" sz="800" dirty="0"/>
+              <a:t>Ограничить власть монарха </a:t>
+            </a:r>
+            <a:r>
+              <a:rPr lang="ru-RU" sz="400" dirty="0"/>
+              <a:t>(Конституционная демократия с ограничением власти монарха и разделением властей.)</a:t>
+            </a:r>
+            <a:endParaRPr lang="ru-RU" sz="800" dirty="0"/>
+          </a:p>
+        </p:txBody>
+      </p:sp>
+      <p:cxnSp>
+        <p:nvCxnSpPr>
+          <p:cNvPr id="551" name="Соединительная линия уступом 620">
+            <a:extLst>
+              <a:ext uri="{FF2B5EF4-FFF2-40B4-BE49-F238E27FC236}">
+                <a16:creationId xmlns:a16="http://schemas.microsoft.com/office/drawing/2014/main" id="{4ED43F8D-A46A-4BB5-A376-66E38C1E51CA}"/>
+              </a:ext>
+            </a:extLst>
+          </p:cNvPr>
+          <p:cNvCxnSpPr>
+            <a:cxnSpLocks/>
+            <a:stCxn id="642" idx="2"/>
+            <a:endCxn id="645" idx="0"/>
+          </p:cNvCxnSpPr>
+          <p:nvPr/>
+        </p:nvCxnSpPr>
+        <p:spPr>
+          <a:xfrm rot="5400000">
+            <a:off x="10353529" y="8131374"/>
+            <a:ext cx="273575" cy="2711"/>
+          </a:xfrm>
+          <a:prstGeom prst="bentConnector3">
+            <a:avLst>
+              <a:gd name="adj1" fmla="val 50000"/>
+            </a:avLst>
+          </a:prstGeom>
+          <a:ln w="19050">
+            <a:tailEnd type="arrow"/>
+          </a:ln>
+        </p:spPr>
+        <p:style>
+          <a:lnRef idx="1">
+            <a:schemeClr val="accent1"/>
+          </a:lnRef>
+          <a:fillRef idx="0">
+            <a:schemeClr val="accent1"/>
+          </a:fillRef>
+          <a:effectRef idx="0">
+            <a:schemeClr val="accent1"/>
+          </a:effectRef>
+          <a:fontRef idx="minor">
+            <a:schemeClr val="tx1"/>
+          </a:fontRef>
+        </p:style>
+      </p:cxnSp>
+      <p:cxnSp>
+        <p:nvCxnSpPr>
+          <p:cNvPr id="555" name="Соединительная линия уступом 620">
+            <a:extLst>
+              <a:ext uri="{FF2B5EF4-FFF2-40B4-BE49-F238E27FC236}">
+                <a16:creationId xmlns:a16="http://schemas.microsoft.com/office/drawing/2014/main" id="{123B5ACA-56DC-4326-AC08-8DB7CAC572B1}"/>
+              </a:ext>
+            </a:extLst>
+          </p:cNvPr>
+          <p:cNvCxnSpPr>
+            <a:cxnSpLocks/>
+            <a:stCxn id="395" idx="2"/>
+            <a:endCxn id="545" idx="0"/>
+          </p:cNvCxnSpPr>
+          <p:nvPr/>
+        </p:nvCxnSpPr>
+        <p:spPr>
+          <a:xfrm rot="16200000" flipH="1">
+            <a:off x="7571521" y="8539396"/>
+            <a:ext cx="1089609" cy="1139"/>
+          </a:xfrm>
+          <a:prstGeom prst="bentConnector3">
+            <a:avLst>
+              <a:gd name="adj1" fmla="val 50000"/>
+            </a:avLst>
+          </a:prstGeom>
+          <a:ln w="19050">
+            <a:tailEnd type="arrow"/>
+          </a:ln>
+        </p:spPr>
+        <p:style>
+          <a:lnRef idx="1">
+            <a:schemeClr val="accent1"/>
+          </a:lnRef>
+          <a:fillRef idx="0">
+            <a:schemeClr val="accent1"/>
+          </a:fillRef>
+          <a:effectRef idx="0">
+            <a:schemeClr val="accent1"/>
+          </a:effectRef>
+          <a:fontRef idx="minor">
+            <a:schemeClr val="tx1"/>
+          </a:fontRef>
+        </p:style>
+      </p:cxnSp>
+      <p:sp>
+        <p:nvSpPr>
+          <p:cNvPr id="575" name="Прямоугольник 574">
+            <a:extLst>
+              <a:ext uri="{FF2B5EF4-FFF2-40B4-BE49-F238E27FC236}">
+                <a16:creationId xmlns:a16="http://schemas.microsoft.com/office/drawing/2014/main" id="{786780DD-B636-4AAA-BB44-1B2A63E40798}"/>
+              </a:ext>
+            </a:extLst>
+          </p:cNvPr>
+          <p:cNvSpPr/>
+          <p:nvPr/>
+        </p:nvSpPr>
+        <p:spPr>
+          <a:xfrm>
+            <a:off x="8251905" y="9881933"/>
+            <a:ext cx="926325" cy="533025"/>
+          </a:xfrm>
+          <a:prstGeom prst="rect">
+            <a:avLst/>
+          </a:prstGeom>
+          <a:solidFill>
+            <a:schemeClr val="accent1">
+              <a:lumMod val="60000"/>
+              <a:lumOff val="40000"/>
+            </a:schemeClr>
+          </a:solidFill>
+          <a:ln w="19050"/>
+        </p:spPr>
+        <p:style>
+          <a:lnRef idx="2">
+            <a:schemeClr val="accent1"/>
+          </a:lnRef>
+          <a:fillRef idx="1">
+            <a:schemeClr val="lt1"/>
+          </a:fillRef>
+          <a:effectRef idx="0">
+            <a:schemeClr val="accent1"/>
+          </a:effectRef>
+          <a:fontRef idx="minor">
+            <a:schemeClr val="dk1"/>
+          </a:fontRef>
+        </p:style>
+        <p:txBody>
+          <a:bodyPr lIns="124733" tIns="62367" rIns="124733" bIns="62367" rtlCol="0" anchor="ctr"/>
+          <a:lstStyle/>
+          <a:p>
+            <a:pPr algn="ctr"/>
+            <a:r>
+              <a:rPr lang="ru-RU" sz="700" dirty="0"/>
+              <a:t>Расширить студенческие движения</a:t>
+            </a:r>
+          </a:p>
+        </p:txBody>
+      </p:sp>
+      <p:cxnSp>
+        <p:nvCxnSpPr>
+          <p:cNvPr id="640" name="Соединительная линия уступом 620">
+            <a:extLst>
+              <a:ext uri="{FF2B5EF4-FFF2-40B4-BE49-F238E27FC236}">
+                <a16:creationId xmlns:a16="http://schemas.microsoft.com/office/drawing/2014/main" id="{D3BB0D87-6410-459C-A997-D75EE192B481}"/>
+              </a:ext>
+            </a:extLst>
+          </p:cNvPr>
+          <p:cNvCxnSpPr>
+            <a:cxnSpLocks/>
+            <a:stCxn id="545" idx="2"/>
+            <a:endCxn id="575" idx="0"/>
+          </p:cNvCxnSpPr>
+          <p:nvPr/>
+        </p:nvCxnSpPr>
+        <p:spPr>
+          <a:xfrm rot="16200000" flipH="1">
+            <a:off x="8287400" y="9454265"/>
+            <a:ext cx="257162" cy="598173"/>
+          </a:xfrm>
+          <a:prstGeom prst="bentConnector3">
+            <a:avLst>
+              <a:gd name="adj1" fmla="val 50000"/>
+            </a:avLst>
+          </a:prstGeom>
+          <a:ln w="19050">
+            <a:tailEnd type="arrow"/>
+          </a:ln>
+        </p:spPr>
+        <p:style>
+          <a:lnRef idx="1">
+            <a:schemeClr val="accent1"/>
+          </a:lnRef>
+          <a:fillRef idx="0">
+            <a:schemeClr val="accent1"/>
+          </a:fillRef>
+          <a:effectRef idx="0">
+            <a:schemeClr val="accent1"/>
+          </a:effectRef>
+          <a:fontRef idx="minor">
+            <a:schemeClr val="tx1"/>
+          </a:fontRef>
+        </p:style>
+      </p:cxnSp>
+      <p:cxnSp>
+        <p:nvCxnSpPr>
+          <p:cNvPr id="641" name="Соединительная линия уступом 620">
+            <a:extLst>
+              <a:ext uri="{FF2B5EF4-FFF2-40B4-BE49-F238E27FC236}">
+                <a16:creationId xmlns:a16="http://schemas.microsoft.com/office/drawing/2014/main" id="{7E403C6A-A16A-4AE5-83F9-8DF46F5E0B0D}"/>
+              </a:ext>
+            </a:extLst>
+          </p:cNvPr>
+          <p:cNvCxnSpPr>
+            <a:cxnSpLocks/>
+            <a:stCxn id="338" idx="2"/>
+            <a:endCxn id="353" idx="0"/>
+          </p:cNvCxnSpPr>
+          <p:nvPr/>
+        </p:nvCxnSpPr>
+        <p:spPr>
+          <a:xfrm rot="16200000" flipH="1">
+            <a:off x="9470842" y="9454443"/>
+            <a:ext cx="263512" cy="604168"/>
+          </a:xfrm>
+          <a:prstGeom prst="bentConnector3">
+            <a:avLst>
+              <a:gd name="adj1" fmla="val 50000"/>
+            </a:avLst>
+          </a:prstGeom>
+          <a:ln w="19050">
+            <a:tailEnd type="arrow"/>
+          </a:ln>
+        </p:spPr>
+        <p:style>
+          <a:lnRef idx="1">
+            <a:schemeClr val="accent1"/>
+          </a:lnRef>
+          <a:fillRef idx="0">
+            <a:schemeClr val="accent1"/>
+          </a:fillRef>
+          <a:effectRef idx="0">
+            <a:schemeClr val="accent1"/>
+          </a:effectRef>
+          <a:fontRef idx="minor">
+            <a:schemeClr val="tx1"/>
+          </a:fontRef>
+        </p:style>
+      </p:cxnSp>
+      <p:sp>
+        <p:nvSpPr>
+          <p:cNvPr id="642" name="Прямоугольник 641">
+            <a:extLst>
+              <a:ext uri="{FF2B5EF4-FFF2-40B4-BE49-F238E27FC236}">
+                <a16:creationId xmlns:a16="http://schemas.microsoft.com/office/drawing/2014/main" id="{BB533C37-A024-420F-AF5C-27EB9E4439F4}"/>
+              </a:ext>
+            </a:extLst>
+          </p:cNvPr>
+          <p:cNvSpPr/>
+          <p:nvPr/>
+        </p:nvSpPr>
+        <p:spPr>
+          <a:xfrm>
+            <a:off x="10028508" y="7455942"/>
             <a:ext cx="926325" cy="540000"/>
           </a:xfrm>
           <a:prstGeom prst="rect">
@@ -19570,17 +23215,125 @@
             <a:pPr algn="ctr"/>
             <a:r>
               <a:rPr lang="ru-RU" sz="700" dirty="0"/>
-              <a:t>Земли Португалии</a:t>
-            </a:r>
+              <a:t>Провести религиозное обновление</a:t>
+            </a:r>
+          </a:p>
+          <a:p>
+            <a:pPr algn="ctr"/>
+            <a:r>
+              <a:rPr lang="ru-RU" sz="200" dirty="0"/>
+              <a:t>(Исламский традиционализм и </a:t>
+            </a:r>
+            <a:r>
+              <a:rPr lang="ru-RU" sz="200" dirty="0" err="1"/>
+              <a:t>салафитский</a:t>
+            </a:r>
+            <a:r>
+              <a:rPr lang="ru-RU" sz="200" dirty="0"/>
+              <a:t> реформизм. Ставка на религиозное обновление.)</a:t>
+            </a:r>
+            <a:endParaRPr lang="ru-RU" sz="700" dirty="0"/>
           </a:p>
         </p:txBody>
       </p:sp>
+      <p:cxnSp>
+        <p:nvCxnSpPr>
+          <p:cNvPr id="643" name="Соединительная линия уступом 620">
+            <a:extLst>
+              <a:ext uri="{FF2B5EF4-FFF2-40B4-BE49-F238E27FC236}">
+                <a16:creationId xmlns:a16="http://schemas.microsoft.com/office/drawing/2014/main" id="{C965B5A5-794E-42B5-AB1C-407349D08A33}"/>
+              </a:ext>
+            </a:extLst>
+          </p:cNvPr>
+          <p:cNvCxnSpPr>
+            <a:cxnSpLocks/>
+            <a:stCxn id="362" idx="2"/>
+            <a:endCxn id="642" idx="0"/>
+          </p:cNvCxnSpPr>
+          <p:nvPr/>
+        </p:nvCxnSpPr>
+        <p:spPr>
+          <a:xfrm rot="16200000" flipH="1">
+            <a:off x="10067262" y="7031532"/>
+            <a:ext cx="261831" cy="586988"/>
+          </a:xfrm>
+          <a:prstGeom prst="bentConnector3">
+            <a:avLst>
+              <a:gd name="adj1" fmla="val 50000"/>
+            </a:avLst>
+          </a:prstGeom>
+          <a:ln w="19050">
+            <a:prstDash val="dash"/>
+            <a:tailEnd type="arrow"/>
+          </a:ln>
+        </p:spPr>
+        <p:style>
+          <a:lnRef idx="1">
+            <a:schemeClr val="accent1"/>
+          </a:lnRef>
+          <a:fillRef idx="0">
+            <a:schemeClr val="accent1"/>
+          </a:fillRef>
+          <a:effectRef idx="0">
+            <a:schemeClr val="accent1"/>
+          </a:effectRef>
+          <a:fontRef idx="minor">
+            <a:schemeClr val="tx1"/>
+          </a:fontRef>
+        </p:style>
+      </p:cxnSp>
+      <p:cxnSp>
+        <p:nvCxnSpPr>
+          <p:cNvPr id="644" name="Соединительная линия уступом 620">
+            <a:extLst>
+              <a:ext uri="{FF2B5EF4-FFF2-40B4-BE49-F238E27FC236}">
+                <a16:creationId xmlns:a16="http://schemas.microsoft.com/office/drawing/2014/main" id="{F4438365-BF06-4E75-9F42-3B2A80D3D5BE}"/>
+              </a:ext>
+            </a:extLst>
+          </p:cNvPr>
+          <p:cNvCxnSpPr>
+            <a:cxnSpLocks/>
+            <a:stCxn id="345" idx="2"/>
+            <a:endCxn id="642" idx="0"/>
+          </p:cNvCxnSpPr>
+          <p:nvPr/>
+        </p:nvCxnSpPr>
+        <p:spPr>
+          <a:xfrm rot="5400000">
+            <a:off x="10952454" y="6732103"/>
+            <a:ext cx="263056" cy="1184622"/>
+          </a:xfrm>
+          <a:prstGeom prst="bentConnector3">
+            <a:avLst>
+              <a:gd name="adj1" fmla="val 50000"/>
+            </a:avLst>
+          </a:prstGeom>
+          <a:ln w="19050">
+            <a:prstDash val="dash"/>
+            <a:tailEnd type="arrow"/>
+          </a:ln>
+        </p:spPr>
+        <p:style>
+          <a:lnRef idx="1">
+            <a:schemeClr val="accent1"/>
+          </a:lnRef>
+          <a:fillRef idx="0">
+            <a:schemeClr val="accent1"/>
+          </a:fillRef>
+          <a:effectRef idx="0">
+            <a:schemeClr val="accent1"/>
+          </a:effectRef>
+          <a:fontRef idx="minor">
+            <a:schemeClr val="tx1"/>
+          </a:fontRef>
+        </p:style>
+      </p:cxnSp>
       <p:sp>
         <p:nvSpPr>
-          <p:cNvPr id="398" name="Прямоугольник 397">
-            <a:extLst>
-              <a:ext uri="{FF2B5EF4-FFF2-40B4-BE49-F238E27FC236}">
-                <a16:creationId xmlns:a16="http://schemas.microsoft.com/office/drawing/2014/main" id="{28CEDD15-69A5-47C1-928C-D47DE891019A}"/>
+          <p:cNvPr id="645" name="Прямоугольник 644">
+            <a:extLst>
+              <a:ext uri="{FF2B5EF4-FFF2-40B4-BE49-F238E27FC236}">
+                <a16:creationId xmlns:a16="http://schemas.microsoft.com/office/drawing/2014/main" id="{7B37F56A-E948-4527-A037-80458BB9A7B2}"/>
               </a:ext>
             </a:extLst>
           </p:cNvPr>
@@ -19589,7 +23342,7 @@
         </p:nvSpPr>
         <p:spPr>
           <a:xfrm>
-            <a:off x="5277982" y="11488860"/>
+            <a:off x="10025797" y="8269517"/>
             <a:ext cx="926325" cy="540000"/>
           </a:xfrm>
           <a:prstGeom prst="rect">
@@ -19633,17 +23386,17 @@
             <a:pPr algn="ctr"/>
             <a:r>
               <a:rPr lang="ru-RU" sz="700" dirty="0"/>
-              <a:t>Оккупировать Гибралтар</a:t>
+              <a:t>Расширить религиозные движения</a:t>
             </a:r>
           </a:p>
         </p:txBody>
       </p:sp>
       <p:sp>
         <p:nvSpPr>
-          <p:cNvPr id="399" name="Прямоугольник 398">
-            <a:extLst>
-              <a:ext uri="{FF2B5EF4-FFF2-40B4-BE49-F238E27FC236}">
-                <a16:creationId xmlns:a16="http://schemas.microsoft.com/office/drawing/2014/main" id="{2757126F-767B-49BC-8A20-3EF2F6BAD339}"/>
+          <p:cNvPr id="646" name="Прямоугольник 645">
+            <a:extLst>
+              <a:ext uri="{FF2B5EF4-FFF2-40B4-BE49-F238E27FC236}">
+                <a16:creationId xmlns:a16="http://schemas.microsoft.com/office/drawing/2014/main" id="{71C433BE-2815-434C-9894-ED547310B728}"/>
               </a:ext>
             </a:extLst>
           </p:cNvPr>
@@ -19652,7 +23405,7 @@
         </p:nvSpPr>
         <p:spPr>
           <a:xfrm>
-            <a:off x="5868092" y="12288618"/>
+            <a:off x="10028508" y="9083092"/>
             <a:ext cx="926325" cy="540000"/>
           </a:xfrm>
           <a:prstGeom prst="rect">
@@ -19696,17 +23449,67 @@
             <a:pPr algn="ctr"/>
             <a:r>
               <a:rPr lang="ru-RU" sz="700" dirty="0"/>
-              <a:t>Реформировать Иберийские провинции под эмираты</a:t>
-            </a:r>
+              <a:t>Ввести </a:t>
+            </a:r>
+            <a:r>
+              <a:rPr lang="ru-RU" sz="700" dirty="0" err="1"/>
+              <a:t>закят</a:t>
+            </a:r>
+            <a:endParaRPr lang="ru-RU" sz="700" dirty="0"/>
           </a:p>
         </p:txBody>
       </p:sp>
+      <p:cxnSp>
+        <p:nvCxnSpPr>
+          <p:cNvPr id="647" name="Соединительная линия уступом 620">
+            <a:extLst>
+              <a:ext uri="{FF2B5EF4-FFF2-40B4-BE49-F238E27FC236}">
+                <a16:creationId xmlns:a16="http://schemas.microsoft.com/office/drawing/2014/main" id="{CB4958D7-7B1D-4C5E-A8C9-2E07977098A4}"/>
+              </a:ext>
+            </a:extLst>
+          </p:cNvPr>
+          <p:cNvCxnSpPr>
+            <a:cxnSpLocks/>
+            <a:stCxn id="645" idx="2"/>
+            <a:endCxn id="646" idx="0"/>
+          </p:cNvCxnSpPr>
+          <p:nvPr/>
+        </p:nvCxnSpPr>
+        <p:spPr>
+          <a:xfrm rot="16200000" flipH="1">
+            <a:off x="10353528" y="8944948"/>
+            <a:ext cx="273575" cy="2711"/>
+          </a:xfrm>
+          <a:prstGeom prst="bentConnector3">
+            <a:avLst>
+              <a:gd name="adj1" fmla="val 50000"/>
+            </a:avLst>
+          </a:prstGeom>
+          <a:ln w="19050">
+            <a:tailEnd type="arrow"/>
+          </a:ln>
+        </p:spPr>
+        <p:style>
+          <a:lnRef idx="1">
+            <a:schemeClr val="accent1"/>
+          </a:lnRef>
+          <a:fillRef idx="0">
+            <a:schemeClr val="accent1"/>
+          </a:fillRef>
+          <a:effectRef idx="0">
+            <a:schemeClr val="accent1"/>
+          </a:effectRef>
+          <a:fontRef idx="minor">
+            <a:schemeClr val="tx1"/>
+          </a:fontRef>
+        </p:style>
+      </p:cxnSp>
       <p:sp>
         <p:nvSpPr>
-          <p:cNvPr id="401" name="Прямоугольник 400">
-            <a:extLst>
-              <a:ext uri="{FF2B5EF4-FFF2-40B4-BE49-F238E27FC236}">
-                <a16:creationId xmlns:a16="http://schemas.microsoft.com/office/drawing/2014/main" id="{98F1BED1-5D08-4C89-AA68-C9EEB86A12A3}"/>
+          <p:cNvPr id="648" name="Прямоугольник 647">
+            <a:extLst>
+              <a:ext uri="{FF2B5EF4-FFF2-40B4-BE49-F238E27FC236}">
+                <a16:creationId xmlns:a16="http://schemas.microsoft.com/office/drawing/2014/main" id="{D82C8962-4A55-40F2-92BE-18230CFEFB9E}"/>
               </a:ext>
             </a:extLst>
           </p:cNvPr>
@@ -19715,7 +23518,7 @@
         </p:nvSpPr>
         <p:spPr>
           <a:xfrm>
-            <a:off x="4685221" y="12288618"/>
+            <a:off x="5867315" y="10693099"/>
             <a:ext cx="926325" cy="540000"/>
           </a:xfrm>
           <a:prstGeom prst="rect">
@@ -19759,31 +23562,157 @@
             <a:pPr algn="ctr"/>
             <a:r>
               <a:rPr lang="ru-RU" sz="700" dirty="0"/>
-              <a:t>Продвижение ислама на Пиренейском полуострове</a:t>
-            </a:r>
+              <a:t>Снять кандалы с берберов (Алжир и Тунис)</a:t>
+            </a:r>
+          </a:p>
+        </p:txBody>
+      </p:sp>
+      <p:sp>
+        <p:nvSpPr>
+          <p:cNvPr id="650" name="Прямоугольник 649">
+            <a:extLst>
+              <a:ext uri="{FF2B5EF4-FFF2-40B4-BE49-F238E27FC236}">
+                <a16:creationId xmlns:a16="http://schemas.microsoft.com/office/drawing/2014/main" id="{B9D1C4C9-A2D5-4A7D-990E-D8E0541A843E}"/>
+              </a:ext>
+            </a:extLst>
+          </p:cNvPr>
+          <p:cNvSpPr/>
+          <p:nvPr/>
+        </p:nvSpPr>
+        <p:spPr>
+          <a:xfrm>
+            <a:off x="11216384" y="8269651"/>
+            <a:ext cx="926325" cy="540000"/>
+          </a:xfrm>
+          <a:prstGeom prst="rect">
+            <a:avLst/>
+          </a:prstGeom>
+          <a:solidFill>
+            <a:srgbClr val="7030A0"/>
+          </a:solidFill>
+          <a:ln w="19050"/>
+        </p:spPr>
+        <p:style>
+          <a:lnRef idx="2">
+            <a:schemeClr val="accent1"/>
+          </a:lnRef>
+          <a:fillRef idx="1">
+            <a:schemeClr val="lt1"/>
+          </a:fillRef>
+          <a:effectRef idx="0">
+            <a:schemeClr val="accent1"/>
+          </a:effectRef>
+          <a:fontRef idx="minor">
+            <a:schemeClr val="dk1"/>
+          </a:fontRef>
+        </p:style>
+        <p:txBody>
+          <a:bodyPr lIns="124733" tIns="62367" rIns="124733" bIns="62367" rtlCol="0" anchor="ctr"/>
+          <a:lstStyle/>
+          <a:p>
+            <a:pPr algn="ctr"/>
+            <a:r>
+              <a:rPr lang="ru-RU" sz="700" dirty="0"/>
+              <a:t>Предоставить евреям укрытие и защиту</a:t>
+            </a:r>
+          </a:p>
+        </p:txBody>
+      </p:sp>
+      <p:sp>
+        <p:nvSpPr>
+          <p:cNvPr id="651" name="Прямоугольник 650">
+            <a:extLst>
+              <a:ext uri="{FF2B5EF4-FFF2-40B4-BE49-F238E27FC236}">
+                <a16:creationId xmlns:a16="http://schemas.microsoft.com/office/drawing/2014/main" id="{ECEB2BDC-5C22-4C53-874C-0D93BC34C179}"/>
+              </a:ext>
+            </a:extLst>
+          </p:cNvPr>
+          <p:cNvSpPr/>
+          <p:nvPr/>
+        </p:nvSpPr>
+        <p:spPr>
+          <a:xfrm>
+            <a:off x="11216385" y="9078900"/>
+            <a:ext cx="926325" cy="540000"/>
+          </a:xfrm>
+          <a:prstGeom prst="rect">
+            <a:avLst/>
+          </a:prstGeom>
+          <a:solidFill>
+            <a:srgbClr val="7030A0"/>
+          </a:solidFill>
+          <a:ln w="19050"/>
+        </p:spPr>
+        <p:style>
+          <a:lnRef idx="2">
+            <a:schemeClr val="accent1"/>
+          </a:lnRef>
+          <a:fillRef idx="1">
+            <a:schemeClr val="lt1"/>
+          </a:fillRef>
+          <a:effectRef idx="0">
+            <a:schemeClr val="accent1"/>
+          </a:effectRef>
+          <a:fontRef idx="minor">
+            <a:schemeClr val="dk1"/>
+          </a:fontRef>
+        </p:style>
+        <p:txBody>
+          <a:bodyPr lIns="124733" tIns="62367" rIns="124733" bIns="62367" rtlCol="0" anchor="ctr"/>
+          <a:lstStyle/>
+          <a:p>
+            <a:pPr algn="ctr"/>
+            <a:r>
+              <a:rPr lang="ru-RU" sz="700" dirty="0"/>
+              <a:t>Присяга Племен (</a:t>
+            </a:r>
+            <a:r>
+              <a:rPr lang="ru-RU" sz="700" dirty="0" err="1"/>
+              <a:t>Байа</a:t>
+            </a:r>
+            <a:r>
+              <a:rPr lang="ru-RU" sz="700" dirty="0"/>
+              <a:t>)</a:t>
+            </a:r>
+            <a:br>
+              <a:rPr lang="ru-RU" sz="700" dirty="0"/>
+            </a:br>
+            <a:r>
+              <a:rPr lang="ru-RU" sz="200" dirty="0"/>
+              <a:t>Восстановление древнего ритуала, когда вожди всех племен лично клянутся в верности королю. Фокус снижает </a:t>
+            </a:r>
+            <a:r>
+              <a:rPr lang="ru-RU" sz="200" dirty="0" err="1"/>
+              <a:t>дебаффы</a:t>
+            </a:r>
+            <a:r>
+              <a:rPr lang="ru-RU" sz="200" dirty="0"/>
+              <a:t> от автономии регионов до нуля.</a:t>
+            </a:r>
+            <a:endParaRPr lang="ru-RU" sz="700" dirty="0"/>
           </a:p>
         </p:txBody>
       </p:sp>
       <p:cxnSp>
         <p:nvCxnSpPr>
-          <p:cNvPr id="402" name="Соединительная линия уступом 620">
-            <a:extLst>
-              <a:ext uri="{FF2B5EF4-FFF2-40B4-BE49-F238E27FC236}">
-                <a16:creationId xmlns:a16="http://schemas.microsoft.com/office/drawing/2014/main" id="{2EF2ABD2-BA85-4697-AE78-CF7878ADA90D}"/>
+          <p:cNvPr id="652" name="Соединительная линия уступом 620">
+            <a:extLst>
+              <a:ext uri="{FF2B5EF4-FFF2-40B4-BE49-F238E27FC236}">
+                <a16:creationId xmlns:a16="http://schemas.microsoft.com/office/drawing/2014/main" id="{6B19BAA7-B876-4FDF-8720-711CCAF6895F}"/>
               </a:ext>
             </a:extLst>
           </p:cNvPr>
           <p:cNvCxnSpPr>
             <a:cxnSpLocks/>
-            <a:stCxn id="388" idx="2"/>
-            <a:endCxn id="393" idx="0"/>
+            <a:stCxn id="422" idx="2"/>
+            <a:endCxn id="650" idx="0"/>
           </p:cNvCxnSpPr>
           <p:nvPr/>
         </p:nvCxnSpPr>
         <p:spPr>
           <a:xfrm rot="5400000">
-            <a:off x="5314357" y="10262312"/>
-            <a:ext cx="260819" cy="592761"/>
+            <a:off x="11539151" y="8129253"/>
+            <a:ext cx="280795" cy="1"/>
           </a:xfrm>
           <a:prstGeom prst="bentConnector3">
             <a:avLst>
@@ -19811,24 +23740,24 @@
       </p:cxnSp>
       <p:cxnSp>
         <p:nvCxnSpPr>
-          <p:cNvPr id="404" name="Соединительная линия уступом 620">
-            <a:extLst>
-              <a:ext uri="{FF2B5EF4-FFF2-40B4-BE49-F238E27FC236}">
-                <a16:creationId xmlns:a16="http://schemas.microsoft.com/office/drawing/2014/main" id="{CA823A6B-39CF-47ED-A88F-0C536E2E29A6}"/>
+          <p:cNvPr id="653" name="Соединительная линия уступом 620">
+            <a:extLst>
+              <a:ext uri="{FF2B5EF4-FFF2-40B4-BE49-F238E27FC236}">
+                <a16:creationId xmlns:a16="http://schemas.microsoft.com/office/drawing/2014/main" id="{AA676E65-2BF0-4B34-A2D0-5D1E66729705}"/>
               </a:ext>
             </a:extLst>
           </p:cNvPr>
           <p:cNvCxnSpPr>
             <a:cxnSpLocks/>
-            <a:stCxn id="388" idx="2"/>
-            <a:endCxn id="391" idx="0"/>
+            <a:stCxn id="650" idx="2"/>
+            <a:endCxn id="651" idx="0"/>
           </p:cNvCxnSpPr>
           <p:nvPr/>
         </p:nvCxnSpPr>
         <p:spPr>
           <a:xfrm rot="16200000" flipH="1">
-            <a:off x="5909486" y="10259942"/>
-            <a:ext cx="260289" cy="596969"/>
+            <a:off x="11544923" y="8944274"/>
+            <a:ext cx="269249" cy="1"/>
           </a:xfrm>
           <a:prstGeom prst="bentConnector3">
             <a:avLst>
@@ -19854,147 +23783,12 @@
           </a:fontRef>
         </p:style>
       </p:cxnSp>
-      <p:cxnSp>
-        <p:nvCxnSpPr>
-          <p:cNvPr id="405" name="Соединительная линия уступом 620">
-            <a:extLst>
-              <a:ext uri="{FF2B5EF4-FFF2-40B4-BE49-F238E27FC236}">
-                <a16:creationId xmlns:a16="http://schemas.microsoft.com/office/drawing/2014/main" id="{8C529540-B4D6-4BB9-92AD-DEE61AFB1831}"/>
-              </a:ext>
-            </a:extLst>
-          </p:cNvPr>
-          <p:cNvCxnSpPr>
-            <a:cxnSpLocks/>
-            <a:stCxn id="388" idx="2"/>
-            <a:endCxn id="398" idx="0"/>
-          </p:cNvCxnSpPr>
-          <p:nvPr/>
-        </p:nvCxnSpPr>
-        <p:spPr>
-          <a:xfrm rot="5400000">
-            <a:off x="5210858" y="10958571"/>
-            <a:ext cx="1060577" cy="1"/>
-          </a:xfrm>
-          <a:prstGeom prst="bentConnector3">
-            <a:avLst>
-              <a:gd name="adj1" fmla="val 50000"/>
-            </a:avLst>
-          </a:prstGeom>
-          <a:ln w="19050">
-            <a:tailEnd type="arrow"/>
-          </a:ln>
-        </p:spPr>
-        <p:style>
-          <a:lnRef idx="1">
-            <a:schemeClr val="accent1"/>
-          </a:lnRef>
-          <a:fillRef idx="0">
-            <a:schemeClr val="accent1"/>
-          </a:fillRef>
-          <a:effectRef idx="0">
-            <a:schemeClr val="accent1"/>
-          </a:effectRef>
-          <a:fontRef idx="minor">
-            <a:schemeClr val="tx1"/>
-          </a:fontRef>
-        </p:style>
-      </p:cxnSp>
-      <p:cxnSp>
-        <p:nvCxnSpPr>
-          <p:cNvPr id="407" name="Соединительная линия уступом 620">
-            <a:extLst>
-              <a:ext uri="{FF2B5EF4-FFF2-40B4-BE49-F238E27FC236}">
-                <a16:creationId xmlns:a16="http://schemas.microsoft.com/office/drawing/2014/main" id="{C222986D-1E4F-4588-B963-F7419387B849}"/>
-              </a:ext>
-            </a:extLst>
-          </p:cNvPr>
-          <p:cNvCxnSpPr>
-            <a:cxnSpLocks/>
-            <a:stCxn id="398" idx="2"/>
-            <a:endCxn id="401" idx="0"/>
-          </p:cNvCxnSpPr>
-          <p:nvPr/>
-        </p:nvCxnSpPr>
-        <p:spPr>
-          <a:xfrm rot="5400000">
-            <a:off x="5314886" y="11862359"/>
-            <a:ext cx="259758" cy="592761"/>
-          </a:xfrm>
-          <a:prstGeom prst="bentConnector3">
-            <a:avLst>
-              <a:gd name="adj1" fmla="val 50000"/>
-            </a:avLst>
-          </a:prstGeom>
-          <a:ln w="19050">
-            <a:tailEnd type="arrow"/>
-          </a:ln>
-        </p:spPr>
-        <p:style>
-          <a:lnRef idx="1">
-            <a:schemeClr val="accent1"/>
-          </a:lnRef>
-          <a:fillRef idx="0">
-            <a:schemeClr val="accent1"/>
-          </a:fillRef>
-          <a:effectRef idx="0">
-            <a:schemeClr val="accent1"/>
-          </a:effectRef>
-          <a:fontRef idx="minor">
-            <a:schemeClr val="tx1"/>
-          </a:fontRef>
-        </p:style>
-      </p:cxnSp>
-      <p:cxnSp>
-        <p:nvCxnSpPr>
-          <p:cNvPr id="408" name="Соединительная линия уступом 620">
-            <a:extLst>
-              <a:ext uri="{FF2B5EF4-FFF2-40B4-BE49-F238E27FC236}">
-                <a16:creationId xmlns:a16="http://schemas.microsoft.com/office/drawing/2014/main" id="{4C3C96C6-F2ED-4F21-9CE9-26F579EBDE06}"/>
-              </a:ext>
-            </a:extLst>
-          </p:cNvPr>
-          <p:cNvCxnSpPr>
-            <a:cxnSpLocks/>
-            <a:stCxn id="398" idx="2"/>
-            <a:endCxn id="399" idx="0"/>
-          </p:cNvCxnSpPr>
-          <p:nvPr/>
-        </p:nvCxnSpPr>
-        <p:spPr>
-          <a:xfrm rot="16200000" flipH="1">
-            <a:off x="5906321" y="11863684"/>
-            <a:ext cx="259758" cy="590110"/>
-          </a:xfrm>
-          <a:prstGeom prst="bentConnector3">
-            <a:avLst>
-              <a:gd name="adj1" fmla="val 50000"/>
-            </a:avLst>
-          </a:prstGeom>
-          <a:ln w="19050">
-            <a:tailEnd type="arrow"/>
-          </a:ln>
-        </p:spPr>
-        <p:style>
-          <a:lnRef idx="1">
-            <a:schemeClr val="accent1"/>
-          </a:lnRef>
-          <a:fillRef idx="0">
-            <a:schemeClr val="accent1"/>
-          </a:fillRef>
-          <a:effectRef idx="0">
-            <a:schemeClr val="accent1"/>
-          </a:effectRef>
-          <a:fontRef idx="minor">
-            <a:schemeClr val="tx1"/>
-          </a:fontRef>
-        </p:style>
-      </p:cxnSp>
       <p:sp>
         <p:nvSpPr>
-          <p:cNvPr id="341" name="Прямоугольник 340">
-            <a:extLst>
-              <a:ext uri="{FF2B5EF4-FFF2-40B4-BE49-F238E27FC236}">
-                <a16:creationId xmlns:a16="http://schemas.microsoft.com/office/drawing/2014/main" id="{3C2402F4-31AF-448C-B8FA-52B3ADC9CEE0}"/>
+          <p:cNvPr id="654" name="Прямоугольник 653">
+            <a:extLst>
+              <a:ext uri="{FF2B5EF4-FFF2-40B4-BE49-F238E27FC236}">
+                <a16:creationId xmlns:a16="http://schemas.microsoft.com/office/drawing/2014/main" id="{18C3F344-7D3E-437B-BFE4-9B6FC17E03FD}"/>
               </a:ext>
             </a:extLst>
           </p:cNvPr>
@@ -20003,7 +23797,7 @@
         </p:nvSpPr>
         <p:spPr>
           <a:xfrm>
-            <a:off x="5875167" y="6663485"/>
+            <a:off x="7058064" y="10693099"/>
             <a:ext cx="926325" cy="540000"/>
           </a:xfrm>
           <a:prstGeom prst="rect">
@@ -20047,17 +23841,17 @@
             <a:pPr algn="ctr"/>
             <a:r>
               <a:rPr lang="ru-RU" sz="700" dirty="0"/>
-              <a:t>Поддержать волнения в Мавритании</a:t>
+              <a:t>Распространить свою власть на Магриб</a:t>
             </a:r>
           </a:p>
         </p:txBody>
       </p:sp>
       <p:sp>
         <p:nvSpPr>
-          <p:cNvPr id="411" name="Прямоугольник 410">
-            <a:extLst>
-              <a:ext uri="{FF2B5EF4-FFF2-40B4-BE49-F238E27FC236}">
-                <a16:creationId xmlns:a16="http://schemas.microsoft.com/office/drawing/2014/main" id="{C688C71C-1C36-4FD3-ADF8-83A350ED6574}"/>
+          <p:cNvPr id="655" name="Прямоугольник 654">
+            <a:extLst>
+              <a:ext uri="{FF2B5EF4-FFF2-40B4-BE49-F238E27FC236}">
+                <a16:creationId xmlns:a16="http://schemas.microsoft.com/office/drawing/2014/main" id="{60FF396B-0DD4-4BCC-B80F-1FD9B4AA67F3}"/>
               </a:ext>
             </a:extLst>
           </p:cNvPr>
@@ -20066,15 +23860,27 @@
         </p:nvSpPr>
         <p:spPr>
           <a:xfrm>
-            <a:off x="10028508" y="4235046"/>
+            <a:off x="4687924" y="10693099"/>
             <a:ext cx="926325" cy="540000"/>
           </a:xfrm>
           <a:prstGeom prst="rect">
             <a:avLst/>
           </a:prstGeom>
-          <a:solidFill>
-            <a:srgbClr val="7030A0"/>
-          </a:solidFill>
+          <a:gradFill flip="none" rotWithShape="1">
+            <a:gsLst>
+              <a:gs pos="0">
+                <a:srgbClr val="7030A0"/>
+              </a:gs>
+              <a:gs pos="100000">
+                <a:schemeClr val="accent1">
+                  <a:lumMod val="60000"/>
+                  <a:lumOff val="40000"/>
+                </a:schemeClr>
+              </a:gs>
+            </a:gsLst>
+            <a:lin ang="0" scaled="1"/>
+            <a:tileRect/>
+          </a:gradFill>
           <a:ln w="19050"/>
         </p:spPr>
         <p:style>
@@ -20098,76 +23904,31 @@
             <a:pPr algn="ctr"/>
             <a:r>
               <a:rPr lang="ru-RU" sz="700" dirty="0"/>
-              <a:t>Назначит лояльного королю визиря</a:t>
+              <a:t>Прогнать колонизаторов с Ливийского плата (Ливия, Египет, Судан)</a:t>
             </a:r>
           </a:p>
         </p:txBody>
       </p:sp>
       <p:cxnSp>
         <p:nvCxnSpPr>
-          <p:cNvPr id="412" name="Прямая соединительная линия 411">
-            <a:extLst>
-              <a:ext uri="{FF2B5EF4-FFF2-40B4-BE49-F238E27FC236}">
-                <a16:creationId xmlns:a16="http://schemas.microsoft.com/office/drawing/2014/main" id="{FE3D907B-C345-42EE-9CEE-AE0F130BD2FE}"/>
+          <p:cNvPr id="656" name="Соединительная линия уступом 620">
+            <a:extLst>
+              <a:ext uri="{FF2B5EF4-FFF2-40B4-BE49-F238E27FC236}">
+                <a16:creationId xmlns:a16="http://schemas.microsoft.com/office/drawing/2014/main" id="{9AE567B0-4A3A-4FF3-9DBD-A84E5CC1C1FF}"/>
               </a:ext>
             </a:extLst>
           </p:cNvPr>
           <p:cNvCxnSpPr>
             <a:cxnSpLocks/>
-            <a:stCxn id="411" idx="1"/>
-            <a:endCxn id="275" idx="3"/>
+            <a:stCxn id="435" idx="2"/>
+            <a:endCxn id="655" idx="0"/>
           </p:cNvCxnSpPr>
           <p:nvPr/>
         </p:nvCxnSpPr>
         <p:spPr>
-          <a:xfrm flipH="1">
-            <a:off x="9768525" y="4505046"/>
-            <a:ext cx="259983" cy="0"/>
-          </a:xfrm>
-          <a:prstGeom prst="line">
-            <a:avLst/>
-          </a:prstGeom>
-          <a:ln w="38100">
-            <a:solidFill>
-              <a:srgbClr val="C00000"/>
-            </a:solidFill>
-          </a:ln>
-        </p:spPr>
-        <p:style>
-          <a:lnRef idx="1">
-            <a:schemeClr val="accent1"/>
-          </a:lnRef>
-          <a:fillRef idx="0">
-            <a:schemeClr val="accent1"/>
-          </a:fillRef>
-          <a:effectRef idx="0">
-            <a:schemeClr val="accent1"/>
-          </a:effectRef>
-          <a:fontRef idx="minor">
-            <a:schemeClr val="tx1"/>
-          </a:fontRef>
-        </p:style>
-      </p:cxnSp>
-      <p:cxnSp>
-        <p:nvCxnSpPr>
-          <p:cNvPr id="413" name="Соединительная линия уступом 620">
-            <a:extLst>
-              <a:ext uri="{FF2B5EF4-FFF2-40B4-BE49-F238E27FC236}">
-                <a16:creationId xmlns:a16="http://schemas.microsoft.com/office/drawing/2014/main" id="{8B330FB8-FF98-4300-95FC-E9679674C672}"/>
-              </a:ext>
-            </a:extLst>
-          </p:cNvPr>
-          <p:cNvCxnSpPr>
-            <a:cxnSpLocks/>
-            <a:stCxn id="287" idx="2"/>
-            <a:endCxn id="411" idx="0"/>
-          </p:cNvCxnSpPr>
-          <p:nvPr/>
-        </p:nvCxnSpPr>
-        <p:spPr>
-          <a:xfrm rot="16200000" flipH="1">
-            <a:off x="9765346" y="3508721"/>
-            <a:ext cx="263056" cy="1189594"/>
+          <a:xfrm rot="5400000">
+            <a:off x="5608764" y="9970607"/>
+            <a:ext cx="264816" cy="1180169"/>
           </a:xfrm>
           <a:prstGeom prst="bentConnector3">
             <a:avLst>
@@ -20195,24 +23956,24 @@
       </p:cxnSp>
       <p:cxnSp>
         <p:nvCxnSpPr>
-          <p:cNvPr id="414" name="Соединительная линия уступом 620">
-            <a:extLst>
-              <a:ext uri="{FF2B5EF4-FFF2-40B4-BE49-F238E27FC236}">
-                <a16:creationId xmlns:a16="http://schemas.microsoft.com/office/drawing/2014/main" id="{6F7D6D57-CFAB-4E36-9036-A9781AB86AF9}"/>
+          <p:cNvPr id="657" name="Соединительная линия уступом 620">
+            <a:extLst>
+              <a:ext uri="{FF2B5EF4-FFF2-40B4-BE49-F238E27FC236}">
+                <a16:creationId xmlns:a16="http://schemas.microsoft.com/office/drawing/2014/main" id="{A529821E-5D37-4BEC-98C4-B1362AD5926A}"/>
               </a:ext>
             </a:extLst>
           </p:cNvPr>
           <p:cNvCxnSpPr>
             <a:cxnSpLocks/>
-            <a:stCxn id="411" idx="2"/>
-            <a:endCxn id="336" idx="0"/>
+            <a:stCxn id="435" idx="2"/>
+            <a:endCxn id="648" idx="0"/>
           </p:cNvCxnSpPr>
           <p:nvPr/>
         </p:nvCxnSpPr>
         <p:spPr>
-          <a:xfrm rot="16200000" flipH="1">
-            <a:off x="10357636" y="4909081"/>
-            <a:ext cx="270540" cy="2470"/>
+          <a:xfrm rot="5400000">
+            <a:off x="6198459" y="10560302"/>
+            <a:ext cx="264816" cy="778"/>
           </a:xfrm>
           <a:prstGeom prst="bentConnector3">
             <a:avLst>
@@ -20238,26 +23999,205 @@
           </a:fontRef>
         </p:style>
       </p:cxnSp>
+      <p:sp>
+        <p:nvSpPr>
+          <p:cNvPr id="658" name="Прямоугольник 657">
+            <a:extLst>
+              <a:ext uri="{FF2B5EF4-FFF2-40B4-BE49-F238E27FC236}">
+                <a16:creationId xmlns:a16="http://schemas.microsoft.com/office/drawing/2014/main" id="{3CAB67B9-2BAC-4278-83A4-4C135EE9E7FE}"/>
+              </a:ext>
+            </a:extLst>
+          </p:cNvPr>
+          <p:cNvSpPr/>
+          <p:nvPr/>
+        </p:nvSpPr>
+        <p:spPr>
+          <a:xfrm>
+            <a:off x="5278009" y="11497915"/>
+            <a:ext cx="926325" cy="540000"/>
+          </a:xfrm>
+          <a:prstGeom prst="rect">
+            <a:avLst/>
+          </a:prstGeom>
+          <a:gradFill flip="none" rotWithShape="1">
+            <a:gsLst>
+              <a:gs pos="0">
+                <a:srgbClr val="7030A0"/>
+              </a:gs>
+              <a:gs pos="100000">
+                <a:schemeClr val="accent1">
+                  <a:lumMod val="60000"/>
+                  <a:lumOff val="40000"/>
+                </a:schemeClr>
+              </a:gs>
+            </a:gsLst>
+            <a:lin ang="0" scaled="1"/>
+            <a:tileRect/>
+          </a:gradFill>
+          <a:ln w="19050"/>
+        </p:spPr>
+        <p:style>
+          <a:lnRef idx="2">
+            <a:schemeClr val="accent1"/>
+          </a:lnRef>
+          <a:fillRef idx="1">
+            <a:schemeClr val="lt1"/>
+          </a:fillRef>
+          <a:effectRef idx="0">
+            <a:schemeClr val="accent1"/>
+          </a:effectRef>
+          <a:fontRef idx="minor">
+            <a:schemeClr val="dk1"/>
+          </a:fontRef>
+        </p:style>
+        <p:txBody>
+          <a:bodyPr lIns="124733" tIns="62367" rIns="124733" bIns="62367" rtlCol="0" anchor="ctr"/>
+          <a:lstStyle/>
+          <a:p>
+            <a:pPr algn="ctr"/>
+            <a:r>
+              <a:rPr lang="ru-RU" sz="700" dirty="0"/>
+              <a:t>Освободить Аравийский полуостров</a:t>
+            </a:r>
+          </a:p>
+        </p:txBody>
+      </p:sp>
       <p:cxnSp>
         <p:nvCxnSpPr>
-          <p:cNvPr id="416" name="Соединительная линия уступом 620">
-            <a:extLst>
-              <a:ext uri="{FF2B5EF4-FFF2-40B4-BE49-F238E27FC236}">
-                <a16:creationId xmlns:a16="http://schemas.microsoft.com/office/drawing/2014/main" id="{E4830A77-CFFB-4D97-BE75-3D5605CF1301}"/>
+          <p:cNvPr id="659" name="Соединительная линия уступом 620">
+            <a:extLst>
+              <a:ext uri="{FF2B5EF4-FFF2-40B4-BE49-F238E27FC236}">
+                <a16:creationId xmlns:a16="http://schemas.microsoft.com/office/drawing/2014/main" id="{80BCEB1D-113A-4DA9-BDFF-F4C5FEE9E390}"/>
               </a:ext>
             </a:extLst>
           </p:cNvPr>
           <p:cNvCxnSpPr>
             <a:cxnSpLocks/>
-            <a:stCxn id="336" idx="2"/>
-            <a:endCxn id="320" idx="0"/>
+            <a:stCxn id="435" idx="2"/>
+            <a:endCxn id="658" idx="0"/>
           </p:cNvCxnSpPr>
           <p:nvPr/>
         </p:nvCxnSpPr>
         <p:spPr>
           <a:xfrm rot="5400000">
-            <a:off x="9176723" y="4532110"/>
-            <a:ext cx="263942" cy="2370895"/>
+            <a:off x="5501398" y="10668057"/>
+            <a:ext cx="1069632" cy="590084"/>
+          </a:xfrm>
+          <a:prstGeom prst="bentConnector3">
+            <a:avLst>
+              <a:gd name="adj1" fmla="val 12599"/>
+            </a:avLst>
+          </a:prstGeom>
+          <a:ln w="19050">
+            <a:tailEnd type="arrow"/>
+          </a:ln>
+        </p:spPr>
+        <p:style>
+          <a:lnRef idx="1">
+            <a:schemeClr val="accent1"/>
+          </a:lnRef>
+          <a:fillRef idx="0">
+            <a:schemeClr val="accent1"/>
+          </a:fillRef>
+          <a:effectRef idx="0">
+            <a:schemeClr val="accent1"/>
+          </a:effectRef>
+          <a:fontRef idx="minor">
+            <a:schemeClr val="tx1"/>
+          </a:fontRef>
+        </p:style>
+      </p:cxnSp>
+      <p:sp>
+        <p:nvSpPr>
+          <p:cNvPr id="660" name="Прямоугольник 659">
+            <a:extLst>
+              <a:ext uri="{FF2B5EF4-FFF2-40B4-BE49-F238E27FC236}">
+                <a16:creationId xmlns:a16="http://schemas.microsoft.com/office/drawing/2014/main" id="{4656699D-0F42-4F89-9AB6-5CB375631316}"/>
+              </a:ext>
+            </a:extLst>
+          </p:cNvPr>
+          <p:cNvSpPr/>
+          <p:nvPr/>
+        </p:nvSpPr>
+        <p:spPr>
+          <a:xfrm>
+            <a:off x="5862551" y="12294965"/>
+            <a:ext cx="926325" cy="540000"/>
+          </a:xfrm>
+          <a:prstGeom prst="rect">
+            <a:avLst/>
+          </a:prstGeom>
+          <a:gradFill flip="none" rotWithShape="1">
+            <a:gsLst>
+              <a:gs pos="0">
+                <a:srgbClr val="7030A0"/>
+              </a:gs>
+              <a:gs pos="100000">
+                <a:schemeClr val="accent1">
+                  <a:lumMod val="60000"/>
+                  <a:lumOff val="40000"/>
+                </a:schemeClr>
+              </a:gs>
+            </a:gsLst>
+            <a:lin ang="0" scaled="1"/>
+            <a:tileRect/>
+          </a:gradFill>
+          <a:ln w="19050"/>
+        </p:spPr>
+        <p:style>
+          <a:lnRef idx="2">
+            <a:schemeClr val="accent1"/>
+          </a:lnRef>
+          <a:fillRef idx="1">
+            <a:schemeClr val="lt1"/>
+          </a:fillRef>
+          <a:effectRef idx="0">
+            <a:schemeClr val="accent1"/>
+          </a:effectRef>
+          <a:fontRef idx="minor">
+            <a:schemeClr val="dk1"/>
+          </a:fontRef>
+        </p:style>
+        <p:txBody>
+          <a:bodyPr lIns="124733" tIns="62367" rIns="124733" bIns="62367" rtlCol="0" anchor="ctr"/>
+          <a:lstStyle/>
+          <a:p>
+            <a:pPr algn="ctr"/>
+            <a:r>
+              <a:rPr lang="ru-RU" sz="700" dirty="0"/>
+              <a:t>Никаких мандатов в </a:t>
+            </a:r>
+            <a:r>
+              <a:rPr lang="ru-RU" sz="700" dirty="0" err="1"/>
+              <a:t>Сириийском</a:t>
+            </a:r>
+            <a:r>
+              <a:rPr lang="ru-RU" sz="700" dirty="0"/>
+              <a:t> регионе</a:t>
+            </a:r>
+          </a:p>
+        </p:txBody>
+      </p:sp>
+      <p:cxnSp>
+        <p:nvCxnSpPr>
+          <p:cNvPr id="661" name="Соединительная линия уступом 620">
+            <a:extLst>
+              <a:ext uri="{FF2B5EF4-FFF2-40B4-BE49-F238E27FC236}">
+                <a16:creationId xmlns:a16="http://schemas.microsoft.com/office/drawing/2014/main" id="{AFCC26D8-BC8C-4064-ACF4-66E1DE8CBB42}"/>
+              </a:ext>
+            </a:extLst>
+          </p:cNvPr>
+          <p:cNvCxnSpPr>
+            <a:cxnSpLocks/>
+            <a:stCxn id="658" idx="2"/>
+            <a:endCxn id="660" idx="0"/>
+          </p:cNvCxnSpPr>
+          <p:nvPr/>
+        </p:nvCxnSpPr>
+        <p:spPr>
+          <a:xfrm rot="16200000" flipH="1">
+            <a:off x="5904918" y="11874169"/>
+            <a:ext cx="257050" cy="584542"/>
           </a:xfrm>
           <a:prstGeom prst="bentConnector3">
             <a:avLst>
@@ -20265,7 +24205,303 @@
             </a:avLst>
           </a:prstGeom>
           <a:ln w="19050">
-            <a:prstDash val="dash"/>
+            <a:tailEnd type="arrow"/>
+          </a:ln>
+        </p:spPr>
+        <p:style>
+          <a:lnRef idx="1">
+            <a:schemeClr val="accent1"/>
+          </a:lnRef>
+          <a:fillRef idx="0">
+            <a:schemeClr val="accent1"/>
+          </a:fillRef>
+          <a:effectRef idx="0">
+            <a:schemeClr val="accent1"/>
+          </a:effectRef>
+          <a:fontRef idx="minor">
+            <a:schemeClr val="tx1"/>
+          </a:fontRef>
+        </p:style>
+      </p:cxnSp>
+      <p:sp>
+        <p:nvSpPr>
+          <p:cNvPr id="662" name="Прямоугольник 661">
+            <a:extLst>
+              <a:ext uri="{FF2B5EF4-FFF2-40B4-BE49-F238E27FC236}">
+                <a16:creationId xmlns:a16="http://schemas.microsoft.com/office/drawing/2014/main" id="{1219FAEA-FC53-44D6-AC37-F9E43A549BD0}"/>
+              </a:ext>
+            </a:extLst>
+          </p:cNvPr>
+          <p:cNvSpPr/>
+          <p:nvPr/>
+        </p:nvSpPr>
+        <p:spPr>
+          <a:xfrm>
+            <a:off x="8255525" y="10693099"/>
+            <a:ext cx="926325" cy="540000"/>
+          </a:xfrm>
+          <a:prstGeom prst="rect">
+            <a:avLst/>
+          </a:prstGeom>
+          <a:gradFill flip="none" rotWithShape="1">
+            <a:gsLst>
+              <a:gs pos="0">
+                <a:srgbClr val="7030A0"/>
+              </a:gs>
+              <a:gs pos="100000">
+                <a:schemeClr val="accent1">
+                  <a:lumMod val="60000"/>
+                  <a:lumOff val="40000"/>
+                </a:schemeClr>
+              </a:gs>
+            </a:gsLst>
+            <a:lin ang="0" scaled="1"/>
+            <a:tileRect/>
+          </a:gradFill>
+          <a:ln w="19050"/>
+        </p:spPr>
+        <p:style>
+          <a:lnRef idx="2">
+            <a:schemeClr val="accent1"/>
+          </a:lnRef>
+          <a:fillRef idx="1">
+            <a:schemeClr val="lt1"/>
+          </a:fillRef>
+          <a:effectRef idx="0">
+            <a:schemeClr val="accent1"/>
+          </a:effectRef>
+          <a:fontRef idx="minor">
+            <a:schemeClr val="dk1"/>
+          </a:fontRef>
+        </p:style>
+        <p:txBody>
+          <a:bodyPr lIns="124733" tIns="62367" rIns="124733" bIns="62367" rtlCol="0" anchor="ctr"/>
+          <a:lstStyle/>
+          <a:p>
+            <a:pPr algn="ctr"/>
+            <a:r>
+              <a:rPr lang="ru-RU" sz="700" dirty="0"/>
+              <a:t>Поход на Ливийское плато</a:t>
+            </a:r>
+          </a:p>
+        </p:txBody>
+      </p:sp>
+      <p:sp>
+        <p:nvSpPr>
+          <p:cNvPr id="663" name="Прямоугольник 662">
+            <a:extLst>
+              <a:ext uri="{FF2B5EF4-FFF2-40B4-BE49-F238E27FC236}">
+                <a16:creationId xmlns:a16="http://schemas.microsoft.com/office/drawing/2014/main" id="{C2F8030A-BF54-4D2A-A7C1-1359E169CA4E}"/>
+              </a:ext>
+            </a:extLst>
+          </p:cNvPr>
+          <p:cNvSpPr/>
+          <p:nvPr/>
+        </p:nvSpPr>
+        <p:spPr>
+          <a:xfrm>
+            <a:off x="7652592" y="11493724"/>
+            <a:ext cx="926325" cy="540000"/>
+          </a:xfrm>
+          <a:prstGeom prst="rect">
+            <a:avLst/>
+          </a:prstGeom>
+          <a:gradFill flip="none" rotWithShape="1">
+            <a:gsLst>
+              <a:gs pos="0">
+                <a:srgbClr val="7030A0"/>
+              </a:gs>
+              <a:gs pos="100000">
+                <a:schemeClr val="accent1">
+                  <a:lumMod val="60000"/>
+                  <a:lumOff val="40000"/>
+                </a:schemeClr>
+              </a:gs>
+            </a:gsLst>
+            <a:lin ang="0" scaled="1"/>
+            <a:tileRect/>
+          </a:gradFill>
+          <a:ln w="19050"/>
+        </p:spPr>
+        <p:style>
+          <a:lnRef idx="2">
+            <a:schemeClr val="accent1"/>
+          </a:lnRef>
+          <a:fillRef idx="1">
+            <a:schemeClr val="lt1"/>
+          </a:fillRef>
+          <a:effectRef idx="0">
+            <a:schemeClr val="accent1"/>
+          </a:effectRef>
+          <a:fontRef idx="minor">
+            <a:schemeClr val="dk1"/>
+          </a:fontRef>
+        </p:style>
+        <p:txBody>
+          <a:bodyPr lIns="124733" tIns="62367" rIns="124733" bIns="62367" rtlCol="0" anchor="ctr"/>
+          <a:lstStyle/>
+          <a:p>
+            <a:pPr algn="ctr"/>
+            <a:r>
+              <a:rPr lang="ru-RU" sz="700" dirty="0"/>
+              <a:t>Вернуть религиозные святыни Аравии</a:t>
+            </a:r>
+          </a:p>
+        </p:txBody>
+      </p:sp>
+      <p:sp>
+        <p:nvSpPr>
+          <p:cNvPr id="664" name="Прямоугольник 663">
+            <a:extLst>
+              <a:ext uri="{FF2B5EF4-FFF2-40B4-BE49-F238E27FC236}">
+                <a16:creationId xmlns:a16="http://schemas.microsoft.com/office/drawing/2014/main" id="{76793256-FEF2-42F0-A25D-EF1883BE28E0}"/>
+              </a:ext>
+            </a:extLst>
+          </p:cNvPr>
+          <p:cNvSpPr/>
+          <p:nvPr/>
+        </p:nvSpPr>
+        <p:spPr>
+          <a:xfrm>
+            <a:off x="7058063" y="12294349"/>
+            <a:ext cx="926325" cy="540000"/>
+          </a:xfrm>
+          <a:prstGeom prst="rect">
+            <a:avLst/>
+          </a:prstGeom>
+          <a:gradFill flip="none" rotWithShape="1">
+            <a:gsLst>
+              <a:gs pos="0">
+                <a:srgbClr val="7030A0"/>
+              </a:gs>
+              <a:gs pos="100000">
+                <a:schemeClr val="accent1">
+                  <a:lumMod val="60000"/>
+                  <a:lumOff val="40000"/>
+                </a:schemeClr>
+              </a:gs>
+            </a:gsLst>
+            <a:lin ang="0" scaled="1"/>
+            <a:tileRect/>
+          </a:gradFill>
+          <a:ln w="19050"/>
+        </p:spPr>
+        <p:style>
+          <a:lnRef idx="2">
+            <a:schemeClr val="accent1"/>
+          </a:lnRef>
+          <a:fillRef idx="1">
+            <a:schemeClr val="lt1"/>
+          </a:fillRef>
+          <a:effectRef idx="0">
+            <a:schemeClr val="accent1"/>
+          </a:effectRef>
+          <a:fontRef idx="minor">
+            <a:schemeClr val="dk1"/>
+          </a:fontRef>
+        </p:style>
+        <p:txBody>
+          <a:bodyPr lIns="124733" tIns="62367" rIns="124733" bIns="62367" rtlCol="0" anchor="ctr"/>
+          <a:lstStyle/>
+          <a:p>
+            <a:pPr algn="ctr"/>
+            <a:r>
+              <a:rPr lang="ru-RU" sz="700" dirty="0"/>
+              <a:t>Захват дальних земель</a:t>
+            </a:r>
+          </a:p>
+        </p:txBody>
+      </p:sp>
+      <p:sp>
+        <p:nvSpPr>
+          <p:cNvPr id="665" name="Прямоугольник 664">
+            <a:extLst>
+              <a:ext uri="{FF2B5EF4-FFF2-40B4-BE49-F238E27FC236}">
+                <a16:creationId xmlns:a16="http://schemas.microsoft.com/office/drawing/2014/main" id="{88E696FF-E321-472E-92CA-77E983DEE5D4}"/>
+              </a:ext>
+            </a:extLst>
+          </p:cNvPr>
+          <p:cNvSpPr/>
+          <p:nvPr/>
+        </p:nvSpPr>
+        <p:spPr>
+          <a:xfrm>
+            <a:off x="6460696" y="13091399"/>
+            <a:ext cx="926325" cy="540000"/>
+          </a:xfrm>
+          <a:prstGeom prst="rect">
+            <a:avLst/>
+          </a:prstGeom>
+          <a:gradFill flip="none" rotWithShape="1">
+            <a:gsLst>
+              <a:gs pos="0">
+                <a:srgbClr val="7030A0"/>
+              </a:gs>
+              <a:gs pos="100000">
+                <a:schemeClr val="accent1">
+                  <a:lumMod val="60000"/>
+                  <a:lumOff val="40000"/>
+                </a:schemeClr>
+              </a:gs>
+            </a:gsLst>
+            <a:lin ang="0" scaled="1"/>
+            <a:tileRect/>
+          </a:gradFill>
+          <a:ln w="19050"/>
+        </p:spPr>
+        <p:style>
+          <a:lnRef idx="2">
+            <a:schemeClr val="accent1"/>
+          </a:lnRef>
+          <a:fillRef idx="1">
+            <a:schemeClr val="lt1"/>
+          </a:fillRef>
+          <a:effectRef idx="0">
+            <a:schemeClr val="accent1"/>
+          </a:effectRef>
+          <a:fontRef idx="minor">
+            <a:schemeClr val="dk1"/>
+          </a:fontRef>
+        </p:style>
+        <p:txBody>
+          <a:bodyPr lIns="124733" tIns="62367" rIns="124733" bIns="62367" rtlCol="0" anchor="ctr"/>
+          <a:lstStyle/>
+          <a:p>
+            <a:pPr algn="ctr"/>
+            <a:r>
+              <a:rPr lang="ru-RU" sz="700" dirty="0"/>
+              <a:t>Отец всех арабов</a:t>
+            </a:r>
+          </a:p>
+        </p:txBody>
+      </p:sp>
+      <p:cxnSp>
+        <p:nvCxnSpPr>
+          <p:cNvPr id="666" name="Соединительная линия уступом 620">
+            <a:extLst>
+              <a:ext uri="{FF2B5EF4-FFF2-40B4-BE49-F238E27FC236}">
+                <a16:creationId xmlns:a16="http://schemas.microsoft.com/office/drawing/2014/main" id="{D736B8FF-A872-48FA-AAEA-B10681769268}"/>
+              </a:ext>
+            </a:extLst>
+          </p:cNvPr>
+          <p:cNvCxnSpPr>
+            <a:cxnSpLocks/>
+            <a:stCxn id="655" idx="2"/>
+            <a:endCxn id="660" idx="0"/>
+          </p:cNvCxnSpPr>
+          <p:nvPr/>
+        </p:nvCxnSpPr>
+        <p:spPr>
+          <a:xfrm rot="16200000" flipH="1">
+            <a:off x="5207467" y="11176718"/>
+            <a:ext cx="1061866" cy="1174627"/>
+          </a:xfrm>
+          <a:prstGeom prst="bentConnector3">
+            <a:avLst>
+              <a:gd name="adj1" fmla="val 8738"/>
+            </a:avLst>
+          </a:prstGeom>
+          <a:ln w="19050">
             <a:tailEnd type="arrow"/>
           </a:ln>
         </p:spPr>
@@ -20286,69 +24522,24 @@
       </p:cxnSp>
       <p:cxnSp>
         <p:nvCxnSpPr>
-          <p:cNvPr id="417" name="Прямая соединительная линия 416">
-            <a:extLst>
-              <a:ext uri="{FF2B5EF4-FFF2-40B4-BE49-F238E27FC236}">
-                <a16:creationId xmlns:a16="http://schemas.microsoft.com/office/drawing/2014/main" id="{1E429E6C-CAEA-4DE1-8529-074CBD4D666A}"/>
+          <p:cNvPr id="667" name="Соединительная линия уступом 620">
+            <a:extLst>
+              <a:ext uri="{FF2B5EF4-FFF2-40B4-BE49-F238E27FC236}">
+                <a16:creationId xmlns:a16="http://schemas.microsoft.com/office/drawing/2014/main" id="{891731BE-0C06-4A6D-875D-C186699E09EC}"/>
               </a:ext>
             </a:extLst>
           </p:cNvPr>
           <p:cNvCxnSpPr>
             <a:cxnSpLocks/>
-            <a:stCxn id="336" idx="1"/>
-            <a:endCxn id="316" idx="3"/>
+            <a:stCxn id="648" idx="2"/>
+            <a:endCxn id="660" idx="0"/>
           </p:cNvCxnSpPr>
           <p:nvPr/>
         </p:nvCxnSpPr>
         <p:spPr>
-          <a:xfrm flipH="1" flipV="1">
-            <a:off x="8582229" y="5312438"/>
-            <a:ext cx="1448749" cy="3148"/>
-          </a:xfrm>
-          <a:prstGeom prst="line">
-            <a:avLst/>
-          </a:prstGeom>
-          <a:ln w="38100">
-            <a:solidFill>
-              <a:srgbClr val="C00000"/>
-            </a:solidFill>
-          </a:ln>
-        </p:spPr>
-        <p:style>
-          <a:lnRef idx="1">
-            <a:schemeClr val="accent1"/>
-          </a:lnRef>
-          <a:fillRef idx="0">
-            <a:schemeClr val="accent1"/>
-          </a:fillRef>
-          <a:effectRef idx="0">
-            <a:schemeClr val="accent1"/>
-          </a:effectRef>
-          <a:fontRef idx="minor">
-            <a:schemeClr val="tx1"/>
-          </a:fontRef>
-        </p:style>
-      </p:cxnSp>
-      <p:cxnSp>
-        <p:nvCxnSpPr>
-          <p:cNvPr id="418" name="Соединительная линия уступом 620">
-            <a:extLst>
-              <a:ext uri="{FF2B5EF4-FFF2-40B4-BE49-F238E27FC236}">
-                <a16:creationId xmlns:a16="http://schemas.microsoft.com/office/drawing/2014/main" id="{39F7F08E-601C-4E17-AA63-BAB3202D746A}"/>
-              </a:ext>
-            </a:extLst>
-          </p:cNvPr>
-          <p:cNvCxnSpPr>
-            <a:cxnSpLocks/>
-            <a:stCxn id="336" idx="2"/>
-            <a:endCxn id="339" idx="0"/>
-          </p:cNvCxnSpPr>
-          <p:nvPr/>
-        </p:nvCxnSpPr>
-        <p:spPr>
           <a:xfrm rot="5400000">
-            <a:off x="10364261" y="5714232"/>
-            <a:ext cx="258526" cy="1235"/>
+            <a:off x="5797163" y="11761650"/>
+            <a:ext cx="1061866" cy="4764"/>
           </a:xfrm>
           <a:prstGeom prst="bentConnector3">
             <a:avLst>
@@ -20376,24 +24567,24 @@
       </p:cxnSp>
       <p:cxnSp>
         <p:nvCxnSpPr>
-          <p:cNvPr id="419" name="Соединительная линия уступом 620">
-            <a:extLst>
-              <a:ext uri="{FF2B5EF4-FFF2-40B4-BE49-F238E27FC236}">
-                <a16:creationId xmlns:a16="http://schemas.microsoft.com/office/drawing/2014/main" id="{681E0FBA-1733-43B9-98CA-A4658882A5F5}"/>
+          <p:cNvPr id="668" name="Соединительная линия уступом 620">
+            <a:extLst>
+              <a:ext uri="{FF2B5EF4-FFF2-40B4-BE49-F238E27FC236}">
+                <a16:creationId xmlns:a16="http://schemas.microsoft.com/office/drawing/2014/main" id="{A2DB622B-75CB-4ECD-822F-58B46441EC42}"/>
               </a:ext>
             </a:extLst>
           </p:cNvPr>
           <p:cNvCxnSpPr>
             <a:cxnSpLocks/>
-            <a:stCxn id="339" idx="2"/>
-            <a:endCxn id="345" idx="0"/>
+            <a:stCxn id="385" idx="2"/>
+            <a:endCxn id="662" idx="0"/>
           </p:cNvCxnSpPr>
           <p:nvPr/>
         </p:nvCxnSpPr>
         <p:spPr>
           <a:xfrm rot="16200000" flipH="1">
-            <a:off x="10950212" y="5926805"/>
-            <a:ext cx="268774" cy="1183387"/>
+            <a:off x="7985168" y="9959579"/>
+            <a:ext cx="264816" cy="1202224"/>
           </a:xfrm>
           <a:prstGeom prst="bentConnector3">
             <a:avLst>
@@ -20419,77 +24610,26 @@
           </a:fontRef>
         </p:style>
       </p:cxnSp>
-      <p:sp>
-        <p:nvSpPr>
-          <p:cNvPr id="420" name="Прямоугольник 419">
-            <a:extLst>
-              <a:ext uri="{FF2B5EF4-FFF2-40B4-BE49-F238E27FC236}">
-                <a16:creationId xmlns:a16="http://schemas.microsoft.com/office/drawing/2014/main" id="{D1A6BCEA-858E-4D65-ACB7-0ADE35BB1A2A}"/>
-              </a:ext>
-            </a:extLst>
-          </p:cNvPr>
-          <p:cNvSpPr/>
-          <p:nvPr/>
-        </p:nvSpPr>
-        <p:spPr>
-          <a:xfrm>
-            <a:off x="11210970" y="5856916"/>
-            <a:ext cx="926325" cy="540000"/>
-          </a:xfrm>
-          <a:prstGeom prst="rect">
-            <a:avLst/>
-          </a:prstGeom>
-          <a:solidFill>
-            <a:srgbClr val="7030A0"/>
-          </a:solidFill>
-          <a:ln w="19050"/>
-        </p:spPr>
-        <p:style>
-          <a:lnRef idx="2">
-            <a:schemeClr val="accent1"/>
-          </a:lnRef>
-          <a:fillRef idx="1">
-            <a:schemeClr val="lt1"/>
-          </a:fillRef>
-          <a:effectRef idx="0">
-            <a:schemeClr val="accent1"/>
-          </a:effectRef>
-          <a:fontRef idx="minor">
-            <a:schemeClr val="dk1"/>
-          </a:fontRef>
-        </p:style>
-        <p:txBody>
-          <a:bodyPr lIns="124733" tIns="62367" rIns="124733" bIns="62367" rtlCol="0" anchor="ctr"/>
-          <a:lstStyle/>
-          <a:p>
-            <a:pPr algn="ctr"/>
-            <a:r>
-              <a:rPr lang="ru-RU" sz="700" dirty="0"/>
-              <a:t>Разрешить митинги и профсоюзы</a:t>
-            </a:r>
-          </a:p>
-        </p:txBody>
-      </p:sp>
       <p:cxnSp>
         <p:nvCxnSpPr>
-          <p:cNvPr id="421" name="Соединительная линия уступом 620">
-            <a:extLst>
-              <a:ext uri="{FF2B5EF4-FFF2-40B4-BE49-F238E27FC236}">
-                <a16:creationId xmlns:a16="http://schemas.microsoft.com/office/drawing/2014/main" id="{04418FFC-EF67-4950-A1E9-BF3730CDF1A8}"/>
+          <p:cNvPr id="669" name="Соединительная линия уступом 620">
+            <a:extLst>
+              <a:ext uri="{FF2B5EF4-FFF2-40B4-BE49-F238E27FC236}">
+                <a16:creationId xmlns:a16="http://schemas.microsoft.com/office/drawing/2014/main" id="{BC7070B2-A274-4CFB-9239-E5C1E89FB4DE}"/>
               </a:ext>
             </a:extLst>
           </p:cNvPr>
           <p:cNvCxnSpPr>
             <a:cxnSpLocks/>
-            <a:stCxn id="336" idx="2"/>
-            <a:endCxn id="420" idx="0"/>
+            <a:stCxn id="385" idx="2"/>
+            <a:endCxn id="654" idx="0"/>
           </p:cNvCxnSpPr>
           <p:nvPr/>
         </p:nvCxnSpPr>
         <p:spPr>
           <a:xfrm rot="16200000" flipH="1">
-            <a:off x="10948472" y="5131255"/>
-            <a:ext cx="271330" cy="1179992"/>
+            <a:off x="7386437" y="10558309"/>
+            <a:ext cx="264816" cy="4763"/>
           </a:xfrm>
           <a:prstGeom prst="bentConnector3">
             <a:avLst>
@@ -20515,82 +24655,71 @@
           </a:fontRef>
         </p:style>
       </p:cxnSp>
-      <p:sp>
-        <p:nvSpPr>
-          <p:cNvPr id="422" name="Прямоугольник 421">
-            <a:extLst>
-              <a:ext uri="{FF2B5EF4-FFF2-40B4-BE49-F238E27FC236}">
-                <a16:creationId xmlns:a16="http://schemas.microsoft.com/office/drawing/2014/main" id="{0CDAB3F3-F1D4-45E2-808F-9C0405D4348C}"/>
-              </a:ext>
-            </a:extLst>
-          </p:cNvPr>
-          <p:cNvSpPr/>
-          <p:nvPr/>
-        </p:nvSpPr>
-        <p:spPr>
-          <a:xfrm>
-            <a:off x="11216385" y="7448856"/>
-            <a:ext cx="926325" cy="540000"/>
-          </a:xfrm>
-          <a:prstGeom prst="rect">
-            <a:avLst/>
-          </a:prstGeom>
-          <a:solidFill>
-            <a:srgbClr val="7030A0"/>
-          </a:solidFill>
-          <a:ln w="19050"/>
-        </p:spPr>
-        <p:style>
-          <a:lnRef idx="2">
-            <a:schemeClr val="accent1"/>
-          </a:lnRef>
-          <a:fillRef idx="1">
-            <a:schemeClr val="lt1"/>
-          </a:fillRef>
-          <a:effectRef idx="0">
-            <a:schemeClr val="accent1"/>
-          </a:effectRef>
-          <a:fontRef idx="minor">
-            <a:schemeClr val="dk1"/>
-          </a:fontRef>
-        </p:style>
-        <p:txBody>
-          <a:bodyPr lIns="124733" tIns="62367" rIns="124733" bIns="62367" rtlCol="0" anchor="ctr"/>
-          <a:lstStyle/>
-          <a:p>
-            <a:pPr algn="ctr"/>
-            <a:r>
-              <a:rPr lang="ru-RU" sz="700" dirty="0"/>
-              <a:t>Единоличная власть Мухаммеда </a:t>
-            </a:r>
-            <a:r>
-              <a:rPr lang="en-US" sz="700" dirty="0"/>
-              <a:t>V</a:t>
-            </a:r>
-            <a:endParaRPr lang="ru-RU" sz="700" dirty="0"/>
-          </a:p>
-        </p:txBody>
-      </p:sp>
       <p:cxnSp>
         <p:nvCxnSpPr>
-          <p:cNvPr id="423" name="Соединительная линия уступом 620">
-            <a:extLst>
-              <a:ext uri="{FF2B5EF4-FFF2-40B4-BE49-F238E27FC236}">
-                <a16:creationId xmlns:a16="http://schemas.microsoft.com/office/drawing/2014/main" id="{B2211544-6FD5-4685-9C14-221F7049609B}"/>
+          <p:cNvPr id="670" name="Соединительная линия уступом 620">
+            <a:extLst>
+              <a:ext uri="{FF2B5EF4-FFF2-40B4-BE49-F238E27FC236}">
+                <a16:creationId xmlns:a16="http://schemas.microsoft.com/office/drawing/2014/main" id="{9A4E2F1D-8712-4D2A-924B-A0C92EF6AEEC}"/>
               </a:ext>
             </a:extLst>
           </p:cNvPr>
           <p:cNvCxnSpPr>
             <a:cxnSpLocks/>
-            <a:stCxn id="420" idx="2"/>
-            <a:endCxn id="345" idx="0"/>
+            <a:stCxn id="385" idx="2"/>
+            <a:endCxn id="663" idx="0"/>
           </p:cNvCxnSpPr>
           <p:nvPr/>
         </p:nvCxnSpPr>
         <p:spPr>
           <a:xfrm rot="16200000" flipH="1">
-            <a:off x="11547228" y="6523821"/>
-            <a:ext cx="255970" cy="2160"/>
+            <a:off x="7283389" y="10661357"/>
+            <a:ext cx="1065441" cy="599291"/>
+          </a:xfrm>
+          <a:prstGeom prst="bentConnector3">
+            <a:avLst>
+              <a:gd name="adj1" fmla="val 12005"/>
+            </a:avLst>
+          </a:prstGeom>
+          <a:ln w="19050">
+            <a:tailEnd type="arrow"/>
+          </a:ln>
+        </p:spPr>
+        <p:style>
+          <a:lnRef idx="1">
+            <a:schemeClr val="accent1"/>
+          </a:lnRef>
+          <a:fillRef idx="0">
+            <a:schemeClr val="accent1"/>
+          </a:fillRef>
+          <a:effectRef idx="0">
+            <a:schemeClr val="accent1"/>
+          </a:effectRef>
+          <a:fontRef idx="minor">
+            <a:schemeClr val="tx1"/>
+          </a:fontRef>
+        </p:style>
+      </p:cxnSp>
+      <p:cxnSp>
+        <p:nvCxnSpPr>
+          <p:cNvPr id="671" name="Соединительная линия уступом 620">
+            <a:extLst>
+              <a:ext uri="{FF2B5EF4-FFF2-40B4-BE49-F238E27FC236}">
+                <a16:creationId xmlns:a16="http://schemas.microsoft.com/office/drawing/2014/main" id="{AF048FC1-75E1-4A69-9262-337B413790DB}"/>
+              </a:ext>
+            </a:extLst>
+          </p:cNvPr>
+          <p:cNvCxnSpPr>
+            <a:cxnSpLocks/>
+            <a:stCxn id="654" idx="2"/>
+            <a:endCxn id="664" idx="0"/>
+          </p:cNvCxnSpPr>
+          <p:nvPr/>
+        </p:nvCxnSpPr>
+        <p:spPr>
+          <a:xfrm rot="5400000">
+            <a:off x="6990602" y="11763724"/>
+            <a:ext cx="1061250" cy="1"/>
           </a:xfrm>
           <a:prstGeom prst="bentConnector3">
             <a:avLst>
@@ -20618,24 +24747,69 @@
       </p:cxnSp>
       <p:cxnSp>
         <p:nvCxnSpPr>
-          <p:cNvPr id="424" name="Соединительная линия уступом 620">
-            <a:extLst>
-              <a:ext uri="{FF2B5EF4-FFF2-40B4-BE49-F238E27FC236}">
-                <a16:creationId xmlns:a16="http://schemas.microsoft.com/office/drawing/2014/main" id="{43B70F96-3D36-4946-9DC4-867C38D732EE}"/>
+          <p:cNvPr id="674" name="Соединительная линия уступом 620">
+            <a:extLst>
+              <a:ext uri="{FF2B5EF4-FFF2-40B4-BE49-F238E27FC236}">
+                <a16:creationId xmlns:a16="http://schemas.microsoft.com/office/drawing/2014/main" id="{F00985B5-C9B1-4C58-871B-155E5500E864}"/>
               </a:ext>
             </a:extLst>
           </p:cNvPr>
           <p:cNvCxnSpPr>
             <a:cxnSpLocks/>
-            <a:stCxn id="345" idx="2"/>
-            <a:endCxn id="422" idx="0"/>
+            <a:stCxn id="662" idx="2"/>
+            <a:endCxn id="664" idx="0"/>
           </p:cNvCxnSpPr>
           <p:nvPr/>
         </p:nvCxnSpPr>
         <p:spPr>
-          <a:xfrm rot="16200000" flipH="1">
-            <a:off x="11549935" y="7319243"/>
-            <a:ext cx="255970" cy="3255"/>
+          <a:xfrm rot="5400000">
+            <a:off x="7589332" y="11164993"/>
+            <a:ext cx="1061250" cy="1197462"/>
+          </a:xfrm>
+          <a:prstGeom prst="bentConnector3">
+            <a:avLst>
+              <a:gd name="adj1" fmla="val 10509"/>
+            </a:avLst>
+          </a:prstGeom>
+          <a:ln w="19050">
+            <a:tailEnd type="arrow"/>
+          </a:ln>
+        </p:spPr>
+        <p:style>
+          <a:lnRef idx="1">
+            <a:schemeClr val="accent1"/>
+          </a:lnRef>
+          <a:fillRef idx="0">
+            <a:schemeClr val="accent1"/>
+          </a:fillRef>
+          <a:effectRef idx="0">
+            <a:schemeClr val="accent1"/>
+          </a:effectRef>
+          <a:fontRef idx="minor">
+            <a:schemeClr val="tx1"/>
+          </a:fontRef>
+        </p:style>
+      </p:cxnSp>
+      <p:cxnSp>
+        <p:nvCxnSpPr>
+          <p:cNvPr id="680" name="Соединительная линия уступом 620">
+            <a:extLst>
+              <a:ext uri="{FF2B5EF4-FFF2-40B4-BE49-F238E27FC236}">
+                <a16:creationId xmlns:a16="http://schemas.microsoft.com/office/drawing/2014/main" id="{54C45103-9610-4747-AF7B-92360349A296}"/>
+              </a:ext>
+            </a:extLst>
+          </p:cNvPr>
+          <p:cNvCxnSpPr>
+            <a:cxnSpLocks/>
+            <a:stCxn id="663" idx="2"/>
+            <a:endCxn id="664" idx="0"/>
+          </p:cNvCxnSpPr>
+          <p:nvPr/>
+        </p:nvCxnSpPr>
+        <p:spPr>
+          <a:xfrm rot="5400000">
+            <a:off x="7688179" y="11866772"/>
+            <a:ext cx="260625" cy="594529"/>
           </a:xfrm>
           <a:prstGeom prst="bentConnector3">
             <a:avLst>
@@ -20643,6 +24817,98 @@
             </a:avLst>
           </a:prstGeom>
           <a:ln w="19050">
+            <a:tailEnd type="arrow"/>
+          </a:ln>
+        </p:spPr>
+        <p:style>
+          <a:lnRef idx="1">
+            <a:schemeClr val="accent1"/>
+          </a:lnRef>
+          <a:fillRef idx="0">
+            <a:schemeClr val="accent1"/>
+          </a:fillRef>
+          <a:effectRef idx="0">
+            <a:schemeClr val="accent1"/>
+          </a:effectRef>
+          <a:fontRef idx="minor">
+            <a:schemeClr val="tx1"/>
+          </a:fontRef>
+        </p:style>
+      </p:cxnSp>
+      <p:cxnSp>
+        <p:nvCxnSpPr>
+          <p:cNvPr id="683" name="Соединительная линия уступом 620">
+            <a:extLst>
+              <a:ext uri="{FF2B5EF4-FFF2-40B4-BE49-F238E27FC236}">
+                <a16:creationId xmlns:a16="http://schemas.microsoft.com/office/drawing/2014/main" id="{DE2D8494-1503-4DF6-A629-C5B24D7D0A7A}"/>
+              </a:ext>
+            </a:extLst>
+          </p:cNvPr>
+          <p:cNvCxnSpPr>
+            <a:cxnSpLocks/>
+            <a:stCxn id="664" idx="2"/>
+            <a:endCxn id="665" idx="0"/>
+          </p:cNvCxnSpPr>
+          <p:nvPr/>
+        </p:nvCxnSpPr>
+        <p:spPr>
+          <a:xfrm rot="5400000">
+            <a:off x="7094018" y="12664191"/>
+            <a:ext cx="257050" cy="597367"/>
+          </a:xfrm>
+          <a:prstGeom prst="bentConnector3">
+            <a:avLst>
+              <a:gd name="adj1" fmla="val 50000"/>
+            </a:avLst>
+          </a:prstGeom>
+          <a:ln w="19050">
+            <a:prstDash val="dash"/>
+            <a:tailEnd type="arrow"/>
+          </a:ln>
+        </p:spPr>
+        <p:style>
+          <a:lnRef idx="1">
+            <a:schemeClr val="accent1"/>
+          </a:lnRef>
+          <a:fillRef idx="0">
+            <a:schemeClr val="accent1"/>
+          </a:fillRef>
+          <a:effectRef idx="0">
+            <a:schemeClr val="accent1"/>
+          </a:effectRef>
+          <a:fontRef idx="minor">
+            <a:schemeClr val="tx1"/>
+          </a:fontRef>
+        </p:style>
+      </p:cxnSp>
+      <p:cxnSp>
+        <p:nvCxnSpPr>
+          <p:cNvPr id="686" name="Соединительная линия уступом 620">
+            <a:extLst>
+              <a:ext uri="{FF2B5EF4-FFF2-40B4-BE49-F238E27FC236}">
+                <a16:creationId xmlns:a16="http://schemas.microsoft.com/office/drawing/2014/main" id="{2C209F84-093F-4DE0-AB5F-949879174C14}"/>
+              </a:ext>
+            </a:extLst>
+          </p:cNvPr>
+          <p:cNvCxnSpPr>
+            <a:cxnSpLocks/>
+            <a:stCxn id="660" idx="2"/>
+            <a:endCxn id="665" idx="0"/>
+          </p:cNvCxnSpPr>
+          <p:nvPr/>
+        </p:nvCxnSpPr>
+        <p:spPr>
+          <a:xfrm rot="16200000" flipH="1">
+            <a:off x="6496569" y="12664109"/>
+            <a:ext cx="256434" cy="598145"/>
+          </a:xfrm>
+          <a:prstGeom prst="bentConnector3">
+            <a:avLst>
+              <a:gd name="adj1" fmla="val 50000"/>
+            </a:avLst>
+          </a:prstGeom>
+          <a:ln w="19050">
+            <a:prstDash val="dash"/>
             <a:tailEnd type="arrow"/>
           </a:ln>
         </p:spPr>

--- a/Наработки/диздоки/Марокко/Марокко.pptx
+++ b/Наработки/диздоки/Марокко/Марокко.pptx
@@ -209,7 +209,7 @@
             <a:fld id="{33E3D7F9-E251-484C-A6FF-FA958879DF69}" type="datetimeFigureOut">
               <a:rPr lang="ru-RU" smtClean="0"/>
               <a:pPr/>
-              <a:t>18.06.2026</a:t>
+              <a:t>22.06.2026</a:t>
             </a:fld>
             <a:endParaRPr lang="ru-RU"/>
           </a:p>
@@ -699,7 +699,7 @@
             <a:fld id="{85A5DE44-605B-4D3B-B2B7-94543DF81A36}" type="datetimeFigureOut">
               <a:rPr lang="ru-RU" smtClean="0"/>
               <a:pPr/>
-              <a:t>18.06.2026</a:t>
+              <a:t>22.06.2026</a:t>
             </a:fld>
             <a:endParaRPr lang="ru-RU"/>
           </a:p>
@@ -871,7 +871,7 @@
             <a:fld id="{85A5DE44-605B-4D3B-B2B7-94543DF81A36}" type="datetimeFigureOut">
               <a:rPr lang="ru-RU" smtClean="0"/>
               <a:pPr/>
-              <a:t>18.06.2026</a:t>
+              <a:t>22.06.2026</a:t>
             </a:fld>
             <a:endParaRPr lang="ru-RU"/>
           </a:p>
@@ -1053,7 +1053,7 @@
             <a:fld id="{85A5DE44-605B-4D3B-B2B7-94543DF81A36}" type="datetimeFigureOut">
               <a:rPr lang="ru-RU" smtClean="0"/>
               <a:pPr/>
-              <a:t>18.06.2026</a:t>
+              <a:t>22.06.2026</a:t>
             </a:fld>
             <a:endParaRPr lang="ru-RU"/>
           </a:p>
@@ -1225,7 +1225,7 @@
             <a:fld id="{85A5DE44-605B-4D3B-B2B7-94543DF81A36}" type="datetimeFigureOut">
               <a:rPr lang="ru-RU" smtClean="0"/>
               <a:pPr/>
-              <a:t>18.06.2026</a:t>
+              <a:t>22.06.2026</a:t>
             </a:fld>
             <a:endParaRPr lang="ru-RU"/>
           </a:p>
@@ -1473,7 +1473,7 @@
             <a:fld id="{85A5DE44-605B-4D3B-B2B7-94543DF81A36}" type="datetimeFigureOut">
               <a:rPr lang="ru-RU" smtClean="0"/>
               <a:pPr/>
-              <a:t>18.06.2026</a:t>
+              <a:t>22.06.2026</a:t>
             </a:fld>
             <a:endParaRPr lang="ru-RU"/>
           </a:p>
@@ -1707,7 +1707,7 @@
             <a:fld id="{85A5DE44-605B-4D3B-B2B7-94543DF81A36}" type="datetimeFigureOut">
               <a:rPr lang="ru-RU" smtClean="0"/>
               <a:pPr/>
-              <a:t>18.06.2026</a:t>
+              <a:t>22.06.2026</a:t>
             </a:fld>
             <a:endParaRPr lang="ru-RU"/>
           </a:p>
@@ -2076,7 +2076,7 @@
             <a:fld id="{85A5DE44-605B-4D3B-B2B7-94543DF81A36}" type="datetimeFigureOut">
               <a:rPr lang="ru-RU" smtClean="0"/>
               <a:pPr/>
-              <a:t>18.06.2026</a:t>
+              <a:t>22.06.2026</a:t>
             </a:fld>
             <a:endParaRPr lang="ru-RU"/>
           </a:p>
@@ -2196,7 +2196,7 @@
             <a:fld id="{85A5DE44-605B-4D3B-B2B7-94543DF81A36}" type="datetimeFigureOut">
               <a:rPr lang="ru-RU" smtClean="0"/>
               <a:pPr/>
-              <a:t>18.06.2026</a:t>
+              <a:t>22.06.2026</a:t>
             </a:fld>
             <a:endParaRPr lang="ru-RU"/>
           </a:p>
@@ -2293,7 +2293,7 @@
             <a:fld id="{85A5DE44-605B-4D3B-B2B7-94543DF81A36}" type="datetimeFigureOut">
               <a:rPr lang="ru-RU" smtClean="0"/>
               <a:pPr/>
-              <a:t>18.06.2026</a:t>
+              <a:t>22.06.2026</a:t>
             </a:fld>
             <a:endParaRPr lang="ru-RU"/>
           </a:p>
@@ -2572,7 +2572,7 @@
             <a:fld id="{85A5DE44-605B-4D3B-B2B7-94543DF81A36}" type="datetimeFigureOut">
               <a:rPr lang="ru-RU" smtClean="0"/>
               <a:pPr/>
-              <a:t>18.06.2026</a:t>
+              <a:t>22.06.2026</a:t>
             </a:fld>
             <a:endParaRPr lang="ru-RU"/>
           </a:p>
@@ -2831,7 +2831,7 @@
             <a:fld id="{85A5DE44-605B-4D3B-B2B7-94543DF81A36}" type="datetimeFigureOut">
               <a:rPr lang="ru-RU" smtClean="0"/>
               <a:pPr/>
-              <a:t>18.06.2026</a:t>
+              <a:t>22.06.2026</a:t>
             </a:fld>
             <a:endParaRPr lang="ru-RU"/>
           </a:p>
@@ -3046,7 +3046,7 @@
             <a:fld id="{85A5DE44-605B-4D3B-B2B7-94543DF81A36}" type="datetimeFigureOut">
               <a:rPr lang="ru-RU" smtClean="0"/>
               <a:pPr/>
-              <a:t>18.06.2026</a:t>
+              <a:t>22.06.2026</a:t>
             </a:fld>
             <a:endParaRPr lang="ru-RU"/>
           </a:p>
@@ -3460,7 +3460,7 @@
         </p:nvSpPr>
         <p:spPr>
           <a:xfrm>
-            <a:off x="46820132" y="28885095"/>
+            <a:off x="18326336" y="14382017"/>
             <a:ext cx="926325" cy="540000"/>
           </a:xfrm>
           <a:prstGeom prst="rect">
@@ -3492,21 +3492,8 @@
             <a:pPr algn="ctr"/>
             <a:r>
               <a:rPr lang="ru-RU" sz="700" dirty="0"/>
-              <a:t>Модернизация лагерей в Фесе (1936) </a:t>
-            </a:r>
-            <a:r>
-              <a:rPr lang="ru-RU" sz="100" dirty="0"/>
-              <a:t>(В 1936 году Франция усиливала гарнизоны, опасаясь, что испанский хаос перекинется на их часть </a:t>
-            </a:r>
-            <a:r>
-              <a:rPr lang="ru-RU" sz="100" dirty="0" err="1"/>
-              <a:t>Марокко.Эффект</a:t>
-            </a:r>
-            <a:r>
-              <a:rPr lang="ru-RU" sz="100" dirty="0"/>
-              <a:t> в HOI 4: Добавляет 2 военные фабрики и 1 инфраструктуру в регион Фес.</a:t>
-            </a:r>
-            <a:endParaRPr lang="ru-RU" sz="700" dirty="0"/>
+              <a:t>Модернизация лагерей в Фесе</a:t>
+            </a:r>
           </a:p>
         </p:txBody>
       </p:sp>
@@ -3528,7 +3515,7 @@
         </p:nvCxnSpPr>
         <p:spPr>
           <a:xfrm rot="5400000">
-            <a:off x="46491024" y="28970770"/>
+            <a:off x="17997228" y="14467692"/>
             <a:ext cx="337946" cy="1246596"/>
           </a:xfrm>
           <a:prstGeom prst="bentConnector3">
@@ -3573,7 +3560,7 @@
         </p:nvCxnSpPr>
         <p:spPr>
           <a:xfrm rot="16200000" flipH="1">
-            <a:off x="47726569" y="28981821"/>
+            <a:off x="19232773" y="14478743"/>
             <a:ext cx="337947" cy="1224494"/>
           </a:xfrm>
           <a:prstGeom prst="bentConnector3">
@@ -3614,7 +3601,7 @@
         </p:nvSpPr>
         <p:spPr>
           <a:xfrm>
-            <a:off x="47439274" y="30570291"/>
+            <a:off x="18945478" y="16067213"/>
             <a:ext cx="926325" cy="540000"/>
           </a:xfrm>
           <a:prstGeom prst="rect">
@@ -3665,7 +3652,7 @@
         </p:nvSpPr>
         <p:spPr>
           <a:xfrm>
-            <a:off x="45573536" y="29763041"/>
+            <a:off x="17079740" y="15259963"/>
             <a:ext cx="926325" cy="540000"/>
           </a:xfrm>
           <a:prstGeom prst="rect">
@@ -3716,7 +3703,7 @@
         </p:nvSpPr>
         <p:spPr>
           <a:xfrm>
-            <a:off x="48044626" y="29763042"/>
+            <a:off x="19550830" y="15259964"/>
             <a:ext cx="926325" cy="540000"/>
           </a:xfrm>
           <a:prstGeom prst="rect">
@@ -3771,7 +3758,7 @@
         </p:nvCxnSpPr>
         <p:spPr>
           <a:xfrm flipH="1" flipV="1">
-            <a:off x="46499861" y="30033041"/>
+            <a:off x="18006065" y="15529963"/>
             <a:ext cx="1544765" cy="1"/>
           </a:xfrm>
           <a:prstGeom prst="line">
@@ -3816,7 +3803,7 @@
         </p:nvCxnSpPr>
         <p:spPr>
           <a:xfrm rot="5400000">
-            <a:off x="48071489" y="30133990"/>
+            <a:off x="19577693" y="15630912"/>
             <a:ext cx="267249" cy="605352"/>
           </a:xfrm>
           <a:prstGeom prst="bentConnector3">
@@ -3862,7 +3849,7 @@
         </p:nvCxnSpPr>
         <p:spPr>
           <a:xfrm rot="16200000" flipH="1">
-            <a:off x="46835943" y="29503797"/>
+            <a:off x="18342147" y="15000719"/>
             <a:ext cx="267250" cy="1865738"/>
           </a:xfrm>
           <a:prstGeom prst="bentConnector3">
@@ -3908,7 +3895,7 @@
         </p:nvCxnSpPr>
         <p:spPr>
           <a:xfrm rot="5400000">
-            <a:off x="45595019" y="30126231"/>
+            <a:off x="17101223" y="15623153"/>
             <a:ext cx="264871" cy="618491"/>
           </a:xfrm>
           <a:prstGeom prst="bentConnector3">
@@ -3949,7 +3936,7 @@
         </p:nvSpPr>
         <p:spPr>
           <a:xfrm>
-            <a:off x="48661933" y="30567206"/>
+            <a:off x="20168137" y="16064128"/>
             <a:ext cx="926325" cy="540000"/>
           </a:xfrm>
           <a:prstGeom prst="rect">
@@ -3981,7 +3968,7 @@
             <a:pPr algn="ctr"/>
             <a:r>
               <a:rPr lang="ru-RU" sz="700" dirty="0"/>
-              <a:t>Набрать марокканцев в генералитет</a:t>
+              <a:t>Набрать элитных солдат в гвардию</a:t>
             </a:r>
           </a:p>
         </p:txBody>
@@ -4000,7 +3987,7 @@
         </p:nvSpPr>
         <p:spPr>
           <a:xfrm>
-            <a:off x="44955045" y="30567912"/>
+            <a:off x="16461249" y="16064834"/>
             <a:ext cx="926325" cy="540000"/>
           </a:xfrm>
           <a:prstGeom prst="rect">
@@ -4128,7 +4115,7 @@
         </p:nvSpPr>
         <p:spPr>
           <a:xfrm>
-            <a:off x="44954397" y="31385841"/>
+            <a:off x="16460601" y="16882763"/>
             <a:ext cx="926325" cy="540000"/>
           </a:xfrm>
           <a:prstGeom prst="rect">
@@ -4200,7 +4187,7 @@
         </p:nvSpPr>
         <p:spPr>
           <a:xfrm>
-            <a:off x="43712013" y="30567206"/>
+            <a:off x="15218217" y="16064128"/>
             <a:ext cx="926325" cy="540000"/>
           </a:xfrm>
           <a:prstGeom prst="rect">
@@ -4304,7 +4291,7 @@
         </p:nvSpPr>
         <p:spPr>
           <a:xfrm>
-            <a:off x="46196242" y="30573039"/>
+            <a:off x="17702446" y="16069961"/>
             <a:ext cx="926325" cy="540000"/>
           </a:xfrm>
           <a:prstGeom prst="rect">
@@ -4404,7 +4391,7 @@
         </p:nvCxnSpPr>
         <p:spPr>
           <a:xfrm rot="5400000">
-            <a:off x="44973856" y="29504362"/>
+            <a:off x="16480060" y="15001284"/>
             <a:ext cx="264165" cy="1861523"/>
           </a:xfrm>
           <a:prstGeom prst="bentConnector3">
@@ -4449,7 +4436,7 @@
         </p:nvCxnSpPr>
         <p:spPr>
           <a:xfrm rot="5400000">
-            <a:off x="45278920" y="31246552"/>
+            <a:off x="16785124" y="16743474"/>
             <a:ext cx="277929" cy="648"/>
           </a:xfrm>
           <a:prstGeom prst="bentConnector3">
@@ -4490,7 +4477,7 @@
         </p:nvSpPr>
         <p:spPr>
           <a:xfrm>
-            <a:off x="46196241" y="31385841"/>
+            <a:off x="17702445" y="16882763"/>
             <a:ext cx="926325" cy="540000"/>
           </a:xfrm>
           <a:prstGeom prst="rect">
@@ -4558,7 +4545,7 @@
         </p:nvCxnSpPr>
         <p:spPr>
           <a:xfrm rot="5400000">
-            <a:off x="46523004" y="31249440"/>
+            <a:off x="18029208" y="16746362"/>
             <a:ext cx="272802" cy="1"/>
           </a:xfrm>
           <a:prstGeom prst="bentConnector3">
@@ -4599,7 +4586,7 @@
         </p:nvSpPr>
         <p:spPr>
           <a:xfrm>
-            <a:off x="47437440" y="31388103"/>
+            <a:off x="18943644" y="16885025"/>
             <a:ext cx="926325" cy="540000"/>
           </a:xfrm>
           <a:prstGeom prst="rect">
@@ -4679,7 +4666,7 @@
         </p:nvSpPr>
         <p:spPr>
           <a:xfrm>
-            <a:off x="47439273" y="32205915"/>
+            <a:off x="18945477" y="17702837"/>
             <a:ext cx="926325" cy="540000"/>
           </a:xfrm>
           <a:prstGeom prst="rect">
@@ -4771,7 +4758,7 @@
         </p:nvCxnSpPr>
         <p:spPr>
           <a:xfrm rot="5400000">
-            <a:off x="47762614" y="31248280"/>
+            <a:off x="19268818" y="16745202"/>
             <a:ext cx="277812" cy="1834"/>
           </a:xfrm>
           <a:prstGeom prst="bentConnector3">
@@ -4816,7 +4803,7 @@
         </p:nvCxnSpPr>
         <p:spPr>
           <a:xfrm rot="16200000" flipH="1">
-            <a:off x="47762613" y="32066092"/>
+            <a:off x="19268817" y="17563014"/>
             <a:ext cx="277812" cy="1833"/>
           </a:xfrm>
           <a:prstGeom prst="bentConnector3">
@@ -4861,7 +4848,7 @@
         </p:nvCxnSpPr>
         <p:spPr>
           <a:xfrm rot="16200000" flipH="1">
-            <a:off x="46213053" y="30126687"/>
+            <a:off x="17719257" y="15623609"/>
             <a:ext cx="269998" cy="622706"/>
           </a:xfrm>
           <a:prstGeom prst="bentConnector3">
@@ -4907,7 +4894,7 @@
         </p:nvCxnSpPr>
         <p:spPr>
           <a:xfrm rot="5400000">
-            <a:off x="47448599" y="29513848"/>
+            <a:off x="18954803" y="15010770"/>
             <a:ext cx="269997" cy="1848384"/>
           </a:xfrm>
           <a:prstGeom prst="bentConnector3">
@@ -4949,7 +4936,7 @@
         </p:nvSpPr>
         <p:spPr>
           <a:xfrm>
-            <a:off x="46820132" y="33007771"/>
+            <a:off x="18326336" y="18504693"/>
             <a:ext cx="926325" cy="540000"/>
           </a:xfrm>
           <a:prstGeom prst="rect">
@@ -5017,12 +5004,12 @@
         </p:nvCxnSpPr>
         <p:spPr>
           <a:xfrm rot="5400000">
-            <a:off x="46543178" y="31043159"/>
+            <a:off x="18049382" y="16540081"/>
             <a:ext cx="2704729" cy="1224494"/>
           </a:xfrm>
           <a:prstGeom prst="bentConnector3">
             <a:avLst>
-              <a:gd name="adj1" fmla="val 50000"/>
+              <a:gd name="adj1" fmla="val 4923"/>
             </a:avLst>
           </a:prstGeom>
           <a:ln w="19050">
@@ -5063,12 +5050,12 @@
         </p:nvCxnSpPr>
         <p:spPr>
           <a:xfrm rot="16200000" flipH="1">
-            <a:off x="45307632" y="31032108"/>
+            <a:off x="16813836" y="16529030"/>
             <a:ext cx="2704730" cy="1246596"/>
           </a:xfrm>
           <a:prstGeom prst="bentConnector3">
             <a:avLst>
-              <a:gd name="adj1" fmla="val 50000"/>
+              <a:gd name="adj1" fmla="val 4923"/>
             </a:avLst>
           </a:prstGeom>
           <a:ln w="19050">
@@ -5109,7 +5096,7 @@
         </p:nvCxnSpPr>
         <p:spPr>
           <a:xfrm rot="5400000">
-            <a:off x="44036212" y="31246170"/>
+            <a:off x="15542416" y="16743092"/>
             <a:ext cx="277929" cy="1"/>
           </a:xfrm>
           <a:prstGeom prst="bentConnector3">
@@ -5150,7 +5137,7 @@
         </p:nvSpPr>
         <p:spPr>
           <a:xfrm>
-            <a:off x="46196240" y="32205915"/>
+            <a:off x="17702444" y="17702837"/>
             <a:ext cx="926325" cy="540000"/>
           </a:xfrm>
           <a:prstGeom prst="rect">
@@ -5201,7 +5188,7 @@
         </p:nvSpPr>
         <p:spPr>
           <a:xfrm>
-            <a:off x="44340079" y="32203770"/>
+            <a:off x="15846283" y="17700692"/>
             <a:ext cx="926325" cy="540000"/>
           </a:xfrm>
           <a:prstGeom prst="rect">
@@ -5256,7 +5243,7 @@
         </p:nvCxnSpPr>
         <p:spPr>
           <a:xfrm rot="5400000">
-            <a:off x="44971437" y="31757646"/>
+            <a:off x="16477641" y="17254568"/>
             <a:ext cx="277929" cy="614318"/>
           </a:xfrm>
           <a:prstGeom prst="bentConnector3">
@@ -5301,7 +5288,7 @@
         </p:nvCxnSpPr>
         <p:spPr>
           <a:xfrm rot="16200000" flipH="1">
-            <a:off x="43940927" y="31341455"/>
+            <a:off x="15447131" y="16838377"/>
             <a:ext cx="1096564" cy="628066"/>
           </a:xfrm>
           <a:prstGeom prst="bentConnector3">
@@ -5346,7 +5333,7 @@
         </p:nvCxnSpPr>
         <p:spPr>
           <a:xfrm rot="5400000">
-            <a:off x="46519367" y="32065878"/>
+            <a:off x="18025571" y="17562800"/>
             <a:ext cx="280074" cy="1"/>
           </a:xfrm>
           <a:prstGeom prst="bentConnector3">
@@ -5391,7 +5378,7 @@
         </p:nvCxnSpPr>
         <p:spPr>
           <a:xfrm rot="16200000" flipH="1">
-            <a:off x="48684360" y="30126470"/>
+            <a:off x="20190564" y="15623392"/>
             <a:ext cx="264164" cy="617307"/>
           </a:xfrm>
           <a:prstGeom prst="bentConnector3">
@@ -5432,7 +5419,7 @@
         </p:nvSpPr>
         <p:spPr>
           <a:xfrm>
-            <a:off x="49900784" y="30567206"/>
+            <a:off x="21406988" y="16064128"/>
             <a:ext cx="926325" cy="540000"/>
           </a:xfrm>
           <a:prstGeom prst="rect">
@@ -5487,7 +5474,7 @@
         </p:nvCxnSpPr>
         <p:spPr>
           <a:xfrm rot="16200000" flipH="1">
-            <a:off x="49303786" y="29507045"/>
+            <a:off x="20809990" y="15003967"/>
             <a:ext cx="264164" cy="1856158"/>
           </a:xfrm>
           <a:prstGeom prst="bentConnector3">
@@ -5528,7 +5515,7 @@
         </p:nvSpPr>
         <p:spPr>
           <a:xfrm>
-            <a:off x="47437440" y="34028368"/>
+            <a:off x="18943644" y="19525290"/>
             <a:ext cx="926325" cy="540000"/>
           </a:xfrm>
           <a:prstGeom prst="rect">
@@ -5579,7 +5566,7 @@
         </p:nvSpPr>
         <p:spPr>
           <a:xfrm>
-            <a:off x="43712012" y="31385135"/>
+            <a:off x="15218216" y="16882057"/>
             <a:ext cx="926325" cy="540000"/>
           </a:xfrm>
           <a:prstGeom prst="rect">
@@ -5679,7 +5666,7 @@
         </p:nvCxnSpPr>
         <p:spPr>
           <a:xfrm rot="16200000" flipH="1">
-            <a:off x="47351651" y="33479415"/>
+            <a:off x="18857855" y="18976337"/>
             <a:ext cx="480597" cy="617308"/>
           </a:xfrm>
           <a:prstGeom prst="bentConnector3">
@@ -5720,7 +5707,7 @@
         </p:nvSpPr>
         <p:spPr>
           <a:xfrm>
-            <a:off x="43715822" y="33007771"/>
+            <a:off x="15222026" y="18504693"/>
             <a:ext cx="926325" cy="540000"/>
           </a:xfrm>
           <a:prstGeom prst="rect">
@@ -5812,7 +5799,7 @@
         </p:nvCxnSpPr>
         <p:spPr>
           <a:xfrm rot="16200000" flipH="1">
-            <a:off x="43635762" y="32464548"/>
+            <a:off x="15141966" y="17961470"/>
             <a:ext cx="1082636" cy="3810"/>
           </a:xfrm>
           <a:prstGeom prst="bentConnector3">
@@ -5853,7 +5840,7 @@
         </p:nvSpPr>
         <p:spPr>
           <a:xfrm>
-            <a:off x="49900783" y="31385135"/>
+            <a:off x="21406987" y="16882057"/>
             <a:ext cx="926325" cy="540000"/>
           </a:xfrm>
           <a:prstGeom prst="rect">
@@ -5885,7 +5872,7 @@
             <a:pPr algn="ctr"/>
             <a:r>
               <a:rPr lang="ru-RU" sz="700" dirty="0"/>
-              <a:t>Уроки Атласских гор (+в горах и горняки)</a:t>
+              <a:t>Уроки Атласских гор</a:t>
             </a:r>
           </a:p>
         </p:txBody>
@@ -5908,7 +5895,7 @@
         </p:nvCxnSpPr>
         <p:spPr>
           <a:xfrm rot="5400000">
-            <a:off x="50224983" y="31246170"/>
+            <a:off x="21731187" y="16743092"/>
             <a:ext cx="277929" cy="1"/>
           </a:xfrm>
           <a:prstGeom prst="bentConnector3">
@@ -5937,10 +5924,10 @@
       </p:cxnSp>
       <p:sp>
         <p:nvSpPr>
-          <p:cNvPr id="87" name="Прямоугольник 86">
-            <a:extLst>
-              <a:ext uri="{FF2B5EF4-FFF2-40B4-BE49-F238E27FC236}">
-                <a16:creationId xmlns:a16="http://schemas.microsoft.com/office/drawing/2014/main" id="{FFA5A51C-91CE-46B7-9AE4-E05DEBBD456D}"/>
+          <p:cNvPr id="90" name="Прямоугольник 89">
+            <a:extLst>
+              <a:ext uri="{FF2B5EF4-FFF2-40B4-BE49-F238E27FC236}">
+                <a16:creationId xmlns:a16="http://schemas.microsoft.com/office/drawing/2014/main" id="{4D3A332D-0695-445F-8EF4-63F5B567A6E2}"/>
               </a:ext>
             </a:extLst>
           </p:cNvPr>
@@ -5949,7 +5936,7 @@
         </p:nvSpPr>
         <p:spPr>
           <a:xfrm>
-            <a:off x="48663766" y="31385309"/>
+            <a:off x="20170232" y="17700692"/>
             <a:ext cx="926325" cy="540000"/>
           </a:xfrm>
           <a:prstGeom prst="rect">
@@ -5981,58 +5968,15 @@
             <a:pPr algn="ctr"/>
             <a:r>
               <a:rPr lang="ru-RU" sz="700" dirty="0"/>
-              <a:t>Заменить Французских офицеров Марокканцами</a:t>
-            </a:r>
-          </a:p>
-        </p:txBody>
-      </p:sp>
-      <p:sp>
-        <p:nvSpPr>
-          <p:cNvPr id="90" name="Прямоугольник 89">
-            <a:extLst>
-              <a:ext uri="{FF2B5EF4-FFF2-40B4-BE49-F238E27FC236}">
-                <a16:creationId xmlns:a16="http://schemas.microsoft.com/office/drawing/2014/main" id="{4D3A332D-0695-445F-8EF4-63F5B567A6E2}"/>
-              </a:ext>
-            </a:extLst>
-          </p:cNvPr>
-          <p:cNvSpPr/>
-          <p:nvPr/>
-        </p:nvSpPr>
-        <p:spPr>
-          <a:xfrm>
-            <a:off x="48664028" y="32203770"/>
-            <a:ext cx="926325" cy="540000"/>
-          </a:xfrm>
-          <a:prstGeom prst="rect">
-            <a:avLst/>
-          </a:prstGeom>
-          <a:solidFill>
-            <a:schemeClr val="bg1"/>
-          </a:solidFill>
-          <a:ln w="19050"/>
-        </p:spPr>
-        <p:style>
-          <a:lnRef idx="2">
-            <a:schemeClr val="accent1"/>
-          </a:lnRef>
-          <a:fillRef idx="1">
-            <a:schemeClr val="lt1"/>
-          </a:fillRef>
-          <a:effectRef idx="0">
-            <a:schemeClr val="accent1"/>
-          </a:effectRef>
-          <a:fontRef idx="minor">
-            <a:schemeClr val="dk1"/>
-          </a:fontRef>
-        </p:style>
-        <p:txBody>
-          <a:bodyPr lIns="124733" tIns="62367" rIns="124733" bIns="62367" rtlCol="0" anchor="ctr"/>
-          <a:lstStyle/>
-          <a:p>
-            <a:pPr algn="ctr"/>
+              <a:t>Поставить </a:t>
+            </a:r>
+            <a:r>
+              <a:rPr lang="ru-RU" sz="700" dirty="0" err="1"/>
+              <a:t>марроканцев</a:t>
+            </a:r>
             <a:r>
               <a:rPr lang="ru-RU" sz="700" dirty="0"/>
-              <a:t>Заменить Французских офицеров Марокканцами</a:t>
+              <a:t> на часть генеральских должностей</a:t>
             </a:r>
           </a:p>
         </p:txBody>
@@ -6055,7 +5999,7 @@
         </p:nvCxnSpPr>
         <p:spPr>
           <a:xfrm rot="5400000">
-            <a:off x="47871598" y="32772775"/>
+            <a:off x="19377802" y="18269697"/>
             <a:ext cx="1284598" cy="1226588"/>
           </a:xfrm>
           <a:prstGeom prst="bentConnector3">
@@ -6096,7 +6040,7 @@
         </p:nvSpPr>
         <p:spPr>
           <a:xfrm>
-            <a:off x="46196239" y="34028367"/>
+            <a:off x="17702443" y="19525289"/>
             <a:ext cx="926325" cy="540000"/>
           </a:xfrm>
           <a:prstGeom prst="rect">
@@ -6145,59 +6089,14 @@
           <p:cNvCxnSpPr>
             <a:cxnSpLocks/>
             <a:stCxn id="45" idx="2"/>
-            <a:endCxn id="87" idx="0"/>
-          </p:cNvCxnSpPr>
-          <p:nvPr/>
-        </p:nvCxnSpPr>
-        <p:spPr>
-          <a:xfrm rot="16200000" flipH="1">
-            <a:off x="48986961" y="31245340"/>
-            <a:ext cx="278103" cy="1833"/>
-          </a:xfrm>
-          <a:prstGeom prst="bentConnector3">
-            <a:avLst>
-              <a:gd name="adj1" fmla="val 50000"/>
-            </a:avLst>
-          </a:prstGeom>
-          <a:ln w="19050">
-            <a:tailEnd type="arrow"/>
-          </a:ln>
-        </p:spPr>
-        <p:style>
-          <a:lnRef idx="1">
-            <a:schemeClr val="accent1"/>
-          </a:lnRef>
-          <a:fillRef idx="0">
-            <a:schemeClr val="accent1"/>
-          </a:fillRef>
-          <a:effectRef idx="0">
-            <a:schemeClr val="accent1"/>
-          </a:effectRef>
-          <a:fontRef idx="minor">
-            <a:schemeClr val="tx1"/>
-          </a:fontRef>
-        </p:style>
-      </p:cxnSp>
-      <p:cxnSp>
-        <p:nvCxnSpPr>
-          <p:cNvPr id="100" name="Соединительная линия уступом 620">
-            <a:extLst>
-              <a:ext uri="{FF2B5EF4-FFF2-40B4-BE49-F238E27FC236}">
-                <a16:creationId xmlns:a16="http://schemas.microsoft.com/office/drawing/2014/main" id="{1D3BB680-7BC6-4E4D-93B0-5693659E5A26}"/>
-              </a:ext>
-            </a:extLst>
-          </p:cNvPr>
-          <p:cNvCxnSpPr>
-            <a:cxnSpLocks/>
-            <a:stCxn id="87" idx="2"/>
             <a:endCxn id="90" idx="0"/>
           </p:cNvCxnSpPr>
           <p:nvPr/>
         </p:nvCxnSpPr>
         <p:spPr>
           <a:xfrm rot="16200000" flipH="1">
-            <a:off x="48987830" y="32064408"/>
-            <a:ext cx="278461" cy="262"/>
+            <a:off x="20084065" y="17151362"/>
+            <a:ext cx="1096564" cy="2095"/>
           </a:xfrm>
           <a:prstGeom prst="bentConnector3">
             <a:avLst>
@@ -6241,7 +6140,7 @@
         </p:nvCxnSpPr>
         <p:spPr>
           <a:xfrm rot="5400000">
-            <a:off x="46731051" y="33476123"/>
+            <a:off x="18237255" y="18973045"/>
             <a:ext cx="480596" cy="623893"/>
           </a:xfrm>
           <a:prstGeom prst="bentConnector3">
@@ -6282,7 +6181,7 @@
         </p:nvSpPr>
         <p:spPr>
           <a:xfrm>
-            <a:off x="46196239" y="34961818"/>
+            <a:off x="17702443" y="20458740"/>
             <a:ext cx="926325" cy="540000"/>
           </a:xfrm>
           <a:prstGeom prst="rect">
@@ -6333,7 +6232,7 @@
         </p:nvSpPr>
         <p:spPr>
           <a:xfrm>
-            <a:off x="48656104" y="34961415"/>
+            <a:off x="20162308" y="20458337"/>
             <a:ext cx="926325" cy="540000"/>
           </a:xfrm>
           <a:prstGeom prst="rect">
@@ -6388,7 +6287,7 @@
         </p:nvCxnSpPr>
         <p:spPr>
           <a:xfrm rot="5400000">
-            <a:off x="47083278" y="34144493"/>
+            <a:off x="18589482" y="19641415"/>
             <a:ext cx="393450" cy="1241201"/>
           </a:xfrm>
           <a:prstGeom prst="bentConnector3">
@@ -6433,7 +6332,7 @@
         </p:nvCxnSpPr>
         <p:spPr>
           <a:xfrm rot="16200000" flipH="1">
-            <a:off x="48313412" y="34155559"/>
+            <a:off x="19819616" y="19652481"/>
             <a:ext cx="393047" cy="1218664"/>
           </a:xfrm>
           <a:prstGeom prst="bentConnector3">
@@ -6474,7 +6373,7 @@
         </p:nvSpPr>
         <p:spPr>
           <a:xfrm>
-            <a:off x="47127139" y="19702809"/>
+            <a:off x="12143190" y="14554835"/>
             <a:ext cx="926325" cy="540000"/>
           </a:xfrm>
           <a:prstGeom prst="rect">
@@ -6525,7 +6424,7 @@
         </p:nvSpPr>
         <p:spPr>
           <a:xfrm>
-            <a:off x="48363036" y="21384919"/>
+            <a:off x="13379087" y="16236945"/>
             <a:ext cx="926325" cy="540000"/>
           </a:xfrm>
           <a:prstGeom prst="rect">
@@ -6576,7 +6475,7 @@
         </p:nvSpPr>
         <p:spPr>
           <a:xfrm>
-            <a:off x="47127140" y="21384919"/>
+            <a:off x="12143191" y="16236945"/>
             <a:ext cx="926325" cy="540000"/>
           </a:xfrm>
           <a:prstGeom prst="rect">
@@ -6696,7 +6595,7 @@
         </p:nvSpPr>
         <p:spPr>
           <a:xfrm>
-            <a:off x="47736150" y="20580756"/>
+            <a:off x="12752201" y="15432782"/>
             <a:ext cx="926325" cy="540000"/>
           </a:xfrm>
           <a:prstGeom prst="rect">
@@ -6755,7 +6654,7 @@
         </p:nvSpPr>
         <p:spPr>
           <a:xfrm>
-            <a:off x="45888289" y="21384919"/>
+            <a:off x="10904340" y="16236945"/>
             <a:ext cx="926325" cy="540000"/>
           </a:xfrm>
           <a:prstGeom prst="rect">
@@ -6806,7 +6705,7 @@
         </p:nvSpPr>
         <p:spPr>
           <a:xfrm>
-            <a:off x="46497299" y="20580756"/>
+            <a:off x="11513350" y="15432782"/>
             <a:ext cx="926325" cy="540000"/>
           </a:xfrm>
           <a:prstGeom prst="rect">
@@ -6869,7 +6768,7 @@
         </p:nvCxnSpPr>
         <p:spPr>
           <a:xfrm rot="5400000">
-            <a:off x="47106409" y="20096862"/>
+            <a:off x="12122460" y="14948888"/>
             <a:ext cx="337947" cy="629840"/>
           </a:xfrm>
           <a:prstGeom prst="bentConnector3">
@@ -6914,7 +6813,7 @@
         </p:nvCxnSpPr>
         <p:spPr>
           <a:xfrm rot="16200000" flipH="1">
-            <a:off x="47725834" y="20107276"/>
+            <a:off x="12741885" y="14959302"/>
             <a:ext cx="337947" cy="609011"/>
           </a:xfrm>
           <a:prstGeom prst="bentConnector3">
@@ -6959,7 +6858,7 @@
         </p:nvCxnSpPr>
         <p:spPr>
           <a:xfrm rot="16200000" flipH="1">
-            <a:off x="47143301" y="20937916"/>
+            <a:off x="12159352" y="15789942"/>
             <a:ext cx="264163" cy="629841"/>
           </a:xfrm>
           <a:prstGeom prst="bentConnector3">
@@ -7005,7 +6904,7 @@
         </p:nvCxnSpPr>
         <p:spPr>
           <a:xfrm rot="5400000">
-            <a:off x="47762727" y="20948332"/>
+            <a:off x="12778778" y="15800358"/>
             <a:ext cx="264163" cy="609010"/>
           </a:xfrm>
           <a:prstGeom prst="bentConnector3">
@@ -7051,7 +6950,7 @@
         </p:nvCxnSpPr>
         <p:spPr>
           <a:xfrm rot="16200000" flipH="1">
-            <a:off x="48380675" y="20939394"/>
+            <a:off x="13396726" y="15791420"/>
             <a:ext cx="264163" cy="626886"/>
           </a:xfrm>
           <a:prstGeom prst="bentConnector3">
@@ -7096,7 +6995,7 @@
         </p:nvCxnSpPr>
         <p:spPr>
           <a:xfrm rot="5400000">
-            <a:off x="46523876" y="20948332"/>
+            <a:off x="11539927" y="15800358"/>
             <a:ext cx="264163" cy="609010"/>
           </a:xfrm>
           <a:prstGeom prst="bentConnector3">
@@ -7142,7 +7041,7 @@
         </p:nvCxnSpPr>
         <p:spPr>
           <a:xfrm rot="5400000">
-            <a:off x="47143302" y="20328907"/>
+            <a:off x="12159353" y="15180933"/>
             <a:ext cx="264163" cy="1847861"/>
           </a:xfrm>
           <a:prstGeom prst="bentConnector3">
@@ -7188,7 +7087,7 @@
         </p:nvCxnSpPr>
         <p:spPr>
           <a:xfrm flipH="1">
-            <a:off x="46814614" y="21654919"/>
+            <a:off x="11830665" y="16506945"/>
             <a:ext cx="312526" cy="0"/>
           </a:xfrm>
           <a:prstGeom prst="line">
@@ -7229,7 +7128,7 @@
         </p:nvSpPr>
         <p:spPr>
           <a:xfrm>
-            <a:off x="47128671" y="22202848"/>
+            <a:off x="12144722" y="17054874"/>
             <a:ext cx="926325" cy="540000"/>
           </a:xfrm>
           <a:prstGeom prst="rect">
@@ -7280,7 +7179,7 @@
         </p:nvSpPr>
         <p:spPr>
           <a:xfrm>
-            <a:off x="48360595" y="22202849"/>
+            <a:off x="13376646" y="17054875"/>
             <a:ext cx="926325" cy="540000"/>
           </a:xfrm>
           <a:prstGeom prst="rect">
@@ -7335,7 +7234,7 @@
         </p:nvCxnSpPr>
         <p:spPr>
           <a:xfrm rot="16200000" flipH="1">
-            <a:off x="47452104" y="22063117"/>
+            <a:off x="12468155" y="16915143"/>
             <a:ext cx="277929" cy="1531"/>
           </a:xfrm>
           <a:prstGeom prst="bentConnector3">
@@ -7380,7 +7279,7 @@
         </p:nvCxnSpPr>
         <p:spPr>
           <a:xfrm rot="5400000">
-            <a:off x="48686014" y="22062664"/>
+            <a:off x="13702065" y="16914690"/>
             <a:ext cx="277930" cy="2441"/>
           </a:xfrm>
           <a:prstGeom prst="bentConnector3">
@@ -7421,7 +7320,7 @@
         </p:nvSpPr>
         <p:spPr>
           <a:xfrm>
-            <a:off x="48985804" y="23020778"/>
+            <a:off x="14001855" y="17872804"/>
             <a:ext cx="926325" cy="540000"/>
           </a:xfrm>
           <a:prstGeom prst="rect">
@@ -7476,7 +7375,7 @@
         </p:nvCxnSpPr>
         <p:spPr>
           <a:xfrm rot="16200000" flipH="1">
-            <a:off x="48589654" y="22161464"/>
+            <a:off x="13605705" y="17013490"/>
             <a:ext cx="1095859" cy="622768"/>
           </a:xfrm>
           <a:prstGeom prst="bentConnector3">
@@ -7517,7 +7416,7 @@
         </p:nvSpPr>
         <p:spPr>
           <a:xfrm>
-            <a:off x="40465253" y="32213672"/>
+            <a:off x="6534667" y="21047292"/>
             <a:ext cx="926325" cy="540000"/>
           </a:xfrm>
           <a:prstGeom prst="rect">
@@ -7549,13 +7448,8 @@
             <a:pPr algn="ctr"/>
             <a:r>
               <a:rPr lang="ru-RU" sz="700" dirty="0"/>
-              <a:t>Создать государственный банк Марокко </a:t>
-            </a:r>
-            <a:r>
-              <a:rPr lang="ru-RU" sz="400" dirty="0"/>
-              <a:t>(После объявления большого джихада)</a:t>
-            </a:r>
-            <a:endParaRPr lang="ru-RU" sz="700" dirty="0"/>
+              <a:t>Создать государственный банк Марокко</a:t>
+            </a:r>
           </a:p>
         </p:txBody>
       </p:sp>
@@ -7573,7 +7467,7 @@
         </p:nvSpPr>
         <p:spPr>
           <a:xfrm>
-            <a:off x="40465252" y="33814481"/>
+            <a:off x="6534666" y="22648101"/>
             <a:ext cx="926325" cy="540000"/>
           </a:xfrm>
           <a:prstGeom prst="rect">
@@ -7605,13 +7499,8 @@
             <a:pPr algn="ctr"/>
             <a:r>
               <a:rPr lang="ru-RU" sz="700" dirty="0"/>
-              <a:t>Интегрировать Французские школы в новую систему образования </a:t>
-            </a:r>
-            <a:r>
-              <a:rPr lang="ru-RU" sz="100" dirty="0"/>
-              <a:t>(Доступ к аттестату о среднем образовании был предоставлен марокканскому мусульманскому населению в 1930 году, но доступ к элитным французским школам ( лицеям ) был предоставлен мусульманскому населению только после окончания войны. [ 11 ] Около девяноста процентов мусульманского населения Марокко были неграмотны во время Второй мировой войны. [)</a:t>
-            </a:r>
-            <a:endParaRPr lang="ru-RU" sz="700" dirty="0"/>
+              <a:t>Интегрировать Французские учреждения в новую систему образования</a:t>
+            </a:r>
           </a:p>
         </p:txBody>
       </p:sp>
@@ -7629,7 +7518,7 @@
         </p:nvSpPr>
         <p:spPr>
           <a:xfrm>
-            <a:off x="39848032" y="33013772"/>
+            <a:off x="5917446" y="21847392"/>
             <a:ext cx="926325" cy="540000"/>
           </a:xfrm>
           <a:prstGeom prst="rect">
@@ -7680,7 +7569,7 @@
         </p:nvSpPr>
         <p:spPr>
           <a:xfrm>
-            <a:off x="41090092" y="33013772"/>
+            <a:off x="7159506" y="21847392"/>
             <a:ext cx="926325" cy="540000"/>
           </a:xfrm>
           <a:prstGeom prst="rect">
@@ -7712,7 +7601,7 @@
             <a:pPr algn="ctr"/>
             <a:r>
               <a:rPr lang="ru-RU" sz="700" dirty="0"/>
-              <a:t>Единая учебная программа</a:t>
+              <a:t>Единая учебная программа и вечерние школы</a:t>
             </a:r>
           </a:p>
         </p:txBody>
@@ -7735,7 +7624,7 @@
         </p:nvCxnSpPr>
         <p:spPr>
           <a:xfrm rot="5400000">
-            <a:off x="40489756" y="32575112"/>
+            <a:off x="6559170" y="21408732"/>
             <a:ext cx="260100" cy="617221"/>
           </a:xfrm>
           <a:prstGeom prst="bentConnector3">
@@ -7780,7 +7669,7 @@
         </p:nvCxnSpPr>
         <p:spPr>
           <a:xfrm rot="16200000" flipH="1">
-            <a:off x="41110785" y="32571302"/>
+            <a:off x="7180199" y="21404922"/>
             <a:ext cx="260100" cy="624839"/>
           </a:xfrm>
           <a:prstGeom prst="bentConnector3">
@@ -7821,7 +7710,7 @@
         </p:nvSpPr>
         <p:spPr>
           <a:xfrm>
-            <a:off x="42332151" y="33814481"/>
+            <a:off x="8401565" y="22648101"/>
             <a:ext cx="926325" cy="540000"/>
           </a:xfrm>
           <a:prstGeom prst="rect">
@@ -7872,7 +7761,7 @@
         </p:nvSpPr>
         <p:spPr>
           <a:xfrm>
-            <a:off x="42332152" y="33013771"/>
+            <a:off x="8401566" y="21847391"/>
             <a:ext cx="926325" cy="540000"/>
           </a:xfrm>
           <a:prstGeom prst="rect">
@@ -7927,7 +7816,7 @@
         </p:nvCxnSpPr>
         <p:spPr>
           <a:xfrm rot="16200000" flipH="1">
-            <a:off x="41731816" y="31950271"/>
+            <a:off x="7801230" y="20783891"/>
             <a:ext cx="260099" cy="1866899"/>
           </a:xfrm>
           <a:prstGeom prst="bentConnector3">
@@ -7972,7 +7861,7 @@
         </p:nvCxnSpPr>
         <p:spPr>
           <a:xfrm rot="5400000">
-            <a:off x="42664960" y="33684126"/>
+            <a:off x="8734374" y="22517746"/>
             <a:ext cx="260710" cy="1"/>
           </a:xfrm>
           <a:prstGeom prst="bentConnector3">
@@ -8013,7 +7902,7 @@
         </p:nvSpPr>
         <p:spPr>
           <a:xfrm>
-            <a:off x="38605972" y="33013770"/>
+            <a:off x="4675386" y="21847390"/>
             <a:ext cx="926325" cy="540000"/>
           </a:xfrm>
           <a:prstGeom prst="rect">
@@ -8068,7 +7957,7 @@
         </p:nvCxnSpPr>
         <p:spPr>
           <a:xfrm rot="5400000">
-            <a:off x="39868727" y="31954081"/>
+            <a:off x="5938141" y="20787701"/>
             <a:ext cx="260098" cy="1859281"/>
           </a:xfrm>
           <a:prstGeom prst="bentConnector3">
@@ -8109,7 +7998,7 @@
         </p:nvSpPr>
         <p:spPr>
           <a:xfrm>
-            <a:off x="38608400" y="33814481"/>
+            <a:off x="4677814" y="22648101"/>
             <a:ext cx="926325" cy="540000"/>
           </a:xfrm>
           <a:prstGeom prst="rect">
@@ -8164,7 +8053,7 @@
         </p:nvCxnSpPr>
         <p:spPr>
           <a:xfrm rot="16200000" flipH="1">
-            <a:off x="38939994" y="33682911"/>
+            <a:off x="5009408" y="22516531"/>
             <a:ext cx="260711" cy="2428"/>
           </a:xfrm>
           <a:prstGeom prst="bentConnector3">
@@ -8205,7 +8094,7 @@
         </p:nvSpPr>
         <p:spPr>
           <a:xfrm>
-            <a:off x="41090092" y="29810895"/>
+            <a:off x="7159506" y="18644515"/>
             <a:ext cx="926325" cy="540000"/>
           </a:xfrm>
           <a:prstGeom prst="rect">
@@ -8239,46 +8128,6 @@
               <a:rPr lang="ru-RU" sz="700" dirty="0"/>
               <a:t>Запуск программы «Службы общественного труда»</a:t>
             </a:r>
-          </a:p>
-          <a:p>
-            <a:pPr algn="ctr"/>
-            <a:r>
-              <a:rPr lang="ru-RU" sz="100" dirty="0"/>
-              <a:t>(Чтобы занять сотни тысяч разорившихся крестьян, бежавших в города и создававших первые трущобы (бидонвили) Касабланки и Рабата, французы скопировали американские методы «Нового курса» </a:t>
-            </a:r>
-            <a:r>
-              <a:rPr lang="ru-RU" sz="100" dirty="0" err="1"/>
-              <a:t>Рузвельта:Инфраструктурные</a:t>
-            </a:r>
-            <a:r>
-              <a:rPr lang="ru-RU" sz="100" dirty="0"/>
-              <a:t> фокусы: Марокканцев массово нанимали за минимальную оплату и паёк на ручной труд — строительство дорог, прокладку телефонных линий и ирригационных </a:t>
-            </a:r>
-            <a:r>
-              <a:rPr lang="ru-RU" sz="100" dirty="0" err="1"/>
-              <a:t>каналов.Форсирование</a:t>
-            </a:r>
-            <a:r>
-              <a:rPr lang="ru-RU" sz="100" dirty="0"/>
-              <a:t> строительства плотины Эль-</a:t>
-            </a:r>
-            <a:r>
-              <a:rPr lang="ru-RU" sz="100" dirty="0" err="1"/>
-              <a:t>Кансера</a:t>
-            </a:r>
-            <a:r>
-              <a:rPr lang="ru-RU" sz="100" dirty="0"/>
-              <a:t>: В 1937 году были брошены колоссальные человеческие ресурсы на ускорение строительства этой ГЭС на реке </a:t>
-            </a:r>
-            <a:r>
-              <a:rPr lang="ru-RU" sz="100" dirty="0" err="1"/>
-              <a:t>Бех</a:t>
-            </a:r>
-            <a:r>
-              <a:rPr lang="ru-RU" sz="100" dirty="0"/>
-              <a:t> для обеспечения водой Новых городов.)</a:t>
-            </a:r>
-            <a:endParaRPr lang="ru-RU" sz="700" dirty="0"/>
           </a:p>
         </p:txBody>
       </p:sp>
@@ -8296,7 +8145,7 @@
         </p:nvSpPr>
         <p:spPr>
           <a:xfrm>
-            <a:off x="40465251" y="30612238"/>
+            <a:off x="6534665" y="19445858"/>
             <a:ext cx="926325" cy="540000"/>
           </a:xfrm>
           <a:prstGeom prst="rect">
@@ -8330,54 +8179,6 @@
               <a:rPr lang="ru-RU" sz="700" dirty="0"/>
               <a:t>Развитие консервной промышленности</a:t>
             </a:r>
-          </a:p>
-          <a:p>
-            <a:pPr algn="ctr"/>
-            <a:r>
-              <a:rPr lang="ru-RU" sz="100" dirty="0"/>
-              <a:t>(В 1938 году в </a:t>
-            </a:r>
-            <a:r>
-              <a:rPr lang="ru-RU" sz="100" dirty="0" err="1"/>
-              <a:t>Сафи</a:t>
-            </a:r>
-            <a:r>
-              <a:rPr lang="ru-RU" sz="100" dirty="0"/>
-              <a:t> и </a:t>
-            </a:r>
-            <a:r>
-              <a:rPr lang="ru-RU" sz="100" dirty="0" err="1"/>
-              <a:t>Агадире</a:t>
-            </a:r>
-            <a:r>
-              <a:rPr lang="ru-RU" sz="100" dirty="0"/>
-              <a:t> начался бум строительства заводов по производству рыбных консервов (сардин). Это было сделано для долгосрочного снабжения французской армии </a:t>
-            </a:r>
-            <a:r>
-              <a:rPr lang="ru-RU" sz="100" dirty="0" err="1"/>
-              <a:t>сухпайками</a:t>
-            </a:r>
-            <a:r>
-              <a:rPr lang="ru-RU" sz="100" dirty="0"/>
-              <a:t>.) Продовольственный мост: Вся консервная промышленность </a:t>
-            </a:r>
-            <a:r>
-              <a:rPr lang="ru-RU" sz="100" dirty="0" err="1"/>
-              <a:t>Сафи</a:t>
-            </a:r>
-            <a:r>
-              <a:rPr lang="ru-RU" sz="100" dirty="0"/>
-              <a:t> и </a:t>
-            </a:r>
-            <a:r>
-              <a:rPr lang="ru-RU" sz="100" dirty="0" err="1"/>
-              <a:t>Агадира</a:t>
-            </a:r>
-            <a:r>
-              <a:rPr lang="ru-RU" sz="100" dirty="0"/>
-              <a:t> (производство рыбных и мясных консервов) работала исключительно на французскую армию. Поставки цитрусовых и ранних овощей частным лицам в Европу прекратились — всё уходило на нужды госпиталей и воинских частей.</a:t>
-            </a:r>
-            <a:endParaRPr lang="ru-RU" sz="700" dirty="0"/>
           </a:p>
         </p:txBody>
       </p:sp>
@@ -8395,7 +8196,7 @@
         </p:nvSpPr>
         <p:spPr>
           <a:xfrm>
-            <a:off x="39847255" y="34624480"/>
+            <a:off x="6534665" y="23448810"/>
             <a:ext cx="926325" cy="540000"/>
           </a:xfrm>
           <a:prstGeom prst="rect">
@@ -8432,46 +8233,6 @@
             <a:r>
               <a:rPr lang="ru-RU" sz="700" dirty="0" err="1"/>
               <a:t>Карауина</a:t>
-            </a:r>
-            <a:r>
-              <a:rPr lang="ru-RU" sz="700" dirty="0"/>
-              <a:t> </a:t>
-            </a:r>
-            <a:r>
-              <a:rPr lang="ru-RU" sz="200" dirty="0"/>
-              <a:t>(Параллельно в Марокко шла реформа старейшего исламского центра — Аль-</a:t>
-            </a:r>
-            <a:r>
-              <a:rPr lang="ru-RU" sz="200" dirty="0" err="1"/>
-              <a:t>Карауина</a:t>
-            </a:r>
-            <a:r>
-              <a:rPr lang="ru-RU" sz="200" dirty="0"/>
-              <a:t> в Фесе, основанного еще в 859 </a:t>
-            </a:r>
-            <a:r>
-              <a:rPr lang="ru-RU" sz="200" dirty="0" err="1"/>
-              <a:t>году.В</a:t>
-            </a:r>
-            <a:r>
-              <a:rPr lang="ru-RU" sz="200" dirty="0"/>
-              <a:t> 1947 году его частично интегрировали в систему государственного </a:t>
-            </a:r>
-            <a:r>
-              <a:rPr lang="ru-RU" sz="200" dirty="0" err="1"/>
-              <a:t>образования.Полноценным</a:t>
-            </a:r>
-            <a:r>
-              <a:rPr lang="ru-RU" sz="200" dirty="0"/>
-              <a:t> государственным современным светским университетом по европейским стандартам (с выдачей дипломов единого образца) Аль-</a:t>
-            </a:r>
-            <a:r>
-              <a:rPr lang="ru-RU" sz="200" dirty="0" err="1"/>
-              <a:t>Карауин</a:t>
-            </a:r>
-            <a:r>
-              <a:rPr lang="ru-RU" sz="200" dirty="0"/>
-              <a:t> официально стал только в 1963 году специальным королевским указом)</a:t>
             </a:r>
             <a:endParaRPr lang="ru-RU" sz="700" dirty="0"/>
           </a:p>
@@ -8491,7 +8252,7 @@
         </p:nvSpPr>
         <p:spPr>
           <a:xfrm>
-            <a:off x="39847255" y="28995082"/>
+            <a:off x="5916669" y="17828702"/>
             <a:ext cx="926325" cy="540000"/>
           </a:xfrm>
           <a:prstGeom prst="rect">
@@ -8525,46 +8286,6 @@
               <a:rPr lang="ru-RU" sz="700" dirty="0"/>
               <a:t>Девальвировать Марокканский франк</a:t>
             </a:r>
-          </a:p>
-          <a:p>
-            <a:pPr algn="ctr"/>
-            <a:r>
-              <a:rPr lang="ru-RU" sz="100" dirty="0"/>
-              <a:t>(В сентябре 1936 года Франция провела девальвацию французского франка. Вслед за ним колониальный Банк Марокко (</a:t>
-            </a:r>
-            <a:r>
-              <a:rPr lang="ru-RU" sz="100" dirty="0" err="1"/>
-              <a:t>Banque</a:t>
-            </a:r>
-            <a:r>
-              <a:rPr lang="ru-RU" sz="100" dirty="0"/>
-              <a:t> </a:t>
-            </a:r>
-            <a:r>
-              <a:rPr lang="ru-RU" sz="100" dirty="0" err="1"/>
-              <a:t>d’Etat</a:t>
-            </a:r>
-            <a:r>
-              <a:rPr lang="ru-RU" sz="100" dirty="0"/>
-              <a:t> </a:t>
-            </a:r>
-            <a:r>
-              <a:rPr lang="ru-RU" sz="100" dirty="0" err="1"/>
-              <a:t>du</a:t>
-            </a:r>
-            <a:r>
-              <a:rPr lang="ru-RU" sz="100" dirty="0"/>
-              <a:t> </a:t>
-            </a:r>
-            <a:r>
-              <a:rPr lang="ru-RU" sz="100" dirty="0" err="1"/>
-              <a:t>Maroc</a:t>
-            </a:r>
-            <a:r>
-              <a:rPr lang="ru-RU" sz="100" dirty="0"/>
-              <a:t>) был вынужден девальвировать марокканский франк на 25–35%.Результат: Это сделало марокканские экспортные товары (фосфаты, зерно, металлы) значительно дешевле и привлекательнее на мировом рынке, что резко стимулировало экспорт и увеличило доходы протектората)</a:t>
-            </a:r>
-            <a:endParaRPr lang="ru-RU" sz="600" dirty="0"/>
           </a:p>
         </p:txBody>
       </p:sp>
@@ -8582,7 +8303,7 @@
         </p:nvSpPr>
         <p:spPr>
           <a:xfrm>
-            <a:off x="40465252" y="31412955"/>
+            <a:off x="6534666" y="20246575"/>
             <a:ext cx="926325" cy="540000"/>
           </a:xfrm>
           <a:prstGeom prst="rect">
@@ -8619,30 +8340,6 @@
             <a:r>
               <a:rPr lang="ru-RU" sz="700" dirty="0" err="1"/>
               <a:t>Кансера</a:t>
-            </a:r>
-            <a:r>
-              <a:rPr lang="ru-RU" sz="700" dirty="0"/>
-              <a:t> </a:t>
-            </a:r>
-            <a:r>
-              <a:rPr lang="ru-RU" sz="100" dirty="0"/>
-              <a:t>(В 1939 году была официально введена в строй крупная гидроэлектростанция на реке </a:t>
-            </a:r>
-            <a:r>
-              <a:rPr lang="ru-RU" sz="100" dirty="0" err="1"/>
-              <a:t>Бех</a:t>
-            </a:r>
-            <a:r>
-              <a:rPr lang="ru-RU" sz="100" dirty="0"/>
-              <a:t>. Она дала промышленную электроэнергию военным заводам и мастерским </a:t>
-            </a:r>
-            <a:r>
-              <a:rPr lang="ru-RU" sz="100" dirty="0" err="1"/>
-              <a:t>Мекнеса</a:t>
-            </a:r>
-            <a:r>
-              <a:rPr lang="ru-RU" sz="100" dirty="0"/>
-              <a:t> и Рабата.)</a:t>
             </a:r>
             <a:endParaRPr lang="ru-RU" sz="700" dirty="0"/>
           </a:p>
@@ -8662,7 +8359,7 @@
         </p:nvSpPr>
         <p:spPr>
           <a:xfrm>
-            <a:off x="41707311" y="31412952"/>
+            <a:off x="7776725" y="20246572"/>
             <a:ext cx="926325" cy="540000"/>
           </a:xfrm>
           <a:prstGeom prst="rect">
@@ -8696,72 +8393,6 @@
               <a:rPr lang="ru-RU" sz="700" dirty="0"/>
               <a:t>Перевести добычу на военные рельсы</a:t>
             </a:r>
-          </a:p>
-          <a:p>
-            <a:pPr algn="ctr"/>
-            <a:r>
-              <a:rPr lang="ru-RU" sz="100" dirty="0"/>
-              <a:t>(Марокко превратилось в ключевого сырьевого донора французского ВПК, который лихорадочно наращивал производство </a:t>
-            </a:r>
-            <a:r>
-              <a:rPr lang="ru-RU" sz="100" dirty="0" err="1"/>
-              <a:t>оружия.Экспортные</a:t>
-            </a:r>
-            <a:r>
-              <a:rPr lang="ru-RU" sz="100" dirty="0"/>
-              <a:t> квоты: В 1938 году был введен жесткий контроль над экспортом стратегического сырья. Весь объем добычи кобальта (месторождение </a:t>
-            </a:r>
-            <a:r>
-              <a:rPr lang="ru-RU" sz="100" dirty="0" err="1"/>
-              <a:t>Бу-Аззер</a:t>
-            </a:r>
-            <a:r>
-              <a:rPr lang="ru-RU" sz="100" dirty="0"/>
-              <a:t>) и марганца (</a:t>
-            </a:r>
-            <a:r>
-              <a:rPr lang="ru-RU" sz="100" dirty="0" err="1"/>
-              <a:t>Бу</a:t>
-            </a:r>
-            <a:r>
-              <a:rPr lang="ru-RU" sz="100" dirty="0"/>
-              <a:t>-Арфа) теперь принудительно направлялся на металлургические заводы Франции для производства броневой стали. Фокус «Сырьевой донор Метрополии»: Добавляет в регионы Марокко дополнительные единицы хрома/стали (имитирующих марганец и кобальт) и увеличивает скорость их добычи на +10%, но направляет часть ресурсов Франции.) Перевести всю экономику на военные рельсы (Переход на режим военной экономики и </a:t>
-            </a:r>
-            <a:r>
-              <a:rPr lang="ru-RU" sz="100" dirty="0" err="1"/>
-              <a:t>нормированияС</a:t>
-            </a:r>
-            <a:r>
-              <a:rPr lang="ru-RU" sz="100" dirty="0"/>
-              <a:t> началом войны в сентябре 1939 года свободный рынок в Марокко фактически перестал </a:t>
-            </a:r>
-            <a:r>
-              <a:rPr lang="ru-RU" sz="100" dirty="0" err="1"/>
-              <a:t>существовать.Введение</a:t>
-            </a:r>
-            <a:r>
-              <a:rPr lang="ru-RU" sz="100" dirty="0"/>
-              <a:t> карточной системы: Французская администрация ввела жесткое нормирование и купоны на базовые товары: сахар, чай, ткани, горючее и </a:t>
-            </a:r>
-            <a:r>
-              <a:rPr lang="ru-RU" sz="100" dirty="0" err="1"/>
-              <a:t>мыло.Контроль</a:t>
-            </a:r>
-            <a:r>
-              <a:rPr lang="ru-RU" sz="100" dirty="0"/>
-              <a:t> цен и конфискации: Были введены суровые наказания за спекуляцию. Специальные экономические патрули имели право конфисковать «излишки» зерна у крупных землевладельцев для нужд </a:t>
-            </a:r>
-            <a:r>
-              <a:rPr lang="ru-RU" sz="100" dirty="0" err="1"/>
-              <a:t>армии.Замораживание</a:t>
-            </a:r>
-            <a:r>
-              <a:rPr lang="ru-RU" sz="100" dirty="0"/>
-              <a:t> капиталов: Были введены жесткие ограничения на вывоз валюты и золота из протектората, чтобы предотвратить панику и бегство европейских капиталов.)</a:t>
-            </a:r>
-          </a:p>
-          <a:p>
-            <a:pPr algn="ctr"/>
             <a:endParaRPr lang="ru-RU" sz="100" dirty="0"/>
           </a:p>
         </p:txBody>
@@ -8780,7 +8411,7 @@
         </p:nvSpPr>
         <p:spPr>
           <a:xfrm>
-            <a:off x="41707312" y="30612238"/>
+            <a:off x="7776726" y="19445858"/>
             <a:ext cx="926325" cy="540000"/>
           </a:xfrm>
           <a:prstGeom prst="rect">
@@ -8812,69 +8443,8 @@
             <a:pPr algn="ctr"/>
             <a:r>
               <a:rPr lang="ru-RU" sz="700" dirty="0"/>
-              <a:t>Модернизация фосфатных конвейеров </a:t>
-            </a:r>
-            <a:r>
-              <a:rPr lang="ru-RU" sz="100" dirty="0"/>
-              <a:t>(Выход фосфатной промышленности на пик </a:t>
-            </a:r>
-            <a:r>
-              <a:rPr lang="ru-RU" sz="100" dirty="0" err="1"/>
-              <a:t>производстваНесмотря</a:t>
-            </a:r>
-            <a:r>
-              <a:rPr lang="ru-RU" sz="100" dirty="0"/>
-              <a:t> на кризис в сельском хозяйстве, промышленный сектор показал рекордный </a:t>
-            </a:r>
-            <a:r>
-              <a:rPr lang="ru-RU" sz="100" dirty="0" err="1"/>
-              <a:t>рост.Валютный</a:t>
-            </a:r>
-            <a:r>
-              <a:rPr lang="ru-RU" sz="100" dirty="0"/>
-              <a:t> донор: Государственная OCP (</a:t>
-            </a:r>
-            <a:r>
-              <a:rPr lang="ru-RU" sz="100" dirty="0" err="1"/>
-              <a:t>Office</a:t>
-            </a:r>
-            <a:r>
-              <a:rPr lang="ru-RU" sz="100" dirty="0"/>
-              <a:t> </a:t>
-            </a:r>
-            <a:r>
-              <a:rPr lang="ru-RU" sz="100" dirty="0" err="1"/>
-              <a:t>Chérifien</a:t>
-            </a:r>
-            <a:r>
-              <a:rPr lang="ru-RU" sz="100" dirty="0"/>
-              <a:t> </a:t>
-            </a:r>
-            <a:r>
-              <a:rPr lang="ru-RU" sz="100" dirty="0" err="1"/>
-              <a:t>des</a:t>
-            </a:r>
-            <a:r>
-              <a:rPr lang="ru-RU" sz="100" dirty="0"/>
-              <a:t> </a:t>
-            </a:r>
-            <a:r>
-              <a:rPr lang="ru-RU" sz="100" dirty="0" err="1"/>
-              <a:t>Phosphates</a:t>
-            </a:r>
-            <a:r>
-              <a:rPr lang="ru-RU" sz="100" dirty="0"/>
-              <a:t>) в </a:t>
-            </a:r>
-            <a:r>
-              <a:rPr lang="ru-RU" sz="100" dirty="0" err="1"/>
-              <a:t>Хурибге</a:t>
-            </a:r>
-            <a:r>
-              <a:rPr lang="ru-RU" sz="100" dirty="0"/>
-              <a:t> в 1937 году полностью модернизировала конвейерные линии и увеличила добычу фосфатов до исторического максимума. Это позволило Франции перекрыть дефицит бюджета протектората, возникший из-за засухи.)</a:t>
-            </a:r>
-            <a:endParaRPr lang="ru-RU" sz="700" dirty="0"/>
+              <a:t>Модернизация фосфатных конвейеров</a:t>
+            </a:r>
           </a:p>
         </p:txBody>
       </p:sp>
@@ -8892,7 +8462,7 @@
         </p:nvSpPr>
         <p:spPr>
           <a:xfrm>
-            <a:off x="39847256" y="29811520"/>
+            <a:off x="5916670" y="18645140"/>
             <a:ext cx="926325" cy="540000"/>
           </a:xfrm>
           <a:prstGeom prst="rect">
@@ -8926,38 +8496,6 @@
               <a:rPr lang="ru-RU" sz="700" dirty="0"/>
               <a:t>Строительство Южной железной дороги</a:t>
             </a:r>
-          </a:p>
-          <a:p>
-            <a:pPr algn="ctr"/>
-            <a:r>
-              <a:rPr lang="ru-RU" sz="200" dirty="0"/>
-              <a:t>В 1936 году шло форсированное расширение узкоколейной ветки в Сахару до города </a:t>
-            </a:r>
-            <a:r>
-              <a:rPr lang="ru-RU" sz="200" dirty="0" err="1"/>
-              <a:t>Бу</a:t>
-            </a:r>
-            <a:r>
-              <a:rPr lang="ru-RU" sz="200" dirty="0"/>
-              <a:t>-Арфа для вывоза стратегического марганца из рудников </a:t>
-            </a:r>
-            <a:r>
-              <a:rPr lang="ru-RU" sz="200" dirty="0" err="1"/>
-              <a:t>Бу-Аззер</a:t>
-            </a:r>
-            <a:r>
-              <a:rPr lang="ru-RU" sz="200" dirty="0"/>
-              <a:t>. Это была подготовка к созданию </a:t>
-            </a:r>
-            <a:r>
-              <a:rPr lang="ru-RU" sz="200" dirty="0" err="1"/>
-              <a:t>Транссахарской</a:t>
-            </a:r>
-            <a:r>
-              <a:rPr lang="ru-RU" sz="200" dirty="0"/>
-              <a:t> магистрали.</a:t>
-            </a:r>
-            <a:endParaRPr lang="ru-RU" sz="600" dirty="0"/>
           </a:p>
         </p:txBody>
       </p:sp>
@@ -8975,7 +8513,7 @@
         </p:nvSpPr>
         <p:spPr>
           <a:xfrm>
-            <a:off x="39221311" y="30612237"/>
+            <a:off x="5290725" y="19445857"/>
             <a:ext cx="926325" cy="540000"/>
           </a:xfrm>
           <a:prstGeom prst="rect">
@@ -9009,46 +8547,6 @@
               <a:rPr lang="ru-RU" sz="700" dirty="0"/>
               <a:t>Поддержать проект «свободных школ»</a:t>
             </a:r>
-          </a:p>
-          <a:p>
-            <a:pPr algn="ctr"/>
-            <a:r>
-              <a:rPr lang="ru-RU" sz="100" dirty="0"/>
-              <a:t>(Поскольку государственное образование искусственно сдерживало марокканцев (в 1945 году в школах училось всего около 35 000 местных детей), марокканское национальное движение и буржуазия начали массово открывать «Свободные школы» (</a:t>
-            </a:r>
-            <a:r>
-              <a:rPr lang="ru-RU" sz="100" dirty="0" err="1"/>
-              <a:t>Ecoles</a:t>
-            </a:r>
-            <a:r>
-              <a:rPr lang="ru-RU" sz="100" dirty="0"/>
-              <a:t> </a:t>
-            </a:r>
-            <a:r>
-              <a:rPr lang="ru-RU" sz="100" dirty="0" err="1"/>
-              <a:t>Libres</a:t>
-            </a:r>
-            <a:r>
-              <a:rPr lang="ru-RU" sz="100" dirty="0"/>
-              <a:t>).В период 1936–1939 годов эти частные школы пережили </a:t>
-            </a:r>
-            <a:r>
-              <a:rPr lang="ru-RU" sz="100" dirty="0" err="1"/>
-              <a:t>бум.Их</a:t>
-            </a:r>
-            <a:r>
-              <a:rPr lang="ru-RU" sz="100" dirty="0"/>
-              <a:t> главная реформа заключалась в модернизации учебного плана: в отличие от традиционных коранических школ (</a:t>
-            </a:r>
-            <a:r>
-              <a:rPr lang="ru-RU" sz="100" dirty="0" err="1"/>
-              <a:t>мсid</a:t>
-            </a:r>
-            <a:r>
-              <a:rPr lang="ru-RU" sz="100" dirty="0"/>
-              <a:t>), где тексты зазубривались, здесь преподавали математику, историю и географию на арабском языке, воспитывая будущих лидеров борьбы за независимость.)</a:t>
-            </a:r>
-            <a:endParaRPr lang="ru-RU" sz="700" dirty="0"/>
           </a:p>
         </p:txBody>
       </p:sp>
@@ -9066,7 +8564,7 @@
         </p:nvSpPr>
         <p:spPr>
           <a:xfrm>
-            <a:off x="39221312" y="32209238"/>
+            <a:off x="5290726" y="21042858"/>
             <a:ext cx="926325" cy="540000"/>
           </a:xfrm>
           <a:prstGeom prst="rect">
@@ -9100,30 +8598,6 @@
               <a:rPr lang="ru-RU" sz="700" dirty="0"/>
               <a:t>Санитарные реформы</a:t>
             </a:r>
-          </a:p>
-          <a:p>
-            <a:pPr algn="ctr"/>
-            <a:r>
-              <a:rPr lang="ru-RU" sz="100" dirty="0"/>
-              <a:t>(Голод спровоцировал эпидемии среди населения и массовый падеж скота, который был основой экономики </a:t>
-            </a:r>
-            <a:r>
-              <a:rPr lang="ru-RU" sz="100" dirty="0" err="1"/>
-              <a:t>берберов.«Операция</a:t>
-            </a:r>
-            <a:r>
-              <a:rPr lang="ru-RU" sz="100" dirty="0"/>
-              <a:t> ветеринарии»: Колониальные власти организовали принудительную бесплатную вакцинацию оставшегося скота от ящура и </a:t>
-            </a:r>
-            <a:r>
-              <a:rPr lang="ru-RU" sz="100" dirty="0" err="1"/>
-              <a:t>чумы.Мобильные</a:t>
-            </a:r>
-            <a:r>
-              <a:rPr lang="ru-RU" sz="100" dirty="0"/>
-              <a:t> госпитали: Для борьбы с сыпным тифом и чумой в 1937 году французы создали сеть мобильных медицинских отрядов, которые перемещались по Сахаре и Атласу, вакцинируя местных жителей.)</a:t>
-            </a:r>
-            <a:endParaRPr lang="ru-RU" sz="700" dirty="0"/>
           </a:p>
         </p:txBody>
       </p:sp>
@@ -9141,7 +8615,7 @@
         </p:nvSpPr>
         <p:spPr>
           <a:xfrm>
-            <a:off x="39221311" y="31412952"/>
+            <a:off x="5290725" y="20246572"/>
             <a:ext cx="926325" cy="540000"/>
           </a:xfrm>
           <a:prstGeom prst="rect">
@@ -9175,46 +8649,6 @@
               <a:rPr lang="ru-RU" sz="800" dirty="0"/>
               <a:t>Французские дотации для феллахов</a:t>
             </a:r>
-          </a:p>
-          <a:p>
-            <a:pPr algn="ctr"/>
-            <a:r>
-              <a:rPr lang="ru-RU" sz="100" dirty="0"/>
-              <a:t>(Из-за сильного неурожая зерновых в предыдущие годы администрация ввела жесткое регулирование цен на хлеб и муку для предотвращения спекуляций. Султан Мухаммед V добился от французов выделения дотаций и посевного зерна для беднейших марокканских крестьян (феллахов).) Из-за полного отсутствия дождей в начале 1937 года урожай зерна в южных и центральных регионах Марокко погиб. Надвигался массовый голод среди коренного населения (феллахов).Создание «Фонда солидарности»: Администрация </a:t>
-            </a:r>
-            <a:r>
-              <a:rPr lang="ru-RU" sz="100" dirty="0" err="1"/>
-              <a:t>Ногеса</a:t>
-            </a:r>
-            <a:r>
-              <a:rPr lang="ru-RU" sz="100" dirty="0"/>
-              <a:t> ввела чрезвычайный налог на сверхприбыли крупных европейских компаний для закупки </a:t>
-            </a:r>
-            <a:r>
-              <a:rPr lang="ru-RU" sz="100" dirty="0" err="1"/>
-              <a:t>зерна.Экстренный</a:t>
-            </a:r>
-            <a:r>
-              <a:rPr lang="ru-RU" sz="100" dirty="0"/>
-              <a:t> импорт и бесплатная раздача: Были отменены пошлины на ввоз пшеницы из Алжира и Франции. В пострадавших регионах (Марракеш, </a:t>
-            </a:r>
-            <a:r>
-              <a:rPr lang="ru-RU" sz="100" dirty="0" err="1"/>
-              <a:t>Сус</a:t>
-            </a:r>
-            <a:r>
-              <a:rPr lang="ru-RU" sz="100" dirty="0"/>
-              <a:t>) французы открыли пункты бесплатной раздачи супа и зерна, чтобы остановить голодные марши на </a:t>
-            </a:r>
-            <a:r>
-              <a:rPr lang="ru-RU" sz="100" dirty="0" err="1"/>
-              <a:t>Касабланку.Запрет</a:t>
-            </a:r>
-            <a:r>
-              <a:rPr lang="ru-RU" sz="100" dirty="0"/>
-              <a:t> на вывоз хлеба: Весной 1937 года был введен полный запрет на экспорт марокканского зерна в Европу, чтобы удержать внутренние цены.</a:t>
-            </a:r>
-            <a:endParaRPr lang="ru-RU" sz="600" dirty="0"/>
           </a:p>
         </p:txBody>
       </p:sp>
@@ -9232,7 +8666,7 @@
         </p:nvSpPr>
         <p:spPr>
           <a:xfrm>
-            <a:off x="38612323" y="29815951"/>
+            <a:off x="4681737" y="18649571"/>
             <a:ext cx="926325" cy="540000"/>
           </a:xfrm>
           <a:prstGeom prst="rect">
@@ -9269,38 +8703,6 @@
             <a:r>
               <a:rPr lang="ru-RU" sz="700" dirty="0" err="1"/>
               <a:t>Касба-Тадла</a:t>
-            </a:r>
-            <a:endParaRPr lang="ru-RU" sz="700" dirty="0"/>
-          </a:p>
-          <a:p>
-            <a:pPr algn="ctr"/>
-            <a:r>
-              <a:rPr lang="ru-RU" sz="100" dirty="0"/>
-              <a:t>(Для борьбы с безработицей среди коренного населения и решения проблемы засух в 1936 году было выделено целевое государственное финансирование на новые инфраструктурные объекты. В частности, активизировалось финансирование строительства плотины </a:t>
-            </a:r>
-            <a:r>
-              <a:rPr lang="ru-RU" sz="100" dirty="0" err="1"/>
-              <a:t>Касба-Тадла</a:t>
-            </a:r>
-            <a:r>
-              <a:rPr lang="ru-RU" sz="100" dirty="0"/>
-              <a:t> и гидротехнических сооружений на ключевой реке </a:t>
-            </a:r>
-            <a:r>
-              <a:rPr lang="ru-RU" sz="100" dirty="0" err="1"/>
-              <a:t>Умм</a:t>
-            </a:r>
-            <a:r>
-              <a:rPr lang="ru-RU" sz="100" dirty="0"/>
-              <a:t>-эр-</a:t>
-            </a:r>
-            <a:r>
-              <a:rPr lang="ru-RU" sz="100" dirty="0" err="1"/>
-              <a:t>Рбия</a:t>
-            </a:r>
-            <a:r>
-              <a:rPr lang="ru-RU" sz="100" dirty="0"/>
-              <a:t>. Это дало сильный толчок строительному сектору.)</a:t>
             </a:r>
             <a:endParaRPr lang="ru-RU" sz="700" dirty="0"/>
           </a:p>
@@ -9413,7 +8815,7 @@
         </p:nvSpPr>
         <p:spPr>
           <a:xfrm>
-            <a:off x="41707310" y="32213669"/>
+            <a:off x="7776724" y="21047289"/>
             <a:ext cx="926325" cy="540000"/>
           </a:xfrm>
           <a:prstGeom prst="rect">
@@ -9481,7 +8883,7 @@
         </p:nvCxnSpPr>
         <p:spPr>
           <a:xfrm rot="16200000" flipH="1">
-            <a:off x="39556331" y="32081094"/>
+            <a:off x="5625745" y="20914714"/>
             <a:ext cx="256286" cy="1"/>
           </a:xfrm>
           <a:prstGeom prst="bentConnector3">
@@ -9526,7 +8928,7 @@
         </p:nvCxnSpPr>
         <p:spPr>
           <a:xfrm rot="5400000">
-            <a:off x="42040118" y="31282595"/>
+            <a:off x="8109532" y="20116215"/>
             <a:ext cx="260714" cy="1"/>
           </a:xfrm>
           <a:prstGeom prst="bentConnector3">
@@ -9571,7 +8973,7 @@
         </p:nvCxnSpPr>
         <p:spPr>
           <a:xfrm rot="5400000">
-            <a:off x="42040116" y="32083310"/>
+            <a:off x="8109530" y="20916930"/>
             <a:ext cx="260717" cy="1"/>
           </a:xfrm>
           <a:prstGeom prst="bentConnector3">
@@ -9616,7 +9018,7 @@
         </p:nvCxnSpPr>
         <p:spPr>
           <a:xfrm rot="16200000" flipH="1">
-            <a:off x="40798056" y="31282595"/>
+            <a:off x="6867470" y="20116215"/>
             <a:ext cx="260717" cy="1"/>
           </a:xfrm>
           <a:prstGeom prst="bentConnector3">
@@ -9662,7 +9064,7 @@
         </p:nvCxnSpPr>
         <p:spPr>
           <a:xfrm rot="5400000">
-            <a:off x="41419087" y="30661566"/>
+            <a:off x="7488501" y="19495186"/>
             <a:ext cx="260717" cy="1242060"/>
           </a:xfrm>
           <a:prstGeom prst="bentConnector3">
@@ -9708,7 +9110,7 @@
         </p:nvCxnSpPr>
         <p:spPr>
           <a:xfrm rot="5400000">
-            <a:off x="41419085" y="31462283"/>
+            <a:off x="7488499" y="20295903"/>
             <a:ext cx="260720" cy="1242058"/>
           </a:xfrm>
           <a:prstGeom prst="bentConnector3">
@@ -9754,7 +9156,7 @@
         </p:nvCxnSpPr>
         <p:spPr>
           <a:xfrm rot="16200000" flipH="1">
-            <a:off x="40798057" y="32083312"/>
+            <a:off x="6867471" y="20916932"/>
             <a:ext cx="260717" cy="1"/>
           </a:xfrm>
           <a:prstGeom prst="bentConnector3">
@@ -9796,7 +9198,7 @@
         </p:nvSpPr>
         <p:spPr>
           <a:xfrm>
-            <a:off x="37977371" y="30612237"/>
+            <a:off x="4046785" y="19445857"/>
             <a:ext cx="926325" cy="540000"/>
           </a:xfrm>
           <a:prstGeom prst="rect">
@@ -9830,30 +9232,6 @@
               <a:rPr lang="ru-RU" sz="700" dirty="0"/>
               <a:t>Франко-берберские школы</a:t>
             </a:r>
-          </a:p>
-          <a:p>
-            <a:pPr algn="ctr"/>
-            <a:r>
-              <a:rPr lang="ru-RU" sz="100" dirty="0"/>
-              <a:t>(</a:t>
-            </a:r>
-            <a:r>
-              <a:rPr lang="ru-RU" sz="100" b="1" dirty="0"/>
-              <a:t>Франко-берберские школы:</a:t>
-            </a:r>
-            <a:r>
-              <a:rPr lang="ru-RU" sz="100" dirty="0"/>
-              <a:t> В горах Атласа </a:t>
-            </a:r>
-            <a:r>
-              <a:rPr lang="ru-RU" sz="100" dirty="0" err="1"/>
-              <a:t>Ногес</a:t>
-            </a:r>
-            <a:r>
-              <a:rPr lang="ru-RU" sz="100" dirty="0"/>
-              <a:t> продолжил развивать сеть школ, где обучение велось исключительно на французском языке, а арабский язык и исламское право были полностью исключены. Это делалось для того, чтобы оторвать берберов от арабского большинства страны.)</a:t>
-            </a:r>
-            <a:endParaRPr lang="ru-RU" sz="700" dirty="0"/>
           </a:p>
         </p:txBody>
       </p:sp>
@@ -9875,7 +9253,7 @@
         </p:nvCxnSpPr>
         <p:spPr>
           <a:xfrm flipH="1">
-            <a:off x="38903696" y="30882237"/>
+            <a:off x="4973110" y="19715857"/>
             <a:ext cx="317615" cy="0"/>
           </a:xfrm>
           <a:prstGeom prst="line">
@@ -9916,7 +9294,7 @@
         </p:nvSpPr>
         <p:spPr>
           <a:xfrm>
-            <a:off x="37977370" y="31413361"/>
+            <a:off x="4046784" y="20246981"/>
             <a:ext cx="926325" cy="540000"/>
           </a:xfrm>
           <a:prstGeom prst="rect">
@@ -9948,13 +9326,8 @@
             <a:pPr algn="ctr"/>
             <a:r>
               <a:rPr lang="ru-RU" sz="700" dirty="0"/>
-              <a:t>Создать колледжи для женщин </a:t>
-            </a:r>
-            <a:r>
-              <a:rPr lang="ru-RU" sz="200" dirty="0"/>
-              <a:t>(Ближе к концу Второй мировой войны, под давлением модернизационных процессов, колониальные власти пошли на историческую уступку и заложили базу для женского среднего образования. Были созданы первые специализированные колледжи для мусульманских девушек (в частности, в Рабате и Фесе), что стало революционным шагом для традиционного марокканского общества того времени.)</a:t>
-            </a:r>
-            <a:endParaRPr lang="ru-RU" sz="700" dirty="0"/>
+              <a:t>Создать колледжи для женщин</a:t>
+            </a:r>
           </a:p>
         </p:txBody>
       </p:sp>
@@ -9976,7 +9349,7 @@
         </p:nvCxnSpPr>
         <p:spPr>
           <a:xfrm rot="5400000">
-            <a:off x="38629867" y="30166618"/>
+            <a:off x="4699281" y="19000238"/>
             <a:ext cx="256286" cy="634952"/>
           </a:xfrm>
           <a:prstGeom prst="bentConnector3">
@@ -10021,7 +9394,7 @@
         </p:nvCxnSpPr>
         <p:spPr>
           <a:xfrm rot="16200000" flipH="1">
-            <a:off x="39251837" y="30179600"/>
+            <a:off x="5321251" y="19013220"/>
             <a:ext cx="256286" cy="608988"/>
           </a:xfrm>
           <a:prstGeom prst="bentConnector3">
@@ -10066,7 +9439,7 @@
         </p:nvCxnSpPr>
         <p:spPr>
           <a:xfrm rot="5400000">
-            <a:off x="38931942" y="30660829"/>
+            <a:off x="5001356" y="19494449"/>
             <a:ext cx="261124" cy="1243941"/>
           </a:xfrm>
           <a:prstGeom prst="bentConnector3">
@@ -10112,7 +9485,7 @@
         </p:nvCxnSpPr>
         <p:spPr>
           <a:xfrm rot="5400000">
-            <a:off x="38309972" y="31282799"/>
+            <a:off x="4379386" y="20116419"/>
             <a:ext cx="261124" cy="1"/>
           </a:xfrm>
           <a:prstGeom prst="bentConnector3">
@@ -10158,7 +9531,7 @@
         </p:nvCxnSpPr>
         <p:spPr>
           <a:xfrm rot="16200000" flipH="1">
-            <a:off x="38932147" y="30660624"/>
+            <a:off x="5001561" y="19494244"/>
             <a:ext cx="260715" cy="1243940"/>
           </a:xfrm>
           <a:prstGeom prst="bentConnector3">
@@ -10204,7 +9577,7 @@
         </p:nvCxnSpPr>
         <p:spPr>
           <a:xfrm rot="5400000">
-            <a:off x="39554117" y="31282594"/>
+            <a:off x="5623531" y="20116214"/>
             <a:ext cx="260715" cy="12700"/>
           </a:xfrm>
           <a:prstGeom prst="bentConnector3">
@@ -10250,7 +9623,7 @@
         </p:nvCxnSpPr>
         <p:spPr>
           <a:xfrm rot="16200000" flipH="1">
-            <a:off x="40172199" y="29673300"/>
+            <a:off x="6241613" y="18506920"/>
             <a:ext cx="276438" cy="1"/>
           </a:xfrm>
           <a:prstGeom prst="bentConnector3">
@@ -10296,54 +9669,8 @@
         </p:nvCxnSpPr>
         <p:spPr>
           <a:xfrm rot="16200000" flipH="1">
-            <a:off x="40489057" y="30172881"/>
+            <a:off x="6558471" y="19006501"/>
             <a:ext cx="260718" cy="617995"/>
-          </a:xfrm>
-          <a:prstGeom prst="bentConnector3">
-            <a:avLst>
-              <a:gd name="adj1" fmla="val 50000"/>
-            </a:avLst>
-          </a:prstGeom>
-          <a:ln w="19050">
-            <a:prstDash val="dash"/>
-            <a:tailEnd type="arrow"/>
-          </a:ln>
-        </p:spPr>
-        <p:style>
-          <a:lnRef idx="1">
-            <a:schemeClr val="accent1"/>
-          </a:lnRef>
-          <a:fillRef idx="0">
-            <a:schemeClr val="accent1"/>
-          </a:fillRef>
-          <a:effectRef idx="0">
-            <a:schemeClr val="accent1"/>
-          </a:effectRef>
-          <a:fontRef idx="minor">
-            <a:schemeClr val="tx1"/>
-          </a:fontRef>
-        </p:style>
-      </p:cxnSp>
-      <p:cxnSp>
-        <p:nvCxnSpPr>
-          <p:cNvPr id="309" name="Соединительная линия уступом 620">
-            <a:extLst>
-              <a:ext uri="{FF2B5EF4-FFF2-40B4-BE49-F238E27FC236}">
-                <a16:creationId xmlns:a16="http://schemas.microsoft.com/office/drawing/2014/main" id="{EB1802D9-6AEF-43B0-8B61-D88E8CD70023}"/>
-              </a:ext>
-            </a:extLst>
-          </p:cNvPr>
-          <p:cNvCxnSpPr>
-            <a:cxnSpLocks/>
-            <a:stCxn id="161" idx="2"/>
-            <a:endCxn id="160" idx="0"/>
-          </p:cNvCxnSpPr>
-          <p:nvPr/>
-        </p:nvCxnSpPr>
-        <p:spPr>
-          <a:xfrm rot="5400000">
-            <a:off x="41110164" y="30169146"/>
-            <a:ext cx="261343" cy="624841"/>
           </a:xfrm>
           <a:prstGeom prst="bentConnector3">
             <a:avLst>
@@ -10388,7 +9715,7 @@
         </p:nvCxnSpPr>
         <p:spPr>
           <a:xfrm rot="16200000" flipH="1">
-            <a:off x="41731194" y="30172956"/>
+            <a:off x="7800608" y="19006576"/>
             <a:ext cx="261343" cy="617220"/>
           </a:xfrm>
           <a:prstGeom prst="bentConnector3">
@@ -10433,7 +9760,7 @@
         </p:nvCxnSpPr>
         <p:spPr>
           <a:xfrm rot="16200000" flipH="1">
-            <a:off x="38445097" y="31147673"/>
+            <a:off x="4514511" y="19981293"/>
             <a:ext cx="1861535" cy="1870661"/>
           </a:xfrm>
           <a:prstGeom prst="bentConnector3">
@@ -10479,7 +9806,7 @@
         </p:nvCxnSpPr>
         <p:spPr>
           <a:xfrm rot="16200000" flipH="1">
-            <a:off x="39067067" y="31769643"/>
+            <a:off x="5136481" y="20603263"/>
             <a:ext cx="1861535" cy="626721"/>
           </a:xfrm>
           <a:prstGeom prst="bentConnector3">
@@ -10525,7 +9852,7 @@
         </p:nvCxnSpPr>
         <p:spPr>
           <a:xfrm rot="16200000" flipH="1">
-            <a:off x="39066127" y="30526643"/>
+            <a:off x="5135541" y="19360263"/>
             <a:ext cx="1861535" cy="3112721"/>
           </a:xfrm>
           <a:prstGeom prst="bentConnector3">
@@ -10571,7 +9898,7 @@
         </p:nvCxnSpPr>
         <p:spPr>
           <a:xfrm rot="16200000" flipH="1">
-            <a:off x="39688097" y="31148613"/>
+            <a:off x="5757511" y="19982233"/>
             <a:ext cx="1861535" cy="1868781"/>
           </a:xfrm>
           <a:prstGeom prst="bentConnector3">
@@ -10617,8 +9944,8 @@
         </p:nvCxnSpPr>
         <p:spPr>
           <a:xfrm rot="5400000">
-            <a:off x="40484418" y="34180482"/>
-            <a:ext cx="269999" cy="617997"/>
+            <a:off x="6867475" y="23318455"/>
+            <a:ext cx="260709" cy="1"/>
           </a:xfrm>
           <a:prstGeom prst="bentConnector3">
             <a:avLst>
@@ -10663,7 +9990,7 @@
         <p:spPr>
           <a:xfrm flipH="1">
             <a:off x="7394931" y="2077655"/>
-            <a:ext cx="8622364" cy="0"/>
+            <a:ext cx="9104633" cy="0"/>
           </a:xfrm>
           <a:prstGeom prst="line">
             <a:avLst/>
@@ -10703,7 +10030,7 @@
         </p:nvSpPr>
         <p:spPr>
           <a:xfrm>
-            <a:off x="37977369" y="32203770"/>
+            <a:off x="4046783" y="21037390"/>
             <a:ext cx="926325" cy="540000"/>
           </a:xfrm>
           <a:prstGeom prst="rect">
@@ -10737,77 +10064,7 @@
               <a:rPr lang="ru-RU" sz="700" dirty="0"/>
               <a:t>Секторы модернизации сельской местности</a:t>
             </a:r>
-          </a:p>
-          <a:p>
-            <a:pPr algn="ctr"/>
-            <a:r>
-              <a:rPr lang="ru-RU" sz="100" dirty="0"/>
-              <a:t>(Еще одним проявлением государственного социального планирования стали сельские районы. Наиболее заметной из этих новых государственных социальных программ стала «Секторы модернизации сельской местности» (СМП), план развития сельских районов, запущенный в 1946 году новым генеральным резидентом Эриком </a:t>
-            </a:r>
-            <a:r>
-              <a:rPr lang="ru-RU" sz="100" dirty="0" err="1"/>
-              <a:t>Лабонном</a:t>
-            </a:r>
-            <a:r>
-              <a:rPr lang="ru-RU" sz="100" dirty="0"/>
-              <a:t>, профессиональным дипломатом-реформатором, сменившим Габриэля </a:t>
-            </a:r>
-            <a:r>
-              <a:rPr lang="ru-RU" sz="100" dirty="0" err="1"/>
-              <a:t>Пуо</a:t>
-            </a:r>
-            <a:r>
-              <a:rPr lang="ru-RU" sz="100" dirty="0"/>
-              <a:t> после окончания войны. Будучи сторонником «мягкого» подхода, предполагающего использование экономического развития, а не грубой силы для сдерживания давления в целях перемен, </a:t>
-            </a:r>
-            <a:r>
-              <a:rPr lang="ru-RU" sz="100" dirty="0" err="1"/>
-              <a:t>Лабонн</a:t>
-            </a:r>
-            <a:r>
-              <a:rPr lang="ru-RU" sz="100" dirty="0"/>
-              <a:t> осуждал сорок лет «стагнации», навязанной режимом Протектората, и предлагал «новый курс» для Марокко. Представленная как начальный этап новой французской социальной политики, СМП привлекла к работе французских социологов, проникнутых эгалитарными идеалами, таких как молодой Жак </a:t>
-            </a:r>
-            <a:r>
-              <a:rPr lang="ru-RU" sz="100" dirty="0" err="1"/>
-              <a:t>Берк</a:t>
-            </a:r>
-            <a:r>
-              <a:rPr lang="ru-RU" sz="100" dirty="0"/>
-              <a:t>, который впоследствии сделал карьеру выдающегося социолога ислама. Эти идеалистически настроенные молодые люди помогли создать программы, направленные на модернизацию методов ведения сельского хозяйства, которые имитировали советскую модель колхоза, сельскохозяйственного кооператива. Несколько факторов сорвали планы </a:t>
-            </a:r>
-            <a:r>
-              <a:rPr lang="ru-RU" sz="100" dirty="0" err="1"/>
-              <a:t>Лабонна</a:t>
-            </a:r>
-            <a:r>
-              <a:rPr lang="ru-RU" sz="100" dirty="0"/>
-              <a:t>: политика упорного отказа от сотрудничества со стороны </a:t>
-            </a:r>
-            <a:r>
-              <a:rPr lang="ru-RU" sz="100" dirty="0" err="1"/>
-              <a:t>Истикляля</a:t>
-            </a:r>
-            <a:r>
-              <a:rPr lang="ru-RU" sz="100" dirty="0"/>
-              <a:t>, медлительная бюрократия Протектората и резкое возмущение крупных землевладельцев, непримиримо выступавших против ориентированного на рабочих подхода </a:t>
-            </a:r>
-            <a:r>
-              <a:rPr lang="ru-RU" sz="100" dirty="0" err="1"/>
-              <a:t>Лабонна</a:t>
-            </a:r>
-            <a:r>
-              <a:rPr lang="ru-RU" sz="100" dirty="0"/>
-              <a:t>. В совокупности эти факторы вынудили </a:t>
-            </a:r>
-            <a:r>
-              <a:rPr lang="ru-RU" sz="100" dirty="0" err="1"/>
-              <a:t>Лабонна</a:t>
-            </a:r>
-            <a:r>
-              <a:rPr lang="ru-RU" sz="100" dirty="0"/>
-              <a:t> отступить и распустить свои кадры, что привело к тому, что проект стал практически неэффективным.¬44)</a:t>
-            </a:r>
+            <a:endParaRPr lang="ru-RU" sz="100" dirty="0"/>
           </a:p>
         </p:txBody>
       </p:sp>
@@ -10829,7 +10086,7 @@
         </p:nvCxnSpPr>
         <p:spPr>
           <a:xfrm rot="5400000">
-            <a:off x="38937094" y="31456390"/>
+            <a:off x="5006508" y="20290010"/>
             <a:ext cx="250818" cy="1243942"/>
           </a:xfrm>
           <a:prstGeom prst="bentConnector3">
@@ -10874,7 +10131,7 @@
         </p:nvCxnSpPr>
         <p:spPr>
           <a:xfrm rot="5400000">
-            <a:off x="39552518" y="29058050"/>
+            <a:off x="5621932" y="17891670"/>
             <a:ext cx="280869" cy="1234932"/>
           </a:xfrm>
           <a:prstGeom prst="bentConnector3">
@@ -10920,7 +10177,7 @@
         </p:nvCxnSpPr>
         <p:spPr>
           <a:xfrm rot="16200000" flipH="1">
-            <a:off x="40793930" y="29051569"/>
+            <a:off x="6863344" y="17885189"/>
             <a:ext cx="275813" cy="1242837"/>
           </a:xfrm>
           <a:prstGeom prst="bentConnector3">
@@ -10962,7 +10219,7 @@
         </p:nvSpPr>
         <p:spPr>
           <a:xfrm>
-            <a:off x="16017295" y="1807655"/>
+            <a:off x="16499564" y="1807655"/>
             <a:ext cx="926325" cy="540000"/>
           </a:xfrm>
           <a:prstGeom prst="rect">
@@ -11013,7 +10270,7 @@
         </p:nvSpPr>
         <p:spPr>
           <a:xfrm>
-            <a:off x="16605629" y="2617655"/>
+            <a:off x="17087898" y="2617655"/>
             <a:ext cx="926325" cy="540000"/>
           </a:xfrm>
           <a:prstGeom prst="rect">
@@ -11064,7 +10321,7 @@
         </p:nvSpPr>
         <p:spPr>
           <a:xfrm>
-            <a:off x="15418325" y="2617655"/>
+            <a:off x="15900594" y="2617655"/>
             <a:ext cx="926325" cy="540000"/>
           </a:xfrm>
           <a:prstGeom prst="rect">
@@ -11115,7 +10372,7 @@
         </p:nvSpPr>
         <p:spPr>
           <a:xfrm>
-            <a:off x="16017293" y="3427655"/>
+            <a:off x="16499562" y="3427655"/>
             <a:ext cx="926325" cy="540000"/>
           </a:xfrm>
           <a:prstGeom prst="rect">
@@ -11166,7 +10423,7 @@
         </p:nvSpPr>
         <p:spPr>
           <a:xfrm>
-            <a:off x="17206368" y="3427655"/>
+            <a:off x="17688637" y="3427655"/>
             <a:ext cx="926325" cy="540000"/>
           </a:xfrm>
           <a:prstGeom prst="rect">
@@ -11217,7 +10474,7 @@
         </p:nvSpPr>
         <p:spPr>
           <a:xfrm>
-            <a:off x="14828218" y="3427654"/>
+            <a:off x="15310487" y="3427654"/>
             <a:ext cx="926325" cy="540000"/>
           </a:xfrm>
           <a:prstGeom prst="rect">
@@ -11272,7 +10529,7 @@
         </p:nvCxnSpPr>
         <p:spPr>
           <a:xfrm rot="5400000">
-            <a:off x="16045973" y="2183170"/>
+            <a:off x="16528242" y="2183170"/>
             <a:ext cx="270000" cy="598970"/>
           </a:xfrm>
           <a:prstGeom prst="bentConnector3">
@@ -11317,7 +10574,7 @@
         </p:nvCxnSpPr>
         <p:spPr>
           <a:xfrm rot="16200000" flipH="1">
-            <a:off x="16639625" y="2188488"/>
+            <a:off x="17121894" y="2188488"/>
             <a:ext cx="270000" cy="588334"/>
           </a:xfrm>
           <a:prstGeom prst="bentConnector3">
@@ -11362,7 +10619,7 @@
         </p:nvCxnSpPr>
         <p:spPr>
           <a:xfrm flipH="1">
-            <a:off x="16344650" y="2887655"/>
+            <a:off x="16826919" y="2887655"/>
             <a:ext cx="260979" cy="0"/>
           </a:xfrm>
           <a:prstGeom prst="line">
@@ -11407,7 +10664,7 @@
         </p:nvCxnSpPr>
         <p:spPr>
           <a:xfrm rot="5400000">
-            <a:off x="15345921" y="2293116"/>
+            <a:off x="15828190" y="2293116"/>
             <a:ext cx="1079999" cy="1189077"/>
           </a:xfrm>
           <a:prstGeom prst="bentConnector3">
@@ -11452,7 +10709,7 @@
         </p:nvCxnSpPr>
         <p:spPr>
           <a:xfrm rot="16200000" flipH="1">
-            <a:off x="16534994" y="2293118"/>
+            <a:off x="17017263" y="2293118"/>
             <a:ext cx="1080000" cy="1189073"/>
           </a:xfrm>
           <a:prstGeom prst="bentConnector3">
@@ -11497,7 +10754,7 @@
         </p:nvCxnSpPr>
         <p:spPr>
           <a:xfrm rot="5400000">
-            <a:off x="15940457" y="2887654"/>
+            <a:off x="16422726" y="2887654"/>
             <a:ext cx="1080000" cy="2"/>
           </a:xfrm>
           <a:prstGeom prst="bentConnector3">
@@ -11538,7 +10795,7 @@
         </p:nvSpPr>
         <p:spPr>
           <a:xfrm>
-            <a:off x="15418325" y="4237653"/>
+            <a:off x="15900594" y="4237653"/>
             <a:ext cx="926325" cy="540000"/>
           </a:xfrm>
           <a:prstGeom prst="rect">
@@ -11589,7 +10846,7 @@
         </p:nvSpPr>
         <p:spPr>
           <a:xfrm>
-            <a:off x="16605628" y="4237653"/>
+            <a:off x="17087897" y="4237653"/>
             <a:ext cx="926325" cy="540000"/>
           </a:xfrm>
           <a:prstGeom prst="rect">
@@ -11644,12 +10901,12 @@
         </p:nvCxnSpPr>
         <p:spPr>
           <a:xfrm rot="16200000" flipH="1">
-            <a:off x="16718745" y="3507701"/>
-            <a:ext cx="1887395" cy="1187301"/>
+            <a:off x="17507439" y="3201277"/>
+            <a:ext cx="1887395" cy="1800150"/>
           </a:xfrm>
           <a:prstGeom prst="bentConnector3">
             <a:avLst>
-              <a:gd name="adj1" fmla="val 6904"/>
+              <a:gd name="adj1" fmla="val 5186"/>
             </a:avLst>
           </a:prstGeom>
           <a:ln w="19050">
@@ -11689,12 +10946,12 @@
         </p:nvCxnSpPr>
         <p:spPr>
           <a:xfrm rot="5400000">
-            <a:off x="14344139" y="3507700"/>
-            <a:ext cx="1887395" cy="1187304"/>
+            <a:off x="14533265" y="3211945"/>
+            <a:ext cx="1884783" cy="1776202"/>
           </a:xfrm>
           <a:prstGeom prst="bentConnector3">
             <a:avLst>
-              <a:gd name="adj1" fmla="val 7186"/>
+              <a:gd name="adj1" fmla="val 5528"/>
             </a:avLst>
           </a:prstGeom>
           <a:ln w="19050">
@@ -11730,7 +10987,7 @@
         </p:nvSpPr>
         <p:spPr>
           <a:xfrm>
-            <a:off x="16011975" y="5852447"/>
+            <a:off x="16494244" y="5852447"/>
             <a:ext cx="926325" cy="540000"/>
           </a:xfrm>
           <a:prstGeom prst="rect">
@@ -11801,7 +11058,7 @@
             </a:r>
             <a:r>
               <a:rPr lang="ru-RU" sz="200" dirty="0"/>
-              <a:t> и Султанат».🛑 Популярность нейтральной (монархической) идеологии: -0.05 в день.🛠️ Скорость конверсии гражданских фабрик в военные заводы: +15%📉 Краткосрочный штраф к стабильности: -5.00% (из-за сопротивления роялистов).</a:t>
+              <a:t> и Султанат».🛑 Популярность нейтральной (монархической) идеологии: -0.05 в день.🛠️ Скорость конверсии гражданских фабрик в военные заводы: +15%📉 Краткосрочный штраф к стабильности: -5.00% (из-за сопротивления роялистов). В конце 1950-х — начале 1990-х годов видные марокканские евреи отвергали определенные политические решения монархии и ее поворот к авторитаризму. Однако они не оспаривали легитимность самой монархии. Они боролись за идеализированное видение Марокко, в то время как большинство марокканских евреев покидали страну.¬</a:t>
             </a:r>
             <a:endParaRPr lang="ru-RU" sz="700" dirty="0"/>
           </a:p>
@@ -11825,7 +11082,7 @@
         </p:nvCxnSpPr>
         <p:spPr>
           <a:xfrm rot="16200000" flipH="1">
-            <a:off x="16639624" y="3808486"/>
+            <a:off x="17121893" y="3808486"/>
             <a:ext cx="269998" cy="588335"/>
           </a:xfrm>
           <a:prstGeom prst="bentConnector3">
@@ -11871,7 +11128,7 @@
         </p:nvCxnSpPr>
         <p:spPr>
           <a:xfrm rot="5400000">
-            <a:off x="17234162" y="3802284"/>
+            <a:off x="17716431" y="3802284"/>
             <a:ext cx="269998" cy="600740"/>
           </a:xfrm>
           <a:prstGeom prst="bentConnector3">
@@ -11917,7 +11174,7 @@
         </p:nvCxnSpPr>
         <p:spPr>
           <a:xfrm rot="16200000" flipH="1">
-            <a:off x="16045087" y="3213948"/>
+            <a:off x="16527356" y="3213948"/>
             <a:ext cx="269999" cy="1777410"/>
           </a:xfrm>
           <a:prstGeom prst="bentConnector3">
@@ -11963,7 +11220,7 @@
         </p:nvCxnSpPr>
         <p:spPr>
           <a:xfrm rot="16200000" flipH="1">
-            <a:off x="15451435" y="3807599"/>
+            <a:off x="15933704" y="3807599"/>
             <a:ext cx="269999" cy="590107"/>
           </a:xfrm>
           <a:prstGeom prst="bentConnector3">
@@ -12009,7 +11266,7 @@
         </p:nvCxnSpPr>
         <p:spPr>
           <a:xfrm rot="5400000">
-            <a:off x="16045973" y="3803170"/>
+            <a:off x="16528242" y="3803170"/>
             <a:ext cx="269998" cy="598968"/>
           </a:xfrm>
           <a:prstGeom prst="bentConnector3">
@@ -12055,7 +11312,7 @@
         </p:nvCxnSpPr>
         <p:spPr>
           <a:xfrm rot="5400000">
-            <a:off x="16640511" y="3208633"/>
+            <a:off x="17122780" y="3208633"/>
             <a:ext cx="269998" cy="1788043"/>
           </a:xfrm>
           <a:prstGeom prst="bentConnector3">
@@ -12097,7 +11354,7 @@
         </p:nvSpPr>
         <p:spPr>
           <a:xfrm>
-            <a:off x="17792930" y="5045050"/>
+            <a:off x="18888048" y="5045050"/>
             <a:ext cx="926325" cy="540000"/>
           </a:xfrm>
           <a:prstGeom prst="rect">
@@ -12148,7 +11405,7 @@
         </p:nvSpPr>
         <p:spPr>
           <a:xfrm>
-            <a:off x="14231021" y="5045050"/>
+            <a:off x="14124392" y="5042438"/>
             <a:ext cx="926325" cy="540000"/>
           </a:xfrm>
           <a:prstGeom prst="rect">
@@ -12202,9 +11459,9 @@
           <p:nvPr/>
         </p:nvCxnSpPr>
         <p:spPr>
-          <a:xfrm flipH="1">
-            <a:off x="15157346" y="5315050"/>
-            <a:ext cx="2635584" cy="0"/>
+          <a:xfrm flipH="1" flipV="1">
+            <a:off x="15050717" y="5312438"/>
+            <a:ext cx="3837331" cy="2612"/>
           </a:xfrm>
           <a:prstGeom prst="line">
             <a:avLst/>
@@ -12248,8 +11505,8 @@
         </p:nvCxnSpPr>
         <p:spPr>
           <a:xfrm rot="5400000">
-            <a:off x="17231918" y="4828271"/>
-            <a:ext cx="267397" cy="1780955"/>
+            <a:off x="18020611" y="4521846"/>
+            <a:ext cx="267397" cy="2393804"/>
           </a:xfrm>
           <a:prstGeom prst="bentConnector3">
             <a:avLst>
@@ -12294,8 +11551,8 @@
         </p:nvCxnSpPr>
         <p:spPr>
           <a:xfrm rot="16200000" flipH="1">
-            <a:off x="15450963" y="4828271"/>
-            <a:ext cx="267397" cy="1780954"/>
+            <a:off x="15637477" y="4532516"/>
+            <a:ext cx="270009" cy="2369852"/>
           </a:xfrm>
           <a:prstGeom prst="bentConnector3">
             <a:avLst>
@@ -13447,10 +12704,14 @@
             <a:pPr algn="ctr"/>
             <a:r>
               <a:rPr lang="ru-RU" sz="700" dirty="0"/>
-              <a:t>Заключить пакт с Комитетом антифашистских милиций </a:t>
-            </a:r>
-            <a:r>
-              <a:rPr lang="ru-RU" sz="100" dirty="0"/>
+              <a:t>Заключить пакт с Комитетом антифашистских </a:t>
+            </a:r>
+            <a:r>
+              <a:rPr lang="ru-RU" sz="700" dirty="0" err="1"/>
+              <a:t>милиций</a:t>
+            </a:r>
+            <a:r>
+              <a:rPr lang="ru-RU" sz="100" dirty="0" err="1"/>
               <a:t>Каталонии</a:t>
             </a:r>
             <a:br>
@@ -13901,7 +13162,7 @@
         </p:nvSpPr>
         <p:spPr>
           <a:xfrm>
-            <a:off x="17206368" y="5852447"/>
+            <a:off x="17688637" y="6640229"/>
             <a:ext cx="926325" cy="540000"/>
           </a:xfrm>
           <a:prstGeom prst="rect">
@@ -13952,7 +13213,7 @@
         </p:nvSpPr>
         <p:spPr>
           <a:xfrm>
-            <a:off x="18400761" y="5852447"/>
+            <a:off x="19954023" y="7537245"/>
             <a:ext cx="926325" cy="540000"/>
           </a:xfrm>
           <a:prstGeom prst="rect">
@@ -13989,51 +13250,6 @@
           </a:p>
         </p:txBody>
       </p:sp>
-      <p:cxnSp>
-        <p:nvCxnSpPr>
-          <p:cNvPr id="204" name="Соединительная линия уступом 620">
-            <a:extLst>
-              <a:ext uri="{FF2B5EF4-FFF2-40B4-BE49-F238E27FC236}">
-                <a16:creationId xmlns:a16="http://schemas.microsoft.com/office/drawing/2014/main" id="{CDBF821E-249F-43E7-8D63-C79A65A58854}"/>
-              </a:ext>
-            </a:extLst>
-          </p:cNvPr>
-          <p:cNvCxnSpPr>
-            <a:cxnSpLocks/>
-            <a:stCxn id="229" idx="2"/>
-            <a:endCxn id="203" idx="0"/>
-          </p:cNvCxnSpPr>
-          <p:nvPr/>
-        </p:nvCxnSpPr>
-        <p:spPr>
-          <a:xfrm rot="16200000" flipH="1">
-            <a:off x="18426310" y="5414832"/>
-            <a:ext cx="267397" cy="607831"/>
-          </a:xfrm>
-          <a:prstGeom prst="bentConnector3">
-            <a:avLst>
-              <a:gd name="adj1" fmla="val 50000"/>
-            </a:avLst>
-          </a:prstGeom>
-          <a:ln w="19050">
-            <a:tailEnd type="arrow"/>
-          </a:ln>
-        </p:spPr>
-        <p:style>
-          <a:lnRef idx="1">
-            <a:schemeClr val="accent1"/>
-          </a:lnRef>
-          <a:fillRef idx="0">
-            <a:schemeClr val="accent1"/>
-          </a:fillRef>
-          <a:effectRef idx="0">
-            <a:schemeClr val="accent1"/>
-          </a:effectRef>
-          <a:fontRef idx="minor">
-            <a:schemeClr val="tx1"/>
-          </a:fontRef>
-        </p:style>
-      </p:cxnSp>
       <p:sp>
         <p:nvSpPr>
           <p:cNvPr id="207" name="Прямоугольник 206">
@@ -14048,7 +13264,7 @@
         </p:nvSpPr>
         <p:spPr>
           <a:xfrm>
-            <a:off x="18400760" y="6659845"/>
+            <a:off x="19959104" y="8327808"/>
             <a:ext cx="926325" cy="540000"/>
           </a:xfrm>
           <a:prstGeom prst="rect">
@@ -14102,9 +13318,9 @@
           <p:nvPr/>
         </p:nvCxnSpPr>
         <p:spPr>
-          <a:xfrm rot="5400000">
-            <a:off x="18730225" y="6526146"/>
-            <a:ext cx="267398" cy="1"/>
+          <a:xfrm rot="16200000" flipH="1">
+            <a:off x="20294445" y="8199985"/>
+            <a:ext cx="250563" cy="5081"/>
           </a:xfrm>
           <a:prstGeom prst="bentConnector3">
             <a:avLst>
@@ -14144,7 +13360,7 @@
         </p:nvSpPr>
         <p:spPr>
           <a:xfrm>
-            <a:off x="14817582" y="5854963"/>
+            <a:off x="15318108" y="5845967"/>
             <a:ext cx="926325" cy="540000"/>
           </a:xfrm>
           <a:prstGeom prst="rect">
@@ -14195,7 +13411,7 @@
         </p:nvSpPr>
         <p:spPr>
           <a:xfrm>
-            <a:off x="16011974" y="6659844"/>
+            <a:off x="17693717" y="8320016"/>
             <a:ext cx="926325" cy="540000"/>
           </a:xfrm>
           <a:prstGeom prst="rect">
@@ -14246,7 +13462,7 @@
         </p:nvSpPr>
         <p:spPr>
           <a:xfrm>
-            <a:off x="14817581" y="6657240"/>
+            <a:off x="15318107" y="6632102"/>
             <a:ext cx="926325" cy="540000"/>
           </a:xfrm>
           <a:prstGeom prst="rect">
@@ -14297,7 +13513,7 @@
         </p:nvSpPr>
         <p:spPr>
           <a:xfrm>
-            <a:off x="15418325" y="7469757"/>
+            <a:off x="17087319" y="7470515"/>
             <a:ext cx="926325" cy="540000"/>
           </a:xfrm>
           <a:prstGeom prst="rect">
@@ -14329,57 +13545,6 @@
             <a:pPr algn="ctr"/>
             <a:r>
               <a:rPr lang="ru-RU" sz="700" dirty="0"/>
-              <a:t>Национализация тканевых и сахарных фабрик</a:t>
-            </a:r>
-          </a:p>
-        </p:txBody>
-      </p:sp>
-      <p:sp>
-        <p:nvSpPr>
-          <p:cNvPr id="221" name="Прямоугольник 220">
-            <a:extLst>
-              <a:ext uri="{FF2B5EF4-FFF2-40B4-BE49-F238E27FC236}">
-                <a16:creationId xmlns:a16="http://schemas.microsoft.com/office/drawing/2014/main" id="{2267C2D4-A1F2-44C3-A2B4-B9EB2D105F40}"/>
-              </a:ext>
-            </a:extLst>
-          </p:cNvPr>
-          <p:cNvSpPr/>
-          <p:nvPr/>
-        </p:nvSpPr>
-        <p:spPr>
-          <a:xfrm>
-            <a:off x="16605627" y="7467241"/>
-            <a:ext cx="926325" cy="540000"/>
-          </a:xfrm>
-          <a:prstGeom prst="rect">
-            <a:avLst/>
-          </a:prstGeom>
-          <a:solidFill>
-            <a:srgbClr val="FF0000"/>
-          </a:solidFill>
-          <a:ln w="19050"/>
-        </p:spPr>
-        <p:style>
-          <a:lnRef idx="2">
-            <a:schemeClr val="accent1"/>
-          </a:lnRef>
-          <a:fillRef idx="1">
-            <a:schemeClr val="lt1"/>
-          </a:fillRef>
-          <a:effectRef idx="0">
-            <a:schemeClr val="accent1"/>
-          </a:effectRef>
-          <a:fontRef idx="minor">
-            <a:schemeClr val="dk1"/>
-          </a:fontRef>
-        </p:style>
-        <p:txBody>
-          <a:bodyPr lIns="124733" tIns="62367" rIns="124733" bIns="62367" rtlCol="0" anchor="ctr"/>
-          <a:lstStyle/>
-          <a:p>
-            <a:pPr algn="ctr"/>
-            <a:r>
-              <a:rPr lang="ru-RU" sz="700" dirty="0"/>
               <a:t>Национализация фосфатных кампаний</a:t>
             </a:r>
           </a:p>
@@ -14387,52 +13552,6 @@
       </p:sp>
       <p:cxnSp>
         <p:nvCxnSpPr>
-          <p:cNvPr id="222" name="Соединительная линия уступом 620">
-            <a:extLst>
-              <a:ext uri="{FF2B5EF4-FFF2-40B4-BE49-F238E27FC236}">
-                <a16:creationId xmlns:a16="http://schemas.microsoft.com/office/drawing/2014/main" id="{912FD209-02E6-41E4-8354-F8280F73C209}"/>
-              </a:ext>
-            </a:extLst>
-          </p:cNvPr>
-          <p:cNvCxnSpPr>
-            <a:cxnSpLocks/>
-            <a:stCxn id="229" idx="2"/>
-            <a:endCxn id="202" idx="0"/>
-          </p:cNvCxnSpPr>
-          <p:nvPr/>
-        </p:nvCxnSpPr>
-        <p:spPr>
-          <a:xfrm rot="5400000">
-            <a:off x="17829114" y="5425467"/>
-            <a:ext cx="267397" cy="586562"/>
-          </a:xfrm>
-          <a:prstGeom prst="bentConnector3">
-            <a:avLst>
-              <a:gd name="adj1" fmla="val 50000"/>
-            </a:avLst>
-          </a:prstGeom>
-          <a:ln w="19050">
-            <a:prstDash val="dash"/>
-            <a:tailEnd type="arrow"/>
-          </a:ln>
-        </p:spPr>
-        <p:style>
-          <a:lnRef idx="1">
-            <a:schemeClr val="accent1"/>
-          </a:lnRef>
-          <a:fillRef idx="0">
-            <a:schemeClr val="accent1"/>
-          </a:fillRef>
-          <a:effectRef idx="0">
-            <a:schemeClr val="accent1"/>
-          </a:effectRef>
-          <a:fontRef idx="minor">
-            <a:schemeClr val="tx1"/>
-          </a:fontRef>
-        </p:style>
-      </p:cxnSp>
-      <p:cxnSp>
-        <p:nvCxnSpPr>
           <p:cNvPr id="223" name="Соединительная линия уступом 620">
             <a:extLst>
               <a:ext uri="{FF2B5EF4-FFF2-40B4-BE49-F238E27FC236}">
@@ -14443,60 +13562,14 @@
           <p:cNvCxnSpPr>
             <a:cxnSpLocks/>
             <a:stCxn id="231" idx="2"/>
-            <a:endCxn id="202" idx="0"/>
+            <a:endCxn id="447" idx="0"/>
           </p:cNvCxnSpPr>
           <p:nvPr/>
         </p:nvCxnSpPr>
         <p:spPr>
           <a:xfrm rot="16200000" flipH="1">
-            <a:off x="16048159" y="4231074"/>
-            <a:ext cx="267397" cy="2975347"/>
-          </a:xfrm>
-          <a:prstGeom prst="bentConnector3">
-            <a:avLst>
-              <a:gd name="adj1" fmla="val 50000"/>
-            </a:avLst>
-          </a:prstGeom>
-          <a:ln w="19050">
-            <a:prstDash val="dash"/>
-            <a:tailEnd type="arrow"/>
-          </a:ln>
-        </p:spPr>
-        <p:style>
-          <a:lnRef idx="1">
-            <a:schemeClr val="accent1"/>
-          </a:lnRef>
-          <a:fillRef idx="0">
-            <a:schemeClr val="accent1"/>
-          </a:fillRef>
-          <a:effectRef idx="0">
-            <a:schemeClr val="accent1"/>
-          </a:effectRef>
-          <a:fontRef idx="minor">
-            <a:schemeClr val="tx1"/>
-          </a:fontRef>
-        </p:style>
-      </p:cxnSp>
-      <p:cxnSp>
-        <p:nvCxnSpPr>
-          <p:cNvPr id="225" name="Соединительная линия уступом 620">
-            <a:extLst>
-              <a:ext uri="{FF2B5EF4-FFF2-40B4-BE49-F238E27FC236}">
-                <a16:creationId xmlns:a16="http://schemas.microsoft.com/office/drawing/2014/main" id="{3D98D337-D917-45D8-8BF8-14F56B503905}"/>
-              </a:ext>
-            </a:extLst>
-          </p:cNvPr>
-          <p:cNvCxnSpPr>
-            <a:cxnSpLocks/>
-            <a:stCxn id="231" idx="2"/>
-            <a:endCxn id="215" idx="0"/>
-          </p:cNvCxnSpPr>
-          <p:nvPr/>
-        </p:nvCxnSpPr>
-        <p:spPr>
-          <a:xfrm rot="16200000" flipH="1">
-            <a:off x="14852508" y="5426725"/>
-            <a:ext cx="269913" cy="586561"/>
+            <a:off x="16238841" y="3931151"/>
+            <a:ext cx="261673" cy="3564245"/>
           </a:xfrm>
           <a:prstGeom prst="bentConnector3">
             <a:avLst>
@@ -14541,8 +13614,8 @@
         </p:nvCxnSpPr>
         <p:spPr>
           <a:xfrm rot="5400000">
-            <a:off x="16633463" y="4232332"/>
-            <a:ext cx="269913" cy="2975348"/>
+            <a:off x="17435783" y="3930538"/>
+            <a:ext cx="260917" cy="3569940"/>
           </a:xfrm>
           <a:prstGeom prst="bentConnector3">
             <a:avLst>
@@ -14569,231 +13642,6 @@
           </a:fontRef>
         </p:style>
       </p:cxnSp>
-      <p:cxnSp>
-        <p:nvCxnSpPr>
-          <p:cNvPr id="232" name="Соединительная линия уступом 620">
-            <a:extLst>
-              <a:ext uri="{FF2B5EF4-FFF2-40B4-BE49-F238E27FC236}">
-                <a16:creationId xmlns:a16="http://schemas.microsoft.com/office/drawing/2014/main" id="{B03A89F1-681A-483E-AFD6-C51FFC56F472}"/>
-              </a:ext>
-            </a:extLst>
-          </p:cNvPr>
-          <p:cNvCxnSpPr>
-            <a:cxnSpLocks/>
-            <a:stCxn id="215" idx="2"/>
-            <a:endCxn id="219" idx="0"/>
-          </p:cNvCxnSpPr>
-          <p:nvPr/>
-        </p:nvCxnSpPr>
-        <p:spPr>
-          <a:xfrm rot="5400000">
-            <a:off x="15149607" y="6526101"/>
-            <a:ext cx="262277" cy="1"/>
-          </a:xfrm>
-          <a:prstGeom prst="bentConnector3">
-            <a:avLst>
-              <a:gd name="adj1" fmla="val 50000"/>
-            </a:avLst>
-          </a:prstGeom>
-          <a:ln w="19050">
-            <a:tailEnd type="arrow"/>
-          </a:ln>
-        </p:spPr>
-        <p:style>
-          <a:lnRef idx="1">
-            <a:schemeClr val="accent1"/>
-          </a:lnRef>
-          <a:fillRef idx="0">
-            <a:schemeClr val="accent1"/>
-          </a:fillRef>
-          <a:effectRef idx="0">
-            <a:schemeClr val="accent1"/>
-          </a:effectRef>
-          <a:fontRef idx="minor">
-            <a:schemeClr val="tx1"/>
-          </a:fontRef>
-        </p:style>
-      </p:cxnSp>
-      <p:cxnSp>
-        <p:nvCxnSpPr>
-          <p:cNvPr id="238" name="Соединительная линия уступом 620">
-            <a:extLst>
-              <a:ext uri="{FF2B5EF4-FFF2-40B4-BE49-F238E27FC236}">
-                <a16:creationId xmlns:a16="http://schemas.microsoft.com/office/drawing/2014/main" id="{0ADACAE7-2BC4-427A-BD0A-7593F9AAF2D0}"/>
-              </a:ext>
-            </a:extLst>
-          </p:cNvPr>
-          <p:cNvCxnSpPr>
-            <a:cxnSpLocks/>
-            <a:stCxn id="202" idx="2"/>
-            <a:endCxn id="216" idx="0"/>
-          </p:cNvCxnSpPr>
-          <p:nvPr/>
-        </p:nvCxnSpPr>
-        <p:spPr>
-          <a:xfrm rot="5400000">
-            <a:off x="16938636" y="5928948"/>
-            <a:ext cx="267397" cy="1194394"/>
-          </a:xfrm>
-          <a:prstGeom prst="bentConnector3">
-            <a:avLst>
-              <a:gd name="adj1" fmla="val 50000"/>
-            </a:avLst>
-          </a:prstGeom>
-          <a:ln w="19050">
-            <a:tailEnd type="arrow"/>
-          </a:ln>
-        </p:spPr>
-        <p:style>
-          <a:lnRef idx="1">
-            <a:schemeClr val="accent1"/>
-          </a:lnRef>
-          <a:fillRef idx="0">
-            <a:schemeClr val="accent1"/>
-          </a:fillRef>
-          <a:effectRef idx="0">
-            <a:schemeClr val="accent1"/>
-          </a:effectRef>
-          <a:fontRef idx="minor">
-            <a:schemeClr val="tx1"/>
-          </a:fontRef>
-        </p:style>
-      </p:cxnSp>
-      <p:cxnSp>
-        <p:nvCxnSpPr>
-          <p:cNvPr id="240" name="Соединительная линия уступом 620">
-            <a:extLst>
-              <a:ext uri="{FF2B5EF4-FFF2-40B4-BE49-F238E27FC236}">
-                <a16:creationId xmlns:a16="http://schemas.microsoft.com/office/drawing/2014/main" id="{C102A62D-F57D-4F82-A049-D207C1479D24}"/>
-              </a:ext>
-            </a:extLst>
-          </p:cNvPr>
-          <p:cNvCxnSpPr>
-            <a:cxnSpLocks/>
-            <a:stCxn id="215" idx="2"/>
-            <a:endCxn id="216" idx="0"/>
-          </p:cNvCxnSpPr>
-          <p:nvPr/>
-        </p:nvCxnSpPr>
-        <p:spPr>
-          <a:xfrm rot="16200000" flipH="1">
-            <a:off x="15745501" y="5930207"/>
-            <a:ext cx="264881" cy="1194392"/>
-          </a:xfrm>
-          <a:prstGeom prst="bentConnector3">
-            <a:avLst>
-              <a:gd name="adj1" fmla="val 50000"/>
-            </a:avLst>
-          </a:prstGeom>
-          <a:ln w="19050">
-            <a:tailEnd type="arrow"/>
-          </a:ln>
-        </p:spPr>
-        <p:style>
-          <a:lnRef idx="1">
-            <a:schemeClr val="accent1"/>
-          </a:lnRef>
-          <a:fillRef idx="0">
-            <a:schemeClr val="accent1"/>
-          </a:fillRef>
-          <a:effectRef idx="0">
-            <a:schemeClr val="accent1"/>
-          </a:effectRef>
-          <a:fontRef idx="minor">
-            <a:schemeClr val="tx1"/>
-          </a:fontRef>
-        </p:style>
-      </p:cxnSp>
-      <p:cxnSp>
-        <p:nvCxnSpPr>
-          <p:cNvPr id="243" name="Соединительная линия уступом 620">
-            <a:extLst>
-              <a:ext uri="{FF2B5EF4-FFF2-40B4-BE49-F238E27FC236}">
-                <a16:creationId xmlns:a16="http://schemas.microsoft.com/office/drawing/2014/main" id="{D1218FC0-8438-4146-8E3E-536B2DE9E441}"/>
-              </a:ext>
-            </a:extLst>
-          </p:cNvPr>
-          <p:cNvCxnSpPr>
-            <a:cxnSpLocks/>
-            <a:stCxn id="216" idx="2"/>
-            <a:endCxn id="221" idx="0"/>
-          </p:cNvCxnSpPr>
-          <p:nvPr/>
-        </p:nvCxnSpPr>
-        <p:spPr>
-          <a:xfrm rot="16200000" flipH="1">
-            <a:off x="16638265" y="7036715"/>
-            <a:ext cx="267397" cy="593653"/>
-          </a:xfrm>
-          <a:prstGeom prst="bentConnector3">
-            <a:avLst>
-              <a:gd name="adj1" fmla="val 50000"/>
-            </a:avLst>
-          </a:prstGeom>
-          <a:ln w="19050">
-            <a:tailEnd type="arrow"/>
-          </a:ln>
-        </p:spPr>
-        <p:style>
-          <a:lnRef idx="1">
-            <a:schemeClr val="accent1"/>
-          </a:lnRef>
-          <a:fillRef idx="0">
-            <a:schemeClr val="accent1"/>
-          </a:fillRef>
-          <a:effectRef idx="0">
-            <a:schemeClr val="accent1"/>
-          </a:effectRef>
-          <a:fontRef idx="minor">
-            <a:schemeClr val="tx1"/>
-          </a:fontRef>
-        </p:style>
-      </p:cxnSp>
-      <p:cxnSp>
-        <p:nvCxnSpPr>
-          <p:cNvPr id="246" name="Соединительная линия уступом 620">
-            <a:extLst>
-              <a:ext uri="{FF2B5EF4-FFF2-40B4-BE49-F238E27FC236}">
-                <a16:creationId xmlns:a16="http://schemas.microsoft.com/office/drawing/2014/main" id="{00A13E01-AD5E-4E3A-8064-0DCCEA40624C}"/>
-              </a:ext>
-            </a:extLst>
-          </p:cNvPr>
-          <p:cNvCxnSpPr>
-            <a:cxnSpLocks/>
-            <a:stCxn id="216" idx="2"/>
-            <a:endCxn id="220" idx="0"/>
-          </p:cNvCxnSpPr>
-          <p:nvPr/>
-        </p:nvCxnSpPr>
-        <p:spPr>
-          <a:xfrm rot="5400000">
-            <a:off x="16043357" y="7037976"/>
-            <a:ext cx="269913" cy="593649"/>
-          </a:xfrm>
-          <a:prstGeom prst="bentConnector3">
-            <a:avLst>
-              <a:gd name="adj1" fmla="val 50000"/>
-            </a:avLst>
-          </a:prstGeom>
-          <a:ln w="19050">
-            <a:tailEnd type="arrow"/>
-          </a:ln>
-        </p:spPr>
-        <p:style>
-          <a:lnRef idx="1">
-            <a:schemeClr val="accent1"/>
-          </a:lnRef>
-          <a:fillRef idx="0">
-            <a:schemeClr val="accent1"/>
-          </a:fillRef>
-          <a:effectRef idx="0">
-            <a:schemeClr val="accent1"/>
-          </a:effectRef>
-          <a:fontRef idx="minor">
-            <a:schemeClr val="tx1"/>
-          </a:fontRef>
-        </p:style>
-      </p:cxnSp>
       <p:sp>
         <p:nvSpPr>
           <p:cNvPr id="250" name="Прямоугольник 249">
@@ -14808,7 +13656,7 @@
         </p:nvSpPr>
         <p:spPr>
           <a:xfrm>
-            <a:off x="14231021" y="7457387"/>
+            <a:off x="14711406" y="7474257"/>
             <a:ext cx="926325" cy="540000"/>
           </a:xfrm>
           <a:prstGeom prst="rect">
@@ -14845,51 +13693,6 @@
           </a:p>
         </p:txBody>
       </p:sp>
-      <p:cxnSp>
-        <p:nvCxnSpPr>
-          <p:cNvPr id="251" name="Соединительная линия уступом 620">
-            <a:extLst>
-              <a:ext uri="{FF2B5EF4-FFF2-40B4-BE49-F238E27FC236}">
-                <a16:creationId xmlns:a16="http://schemas.microsoft.com/office/drawing/2014/main" id="{F1CF458C-9D44-4FE9-9658-5EEA0EC4F89C}"/>
-              </a:ext>
-            </a:extLst>
-          </p:cNvPr>
-          <p:cNvCxnSpPr>
-            <a:cxnSpLocks/>
-            <a:stCxn id="219" idx="2"/>
-            <a:endCxn id="250" idx="0"/>
-          </p:cNvCxnSpPr>
-          <p:nvPr/>
-        </p:nvCxnSpPr>
-        <p:spPr>
-          <a:xfrm rot="5400000">
-            <a:off x="14857391" y="7034033"/>
-            <a:ext cx="260147" cy="586560"/>
-          </a:xfrm>
-          <a:prstGeom prst="bentConnector3">
-            <a:avLst>
-              <a:gd name="adj1" fmla="val 50000"/>
-            </a:avLst>
-          </a:prstGeom>
-          <a:ln w="19050">
-            <a:tailEnd type="arrow"/>
-          </a:ln>
-        </p:spPr>
-        <p:style>
-          <a:lnRef idx="1">
-            <a:schemeClr val="accent1"/>
-          </a:lnRef>
-          <a:fillRef idx="0">
-            <a:schemeClr val="accent1"/>
-          </a:fillRef>
-          <a:effectRef idx="0">
-            <a:schemeClr val="accent1"/>
-          </a:effectRef>
-          <a:fontRef idx="minor">
-            <a:schemeClr val="tx1"/>
-          </a:fontRef>
-        </p:style>
-      </p:cxnSp>
       <p:sp>
         <p:nvSpPr>
           <p:cNvPr id="253" name="Прямоугольник 252">
@@ -14904,7 +13707,7 @@
         </p:nvSpPr>
         <p:spPr>
           <a:xfrm>
-            <a:off x="17206366" y="6657240"/>
+            <a:off x="16501863" y="8316274"/>
             <a:ext cx="926325" cy="540000"/>
           </a:xfrm>
           <a:prstGeom prst="rect">
@@ -14941,51 +13744,6 @@
           </a:p>
         </p:txBody>
       </p:sp>
-      <p:cxnSp>
-        <p:nvCxnSpPr>
-          <p:cNvPr id="254" name="Соединительная линия уступом 620">
-            <a:extLst>
-              <a:ext uri="{FF2B5EF4-FFF2-40B4-BE49-F238E27FC236}">
-                <a16:creationId xmlns:a16="http://schemas.microsoft.com/office/drawing/2014/main" id="{1345971B-2793-47F1-8AC3-C60214E9857E}"/>
-              </a:ext>
-            </a:extLst>
-          </p:cNvPr>
-          <p:cNvCxnSpPr>
-            <a:cxnSpLocks/>
-            <a:stCxn id="202" idx="2"/>
-            <a:endCxn id="253" idx="0"/>
-          </p:cNvCxnSpPr>
-          <p:nvPr/>
-        </p:nvCxnSpPr>
-        <p:spPr>
-          <a:xfrm rot="5400000">
-            <a:off x="17537134" y="6524842"/>
-            <a:ext cx="264793" cy="2"/>
-          </a:xfrm>
-          <a:prstGeom prst="bentConnector3">
-            <a:avLst>
-              <a:gd name="adj1" fmla="val 50000"/>
-            </a:avLst>
-          </a:prstGeom>
-          <a:ln w="19050">
-            <a:tailEnd type="arrow"/>
-          </a:ln>
-        </p:spPr>
-        <p:style>
-          <a:lnRef idx="1">
-            <a:schemeClr val="accent1"/>
-          </a:lnRef>
-          <a:fillRef idx="0">
-            <a:schemeClr val="accent1"/>
-          </a:fillRef>
-          <a:effectRef idx="0">
-            <a:schemeClr val="accent1"/>
-          </a:effectRef>
-          <a:fontRef idx="minor">
-            <a:schemeClr val="tx1"/>
-          </a:fontRef>
-        </p:style>
-      </p:cxnSp>
       <p:sp>
         <p:nvSpPr>
           <p:cNvPr id="257" name="Прямоугольник 256">
@@ -15000,7 +13758,7 @@
         </p:nvSpPr>
         <p:spPr>
           <a:xfrm>
-            <a:off x="17792930" y="7457387"/>
+            <a:off x="15899440" y="7474257"/>
             <a:ext cx="926325" cy="540000"/>
           </a:xfrm>
           <a:prstGeom prst="rect">
@@ -15037,57 +13795,12 @@
           </a:p>
         </p:txBody>
       </p:sp>
-      <p:cxnSp>
-        <p:nvCxnSpPr>
-          <p:cNvPr id="260" name="Соединительная линия уступом 620">
-            <a:extLst>
-              <a:ext uri="{FF2B5EF4-FFF2-40B4-BE49-F238E27FC236}">
-                <a16:creationId xmlns:a16="http://schemas.microsoft.com/office/drawing/2014/main" id="{2B9B7DB9-C3AC-4033-92B0-FDA2EF69BE71}"/>
-              </a:ext>
-            </a:extLst>
-          </p:cNvPr>
-          <p:cNvCxnSpPr>
-            <a:cxnSpLocks/>
-            <a:stCxn id="253" idx="2"/>
-            <a:endCxn id="257" idx="0"/>
-          </p:cNvCxnSpPr>
-          <p:nvPr/>
-        </p:nvCxnSpPr>
-        <p:spPr>
-          <a:xfrm rot="16200000" flipH="1">
-            <a:off x="17832738" y="7034031"/>
-            <a:ext cx="260147" cy="586564"/>
-          </a:xfrm>
-          <a:prstGeom prst="bentConnector3">
-            <a:avLst>
-              <a:gd name="adj1" fmla="val 50000"/>
-            </a:avLst>
-          </a:prstGeom>
-          <a:ln w="19050">
-            <a:tailEnd type="arrow"/>
-          </a:ln>
-        </p:spPr>
-        <p:style>
-          <a:lnRef idx="1">
-            <a:schemeClr val="accent1"/>
-          </a:lnRef>
-          <a:fillRef idx="0">
-            <a:schemeClr val="accent1"/>
-          </a:fillRef>
-          <a:effectRef idx="0">
-            <a:schemeClr val="accent1"/>
-          </a:effectRef>
-          <a:fontRef idx="minor">
-            <a:schemeClr val="tx1"/>
-          </a:fontRef>
-        </p:style>
-      </p:cxnSp>
       <p:sp>
         <p:nvSpPr>
-          <p:cNvPr id="261" name="Прямоугольник 260">
-            <a:extLst>
-              <a:ext uri="{FF2B5EF4-FFF2-40B4-BE49-F238E27FC236}">
-                <a16:creationId xmlns:a16="http://schemas.microsoft.com/office/drawing/2014/main" id="{E44D532E-23E4-4EB8-A246-095F67AB1A45}"/>
+          <p:cNvPr id="270" name="Прямоугольник 269">
+            <a:extLst>
+              <a:ext uri="{FF2B5EF4-FFF2-40B4-BE49-F238E27FC236}">
+                <a16:creationId xmlns:a16="http://schemas.microsoft.com/office/drawing/2014/main" id="{4D251A9D-8A1C-4835-A529-5CFFA224CEFA}"/>
               </a:ext>
             </a:extLst>
           </p:cNvPr>
@@ -15096,7 +13809,7 @@
         </p:nvSpPr>
         <p:spPr>
           <a:xfrm>
-            <a:off x="16011973" y="8274637"/>
+            <a:off x="15319740" y="8320017"/>
             <a:ext cx="926325" cy="540000"/>
           </a:xfrm>
           <a:prstGeom prst="rect">
@@ -15128,248 +13841,11 @@
             <a:pPr algn="ctr"/>
             <a:r>
               <a:rPr lang="ru-RU" sz="700" dirty="0"/>
-              <a:t>Ввести плановую экономику</a:t>
+              <a:t>Коллективизация</a:t>
             </a:r>
           </a:p>
         </p:txBody>
       </p:sp>
-      <p:cxnSp>
-        <p:nvCxnSpPr>
-          <p:cNvPr id="262" name="Соединительная линия уступом 620">
-            <a:extLst>
-              <a:ext uri="{FF2B5EF4-FFF2-40B4-BE49-F238E27FC236}">
-                <a16:creationId xmlns:a16="http://schemas.microsoft.com/office/drawing/2014/main" id="{964B46D5-CE1E-4FA0-9D71-6D3884088506}"/>
-              </a:ext>
-            </a:extLst>
-          </p:cNvPr>
-          <p:cNvCxnSpPr>
-            <a:cxnSpLocks/>
-            <a:stCxn id="216" idx="2"/>
-            <a:endCxn id="261" idx="0"/>
-          </p:cNvCxnSpPr>
-          <p:nvPr/>
-        </p:nvCxnSpPr>
-        <p:spPr>
-          <a:xfrm rot="5400000">
-            <a:off x="15937741" y="7737240"/>
-            <a:ext cx="1074793" cy="1"/>
-          </a:xfrm>
-          <a:prstGeom prst="bentConnector3">
-            <a:avLst>
-              <a:gd name="adj1" fmla="val 50000"/>
-            </a:avLst>
-          </a:prstGeom>
-          <a:ln w="19050">
-            <a:tailEnd type="arrow"/>
-          </a:ln>
-        </p:spPr>
-        <p:style>
-          <a:lnRef idx="1">
-            <a:schemeClr val="accent1"/>
-          </a:lnRef>
-          <a:fillRef idx="0">
-            <a:schemeClr val="accent1"/>
-          </a:fillRef>
-          <a:effectRef idx="0">
-            <a:schemeClr val="accent1"/>
-          </a:effectRef>
-          <a:fontRef idx="minor">
-            <a:schemeClr val="tx1"/>
-          </a:fontRef>
-        </p:style>
-      </p:cxnSp>
-      <p:sp>
-        <p:nvSpPr>
-          <p:cNvPr id="270" name="Прямоугольник 269">
-            <a:extLst>
-              <a:ext uri="{FF2B5EF4-FFF2-40B4-BE49-F238E27FC236}">
-                <a16:creationId xmlns:a16="http://schemas.microsoft.com/office/drawing/2014/main" id="{4D251A9D-8A1C-4835-A529-5CFFA224CEFA}"/>
-              </a:ext>
-            </a:extLst>
-          </p:cNvPr>
-          <p:cNvSpPr/>
-          <p:nvPr/>
-        </p:nvSpPr>
-        <p:spPr>
-          <a:xfrm>
-            <a:off x="14816545" y="8269517"/>
-            <a:ext cx="926325" cy="540000"/>
-          </a:xfrm>
-          <a:prstGeom prst="rect">
-            <a:avLst/>
-          </a:prstGeom>
-          <a:solidFill>
-            <a:srgbClr val="FF0000"/>
-          </a:solidFill>
-          <a:ln w="19050"/>
-        </p:spPr>
-        <p:style>
-          <a:lnRef idx="2">
-            <a:schemeClr val="accent1"/>
-          </a:lnRef>
-          <a:fillRef idx="1">
-            <a:schemeClr val="lt1"/>
-          </a:fillRef>
-          <a:effectRef idx="0">
-            <a:schemeClr val="accent1"/>
-          </a:effectRef>
-          <a:fontRef idx="minor">
-            <a:schemeClr val="dk1"/>
-          </a:fontRef>
-        </p:style>
-        <p:txBody>
-          <a:bodyPr lIns="124733" tIns="62367" rIns="124733" bIns="62367" rtlCol="0" anchor="ctr"/>
-          <a:lstStyle/>
-          <a:p>
-            <a:pPr algn="ctr"/>
-            <a:r>
-              <a:rPr lang="ru-RU" sz="700" dirty="0"/>
-              <a:t>Коллективизация</a:t>
-            </a:r>
-          </a:p>
-        </p:txBody>
-      </p:sp>
-      <p:cxnSp>
-        <p:nvCxnSpPr>
-          <p:cNvPr id="271" name="Соединительная линия уступом 620">
-            <a:extLst>
-              <a:ext uri="{FF2B5EF4-FFF2-40B4-BE49-F238E27FC236}">
-                <a16:creationId xmlns:a16="http://schemas.microsoft.com/office/drawing/2014/main" id="{F637BBA0-9DDF-44D9-9BF3-FD42FF01036C}"/>
-              </a:ext>
-            </a:extLst>
-          </p:cNvPr>
-          <p:cNvCxnSpPr>
-            <a:cxnSpLocks/>
-            <a:stCxn id="219" idx="2"/>
-            <a:endCxn id="270" idx="0"/>
-          </p:cNvCxnSpPr>
-          <p:nvPr/>
-        </p:nvCxnSpPr>
-        <p:spPr>
-          <a:xfrm rot="5400000">
-            <a:off x="14744088" y="7732860"/>
-            <a:ext cx="1072277" cy="1036"/>
-          </a:xfrm>
-          <a:prstGeom prst="bentConnector3">
-            <a:avLst>
-              <a:gd name="adj1" fmla="val 50000"/>
-            </a:avLst>
-          </a:prstGeom>
-          <a:ln w="19050">
-            <a:tailEnd type="arrow"/>
-          </a:ln>
-        </p:spPr>
-        <p:style>
-          <a:lnRef idx="1">
-            <a:schemeClr val="accent1"/>
-          </a:lnRef>
-          <a:fillRef idx="0">
-            <a:schemeClr val="accent1"/>
-          </a:fillRef>
-          <a:effectRef idx="0">
-            <a:schemeClr val="accent1"/>
-          </a:effectRef>
-          <a:fontRef idx="minor">
-            <a:schemeClr val="tx1"/>
-          </a:fontRef>
-        </p:style>
-      </p:cxnSp>
-      <p:sp>
-        <p:nvSpPr>
-          <p:cNvPr id="274" name="Прямоугольник 273">
-            <a:extLst>
-              <a:ext uri="{FF2B5EF4-FFF2-40B4-BE49-F238E27FC236}">
-                <a16:creationId xmlns:a16="http://schemas.microsoft.com/office/drawing/2014/main" id="{EDCC40A8-AC99-442F-B0C1-B8F075BA3BBA}"/>
-              </a:ext>
-            </a:extLst>
-          </p:cNvPr>
-          <p:cNvSpPr/>
-          <p:nvPr/>
-        </p:nvSpPr>
-        <p:spPr>
-          <a:xfrm>
-            <a:off x="17206365" y="8277242"/>
-            <a:ext cx="926325" cy="540000"/>
-          </a:xfrm>
-          <a:prstGeom prst="rect">
-            <a:avLst/>
-          </a:prstGeom>
-          <a:solidFill>
-            <a:srgbClr val="FF0000"/>
-          </a:solidFill>
-          <a:ln w="19050"/>
-        </p:spPr>
-        <p:style>
-          <a:lnRef idx="2">
-            <a:schemeClr val="accent1"/>
-          </a:lnRef>
-          <a:fillRef idx="1">
-            <a:schemeClr val="lt1"/>
-          </a:fillRef>
-          <a:effectRef idx="0">
-            <a:schemeClr val="accent1"/>
-          </a:effectRef>
-          <a:fontRef idx="minor">
-            <a:schemeClr val="dk1"/>
-          </a:fontRef>
-        </p:style>
-        <p:txBody>
-          <a:bodyPr lIns="124733" tIns="62367" rIns="124733" bIns="62367" rtlCol="0" anchor="ctr"/>
-          <a:lstStyle/>
-          <a:p>
-            <a:pPr algn="ctr"/>
-            <a:r>
-              <a:rPr lang="ru-RU" sz="700" dirty="0"/>
-              <a:t>Реформировать армию по «современному» образцу</a:t>
-            </a:r>
-          </a:p>
-        </p:txBody>
-      </p:sp>
-      <p:cxnSp>
-        <p:nvCxnSpPr>
-          <p:cNvPr id="278" name="Соединительная линия уступом 620">
-            <a:extLst>
-              <a:ext uri="{FF2B5EF4-FFF2-40B4-BE49-F238E27FC236}">
-                <a16:creationId xmlns:a16="http://schemas.microsoft.com/office/drawing/2014/main" id="{75ED8A32-EBF6-4119-B63C-6489D7C5099E}"/>
-              </a:ext>
-            </a:extLst>
-          </p:cNvPr>
-          <p:cNvCxnSpPr>
-            <a:cxnSpLocks/>
-            <a:stCxn id="253" idx="2"/>
-            <a:endCxn id="274" idx="0"/>
-          </p:cNvCxnSpPr>
-          <p:nvPr/>
-        </p:nvCxnSpPr>
-        <p:spPr>
-          <a:xfrm rot="5400000">
-            <a:off x="17129528" y="7737241"/>
-            <a:ext cx="1080002" cy="1"/>
-          </a:xfrm>
-          <a:prstGeom prst="bentConnector3">
-            <a:avLst>
-              <a:gd name="adj1" fmla="val 50000"/>
-            </a:avLst>
-          </a:prstGeom>
-          <a:ln w="19050">
-            <a:tailEnd type="arrow"/>
-          </a:ln>
-        </p:spPr>
-        <p:style>
-          <a:lnRef idx="1">
-            <a:schemeClr val="accent1"/>
-          </a:lnRef>
-          <a:fillRef idx="0">
-            <a:schemeClr val="accent1"/>
-          </a:fillRef>
-          <a:effectRef idx="0">
-            <a:schemeClr val="accent1"/>
-          </a:effectRef>
-          <a:fontRef idx="minor">
-            <a:schemeClr val="tx1"/>
-          </a:fontRef>
-        </p:style>
-      </p:cxnSp>
       <p:sp>
         <p:nvSpPr>
           <p:cNvPr id="280" name="Прямоугольник 279">
@@ -15384,7 +13860,7 @@
         </p:nvSpPr>
         <p:spPr>
           <a:xfrm>
-            <a:off x="19614239" y="6652886"/>
+            <a:off x="21147590" y="8333090"/>
             <a:ext cx="926325" cy="540000"/>
           </a:xfrm>
           <a:prstGeom prst="rect">
@@ -15439,8 +13915,8 @@
         </p:nvCxnSpPr>
         <p:spPr>
           <a:xfrm rot="16200000" flipH="1">
-            <a:off x="19340444" y="5915927"/>
-            <a:ext cx="260439" cy="1213478"/>
+            <a:off x="20886047" y="7608383"/>
+            <a:ext cx="255845" cy="1193567"/>
           </a:xfrm>
           <a:prstGeom prst="bentConnector3">
             <a:avLst>
@@ -15480,7 +13956,7 @@
         </p:nvSpPr>
         <p:spPr>
           <a:xfrm>
-            <a:off x="19007500" y="7460284"/>
+            <a:off x="20550806" y="9081805"/>
             <a:ext cx="926325" cy="540000"/>
           </a:xfrm>
           <a:prstGeom prst="rect">
@@ -15535,8 +14011,8 @@
         </p:nvCxnSpPr>
         <p:spPr>
           <a:xfrm rot="16200000" flipH="1">
-            <a:off x="19037074" y="7026694"/>
-            <a:ext cx="260439" cy="606740"/>
+            <a:off x="20611120" y="8678955"/>
+            <a:ext cx="213997" cy="591702"/>
           </a:xfrm>
           <a:prstGeom prst="bentConnector3">
             <a:avLst>
@@ -15580,8 +14056,8 @@
         </p:nvCxnSpPr>
         <p:spPr>
           <a:xfrm rot="5400000">
-            <a:off x="19640334" y="7023216"/>
-            <a:ext cx="267398" cy="606739"/>
+            <a:off x="21208004" y="8679055"/>
+            <a:ext cx="208715" cy="596784"/>
           </a:xfrm>
           <a:prstGeom prst="bentConnector3">
             <a:avLst>
@@ -15609,10 +14085,10 @@
       </p:cxnSp>
       <p:sp>
         <p:nvSpPr>
-          <p:cNvPr id="239" name="Прямоугольник 238">
-            <a:extLst>
-              <a:ext uri="{FF2B5EF4-FFF2-40B4-BE49-F238E27FC236}">
-                <a16:creationId xmlns:a16="http://schemas.microsoft.com/office/drawing/2014/main" id="{64A45257-8F21-40BB-B44B-74B5E2E87EFF}"/>
+          <p:cNvPr id="244" name="Прямоугольник 243">
+            <a:extLst>
+              <a:ext uri="{FF2B5EF4-FFF2-40B4-BE49-F238E27FC236}">
+                <a16:creationId xmlns:a16="http://schemas.microsoft.com/office/drawing/2014/main" id="{68301316-F113-43E2-BE8C-A421E8E8F476}"/>
               </a:ext>
             </a:extLst>
           </p:cNvPr>
@@ -15621,103 +14097,7 @@
         </p:nvSpPr>
         <p:spPr>
           <a:xfrm>
-            <a:off x="13623189" y="5852446"/>
-            <a:ext cx="926325" cy="540000"/>
-          </a:xfrm>
-          <a:prstGeom prst="rect">
-            <a:avLst/>
-          </a:prstGeom>
-          <a:solidFill>
-            <a:srgbClr val="FF0000"/>
-          </a:solidFill>
-          <a:ln w="19050"/>
-        </p:spPr>
-        <p:style>
-          <a:lnRef idx="2">
-            <a:schemeClr val="accent1"/>
-          </a:lnRef>
-          <a:fillRef idx="1">
-            <a:schemeClr val="lt1"/>
-          </a:fillRef>
-          <a:effectRef idx="0">
-            <a:schemeClr val="accent1"/>
-          </a:effectRef>
-          <a:fontRef idx="minor">
-            <a:schemeClr val="dk1"/>
-          </a:fontRef>
-        </p:style>
-        <p:txBody>
-          <a:bodyPr lIns="124733" tIns="62367" rIns="124733" bIns="62367" rtlCol="0" anchor="ctr"/>
-          <a:lstStyle/>
-          <a:p>
-            <a:pPr algn="ctr"/>
-            <a:r>
-              <a:rPr lang="ru-RU" sz="700" dirty="0"/>
-              <a:t>Исключить французов из партии</a:t>
-            </a:r>
-          </a:p>
-        </p:txBody>
-      </p:sp>
-      <p:cxnSp>
-        <p:nvCxnSpPr>
-          <p:cNvPr id="241" name="Соединительная линия уступом 620">
-            <a:extLst>
-              <a:ext uri="{FF2B5EF4-FFF2-40B4-BE49-F238E27FC236}">
-                <a16:creationId xmlns:a16="http://schemas.microsoft.com/office/drawing/2014/main" id="{5488EBCC-733B-4DD5-8178-EE54CD215417}"/>
-              </a:ext>
-            </a:extLst>
-          </p:cNvPr>
-          <p:cNvCxnSpPr>
-            <a:cxnSpLocks/>
-            <a:stCxn id="231" idx="2"/>
-            <a:endCxn id="239" idx="0"/>
-          </p:cNvCxnSpPr>
-          <p:nvPr/>
-        </p:nvCxnSpPr>
-        <p:spPr>
-          <a:xfrm rot="5400000">
-            <a:off x="14256570" y="5414832"/>
-            <a:ext cx="267396" cy="607832"/>
-          </a:xfrm>
-          <a:prstGeom prst="bentConnector3">
-            <a:avLst>
-              <a:gd name="adj1" fmla="val 50000"/>
-            </a:avLst>
-          </a:prstGeom>
-          <a:ln w="19050">
-            <a:tailEnd type="arrow"/>
-          </a:ln>
-        </p:spPr>
-        <p:style>
-          <a:lnRef idx="1">
-            <a:schemeClr val="accent1"/>
-          </a:lnRef>
-          <a:fillRef idx="0">
-            <a:schemeClr val="accent1"/>
-          </a:fillRef>
-          <a:effectRef idx="0">
-            <a:schemeClr val="accent1"/>
-          </a:effectRef>
-          <a:fontRef idx="minor">
-            <a:schemeClr val="tx1"/>
-          </a:fontRef>
-        </p:style>
-      </p:cxnSp>
-      <p:sp>
-        <p:nvSpPr>
-          <p:cNvPr id="244" name="Прямоугольник 243">
-            <a:extLst>
-              <a:ext uri="{FF2B5EF4-FFF2-40B4-BE49-F238E27FC236}">
-                <a16:creationId xmlns:a16="http://schemas.microsoft.com/office/drawing/2014/main" id="{68301316-F113-43E2-BE8C-A421E8E8F476}"/>
-              </a:ext>
-            </a:extLst>
-          </p:cNvPr>
-          <p:cNvSpPr/>
-          <p:nvPr/>
-        </p:nvSpPr>
-        <p:spPr>
-          <a:xfrm>
-            <a:off x="45887498" y="23825486"/>
+            <a:off x="10903549" y="18677512"/>
             <a:ext cx="926325" cy="540000"/>
           </a:xfrm>
           <a:prstGeom prst="rect">
@@ -15775,7 +14155,7 @@
         </p:nvSpPr>
         <p:spPr>
           <a:xfrm>
-            <a:off x="45887499" y="23015652"/>
+            <a:off x="10903550" y="17867678"/>
             <a:ext cx="926325" cy="540000"/>
           </a:xfrm>
           <a:prstGeom prst="rect">
@@ -15835,7 +14215,7 @@
         </p:nvSpPr>
         <p:spPr>
           <a:xfrm>
-            <a:off x="48355292" y="23825485"/>
+            <a:off x="13371343" y="18677511"/>
             <a:ext cx="926325" cy="540000"/>
           </a:xfrm>
           <a:prstGeom prst="rect">
@@ -15936,7 +14316,7 @@
         </p:nvSpPr>
         <p:spPr>
           <a:xfrm>
-            <a:off x="47734372" y="24654842"/>
+            <a:off x="12750423" y="19506868"/>
             <a:ext cx="926325" cy="540000"/>
           </a:xfrm>
           <a:prstGeom prst="rect">
@@ -16005,7 +14385,7 @@
         </p:nvSpPr>
         <p:spPr>
           <a:xfrm>
-            <a:off x="43770887" y="20580755"/>
+            <a:off x="7122627" y="15430402"/>
             <a:ext cx="926325" cy="540000"/>
           </a:xfrm>
           <a:prstGeom prst="rect">
@@ -16037,7 +14417,7 @@
             <a:pPr algn="ctr"/>
             <a:r>
               <a:rPr lang="ru-RU" sz="700" dirty="0"/>
-              <a:t>«Танжер — столица шпионажа</a:t>
+              <a:t>Танжер — столица шпионажа</a:t>
             </a:r>
             <a:br>
               <a:rPr lang="ru-RU" sz="700" dirty="0"/>
@@ -16064,7 +14444,7 @@
         </p:nvSpPr>
         <p:spPr>
           <a:xfrm>
-            <a:off x="42530651" y="20580755"/>
+            <a:off x="5882391" y="15430402"/>
             <a:ext cx="926325" cy="540000"/>
           </a:xfrm>
           <a:prstGeom prst="rect">
@@ -16098,6 +14478,110 @@
               <a:rPr lang="ru-RU" sz="700" dirty="0"/>
               <a:t>Свободный порт Танжера</a:t>
             </a:r>
+            <a:br>
+              <a:rPr lang="ru-RU" sz="700" dirty="0"/>
+            </a:br>
+            <a:r>
+              <a:rPr lang="ru-RU" sz="100" dirty="0"/>
+              <a:t>(Историко-игровое </a:t>
+            </a:r>
+            <a:r>
+              <a:rPr lang="ru-RU" sz="100" dirty="0" err="1"/>
+              <a:t>описание:«Танжер</a:t>
+            </a:r>
+            <a:r>
+              <a:rPr lang="ru-RU" sz="100" dirty="0"/>
+              <a:t> — это ворота из Атлантики в Средиземное море. Объявив город зоной свободной торговли (Порто-франко), мы отменим таможенные пошлины для иностранных судов. Это привлечет в город международные торговые компании, склады и сборочные мануфактуры, превратив Танжер в главный логистический </a:t>
+            </a:r>
+            <a:r>
+              <a:rPr lang="ru-RU" sz="100" dirty="0" err="1"/>
+              <a:t>хаб</a:t>
+            </a:r>
+            <a:r>
+              <a:rPr lang="ru-RU" sz="100" dirty="0"/>
+              <a:t> Северной Африки».⚙️ Игровые </a:t>
+            </a:r>
+            <a:r>
+              <a:rPr lang="ru-RU" sz="100" dirty="0" err="1"/>
+              <a:t>эффекты:Развитие</a:t>
+            </a:r>
+            <a:r>
+              <a:rPr lang="ru-RU" sz="100" dirty="0"/>
+              <a:t> региона (Танжер):Морская база (</a:t>
+            </a:r>
+            <a:r>
+              <a:rPr lang="ru-RU" sz="100" dirty="0" err="1"/>
+              <a:t>Naval</a:t>
+            </a:r>
+            <a:r>
+              <a:rPr lang="ru-RU" sz="100" dirty="0"/>
+              <a:t> </a:t>
+            </a:r>
+            <a:r>
+              <a:rPr lang="ru-RU" sz="100" dirty="0" err="1"/>
+              <a:t>Base</a:t>
+            </a:r>
+            <a:r>
+              <a:rPr lang="ru-RU" sz="100" dirty="0"/>
+              <a:t>): +2 </a:t>
+            </a:r>
+            <a:r>
+              <a:rPr lang="ru-RU" sz="100" dirty="0" err="1"/>
+              <a:t>уровня.Гражданская</a:t>
+            </a:r>
+            <a:r>
+              <a:rPr lang="ru-RU" sz="100" dirty="0"/>
+              <a:t> фабрика (</a:t>
+            </a:r>
+            <a:r>
+              <a:rPr lang="ru-RU" sz="100" dirty="0" err="1"/>
+              <a:t>Civilian</a:t>
+            </a:r>
+            <a:r>
+              <a:rPr lang="ru-RU" sz="100" dirty="0"/>
+              <a:t> </a:t>
+            </a:r>
+            <a:r>
+              <a:rPr lang="ru-RU" sz="100" dirty="0" err="1"/>
+              <a:t>Factory</a:t>
+            </a:r>
+            <a:r>
+              <a:rPr lang="ru-RU" sz="100" dirty="0"/>
+              <a:t>): +2 штуки (за счет притока иностранного капитала).Открывается +2 свободных слота для </a:t>
+            </a:r>
+            <a:r>
+              <a:rPr lang="ru-RU" sz="100" dirty="0" err="1"/>
+              <a:t>строительства.Экономические</a:t>
+            </a:r>
+            <a:r>
+              <a:rPr lang="ru-RU" sz="100" dirty="0"/>
+              <a:t> бонусы (Национальный дух «Ворота Средиземноморья»):Скорость строительства гражданских фабрик и инфраструктуры: +10%.Эффективность торговли (</a:t>
+            </a:r>
+            <a:r>
+              <a:rPr lang="ru-RU" sz="100" dirty="0" err="1"/>
+              <a:t>Trade</a:t>
+            </a:r>
+            <a:r>
+              <a:rPr lang="ru-RU" sz="100" dirty="0"/>
+              <a:t> </a:t>
+            </a:r>
+            <a:r>
+              <a:rPr lang="ru-RU" sz="100" dirty="0" err="1"/>
+              <a:t>Influence</a:t>
+            </a:r>
+            <a:r>
+              <a:rPr lang="ru-RU" sz="100" dirty="0"/>
+              <a:t> </a:t>
+            </a:r>
+            <a:r>
+              <a:rPr lang="ru-RU" sz="100" dirty="0" err="1"/>
+              <a:t>Factor</a:t>
+            </a:r>
+            <a:r>
+              <a:rPr lang="ru-RU" sz="100" dirty="0"/>
+              <a:t>): +15% (иностранные державы охотнее покупают ваши ресурсы).)</a:t>
+            </a:r>
+            <a:endParaRPr lang="ru-RU" sz="700" dirty="0"/>
           </a:p>
         </p:txBody>
       </p:sp>
@@ -16115,7 +14599,7 @@
         </p:nvSpPr>
         <p:spPr>
           <a:xfrm>
-            <a:off x="43136559" y="19702808"/>
+            <a:off x="6488299" y="14552455"/>
             <a:ext cx="926325" cy="540000"/>
           </a:xfrm>
           <a:prstGeom prst="rect">
@@ -16166,7 +14650,7 @@
         </p:nvSpPr>
         <p:spPr>
           <a:xfrm>
-            <a:off x="41315539" y="20580755"/>
+            <a:off x="10443385" y="15430402"/>
             <a:ext cx="926325" cy="540000"/>
           </a:xfrm>
           <a:prstGeom prst="rect">
@@ -16198,8 +14682,128 @@
             <a:pPr algn="ctr"/>
             <a:r>
               <a:rPr lang="ru-RU" sz="700" dirty="0"/>
-              <a:t>Мавритания 3</a:t>
-            </a:r>
+              <a:t>Мавританские Акажу и Гуммиарабик</a:t>
+            </a:r>
+            <a:br>
+              <a:rPr lang="ru-RU" sz="700" dirty="0"/>
+            </a:br>
+            <a:r>
+              <a:rPr lang="ru-RU" sz="100" dirty="0"/>
+              <a:t>(«Южные провинции Мавритании, примыкающие к реке Сенегал, богаты лесами красного дерева (Акажу) и зарослями акаций, дающих ценнейший гуммиарабик. Наладив промышленный сбор смолы и заготовку древесины, мы обеспечим наши текстильные, химические и фармацевтические фабрики собственным сырьем, снизив зависимость от импорта». </a:t>
+            </a:r>
+            <a:r>
+              <a:rPr lang="ru-RU" sz="100" dirty="0" err="1"/>
+              <a:t>оявление</a:t>
+            </a:r>
+            <a:r>
+              <a:rPr lang="ru-RU" sz="100" dirty="0"/>
+              <a:t> </a:t>
+            </a:r>
+            <a:r>
+              <a:rPr lang="ru-RU" sz="100" dirty="0" err="1"/>
+              <a:t>ресурсов:В</a:t>
+            </a:r>
+            <a:r>
+              <a:rPr lang="ru-RU" sz="100" dirty="0"/>
+              <a:t> регионе Мавритания (или южный </a:t>
+            </a:r>
+            <a:r>
+              <a:rPr lang="ru-RU" sz="100" dirty="0" err="1"/>
+              <a:t>стейт</a:t>
+            </a:r>
+            <a:r>
+              <a:rPr lang="ru-RU" sz="100" dirty="0"/>
+              <a:t>, если регион разделен) добавляется:+10 Резины (</a:t>
+            </a:r>
+            <a:r>
+              <a:rPr lang="ru-RU" sz="100" dirty="0" err="1"/>
+              <a:t>Rubber</a:t>
+            </a:r>
+            <a:r>
+              <a:rPr lang="ru-RU" sz="100" dirty="0"/>
+              <a:t>) — в HoI4 резина отвечает за любые эластичные, химические смолы и изоляционные материалы. Это критически важно для производства грузовиков, самолетов и пехотного </a:t>
+            </a:r>
+            <a:r>
+              <a:rPr lang="ru-RU" sz="100" dirty="0" err="1"/>
+              <a:t>снаряжения.Экономические</a:t>
+            </a:r>
+            <a:r>
+              <a:rPr lang="ru-RU" sz="100" dirty="0"/>
+              <a:t> бонусы (Национальный дух):Страна получает постоянный или временный (на 365 дней) национальный дух «Мавританское </a:t>
+            </a:r>
+            <a:r>
+              <a:rPr lang="ru-RU" sz="100" dirty="0" err="1"/>
+              <a:t>сырье»:Эффективность</a:t>
+            </a:r>
+            <a:r>
+              <a:rPr lang="ru-RU" sz="100" dirty="0"/>
+              <a:t> производства (</a:t>
+            </a:r>
+            <a:r>
+              <a:rPr lang="ru-RU" sz="100" dirty="0" err="1"/>
+              <a:t>Production</a:t>
+            </a:r>
+            <a:r>
+              <a:rPr lang="ru-RU" sz="100" dirty="0"/>
+              <a:t> </a:t>
+            </a:r>
+            <a:r>
+              <a:rPr lang="ru-RU" sz="100" dirty="0" err="1"/>
+              <a:t>Efficiency</a:t>
+            </a:r>
+            <a:r>
+              <a:rPr lang="ru-RU" sz="100" dirty="0"/>
+              <a:t> </a:t>
+            </a:r>
+            <a:r>
+              <a:rPr lang="ru-RU" sz="100" dirty="0" err="1"/>
+              <a:t>Growth</a:t>
+            </a:r>
+            <a:r>
+              <a:rPr lang="ru-RU" sz="100" dirty="0"/>
+              <a:t>): +5%Скорость исследования промышленных технологий (</a:t>
+            </a:r>
+            <a:r>
+              <a:rPr lang="ru-RU" sz="100" dirty="0" err="1"/>
+              <a:t>Industry</a:t>
+            </a:r>
+            <a:r>
+              <a:rPr lang="ru-RU" sz="100" dirty="0"/>
+              <a:t> </a:t>
+            </a:r>
+            <a:r>
+              <a:rPr lang="ru-RU" sz="100" dirty="0" err="1"/>
+              <a:t>Research</a:t>
+            </a:r>
+            <a:r>
+              <a:rPr lang="ru-RU" sz="100" dirty="0"/>
+              <a:t> </a:t>
+            </a:r>
+            <a:r>
+              <a:rPr lang="ru-RU" sz="100" dirty="0" err="1"/>
+              <a:t>Speed</a:t>
+            </a:r>
+            <a:r>
+              <a:rPr lang="ru-RU" sz="100" dirty="0"/>
+              <a:t>): +10% (химическая отрасль).Развитие </a:t>
+            </a:r>
+            <a:r>
+              <a:rPr lang="ru-RU" sz="100" dirty="0" err="1"/>
+              <a:t>инфраструктуры:В</a:t>
+            </a:r>
+            <a:r>
+              <a:rPr lang="ru-RU" sz="100" dirty="0"/>
+              <a:t> южном регионе Мавритании бесплатно строится +1 уровень </a:t>
+            </a:r>
+            <a:r>
+              <a:rPr lang="ru-RU" sz="100" dirty="0" err="1"/>
+              <a:t>Инфраструктуры.Открывается</a:t>
+            </a:r>
+            <a:r>
+              <a:rPr lang="ru-RU" sz="100" dirty="0"/>
+              <a:t> +1 свободный слот для строительства фабрик в этом регионе.)</a:t>
+            </a:r>
+            <a:endParaRPr lang="ru-RU" sz="700" dirty="0"/>
           </a:p>
         </p:txBody>
       </p:sp>
@@ -16217,7 +14821,7 @@
         </p:nvSpPr>
         <p:spPr>
           <a:xfrm>
-            <a:off x="40657279" y="19702808"/>
+            <a:off x="9785125" y="14552455"/>
             <a:ext cx="926325" cy="540000"/>
           </a:xfrm>
           <a:prstGeom prst="rect">
@@ -16251,6 +14855,86 @@
               <a:rPr lang="ru-RU" sz="700" dirty="0"/>
               <a:t>Мавритания – южная провинция Марокко</a:t>
             </a:r>
+            <a:br>
+              <a:rPr lang="ru-RU" sz="700" dirty="0"/>
+            </a:br>
+            <a:r>
+              <a:rPr lang="ru-RU" sz="100" dirty="0"/>
+              <a:t>(Умиротворение эмиров </a:t>
+            </a:r>
+            <a:r>
+              <a:rPr lang="ru-RU" sz="100" dirty="0" err="1"/>
+              <a:t>Трарзы</a:t>
+            </a:r>
+            <a:r>
+              <a:rPr lang="ru-RU" sz="100" dirty="0"/>
+              <a:t> и </a:t>
+            </a:r>
+            <a:r>
+              <a:rPr lang="ru-RU" sz="100" dirty="0" err="1"/>
+              <a:t>Адрара</a:t>
+            </a:r>
+            <a:r>
+              <a:rPr lang="ru-RU" sz="100" dirty="0"/>
+              <a:t>»: Договор с местной кочевой </a:t>
+            </a:r>
+            <a:r>
+              <a:rPr lang="ru-RU" sz="100" dirty="0" err="1"/>
+              <a:t>элитой.Эффект</a:t>
+            </a:r>
+            <a:r>
+              <a:rPr lang="ru-RU" sz="100" dirty="0"/>
+              <a:t>: Снижение подчинения (</a:t>
+            </a:r>
+            <a:r>
+              <a:rPr lang="ru-RU" sz="100" dirty="0" err="1"/>
+              <a:t>Resistance</a:t>
+            </a:r>
+            <a:r>
+              <a:rPr lang="ru-RU" sz="100" dirty="0"/>
+              <a:t>) на 20%, рост </a:t>
+            </a:r>
+            <a:r>
+              <a:rPr lang="ru-RU" sz="100" dirty="0" err="1"/>
+              <a:t>стабильности.«Суфийские</a:t>
+            </a:r>
+            <a:r>
+              <a:rPr lang="ru-RU" sz="100" dirty="0"/>
+              <a:t> братства на службе Султана»: Использование авторитета марокканских религиозных орденов (</a:t>
+            </a:r>
+            <a:r>
+              <a:rPr lang="ru-RU" sz="100" dirty="0" err="1"/>
+              <a:t>Тиджания</a:t>
+            </a:r>
+            <a:r>
+              <a:rPr lang="ru-RU" sz="100" dirty="0"/>
+              <a:t>).Эффект: Прирост политической власти (+0.5/день), ускорение роста подчинения </a:t>
+            </a:r>
+            <a:r>
+              <a:rPr lang="ru-RU" sz="100" dirty="0" err="1"/>
+              <a:t>населения.«Ликвидация</a:t>
+            </a:r>
+            <a:r>
+              <a:rPr lang="ru-RU" sz="100" dirty="0"/>
+              <a:t> французских колониальных границ»: Административная реформа и объявление Мавритании неотъемлемой южной </a:t>
+            </a:r>
+            <a:r>
+              <a:rPr lang="ru-RU" sz="100" dirty="0" err="1"/>
+              <a:t>провинцией.Эффект</a:t>
+            </a:r>
+            <a:r>
+              <a:rPr lang="ru-RU" sz="100" dirty="0"/>
+              <a:t>: Получение национальных корней (</a:t>
+            </a:r>
+            <a:r>
+              <a:rPr lang="ru-RU" sz="100" dirty="0" err="1"/>
+              <a:t>Cores</a:t>
+            </a:r>
+            <a:r>
+              <a:rPr lang="ru-RU" sz="100" dirty="0"/>
+              <a:t>) на регионы Мавритании.)</a:t>
+            </a:r>
+            <a:endParaRPr lang="ru-RU" sz="700" dirty="0"/>
           </a:p>
         </p:txBody>
       </p:sp>
@@ -16268,7 +14952,7 @@
         </p:nvSpPr>
         <p:spPr>
           <a:xfrm>
-            <a:off x="40101935" y="20580755"/>
+            <a:off x="9229781" y="15430402"/>
             <a:ext cx="926325" cy="540000"/>
           </a:xfrm>
           <a:prstGeom prst="rect">
@@ -16299,9 +14983,14 @@
           <a:p>
             <a:pPr algn="ctr"/>
             <a:r>
-              <a:rPr lang="ru-RU" sz="700" dirty="0"/>
-              <a:t>Мавритания 2</a:t>
-            </a:r>
+              <a:rPr lang="ru-RU" sz="800" dirty="0" err="1"/>
+              <a:t>Транссахарская</a:t>
+            </a:r>
+            <a:r>
+              <a:rPr lang="ru-RU" sz="800" dirty="0"/>
+              <a:t> железная дорога: Фес — Нуакшот</a:t>
+            </a:r>
+            <a:endParaRPr lang="ru-RU" sz="700" dirty="0"/>
           </a:p>
         </p:txBody>
       </p:sp>
@@ -16319,7 +15008,7 @@
         </p:nvSpPr>
         <p:spPr>
           <a:xfrm>
-            <a:off x="43136559" y="21384918"/>
+            <a:off x="8279449" y="16236945"/>
             <a:ext cx="926325" cy="540000"/>
           </a:xfrm>
           <a:prstGeom prst="rect">
@@ -16374,12 +15063,12 @@
         </p:nvCxnSpPr>
         <p:spPr>
           <a:xfrm rot="5400000">
-            <a:off x="45023958" y="18818573"/>
-            <a:ext cx="1142109" cy="3990580"/>
+            <a:off x="10103428" y="13734020"/>
+            <a:ext cx="1142110" cy="3863741"/>
           </a:xfrm>
           <a:prstGeom prst="bentConnector3">
             <a:avLst>
-              <a:gd name="adj1" fmla="val 14417"/>
+              <a:gd name="adj1" fmla="val 15101"/>
             </a:avLst>
           </a:prstGeom>
           <a:ln w="19050">
@@ -16418,13 +15107,13 @@
           <p:nvPr/>
         </p:nvCxnSpPr>
         <p:spPr>
-          <a:xfrm rot="5400000">
-            <a:off x="43028667" y="20813863"/>
-            <a:ext cx="1142110" cy="12700"/>
+          <a:xfrm rot="16200000" flipH="1">
+            <a:off x="7274792" y="14769125"/>
+            <a:ext cx="1144490" cy="1791150"/>
           </a:xfrm>
           <a:prstGeom prst="bentConnector3">
             <a:avLst>
-              <a:gd name="adj1" fmla="val 50000"/>
+              <a:gd name="adj1" fmla="val 15174"/>
             </a:avLst>
           </a:prstGeom>
           <a:ln w="19050">
@@ -16463,13 +15152,13 @@
           <p:nvPr/>
         </p:nvCxnSpPr>
         <p:spPr>
-          <a:xfrm rot="16200000" flipH="1">
-            <a:off x="41789027" y="19574223"/>
-            <a:ext cx="1142110" cy="2479280"/>
+          <a:xfrm rot="5400000">
+            <a:off x="8923205" y="14911862"/>
+            <a:ext cx="1144490" cy="1505676"/>
           </a:xfrm>
           <a:prstGeom prst="bentConnector3">
             <a:avLst>
-              <a:gd name="adj1" fmla="val 15306"/>
+              <a:gd name="adj1" fmla="val 15174"/>
             </a:avLst>
           </a:prstGeom>
           <a:ln w="19050">
@@ -17521,8 +16210,44 @@
             <a:pPr algn="ctr"/>
             <a:r>
               <a:rPr lang="ru-RU" sz="700" dirty="0"/>
-              <a:t>Импровизированный аэропорт</a:t>
-            </a:r>
+              <a:t>Проект </a:t>
+            </a:r>
+            <a:r>
+              <a:rPr lang="ru-RU" sz="700" dirty="0" err="1"/>
+              <a:t>Нуассер</a:t>
+            </a:r>
+            <a:br>
+              <a:rPr lang="ru-RU" sz="700" dirty="0"/>
+            </a:br>
+            <a:r>
+              <a:rPr lang="ru-RU" sz="200" dirty="0"/>
+              <a:t>(Фокус: «Проект </a:t>
+            </a:r>
+            <a:r>
+              <a:rPr lang="ru-RU" sz="200" dirty="0" err="1"/>
+              <a:t>Нуассер</a:t>
+            </a:r>
+            <a:r>
+              <a:rPr lang="ru-RU" sz="200" dirty="0"/>
+              <a:t>» (Аэродром Касабланки)Исторический контекст: В конце войны США начали закладывать в Марокко гигантские взлетно-посадочные полосы (в будущем — база </a:t>
+            </a:r>
+            <a:r>
+              <a:rPr lang="ru-RU" sz="200" dirty="0" err="1"/>
+              <a:t>Нуассер</a:t>
+            </a:r>
+            <a:r>
+              <a:rPr lang="ru-RU" sz="200" dirty="0"/>
+              <a:t>). Они проектировались под новейшие тяжелые бомбардировщики на случай затяжной </a:t>
+            </a:r>
+            <a:r>
+              <a:rPr lang="ru-RU" sz="200" dirty="0" err="1"/>
+              <a:t>войны.Эффекты</a:t>
+            </a:r>
+            <a:r>
+              <a:rPr lang="ru-RU" sz="200" dirty="0"/>
+              <a:t> в игре: Дает скидку \(50\%\) на исследование стратегических бомбардировщиков и увеличивает максимальный размер авиабаз в Марокко.)</a:t>
+            </a:r>
+            <a:endParaRPr lang="ru-RU" sz="700" dirty="0"/>
           </a:p>
         </p:txBody>
       </p:sp>
@@ -17627,8 +16352,16 @@
             <a:pPr algn="ctr"/>
             <a:r>
               <a:rPr lang="ru-RU" sz="700" dirty="0"/>
-              <a:t>Экстренный порт для союзников</a:t>
-            </a:r>
+              <a:t>Модернизация порта Касабланки</a:t>
+            </a:r>
+            <a:br>
+              <a:rPr lang="ru-RU" sz="700" dirty="0"/>
+            </a:br>
+            <a:r>
+              <a:rPr lang="ru-RU" sz="200" dirty="0"/>
+              <a:t>(Исторический контекст: Во время войны через Касабланку шло до 80% всей международной торговли Северной Африки. Союзники радикально увеличили пропускную способность доков для приема сотен американских кораблей снабжения «Либерти».)</a:t>
+            </a:r>
+            <a:endParaRPr lang="ru-RU" sz="700" dirty="0"/>
           </a:p>
         </p:txBody>
       </p:sp>
@@ -17786,7 +16519,7 @@
             <a:pPr algn="ctr"/>
             <a:r>
               <a:rPr lang="ru-RU" sz="700" dirty="0"/>
-              <a:t>Поддержка США</a:t>
+              <a:t>Подводя итоги «Факела»</a:t>
             </a:r>
           </a:p>
         </p:txBody>
@@ -18728,7 +17461,7 @@
               <a:rPr lang="ru-RU" sz="700" dirty="0"/>
             </a:br>
             <a:r>
-              <a:rPr lang="ru-RU" sz="300" dirty="0"/>
+              <a:rPr lang="ru-RU" sz="200" dirty="0"/>
               <a:t>В 1957 году он принял титул короля Марокко , чтобы символизировать единство страны, несмотря на разногласия между арабами и берберами . «Провозглашение Королевства»: Исторический шаг 1957 года. Мухаммед V меняет титул султана на короля, модернизируя образ монархии. Эффект: +15% к Стабильности, рост ежедневного прироста Политической власти (PP).</a:t>
             </a:r>
             <a:endParaRPr lang="ru-RU" sz="700" dirty="0"/>
@@ -18880,7 +17613,7 @@
         </p:nvSpPr>
         <p:spPr>
           <a:xfrm>
-            <a:off x="45290529" y="24654313"/>
+            <a:off x="10306580" y="19506339"/>
             <a:ext cx="926325" cy="540000"/>
           </a:xfrm>
           <a:prstGeom prst="rect">
@@ -19023,7 +17756,7 @@
         </p:nvSpPr>
         <p:spPr>
           <a:xfrm>
-            <a:off x="45887498" y="25454602"/>
+            <a:off x="10903549" y="20306628"/>
             <a:ext cx="926325" cy="540000"/>
           </a:xfrm>
           <a:prstGeom prst="rect">
@@ -19121,7 +17854,7 @@
         </p:nvSpPr>
         <p:spPr>
           <a:xfrm>
-            <a:off x="44697768" y="25455132"/>
+            <a:off x="9713819" y="20307158"/>
             <a:ext cx="926325" cy="540000"/>
           </a:xfrm>
           <a:prstGeom prst="rect">
@@ -19174,7 +17907,7 @@
         </p:nvSpPr>
         <p:spPr>
           <a:xfrm>
-            <a:off x="45290528" y="26254890"/>
+            <a:off x="10306579" y="21106916"/>
             <a:ext cx="926325" cy="540000"/>
           </a:xfrm>
           <a:prstGeom prst="rect">
@@ -19227,7 +17960,7 @@
         </p:nvSpPr>
         <p:spPr>
           <a:xfrm>
-            <a:off x="45880638" y="27054648"/>
+            <a:off x="10896689" y="21906674"/>
             <a:ext cx="926325" cy="540000"/>
           </a:xfrm>
           <a:prstGeom prst="rect">
@@ -19280,7 +18013,7 @@
         </p:nvSpPr>
         <p:spPr>
           <a:xfrm>
-            <a:off x="44697767" y="27054648"/>
+            <a:off x="9713818" y="21906674"/>
             <a:ext cx="926325" cy="540000"/>
           </a:xfrm>
           <a:prstGeom prst="rect">
@@ -19337,7 +18070,7 @@
         </p:nvCxnSpPr>
         <p:spPr>
           <a:xfrm rot="5400000">
-            <a:off x="45326903" y="25028342"/>
+            <a:off x="10342954" y="19880368"/>
             <a:ext cx="260819" cy="592761"/>
           </a:xfrm>
           <a:prstGeom prst="bentConnector3">
@@ -19382,7 +18115,7 @@
         </p:nvCxnSpPr>
         <p:spPr>
           <a:xfrm rot="16200000" flipH="1">
-            <a:off x="45922032" y="25025972"/>
+            <a:off x="10938083" y="19877998"/>
             <a:ext cx="260289" cy="596969"/>
           </a:xfrm>
           <a:prstGeom prst="bentConnector3">
@@ -19427,7 +18160,7 @@
         </p:nvCxnSpPr>
         <p:spPr>
           <a:xfrm rot="5400000">
-            <a:off x="45223404" y="25724601"/>
+            <a:off x="10239455" y="20576627"/>
             <a:ext cx="1060577" cy="1"/>
           </a:xfrm>
           <a:prstGeom prst="bentConnector3">
@@ -19472,7 +18205,7 @@
         </p:nvCxnSpPr>
         <p:spPr>
           <a:xfrm rot="5400000">
-            <a:off x="45327432" y="26628389"/>
+            <a:off x="10343483" y="21480415"/>
             <a:ext cx="259758" cy="592761"/>
           </a:xfrm>
           <a:prstGeom prst="bentConnector3">
@@ -19517,7 +18250,7 @@
         </p:nvCxnSpPr>
         <p:spPr>
           <a:xfrm rot="16200000" flipH="1">
-            <a:off x="45918867" y="26629714"/>
+            <a:off x="10934918" y="21481740"/>
             <a:ext cx="259758" cy="590110"/>
           </a:xfrm>
           <a:prstGeom prst="bentConnector3">
@@ -20350,7 +19083,7 @@
         </p:nvCxnSpPr>
         <p:spPr>
           <a:xfrm rot="5400000">
-            <a:off x="41110481" y="33371706"/>
+            <a:off x="7179895" y="22205326"/>
             <a:ext cx="260709" cy="624840"/>
           </a:xfrm>
           <a:prstGeom prst="bentConnector3">
@@ -20395,7 +19128,7 @@
         </p:nvCxnSpPr>
         <p:spPr>
           <a:xfrm rot="16200000" flipH="1">
-            <a:off x="40489451" y="33375516"/>
+            <a:off x="6558865" y="22209136"/>
             <a:ext cx="260709" cy="617220"/>
           </a:xfrm>
           <a:prstGeom prst="bentConnector3">
@@ -20498,15 +19231,24 @@
         </p:nvSpPr>
         <p:spPr>
           <a:xfrm>
-            <a:off x="41090092" y="34620878"/>
+            <a:off x="12392197" y="5854686"/>
             <a:ext cx="926325" cy="540000"/>
           </a:xfrm>
           <a:prstGeom prst="rect">
             <a:avLst/>
           </a:prstGeom>
-          <a:solidFill>
-            <a:schemeClr val="bg1"/>
-          </a:solidFill>
+          <a:gradFill flip="none" rotWithShape="1">
+            <a:gsLst>
+              <a:gs pos="0">
+                <a:srgbClr val="7030A0"/>
+              </a:gs>
+              <a:gs pos="100000">
+                <a:srgbClr val="FF0000"/>
+              </a:gs>
+            </a:gsLst>
+            <a:lin ang="0" scaled="1"/>
+            <a:tileRect/>
+          </a:gradFill>
           <a:ln w="19050"/>
         </p:spPr>
         <p:style>
@@ -20540,51 +19282,6 @@
           </a:p>
         </p:txBody>
       </p:sp>
-      <p:cxnSp>
-        <p:nvCxnSpPr>
-          <p:cNvPr id="359" name="Соединительная линия уступом 620">
-            <a:extLst>
-              <a:ext uri="{FF2B5EF4-FFF2-40B4-BE49-F238E27FC236}">
-                <a16:creationId xmlns:a16="http://schemas.microsoft.com/office/drawing/2014/main" id="{16F75AB0-644E-41C4-AFB9-00A7652E2F4D}"/>
-              </a:ext>
-            </a:extLst>
-          </p:cNvPr>
-          <p:cNvCxnSpPr>
-            <a:cxnSpLocks/>
-            <a:stCxn id="134" idx="2"/>
-            <a:endCxn id="358" idx="0"/>
-          </p:cNvCxnSpPr>
-          <p:nvPr/>
-        </p:nvCxnSpPr>
-        <p:spPr>
-          <a:xfrm rot="16200000" flipH="1">
-            <a:off x="41107637" y="34175259"/>
-            <a:ext cx="266397" cy="624840"/>
-          </a:xfrm>
-          <a:prstGeom prst="bentConnector3">
-            <a:avLst>
-              <a:gd name="adj1" fmla="val 50000"/>
-            </a:avLst>
-          </a:prstGeom>
-          <a:ln w="19050">
-            <a:tailEnd type="arrow"/>
-          </a:ln>
-        </p:spPr>
-        <p:style>
-          <a:lnRef idx="1">
-            <a:schemeClr val="accent1"/>
-          </a:lnRef>
-          <a:fillRef idx="0">
-            <a:schemeClr val="accent1"/>
-          </a:fillRef>
-          <a:effectRef idx="0">
-            <a:schemeClr val="accent1"/>
-          </a:effectRef>
-          <a:fontRef idx="minor">
-            <a:schemeClr val="tx1"/>
-          </a:fontRef>
-        </p:style>
-      </p:cxnSp>
       <p:cxnSp>
         <p:nvCxnSpPr>
           <p:cNvPr id="381" name="Соединительная линия уступом 620">
@@ -20689,7 +19386,7 @@
         </p:nvSpPr>
         <p:spPr>
           <a:xfrm>
-            <a:off x="45889787" y="22202848"/>
+            <a:off x="10905838" y="17054874"/>
             <a:ext cx="926325" cy="540000"/>
           </a:xfrm>
           <a:prstGeom prst="rect">
@@ -20742,7 +19439,7 @@
         </p:nvSpPr>
         <p:spPr>
           <a:xfrm>
-            <a:off x="44644589" y="22205818"/>
+            <a:off x="9660640" y="17057844"/>
             <a:ext cx="926325" cy="540000"/>
           </a:xfrm>
           <a:prstGeom prst="rect">
@@ -20805,7 +19502,7 @@
         </p:nvCxnSpPr>
         <p:spPr>
           <a:xfrm rot="5400000">
-            <a:off x="45589153" y="21443518"/>
+            <a:off x="10605204" y="16295544"/>
             <a:ext cx="280899" cy="1243700"/>
           </a:xfrm>
           <a:prstGeom prst="bentConnector3">
@@ -20850,7 +19547,7 @@
         </p:nvCxnSpPr>
         <p:spPr>
           <a:xfrm rot="16200000" flipH="1">
-            <a:off x="46213237" y="22063134"/>
+            <a:off x="11229288" y="16915160"/>
             <a:ext cx="277929" cy="1498"/>
           </a:xfrm>
           <a:prstGeom prst="bentConnector3">
@@ -20895,7 +19592,7 @@
         </p:nvCxnSpPr>
         <p:spPr>
           <a:xfrm rot="16200000" flipH="1">
-            <a:off x="44476475" y="23377095"/>
+            <a:off x="9492526" y="18229121"/>
             <a:ext cx="1908495" cy="645940"/>
           </a:xfrm>
           <a:prstGeom prst="bentConnector3">
@@ -20940,7 +19637,7 @@
         </p:nvCxnSpPr>
         <p:spPr>
           <a:xfrm rot="16200000" flipH="1">
-            <a:off x="46836356" y="22259442"/>
+            <a:off x="11852407" y="17111468"/>
             <a:ext cx="277493" cy="1244304"/>
           </a:xfrm>
           <a:prstGeom prst="bentConnector3">
@@ -20985,7 +19682,7 @@
         </p:nvCxnSpPr>
         <p:spPr>
           <a:xfrm rot="5400000">
-            <a:off x="46215404" y="22878106"/>
+            <a:off x="11231455" y="17730132"/>
             <a:ext cx="272804" cy="2288"/>
           </a:xfrm>
           <a:prstGeom prst="bentConnector3">
@@ -21030,7 +19727,7 @@
         </p:nvCxnSpPr>
         <p:spPr>
           <a:xfrm rot="5400000">
-            <a:off x="46215745" y="23690569"/>
+            <a:off x="11231796" y="18542595"/>
             <a:ext cx="269834" cy="1"/>
           </a:xfrm>
           <a:prstGeom prst="bentConnector3">
@@ -21075,7 +19772,7 @@
         </p:nvCxnSpPr>
         <p:spPr>
           <a:xfrm rot="5400000">
-            <a:off x="45907764" y="24211415"/>
+            <a:off x="10923815" y="19063441"/>
             <a:ext cx="288827" cy="596969"/>
           </a:xfrm>
           <a:prstGeom prst="bentConnector3">
@@ -21179,7 +19876,7 @@
         </p:nvSpPr>
         <p:spPr>
           <a:xfrm>
-            <a:off x="44641509" y="23026398"/>
+            <a:off x="9657560" y="17878424"/>
             <a:ext cx="926325" cy="540000"/>
           </a:xfrm>
           <a:prstGeom prst="rect">
@@ -21233,7 +19930,7 @@
         </p:nvSpPr>
         <p:spPr>
           <a:xfrm>
-            <a:off x="47134091" y="23020341"/>
+            <a:off x="12150142" y="17872367"/>
             <a:ext cx="926325" cy="540000"/>
           </a:xfrm>
           <a:prstGeom prst="rect">
@@ -21310,7 +20007,7 @@
         </p:nvSpPr>
         <p:spPr>
           <a:xfrm>
-            <a:off x="44644589" y="23842829"/>
+            <a:off x="9660640" y="18694855"/>
             <a:ext cx="926325" cy="540000"/>
           </a:xfrm>
           <a:prstGeom prst="rect">
@@ -21368,7 +20065,7 @@
         </p:nvCxnSpPr>
         <p:spPr>
           <a:xfrm rot="5400000">
-            <a:off x="45587036" y="22260484"/>
+            <a:off x="10603087" y="17112510"/>
             <a:ext cx="283550" cy="1248278"/>
           </a:xfrm>
           <a:prstGeom prst="bentConnector3">
@@ -21413,7 +20110,7 @@
         </p:nvCxnSpPr>
         <p:spPr>
           <a:xfrm rot="16200000" flipH="1">
-            <a:off x="44967997" y="23703073"/>
+            <a:off x="9984048" y="18555099"/>
             <a:ext cx="276431" cy="3080"/>
           </a:xfrm>
           <a:prstGeom prst="bentConnector3">
@@ -21454,7 +20151,7 @@
         </p:nvSpPr>
         <p:spPr>
           <a:xfrm>
-            <a:off x="47134092" y="23825485"/>
+            <a:off x="12150143" y="18677511"/>
             <a:ext cx="926325" cy="540000"/>
           </a:xfrm>
           <a:prstGeom prst="rect">
@@ -21527,7 +20224,7 @@
         </p:nvCxnSpPr>
         <p:spPr>
           <a:xfrm rot="16200000" flipH="1">
-            <a:off x="47044384" y="22051413"/>
+            <a:off x="12060435" y="16903439"/>
             <a:ext cx="1082637" cy="2465505"/>
           </a:xfrm>
           <a:prstGeom prst="bentConnector3">
@@ -21572,7 +20269,7 @@
         </p:nvCxnSpPr>
         <p:spPr>
           <a:xfrm rot="16200000" flipH="1">
-            <a:off x="47464682" y="23692912"/>
+            <a:off x="12480733" y="18544938"/>
             <a:ext cx="265144" cy="1"/>
           </a:xfrm>
           <a:prstGeom prst="bentConnector3">
@@ -21617,7 +20314,7 @@
         </p:nvCxnSpPr>
         <p:spPr>
           <a:xfrm rot="16200000" flipH="1">
-            <a:off x="47129420" y="23586727"/>
+            <a:off x="12145471" y="18438753"/>
             <a:ext cx="289356" cy="1846874"/>
           </a:xfrm>
           <a:prstGeom prst="bentConnector3">
@@ -21662,7 +20359,7 @@
         </p:nvCxnSpPr>
         <p:spPr>
           <a:xfrm rot="16200000" flipH="1">
-            <a:off x="47752717" y="24210023"/>
+            <a:off x="12768768" y="19062049"/>
             <a:ext cx="289357" cy="600280"/>
           </a:xfrm>
           <a:prstGeom prst="bentConnector3">
@@ -21703,7 +20400,7 @@
         </p:nvSpPr>
         <p:spPr>
           <a:xfrm>
-            <a:off x="47134091" y="25454602"/>
+            <a:off x="12150142" y="20306628"/>
             <a:ext cx="926325" cy="540000"/>
           </a:xfrm>
           <a:prstGeom prst="rect">
@@ -21756,7 +20453,7 @@
         </p:nvSpPr>
         <p:spPr>
           <a:xfrm>
-            <a:off x="46507714" y="26254889"/>
+            <a:off x="11523765" y="21106915"/>
             <a:ext cx="926325" cy="540000"/>
           </a:xfrm>
           <a:prstGeom prst="rect">
@@ -21813,7 +20510,7 @@
         </p:nvCxnSpPr>
         <p:spPr>
           <a:xfrm rot="5400000">
-            <a:off x="47767515" y="25024582"/>
+            <a:off x="12783566" y="19876608"/>
             <a:ext cx="259760" cy="600281"/>
           </a:xfrm>
           <a:prstGeom prst="bentConnector3">
@@ -21858,7 +20555,7 @@
         </p:nvCxnSpPr>
         <p:spPr>
           <a:xfrm rot="5400000">
-            <a:off x="47153923" y="25811557"/>
+            <a:off x="12169974" y="20663583"/>
             <a:ext cx="260287" cy="626377"/>
           </a:xfrm>
           <a:prstGeom prst="bentConnector3">
@@ -21899,7 +20596,7 @@
         </p:nvSpPr>
         <p:spPr>
           <a:xfrm>
-            <a:off x="47736149" y="26254889"/>
+            <a:off x="12752200" y="21106915"/>
             <a:ext cx="926325" cy="540000"/>
           </a:xfrm>
           <a:prstGeom prst="rect">
@@ -21961,7 +20658,7 @@
         </p:nvCxnSpPr>
         <p:spPr>
           <a:xfrm rot="16200000" flipH="1">
-            <a:off x="47768140" y="25823716"/>
+            <a:off x="12784191" y="20675742"/>
             <a:ext cx="260287" cy="602058"/>
           </a:xfrm>
           <a:prstGeom prst="bentConnector3">
@@ -22002,7 +20699,7 @@
         </p:nvSpPr>
         <p:spPr>
           <a:xfrm>
-            <a:off x="48984277" y="24648382"/>
+            <a:off x="14000328" y="19500408"/>
             <a:ext cx="926325" cy="540000"/>
           </a:xfrm>
           <a:prstGeom prst="rect">
@@ -22059,7 +20756,7 @@
         </p:nvCxnSpPr>
         <p:spPr>
           <a:xfrm rot="16200000" flipH="1">
-            <a:off x="48380899" y="23581840"/>
+            <a:off x="13396950" y="18433866"/>
             <a:ext cx="282897" cy="1850185"/>
           </a:xfrm>
           <a:prstGeom prst="bentConnector3">
@@ -22100,7 +20797,7 @@
         </p:nvSpPr>
         <p:spPr>
           <a:xfrm>
-            <a:off x="48361816" y="25471280"/>
+            <a:off x="13377867" y="20311114"/>
             <a:ext cx="926325" cy="540000"/>
           </a:xfrm>
           <a:prstGeom prst="rect">
@@ -22157,7 +20854,7 @@
         </p:nvCxnSpPr>
         <p:spPr>
           <a:xfrm flipH="1" flipV="1">
-            <a:off x="46216854" y="24924313"/>
+            <a:off x="11232905" y="19776339"/>
             <a:ext cx="1517518" cy="529"/>
           </a:xfrm>
           <a:prstGeom prst="line">
@@ -22202,8 +20899,8 @@
         </p:nvCxnSpPr>
         <p:spPr>
           <a:xfrm rot="16200000" flipH="1">
-            <a:off x="48373038" y="25019339"/>
-            <a:ext cx="276438" cy="627444"/>
+            <a:off x="13395185" y="19865269"/>
+            <a:ext cx="264246" cy="627444"/>
           </a:xfrm>
           <a:prstGeom prst="bentConnector3">
             <a:avLst>
@@ -22243,7 +20940,7 @@
         </p:nvSpPr>
         <p:spPr>
           <a:xfrm>
-            <a:off x="47736148" y="27054648"/>
+            <a:off x="12752199" y="21906674"/>
             <a:ext cx="926325" cy="540000"/>
           </a:xfrm>
           <a:prstGeom prst="rect">
@@ -22305,7 +21002,7 @@
         </p:nvCxnSpPr>
         <p:spPr>
           <a:xfrm rot="5400000">
-            <a:off x="48069433" y="26924768"/>
+            <a:off x="13085484" y="21776794"/>
             <a:ext cx="259759" cy="1"/>
           </a:xfrm>
           <a:prstGeom prst="bentConnector3">
@@ -22346,7 +21043,7 @@
         </p:nvSpPr>
         <p:spPr>
           <a:xfrm>
-            <a:off x="48984277" y="27051395"/>
+            <a:off x="14000328" y="21903421"/>
             <a:ext cx="926325" cy="540000"/>
           </a:xfrm>
           <a:prstGeom prst="rect">
@@ -22399,7 +21096,7 @@
         </p:nvSpPr>
         <p:spPr>
           <a:xfrm>
-            <a:off x="48984278" y="26254889"/>
+            <a:off x="14000329" y="21106915"/>
             <a:ext cx="926325" cy="540000"/>
           </a:xfrm>
           <a:prstGeom prst="rect">
@@ -22456,8 +21153,8 @@
         </p:nvCxnSpPr>
         <p:spPr>
           <a:xfrm rot="16200000" flipH="1">
-            <a:off x="49014406" y="25821853"/>
-            <a:ext cx="243609" cy="622462"/>
+            <a:off x="14024361" y="20667783"/>
+            <a:ext cx="255801" cy="622462"/>
           </a:xfrm>
           <a:prstGeom prst="bentConnector3">
             <a:avLst>
@@ -22501,7 +21198,7 @@
         </p:nvCxnSpPr>
         <p:spPr>
           <a:xfrm rot="16200000" flipH="1">
-            <a:off x="48914187" y="25721634"/>
+            <a:off x="13930238" y="20573660"/>
             <a:ext cx="1066507" cy="1"/>
           </a:xfrm>
           <a:prstGeom prst="bentConnector3">
@@ -22542,7 +21239,7 @@
         </p:nvSpPr>
         <p:spPr>
           <a:xfrm>
-            <a:off x="45294762" y="27921782"/>
+            <a:off x="10310813" y="22773808"/>
             <a:ext cx="926325" cy="540000"/>
           </a:xfrm>
           <a:prstGeom prst="rect">
@@ -22604,7 +21301,7 @@
         </p:nvCxnSpPr>
         <p:spPr>
           <a:xfrm rot="5400000">
-            <a:off x="49319188" y="26923142"/>
+            <a:off x="14335239" y="21775168"/>
             <a:ext cx="256506" cy="1"/>
           </a:xfrm>
           <a:prstGeom prst="bentConnector3">
@@ -22649,7 +21346,7 @@
         </p:nvCxnSpPr>
         <p:spPr>
           <a:xfrm rot="5400000">
-            <a:off x="45887296" y="27465277"/>
+            <a:off x="10903347" y="22317303"/>
             <a:ext cx="327134" cy="585876"/>
           </a:xfrm>
           <a:prstGeom prst="bentConnector3">
@@ -22694,7 +21391,7 @@
         </p:nvCxnSpPr>
         <p:spPr>
           <a:xfrm rot="16200000" flipH="1">
-            <a:off x="45295860" y="27459717"/>
+            <a:off x="10311911" y="22311743"/>
             <a:ext cx="327134" cy="596995"/>
           </a:xfrm>
           <a:prstGeom prst="bentConnector3">
@@ -22735,7 +21432,7 @@
         </p:nvSpPr>
         <p:spPr>
           <a:xfrm>
-            <a:off x="48361816" y="27921782"/>
+            <a:off x="13377867" y="22773808"/>
             <a:ext cx="926325" cy="540000"/>
           </a:xfrm>
           <a:prstGeom prst="rect">
@@ -22792,7 +21489,7 @@
         </p:nvCxnSpPr>
         <p:spPr>
           <a:xfrm rot="16200000" flipH="1">
-            <a:off x="48348578" y="27445381"/>
+            <a:off x="13364629" y="22297407"/>
             <a:ext cx="327134" cy="625668"/>
           </a:xfrm>
           <a:prstGeom prst="bentConnector3">
@@ -22837,7 +21534,7 @@
         </p:nvCxnSpPr>
         <p:spPr>
           <a:xfrm rot="5400000">
-            <a:off x="48971017" y="27445358"/>
+            <a:off x="13987068" y="22297384"/>
             <a:ext cx="330387" cy="622461"/>
           </a:xfrm>
           <a:prstGeom prst="bentConnector3">
@@ -24909,6 +23606,4528 @@
           </a:prstGeom>
           <a:ln w="19050">
             <a:prstDash val="dash"/>
+            <a:tailEnd type="arrow"/>
+          </a:ln>
+        </p:spPr>
+        <p:style>
+          <a:lnRef idx="1">
+            <a:schemeClr val="accent1"/>
+          </a:lnRef>
+          <a:fillRef idx="0">
+            <a:schemeClr val="accent1"/>
+          </a:fillRef>
+          <a:effectRef idx="0">
+            <a:schemeClr val="accent1"/>
+          </a:effectRef>
+          <a:fontRef idx="minor">
+            <a:schemeClr val="tx1"/>
+          </a:fontRef>
+        </p:style>
+      </p:cxnSp>
+      <p:sp>
+        <p:nvSpPr>
+          <p:cNvPr id="409" name="Прямоугольник 408">
+            <a:extLst>
+              <a:ext uri="{FF2B5EF4-FFF2-40B4-BE49-F238E27FC236}">
+                <a16:creationId xmlns:a16="http://schemas.microsoft.com/office/drawing/2014/main" id="{F94A8CD5-CDDE-4607-989B-0C72CA0A2183}"/>
+              </a:ext>
+            </a:extLst>
+          </p:cNvPr>
+          <p:cNvSpPr/>
+          <p:nvPr/>
+        </p:nvSpPr>
+        <p:spPr>
+          <a:xfrm>
+            <a:off x="3514511" y="8277242"/>
+            <a:ext cx="926325" cy="540000"/>
+          </a:xfrm>
+          <a:prstGeom prst="rect">
+            <a:avLst/>
+          </a:prstGeom>
+          <a:solidFill>
+            <a:schemeClr val="bg1">
+              <a:lumMod val="50000"/>
+            </a:schemeClr>
+          </a:solidFill>
+          <a:ln w="19050"/>
+        </p:spPr>
+        <p:style>
+          <a:lnRef idx="2">
+            <a:schemeClr val="accent1"/>
+          </a:lnRef>
+          <a:fillRef idx="1">
+            <a:schemeClr val="lt1"/>
+          </a:fillRef>
+          <a:effectRef idx="0">
+            <a:schemeClr val="accent1"/>
+          </a:effectRef>
+          <a:fontRef idx="minor">
+            <a:schemeClr val="dk1"/>
+          </a:fontRef>
+        </p:style>
+        <p:txBody>
+          <a:bodyPr lIns="124733" tIns="62367" rIns="124733" bIns="62367" rtlCol="0" anchor="ctr"/>
+          <a:lstStyle/>
+          <a:p>
+            <a:pPr algn="ctr"/>
+            <a:r>
+              <a:rPr lang="ru-RU" sz="700" dirty="0"/>
+              <a:t>Железнодорожная петля Танжер - Фес</a:t>
+            </a:r>
+            <a:br>
+              <a:rPr lang="ru-RU" sz="700" dirty="0"/>
+            </a:br>
+            <a:r>
+              <a:rPr lang="ru-RU" sz="100" dirty="0"/>
+              <a:t>(Исторический контекст: До войны французская колея была развита слабо. Под руководством американских инженеров снабжение между портами Атлантики и базами снабжения вглубь страны было переведено на круглосуточные </a:t>
+            </a:r>
+            <a:r>
+              <a:rPr lang="ru-RU" sz="100" dirty="0" err="1"/>
+              <a:t>рельсы.Эффекты</a:t>
+            </a:r>
+            <a:r>
+              <a:rPr lang="ru-RU" sz="100" dirty="0"/>
+              <a:t> в игре: Максимальная пропускная способность снабжения (</a:t>
+            </a:r>
+            <a:r>
+              <a:rPr lang="ru-RU" sz="100" dirty="0" err="1"/>
+              <a:t>Supply</a:t>
+            </a:r>
+            <a:r>
+              <a:rPr lang="ru-RU" sz="100" dirty="0"/>
+              <a:t> </a:t>
+            </a:r>
+            <a:r>
+              <a:rPr lang="ru-RU" sz="100" dirty="0" err="1"/>
+              <a:t>Hub</a:t>
+            </a:r>
+            <a:r>
+              <a:rPr lang="ru-RU" sz="100" dirty="0"/>
+              <a:t>) по всему Марокко. Скорость передвижения сухопутных войск в регионе \(+15\%\))</a:t>
+            </a:r>
+            <a:endParaRPr lang="ru-RU" sz="700" dirty="0"/>
+          </a:p>
+        </p:txBody>
+      </p:sp>
+      <p:sp>
+        <p:nvSpPr>
+          <p:cNvPr id="417" name="Прямоугольник 416">
+            <a:extLst>
+              <a:ext uri="{FF2B5EF4-FFF2-40B4-BE49-F238E27FC236}">
+                <a16:creationId xmlns:a16="http://schemas.microsoft.com/office/drawing/2014/main" id="{8D4076E3-5173-4E28-AAAB-8723F6E1B29D}"/>
+              </a:ext>
+            </a:extLst>
+          </p:cNvPr>
+          <p:cNvSpPr/>
+          <p:nvPr/>
+        </p:nvSpPr>
+        <p:spPr>
+          <a:xfrm>
+            <a:off x="4086253" y="9073464"/>
+            <a:ext cx="926325" cy="540000"/>
+          </a:xfrm>
+          <a:prstGeom prst="rect">
+            <a:avLst/>
+          </a:prstGeom>
+          <a:solidFill>
+            <a:schemeClr val="bg1">
+              <a:lumMod val="50000"/>
+            </a:schemeClr>
+          </a:solidFill>
+          <a:ln w="19050"/>
+        </p:spPr>
+        <p:style>
+          <a:lnRef idx="2">
+            <a:schemeClr val="accent1"/>
+          </a:lnRef>
+          <a:fillRef idx="1">
+            <a:schemeClr val="lt1"/>
+          </a:fillRef>
+          <a:effectRef idx="0">
+            <a:schemeClr val="accent1"/>
+          </a:effectRef>
+          <a:fontRef idx="minor">
+            <a:schemeClr val="dk1"/>
+          </a:fontRef>
+        </p:style>
+        <p:txBody>
+          <a:bodyPr lIns="124733" tIns="62367" rIns="124733" bIns="62367" rtlCol="0" anchor="ctr"/>
+          <a:lstStyle/>
+          <a:p>
+            <a:pPr algn="ctr"/>
+            <a:r>
+              <a:rPr lang="ru-RU" sz="700" dirty="0"/>
+              <a:t>Военные госпитали эвакуации</a:t>
+            </a:r>
+            <a:br>
+              <a:rPr lang="ru-RU" sz="700" dirty="0"/>
+            </a:br>
+            <a:r>
+              <a:rPr lang="ru-RU" sz="200" dirty="0"/>
+              <a:t>(Исторический контекст: В Марокко развернули сеть тыловых госпиталей США, которые принимали раненых с сицилийского и итальянского </a:t>
+            </a:r>
+            <a:r>
+              <a:rPr lang="ru-RU" sz="200" dirty="0" err="1"/>
+              <a:t>фронтов.Эффекты</a:t>
+            </a:r>
+            <a:r>
+              <a:rPr lang="ru-RU" sz="200" dirty="0"/>
+              <a:t> в игре: Национальный дух: Снижение безвозвратных потерь армии (</a:t>
+            </a:r>
+            <a:r>
+              <a:rPr lang="ru-RU" sz="200" dirty="0" err="1"/>
+              <a:t>Trickleback</a:t>
+            </a:r>
+            <a:r>
+              <a:rPr lang="ru-RU" sz="200" dirty="0"/>
+              <a:t>) на \(+15\%\), скорость восстановления опыта дивизий \(+10\%\)) </a:t>
+            </a:r>
+            <a:endParaRPr lang="ru-RU" sz="700" dirty="0"/>
+          </a:p>
+        </p:txBody>
+      </p:sp>
+      <p:sp>
+        <p:nvSpPr>
+          <p:cNvPr id="427" name="Прямоугольник 426">
+            <a:extLst>
+              <a:ext uri="{FF2B5EF4-FFF2-40B4-BE49-F238E27FC236}">
+                <a16:creationId xmlns:a16="http://schemas.microsoft.com/office/drawing/2014/main" id="{3D111D3C-3C2E-4B44-9FB8-2691F7F68F40}"/>
+              </a:ext>
+            </a:extLst>
+          </p:cNvPr>
+          <p:cNvSpPr/>
+          <p:nvPr/>
+        </p:nvSpPr>
+        <p:spPr>
+          <a:xfrm>
+            <a:off x="3508415" y="7448856"/>
+            <a:ext cx="926325" cy="540000"/>
+          </a:xfrm>
+          <a:prstGeom prst="rect">
+            <a:avLst/>
+          </a:prstGeom>
+          <a:solidFill>
+            <a:schemeClr val="bg1">
+              <a:lumMod val="50000"/>
+            </a:schemeClr>
+          </a:solidFill>
+          <a:ln w="19050"/>
+        </p:spPr>
+        <p:style>
+          <a:lnRef idx="2">
+            <a:schemeClr val="accent1"/>
+          </a:lnRef>
+          <a:fillRef idx="1">
+            <a:schemeClr val="lt1"/>
+          </a:fillRef>
+          <a:effectRef idx="0">
+            <a:schemeClr val="accent1"/>
+          </a:effectRef>
+          <a:fontRef idx="minor">
+            <a:schemeClr val="dk1"/>
+          </a:fontRef>
+        </p:style>
+        <p:txBody>
+          <a:bodyPr lIns="124733" tIns="62367" rIns="124733" bIns="62367" rtlCol="0" anchor="ctr"/>
+          <a:lstStyle/>
+          <a:p>
+            <a:pPr algn="ctr"/>
+            <a:r>
+              <a:rPr lang="ru-RU" sz="700" dirty="0"/>
+              <a:t>Поддержка США</a:t>
+            </a:r>
+          </a:p>
+        </p:txBody>
+      </p:sp>
+      <p:cxnSp>
+        <p:nvCxnSpPr>
+          <p:cNvPr id="433" name="Соединительная линия уступом 620">
+            <a:extLst>
+              <a:ext uri="{FF2B5EF4-FFF2-40B4-BE49-F238E27FC236}">
+                <a16:creationId xmlns:a16="http://schemas.microsoft.com/office/drawing/2014/main" id="{6EE2660D-766B-4A4B-8513-1F262155B5E7}"/>
+              </a:ext>
+            </a:extLst>
+          </p:cNvPr>
+          <p:cNvCxnSpPr>
+            <a:cxnSpLocks/>
+            <a:stCxn id="372" idx="2"/>
+            <a:endCxn id="427" idx="0"/>
+          </p:cNvCxnSpPr>
+          <p:nvPr/>
+        </p:nvCxnSpPr>
+        <p:spPr>
+          <a:xfrm rot="5400000">
+            <a:off x="3851429" y="7328705"/>
+            <a:ext cx="240301" cy="1"/>
+          </a:xfrm>
+          <a:prstGeom prst="bentConnector3">
+            <a:avLst>
+              <a:gd name="adj1" fmla="val 50000"/>
+            </a:avLst>
+          </a:prstGeom>
+          <a:ln w="19050">
+            <a:tailEnd type="arrow"/>
+          </a:ln>
+        </p:spPr>
+        <p:style>
+          <a:lnRef idx="1">
+            <a:schemeClr val="accent1"/>
+          </a:lnRef>
+          <a:fillRef idx="0">
+            <a:schemeClr val="accent1"/>
+          </a:fillRef>
+          <a:effectRef idx="0">
+            <a:schemeClr val="accent1"/>
+          </a:effectRef>
+          <a:fontRef idx="minor">
+            <a:schemeClr val="tx1"/>
+          </a:fontRef>
+        </p:style>
+      </p:cxnSp>
+      <p:cxnSp>
+        <p:nvCxnSpPr>
+          <p:cNvPr id="434" name="Соединительная линия уступом 620">
+            <a:extLst>
+              <a:ext uri="{FF2B5EF4-FFF2-40B4-BE49-F238E27FC236}">
+                <a16:creationId xmlns:a16="http://schemas.microsoft.com/office/drawing/2014/main" id="{2F6B1CB6-50E2-4B75-BFBB-E2C6E8B4DCE6}"/>
+              </a:ext>
+            </a:extLst>
+          </p:cNvPr>
+          <p:cNvCxnSpPr>
+            <a:cxnSpLocks/>
+            <a:stCxn id="427" idx="2"/>
+            <a:endCxn id="409" idx="0"/>
+          </p:cNvCxnSpPr>
+          <p:nvPr/>
+        </p:nvCxnSpPr>
+        <p:spPr>
+          <a:xfrm rot="16200000" flipH="1">
+            <a:off x="3830433" y="8130001"/>
+            <a:ext cx="288386" cy="6096"/>
+          </a:xfrm>
+          <a:prstGeom prst="bentConnector3">
+            <a:avLst>
+              <a:gd name="adj1" fmla="val 50000"/>
+            </a:avLst>
+          </a:prstGeom>
+          <a:ln w="19050">
+            <a:tailEnd type="arrow"/>
+          </a:ln>
+        </p:spPr>
+        <p:style>
+          <a:lnRef idx="1">
+            <a:schemeClr val="accent1"/>
+          </a:lnRef>
+          <a:fillRef idx="0">
+            <a:schemeClr val="accent1"/>
+          </a:fillRef>
+          <a:effectRef idx="0">
+            <a:schemeClr val="accent1"/>
+          </a:effectRef>
+          <a:fontRef idx="minor">
+            <a:schemeClr val="tx1"/>
+          </a:fontRef>
+        </p:style>
+      </p:cxnSp>
+      <p:cxnSp>
+        <p:nvCxnSpPr>
+          <p:cNvPr id="436" name="Соединительная линия уступом 620">
+            <a:extLst>
+              <a:ext uri="{FF2B5EF4-FFF2-40B4-BE49-F238E27FC236}">
+                <a16:creationId xmlns:a16="http://schemas.microsoft.com/office/drawing/2014/main" id="{593B12CD-5F29-4B60-BD55-0E6F2A16BF27}"/>
+              </a:ext>
+            </a:extLst>
+          </p:cNvPr>
+          <p:cNvCxnSpPr>
+            <a:cxnSpLocks/>
+            <a:stCxn id="427" idx="2"/>
+            <a:endCxn id="417" idx="0"/>
+          </p:cNvCxnSpPr>
+          <p:nvPr/>
+        </p:nvCxnSpPr>
+        <p:spPr>
+          <a:xfrm rot="16200000" flipH="1">
+            <a:off x="3718193" y="8242241"/>
+            <a:ext cx="1084608" cy="577838"/>
+          </a:xfrm>
+          <a:prstGeom prst="bentConnector3">
+            <a:avLst>
+              <a:gd name="adj1" fmla="val 12999"/>
+            </a:avLst>
+          </a:prstGeom>
+          <a:ln w="19050">
+            <a:tailEnd type="arrow"/>
+          </a:ln>
+        </p:spPr>
+        <p:style>
+          <a:lnRef idx="1">
+            <a:schemeClr val="accent1"/>
+          </a:lnRef>
+          <a:fillRef idx="0">
+            <a:schemeClr val="accent1"/>
+          </a:fillRef>
+          <a:effectRef idx="0">
+            <a:schemeClr val="accent1"/>
+          </a:effectRef>
+          <a:fontRef idx="minor">
+            <a:schemeClr val="tx1"/>
+          </a:fontRef>
+        </p:style>
+      </p:cxnSp>
+      <p:sp>
+        <p:nvSpPr>
+          <p:cNvPr id="442" name="Прямоугольник 441">
+            <a:extLst>
+              <a:ext uri="{FF2B5EF4-FFF2-40B4-BE49-F238E27FC236}">
+                <a16:creationId xmlns:a16="http://schemas.microsoft.com/office/drawing/2014/main" id="{558E7069-282C-4D0D-A06F-74949CAC250A}"/>
+              </a:ext>
+            </a:extLst>
+          </p:cNvPr>
+          <p:cNvSpPr/>
+          <p:nvPr/>
+        </p:nvSpPr>
+        <p:spPr>
+          <a:xfrm>
+            <a:off x="4675386" y="8269965"/>
+            <a:ext cx="926325" cy="540000"/>
+          </a:xfrm>
+          <a:prstGeom prst="rect">
+            <a:avLst/>
+          </a:prstGeom>
+          <a:solidFill>
+            <a:schemeClr val="bg1">
+              <a:lumMod val="50000"/>
+            </a:schemeClr>
+          </a:solidFill>
+          <a:ln w="19050"/>
+        </p:spPr>
+        <p:style>
+          <a:lnRef idx="2">
+            <a:schemeClr val="accent1"/>
+          </a:lnRef>
+          <a:fillRef idx="1">
+            <a:schemeClr val="lt1"/>
+          </a:fillRef>
+          <a:effectRef idx="0">
+            <a:schemeClr val="accent1"/>
+          </a:effectRef>
+          <a:fontRef idx="minor">
+            <a:schemeClr val="dk1"/>
+          </a:fontRef>
+        </p:style>
+        <p:txBody>
+          <a:bodyPr lIns="124733" tIns="62367" rIns="124733" bIns="62367" rtlCol="0" anchor="ctr"/>
+          <a:lstStyle/>
+          <a:p>
+            <a:pPr algn="ctr"/>
+            <a:r>
+              <a:rPr lang="ru-RU" sz="700" dirty="0"/>
+              <a:t>Военно-морская авиабаза Порт-</a:t>
+            </a:r>
+            <a:r>
+              <a:rPr lang="ru-RU" sz="700" dirty="0" err="1"/>
+              <a:t>Лиоте</a:t>
+            </a:r>
+            <a:br>
+              <a:rPr lang="ru-RU" sz="700" dirty="0"/>
+            </a:br>
+            <a:r>
+              <a:rPr lang="ru-RU" sz="200" dirty="0"/>
+              <a:t>(Исторический контекст: База была отбита у </a:t>
+            </a:r>
+            <a:r>
+              <a:rPr lang="ru-RU" sz="200" dirty="0" err="1"/>
+              <a:t>вишистов</a:t>
+            </a:r>
+            <a:r>
+              <a:rPr lang="ru-RU" sz="200" dirty="0"/>
+              <a:t> во время операции «Факел» и превращена в мощнейший узел авиации ВМС США. Отсюда взлетали американские «</a:t>
+            </a:r>
+            <a:r>
+              <a:rPr lang="ru-RU" sz="200" dirty="0" err="1"/>
+              <a:t>Каталины</a:t>
+            </a:r>
+            <a:r>
+              <a:rPr lang="ru-RU" sz="200" dirty="0"/>
+              <a:t>» и «</a:t>
+            </a:r>
+            <a:r>
+              <a:rPr lang="ru-RU" sz="200" dirty="0" err="1"/>
+              <a:t>Либерейторы</a:t>
+            </a:r>
+            <a:r>
+              <a:rPr lang="ru-RU" sz="200" dirty="0"/>
+              <a:t>» для охоты за немецкими субмаринами U-</a:t>
+            </a:r>
+            <a:r>
+              <a:rPr lang="ru-RU" sz="200" dirty="0" err="1"/>
+              <a:t>boat</a:t>
+            </a:r>
+            <a:r>
+              <a:rPr lang="ru-RU" sz="200" dirty="0"/>
+              <a:t> в Гибралтарском </a:t>
+            </a:r>
+            <a:r>
+              <a:rPr lang="ru-RU" sz="200" dirty="0" err="1"/>
+              <a:t>проливе.Эффекты</a:t>
+            </a:r>
+            <a:r>
+              <a:rPr lang="ru-RU" sz="200" dirty="0"/>
+              <a:t> в игре: В регионе Западное Марокко строится аэродром 5-го уровня и радар 2-го уровня. Бонус к обнаружению подлодок для всей авиации в Западных подходах \(+20\%\))</a:t>
+            </a:r>
+            <a:endParaRPr lang="ru-RU" sz="700" dirty="0"/>
+          </a:p>
+        </p:txBody>
+      </p:sp>
+      <p:cxnSp>
+        <p:nvCxnSpPr>
+          <p:cNvPr id="443" name="Соединительная линия уступом 620">
+            <a:extLst>
+              <a:ext uri="{FF2B5EF4-FFF2-40B4-BE49-F238E27FC236}">
+                <a16:creationId xmlns:a16="http://schemas.microsoft.com/office/drawing/2014/main" id="{6DC2BB2F-54F8-4A05-ACB6-FC77D8E80346}"/>
+              </a:ext>
+            </a:extLst>
+          </p:cNvPr>
+          <p:cNvCxnSpPr>
+            <a:cxnSpLocks/>
+            <a:stCxn id="427" idx="2"/>
+            <a:endCxn id="442" idx="0"/>
+          </p:cNvCxnSpPr>
+          <p:nvPr/>
+        </p:nvCxnSpPr>
+        <p:spPr>
+          <a:xfrm rot="16200000" flipH="1">
+            <a:off x="4414509" y="7545924"/>
+            <a:ext cx="281109" cy="1166971"/>
+          </a:xfrm>
+          <a:prstGeom prst="bentConnector3">
+            <a:avLst>
+              <a:gd name="adj1" fmla="val 50000"/>
+            </a:avLst>
+          </a:prstGeom>
+          <a:ln w="19050">
+            <a:tailEnd type="arrow"/>
+          </a:ln>
+        </p:spPr>
+        <p:style>
+          <a:lnRef idx="1">
+            <a:schemeClr val="accent1"/>
+          </a:lnRef>
+          <a:fillRef idx="0">
+            <a:schemeClr val="accent1"/>
+          </a:fillRef>
+          <a:effectRef idx="0">
+            <a:schemeClr val="accent1"/>
+          </a:effectRef>
+          <a:fontRef idx="minor">
+            <a:schemeClr val="tx1"/>
+          </a:fontRef>
+        </p:style>
+      </p:cxnSp>
+      <p:cxnSp>
+        <p:nvCxnSpPr>
+          <p:cNvPr id="444" name="Соединительная линия уступом 620">
+            <a:extLst>
+              <a:ext uri="{FF2B5EF4-FFF2-40B4-BE49-F238E27FC236}">
+                <a16:creationId xmlns:a16="http://schemas.microsoft.com/office/drawing/2014/main" id="{413DC653-93E2-404F-B9A6-2F1EB8C5C198}"/>
+              </a:ext>
+            </a:extLst>
+          </p:cNvPr>
+          <p:cNvCxnSpPr>
+            <a:cxnSpLocks/>
+            <a:stCxn id="370" idx="2"/>
+            <a:endCxn id="442" idx="0"/>
+          </p:cNvCxnSpPr>
+          <p:nvPr/>
+        </p:nvCxnSpPr>
+        <p:spPr>
+          <a:xfrm rot="5400000">
+            <a:off x="5301635" y="7837541"/>
+            <a:ext cx="269338" cy="595510"/>
+          </a:xfrm>
+          <a:prstGeom prst="bentConnector3">
+            <a:avLst>
+              <a:gd name="adj1" fmla="val 50000"/>
+            </a:avLst>
+          </a:prstGeom>
+          <a:ln w="19050">
+            <a:tailEnd type="arrow"/>
+          </a:ln>
+        </p:spPr>
+        <p:style>
+          <a:lnRef idx="1">
+            <a:schemeClr val="accent1"/>
+          </a:lnRef>
+          <a:fillRef idx="0">
+            <a:schemeClr val="accent1"/>
+          </a:fillRef>
+          <a:effectRef idx="0">
+            <a:schemeClr val="accent1"/>
+          </a:effectRef>
+          <a:fontRef idx="minor">
+            <a:schemeClr val="tx1"/>
+          </a:fontRef>
+        </p:style>
+      </p:cxnSp>
+      <p:sp>
+        <p:nvSpPr>
+          <p:cNvPr id="447" name="Прямоугольник 446">
+            <a:extLst>
+              <a:ext uri="{FF2B5EF4-FFF2-40B4-BE49-F238E27FC236}">
+                <a16:creationId xmlns:a16="http://schemas.microsoft.com/office/drawing/2014/main" id="{B0F75998-AA54-4F32-B805-812B3D0FE1D3}"/>
+              </a:ext>
+            </a:extLst>
+          </p:cNvPr>
+          <p:cNvSpPr/>
+          <p:nvPr/>
+        </p:nvSpPr>
+        <p:spPr>
+          <a:xfrm>
+            <a:off x="17688637" y="5844111"/>
+            <a:ext cx="926325" cy="540000"/>
+          </a:xfrm>
+          <a:prstGeom prst="rect">
+            <a:avLst/>
+          </a:prstGeom>
+          <a:solidFill>
+            <a:srgbClr val="FF0000"/>
+          </a:solidFill>
+          <a:ln w="19050"/>
+        </p:spPr>
+        <p:style>
+          <a:lnRef idx="2">
+            <a:schemeClr val="accent1"/>
+          </a:lnRef>
+          <a:fillRef idx="1">
+            <a:schemeClr val="lt1"/>
+          </a:fillRef>
+          <a:effectRef idx="0">
+            <a:schemeClr val="accent1"/>
+          </a:effectRef>
+          <a:fontRef idx="minor">
+            <a:schemeClr val="dk1"/>
+          </a:fontRef>
+        </p:style>
+        <p:txBody>
+          <a:bodyPr lIns="124733" tIns="62367" rIns="124733" bIns="62367" rtlCol="0" anchor="ctr"/>
+          <a:lstStyle/>
+          <a:p>
+            <a:pPr algn="ctr"/>
+            <a:r>
+              <a:rPr lang="ru-RU" sz="700" dirty="0"/>
+              <a:t>Национализация банков</a:t>
+            </a:r>
+          </a:p>
+        </p:txBody>
+      </p:sp>
+      <p:sp>
+        <p:nvSpPr>
+          <p:cNvPr id="449" name="Прямоугольник 448">
+            <a:extLst>
+              <a:ext uri="{FF2B5EF4-FFF2-40B4-BE49-F238E27FC236}">
+                <a16:creationId xmlns:a16="http://schemas.microsoft.com/office/drawing/2014/main" id="{5CE1941D-08BE-4787-8655-E09661F81408}"/>
+              </a:ext>
+            </a:extLst>
+          </p:cNvPr>
+          <p:cNvSpPr/>
+          <p:nvPr/>
+        </p:nvSpPr>
+        <p:spPr>
+          <a:xfrm>
+            <a:off x="16506944" y="9077610"/>
+            <a:ext cx="926325" cy="540000"/>
+          </a:xfrm>
+          <a:prstGeom prst="rect">
+            <a:avLst/>
+          </a:prstGeom>
+          <a:solidFill>
+            <a:srgbClr val="FF0000"/>
+          </a:solidFill>
+          <a:ln w="19050"/>
+        </p:spPr>
+        <p:style>
+          <a:lnRef idx="2">
+            <a:schemeClr val="accent1"/>
+          </a:lnRef>
+          <a:fillRef idx="1">
+            <a:schemeClr val="lt1"/>
+          </a:fillRef>
+          <a:effectRef idx="0">
+            <a:schemeClr val="accent1"/>
+          </a:effectRef>
+          <a:fontRef idx="minor">
+            <a:schemeClr val="dk1"/>
+          </a:fontRef>
+        </p:style>
+        <p:txBody>
+          <a:bodyPr lIns="124733" tIns="62367" rIns="124733" bIns="62367" rtlCol="0" anchor="ctr"/>
+          <a:lstStyle/>
+          <a:p>
+            <a:pPr algn="ctr"/>
+            <a:r>
+              <a:rPr lang="ru-RU" sz="700" dirty="0"/>
+              <a:t>Повышение уровня жизни населения</a:t>
+            </a:r>
+          </a:p>
+        </p:txBody>
+      </p:sp>
+      <p:sp>
+        <p:nvSpPr>
+          <p:cNvPr id="452" name="Прямоугольник 451">
+            <a:extLst>
+              <a:ext uri="{FF2B5EF4-FFF2-40B4-BE49-F238E27FC236}">
+                <a16:creationId xmlns:a16="http://schemas.microsoft.com/office/drawing/2014/main" id="{C1BA60D6-76AC-482A-A00A-454B8631DDB7}"/>
+              </a:ext>
+            </a:extLst>
+          </p:cNvPr>
+          <p:cNvSpPr/>
+          <p:nvPr/>
+        </p:nvSpPr>
+        <p:spPr>
+          <a:xfrm>
+            <a:off x="14124393" y="8305947"/>
+            <a:ext cx="926325" cy="540000"/>
+          </a:xfrm>
+          <a:prstGeom prst="rect">
+            <a:avLst/>
+          </a:prstGeom>
+          <a:solidFill>
+            <a:srgbClr val="FF0000"/>
+          </a:solidFill>
+          <a:ln w="19050"/>
+        </p:spPr>
+        <p:style>
+          <a:lnRef idx="2">
+            <a:schemeClr val="accent1"/>
+          </a:lnRef>
+          <a:fillRef idx="1">
+            <a:schemeClr val="lt1"/>
+          </a:fillRef>
+          <a:effectRef idx="0">
+            <a:schemeClr val="accent1"/>
+          </a:effectRef>
+          <a:fontRef idx="minor">
+            <a:schemeClr val="dk1"/>
+          </a:fontRef>
+        </p:style>
+        <p:txBody>
+          <a:bodyPr lIns="124733" tIns="62367" rIns="124733" bIns="62367" rtlCol="0" anchor="ctr"/>
+          <a:lstStyle/>
+          <a:p>
+            <a:pPr algn="ctr"/>
+            <a:r>
+              <a:rPr lang="ru-RU" sz="700" dirty="0" err="1"/>
+              <a:t>Мароккансая</a:t>
+            </a:r>
+            <a:r>
+              <a:rPr lang="ru-RU" sz="700" dirty="0"/>
+              <a:t> молодёжная коммунистическая партия</a:t>
+            </a:r>
+          </a:p>
+        </p:txBody>
+      </p:sp>
+      <p:sp>
+        <p:nvSpPr>
+          <p:cNvPr id="453" name="Прямоугольник 452">
+            <a:extLst>
+              <a:ext uri="{FF2B5EF4-FFF2-40B4-BE49-F238E27FC236}">
+                <a16:creationId xmlns:a16="http://schemas.microsoft.com/office/drawing/2014/main" id="{E8ED2674-4FC5-4881-BA08-77010A80A3AA}"/>
+              </a:ext>
+            </a:extLst>
+          </p:cNvPr>
+          <p:cNvSpPr/>
+          <p:nvPr/>
+        </p:nvSpPr>
+        <p:spPr>
+          <a:xfrm>
+            <a:off x="16491703" y="11593266"/>
+            <a:ext cx="926325" cy="540000"/>
+          </a:xfrm>
+          <a:prstGeom prst="rect">
+            <a:avLst/>
+          </a:prstGeom>
+          <a:solidFill>
+            <a:srgbClr val="FF0000"/>
+          </a:solidFill>
+          <a:ln w="19050"/>
+        </p:spPr>
+        <p:style>
+          <a:lnRef idx="2">
+            <a:schemeClr val="accent1"/>
+          </a:lnRef>
+          <a:fillRef idx="1">
+            <a:schemeClr val="lt1"/>
+          </a:fillRef>
+          <a:effectRef idx="0">
+            <a:schemeClr val="accent1"/>
+          </a:effectRef>
+          <a:fontRef idx="minor">
+            <a:schemeClr val="dk1"/>
+          </a:fontRef>
+        </p:style>
+        <p:txBody>
+          <a:bodyPr lIns="124733" tIns="62367" rIns="124733" bIns="62367" rtlCol="0" anchor="ctr"/>
+          <a:lstStyle/>
+          <a:p>
+            <a:pPr algn="ctr"/>
+            <a:r>
+              <a:rPr lang="ru-RU" sz="600" dirty="0"/>
+              <a:t>Продвигать арабо-мусульманскую марокканскую национальную идентичность</a:t>
+            </a:r>
+            <a:br>
+              <a:rPr lang="ru-RU" sz="100" dirty="0"/>
+            </a:br>
+            <a:r>
+              <a:rPr lang="ru-RU" sz="100" dirty="0"/>
+              <a:t>В ходе своего выступления Султан утверждал, что для победы над фашизмом необходимо «единство французского и марокканского народов, независимо от религии, которое является частным и личным».136 Действительно, Султан однажды заявил, что в Коране нет ничего, что препятствовало бы мусульманам участвовать в коммунистической или профсоюзной деятельности, потому что, в конце концов, «в 600 году Сиди Мухаммад не думал ни о Всеобщей конфедерации труда, ни о Коммунистической партии»)</a:t>
+            </a:r>
+            <a:endParaRPr lang="ru-RU" sz="600" dirty="0"/>
+          </a:p>
+        </p:txBody>
+      </p:sp>
+      <p:sp>
+        <p:nvSpPr>
+          <p:cNvPr id="454" name="Прямоугольник 453">
+            <a:extLst>
+              <a:ext uri="{FF2B5EF4-FFF2-40B4-BE49-F238E27FC236}">
+                <a16:creationId xmlns:a16="http://schemas.microsoft.com/office/drawing/2014/main" id="{A16A72A1-4D21-4526-A383-B4ACAA398993}"/>
+              </a:ext>
+            </a:extLst>
+          </p:cNvPr>
+          <p:cNvSpPr/>
+          <p:nvPr/>
+        </p:nvSpPr>
+        <p:spPr>
+          <a:xfrm>
+            <a:off x="16501863" y="13270370"/>
+            <a:ext cx="926325" cy="540000"/>
+          </a:xfrm>
+          <a:prstGeom prst="rect">
+            <a:avLst/>
+          </a:prstGeom>
+          <a:solidFill>
+            <a:srgbClr val="FF0000"/>
+          </a:solidFill>
+          <a:ln w="19050"/>
+        </p:spPr>
+        <p:style>
+          <a:lnRef idx="2">
+            <a:schemeClr val="accent1"/>
+          </a:lnRef>
+          <a:fillRef idx="1">
+            <a:schemeClr val="lt1"/>
+          </a:fillRef>
+          <a:effectRef idx="0">
+            <a:schemeClr val="accent1"/>
+          </a:effectRef>
+          <a:fontRef idx="minor">
+            <a:schemeClr val="dk1"/>
+          </a:fontRef>
+        </p:style>
+        <p:txBody>
+          <a:bodyPr lIns="124733" tIns="62367" rIns="124733" bIns="62367" rtlCol="0" anchor="ctr"/>
+          <a:lstStyle/>
+          <a:p>
+            <a:pPr algn="ctr"/>
+            <a:r>
+              <a:rPr lang="ru-RU" sz="700" dirty="0"/>
+              <a:t>Идеальное Марокко</a:t>
+            </a:r>
+            <a:br>
+              <a:rPr lang="ru-RU" sz="700" dirty="0"/>
+            </a:br>
+            <a:r>
+              <a:rPr lang="ru-RU" sz="300" dirty="0"/>
+              <a:t>(Марокканские еврейские коммунисты боролись за идеализированное Марокко, которое так и не воплотилось в жизнь.)</a:t>
+            </a:r>
+            <a:endParaRPr lang="ru-RU" sz="700" dirty="0"/>
+          </a:p>
+        </p:txBody>
+      </p:sp>
+      <p:sp>
+        <p:nvSpPr>
+          <p:cNvPr id="456" name="Прямоугольник 455">
+            <a:extLst>
+              <a:ext uri="{FF2B5EF4-FFF2-40B4-BE49-F238E27FC236}">
+                <a16:creationId xmlns:a16="http://schemas.microsoft.com/office/drawing/2014/main" id="{A9E2206B-36B0-4366-A016-75A2CE7F86BD}"/>
+              </a:ext>
+            </a:extLst>
+          </p:cNvPr>
+          <p:cNvSpPr/>
+          <p:nvPr/>
+        </p:nvSpPr>
+        <p:spPr>
+          <a:xfrm>
+            <a:off x="18883030" y="6639955"/>
+            <a:ext cx="926325" cy="540000"/>
+          </a:xfrm>
+          <a:prstGeom prst="rect">
+            <a:avLst/>
+          </a:prstGeom>
+          <a:solidFill>
+            <a:srgbClr val="FF0000"/>
+          </a:solidFill>
+          <a:ln w="19050"/>
+        </p:spPr>
+        <p:style>
+          <a:lnRef idx="2">
+            <a:schemeClr val="accent1"/>
+          </a:lnRef>
+          <a:fillRef idx="1">
+            <a:schemeClr val="lt1"/>
+          </a:fillRef>
+          <a:effectRef idx="0">
+            <a:schemeClr val="accent1"/>
+          </a:effectRef>
+          <a:fontRef idx="minor">
+            <a:schemeClr val="dk1"/>
+          </a:fontRef>
+        </p:style>
+        <p:txBody>
+          <a:bodyPr lIns="124733" tIns="62367" rIns="124733" bIns="62367" rtlCol="0" anchor="ctr"/>
+          <a:lstStyle/>
+          <a:p>
+            <a:pPr algn="ctr"/>
+            <a:r>
+              <a:rPr lang="ru-RU" sz="700" dirty="0"/>
+              <a:t>Легализовать Антифашистский комитет</a:t>
+            </a:r>
+            <a:br>
+              <a:rPr lang="ru-RU" sz="700" dirty="0"/>
+            </a:br>
+            <a:r>
+              <a:rPr lang="ru-RU" sz="100" dirty="0"/>
+              <a:t>(В июне 1935 года в Марокко был создан официальный «Антифашистский комитет», члены которого уже предпринимали значительные действия. Будучи предшественником Марокканского народного фронта (официально основанного в марте 1936 года), Антифашистский комитет включал в себя многочисленные организации «</a:t>
+            </a:r>
+            <a:r>
+              <a:rPr lang="ru-RU" sz="100" dirty="0" err="1"/>
+              <a:t>Амикале</a:t>
+            </a:r>
+            <a:r>
+              <a:rPr lang="ru-RU" sz="100" dirty="0"/>
+              <a:t>» и профессиональные федерации, созданные европейцами до того, как было разрешено создание профсоюзов, Марокканскую федерацию Лиги за права человека, Федерацию борцов за мир, SFIO и Молодежную социалистическую организацию, Федерацию республиканских борцов, секции группы «Свободная мысль», группу «Друзья СССР» и другие левые организации, которые чиновники протектората назвали «экстремистскими». К комитету также присоединились видные деятели марокканских мусульманских националистических организаций, в том числе Хасан </a:t>
+            </a:r>
+            <a:r>
+              <a:rPr lang="ru-RU" sz="100" dirty="0" err="1"/>
+              <a:t>Уаззани</a:t>
+            </a:r>
+            <a:r>
+              <a:rPr lang="ru-RU" sz="100" dirty="0"/>
+              <a:t>, Мухаммад </a:t>
+            </a:r>
+            <a:r>
+              <a:rPr lang="ru-RU" sz="100" dirty="0" err="1"/>
+              <a:t>Холти</a:t>
+            </a:r>
+            <a:r>
+              <a:rPr lang="ru-RU" sz="100" dirty="0"/>
+              <a:t>, Омар бен </a:t>
+            </a:r>
+            <a:r>
+              <a:rPr lang="ru-RU" sz="100" dirty="0" err="1"/>
+              <a:t>Абдельджелил</a:t>
+            </a:r>
+            <a:r>
+              <a:rPr lang="ru-RU" sz="100" dirty="0"/>
+              <a:t>, Ахмед </a:t>
+            </a:r>
+            <a:r>
+              <a:rPr lang="ru-RU" sz="100" dirty="0" err="1"/>
+              <a:t>Балафредж</a:t>
+            </a:r>
+            <a:r>
+              <a:rPr lang="ru-RU" sz="100" dirty="0"/>
+              <a:t>, Мухаммад аль-</a:t>
+            </a:r>
+            <a:r>
+              <a:rPr lang="ru-RU" sz="100" dirty="0" err="1"/>
+              <a:t>Фасси</a:t>
+            </a:r>
+            <a:r>
+              <a:rPr lang="ru-RU" sz="100" dirty="0"/>
+              <a:t> и Ахмед </a:t>
+            </a:r>
+            <a:r>
+              <a:rPr lang="ru-RU" sz="100" dirty="0" err="1"/>
+              <a:t>Уаззани</a:t>
+            </a:r>
+            <a:r>
+              <a:rPr lang="ru-RU" sz="100" dirty="0"/>
+              <a:t>. Представитель ведомства подверг критике европейские правительства за их «слабость» и инертность перед лицом коммунистической и революционной активности в Северной Африке, жалуясь на то, что «все используется» в революционных целях, от антисемитизма до «очевидного неравенства между расами». Он предупредил, что такие тенденции, если их не остановить, приведут к «психическому заражению» и «ненависти» среди колониальных подданных Французской Северной Африки к Франции, их «защитнику». Несмотря на все попытки предотвратить левую </a:t>
+            </a:r>
+            <a:r>
+              <a:rPr lang="ru-RU" sz="100" dirty="0" err="1"/>
+              <a:t>марокканско</a:t>
+            </a:r>
+            <a:r>
+              <a:rPr lang="ru-RU" sz="100" dirty="0"/>
+              <a:t>-европейскую солидарность и мусульманско-еврейскую организацию, власти Французского протектората с растущей тревогой отмечали быстрый рост числа марокканских евреев и мусульман среди членов таких организаций, как «Друзья СССР» и других «радикальных» организаций европейского происхождения.111)</a:t>
+            </a:r>
+            <a:endParaRPr lang="ru-RU" sz="700" dirty="0"/>
+          </a:p>
+        </p:txBody>
+      </p:sp>
+      <p:sp>
+        <p:nvSpPr>
+          <p:cNvPr id="457" name="Прямоугольник 456">
+            <a:extLst>
+              <a:ext uri="{FF2B5EF4-FFF2-40B4-BE49-F238E27FC236}">
+                <a16:creationId xmlns:a16="http://schemas.microsoft.com/office/drawing/2014/main" id="{400071D4-0AE7-4BD3-BDEC-D359A88C0B61}"/>
+              </a:ext>
+            </a:extLst>
+          </p:cNvPr>
+          <p:cNvSpPr/>
+          <p:nvPr/>
+        </p:nvSpPr>
+        <p:spPr>
+          <a:xfrm>
+            <a:off x="16493728" y="10754714"/>
+            <a:ext cx="926325" cy="540000"/>
+          </a:xfrm>
+          <a:prstGeom prst="rect">
+            <a:avLst/>
+          </a:prstGeom>
+          <a:solidFill>
+            <a:srgbClr val="FF0000"/>
+          </a:solidFill>
+          <a:ln w="19050"/>
+        </p:spPr>
+        <p:style>
+          <a:lnRef idx="2">
+            <a:schemeClr val="accent1"/>
+          </a:lnRef>
+          <a:fillRef idx="1">
+            <a:schemeClr val="lt1"/>
+          </a:fillRef>
+          <a:effectRef idx="0">
+            <a:schemeClr val="accent1"/>
+          </a:effectRef>
+          <a:fontRef idx="minor">
+            <a:schemeClr val="dk1"/>
+          </a:fontRef>
+        </p:style>
+        <p:txBody>
+          <a:bodyPr lIns="124733" tIns="62367" rIns="124733" bIns="62367" rtlCol="0" anchor="ctr"/>
+          <a:lstStyle/>
+          <a:p>
+            <a:pPr algn="ctr"/>
+            <a:r>
+              <a:rPr lang="ru-RU" sz="700" dirty="0"/>
+              <a:t>Поддержка </a:t>
+            </a:r>
+            <a:r>
+              <a:rPr lang="ru-RU" sz="700" dirty="0" err="1"/>
+              <a:t>нац</a:t>
+            </a:r>
+            <a:r>
+              <a:rPr lang="ru-RU" sz="700" dirty="0"/>
+              <a:t> меньшинств</a:t>
+            </a:r>
+          </a:p>
+        </p:txBody>
+      </p:sp>
+      <p:sp>
+        <p:nvSpPr>
+          <p:cNvPr id="459" name="Прямоугольник 458">
+            <a:extLst>
+              <a:ext uri="{FF2B5EF4-FFF2-40B4-BE49-F238E27FC236}">
+                <a16:creationId xmlns:a16="http://schemas.microsoft.com/office/drawing/2014/main" id="{09264916-28B5-459C-9A21-1DAA5E36DA13}"/>
+              </a:ext>
+            </a:extLst>
+          </p:cNvPr>
+          <p:cNvSpPr/>
+          <p:nvPr/>
+        </p:nvSpPr>
+        <p:spPr>
+          <a:xfrm>
+            <a:off x="15899439" y="12431818"/>
+            <a:ext cx="926325" cy="540000"/>
+          </a:xfrm>
+          <a:prstGeom prst="rect">
+            <a:avLst/>
+          </a:prstGeom>
+          <a:solidFill>
+            <a:srgbClr val="FF0000"/>
+          </a:solidFill>
+          <a:ln w="19050"/>
+        </p:spPr>
+        <p:style>
+          <a:lnRef idx="2">
+            <a:schemeClr val="accent1"/>
+          </a:lnRef>
+          <a:fillRef idx="1">
+            <a:schemeClr val="lt1"/>
+          </a:fillRef>
+          <a:effectRef idx="0">
+            <a:schemeClr val="accent1"/>
+          </a:effectRef>
+          <a:fontRef idx="minor">
+            <a:schemeClr val="dk1"/>
+          </a:fontRef>
+        </p:style>
+        <p:txBody>
+          <a:bodyPr lIns="124733" tIns="62367" rIns="124733" bIns="62367" rtlCol="0" anchor="ctr"/>
+          <a:lstStyle/>
+          <a:p>
+            <a:pPr algn="ctr"/>
+            <a:r>
+              <a:rPr lang="ru-RU" sz="700" dirty="0"/>
+              <a:t>Предложить Израилю объединиться</a:t>
+            </a:r>
+          </a:p>
+        </p:txBody>
+      </p:sp>
+      <p:sp>
+        <p:nvSpPr>
+          <p:cNvPr id="460" name="Прямоугольник 459">
+            <a:extLst>
+              <a:ext uri="{FF2B5EF4-FFF2-40B4-BE49-F238E27FC236}">
+                <a16:creationId xmlns:a16="http://schemas.microsoft.com/office/drawing/2014/main" id="{0EA75BDB-B6D7-432C-916F-4F73C1D348D0}"/>
+              </a:ext>
+            </a:extLst>
+          </p:cNvPr>
+          <p:cNvSpPr/>
+          <p:nvPr/>
+        </p:nvSpPr>
+        <p:spPr>
+          <a:xfrm>
+            <a:off x="17087318" y="12434913"/>
+            <a:ext cx="926325" cy="540000"/>
+          </a:xfrm>
+          <a:prstGeom prst="rect">
+            <a:avLst/>
+          </a:prstGeom>
+          <a:solidFill>
+            <a:srgbClr val="FF0000"/>
+          </a:solidFill>
+          <a:ln w="19050"/>
+        </p:spPr>
+        <p:style>
+          <a:lnRef idx="2">
+            <a:schemeClr val="accent1"/>
+          </a:lnRef>
+          <a:fillRef idx="1">
+            <a:schemeClr val="lt1"/>
+          </a:fillRef>
+          <a:effectRef idx="0">
+            <a:schemeClr val="accent1"/>
+          </a:effectRef>
+          <a:fontRef idx="minor">
+            <a:schemeClr val="dk1"/>
+          </a:fontRef>
+        </p:style>
+        <p:txBody>
+          <a:bodyPr lIns="124733" tIns="62367" rIns="124733" bIns="62367" rtlCol="0" anchor="ctr"/>
+          <a:lstStyle/>
+          <a:p>
+            <a:pPr algn="ctr"/>
+            <a:r>
+              <a:rPr lang="ru-RU" sz="700" dirty="0"/>
+              <a:t>Освободить Святую землю</a:t>
+            </a:r>
+          </a:p>
+        </p:txBody>
+      </p:sp>
+      <p:sp>
+        <p:nvSpPr>
+          <p:cNvPr id="461" name="Прямоугольник 460">
+            <a:extLst>
+              <a:ext uri="{FF2B5EF4-FFF2-40B4-BE49-F238E27FC236}">
+                <a16:creationId xmlns:a16="http://schemas.microsoft.com/office/drawing/2014/main" id="{82D94EEE-15DE-4B9E-A9F6-F24B5C818A61}"/>
+              </a:ext>
+            </a:extLst>
+          </p:cNvPr>
+          <p:cNvSpPr/>
+          <p:nvPr/>
+        </p:nvSpPr>
+        <p:spPr>
+          <a:xfrm>
+            <a:off x="17693717" y="13270370"/>
+            <a:ext cx="926325" cy="540000"/>
+          </a:xfrm>
+          <a:prstGeom prst="rect">
+            <a:avLst/>
+          </a:prstGeom>
+          <a:solidFill>
+            <a:srgbClr val="FF0000"/>
+          </a:solidFill>
+          <a:ln w="19050"/>
+        </p:spPr>
+        <p:style>
+          <a:lnRef idx="2">
+            <a:schemeClr val="accent1"/>
+          </a:lnRef>
+          <a:fillRef idx="1">
+            <a:schemeClr val="lt1"/>
+          </a:fillRef>
+          <a:effectRef idx="0">
+            <a:schemeClr val="accent1"/>
+          </a:effectRef>
+          <a:fontRef idx="minor">
+            <a:schemeClr val="dk1"/>
+          </a:fontRef>
+        </p:style>
+        <p:txBody>
+          <a:bodyPr lIns="124733" tIns="62367" rIns="124733" bIns="62367" rtlCol="0" anchor="ctr"/>
+          <a:lstStyle/>
+          <a:p>
+            <a:pPr algn="ctr"/>
+            <a:r>
+              <a:rPr lang="ru-RU" sz="700" dirty="0"/>
+              <a:t>Связи с мировыми сионистскими движениями</a:t>
+            </a:r>
+            <a:br>
+              <a:rPr lang="ru-RU" sz="700" dirty="0"/>
+            </a:br>
+            <a:r>
+              <a:rPr lang="ru-RU" sz="200" dirty="0"/>
+              <a:t>(быстрый рост числа марокканских евреев и мусульман среди членов таких организаций, как «Друзья СССР» и других «радикальных» организаций европейского происхождения.)</a:t>
+            </a:r>
+            <a:endParaRPr lang="ru-RU" sz="700" dirty="0"/>
+          </a:p>
+        </p:txBody>
+      </p:sp>
+      <p:sp>
+        <p:nvSpPr>
+          <p:cNvPr id="462" name="Прямоугольник 461">
+            <a:extLst>
+              <a:ext uri="{FF2B5EF4-FFF2-40B4-BE49-F238E27FC236}">
+                <a16:creationId xmlns:a16="http://schemas.microsoft.com/office/drawing/2014/main" id="{074A91A3-FDD6-45FB-B9F8-A16E806C5E50}"/>
+              </a:ext>
+            </a:extLst>
+          </p:cNvPr>
+          <p:cNvSpPr/>
+          <p:nvPr/>
+        </p:nvSpPr>
+        <p:spPr>
+          <a:xfrm>
+            <a:off x="15309318" y="10754714"/>
+            <a:ext cx="926325" cy="540000"/>
+          </a:xfrm>
+          <a:prstGeom prst="rect">
+            <a:avLst/>
+          </a:prstGeom>
+          <a:solidFill>
+            <a:srgbClr val="FF0000"/>
+          </a:solidFill>
+          <a:ln w="19050"/>
+        </p:spPr>
+        <p:style>
+          <a:lnRef idx="2">
+            <a:schemeClr val="accent1"/>
+          </a:lnRef>
+          <a:fillRef idx="1">
+            <a:schemeClr val="lt1"/>
+          </a:fillRef>
+          <a:effectRef idx="0">
+            <a:schemeClr val="accent1"/>
+          </a:effectRef>
+          <a:fontRef idx="minor">
+            <a:schemeClr val="dk1"/>
+          </a:fontRef>
+        </p:style>
+        <p:txBody>
+          <a:bodyPr lIns="124733" tIns="62367" rIns="124733" bIns="62367" rtlCol="0" anchor="ctr"/>
+          <a:lstStyle/>
+          <a:p>
+            <a:pPr algn="ctr"/>
+            <a:r>
+              <a:rPr lang="ru-RU" sz="700" dirty="0"/>
+              <a:t>Привлечь испанских беженцев</a:t>
+            </a:r>
+          </a:p>
+        </p:txBody>
+      </p:sp>
+      <p:sp>
+        <p:nvSpPr>
+          <p:cNvPr id="467" name="Прямоугольник 466">
+            <a:extLst>
+              <a:ext uri="{FF2B5EF4-FFF2-40B4-BE49-F238E27FC236}">
+                <a16:creationId xmlns:a16="http://schemas.microsoft.com/office/drawing/2014/main" id="{CB0A795A-6556-4388-9326-2B1D5C99B424}"/>
+              </a:ext>
+            </a:extLst>
+          </p:cNvPr>
+          <p:cNvSpPr/>
+          <p:nvPr/>
+        </p:nvSpPr>
+        <p:spPr>
+          <a:xfrm>
+            <a:off x="16496783" y="9916162"/>
+            <a:ext cx="926325" cy="540000"/>
+          </a:xfrm>
+          <a:prstGeom prst="rect">
+            <a:avLst/>
+          </a:prstGeom>
+          <a:solidFill>
+            <a:srgbClr val="FF0000"/>
+          </a:solidFill>
+          <a:ln w="19050"/>
+        </p:spPr>
+        <p:style>
+          <a:lnRef idx="2">
+            <a:schemeClr val="accent1"/>
+          </a:lnRef>
+          <a:fillRef idx="1">
+            <a:schemeClr val="lt1"/>
+          </a:fillRef>
+          <a:effectRef idx="0">
+            <a:schemeClr val="accent1"/>
+          </a:effectRef>
+          <a:fontRef idx="minor">
+            <a:schemeClr val="dk1"/>
+          </a:fontRef>
+        </p:style>
+        <p:txBody>
+          <a:bodyPr lIns="124733" tIns="62367" rIns="124733" bIns="62367" rtlCol="0" anchor="ctr"/>
+          <a:lstStyle/>
+          <a:p>
+            <a:pPr algn="ctr"/>
+            <a:r>
+              <a:rPr lang="ru-RU" sz="700" dirty="0"/>
+              <a:t>Активная поддержка интернационализма</a:t>
+            </a:r>
+          </a:p>
+        </p:txBody>
+      </p:sp>
+      <p:sp>
+        <p:nvSpPr>
+          <p:cNvPr id="469" name="Прямоугольник 468">
+            <a:extLst>
+              <a:ext uri="{FF2B5EF4-FFF2-40B4-BE49-F238E27FC236}">
+                <a16:creationId xmlns:a16="http://schemas.microsoft.com/office/drawing/2014/main" id="{A0FE13A0-495E-411D-906E-F3A66E09A857}"/>
+              </a:ext>
+            </a:extLst>
+          </p:cNvPr>
+          <p:cNvSpPr/>
+          <p:nvPr/>
+        </p:nvSpPr>
+        <p:spPr>
+          <a:xfrm>
+            <a:off x="17690014" y="10754714"/>
+            <a:ext cx="926325" cy="540000"/>
+          </a:xfrm>
+          <a:prstGeom prst="rect">
+            <a:avLst/>
+          </a:prstGeom>
+          <a:solidFill>
+            <a:srgbClr val="FF0000"/>
+          </a:solidFill>
+          <a:ln w="19050"/>
+        </p:spPr>
+        <p:style>
+          <a:lnRef idx="2">
+            <a:schemeClr val="accent1"/>
+          </a:lnRef>
+          <a:fillRef idx="1">
+            <a:schemeClr val="lt1"/>
+          </a:fillRef>
+          <a:effectRef idx="0">
+            <a:schemeClr val="accent1"/>
+          </a:effectRef>
+          <a:fontRef idx="minor">
+            <a:schemeClr val="dk1"/>
+          </a:fontRef>
+        </p:style>
+        <p:txBody>
+          <a:bodyPr lIns="124733" tIns="62367" rIns="124733" bIns="62367" rtlCol="0" anchor="ctr"/>
+          <a:lstStyle/>
+          <a:p>
+            <a:pPr algn="ctr"/>
+            <a:r>
+              <a:rPr lang="ru-RU" sz="700" dirty="0"/>
+              <a:t>Поддерживать всеобщие права человека</a:t>
+            </a:r>
+          </a:p>
+        </p:txBody>
+      </p:sp>
+      <p:sp>
+        <p:nvSpPr>
+          <p:cNvPr id="470" name="Прямоугольник 469">
+            <a:extLst>
+              <a:ext uri="{FF2B5EF4-FFF2-40B4-BE49-F238E27FC236}">
+                <a16:creationId xmlns:a16="http://schemas.microsoft.com/office/drawing/2014/main" id="{EE9C3761-85EE-4A6D-A59B-A63F7E66CDE1}"/>
+              </a:ext>
+            </a:extLst>
+          </p:cNvPr>
+          <p:cNvSpPr/>
+          <p:nvPr/>
+        </p:nvSpPr>
+        <p:spPr>
+          <a:xfrm>
+            <a:off x="18270119" y="7466525"/>
+            <a:ext cx="926325" cy="540000"/>
+          </a:xfrm>
+          <a:prstGeom prst="rect">
+            <a:avLst/>
+          </a:prstGeom>
+          <a:solidFill>
+            <a:srgbClr val="FF0000"/>
+          </a:solidFill>
+          <a:ln w="19050"/>
+        </p:spPr>
+        <p:style>
+          <a:lnRef idx="2">
+            <a:schemeClr val="accent1"/>
+          </a:lnRef>
+          <a:fillRef idx="1">
+            <a:schemeClr val="lt1"/>
+          </a:fillRef>
+          <a:effectRef idx="0">
+            <a:schemeClr val="accent1"/>
+          </a:effectRef>
+          <a:fontRef idx="minor">
+            <a:schemeClr val="dk1"/>
+          </a:fontRef>
+        </p:style>
+        <p:txBody>
+          <a:bodyPr lIns="124733" tIns="62367" rIns="124733" bIns="62367" rtlCol="0" anchor="ctr"/>
+          <a:lstStyle/>
+          <a:p>
+            <a:pPr algn="ctr"/>
+            <a:r>
+              <a:rPr lang="ru-RU" sz="700" dirty="0"/>
+              <a:t>Прекратить вопиющую эксплуатацию женщин</a:t>
+            </a:r>
+          </a:p>
+        </p:txBody>
+      </p:sp>
+      <p:sp>
+        <p:nvSpPr>
+          <p:cNvPr id="472" name="Прямоугольник 471">
+            <a:extLst>
+              <a:ext uri="{FF2B5EF4-FFF2-40B4-BE49-F238E27FC236}">
+                <a16:creationId xmlns:a16="http://schemas.microsoft.com/office/drawing/2014/main" id="{6E9F1647-F412-4B77-A2E3-7F643FCC3DBD}"/>
+              </a:ext>
+            </a:extLst>
+          </p:cNvPr>
+          <p:cNvSpPr/>
+          <p:nvPr/>
+        </p:nvSpPr>
+        <p:spPr>
+          <a:xfrm>
+            <a:off x="14126730" y="6628497"/>
+            <a:ext cx="926325" cy="540000"/>
+          </a:xfrm>
+          <a:prstGeom prst="rect">
+            <a:avLst/>
+          </a:prstGeom>
+          <a:solidFill>
+            <a:srgbClr val="FF0000"/>
+          </a:solidFill>
+          <a:ln w="19050"/>
+        </p:spPr>
+        <p:style>
+          <a:lnRef idx="2">
+            <a:schemeClr val="accent1"/>
+          </a:lnRef>
+          <a:fillRef idx="1">
+            <a:schemeClr val="lt1"/>
+          </a:fillRef>
+          <a:effectRef idx="0">
+            <a:schemeClr val="accent1"/>
+          </a:effectRef>
+          <a:fontRef idx="minor">
+            <a:schemeClr val="dk1"/>
+          </a:fontRef>
+        </p:style>
+        <p:txBody>
+          <a:bodyPr lIns="124733" tIns="62367" rIns="124733" bIns="62367" rtlCol="0" anchor="ctr"/>
+          <a:lstStyle/>
+          <a:p>
+            <a:pPr algn="ctr"/>
+            <a:r>
+              <a:rPr lang="ru-RU" sz="700" dirty="0"/>
+              <a:t>Коммунистические ассоциации </a:t>
+            </a:r>
+            <a:r>
+              <a:rPr lang="ru-RU" sz="300" dirty="0"/>
+              <a:t>(создав в 1945 году «Коммунистические ассоциации» (</a:t>
+            </a:r>
+            <a:r>
+              <a:rPr lang="ru-RU" sz="300" dirty="0" err="1"/>
+              <a:t>Amicales</a:t>
+            </a:r>
+            <a:r>
+              <a:rPr lang="ru-RU" sz="300" dirty="0"/>
+              <a:t> </a:t>
+            </a:r>
+            <a:r>
+              <a:rPr lang="ru-RU" sz="300" dirty="0" err="1"/>
+              <a:t>Communistes</a:t>
+            </a:r>
+            <a:r>
+              <a:rPr lang="ru-RU" sz="300" dirty="0"/>
+              <a:t>) с целью вербовки в сельской местности.)</a:t>
+            </a:r>
+            <a:endParaRPr lang="ru-RU" sz="700" dirty="0"/>
+          </a:p>
+        </p:txBody>
+      </p:sp>
+      <p:sp>
+        <p:nvSpPr>
+          <p:cNvPr id="474" name="Прямоугольник 473">
+            <a:extLst>
+              <a:ext uri="{FF2B5EF4-FFF2-40B4-BE49-F238E27FC236}">
+                <a16:creationId xmlns:a16="http://schemas.microsoft.com/office/drawing/2014/main" id="{7CCBFDA2-886A-4C3B-A834-114B4FFE7251}"/>
+              </a:ext>
+            </a:extLst>
+          </p:cNvPr>
+          <p:cNvSpPr/>
+          <p:nvPr/>
+        </p:nvSpPr>
+        <p:spPr>
+          <a:xfrm>
+            <a:off x="18880490" y="8320016"/>
+            <a:ext cx="926325" cy="540000"/>
+          </a:xfrm>
+          <a:prstGeom prst="rect">
+            <a:avLst/>
+          </a:prstGeom>
+          <a:solidFill>
+            <a:srgbClr val="FF0000"/>
+          </a:solidFill>
+          <a:ln w="19050"/>
+        </p:spPr>
+        <p:style>
+          <a:lnRef idx="2">
+            <a:schemeClr val="accent1"/>
+          </a:lnRef>
+          <a:fillRef idx="1">
+            <a:schemeClr val="lt1"/>
+          </a:fillRef>
+          <a:effectRef idx="0">
+            <a:schemeClr val="accent1"/>
+          </a:effectRef>
+          <a:fontRef idx="minor">
+            <a:schemeClr val="dk1"/>
+          </a:fontRef>
+        </p:style>
+        <p:txBody>
+          <a:bodyPr lIns="124733" tIns="62367" rIns="124733" bIns="62367" rtlCol="0" anchor="ctr"/>
+          <a:lstStyle/>
+          <a:p>
+            <a:pPr algn="ctr"/>
+            <a:r>
+              <a:rPr lang="ru-RU" sz="700" dirty="0"/>
+              <a:t>Союзом женщин Марокко</a:t>
+            </a:r>
+            <a:br>
+              <a:rPr lang="ru-RU" sz="700" dirty="0"/>
+            </a:br>
+            <a:r>
+              <a:rPr lang="ru-RU" sz="200" dirty="0"/>
+              <a:t>(во главе с мадам Фортуне Султан (женой Леона Султана), </a:t>
+            </a:r>
+            <a:r>
+              <a:rPr lang="ru-RU" sz="200" dirty="0" err="1"/>
+              <a:t>Люсетт</a:t>
+            </a:r>
+            <a:r>
+              <a:rPr lang="ru-RU" sz="200" dirty="0"/>
+              <a:t> </a:t>
+            </a:r>
+            <a:r>
+              <a:rPr lang="ru-RU" sz="200" dirty="0" err="1"/>
+              <a:t>Мазелла</a:t>
+            </a:r>
+            <a:r>
+              <a:rPr lang="ru-RU" sz="200" dirty="0"/>
+              <a:t> (женой Мишеля </a:t>
+            </a:r>
+            <a:r>
+              <a:rPr lang="ru-RU" sz="200" dirty="0" err="1"/>
+              <a:t>Мазеллы</a:t>
+            </a:r>
+            <a:r>
+              <a:rPr lang="ru-RU" sz="200" dirty="0"/>
+              <a:t>) и </a:t>
+            </a:r>
+            <a:r>
+              <a:rPr lang="ru-RU" sz="200" dirty="0" err="1"/>
+              <a:t>Фреей</a:t>
+            </a:r>
+            <a:r>
+              <a:rPr lang="ru-RU" sz="200" dirty="0"/>
+              <a:t> </a:t>
+            </a:r>
+            <a:r>
+              <a:rPr lang="ru-RU" sz="200" dirty="0" err="1"/>
+              <a:t>Айаш</a:t>
+            </a:r>
+            <a:r>
+              <a:rPr lang="ru-RU" sz="200" dirty="0"/>
+              <a:t> (женой </a:t>
+            </a:r>
+            <a:r>
+              <a:rPr lang="ru-RU" sz="200" dirty="0" err="1"/>
+              <a:t>Жермена</a:t>
+            </a:r>
+            <a:r>
+              <a:rPr lang="ru-RU" sz="200" dirty="0"/>
+              <a:t> </a:t>
+            </a:r>
+            <a:r>
+              <a:rPr lang="ru-RU" sz="200" dirty="0" err="1"/>
+              <a:t>Айаша</a:t>
+            </a:r>
+            <a:r>
+              <a:rPr lang="ru-RU" sz="200" dirty="0"/>
+              <a:t>, марокканской еврейкой из Сале) — работали с «</a:t>
+            </a:r>
+            <a:r>
+              <a:rPr lang="ru-RU" sz="200" dirty="0" err="1"/>
+              <a:t>Амикалес</a:t>
+            </a:r>
+            <a:r>
+              <a:rPr lang="ru-RU" sz="200" dirty="0"/>
+              <a:t>» над расширением вербовки как в городских, так и в сельских общинах.)</a:t>
+            </a:r>
+            <a:endParaRPr lang="ru-RU" sz="700" dirty="0"/>
+          </a:p>
+        </p:txBody>
+      </p:sp>
+      <p:sp>
+        <p:nvSpPr>
+          <p:cNvPr id="475" name="Прямоугольник 474">
+            <a:extLst>
+              <a:ext uri="{FF2B5EF4-FFF2-40B4-BE49-F238E27FC236}">
+                <a16:creationId xmlns:a16="http://schemas.microsoft.com/office/drawing/2014/main" id="{F3614565-66FF-43E4-A9C0-09A7111CF91B}"/>
+              </a:ext>
+            </a:extLst>
+          </p:cNvPr>
+          <p:cNvSpPr/>
+          <p:nvPr/>
+        </p:nvSpPr>
+        <p:spPr>
+          <a:xfrm>
+            <a:off x="16494244" y="6640229"/>
+            <a:ext cx="926325" cy="540000"/>
+          </a:xfrm>
+          <a:prstGeom prst="rect">
+            <a:avLst/>
+          </a:prstGeom>
+          <a:solidFill>
+            <a:srgbClr val="FF0000"/>
+          </a:solidFill>
+          <a:ln w="19050"/>
+        </p:spPr>
+        <p:style>
+          <a:lnRef idx="2">
+            <a:schemeClr val="accent1"/>
+          </a:lnRef>
+          <a:fillRef idx="1">
+            <a:schemeClr val="lt1"/>
+          </a:fillRef>
+          <a:effectRef idx="0">
+            <a:schemeClr val="accent1"/>
+          </a:effectRef>
+          <a:fontRef idx="minor">
+            <a:schemeClr val="dk1"/>
+          </a:fontRef>
+        </p:style>
+        <p:txBody>
+          <a:bodyPr lIns="124733" tIns="62367" rIns="124733" bIns="62367" rtlCol="0" anchor="ctr"/>
+          <a:lstStyle/>
+          <a:p>
+            <a:pPr algn="ctr"/>
+            <a:r>
+              <a:rPr lang="ru-RU" sz="700" dirty="0"/>
+              <a:t>Программы повышения грамотности</a:t>
+            </a:r>
+            <a:br>
+              <a:rPr lang="ru-RU" sz="700" dirty="0"/>
+            </a:br>
+            <a:r>
+              <a:rPr lang="ru-RU" sz="100" dirty="0"/>
+              <a:t>(Помимо не совсем эффективных программ повышения грамотности, проводимых МКМ, участие в деятельности МКМ само по себе представляло собой своего рода «школу», как писал Саймон Леви.&lt;</a:t>
+            </a:r>
+            <a:r>
+              <a:rPr lang="ru-RU" sz="100" dirty="0" err="1"/>
+              <a:t>sup</a:t>
+            </a:r>
+            <a:r>
+              <a:rPr lang="ru-RU" sz="100" dirty="0"/>
+              <a:t>&gt;167&lt;/</a:t>
+            </a:r>
+            <a:r>
+              <a:rPr lang="ru-RU" sz="100" dirty="0" err="1"/>
+              <a:t>sup</a:t>
+            </a:r>
+            <a:r>
+              <a:rPr lang="ru-RU" sz="100" dirty="0"/>
+              <a:t>&gt; Леви писал: «Для многих евреев [МКМ] была плавильным котлом солидарности в борьбе. Демократический призыв после войны привел в движение скрытые силы. Когда независимость стала конкретной целью, МКМ предложила четкие ответы для меньшинств и вовлекла их в трудовую и политическую деятельность».)</a:t>
+            </a:r>
+            <a:endParaRPr lang="ru-RU" sz="700" dirty="0"/>
+          </a:p>
+        </p:txBody>
+      </p:sp>
+      <p:sp>
+        <p:nvSpPr>
+          <p:cNvPr id="478" name="Прямоугольник 477">
+            <a:extLst>
+              <a:ext uri="{FF2B5EF4-FFF2-40B4-BE49-F238E27FC236}">
+                <a16:creationId xmlns:a16="http://schemas.microsoft.com/office/drawing/2014/main" id="{87B8F8F9-1B80-41A2-B2AC-7511FE35B053}"/>
+              </a:ext>
+            </a:extLst>
+          </p:cNvPr>
+          <p:cNvSpPr/>
+          <p:nvPr/>
+        </p:nvSpPr>
+        <p:spPr>
+          <a:xfrm>
+            <a:off x="18880490" y="5844109"/>
+            <a:ext cx="926325" cy="540000"/>
+          </a:xfrm>
+          <a:prstGeom prst="rect">
+            <a:avLst/>
+          </a:prstGeom>
+          <a:solidFill>
+            <a:srgbClr val="FF0000"/>
+          </a:solidFill>
+          <a:ln w="19050"/>
+        </p:spPr>
+        <p:style>
+          <a:lnRef idx="2">
+            <a:schemeClr val="accent1"/>
+          </a:lnRef>
+          <a:fillRef idx="1">
+            <a:schemeClr val="lt1"/>
+          </a:fillRef>
+          <a:effectRef idx="0">
+            <a:schemeClr val="accent1"/>
+          </a:effectRef>
+          <a:fontRef idx="minor">
+            <a:schemeClr val="dk1"/>
+          </a:fontRef>
+        </p:style>
+        <p:txBody>
+          <a:bodyPr lIns="124733" tIns="62367" rIns="124733" bIns="62367" rtlCol="0" anchor="ctr"/>
+          <a:lstStyle/>
+          <a:p>
+            <a:pPr algn="ctr"/>
+            <a:r>
+              <a:rPr lang="ru-RU" sz="700" dirty="0"/>
+              <a:t>Принять французских беженцев</a:t>
+            </a:r>
+          </a:p>
+        </p:txBody>
+      </p:sp>
+      <p:cxnSp>
+        <p:nvCxnSpPr>
+          <p:cNvPr id="479" name="Соединительная линия уступом 620">
+            <a:extLst>
+              <a:ext uri="{FF2B5EF4-FFF2-40B4-BE49-F238E27FC236}">
+                <a16:creationId xmlns:a16="http://schemas.microsoft.com/office/drawing/2014/main" id="{98560C68-CEA5-4F2F-B43B-A9BC34BD1102}"/>
+              </a:ext>
+            </a:extLst>
+          </p:cNvPr>
+          <p:cNvCxnSpPr>
+            <a:cxnSpLocks/>
+            <a:stCxn id="231" idx="2"/>
+            <a:endCxn id="215" idx="0"/>
+          </p:cNvCxnSpPr>
+          <p:nvPr/>
+        </p:nvCxnSpPr>
+        <p:spPr>
+          <a:xfrm rot="16200000" flipH="1">
+            <a:off x="15052649" y="5117344"/>
+            <a:ext cx="263529" cy="1193716"/>
+          </a:xfrm>
+          <a:prstGeom prst="bentConnector3">
+            <a:avLst>
+              <a:gd name="adj1" fmla="val 50000"/>
+            </a:avLst>
+          </a:prstGeom>
+          <a:ln w="19050">
+            <a:prstDash val="dash"/>
+            <a:tailEnd type="arrow"/>
+          </a:ln>
+        </p:spPr>
+        <p:style>
+          <a:lnRef idx="1">
+            <a:schemeClr val="accent1"/>
+          </a:lnRef>
+          <a:fillRef idx="0">
+            <a:schemeClr val="accent1"/>
+          </a:fillRef>
+          <a:effectRef idx="0">
+            <a:schemeClr val="accent1"/>
+          </a:effectRef>
+          <a:fontRef idx="minor">
+            <a:schemeClr val="tx1"/>
+          </a:fontRef>
+        </p:style>
+      </p:cxnSp>
+      <p:cxnSp>
+        <p:nvCxnSpPr>
+          <p:cNvPr id="482" name="Соединительная линия уступом 620">
+            <a:extLst>
+              <a:ext uri="{FF2B5EF4-FFF2-40B4-BE49-F238E27FC236}">
+                <a16:creationId xmlns:a16="http://schemas.microsoft.com/office/drawing/2014/main" id="{7294AAD0-0FD1-43C8-B469-906C5EA921AB}"/>
+              </a:ext>
+            </a:extLst>
+          </p:cNvPr>
+          <p:cNvCxnSpPr>
+            <a:cxnSpLocks/>
+            <a:stCxn id="229" idx="2"/>
+            <a:endCxn id="447" idx="0"/>
+          </p:cNvCxnSpPr>
+          <p:nvPr/>
+        </p:nvCxnSpPr>
+        <p:spPr>
+          <a:xfrm rot="5400000">
+            <a:off x="18621976" y="5114875"/>
+            <a:ext cx="259061" cy="1199411"/>
+          </a:xfrm>
+          <a:prstGeom prst="bentConnector3">
+            <a:avLst>
+              <a:gd name="adj1" fmla="val 50000"/>
+            </a:avLst>
+          </a:prstGeom>
+          <a:ln w="19050">
+            <a:prstDash val="dash"/>
+            <a:tailEnd type="arrow"/>
+          </a:ln>
+        </p:spPr>
+        <p:style>
+          <a:lnRef idx="1">
+            <a:schemeClr val="accent1"/>
+          </a:lnRef>
+          <a:fillRef idx="0">
+            <a:schemeClr val="accent1"/>
+          </a:fillRef>
+          <a:effectRef idx="0">
+            <a:schemeClr val="accent1"/>
+          </a:effectRef>
+          <a:fontRef idx="minor">
+            <a:schemeClr val="tx1"/>
+          </a:fontRef>
+        </p:style>
+      </p:cxnSp>
+      <p:cxnSp>
+        <p:nvCxnSpPr>
+          <p:cNvPr id="483" name="Соединительная линия уступом 620">
+            <a:extLst>
+              <a:ext uri="{FF2B5EF4-FFF2-40B4-BE49-F238E27FC236}">
+                <a16:creationId xmlns:a16="http://schemas.microsoft.com/office/drawing/2014/main" id="{69DFD40F-7A77-4675-8435-0E943B9818CF}"/>
+              </a:ext>
+            </a:extLst>
+          </p:cNvPr>
+          <p:cNvCxnSpPr>
+            <a:cxnSpLocks/>
+            <a:stCxn id="447" idx="2"/>
+            <a:endCxn id="475" idx="0"/>
+          </p:cNvCxnSpPr>
+          <p:nvPr/>
+        </p:nvCxnSpPr>
+        <p:spPr>
+          <a:xfrm rot="5400000">
+            <a:off x="17426545" y="5914974"/>
+            <a:ext cx="256118" cy="1194393"/>
+          </a:xfrm>
+          <a:prstGeom prst="bentConnector3">
+            <a:avLst>
+              <a:gd name="adj1" fmla="val 50000"/>
+            </a:avLst>
+          </a:prstGeom>
+          <a:ln w="19050">
+            <a:tailEnd type="arrow"/>
+          </a:ln>
+        </p:spPr>
+        <p:style>
+          <a:lnRef idx="1">
+            <a:schemeClr val="accent1"/>
+          </a:lnRef>
+          <a:fillRef idx="0">
+            <a:schemeClr val="accent1"/>
+          </a:fillRef>
+          <a:effectRef idx="0">
+            <a:schemeClr val="accent1"/>
+          </a:effectRef>
+          <a:fontRef idx="minor">
+            <a:schemeClr val="tx1"/>
+          </a:fontRef>
+        </p:style>
+      </p:cxnSp>
+      <p:cxnSp>
+        <p:nvCxnSpPr>
+          <p:cNvPr id="484" name="Соединительная линия уступом 620">
+            <a:extLst>
+              <a:ext uri="{FF2B5EF4-FFF2-40B4-BE49-F238E27FC236}">
+                <a16:creationId xmlns:a16="http://schemas.microsoft.com/office/drawing/2014/main" id="{E5D476AA-1A04-497F-A84C-8B24048ABCFD}"/>
+              </a:ext>
+            </a:extLst>
+          </p:cNvPr>
+          <p:cNvCxnSpPr>
+            <a:cxnSpLocks/>
+            <a:stCxn id="215" idx="2"/>
+            <a:endCxn id="219" idx="0"/>
+          </p:cNvCxnSpPr>
+          <p:nvPr/>
+        </p:nvCxnSpPr>
+        <p:spPr>
+          <a:xfrm rot="5400000">
+            <a:off x="15658204" y="6509034"/>
+            <a:ext cx="246135" cy="1"/>
+          </a:xfrm>
+          <a:prstGeom prst="bentConnector3">
+            <a:avLst>
+              <a:gd name="adj1" fmla="val 50000"/>
+            </a:avLst>
+          </a:prstGeom>
+          <a:ln w="19050">
+            <a:tailEnd type="arrow"/>
+          </a:ln>
+        </p:spPr>
+        <p:style>
+          <a:lnRef idx="1">
+            <a:schemeClr val="accent1"/>
+          </a:lnRef>
+          <a:fillRef idx="0">
+            <a:schemeClr val="accent1"/>
+          </a:fillRef>
+          <a:effectRef idx="0">
+            <a:schemeClr val="accent1"/>
+          </a:effectRef>
+          <a:fontRef idx="minor">
+            <a:schemeClr val="tx1"/>
+          </a:fontRef>
+        </p:style>
+      </p:cxnSp>
+      <p:cxnSp>
+        <p:nvCxnSpPr>
+          <p:cNvPr id="485" name="Соединительная линия уступом 620">
+            <a:extLst>
+              <a:ext uri="{FF2B5EF4-FFF2-40B4-BE49-F238E27FC236}">
+                <a16:creationId xmlns:a16="http://schemas.microsoft.com/office/drawing/2014/main" id="{A11EE601-D377-4053-9856-66E2957DD134}"/>
+              </a:ext>
+            </a:extLst>
+          </p:cNvPr>
+          <p:cNvCxnSpPr>
+            <a:cxnSpLocks/>
+            <a:stCxn id="215" idx="2"/>
+            <a:endCxn id="472" idx="0"/>
+          </p:cNvCxnSpPr>
+          <p:nvPr/>
+        </p:nvCxnSpPr>
+        <p:spPr>
+          <a:xfrm rot="5400000">
+            <a:off x="15064317" y="5911543"/>
+            <a:ext cx="242530" cy="1191378"/>
+          </a:xfrm>
+          <a:prstGeom prst="bentConnector3">
+            <a:avLst>
+              <a:gd name="adj1" fmla="val 50000"/>
+            </a:avLst>
+          </a:prstGeom>
+          <a:ln w="19050">
+            <a:tailEnd type="arrow"/>
+          </a:ln>
+        </p:spPr>
+        <p:style>
+          <a:lnRef idx="1">
+            <a:schemeClr val="accent1"/>
+          </a:lnRef>
+          <a:fillRef idx="0">
+            <a:schemeClr val="accent1"/>
+          </a:fillRef>
+          <a:effectRef idx="0">
+            <a:schemeClr val="accent1"/>
+          </a:effectRef>
+          <a:fontRef idx="minor">
+            <a:schemeClr val="tx1"/>
+          </a:fontRef>
+        </p:style>
+      </p:cxnSp>
+      <p:cxnSp>
+        <p:nvCxnSpPr>
+          <p:cNvPr id="486" name="Соединительная линия уступом 620">
+            <a:extLst>
+              <a:ext uri="{FF2B5EF4-FFF2-40B4-BE49-F238E27FC236}">
+                <a16:creationId xmlns:a16="http://schemas.microsoft.com/office/drawing/2014/main" id="{103F8ECF-F1D5-4944-9E9B-C99E3A1A44AC}"/>
+              </a:ext>
+            </a:extLst>
+          </p:cNvPr>
+          <p:cNvCxnSpPr>
+            <a:cxnSpLocks/>
+            <a:stCxn id="219" idx="2"/>
+            <a:endCxn id="250" idx="0"/>
+          </p:cNvCxnSpPr>
+          <p:nvPr/>
+        </p:nvCxnSpPr>
+        <p:spPr>
+          <a:xfrm rot="5400000">
+            <a:off x="15326843" y="7019829"/>
+            <a:ext cx="302155" cy="606701"/>
+          </a:xfrm>
+          <a:prstGeom prst="bentConnector3">
+            <a:avLst>
+              <a:gd name="adj1" fmla="val 50000"/>
+            </a:avLst>
+          </a:prstGeom>
+          <a:ln w="19050">
+            <a:tailEnd type="arrow"/>
+          </a:ln>
+        </p:spPr>
+        <p:style>
+          <a:lnRef idx="1">
+            <a:schemeClr val="accent1"/>
+          </a:lnRef>
+          <a:fillRef idx="0">
+            <a:schemeClr val="accent1"/>
+          </a:fillRef>
+          <a:effectRef idx="0">
+            <a:schemeClr val="accent1"/>
+          </a:effectRef>
+          <a:fontRef idx="minor">
+            <a:schemeClr val="tx1"/>
+          </a:fontRef>
+        </p:style>
+      </p:cxnSp>
+      <p:cxnSp>
+        <p:nvCxnSpPr>
+          <p:cNvPr id="487" name="Соединительная линия уступом 620">
+            <a:extLst>
+              <a:ext uri="{FF2B5EF4-FFF2-40B4-BE49-F238E27FC236}">
+                <a16:creationId xmlns:a16="http://schemas.microsoft.com/office/drawing/2014/main" id="{D4B80950-8155-4084-8E34-082B98922699}"/>
+              </a:ext>
+            </a:extLst>
+          </p:cNvPr>
+          <p:cNvCxnSpPr>
+            <a:cxnSpLocks/>
+            <a:stCxn id="219" idx="2"/>
+            <a:endCxn id="270" idx="0"/>
+          </p:cNvCxnSpPr>
+          <p:nvPr/>
+        </p:nvCxnSpPr>
+        <p:spPr>
+          <a:xfrm rot="16200000" flipH="1">
+            <a:off x="15208129" y="7745242"/>
+            <a:ext cx="1147915" cy="1633"/>
+          </a:xfrm>
+          <a:prstGeom prst="bentConnector3">
+            <a:avLst>
+              <a:gd name="adj1" fmla="val 50000"/>
+            </a:avLst>
+          </a:prstGeom>
+          <a:ln w="19050">
+            <a:tailEnd type="arrow"/>
+          </a:ln>
+        </p:spPr>
+        <p:style>
+          <a:lnRef idx="1">
+            <a:schemeClr val="accent1"/>
+          </a:lnRef>
+          <a:fillRef idx="0">
+            <a:schemeClr val="accent1"/>
+          </a:fillRef>
+          <a:effectRef idx="0">
+            <a:schemeClr val="accent1"/>
+          </a:effectRef>
+          <a:fontRef idx="minor">
+            <a:schemeClr val="tx1"/>
+          </a:fontRef>
+        </p:style>
+      </p:cxnSp>
+      <p:cxnSp>
+        <p:nvCxnSpPr>
+          <p:cNvPr id="488" name="Соединительная линия уступом 620">
+            <a:extLst>
+              <a:ext uri="{FF2B5EF4-FFF2-40B4-BE49-F238E27FC236}">
+                <a16:creationId xmlns:a16="http://schemas.microsoft.com/office/drawing/2014/main" id="{A68C80CE-2CAB-4ADC-9C54-E26116F6EBC4}"/>
+              </a:ext>
+            </a:extLst>
+          </p:cNvPr>
+          <p:cNvCxnSpPr>
+            <a:cxnSpLocks/>
+            <a:stCxn id="475" idx="2"/>
+            <a:endCxn id="257" idx="0"/>
+          </p:cNvCxnSpPr>
+          <p:nvPr/>
+        </p:nvCxnSpPr>
+        <p:spPr>
+          <a:xfrm rot="5400000">
+            <a:off x="16512991" y="7029841"/>
+            <a:ext cx="294028" cy="594804"/>
+          </a:xfrm>
+          <a:prstGeom prst="bentConnector3">
+            <a:avLst>
+              <a:gd name="adj1" fmla="val 50000"/>
+            </a:avLst>
+          </a:prstGeom>
+          <a:ln w="19050">
+            <a:tailEnd type="arrow"/>
+          </a:ln>
+        </p:spPr>
+        <p:style>
+          <a:lnRef idx="1">
+            <a:schemeClr val="accent1"/>
+          </a:lnRef>
+          <a:fillRef idx="0">
+            <a:schemeClr val="accent1"/>
+          </a:fillRef>
+          <a:effectRef idx="0">
+            <a:schemeClr val="accent1"/>
+          </a:effectRef>
+          <a:fontRef idx="minor">
+            <a:schemeClr val="tx1"/>
+          </a:fontRef>
+        </p:style>
+      </p:cxnSp>
+      <p:cxnSp>
+        <p:nvCxnSpPr>
+          <p:cNvPr id="490" name="Соединительная линия уступом 620">
+            <a:extLst>
+              <a:ext uri="{FF2B5EF4-FFF2-40B4-BE49-F238E27FC236}">
+                <a16:creationId xmlns:a16="http://schemas.microsoft.com/office/drawing/2014/main" id="{8193FEB3-3195-4F87-B110-408DF9F3DCEC}"/>
+              </a:ext>
+            </a:extLst>
+          </p:cNvPr>
+          <p:cNvCxnSpPr>
+            <a:cxnSpLocks/>
+            <a:stCxn id="475" idx="2"/>
+            <a:endCxn id="253" idx="0"/>
+          </p:cNvCxnSpPr>
+          <p:nvPr/>
+        </p:nvCxnSpPr>
+        <p:spPr>
+          <a:xfrm rot="16200000" flipH="1">
+            <a:off x="16393194" y="7744441"/>
+            <a:ext cx="1136045" cy="7619"/>
+          </a:xfrm>
+          <a:prstGeom prst="bentConnector3">
+            <a:avLst>
+              <a:gd name="adj1" fmla="val 50000"/>
+            </a:avLst>
+          </a:prstGeom>
+          <a:ln w="19050">
+            <a:tailEnd type="arrow"/>
+          </a:ln>
+        </p:spPr>
+        <p:style>
+          <a:lnRef idx="1">
+            <a:schemeClr val="accent1"/>
+          </a:lnRef>
+          <a:fillRef idx="0">
+            <a:schemeClr val="accent1"/>
+          </a:fillRef>
+          <a:effectRef idx="0">
+            <a:schemeClr val="accent1"/>
+          </a:effectRef>
+          <a:fontRef idx="minor">
+            <a:schemeClr val="tx1"/>
+          </a:fontRef>
+        </p:style>
+      </p:cxnSp>
+      <p:cxnSp>
+        <p:nvCxnSpPr>
+          <p:cNvPr id="491" name="Соединительная линия уступом 620">
+            <a:extLst>
+              <a:ext uri="{FF2B5EF4-FFF2-40B4-BE49-F238E27FC236}">
+                <a16:creationId xmlns:a16="http://schemas.microsoft.com/office/drawing/2014/main" id="{C3FA3928-BB9E-44E3-A6A9-027303C8B10F}"/>
+              </a:ext>
+            </a:extLst>
+          </p:cNvPr>
+          <p:cNvCxnSpPr>
+            <a:cxnSpLocks/>
+            <a:stCxn id="253" idx="2"/>
+            <a:endCxn id="449" idx="0"/>
+          </p:cNvCxnSpPr>
+          <p:nvPr/>
+        </p:nvCxnSpPr>
+        <p:spPr>
+          <a:xfrm rot="16200000" flipH="1">
+            <a:off x="16856898" y="8964401"/>
+            <a:ext cx="221336" cy="5081"/>
+          </a:xfrm>
+          <a:prstGeom prst="bentConnector3">
+            <a:avLst>
+              <a:gd name="adj1" fmla="val 50000"/>
+            </a:avLst>
+          </a:prstGeom>
+          <a:ln w="19050">
+            <a:tailEnd type="arrow"/>
+          </a:ln>
+        </p:spPr>
+        <p:style>
+          <a:lnRef idx="1">
+            <a:schemeClr val="accent1"/>
+          </a:lnRef>
+          <a:fillRef idx="0">
+            <a:schemeClr val="accent1"/>
+          </a:fillRef>
+          <a:effectRef idx="0">
+            <a:schemeClr val="accent1"/>
+          </a:effectRef>
+          <a:fontRef idx="minor">
+            <a:schemeClr val="tx1"/>
+          </a:fontRef>
+        </p:style>
+      </p:cxnSp>
+      <p:cxnSp>
+        <p:nvCxnSpPr>
+          <p:cNvPr id="492" name="Соединительная линия уступом 620">
+            <a:extLst>
+              <a:ext uri="{FF2B5EF4-FFF2-40B4-BE49-F238E27FC236}">
+                <a16:creationId xmlns:a16="http://schemas.microsoft.com/office/drawing/2014/main" id="{1348DB09-1CBA-4AF4-9106-18AA30A8BD7F}"/>
+              </a:ext>
+            </a:extLst>
+          </p:cNvPr>
+          <p:cNvCxnSpPr>
+            <a:cxnSpLocks/>
+            <a:stCxn id="202" idx="2"/>
+            <a:endCxn id="253" idx="0"/>
+          </p:cNvCxnSpPr>
+          <p:nvPr/>
+        </p:nvCxnSpPr>
+        <p:spPr>
+          <a:xfrm rot="5400000">
+            <a:off x="16990391" y="7154864"/>
+            <a:ext cx="1136045" cy="1186774"/>
+          </a:xfrm>
+          <a:prstGeom prst="bentConnector3">
+            <a:avLst>
+              <a:gd name="adj1" fmla="val 12885"/>
+            </a:avLst>
+          </a:prstGeom>
+          <a:ln w="19050">
+            <a:tailEnd type="arrow"/>
+          </a:ln>
+        </p:spPr>
+        <p:style>
+          <a:lnRef idx="1">
+            <a:schemeClr val="accent1"/>
+          </a:lnRef>
+          <a:fillRef idx="0">
+            <a:schemeClr val="accent1"/>
+          </a:fillRef>
+          <a:effectRef idx="0">
+            <a:schemeClr val="accent1"/>
+          </a:effectRef>
+          <a:fontRef idx="minor">
+            <a:schemeClr val="tx1"/>
+          </a:fontRef>
+        </p:style>
+      </p:cxnSp>
+      <p:cxnSp>
+        <p:nvCxnSpPr>
+          <p:cNvPr id="493" name="Соединительная линия уступом 620">
+            <a:extLst>
+              <a:ext uri="{FF2B5EF4-FFF2-40B4-BE49-F238E27FC236}">
+                <a16:creationId xmlns:a16="http://schemas.microsoft.com/office/drawing/2014/main" id="{001F07AD-046C-491B-BF2B-7BC150C1E326}"/>
+              </a:ext>
+            </a:extLst>
+          </p:cNvPr>
+          <p:cNvCxnSpPr>
+            <a:cxnSpLocks/>
+            <a:stCxn id="202" idx="2"/>
+            <a:endCxn id="220" idx="0"/>
+          </p:cNvCxnSpPr>
+          <p:nvPr/>
+        </p:nvCxnSpPr>
+        <p:spPr>
+          <a:xfrm rot="5400000">
+            <a:off x="17705998" y="7024713"/>
+            <a:ext cx="290286" cy="601318"/>
+          </a:xfrm>
+          <a:prstGeom prst="bentConnector3">
+            <a:avLst>
+              <a:gd name="adj1" fmla="val 50000"/>
+            </a:avLst>
+          </a:prstGeom>
+          <a:ln w="19050">
+            <a:tailEnd type="arrow"/>
+          </a:ln>
+        </p:spPr>
+        <p:style>
+          <a:lnRef idx="1">
+            <a:schemeClr val="accent1"/>
+          </a:lnRef>
+          <a:fillRef idx="0">
+            <a:schemeClr val="accent1"/>
+          </a:fillRef>
+          <a:effectRef idx="0">
+            <a:schemeClr val="accent1"/>
+          </a:effectRef>
+          <a:fontRef idx="minor">
+            <a:schemeClr val="tx1"/>
+          </a:fontRef>
+        </p:style>
+      </p:cxnSp>
+      <p:cxnSp>
+        <p:nvCxnSpPr>
+          <p:cNvPr id="494" name="Соединительная линия уступом 620">
+            <a:extLst>
+              <a:ext uri="{FF2B5EF4-FFF2-40B4-BE49-F238E27FC236}">
+                <a16:creationId xmlns:a16="http://schemas.microsoft.com/office/drawing/2014/main" id="{9D081202-8E8F-42EB-97F7-F4801E18AE3E}"/>
+              </a:ext>
+            </a:extLst>
+          </p:cNvPr>
+          <p:cNvCxnSpPr>
+            <a:cxnSpLocks/>
+            <a:stCxn id="202" idx="2"/>
+            <a:endCxn id="470" idx="0"/>
+          </p:cNvCxnSpPr>
+          <p:nvPr/>
+        </p:nvCxnSpPr>
+        <p:spPr>
+          <a:xfrm rot="16200000" flipH="1">
+            <a:off x="18299393" y="7032636"/>
+            <a:ext cx="286296" cy="581482"/>
+          </a:xfrm>
+          <a:prstGeom prst="bentConnector3">
+            <a:avLst>
+              <a:gd name="adj1" fmla="val 50000"/>
+            </a:avLst>
+          </a:prstGeom>
+          <a:ln w="19050">
+            <a:tailEnd type="arrow"/>
+          </a:ln>
+        </p:spPr>
+        <p:style>
+          <a:lnRef idx="1">
+            <a:schemeClr val="accent1"/>
+          </a:lnRef>
+          <a:fillRef idx="0">
+            <a:schemeClr val="accent1"/>
+          </a:fillRef>
+          <a:effectRef idx="0">
+            <a:schemeClr val="accent1"/>
+          </a:effectRef>
+          <a:fontRef idx="minor">
+            <a:schemeClr val="tx1"/>
+          </a:fontRef>
+        </p:style>
+      </p:cxnSp>
+      <p:cxnSp>
+        <p:nvCxnSpPr>
+          <p:cNvPr id="497" name="Соединительная линия уступом 620">
+            <a:extLst>
+              <a:ext uri="{FF2B5EF4-FFF2-40B4-BE49-F238E27FC236}">
+                <a16:creationId xmlns:a16="http://schemas.microsoft.com/office/drawing/2014/main" id="{96D22CD3-8E70-48FE-BF72-B36B25D9BA07}"/>
+              </a:ext>
+            </a:extLst>
+          </p:cNvPr>
+          <p:cNvCxnSpPr>
+            <a:cxnSpLocks/>
+            <a:stCxn id="202" idx="2"/>
+            <a:endCxn id="216" idx="0"/>
+          </p:cNvCxnSpPr>
+          <p:nvPr/>
+        </p:nvCxnSpPr>
+        <p:spPr>
+          <a:xfrm rot="16200000" flipH="1">
+            <a:off x="17584447" y="7747582"/>
+            <a:ext cx="1139787" cy="5080"/>
+          </a:xfrm>
+          <a:prstGeom prst="bentConnector3">
+            <a:avLst>
+              <a:gd name="adj1" fmla="val 50000"/>
+            </a:avLst>
+          </a:prstGeom>
+          <a:ln w="19050">
+            <a:tailEnd type="arrow"/>
+          </a:ln>
+        </p:spPr>
+        <p:style>
+          <a:lnRef idx="1">
+            <a:schemeClr val="accent1"/>
+          </a:lnRef>
+          <a:fillRef idx="0">
+            <a:schemeClr val="accent1"/>
+          </a:fillRef>
+          <a:effectRef idx="0">
+            <a:schemeClr val="accent1"/>
+          </a:effectRef>
+          <a:fontRef idx="minor">
+            <a:schemeClr val="tx1"/>
+          </a:fontRef>
+        </p:style>
+      </p:cxnSp>
+      <p:cxnSp>
+        <p:nvCxnSpPr>
+          <p:cNvPr id="498" name="Соединительная линия уступом 620">
+            <a:extLst>
+              <a:ext uri="{FF2B5EF4-FFF2-40B4-BE49-F238E27FC236}">
+                <a16:creationId xmlns:a16="http://schemas.microsoft.com/office/drawing/2014/main" id="{520634DA-2FC9-48C7-AC46-1859AD0C2EF6}"/>
+              </a:ext>
+            </a:extLst>
+          </p:cNvPr>
+          <p:cNvCxnSpPr>
+            <a:cxnSpLocks/>
+            <a:stCxn id="216" idx="2"/>
+            <a:endCxn id="449" idx="0"/>
+          </p:cNvCxnSpPr>
+          <p:nvPr/>
+        </p:nvCxnSpPr>
+        <p:spPr>
+          <a:xfrm rot="5400000">
+            <a:off x="17454697" y="8375427"/>
+            <a:ext cx="217594" cy="1186773"/>
+          </a:xfrm>
+          <a:prstGeom prst="bentConnector3">
+            <a:avLst>
+              <a:gd name="adj1" fmla="val 50000"/>
+            </a:avLst>
+          </a:prstGeom>
+          <a:ln w="19050">
+            <a:tailEnd type="arrow"/>
+          </a:ln>
+        </p:spPr>
+        <p:style>
+          <a:lnRef idx="1">
+            <a:schemeClr val="accent1"/>
+          </a:lnRef>
+          <a:fillRef idx="0">
+            <a:schemeClr val="accent1"/>
+          </a:fillRef>
+          <a:effectRef idx="0">
+            <a:schemeClr val="accent1"/>
+          </a:effectRef>
+          <a:fontRef idx="minor">
+            <a:schemeClr val="tx1"/>
+          </a:fontRef>
+        </p:style>
+      </p:cxnSp>
+      <p:cxnSp>
+        <p:nvCxnSpPr>
+          <p:cNvPr id="500" name="Соединительная линия уступом 620">
+            <a:extLst>
+              <a:ext uri="{FF2B5EF4-FFF2-40B4-BE49-F238E27FC236}">
+                <a16:creationId xmlns:a16="http://schemas.microsoft.com/office/drawing/2014/main" id="{29361F29-95E6-4334-B5E4-E011ED5CB776}"/>
+              </a:ext>
+            </a:extLst>
+          </p:cNvPr>
+          <p:cNvCxnSpPr>
+            <a:cxnSpLocks/>
+            <a:stCxn id="270" idx="2"/>
+            <a:endCxn id="449" idx="0"/>
+          </p:cNvCxnSpPr>
+          <p:nvPr/>
+        </p:nvCxnSpPr>
+        <p:spPr>
+          <a:xfrm rot="16200000" flipH="1">
+            <a:off x="16267709" y="8375211"/>
+            <a:ext cx="217593" cy="1187204"/>
+          </a:xfrm>
+          <a:prstGeom prst="bentConnector3">
+            <a:avLst>
+              <a:gd name="adj1" fmla="val 50000"/>
+            </a:avLst>
+          </a:prstGeom>
+          <a:ln w="19050">
+            <a:tailEnd type="arrow"/>
+          </a:ln>
+        </p:spPr>
+        <p:style>
+          <a:lnRef idx="1">
+            <a:schemeClr val="accent1"/>
+          </a:lnRef>
+          <a:fillRef idx="0">
+            <a:schemeClr val="accent1"/>
+          </a:fillRef>
+          <a:effectRef idx="0">
+            <a:schemeClr val="accent1"/>
+          </a:effectRef>
+          <a:fontRef idx="minor">
+            <a:schemeClr val="tx1"/>
+          </a:fontRef>
+        </p:style>
+      </p:cxnSp>
+      <p:cxnSp>
+        <p:nvCxnSpPr>
+          <p:cNvPr id="516" name="Соединительная линия уступом 620">
+            <a:extLst>
+              <a:ext uri="{FF2B5EF4-FFF2-40B4-BE49-F238E27FC236}">
+                <a16:creationId xmlns:a16="http://schemas.microsoft.com/office/drawing/2014/main" id="{E9C3D880-6F0F-46CA-A860-2FA56B8391C2}"/>
+              </a:ext>
+            </a:extLst>
+          </p:cNvPr>
+          <p:cNvCxnSpPr>
+            <a:cxnSpLocks/>
+            <a:stCxn id="470" idx="2"/>
+            <a:endCxn id="474" idx="0"/>
+          </p:cNvCxnSpPr>
+          <p:nvPr/>
+        </p:nvCxnSpPr>
+        <p:spPr>
+          <a:xfrm rot="16200000" flipH="1">
+            <a:off x="18881722" y="7858084"/>
+            <a:ext cx="313491" cy="610371"/>
+          </a:xfrm>
+          <a:prstGeom prst="bentConnector3">
+            <a:avLst>
+              <a:gd name="adj1" fmla="val 50000"/>
+            </a:avLst>
+          </a:prstGeom>
+          <a:ln w="19050">
+            <a:tailEnd type="arrow"/>
+          </a:ln>
+        </p:spPr>
+        <p:style>
+          <a:lnRef idx="1">
+            <a:schemeClr val="accent1"/>
+          </a:lnRef>
+          <a:fillRef idx="0">
+            <a:schemeClr val="accent1"/>
+          </a:fillRef>
+          <a:effectRef idx="0">
+            <a:schemeClr val="accent1"/>
+          </a:effectRef>
+          <a:fontRef idx="minor">
+            <a:schemeClr val="tx1"/>
+          </a:fontRef>
+        </p:style>
+      </p:cxnSp>
+      <p:cxnSp>
+        <p:nvCxnSpPr>
+          <p:cNvPr id="522" name="Соединительная линия уступом 620">
+            <a:extLst>
+              <a:ext uri="{FF2B5EF4-FFF2-40B4-BE49-F238E27FC236}">
+                <a16:creationId xmlns:a16="http://schemas.microsoft.com/office/drawing/2014/main" id="{13BF0CA5-FC10-4E83-8E36-B72C083DC2DE}"/>
+              </a:ext>
+            </a:extLst>
+          </p:cNvPr>
+          <p:cNvCxnSpPr>
+            <a:cxnSpLocks/>
+            <a:stCxn id="472" idx="2"/>
+            <a:endCxn id="452" idx="0"/>
+          </p:cNvCxnSpPr>
+          <p:nvPr/>
+        </p:nvCxnSpPr>
+        <p:spPr>
+          <a:xfrm rot="5400000">
+            <a:off x="14020000" y="7736054"/>
+            <a:ext cx="1137450" cy="2337"/>
+          </a:xfrm>
+          <a:prstGeom prst="bentConnector3">
+            <a:avLst>
+              <a:gd name="adj1" fmla="val 50000"/>
+            </a:avLst>
+          </a:prstGeom>
+          <a:ln w="19050">
+            <a:tailEnd type="arrow"/>
+          </a:ln>
+        </p:spPr>
+        <p:style>
+          <a:lnRef idx="1">
+            <a:schemeClr val="accent1"/>
+          </a:lnRef>
+          <a:fillRef idx="0">
+            <a:schemeClr val="accent1"/>
+          </a:fillRef>
+          <a:effectRef idx="0">
+            <a:schemeClr val="accent1"/>
+          </a:effectRef>
+          <a:fontRef idx="minor">
+            <a:schemeClr val="tx1"/>
+          </a:fontRef>
+        </p:style>
+      </p:cxnSp>
+      <p:cxnSp>
+        <p:nvCxnSpPr>
+          <p:cNvPr id="526" name="Соединительная линия уступом 620">
+            <a:extLst>
+              <a:ext uri="{FF2B5EF4-FFF2-40B4-BE49-F238E27FC236}">
+                <a16:creationId xmlns:a16="http://schemas.microsoft.com/office/drawing/2014/main" id="{9AFE2E3D-7649-454E-9945-F7739EF8EDE4}"/>
+              </a:ext>
+            </a:extLst>
+          </p:cNvPr>
+          <p:cNvCxnSpPr>
+            <a:cxnSpLocks/>
+            <a:stCxn id="456" idx="2"/>
+            <a:endCxn id="474" idx="0"/>
+          </p:cNvCxnSpPr>
+          <p:nvPr/>
+        </p:nvCxnSpPr>
+        <p:spPr>
+          <a:xfrm rot="5400000">
+            <a:off x="18774893" y="7748715"/>
+            <a:ext cx="1140061" cy="2540"/>
+          </a:xfrm>
+          <a:prstGeom prst="bentConnector3">
+            <a:avLst>
+              <a:gd name="adj1" fmla="val 50000"/>
+            </a:avLst>
+          </a:prstGeom>
+          <a:ln w="19050">
+            <a:tailEnd type="arrow"/>
+          </a:ln>
+        </p:spPr>
+        <p:style>
+          <a:lnRef idx="1">
+            <a:schemeClr val="accent1"/>
+          </a:lnRef>
+          <a:fillRef idx="0">
+            <a:schemeClr val="accent1"/>
+          </a:fillRef>
+          <a:effectRef idx="0">
+            <a:schemeClr val="accent1"/>
+          </a:effectRef>
+          <a:fontRef idx="minor">
+            <a:schemeClr val="tx1"/>
+          </a:fontRef>
+        </p:style>
+      </p:cxnSp>
+      <p:cxnSp>
+        <p:nvCxnSpPr>
+          <p:cNvPr id="528" name="Соединительная линия уступом 620">
+            <a:extLst>
+              <a:ext uri="{FF2B5EF4-FFF2-40B4-BE49-F238E27FC236}">
+                <a16:creationId xmlns:a16="http://schemas.microsoft.com/office/drawing/2014/main" id="{10C0898C-B086-4CCF-8E4C-CD9650831642}"/>
+              </a:ext>
+            </a:extLst>
+          </p:cNvPr>
+          <p:cNvCxnSpPr>
+            <a:cxnSpLocks/>
+            <a:stCxn id="447" idx="2"/>
+            <a:endCxn id="456" idx="0"/>
+          </p:cNvCxnSpPr>
+          <p:nvPr/>
+        </p:nvCxnSpPr>
+        <p:spPr>
+          <a:xfrm rot="16200000" flipH="1">
+            <a:off x="18621074" y="5914836"/>
+            <a:ext cx="255844" cy="1194393"/>
+          </a:xfrm>
+          <a:prstGeom prst="bentConnector3">
+            <a:avLst>
+              <a:gd name="adj1" fmla="val 50000"/>
+            </a:avLst>
+          </a:prstGeom>
+          <a:ln w="19050">
+            <a:tailEnd type="arrow"/>
+          </a:ln>
+        </p:spPr>
+        <p:style>
+          <a:lnRef idx="1">
+            <a:schemeClr val="accent1"/>
+          </a:lnRef>
+          <a:fillRef idx="0">
+            <a:schemeClr val="accent1"/>
+          </a:fillRef>
+          <a:effectRef idx="0">
+            <a:schemeClr val="accent1"/>
+          </a:effectRef>
+          <a:fontRef idx="minor">
+            <a:schemeClr val="tx1"/>
+          </a:fontRef>
+        </p:style>
+      </p:cxnSp>
+      <p:sp>
+        <p:nvSpPr>
+          <p:cNvPr id="544" name="Прямоугольник 543">
+            <a:extLst>
+              <a:ext uri="{FF2B5EF4-FFF2-40B4-BE49-F238E27FC236}">
+                <a16:creationId xmlns:a16="http://schemas.microsoft.com/office/drawing/2014/main" id="{2B23A7A3-C6CC-4FA1-83CD-C97089BD720A}"/>
+              </a:ext>
+            </a:extLst>
+          </p:cNvPr>
+          <p:cNvSpPr/>
+          <p:nvPr/>
+        </p:nvSpPr>
+        <p:spPr>
+          <a:xfrm>
+            <a:off x="15318107" y="13270370"/>
+            <a:ext cx="926325" cy="540000"/>
+          </a:xfrm>
+          <a:prstGeom prst="rect">
+            <a:avLst/>
+          </a:prstGeom>
+          <a:solidFill>
+            <a:srgbClr val="FF0000"/>
+          </a:solidFill>
+          <a:ln w="19050"/>
+        </p:spPr>
+        <p:style>
+          <a:lnRef idx="2">
+            <a:schemeClr val="accent1"/>
+          </a:lnRef>
+          <a:fillRef idx="1">
+            <a:schemeClr val="lt1"/>
+          </a:fillRef>
+          <a:effectRef idx="0">
+            <a:schemeClr val="accent1"/>
+          </a:effectRef>
+          <a:fontRef idx="minor">
+            <a:schemeClr val="dk1"/>
+          </a:fontRef>
+        </p:style>
+        <p:txBody>
+          <a:bodyPr lIns="124733" tIns="62367" rIns="124733" bIns="62367" rtlCol="0" anchor="ctr"/>
+          <a:lstStyle/>
+          <a:p>
+            <a:pPr algn="ctr"/>
+            <a:r>
+              <a:rPr lang="ru-RU" sz="700" dirty="0"/>
+              <a:t>Принять концепцию «</a:t>
+            </a:r>
+            <a:r>
+              <a:rPr lang="ru-RU" sz="700" dirty="0" err="1"/>
+              <a:t>Ахуват</a:t>
+            </a:r>
+            <a:r>
+              <a:rPr lang="ru-RU" sz="700" dirty="0"/>
+              <a:t> </a:t>
+            </a:r>
+            <a:r>
+              <a:rPr lang="ru-RU" sz="700" dirty="0" err="1"/>
+              <a:t>амим</a:t>
+            </a:r>
+            <a:r>
+              <a:rPr lang="ru-RU" sz="700" dirty="0"/>
+              <a:t>» </a:t>
+            </a:r>
+            <a:r>
+              <a:rPr lang="ru-RU" sz="100" dirty="0"/>
+              <a:t>(то ключевая идеологическая доктрина израильского коммунистического движения в XX веке. Она служила главным противовесом как сионистскому, так и арабскому национализму.🎯 Суть </a:t>
+            </a:r>
+            <a:r>
+              <a:rPr lang="ru-RU" sz="100" dirty="0" err="1"/>
+              <a:t>концепцииВ</a:t>
+            </a:r>
+            <a:r>
+              <a:rPr lang="ru-RU" sz="100" dirty="0"/>
+              <a:t> основе «</a:t>
+            </a:r>
+            <a:r>
+              <a:rPr lang="ru-RU" sz="100" dirty="0" err="1"/>
+              <a:t>Ахуват</a:t>
+            </a:r>
+            <a:r>
+              <a:rPr lang="ru-RU" sz="100" dirty="0"/>
+              <a:t> </a:t>
+            </a:r>
+            <a:r>
+              <a:rPr lang="ru-RU" sz="100" dirty="0" err="1"/>
+              <a:t>амим</a:t>
+            </a:r>
+            <a:r>
+              <a:rPr lang="ru-RU" sz="100" dirty="0"/>
+              <a:t>» лежит классический марксистский тезис: главное разделение между людьми — классовое, а не </a:t>
+            </a:r>
+            <a:r>
+              <a:rPr lang="ru-RU" sz="100" dirty="0" err="1"/>
+              <a:t>национальное.Движение</a:t>
+            </a:r>
+            <a:r>
+              <a:rPr lang="ru-RU" sz="100" dirty="0"/>
+              <a:t> утверждало, что у арабских и еврейских трудящихся один враг — крупный капитал и </a:t>
+            </a:r>
+            <a:r>
+              <a:rPr lang="ru-RU" sz="100" dirty="0" err="1"/>
+              <a:t>империализм.Концепция</a:t>
+            </a:r>
+            <a:r>
+              <a:rPr lang="ru-RU" sz="100" dirty="0"/>
+              <a:t> требовала полного отказа от шовинизма. Арабские коммунисты боролись с антисемитизмом и призывами «сбросить евреев в море», а еврейские коммунисты — с расизмом, дискриминацией арабов и идеей «трансфера» (выселения) коренного населения.)</a:t>
+            </a:r>
+            <a:endParaRPr lang="ru-RU" sz="700" dirty="0"/>
+          </a:p>
+        </p:txBody>
+      </p:sp>
+      <p:cxnSp>
+        <p:nvCxnSpPr>
+          <p:cNvPr id="548" name="Соединительная линия уступом 620">
+            <a:extLst>
+              <a:ext uri="{FF2B5EF4-FFF2-40B4-BE49-F238E27FC236}">
+                <a16:creationId xmlns:a16="http://schemas.microsoft.com/office/drawing/2014/main" id="{245903BA-9B58-47BE-861F-CE2C572E03E8}"/>
+              </a:ext>
+            </a:extLst>
+          </p:cNvPr>
+          <p:cNvCxnSpPr>
+            <a:cxnSpLocks/>
+            <a:stCxn id="459" idx="2"/>
+            <a:endCxn id="544" idx="0"/>
+          </p:cNvCxnSpPr>
+          <p:nvPr/>
+        </p:nvCxnSpPr>
+        <p:spPr>
+          <a:xfrm rot="5400000">
+            <a:off x="15922660" y="12830428"/>
+            <a:ext cx="298552" cy="581332"/>
+          </a:xfrm>
+          <a:prstGeom prst="bentConnector3">
+            <a:avLst>
+              <a:gd name="adj1" fmla="val 50000"/>
+            </a:avLst>
+          </a:prstGeom>
+          <a:ln w="19050">
+            <a:prstDash val="dash"/>
+            <a:tailEnd type="arrow"/>
+          </a:ln>
+        </p:spPr>
+        <p:style>
+          <a:lnRef idx="1">
+            <a:schemeClr val="accent1"/>
+          </a:lnRef>
+          <a:fillRef idx="0">
+            <a:schemeClr val="accent1"/>
+          </a:fillRef>
+          <a:effectRef idx="0">
+            <a:schemeClr val="accent1"/>
+          </a:effectRef>
+          <a:fontRef idx="minor">
+            <a:schemeClr val="tx1"/>
+          </a:fontRef>
+        </p:style>
+      </p:cxnSp>
+      <p:cxnSp>
+        <p:nvCxnSpPr>
+          <p:cNvPr id="552" name="Соединительная линия уступом 620">
+            <a:extLst>
+              <a:ext uri="{FF2B5EF4-FFF2-40B4-BE49-F238E27FC236}">
+                <a16:creationId xmlns:a16="http://schemas.microsoft.com/office/drawing/2014/main" id="{AE0754C8-C7CD-49A7-A8A9-E1A6E1D41A5C}"/>
+              </a:ext>
+            </a:extLst>
+          </p:cNvPr>
+          <p:cNvCxnSpPr>
+            <a:cxnSpLocks/>
+            <a:stCxn id="460" idx="2"/>
+            <a:endCxn id="544" idx="0"/>
+          </p:cNvCxnSpPr>
+          <p:nvPr/>
+        </p:nvCxnSpPr>
+        <p:spPr>
+          <a:xfrm rot="5400000">
+            <a:off x="16518148" y="12238036"/>
+            <a:ext cx="295457" cy="1769211"/>
+          </a:xfrm>
+          <a:prstGeom prst="bentConnector3">
+            <a:avLst>
+              <a:gd name="adj1" fmla="val 50000"/>
+            </a:avLst>
+          </a:prstGeom>
+          <a:ln w="19050">
+            <a:prstDash val="dash"/>
+            <a:tailEnd type="arrow"/>
+          </a:ln>
+        </p:spPr>
+        <p:style>
+          <a:lnRef idx="1">
+            <a:schemeClr val="accent1"/>
+          </a:lnRef>
+          <a:fillRef idx="0">
+            <a:schemeClr val="accent1"/>
+          </a:fillRef>
+          <a:effectRef idx="0">
+            <a:schemeClr val="accent1"/>
+          </a:effectRef>
+          <a:fontRef idx="minor">
+            <a:schemeClr val="tx1"/>
+          </a:fontRef>
+        </p:style>
+      </p:cxnSp>
+      <p:cxnSp>
+        <p:nvCxnSpPr>
+          <p:cNvPr id="556" name="Соединительная линия уступом 620">
+            <a:extLst>
+              <a:ext uri="{FF2B5EF4-FFF2-40B4-BE49-F238E27FC236}">
+                <a16:creationId xmlns:a16="http://schemas.microsoft.com/office/drawing/2014/main" id="{FCCAFA67-A758-429A-AE1A-9B3B06E0541D}"/>
+              </a:ext>
+            </a:extLst>
+          </p:cNvPr>
+          <p:cNvCxnSpPr>
+            <a:cxnSpLocks/>
+            <a:stCxn id="459" idx="2"/>
+            <a:endCxn id="461" idx="0"/>
+          </p:cNvCxnSpPr>
+          <p:nvPr/>
+        </p:nvCxnSpPr>
+        <p:spPr>
+          <a:xfrm rot="16200000" flipH="1">
+            <a:off x="17110465" y="12223955"/>
+            <a:ext cx="298552" cy="1794278"/>
+          </a:xfrm>
+          <a:prstGeom prst="bentConnector3">
+            <a:avLst>
+              <a:gd name="adj1" fmla="val 50000"/>
+            </a:avLst>
+          </a:prstGeom>
+          <a:ln w="19050">
+            <a:prstDash val="dash"/>
+            <a:tailEnd type="arrow"/>
+          </a:ln>
+        </p:spPr>
+        <p:style>
+          <a:lnRef idx="1">
+            <a:schemeClr val="accent1"/>
+          </a:lnRef>
+          <a:fillRef idx="0">
+            <a:schemeClr val="accent1"/>
+          </a:fillRef>
+          <a:effectRef idx="0">
+            <a:schemeClr val="accent1"/>
+          </a:effectRef>
+          <a:fontRef idx="minor">
+            <a:schemeClr val="tx1"/>
+          </a:fontRef>
+        </p:style>
+      </p:cxnSp>
+      <p:cxnSp>
+        <p:nvCxnSpPr>
+          <p:cNvPr id="559" name="Соединительная линия уступом 620">
+            <a:extLst>
+              <a:ext uri="{FF2B5EF4-FFF2-40B4-BE49-F238E27FC236}">
+                <a16:creationId xmlns:a16="http://schemas.microsoft.com/office/drawing/2014/main" id="{43B8C75E-30B8-428B-9E75-E4E1DD5B817F}"/>
+              </a:ext>
+            </a:extLst>
+          </p:cNvPr>
+          <p:cNvCxnSpPr>
+            <a:cxnSpLocks/>
+            <a:stCxn id="460" idx="2"/>
+            <a:endCxn id="461" idx="0"/>
+          </p:cNvCxnSpPr>
+          <p:nvPr/>
+        </p:nvCxnSpPr>
+        <p:spPr>
+          <a:xfrm rot="16200000" flipH="1">
+            <a:off x="17705952" y="12819441"/>
+            <a:ext cx="295457" cy="606399"/>
+          </a:xfrm>
+          <a:prstGeom prst="bentConnector3">
+            <a:avLst>
+              <a:gd name="adj1" fmla="val 50000"/>
+            </a:avLst>
+          </a:prstGeom>
+          <a:ln w="19050">
+            <a:prstDash val="dash"/>
+            <a:tailEnd type="arrow"/>
+          </a:ln>
+        </p:spPr>
+        <p:style>
+          <a:lnRef idx="1">
+            <a:schemeClr val="accent1"/>
+          </a:lnRef>
+          <a:fillRef idx="0">
+            <a:schemeClr val="accent1"/>
+          </a:fillRef>
+          <a:effectRef idx="0">
+            <a:schemeClr val="accent1"/>
+          </a:effectRef>
+          <a:fontRef idx="minor">
+            <a:schemeClr val="tx1"/>
+          </a:fontRef>
+        </p:style>
+      </p:cxnSp>
+      <p:cxnSp>
+        <p:nvCxnSpPr>
+          <p:cNvPr id="574" name="Соединительная линия уступом 620">
+            <a:extLst>
+              <a:ext uri="{FF2B5EF4-FFF2-40B4-BE49-F238E27FC236}">
+                <a16:creationId xmlns:a16="http://schemas.microsoft.com/office/drawing/2014/main" id="{6AB63DF3-B448-4E13-9B39-655A22258632}"/>
+              </a:ext>
+            </a:extLst>
+          </p:cNvPr>
+          <p:cNvCxnSpPr>
+            <a:cxnSpLocks/>
+            <a:stCxn id="229" idx="2"/>
+            <a:endCxn id="203" idx="0"/>
+          </p:cNvCxnSpPr>
+          <p:nvPr/>
+        </p:nvCxnSpPr>
+        <p:spPr>
+          <a:xfrm rot="16200000" flipH="1">
+            <a:off x="18908101" y="6028159"/>
+            <a:ext cx="1952195" cy="1065975"/>
+          </a:xfrm>
+          <a:prstGeom prst="bentConnector3">
+            <a:avLst>
+              <a:gd name="adj1" fmla="val 6804"/>
+            </a:avLst>
+          </a:prstGeom>
+          <a:ln w="19050">
+            <a:tailEnd type="arrow"/>
+          </a:ln>
+        </p:spPr>
+        <p:style>
+          <a:lnRef idx="1">
+            <a:schemeClr val="accent1"/>
+          </a:lnRef>
+          <a:fillRef idx="0">
+            <a:schemeClr val="accent1"/>
+          </a:fillRef>
+          <a:effectRef idx="0">
+            <a:schemeClr val="accent1"/>
+          </a:effectRef>
+          <a:fontRef idx="minor">
+            <a:schemeClr val="tx1"/>
+          </a:fontRef>
+        </p:style>
+      </p:cxnSp>
+      <p:cxnSp>
+        <p:nvCxnSpPr>
+          <p:cNvPr id="580" name="Соединительная линия уступом 620">
+            <a:extLst>
+              <a:ext uri="{FF2B5EF4-FFF2-40B4-BE49-F238E27FC236}">
+                <a16:creationId xmlns:a16="http://schemas.microsoft.com/office/drawing/2014/main" id="{E202C518-A64C-4973-B337-9DF8FEF64A7B}"/>
+              </a:ext>
+            </a:extLst>
+          </p:cNvPr>
+          <p:cNvCxnSpPr>
+            <a:cxnSpLocks/>
+            <a:stCxn id="467" idx="2"/>
+            <a:endCxn id="462" idx="0"/>
+          </p:cNvCxnSpPr>
+          <p:nvPr/>
+        </p:nvCxnSpPr>
+        <p:spPr>
+          <a:xfrm rot="5400000">
+            <a:off x="16216938" y="10011706"/>
+            <a:ext cx="298552" cy="1187465"/>
+          </a:xfrm>
+          <a:prstGeom prst="bentConnector3">
+            <a:avLst>
+              <a:gd name="adj1" fmla="val 50000"/>
+            </a:avLst>
+          </a:prstGeom>
+          <a:ln w="19050">
+            <a:tailEnd type="arrow"/>
+          </a:ln>
+        </p:spPr>
+        <p:style>
+          <a:lnRef idx="1">
+            <a:schemeClr val="accent1"/>
+          </a:lnRef>
+          <a:fillRef idx="0">
+            <a:schemeClr val="accent1"/>
+          </a:fillRef>
+          <a:effectRef idx="0">
+            <a:schemeClr val="accent1"/>
+          </a:effectRef>
+          <a:fontRef idx="minor">
+            <a:schemeClr val="tx1"/>
+          </a:fontRef>
+        </p:style>
+      </p:cxnSp>
+      <p:cxnSp>
+        <p:nvCxnSpPr>
+          <p:cNvPr id="583" name="Соединительная линия уступом 620">
+            <a:extLst>
+              <a:ext uri="{FF2B5EF4-FFF2-40B4-BE49-F238E27FC236}">
+                <a16:creationId xmlns:a16="http://schemas.microsoft.com/office/drawing/2014/main" id="{8358C2D3-F58C-4FBB-9CF4-0FAF330B2EC6}"/>
+              </a:ext>
+            </a:extLst>
+          </p:cNvPr>
+          <p:cNvCxnSpPr>
+            <a:cxnSpLocks/>
+            <a:stCxn id="467" idx="2"/>
+            <a:endCxn id="469" idx="0"/>
+          </p:cNvCxnSpPr>
+          <p:nvPr/>
+        </p:nvCxnSpPr>
+        <p:spPr>
+          <a:xfrm rot="16200000" flipH="1">
+            <a:off x="17407285" y="10008822"/>
+            <a:ext cx="298552" cy="1193231"/>
+          </a:xfrm>
+          <a:prstGeom prst="bentConnector3">
+            <a:avLst>
+              <a:gd name="adj1" fmla="val 50000"/>
+            </a:avLst>
+          </a:prstGeom>
+          <a:ln w="19050">
+            <a:tailEnd type="arrow"/>
+          </a:ln>
+        </p:spPr>
+        <p:style>
+          <a:lnRef idx="1">
+            <a:schemeClr val="accent1"/>
+          </a:lnRef>
+          <a:fillRef idx="0">
+            <a:schemeClr val="accent1"/>
+          </a:fillRef>
+          <a:effectRef idx="0">
+            <a:schemeClr val="accent1"/>
+          </a:effectRef>
+          <a:fontRef idx="minor">
+            <a:schemeClr val="tx1"/>
+          </a:fontRef>
+        </p:style>
+      </p:cxnSp>
+      <p:cxnSp>
+        <p:nvCxnSpPr>
+          <p:cNvPr id="586" name="Соединительная линия уступом 620">
+            <a:extLst>
+              <a:ext uri="{FF2B5EF4-FFF2-40B4-BE49-F238E27FC236}">
+                <a16:creationId xmlns:a16="http://schemas.microsoft.com/office/drawing/2014/main" id="{DB43D146-32E5-4B0D-A45C-B3BC81315958}"/>
+              </a:ext>
+            </a:extLst>
+          </p:cNvPr>
+          <p:cNvCxnSpPr>
+            <a:cxnSpLocks/>
+            <a:stCxn id="467" idx="2"/>
+            <a:endCxn id="457" idx="0"/>
+          </p:cNvCxnSpPr>
+          <p:nvPr/>
+        </p:nvCxnSpPr>
+        <p:spPr>
+          <a:xfrm rot="5400000">
+            <a:off x="16809143" y="10603911"/>
+            <a:ext cx="298552" cy="3055"/>
+          </a:xfrm>
+          <a:prstGeom prst="bentConnector3">
+            <a:avLst>
+              <a:gd name="adj1" fmla="val 50000"/>
+            </a:avLst>
+          </a:prstGeom>
+          <a:ln w="19050">
+            <a:tailEnd type="arrow"/>
+          </a:ln>
+        </p:spPr>
+        <p:style>
+          <a:lnRef idx="1">
+            <a:schemeClr val="accent1"/>
+          </a:lnRef>
+          <a:fillRef idx="0">
+            <a:schemeClr val="accent1"/>
+          </a:fillRef>
+          <a:effectRef idx="0">
+            <a:schemeClr val="accent1"/>
+          </a:effectRef>
+          <a:fontRef idx="minor">
+            <a:schemeClr val="tx1"/>
+          </a:fontRef>
+        </p:style>
+      </p:cxnSp>
+      <p:cxnSp>
+        <p:nvCxnSpPr>
+          <p:cNvPr id="589" name="Соединительная линия уступом 620">
+            <a:extLst>
+              <a:ext uri="{FF2B5EF4-FFF2-40B4-BE49-F238E27FC236}">
+                <a16:creationId xmlns:a16="http://schemas.microsoft.com/office/drawing/2014/main" id="{BA3B4AFA-5FE2-439F-8A1D-B01A400164E4}"/>
+              </a:ext>
+            </a:extLst>
+          </p:cNvPr>
+          <p:cNvCxnSpPr>
+            <a:cxnSpLocks/>
+            <a:stCxn id="457" idx="2"/>
+            <a:endCxn id="453" idx="0"/>
+          </p:cNvCxnSpPr>
+          <p:nvPr/>
+        </p:nvCxnSpPr>
+        <p:spPr>
+          <a:xfrm rot="5400000">
+            <a:off x="16806603" y="11442978"/>
+            <a:ext cx="298552" cy="2025"/>
+          </a:xfrm>
+          <a:prstGeom prst="bentConnector3">
+            <a:avLst>
+              <a:gd name="adj1" fmla="val 50000"/>
+            </a:avLst>
+          </a:prstGeom>
+          <a:ln w="19050">
+            <a:tailEnd type="arrow"/>
+          </a:ln>
+        </p:spPr>
+        <p:style>
+          <a:lnRef idx="1">
+            <a:schemeClr val="accent1"/>
+          </a:lnRef>
+          <a:fillRef idx="0">
+            <a:schemeClr val="accent1"/>
+          </a:fillRef>
+          <a:effectRef idx="0">
+            <a:schemeClr val="accent1"/>
+          </a:effectRef>
+          <a:fontRef idx="minor">
+            <a:schemeClr val="tx1"/>
+          </a:fontRef>
+        </p:style>
+      </p:cxnSp>
+      <p:cxnSp>
+        <p:nvCxnSpPr>
+          <p:cNvPr id="592" name="Соединительная линия уступом 620">
+            <a:extLst>
+              <a:ext uri="{FF2B5EF4-FFF2-40B4-BE49-F238E27FC236}">
+                <a16:creationId xmlns:a16="http://schemas.microsoft.com/office/drawing/2014/main" id="{AABB4E71-9FE1-4A20-9647-4E13D7300A28}"/>
+              </a:ext>
+            </a:extLst>
+          </p:cNvPr>
+          <p:cNvCxnSpPr>
+            <a:cxnSpLocks/>
+            <a:stCxn id="453" idx="2"/>
+            <a:endCxn id="459" idx="0"/>
+          </p:cNvCxnSpPr>
+          <p:nvPr/>
+        </p:nvCxnSpPr>
+        <p:spPr>
+          <a:xfrm rot="5400000">
+            <a:off x="16509458" y="11986410"/>
+            <a:ext cx="298552" cy="592264"/>
+          </a:xfrm>
+          <a:prstGeom prst="bentConnector3">
+            <a:avLst>
+              <a:gd name="adj1" fmla="val 50000"/>
+            </a:avLst>
+          </a:prstGeom>
+          <a:ln w="19050">
+            <a:tailEnd type="arrow"/>
+          </a:ln>
+        </p:spPr>
+        <p:style>
+          <a:lnRef idx="1">
+            <a:schemeClr val="accent1"/>
+          </a:lnRef>
+          <a:fillRef idx="0">
+            <a:schemeClr val="accent1"/>
+          </a:fillRef>
+          <a:effectRef idx="0">
+            <a:schemeClr val="accent1"/>
+          </a:effectRef>
+          <a:fontRef idx="minor">
+            <a:schemeClr val="tx1"/>
+          </a:fontRef>
+        </p:style>
+      </p:cxnSp>
+      <p:cxnSp>
+        <p:nvCxnSpPr>
+          <p:cNvPr id="595" name="Соединительная линия уступом 620">
+            <a:extLst>
+              <a:ext uri="{FF2B5EF4-FFF2-40B4-BE49-F238E27FC236}">
+                <a16:creationId xmlns:a16="http://schemas.microsoft.com/office/drawing/2014/main" id="{67A4AAC9-1C72-4507-B30A-1C80434BB64E}"/>
+              </a:ext>
+            </a:extLst>
+          </p:cNvPr>
+          <p:cNvCxnSpPr>
+            <a:cxnSpLocks/>
+            <a:stCxn id="453" idx="2"/>
+            <a:endCxn id="460" idx="0"/>
+          </p:cNvCxnSpPr>
+          <p:nvPr/>
+        </p:nvCxnSpPr>
+        <p:spPr>
+          <a:xfrm rot="16200000" flipH="1">
+            <a:off x="17101850" y="11986281"/>
+            <a:ext cx="301647" cy="595615"/>
+          </a:xfrm>
+          <a:prstGeom prst="bentConnector3">
+            <a:avLst>
+              <a:gd name="adj1" fmla="val 50000"/>
+            </a:avLst>
+          </a:prstGeom>
+          <a:ln w="19050">
+            <a:tailEnd type="arrow"/>
+          </a:ln>
+        </p:spPr>
+        <p:style>
+          <a:lnRef idx="1">
+            <a:schemeClr val="accent1"/>
+          </a:lnRef>
+          <a:fillRef idx="0">
+            <a:schemeClr val="accent1"/>
+          </a:fillRef>
+          <a:effectRef idx="0">
+            <a:schemeClr val="accent1"/>
+          </a:effectRef>
+          <a:fontRef idx="minor">
+            <a:schemeClr val="tx1"/>
+          </a:fontRef>
+        </p:style>
+      </p:cxnSp>
+      <p:cxnSp>
+        <p:nvCxnSpPr>
+          <p:cNvPr id="598" name="Соединительная линия уступом 620">
+            <a:extLst>
+              <a:ext uri="{FF2B5EF4-FFF2-40B4-BE49-F238E27FC236}">
+                <a16:creationId xmlns:a16="http://schemas.microsoft.com/office/drawing/2014/main" id="{53E3C412-DEA6-40C0-90E0-F7470B6BECD1}"/>
+              </a:ext>
+            </a:extLst>
+          </p:cNvPr>
+          <p:cNvCxnSpPr>
+            <a:cxnSpLocks/>
+            <a:stCxn id="229" idx="2"/>
+            <a:endCxn id="478" idx="0"/>
+          </p:cNvCxnSpPr>
+          <p:nvPr/>
+        </p:nvCxnSpPr>
+        <p:spPr>
+          <a:xfrm rot="5400000">
+            <a:off x="19217903" y="5710800"/>
+            <a:ext cx="259059" cy="7558"/>
+          </a:xfrm>
+          <a:prstGeom prst="bentConnector3">
+            <a:avLst>
+              <a:gd name="adj1" fmla="val 50000"/>
+            </a:avLst>
+          </a:prstGeom>
+          <a:ln w="19050">
+            <a:tailEnd type="arrow"/>
+          </a:ln>
+        </p:spPr>
+        <p:style>
+          <a:lnRef idx="1">
+            <a:schemeClr val="accent1"/>
+          </a:lnRef>
+          <a:fillRef idx="0">
+            <a:schemeClr val="accent1"/>
+          </a:fillRef>
+          <a:effectRef idx="0">
+            <a:schemeClr val="accent1"/>
+          </a:effectRef>
+          <a:fontRef idx="minor">
+            <a:schemeClr val="tx1"/>
+          </a:fontRef>
+        </p:style>
+      </p:cxnSp>
+      <p:sp>
+        <p:nvSpPr>
+          <p:cNvPr id="605" name="Прямоугольник 604">
+            <a:extLst>
+              <a:ext uri="{FF2B5EF4-FFF2-40B4-BE49-F238E27FC236}">
+                <a16:creationId xmlns:a16="http://schemas.microsoft.com/office/drawing/2014/main" id="{E337B5E4-6092-4A99-913F-23B110D867B2}"/>
+              </a:ext>
+            </a:extLst>
+          </p:cNvPr>
+          <p:cNvSpPr/>
+          <p:nvPr/>
+        </p:nvSpPr>
+        <p:spPr>
+          <a:xfrm>
+            <a:off x="13561717" y="5854077"/>
+            <a:ext cx="926325" cy="540000"/>
+          </a:xfrm>
+          <a:prstGeom prst="rect">
+            <a:avLst/>
+          </a:prstGeom>
+          <a:solidFill>
+            <a:srgbClr val="FF0000"/>
+          </a:solidFill>
+          <a:ln w="19050"/>
+        </p:spPr>
+        <p:style>
+          <a:lnRef idx="2">
+            <a:schemeClr val="accent1"/>
+          </a:lnRef>
+          <a:fillRef idx="1">
+            <a:schemeClr val="lt1"/>
+          </a:fillRef>
+          <a:effectRef idx="0">
+            <a:schemeClr val="accent1"/>
+          </a:effectRef>
+          <a:fontRef idx="minor">
+            <a:schemeClr val="dk1"/>
+          </a:fontRef>
+        </p:style>
+        <p:txBody>
+          <a:bodyPr lIns="124733" tIns="62367" rIns="124733" bIns="62367" rtlCol="0" anchor="ctr"/>
+          <a:lstStyle/>
+          <a:p>
+            <a:pPr algn="ctr"/>
+            <a:r>
+              <a:rPr lang="ru-RU" sz="700" dirty="0"/>
+              <a:t>Исключить французов из партии</a:t>
+            </a:r>
+          </a:p>
+        </p:txBody>
+      </p:sp>
+      <p:cxnSp>
+        <p:nvCxnSpPr>
+          <p:cNvPr id="626" name="Соединительная линия уступом 620">
+            <a:extLst>
+              <a:ext uri="{FF2B5EF4-FFF2-40B4-BE49-F238E27FC236}">
+                <a16:creationId xmlns:a16="http://schemas.microsoft.com/office/drawing/2014/main" id="{BDAA3EA9-B00C-4072-ACCE-CF6588B70FBD}"/>
+              </a:ext>
+            </a:extLst>
+          </p:cNvPr>
+          <p:cNvCxnSpPr>
+            <a:cxnSpLocks/>
+            <a:stCxn id="289" idx="2"/>
+            <a:endCxn id="467" idx="0"/>
+          </p:cNvCxnSpPr>
+          <p:nvPr/>
+        </p:nvCxnSpPr>
+        <p:spPr>
+          <a:xfrm rot="5400000">
+            <a:off x="18839780" y="7741972"/>
+            <a:ext cx="294357" cy="4054023"/>
+          </a:xfrm>
+          <a:prstGeom prst="bentConnector3">
+            <a:avLst>
+              <a:gd name="adj1" fmla="val 50000"/>
+            </a:avLst>
+          </a:prstGeom>
+          <a:ln w="19050">
+            <a:prstDash val="dash"/>
+            <a:tailEnd type="arrow"/>
+          </a:ln>
+        </p:spPr>
+        <p:style>
+          <a:lnRef idx="1">
+            <a:schemeClr val="accent1"/>
+          </a:lnRef>
+          <a:fillRef idx="0">
+            <a:schemeClr val="accent1"/>
+          </a:fillRef>
+          <a:effectRef idx="0">
+            <a:schemeClr val="accent1"/>
+          </a:effectRef>
+          <a:fontRef idx="minor">
+            <a:schemeClr val="tx1"/>
+          </a:fontRef>
+        </p:style>
+      </p:cxnSp>
+      <p:cxnSp>
+        <p:nvCxnSpPr>
+          <p:cNvPr id="629" name="Соединительная линия уступом 620">
+            <a:extLst>
+              <a:ext uri="{FF2B5EF4-FFF2-40B4-BE49-F238E27FC236}">
+                <a16:creationId xmlns:a16="http://schemas.microsoft.com/office/drawing/2014/main" id="{1A9262D3-BC8A-42AD-A524-EA6E00F3D5C6}"/>
+              </a:ext>
+            </a:extLst>
+          </p:cNvPr>
+          <p:cNvCxnSpPr>
+            <a:cxnSpLocks/>
+            <a:stCxn id="459" idx="2"/>
+            <a:endCxn id="454" idx="0"/>
+          </p:cNvCxnSpPr>
+          <p:nvPr/>
+        </p:nvCxnSpPr>
+        <p:spPr>
+          <a:xfrm rot="16200000" flipH="1">
+            <a:off x="16514538" y="12819882"/>
+            <a:ext cx="298552" cy="602424"/>
+          </a:xfrm>
+          <a:prstGeom prst="bentConnector3">
+            <a:avLst>
+              <a:gd name="adj1" fmla="val 50000"/>
+            </a:avLst>
+          </a:prstGeom>
+          <a:ln w="19050">
+            <a:prstDash val="dash"/>
+            <a:tailEnd type="arrow"/>
+          </a:ln>
+        </p:spPr>
+        <p:style>
+          <a:lnRef idx="1">
+            <a:schemeClr val="accent1"/>
+          </a:lnRef>
+          <a:fillRef idx="0">
+            <a:schemeClr val="accent1"/>
+          </a:fillRef>
+          <a:effectRef idx="0">
+            <a:schemeClr val="accent1"/>
+          </a:effectRef>
+          <a:fontRef idx="minor">
+            <a:schemeClr val="tx1"/>
+          </a:fontRef>
+        </p:style>
+      </p:cxnSp>
+      <p:cxnSp>
+        <p:nvCxnSpPr>
+          <p:cNvPr id="632" name="Соединительная линия уступом 620">
+            <a:extLst>
+              <a:ext uri="{FF2B5EF4-FFF2-40B4-BE49-F238E27FC236}">
+                <a16:creationId xmlns:a16="http://schemas.microsoft.com/office/drawing/2014/main" id="{CB2E3E8A-AA7A-4B6A-B31E-041278D0202D}"/>
+              </a:ext>
+            </a:extLst>
+          </p:cNvPr>
+          <p:cNvCxnSpPr>
+            <a:cxnSpLocks/>
+            <a:stCxn id="460" idx="2"/>
+            <a:endCxn id="454" idx="0"/>
+          </p:cNvCxnSpPr>
+          <p:nvPr/>
+        </p:nvCxnSpPr>
+        <p:spPr>
+          <a:xfrm rot="5400000">
+            <a:off x="17110026" y="12829914"/>
+            <a:ext cx="295457" cy="585455"/>
+          </a:xfrm>
+          <a:prstGeom prst="bentConnector3">
+            <a:avLst>
+              <a:gd name="adj1" fmla="val 50000"/>
+            </a:avLst>
+          </a:prstGeom>
+          <a:ln w="19050">
+            <a:prstDash val="dash"/>
+            <a:tailEnd type="arrow"/>
+          </a:ln>
+        </p:spPr>
+        <p:style>
+          <a:lnRef idx="1">
+            <a:schemeClr val="accent1"/>
+          </a:lnRef>
+          <a:fillRef idx="0">
+            <a:schemeClr val="accent1"/>
+          </a:fillRef>
+          <a:effectRef idx="0">
+            <a:schemeClr val="accent1"/>
+          </a:effectRef>
+          <a:fontRef idx="minor">
+            <a:schemeClr val="tx1"/>
+          </a:fontRef>
+        </p:style>
+      </p:cxnSp>
+      <p:cxnSp>
+        <p:nvCxnSpPr>
+          <p:cNvPr id="635" name="Прямая соединительная линия 634">
+            <a:extLst>
+              <a:ext uri="{FF2B5EF4-FFF2-40B4-BE49-F238E27FC236}">
+                <a16:creationId xmlns:a16="http://schemas.microsoft.com/office/drawing/2014/main" id="{6BE52F0A-B2EE-4D5C-89C1-F14F989FF99E}"/>
+              </a:ext>
+            </a:extLst>
+          </p:cNvPr>
+          <p:cNvCxnSpPr>
+            <a:cxnSpLocks/>
+            <a:stCxn id="460" idx="1"/>
+            <a:endCxn id="459" idx="3"/>
+          </p:cNvCxnSpPr>
+          <p:nvPr/>
+        </p:nvCxnSpPr>
+        <p:spPr>
+          <a:xfrm flipH="1" flipV="1">
+            <a:off x="16825764" y="12701818"/>
+            <a:ext cx="261554" cy="3095"/>
+          </a:xfrm>
+          <a:prstGeom prst="line">
+            <a:avLst/>
+          </a:prstGeom>
+          <a:ln w="38100">
+            <a:solidFill>
+              <a:srgbClr val="C00000"/>
+            </a:solidFill>
+          </a:ln>
+        </p:spPr>
+        <p:style>
+          <a:lnRef idx="1">
+            <a:schemeClr val="accent1"/>
+          </a:lnRef>
+          <a:fillRef idx="0">
+            <a:schemeClr val="accent1"/>
+          </a:fillRef>
+          <a:effectRef idx="0">
+            <a:schemeClr val="accent1"/>
+          </a:effectRef>
+          <a:fontRef idx="minor">
+            <a:schemeClr val="tx1"/>
+          </a:fontRef>
+        </p:style>
+      </p:cxnSp>
+      <p:cxnSp>
+        <p:nvCxnSpPr>
+          <p:cNvPr id="638" name="Соединительная линия уступом 620">
+            <a:extLst>
+              <a:ext uri="{FF2B5EF4-FFF2-40B4-BE49-F238E27FC236}">
+                <a16:creationId xmlns:a16="http://schemas.microsoft.com/office/drawing/2014/main" id="{BAEA8480-DD49-412D-99D7-E0097C2EE541}"/>
+              </a:ext>
+            </a:extLst>
+          </p:cNvPr>
+          <p:cNvCxnSpPr>
+            <a:cxnSpLocks/>
+            <a:stCxn id="231" idx="2"/>
+            <a:endCxn id="605" idx="0"/>
+          </p:cNvCxnSpPr>
+          <p:nvPr/>
+        </p:nvCxnSpPr>
+        <p:spPr>
+          <a:xfrm rot="5400000">
+            <a:off x="14170399" y="5436920"/>
+            <a:ext cx="271639" cy="562675"/>
+          </a:xfrm>
+          <a:prstGeom prst="bentConnector3">
+            <a:avLst>
+              <a:gd name="adj1" fmla="val 50000"/>
+            </a:avLst>
+          </a:prstGeom>
+          <a:ln w="19050">
+            <a:tailEnd type="arrow"/>
+          </a:ln>
+        </p:spPr>
+        <p:style>
+          <a:lnRef idx="1">
+            <a:schemeClr val="accent1"/>
+          </a:lnRef>
+          <a:fillRef idx="0">
+            <a:schemeClr val="accent1"/>
+          </a:fillRef>
+          <a:effectRef idx="0">
+            <a:schemeClr val="accent1"/>
+          </a:effectRef>
+          <a:fontRef idx="minor">
+            <a:schemeClr val="tx1"/>
+          </a:fontRef>
+        </p:style>
+      </p:cxnSp>
+      <p:sp>
+        <p:nvSpPr>
+          <p:cNvPr id="672" name="Прямоугольник 671">
+            <a:extLst>
+              <a:ext uri="{FF2B5EF4-FFF2-40B4-BE49-F238E27FC236}">
+                <a16:creationId xmlns:a16="http://schemas.microsoft.com/office/drawing/2014/main" id="{CFE91351-277E-4E4C-8EAA-BE1186BEF4CF}"/>
+              </a:ext>
+            </a:extLst>
+          </p:cNvPr>
+          <p:cNvSpPr/>
+          <p:nvPr/>
+        </p:nvSpPr>
+        <p:spPr>
+          <a:xfrm>
+            <a:off x="13558688" y="9081805"/>
+            <a:ext cx="926325" cy="540000"/>
+          </a:xfrm>
+          <a:prstGeom prst="rect">
+            <a:avLst/>
+          </a:prstGeom>
+          <a:solidFill>
+            <a:srgbClr val="FF0000"/>
+          </a:solidFill>
+          <a:ln w="19050"/>
+        </p:spPr>
+        <p:style>
+          <a:lnRef idx="2">
+            <a:schemeClr val="accent1"/>
+          </a:lnRef>
+          <a:fillRef idx="1">
+            <a:schemeClr val="lt1"/>
+          </a:fillRef>
+          <a:effectRef idx="0">
+            <a:schemeClr val="accent1"/>
+          </a:effectRef>
+          <a:fontRef idx="minor">
+            <a:schemeClr val="dk1"/>
+          </a:fontRef>
+        </p:style>
+        <p:txBody>
+          <a:bodyPr lIns="124733" tIns="62367" rIns="124733" bIns="62367" rtlCol="0" anchor="ctr"/>
+          <a:lstStyle/>
+          <a:p>
+            <a:pPr algn="ctr"/>
+            <a:r>
+              <a:rPr lang="ru-RU" sz="700" dirty="0"/>
+              <a:t>Полная национализация французского имущества</a:t>
+            </a:r>
+          </a:p>
+        </p:txBody>
+      </p:sp>
+      <p:cxnSp>
+        <p:nvCxnSpPr>
+          <p:cNvPr id="673" name="Соединительная линия уступом 620">
+            <a:extLst>
+              <a:ext uri="{FF2B5EF4-FFF2-40B4-BE49-F238E27FC236}">
+                <a16:creationId xmlns:a16="http://schemas.microsoft.com/office/drawing/2014/main" id="{B7632463-B8F9-4CE2-9D4D-A8817A8CA83B}"/>
+              </a:ext>
+            </a:extLst>
+          </p:cNvPr>
+          <p:cNvCxnSpPr>
+            <a:cxnSpLocks/>
+            <a:stCxn id="605" idx="2"/>
+            <a:endCxn id="672" idx="0"/>
+          </p:cNvCxnSpPr>
+          <p:nvPr/>
+        </p:nvCxnSpPr>
+        <p:spPr>
+          <a:xfrm rot="5400000">
+            <a:off x="12679502" y="7736427"/>
+            <a:ext cx="2687728" cy="3029"/>
+          </a:xfrm>
+          <a:prstGeom prst="bentConnector3">
+            <a:avLst>
+              <a:gd name="adj1" fmla="val 50000"/>
+            </a:avLst>
+          </a:prstGeom>
+          <a:ln w="19050">
+            <a:tailEnd type="arrow"/>
+          </a:ln>
+        </p:spPr>
+        <p:style>
+          <a:lnRef idx="1">
+            <a:schemeClr val="accent1"/>
+          </a:lnRef>
+          <a:fillRef idx="0">
+            <a:schemeClr val="accent1"/>
+          </a:fillRef>
+          <a:effectRef idx="0">
+            <a:schemeClr val="accent1"/>
+          </a:effectRef>
+          <a:fontRef idx="minor">
+            <a:schemeClr val="tx1"/>
+          </a:fontRef>
+        </p:style>
+      </p:cxnSp>
+      <p:cxnSp>
+        <p:nvCxnSpPr>
+          <p:cNvPr id="677" name="Соединительная линия уступом 620">
+            <a:extLst>
+              <a:ext uri="{FF2B5EF4-FFF2-40B4-BE49-F238E27FC236}">
+                <a16:creationId xmlns:a16="http://schemas.microsoft.com/office/drawing/2014/main" id="{B768D324-794D-4757-A700-B6ED49687AE3}"/>
+              </a:ext>
+            </a:extLst>
+          </p:cNvPr>
+          <p:cNvCxnSpPr>
+            <a:cxnSpLocks/>
+            <a:stCxn id="672" idx="2"/>
+            <a:endCxn id="467" idx="0"/>
+          </p:cNvCxnSpPr>
+          <p:nvPr/>
+        </p:nvCxnSpPr>
+        <p:spPr>
+          <a:xfrm rot="16200000" flipH="1">
+            <a:off x="15343720" y="8299935"/>
+            <a:ext cx="294357" cy="2938095"/>
+          </a:xfrm>
+          <a:prstGeom prst="bentConnector3">
+            <a:avLst>
+              <a:gd name="adj1" fmla="val 50000"/>
+            </a:avLst>
+          </a:prstGeom>
+          <a:ln w="19050">
+            <a:prstDash val="dash"/>
+            <a:tailEnd type="arrow"/>
+          </a:ln>
+        </p:spPr>
+        <p:style>
+          <a:lnRef idx="1">
+            <a:schemeClr val="accent1"/>
+          </a:lnRef>
+          <a:fillRef idx="0">
+            <a:schemeClr val="accent1"/>
+          </a:fillRef>
+          <a:effectRef idx="0">
+            <a:schemeClr val="accent1"/>
+          </a:effectRef>
+          <a:fontRef idx="minor">
+            <a:schemeClr val="tx1"/>
+          </a:fontRef>
+        </p:style>
+      </p:cxnSp>
+      <p:cxnSp>
+        <p:nvCxnSpPr>
+          <p:cNvPr id="678" name="Соединительная линия уступом 620">
+            <a:extLst>
+              <a:ext uri="{FF2B5EF4-FFF2-40B4-BE49-F238E27FC236}">
+                <a16:creationId xmlns:a16="http://schemas.microsoft.com/office/drawing/2014/main" id="{107A50E5-4279-4F78-BB4D-D0EE1845AA2E}"/>
+              </a:ext>
+            </a:extLst>
+          </p:cNvPr>
+          <p:cNvCxnSpPr>
+            <a:cxnSpLocks/>
+            <a:stCxn id="336" idx="2"/>
+            <a:endCxn id="358" idx="0"/>
+          </p:cNvCxnSpPr>
+          <p:nvPr/>
+        </p:nvCxnSpPr>
+        <p:spPr>
+          <a:xfrm rot="16200000" flipH="1">
+            <a:off x="11540200" y="4539526"/>
+            <a:ext cx="269100" cy="2361219"/>
+          </a:xfrm>
+          <a:prstGeom prst="bentConnector3">
+            <a:avLst>
+              <a:gd name="adj1" fmla="val 50000"/>
+            </a:avLst>
+          </a:prstGeom>
+          <a:ln w="19050">
+            <a:prstDash val="dash"/>
+            <a:tailEnd type="arrow"/>
+          </a:ln>
+        </p:spPr>
+        <p:style>
+          <a:lnRef idx="1">
+            <a:schemeClr val="accent1"/>
+          </a:lnRef>
+          <a:fillRef idx="0">
+            <a:schemeClr val="accent1"/>
+          </a:fillRef>
+          <a:effectRef idx="0">
+            <a:schemeClr val="accent1"/>
+          </a:effectRef>
+          <a:fontRef idx="minor">
+            <a:schemeClr val="tx1"/>
+          </a:fontRef>
+        </p:style>
+      </p:cxnSp>
+      <p:cxnSp>
+        <p:nvCxnSpPr>
+          <p:cNvPr id="679" name="Соединительная линия уступом 620">
+            <a:extLst>
+              <a:ext uri="{FF2B5EF4-FFF2-40B4-BE49-F238E27FC236}">
+                <a16:creationId xmlns:a16="http://schemas.microsoft.com/office/drawing/2014/main" id="{0BE6AA82-FCC9-4929-AAB7-F0B54221683C}"/>
+              </a:ext>
+            </a:extLst>
+          </p:cNvPr>
+          <p:cNvCxnSpPr>
+            <a:cxnSpLocks/>
+            <a:stCxn id="231" idx="2"/>
+            <a:endCxn id="358" idx="0"/>
+          </p:cNvCxnSpPr>
+          <p:nvPr/>
+        </p:nvCxnSpPr>
+        <p:spPr>
+          <a:xfrm rot="5400000">
+            <a:off x="13585334" y="4852465"/>
+            <a:ext cx="272248" cy="1732195"/>
+          </a:xfrm>
+          <a:prstGeom prst="bentConnector3">
+            <a:avLst>
+              <a:gd name="adj1" fmla="val 50000"/>
+            </a:avLst>
+          </a:prstGeom>
+          <a:ln w="19050">
+            <a:prstDash val="dash"/>
+            <a:tailEnd type="arrow"/>
+          </a:ln>
+        </p:spPr>
+        <p:style>
+          <a:lnRef idx="1">
+            <a:schemeClr val="accent1"/>
+          </a:lnRef>
+          <a:fillRef idx="0">
+            <a:schemeClr val="accent1"/>
+          </a:fillRef>
+          <a:effectRef idx="0">
+            <a:schemeClr val="accent1"/>
+          </a:effectRef>
+          <a:fontRef idx="minor">
+            <a:schemeClr val="tx1"/>
+          </a:fontRef>
+        </p:style>
+      </p:cxnSp>
+      <p:sp>
+        <p:nvSpPr>
+          <p:cNvPr id="682" name="Прямоугольник 681">
+            <a:extLst>
+              <a:ext uri="{FF2B5EF4-FFF2-40B4-BE49-F238E27FC236}">
+                <a16:creationId xmlns:a16="http://schemas.microsoft.com/office/drawing/2014/main" id="{47EC0B54-2B64-4C65-B4C0-70F9B959A7B0}"/>
+              </a:ext>
+            </a:extLst>
+          </p:cNvPr>
+          <p:cNvSpPr/>
+          <p:nvPr/>
+        </p:nvSpPr>
+        <p:spPr>
+          <a:xfrm>
+            <a:off x="20550806" y="9916161"/>
+            <a:ext cx="926325" cy="540000"/>
+          </a:xfrm>
+          <a:prstGeom prst="rect">
+            <a:avLst/>
+          </a:prstGeom>
+          <a:solidFill>
+            <a:srgbClr val="FF0000"/>
+          </a:solidFill>
+          <a:ln w="19050"/>
+        </p:spPr>
+        <p:style>
+          <a:lnRef idx="2">
+            <a:schemeClr val="accent1"/>
+          </a:lnRef>
+          <a:fillRef idx="1">
+            <a:schemeClr val="lt1"/>
+          </a:fillRef>
+          <a:effectRef idx="0">
+            <a:schemeClr val="accent1"/>
+          </a:effectRef>
+          <a:fontRef idx="minor">
+            <a:schemeClr val="dk1"/>
+          </a:fontRef>
+        </p:style>
+        <p:txBody>
+          <a:bodyPr lIns="124733" tIns="62367" rIns="124733" bIns="62367" rtlCol="0" anchor="ctr"/>
+          <a:lstStyle/>
+          <a:p>
+            <a:pPr algn="ctr"/>
+            <a:r>
+              <a:rPr lang="ru-RU" sz="700" dirty="0"/>
+              <a:t>Остаться союзником Франции</a:t>
+            </a:r>
+          </a:p>
+        </p:txBody>
+      </p:sp>
+      <p:sp>
+        <p:nvSpPr>
+          <p:cNvPr id="684" name="Прямоугольник 683">
+            <a:extLst>
+              <a:ext uri="{FF2B5EF4-FFF2-40B4-BE49-F238E27FC236}">
+                <a16:creationId xmlns:a16="http://schemas.microsoft.com/office/drawing/2014/main" id="{441B5A07-9519-45BC-9B4D-4EA0DD9C5CA5}"/>
+              </a:ext>
+            </a:extLst>
+          </p:cNvPr>
+          <p:cNvSpPr/>
+          <p:nvPr/>
+        </p:nvSpPr>
+        <p:spPr>
+          <a:xfrm>
+            <a:off x="13558539" y="9920354"/>
+            <a:ext cx="926325" cy="540000"/>
+          </a:xfrm>
+          <a:prstGeom prst="rect">
+            <a:avLst/>
+          </a:prstGeom>
+          <a:solidFill>
+            <a:srgbClr val="FF0000"/>
+          </a:solidFill>
+          <a:ln w="19050"/>
+        </p:spPr>
+        <p:style>
+          <a:lnRef idx="2">
+            <a:schemeClr val="accent1"/>
+          </a:lnRef>
+          <a:fillRef idx="1">
+            <a:schemeClr val="lt1"/>
+          </a:fillRef>
+          <a:effectRef idx="0">
+            <a:schemeClr val="accent1"/>
+          </a:effectRef>
+          <a:fontRef idx="minor">
+            <a:schemeClr val="dk1"/>
+          </a:fontRef>
+        </p:style>
+        <p:txBody>
+          <a:bodyPr lIns="124733" tIns="62367" rIns="124733" bIns="62367" rtlCol="0" anchor="ctr"/>
+          <a:lstStyle/>
+          <a:p>
+            <a:pPr algn="ctr"/>
+            <a:r>
+              <a:rPr lang="ru-RU" sz="700" dirty="0"/>
+              <a:t>Вступить в Коминтерн</a:t>
+            </a:r>
+          </a:p>
+        </p:txBody>
+      </p:sp>
+      <p:cxnSp>
+        <p:nvCxnSpPr>
+          <p:cNvPr id="685" name="Соединительная линия уступом 620">
+            <a:extLst>
+              <a:ext uri="{FF2B5EF4-FFF2-40B4-BE49-F238E27FC236}">
+                <a16:creationId xmlns:a16="http://schemas.microsoft.com/office/drawing/2014/main" id="{30DEDB27-1BFF-4A10-A5D0-5B8EB220E568}"/>
+              </a:ext>
+            </a:extLst>
+          </p:cNvPr>
+          <p:cNvCxnSpPr>
+            <a:cxnSpLocks/>
+            <a:stCxn id="672" idx="2"/>
+            <a:endCxn id="684" idx="0"/>
+          </p:cNvCxnSpPr>
+          <p:nvPr/>
+        </p:nvCxnSpPr>
+        <p:spPr>
+          <a:xfrm rot="5400000">
+            <a:off x="13872503" y="9771005"/>
+            <a:ext cx="298549" cy="149"/>
+          </a:xfrm>
+          <a:prstGeom prst="bentConnector3">
+            <a:avLst>
+              <a:gd name="adj1" fmla="val 50000"/>
+            </a:avLst>
+          </a:prstGeom>
+          <a:ln w="19050">
+            <a:tailEnd type="arrow"/>
+          </a:ln>
+        </p:spPr>
+        <p:style>
+          <a:lnRef idx="1">
+            <a:schemeClr val="accent1"/>
+          </a:lnRef>
+          <a:fillRef idx="0">
+            <a:schemeClr val="accent1"/>
+          </a:fillRef>
+          <a:effectRef idx="0">
+            <a:schemeClr val="accent1"/>
+          </a:effectRef>
+          <a:fontRef idx="minor">
+            <a:schemeClr val="tx1"/>
+          </a:fontRef>
+        </p:style>
+      </p:cxnSp>
+      <p:cxnSp>
+        <p:nvCxnSpPr>
+          <p:cNvPr id="687" name="Соединительная линия уступом 620">
+            <a:extLst>
+              <a:ext uri="{FF2B5EF4-FFF2-40B4-BE49-F238E27FC236}">
+                <a16:creationId xmlns:a16="http://schemas.microsoft.com/office/drawing/2014/main" id="{AFB626DD-C424-4137-9D19-667C6B93FBFB}"/>
+              </a:ext>
+            </a:extLst>
+          </p:cNvPr>
+          <p:cNvCxnSpPr>
+            <a:cxnSpLocks/>
+            <a:stCxn id="289" idx="2"/>
+            <a:endCxn id="682" idx="0"/>
+          </p:cNvCxnSpPr>
+          <p:nvPr/>
+        </p:nvCxnSpPr>
+        <p:spPr>
+          <a:xfrm rot="5400000">
+            <a:off x="20866791" y="9768983"/>
+            <a:ext cx="294356" cy="12700"/>
+          </a:xfrm>
+          <a:prstGeom prst="bentConnector3">
+            <a:avLst>
+              <a:gd name="adj1" fmla="val 50000"/>
+            </a:avLst>
+          </a:prstGeom>
+          <a:ln w="19050">
+            <a:tailEnd type="arrow"/>
+          </a:ln>
+        </p:spPr>
+        <p:style>
+          <a:lnRef idx="1">
+            <a:schemeClr val="accent1"/>
+          </a:lnRef>
+          <a:fillRef idx="0">
+            <a:schemeClr val="accent1"/>
+          </a:fillRef>
+          <a:effectRef idx="0">
+            <a:schemeClr val="accent1"/>
+          </a:effectRef>
+          <a:fontRef idx="minor">
+            <a:schemeClr val="tx1"/>
+          </a:fontRef>
+        </p:style>
+      </p:cxnSp>
+      <p:cxnSp>
+        <p:nvCxnSpPr>
+          <p:cNvPr id="466" name="Соединительная линия уступом 620">
+            <a:extLst>
+              <a:ext uri="{FF2B5EF4-FFF2-40B4-BE49-F238E27FC236}">
+                <a16:creationId xmlns:a16="http://schemas.microsoft.com/office/drawing/2014/main" id="{C2E25588-1DBF-4AFC-8AD0-2B705FB8FBDC}"/>
+              </a:ext>
+            </a:extLst>
+          </p:cNvPr>
+          <p:cNvCxnSpPr>
+            <a:cxnSpLocks/>
+            <a:stCxn id="308" idx="2"/>
+            <a:endCxn id="311" idx="0"/>
+          </p:cNvCxnSpPr>
+          <p:nvPr/>
+        </p:nvCxnSpPr>
+        <p:spPr>
+          <a:xfrm rot="5400000">
+            <a:off x="9801643" y="14983756"/>
+            <a:ext cx="337947" cy="555344"/>
+          </a:xfrm>
+          <a:prstGeom prst="bentConnector3">
+            <a:avLst>
+              <a:gd name="adj1" fmla="val 50000"/>
+            </a:avLst>
+          </a:prstGeom>
+          <a:ln w="19050">
+            <a:tailEnd type="arrow"/>
+          </a:ln>
+        </p:spPr>
+        <p:style>
+          <a:lnRef idx="1">
+            <a:schemeClr val="accent1"/>
+          </a:lnRef>
+          <a:fillRef idx="0">
+            <a:schemeClr val="accent1"/>
+          </a:fillRef>
+          <a:effectRef idx="0">
+            <a:schemeClr val="accent1"/>
+          </a:effectRef>
+          <a:fontRef idx="minor">
+            <a:schemeClr val="tx1"/>
+          </a:fontRef>
+        </p:style>
+      </p:cxnSp>
+      <p:cxnSp>
+        <p:nvCxnSpPr>
+          <p:cNvPr id="503" name="Соединительная линия уступом 620">
+            <a:extLst>
+              <a:ext uri="{FF2B5EF4-FFF2-40B4-BE49-F238E27FC236}">
+                <a16:creationId xmlns:a16="http://schemas.microsoft.com/office/drawing/2014/main" id="{E1F63AED-8F53-410D-97A5-29896073417B}"/>
+              </a:ext>
+            </a:extLst>
+          </p:cNvPr>
+          <p:cNvCxnSpPr>
+            <a:cxnSpLocks/>
+            <a:stCxn id="308" idx="2"/>
+            <a:endCxn id="307" idx="0"/>
+          </p:cNvCxnSpPr>
+          <p:nvPr/>
+        </p:nvCxnSpPr>
+        <p:spPr>
+          <a:xfrm rot="16200000" flipH="1">
+            <a:off x="10408445" y="14932298"/>
+            <a:ext cx="337947" cy="658260"/>
+          </a:xfrm>
+          <a:prstGeom prst="bentConnector3">
+            <a:avLst>
+              <a:gd name="adj1" fmla="val 50000"/>
+            </a:avLst>
+          </a:prstGeom>
+          <a:ln w="19050">
+            <a:tailEnd type="arrow"/>
+          </a:ln>
+        </p:spPr>
+        <p:style>
+          <a:lnRef idx="1">
+            <a:schemeClr val="accent1"/>
+          </a:lnRef>
+          <a:fillRef idx="0">
+            <a:schemeClr val="accent1"/>
+          </a:fillRef>
+          <a:effectRef idx="0">
+            <a:schemeClr val="accent1"/>
+          </a:effectRef>
+          <a:fontRef idx="minor">
+            <a:schemeClr val="tx1"/>
+          </a:fontRef>
+        </p:style>
+      </p:cxnSp>
+      <p:cxnSp>
+        <p:nvCxnSpPr>
+          <p:cNvPr id="504" name="Соединительная линия уступом 620">
+            <a:extLst>
+              <a:ext uri="{FF2B5EF4-FFF2-40B4-BE49-F238E27FC236}">
+                <a16:creationId xmlns:a16="http://schemas.microsoft.com/office/drawing/2014/main" id="{52081357-7316-4DC8-82BA-0E8B295FB117}"/>
+              </a:ext>
+            </a:extLst>
+          </p:cNvPr>
+          <p:cNvCxnSpPr>
+            <a:cxnSpLocks/>
+            <a:stCxn id="303" idx="2"/>
+            <a:endCxn id="302" idx="0"/>
+          </p:cNvCxnSpPr>
+          <p:nvPr/>
+        </p:nvCxnSpPr>
+        <p:spPr>
+          <a:xfrm rot="5400000">
+            <a:off x="6479535" y="14958474"/>
+            <a:ext cx="337947" cy="605908"/>
+          </a:xfrm>
+          <a:prstGeom prst="bentConnector3">
+            <a:avLst>
+              <a:gd name="adj1" fmla="val 50000"/>
+            </a:avLst>
+          </a:prstGeom>
+          <a:ln w="19050">
+            <a:tailEnd type="arrow"/>
+          </a:ln>
+        </p:spPr>
+        <p:style>
+          <a:lnRef idx="1">
+            <a:schemeClr val="accent1"/>
+          </a:lnRef>
+          <a:fillRef idx="0">
+            <a:schemeClr val="accent1"/>
+          </a:fillRef>
+          <a:effectRef idx="0">
+            <a:schemeClr val="accent1"/>
+          </a:effectRef>
+          <a:fontRef idx="minor">
+            <a:schemeClr val="tx1"/>
+          </a:fontRef>
+        </p:style>
+      </p:cxnSp>
+      <p:cxnSp>
+        <p:nvCxnSpPr>
+          <p:cNvPr id="506" name="Соединительная линия уступом 620">
+            <a:extLst>
+              <a:ext uri="{FF2B5EF4-FFF2-40B4-BE49-F238E27FC236}">
+                <a16:creationId xmlns:a16="http://schemas.microsoft.com/office/drawing/2014/main" id="{1FC3434E-63FB-4C17-9AAA-7F3F13F81A01}"/>
+              </a:ext>
+            </a:extLst>
+          </p:cNvPr>
+          <p:cNvCxnSpPr>
+            <a:cxnSpLocks/>
+            <a:stCxn id="303" idx="2"/>
+            <a:endCxn id="301" idx="0"/>
+          </p:cNvCxnSpPr>
+          <p:nvPr/>
+        </p:nvCxnSpPr>
+        <p:spPr>
+          <a:xfrm rot="16200000" flipH="1">
+            <a:off x="7099653" y="14944264"/>
+            <a:ext cx="337947" cy="634328"/>
+          </a:xfrm>
+          <a:prstGeom prst="bentConnector3">
+            <a:avLst>
+              <a:gd name="adj1" fmla="val 50000"/>
+            </a:avLst>
+          </a:prstGeom>
+          <a:ln w="19050">
+            <a:tailEnd type="arrow"/>
+          </a:ln>
+        </p:spPr>
+        <p:style>
+          <a:lnRef idx="1">
+            <a:schemeClr val="accent1"/>
+          </a:lnRef>
+          <a:fillRef idx="0">
+            <a:schemeClr val="accent1"/>
+          </a:fillRef>
+          <a:effectRef idx="0">
+            <a:schemeClr val="accent1"/>
+          </a:effectRef>
+          <a:fontRef idx="minor">
+            <a:schemeClr val="tx1"/>
+          </a:fontRef>
+        </p:style>
+      </p:cxnSp>
+      <p:sp>
+        <p:nvSpPr>
+          <p:cNvPr id="508" name="Прямоугольник 507">
+            <a:extLst>
+              <a:ext uri="{FF2B5EF4-FFF2-40B4-BE49-F238E27FC236}">
+                <a16:creationId xmlns:a16="http://schemas.microsoft.com/office/drawing/2014/main" id="{46E197FE-2A45-4F0F-9B6C-9BF43DFB2083}"/>
+              </a:ext>
+            </a:extLst>
+          </p:cNvPr>
+          <p:cNvSpPr/>
+          <p:nvPr/>
+        </p:nvSpPr>
+        <p:spPr>
+          <a:xfrm>
+            <a:off x="6484428" y="16231112"/>
+            <a:ext cx="926325" cy="540000"/>
+          </a:xfrm>
+          <a:prstGeom prst="rect">
+            <a:avLst/>
+          </a:prstGeom>
+          <a:solidFill>
+            <a:schemeClr val="bg1"/>
+          </a:solidFill>
+          <a:ln w="19050"/>
+        </p:spPr>
+        <p:style>
+          <a:lnRef idx="2">
+            <a:schemeClr val="accent1"/>
+          </a:lnRef>
+          <a:fillRef idx="1">
+            <a:schemeClr val="lt1"/>
+          </a:fillRef>
+          <a:effectRef idx="0">
+            <a:schemeClr val="accent1"/>
+          </a:effectRef>
+          <a:fontRef idx="minor">
+            <a:schemeClr val="dk1"/>
+          </a:fontRef>
+        </p:style>
+        <p:txBody>
+          <a:bodyPr lIns="124733" tIns="62367" rIns="124733" bIns="62367" rtlCol="0" anchor="ctr"/>
+          <a:lstStyle/>
+          <a:p>
+            <a:pPr algn="ctr"/>
+            <a:r>
+              <a:rPr lang="ru-RU" sz="700" dirty="0" err="1"/>
+              <a:t>Танжерский</a:t>
+            </a:r>
+            <a:r>
+              <a:rPr lang="ru-RU" sz="700" dirty="0"/>
+              <a:t> офшор и контрабанда</a:t>
+            </a:r>
+            <a:br>
+              <a:rPr lang="ru-RU" sz="700" dirty="0"/>
+            </a:br>
+            <a:r>
+              <a:rPr lang="ru-RU" sz="100" dirty="0"/>
+              <a:t>(Историко-игровое </a:t>
+            </a:r>
+            <a:r>
+              <a:rPr lang="ru-RU" sz="100" dirty="0" err="1"/>
+              <a:t>описание:«Пока</a:t>
+            </a:r>
+            <a:r>
+              <a:rPr lang="ru-RU" sz="100" dirty="0"/>
+              <a:t> в Европе разгорается Вторая мировая война, Танжер может стать тихой гаванью для бегущих капиталов. Ослабив банковский контроль и закрыв глаза на контрабандные рынки, мы превратим город в центр теневой торговли дефицитным сырьем, станками и валютой. Все это пойдет на нужды нашей марокканской промышленности».⚙️ Игровые </a:t>
+            </a:r>
+            <a:r>
+              <a:rPr lang="ru-RU" sz="100" dirty="0" err="1"/>
+              <a:t>эффекты:Прямой</a:t>
+            </a:r>
+            <a:r>
+              <a:rPr lang="ru-RU" sz="100" dirty="0"/>
+              <a:t> финансовый </a:t>
+            </a:r>
+            <a:r>
+              <a:rPr lang="ru-RU" sz="100" dirty="0" err="1"/>
+              <a:t>прирост:Прирост</a:t>
+            </a:r>
+            <a:r>
+              <a:rPr lang="ru-RU" sz="100" dirty="0"/>
+              <a:t> политической власти: +120 (символизирует взятки и налоги с банкиров).Прибыль гражданской промышленности (</a:t>
+            </a:r>
+            <a:r>
+              <a:rPr lang="ru-RU" sz="100" dirty="0" err="1"/>
+              <a:t>Consumer</a:t>
+            </a:r>
+            <a:r>
+              <a:rPr lang="ru-RU" sz="100" dirty="0"/>
+              <a:t> </a:t>
+            </a:r>
+            <a:r>
+              <a:rPr lang="ru-RU" sz="100" dirty="0" err="1"/>
+              <a:t>Goods</a:t>
+            </a:r>
+            <a:r>
+              <a:rPr lang="ru-RU" sz="100" dirty="0"/>
+              <a:t> </a:t>
+            </a:r>
+            <a:r>
+              <a:rPr lang="ru-RU" sz="100" dirty="0" err="1"/>
+              <a:t>Factories</a:t>
+            </a:r>
+            <a:r>
+              <a:rPr lang="ru-RU" sz="100" dirty="0"/>
+              <a:t>): −3% (снижение товаров народного потребления, так как экономика насыщается за счет контрабанды).)</a:t>
+            </a:r>
+            <a:endParaRPr lang="ru-RU" sz="700" dirty="0"/>
+          </a:p>
+        </p:txBody>
+      </p:sp>
+      <p:cxnSp>
+        <p:nvCxnSpPr>
+          <p:cNvPr id="509" name="Соединительная линия уступом 620">
+            <a:extLst>
+              <a:ext uri="{FF2B5EF4-FFF2-40B4-BE49-F238E27FC236}">
+                <a16:creationId xmlns:a16="http://schemas.microsoft.com/office/drawing/2014/main" id="{B6557F02-1289-420C-B9C0-FD17946E8DBA}"/>
+              </a:ext>
+            </a:extLst>
+          </p:cNvPr>
+          <p:cNvCxnSpPr>
+            <a:cxnSpLocks/>
+            <a:stCxn id="301" idx="2"/>
+            <a:endCxn id="508" idx="0"/>
+          </p:cNvCxnSpPr>
+          <p:nvPr/>
+        </p:nvCxnSpPr>
+        <p:spPr>
+          <a:xfrm rot="5400000">
+            <a:off x="7136336" y="15781658"/>
+            <a:ext cx="260710" cy="638199"/>
+          </a:xfrm>
+          <a:prstGeom prst="bentConnector3">
+            <a:avLst>
+              <a:gd name="adj1" fmla="val 50000"/>
+            </a:avLst>
+          </a:prstGeom>
+          <a:ln w="19050">
+            <a:tailEnd type="arrow"/>
+          </a:ln>
+        </p:spPr>
+        <p:style>
+          <a:lnRef idx="1">
+            <a:schemeClr val="accent1"/>
+          </a:lnRef>
+          <a:fillRef idx="0">
+            <a:schemeClr val="accent1"/>
+          </a:fillRef>
+          <a:effectRef idx="0">
+            <a:schemeClr val="accent1"/>
+          </a:effectRef>
+          <a:fontRef idx="minor">
+            <a:schemeClr val="tx1"/>
+          </a:fontRef>
+        </p:style>
+      </p:cxnSp>
+      <p:cxnSp>
+        <p:nvCxnSpPr>
+          <p:cNvPr id="510" name="Соединительная линия уступом 620">
+            <a:extLst>
+              <a:ext uri="{FF2B5EF4-FFF2-40B4-BE49-F238E27FC236}">
+                <a16:creationId xmlns:a16="http://schemas.microsoft.com/office/drawing/2014/main" id="{93DCDEC9-BCF1-404B-B8A7-351298345583}"/>
+              </a:ext>
+            </a:extLst>
+          </p:cNvPr>
+          <p:cNvCxnSpPr>
+            <a:cxnSpLocks/>
+            <a:stCxn id="302" idx="2"/>
+            <a:endCxn id="508" idx="0"/>
+          </p:cNvCxnSpPr>
+          <p:nvPr/>
+        </p:nvCxnSpPr>
+        <p:spPr>
+          <a:xfrm rot="16200000" flipH="1">
+            <a:off x="6516217" y="15799738"/>
+            <a:ext cx="260710" cy="602037"/>
+          </a:xfrm>
+          <a:prstGeom prst="bentConnector3">
+            <a:avLst>
+              <a:gd name="adj1" fmla="val 50000"/>
+            </a:avLst>
+          </a:prstGeom>
+          <a:ln w="19050">
+            <a:tailEnd type="arrow"/>
+          </a:ln>
+        </p:spPr>
+        <p:style>
+          <a:lnRef idx="1">
+            <a:schemeClr val="accent1"/>
+          </a:lnRef>
+          <a:fillRef idx="0">
+            <a:schemeClr val="accent1"/>
+          </a:fillRef>
+          <a:effectRef idx="0">
+            <a:schemeClr val="accent1"/>
+          </a:effectRef>
+          <a:fontRef idx="minor">
+            <a:schemeClr val="tx1"/>
+          </a:fontRef>
+        </p:style>
+      </p:cxnSp>
+      <p:sp>
+        <p:nvSpPr>
+          <p:cNvPr id="511" name="Прямоугольник 510">
+            <a:extLst>
+              <a:ext uri="{FF2B5EF4-FFF2-40B4-BE49-F238E27FC236}">
+                <a16:creationId xmlns:a16="http://schemas.microsoft.com/office/drawing/2014/main" id="{29342093-D9E4-4C0B-AB04-1B4C6FB72429}"/>
+              </a:ext>
+            </a:extLst>
+          </p:cNvPr>
+          <p:cNvSpPr/>
+          <p:nvPr/>
+        </p:nvSpPr>
+        <p:spPr>
+          <a:xfrm>
+            <a:off x="5888253" y="17057844"/>
+            <a:ext cx="926325" cy="540000"/>
+          </a:xfrm>
+          <a:prstGeom prst="rect">
+            <a:avLst/>
+          </a:prstGeom>
+          <a:solidFill>
+            <a:schemeClr val="bg1"/>
+          </a:solidFill>
+          <a:ln w="19050"/>
+        </p:spPr>
+        <p:style>
+          <a:lnRef idx="2">
+            <a:schemeClr val="accent1"/>
+          </a:lnRef>
+          <a:fillRef idx="1">
+            <a:schemeClr val="lt1"/>
+          </a:fillRef>
+          <a:effectRef idx="0">
+            <a:schemeClr val="accent1"/>
+          </a:effectRef>
+          <a:fontRef idx="minor">
+            <a:schemeClr val="dk1"/>
+          </a:fontRef>
+        </p:style>
+        <p:txBody>
+          <a:bodyPr lIns="124733" tIns="62367" rIns="124733" bIns="62367" rtlCol="0" anchor="ctr"/>
+          <a:lstStyle/>
+          <a:p>
+            <a:pPr algn="ctr"/>
+            <a:r>
+              <a:rPr lang="ru-RU" sz="700" dirty="0" err="1"/>
+              <a:t>Танжерская</a:t>
+            </a:r>
+            <a:r>
+              <a:rPr lang="ru-RU" sz="700" dirty="0"/>
+              <a:t> судостроительная верфь</a:t>
+            </a:r>
+          </a:p>
+        </p:txBody>
+      </p:sp>
+      <p:cxnSp>
+        <p:nvCxnSpPr>
+          <p:cNvPr id="512" name="Соединительная линия уступом 620">
+            <a:extLst>
+              <a:ext uri="{FF2B5EF4-FFF2-40B4-BE49-F238E27FC236}">
+                <a16:creationId xmlns:a16="http://schemas.microsoft.com/office/drawing/2014/main" id="{8E9AF91D-7B78-4A46-8C41-9626DB43DAD7}"/>
+              </a:ext>
+            </a:extLst>
+          </p:cNvPr>
+          <p:cNvCxnSpPr>
+            <a:cxnSpLocks/>
+            <a:stCxn id="302" idx="2"/>
+            <a:endCxn id="511" idx="0"/>
+          </p:cNvCxnSpPr>
+          <p:nvPr/>
+        </p:nvCxnSpPr>
+        <p:spPr>
+          <a:xfrm rot="16200000" flipH="1">
+            <a:off x="5804764" y="16511192"/>
+            <a:ext cx="1087442" cy="5862"/>
+          </a:xfrm>
+          <a:prstGeom prst="bentConnector3">
+            <a:avLst>
+              <a:gd name="adj1" fmla="val 50000"/>
+            </a:avLst>
+          </a:prstGeom>
+          <a:ln w="19050">
+            <a:tailEnd type="arrow"/>
+          </a:ln>
+        </p:spPr>
+        <p:style>
+          <a:lnRef idx="1">
+            <a:schemeClr val="accent1"/>
+          </a:lnRef>
+          <a:fillRef idx="0">
+            <a:schemeClr val="accent1"/>
+          </a:fillRef>
+          <a:effectRef idx="0">
+            <a:schemeClr val="accent1"/>
+          </a:effectRef>
+          <a:fontRef idx="minor">
+            <a:schemeClr val="tx1"/>
+          </a:fontRef>
+        </p:style>
+      </p:cxnSp>
+      <p:cxnSp>
+        <p:nvCxnSpPr>
+          <p:cNvPr id="507" name="Соединительная линия уступом 620">
+            <a:extLst>
+              <a:ext uri="{FF2B5EF4-FFF2-40B4-BE49-F238E27FC236}">
+                <a16:creationId xmlns:a16="http://schemas.microsoft.com/office/drawing/2014/main" id="{A10160AE-185D-4BBF-8C85-3CFE3904D664}"/>
+              </a:ext>
+            </a:extLst>
+          </p:cNvPr>
+          <p:cNvCxnSpPr>
+            <a:cxnSpLocks/>
+            <a:stCxn id="161" idx="2"/>
+            <a:endCxn id="160" idx="0"/>
+          </p:cNvCxnSpPr>
+          <p:nvPr/>
+        </p:nvCxnSpPr>
+        <p:spPr>
+          <a:xfrm rot="5400000">
+            <a:off x="7179578" y="19002766"/>
+            <a:ext cx="261343" cy="624841"/>
+          </a:xfrm>
+          <a:prstGeom prst="bentConnector3">
+            <a:avLst>
+              <a:gd name="adj1" fmla="val 50000"/>
+            </a:avLst>
+          </a:prstGeom>
+          <a:ln w="19050">
+            <a:tailEnd type="arrow"/>
+          </a:ln>
+        </p:spPr>
+        <p:style>
+          <a:lnRef idx="1">
+            <a:schemeClr val="accent1"/>
+          </a:lnRef>
+          <a:fillRef idx="0">
+            <a:schemeClr val="accent1"/>
+          </a:fillRef>
+          <a:effectRef idx="0">
+            <a:schemeClr val="accent1"/>
+          </a:effectRef>
+          <a:fontRef idx="minor">
+            <a:schemeClr val="tx1"/>
+          </a:fontRef>
+        </p:style>
+      </p:cxnSp>
+      <p:cxnSp>
+        <p:nvCxnSpPr>
+          <p:cNvPr id="513" name="Соединительная линия уступом 620">
+            <a:extLst>
+              <a:ext uri="{FF2B5EF4-FFF2-40B4-BE49-F238E27FC236}">
+                <a16:creationId xmlns:a16="http://schemas.microsoft.com/office/drawing/2014/main" id="{4141F6BE-135E-42B6-8DA8-5C6264A94EF0}"/>
+              </a:ext>
+            </a:extLst>
+          </p:cNvPr>
+          <p:cNvCxnSpPr>
+            <a:cxnSpLocks/>
+            <a:stCxn id="159" idx="2"/>
+            <a:endCxn id="164" idx="0"/>
+          </p:cNvCxnSpPr>
+          <p:nvPr/>
+        </p:nvCxnSpPr>
+        <p:spPr>
+          <a:xfrm rot="16200000" flipH="1">
+            <a:off x="7488501" y="20295903"/>
+            <a:ext cx="260714" cy="1242058"/>
+          </a:xfrm>
+          <a:prstGeom prst="bentConnector3">
+            <a:avLst>
+              <a:gd name="adj1" fmla="val 50000"/>
+            </a:avLst>
+          </a:prstGeom>
+          <a:ln w="19050">
             <a:tailEnd type="arrow"/>
           </a:ln>
         </p:spPr>

--- a/Наработки/диздоки/Марокко/Марокко.pptx
+++ b/Наработки/диздоки/Марокко/Марокко.pptx
@@ -209,7 +209,7 @@
             <a:fld id="{33E3D7F9-E251-484C-A6FF-FA958879DF69}" type="datetimeFigureOut">
               <a:rPr lang="ru-RU" smtClean="0"/>
               <a:pPr/>
-              <a:t>22.06.2026</a:t>
+              <a:t>23.06.2026</a:t>
             </a:fld>
             <a:endParaRPr lang="ru-RU"/>
           </a:p>
@@ -699,7 +699,7 @@
             <a:fld id="{85A5DE44-605B-4D3B-B2B7-94543DF81A36}" type="datetimeFigureOut">
               <a:rPr lang="ru-RU" smtClean="0"/>
               <a:pPr/>
-              <a:t>22.06.2026</a:t>
+              <a:t>23.06.2026</a:t>
             </a:fld>
             <a:endParaRPr lang="ru-RU"/>
           </a:p>
@@ -871,7 +871,7 @@
             <a:fld id="{85A5DE44-605B-4D3B-B2B7-94543DF81A36}" type="datetimeFigureOut">
               <a:rPr lang="ru-RU" smtClean="0"/>
               <a:pPr/>
-              <a:t>22.06.2026</a:t>
+              <a:t>23.06.2026</a:t>
             </a:fld>
             <a:endParaRPr lang="ru-RU"/>
           </a:p>
@@ -1053,7 +1053,7 @@
             <a:fld id="{85A5DE44-605B-4D3B-B2B7-94543DF81A36}" type="datetimeFigureOut">
               <a:rPr lang="ru-RU" smtClean="0"/>
               <a:pPr/>
-              <a:t>22.06.2026</a:t>
+              <a:t>23.06.2026</a:t>
             </a:fld>
             <a:endParaRPr lang="ru-RU"/>
           </a:p>
@@ -1225,7 +1225,7 @@
             <a:fld id="{85A5DE44-605B-4D3B-B2B7-94543DF81A36}" type="datetimeFigureOut">
               <a:rPr lang="ru-RU" smtClean="0"/>
               <a:pPr/>
-              <a:t>22.06.2026</a:t>
+              <a:t>23.06.2026</a:t>
             </a:fld>
             <a:endParaRPr lang="ru-RU"/>
           </a:p>
@@ -1473,7 +1473,7 @@
             <a:fld id="{85A5DE44-605B-4D3B-B2B7-94543DF81A36}" type="datetimeFigureOut">
               <a:rPr lang="ru-RU" smtClean="0"/>
               <a:pPr/>
-              <a:t>22.06.2026</a:t>
+              <a:t>23.06.2026</a:t>
             </a:fld>
             <a:endParaRPr lang="ru-RU"/>
           </a:p>
@@ -1707,7 +1707,7 @@
             <a:fld id="{85A5DE44-605B-4D3B-B2B7-94543DF81A36}" type="datetimeFigureOut">
               <a:rPr lang="ru-RU" smtClean="0"/>
               <a:pPr/>
-              <a:t>22.06.2026</a:t>
+              <a:t>23.06.2026</a:t>
             </a:fld>
             <a:endParaRPr lang="ru-RU"/>
           </a:p>
@@ -2076,7 +2076,7 @@
             <a:fld id="{85A5DE44-605B-4D3B-B2B7-94543DF81A36}" type="datetimeFigureOut">
               <a:rPr lang="ru-RU" smtClean="0"/>
               <a:pPr/>
-              <a:t>22.06.2026</a:t>
+              <a:t>23.06.2026</a:t>
             </a:fld>
             <a:endParaRPr lang="ru-RU"/>
           </a:p>
@@ -2196,7 +2196,7 @@
             <a:fld id="{85A5DE44-605B-4D3B-B2B7-94543DF81A36}" type="datetimeFigureOut">
               <a:rPr lang="ru-RU" smtClean="0"/>
               <a:pPr/>
-              <a:t>22.06.2026</a:t>
+              <a:t>23.06.2026</a:t>
             </a:fld>
             <a:endParaRPr lang="ru-RU"/>
           </a:p>
@@ -2293,7 +2293,7 @@
             <a:fld id="{85A5DE44-605B-4D3B-B2B7-94543DF81A36}" type="datetimeFigureOut">
               <a:rPr lang="ru-RU" smtClean="0"/>
               <a:pPr/>
-              <a:t>22.06.2026</a:t>
+              <a:t>23.06.2026</a:t>
             </a:fld>
             <a:endParaRPr lang="ru-RU"/>
           </a:p>
@@ -2572,7 +2572,7 @@
             <a:fld id="{85A5DE44-605B-4D3B-B2B7-94543DF81A36}" type="datetimeFigureOut">
               <a:rPr lang="ru-RU" smtClean="0"/>
               <a:pPr/>
-              <a:t>22.06.2026</a:t>
+              <a:t>23.06.2026</a:t>
             </a:fld>
             <a:endParaRPr lang="ru-RU"/>
           </a:p>
@@ -2831,7 +2831,7 @@
             <a:fld id="{85A5DE44-605B-4D3B-B2B7-94543DF81A36}" type="datetimeFigureOut">
               <a:rPr lang="ru-RU" smtClean="0"/>
               <a:pPr/>
-              <a:t>22.06.2026</a:t>
+              <a:t>23.06.2026</a:t>
             </a:fld>
             <a:endParaRPr lang="ru-RU"/>
           </a:p>
@@ -3046,7 +3046,7 @@
             <a:fld id="{85A5DE44-605B-4D3B-B2B7-94543DF81A36}" type="datetimeFigureOut">
               <a:rPr lang="ru-RU" smtClean="0"/>
               <a:pPr/>
-              <a:t>22.06.2026</a:t>
+              <a:t>23.06.2026</a:t>
             </a:fld>
             <a:endParaRPr lang="ru-RU"/>
           </a:p>
@@ -4027,77 +4027,8 @@
             </a:r>
             <a:r>
               <a:rPr lang="ru-RU" sz="700" dirty="0"/>
-              <a:t> вспомогательной службы (1937) </a:t>
-            </a:r>
-            <a:r>
-              <a:rPr lang="ru-RU" sz="100" dirty="0"/>
-              <a:t>(Стандартный </a:t>
-            </a:r>
-            <a:r>
-              <a:rPr lang="ru-RU" sz="100" dirty="0" err="1"/>
-              <a:t>гум</a:t>
-            </a:r>
-            <a:r>
-              <a:rPr lang="ru-RU" sz="100" dirty="0"/>
-              <a:t> представлял собой конно-стрелковое подразделение, эквивалентное роте. В его составе имелся верховой взвод (на лошадях или верблюдах), вьючный взвод, а также 3-4 стрелковых взвода. Такая организация позволяла </a:t>
-            </a:r>
-            <a:r>
-              <a:rPr lang="ru-RU" sz="100" dirty="0" err="1"/>
-              <a:t>гумам</a:t>
-            </a:r>
-            <a:r>
-              <a:rPr lang="ru-RU" sz="100" dirty="0"/>
-              <a:t> вести автономные боевые действия в условиях горно-пустынной </a:t>
-            </a:r>
-            <a:r>
-              <a:rPr lang="ru-RU" sz="100" dirty="0" err="1"/>
-              <a:t>местности.Первый</a:t>
-            </a:r>
-            <a:r>
-              <a:rPr lang="ru-RU" sz="100" dirty="0"/>
-              <a:t> марокканский </a:t>
-            </a:r>
-            <a:r>
-              <a:rPr lang="ru-RU" sz="100" dirty="0" err="1"/>
-              <a:t>гум</a:t>
-            </a:r>
-            <a:r>
-              <a:rPr lang="ru-RU" sz="100" dirty="0"/>
-              <a:t> был сформирован 5 ноября 1908 г. В дальнейшем их число постоянно росло. Если в 1914 г. в армии протектората насчитывалось 15 </a:t>
-            </a:r>
-            <a:r>
-              <a:rPr lang="ru-RU" sz="100" dirty="0" err="1"/>
-              <a:t>гумов</a:t>
-            </a:r>
-            <a:r>
-              <a:rPr lang="ru-RU" sz="100" dirty="0"/>
-              <a:t>, к 1934 г. — году, связываемому французами с завершением операции по “примирению” Марокко — их насчитывалось уже 51. Как правило, каждым </a:t>
-            </a:r>
-            <a:r>
-              <a:rPr lang="ru-RU" sz="100" dirty="0" err="1"/>
-              <a:t>гумом</a:t>
-            </a:r>
-            <a:r>
-              <a:rPr lang="ru-RU" sz="100" dirty="0"/>
-              <a:t> командовал французский офицер из состава Службы туземных дел. В 1937 г. был создан институт </a:t>
-            </a:r>
-            <a:r>
-              <a:rPr lang="ru-RU" sz="100" dirty="0" err="1"/>
-              <a:t>тумов</a:t>
-            </a:r>
-            <a:r>
-              <a:rPr lang="ru-RU" sz="100" dirty="0"/>
-              <a:t> вспомогательной службы. Забегая вперед, необходимо отметить, что к началу Второй мировой войны в войсках протектората насчитывалось 57 действующих </a:t>
-            </a:r>
-            <a:r>
-              <a:rPr lang="ru-RU" sz="100" dirty="0" err="1"/>
-              <a:t>гумов</a:t>
-            </a:r>
-            <a:r>
-              <a:rPr lang="ru-RU" sz="100" dirty="0"/>
-              <a:t> и 64 вспомогательных)</a:t>
-            </a:r>
-            <a:endParaRPr lang="ru-RU" sz="700" dirty="0"/>
+              <a:t> вспомогательной службы</a:t>
+            </a:r>
           </a:p>
         </p:txBody>
       </p:sp>
@@ -4153,22 +4084,6 @@
               <a:rPr lang="ru-RU" sz="700" dirty="0" err="1"/>
               <a:t>гумов</a:t>
             </a:r>
-            <a:r>
-              <a:rPr lang="ru-RU" sz="700" dirty="0"/>
-              <a:t> (1940) </a:t>
-            </a:r>
-            <a:r>
-              <a:rPr lang="ru-RU" sz="300" dirty="0"/>
-              <a:t>(После мобилизации число первых было доведено до 121. К апрелю 1940 г. они были сведены в 16 таборов (батальонов) по 4-5 </a:t>
-            </a:r>
-            <a:r>
-              <a:rPr lang="ru-RU" sz="300" dirty="0" err="1"/>
-              <a:t>гумов</a:t>
-            </a:r>
-            <a:r>
-              <a:rPr lang="ru-RU" sz="300" dirty="0"/>
-              <a:t> в каждом.)</a:t>
-            </a:r>
             <a:endParaRPr lang="ru-RU" sz="700" dirty="0"/>
           </a:p>
         </p:txBody>
@@ -4219,61 +4134,8 @@
             <a:pPr algn="ctr"/>
             <a:r>
               <a:rPr lang="ru-RU" sz="700" dirty="0"/>
-              <a:t>Директива </a:t>
-            </a:r>
-            <a:r>
-              <a:rPr lang="ru-RU" sz="700" dirty="0" err="1"/>
-              <a:t>Ногеса</a:t>
-            </a:r>
-            <a:r>
-              <a:rPr lang="ru-RU" sz="700" dirty="0"/>
-              <a:t>: Мобилизация племен Атласа </a:t>
-            </a:r>
-            <a:r>
-              <a:rPr lang="ru-RU" sz="100" dirty="0"/>
-              <a:t>(С 1936 года Франция резко увеличила набор коренных марокканцев (арабов и берберов) в ряды регулярных частей — </a:t>
-            </a:r>
-            <a:r>
-              <a:rPr lang="ru-RU" sz="100" dirty="0" err="1"/>
-              <a:t>Тиральеров</a:t>
-            </a:r>
-            <a:r>
-              <a:rPr lang="ru-RU" sz="100" dirty="0"/>
-              <a:t> (Тайлеров) и </a:t>
-            </a:r>
-            <a:r>
-              <a:rPr lang="ru-RU" sz="100" dirty="0" err="1"/>
-              <a:t>Гумьеров</a:t>
-            </a:r>
-            <a:r>
-              <a:rPr lang="ru-RU" sz="100" dirty="0"/>
-              <a:t>. К 1939 году </a:t>
-            </a:r>
-            <a:r>
-              <a:rPr lang="ru-RU" sz="100" dirty="0" err="1"/>
-              <a:t>Ногесу</a:t>
-            </a:r>
-            <a:r>
-              <a:rPr lang="ru-RU" sz="100" dirty="0"/>
-              <a:t> удалось поставить под ружье невиданное для колонии число местных </a:t>
-            </a:r>
-            <a:r>
-              <a:rPr lang="ru-RU" sz="100" dirty="0" err="1"/>
-              <a:t>жителей.Эффект</a:t>
-            </a:r>
-            <a:r>
-              <a:rPr lang="ru-RU" sz="100" dirty="0"/>
-              <a:t> в HOI 4: Дает постоянный бонус к призывному населению (</a:t>
-            </a:r>
-            <a:r>
-              <a:rPr lang="ru-RU" sz="100" dirty="0" err="1"/>
-              <a:t>Manpower</a:t>
-            </a:r>
-            <a:r>
-              <a:rPr lang="ru-RU" sz="100" dirty="0"/>
-              <a:t>) +2.50% на национальных территориях. Снижает время подготовки пехотных дивизий на 10%.)</a:t>
-            </a:r>
-            <a:endParaRPr lang="ru-RU" sz="700" dirty="0"/>
+              <a:t>Реформирование Марокканских стрелков</a:t>
+            </a:r>
           </a:p>
         </p:txBody>
       </p:sp>
@@ -4323,53 +4185,8 @@
             <a:pPr algn="ctr"/>
             <a:r>
               <a:rPr lang="ru-RU" sz="700" dirty="0"/>
-              <a:t>Развертывание 1-й и 3-й Марокканских пехотных дивизий </a:t>
-            </a:r>
-            <a:r>
-              <a:rPr lang="ru-RU" sz="100" dirty="0"/>
-              <a:t>(В конце 1930-х годов в Марокко были сформированы и доукомплектованы элитные марокканские пулеметные и пехотные дивизии (</a:t>
-            </a:r>
-            <a:r>
-              <a:rPr lang="ru-RU" sz="100" dirty="0" err="1"/>
-              <a:t>Division</a:t>
-            </a:r>
-            <a:r>
-              <a:rPr lang="ru-RU" sz="100" dirty="0"/>
-              <a:t> </a:t>
-            </a:r>
-            <a:r>
-              <a:rPr lang="ru-RU" sz="100" dirty="0" err="1"/>
-              <a:t>d'Infanterie</a:t>
-            </a:r>
-            <a:r>
-              <a:rPr lang="ru-RU" sz="100" dirty="0"/>
-              <a:t> </a:t>
-            </a:r>
-            <a:r>
-              <a:rPr lang="ru-RU" sz="100" dirty="0" err="1"/>
-              <a:t>Marocaine</a:t>
-            </a:r>
-            <a:r>
-              <a:rPr lang="ru-RU" sz="100" dirty="0"/>
-              <a:t>). В 1939 году их перебросили во Францию, где они героически проявили себя в боях 1940 года (например, при </a:t>
-            </a:r>
-            <a:r>
-              <a:rPr lang="ru-RU" sz="100" dirty="0" err="1"/>
-              <a:t>Жамблу</a:t>
-            </a:r>
-            <a:r>
-              <a:rPr lang="ru-RU" sz="100" dirty="0"/>
-              <a:t>).Эффект в HOI 4: </a:t>
-            </a:r>
-            <a:r>
-              <a:rPr lang="ru-RU" sz="100" dirty="0" err="1"/>
-              <a:t>Спавнит</a:t>
-            </a:r>
-            <a:r>
-              <a:rPr lang="ru-RU" sz="100" dirty="0"/>
-              <a:t> в Касабланке 2 пехотные дивизии с полной организацией, оснащенные уникальным батальоном поддержки (усиленная ПВО/противотанковое оружие).)</a:t>
-            </a:r>
-            <a:endParaRPr lang="ru-RU" sz="700" dirty="0"/>
+              <a:t>Развертывание 1-й и 3-й Марокканских пехотных дивизий</a:t>
+            </a:r>
           </a:p>
         </p:txBody>
       </p:sp>
@@ -4509,21 +4326,8 @@
             <a:pPr algn="ctr"/>
             <a:r>
               <a:rPr lang="ru-RU" sz="700" dirty="0"/>
-              <a:t>Интеграция Иностранного легиона в гарнизон Феса </a:t>
-            </a:r>
-            <a:r>
-              <a:rPr lang="ru-RU" sz="100" dirty="0"/>
-              <a:t>(2-й иностранный пехотный полк (2e REI) Иностранного легиона базировался в Марокко и в этот период активно укреплял внутренние рубежи протектората для предотвращения диверсий </a:t>
-            </a:r>
-            <a:r>
-              <a:rPr lang="ru-RU" sz="100" dirty="0" err="1"/>
-              <a:t>Оси.Эффект</a:t>
-            </a:r>
-            <a:r>
-              <a:rPr lang="ru-RU" sz="100" dirty="0"/>
-              <a:t> в HOI 4: Добавляет 1 элитную дивизию Иностранного легиона. Дает национальный дух «Жесткий колониальный порядок» (-15% к скорости роста сопротивления в североафриканских регионах).)</a:t>
-            </a:r>
-            <a:endParaRPr lang="ru-RU" sz="700" dirty="0"/>
+              <a:t>Интеграция Иностранного легиона в гарнизон Феса</a:t>
+            </a:r>
           </a:p>
         </p:txBody>
       </p:sp>
@@ -4622,31 +4426,7 @@
             </a:r>
             <a:r>
               <a:rPr lang="ru-RU" sz="100" dirty="0"/>
-              <a:t>(Французское командование опасалось, что профашистские силы из Испанского Сахары или итальянские войска из Ливии могут нанести удар через пустыню во фланг. Были созданы специальные мобильные дозоры (</a:t>
-            </a:r>
-            <a:r>
-              <a:rPr lang="ru-RU" sz="100" dirty="0" err="1"/>
-              <a:t>Compagnies</a:t>
-            </a:r>
-            <a:r>
-              <a:rPr lang="ru-RU" sz="100" dirty="0"/>
-              <a:t> </a:t>
-            </a:r>
-            <a:r>
-              <a:rPr lang="ru-RU" sz="100" dirty="0" err="1"/>
-              <a:t>Sahariennes</a:t>
-            </a:r>
-            <a:r>
-              <a:rPr lang="ru-RU" sz="100" dirty="0"/>
-              <a:t>).Эффект в HOI 4: Дает войскам национальный дух «Адаптация к пустыне» (+15% к защите и -10% к истощению (</a:t>
-            </a:r>
-            <a:r>
-              <a:rPr lang="ru-RU" sz="100" dirty="0" err="1"/>
-              <a:t>Attrition</a:t>
-            </a:r>
-            <a:r>
-              <a:rPr lang="ru-RU" sz="100" dirty="0"/>
-              <a:t>) в пустынных регионах).)</a:t>
+              <a:t>(</a:t>
             </a:r>
             <a:endParaRPr lang="ru-RU" sz="700" dirty="0"/>
           </a:p>
@@ -4698,45 +4478,8 @@
             <a:pPr algn="ctr"/>
             <a:r>
               <a:rPr lang="ru-RU" sz="700" dirty="0"/>
-              <a:t>Фортификация прохода Таза </a:t>
-            </a:r>
-            <a:r>
-              <a:rPr lang="ru-RU" sz="200" dirty="0"/>
-              <a:t>(Проход Таза — стратегический коридор между горами Риф и Атлас, связывающий Марокко с Алжиром. В 1938–1939 годах </a:t>
-            </a:r>
-            <a:r>
-              <a:rPr lang="ru-RU" sz="200" dirty="0" err="1"/>
-              <a:t>Ногес</a:t>
-            </a:r>
-            <a:r>
-              <a:rPr lang="ru-RU" sz="200" dirty="0"/>
-              <a:t> укрепил этот проход на случай прорыва испанских войск Франко на </a:t>
-            </a:r>
-            <a:r>
-              <a:rPr lang="ru-RU" sz="200" dirty="0" err="1"/>
-              <a:t>восток.Эффект</a:t>
-            </a:r>
-            <a:r>
-              <a:rPr lang="ru-RU" sz="200" dirty="0"/>
-              <a:t> в HOI 4: Строит сухопутные укрепления (</a:t>
-            </a:r>
-            <a:r>
-              <a:rPr lang="ru-RU" sz="200" dirty="0" err="1"/>
-              <a:t>Land</a:t>
-            </a:r>
-            <a:r>
-              <a:rPr lang="ru-RU" sz="200" dirty="0"/>
-              <a:t> </a:t>
-            </a:r>
-            <a:r>
-              <a:rPr lang="ru-RU" sz="200" dirty="0" err="1"/>
-              <a:t>Fort</a:t>
-            </a:r>
-            <a:r>
-              <a:rPr lang="ru-RU" sz="200" dirty="0"/>
-              <a:t>) 3-го уровня в провинции Таза.)</a:t>
-            </a:r>
-            <a:endParaRPr lang="ru-RU" sz="700" dirty="0"/>
+              <a:t>Фортификация прохода Таза</a:t>
+            </a:r>
           </a:p>
         </p:txBody>
       </p:sp>
@@ -4968,21 +4711,8 @@
             <a:pPr algn="ctr"/>
             <a:r>
               <a:rPr lang="ru-RU" sz="700" dirty="0"/>
-              <a:t>Арсенал в Касабланке </a:t>
-            </a:r>
-            <a:r>
-              <a:rPr lang="ru-RU" sz="100" dirty="0"/>
-              <a:t>(Понимая уязвимость морских путей из метрополии, французское командование в 1937 году начало расширять склады боеприпасов и ремонтные мастерские в Марокко, чтобы армия могла воевать автономно как минимум 6 </a:t>
-            </a:r>
-            <a:r>
-              <a:rPr lang="ru-RU" sz="100" dirty="0" err="1"/>
-              <a:t>месяцев.Эффект</a:t>
-            </a:r>
-            <a:r>
-              <a:rPr lang="ru-RU" sz="100" dirty="0"/>
-              <a:t> в HOI 4: Добавляет 1 военную фабрику в Касабланку. Увеличивает максимальную емкость региональных складов снабжения на +20%.)</a:t>
-            </a:r>
-            <a:endParaRPr lang="ru-RU" sz="700" dirty="0"/>
+              <a:t>Арсенал в Касабланке</a:t>
+            </a:r>
           </a:p>
         </p:txBody>
       </p:sp>
@@ -5281,19 +5011,19 @@
           </p:cNvPr>
           <p:cNvCxnSpPr>
             <a:cxnSpLocks/>
-            <a:stCxn id="50" idx="2"/>
+            <a:stCxn id="67" idx="2"/>
             <a:endCxn id="43" idx="0"/>
           </p:cNvCxnSpPr>
           <p:nvPr/>
         </p:nvCxnSpPr>
         <p:spPr>
           <a:xfrm rot="16200000" flipH="1">
-            <a:off x="15447131" y="16838377"/>
-            <a:ext cx="1096564" cy="628066"/>
+            <a:off x="15856095" y="17247340"/>
+            <a:ext cx="278635" cy="628067"/>
           </a:xfrm>
           <a:prstGeom prst="bentConnector3">
             <a:avLst>
-              <a:gd name="adj1" fmla="val 11433"/>
+              <a:gd name="adj1" fmla="val 50000"/>
             </a:avLst>
           </a:prstGeom>
           <a:ln w="19050">
@@ -5598,53 +5328,8 @@
             <a:pPr algn="ctr"/>
             <a:r>
               <a:rPr lang="ru-RU" sz="700" dirty="0"/>
-              <a:t>Реформирование Марокканских стрелков </a:t>
-            </a:r>
-            <a:r>
-              <a:rPr lang="ru-RU" sz="100" dirty="0"/>
-              <a:t>(С 1936 года Франция резко увеличила набор коренных марокканцев (арабов и берберов) в ряды регулярных частей — </a:t>
-            </a:r>
-            <a:r>
-              <a:rPr lang="ru-RU" sz="100" dirty="0" err="1"/>
-              <a:t>Тиральеров</a:t>
-            </a:r>
-            <a:r>
-              <a:rPr lang="ru-RU" sz="100" dirty="0"/>
-              <a:t> (Тайлеров) и </a:t>
-            </a:r>
-            <a:r>
-              <a:rPr lang="ru-RU" sz="100" dirty="0" err="1"/>
-              <a:t>Гумьеров</a:t>
-            </a:r>
-            <a:r>
-              <a:rPr lang="ru-RU" sz="100" dirty="0"/>
-              <a:t>. К 1939 году </a:t>
-            </a:r>
-            <a:r>
-              <a:rPr lang="ru-RU" sz="100" dirty="0" err="1"/>
-              <a:t>Ногесу</a:t>
-            </a:r>
-            <a:r>
-              <a:rPr lang="ru-RU" sz="100" dirty="0"/>
-              <a:t> удалось поставить под ружье невиданное для колонии число местных </a:t>
-            </a:r>
-            <a:r>
-              <a:rPr lang="ru-RU" sz="100" dirty="0" err="1"/>
-              <a:t>жителей.Эффект</a:t>
-            </a:r>
-            <a:r>
-              <a:rPr lang="ru-RU" sz="100" dirty="0"/>
-              <a:t> в HOI 4: Дает постоянный бонус к призывному населению (</a:t>
-            </a:r>
-            <a:r>
-              <a:rPr lang="ru-RU" sz="100" dirty="0" err="1"/>
-              <a:t>Manpower</a:t>
-            </a:r>
-            <a:r>
-              <a:rPr lang="ru-RU" sz="100" dirty="0"/>
-              <a:t>) +2.50% на национальных территориях. Снижает время подготовки пехотных дивизий на 10%.)</a:t>
-            </a:r>
-            <a:endParaRPr lang="ru-RU" sz="700" dirty="0"/>
+              <a:t>Мобилизовать племена с равнин</a:t>
+            </a:r>
           </a:p>
         </p:txBody>
       </p:sp>
@@ -5739,45 +5424,8 @@
             <a:pPr algn="ctr"/>
             <a:r>
               <a:rPr lang="ru-RU" sz="700" dirty="0"/>
-              <a:t>Марокканские спаги: Рождение моторизованной кавалерии (Полки марокканских </a:t>
-            </a:r>
-            <a:r>
-              <a:rPr lang="ru-RU" sz="700" dirty="0" err="1"/>
-              <a:t>спагов</a:t>
-            </a:r>
-            <a:r>
-              <a:rPr lang="ru-RU" sz="700" dirty="0"/>
-              <a:t> </a:t>
-            </a:r>
-            <a:r>
-              <a:rPr lang="ru-RU" sz="100" dirty="0"/>
-              <a:t>(элитная туземная кавалерия) славились своей стремительностью. В 1937–1938 годах 1-й и 2-й полки </a:t>
-            </a:r>
-            <a:r>
-              <a:rPr lang="ru-RU" sz="100" dirty="0" err="1"/>
-              <a:t>спагов</a:t>
-            </a:r>
-            <a:r>
-              <a:rPr lang="ru-RU" sz="100" dirty="0"/>
-              <a:t> начали частично пересаживать на мотоциклы и легкие бронеавтомобили, создавая разведывательные группы (GRDI).Эффект в HOI 4: Дает скидку 50% на исследование бронеавтомобилей (</a:t>
-            </a:r>
-            <a:r>
-              <a:rPr lang="ru-RU" sz="100" dirty="0" err="1"/>
-              <a:t>Armored</a:t>
-            </a:r>
-            <a:r>
-              <a:rPr lang="ru-RU" sz="100" dirty="0"/>
-              <a:t> </a:t>
-            </a:r>
-            <a:r>
-              <a:rPr lang="ru-RU" sz="100" dirty="0" err="1"/>
-              <a:t>Cars</a:t>
-            </a:r>
-            <a:r>
-              <a:rPr lang="ru-RU" sz="100" dirty="0"/>
-              <a:t>) или моторизованной пехоты. Увеличивает максимальную скорость кавалерийских и моторизованных шаблонов на +10%.)</a:t>
-            </a:r>
-            <a:endParaRPr lang="ru-RU" sz="700" dirty="0"/>
+              <a:t>Марокканские спаги</a:t>
+            </a:r>
           </a:p>
         </p:txBody>
       </p:sp>
@@ -11625,7 +11273,7 @@
             <a:pPr algn="ctr"/>
             <a:r>
               <a:rPr lang="ru-RU" sz="700" dirty="0"/>
-              <a:t>Принять французские инвестиции</a:t>
+              <a:t>Запросить оружие для гарнизонов</a:t>
             </a:r>
           </a:p>
         </p:txBody>
@@ -11730,7 +11378,7 @@
             <a:pPr algn="ctr"/>
             <a:r>
               <a:rPr lang="ru-RU" sz="700" dirty="0"/>
-              <a:t>Запросить оружие для гарнизонов</a:t>
+              <a:t>Запретить любые сходки рабочих</a:t>
             </a:r>
           </a:p>
         </p:txBody>
@@ -12037,7 +11685,7 @@
         </p:nvSpPr>
         <p:spPr>
           <a:xfrm>
-            <a:off x="4098299" y="3425128"/>
+            <a:off x="4680148" y="3434161"/>
             <a:ext cx="926325" cy="540000"/>
           </a:xfrm>
           <a:prstGeom prst="rect">
@@ -12094,8 +11742,8 @@
         </p:nvCxnSpPr>
         <p:spPr>
           <a:xfrm rot="5400000">
-            <a:off x="4711516" y="2992705"/>
-            <a:ext cx="282369" cy="582476"/>
+            <a:off x="4997924" y="3288147"/>
+            <a:ext cx="291402" cy="627"/>
           </a:xfrm>
           <a:prstGeom prst="bentConnector3">
             <a:avLst>
@@ -12346,7 +11994,7 @@
         </p:nvSpPr>
         <p:spPr>
           <a:xfrm>
-            <a:off x="4102345" y="4237644"/>
+            <a:off x="4679402" y="4255811"/>
             <a:ext cx="926325" cy="540000"/>
           </a:xfrm>
           <a:prstGeom prst="rect">
@@ -12402,9 +12050,9 @@
           <p:nvPr/>
         </p:nvCxnSpPr>
         <p:spPr>
-          <a:xfrm rot="16200000" flipH="1">
-            <a:off x="4427227" y="4099363"/>
-            <a:ext cx="272516" cy="4046"/>
+          <a:xfrm rot="5400000">
+            <a:off x="5002113" y="4114613"/>
+            <a:ext cx="281650" cy="746"/>
           </a:xfrm>
           <a:prstGeom prst="bentConnector3">
             <a:avLst>
@@ -13098,7 +12746,7 @@
             <a:pPr algn="ctr"/>
             <a:r>
               <a:rPr lang="ru-RU" sz="700" dirty="0"/>
-              <a:t>Запретить любые сходки рабочих</a:t>
+              <a:t>Принять французские инвестиции</a:t>
             </a:r>
           </a:p>
         </p:txBody>
@@ -15591,7 +15239,7 @@
         </p:nvSpPr>
         <p:spPr>
           <a:xfrm>
-            <a:off x="7054131" y="6657857"/>
+            <a:off x="7054131" y="6672146"/>
             <a:ext cx="926325" cy="540000"/>
           </a:xfrm>
           <a:prstGeom prst="rect">
@@ -15658,12 +15306,12 @@
         </p:nvCxnSpPr>
         <p:spPr>
           <a:xfrm rot="16200000" flipH="1">
-            <a:off x="6688127" y="5828690"/>
-            <a:ext cx="1072808" cy="585525"/>
+            <a:off x="6680983" y="5835834"/>
+            <a:ext cx="1087097" cy="585525"/>
           </a:xfrm>
           <a:prstGeom prst="bentConnector3">
             <a:avLst>
-              <a:gd name="adj1" fmla="val 12907"/>
+              <a:gd name="adj1" fmla="val 12762"/>
             </a:avLst>
           </a:prstGeom>
           <a:ln w="19050">
@@ -15703,8 +15351,8 @@
         </p:nvCxnSpPr>
         <p:spPr>
           <a:xfrm rot="5400000">
-            <a:off x="7088182" y="7038127"/>
-            <a:ext cx="269383" cy="588843"/>
+            <a:off x="7095326" y="7045272"/>
+            <a:ext cx="255094" cy="588843"/>
           </a:xfrm>
           <a:prstGeom prst="bentConnector3">
             <a:avLst>
@@ -16219,34 +15867,6 @@
             <a:br>
               <a:rPr lang="ru-RU" sz="700" dirty="0"/>
             </a:br>
-            <a:r>
-              <a:rPr lang="ru-RU" sz="200" dirty="0"/>
-              <a:t>(Фокус: «Проект </a:t>
-            </a:r>
-            <a:r>
-              <a:rPr lang="ru-RU" sz="200" dirty="0" err="1"/>
-              <a:t>Нуассер</a:t>
-            </a:r>
-            <a:r>
-              <a:rPr lang="ru-RU" sz="200" dirty="0"/>
-              <a:t>» (Аэродром Касабланки)Исторический контекст: В конце войны США начали закладывать в Марокко гигантские взлетно-посадочные полосы (в будущем — база </a:t>
-            </a:r>
-            <a:r>
-              <a:rPr lang="ru-RU" sz="200" dirty="0" err="1"/>
-              <a:t>Нуассер</a:t>
-            </a:r>
-            <a:r>
-              <a:rPr lang="ru-RU" sz="200" dirty="0"/>
-              <a:t>). Они проектировались под новейшие тяжелые бомбардировщики на случай затяжной </a:t>
-            </a:r>
-            <a:r>
-              <a:rPr lang="ru-RU" sz="200" dirty="0" err="1"/>
-              <a:t>войны.Эффекты</a:t>
-            </a:r>
-            <a:r>
-              <a:rPr lang="ru-RU" sz="200" dirty="0"/>
-              <a:t> в игре: Дает скидку \(50\%\) на исследование стратегических бомбардировщиков и увеличивает максимальный размер авиабаз в Марокко.)</a:t>
-            </a:r>
             <a:endParaRPr lang="ru-RU" sz="700" dirty="0"/>
           </a:p>
         </p:txBody>
@@ -16318,7 +15938,7 @@
         </p:nvSpPr>
         <p:spPr>
           <a:xfrm>
-            <a:off x="4092450" y="5854962"/>
+            <a:off x="4681737" y="5860159"/>
             <a:ext cx="926325" cy="540000"/>
           </a:xfrm>
           <a:prstGeom prst="rect">
@@ -16354,14 +15974,6 @@
               <a:rPr lang="ru-RU" sz="700" dirty="0"/>
               <a:t>Модернизация порта Касабланки</a:t>
             </a:r>
-            <a:br>
-              <a:rPr lang="ru-RU" sz="700" dirty="0"/>
-            </a:br>
-            <a:r>
-              <a:rPr lang="ru-RU" sz="200" dirty="0"/>
-              <a:t>(Исторический контекст: Во время войны через Касабланку шло до 80% всей международной торговли Северной Африки. Союзники радикально увеличили пропускную способность доков для приема сотен американских кораблей снабжения «Либерти».)</a:t>
-            </a:r>
-            <a:endParaRPr lang="ru-RU" sz="700" dirty="0"/>
           </a:p>
         </p:txBody>
       </p:sp>
@@ -16379,7 +15991,7 @@
         </p:nvSpPr>
         <p:spPr>
           <a:xfrm>
-            <a:off x="5270896" y="7460627"/>
+            <a:off x="5270896" y="7441575"/>
             <a:ext cx="926325" cy="540000"/>
           </a:xfrm>
           <a:prstGeom prst="rect">
@@ -16420,10 +16032,10 @@
       </p:sp>
       <p:sp>
         <p:nvSpPr>
-          <p:cNvPr id="371" name="Прямоугольник 370">
-            <a:extLst>
-              <a:ext uri="{FF2B5EF4-FFF2-40B4-BE49-F238E27FC236}">
-                <a16:creationId xmlns:a16="http://schemas.microsoft.com/office/drawing/2014/main" id="{8F135ABC-3BC0-43BB-BBED-4C8E0EB2515E}"/>
+          <p:cNvPr id="372" name="Прямоугольник 371">
+            <a:extLst>
+              <a:ext uri="{FF2B5EF4-FFF2-40B4-BE49-F238E27FC236}">
+                <a16:creationId xmlns:a16="http://schemas.microsoft.com/office/drawing/2014/main" id="{7DE89301-4366-4909-AA18-B24463FAB130}"/>
               </a:ext>
             </a:extLst>
           </p:cNvPr>
@@ -16432,7 +16044,7 @@
         </p:nvSpPr>
         <p:spPr>
           <a:xfrm>
-            <a:off x="5274566" y="5845935"/>
+            <a:off x="3508416" y="6668555"/>
             <a:ext cx="926325" cy="540000"/>
           </a:xfrm>
           <a:prstGeom prst="rect">
@@ -16466,17 +16078,62 @@
             <a:pPr algn="ctr"/>
             <a:r>
               <a:rPr lang="ru-RU" sz="700" dirty="0"/>
-              <a:t>Запретить любые сходки и митинги</a:t>
+              <a:t>Подводя итоги «Факела»</a:t>
             </a:r>
           </a:p>
         </p:txBody>
       </p:sp>
+      <p:cxnSp>
+        <p:nvCxnSpPr>
+          <p:cNvPr id="373" name="Соединительная линия уступом 620">
+            <a:extLst>
+              <a:ext uri="{FF2B5EF4-FFF2-40B4-BE49-F238E27FC236}">
+                <a16:creationId xmlns:a16="http://schemas.microsoft.com/office/drawing/2014/main" id="{7E967D57-8385-4220-BDF1-7187168513C4}"/>
+              </a:ext>
+            </a:extLst>
+          </p:cNvPr>
+          <p:cNvCxnSpPr>
+            <a:cxnSpLocks/>
+            <a:stCxn id="292" idx="2"/>
+            <a:endCxn id="368" idx="0"/>
+          </p:cNvCxnSpPr>
+          <p:nvPr/>
+        </p:nvCxnSpPr>
+        <p:spPr>
+          <a:xfrm rot="5400000">
+            <a:off x="4433802" y="4333674"/>
+            <a:ext cx="246627" cy="1170901"/>
+          </a:xfrm>
+          <a:prstGeom prst="bentConnector3">
+            <a:avLst>
+              <a:gd name="adj1" fmla="val 50000"/>
+            </a:avLst>
+          </a:prstGeom>
+          <a:ln w="19050">
+            <a:tailEnd type="arrow"/>
+          </a:ln>
+        </p:spPr>
+        <p:style>
+          <a:lnRef idx="1">
+            <a:schemeClr val="accent1"/>
+          </a:lnRef>
+          <a:fillRef idx="0">
+            <a:schemeClr val="accent1"/>
+          </a:fillRef>
+          <a:effectRef idx="0">
+            <a:schemeClr val="accent1"/>
+          </a:effectRef>
+          <a:fontRef idx="minor">
+            <a:schemeClr val="tx1"/>
+          </a:fontRef>
+        </p:style>
+      </p:cxnSp>
       <p:sp>
         <p:nvSpPr>
-          <p:cNvPr id="372" name="Прямоугольник 371">
-            <a:extLst>
-              <a:ext uri="{FF2B5EF4-FFF2-40B4-BE49-F238E27FC236}">
-                <a16:creationId xmlns:a16="http://schemas.microsoft.com/office/drawing/2014/main" id="{7DE89301-4366-4909-AA18-B24463FAB130}"/>
+          <p:cNvPr id="374" name="Прямоугольник 373">
+            <a:extLst>
+              <a:ext uri="{FF2B5EF4-FFF2-40B4-BE49-F238E27FC236}">
+                <a16:creationId xmlns:a16="http://schemas.microsoft.com/office/drawing/2014/main" id="{AA67ACCE-9C2A-4946-884C-805DF0C819AE}"/>
               </a:ext>
             </a:extLst>
           </p:cNvPr>
@@ -16485,7 +16142,7 @@
         </p:nvSpPr>
         <p:spPr>
           <a:xfrm>
-            <a:off x="3508416" y="6668555"/>
+            <a:off x="5273503" y="5039392"/>
             <a:ext cx="926325" cy="540000"/>
           </a:xfrm>
           <a:prstGeom prst="rect">
@@ -16519,105 +16176,7 @@
             <a:pPr algn="ctr"/>
             <a:r>
               <a:rPr lang="ru-RU" sz="700" dirty="0"/>
-              <a:t>Подводя итоги «Факела»</a:t>
-            </a:r>
-          </a:p>
-        </p:txBody>
-      </p:sp>
-      <p:cxnSp>
-        <p:nvCxnSpPr>
-          <p:cNvPr id="373" name="Соединительная линия уступом 620">
-            <a:extLst>
-              <a:ext uri="{FF2B5EF4-FFF2-40B4-BE49-F238E27FC236}">
-                <a16:creationId xmlns:a16="http://schemas.microsoft.com/office/drawing/2014/main" id="{7E967D57-8385-4220-BDF1-7187168513C4}"/>
-              </a:ext>
-            </a:extLst>
-          </p:cNvPr>
-          <p:cNvCxnSpPr>
-            <a:cxnSpLocks/>
-            <a:stCxn id="292" idx="2"/>
-            <a:endCxn id="368" idx="0"/>
-          </p:cNvCxnSpPr>
-          <p:nvPr/>
-        </p:nvCxnSpPr>
-        <p:spPr>
-          <a:xfrm rot="5400000">
-            <a:off x="4136189" y="4613119"/>
-            <a:ext cx="264794" cy="593844"/>
-          </a:xfrm>
-          <a:prstGeom prst="bentConnector3">
-            <a:avLst>
-              <a:gd name="adj1" fmla="val 50000"/>
-            </a:avLst>
-          </a:prstGeom>
-          <a:ln w="19050">
-            <a:tailEnd type="arrow"/>
-          </a:ln>
-        </p:spPr>
-        <p:style>
-          <a:lnRef idx="1">
-            <a:schemeClr val="accent1"/>
-          </a:lnRef>
-          <a:fillRef idx="0">
-            <a:schemeClr val="accent1"/>
-          </a:fillRef>
-          <a:effectRef idx="0">
-            <a:schemeClr val="accent1"/>
-          </a:effectRef>
-          <a:fontRef idx="minor">
-            <a:schemeClr val="tx1"/>
-          </a:fontRef>
-        </p:style>
-      </p:cxnSp>
-      <p:sp>
-        <p:nvSpPr>
-          <p:cNvPr id="374" name="Прямоугольник 373">
-            <a:extLst>
-              <a:ext uri="{FF2B5EF4-FFF2-40B4-BE49-F238E27FC236}">
-                <a16:creationId xmlns:a16="http://schemas.microsoft.com/office/drawing/2014/main" id="{AA67ACCE-9C2A-4946-884C-805DF0C819AE}"/>
-              </a:ext>
-            </a:extLst>
-          </p:cNvPr>
-          <p:cNvSpPr/>
-          <p:nvPr/>
-        </p:nvSpPr>
-        <p:spPr>
-          <a:xfrm>
-            <a:off x="5273503" y="5034629"/>
-            <a:ext cx="926325" cy="540000"/>
-          </a:xfrm>
-          <a:prstGeom prst="rect">
-            <a:avLst/>
-          </a:prstGeom>
-          <a:solidFill>
-            <a:schemeClr val="bg1">
-              <a:lumMod val="50000"/>
-            </a:schemeClr>
-          </a:solidFill>
-          <a:ln w="19050"/>
-        </p:spPr>
-        <p:style>
-          <a:lnRef idx="2">
-            <a:schemeClr val="accent1"/>
-          </a:lnRef>
-          <a:fillRef idx="1">
-            <a:schemeClr val="lt1"/>
-          </a:fillRef>
-          <a:effectRef idx="0">
-            <a:schemeClr val="accent1"/>
-          </a:effectRef>
-          <a:fontRef idx="minor">
-            <a:schemeClr val="dk1"/>
-          </a:fontRef>
-        </p:style>
-        <p:txBody>
-          <a:bodyPr lIns="124733" tIns="62367" rIns="124733" bIns="62367" rtlCol="0" anchor="ctr"/>
-          <a:lstStyle/>
-          <a:p>
-            <a:pPr algn="ctr"/>
-            <a:r>
-              <a:rPr lang="ru-RU" sz="700" dirty="0"/>
-              <a:t>Запретить деятельность МКП</a:t>
+              <a:t>Запретить деятельность компартии</a:t>
             </a:r>
           </a:p>
         </p:txBody>
@@ -16640,53 +16199,8 @@
         </p:nvCxnSpPr>
         <p:spPr>
           <a:xfrm rot="16200000" flipH="1">
-            <a:off x="5022595" y="4320557"/>
-            <a:ext cx="256985" cy="1171158"/>
-          </a:xfrm>
-          <a:prstGeom prst="bentConnector3">
-            <a:avLst>
-              <a:gd name="adj1" fmla="val 50000"/>
-            </a:avLst>
-          </a:prstGeom>
-          <a:ln w="19050">
-            <a:tailEnd type="arrow"/>
-          </a:ln>
-        </p:spPr>
-        <p:style>
-          <a:lnRef idx="1">
-            <a:schemeClr val="accent1"/>
-          </a:lnRef>
-          <a:fillRef idx="0">
-            <a:schemeClr val="accent1"/>
-          </a:fillRef>
-          <a:effectRef idx="0">
-            <a:schemeClr val="accent1"/>
-          </a:effectRef>
-          <a:fontRef idx="minor">
-            <a:schemeClr val="tx1"/>
-          </a:fontRef>
-        </p:style>
-      </p:cxnSp>
-      <p:cxnSp>
-        <p:nvCxnSpPr>
-          <p:cNvPr id="376" name="Соединительная линия уступом 620">
-            <a:extLst>
-              <a:ext uri="{FF2B5EF4-FFF2-40B4-BE49-F238E27FC236}">
-                <a16:creationId xmlns:a16="http://schemas.microsoft.com/office/drawing/2014/main" id="{5267BC9B-273F-4E1F-9D74-30F24C0A212D}"/>
-              </a:ext>
-            </a:extLst>
-          </p:cNvPr>
-          <p:cNvCxnSpPr>
-            <a:cxnSpLocks/>
-            <a:stCxn id="374" idx="2"/>
-            <a:endCxn id="371" idx="0"/>
-          </p:cNvCxnSpPr>
-          <p:nvPr/>
-        </p:nvCxnSpPr>
-        <p:spPr>
-          <a:xfrm rot="16200000" flipH="1">
-            <a:off x="5601544" y="5709750"/>
-            <a:ext cx="271306" cy="1063"/>
+            <a:off x="5317825" y="4620550"/>
+            <a:ext cx="243581" cy="594101"/>
           </a:xfrm>
           <a:prstGeom prst="bentConnector3">
             <a:avLst>
@@ -16730,8 +16244,8 @@
         </p:nvCxnSpPr>
         <p:spPr>
           <a:xfrm rot="16200000" flipH="1">
-            <a:off x="4127376" y="5426725"/>
-            <a:ext cx="272524" cy="583949"/>
+            <a:off x="4419422" y="5134680"/>
+            <a:ext cx="277721" cy="1173236"/>
           </a:xfrm>
           <a:prstGeom prst="bentConnector3">
             <a:avLst>
@@ -16775,12 +16289,12 @@
         </p:nvCxnSpPr>
         <p:spPr>
           <a:xfrm rot="16200000" flipH="1">
-            <a:off x="4612004" y="6338571"/>
-            <a:ext cx="1065665" cy="1178446"/>
+            <a:off x="4918771" y="6626287"/>
+            <a:ext cx="1041416" cy="589159"/>
           </a:xfrm>
           <a:prstGeom prst="bentConnector3">
             <a:avLst>
-              <a:gd name="adj1" fmla="val 12460"/>
+              <a:gd name="adj1" fmla="val 11586"/>
             </a:avLst>
           </a:prstGeom>
           <a:ln w="19050">
@@ -16819,9 +16333,9 @@
           <p:nvPr/>
         </p:nvCxnSpPr>
         <p:spPr>
-          <a:xfrm rot="16200000" flipH="1">
-            <a:off x="4713733" y="6236841"/>
-            <a:ext cx="272084" cy="588325"/>
+          <a:xfrm rot="5400000">
+            <a:off x="5010976" y="6533121"/>
+            <a:ext cx="266887" cy="962"/>
           </a:xfrm>
           <a:prstGeom prst="bentConnector3">
             <a:avLst>
@@ -22494,7 +22008,7 @@
         </p:nvSpPr>
         <p:spPr>
           <a:xfrm>
-            <a:off x="7058064" y="10693099"/>
+            <a:off x="7051714" y="10693099"/>
             <a:ext cx="926325" cy="540000"/>
           </a:xfrm>
           <a:prstGeom prst="rect">
@@ -22818,7 +22332,7 @@
         </p:nvSpPr>
         <p:spPr>
           <a:xfrm>
-            <a:off x="5862551" y="12294965"/>
+            <a:off x="5868901" y="12294965"/>
             <a:ext cx="926325" cy="540000"/>
           </a:xfrm>
           <a:prstGeom prst="rect">
@@ -22893,8 +22407,8 @@
         </p:nvCxnSpPr>
         <p:spPr>
           <a:xfrm rot="16200000" flipH="1">
-            <a:off x="5904918" y="11874169"/>
-            <a:ext cx="257050" cy="584542"/>
+            <a:off x="5908093" y="11870994"/>
+            <a:ext cx="257050" cy="590892"/>
           </a:xfrm>
           <a:prstGeom prst="bentConnector3">
             <a:avLst>
@@ -23060,7 +22574,7 @@
         </p:nvSpPr>
         <p:spPr>
           <a:xfrm>
-            <a:off x="7058063" y="12294349"/>
+            <a:off x="7051713" y="12294349"/>
             <a:ext cx="926325" cy="540000"/>
           </a:xfrm>
           <a:prstGeom prst="rect">
@@ -23190,12 +22704,12 @@
         </p:nvCxnSpPr>
         <p:spPr>
           <a:xfrm rot="16200000" flipH="1">
-            <a:off x="5207467" y="11176718"/>
-            <a:ext cx="1061866" cy="1174627"/>
+            <a:off x="5210642" y="11173543"/>
+            <a:ext cx="1061866" cy="1180977"/>
           </a:xfrm>
           <a:prstGeom prst="bentConnector3">
             <a:avLst>
-              <a:gd name="adj1" fmla="val 8738"/>
+              <a:gd name="adj1" fmla="val 9336"/>
             </a:avLst>
           </a:prstGeom>
           <a:ln w="19050">
@@ -23234,9 +22748,9 @@
           <p:nvPr/>
         </p:nvCxnSpPr>
         <p:spPr>
-          <a:xfrm rot="5400000">
-            <a:off x="5797163" y="11761650"/>
-            <a:ext cx="1061866" cy="4764"/>
+          <a:xfrm rot="16200000" flipH="1">
+            <a:off x="5800338" y="11763239"/>
+            <a:ext cx="1061866" cy="1586"/>
           </a:xfrm>
           <a:prstGeom prst="bentConnector3">
             <a:avLst>
@@ -23324,9 +22838,9 @@
           <p:nvPr/>
         </p:nvCxnSpPr>
         <p:spPr>
-          <a:xfrm rot="16200000" flipH="1">
-            <a:off x="7386437" y="10558309"/>
-            <a:ext cx="264816" cy="4763"/>
+          <a:xfrm rot="5400000">
+            <a:off x="7383263" y="10559898"/>
+            <a:ext cx="264816" cy="1587"/>
           </a:xfrm>
           <a:prstGeom prst="bentConnector3">
             <a:avLst>
@@ -23415,7 +22929,7 @@
         </p:nvCxnSpPr>
         <p:spPr>
           <a:xfrm rot="5400000">
-            <a:off x="6990602" y="11763724"/>
+            <a:off x="6984252" y="11763724"/>
             <a:ext cx="1061250" cy="1"/>
           </a:xfrm>
           <a:prstGeom prst="bentConnector3">
@@ -23460,12 +22974,12 @@
         </p:nvCxnSpPr>
         <p:spPr>
           <a:xfrm rot="5400000">
-            <a:off x="7589332" y="11164993"/>
-            <a:ext cx="1061250" cy="1197462"/>
+            <a:off x="7586157" y="11161818"/>
+            <a:ext cx="1061250" cy="1203812"/>
           </a:xfrm>
           <a:prstGeom prst="bentConnector3">
             <a:avLst>
-              <a:gd name="adj1" fmla="val 10509"/>
+              <a:gd name="adj1" fmla="val 8714"/>
             </a:avLst>
           </a:prstGeom>
           <a:ln w="19050">
@@ -23505,8 +23019,8 @@
         </p:nvCxnSpPr>
         <p:spPr>
           <a:xfrm rot="5400000">
-            <a:off x="7688179" y="11866772"/>
-            <a:ext cx="260625" cy="594529"/>
+            <a:off x="7685004" y="11863597"/>
+            <a:ext cx="260625" cy="600879"/>
           </a:xfrm>
           <a:prstGeom prst="bentConnector3">
             <a:avLst>
@@ -23550,8 +23064,8 @@
         </p:nvCxnSpPr>
         <p:spPr>
           <a:xfrm rot="5400000">
-            <a:off x="7094018" y="12664191"/>
-            <a:ext cx="257050" cy="597367"/>
+            <a:off x="7090843" y="12667366"/>
+            <a:ext cx="257050" cy="591017"/>
           </a:xfrm>
           <a:prstGeom prst="bentConnector3">
             <a:avLst>
@@ -23596,8 +23110,8 @@
         </p:nvCxnSpPr>
         <p:spPr>
           <a:xfrm rot="16200000" flipH="1">
-            <a:off x="6496569" y="12664109"/>
-            <a:ext cx="256434" cy="598145"/>
+            <a:off x="6499744" y="12667284"/>
+            <a:ext cx="256434" cy="591795"/>
           </a:xfrm>
           <a:prstGeom prst="bentConnector3">
             <a:avLst>
@@ -23638,7 +23152,7 @@
         </p:nvSpPr>
         <p:spPr>
           <a:xfrm>
-            <a:off x="3514511" y="8277242"/>
+            <a:off x="3508161" y="8277242"/>
             <a:ext cx="926325" cy="540000"/>
           </a:xfrm>
           <a:prstGeom prst="rect">
@@ -23674,38 +23188,6 @@
               <a:rPr lang="ru-RU" sz="700" dirty="0"/>
               <a:t>Железнодорожная петля Танжер - Фес</a:t>
             </a:r>
-            <a:br>
-              <a:rPr lang="ru-RU" sz="700" dirty="0"/>
-            </a:br>
-            <a:r>
-              <a:rPr lang="ru-RU" sz="100" dirty="0"/>
-              <a:t>(Исторический контекст: До войны французская колея была развита слабо. Под руководством американских инженеров снабжение между портами Атлантики и базами снабжения вглубь страны было переведено на круглосуточные </a:t>
-            </a:r>
-            <a:r>
-              <a:rPr lang="ru-RU" sz="100" dirty="0" err="1"/>
-              <a:t>рельсы.Эффекты</a:t>
-            </a:r>
-            <a:r>
-              <a:rPr lang="ru-RU" sz="100" dirty="0"/>
-              <a:t> в игре: Максимальная пропускная способность снабжения (</a:t>
-            </a:r>
-            <a:r>
-              <a:rPr lang="ru-RU" sz="100" dirty="0" err="1"/>
-              <a:t>Supply</a:t>
-            </a:r>
-            <a:r>
-              <a:rPr lang="ru-RU" sz="100" dirty="0"/>
-              <a:t> </a:t>
-            </a:r>
-            <a:r>
-              <a:rPr lang="ru-RU" sz="100" dirty="0" err="1"/>
-              <a:t>Hub</a:t>
-            </a:r>
-            <a:r>
-              <a:rPr lang="ru-RU" sz="100" dirty="0"/>
-              <a:t>) по всему Марокко. Скорость передвижения сухопутных войск в регионе \(+15\%\))</a:t>
-            </a:r>
-            <a:endParaRPr lang="ru-RU" sz="700" dirty="0"/>
           </a:p>
         </p:txBody>
       </p:sp>
@@ -23759,30 +23241,6 @@
               <a:rPr lang="ru-RU" sz="700" dirty="0"/>
               <a:t>Военные госпитали эвакуации</a:t>
             </a:r>
-            <a:br>
-              <a:rPr lang="ru-RU" sz="700" dirty="0"/>
-            </a:br>
-            <a:r>
-              <a:rPr lang="ru-RU" sz="200" dirty="0"/>
-              <a:t>(Исторический контекст: В Марокко развернули сеть тыловых госпиталей США, которые принимали раненых с сицилийского и итальянского </a:t>
-            </a:r>
-            <a:r>
-              <a:rPr lang="ru-RU" sz="200" dirty="0" err="1"/>
-              <a:t>фронтов.Эффекты</a:t>
-            </a:r>
-            <a:r>
-              <a:rPr lang="ru-RU" sz="200" dirty="0"/>
-              <a:t> в игре: Национальный дух: Снижение безвозвратных потерь армии (</a:t>
-            </a:r>
-            <a:r>
-              <a:rPr lang="ru-RU" sz="200" dirty="0" err="1"/>
-              <a:t>Trickleback</a:t>
-            </a:r>
-            <a:r>
-              <a:rPr lang="ru-RU" sz="200" dirty="0"/>
-              <a:t>) на \(+15\%\), скорость восстановления опыта дивизий \(+10\%\)) </a:t>
-            </a:r>
-            <a:endParaRPr lang="ru-RU" sz="700" dirty="0"/>
           </a:p>
         </p:txBody>
       </p:sp>
@@ -23901,9 +23359,9 @@
           <p:nvPr/>
         </p:nvCxnSpPr>
         <p:spPr>
-          <a:xfrm rot="16200000" flipH="1">
-            <a:off x="3830433" y="8130001"/>
-            <a:ext cx="288386" cy="6096"/>
+          <a:xfrm rot="5400000">
+            <a:off x="3827258" y="8132922"/>
+            <a:ext cx="288386" cy="254"/>
           </a:xfrm>
           <a:prstGeom prst="bentConnector3">
             <a:avLst>
@@ -24028,53 +23486,6 @@
               <a:rPr lang="ru-RU" sz="700" dirty="0" err="1"/>
               <a:t>Лиоте</a:t>
             </a:r>
-            <a:br>
-              <a:rPr lang="ru-RU" sz="700" dirty="0"/>
-            </a:br>
-            <a:r>
-              <a:rPr lang="ru-RU" sz="200" dirty="0"/>
-              <a:t>(Исторический контекст: База была отбита у </a:t>
-            </a:r>
-            <a:r>
-              <a:rPr lang="ru-RU" sz="200" dirty="0" err="1"/>
-              <a:t>вишистов</a:t>
-            </a:r>
-            <a:r>
-              <a:rPr lang="ru-RU" sz="200" dirty="0"/>
-              <a:t> во время операции «Факел» и превращена в мощнейший узел авиации ВМС США. Отсюда взлетали американские «</a:t>
-            </a:r>
-            <a:r>
-              <a:rPr lang="ru-RU" sz="200" dirty="0" err="1"/>
-              <a:t>Каталины</a:t>
-            </a:r>
-            <a:r>
-              <a:rPr lang="ru-RU" sz="200" dirty="0"/>
-              <a:t>» и «</a:t>
-            </a:r>
-            <a:r>
-              <a:rPr lang="ru-RU" sz="200" dirty="0" err="1"/>
-              <a:t>Либерейторы</a:t>
-            </a:r>
-            <a:r>
-              <a:rPr lang="ru-RU" sz="200" dirty="0"/>
-              <a:t>» для охоты за немецкими субмаринами U-</a:t>
-            </a:r>
-            <a:r>
-              <a:rPr lang="ru-RU" sz="200" dirty="0" err="1"/>
-              <a:t>boat</a:t>
-            </a:r>
-            <a:r>
-              <a:rPr lang="ru-RU" sz="200" dirty="0"/>
-              <a:t> в Гибралтарском </a:t>
-            </a:r>
-            <a:r>
-              <a:rPr lang="ru-RU" sz="200" dirty="0" err="1"/>
-              <a:t>проливе.Эффекты</a:t>
-            </a:r>
-            <a:r>
-              <a:rPr lang="ru-RU" sz="200" dirty="0"/>
-              <a:t> в игре: В регионе Западное Марокко строится аэродром 5-го уровня и радар 2-го уровня. Бонус к обнаружению подлодок для всей авиации в Западных подходах \(+20\%\))</a:t>
-            </a:r>
             <a:endParaRPr lang="ru-RU" sz="700" dirty="0"/>
           </a:p>
         </p:txBody>
@@ -24142,8 +23553,8 @@
         </p:nvCxnSpPr>
         <p:spPr>
           <a:xfrm rot="5400000">
-            <a:off x="5301635" y="7837541"/>
-            <a:ext cx="269338" cy="595510"/>
+            <a:off x="5292109" y="7828015"/>
+            <a:ext cx="288390" cy="595510"/>
           </a:xfrm>
           <a:prstGeom prst="bentConnector3">
             <a:avLst>
@@ -28125,6 +27536,51 @@
           <a:prstGeom prst="bentConnector3">
             <a:avLst>
               <a:gd name="adj1" fmla="val 50000"/>
+            </a:avLst>
+          </a:prstGeom>
+          <a:ln w="19050">
+            <a:tailEnd type="arrow"/>
+          </a:ln>
+        </p:spPr>
+        <p:style>
+          <a:lnRef idx="1">
+            <a:schemeClr val="accent1"/>
+          </a:lnRef>
+          <a:fillRef idx="0">
+            <a:schemeClr val="accent1"/>
+          </a:fillRef>
+          <a:effectRef idx="0">
+            <a:schemeClr val="accent1"/>
+          </a:effectRef>
+          <a:fontRef idx="minor">
+            <a:schemeClr val="tx1"/>
+          </a:fontRef>
+        </p:style>
+      </p:cxnSp>
+      <p:cxnSp>
+        <p:nvCxnSpPr>
+          <p:cNvPr id="547" name="Соединительная линия уступом 620">
+            <a:extLst>
+              <a:ext uri="{FF2B5EF4-FFF2-40B4-BE49-F238E27FC236}">
+                <a16:creationId xmlns:a16="http://schemas.microsoft.com/office/drawing/2014/main" id="{A356C9BA-845A-426A-A20D-4848C123BB5D}"/>
+              </a:ext>
+            </a:extLst>
+          </p:cNvPr>
+          <p:cNvCxnSpPr>
+            <a:cxnSpLocks/>
+            <a:stCxn id="264" idx="2"/>
+            <a:endCxn id="374" idx="0"/>
+          </p:cNvCxnSpPr>
+          <p:nvPr/>
+        </p:nvCxnSpPr>
+        <p:spPr>
+          <a:xfrm rot="5400000">
+            <a:off x="5500308" y="4204011"/>
+            <a:ext cx="1071739" cy="599022"/>
+          </a:xfrm>
+          <a:prstGeom prst="bentConnector3">
+            <a:avLst>
+              <a:gd name="adj1" fmla="val 13265"/>
             </a:avLst>
           </a:prstGeom>
           <a:ln w="19050">

--- a/Наработки/диздоки/Марокко/Марокко.pptx
+++ b/Наработки/диздоки/Марокко/Марокко.pptx
@@ -209,7 +209,7 @@
             <a:fld id="{33E3D7F9-E251-484C-A6FF-FA958879DF69}" type="datetimeFigureOut">
               <a:rPr lang="ru-RU" smtClean="0"/>
               <a:pPr/>
-              <a:t>30.06.2026</a:t>
+              <a:t>01.07.2026</a:t>
             </a:fld>
             <a:endParaRPr lang="ru-RU"/>
           </a:p>
@@ -699,7 +699,7 @@
             <a:fld id="{85A5DE44-605B-4D3B-B2B7-94543DF81A36}" type="datetimeFigureOut">
               <a:rPr lang="ru-RU" smtClean="0"/>
               <a:pPr/>
-              <a:t>30.06.2026</a:t>
+              <a:t>01.07.2026</a:t>
             </a:fld>
             <a:endParaRPr lang="ru-RU"/>
           </a:p>
@@ -871,7 +871,7 @@
             <a:fld id="{85A5DE44-605B-4D3B-B2B7-94543DF81A36}" type="datetimeFigureOut">
               <a:rPr lang="ru-RU" smtClean="0"/>
               <a:pPr/>
-              <a:t>30.06.2026</a:t>
+              <a:t>01.07.2026</a:t>
             </a:fld>
             <a:endParaRPr lang="ru-RU"/>
           </a:p>
@@ -1053,7 +1053,7 @@
             <a:fld id="{85A5DE44-605B-4D3B-B2B7-94543DF81A36}" type="datetimeFigureOut">
               <a:rPr lang="ru-RU" smtClean="0"/>
               <a:pPr/>
-              <a:t>30.06.2026</a:t>
+              <a:t>01.07.2026</a:t>
             </a:fld>
             <a:endParaRPr lang="ru-RU"/>
           </a:p>
@@ -1225,7 +1225,7 @@
             <a:fld id="{85A5DE44-605B-4D3B-B2B7-94543DF81A36}" type="datetimeFigureOut">
               <a:rPr lang="ru-RU" smtClean="0"/>
               <a:pPr/>
-              <a:t>30.06.2026</a:t>
+              <a:t>01.07.2026</a:t>
             </a:fld>
             <a:endParaRPr lang="ru-RU"/>
           </a:p>
@@ -1473,7 +1473,7 @@
             <a:fld id="{85A5DE44-605B-4D3B-B2B7-94543DF81A36}" type="datetimeFigureOut">
               <a:rPr lang="ru-RU" smtClean="0"/>
               <a:pPr/>
-              <a:t>30.06.2026</a:t>
+              <a:t>01.07.2026</a:t>
             </a:fld>
             <a:endParaRPr lang="ru-RU"/>
           </a:p>
@@ -1707,7 +1707,7 @@
             <a:fld id="{85A5DE44-605B-4D3B-B2B7-94543DF81A36}" type="datetimeFigureOut">
               <a:rPr lang="ru-RU" smtClean="0"/>
               <a:pPr/>
-              <a:t>30.06.2026</a:t>
+              <a:t>01.07.2026</a:t>
             </a:fld>
             <a:endParaRPr lang="ru-RU"/>
           </a:p>
@@ -2076,7 +2076,7 @@
             <a:fld id="{85A5DE44-605B-4D3B-B2B7-94543DF81A36}" type="datetimeFigureOut">
               <a:rPr lang="ru-RU" smtClean="0"/>
               <a:pPr/>
-              <a:t>30.06.2026</a:t>
+              <a:t>01.07.2026</a:t>
             </a:fld>
             <a:endParaRPr lang="ru-RU"/>
           </a:p>
@@ -2196,7 +2196,7 @@
             <a:fld id="{85A5DE44-605B-4D3B-B2B7-94543DF81A36}" type="datetimeFigureOut">
               <a:rPr lang="ru-RU" smtClean="0"/>
               <a:pPr/>
-              <a:t>30.06.2026</a:t>
+              <a:t>01.07.2026</a:t>
             </a:fld>
             <a:endParaRPr lang="ru-RU"/>
           </a:p>
@@ -2293,7 +2293,7 @@
             <a:fld id="{85A5DE44-605B-4D3B-B2B7-94543DF81A36}" type="datetimeFigureOut">
               <a:rPr lang="ru-RU" smtClean="0"/>
               <a:pPr/>
-              <a:t>30.06.2026</a:t>
+              <a:t>01.07.2026</a:t>
             </a:fld>
             <a:endParaRPr lang="ru-RU"/>
           </a:p>
@@ -2572,7 +2572,7 @@
             <a:fld id="{85A5DE44-605B-4D3B-B2B7-94543DF81A36}" type="datetimeFigureOut">
               <a:rPr lang="ru-RU" smtClean="0"/>
               <a:pPr/>
-              <a:t>30.06.2026</a:t>
+              <a:t>01.07.2026</a:t>
             </a:fld>
             <a:endParaRPr lang="ru-RU"/>
           </a:p>
@@ -2831,7 +2831,7 @@
             <a:fld id="{85A5DE44-605B-4D3B-B2B7-94543DF81A36}" type="datetimeFigureOut">
               <a:rPr lang="ru-RU" smtClean="0"/>
               <a:pPr/>
-              <a:t>30.06.2026</a:t>
+              <a:t>01.07.2026</a:t>
             </a:fld>
             <a:endParaRPr lang="ru-RU"/>
           </a:p>
@@ -3046,7 +3046,7 @@
             <a:fld id="{85A5DE44-605B-4D3B-B2B7-94543DF81A36}" type="datetimeFigureOut">
               <a:rPr lang="ru-RU" smtClean="0"/>
               <a:pPr/>
-              <a:t>30.06.2026</a:t>
+              <a:t>01.07.2026</a:t>
             </a:fld>
             <a:endParaRPr lang="ru-RU"/>
           </a:p>
@@ -6968,7 +6968,7 @@
         </p:nvSpPr>
         <p:spPr>
           <a:xfrm>
-            <a:off x="14001855" y="17872804"/>
+            <a:off x="13384041" y="17828701"/>
             <a:ext cx="926325" cy="540000"/>
           </a:xfrm>
           <a:prstGeom prst="rect">
@@ -7016,19 +7016,19 @@
           </p:cNvPr>
           <p:cNvCxnSpPr>
             <a:cxnSpLocks/>
-            <a:stCxn id="62" idx="2"/>
+            <a:stCxn id="102" idx="2"/>
             <a:endCxn id="113" idx="0"/>
           </p:cNvCxnSpPr>
           <p:nvPr/>
         </p:nvCxnSpPr>
         <p:spPr>
           <a:xfrm rot="16200000" flipH="1">
-            <a:off x="13605705" y="17013490"/>
-            <a:ext cx="1095859" cy="622768"/>
+            <a:off x="13726593" y="17708090"/>
+            <a:ext cx="233826" cy="7395"/>
           </a:xfrm>
           <a:prstGeom prst="bentConnector3">
             <a:avLst>
-              <a:gd name="adj1" fmla="val 11988"/>
+              <a:gd name="adj1" fmla="val 50000"/>
             </a:avLst>
           </a:prstGeom>
           <a:ln w="19050">
@@ -13478,7 +13478,7 @@
         </p:nvSpPr>
         <p:spPr>
           <a:xfrm>
-            <a:off x="13371343" y="18677511"/>
+            <a:off x="11512749" y="19507629"/>
             <a:ext cx="926325" cy="540000"/>
           </a:xfrm>
           <a:prstGeom prst="rect">
@@ -13567,75 +13567,6 @@
       </p:sp>
       <p:sp>
         <p:nvSpPr>
-          <p:cNvPr id="299" name="Прямоугольник 298">
-            <a:extLst>
-              <a:ext uri="{FF2B5EF4-FFF2-40B4-BE49-F238E27FC236}">
-                <a16:creationId xmlns:a16="http://schemas.microsoft.com/office/drawing/2014/main" id="{3DAE6CB6-1F84-4263-8B95-FD8B316CCCD2}"/>
-              </a:ext>
-            </a:extLst>
-          </p:cNvPr>
-          <p:cNvSpPr/>
-          <p:nvPr/>
-        </p:nvSpPr>
-        <p:spPr>
-          <a:xfrm>
-            <a:off x="12750423" y="19506868"/>
-            <a:ext cx="926325" cy="540000"/>
-          </a:xfrm>
-          <a:prstGeom prst="rect">
-            <a:avLst/>
-          </a:prstGeom>
-          <a:solidFill>
-            <a:schemeClr val="accent2">
-              <a:lumMod val="75000"/>
-            </a:schemeClr>
-          </a:solidFill>
-          <a:ln w="19050"/>
-        </p:spPr>
-        <p:style>
-          <a:lnRef idx="2">
-            <a:schemeClr val="accent1"/>
-          </a:lnRef>
-          <a:fillRef idx="1">
-            <a:schemeClr val="lt1"/>
-          </a:fillRef>
-          <a:effectRef idx="0">
-            <a:schemeClr val="accent1"/>
-          </a:effectRef>
-          <a:fontRef idx="minor">
-            <a:schemeClr val="dk1"/>
-          </a:fontRef>
-        </p:style>
-        <p:txBody>
-          <a:bodyPr lIns="124733" tIns="62367" rIns="124733" bIns="62367" rtlCol="0" anchor="ctr"/>
-          <a:lstStyle/>
-          <a:p>
-            <a:pPr algn="ctr"/>
-            <a:r>
-              <a:rPr lang="ru-RU" sz="700" dirty="0"/>
-              <a:t>Панарабизм и ислам</a:t>
-            </a:r>
-          </a:p>
-          <a:p>
-            <a:pPr algn="ctr"/>
-            <a:r>
-              <a:rPr lang="ru-RU" sz="200" dirty="0"/>
-              <a:t>Вместо католицизма и испанского империализма Фаланги, «</a:t>
-            </a:r>
-            <a:r>
-              <a:rPr lang="ru-RU" sz="200" dirty="0" err="1"/>
-              <a:t>Фитьян</a:t>
-            </a:r>
-            <a:r>
-              <a:rPr lang="ru-RU" sz="200" dirty="0"/>
-              <a:t>» воспитывали молодежь на ценностях арабского возрождения, защиты ислама и гордости за историю Марокко.</a:t>
-            </a:r>
-            <a:endParaRPr lang="ru-RU" sz="700" dirty="0"/>
-          </a:p>
-        </p:txBody>
-      </p:sp>
-      <p:sp>
-        <p:nvSpPr>
           <p:cNvPr id="301" name="Прямоугольник 300">
             <a:extLst>
               <a:ext uri="{FF2B5EF4-FFF2-40B4-BE49-F238E27FC236}">
@@ -14118,86 +14049,6 @@
               <a:rPr lang="ru-RU" sz="700" dirty="0"/>
               <a:t>Мавритания – южная провинция Марокко</a:t>
             </a:r>
-            <a:br>
-              <a:rPr lang="ru-RU" sz="700" dirty="0"/>
-            </a:br>
-            <a:r>
-              <a:rPr lang="ru-RU" sz="100" dirty="0"/>
-              <a:t>(Умиротворение эмиров </a:t>
-            </a:r>
-            <a:r>
-              <a:rPr lang="ru-RU" sz="100" dirty="0" err="1"/>
-              <a:t>Трарзы</a:t>
-            </a:r>
-            <a:r>
-              <a:rPr lang="ru-RU" sz="100" dirty="0"/>
-              <a:t> и </a:t>
-            </a:r>
-            <a:r>
-              <a:rPr lang="ru-RU" sz="100" dirty="0" err="1"/>
-              <a:t>Адрара</a:t>
-            </a:r>
-            <a:r>
-              <a:rPr lang="ru-RU" sz="100" dirty="0"/>
-              <a:t>»: Договор с местной кочевой </a:t>
-            </a:r>
-            <a:r>
-              <a:rPr lang="ru-RU" sz="100" dirty="0" err="1"/>
-              <a:t>элитой.Эффект</a:t>
-            </a:r>
-            <a:r>
-              <a:rPr lang="ru-RU" sz="100" dirty="0"/>
-              <a:t>: Снижение подчинения (</a:t>
-            </a:r>
-            <a:r>
-              <a:rPr lang="ru-RU" sz="100" dirty="0" err="1"/>
-              <a:t>Resistance</a:t>
-            </a:r>
-            <a:r>
-              <a:rPr lang="ru-RU" sz="100" dirty="0"/>
-              <a:t>) на 20%, рост </a:t>
-            </a:r>
-            <a:r>
-              <a:rPr lang="ru-RU" sz="100" dirty="0" err="1"/>
-              <a:t>стабильности.«Суфийские</a:t>
-            </a:r>
-            <a:r>
-              <a:rPr lang="ru-RU" sz="100" dirty="0"/>
-              <a:t> братства на службе Султана»: Использование авторитета марокканских религиозных орденов (</a:t>
-            </a:r>
-            <a:r>
-              <a:rPr lang="ru-RU" sz="100" dirty="0" err="1"/>
-              <a:t>Тиджания</a:t>
-            </a:r>
-            <a:r>
-              <a:rPr lang="ru-RU" sz="100" dirty="0"/>
-              <a:t>).Эффект: Прирост политической власти (+0.5/день), ускорение роста подчинения </a:t>
-            </a:r>
-            <a:r>
-              <a:rPr lang="ru-RU" sz="100" dirty="0" err="1"/>
-              <a:t>населения.«Ликвидация</a:t>
-            </a:r>
-            <a:r>
-              <a:rPr lang="ru-RU" sz="100" dirty="0"/>
-              <a:t> французских колониальных границ»: Административная реформа и объявление Мавритании неотъемлемой южной </a:t>
-            </a:r>
-            <a:r>
-              <a:rPr lang="ru-RU" sz="100" dirty="0" err="1"/>
-              <a:t>провинцией.Эффект</a:t>
-            </a:r>
-            <a:r>
-              <a:rPr lang="ru-RU" sz="100" dirty="0"/>
-              <a:t>: Получение национальных корней (</a:t>
-            </a:r>
-            <a:r>
-              <a:rPr lang="ru-RU" sz="100" dirty="0" err="1"/>
-              <a:t>Cores</a:t>
-            </a:r>
-            <a:r>
-              <a:rPr lang="ru-RU" sz="100" dirty="0"/>
-              <a:t>) на регионы Мавритании.)</a:t>
-            </a:r>
-            <a:endParaRPr lang="ru-RU" sz="700" dirty="0"/>
           </a:p>
         </p:txBody>
       </p:sp>
@@ -14246,14 +14097,14 @@
           <a:p>
             <a:pPr algn="ctr"/>
             <a:r>
-              <a:rPr lang="ru-RU" sz="800" dirty="0" err="1"/>
+              <a:rPr lang="ru-RU" sz="700" dirty="0" err="1"/>
               <a:t>Транссахарская</a:t>
             </a:r>
             <a:r>
-              <a:rPr lang="ru-RU" sz="800" dirty="0"/>
+              <a:rPr lang="ru-RU" sz="700" dirty="0"/>
               <a:t> железная дорога: Фес — Нуакшот</a:t>
             </a:r>
-            <a:endParaRPr lang="ru-RU" sz="700" dirty="0"/>
+            <a:endParaRPr lang="ru-RU" sz="600" dirty="0"/>
           </a:p>
         </p:txBody>
       </p:sp>
@@ -16839,7 +16690,7 @@
         </p:nvSpPr>
         <p:spPr>
           <a:xfrm>
-            <a:off x="10306579" y="21106916"/>
+            <a:off x="10306579" y="21037390"/>
             <a:ext cx="926325" cy="540000"/>
           </a:xfrm>
           <a:prstGeom prst="rect">
@@ -16892,7 +16743,7 @@
         </p:nvSpPr>
         <p:spPr>
           <a:xfrm>
-            <a:off x="10896689" y="21906674"/>
+            <a:off x="10903548" y="21847388"/>
             <a:ext cx="926325" cy="540000"/>
           </a:xfrm>
           <a:prstGeom prst="rect">
@@ -16945,7 +16796,7 @@
         </p:nvSpPr>
         <p:spPr>
           <a:xfrm>
-            <a:off x="9713818" y="21906674"/>
+            <a:off x="9713818" y="21847389"/>
             <a:ext cx="926325" cy="540000"/>
           </a:xfrm>
           <a:prstGeom prst="rect">
@@ -17092,8 +16943,8 @@
         </p:nvCxnSpPr>
         <p:spPr>
           <a:xfrm rot="5400000">
-            <a:off x="10239455" y="20576627"/>
-            <a:ext cx="1060577" cy="1"/>
+            <a:off x="10274218" y="20541864"/>
+            <a:ext cx="991051" cy="1"/>
           </a:xfrm>
           <a:prstGeom prst="bentConnector3">
             <a:avLst>
@@ -17137,8 +16988,8 @@
         </p:nvCxnSpPr>
         <p:spPr>
           <a:xfrm rot="5400000">
-            <a:off x="10343483" y="21480415"/>
-            <a:ext cx="259758" cy="592761"/>
+            <a:off x="10338363" y="21416009"/>
+            <a:ext cx="269999" cy="592761"/>
           </a:xfrm>
           <a:prstGeom prst="bentConnector3">
             <a:avLst>
@@ -17182,8 +17033,8 @@
         </p:nvCxnSpPr>
         <p:spPr>
           <a:xfrm rot="16200000" flipH="1">
-            <a:off x="10934918" y="21481740"/>
-            <a:ext cx="259758" cy="590110"/>
+            <a:off x="10933227" y="21413904"/>
+            <a:ext cx="269998" cy="596969"/>
           </a:xfrm>
           <a:prstGeom prst="bentConnector3">
             <a:avLst>
@@ -18142,13 +17993,8 @@
             <a:pPr algn="ctr"/>
             <a:r>
               <a:rPr lang="ru-RU" sz="700" dirty="0"/>
-              <a:t>Арабизация страны </a:t>
-            </a:r>
-            <a:r>
-              <a:rPr lang="ru-RU" sz="200" dirty="0"/>
-              <a:t>(В качестве предзнаменования будущего План требовал повсеместного использования арабского языка в общественном пространстве, включая железную дорогу, где «все билеты и квитанции, а также вывески в вагонах и на станциях должны быть напечатаны на арабском и французском языках».)</a:t>
-            </a:r>
-            <a:endParaRPr lang="ru-RU" sz="700" dirty="0"/>
+              <a:t>Арабизация страны</a:t>
+            </a:r>
           </a:p>
         </p:txBody>
       </p:sp>
@@ -19085,12 +18931,12 @@
         </p:nvCxnSpPr>
         <p:spPr>
           <a:xfrm rot="16200000" flipH="1">
-            <a:off x="12060435" y="16903439"/>
-            <a:ext cx="1082637" cy="2465505"/>
+            <a:off x="10716079" y="18247795"/>
+            <a:ext cx="1912755" cy="606911"/>
           </a:xfrm>
           <a:prstGeom prst="bentConnector3">
             <a:avLst>
-              <a:gd name="adj1" fmla="val 12462"/>
+              <a:gd name="adj1" fmla="val 7294"/>
             </a:avLst>
           </a:prstGeom>
           <a:ln w="19050">
@@ -19157,102 +19003,12 @@
           </a:fontRef>
         </p:style>
       </p:cxnSp>
-      <p:cxnSp>
-        <p:nvCxnSpPr>
-          <p:cNvPr id="455" name="Соединительная линия уступом 620">
-            <a:extLst>
-              <a:ext uri="{FF2B5EF4-FFF2-40B4-BE49-F238E27FC236}">
-                <a16:creationId xmlns:a16="http://schemas.microsoft.com/office/drawing/2014/main" id="{2B98F768-D204-4604-B962-EA14A2C665C1}"/>
-              </a:ext>
-            </a:extLst>
-          </p:cNvPr>
-          <p:cNvCxnSpPr>
-            <a:cxnSpLocks/>
-            <a:stCxn id="244" idx="2"/>
-            <a:endCxn id="299" idx="0"/>
-          </p:cNvCxnSpPr>
-          <p:nvPr/>
-        </p:nvCxnSpPr>
-        <p:spPr>
-          <a:xfrm rot="16200000" flipH="1">
-            <a:off x="12145471" y="18438753"/>
-            <a:ext cx="289356" cy="1846874"/>
-          </a:xfrm>
-          <a:prstGeom prst="bentConnector3">
-            <a:avLst>
-              <a:gd name="adj1" fmla="val 50000"/>
-            </a:avLst>
-          </a:prstGeom>
-          <a:ln w="19050">
-            <a:tailEnd type="arrow"/>
-          </a:ln>
-        </p:spPr>
-        <p:style>
-          <a:lnRef idx="1">
-            <a:schemeClr val="accent1"/>
-          </a:lnRef>
-          <a:fillRef idx="0">
-            <a:schemeClr val="accent1"/>
-          </a:fillRef>
-          <a:effectRef idx="0">
-            <a:schemeClr val="accent1"/>
-          </a:effectRef>
-          <a:fontRef idx="minor">
-            <a:schemeClr val="tx1"/>
-          </a:fontRef>
-        </p:style>
-      </p:cxnSp>
-      <p:cxnSp>
-        <p:nvCxnSpPr>
-          <p:cNvPr id="458" name="Соединительная линия уступом 620">
-            <a:extLst>
-              <a:ext uri="{FF2B5EF4-FFF2-40B4-BE49-F238E27FC236}">
-                <a16:creationId xmlns:a16="http://schemas.microsoft.com/office/drawing/2014/main" id="{6FB6D578-DFA8-4CE8-937B-B828957F287F}"/>
-              </a:ext>
-            </a:extLst>
-          </p:cNvPr>
-          <p:cNvCxnSpPr>
-            <a:cxnSpLocks/>
-            <a:stCxn id="445" idx="2"/>
-            <a:endCxn id="299" idx="0"/>
-          </p:cNvCxnSpPr>
-          <p:nvPr/>
-        </p:nvCxnSpPr>
-        <p:spPr>
-          <a:xfrm rot="16200000" flipH="1">
-            <a:off x="12768768" y="19062049"/>
-            <a:ext cx="289357" cy="600280"/>
-          </a:xfrm>
-          <a:prstGeom prst="bentConnector3">
-            <a:avLst>
-              <a:gd name="adj1" fmla="val 50000"/>
-            </a:avLst>
-          </a:prstGeom>
-          <a:ln w="19050">
-            <a:tailEnd type="arrow"/>
-          </a:ln>
-        </p:spPr>
-        <p:style>
-          <a:lnRef idx="1">
-            <a:schemeClr val="accent1"/>
-          </a:lnRef>
-          <a:fillRef idx="0">
-            <a:schemeClr val="accent1"/>
-          </a:fillRef>
-          <a:effectRef idx="0">
-            <a:schemeClr val="accent1"/>
-          </a:effectRef>
-          <a:fontRef idx="minor">
-            <a:schemeClr val="tx1"/>
-          </a:fontRef>
-        </p:style>
-      </p:cxnSp>
       <p:sp>
         <p:nvSpPr>
-          <p:cNvPr id="463" name="Прямоугольник 462">
-            <a:extLst>
-              <a:ext uri="{FF2B5EF4-FFF2-40B4-BE49-F238E27FC236}">
-                <a16:creationId xmlns:a16="http://schemas.microsoft.com/office/drawing/2014/main" id="{650344BC-1870-4F0E-9E78-8868189D65F1}"/>
+          <p:cNvPr id="524" name="Прямоугольник 523">
+            <a:extLst>
+              <a:ext uri="{FF2B5EF4-FFF2-40B4-BE49-F238E27FC236}">
+                <a16:creationId xmlns:a16="http://schemas.microsoft.com/office/drawing/2014/main" id="{38845350-9EFD-4225-BF8E-4B28D856BAB0}"/>
               </a:ext>
             </a:extLst>
           </p:cNvPr>
@@ -19261,7 +19017,7 @@
         </p:nvSpPr>
         <p:spPr>
           <a:xfrm>
-            <a:off x="12150142" y="20306628"/>
+            <a:off x="10310814" y="22648101"/>
             <a:ext cx="926325" cy="540000"/>
           </a:xfrm>
           <a:prstGeom prst="rect">
@@ -19295,900 +19051,16 @@
             <a:pPr algn="ctr"/>
             <a:r>
               <a:rPr lang="ru-RU" sz="700" dirty="0"/>
-              <a:t>Освободить Бея Туниса от французского гнёта</a:t>
-            </a:r>
+              <a:t>Объявить о воссоздании Аль-</a:t>
+            </a:r>
+            <a:r>
+              <a:rPr lang="ru-RU" sz="700" dirty="0" err="1"/>
+              <a:t>Андулуса</a:t>
+            </a:r>
+            <a:endParaRPr lang="ru-RU" sz="700" dirty="0"/>
           </a:p>
         </p:txBody>
       </p:sp>
-      <p:sp>
-        <p:nvSpPr>
-          <p:cNvPr id="464" name="Прямоугольник 463">
-            <a:extLst>
-              <a:ext uri="{FF2B5EF4-FFF2-40B4-BE49-F238E27FC236}">
-                <a16:creationId xmlns:a16="http://schemas.microsoft.com/office/drawing/2014/main" id="{B4C6028A-B393-4A8F-AB7E-AA61247C9DC7}"/>
-              </a:ext>
-            </a:extLst>
-          </p:cNvPr>
-          <p:cNvSpPr/>
-          <p:nvPr/>
-        </p:nvSpPr>
-        <p:spPr>
-          <a:xfrm>
-            <a:off x="11523765" y="21106915"/>
-            <a:ext cx="926325" cy="540000"/>
-          </a:xfrm>
-          <a:prstGeom prst="rect">
-            <a:avLst/>
-          </a:prstGeom>
-          <a:solidFill>
-            <a:schemeClr val="accent2">
-              <a:lumMod val="75000"/>
-            </a:schemeClr>
-          </a:solidFill>
-          <a:ln w="19050"/>
-        </p:spPr>
-        <p:style>
-          <a:lnRef idx="2">
-            <a:schemeClr val="accent1"/>
-          </a:lnRef>
-          <a:fillRef idx="1">
-            <a:schemeClr val="lt1"/>
-          </a:fillRef>
-          <a:effectRef idx="0">
-            <a:schemeClr val="accent1"/>
-          </a:effectRef>
-          <a:fontRef idx="minor">
-            <a:schemeClr val="dk1"/>
-          </a:fontRef>
-        </p:style>
-        <p:txBody>
-          <a:bodyPr lIns="124733" tIns="62367" rIns="124733" bIns="62367" rtlCol="0" anchor="ctr"/>
-          <a:lstStyle/>
-          <a:p>
-            <a:pPr algn="ctr"/>
-            <a:r>
-              <a:rPr lang="ru-RU" sz="700" dirty="0"/>
-              <a:t>Поделить Алжир между султаном и беем</a:t>
-            </a:r>
-          </a:p>
-        </p:txBody>
-      </p:sp>
-      <p:cxnSp>
-        <p:nvCxnSpPr>
-          <p:cNvPr id="465" name="Соединительная линия уступом 620">
-            <a:extLst>
-              <a:ext uri="{FF2B5EF4-FFF2-40B4-BE49-F238E27FC236}">
-                <a16:creationId xmlns:a16="http://schemas.microsoft.com/office/drawing/2014/main" id="{503A91C2-CF9E-4358-A873-96E06E5EDF6A}"/>
-              </a:ext>
-            </a:extLst>
-          </p:cNvPr>
-          <p:cNvCxnSpPr>
-            <a:cxnSpLocks/>
-            <a:stCxn id="299" idx="2"/>
-            <a:endCxn id="463" idx="0"/>
-          </p:cNvCxnSpPr>
-          <p:nvPr/>
-        </p:nvCxnSpPr>
-        <p:spPr>
-          <a:xfrm rot="5400000">
-            <a:off x="12783566" y="19876608"/>
-            <a:ext cx="259760" cy="600281"/>
-          </a:xfrm>
-          <a:prstGeom prst="bentConnector3">
-            <a:avLst>
-              <a:gd name="adj1" fmla="val 50000"/>
-            </a:avLst>
-          </a:prstGeom>
-          <a:ln w="19050">
-            <a:tailEnd type="arrow"/>
-          </a:ln>
-        </p:spPr>
-        <p:style>
-          <a:lnRef idx="1">
-            <a:schemeClr val="accent1"/>
-          </a:lnRef>
-          <a:fillRef idx="0">
-            <a:schemeClr val="accent1"/>
-          </a:fillRef>
-          <a:effectRef idx="0">
-            <a:schemeClr val="accent1"/>
-          </a:effectRef>
-          <a:fontRef idx="minor">
-            <a:schemeClr val="tx1"/>
-          </a:fontRef>
-        </p:style>
-      </p:cxnSp>
-      <p:cxnSp>
-        <p:nvCxnSpPr>
-          <p:cNvPr id="468" name="Соединительная линия уступом 620">
-            <a:extLst>
-              <a:ext uri="{FF2B5EF4-FFF2-40B4-BE49-F238E27FC236}">
-                <a16:creationId xmlns:a16="http://schemas.microsoft.com/office/drawing/2014/main" id="{B7A2BFAC-67D6-4305-95FF-2ED05C01E2FB}"/>
-              </a:ext>
-            </a:extLst>
-          </p:cNvPr>
-          <p:cNvCxnSpPr>
-            <a:cxnSpLocks/>
-            <a:stCxn id="463" idx="2"/>
-            <a:endCxn id="464" idx="0"/>
-          </p:cNvCxnSpPr>
-          <p:nvPr/>
-        </p:nvCxnSpPr>
-        <p:spPr>
-          <a:xfrm rot="5400000">
-            <a:off x="12169974" y="20663583"/>
-            <a:ext cx="260287" cy="626377"/>
-          </a:xfrm>
-          <a:prstGeom prst="bentConnector3">
-            <a:avLst>
-              <a:gd name="adj1" fmla="val 50000"/>
-            </a:avLst>
-          </a:prstGeom>
-          <a:ln w="19050">
-            <a:tailEnd type="arrow"/>
-          </a:ln>
-        </p:spPr>
-        <p:style>
-          <a:lnRef idx="1">
-            <a:schemeClr val="accent1"/>
-          </a:lnRef>
-          <a:fillRef idx="0">
-            <a:schemeClr val="accent1"/>
-          </a:fillRef>
-          <a:effectRef idx="0">
-            <a:schemeClr val="accent1"/>
-          </a:effectRef>
-          <a:fontRef idx="minor">
-            <a:schemeClr val="tx1"/>
-          </a:fontRef>
-        </p:style>
-      </p:cxnSp>
-      <p:sp>
-        <p:nvSpPr>
-          <p:cNvPr id="471" name="Прямоугольник 470">
-            <a:extLst>
-              <a:ext uri="{FF2B5EF4-FFF2-40B4-BE49-F238E27FC236}">
-                <a16:creationId xmlns:a16="http://schemas.microsoft.com/office/drawing/2014/main" id="{9FA1C022-691C-4F3D-B4B5-1D247E928869}"/>
-              </a:ext>
-            </a:extLst>
-          </p:cNvPr>
-          <p:cNvSpPr/>
-          <p:nvPr/>
-        </p:nvSpPr>
-        <p:spPr>
-          <a:xfrm>
-            <a:off x="12752200" y="21106915"/>
-            <a:ext cx="926325" cy="540000"/>
-          </a:xfrm>
-          <a:prstGeom prst="rect">
-            <a:avLst/>
-          </a:prstGeom>
-          <a:solidFill>
-            <a:schemeClr val="accent2">
-              <a:lumMod val="75000"/>
-            </a:schemeClr>
-          </a:solidFill>
-          <a:ln w="19050"/>
-        </p:spPr>
-        <p:style>
-          <a:lnRef idx="2">
-            <a:schemeClr val="accent1"/>
-          </a:lnRef>
-          <a:fillRef idx="1">
-            <a:schemeClr val="lt1"/>
-          </a:fillRef>
-          <a:effectRef idx="0">
-            <a:schemeClr val="accent1"/>
-          </a:effectRef>
-          <a:fontRef idx="minor">
-            <a:schemeClr val="dk1"/>
-          </a:fontRef>
-        </p:style>
-        <p:txBody>
-          <a:bodyPr lIns="124733" tIns="62367" rIns="124733" bIns="62367" rtlCol="0" anchor="ctr"/>
-          <a:lstStyle/>
-          <a:p>
-            <a:pPr algn="ctr"/>
-            <a:r>
-              <a:rPr lang="ru-RU" sz="700" dirty="0"/>
-              <a:t>Освободить королевство </a:t>
-            </a:r>
-            <a:r>
-              <a:rPr lang="ru-RU" sz="700" dirty="0" err="1"/>
-              <a:t>Сенуситов</a:t>
-            </a:r>
-            <a:endParaRPr lang="ru-RU" sz="700" dirty="0"/>
-          </a:p>
-        </p:txBody>
-      </p:sp>
-      <p:cxnSp>
-        <p:nvCxnSpPr>
-          <p:cNvPr id="473" name="Соединительная линия уступом 620">
-            <a:extLst>
-              <a:ext uri="{FF2B5EF4-FFF2-40B4-BE49-F238E27FC236}">
-                <a16:creationId xmlns:a16="http://schemas.microsoft.com/office/drawing/2014/main" id="{E20EFA4A-145D-49CC-98D7-D6C9C8DB6250}"/>
-              </a:ext>
-            </a:extLst>
-          </p:cNvPr>
-          <p:cNvCxnSpPr>
-            <a:cxnSpLocks/>
-            <a:stCxn id="463" idx="2"/>
-            <a:endCxn id="471" idx="0"/>
-          </p:cNvCxnSpPr>
-          <p:nvPr/>
-        </p:nvCxnSpPr>
-        <p:spPr>
-          <a:xfrm rot="16200000" flipH="1">
-            <a:off x="12784191" y="20675742"/>
-            <a:ext cx="260287" cy="602058"/>
-          </a:xfrm>
-          <a:prstGeom prst="bentConnector3">
-            <a:avLst>
-              <a:gd name="adj1" fmla="val 50000"/>
-            </a:avLst>
-          </a:prstGeom>
-          <a:ln w="19050">
-            <a:tailEnd type="arrow"/>
-          </a:ln>
-        </p:spPr>
-        <p:style>
-          <a:lnRef idx="1">
-            <a:schemeClr val="accent1"/>
-          </a:lnRef>
-          <a:fillRef idx="0">
-            <a:schemeClr val="accent1"/>
-          </a:fillRef>
-          <a:effectRef idx="0">
-            <a:schemeClr val="accent1"/>
-          </a:effectRef>
-          <a:fontRef idx="minor">
-            <a:schemeClr val="tx1"/>
-          </a:fontRef>
-        </p:style>
-      </p:cxnSp>
-      <p:sp>
-        <p:nvSpPr>
-          <p:cNvPr id="476" name="Прямоугольник 475">
-            <a:extLst>
-              <a:ext uri="{FF2B5EF4-FFF2-40B4-BE49-F238E27FC236}">
-                <a16:creationId xmlns:a16="http://schemas.microsoft.com/office/drawing/2014/main" id="{C4877405-2FC0-41D1-89B9-92A1CE16E115}"/>
-              </a:ext>
-            </a:extLst>
-          </p:cNvPr>
-          <p:cNvSpPr/>
-          <p:nvPr/>
-        </p:nvSpPr>
-        <p:spPr>
-          <a:xfrm>
-            <a:off x="14000328" y="19500408"/>
-            <a:ext cx="926325" cy="540000"/>
-          </a:xfrm>
-          <a:prstGeom prst="rect">
-            <a:avLst/>
-          </a:prstGeom>
-          <a:solidFill>
-            <a:schemeClr val="accent2">
-              <a:lumMod val="75000"/>
-            </a:schemeClr>
-          </a:solidFill>
-          <a:ln w="19050"/>
-        </p:spPr>
-        <p:style>
-          <a:lnRef idx="2">
-            <a:schemeClr val="accent1"/>
-          </a:lnRef>
-          <a:fillRef idx="1">
-            <a:schemeClr val="lt1"/>
-          </a:fillRef>
-          <a:effectRef idx="0">
-            <a:schemeClr val="accent1"/>
-          </a:effectRef>
-          <a:fontRef idx="minor">
-            <a:schemeClr val="dk1"/>
-          </a:fontRef>
-        </p:style>
-        <p:txBody>
-          <a:bodyPr lIns="124733" tIns="62367" rIns="124733" bIns="62367" rtlCol="0" anchor="ctr"/>
-          <a:lstStyle/>
-          <a:p>
-            <a:pPr algn="ctr"/>
-            <a:r>
-              <a:rPr lang="ru-RU" sz="700" dirty="0"/>
-              <a:t>Объединиться с королями арабов</a:t>
-            </a:r>
-          </a:p>
-        </p:txBody>
-      </p:sp>
-      <p:cxnSp>
-        <p:nvCxnSpPr>
-          <p:cNvPr id="477" name="Соединительная линия уступом 620">
-            <a:extLst>
-              <a:ext uri="{FF2B5EF4-FFF2-40B4-BE49-F238E27FC236}">
-                <a16:creationId xmlns:a16="http://schemas.microsoft.com/office/drawing/2014/main" id="{C65BA08B-A094-49AA-9B25-ADF84BAC3B08}"/>
-              </a:ext>
-            </a:extLst>
-          </p:cNvPr>
-          <p:cNvCxnSpPr>
-            <a:cxnSpLocks/>
-            <a:stCxn id="445" idx="2"/>
-            <a:endCxn id="476" idx="0"/>
-          </p:cNvCxnSpPr>
-          <p:nvPr/>
-        </p:nvCxnSpPr>
-        <p:spPr>
-          <a:xfrm rot="16200000" flipH="1">
-            <a:off x="13396950" y="18433866"/>
-            <a:ext cx="282897" cy="1850185"/>
-          </a:xfrm>
-          <a:prstGeom prst="bentConnector3">
-            <a:avLst>
-              <a:gd name="adj1" fmla="val 50000"/>
-            </a:avLst>
-          </a:prstGeom>
-          <a:ln w="19050">
-            <a:tailEnd type="arrow"/>
-          </a:ln>
-        </p:spPr>
-        <p:style>
-          <a:lnRef idx="1">
-            <a:schemeClr val="accent1"/>
-          </a:lnRef>
-          <a:fillRef idx="0">
-            <a:schemeClr val="accent1"/>
-          </a:fillRef>
-          <a:effectRef idx="0">
-            <a:schemeClr val="accent1"/>
-          </a:effectRef>
-          <a:fontRef idx="minor">
-            <a:schemeClr val="tx1"/>
-          </a:fontRef>
-        </p:style>
-      </p:cxnSp>
-      <p:sp>
-        <p:nvSpPr>
-          <p:cNvPr id="480" name="Прямоугольник 479">
-            <a:extLst>
-              <a:ext uri="{FF2B5EF4-FFF2-40B4-BE49-F238E27FC236}">
-                <a16:creationId xmlns:a16="http://schemas.microsoft.com/office/drawing/2014/main" id="{8C02F0DB-A2BB-4711-BC0F-339E3C4ED827}"/>
-              </a:ext>
-            </a:extLst>
-          </p:cNvPr>
-          <p:cNvSpPr/>
-          <p:nvPr/>
-        </p:nvSpPr>
-        <p:spPr>
-          <a:xfrm>
-            <a:off x="13377867" y="20311114"/>
-            <a:ext cx="926325" cy="540000"/>
-          </a:xfrm>
-          <a:prstGeom prst="rect">
-            <a:avLst/>
-          </a:prstGeom>
-          <a:solidFill>
-            <a:schemeClr val="accent2">
-              <a:lumMod val="75000"/>
-            </a:schemeClr>
-          </a:solidFill>
-          <a:ln w="19050"/>
-        </p:spPr>
-        <p:style>
-          <a:lnRef idx="2">
-            <a:schemeClr val="accent1"/>
-          </a:lnRef>
-          <a:fillRef idx="1">
-            <a:schemeClr val="lt1"/>
-          </a:fillRef>
-          <a:effectRef idx="0">
-            <a:schemeClr val="accent1"/>
-          </a:effectRef>
-          <a:fontRef idx="minor">
-            <a:schemeClr val="dk1"/>
-          </a:fontRef>
-        </p:style>
-        <p:txBody>
-          <a:bodyPr lIns="124733" tIns="62367" rIns="124733" bIns="62367" rtlCol="0" anchor="ctr"/>
-          <a:lstStyle/>
-          <a:p>
-            <a:pPr algn="ctr"/>
-            <a:r>
-              <a:rPr lang="ru-RU" sz="700" dirty="0"/>
-              <a:t>Спасти святые земли</a:t>
-            </a:r>
-          </a:p>
-        </p:txBody>
-      </p:sp>
-      <p:cxnSp>
-        <p:nvCxnSpPr>
-          <p:cNvPr id="481" name="Прямая соединительная линия 480">
-            <a:extLst>
-              <a:ext uri="{FF2B5EF4-FFF2-40B4-BE49-F238E27FC236}">
-                <a16:creationId xmlns:a16="http://schemas.microsoft.com/office/drawing/2014/main" id="{33A58044-D3D1-45D5-881C-2597CEC56D5B}"/>
-              </a:ext>
-            </a:extLst>
-          </p:cNvPr>
-          <p:cNvCxnSpPr>
-            <a:cxnSpLocks/>
-            <a:stCxn id="299" idx="1"/>
-            <a:endCxn id="388" idx="3"/>
-          </p:cNvCxnSpPr>
-          <p:nvPr/>
-        </p:nvCxnSpPr>
-        <p:spPr>
-          <a:xfrm flipH="1" flipV="1">
-            <a:off x="11232905" y="19776339"/>
-            <a:ext cx="1517518" cy="529"/>
-          </a:xfrm>
-          <a:prstGeom prst="line">
-            <a:avLst/>
-          </a:prstGeom>
-          <a:ln w="38100">
-            <a:solidFill>
-              <a:srgbClr val="C00000"/>
-            </a:solidFill>
-          </a:ln>
-        </p:spPr>
-        <p:style>
-          <a:lnRef idx="1">
-            <a:schemeClr val="accent1"/>
-          </a:lnRef>
-          <a:fillRef idx="0">
-            <a:schemeClr val="accent1"/>
-          </a:fillRef>
-          <a:effectRef idx="0">
-            <a:schemeClr val="accent1"/>
-          </a:effectRef>
-          <a:fontRef idx="minor">
-            <a:schemeClr val="tx1"/>
-          </a:fontRef>
-        </p:style>
-      </p:cxnSp>
-      <p:cxnSp>
-        <p:nvCxnSpPr>
-          <p:cNvPr id="489" name="Соединительная линия уступом 620">
-            <a:extLst>
-              <a:ext uri="{FF2B5EF4-FFF2-40B4-BE49-F238E27FC236}">
-                <a16:creationId xmlns:a16="http://schemas.microsoft.com/office/drawing/2014/main" id="{D723A5DC-2D38-496C-831E-DD515F89FD92}"/>
-              </a:ext>
-            </a:extLst>
-          </p:cNvPr>
-          <p:cNvCxnSpPr>
-            <a:cxnSpLocks/>
-            <a:stCxn id="299" idx="2"/>
-            <a:endCxn id="480" idx="0"/>
-          </p:cNvCxnSpPr>
-          <p:nvPr/>
-        </p:nvCxnSpPr>
-        <p:spPr>
-          <a:xfrm rot="16200000" flipH="1">
-            <a:off x="13395185" y="19865269"/>
-            <a:ext cx="264246" cy="627444"/>
-          </a:xfrm>
-          <a:prstGeom prst="bentConnector3">
-            <a:avLst>
-              <a:gd name="adj1" fmla="val 50000"/>
-            </a:avLst>
-          </a:prstGeom>
-          <a:ln w="19050">
-            <a:tailEnd type="arrow"/>
-          </a:ln>
-        </p:spPr>
-        <p:style>
-          <a:lnRef idx="1">
-            <a:schemeClr val="accent1"/>
-          </a:lnRef>
-          <a:fillRef idx="0">
-            <a:schemeClr val="accent1"/>
-          </a:fillRef>
-          <a:effectRef idx="0">
-            <a:schemeClr val="accent1"/>
-          </a:effectRef>
-          <a:fontRef idx="minor">
-            <a:schemeClr val="tx1"/>
-          </a:fontRef>
-        </p:style>
-      </p:cxnSp>
-      <p:sp>
-        <p:nvSpPr>
-          <p:cNvPr id="495" name="Прямоугольник 494">
-            <a:extLst>
-              <a:ext uri="{FF2B5EF4-FFF2-40B4-BE49-F238E27FC236}">
-                <a16:creationId xmlns:a16="http://schemas.microsoft.com/office/drawing/2014/main" id="{B4EBCBB4-0F46-419E-B5D5-FC26FA0BF919}"/>
-              </a:ext>
-            </a:extLst>
-          </p:cNvPr>
-          <p:cNvSpPr/>
-          <p:nvPr/>
-        </p:nvSpPr>
-        <p:spPr>
-          <a:xfrm>
-            <a:off x="12752199" y="21906674"/>
-            <a:ext cx="926325" cy="540000"/>
-          </a:xfrm>
-          <a:prstGeom prst="rect">
-            <a:avLst/>
-          </a:prstGeom>
-          <a:solidFill>
-            <a:schemeClr val="accent2">
-              <a:lumMod val="75000"/>
-            </a:schemeClr>
-          </a:solidFill>
-          <a:ln w="19050"/>
-        </p:spPr>
-        <p:style>
-          <a:lnRef idx="2">
-            <a:schemeClr val="accent1"/>
-          </a:lnRef>
-          <a:fillRef idx="1">
-            <a:schemeClr val="lt1"/>
-          </a:fillRef>
-          <a:effectRef idx="0">
-            <a:schemeClr val="accent1"/>
-          </a:effectRef>
-          <a:fontRef idx="minor">
-            <a:schemeClr val="dk1"/>
-          </a:fontRef>
-        </p:style>
-        <p:txBody>
-          <a:bodyPr lIns="124733" tIns="62367" rIns="124733" bIns="62367" rtlCol="0" anchor="ctr"/>
-          <a:lstStyle/>
-          <a:p>
-            <a:pPr algn="ctr"/>
-            <a:r>
-              <a:rPr lang="ru-RU" sz="700" dirty="0"/>
-              <a:t>Сместить недостойного </a:t>
-            </a:r>
-            <a:r>
-              <a:rPr lang="ru-RU" sz="700" dirty="0" err="1"/>
-              <a:t>Фаррука</a:t>
-            </a:r>
-            <a:endParaRPr lang="ru-RU" sz="700" dirty="0"/>
-          </a:p>
-        </p:txBody>
-      </p:sp>
-      <p:cxnSp>
-        <p:nvCxnSpPr>
-          <p:cNvPr id="496" name="Соединительная линия уступом 620">
-            <a:extLst>
-              <a:ext uri="{FF2B5EF4-FFF2-40B4-BE49-F238E27FC236}">
-                <a16:creationId xmlns:a16="http://schemas.microsoft.com/office/drawing/2014/main" id="{92205E9D-8331-41D1-B409-CFD0984BFFFA}"/>
-              </a:ext>
-            </a:extLst>
-          </p:cNvPr>
-          <p:cNvCxnSpPr>
-            <a:cxnSpLocks/>
-            <a:stCxn id="471" idx="2"/>
-            <a:endCxn id="495" idx="0"/>
-          </p:cNvCxnSpPr>
-          <p:nvPr/>
-        </p:nvCxnSpPr>
-        <p:spPr>
-          <a:xfrm rot="5400000">
-            <a:off x="13085484" y="21776794"/>
-            <a:ext cx="259759" cy="1"/>
-          </a:xfrm>
-          <a:prstGeom prst="bentConnector3">
-            <a:avLst>
-              <a:gd name="adj1" fmla="val 50000"/>
-            </a:avLst>
-          </a:prstGeom>
-          <a:ln w="19050">
-            <a:tailEnd type="arrow"/>
-          </a:ln>
-        </p:spPr>
-        <p:style>
-          <a:lnRef idx="1">
-            <a:schemeClr val="accent1"/>
-          </a:lnRef>
-          <a:fillRef idx="0">
-            <a:schemeClr val="accent1"/>
-          </a:fillRef>
-          <a:effectRef idx="0">
-            <a:schemeClr val="accent1"/>
-          </a:effectRef>
-          <a:fontRef idx="minor">
-            <a:schemeClr val="tx1"/>
-          </a:fontRef>
-        </p:style>
-      </p:cxnSp>
-      <p:sp>
-        <p:nvSpPr>
-          <p:cNvPr id="499" name="Прямоугольник 498">
-            <a:extLst>
-              <a:ext uri="{FF2B5EF4-FFF2-40B4-BE49-F238E27FC236}">
-                <a16:creationId xmlns:a16="http://schemas.microsoft.com/office/drawing/2014/main" id="{8248E5C5-861C-4B3A-AB08-BEA35760CFE6}"/>
-              </a:ext>
-            </a:extLst>
-          </p:cNvPr>
-          <p:cNvSpPr/>
-          <p:nvPr/>
-        </p:nvSpPr>
-        <p:spPr>
-          <a:xfrm>
-            <a:off x="14000328" y="21903421"/>
-            <a:ext cx="926325" cy="540000"/>
-          </a:xfrm>
-          <a:prstGeom prst="rect">
-            <a:avLst/>
-          </a:prstGeom>
-          <a:solidFill>
-            <a:schemeClr val="accent2">
-              <a:lumMod val="75000"/>
-            </a:schemeClr>
-          </a:solidFill>
-          <a:ln w="19050"/>
-        </p:spPr>
-        <p:style>
-          <a:lnRef idx="2">
-            <a:schemeClr val="accent1"/>
-          </a:lnRef>
-          <a:fillRef idx="1">
-            <a:schemeClr val="lt1"/>
-          </a:fillRef>
-          <a:effectRef idx="0">
-            <a:schemeClr val="accent1"/>
-          </a:effectRef>
-          <a:fontRef idx="minor">
-            <a:schemeClr val="dk1"/>
-          </a:fontRef>
-        </p:style>
-        <p:txBody>
-          <a:bodyPr lIns="124733" tIns="62367" rIns="124733" bIns="62367" rtlCol="0" anchor="ctr"/>
-          <a:lstStyle/>
-          <a:p>
-            <a:pPr algn="ctr"/>
-            <a:r>
-              <a:rPr lang="ru-RU" sz="700" dirty="0"/>
-              <a:t>Вернуть Мекку</a:t>
-            </a:r>
-          </a:p>
-        </p:txBody>
-      </p:sp>
-      <p:sp>
-        <p:nvSpPr>
-          <p:cNvPr id="501" name="Прямоугольник 500">
-            <a:extLst>
-              <a:ext uri="{FF2B5EF4-FFF2-40B4-BE49-F238E27FC236}">
-                <a16:creationId xmlns:a16="http://schemas.microsoft.com/office/drawing/2014/main" id="{557FAF48-D874-470D-BE40-9E02258506A6}"/>
-              </a:ext>
-            </a:extLst>
-          </p:cNvPr>
-          <p:cNvSpPr/>
-          <p:nvPr/>
-        </p:nvSpPr>
-        <p:spPr>
-          <a:xfrm>
-            <a:off x="14000329" y="21106915"/>
-            <a:ext cx="926325" cy="540000"/>
-          </a:xfrm>
-          <a:prstGeom prst="rect">
-            <a:avLst/>
-          </a:prstGeom>
-          <a:solidFill>
-            <a:schemeClr val="accent2">
-              <a:lumMod val="75000"/>
-            </a:schemeClr>
-          </a:solidFill>
-          <a:ln w="19050"/>
-        </p:spPr>
-        <p:style>
-          <a:lnRef idx="2">
-            <a:schemeClr val="accent1"/>
-          </a:lnRef>
-          <a:fillRef idx="1">
-            <a:schemeClr val="lt1"/>
-          </a:fillRef>
-          <a:effectRef idx="0">
-            <a:schemeClr val="accent1"/>
-          </a:effectRef>
-          <a:fontRef idx="minor">
-            <a:schemeClr val="dk1"/>
-          </a:fontRef>
-        </p:style>
-        <p:txBody>
-          <a:bodyPr lIns="124733" tIns="62367" rIns="124733" bIns="62367" rtlCol="0" anchor="ctr"/>
-          <a:lstStyle/>
-          <a:p>
-            <a:pPr algn="ctr"/>
-            <a:r>
-              <a:rPr lang="ru-RU" sz="700" dirty="0"/>
-              <a:t>Совет королей</a:t>
-            </a:r>
-          </a:p>
-        </p:txBody>
-      </p:sp>
-      <p:cxnSp>
-        <p:nvCxnSpPr>
-          <p:cNvPr id="502" name="Соединительная линия уступом 620">
-            <a:extLst>
-              <a:ext uri="{FF2B5EF4-FFF2-40B4-BE49-F238E27FC236}">
-                <a16:creationId xmlns:a16="http://schemas.microsoft.com/office/drawing/2014/main" id="{46B695DF-0CE6-47C1-989E-ABB5C4051389}"/>
-              </a:ext>
-            </a:extLst>
-          </p:cNvPr>
-          <p:cNvCxnSpPr>
-            <a:cxnSpLocks/>
-            <a:stCxn id="480" idx="2"/>
-            <a:endCxn id="501" idx="0"/>
-          </p:cNvCxnSpPr>
-          <p:nvPr/>
-        </p:nvCxnSpPr>
-        <p:spPr>
-          <a:xfrm rot="16200000" flipH="1">
-            <a:off x="14024361" y="20667783"/>
-            <a:ext cx="255801" cy="622462"/>
-          </a:xfrm>
-          <a:prstGeom prst="bentConnector3">
-            <a:avLst>
-              <a:gd name="adj1" fmla="val 50000"/>
-            </a:avLst>
-          </a:prstGeom>
-          <a:ln w="19050">
-            <a:tailEnd type="arrow"/>
-          </a:ln>
-        </p:spPr>
-        <p:style>
-          <a:lnRef idx="1">
-            <a:schemeClr val="accent1"/>
-          </a:lnRef>
-          <a:fillRef idx="0">
-            <a:schemeClr val="accent1"/>
-          </a:fillRef>
-          <a:effectRef idx="0">
-            <a:schemeClr val="accent1"/>
-          </a:effectRef>
-          <a:fontRef idx="minor">
-            <a:schemeClr val="tx1"/>
-          </a:fontRef>
-        </p:style>
-      </p:cxnSp>
-      <p:cxnSp>
-        <p:nvCxnSpPr>
-          <p:cNvPr id="505" name="Соединительная линия уступом 620">
-            <a:extLst>
-              <a:ext uri="{FF2B5EF4-FFF2-40B4-BE49-F238E27FC236}">
-                <a16:creationId xmlns:a16="http://schemas.microsoft.com/office/drawing/2014/main" id="{4FFBC942-3FB4-4F84-9677-3EAA1CEDCA48}"/>
-              </a:ext>
-            </a:extLst>
-          </p:cNvPr>
-          <p:cNvCxnSpPr>
-            <a:cxnSpLocks/>
-            <a:stCxn id="476" idx="2"/>
-            <a:endCxn id="501" idx="0"/>
-          </p:cNvCxnSpPr>
-          <p:nvPr/>
-        </p:nvCxnSpPr>
-        <p:spPr>
-          <a:xfrm rot="16200000" flipH="1">
-            <a:off x="13930238" y="20573660"/>
-            <a:ext cx="1066507" cy="1"/>
-          </a:xfrm>
-          <a:prstGeom prst="bentConnector3">
-            <a:avLst>
-              <a:gd name="adj1" fmla="val 50000"/>
-            </a:avLst>
-          </a:prstGeom>
-          <a:ln w="19050">
-            <a:tailEnd type="arrow"/>
-          </a:ln>
-        </p:spPr>
-        <p:style>
-          <a:lnRef idx="1">
-            <a:schemeClr val="accent1"/>
-          </a:lnRef>
-          <a:fillRef idx="0">
-            <a:schemeClr val="accent1"/>
-          </a:fillRef>
-          <a:effectRef idx="0">
-            <a:schemeClr val="accent1"/>
-          </a:effectRef>
-          <a:fontRef idx="minor">
-            <a:schemeClr val="tx1"/>
-          </a:fontRef>
-        </p:style>
-      </p:cxnSp>
-      <p:sp>
-        <p:nvSpPr>
-          <p:cNvPr id="524" name="Прямоугольник 523">
-            <a:extLst>
-              <a:ext uri="{FF2B5EF4-FFF2-40B4-BE49-F238E27FC236}">
-                <a16:creationId xmlns:a16="http://schemas.microsoft.com/office/drawing/2014/main" id="{38845350-9EFD-4225-BF8E-4B28D856BAB0}"/>
-              </a:ext>
-            </a:extLst>
-          </p:cNvPr>
-          <p:cNvSpPr/>
-          <p:nvPr/>
-        </p:nvSpPr>
-        <p:spPr>
-          <a:xfrm>
-            <a:off x="10310813" y="22773808"/>
-            <a:ext cx="926325" cy="540000"/>
-          </a:xfrm>
-          <a:prstGeom prst="rect">
-            <a:avLst/>
-          </a:prstGeom>
-          <a:solidFill>
-            <a:schemeClr val="accent2">
-              <a:lumMod val="75000"/>
-            </a:schemeClr>
-          </a:solidFill>
-          <a:ln w="19050"/>
-        </p:spPr>
-        <p:style>
-          <a:lnRef idx="2">
-            <a:schemeClr val="accent1"/>
-          </a:lnRef>
-          <a:fillRef idx="1">
-            <a:schemeClr val="lt1"/>
-          </a:fillRef>
-          <a:effectRef idx="0">
-            <a:schemeClr val="accent1"/>
-          </a:effectRef>
-          <a:fontRef idx="minor">
-            <a:schemeClr val="dk1"/>
-          </a:fontRef>
-        </p:style>
-        <p:txBody>
-          <a:bodyPr lIns="124733" tIns="62367" rIns="124733" bIns="62367" rtlCol="0" anchor="ctr"/>
-          <a:lstStyle/>
-          <a:p>
-            <a:pPr algn="ctr"/>
-            <a:r>
-              <a:rPr lang="ru-RU" sz="700" dirty="0"/>
-              <a:t>Объявить о воссоздании Аль-</a:t>
-            </a:r>
-            <a:r>
-              <a:rPr lang="ru-RU" sz="700" dirty="0" err="1"/>
-              <a:t>Андулуса</a:t>
-            </a:r>
-            <a:endParaRPr lang="ru-RU" sz="700" dirty="0"/>
-          </a:p>
-        </p:txBody>
-      </p:sp>
-      <p:cxnSp>
-        <p:nvCxnSpPr>
-          <p:cNvPr id="525" name="Соединительная линия уступом 620">
-            <a:extLst>
-              <a:ext uri="{FF2B5EF4-FFF2-40B4-BE49-F238E27FC236}">
-                <a16:creationId xmlns:a16="http://schemas.microsoft.com/office/drawing/2014/main" id="{828CC0F5-AA67-4601-B98A-88020B70EA82}"/>
-              </a:ext>
-            </a:extLst>
-          </p:cNvPr>
-          <p:cNvCxnSpPr>
-            <a:cxnSpLocks/>
-            <a:stCxn id="501" idx="2"/>
-            <a:endCxn id="499" idx="0"/>
-          </p:cNvCxnSpPr>
-          <p:nvPr/>
-        </p:nvCxnSpPr>
-        <p:spPr>
-          <a:xfrm rot="5400000">
-            <a:off x="14335239" y="21775168"/>
-            <a:ext cx="256506" cy="1"/>
-          </a:xfrm>
-          <a:prstGeom prst="bentConnector3">
-            <a:avLst>
-              <a:gd name="adj1" fmla="val 50000"/>
-            </a:avLst>
-          </a:prstGeom>
-          <a:ln w="19050">
-            <a:tailEnd type="arrow"/>
-          </a:ln>
-        </p:spPr>
-        <p:style>
-          <a:lnRef idx="1">
-            <a:schemeClr val="accent1"/>
-          </a:lnRef>
-          <a:fillRef idx="0">
-            <a:schemeClr val="accent1"/>
-          </a:fillRef>
-          <a:effectRef idx="0">
-            <a:schemeClr val="accent1"/>
-          </a:effectRef>
-          <a:fontRef idx="minor">
-            <a:schemeClr val="tx1"/>
-          </a:fontRef>
-        </p:style>
-      </p:cxnSp>
       <p:cxnSp>
         <p:nvCxnSpPr>
           <p:cNvPr id="529" name="Соединительная линия уступом 620">
@@ -20207,8 +19079,8 @@
         </p:nvCxnSpPr>
         <p:spPr>
           <a:xfrm rot="5400000">
-            <a:off x="10903347" y="22317303"/>
-            <a:ext cx="327134" cy="585876"/>
+            <a:off x="10939988" y="22221377"/>
+            <a:ext cx="260713" cy="592734"/>
           </a:xfrm>
           <a:prstGeom prst="bentConnector3">
             <a:avLst>
@@ -20252,151 +19124,8 @@
         </p:nvCxnSpPr>
         <p:spPr>
           <a:xfrm rot="16200000" flipH="1">
-            <a:off x="10311911" y="22311743"/>
-            <a:ext cx="327134" cy="596995"/>
-          </a:xfrm>
-          <a:prstGeom prst="bentConnector3">
-            <a:avLst>
-              <a:gd name="adj1" fmla="val 50000"/>
-            </a:avLst>
-          </a:prstGeom>
-          <a:ln w="19050">
-            <a:tailEnd type="arrow"/>
-          </a:ln>
-        </p:spPr>
-        <p:style>
-          <a:lnRef idx="1">
-            <a:schemeClr val="accent1"/>
-          </a:lnRef>
-          <a:fillRef idx="0">
-            <a:schemeClr val="accent1"/>
-          </a:fillRef>
-          <a:effectRef idx="0">
-            <a:schemeClr val="accent1"/>
-          </a:effectRef>
-          <a:fontRef idx="minor">
-            <a:schemeClr val="tx1"/>
-          </a:fontRef>
-        </p:style>
-      </p:cxnSp>
-      <p:sp>
-        <p:nvSpPr>
-          <p:cNvPr id="535" name="Прямоугольник 534">
-            <a:extLst>
-              <a:ext uri="{FF2B5EF4-FFF2-40B4-BE49-F238E27FC236}">
-                <a16:creationId xmlns:a16="http://schemas.microsoft.com/office/drawing/2014/main" id="{0EF51C39-5CDB-4991-B859-6F3CB100F62B}"/>
-              </a:ext>
-            </a:extLst>
-          </p:cNvPr>
-          <p:cNvSpPr/>
-          <p:nvPr/>
-        </p:nvSpPr>
-        <p:spPr>
-          <a:xfrm>
-            <a:off x="13377867" y="22773808"/>
-            <a:ext cx="926325" cy="540000"/>
-          </a:xfrm>
-          <a:prstGeom prst="rect">
-            <a:avLst/>
-          </a:prstGeom>
-          <a:solidFill>
-            <a:schemeClr val="accent2">
-              <a:lumMod val="75000"/>
-            </a:schemeClr>
-          </a:solidFill>
-          <a:ln w="19050"/>
-        </p:spPr>
-        <p:style>
-          <a:lnRef idx="2">
-            <a:schemeClr val="accent1"/>
-          </a:lnRef>
-          <a:fillRef idx="1">
-            <a:schemeClr val="lt1"/>
-          </a:fillRef>
-          <a:effectRef idx="0">
-            <a:schemeClr val="accent1"/>
-          </a:effectRef>
-          <a:fontRef idx="minor">
-            <a:schemeClr val="dk1"/>
-          </a:fontRef>
-        </p:style>
-        <p:txBody>
-          <a:bodyPr lIns="124733" tIns="62367" rIns="124733" bIns="62367" rtlCol="0" anchor="ctr"/>
-          <a:lstStyle/>
-          <a:p>
-            <a:pPr algn="ctr"/>
-            <a:r>
-              <a:rPr lang="ru-RU" sz="700" dirty="0"/>
-              <a:t>Объявить о создании Федерации арабских королевств</a:t>
-            </a:r>
-          </a:p>
-        </p:txBody>
-      </p:sp>
-      <p:cxnSp>
-        <p:nvCxnSpPr>
-          <p:cNvPr id="536" name="Соединительная линия уступом 620">
-            <a:extLst>
-              <a:ext uri="{FF2B5EF4-FFF2-40B4-BE49-F238E27FC236}">
-                <a16:creationId xmlns:a16="http://schemas.microsoft.com/office/drawing/2014/main" id="{70499EFD-2CD6-4B5A-BCCE-FD0B9B26485B}"/>
-              </a:ext>
-            </a:extLst>
-          </p:cNvPr>
-          <p:cNvCxnSpPr>
-            <a:cxnSpLocks/>
-            <a:stCxn id="495" idx="2"/>
-            <a:endCxn id="535" idx="0"/>
-          </p:cNvCxnSpPr>
-          <p:nvPr/>
-        </p:nvCxnSpPr>
-        <p:spPr>
-          <a:xfrm rot="16200000" flipH="1">
-            <a:off x="13364629" y="22297407"/>
-            <a:ext cx="327134" cy="625668"/>
-          </a:xfrm>
-          <a:prstGeom prst="bentConnector3">
-            <a:avLst>
-              <a:gd name="adj1" fmla="val 50000"/>
-            </a:avLst>
-          </a:prstGeom>
-          <a:ln w="19050">
-            <a:tailEnd type="arrow"/>
-          </a:ln>
-        </p:spPr>
-        <p:style>
-          <a:lnRef idx="1">
-            <a:schemeClr val="accent1"/>
-          </a:lnRef>
-          <a:fillRef idx="0">
-            <a:schemeClr val="accent1"/>
-          </a:fillRef>
-          <a:effectRef idx="0">
-            <a:schemeClr val="accent1"/>
-          </a:effectRef>
-          <a:fontRef idx="minor">
-            <a:schemeClr val="tx1"/>
-          </a:fontRef>
-        </p:style>
-      </p:cxnSp>
-      <p:cxnSp>
-        <p:nvCxnSpPr>
-          <p:cNvPr id="539" name="Соединительная линия уступом 620">
-            <a:extLst>
-              <a:ext uri="{FF2B5EF4-FFF2-40B4-BE49-F238E27FC236}">
-                <a16:creationId xmlns:a16="http://schemas.microsoft.com/office/drawing/2014/main" id="{035D5408-D287-4FEE-B46A-9DAE78A1D826}"/>
-              </a:ext>
-            </a:extLst>
-          </p:cNvPr>
-          <p:cNvCxnSpPr>
-            <a:cxnSpLocks/>
-            <a:stCxn id="499" idx="2"/>
-            <a:endCxn id="535" idx="0"/>
-          </p:cNvCxnSpPr>
-          <p:nvPr/>
-        </p:nvCxnSpPr>
-        <p:spPr>
-          <a:xfrm rot="5400000">
-            <a:off x="13987068" y="22297384"/>
-            <a:ext cx="330387" cy="622461"/>
+            <a:off x="10345123" y="22219247"/>
+            <a:ext cx="260712" cy="596996"/>
           </a:xfrm>
           <a:prstGeom prst="bentConnector3">
             <a:avLst>
@@ -21141,32 +19870,8 @@
             <a:pPr algn="ctr"/>
             <a:r>
               <a:rPr lang="ru-RU" sz="800" dirty="0"/>
-              <a:t>Присяга Племен (</a:t>
-            </a:r>
-            <a:r>
-              <a:rPr lang="ru-RU" sz="800" dirty="0" err="1"/>
-              <a:t>Байа</a:t>
-            </a:r>
-            <a:r>
-              <a:rPr lang="ru-RU" sz="800" dirty="0"/>
-              <a:t>)</a:t>
-            </a:r>
-            <a:br>
-              <a:rPr lang="ru-RU" sz="800" dirty="0"/>
-            </a:br>
-            <a:r>
-              <a:rPr lang="ru-RU" sz="300" dirty="0"/>
-              <a:t>Восстановление древнего ритуала, когда вожди всех племен лично клянутся в верности королю. Фокус снижает </a:t>
-            </a:r>
-            <a:r>
-              <a:rPr lang="ru-RU" sz="300" dirty="0" err="1"/>
-              <a:t>дебаффы</a:t>
-            </a:r>
-            <a:r>
-              <a:rPr lang="ru-RU" sz="300" dirty="0"/>
-              <a:t> от автономии регионов до нуля.</a:t>
-            </a:r>
-            <a:endParaRPr lang="ru-RU" sz="800" dirty="0"/>
+              <a:t>Присяга племён</a:t>
+            </a:r>
           </a:p>
         </p:txBody>
       </p:sp>
@@ -27114,6 +25819,644 @@
           <a:prstGeom prst="bentConnector3">
             <a:avLst>
               <a:gd name="adj1" fmla="val 11782"/>
+            </a:avLst>
+          </a:prstGeom>
+          <a:ln w="19050">
+            <a:tailEnd type="arrow"/>
+          </a:ln>
+        </p:spPr>
+        <p:style>
+          <a:lnRef idx="1">
+            <a:schemeClr val="accent1"/>
+          </a:lnRef>
+          <a:fillRef idx="0">
+            <a:schemeClr val="accent1"/>
+          </a:fillRef>
+          <a:effectRef idx="0">
+            <a:schemeClr val="accent1"/>
+          </a:effectRef>
+          <a:fontRef idx="minor">
+            <a:schemeClr val="tx1"/>
+          </a:fontRef>
+        </p:style>
+      </p:cxnSp>
+      <p:sp>
+        <p:nvSpPr>
+          <p:cNvPr id="520" name="Прямоугольник 519">
+            <a:extLst>
+              <a:ext uri="{FF2B5EF4-FFF2-40B4-BE49-F238E27FC236}">
+                <a16:creationId xmlns:a16="http://schemas.microsoft.com/office/drawing/2014/main" id="{D879779D-C792-48BC-9465-5526A3CCE035}"/>
+              </a:ext>
+            </a:extLst>
+          </p:cNvPr>
+          <p:cNvSpPr/>
+          <p:nvPr/>
+        </p:nvSpPr>
+        <p:spPr>
+          <a:xfrm>
+            <a:off x="11512748" y="21032646"/>
+            <a:ext cx="926325" cy="540000"/>
+          </a:xfrm>
+          <a:prstGeom prst="rect">
+            <a:avLst/>
+          </a:prstGeom>
+          <a:solidFill>
+            <a:schemeClr val="accent2">
+              <a:lumMod val="75000"/>
+            </a:schemeClr>
+          </a:solidFill>
+          <a:ln w="19050"/>
+        </p:spPr>
+        <p:style>
+          <a:lnRef idx="2">
+            <a:schemeClr val="accent1"/>
+          </a:lnRef>
+          <a:fillRef idx="1">
+            <a:schemeClr val="lt1"/>
+          </a:fillRef>
+          <a:effectRef idx="0">
+            <a:schemeClr val="accent1"/>
+          </a:effectRef>
+          <a:fontRef idx="minor">
+            <a:schemeClr val="dk1"/>
+          </a:fontRef>
+        </p:style>
+        <p:txBody>
+          <a:bodyPr lIns="124733" tIns="62367" rIns="124733" bIns="62367" rtlCol="0" anchor="ctr"/>
+          <a:lstStyle/>
+          <a:p>
+            <a:pPr algn="ctr"/>
+            <a:r>
+              <a:rPr lang="ru-RU" sz="700" dirty="0"/>
+              <a:t>Найти поддержку среди испанских фалангистов</a:t>
+            </a:r>
+          </a:p>
+        </p:txBody>
+      </p:sp>
+      <p:cxnSp>
+        <p:nvCxnSpPr>
+          <p:cNvPr id="521" name="Соединительная линия уступом 620">
+            <a:extLst>
+              <a:ext uri="{FF2B5EF4-FFF2-40B4-BE49-F238E27FC236}">
+                <a16:creationId xmlns:a16="http://schemas.microsoft.com/office/drawing/2014/main" id="{F2302FEA-DE50-42DE-827F-0248782C6D3B}"/>
+              </a:ext>
+            </a:extLst>
+          </p:cNvPr>
+          <p:cNvCxnSpPr>
+            <a:cxnSpLocks/>
+            <a:stCxn id="391" idx="2"/>
+            <a:endCxn id="520" idx="0"/>
+          </p:cNvCxnSpPr>
+          <p:nvPr/>
+        </p:nvCxnSpPr>
+        <p:spPr>
+          <a:xfrm rot="16200000" flipH="1">
+            <a:off x="11578302" y="20635037"/>
+            <a:ext cx="186018" cy="609199"/>
+          </a:xfrm>
+          <a:prstGeom prst="bentConnector3">
+            <a:avLst>
+              <a:gd name="adj1" fmla="val 50000"/>
+            </a:avLst>
+          </a:prstGeom>
+          <a:ln w="19050">
+            <a:tailEnd type="arrow"/>
+          </a:ln>
+        </p:spPr>
+        <p:style>
+          <a:lnRef idx="1">
+            <a:schemeClr val="accent1"/>
+          </a:lnRef>
+          <a:fillRef idx="0">
+            <a:schemeClr val="accent1"/>
+          </a:fillRef>
+          <a:effectRef idx="0">
+            <a:schemeClr val="accent1"/>
+          </a:effectRef>
+          <a:fontRef idx="minor">
+            <a:schemeClr val="tx1"/>
+          </a:fontRef>
+        </p:style>
+      </p:cxnSp>
+      <p:cxnSp>
+        <p:nvCxnSpPr>
+          <p:cNvPr id="523" name="Соединительная линия уступом 620">
+            <a:extLst>
+              <a:ext uri="{FF2B5EF4-FFF2-40B4-BE49-F238E27FC236}">
+                <a16:creationId xmlns:a16="http://schemas.microsoft.com/office/drawing/2014/main" id="{35AE13DC-21AF-4BCC-BDB4-6EC259833CB6}"/>
+              </a:ext>
+            </a:extLst>
+          </p:cNvPr>
+          <p:cNvCxnSpPr>
+            <a:cxnSpLocks/>
+            <a:stCxn id="286" idx="2"/>
+            <a:endCxn id="520" idx="0"/>
+          </p:cNvCxnSpPr>
+          <p:nvPr/>
+        </p:nvCxnSpPr>
+        <p:spPr>
+          <a:xfrm rot="5400000">
+            <a:off x="11483404" y="20540137"/>
+            <a:ext cx="985017" cy="1"/>
+          </a:xfrm>
+          <a:prstGeom prst="bentConnector3">
+            <a:avLst>
+              <a:gd name="adj1" fmla="val 50000"/>
+            </a:avLst>
+          </a:prstGeom>
+          <a:ln w="19050">
+            <a:tailEnd type="arrow"/>
+          </a:ln>
+        </p:spPr>
+        <p:style>
+          <a:lnRef idx="1">
+            <a:schemeClr val="accent1"/>
+          </a:lnRef>
+          <a:fillRef idx="0">
+            <a:schemeClr val="accent1"/>
+          </a:fillRef>
+          <a:effectRef idx="0">
+            <a:schemeClr val="accent1"/>
+          </a:effectRef>
+          <a:fontRef idx="minor">
+            <a:schemeClr val="tx1"/>
+          </a:fontRef>
+        </p:style>
+      </p:cxnSp>
+      <p:sp>
+        <p:nvSpPr>
+          <p:cNvPr id="527" name="Прямоугольник 526">
+            <a:extLst>
+              <a:ext uri="{FF2B5EF4-FFF2-40B4-BE49-F238E27FC236}">
+                <a16:creationId xmlns:a16="http://schemas.microsoft.com/office/drawing/2014/main" id="{7BE6B12E-2FC5-4352-A850-0061360A1EEE}"/>
+              </a:ext>
+            </a:extLst>
+          </p:cNvPr>
+          <p:cNvSpPr/>
+          <p:nvPr/>
+        </p:nvSpPr>
+        <p:spPr>
+          <a:xfrm>
+            <a:off x="12150141" y="20306733"/>
+            <a:ext cx="926325" cy="540000"/>
+          </a:xfrm>
+          <a:prstGeom prst="rect">
+            <a:avLst/>
+          </a:prstGeom>
+          <a:solidFill>
+            <a:schemeClr val="accent2">
+              <a:lumMod val="75000"/>
+            </a:schemeClr>
+          </a:solidFill>
+          <a:ln w="19050"/>
+        </p:spPr>
+        <p:style>
+          <a:lnRef idx="2">
+            <a:schemeClr val="accent1"/>
+          </a:lnRef>
+          <a:fillRef idx="1">
+            <a:schemeClr val="lt1"/>
+          </a:fillRef>
+          <a:effectRef idx="0">
+            <a:schemeClr val="accent1"/>
+          </a:effectRef>
+          <a:fontRef idx="minor">
+            <a:schemeClr val="dk1"/>
+          </a:fontRef>
+        </p:style>
+        <p:txBody>
+          <a:bodyPr lIns="124733" tIns="62367" rIns="124733" bIns="62367" rtlCol="0" anchor="ctr"/>
+          <a:lstStyle/>
+          <a:p>
+            <a:pPr algn="ctr"/>
+            <a:r>
+              <a:rPr lang="ru-RU" sz="700" dirty="0"/>
+              <a:t>Создание вертикального профсоюза</a:t>
+            </a:r>
+          </a:p>
+        </p:txBody>
+      </p:sp>
+      <p:sp>
+        <p:nvSpPr>
+          <p:cNvPr id="530" name="Прямоугольник 529">
+            <a:extLst>
+              <a:ext uri="{FF2B5EF4-FFF2-40B4-BE49-F238E27FC236}">
+                <a16:creationId xmlns:a16="http://schemas.microsoft.com/office/drawing/2014/main" id="{2A82F62F-8395-4C99-9757-DE13F85A4E30}"/>
+              </a:ext>
+            </a:extLst>
+          </p:cNvPr>
+          <p:cNvSpPr/>
+          <p:nvPr/>
+        </p:nvSpPr>
+        <p:spPr>
+          <a:xfrm>
+            <a:off x="12752200" y="21032646"/>
+            <a:ext cx="926325" cy="540000"/>
+          </a:xfrm>
+          <a:prstGeom prst="rect">
+            <a:avLst/>
+          </a:prstGeom>
+          <a:solidFill>
+            <a:schemeClr val="accent2">
+              <a:lumMod val="75000"/>
+            </a:schemeClr>
+          </a:solidFill>
+          <a:ln w="19050"/>
+        </p:spPr>
+        <p:style>
+          <a:lnRef idx="2">
+            <a:schemeClr val="accent1"/>
+          </a:lnRef>
+          <a:fillRef idx="1">
+            <a:schemeClr val="lt1"/>
+          </a:fillRef>
+          <a:effectRef idx="0">
+            <a:schemeClr val="accent1"/>
+          </a:effectRef>
+          <a:fontRef idx="minor">
+            <a:schemeClr val="dk1"/>
+          </a:fontRef>
+        </p:style>
+        <p:txBody>
+          <a:bodyPr lIns="124733" tIns="62367" rIns="124733" bIns="62367" rtlCol="0" anchor="ctr"/>
+          <a:lstStyle/>
+          <a:p>
+            <a:pPr algn="ctr"/>
+            <a:r>
+              <a:rPr lang="ru-RU" sz="700" dirty="0"/>
+              <a:t>Объединение рабочих и работодателей по отраслям</a:t>
+            </a:r>
+          </a:p>
+        </p:txBody>
+      </p:sp>
+      <p:cxnSp>
+        <p:nvCxnSpPr>
+          <p:cNvPr id="531" name="Соединительная линия уступом 620">
+            <a:extLst>
+              <a:ext uri="{FF2B5EF4-FFF2-40B4-BE49-F238E27FC236}">
+                <a16:creationId xmlns:a16="http://schemas.microsoft.com/office/drawing/2014/main" id="{249B645A-AC76-46A7-A83B-C0F9A7D5B865}"/>
+              </a:ext>
+            </a:extLst>
+          </p:cNvPr>
+          <p:cNvCxnSpPr>
+            <a:cxnSpLocks/>
+            <a:stCxn id="286" idx="2"/>
+            <a:endCxn id="527" idx="0"/>
+          </p:cNvCxnSpPr>
+          <p:nvPr/>
+        </p:nvCxnSpPr>
+        <p:spPr>
+          <a:xfrm rot="16200000" flipH="1">
+            <a:off x="12165056" y="19858485"/>
+            <a:ext cx="259104" cy="637392"/>
+          </a:xfrm>
+          <a:prstGeom prst="bentConnector3">
+            <a:avLst>
+              <a:gd name="adj1" fmla="val 50000"/>
+            </a:avLst>
+          </a:prstGeom>
+          <a:ln w="19050">
+            <a:tailEnd type="arrow"/>
+          </a:ln>
+        </p:spPr>
+        <p:style>
+          <a:lnRef idx="1">
+            <a:schemeClr val="accent1"/>
+          </a:lnRef>
+          <a:fillRef idx="0">
+            <a:schemeClr val="accent1"/>
+          </a:fillRef>
+          <a:effectRef idx="0">
+            <a:schemeClr val="accent1"/>
+          </a:effectRef>
+          <a:fontRef idx="minor">
+            <a:schemeClr val="tx1"/>
+          </a:fontRef>
+        </p:style>
+      </p:cxnSp>
+      <p:sp>
+        <p:nvSpPr>
+          <p:cNvPr id="533" name="Прямоугольник 532">
+            <a:extLst>
+              <a:ext uri="{FF2B5EF4-FFF2-40B4-BE49-F238E27FC236}">
+                <a16:creationId xmlns:a16="http://schemas.microsoft.com/office/drawing/2014/main" id="{07F1E05F-B285-4962-8AFC-85A9CE71C5DE}"/>
+              </a:ext>
+            </a:extLst>
+          </p:cNvPr>
+          <p:cNvSpPr/>
+          <p:nvPr/>
+        </p:nvSpPr>
+        <p:spPr>
+          <a:xfrm>
+            <a:off x="11512747" y="22654770"/>
+            <a:ext cx="926325" cy="540000"/>
+          </a:xfrm>
+          <a:prstGeom prst="rect">
+            <a:avLst/>
+          </a:prstGeom>
+          <a:solidFill>
+            <a:schemeClr val="accent2">
+              <a:lumMod val="75000"/>
+            </a:schemeClr>
+          </a:solidFill>
+          <a:ln w="19050"/>
+        </p:spPr>
+        <p:style>
+          <a:lnRef idx="2">
+            <a:schemeClr val="accent1"/>
+          </a:lnRef>
+          <a:fillRef idx="1">
+            <a:schemeClr val="lt1"/>
+          </a:fillRef>
+          <a:effectRef idx="0">
+            <a:schemeClr val="accent1"/>
+          </a:effectRef>
+          <a:fontRef idx="minor">
+            <a:schemeClr val="dk1"/>
+          </a:fontRef>
+        </p:style>
+        <p:txBody>
+          <a:bodyPr lIns="124733" tIns="62367" rIns="124733" bIns="62367" rtlCol="0" anchor="ctr"/>
+          <a:lstStyle/>
+          <a:p>
+            <a:pPr algn="ctr"/>
+            <a:r>
+              <a:rPr lang="ru-RU" sz="700" dirty="0"/>
+              <a:t>Создать культ личности</a:t>
+            </a:r>
+          </a:p>
+        </p:txBody>
+      </p:sp>
+      <p:sp>
+        <p:nvSpPr>
+          <p:cNvPr id="534" name="Прямоугольник 533">
+            <a:extLst>
+              <a:ext uri="{FF2B5EF4-FFF2-40B4-BE49-F238E27FC236}">
+                <a16:creationId xmlns:a16="http://schemas.microsoft.com/office/drawing/2014/main" id="{439679E5-8F70-4C51-996F-EC7F24AA5DDE}"/>
+              </a:ext>
+            </a:extLst>
+          </p:cNvPr>
+          <p:cNvSpPr/>
+          <p:nvPr/>
+        </p:nvSpPr>
+        <p:spPr>
+          <a:xfrm>
+            <a:off x="12752201" y="21847388"/>
+            <a:ext cx="926325" cy="540000"/>
+          </a:xfrm>
+          <a:prstGeom prst="rect">
+            <a:avLst/>
+          </a:prstGeom>
+          <a:solidFill>
+            <a:schemeClr val="accent2">
+              <a:lumMod val="75000"/>
+            </a:schemeClr>
+          </a:solidFill>
+          <a:ln w="19050"/>
+        </p:spPr>
+        <p:style>
+          <a:lnRef idx="2">
+            <a:schemeClr val="accent1"/>
+          </a:lnRef>
+          <a:fillRef idx="1">
+            <a:schemeClr val="lt1"/>
+          </a:fillRef>
+          <a:effectRef idx="0">
+            <a:schemeClr val="accent1"/>
+          </a:effectRef>
+          <a:fontRef idx="minor">
+            <a:schemeClr val="dk1"/>
+          </a:fontRef>
+        </p:style>
+        <p:txBody>
+          <a:bodyPr lIns="124733" tIns="62367" rIns="124733" bIns="62367" rtlCol="0" anchor="ctr"/>
+          <a:lstStyle/>
+          <a:p>
+            <a:pPr algn="ctr"/>
+            <a:r>
+              <a:rPr lang="ru-RU" sz="700" dirty="0"/>
+              <a:t>Передача прав собственности и средств производства в профсоюзы</a:t>
+            </a:r>
+          </a:p>
+        </p:txBody>
+      </p:sp>
+      <p:sp>
+        <p:nvSpPr>
+          <p:cNvPr id="537" name="Прямоугольник 536">
+            <a:extLst>
+              <a:ext uri="{FF2B5EF4-FFF2-40B4-BE49-F238E27FC236}">
+                <a16:creationId xmlns:a16="http://schemas.microsoft.com/office/drawing/2014/main" id="{D4B3B65D-4D05-457E-A3ED-BDEA402DC168}"/>
+              </a:ext>
+            </a:extLst>
+          </p:cNvPr>
+          <p:cNvSpPr/>
+          <p:nvPr/>
+        </p:nvSpPr>
+        <p:spPr>
+          <a:xfrm>
+            <a:off x="12752200" y="22654770"/>
+            <a:ext cx="926325" cy="540000"/>
+          </a:xfrm>
+          <a:prstGeom prst="rect">
+            <a:avLst/>
+          </a:prstGeom>
+          <a:solidFill>
+            <a:schemeClr val="accent2">
+              <a:lumMod val="75000"/>
+            </a:schemeClr>
+          </a:solidFill>
+          <a:ln w="19050"/>
+        </p:spPr>
+        <p:style>
+          <a:lnRef idx="2">
+            <a:schemeClr val="accent1"/>
+          </a:lnRef>
+          <a:fillRef idx="1">
+            <a:schemeClr val="lt1"/>
+          </a:fillRef>
+          <a:effectRef idx="0">
+            <a:schemeClr val="accent1"/>
+          </a:effectRef>
+          <a:fontRef idx="minor">
+            <a:schemeClr val="dk1"/>
+          </a:fontRef>
+        </p:style>
+        <p:txBody>
+          <a:bodyPr lIns="124733" tIns="62367" rIns="124733" bIns="62367" rtlCol="0" anchor="ctr"/>
+          <a:lstStyle/>
+          <a:p>
+            <a:pPr algn="ctr"/>
+            <a:r>
+              <a:rPr lang="ru-RU" sz="700" dirty="0"/>
+              <a:t>Воплотить в жизнь национал-</a:t>
+            </a:r>
+            <a:r>
+              <a:rPr lang="ru-RU" sz="700" dirty="0" err="1"/>
+              <a:t>юнионизм</a:t>
+            </a:r>
+            <a:endParaRPr lang="ru-RU" sz="700" dirty="0"/>
+          </a:p>
+        </p:txBody>
+      </p:sp>
+      <p:cxnSp>
+        <p:nvCxnSpPr>
+          <p:cNvPr id="538" name="Соединительная линия уступом 620">
+            <a:extLst>
+              <a:ext uri="{FF2B5EF4-FFF2-40B4-BE49-F238E27FC236}">
+                <a16:creationId xmlns:a16="http://schemas.microsoft.com/office/drawing/2014/main" id="{AB0C856A-015A-4250-A7F2-0CEE1A7AE3D8}"/>
+              </a:ext>
+            </a:extLst>
+          </p:cNvPr>
+          <p:cNvCxnSpPr>
+            <a:cxnSpLocks/>
+            <a:stCxn id="520" idx="2"/>
+            <a:endCxn id="533" idx="0"/>
+          </p:cNvCxnSpPr>
+          <p:nvPr/>
+        </p:nvCxnSpPr>
+        <p:spPr>
+          <a:xfrm rot="5400000">
+            <a:off x="11434849" y="22113708"/>
+            <a:ext cx="1082124" cy="1"/>
+          </a:xfrm>
+          <a:prstGeom prst="bentConnector3">
+            <a:avLst>
+              <a:gd name="adj1" fmla="val 50000"/>
+            </a:avLst>
+          </a:prstGeom>
+          <a:ln w="19050">
+            <a:tailEnd type="arrow"/>
+          </a:ln>
+        </p:spPr>
+        <p:style>
+          <a:lnRef idx="1">
+            <a:schemeClr val="accent1"/>
+          </a:lnRef>
+          <a:fillRef idx="0">
+            <a:schemeClr val="accent1"/>
+          </a:fillRef>
+          <a:effectRef idx="0">
+            <a:schemeClr val="accent1"/>
+          </a:effectRef>
+          <a:fontRef idx="minor">
+            <a:schemeClr val="tx1"/>
+          </a:fontRef>
+        </p:style>
+      </p:cxnSp>
+      <p:cxnSp>
+        <p:nvCxnSpPr>
+          <p:cNvPr id="540" name="Соединительная линия уступом 620">
+            <a:extLst>
+              <a:ext uri="{FF2B5EF4-FFF2-40B4-BE49-F238E27FC236}">
+                <a16:creationId xmlns:a16="http://schemas.microsoft.com/office/drawing/2014/main" id="{89AE2EBF-E461-4885-8EBB-A725AAD7537D}"/>
+              </a:ext>
+            </a:extLst>
+          </p:cNvPr>
+          <p:cNvCxnSpPr>
+            <a:cxnSpLocks/>
+            <a:stCxn id="527" idx="2"/>
+            <a:endCxn id="530" idx="0"/>
+          </p:cNvCxnSpPr>
+          <p:nvPr/>
+        </p:nvCxnSpPr>
+        <p:spPr>
+          <a:xfrm rot="16200000" flipH="1">
+            <a:off x="12821377" y="20638659"/>
+            <a:ext cx="185913" cy="602059"/>
+          </a:xfrm>
+          <a:prstGeom prst="bentConnector3">
+            <a:avLst>
+              <a:gd name="adj1" fmla="val 50000"/>
+            </a:avLst>
+          </a:prstGeom>
+          <a:ln w="19050">
+            <a:tailEnd type="arrow"/>
+          </a:ln>
+        </p:spPr>
+        <p:style>
+          <a:lnRef idx="1">
+            <a:schemeClr val="accent1"/>
+          </a:lnRef>
+          <a:fillRef idx="0">
+            <a:schemeClr val="accent1"/>
+          </a:fillRef>
+          <a:effectRef idx="0">
+            <a:schemeClr val="accent1"/>
+          </a:effectRef>
+          <a:fontRef idx="minor">
+            <a:schemeClr val="tx1"/>
+          </a:fontRef>
+        </p:style>
+      </p:cxnSp>
+      <p:cxnSp>
+        <p:nvCxnSpPr>
+          <p:cNvPr id="541" name="Соединительная линия уступом 620">
+            <a:extLst>
+              <a:ext uri="{FF2B5EF4-FFF2-40B4-BE49-F238E27FC236}">
+                <a16:creationId xmlns:a16="http://schemas.microsoft.com/office/drawing/2014/main" id="{BB42ABE2-7B27-4605-A3C2-923A7B99A9F8}"/>
+              </a:ext>
+            </a:extLst>
+          </p:cNvPr>
+          <p:cNvCxnSpPr>
+            <a:cxnSpLocks/>
+            <a:stCxn id="530" idx="2"/>
+            <a:endCxn id="534" idx="0"/>
+          </p:cNvCxnSpPr>
+          <p:nvPr/>
+        </p:nvCxnSpPr>
+        <p:spPr>
+          <a:xfrm rot="16200000" flipH="1">
+            <a:off x="13077992" y="21710016"/>
+            <a:ext cx="274742" cy="1"/>
+          </a:xfrm>
+          <a:prstGeom prst="bentConnector3">
+            <a:avLst>
+              <a:gd name="adj1" fmla="val 50000"/>
+            </a:avLst>
+          </a:prstGeom>
+          <a:ln w="19050">
+            <a:tailEnd type="arrow"/>
+          </a:ln>
+        </p:spPr>
+        <p:style>
+          <a:lnRef idx="1">
+            <a:schemeClr val="accent1"/>
+          </a:lnRef>
+          <a:fillRef idx="0">
+            <a:schemeClr val="accent1"/>
+          </a:fillRef>
+          <a:effectRef idx="0">
+            <a:schemeClr val="accent1"/>
+          </a:effectRef>
+          <a:fontRef idx="minor">
+            <a:schemeClr val="tx1"/>
+          </a:fontRef>
+        </p:style>
+      </p:cxnSp>
+      <p:cxnSp>
+        <p:nvCxnSpPr>
+          <p:cNvPr id="542" name="Соединительная линия уступом 620">
+            <a:extLst>
+              <a:ext uri="{FF2B5EF4-FFF2-40B4-BE49-F238E27FC236}">
+                <a16:creationId xmlns:a16="http://schemas.microsoft.com/office/drawing/2014/main" id="{405B02C7-D8B4-454D-BBFE-7AE75634DDBF}"/>
+              </a:ext>
+            </a:extLst>
+          </p:cNvPr>
+          <p:cNvCxnSpPr>
+            <a:cxnSpLocks/>
+            <a:stCxn id="534" idx="2"/>
+            <a:endCxn id="537" idx="0"/>
+          </p:cNvCxnSpPr>
+          <p:nvPr/>
+        </p:nvCxnSpPr>
+        <p:spPr>
+          <a:xfrm rot="5400000">
+            <a:off x="13081673" y="22521079"/>
+            <a:ext cx="267382" cy="1"/>
+          </a:xfrm>
+          <a:prstGeom prst="bentConnector3">
+            <a:avLst>
+              <a:gd name="adj1" fmla="val 50000"/>
             </a:avLst>
           </a:prstGeom>
           <a:ln w="19050">

--- a/Наработки/диздоки/Марокко/Марокко.pptx
+++ b/Наработки/диздоки/Марокко/Марокко.pptx
@@ -209,7 +209,7 @@
             <a:fld id="{33E3D7F9-E251-484C-A6FF-FA958879DF69}" type="datetimeFigureOut">
               <a:rPr lang="ru-RU" smtClean="0"/>
               <a:pPr/>
-              <a:t>01.07.2026</a:t>
+              <a:t>02.07.2026</a:t>
             </a:fld>
             <a:endParaRPr lang="ru-RU"/>
           </a:p>
@@ -699,7 +699,7 @@
             <a:fld id="{85A5DE44-605B-4D3B-B2B7-94543DF81A36}" type="datetimeFigureOut">
               <a:rPr lang="ru-RU" smtClean="0"/>
               <a:pPr/>
-              <a:t>01.07.2026</a:t>
+              <a:t>02.07.2026</a:t>
             </a:fld>
             <a:endParaRPr lang="ru-RU"/>
           </a:p>
@@ -871,7 +871,7 @@
             <a:fld id="{85A5DE44-605B-4D3B-B2B7-94543DF81A36}" type="datetimeFigureOut">
               <a:rPr lang="ru-RU" smtClean="0"/>
               <a:pPr/>
-              <a:t>01.07.2026</a:t>
+              <a:t>02.07.2026</a:t>
             </a:fld>
             <a:endParaRPr lang="ru-RU"/>
           </a:p>
@@ -1053,7 +1053,7 @@
             <a:fld id="{85A5DE44-605B-4D3B-B2B7-94543DF81A36}" type="datetimeFigureOut">
               <a:rPr lang="ru-RU" smtClean="0"/>
               <a:pPr/>
-              <a:t>01.07.2026</a:t>
+              <a:t>02.07.2026</a:t>
             </a:fld>
             <a:endParaRPr lang="ru-RU"/>
           </a:p>
@@ -1225,7 +1225,7 @@
             <a:fld id="{85A5DE44-605B-4D3B-B2B7-94543DF81A36}" type="datetimeFigureOut">
               <a:rPr lang="ru-RU" smtClean="0"/>
               <a:pPr/>
-              <a:t>01.07.2026</a:t>
+              <a:t>02.07.2026</a:t>
             </a:fld>
             <a:endParaRPr lang="ru-RU"/>
           </a:p>
@@ -1473,7 +1473,7 @@
             <a:fld id="{85A5DE44-605B-4D3B-B2B7-94543DF81A36}" type="datetimeFigureOut">
               <a:rPr lang="ru-RU" smtClean="0"/>
               <a:pPr/>
-              <a:t>01.07.2026</a:t>
+              <a:t>02.07.2026</a:t>
             </a:fld>
             <a:endParaRPr lang="ru-RU"/>
           </a:p>
@@ -1707,7 +1707,7 @@
             <a:fld id="{85A5DE44-605B-4D3B-B2B7-94543DF81A36}" type="datetimeFigureOut">
               <a:rPr lang="ru-RU" smtClean="0"/>
               <a:pPr/>
-              <a:t>01.07.2026</a:t>
+              <a:t>02.07.2026</a:t>
             </a:fld>
             <a:endParaRPr lang="ru-RU"/>
           </a:p>
@@ -2076,7 +2076,7 @@
             <a:fld id="{85A5DE44-605B-4D3B-B2B7-94543DF81A36}" type="datetimeFigureOut">
               <a:rPr lang="ru-RU" smtClean="0"/>
               <a:pPr/>
-              <a:t>01.07.2026</a:t>
+              <a:t>02.07.2026</a:t>
             </a:fld>
             <a:endParaRPr lang="ru-RU"/>
           </a:p>
@@ -2196,7 +2196,7 @@
             <a:fld id="{85A5DE44-605B-4D3B-B2B7-94543DF81A36}" type="datetimeFigureOut">
               <a:rPr lang="ru-RU" smtClean="0"/>
               <a:pPr/>
-              <a:t>01.07.2026</a:t>
+              <a:t>02.07.2026</a:t>
             </a:fld>
             <a:endParaRPr lang="ru-RU"/>
           </a:p>
@@ -2293,7 +2293,7 @@
             <a:fld id="{85A5DE44-605B-4D3B-B2B7-94543DF81A36}" type="datetimeFigureOut">
               <a:rPr lang="ru-RU" smtClean="0"/>
               <a:pPr/>
-              <a:t>01.07.2026</a:t>
+              <a:t>02.07.2026</a:t>
             </a:fld>
             <a:endParaRPr lang="ru-RU"/>
           </a:p>
@@ -2572,7 +2572,7 @@
             <a:fld id="{85A5DE44-605B-4D3B-B2B7-94543DF81A36}" type="datetimeFigureOut">
               <a:rPr lang="ru-RU" smtClean="0"/>
               <a:pPr/>
-              <a:t>01.07.2026</a:t>
+              <a:t>02.07.2026</a:t>
             </a:fld>
             <a:endParaRPr lang="ru-RU"/>
           </a:p>
@@ -2831,7 +2831,7 @@
             <a:fld id="{85A5DE44-605B-4D3B-B2B7-94543DF81A36}" type="datetimeFigureOut">
               <a:rPr lang="ru-RU" smtClean="0"/>
               <a:pPr/>
-              <a:t>01.07.2026</a:t>
+              <a:t>02.07.2026</a:t>
             </a:fld>
             <a:endParaRPr lang="ru-RU"/>
           </a:p>
@@ -3046,7 +3046,7 @@
             <a:fld id="{85A5DE44-605B-4D3B-B2B7-94543DF81A36}" type="datetimeFigureOut">
               <a:rPr lang="ru-RU" smtClean="0"/>
               <a:pPr/>
-              <a:t>01.07.2026</a:t>
+              <a:t>02.07.2026</a:t>
             </a:fld>
             <a:endParaRPr lang="ru-RU"/>
           </a:p>
@@ -13613,12 +13613,9 @@
               <a:rPr lang="ru-RU" sz="700" dirty="0"/>
               <a:t>Танжер — столица шпионажа</a:t>
             </a:r>
-            <a:br>
-              <a:rPr lang="ru-RU" sz="700" dirty="0"/>
-            </a:br>
             <a:r>
               <a:rPr lang="ru-RU" sz="100" dirty="0"/>
-              <a:t>»: Использование уникального статуса Танжера (который долгое время был финансовой и шпионской «серой зоной»). Эффект: Дает +1 шпиона в агентство и ускоряет создание шпионской сети в Европе на 25%.</a:t>
+              <a:t>.</a:t>
             </a:r>
             <a:endParaRPr lang="ru-RU" sz="700" dirty="0"/>
           </a:p>
@@ -13672,110 +13669,6 @@
               <a:rPr lang="ru-RU" sz="700" dirty="0"/>
               <a:t>Свободный порт Танжера</a:t>
             </a:r>
-            <a:br>
-              <a:rPr lang="ru-RU" sz="700" dirty="0"/>
-            </a:br>
-            <a:r>
-              <a:rPr lang="ru-RU" sz="100" dirty="0"/>
-              <a:t>(Историко-игровое </a:t>
-            </a:r>
-            <a:r>
-              <a:rPr lang="ru-RU" sz="100" dirty="0" err="1"/>
-              <a:t>описание:«Танжер</a:t>
-            </a:r>
-            <a:r>
-              <a:rPr lang="ru-RU" sz="100" dirty="0"/>
-              <a:t> — это ворота из Атлантики в Средиземное море. Объявив город зоной свободной торговли (Порто-франко), мы отменим таможенные пошлины для иностранных судов. Это привлечет в город международные торговые компании, склады и сборочные мануфактуры, превратив Танжер в главный логистический </a:t>
-            </a:r>
-            <a:r>
-              <a:rPr lang="ru-RU" sz="100" dirty="0" err="1"/>
-              <a:t>хаб</a:t>
-            </a:r>
-            <a:r>
-              <a:rPr lang="ru-RU" sz="100" dirty="0"/>
-              <a:t> Северной Африки».⚙️ Игровые </a:t>
-            </a:r>
-            <a:r>
-              <a:rPr lang="ru-RU" sz="100" dirty="0" err="1"/>
-              <a:t>эффекты:Развитие</a:t>
-            </a:r>
-            <a:r>
-              <a:rPr lang="ru-RU" sz="100" dirty="0"/>
-              <a:t> региона (Танжер):Морская база (</a:t>
-            </a:r>
-            <a:r>
-              <a:rPr lang="ru-RU" sz="100" dirty="0" err="1"/>
-              <a:t>Naval</a:t>
-            </a:r>
-            <a:r>
-              <a:rPr lang="ru-RU" sz="100" dirty="0"/>
-              <a:t> </a:t>
-            </a:r>
-            <a:r>
-              <a:rPr lang="ru-RU" sz="100" dirty="0" err="1"/>
-              <a:t>Base</a:t>
-            </a:r>
-            <a:r>
-              <a:rPr lang="ru-RU" sz="100" dirty="0"/>
-              <a:t>): +2 </a:t>
-            </a:r>
-            <a:r>
-              <a:rPr lang="ru-RU" sz="100" dirty="0" err="1"/>
-              <a:t>уровня.Гражданская</a:t>
-            </a:r>
-            <a:r>
-              <a:rPr lang="ru-RU" sz="100" dirty="0"/>
-              <a:t> фабрика (</a:t>
-            </a:r>
-            <a:r>
-              <a:rPr lang="ru-RU" sz="100" dirty="0" err="1"/>
-              <a:t>Civilian</a:t>
-            </a:r>
-            <a:r>
-              <a:rPr lang="ru-RU" sz="100" dirty="0"/>
-              <a:t> </a:t>
-            </a:r>
-            <a:r>
-              <a:rPr lang="ru-RU" sz="100" dirty="0" err="1"/>
-              <a:t>Factory</a:t>
-            </a:r>
-            <a:r>
-              <a:rPr lang="ru-RU" sz="100" dirty="0"/>
-              <a:t>): +2 штуки (за счет притока иностранного капитала).Открывается +2 свободных слота для </a:t>
-            </a:r>
-            <a:r>
-              <a:rPr lang="ru-RU" sz="100" dirty="0" err="1"/>
-              <a:t>строительства.Экономические</a:t>
-            </a:r>
-            <a:r>
-              <a:rPr lang="ru-RU" sz="100" dirty="0"/>
-              <a:t> бонусы (Национальный дух «Ворота Средиземноморья»):Скорость строительства гражданских фабрик и инфраструктуры: +10%.Эффективность торговли (</a:t>
-            </a:r>
-            <a:r>
-              <a:rPr lang="ru-RU" sz="100" dirty="0" err="1"/>
-              <a:t>Trade</a:t>
-            </a:r>
-            <a:r>
-              <a:rPr lang="ru-RU" sz="100" dirty="0"/>
-              <a:t> </a:t>
-            </a:r>
-            <a:r>
-              <a:rPr lang="ru-RU" sz="100" dirty="0" err="1"/>
-              <a:t>Influence</a:t>
-            </a:r>
-            <a:r>
-              <a:rPr lang="ru-RU" sz="100" dirty="0"/>
-              <a:t> </a:t>
-            </a:r>
-            <a:r>
-              <a:rPr lang="ru-RU" sz="100" dirty="0" err="1"/>
-              <a:t>Factor</a:t>
-            </a:r>
-            <a:r>
-              <a:rPr lang="ru-RU" sz="100" dirty="0"/>
-              <a:t>): +15% (иностранные державы охотнее покупают ваши ресурсы).)</a:t>
-            </a:r>
-            <a:endParaRPr lang="ru-RU" sz="700" dirty="0"/>
           </a:p>
         </p:txBody>
       </p:sp>
@@ -13878,126 +13771,6 @@
               <a:rPr lang="ru-RU" sz="700" dirty="0"/>
               <a:t>Мавританские Акажу и Гуммиарабик</a:t>
             </a:r>
-            <a:br>
-              <a:rPr lang="ru-RU" sz="700" dirty="0"/>
-            </a:br>
-            <a:r>
-              <a:rPr lang="ru-RU" sz="100" dirty="0"/>
-              <a:t>(«Южные провинции Мавритании, примыкающие к реке Сенегал, богаты лесами красного дерева (Акажу) и зарослями акаций, дающих ценнейший гуммиарабик. Наладив промышленный сбор смолы и заготовку древесины, мы обеспечим наши текстильные, химические и фармацевтические фабрики собственным сырьем, снизив зависимость от импорта». </a:t>
-            </a:r>
-            <a:r>
-              <a:rPr lang="ru-RU" sz="100" dirty="0" err="1"/>
-              <a:t>оявление</a:t>
-            </a:r>
-            <a:r>
-              <a:rPr lang="ru-RU" sz="100" dirty="0"/>
-              <a:t> </a:t>
-            </a:r>
-            <a:r>
-              <a:rPr lang="ru-RU" sz="100" dirty="0" err="1"/>
-              <a:t>ресурсов:В</a:t>
-            </a:r>
-            <a:r>
-              <a:rPr lang="ru-RU" sz="100" dirty="0"/>
-              <a:t> регионе Мавритания (или южный </a:t>
-            </a:r>
-            <a:r>
-              <a:rPr lang="ru-RU" sz="100" dirty="0" err="1"/>
-              <a:t>стейт</a:t>
-            </a:r>
-            <a:r>
-              <a:rPr lang="ru-RU" sz="100" dirty="0"/>
-              <a:t>, если регион разделен) добавляется:+10 Резины (</a:t>
-            </a:r>
-            <a:r>
-              <a:rPr lang="ru-RU" sz="100" dirty="0" err="1"/>
-              <a:t>Rubber</a:t>
-            </a:r>
-            <a:r>
-              <a:rPr lang="ru-RU" sz="100" dirty="0"/>
-              <a:t>) — в HoI4 резина отвечает за любые эластичные, химические смолы и изоляционные материалы. Это критически важно для производства грузовиков, самолетов и пехотного </a:t>
-            </a:r>
-            <a:r>
-              <a:rPr lang="ru-RU" sz="100" dirty="0" err="1"/>
-              <a:t>снаряжения.Экономические</a:t>
-            </a:r>
-            <a:r>
-              <a:rPr lang="ru-RU" sz="100" dirty="0"/>
-              <a:t> бонусы (Национальный дух):Страна получает постоянный или временный (на 365 дней) национальный дух «Мавританское </a:t>
-            </a:r>
-            <a:r>
-              <a:rPr lang="ru-RU" sz="100" dirty="0" err="1"/>
-              <a:t>сырье»:Эффективность</a:t>
-            </a:r>
-            <a:r>
-              <a:rPr lang="ru-RU" sz="100" dirty="0"/>
-              <a:t> производства (</a:t>
-            </a:r>
-            <a:r>
-              <a:rPr lang="ru-RU" sz="100" dirty="0" err="1"/>
-              <a:t>Production</a:t>
-            </a:r>
-            <a:r>
-              <a:rPr lang="ru-RU" sz="100" dirty="0"/>
-              <a:t> </a:t>
-            </a:r>
-            <a:r>
-              <a:rPr lang="ru-RU" sz="100" dirty="0" err="1"/>
-              <a:t>Efficiency</a:t>
-            </a:r>
-            <a:r>
-              <a:rPr lang="ru-RU" sz="100" dirty="0"/>
-              <a:t> </a:t>
-            </a:r>
-            <a:r>
-              <a:rPr lang="ru-RU" sz="100" dirty="0" err="1"/>
-              <a:t>Growth</a:t>
-            </a:r>
-            <a:r>
-              <a:rPr lang="ru-RU" sz="100" dirty="0"/>
-              <a:t>): +5%Скорость исследования промышленных технологий (</a:t>
-            </a:r>
-            <a:r>
-              <a:rPr lang="ru-RU" sz="100" dirty="0" err="1"/>
-              <a:t>Industry</a:t>
-            </a:r>
-            <a:r>
-              <a:rPr lang="ru-RU" sz="100" dirty="0"/>
-              <a:t> </a:t>
-            </a:r>
-            <a:r>
-              <a:rPr lang="ru-RU" sz="100" dirty="0" err="1"/>
-              <a:t>Research</a:t>
-            </a:r>
-            <a:r>
-              <a:rPr lang="ru-RU" sz="100" dirty="0"/>
-              <a:t> </a:t>
-            </a:r>
-            <a:r>
-              <a:rPr lang="ru-RU" sz="100" dirty="0" err="1"/>
-              <a:t>Speed</a:t>
-            </a:r>
-            <a:r>
-              <a:rPr lang="ru-RU" sz="100" dirty="0"/>
-              <a:t>): +10% (химическая отрасль).Развитие </a:t>
-            </a:r>
-            <a:r>
-              <a:rPr lang="ru-RU" sz="100" dirty="0" err="1"/>
-              <a:t>инфраструктуры:В</a:t>
-            </a:r>
-            <a:r>
-              <a:rPr lang="ru-RU" sz="100" dirty="0"/>
-              <a:t> южном регионе Мавритании бесплатно строится +1 уровень </a:t>
-            </a:r>
-            <a:r>
-              <a:rPr lang="ru-RU" sz="100" dirty="0" err="1"/>
-              <a:t>Инфраструктуры.Открывается</a:t>
-            </a:r>
-            <a:r>
-              <a:rPr lang="ru-RU" sz="100" dirty="0"/>
-              <a:t> +1 свободный слот для строительства фабрик в этом регионе.)</a:t>
-            </a:r>
-            <a:endParaRPr lang="ru-RU" sz="700" dirty="0"/>
           </a:p>
         </p:txBody>
       </p:sp>
@@ -25213,62 +24986,6 @@
               <a:rPr lang="ru-RU" sz="700" dirty="0"/>
               <a:t> офшор и контрабанда</a:t>
             </a:r>
-            <a:br>
-              <a:rPr lang="ru-RU" sz="700" dirty="0"/>
-            </a:br>
-            <a:r>
-              <a:rPr lang="ru-RU" sz="100" dirty="0"/>
-              <a:t>(Историко-игровое </a:t>
-            </a:r>
-            <a:r>
-              <a:rPr lang="ru-RU" sz="100" dirty="0" err="1"/>
-              <a:t>описание:«Пока</a:t>
-            </a:r>
-            <a:r>
-              <a:rPr lang="ru-RU" sz="100" dirty="0"/>
-              <a:t> в Европе разгорается Вторая мировая война, Танжер может стать тихой гаванью для бегущих капиталов. Ослабив банковский контроль и закрыв глаза на контрабандные рынки, мы превратим город в центр теневой торговли дефицитным сырьем, станками и валютой. Все это пойдет на нужды нашей марокканской промышленности».⚙️ Игровые </a:t>
-            </a:r>
-            <a:r>
-              <a:rPr lang="ru-RU" sz="100" dirty="0" err="1"/>
-              <a:t>эффекты:Прямой</a:t>
-            </a:r>
-            <a:r>
-              <a:rPr lang="ru-RU" sz="100" dirty="0"/>
-              <a:t> финансовый </a:t>
-            </a:r>
-            <a:r>
-              <a:rPr lang="ru-RU" sz="100" dirty="0" err="1"/>
-              <a:t>прирост:Прирост</a:t>
-            </a:r>
-            <a:r>
-              <a:rPr lang="ru-RU" sz="100" dirty="0"/>
-              <a:t> политической власти: +120 (символизирует взятки и налоги с банкиров).Прибыль гражданской промышленности (</a:t>
-            </a:r>
-            <a:r>
-              <a:rPr lang="ru-RU" sz="100" dirty="0" err="1"/>
-              <a:t>Consumer</a:t>
-            </a:r>
-            <a:r>
-              <a:rPr lang="ru-RU" sz="100" dirty="0"/>
-              <a:t> </a:t>
-            </a:r>
-            <a:r>
-              <a:rPr lang="ru-RU" sz="100" dirty="0" err="1"/>
-              <a:t>Goods</a:t>
-            </a:r>
-            <a:r>
-              <a:rPr lang="ru-RU" sz="100" dirty="0"/>
-              <a:t> </a:t>
-            </a:r>
-            <a:r>
-              <a:rPr lang="ru-RU" sz="100" dirty="0" err="1"/>
-              <a:t>Factories</a:t>
-            </a:r>
-            <a:r>
-              <a:rPr lang="ru-RU" sz="100" dirty="0"/>
-              <a:t>): −3% (снижение товаров народного потребления, так как экономика насыщается за счет контрабанды).)</a:t>
-            </a:r>
-            <a:endParaRPr lang="ru-RU" sz="700" dirty="0"/>
           </a:p>
         </p:txBody>
       </p:sp>
@@ -25376,7 +25093,7 @@
         </p:nvSpPr>
         <p:spPr>
           <a:xfrm>
-            <a:off x="5293179" y="17057844"/>
+            <a:off x="5286829" y="17057844"/>
             <a:ext cx="926325" cy="540000"/>
           </a:xfrm>
           <a:prstGeom prst="rect">
@@ -25434,9 +25151,9 @@
           <p:nvPr/>
         </p:nvCxnSpPr>
         <p:spPr>
-          <a:xfrm rot="16200000" flipH="1">
-            <a:off x="5209690" y="16511192"/>
-            <a:ext cx="1087442" cy="5862"/>
+          <a:xfrm rot="5400000">
+            <a:off x="5206515" y="16513879"/>
+            <a:ext cx="1087442" cy="488"/>
           </a:xfrm>
           <a:prstGeom prst="bentConnector3">
             <a:avLst>

--- a/Наработки/диздоки/Марокко/Марокко.pptx
+++ b/Наработки/диздоки/Марокко/Марокко.pptx
@@ -209,7 +209,7 @@
             <a:fld id="{33E3D7F9-E251-484C-A6FF-FA958879DF69}" type="datetimeFigureOut">
               <a:rPr lang="ru-RU" smtClean="0"/>
               <a:pPr/>
-              <a:t>02.07.2026</a:t>
+              <a:t>06.07.2026</a:t>
             </a:fld>
             <a:endParaRPr lang="ru-RU"/>
           </a:p>
@@ -699,7 +699,7 @@
             <a:fld id="{85A5DE44-605B-4D3B-B2B7-94543DF81A36}" type="datetimeFigureOut">
               <a:rPr lang="ru-RU" smtClean="0"/>
               <a:pPr/>
-              <a:t>02.07.2026</a:t>
+              <a:t>06.07.2026</a:t>
             </a:fld>
             <a:endParaRPr lang="ru-RU"/>
           </a:p>
@@ -871,7 +871,7 @@
             <a:fld id="{85A5DE44-605B-4D3B-B2B7-94543DF81A36}" type="datetimeFigureOut">
               <a:rPr lang="ru-RU" smtClean="0"/>
               <a:pPr/>
-              <a:t>02.07.2026</a:t>
+              <a:t>06.07.2026</a:t>
             </a:fld>
             <a:endParaRPr lang="ru-RU"/>
           </a:p>
@@ -1053,7 +1053,7 @@
             <a:fld id="{85A5DE44-605B-4D3B-B2B7-94543DF81A36}" type="datetimeFigureOut">
               <a:rPr lang="ru-RU" smtClean="0"/>
               <a:pPr/>
-              <a:t>02.07.2026</a:t>
+              <a:t>06.07.2026</a:t>
             </a:fld>
             <a:endParaRPr lang="ru-RU"/>
           </a:p>
@@ -1225,7 +1225,7 @@
             <a:fld id="{85A5DE44-605B-4D3B-B2B7-94543DF81A36}" type="datetimeFigureOut">
               <a:rPr lang="ru-RU" smtClean="0"/>
               <a:pPr/>
-              <a:t>02.07.2026</a:t>
+              <a:t>06.07.2026</a:t>
             </a:fld>
             <a:endParaRPr lang="ru-RU"/>
           </a:p>
@@ -1473,7 +1473,7 @@
             <a:fld id="{85A5DE44-605B-4D3B-B2B7-94543DF81A36}" type="datetimeFigureOut">
               <a:rPr lang="ru-RU" smtClean="0"/>
               <a:pPr/>
-              <a:t>02.07.2026</a:t>
+              <a:t>06.07.2026</a:t>
             </a:fld>
             <a:endParaRPr lang="ru-RU"/>
           </a:p>
@@ -1707,7 +1707,7 @@
             <a:fld id="{85A5DE44-605B-4D3B-B2B7-94543DF81A36}" type="datetimeFigureOut">
               <a:rPr lang="ru-RU" smtClean="0"/>
               <a:pPr/>
-              <a:t>02.07.2026</a:t>
+              <a:t>06.07.2026</a:t>
             </a:fld>
             <a:endParaRPr lang="ru-RU"/>
           </a:p>
@@ -2076,7 +2076,7 @@
             <a:fld id="{85A5DE44-605B-4D3B-B2B7-94543DF81A36}" type="datetimeFigureOut">
               <a:rPr lang="ru-RU" smtClean="0"/>
               <a:pPr/>
-              <a:t>02.07.2026</a:t>
+              <a:t>06.07.2026</a:t>
             </a:fld>
             <a:endParaRPr lang="ru-RU"/>
           </a:p>
@@ -2196,7 +2196,7 @@
             <a:fld id="{85A5DE44-605B-4D3B-B2B7-94543DF81A36}" type="datetimeFigureOut">
               <a:rPr lang="ru-RU" smtClean="0"/>
               <a:pPr/>
-              <a:t>02.07.2026</a:t>
+              <a:t>06.07.2026</a:t>
             </a:fld>
             <a:endParaRPr lang="ru-RU"/>
           </a:p>
@@ -2293,7 +2293,7 @@
             <a:fld id="{85A5DE44-605B-4D3B-B2B7-94543DF81A36}" type="datetimeFigureOut">
               <a:rPr lang="ru-RU" smtClean="0"/>
               <a:pPr/>
-              <a:t>02.07.2026</a:t>
+              <a:t>06.07.2026</a:t>
             </a:fld>
             <a:endParaRPr lang="ru-RU"/>
           </a:p>
@@ -2572,7 +2572,7 @@
             <a:fld id="{85A5DE44-605B-4D3B-B2B7-94543DF81A36}" type="datetimeFigureOut">
               <a:rPr lang="ru-RU" smtClean="0"/>
               <a:pPr/>
-              <a:t>02.07.2026</a:t>
+              <a:t>06.07.2026</a:t>
             </a:fld>
             <a:endParaRPr lang="ru-RU"/>
           </a:p>
@@ -2831,7 +2831,7 @@
             <a:fld id="{85A5DE44-605B-4D3B-B2B7-94543DF81A36}" type="datetimeFigureOut">
               <a:rPr lang="ru-RU" smtClean="0"/>
               <a:pPr/>
-              <a:t>02.07.2026</a:t>
+              <a:t>06.07.2026</a:t>
             </a:fld>
             <a:endParaRPr lang="ru-RU"/>
           </a:p>
@@ -3046,7 +3046,7 @@
             <a:fld id="{85A5DE44-605B-4D3B-B2B7-94543DF81A36}" type="datetimeFigureOut">
               <a:rPr lang="ru-RU" smtClean="0"/>
               <a:pPr/>
-              <a:t>02.07.2026</a:t>
+              <a:t>06.07.2026</a:t>
             </a:fld>
             <a:endParaRPr lang="ru-RU"/>
           </a:p>
@@ -6155,77 +6155,8 @@
             <a:pPr algn="ctr"/>
             <a:r>
               <a:rPr lang="ru-RU" sz="700" dirty="0"/>
-              <a:t>Репрессировать членов Партии Марокканского Единства </a:t>
-            </a:r>
-            <a:r>
-              <a:rPr lang="ru-RU" sz="100" dirty="0"/>
-              <a:t>(Опасаясь влияния Торреса, верховный комиссар генерал </a:t>
-            </a:r>
-            <a:r>
-              <a:rPr lang="ru-RU" sz="100" dirty="0" err="1"/>
-              <a:t>Бейгбедер</a:t>
-            </a:r>
-            <a:r>
-              <a:rPr lang="ru-RU" sz="100" dirty="0"/>
-              <a:t> противопоставил ему другого националистического деятеля - Мекки </a:t>
-            </a:r>
-            <a:r>
-              <a:rPr lang="ru-RU" sz="100" dirty="0" err="1"/>
-              <a:t>Насыри</a:t>
-            </a:r>
-            <a:r>
-              <a:rPr lang="ru-RU" sz="100" dirty="0"/>
-              <a:t>. Последний снискал популярность </a:t>
-            </a:r>
-            <a:r>
-              <a:rPr lang="ru-RU" sz="100" dirty="0" err="1"/>
-              <a:t>реча¬ми</a:t>
-            </a:r>
-            <a:r>
-              <a:rPr lang="ru-RU" sz="100" dirty="0"/>
-              <a:t> в Большой мечети о национальных чаяниях марокканского народа. Верховный комиссар помог </a:t>
-            </a:r>
-            <a:r>
-              <a:rPr lang="ru-RU" sz="100" dirty="0" err="1"/>
-              <a:t>Насыри</a:t>
-            </a:r>
-            <a:r>
-              <a:rPr lang="ru-RU" sz="100" dirty="0"/>
-              <a:t> создать Партию </a:t>
-            </a:r>
-            <a:r>
-              <a:rPr lang="ru-RU" sz="100" dirty="0" err="1"/>
-              <a:t>ма¬рокканского</a:t>
-            </a:r>
-            <a:r>
-              <a:rPr lang="ru-RU" sz="100" dirty="0"/>
-              <a:t> единства (ПМЕ). Лидеры обеих партий представляли одни н те же социальные слои, выдвигали практически </a:t>
-            </a:r>
-            <a:r>
-              <a:rPr lang="ru-RU" sz="100" dirty="0" err="1"/>
-              <a:t>идентич¬ные</a:t>
-            </a:r>
-            <a:r>
-              <a:rPr lang="ru-RU" sz="100" dirty="0"/>
-              <a:t> требования. Но для арабского населения партия </a:t>
-            </a:r>
-            <a:r>
-              <a:rPr lang="ru-RU" sz="100" dirty="0" err="1"/>
-              <a:t>Насыри</a:t>
-            </a:r>
-            <a:r>
-              <a:rPr lang="ru-RU" sz="100" dirty="0"/>
-              <a:t> была более привлекательной вследствие ее приверженности </a:t>
-            </a:r>
-            <a:r>
-              <a:rPr lang="ru-RU" sz="100" dirty="0" err="1"/>
-              <a:t>ара¬бизму</a:t>
-            </a:r>
-            <a:r>
-              <a:rPr lang="ru-RU" sz="100" dirty="0"/>
-              <a:t>: ПМЕ выступала за то, чтобы арабский язык был объявлен единственным официальным языком мусульманского Марокко. Обе партии первоначально не ставили перед собой конкретных задач по изменению положения в испанской зоне.)</a:t>
-            </a:r>
-            <a:endParaRPr lang="ru-RU" sz="700" dirty="0"/>
+              <a:t>Репрессировать членов Партии Марокканского Единства</a:t>
+            </a:r>
           </a:p>
         </p:txBody>
       </p:sp>
@@ -6827,7 +6758,7 @@
         </p:nvSpPr>
         <p:spPr>
           <a:xfrm>
-            <a:off x="13376646" y="17054875"/>
+            <a:off x="13381128" y="17054875"/>
             <a:ext cx="926325" cy="540000"/>
           </a:xfrm>
           <a:prstGeom prst="rect">
@@ -6926,9 +6857,9 @@
           <p:nvPr/>
         </p:nvCxnSpPr>
         <p:spPr>
-          <a:xfrm rot="5400000">
-            <a:off x="13702065" y="16914690"/>
-            <a:ext cx="277930" cy="2441"/>
+          <a:xfrm rot="16200000" flipH="1">
+            <a:off x="13704305" y="16914889"/>
+            <a:ext cx="277930" cy="2041"/>
           </a:xfrm>
           <a:prstGeom prst="bentConnector3">
             <a:avLst>
@@ -6968,7 +6899,7 @@
         </p:nvSpPr>
         <p:spPr>
           <a:xfrm>
-            <a:off x="13384041" y="17828701"/>
+            <a:off x="13379559" y="17828701"/>
             <a:ext cx="926325" cy="540000"/>
           </a:xfrm>
           <a:prstGeom prst="rect">
@@ -7022,9 +6953,9 @@
           <p:nvPr/>
         </p:nvCxnSpPr>
         <p:spPr>
-          <a:xfrm rot="16200000" flipH="1">
-            <a:off x="13726593" y="17708090"/>
-            <a:ext cx="233826" cy="7395"/>
+          <a:xfrm rot="5400000">
+            <a:off x="13726594" y="17711004"/>
+            <a:ext cx="233826" cy="1569"/>
           </a:xfrm>
           <a:prstGeom prst="bentConnector3">
             <a:avLst>
@@ -13523,46 +13454,6 @@
               <a:t>»</a:t>
             </a:r>
           </a:p>
-          <a:p>
-            <a:pPr algn="ctr"/>
-            <a:r>
-              <a:rPr lang="ru-RU" sz="200" dirty="0"/>
-              <a:t>(Движение «</a:t>
-            </a:r>
-            <a:r>
-              <a:rPr lang="ru-RU" sz="200" dirty="0" err="1"/>
-              <a:t>Фитьян</a:t>
-            </a:r>
-            <a:r>
-              <a:rPr lang="ru-RU" sz="200" dirty="0"/>
-              <a:t>» (араб. </a:t>
-            </a:r>
-            <a:r>
-              <a:rPr lang="ar-AE" sz="200" dirty="0"/>
-              <a:t>فتيان — «</a:t>
-            </a:r>
-            <a:r>
-              <a:rPr lang="ru-RU" sz="200" dirty="0"/>
-              <a:t>Юноши» или «Отроки») в контексте Испанского Марокко — это военизированная молодежная организация, созданная Партией национальных реформ </a:t>
-            </a:r>
-            <a:r>
-              <a:rPr lang="ru-RU" sz="200" dirty="0" err="1"/>
-              <a:t>Абд</a:t>
-            </a:r>
-            <a:r>
-              <a:rPr lang="ru-RU" sz="200" dirty="0"/>
-              <a:t> аль-</a:t>
-            </a:r>
-            <a:r>
-              <a:rPr lang="ru-RU" sz="200" dirty="0" err="1"/>
-              <a:t>Халика</a:t>
-            </a:r>
-            <a:r>
-              <a:rPr lang="ru-RU" sz="200" dirty="0"/>
-              <a:t> Торреса в конце 1930-х годов. На её создание и структуру оказали мощнейшее влияние европейские фашистские движения того времени, в особенности Испанская Фаланга)</a:t>
-            </a:r>
-            <a:endParaRPr lang="ru-RU" sz="700" dirty="0"/>
-          </a:p>
         </p:txBody>
       </p:sp>
       <p:sp>
@@ -17960,15 +17851,7 @@
             <a:pPr algn="ctr"/>
             <a:r>
               <a:rPr lang="ru-RU" sz="700" dirty="0"/>
-              <a:t>Заручиться поддержкой </a:t>
-            </a:r>
-            <a:r>
-              <a:rPr lang="ru-RU" sz="700" dirty="0" err="1"/>
-              <a:t>Фасси</a:t>
-            </a:r>
-            <a:r>
-              <a:rPr lang="ru-RU" sz="700" dirty="0"/>
-              <a:t> и потомками Аль-Андалусской знати</a:t>
+              <a:t>Заручиться поддержкой потомков Аль-Андалусской знати</a:t>
             </a:r>
           </a:p>
         </p:txBody>
@@ -18356,7 +18239,7 @@
         </p:nvSpPr>
         <p:spPr>
           <a:xfrm>
-            <a:off x="9657560" y="17878424"/>
+            <a:off x="9662042" y="17878424"/>
             <a:ext cx="926325" cy="540000"/>
           </a:xfrm>
           <a:prstGeom prst="rect">
@@ -18446,30 +18329,6 @@
               <a:rPr lang="ru-RU" sz="700" dirty="0"/>
               <a:t>Заручиться поддержкой муфтия Иерусалима</a:t>
             </a:r>
-            <a:br>
-              <a:rPr lang="ru-RU" sz="700" dirty="0"/>
-            </a:br>
-            <a:r>
-              <a:rPr lang="ru-RU" sz="200" dirty="0"/>
-              <a:t>(Контакты между националистами на севере и личностями, вовлеченными в орбиту довоенного Берлина, такими как муфтий Иерусалима Хадж Амин аль-</a:t>
-            </a:r>
-            <a:r>
-              <a:rPr lang="ru-RU" sz="200" dirty="0" err="1"/>
-              <a:t>Хусейни</a:t>
-            </a:r>
-            <a:r>
-              <a:rPr lang="ru-RU" sz="200" dirty="0"/>
-              <a:t>, </a:t>
-            </a:r>
-            <a:r>
-              <a:rPr lang="ru-RU" sz="200" dirty="0" err="1"/>
-              <a:t>Шакиб</a:t>
-            </a:r>
-            <a:r>
-              <a:rPr lang="ru-RU" sz="200" dirty="0"/>
-              <a:t> Арслан и Рашид, также имели место.¬)</a:t>
-            </a:r>
-            <a:endParaRPr lang="ru-RU" sz="700" dirty="0"/>
           </a:p>
         </p:txBody>
       </p:sp>
@@ -18545,8 +18404,8 @@
         </p:nvCxnSpPr>
         <p:spPr>
           <a:xfrm rot="5400000">
-            <a:off x="10603087" y="17112510"/>
-            <a:ext cx="283550" cy="1248278"/>
+            <a:off x="10605328" y="17114751"/>
+            <a:ext cx="283550" cy="1243796"/>
           </a:xfrm>
           <a:prstGeom prst="bentConnector3">
             <a:avLst>
@@ -18589,9 +18448,9 @@
           <p:nvPr/>
         </p:nvCxnSpPr>
         <p:spPr>
-          <a:xfrm rot="16200000" flipH="1">
-            <a:off x="9984048" y="18555099"/>
-            <a:ext cx="276431" cy="3080"/>
+          <a:xfrm rot="5400000">
+            <a:off x="9986289" y="18555938"/>
+            <a:ext cx="276431" cy="1402"/>
           </a:xfrm>
           <a:prstGeom prst="bentConnector3">
             <a:avLst>
@@ -18667,22 +18526,6 @@
               <a:rPr lang="ru-RU" sz="700" dirty="0"/>
               <a:t>Заручиться поддержкой королей</a:t>
             </a:r>
-            <a:br>
-              <a:rPr lang="ru-RU" sz="700" dirty="0"/>
-            </a:br>
-            <a:r>
-              <a:rPr lang="ru-RU" sz="300" dirty="0"/>
-              <a:t>(Ливан и Рашид) (может </a:t>
-            </a:r>
-            <a:r>
-              <a:rPr lang="ru-RU" sz="300" dirty="0" err="1"/>
-              <a:t>гуи</a:t>
-            </a:r>
-            <a:r>
-              <a:rPr lang="ru-RU" sz="300" dirty="0"/>
-              <a:t> в виде карты Арабского Мира и портреты королей на странах)</a:t>
-            </a:r>
-            <a:endParaRPr lang="ru-RU" sz="700" dirty="0"/>
           </a:p>
         </p:txBody>
       </p:sp>
@@ -25957,64 +25800,6 @@
           </a:p>
         </p:txBody>
       </p:sp>
-      <p:sp>
-        <p:nvSpPr>
-          <p:cNvPr id="537" name="Прямоугольник 536">
-            <a:extLst>
-              <a:ext uri="{FF2B5EF4-FFF2-40B4-BE49-F238E27FC236}">
-                <a16:creationId xmlns:a16="http://schemas.microsoft.com/office/drawing/2014/main" id="{D4B3B65D-4D05-457E-A3ED-BDEA402DC168}"/>
-              </a:ext>
-            </a:extLst>
-          </p:cNvPr>
-          <p:cNvSpPr/>
-          <p:nvPr/>
-        </p:nvSpPr>
-        <p:spPr>
-          <a:xfrm>
-            <a:off x="12752200" y="22654770"/>
-            <a:ext cx="926325" cy="540000"/>
-          </a:xfrm>
-          <a:prstGeom prst="rect">
-            <a:avLst/>
-          </a:prstGeom>
-          <a:solidFill>
-            <a:schemeClr val="accent2">
-              <a:lumMod val="75000"/>
-            </a:schemeClr>
-          </a:solidFill>
-          <a:ln w="19050"/>
-        </p:spPr>
-        <p:style>
-          <a:lnRef idx="2">
-            <a:schemeClr val="accent1"/>
-          </a:lnRef>
-          <a:fillRef idx="1">
-            <a:schemeClr val="lt1"/>
-          </a:fillRef>
-          <a:effectRef idx="0">
-            <a:schemeClr val="accent1"/>
-          </a:effectRef>
-          <a:fontRef idx="minor">
-            <a:schemeClr val="dk1"/>
-          </a:fontRef>
-        </p:style>
-        <p:txBody>
-          <a:bodyPr lIns="124733" tIns="62367" rIns="124733" bIns="62367" rtlCol="0" anchor="ctr"/>
-          <a:lstStyle/>
-          <a:p>
-            <a:pPr algn="ctr"/>
-            <a:r>
-              <a:rPr lang="ru-RU" sz="700" dirty="0"/>
-              <a:t>Воплотить в жизнь национал-</a:t>
-            </a:r>
-            <a:r>
-              <a:rPr lang="ru-RU" sz="700" dirty="0" err="1"/>
-              <a:t>юнионизм</a:t>
-            </a:r>
-            <a:endParaRPr lang="ru-RU" sz="700" dirty="0"/>
-          </a:p>
-        </p:txBody>
-      </p:sp>
       <p:cxnSp>
         <p:nvCxnSpPr>
           <p:cNvPr id="538" name="Соединительная линия уступом 620">
@@ -26125,51 +25910,6 @@
           <a:xfrm rot="16200000" flipH="1">
             <a:off x="13077992" y="21710016"/>
             <a:ext cx="274742" cy="1"/>
-          </a:xfrm>
-          <a:prstGeom prst="bentConnector3">
-            <a:avLst>
-              <a:gd name="adj1" fmla="val 50000"/>
-            </a:avLst>
-          </a:prstGeom>
-          <a:ln w="19050">
-            <a:tailEnd type="arrow"/>
-          </a:ln>
-        </p:spPr>
-        <p:style>
-          <a:lnRef idx="1">
-            <a:schemeClr val="accent1"/>
-          </a:lnRef>
-          <a:fillRef idx="0">
-            <a:schemeClr val="accent1"/>
-          </a:fillRef>
-          <a:effectRef idx="0">
-            <a:schemeClr val="accent1"/>
-          </a:effectRef>
-          <a:fontRef idx="minor">
-            <a:schemeClr val="tx1"/>
-          </a:fontRef>
-        </p:style>
-      </p:cxnSp>
-      <p:cxnSp>
-        <p:nvCxnSpPr>
-          <p:cNvPr id="542" name="Соединительная линия уступом 620">
-            <a:extLst>
-              <a:ext uri="{FF2B5EF4-FFF2-40B4-BE49-F238E27FC236}">
-                <a16:creationId xmlns:a16="http://schemas.microsoft.com/office/drawing/2014/main" id="{405B02C7-D8B4-454D-BBFE-7AE75634DDBF}"/>
-              </a:ext>
-            </a:extLst>
-          </p:cNvPr>
-          <p:cNvCxnSpPr>
-            <a:cxnSpLocks/>
-            <a:stCxn id="534" idx="2"/>
-            <a:endCxn id="537" idx="0"/>
-          </p:cNvCxnSpPr>
-          <p:nvPr/>
-        </p:nvCxnSpPr>
-        <p:spPr>
-          <a:xfrm rot="5400000">
-            <a:off x="13081673" y="22521079"/>
-            <a:ext cx="267382" cy="1"/>
           </a:xfrm>
           <a:prstGeom prst="bentConnector3">
             <a:avLst>

--- a/Наработки/диздоки/Марокко/Марокко.pptx
+++ b/Наработки/диздоки/Марокко/Марокко.pptx
@@ -209,7 +209,7 @@
             <a:fld id="{33E3D7F9-E251-484C-A6FF-FA958879DF69}" type="datetimeFigureOut">
               <a:rPr lang="ru-RU" smtClean="0"/>
               <a:pPr/>
-              <a:t>06.07.2026</a:t>
+              <a:t>07.07.2026</a:t>
             </a:fld>
             <a:endParaRPr lang="ru-RU"/>
           </a:p>
@@ -699,7 +699,7 @@
             <a:fld id="{85A5DE44-605B-4D3B-B2B7-94543DF81A36}" type="datetimeFigureOut">
               <a:rPr lang="ru-RU" smtClean="0"/>
               <a:pPr/>
-              <a:t>06.07.2026</a:t>
+              <a:t>07.07.2026</a:t>
             </a:fld>
             <a:endParaRPr lang="ru-RU"/>
           </a:p>
@@ -871,7 +871,7 @@
             <a:fld id="{85A5DE44-605B-4D3B-B2B7-94543DF81A36}" type="datetimeFigureOut">
               <a:rPr lang="ru-RU" smtClean="0"/>
               <a:pPr/>
-              <a:t>06.07.2026</a:t>
+              <a:t>07.07.2026</a:t>
             </a:fld>
             <a:endParaRPr lang="ru-RU"/>
           </a:p>
@@ -1053,7 +1053,7 @@
             <a:fld id="{85A5DE44-605B-4D3B-B2B7-94543DF81A36}" type="datetimeFigureOut">
               <a:rPr lang="ru-RU" smtClean="0"/>
               <a:pPr/>
-              <a:t>06.07.2026</a:t>
+              <a:t>07.07.2026</a:t>
             </a:fld>
             <a:endParaRPr lang="ru-RU"/>
           </a:p>
@@ -1225,7 +1225,7 @@
             <a:fld id="{85A5DE44-605B-4D3B-B2B7-94543DF81A36}" type="datetimeFigureOut">
               <a:rPr lang="ru-RU" smtClean="0"/>
               <a:pPr/>
-              <a:t>06.07.2026</a:t>
+              <a:t>07.07.2026</a:t>
             </a:fld>
             <a:endParaRPr lang="ru-RU"/>
           </a:p>
@@ -1473,7 +1473,7 @@
             <a:fld id="{85A5DE44-605B-4D3B-B2B7-94543DF81A36}" type="datetimeFigureOut">
               <a:rPr lang="ru-RU" smtClean="0"/>
               <a:pPr/>
-              <a:t>06.07.2026</a:t>
+              <a:t>07.07.2026</a:t>
             </a:fld>
             <a:endParaRPr lang="ru-RU"/>
           </a:p>
@@ -1707,7 +1707,7 @@
             <a:fld id="{85A5DE44-605B-4D3B-B2B7-94543DF81A36}" type="datetimeFigureOut">
               <a:rPr lang="ru-RU" smtClean="0"/>
               <a:pPr/>
-              <a:t>06.07.2026</a:t>
+              <a:t>07.07.2026</a:t>
             </a:fld>
             <a:endParaRPr lang="ru-RU"/>
           </a:p>
@@ -2076,7 +2076,7 @@
             <a:fld id="{85A5DE44-605B-4D3B-B2B7-94543DF81A36}" type="datetimeFigureOut">
               <a:rPr lang="ru-RU" smtClean="0"/>
               <a:pPr/>
-              <a:t>06.07.2026</a:t>
+              <a:t>07.07.2026</a:t>
             </a:fld>
             <a:endParaRPr lang="ru-RU"/>
           </a:p>
@@ -2196,7 +2196,7 @@
             <a:fld id="{85A5DE44-605B-4D3B-B2B7-94543DF81A36}" type="datetimeFigureOut">
               <a:rPr lang="ru-RU" smtClean="0"/>
               <a:pPr/>
-              <a:t>06.07.2026</a:t>
+              <a:t>07.07.2026</a:t>
             </a:fld>
             <a:endParaRPr lang="ru-RU"/>
           </a:p>
@@ -2293,7 +2293,7 @@
             <a:fld id="{85A5DE44-605B-4D3B-B2B7-94543DF81A36}" type="datetimeFigureOut">
               <a:rPr lang="ru-RU" smtClean="0"/>
               <a:pPr/>
-              <a:t>06.07.2026</a:t>
+              <a:t>07.07.2026</a:t>
             </a:fld>
             <a:endParaRPr lang="ru-RU"/>
           </a:p>
@@ -2572,7 +2572,7 @@
             <a:fld id="{85A5DE44-605B-4D3B-B2B7-94543DF81A36}" type="datetimeFigureOut">
               <a:rPr lang="ru-RU" smtClean="0"/>
               <a:pPr/>
-              <a:t>06.07.2026</a:t>
+              <a:t>07.07.2026</a:t>
             </a:fld>
             <a:endParaRPr lang="ru-RU"/>
           </a:p>
@@ -2831,7 +2831,7 @@
             <a:fld id="{85A5DE44-605B-4D3B-B2B7-94543DF81A36}" type="datetimeFigureOut">
               <a:rPr lang="ru-RU" smtClean="0"/>
               <a:pPr/>
-              <a:t>06.07.2026</a:t>
+              <a:t>07.07.2026</a:t>
             </a:fld>
             <a:endParaRPr lang="ru-RU"/>
           </a:p>
@@ -3046,7 +3046,7 @@
             <a:fld id="{85A5DE44-605B-4D3B-B2B7-94543DF81A36}" type="datetimeFigureOut">
               <a:rPr lang="ru-RU" smtClean="0"/>
               <a:pPr/>
-              <a:t>06.07.2026</a:t>
+              <a:t>07.07.2026</a:t>
             </a:fld>
             <a:endParaRPr lang="ru-RU"/>
           </a:p>
@@ -13385,13 +13385,7 @@
               <a:rPr lang="ru-RU" sz="700" dirty="0"/>
               <a:t>Создание высшего совета</a:t>
             </a:r>
-          </a:p>
-          <a:p>
-            <a:pPr algn="ctr"/>
-            <a:r>
-              <a:rPr lang="ru-RU" sz="200" dirty="0"/>
-              <a:t>(члены которого будут избираться марокканцами)</a:t>
-            </a:r>
+            <a:endParaRPr lang="ru-RU" sz="200" dirty="0"/>
           </a:p>
         </p:txBody>
       </p:sp>

--- a/Наработки/диздоки/Марокко/Марокко.pptx
+++ b/Наработки/диздоки/Марокко/Марокко.pptx
@@ -209,7 +209,7 @@
             <a:fld id="{33E3D7F9-E251-484C-A6FF-FA958879DF69}" type="datetimeFigureOut">
               <a:rPr lang="ru-RU" smtClean="0"/>
               <a:pPr/>
-              <a:t>07.07.2026</a:t>
+              <a:t>08.07.2026</a:t>
             </a:fld>
             <a:endParaRPr lang="ru-RU"/>
           </a:p>
@@ -699,7 +699,7 @@
             <a:fld id="{85A5DE44-605B-4D3B-B2B7-94543DF81A36}" type="datetimeFigureOut">
               <a:rPr lang="ru-RU" smtClean="0"/>
               <a:pPr/>
-              <a:t>07.07.2026</a:t>
+              <a:t>08.07.2026</a:t>
             </a:fld>
             <a:endParaRPr lang="ru-RU"/>
           </a:p>
@@ -871,7 +871,7 @@
             <a:fld id="{85A5DE44-605B-4D3B-B2B7-94543DF81A36}" type="datetimeFigureOut">
               <a:rPr lang="ru-RU" smtClean="0"/>
               <a:pPr/>
-              <a:t>07.07.2026</a:t>
+              <a:t>08.07.2026</a:t>
             </a:fld>
             <a:endParaRPr lang="ru-RU"/>
           </a:p>
@@ -1053,7 +1053,7 @@
             <a:fld id="{85A5DE44-605B-4D3B-B2B7-94543DF81A36}" type="datetimeFigureOut">
               <a:rPr lang="ru-RU" smtClean="0"/>
               <a:pPr/>
-              <a:t>07.07.2026</a:t>
+              <a:t>08.07.2026</a:t>
             </a:fld>
             <a:endParaRPr lang="ru-RU"/>
           </a:p>
@@ -1225,7 +1225,7 @@
             <a:fld id="{85A5DE44-605B-4D3B-B2B7-94543DF81A36}" type="datetimeFigureOut">
               <a:rPr lang="ru-RU" smtClean="0"/>
               <a:pPr/>
-              <a:t>07.07.2026</a:t>
+              <a:t>08.07.2026</a:t>
             </a:fld>
             <a:endParaRPr lang="ru-RU"/>
           </a:p>
@@ -1473,7 +1473,7 @@
             <a:fld id="{85A5DE44-605B-4D3B-B2B7-94543DF81A36}" type="datetimeFigureOut">
               <a:rPr lang="ru-RU" smtClean="0"/>
               <a:pPr/>
-              <a:t>07.07.2026</a:t>
+              <a:t>08.07.2026</a:t>
             </a:fld>
             <a:endParaRPr lang="ru-RU"/>
           </a:p>
@@ -1707,7 +1707,7 @@
             <a:fld id="{85A5DE44-605B-4D3B-B2B7-94543DF81A36}" type="datetimeFigureOut">
               <a:rPr lang="ru-RU" smtClean="0"/>
               <a:pPr/>
-              <a:t>07.07.2026</a:t>
+              <a:t>08.07.2026</a:t>
             </a:fld>
             <a:endParaRPr lang="ru-RU"/>
           </a:p>
@@ -2076,7 +2076,7 @@
             <a:fld id="{85A5DE44-605B-4D3B-B2B7-94543DF81A36}" type="datetimeFigureOut">
               <a:rPr lang="ru-RU" smtClean="0"/>
               <a:pPr/>
-              <a:t>07.07.2026</a:t>
+              <a:t>08.07.2026</a:t>
             </a:fld>
             <a:endParaRPr lang="ru-RU"/>
           </a:p>
@@ -2196,7 +2196,7 @@
             <a:fld id="{85A5DE44-605B-4D3B-B2B7-94543DF81A36}" type="datetimeFigureOut">
               <a:rPr lang="ru-RU" smtClean="0"/>
               <a:pPr/>
-              <a:t>07.07.2026</a:t>
+              <a:t>08.07.2026</a:t>
             </a:fld>
             <a:endParaRPr lang="ru-RU"/>
           </a:p>
@@ -2293,7 +2293,7 @@
             <a:fld id="{85A5DE44-605B-4D3B-B2B7-94543DF81A36}" type="datetimeFigureOut">
               <a:rPr lang="ru-RU" smtClean="0"/>
               <a:pPr/>
-              <a:t>07.07.2026</a:t>
+              <a:t>08.07.2026</a:t>
             </a:fld>
             <a:endParaRPr lang="ru-RU"/>
           </a:p>
@@ -2572,7 +2572,7 @@
             <a:fld id="{85A5DE44-605B-4D3B-B2B7-94543DF81A36}" type="datetimeFigureOut">
               <a:rPr lang="ru-RU" smtClean="0"/>
               <a:pPr/>
-              <a:t>07.07.2026</a:t>
+              <a:t>08.07.2026</a:t>
             </a:fld>
             <a:endParaRPr lang="ru-RU"/>
           </a:p>
@@ -2831,7 +2831,7 @@
             <a:fld id="{85A5DE44-605B-4D3B-B2B7-94543DF81A36}" type="datetimeFigureOut">
               <a:rPr lang="ru-RU" smtClean="0"/>
               <a:pPr/>
-              <a:t>07.07.2026</a:t>
+              <a:t>08.07.2026</a:t>
             </a:fld>
             <a:endParaRPr lang="ru-RU"/>
           </a:p>
@@ -3046,7 +3046,7 @@
             <a:fld id="{85A5DE44-605B-4D3B-B2B7-94543DF81A36}" type="datetimeFigureOut">
               <a:rPr lang="ru-RU" smtClean="0"/>
               <a:pPr/>
-              <a:t>07.07.2026</a:t>
+              <a:t>08.07.2026</a:t>
             </a:fld>
             <a:endParaRPr lang="ru-RU"/>
           </a:p>
@@ -3460,7 +3460,7 @@
         </p:nvSpPr>
         <p:spPr>
           <a:xfrm>
-            <a:off x="18326336" y="14382017"/>
+            <a:off x="12486430" y="14550013"/>
             <a:ext cx="926325" cy="540000"/>
           </a:xfrm>
           <a:prstGeom prst="rect">
@@ -3515,7 +3515,7 @@
         </p:nvCxnSpPr>
         <p:spPr>
           <a:xfrm rot="5400000">
-            <a:off x="17997228" y="14467692"/>
+            <a:off x="12157322" y="14635688"/>
             <a:ext cx="337946" cy="1246596"/>
           </a:xfrm>
           <a:prstGeom prst="bentConnector3">
@@ -3560,7 +3560,7 @@
         </p:nvCxnSpPr>
         <p:spPr>
           <a:xfrm rot="16200000" flipH="1">
-            <a:off x="19232773" y="14478743"/>
+            <a:off x="13392867" y="14646739"/>
             <a:ext cx="337947" cy="1224494"/>
           </a:xfrm>
           <a:prstGeom prst="bentConnector3">
@@ -3601,7 +3601,7 @@
         </p:nvSpPr>
         <p:spPr>
           <a:xfrm>
-            <a:off x="18945478" y="16067213"/>
+            <a:off x="13105572" y="16235209"/>
             <a:ext cx="926325" cy="540000"/>
           </a:xfrm>
           <a:prstGeom prst="rect">
@@ -3652,7 +3652,7 @@
         </p:nvSpPr>
         <p:spPr>
           <a:xfrm>
-            <a:off x="17079740" y="15259963"/>
+            <a:off x="11239834" y="15427959"/>
             <a:ext cx="926325" cy="540000"/>
           </a:xfrm>
           <a:prstGeom prst="rect">
@@ -3703,7 +3703,7 @@
         </p:nvSpPr>
         <p:spPr>
           <a:xfrm>
-            <a:off x="19550830" y="15259964"/>
+            <a:off x="13710924" y="15427960"/>
             <a:ext cx="926325" cy="540000"/>
           </a:xfrm>
           <a:prstGeom prst="rect">
@@ -3758,7 +3758,7 @@
         </p:nvCxnSpPr>
         <p:spPr>
           <a:xfrm flipH="1" flipV="1">
-            <a:off x="18006065" y="15529963"/>
+            <a:off x="12166159" y="15697959"/>
             <a:ext cx="1544765" cy="1"/>
           </a:xfrm>
           <a:prstGeom prst="line">
@@ -3803,7 +3803,7 @@
         </p:nvCxnSpPr>
         <p:spPr>
           <a:xfrm rot="5400000">
-            <a:off x="19577693" y="15630912"/>
+            <a:off x="13737787" y="15798908"/>
             <a:ext cx="267249" cy="605352"/>
           </a:xfrm>
           <a:prstGeom prst="bentConnector3">
@@ -3849,7 +3849,7 @@
         </p:nvCxnSpPr>
         <p:spPr>
           <a:xfrm rot="16200000" flipH="1">
-            <a:off x="18342147" y="15000719"/>
+            <a:off x="12502241" y="15168715"/>
             <a:ext cx="267250" cy="1865738"/>
           </a:xfrm>
           <a:prstGeom prst="bentConnector3">
@@ -3895,7 +3895,7 @@
         </p:nvCxnSpPr>
         <p:spPr>
           <a:xfrm rot="5400000">
-            <a:off x="17101223" y="15623153"/>
+            <a:off x="11261317" y="15791149"/>
             <a:ext cx="264871" cy="618491"/>
           </a:xfrm>
           <a:prstGeom prst="bentConnector3">
@@ -3936,7 +3936,7 @@
         </p:nvSpPr>
         <p:spPr>
           <a:xfrm>
-            <a:off x="20168137" y="16064128"/>
+            <a:off x="14328231" y="16232124"/>
             <a:ext cx="926325" cy="540000"/>
           </a:xfrm>
           <a:prstGeom prst="rect">
@@ -3987,7 +3987,7 @@
         </p:nvSpPr>
         <p:spPr>
           <a:xfrm>
-            <a:off x="16461249" y="16064834"/>
+            <a:off x="10621343" y="16232830"/>
             <a:ext cx="926325" cy="540000"/>
           </a:xfrm>
           <a:prstGeom prst="rect">
@@ -4046,7 +4046,7 @@
         </p:nvSpPr>
         <p:spPr>
           <a:xfrm>
-            <a:off x="16460601" y="16882763"/>
+            <a:off x="10620695" y="17050759"/>
             <a:ext cx="926325" cy="540000"/>
           </a:xfrm>
           <a:prstGeom prst="rect">
@@ -4102,7 +4102,7 @@
         </p:nvSpPr>
         <p:spPr>
           <a:xfrm>
-            <a:off x="15218217" y="16064128"/>
+            <a:off x="9378311" y="16232124"/>
             <a:ext cx="926325" cy="540000"/>
           </a:xfrm>
           <a:prstGeom prst="rect">
@@ -4153,7 +4153,7 @@
         </p:nvSpPr>
         <p:spPr>
           <a:xfrm>
-            <a:off x="17702446" y="16069961"/>
+            <a:off x="11862540" y="16237957"/>
             <a:ext cx="926325" cy="540000"/>
           </a:xfrm>
           <a:prstGeom prst="rect">
@@ -4208,7 +4208,7 @@
         </p:nvCxnSpPr>
         <p:spPr>
           <a:xfrm rot="5400000">
-            <a:off x="16480060" y="15001284"/>
+            <a:off x="10640154" y="15169280"/>
             <a:ext cx="264165" cy="1861523"/>
           </a:xfrm>
           <a:prstGeom prst="bentConnector3">
@@ -4253,7 +4253,7 @@
         </p:nvCxnSpPr>
         <p:spPr>
           <a:xfrm rot="5400000">
-            <a:off x="16785124" y="16743474"/>
+            <a:off x="10945218" y="16911470"/>
             <a:ext cx="277929" cy="648"/>
           </a:xfrm>
           <a:prstGeom prst="bentConnector3">
@@ -4294,7 +4294,7 @@
         </p:nvSpPr>
         <p:spPr>
           <a:xfrm>
-            <a:off x="17702445" y="16882763"/>
+            <a:off x="11862539" y="17050759"/>
             <a:ext cx="926325" cy="540000"/>
           </a:xfrm>
           <a:prstGeom prst="rect">
@@ -4349,7 +4349,7 @@
         </p:nvCxnSpPr>
         <p:spPr>
           <a:xfrm rot="5400000">
-            <a:off x="18029208" y="16746362"/>
+            <a:off x="12189302" y="16914358"/>
             <a:ext cx="272802" cy="1"/>
           </a:xfrm>
           <a:prstGeom prst="bentConnector3">
@@ -4390,7 +4390,7 @@
         </p:nvSpPr>
         <p:spPr>
           <a:xfrm>
-            <a:off x="18943644" y="16885025"/>
+            <a:off x="13103738" y="17053021"/>
             <a:ext cx="926325" cy="540000"/>
           </a:xfrm>
           <a:prstGeom prst="rect">
@@ -4446,7 +4446,7 @@
         </p:nvSpPr>
         <p:spPr>
           <a:xfrm>
-            <a:off x="18945477" y="17702837"/>
+            <a:off x="13105571" y="17870833"/>
             <a:ext cx="926325" cy="540000"/>
           </a:xfrm>
           <a:prstGeom prst="rect">
@@ -4501,7 +4501,7 @@
         </p:nvCxnSpPr>
         <p:spPr>
           <a:xfrm rot="5400000">
-            <a:off x="19268818" y="16745202"/>
+            <a:off x="13428912" y="16913198"/>
             <a:ext cx="277812" cy="1834"/>
           </a:xfrm>
           <a:prstGeom prst="bentConnector3">
@@ -4546,7 +4546,7 @@
         </p:nvCxnSpPr>
         <p:spPr>
           <a:xfrm rot="16200000" flipH="1">
-            <a:off x="19268817" y="17563014"/>
+            <a:off x="13428911" y="17731010"/>
             <a:ext cx="277812" cy="1833"/>
           </a:xfrm>
           <a:prstGeom prst="bentConnector3">
@@ -4591,7 +4591,7 @@
         </p:nvCxnSpPr>
         <p:spPr>
           <a:xfrm rot="16200000" flipH="1">
-            <a:off x="17719257" y="15623609"/>
+            <a:off x="11879351" y="15791605"/>
             <a:ext cx="269998" cy="622706"/>
           </a:xfrm>
           <a:prstGeom prst="bentConnector3">
@@ -4637,7 +4637,7 @@
         </p:nvCxnSpPr>
         <p:spPr>
           <a:xfrm rot="5400000">
-            <a:off x="18954803" y="15010770"/>
+            <a:off x="13114897" y="15178766"/>
             <a:ext cx="269997" cy="1848384"/>
           </a:xfrm>
           <a:prstGeom prst="bentConnector3">
@@ -4679,7 +4679,7 @@
         </p:nvSpPr>
         <p:spPr>
           <a:xfrm>
-            <a:off x="18326336" y="18504693"/>
+            <a:off x="12486430" y="18672689"/>
             <a:ext cx="926325" cy="540000"/>
           </a:xfrm>
           <a:prstGeom prst="rect">
@@ -4734,7 +4734,7 @@
         </p:nvCxnSpPr>
         <p:spPr>
           <a:xfrm rot="5400000">
-            <a:off x="18049382" y="16540081"/>
+            <a:off x="12209476" y="16708077"/>
             <a:ext cx="2704729" cy="1224494"/>
           </a:xfrm>
           <a:prstGeom prst="bentConnector3">
@@ -4780,7 +4780,7 @@
         </p:nvCxnSpPr>
         <p:spPr>
           <a:xfrm rot="16200000" flipH="1">
-            <a:off x="16813836" y="16529030"/>
+            <a:off x="10973930" y="16697026"/>
             <a:ext cx="2704730" cy="1246596"/>
           </a:xfrm>
           <a:prstGeom prst="bentConnector3">
@@ -4826,7 +4826,7 @@
         </p:nvCxnSpPr>
         <p:spPr>
           <a:xfrm rot="5400000">
-            <a:off x="15542416" y="16743092"/>
+            <a:off x="9702510" y="16911088"/>
             <a:ext cx="277929" cy="1"/>
           </a:xfrm>
           <a:prstGeom prst="bentConnector3">
@@ -4867,7 +4867,7 @@
         </p:nvSpPr>
         <p:spPr>
           <a:xfrm>
-            <a:off x="17702444" y="17702837"/>
+            <a:off x="11862538" y="17870833"/>
             <a:ext cx="926325" cy="540000"/>
           </a:xfrm>
           <a:prstGeom prst="rect">
@@ -4918,7 +4918,7 @@
         </p:nvSpPr>
         <p:spPr>
           <a:xfrm>
-            <a:off x="15846283" y="17700692"/>
+            <a:off x="10006377" y="17868688"/>
             <a:ext cx="926325" cy="540000"/>
           </a:xfrm>
           <a:prstGeom prst="rect">
@@ -4973,7 +4973,7 @@
         </p:nvCxnSpPr>
         <p:spPr>
           <a:xfrm rot="5400000">
-            <a:off x="16477641" y="17254568"/>
+            <a:off x="10637735" y="17422564"/>
             <a:ext cx="277929" cy="614318"/>
           </a:xfrm>
           <a:prstGeom prst="bentConnector3">
@@ -5018,7 +5018,7 @@
         </p:nvCxnSpPr>
         <p:spPr>
           <a:xfrm rot="16200000" flipH="1">
-            <a:off x="15856095" y="17247340"/>
+            <a:off x="10016189" y="17415336"/>
             <a:ext cx="278635" cy="628067"/>
           </a:xfrm>
           <a:prstGeom prst="bentConnector3">
@@ -5063,7 +5063,7 @@
         </p:nvCxnSpPr>
         <p:spPr>
           <a:xfrm rot="5400000">
-            <a:off x="18025571" y="17562800"/>
+            <a:off x="12185665" y="17730796"/>
             <a:ext cx="280074" cy="1"/>
           </a:xfrm>
           <a:prstGeom prst="bentConnector3">
@@ -5108,7 +5108,7 @@
         </p:nvCxnSpPr>
         <p:spPr>
           <a:xfrm rot="16200000" flipH="1">
-            <a:off x="20190564" y="15623392"/>
+            <a:off x="14350658" y="15791388"/>
             <a:ext cx="264164" cy="617307"/>
           </a:xfrm>
           <a:prstGeom prst="bentConnector3">
@@ -5149,7 +5149,7 @@
         </p:nvSpPr>
         <p:spPr>
           <a:xfrm>
-            <a:off x="21406988" y="16064128"/>
+            <a:off x="15567082" y="16232124"/>
             <a:ext cx="926325" cy="540000"/>
           </a:xfrm>
           <a:prstGeom prst="rect">
@@ -5204,7 +5204,7 @@
         </p:nvCxnSpPr>
         <p:spPr>
           <a:xfrm rot="16200000" flipH="1">
-            <a:off x="20809990" y="15003967"/>
+            <a:off x="14970084" y="15171963"/>
             <a:ext cx="264164" cy="1856158"/>
           </a:xfrm>
           <a:prstGeom prst="bentConnector3">
@@ -5245,7 +5245,7 @@
         </p:nvSpPr>
         <p:spPr>
           <a:xfrm>
-            <a:off x="18943644" y="19525290"/>
+            <a:off x="13103738" y="19693286"/>
             <a:ext cx="926325" cy="540000"/>
           </a:xfrm>
           <a:prstGeom prst="rect">
@@ -5296,7 +5296,7 @@
         </p:nvSpPr>
         <p:spPr>
           <a:xfrm>
-            <a:off x="15218216" y="16882057"/>
+            <a:off x="9378310" y="17050053"/>
             <a:ext cx="926325" cy="540000"/>
           </a:xfrm>
           <a:prstGeom prst="rect">
@@ -5351,7 +5351,7 @@
         </p:nvCxnSpPr>
         <p:spPr>
           <a:xfrm rot="16200000" flipH="1">
-            <a:off x="18857855" y="18976337"/>
+            <a:off x="13017949" y="19144333"/>
             <a:ext cx="480597" cy="617308"/>
           </a:xfrm>
           <a:prstGeom prst="bentConnector3">
@@ -5392,7 +5392,7 @@
         </p:nvSpPr>
         <p:spPr>
           <a:xfrm>
-            <a:off x="15222026" y="18504693"/>
+            <a:off x="9382120" y="18672689"/>
             <a:ext cx="926325" cy="540000"/>
           </a:xfrm>
           <a:prstGeom prst="rect">
@@ -5447,7 +5447,7 @@
         </p:nvCxnSpPr>
         <p:spPr>
           <a:xfrm rot="16200000" flipH="1">
-            <a:off x="15141966" y="17961470"/>
+            <a:off x="9302060" y="18129466"/>
             <a:ext cx="1082636" cy="3810"/>
           </a:xfrm>
           <a:prstGeom prst="bentConnector3">
@@ -5488,7 +5488,7 @@
         </p:nvSpPr>
         <p:spPr>
           <a:xfrm>
-            <a:off x="21406987" y="16882057"/>
+            <a:off x="15567081" y="17050053"/>
             <a:ext cx="926325" cy="540000"/>
           </a:xfrm>
           <a:prstGeom prst="rect">
@@ -5543,7 +5543,7 @@
         </p:nvCxnSpPr>
         <p:spPr>
           <a:xfrm rot="5400000">
-            <a:off x="21731187" y="16743092"/>
+            <a:off x="15891281" y="16911088"/>
             <a:ext cx="277929" cy="1"/>
           </a:xfrm>
           <a:prstGeom prst="bentConnector3">
@@ -5584,7 +5584,7 @@
         </p:nvSpPr>
         <p:spPr>
           <a:xfrm>
-            <a:off x="20170232" y="17700692"/>
+            <a:off x="14330326" y="17868688"/>
             <a:ext cx="926325" cy="540000"/>
           </a:xfrm>
           <a:prstGeom prst="rect">
@@ -5647,7 +5647,7 @@
         </p:nvCxnSpPr>
         <p:spPr>
           <a:xfrm rot="5400000">
-            <a:off x="19377802" y="18269697"/>
+            <a:off x="13537896" y="18437693"/>
             <a:ext cx="1284598" cy="1226588"/>
           </a:xfrm>
           <a:prstGeom prst="bentConnector3">
@@ -5688,7 +5688,7 @@
         </p:nvSpPr>
         <p:spPr>
           <a:xfrm>
-            <a:off x="17702443" y="19525289"/>
+            <a:off x="11862537" y="19693285"/>
             <a:ext cx="926325" cy="540000"/>
           </a:xfrm>
           <a:prstGeom prst="rect">
@@ -5743,7 +5743,7 @@
         </p:nvCxnSpPr>
         <p:spPr>
           <a:xfrm rot="16200000" flipH="1">
-            <a:off x="20084065" y="17151362"/>
+            <a:off x="14244159" y="17319358"/>
             <a:ext cx="1096564" cy="2095"/>
           </a:xfrm>
           <a:prstGeom prst="bentConnector3">
@@ -5788,7 +5788,7 @@
         </p:nvCxnSpPr>
         <p:spPr>
           <a:xfrm rot="5400000">
-            <a:off x="18237255" y="18973045"/>
+            <a:off x="12397349" y="19141041"/>
             <a:ext cx="480596" cy="623893"/>
           </a:xfrm>
           <a:prstGeom prst="bentConnector3">
@@ -5829,7 +5829,7 @@
         </p:nvSpPr>
         <p:spPr>
           <a:xfrm>
-            <a:off x="17702443" y="20458740"/>
+            <a:off x="11862537" y="20626736"/>
             <a:ext cx="926325" cy="540000"/>
           </a:xfrm>
           <a:prstGeom prst="rect">
@@ -5880,7 +5880,7 @@
         </p:nvSpPr>
         <p:spPr>
           <a:xfrm>
-            <a:off x="20162308" y="20458337"/>
+            <a:off x="14322402" y="20626333"/>
             <a:ext cx="926325" cy="540000"/>
           </a:xfrm>
           <a:prstGeom prst="rect">
@@ -5935,7 +5935,7 @@
         </p:nvCxnSpPr>
         <p:spPr>
           <a:xfrm rot="5400000">
-            <a:off x="18589482" y="19641415"/>
+            <a:off x="12749576" y="19809411"/>
             <a:ext cx="393450" cy="1241201"/>
           </a:xfrm>
           <a:prstGeom prst="bentConnector3">
@@ -5980,7 +5980,7 @@
         </p:nvCxnSpPr>
         <p:spPr>
           <a:xfrm rot="16200000" flipH="1">
-            <a:off x="19819616" y="19652481"/>
+            <a:off x="13979710" y="19820477"/>
             <a:ext cx="393047" cy="1218664"/>
           </a:xfrm>
           <a:prstGeom prst="bentConnector3">
@@ -6021,7 +6021,7 @@
         </p:nvSpPr>
         <p:spPr>
           <a:xfrm>
-            <a:off x="12143190" y="14554835"/>
+            <a:off x="12637898" y="21570720"/>
             <a:ext cx="926325" cy="540000"/>
           </a:xfrm>
           <a:prstGeom prst="rect">
@@ -6072,7 +6072,7 @@
         </p:nvSpPr>
         <p:spPr>
           <a:xfrm>
-            <a:off x="13379087" y="16236945"/>
+            <a:off x="13873795" y="23252830"/>
             <a:ext cx="926325" cy="540000"/>
           </a:xfrm>
           <a:prstGeom prst="rect">
@@ -6123,7 +6123,7 @@
         </p:nvSpPr>
         <p:spPr>
           <a:xfrm>
-            <a:off x="12143191" y="16236945"/>
+            <a:off x="12637899" y="23252830"/>
             <a:ext cx="926325" cy="540000"/>
           </a:xfrm>
           <a:prstGeom prst="rect">
@@ -6174,7 +6174,7 @@
         </p:nvSpPr>
         <p:spPr>
           <a:xfrm>
-            <a:off x="12752201" y="15432782"/>
+            <a:off x="13246909" y="22448667"/>
             <a:ext cx="926325" cy="540000"/>
           </a:xfrm>
           <a:prstGeom prst="rect">
@@ -6233,7 +6233,7 @@
         </p:nvSpPr>
         <p:spPr>
           <a:xfrm>
-            <a:off x="10904340" y="16236945"/>
+            <a:off x="11399048" y="23252830"/>
             <a:ext cx="926325" cy="540000"/>
           </a:xfrm>
           <a:prstGeom prst="rect">
@@ -6284,7 +6284,7 @@
         </p:nvSpPr>
         <p:spPr>
           <a:xfrm>
-            <a:off x="11513350" y="15432782"/>
+            <a:off x="12008058" y="22448667"/>
             <a:ext cx="926325" cy="540000"/>
           </a:xfrm>
           <a:prstGeom prst="rect">
@@ -6347,7 +6347,7 @@
         </p:nvCxnSpPr>
         <p:spPr>
           <a:xfrm rot="5400000">
-            <a:off x="12122460" y="14948888"/>
+            <a:off x="12617168" y="21964773"/>
             <a:ext cx="337947" cy="629840"/>
           </a:xfrm>
           <a:prstGeom prst="bentConnector3">
@@ -6392,7 +6392,7 @@
         </p:nvCxnSpPr>
         <p:spPr>
           <a:xfrm rot="16200000" flipH="1">
-            <a:off x="12741885" y="14959302"/>
+            <a:off x="13236593" y="21975187"/>
             <a:ext cx="337947" cy="609011"/>
           </a:xfrm>
           <a:prstGeom prst="bentConnector3">
@@ -6437,7 +6437,7 @@
         </p:nvCxnSpPr>
         <p:spPr>
           <a:xfrm rot="16200000" flipH="1">
-            <a:off x="12159352" y="15789942"/>
+            <a:off x="12654060" y="22805827"/>
             <a:ext cx="264163" cy="629841"/>
           </a:xfrm>
           <a:prstGeom prst="bentConnector3">
@@ -6483,7 +6483,7 @@
         </p:nvCxnSpPr>
         <p:spPr>
           <a:xfrm rot="5400000">
-            <a:off x="12778778" y="15800358"/>
+            <a:off x="13273486" y="22816243"/>
             <a:ext cx="264163" cy="609010"/>
           </a:xfrm>
           <a:prstGeom prst="bentConnector3">
@@ -6529,7 +6529,7 @@
         </p:nvCxnSpPr>
         <p:spPr>
           <a:xfrm rot="16200000" flipH="1">
-            <a:off x="13396726" y="15791420"/>
+            <a:off x="13891434" y="22807305"/>
             <a:ext cx="264163" cy="626886"/>
           </a:xfrm>
           <a:prstGeom prst="bentConnector3">
@@ -6574,7 +6574,7 @@
         </p:nvCxnSpPr>
         <p:spPr>
           <a:xfrm rot="5400000">
-            <a:off x="11539927" y="15800358"/>
+            <a:off x="12034635" y="22816243"/>
             <a:ext cx="264163" cy="609010"/>
           </a:xfrm>
           <a:prstGeom prst="bentConnector3">
@@ -6620,7 +6620,7 @@
         </p:nvCxnSpPr>
         <p:spPr>
           <a:xfrm rot="5400000">
-            <a:off x="12159353" y="15180933"/>
+            <a:off x="12654061" y="22196818"/>
             <a:ext cx="264163" cy="1847861"/>
           </a:xfrm>
           <a:prstGeom prst="bentConnector3">
@@ -6666,7 +6666,7 @@
         </p:nvCxnSpPr>
         <p:spPr>
           <a:xfrm flipH="1">
-            <a:off x="11830665" y="16506945"/>
+            <a:off x="12325373" y="23522830"/>
             <a:ext cx="312526" cy="0"/>
           </a:xfrm>
           <a:prstGeom prst="line">
@@ -6707,7 +6707,7 @@
         </p:nvSpPr>
         <p:spPr>
           <a:xfrm>
-            <a:off x="12144722" y="17054874"/>
+            <a:off x="12639430" y="24070759"/>
             <a:ext cx="926325" cy="540000"/>
           </a:xfrm>
           <a:prstGeom prst="rect">
@@ -6758,7 +6758,7 @@
         </p:nvSpPr>
         <p:spPr>
           <a:xfrm>
-            <a:off x="13381128" y="17054875"/>
+            <a:off x="13875836" y="24070760"/>
             <a:ext cx="926325" cy="540000"/>
           </a:xfrm>
           <a:prstGeom prst="rect">
@@ -6813,7 +6813,7 @@
         </p:nvCxnSpPr>
         <p:spPr>
           <a:xfrm rot="16200000" flipH="1">
-            <a:off x="12468155" y="16915143"/>
+            <a:off x="12962863" y="23931028"/>
             <a:ext cx="277929" cy="1531"/>
           </a:xfrm>
           <a:prstGeom prst="bentConnector3">
@@ -6858,7 +6858,7 @@
         </p:nvCxnSpPr>
         <p:spPr>
           <a:xfrm rot="16200000" flipH="1">
-            <a:off x="13704305" y="16914889"/>
+            <a:off x="14199013" y="23930774"/>
             <a:ext cx="277930" cy="2041"/>
           </a:xfrm>
           <a:prstGeom prst="bentConnector3">
@@ -6899,7 +6899,7 @@
         </p:nvSpPr>
         <p:spPr>
           <a:xfrm>
-            <a:off x="13379559" y="17828701"/>
+            <a:off x="13874267" y="24844586"/>
             <a:ext cx="926325" cy="540000"/>
           </a:xfrm>
           <a:prstGeom prst="rect">
@@ -6954,7 +6954,7 @@
         </p:nvCxnSpPr>
         <p:spPr>
           <a:xfrm rot="5400000">
-            <a:off x="13726594" y="17711004"/>
+            <a:off x="14221302" y="24726889"/>
             <a:ext cx="233826" cy="1569"/>
           </a:xfrm>
           <a:prstGeom prst="bentConnector3">
@@ -6995,7 +6995,7 @@
         </p:nvSpPr>
         <p:spPr>
           <a:xfrm>
-            <a:off x="7158783" y="21047292"/>
+            <a:off x="7037300" y="17848340"/>
             <a:ext cx="926325" cy="540000"/>
           </a:xfrm>
           <a:prstGeom prst="rect">
@@ -7046,7 +7046,7 @@
         </p:nvSpPr>
         <p:spPr>
           <a:xfrm>
-            <a:off x="7158782" y="22648101"/>
+            <a:off x="7037299" y="19449149"/>
             <a:ext cx="926325" cy="540000"/>
           </a:xfrm>
           <a:prstGeom prst="rect">
@@ -7097,7 +7097,7 @@
         </p:nvSpPr>
         <p:spPr>
           <a:xfrm>
-            <a:off x="6541562" y="21847392"/>
+            <a:off x="6420079" y="18648440"/>
             <a:ext cx="926325" cy="540000"/>
           </a:xfrm>
           <a:prstGeom prst="rect">
@@ -7148,7 +7148,7 @@
         </p:nvSpPr>
         <p:spPr>
           <a:xfrm>
-            <a:off x="7783622" y="21847392"/>
+            <a:off x="7662139" y="18648440"/>
             <a:ext cx="926325" cy="540000"/>
           </a:xfrm>
           <a:prstGeom prst="rect">
@@ -7203,7 +7203,7 @@
         </p:nvCxnSpPr>
         <p:spPr>
           <a:xfrm rot="5400000">
-            <a:off x="7183286" y="21408732"/>
+            <a:off x="7061803" y="18209780"/>
             <a:ext cx="260100" cy="617221"/>
           </a:xfrm>
           <a:prstGeom prst="bentConnector3">
@@ -7248,7 +7248,7 @@
         </p:nvCxnSpPr>
         <p:spPr>
           <a:xfrm rot="16200000" flipH="1">
-            <a:off x="7804315" y="21404922"/>
+            <a:off x="7682832" y="18205970"/>
             <a:ext cx="260100" cy="624839"/>
           </a:xfrm>
           <a:prstGeom prst="bentConnector3">
@@ -7289,7 +7289,7 @@
         </p:nvSpPr>
         <p:spPr>
           <a:xfrm>
-            <a:off x="8411791" y="23455481"/>
+            <a:off x="8290308" y="20256529"/>
             <a:ext cx="926325" cy="540000"/>
           </a:xfrm>
           <a:prstGeom prst="rect">
@@ -7340,7 +7340,7 @@
         </p:nvSpPr>
         <p:spPr>
           <a:xfrm>
-            <a:off x="8411792" y="22654771"/>
+            <a:off x="8290309" y="19455819"/>
             <a:ext cx="926325" cy="540000"/>
           </a:xfrm>
           <a:prstGeom prst="rect">
@@ -7395,7 +7395,7 @@
         </p:nvCxnSpPr>
         <p:spPr>
           <a:xfrm rot="16200000" flipH="1">
-            <a:off x="7714711" y="21494526"/>
+            <a:off x="7593228" y="18295574"/>
             <a:ext cx="1067479" cy="1253009"/>
           </a:xfrm>
           <a:prstGeom prst="bentConnector3">
@@ -7440,7 +7440,7 @@
         </p:nvCxnSpPr>
         <p:spPr>
           <a:xfrm rot="5400000">
-            <a:off x="8744600" y="23325126"/>
+            <a:off x="8623117" y="20126174"/>
             <a:ext cx="260710" cy="1"/>
           </a:xfrm>
           <a:prstGeom prst="bentConnector3">
@@ -7481,7 +7481,7 @@
         </p:nvSpPr>
         <p:spPr>
           <a:xfrm>
-            <a:off x="5299502" y="21847390"/>
+            <a:off x="5178019" y="18648438"/>
             <a:ext cx="926325" cy="540000"/>
           </a:xfrm>
           <a:prstGeom prst="rect">
@@ -7536,7 +7536,7 @@
         </p:nvCxnSpPr>
         <p:spPr>
           <a:xfrm rot="5400000">
-            <a:off x="6562257" y="20787701"/>
+            <a:off x="6440774" y="17588749"/>
             <a:ext cx="260098" cy="1859281"/>
           </a:xfrm>
           <a:prstGeom prst="bentConnector3">
@@ -7577,7 +7577,7 @@
         </p:nvSpPr>
         <p:spPr>
           <a:xfrm>
-            <a:off x="5301930" y="22648101"/>
+            <a:off x="5180447" y="19449149"/>
             <a:ext cx="926325" cy="540000"/>
           </a:xfrm>
           <a:prstGeom prst="rect">
@@ -7632,7 +7632,7 @@
         </p:nvCxnSpPr>
         <p:spPr>
           <a:xfrm rot="16200000" flipH="1">
-            <a:off x="5633524" y="22516531"/>
+            <a:off x="5512041" y="19317579"/>
             <a:ext cx="260711" cy="2428"/>
           </a:xfrm>
           <a:prstGeom prst="bentConnector3">
@@ -7673,7 +7673,7 @@
         </p:nvSpPr>
         <p:spPr>
           <a:xfrm>
-            <a:off x="7783622" y="18644515"/>
+            <a:off x="7662139" y="15445563"/>
             <a:ext cx="926325" cy="540000"/>
           </a:xfrm>
           <a:prstGeom prst="rect">
@@ -7724,7 +7724,7 @@
         </p:nvSpPr>
         <p:spPr>
           <a:xfrm>
-            <a:off x="7158781" y="19445858"/>
+            <a:off x="7037298" y="16246906"/>
             <a:ext cx="926325" cy="540000"/>
           </a:xfrm>
           <a:prstGeom prst="rect">
@@ -7775,7 +7775,7 @@
         </p:nvSpPr>
         <p:spPr>
           <a:xfrm>
-            <a:off x="7158781" y="23448810"/>
+            <a:off x="7037298" y="20249858"/>
             <a:ext cx="926325" cy="540000"/>
           </a:xfrm>
           <a:prstGeom prst="rect">
@@ -7831,7 +7831,7 @@
         </p:nvSpPr>
         <p:spPr>
           <a:xfrm>
-            <a:off x="6540785" y="17828702"/>
+            <a:off x="6419302" y="14629750"/>
             <a:ext cx="926325" cy="540000"/>
           </a:xfrm>
           <a:prstGeom prst="rect">
@@ -7882,7 +7882,7 @@
         </p:nvSpPr>
         <p:spPr>
           <a:xfrm>
-            <a:off x="7158782" y="20246575"/>
+            <a:off x="7037299" y="17047623"/>
             <a:ext cx="926325" cy="540000"/>
           </a:xfrm>
           <a:prstGeom prst="rect">
@@ -7938,7 +7938,7 @@
         </p:nvSpPr>
         <p:spPr>
           <a:xfrm>
-            <a:off x="8400841" y="20246572"/>
+            <a:off x="8279358" y="17047620"/>
             <a:ext cx="926325" cy="540000"/>
           </a:xfrm>
           <a:prstGeom prst="rect">
@@ -7990,7 +7990,7 @@
         </p:nvSpPr>
         <p:spPr>
           <a:xfrm>
-            <a:off x="8400842" y="19445858"/>
+            <a:off x="8279359" y="16246906"/>
             <a:ext cx="926325" cy="540000"/>
           </a:xfrm>
           <a:prstGeom prst="rect">
@@ -8041,7 +8041,7 @@
         </p:nvSpPr>
         <p:spPr>
           <a:xfrm>
-            <a:off x="6540786" y="18645140"/>
+            <a:off x="6419303" y="15446188"/>
             <a:ext cx="926325" cy="540000"/>
           </a:xfrm>
           <a:prstGeom prst="rect">
@@ -8092,7 +8092,7 @@
         </p:nvSpPr>
         <p:spPr>
           <a:xfrm>
-            <a:off x="5914841" y="19445857"/>
+            <a:off x="5793358" y="16246905"/>
             <a:ext cx="926325" cy="540000"/>
           </a:xfrm>
           <a:prstGeom prst="rect">
@@ -8143,7 +8143,7 @@
         </p:nvSpPr>
         <p:spPr>
           <a:xfrm>
-            <a:off x="5914842" y="21042858"/>
+            <a:off x="5793359" y="17843906"/>
             <a:ext cx="926325" cy="540000"/>
           </a:xfrm>
           <a:prstGeom prst="rect">
@@ -8194,7 +8194,7 @@
         </p:nvSpPr>
         <p:spPr>
           <a:xfrm>
-            <a:off x="5914841" y="20246572"/>
+            <a:off x="5793358" y="17047620"/>
             <a:ext cx="926325" cy="540000"/>
           </a:xfrm>
           <a:prstGeom prst="rect">
@@ -8245,7 +8245,7 @@
         </p:nvSpPr>
         <p:spPr>
           <a:xfrm>
-            <a:off x="5305853" y="18649571"/>
+            <a:off x="5184370" y="15450619"/>
             <a:ext cx="926325" cy="540000"/>
           </a:xfrm>
           <a:prstGeom prst="rect">
@@ -8394,7 +8394,7 @@
         </p:nvSpPr>
         <p:spPr>
           <a:xfrm>
-            <a:off x="8400840" y="21047289"/>
+            <a:off x="8279357" y="17848337"/>
             <a:ext cx="926325" cy="540000"/>
           </a:xfrm>
           <a:prstGeom prst="rect">
@@ -8462,7 +8462,7 @@
         </p:nvCxnSpPr>
         <p:spPr>
           <a:xfrm rot="16200000" flipH="1">
-            <a:off x="6249861" y="20914714"/>
+            <a:off x="6128378" y="17715762"/>
             <a:ext cx="256286" cy="1"/>
           </a:xfrm>
           <a:prstGeom prst="bentConnector3">
@@ -8507,7 +8507,7 @@
         </p:nvCxnSpPr>
         <p:spPr>
           <a:xfrm rot="5400000">
-            <a:off x="8733648" y="20116215"/>
+            <a:off x="8612165" y="16917263"/>
             <a:ext cx="260714" cy="1"/>
           </a:xfrm>
           <a:prstGeom prst="bentConnector3">
@@ -8552,7 +8552,7 @@
         </p:nvCxnSpPr>
         <p:spPr>
           <a:xfrm rot="5400000">
-            <a:off x="8733646" y="20916930"/>
+            <a:off x="8612163" y="17717978"/>
             <a:ext cx="260717" cy="1"/>
           </a:xfrm>
           <a:prstGeom prst="bentConnector3">
@@ -8597,7 +8597,7 @@
         </p:nvCxnSpPr>
         <p:spPr>
           <a:xfrm rot="16200000" flipH="1">
-            <a:off x="7491586" y="20116215"/>
+            <a:off x="7370103" y="16917263"/>
             <a:ext cx="260717" cy="1"/>
           </a:xfrm>
           <a:prstGeom prst="bentConnector3">
@@ -8643,7 +8643,7 @@
         </p:nvCxnSpPr>
         <p:spPr>
           <a:xfrm rot="5400000">
-            <a:off x="8112617" y="19495186"/>
+            <a:off x="7991134" y="16296234"/>
             <a:ext cx="260717" cy="1242060"/>
           </a:xfrm>
           <a:prstGeom prst="bentConnector3">
@@ -8689,7 +8689,7 @@
         </p:nvCxnSpPr>
         <p:spPr>
           <a:xfrm rot="5400000">
-            <a:off x="8112615" y="20295903"/>
+            <a:off x="7991132" y="17096951"/>
             <a:ext cx="260720" cy="1242058"/>
           </a:xfrm>
           <a:prstGeom prst="bentConnector3">
@@ -8735,7 +8735,7 @@
         </p:nvCxnSpPr>
         <p:spPr>
           <a:xfrm rot="16200000" flipH="1">
-            <a:off x="7491587" y="20916932"/>
+            <a:off x="7370104" y="17717980"/>
             <a:ext cx="260717" cy="1"/>
           </a:xfrm>
           <a:prstGeom prst="bentConnector3">
@@ -8777,7 +8777,7 @@
         </p:nvSpPr>
         <p:spPr>
           <a:xfrm>
-            <a:off x="4670901" y="19445857"/>
+            <a:off x="4549418" y="16246905"/>
             <a:ext cx="926325" cy="540000"/>
           </a:xfrm>
           <a:prstGeom prst="rect">
@@ -8832,7 +8832,7 @@
         </p:nvCxnSpPr>
         <p:spPr>
           <a:xfrm flipH="1">
-            <a:off x="5597226" y="19715857"/>
+            <a:off x="5475743" y="16516905"/>
             <a:ext cx="317615" cy="0"/>
           </a:xfrm>
           <a:prstGeom prst="line">
@@ -8873,7 +8873,7 @@
         </p:nvSpPr>
         <p:spPr>
           <a:xfrm>
-            <a:off x="4670900" y="20246981"/>
+            <a:off x="4549417" y="17048029"/>
             <a:ext cx="926325" cy="540000"/>
           </a:xfrm>
           <a:prstGeom prst="rect">
@@ -8928,7 +8928,7 @@
         </p:nvCxnSpPr>
         <p:spPr>
           <a:xfrm rot="5400000">
-            <a:off x="5323397" y="19000238"/>
+            <a:off x="5201914" y="15801286"/>
             <a:ext cx="256286" cy="634952"/>
           </a:xfrm>
           <a:prstGeom prst="bentConnector3">
@@ -8973,7 +8973,7 @@
         </p:nvCxnSpPr>
         <p:spPr>
           <a:xfrm rot="16200000" flipH="1">
-            <a:off x="5945367" y="19013220"/>
+            <a:off x="5823884" y="15814268"/>
             <a:ext cx="256286" cy="608988"/>
           </a:xfrm>
           <a:prstGeom prst="bentConnector3">
@@ -9018,7 +9018,7 @@
         </p:nvCxnSpPr>
         <p:spPr>
           <a:xfrm rot="5400000">
-            <a:off x="5625472" y="19494449"/>
+            <a:off x="5503989" y="16295497"/>
             <a:ext cx="261124" cy="1243941"/>
           </a:xfrm>
           <a:prstGeom prst="bentConnector3">
@@ -9064,7 +9064,7 @@
         </p:nvCxnSpPr>
         <p:spPr>
           <a:xfrm rot="5400000">
-            <a:off x="5003502" y="20116419"/>
+            <a:off x="4882019" y="16917467"/>
             <a:ext cx="261124" cy="1"/>
           </a:xfrm>
           <a:prstGeom prst="bentConnector3">
@@ -9110,7 +9110,7 @@
         </p:nvCxnSpPr>
         <p:spPr>
           <a:xfrm rot="16200000" flipH="1">
-            <a:off x="5625677" y="19494244"/>
+            <a:off x="5504194" y="16295292"/>
             <a:ext cx="260715" cy="1243940"/>
           </a:xfrm>
           <a:prstGeom prst="bentConnector3">
@@ -9156,7 +9156,7 @@
         </p:nvCxnSpPr>
         <p:spPr>
           <a:xfrm rot="5400000">
-            <a:off x="6247647" y="20116214"/>
+            <a:off x="6126164" y="16917262"/>
             <a:ext cx="260715" cy="12700"/>
           </a:xfrm>
           <a:prstGeom prst="bentConnector3">
@@ -9202,7 +9202,7 @@
         </p:nvCxnSpPr>
         <p:spPr>
           <a:xfrm rot="16200000" flipH="1">
-            <a:off x="6865729" y="18506920"/>
+            <a:off x="6744246" y="15307968"/>
             <a:ext cx="276438" cy="1"/>
           </a:xfrm>
           <a:prstGeom prst="bentConnector3">
@@ -9248,7 +9248,7 @@
         </p:nvCxnSpPr>
         <p:spPr>
           <a:xfrm rot="16200000" flipH="1">
-            <a:off x="7182587" y="19006501"/>
+            <a:off x="7061104" y="15807549"/>
             <a:ext cx="260718" cy="617995"/>
           </a:xfrm>
           <a:prstGeom prst="bentConnector3">
@@ -9294,7 +9294,7 @@
         </p:nvCxnSpPr>
         <p:spPr>
           <a:xfrm rot="16200000" flipH="1">
-            <a:off x="8424724" y="19006576"/>
+            <a:off x="8303241" y="15807624"/>
             <a:ext cx="261343" cy="617220"/>
           </a:xfrm>
           <a:prstGeom prst="bentConnector3">
@@ -9339,7 +9339,7 @@
         </p:nvCxnSpPr>
         <p:spPr>
           <a:xfrm rot="16200000" flipH="1">
-            <a:off x="5138627" y="19981293"/>
+            <a:off x="5017144" y="16782341"/>
             <a:ext cx="1861535" cy="1870661"/>
           </a:xfrm>
           <a:prstGeom prst="bentConnector3">
@@ -9385,7 +9385,7 @@
         </p:nvCxnSpPr>
         <p:spPr>
           <a:xfrm rot="16200000" flipH="1">
-            <a:off x="5760597" y="20603263"/>
+            <a:off x="5639114" y="17404311"/>
             <a:ext cx="1861535" cy="626721"/>
           </a:xfrm>
           <a:prstGeom prst="bentConnector3">
@@ -9431,7 +9431,7 @@
         </p:nvCxnSpPr>
         <p:spPr>
           <a:xfrm rot="16200000" flipH="1">
-            <a:off x="5759657" y="19360263"/>
+            <a:off x="5638174" y="16161311"/>
             <a:ext cx="1861535" cy="3112721"/>
           </a:xfrm>
           <a:prstGeom prst="bentConnector3">
@@ -9477,7 +9477,7 @@
         </p:nvCxnSpPr>
         <p:spPr>
           <a:xfrm rot="16200000" flipH="1">
-            <a:off x="6381627" y="19982233"/>
+            <a:off x="6260144" y="16783281"/>
             <a:ext cx="1861535" cy="1868781"/>
           </a:xfrm>
           <a:prstGeom prst="bentConnector3">
@@ -9523,7 +9523,7 @@
         </p:nvCxnSpPr>
         <p:spPr>
           <a:xfrm rot="5400000">
-            <a:off x="7491591" y="23318455"/>
+            <a:off x="7370108" y="20119503"/>
             <a:ext cx="260709" cy="1"/>
           </a:xfrm>
           <a:prstGeom prst="bentConnector3">
@@ -9609,7 +9609,7 @@
         </p:nvSpPr>
         <p:spPr>
           <a:xfrm>
-            <a:off x="4670899" y="21037390"/>
+            <a:off x="4549416" y="17838438"/>
             <a:ext cx="926325" cy="540000"/>
           </a:xfrm>
           <a:prstGeom prst="rect">
@@ -9665,7 +9665,7 @@
         </p:nvCxnSpPr>
         <p:spPr>
           <a:xfrm rot="5400000">
-            <a:off x="5630624" y="20290010"/>
+            <a:off x="5509141" y="17091058"/>
             <a:ext cx="250818" cy="1243942"/>
           </a:xfrm>
           <a:prstGeom prst="bentConnector3">
@@ -9710,7 +9710,7 @@
         </p:nvCxnSpPr>
         <p:spPr>
           <a:xfrm rot="5400000">
-            <a:off x="6246048" y="17891670"/>
+            <a:off x="6124565" y="14692718"/>
             <a:ext cx="280869" cy="1234932"/>
           </a:xfrm>
           <a:prstGeom prst="bentConnector3">
@@ -9756,7 +9756,7 @@
         </p:nvCxnSpPr>
         <p:spPr>
           <a:xfrm rot="16200000" flipH="1">
-            <a:off x="7487460" y="17885189"/>
+            <a:off x="7365977" y="14686237"/>
             <a:ext cx="275813" cy="1242837"/>
           </a:xfrm>
           <a:prstGeom prst="bentConnector3">
@@ -13279,10 +13279,10 @@
       </p:cxnSp>
       <p:sp>
         <p:nvSpPr>
-          <p:cNvPr id="244" name="Прямоугольник 243">
-            <a:extLst>
-              <a:ext uri="{FF2B5EF4-FFF2-40B4-BE49-F238E27FC236}">
-                <a16:creationId xmlns:a16="http://schemas.microsoft.com/office/drawing/2014/main" id="{68301316-F113-43E2-BE8C-A421E8E8F476}"/>
+          <p:cNvPr id="286" name="Прямоугольник 285">
+            <a:extLst>
+              <a:ext uri="{FF2B5EF4-FFF2-40B4-BE49-F238E27FC236}">
+                <a16:creationId xmlns:a16="http://schemas.microsoft.com/office/drawing/2014/main" id="{C6D605BB-0F8F-4EBC-8939-EC314CF5EA5B}"/>
               </a:ext>
             </a:extLst>
           </p:cNvPr>
@@ -13291,17 +13291,13 @@
         </p:nvSpPr>
         <p:spPr>
           <a:xfrm>
-            <a:off x="10903549" y="18677512"/>
+            <a:off x="11395711" y="24068112"/>
             <a:ext cx="926325" cy="540000"/>
           </a:xfrm>
           <a:prstGeom prst="rect">
             <a:avLst/>
           </a:prstGeom>
-          <a:solidFill>
-            <a:schemeClr val="accent2">
-              <a:lumMod val="75000"/>
-            </a:schemeClr>
-          </a:solidFill>
+          <a:noFill/>
           <a:ln w="19050"/>
         </p:spPr>
         <p:style>
@@ -13325,119 +13321,7 @@
             <a:pPr algn="ctr"/>
             <a:r>
               <a:rPr lang="ru-RU" sz="700" dirty="0"/>
-              <a:t>Создание муниципальных советов </a:t>
-            </a:r>
-            <a:r>
-              <a:rPr lang="ru-RU" sz="300" dirty="0"/>
-              <a:t>(позволяющих государству управлять своими внутренними делами)</a:t>
-            </a:r>
-            <a:endParaRPr lang="ru-RU" sz="700" dirty="0"/>
-          </a:p>
-        </p:txBody>
-      </p:sp>
-      <p:sp>
-        <p:nvSpPr>
-          <p:cNvPr id="247" name="Прямоугольник 246">
-            <a:extLst>
-              <a:ext uri="{FF2B5EF4-FFF2-40B4-BE49-F238E27FC236}">
-                <a16:creationId xmlns:a16="http://schemas.microsoft.com/office/drawing/2014/main" id="{EFB476FA-A8C6-4F25-A4F9-0EE18F513C6F}"/>
-              </a:ext>
-            </a:extLst>
-          </p:cNvPr>
-          <p:cNvSpPr/>
-          <p:nvPr/>
-        </p:nvSpPr>
-        <p:spPr>
-          <a:xfrm>
-            <a:off x="10903550" y="17867678"/>
-            <a:ext cx="926325" cy="540000"/>
-          </a:xfrm>
-          <a:prstGeom prst="rect">
-            <a:avLst/>
-          </a:prstGeom>
-          <a:solidFill>
-            <a:schemeClr val="accent2">
-              <a:lumMod val="75000"/>
-            </a:schemeClr>
-          </a:solidFill>
-          <a:ln w="19050"/>
-        </p:spPr>
-        <p:style>
-          <a:lnRef idx="2">
-            <a:schemeClr val="accent1"/>
-          </a:lnRef>
-          <a:fillRef idx="1">
-            <a:schemeClr val="lt1"/>
-          </a:fillRef>
-          <a:effectRef idx="0">
-            <a:schemeClr val="accent1"/>
-          </a:effectRef>
-          <a:fontRef idx="minor">
-            <a:schemeClr val="dk1"/>
-          </a:fontRef>
-        </p:style>
-        <p:txBody>
-          <a:bodyPr lIns="124733" tIns="62367" rIns="124733" bIns="62367" rtlCol="0" anchor="ctr"/>
-          <a:lstStyle/>
-          <a:p>
-            <a:pPr algn="ctr"/>
-            <a:r>
-              <a:rPr lang="ru-RU" sz="700" dirty="0"/>
-              <a:t>Создание высшего совета</a:t>
-            </a:r>
-            <a:endParaRPr lang="ru-RU" sz="200" dirty="0"/>
-          </a:p>
-        </p:txBody>
-      </p:sp>
-      <p:sp>
-        <p:nvSpPr>
-          <p:cNvPr id="286" name="Прямоугольник 285">
-            <a:extLst>
-              <a:ext uri="{FF2B5EF4-FFF2-40B4-BE49-F238E27FC236}">
-                <a16:creationId xmlns:a16="http://schemas.microsoft.com/office/drawing/2014/main" id="{C6D605BB-0F8F-4EBC-8939-EC314CF5EA5B}"/>
-              </a:ext>
-            </a:extLst>
-          </p:cNvPr>
-          <p:cNvSpPr/>
-          <p:nvPr/>
-        </p:nvSpPr>
-        <p:spPr>
-          <a:xfrm>
-            <a:off x="11512749" y="19507629"/>
-            <a:ext cx="926325" cy="540000"/>
-          </a:xfrm>
-          <a:prstGeom prst="rect">
-            <a:avLst/>
-          </a:prstGeom>
-          <a:solidFill>
-            <a:schemeClr val="accent2">
-              <a:lumMod val="75000"/>
-            </a:schemeClr>
-          </a:solidFill>
-          <a:ln w="19050"/>
-        </p:spPr>
-        <p:style>
-          <a:lnRef idx="2">
-            <a:schemeClr val="accent1"/>
-          </a:lnRef>
-          <a:fillRef idx="1">
-            <a:schemeClr val="lt1"/>
-          </a:fillRef>
-          <a:effectRef idx="0">
-            <a:schemeClr val="accent1"/>
-          </a:effectRef>
-          <a:fontRef idx="minor">
-            <a:schemeClr val="dk1"/>
-          </a:fontRef>
-        </p:style>
-        <p:txBody>
-          <a:bodyPr lIns="124733" tIns="62367" rIns="124733" bIns="62367" rtlCol="0" anchor="ctr"/>
-          <a:lstStyle/>
-          <a:p>
-            <a:pPr algn="ctr"/>
-            <a:r>
-              <a:rPr lang="ru-RU" sz="700" dirty="0"/>
-              <a:t>Создание движения «</a:t>
+              <a:t>Использовать движение «</a:t>
             </a:r>
             <a:r>
               <a:rPr lang="ru-RU" sz="700" dirty="0" err="1"/>
@@ -13464,7 +13348,7 @@
         </p:nvSpPr>
         <p:spPr>
           <a:xfrm>
-            <a:off x="7731024" y="15426320"/>
+            <a:off x="8225732" y="22442205"/>
             <a:ext cx="926325" cy="540000"/>
           </a:xfrm>
           <a:prstGeom prst="rect">
@@ -13520,7 +13404,7 @@
         </p:nvSpPr>
         <p:spPr>
           <a:xfrm>
-            <a:off x="5287317" y="15430402"/>
+            <a:off x="5782025" y="22446287"/>
             <a:ext cx="926325" cy="540000"/>
           </a:xfrm>
           <a:prstGeom prst="rect">
@@ -13571,7 +13455,7 @@
         </p:nvSpPr>
         <p:spPr>
           <a:xfrm>
-            <a:off x="6488299" y="14552455"/>
+            <a:off x="6983007" y="21568340"/>
             <a:ext cx="926325" cy="540000"/>
           </a:xfrm>
           <a:prstGeom prst="rect">
@@ -13622,7 +13506,7 @@
         </p:nvSpPr>
         <p:spPr>
           <a:xfrm>
-            <a:off x="10443385" y="15430402"/>
+            <a:off x="10895421" y="22446287"/>
             <a:ext cx="926325" cy="540000"/>
           </a:xfrm>
           <a:prstGeom prst="rect">
@@ -13673,7 +13557,7 @@
         </p:nvSpPr>
         <p:spPr>
           <a:xfrm>
-            <a:off x="9785125" y="14552455"/>
+            <a:off x="10279833" y="21568340"/>
             <a:ext cx="926325" cy="540000"/>
           </a:xfrm>
           <a:prstGeom prst="rect">
@@ -13724,7 +13608,7 @@
         </p:nvSpPr>
         <p:spPr>
           <a:xfrm>
-            <a:off x="9171725" y="15430402"/>
+            <a:off x="9709105" y="22446287"/>
             <a:ext cx="926325" cy="540000"/>
           </a:xfrm>
           <a:prstGeom prst="rect">
@@ -13780,7 +13664,7 @@
         </p:nvSpPr>
         <p:spPr>
           <a:xfrm>
-            <a:off x="8409193" y="16236945"/>
+            <a:off x="8903901" y="23252830"/>
             <a:ext cx="926325" cy="540000"/>
           </a:xfrm>
           <a:prstGeom prst="rect">
@@ -13835,7 +13719,7 @@
         </p:nvCxnSpPr>
         <p:spPr>
           <a:xfrm rot="5400000">
-            <a:off x="10168300" y="13798892"/>
+            <a:off x="10663008" y="20814777"/>
             <a:ext cx="1142110" cy="3733997"/>
           </a:xfrm>
           <a:prstGeom prst="bentConnector3">
@@ -13880,7 +13764,7 @@
         </p:nvCxnSpPr>
         <p:spPr>
           <a:xfrm rot="16200000" flipH="1">
-            <a:off x="7339664" y="14704253"/>
+            <a:off x="7834372" y="21720138"/>
             <a:ext cx="1144490" cy="1920894"/>
           </a:xfrm>
           <a:prstGeom prst="bentConnector3">
@@ -13925,7 +13809,7 @@
         </p:nvCxnSpPr>
         <p:spPr>
           <a:xfrm rot="5400000">
-            <a:off x="8988077" y="14976734"/>
+            <a:off x="9482785" y="21992619"/>
             <a:ext cx="1144490" cy="1375932"/>
           </a:xfrm>
           <a:prstGeom prst="bentConnector3">
@@ -16040,59 +15924,6 @@
           </a:p>
         </p:txBody>
       </p:sp>
-      <p:sp>
-        <p:nvSpPr>
-          <p:cNvPr id="388" name="Прямоугольник 387">
-            <a:extLst>
-              <a:ext uri="{FF2B5EF4-FFF2-40B4-BE49-F238E27FC236}">
-                <a16:creationId xmlns:a16="http://schemas.microsoft.com/office/drawing/2014/main" id="{F8854DA0-0A68-4978-AB1E-49C2999C31BA}"/>
-              </a:ext>
-            </a:extLst>
-          </p:cNvPr>
-          <p:cNvSpPr/>
-          <p:nvPr/>
-        </p:nvSpPr>
-        <p:spPr>
-          <a:xfrm>
-            <a:off x="10306580" y="19506339"/>
-            <a:ext cx="926325" cy="540000"/>
-          </a:xfrm>
-          <a:prstGeom prst="rect">
-            <a:avLst/>
-          </a:prstGeom>
-          <a:solidFill>
-            <a:schemeClr val="accent2">
-              <a:lumMod val="75000"/>
-            </a:schemeClr>
-          </a:solidFill>
-          <a:ln w="19050"/>
-        </p:spPr>
-        <p:style>
-          <a:lnRef idx="2">
-            <a:schemeClr val="accent1"/>
-          </a:lnRef>
-          <a:fillRef idx="1">
-            <a:schemeClr val="lt1"/>
-          </a:fillRef>
-          <a:effectRef idx="0">
-            <a:schemeClr val="accent1"/>
-          </a:effectRef>
-          <a:fontRef idx="minor">
-            <a:schemeClr val="dk1"/>
-          </a:fontRef>
-        </p:style>
-        <p:txBody>
-          <a:bodyPr lIns="124733" tIns="62367" rIns="124733" bIns="62367" rtlCol="0" anchor="ctr"/>
-          <a:lstStyle/>
-          <a:p>
-            <a:pPr algn="ctr"/>
-            <a:r>
-              <a:rPr lang="ru-RU" sz="700" dirty="0"/>
-              <a:t>Аль-Андалусские амбиции</a:t>
-            </a:r>
-          </a:p>
-        </p:txBody>
-      </p:sp>
       <p:cxnSp>
         <p:nvCxnSpPr>
           <p:cNvPr id="389" name="Соединительная линия уступом 620">
@@ -16183,59 +16014,6 @@
           </a:fontRef>
         </p:style>
       </p:cxnSp>
-      <p:sp>
-        <p:nvSpPr>
-          <p:cNvPr id="391" name="Прямоугольник 390">
-            <a:extLst>
-              <a:ext uri="{FF2B5EF4-FFF2-40B4-BE49-F238E27FC236}">
-                <a16:creationId xmlns:a16="http://schemas.microsoft.com/office/drawing/2014/main" id="{F6324390-F8AE-4AB5-AD25-75C7A7634BC2}"/>
-              </a:ext>
-            </a:extLst>
-          </p:cNvPr>
-          <p:cNvSpPr/>
-          <p:nvPr/>
-        </p:nvSpPr>
-        <p:spPr>
-          <a:xfrm>
-            <a:off x="10903549" y="20306628"/>
-            <a:ext cx="926325" cy="540000"/>
-          </a:xfrm>
-          <a:prstGeom prst="rect">
-            <a:avLst/>
-          </a:prstGeom>
-          <a:solidFill>
-            <a:schemeClr val="accent2">
-              <a:lumMod val="75000"/>
-            </a:schemeClr>
-          </a:solidFill>
-          <a:ln w="19050"/>
-        </p:spPr>
-        <p:style>
-          <a:lnRef idx="2">
-            <a:schemeClr val="accent1"/>
-          </a:lnRef>
-          <a:fillRef idx="1">
-            <a:schemeClr val="lt1"/>
-          </a:fillRef>
-          <a:effectRef idx="0">
-            <a:schemeClr val="accent1"/>
-          </a:effectRef>
-          <a:fontRef idx="minor">
-            <a:schemeClr val="dk1"/>
-          </a:fontRef>
-        </p:style>
-        <p:txBody>
-          <a:bodyPr lIns="124733" tIns="62367" rIns="124733" bIns="62367" rtlCol="0" anchor="ctr"/>
-          <a:lstStyle/>
-          <a:p>
-            <a:pPr algn="ctr"/>
-            <a:r>
-              <a:rPr lang="ru-RU" sz="700" dirty="0"/>
-              <a:t>Земли Испании</a:t>
-            </a:r>
-          </a:p>
-        </p:txBody>
-      </p:sp>
       <p:cxnSp>
         <p:nvCxnSpPr>
           <p:cNvPr id="392" name="Прямая соединительная линия 391">
@@ -16264,443 +16042,6 @@
             <a:solidFill>
               <a:srgbClr val="C00000"/>
             </a:solidFill>
-          </a:ln>
-        </p:spPr>
-        <p:style>
-          <a:lnRef idx="1">
-            <a:schemeClr val="accent1"/>
-          </a:lnRef>
-          <a:fillRef idx="0">
-            <a:schemeClr val="accent1"/>
-          </a:fillRef>
-          <a:effectRef idx="0">
-            <a:schemeClr val="accent1"/>
-          </a:effectRef>
-          <a:fontRef idx="minor">
-            <a:schemeClr val="tx1"/>
-          </a:fontRef>
-        </p:style>
-      </p:cxnSp>
-      <p:sp>
-        <p:nvSpPr>
-          <p:cNvPr id="393" name="Прямоугольник 392">
-            <a:extLst>
-              <a:ext uri="{FF2B5EF4-FFF2-40B4-BE49-F238E27FC236}">
-                <a16:creationId xmlns:a16="http://schemas.microsoft.com/office/drawing/2014/main" id="{05D0D326-25E7-4CF1-BC8E-9F64D542575B}"/>
-              </a:ext>
-            </a:extLst>
-          </p:cNvPr>
-          <p:cNvSpPr/>
-          <p:nvPr/>
-        </p:nvSpPr>
-        <p:spPr>
-          <a:xfrm>
-            <a:off x="9713819" y="20307158"/>
-            <a:ext cx="926325" cy="540000"/>
-          </a:xfrm>
-          <a:prstGeom prst="rect">
-            <a:avLst/>
-          </a:prstGeom>
-          <a:solidFill>
-            <a:schemeClr val="accent2">
-              <a:lumMod val="75000"/>
-            </a:schemeClr>
-          </a:solidFill>
-          <a:ln w="19050"/>
-        </p:spPr>
-        <p:style>
-          <a:lnRef idx="2">
-            <a:schemeClr val="accent1"/>
-          </a:lnRef>
-          <a:fillRef idx="1">
-            <a:schemeClr val="lt1"/>
-          </a:fillRef>
-          <a:effectRef idx="0">
-            <a:schemeClr val="accent1"/>
-          </a:effectRef>
-          <a:fontRef idx="minor">
-            <a:schemeClr val="dk1"/>
-          </a:fontRef>
-        </p:style>
-        <p:txBody>
-          <a:bodyPr lIns="124733" tIns="62367" rIns="124733" bIns="62367" rtlCol="0" anchor="ctr"/>
-          <a:lstStyle/>
-          <a:p>
-            <a:pPr algn="ctr"/>
-            <a:r>
-              <a:rPr lang="ru-RU" sz="700" dirty="0"/>
-              <a:t>Земли Португалии</a:t>
-            </a:r>
-          </a:p>
-        </p:txBody>
-      </p:sp>
-      <p:sp>
-        <p:nvSpPr>
-          <p:cNvPr id="398" name="Прямоугольник 397">
-            <a:extLst>
-              <a:ext uri="{FF2B5EF4-FFF2-40B4-BE49-F238E27FC236}">
-                <a16:creationId xmlns:a16="http://schemas.microsoft.com/office/drawing/2014/main" id="{28CEDD15-69A5-47C1-928C-D47DE891019A}"/>
-              </a:ext>
-            </a:extLst>
-          </p:cNvPr>
-          <p:cNvSpPr/>
-          <p:nvPr/>
-        </p:nvSpPr>
-        <p:spPr>
-          <a:xfrm>
-            <a:off x="10306579" y="21037390"/>
-            <a:ext cx="926325" cy="540000"/>
-          </a:xfrm>
-          <a:prstGeom prst="rect">
-            <a:avLst/>
-          </a:prstGeom>
-          <a:solidFill>
-            <a:schemeClr val="accent2">
-              <a:lumMod val="75000"/>
-            </a:schemeClr>
-          </a:solidFill>
-          <a:ln w="19050"/>
-        </p:spPr>
-        <p:style>
-          <a:lnRef idx="2">
-            <a:schemeClr val="accent1"/>
-          </a:lnRef>
-          <a:fillRef idx="1">
-            <a:schemeClr val="lt1"/>
-          </a:fillRef>
-          <a:effectRef idx="0">
-            <a:schemeClr val="accent1"/>
-          </a:effectRef>
-          <a:fontRef idx="minor">
-            <a:schemeClr val="dk1"/>
-          </a:fontRef>
-        </p:style>
-        <p:txBody>
-          <a:bodyPr lIns="124733" tIns="62367" rIns="124733" bIns="62367" rtlCol="0" anchor="ctr"/>
-          <a:lstStyle/>
-          <a:p>
-            <a:pPr algn="ctr"/>
-            <a:r>
-              <a:rPr lang="ru-RU" sz="700" dirty="0"/>
-              <a:t>Оккупировать Гибралтар</a:t>
-            </a:r>
-          </a:p>
-        </p:txBody>
-      </p:sp>
-      <p:sp>
-        <p:nvSpPr>
-          <p:cNvPr id="399" name="Прямоугольник 398">
-            <a:extLst>
-              <a:ext uri="{FF2B5EF4-FFF2-40B4-BE49-F238E27FC236}">
-                <a16:creationId xmlns:a16="http://schemas.microsoft.com/office/drawing/2014/main" id="{2757126F-767B-49BC-8A20-3EF2F6BAD339}"/>
-              </a:ext>
-            </a:extLst>
-          </p:cNvPr>
-          <p:cNvSpPr/>
-          <p:nvPr/>
-        </p:nvSpPr>
-        <p:spPr>
-          <a:xfrm>
-            <a:off x="10903548" y="21847388"/>
-            <a:ext cx="926325" cy="540000"/>
-          </a:xfrm>
-          <a:prstGeom prst="rect">
-            <a:avLst/>
-          </a:prstGeom>
-          <a:solidFill>
-            <a:schemeClr val="accent2">
-              <a:lumMod val="75000"/>
-            </a:schemeClr>
-          </a:solidFill>
-          <a:ln w="19050"/>
-        </p:spPr>
-        <p:style>
-          <a:lnRef idx="2">
-            <a:schemeClr val="accent1"/>
-          </a:lnRef>
-          <a:fillRef idx="1">
-            <a:schemeClr val="lt1"/>
-          </a:fillRef>
-          <a:effectRef idx="0">
-            <a:schemeClr val="accent1"/>
-          </a:effectRef>
-          <a:fontRef idx="minor">
-            <a:schemeClr val="dk1"/>
-          </a:fontRef>
-        </p:style>
-        <p:txBody>
-          <a:bodyPr lIns="124733" tIns="62367" rIns="124733" bIns="62367" rtlCol="0" anchor="ctr"/>
-          <a:lstStyle/>
-          <a:p>
-            <a:pPr algn="ctr"/>
-            <a:r>
-              <a:rPr lang="ru-RU" sz="700" dirty="0"/>
-              <a:t>Реформировать Иберийские провинции под эмираты</a:t>
-            </a:r>
-          </a:p>
-        </p:txBody>
-      </p:sp>
-      <p:sp>
-        <p:nvSpPr>
-          <p:cNvPr id="401" name="Прямоугольник 400">
-            <a:extLst>
-              <a:ext uri="{FF2B5EF4-FFF2-40B4-BE49-F238E27FC236}">
-                <a16:creationId xmlns:a16="http://schemas.microsoft.com/office/drawing/2014/main" id="{98F1BED1-5D08-4C89-AA68-C9EEB86A12A3}"/>
-              </a:ext>
-            </a:extLst>
-          </p:cNvPr>
-          <p:cNvSpPr/>
-          <p:nvPr/>
-        </p:nvSpPr>
-        <p:spPr>
-          <a:xfrm>
-            <a:off x="9713818" y="21847389"/>
-            <a:ext cx="926325" cy="540000"/>
-          </a:xfrm>
-          <a:prstGeom prst="rect">
-            <a:avLst/>
-          </a:prstGeom>
-          <a:solidFill>
-            <a:schemeClr val="accent2">
-              <a:lumMod val="75000"/>
-            </a:schemeClr>
-          </a:solidFill>
-          <a:ln w="19050"/>
-        </p:spPr>
-        <p:style>
-          <a:lnRef idx="2">
-            <a:schemeClr val="accent1"/>
-          </a:lnRef>
-          <a:fillRef idx="1">
-            <a:schemeClr val="lt1"/>
-          </a:fillRef>
-          <a:effectRef idx="0">
-            <a:schemeClr val="accent1"/>
-          </a:effectRef>
-          <a:fontRef idx="minor">
-            <a:schemeClr val="dk1"/>
-          </a:fontRef>
-        </p:style>
-        <p:txBody>
-          <a:bodyPr lIns="124733" tIns="62367" rIns="124733" bIns="62367" rtlCol="0" anchor="ctr"/>
-          <a:lstStyle/>
-          <a:p>
-            <a:pPr algn="ctr"/>
-            <a:r>
-              <a:rPr lang="ru-RU" sz="700" dirty="0"/>
-              <a:t>Продвижение ислама на Пиренейском полуострове</a:t>
-            </a:r>
-          </a:p>
-        </p:txBody>
-      </p:sp>
-      <p:cxnSp>
-        <p:nvCxnSpPr>
-          <p:cNvPr id="402" name="Соединительная линия уступом 620">
-            <a:extLst>
-              <a:ext uri="{FF2B5EF4-FFF2-40B4-BE49-F238E27FC236}">
-                <a16:creationId xmlns:a16="http://schemas.microsoft.com/office/drawing/2014/main" id="{2EF2ABD2-BA85-4697-AE78-CF7878ADA90D}"/>
-              </a:ext>
-            </a:extLst>
-          </p:cNvPr>
-          <p:cNvCxnSpPr>
-            <a:cxnSpLocks/>
-            <a:stCxn id="388" idx="2"/>
-            <a:endCxn id="393" idx="0"/>
-          </p:cNvCxnSpPr>
-          <p:nvPr/>
-        </p:nvCxnSpPr>
-        <p:spPr>
-          <a:xfrm rot="5400000">
-            <a:off x="10342954" y="19880368"/>
-            <a:ext cx="260819" cy="592761"/>
-          </a:xfrm>
-          <a:prstGeom prst="bentConnector3">
-            <a:avLst>
-              <a:gd name="adj1" fmla="val 50000"/>
-            </a:avLst>
-          </a:prstGeom>
-          <a:ln w="19050">
-            <a:tailEnd type="arrow"/>
-          </a:ln>
-        </p:spPr>
-        <p:style>
-          <a:lnRef idx="1">
-            <a:schemeClr val="accent1"/>
-          </a:lnRef>
-          <a:fillRef idx="0">
-            <a:schemeClr val="accent1"/>
-          </a:fillRef>
-          <a:effectRef idx="0">
-            <a:schemeClr val="accent1"/>
-          </a:effectRef>
-          <a:fontRef idx="minor">
-            <a:schemeClr val="tx1"/>
-          </a:fontRef>
-        </p:style>
-      </p:cxnSp>
-      <p:cxnSp>
-        <p:nvCxnSpPr>
-          <p:cNvPr id="404" name="Соединительная линия уступом 620">
-            <a:extLst>
-              <a:ext uri="{FF2B5EF4-FFF2-40B4-BE49-F238E27FC236}">
-                <a16:creationId xmlns:a16="http://schemas.microsoft.com/office/drawing/2014/main" id="{CA823A6B-39CF-47ED-A88F-0C536E2E29A6}"/>
-              </a:ext>
-            </a:extLst>
-          </p:cNvPr>
-          <p:cNvCxnSpPr>
-            <a:cxnSpLocks/>
-            <a:stCxn id="388" idx="2"/>
-            <a:endCxn id="391" idx="0"/>
-          </p:cNvCxnSpPr>
-          <p:nvPr/>
-        </p:nvCxnSpPr>
-        <p:spPr>
-          <a:xfrm rot="16200000" flipH="1">
-            <a:off x="10938083" y="19877998"/>
-            <a:ext cx="260289" cy="596969"/>
-          </a:xfrm>
-          <a:prstGeom prst="bentConnector3">
-            <a:avLst>
-              <a:gd name="adj1" fmla="val 50000"/>
-            </a:avLst>
-          </a:prstGeom>
-          <a:ln w="19050">
-            <a:tailEnd type="arrow"/>
-          </a:ln>
-        </p:spPr>
-        <p:style>
-          <a:lnRef idx="1">
-            <a:schemeClr val="accent1"/>
-          </a:lnRef>
-          <a:fillRef idx="0">
-            <a:schemeClr val="accent1"/>
-          </a:fillRef>
-          <a:effectRef idx="0">
-            <a:schemeClr val="accent1"/>
-          </a:effectRef>
-          <a:fontRef idx="minor">
-            <a:schemeClr val="tx1"/>
-          </a:fontRef>
-        </p:style>
-      </p:cxnSp>
-      <p:cxnSp>
-        <p:nvCxnSpPr>
-          <p:cNvPr id="405" name="Соединительная линия уступом 620">
-            <a:extLst>
-              <a:ext uri="{FF2B5EF4-FFF2-40B4-BE49-F238E27FC236}">
-                <a16:creationId xmlns:a16="http://schemas.microsoft.com/office/drawing/2014/main" id="{8C529540-B4D6-4BB9-92AD-DEE61AFB1831}"/>
-              </a:ext>
-            </a:extLst>
-          </p:cNvPr>
-          <p:cNvCxnSpPr>
-            <a:cxnSpLocks/>
-            <a:stCxn id="388" idx="2"/>
-            <a:endCxn id="398" idx="0"/>
-          </p:cNvCxnSpPr>
-          <p:nvPr/>
-        </p:nvCxnSpPr>
-        <p:spPr>
-          <a:xfrm rot="5400000">
-            <a:off x="10274218" y="20541864"/>
-            <a:ext cx="991051" cy="1"/>
-          </a:xfrm>
-          <a:prstGeom prst="bentConnector3">
-            <a:avLst>
-              <a:gd name="adj1" fmla="val 50000"/>
-            </a:avLst>
-          </a:prstGeom>
-          <a:ln w="19050">
-            <a:tailEnd type="arrow"/>
-          </a:ln>
-        </p:spPr>
-        <p:style>
-          <a:lnRef idx="1">
-            <a:schemeClr val="accent1"/>
-          </a:lnRef>
-          <a:fillRef idx="0">
-            <a:schemeClr val="accent1"/>
-          </a:fillRef>
-          <a:effectRef idx="0">
-            <a:schemeClr val="accent1"/>
-          </a:effectRef>
-          <a:fontRef idx="minor">
-            <a:schemeClr val="tx1"/>
-          </a:fontRef>
-        </p:style>
-      </p:cxnSp>
-      <p:cxnSp>
-        <p:nvCxnSpPr>
-          <p:cNvPr id="407" name="Соединительная линия уступом 620">
-            <a:extLst>
-              <a:ext uri="{FF2B5EF4-FFF2-40B4-BE49-F238E27FC236}">
-                <a16:creationId xmlns:a16="http://schemas.microsoft.com/office/drawing/2014/main" id="{C222986D-1E4F-4588-B963-F7419387B849}"/>
-              </a:ext>
-            </a:extLst>
-          </p:cNvPr>
-          <p:cNvCxnSpPr>
-            <a:cxnSpLocks/>
-            <a:stCxn id="398" idx="2"/>
-            <a:endCxn id="401" idx="0"/>
-          </p:cNvCxnSpPr>
-          <p:nvPr/>
-        </p:nvCxnSpPr>
-        <p:spPr>
-          <a:xfrm rot="5400000">
-            <a:off x="10338363" y="21416009"/>
-            <a:ext cx="269999" cy="592761"/>
-          </a:xfrm>
-          <a:prstGeom prst="bentConnector3">
-            <a:avLst>
-              <a:gd name="adj1" fmla="val 50000"/>
-            </a:avLst>
-          </a:prstGeom>
-          <a:ln w="19050">
-            <a:tailEnd type="arrow"/>
-          </a:ln>
-        </p:spPr>
-        <p:style>
-          <a:lnRef idx="1">
-            <a:schemeClr val="accent1"/>
-          </a:lnRef>
-          <a:fillRef idx="0">
-            <a:schemeClr val="accent1"/>
-          </a:fillRef>
-          <a:effectRef idx="0">
-            <a:schemeClr val="accent1"/>
-          </a:effectRef>
-          <a:fontRef idx="minor">
-            <a:schemeClr val="tx1"/>
-          </a:fontRef>
-        </p:style>
-      </p:cxnSp>
-      <p:cxnSp>
-        <p:nvCxnSpPr>
-          <p:cNvPr id="408" name="Соединительная линия уступом 620">
-            <a:extLst>
-              <a:ext uri="{FF2B5EF4-FFF2-40B4-BE49-F238E27FC236}">
-                <a16:creationId xmlns:a16="http://schemas.microsoft.com/office/drawing/2014/main" id="{4C3C96C6-F2ED-4F21-9CE9-26F579EBDE06}"/>
-              </a:ext>
-            </a:extLst>
-          </p:cNvPr>
-          <p:cNvCxnSpPr>
-            <a:cxnSpLocks/>
-            <a:stCxn id="398" idx="2"/>
-            <a:endCxn id="399" idx="0"/>
-          </p:cNvCxnSpPr>
-          <p:nvPr/>
-        </p:nvCxnSpPr>
-        <p:spPr>
-          <a:xfrm rot="16200000" flipH="1">
-            <a:off x="10933227" y="21413904"/>
-            <a:ext cx="269998" cy="596969"/>
-          </a:xfrm>
-          <a:prstGeom prst="bentConnector3">
-            <a:avLst>
-              <a:gd name="adj1" fmla="val 50000"/>
-            </a:avLst>
-          </a:prstGeom>
-          <a:ln w="19050">
-            <a:tailEnd type="arrow"/>
           </a:ln>
         </p:spPr>
         <p:style>
@@ -17470,7 +16811,7 @@
         </p:nvCxnSpPr>
         <p:spPr>
           <a:xfrm rot="5400000">
-            <a:off x="7804011" y="22205326"/>
+            <a:off x="7682528" y="19006374"/>
             <a:ext cx="260709" cy="624840"/>
           </a:xfrm>
           <a:prstGeom prst="bentConnector3">
@@ -17515,7 +16856,7 @@
         </p:nvCxnSpPr>
         <p:spPr>
           <a:xfrm rot="16200000" flipH="1">
-            <a:off x="7182981" y="22209136"/>
+            <a:off x="7061498" y="19010184"/>
             <a:ext cx="260709" cy="617220"/>
           </a:xfrm>
           <a:prstGeom prst="bentConnector3">
@@ -17748,10 +17089,10 @@
       </p:cxnSp>
       <p:sp>
         <p:nvSpPr>
-          <p:cNvPr id="410" name="Прямоугольник 409">
-            <a:extLst>
-              <a:ext uri="{FF2B5EF4-FFF2-40B4-BE49-F238E27FC236}">
-                <a16:creationId xmlns:a16="http://schemas.microsoft.com/office/drawing/2014/main" id="{689FCD2C-74D8-4FA5-97DB-81ADE08D74B0}"/>
+          <p:cNvPr id="415" name="Прямоугольник 414">
+            <a:extLst>
+              <a:ext uri="{FF2B5EF4-FFF2-40B4-BE49-F238E27FC236}">
+                <a16:creationId xmlns:a16="http://schemas.microsoft.com/office/drawing/2014/main" id="{390C7082-3773-4977-8DB9-3D7B82584170}"/>
               </a:ext>
             </a:extLst>
           </p:cNvPr>
@@ -17760,60 +17101,7 @@
         </p:nvSpPr>
         <p:spPr>
           <a:xfrm>
-            <a:off x="10905838" y="17054874"/>
-            <a:ext cx="926325" cy="540000"/>
-          </a:xfrm>
-          <a:prstGeom prst="rect">
-            <a:avLst/>
-          </a:prstGeom>
-          <a:solidFill>
-            <a:schemeClr val="accent2">
-              <a:lumMod val="75000"/>
-            </a:schemeClr>
-          </a:solidFill>
-          <a:ln w="19050"/>
-        </p:spPr>
-        <p:style>
-          <a:lnRef idx="2">
-            <a:schemeClr val="accent1"/>
-          </a:lnRef>
-          <a:fillRef idx="1">
-            <a:schemeClr val="lt1"/>
-          </a:fillRef>
-          <a:effectRef idx="0">
-            <a:schemeClr val="accent1"/>
-          </a:effectRef>
-          <a:fontRef idx="minor">
-            <a:schemeClr val="dk1"/>
-          </a:fontRef>
-        </p:style>
-        <p:txBody>
-          <a:bodyPr lIns="124733" tIns="62367" rIns="124733" bIns="62367" rtlCol="0" anchor="ctr"/>
-          <a:lstStyle/>
-          <a:p>
-            <a:pPr algn="ctr"/>
-            <a:r>
-              <a:rPr lang="ru-RU" sz="700" dirty="0"/>
-              <a:t>Переворот Торреса</a:t>
-            </a:r>
-          </a:p>
-        </p:txBody>
-      </p:sp>
-      <p:sp>
-        <p:nvSpPr>
-          <p:cNvPr id="415" name="Прямоугольник 414">
-            <a:extLst>
-              <a:ext uri="{FF2B5EF4-FFF2-40B4-BE49-F238E27FC236}">
-                <a16:creationId xmlns:a16="http://schemas.microsoft.com/office/drawing/2014/main" id="{390C7082-3773-4977-8DB9-3D7B82584170}"/>
-              </a:ext>
-            </a:extLst>
-          </p:cNvPr>
-          <p:cNvSpPr/>
-          <p:nvPr/>
-        </p:nvSpPr>
-        <p:spPr>
-          <a:xfrm>
-            <a:off x="9660640" y="17057844"/>
+            <a:off x="10895420" y="24844586"/>
             <a:ext cx="926325" cy="540000"/>
           </a:xfrm>
           <a:prstGeom prst="rect">
@@ -17868,12 +17156,12 @@
         </p:nvCxnSpPr>
         <p:spPr>
           <a:xfrm rot="5400000">
-            <a:off x="10605204" y="16295544"/>
-            <a:ext cx="280899" cy="1243700"/>
+            <a:off x="11084519" y="24066894"/>
+            <a:ext cx="1051756" cy="503628"/>
           </a:xfrm>
           <a:prstGeom prst="bentConnector3">
             <a:avLst>
-              <a:gd name="adj1" fmla="val 50000"/>
+              <a:gd name="adj1" fmla="val 13485"/>
             </a:avLst>
           </a:prstGeom>
           <a:ln w="19050">
@@ -17907,239 +17195,13 @@
           <p:cNvCxnSpPr>
             <a:cxnSpLocks/>
             <a:stCxn id="69" idx="2"/>
-            <a:endCxn id="410" idx="0"/>
           </p:cNvCxnSpPr>
           <p:nvPr/>
         </p:nvCxnSpPr>
         <p:spPr>
           <a:xfrm rot="16200000" flipH="1">
-            <a:off x="11229288" y="16915160"/>
+            <a:off x="11723996" y="23931045"/>
             <a:ext cx="277929" cy="1498"/>
-          </a:xfrm>
-          <a:prstGeom prst="bentConnector3">
-            <a:avLst>
-              <a:gd name="adj1" fmla="val 50000"/>
-            </a:avLst>
-          </a:prstGeom>
-          <a:ln w="19050">
-            <a:tailEnd type="arrow"/>
-          </a:ln>
-        </p:spPr>
-        <p:style>
-          <a:lnRef idx="1">
-            <a:schemeClr val="accent1"/>
-          </a:lnRef>
-          <a:fillRef idx="0">
-            <a:schemeClr val="accent1"/>
-          </a:fillRef>
-          <a:effectRef idx="0">
-            <a:schemeClr val="accent1"/>
-          </a:effectRef>
-          <a:fontRef idx="minor">
-            <a:schemeClr val="tx1"/>
-          </a:fontRef>
-        </p:style>
-      </p:cxnSp>
-      <p:cxnSp>
-        <p:nvCxnSpPr>
-          <p:cNvPr id="428" name="Соединительная линия уступом 620">
-            <a:extLst>
-              <a:ext uri="{FF2B5EF4-FFF2-40B4-BE49-F238E27FC236}">
-                <a16:creationId xmlns:a16="http://schemas.microsoft.com/office/drawing/2014/main" id="{9C6ECDC0-C4A4-41DB-A001-F0751FF81343}"/>
-              </a:ext>
-            </a:extLst>
-          </p:cNvPr>
-          <p:cNvCxnSpPr>
-            <a:cxnSpLocks/>
-            <a:stCxn id="415" idx="2"/>
-            <a:endCxn id="388" idx="0"/>
-          </p:cNvCxnSpPr>
-          <p:nvPr/>
-        </p:nvCxnSpPr>
-        <p:spPr>
-          <a:xfrm rot="16200000" flipH="1">
-            <a:off x="9492526" y="18229121"/>
-            <a:ext cx="1908495" cy="645940"/>
-          </a:xfrm>
-          <a:prstGeom prst="bentConnector3">
-            <a:avLst>
-              <a:gd name="adj1" fmla="val 7278"/>
-            </a:avLst>
-          </a:prstGeom>
-          <a:ln w="19050">
-            <a:tailEnd type="arrow"/>
-          </a:ln>
-        </p:spPr>
-        <p:style>
-          <a:lnRef idx="1">
-            <a:schemeClr val="accent1"/>
-          </a:lnRef>
-          <a:fillRef idx="0">
-            <a:schemeClr val="accent1"/>
-          </a:fillRef>
-          <a:effectRef idx="0">
-            <a:schemeClr val="accent1"/>
-          </a:effectRef>
-          <a:fontRef idx="minor">
-            <a:schemeClr val="tx1"/>
-          </a:fontRef>
-        </p:style>
-      </p:cxnSp>
-      <p:cxnSp>
-        <p:nvCxnSpPr>
-          <p:cNvPr id="429" name="Соединительная линия уступом 620">
-            <a:extLst>
-              <a:ext uri="{FF2B5EF4-FFF2-40B4-BE49-F238E27FC236}">
-                <a16:creationId xmlns:a16="http://schemas.microsoft.com/office/drawing/2014/main" id="{B2E45BDC-02B0-4EC0-A935-4E6F3506B92D}"/>
-              </a:ext>
-            </a:extLst>
-          </p:cNvPr>
-          <p:cNvCxnSpPr>
-            <a:cxnSpLocks/>
-            <a:stCxn id="410" idx="2"/>
-            <a:endCxn id="438" idx="0"/>
-          </p:cNvCxnSpPr>
-          <p:nvPr/>
-        </p:nvCxnSpPr>
-        <p:spPr>
-          <a:xfrm rot="16200000" flipH="1">
-            <a:off x="11852407" y="17111468"/>
-            <a:ext cx="277493" cy="1244304"/>
-          </a:xfrm>
-          <a:prstGeom prst="bentConnector3">
-            <a:avLst>
-              <a:gd name="adj1" fmla="val 50000"/>
-            </a:avLst>
-          </a:prstGeom>
-          <a:ln w="19050">
-            <a:tailEnd type="arrow"/>
-          </a:ln>
-        </p:spPr>
-        <p:style>
-          <a:lnRef idx="1">
-            <a:schemeClr val="accent1"/>
-          </a:lnRef>
-          <a:fillRef idx="0">
-            <a:schemeClr val="accent1"/>
-          </a:fillRef>
-          <a:effectRef idx="0">
-            <a:schemeClr val="accent1"/>
-          </a:effectRef>
-          <a:fontRef idx="minor">
-            <a:schemeClr val="tx1"/>
-          </a:fontRef>
-        </p:style>
-      </p:cxnSp>
-      <p:cxnSp>
-        <p:nvCxnSpPr>
-          <p:cNvPr id="430" name="Соединительная линия уступом 620">
-            <a:extLst>
-              <a:ext uri="{FF2B5EF4-FFF2-40B4-BE49-F238E27FC236}">
-                <a16:creationId xmlns:a16="http://schemas.microsoft.com/office/drawing/2014/main" id="{A388DD1F-4756-4F8F-9216-122006CB833A}"/>
-              </a:ext>
-            </a:extLst>
-          </p:cNvPr>
-          <p:cNvCxnSpPr>
-            <a:cxnSpLocks/>
-            <a:stCxn id="410" idx="2"/>
-            <a:endCxn id="247" idx="0"/>
-          </p:cNvCxnSpPr>
-          <p:nvPr/>
-        </p:nvCxnSpPr>
-        <p:spPr>
-          <a:xfrm rot="5400000">
-            <a:off x="11231455" y="17730132"/>
-            <a:ext cx="272804" cy="2288"/>
-          </a:xfrm>
-          <a:prstGeom prst="bentConnector3">
-            <a:avLst>
-              <a:gd name="adj1" fmla="val 50000"/>
-            </a:avLst>
-          </a:prstGeom>
-          <a:ln w="19050">
-            <a:tailEnd type="arrow"/>
-          </a:ln>
-        </p:spPr>
-        <p:style>
-          <a:lnRef idx="1">
-            <a:schemeClr val="accent1"/>
-          </a:lnRef>
-          <a:fillRef idx="0">
-            <a:schemeClr val="accent1"/>
-          </a:fillRef>
-          <a:effectRef idx="0">
-            <a:schemeClr val="accent1"/>
-          </a:effectRef>
-          <a:fontRef idx="minor">
-            <a:schemeClr val="tx1"/>
-          </a:fontRef>
-        </p:style>
-      </p:cxnSp>
-      <p:cxnSp>
-        <p:nvCxnSpPr>
-          <p:cNvPr id="431" name="Соединительная линия уступом 620">
-            <a:extLst>
-              <a:ext uri="{FF2B5EF4-FFF2-40B4-BE49-F238E27FC236}">
-                <a16:creationId xmlns:a16="http://schemas.microsoft.com/office/drawing/2014/main" id="{467A3C7A-10BB-4FE6-8683-12B1DB01A00A}"/>
-              </a:ext>
-            </a:extLst>
-          </p:cNvPr>
-          <p:cNvCxnSpPr>
-            <a:cxnSpLocks/>
-            <a:stCxn id="247" idx="2"/>
-            <a:endCxn id="244" idx="0"/>
-          </p:cNvCxnSpPr>
-          <p:nvPr/>
-        </p:nvCxnSpPr>
-        <p:spPr>
-          <a:xfrm rot="5400000">
-            <a:off x="11231796" y="18542595"/>
-            <a:ext cx="269834" cy="1"/>
-          </a:xfrm>
-          <a:prstGeom prst="bentConnector3">
-            <a:avLst>
-              <a:gd name="adj1" fmla="val 50000"/>
-            </a:avLst>
-          </a:prstGeom>
-          <a:ln w="19050">
-            <a:tailEnd type="arrow"/>
-          </a:ln>
-        </p:spPr>
-        <p:style>
-          <a:lnRef idx="1">
-            <a:schemeClr val="accent1"/>
-          </a:lnRef>
-          <a:fillRef idx="0">
-            <a:schemeClr val="accent1"/>
-          </a:fillRef>
-          <a:effectRef idx="0">
-            <a:schemeClr val="accent1"/>
-          </a:effectRef>
-          <a:fontRef idx="minor">
-            <a:schemeClr val="tx1"/>
-          </a:fontRef>
-        </p:style>
-      </p:cxnSp>
-      <p:cxnSp>
-        <p:nvCxnSpPr>
-          <p:cNvPr id="432" name="Соединительная линия уступом 620">
-            <a:extLst>
-              <a:ext uri="{FF2B5EF4-FFF2-40B4-BE49-F238E27FC236}">
-                <a16:creationId xmlns:a16="http://schemas.microsoft.com/office/drawing/2014/main" id="{2425C51C-549D-421C-BF11-B0F2EB50F05A}"/>
-              </a:ext>
-            </a:extLst>
-          </p:cNvPr>
-          <p:cNvCxnSpPr>
-            <a:cxnSpLocks/>
-            <a:stCxn id="244" idx="2"/>
-            <a:endCxn id="388" idx="0"/>
-          </p:cNvCxnSpPr>
-          <p:nvPr/>
-        </p:nvCxnSpPr>
-        <p:spPr>
-          <a:xfrm rot="5400000">
-            <a:off x="10923815" y="19063441"/>
-            <a:ext cx="288827" cy="596969"/>
           </a:xfrm>
           <a:prstGeom prst="bentConnector3">
             <a:avLst>
@@ -18221,10 +17283,10 @@
       </p:sp>
       <p:sp>
         <p:nvSpPr>
-          <p:cNvPr id="437" name="Прямоугольник 436">
-            <a:extLst>
-              <a:ext uri="{FF2B5EF4-FFF2-40B4-BE49-F238E27FC236}">
-                <a16:creationId xmlns:a16="http://schemas.microsoft.com/office/drawing/2014/main" id="{6739033B-01BE-4768-81A4-8CA2BD9F8CE9}"/>
+          <p:cNvPr id="438" name="Прямоугольник 437">
+            <a:extLst>
+              <a:ext uri="{FF2B5EF4-FFF2-40B4-BE49-F238E27FC236}">
+                <a16:creationId xmlns:a16="http://schemas.microsoft.com/office/drawing/2014/main" id="{6E327805-D803-4557-BD42-AA00A5D18919}"/>
               </a:ext>
             </a:extLst>
           </p:cNvPr>
@@ -18233,17 +17295,13 @@
         </p:nvSpPr>
         <p:spPr>
           <a:xfrm>
-            <a:off x="9662042" y="17878424"/>
+            <a:off x="9707225" y="24070758"/>
             <a:ext cx="926325" cy="540000"/>
           </a:xfrm>
           <a:prstGeom prst="rect">
             <a:avLst/>
           </a:prstGeom>
-          <a:solidFill>
-            <a:schemeClr val="accent2">
-              <a:lumMod val="75000"/>
-            </a:schemeClr>
-          </a:solidFill>
+          <a:noFill/>
           <a:ln w="19050"/>
         </p:spPr>
         <p:style>
@@ -18267,18 +17325,17 @@
             <a:pPr algn="ctr"/>
             <a:r>
               <a:rPr lang="ru-RU" sz="700" dirty="0"/>
-              <a:t>Союз с Германией</a:t>
-            </a:r>
-            <a:endParaRPr lang="ru-RU" sz="200" dirty="0"/>
-          </a:p>
-        </p:txBody>
-      </p:sp>
-      <p:sp>
-        <p:nvSpPr>
-          <p:cNvPr id="438" name="Прямоугольник 437">
-            <a:extLst>
-              <a:ext uri="{FF2B5EF4-FFF2-40B4-BE49-F238E27FC236}">
-                <a16:creationId xmlns:a16="http://schemas.microsoft.com/office/drawing/2014/main" id="{6E327805-D803-4557-BD42-AA00A5D18919}"/>
+              <a:t>Заручиться поддержкой муфтия Иерусалима</a:t>
+            </a:r>
+          </a:p>
+        </p:txBody>
+      </p:sp>
+      <p:sp>
+        <p:nvSpPr>
+          <p:cNvPr id="445" name="Прямоугольник 444">
+            <a:extLst>
+              <a:ext uri="{FF2B5EF4-FFF2-40B4-BE49-F238E27FC236}">
+                <a16:creationId xmlns:a16="http://schemas.microsoft.com/office/drawing/2014/main" id="{394C88E2-CFA8-4475-85DC-FEAC5A3AFFD9}"/>
               </a:ext>
             </a:extLst>
           </p:cNvPr>
@@ -18287,17 +17344,13 @@
         </p:nvSpPr>
         <p:spPr>
           <a:xfrm>
-            <a:off x="12150142" y="17872367"/>
+            <a:off x="9707450" y="24844586"/>
             <a:ext cx="926325" cy="540000"/>
           </a:xfrm>
           <a:prstGeom prst="rect">
             <a:avLst/>
           </a:prstGeom>
-          <a:solidFill>
-            <a:schemeClr val="accent2">
-              <a:lumMod val="75000"/>
-            </a:schemeClr>
-          </a:solidFill>
+          <a:noFill/>
           <a:ln w="19050"/>
         </p:spPr>
         <p:style>
@@ -18321,253 +17374,11 @@
             <a:pPr algn="ctr"/>
             <a:r>
               <a:rPr lang="ru-RU" sz="700" dirty="0"/>
-              <a:t>Заручиться поддержкой муфтия Иерусалима</a:t>
-            </a:r>
-          </a:p>
-        </p:txBody>
-      </p:sp>
-      <p:sp>
-        <p:nvSpPr>
-          <p:cNvPr id="439" name="Прямоугольник 438">
-            <a:extLst>
-              <a:ext uri="{FF2B5EF4-FFF2-40B4-BE49-F238E27FC236}">
-                <a16:creationId xmlns:a16="http://schemas.microsoft.com/office/drawing/2014/main" id="{AFD50110-D9C3-4DE1-805E-DD1F4D0E74D7}"/>
-              </a:ext>
-            </a:extLst>
-          </p:cNvPr>
-          <p:cNvSpPr/>
-          <p:nvPr/>
-        </p:nvSpPr>
-        <p:spPr>
-          <a:xfrm>
-            <a:off x="9660640" y="18694855"/>
-            <a:ext cx="926325" cy="540000"/>
-          </a:xfrm>
-          <a:prstGeom prst="rect">
-            <a:avLst/>
-          </a:prstGeom>
-          <a:solidFill>
-            <a:schemeClr val="accent2">
-              <a:lumMod val="75000"/>
-            </a:schemeClr>
-          </a:solidFill>
-          <a:ln w="19050"/>
-        </p:spPr>
-        <p:style>
-          <a:lnRef idx="2">
-            <a:schemeClr val="accent1"/>
-          </a:lnRef>
-          <a:fillRef idx="1">
-            <a:schemeClr val="lt1"/>
-          </a:fillRef>
-          <a:effectRef idx="0">
-            <a:schemeClr val="accent1"/>
-          </a:effectRef>
-          <a:fontRef idx="minor">
-            <a:schemeClr val="dk1"/>
-          </a:fontRef>
-        </p:style>
-        <p:txBody>
-          <a:bodyPr lIns="124733" tIns="62367" rIns="124733" bIns="62367" rtlCol="0" anchor="ctr"/>
-          <a:lstStyle/>
-          <a:p>
-            <a:pPr algn="ctr"/>
-            <a:r>
-              <a:rPr lang="ru-RU" sz="700" dirty="0"/>
-              <a:t>Изгнать марокканских евреев</a:t>
-            </a:r>
-            <a:endParaRPr lang="ru-RU" sz="200" dirty="0"/>
-          </a:p>
-        </p:txBody>
-      </p:sp>
-      <p:cxnSp>
-        <p:nvCxnSpPr>
-          <p:cNvPr id="440" name="Соединительная линия уступом 620">
-            <a:extLst>
-              <a:ext uri="{FF2B5EF4-FFF2-40B4-BE49-F238E27FC236}">
-                <a16:creationId xmlns:a16="http://schemas.microsoft.com/office/drawing/2014/main" id="{0F9320D7-0E9A-4E2F-A90D-D650D187FDEF}"/>
-              </a:ext>
-            </a:extLst>
-          </p:cNvPr>
-          <p:cNvCxnSpPr>
-            <a:cxnSpLocks/>
-            <a:stCxn id="410" idx="2"/>
-            <a:endCxn id="437" idx="0"/>
-          </p:cNvCxnSpPr>
-          <p:nvPr/>
-        </p:nvCxnSpPr>
-        <p:spPr>
-          <a:xfrm rot="5400000">
-            <a:off x="10605328" y="17114751"/>
-            <a:ext cx="283550" cy="1243796"/>
-          </a:xfrm>
-          <a:prstGeom prst="bentConnector3">
-            <a:avLst>
-              <a:gd name="adj1" fmla="val 50000"/>
-            </a:avLst>
-          </a:prstGeom>
-          <a:ln w="19050">
-            <a:tailEnd type="arrow"/>
-          </a:ln>
-        </p:spPr>
-        <p:style>
-          <a:lnRef idx="1">
-            <a:schemeClr val="accent1"/>
-          </a:lnRef>
-          <a:fillRef idx="0">
-            <a:schemeClr val="accent1"/>
-          </a:fillRef>
-          <a:effectRef idx="0">
-            <a:schemeClr val="accent1"/>
-          </a:effectRef>
-          <a:fontRef idx="minor">
-            <a:schemeClr val="tx1"/>
-          </a:fontRef>
-        </p:style>
-      </p:cxnSp>
-      <p:cxnSp>
-        <p:nvCxnSpPr>
-          <p:cNvPr id="441" name="Соединительная линия уступом 620">
-            <a:extLst>
-              <a:ext uri="{FF2B5EF4-FFF2-40B4-BE49-F238E27FC236}">
-                <a16:creationId xmlns:a16="http://schemas.microsoft.com/office/drawing/2014/main" id="{289F03FB-A37E-407B-85A7-A531665E0698}"/>
-              </a:ext>
-            </a:extLst>
-          </p:cNvPr>
-          <p:cNvCxnSpPr>
-            <a:cxnSpLocks/>
-            <a:stCxn id="437" idx="2"/>
-            <a:endCxn id="439" idx="0"/>
-          </p:cNvCxnSpPr>
-          <p:nvPr/>
-        </p:nvCxnSpPr>
-        <p:spPr>
-          <a:xfrm rot="5400000">
-            <a:off x="9986289" y="18555938"/>
-            <a:ext cx="276431" cy="1402"/>
-          </a:xfrm>
-          <a:prstGeom prst="bentConnector3">
-            <a:avLst>
-              <a:gd name="adj1" fmla="val 50000"/>
-            </a:avLst>
-          </a:prstGeom>
-          <a:ln w="19050">
-            <a:tailEnd type="arrow"/>
-          </a:ln>
-        </p:spPr>
-        <p:style>
-          <a:lnRef idx="1">
-            <a:schemeClr val="accent1"/>
-          </a:lnRef>
-          <a:fillRef idx="0">
-            <a:schemeClr val="accent1"/>
-          </a:fillRef>
-          <a:effectRef idx="0">
-            <a:schemeClr val="accent1"/>
-          </a:effectRef>
-          <a:fontRef idx="minor">
-            <a:schemeClr val="tx1"/>
-          </a:fontRef>
-        </p:style>
-      </p:cxnSp>
-      <p:sp>
-        <p:nvSpPr>
-          <p:cNvPr id="445" name="Прямоугольник 444">
-            <a:extLst>
-              <a:ext uri="{FF2B5EF4-FFF2-40B4-BE49-F238E27FC236}">
-                <a16:creationId xmlns:a16="http://schemas.microsoft.com/office/drawing/2014/main" id="{394C88E2-CFA8-4475-85DC-FEAC5A3AFFD9}"/>
-              </a:ext>
-            </a:extLst>
-          </p:cNvPr>
-          <p:cNvSpPr/>
-          <p:nvPr/>
-        </p:nvSpPr>
-        <p:spPr>
-          <a:xfrm>
-            <a:off x="12150143" y="18677511"/>
-            <a:ext cx="926325" cy="540000"/>
-          </a:xfrm>
-          <a:prstGeom prst="rect">
-            <a:avLst/>
-          </a:prstGeom>
-          <a:solidFill>
-            <a:schemeClr val="accent2">
-              <a:lumMod val="75000"/>
-            </a:schemeClr>
-          </a:solidFill>
-          <a:ln w="19050"/>
-        </p:spPr>
-        <p:style>
-          <a:lnRef idx="2">
-            <a:schemeClr val="accent1"/>
-          </a:lnRef>
-          <a:fillRef idx="1">
-            <a:schemeClr val="lt1"/>
-          </a:fillRef>
-          <a:effectRef idx="0">
-            <a:schemeClr val="accent1"/>
-          </a:effectRef>
-          <a:fontRef idx="minor">
-            <a:schemeClr val="dk1"/>
-          </a:fontRef>
-        </p:style>
-        <p:txBody>
-          <a:bodyPr lIns="124733" tIns="62367" rIns="124733" bIns="62367" rtlCol="0" anchor="ctr"/>
-          <a:lstStyle/>
-          <a:p>
-            <a:pPr algn="ctr"/>
-            <a:r>
-              <a:rPr lang="ru-RU" sz="700" dirty="0"/>
               <a:t>Заручиться поддержкой королей</a:t>
             </a:r>
           </a:p>
         </p:txBody>
       </p:sp>
-      <p:cxnSp>
-        <p:nvCxnSpPr>
-          <p:cNvPr id="446" name="Соединительная линия уступом 620">
-            <a:extLst>
-              <a:ext uri="{FF2B5EF4-FFF2-40B4-BE49-F238E27FC236}">
-                <a16:creationId xmlns:a16="http://schemas.microsoft.com/office/drawing/2014/main" id="{BAF22A48-0445-4910-9615-07B9C95F33BF}"/>
-              </a:ext>
-            </a:extLst>
-          </p:cNvPr>
-          <p:cNvCxnSpPr>
-            <a:cxnSpLocks/>
-            <a:stCxn id="410" idx="2"/>
-            <a:endCxn id="286" idx="0"/>
-          </p:cNvCxnSpPr>
-          <p:nvPr/>
-        </p:nvCxnSpPr>
-        <p:spPr>
-          <a:xfrm rot="16200000" flipH="1">
-            <a:off x="10716079" y="18247795"/>
-            <a:ext cx="1912755" cy="606911"/>
-          </a:xfrm>
-          <a:prstGeom prst="bentConnector3">
-            <a:avLst>
-              <a:gd name="adj1" fmla="val 7294"/>
-            </a:avLst>
-          </a:prstGeom>
-          <a:ln w="19050">
-            <a:tailEnd type="arrow"/>
-          </a:ln>
-        </p:spPr>
-        <p:style>
-          <a:lnRef idx="1">
-            <a:schemeClr val="accent1"/>
-          </a:lnRef>
-          <a:fillRef idx="0">
-            <a:schemeClr val="accent1"/>
-          </a:fillRef>
-          <a:effectRef idx="0">
-            <a:schemeClr val="accent1"/>
-          </a:effectRef>
-          <a:fontRef idx="minor">
-            <a:schemeClr val="tx1"/>
-          </a:fontRef>
-        </p:style>
-      </p:cxnSp>
       <p:cxnSp>
         <p:nvCxnSpPr>
           <p:cNvPr id="450" name="Соединительная линия уступом 620">
@@ -18586,156 +17397,8 @@
         </p:nvCxnSpPr>
         <p:spPr>
           <a:xfrm rot="16200000" flipH="1">
-            <a:off x="12480733" y="18544938"/>
-            <a:ext cx="265144" cy="1"/>
-          </a:xfrm>
-          <a:prstGeom prst="bentConnector3">
-            <a:avLst>
-              <a:gd name="adj1" fmla="val 50000"/>
-            </a:avLst>
-          </a:prstGeom>
-          <a:ln w="19050">
-            <a:tailEnd type="arrow"/>
-          </a:ln>
-        </p:spPr>
-        <p:style>
-          <a:lnRef idx="1">
-            <a:schemeClr val="accent1"/>
-          </a:lnRef>
-          <a:fillRef idx="0">
-            <a:schemeClr val="accent1"/>
-          </a:fillRef>
-          <a:effectRef idx="0">
-            <a:schemeClr val="accent1"/>
-          </a:effectRef>
-          <a:fontRef idx="minor">
-            <a:schemeClr val="tx1"/>
-          </a:fontRef>
-        </p:style>
-      </p:cxnSp>
-      <p:sp>
-        <p:nvSpPr>
-          <p:cNvPr id="524" name="Прямоугольник 523">
-            <a:extLst>
-              <a:ext uri="{FF2B5EF4-FFF2-40B4-BE49-F238E27FC236}">
-                <a16:creationId xmlns:a16="http://schemas.microsoft.com/office/drawing/2014/main" id="{38845350-9EFD-4225-BF8E-4B28D856BAB0}"/>
-              </a:ext>
-            </a:extLst>
-          </p:cNvPr>
-          <p:cNvSpPr/>
-          <p:nvPr/>
-        </p:nvSpPr>
-        <p:spPr>
-          <a:xfrm>
-            <a:off x="10310814" y="22648101"/>
-            <a:ext cx="926325" cy="540000"/>
-          </a:xfrm>
-          <a:prstGeom prst="rect">
-            <a:avLst/>
-          </a:prstGeom>
-          <a:solidFill>
-            <a:schemeClr val="accent2">
-              <a:lumMod val="75000"/>
-            </a:schemeClr>
-          </a:solidFill>
-          <a:ln w="19050"/>
-        </p:spPr>
-        <p:style>
-          <a:lnRef idx="2">
-            <a:schemeClr val="accent1"/>
-          </a:lnRef>
-          <a:fillRef idx="1">
-            <a:schemeClr val="lt1"/>
-          </a:fillRef>
-          <a:effectRef idx="0">
-            <a:schemeClr val="accent1"/>
-          </a:effectRef>
-          <a:fontRef idx="minor">
-            <a:schemeClr val="dk1"/>
-          </a:fontRef>
-        </p:style>
-        <p:txBody>
-          <a:bodyPr lIns="124733" tIns="62367" rIns="124733" bIns="62367" rtlCol="0" anchor="ctr"/>
-          <a:lstStyle/>
-          <a:p>
-            <a:pPr algn="ctr"/>
-            <a:r>
-              <a:rPr lang="ru-RU" sz="700" dirty="0"/>
-              <a:t>Объявить о воссоздании Аль-</a:t>
-            </a:r>
-            <a:r>
-              <a:rPr lang="ru-RU" sz="700" dirty="0" err="1"/>
-              <a:t>Андулуса</a:t>
-            </a:r>
-            <a:endParaRPr lang="ru-RU" sz="700" dirty="0"/>
-          </a:p>
-        </p:txBody>
-      </p:sp>
-      <p:cxnSp>
-        <p:nvCxnSpPr>
-          <p:cNvPr id="529" name="Соединительная линия уступом 620">
-            <a:extLst>
-              <a:ext uri="{FF2B5EF4-FFF2-40B4-BE49-F238E27FC236}">
-                <a16:creationId xmlns:a16="http://schemas.microsoft.com/office/drawing/2014/main" id="{BD31974B-8C00-4D1B-8404-16ABC0BD6776}"/>
-              </a:ext>
-            </a:extLst>
-          </p:cNvPr>
-          <p:cNvCxnSpPr>
-            <a:cxnSpLocks/>
-            <a:stCxn id="399" idx="2"/>
-            <a:endCxn id="524" idx="0"/>
-          </p:cNvCxnSpPr>
-          <p:nvPr/>
-        </p:nvCxnSpPr>
-        <p:spPr>
-          <a:xfrm rot="5400000">
-            <a:off x="10939988" y="22221377"/>
-            <a:ext cx="260713" cy="592734"/>
-          </a:xfrm>
-          <a:prstGeom prst="bentConnector3">
-            <a:avLst>
-              <a:gd name="adj1" fmla="val 50000"/>
-            </a:avLst>
-          </a:prstGeom>
-          <a:ln w="19050">
-            <a:tailEnd type="arrow"/>
-          </a:ln>
-        </p:spPr>
-        <p:style>
-          <a:lnRef idx="1">
-            <a:schemeClr val="accent1"/>
-          </a:lnRef>
-          <a:fillRef idx="0">
-            <a:schemeClr val="accent1"/>
-          </a:fillRef>
-          <a:effectRef idx="0">
-            <a:schemeClr val="accent1"/>
-          </a:effectRef>
-          <a:fontRef idx="minor">
-            <a:schemeClr val="tx1"/>
-          </a:fontRef>
-        </p:style>
-      </p:cxnSp>
-      <p:cxnSp>
-        <p:nvCxnSpPr>
-          <p:cNvPr id="532" name="Соединительная линия уступом 620">
-            <a:extLst>
-              <a:ext uri="{FF2B5EF4-FFF2-40B4-BE49-F238E27FC236}">
-                <a16:creationId xmlns:a16="http://schemas.microsoft.com/office/drawing/2014/main" id="{062A1D1C-4E68-49B0-89B3-9869C6922BC4}"/>
-              </a:ext>
-            </a:extLst>
-          </p:cNvPr>
-          <p:cNvCxnSpPr>
-            <a:cxnSpLocks/>
-            <a:stCxn id="401" idx="2"/>
-            <a:endCxn id="524" idx="0"/>
-          </p:cNvCxnSpPr>
-          <p:nvPr/>
-        </p:nvCxnSpPr>
-        <p:spPr>
-          <a:xfrm rot="16200000" flipH="1">
-            <a:off x="10345123" y="22219247"/>
-            <a:ext cx="260712" cy="596996"/>
+            <a:off x="10053586" y="24727559"/>
+            <a:ext cx="233828" cy="225"/>
           </a:xfrm>
           <a:prstGeom prst="bentConnector3">
             <a:avLst>
@@ -24609,8 +23272,8 @@
         </p:nvCxnSpPr>
         <p:spPr>
           <a:xfrm rot="5400000">
-            <a:off x="9772615" y="14954728"/>
-            <a:ext cx="337947" cy="613400"/>
+            <a:off x="10288659" y="21991949"/>
+            <a:ext cx="337947" cy="570728"/>
           </a:xfrm>
           <a:prstGeom prst="bentConnector3">
             <a:avLst>
@@ -24654,8 +23317,8 @@
         </p:nvCxnSpPr>
         <p:spPr>
           <a:xfrm rot="16200000" flipH="1">
-            <a:off x="10408445" y="14932298"/>
-            <a:ext cx="337947" cy="658260"/>
+            <a:off x="10881817" y="21969519"/>
+            <a:ext cx="337947" cy="615588"/>
           </a:xfrm>
           <a:prstGeom prst="bentConnector3">
             <a:avLst>
@@ -24699,7 +23362,7 @@
         </p:nvCxnSpPr>
         <p:spPr>
           <a:xfrm rot="5400000">
-            <a:off x="6181998" y="14660937"/>
+            <a:off x="6676706" y="21676822"/>
             <a:ext cx="337947" cy="1200982"/>
           </a:xfrm>
           <a:prstGeom prst="bentConnector3">
@@ -24744,7 +23407,7 @@
         </p:nvCxnSpPr>
         <p:spPr>
           <a:xfrm rot="16200000" flipH="1">
-            <a:off x="7405892" y="14638024"/>
+            <a:off x="7900600" y="21653909"/>
             <a:ext cx="333865" cy="1242725"/>
           </a:xfrm>
           <a:prstGeom prst="bentConnector3">
@@ -24785,7 +23448,7 @@
         </p:nvSpPr>
         <p:spPr>
           <a:xfrm>
-            <a:off x="6484428" y="16231112"/>
+            <a:off x="6979136" y="23246997"/>
             <a:ext cx="926325" cy="540000"/>
           </a:xfrm>
           <a:prstGeom prst="rect">
@@ -24844,7 +23507,7 @@
         </p:nvCxnSpPr>
         <p:spPr>
           <a:xfrm rot="5400000">
-            <a:off x="7438493" y="15475418"/>
+            <a:off x="7933201" y="22491303"/>
             <a:ext cx="264792" cy="1246596"/>
           </a:xfrm>
           <a:prstGeom prst="bentConnector3">
@@ -24889,7 +23552,7 @@
         </p:nvCxnSpPr>
         <p:spPr>
           <a:xfrm rot="16200000" flipH="1">
-            <a:off x="6218680" y="15502201"/>
+            <a:off x="6713388" y="22518086"/>
             <a:ext cx="260710" cy="1197111"/>
           </a:xfrm>
           <a:prstGeom prst="bentConnector3">
@@ -24930,7 +23593,7 @@
         </p:nvSpPr>
         <p:spPr>
           <a:xfrm>
-            <a:off x="5286829" y="17057844"/>
+            <a:off x="5781537" y="24073729"/>
             <a:ext cx="926325" cy="540000"/>
           </a:xfrm>
           <a:prstGeom prst="rect">
@@ -24989,7 +23652,7 @@
         </p:nvCxnSpPr>
         <p:spPr>
           <a:xfrm rot="5400000">
-            <a:off x="5206515" y="16513879"/>
+            <a:off x="5701223" y="23529764"/>
             <a:ext cx="1087442" cy="488"/>
           </a:xfrm>
           <a:prstGeom prst="bentConnector3">
@@ -25034,7 +23697,7 @@
         </p:nvCxnSpPr>
         <p:spPr>
           <a:xfrm rot="5400000">
-            <a:off x="7803694" y="19002766"/>
+            <a:off x="7682211" y="15803814"/>
             <a:ext cx="261343" cy="624841"/>
           </a:xfrm>
           <a:prstGeom prst="bentConnector3">
@@ -25079,7 +23742,7 @@
         </p:nvCxnSpPr>
         <p:spPr>
           <a:xfrm rot="16200000" flipH="1">
-            <a:off x="8112617" y="20295903"/>
+            <a:off x="7991134" y="17096951"/>
             <a:ext cx="260714" cy="1242058"/>
           </a:xfrm>
           <a:prstGeom prst="bentConnector3">
@@ -25394,516 +24057,26 @@
           </a:fontRef>
         </p:style>
       </p:cxnSp>
-      <p:sp>
-        <p:nvSpPr>
-          <p:cNvPr id="520" name="Прямоугольник 519">
-            <a:extLst>
-              <a:ext uri="{FF2B5EF4-FFF2-40B4-BE49-F238E27FC236}">
-                <a16:creationId xmlns:a16="http://schemas.microsoft.com/office/drawing/2014/main" id="{D879779D-C792-48BC-9465-5526A3CCE035}"/>
-              </a:ext>
-            </a:extLst>
-          </p:cNvPr>
-          <p:cNvSpPr/>
-          <p:nvPr/>
-        </p:nvSpPr>
-        <p:spPr>
-          <a:xfrm>
-            <a:off x="11512748" y="21032646"/>
-            <a:ext cx="926325" cy="540000"/>
-          </a:xfrm>
-          <a:prstGeom prst="rect">
-            <a:avLst/>
-          </a:prstGeom>
-          <a:solidFill>
-            <a:schemeClr val="accent2">
-              <a:lumMod val="75000"/>
-            </a:schemeClr>
-          </a:solidFill>
-          <a:ln w="19050"/>
-        </p:spPr>
-        <p:style>
-          <a:lnRef idx="2">
-            <a:schemeClr val="accent1"/>
-          </a:lnRef>
-          <a:fillRef idx="1">
-            <a:schemeClr val="lt1"/>
-          </a:fillRef>
-          <a:effectRef idx="0">
-            <a:schemeClr val="accent1"/>
-          </a:effectRef>
-          <a:fontRef idx="minor">
-            <a:schemeClr val="dk1"/>
-          </a:fontRef>
-        </p:style>
-        <p:txBody>
-          <a:bodyPr lIns="124733" tIns="62367" rIns="124733" bIns="62367" rtlCol="0" anchor="ctr"/>
-          <a:lstStyle/>
-          <a:p>
-            <a:pPr algn="ctr"/>
-            <a:r>
-              <a:rPr lang="ru-RU" sz="700" dirty="0"/>
-              <a:t>Найти поддержку среди испанских фалангистов</a:t>
-            </a:r>
-          </a:p>
-        </p:txBody>
-      </p:sp>
       <p:cxnSp>
         <p:nvCxnSpPr>
-          <p:cNvPr id="521" name="Соединительная линия уступом 620">
-            <a:extLst>
-              <a:ext uri="{FF2B5EF4-FFF2-40B4-BE49-F238E27FC236}">
-                <a16:creationId xmlns:a16="http://schemas.microsoft.com/office/drawing/2014/main" id="{F2302FEA-DE50-42DE-827F-0248782C6D3B}"/>
+          <p:cNvPr id="458" name="Соединительная линия уступом 620">
+            <a:extLst>
+              <a:ext uri="{FF2B5EF4-FFF2-40B4-BE49-F238E27FC236}">
+                <a16:creationId xmlns:a16="http://schemas.microsoft.com/office/drawing/2014/main" id="{2F1FC60A-FD35-4AEA-9A97-D8427F39E0C8}"/>
               </a:ext>
             </a:extLst>
           </p:cNvPr>
           <p:cNvCxnSpPr>
             <a:cxnSpLocks/>
-            <a:stCxn id="391" idx="2"/>
-            <a:endCxn id="520" idx="0"/>
+            <a:stCxn id="69" idx="2"/>
+            <a:endCxn id="438" idx="0"/>
           </p:cNvCxnSpPr>
           <p:nvPr/>
         </p:nvCxnSpPr>
         <p:spPr>
-          <a:xfrm rot="16200000" flipH="1">
-            <a:off x="11578302" y="20635037"/>
-            <a:ext cx="186018" cy="609199"/>
-          </a:xfrm>
-          <a:prstGeom prst="bentConnector3">
-            <a:avLst>
-              <a:gd name="adj1" fmla="val 50000"/>
-            </a:avLst>
-          </a:prstGeom>
-          <a:ln w="19050">
-            <a:tailEnd type="arrow"/>
-          </a:ln>
-        </p:spPr>
-        <p:style>
-          <a:lnRef idx="1">
-            <a:schemeClr val="accent1"/>
-          </a:lnRef>
-          <a:fillRef idx="0">
-            <a:schemeClr val="accent1"/>
-          </a:fillRef>
-          <a:effectRef idx="0">
-            <a:schemeClr val="accent1"/>
-          </a:effectRef>
-          <a:fontRef idx="minor">
-            <a:schemeClr val="tx1"/>
-          </a:fontRef>
-        </p:style>
-      </p:cxnSp>
-      <p:cxnSp>
-        <p:nvCxnSpPr>
-          <p:cNvPr id="523" name="Соединительная линия уступом 620">
-            <a:extLst>
-              <a:ext uri="{FF2B5EF4-FFF2-40B4-BE49-F238E27FC236}">
-                <a16:creationId xmlns:a16="http://schemas.microsoft.com/office/drawing/2014/main" id="{35AE13DC-21AF-4BCC-BDB4-6EC259833CB6}"/>
-              </a:ext>
-            </a:extLst>
-          </p:cNvPr>
-          <p:cNvCxnSpPr>
-            <a:cxnSpLocks/>
-            <a:stCxn id="286" idx="2"/>
-            <a:endCxn id="520" idx="0"/>
-          </p:cNvCxnSpPr>
-          <p:nvPr/>
-        </p:nvCxnSpPr>
-        <p:spPr>
           <a:xfrm rot="5400000">
-            <a:off x="11483404" y="20540137"/>
-            <a:ext cx="985017" cy="1"/>
-          </a:xfrm>
-          <a:prstGeom prst="bentConnector3">
-            <a:avLst>
-              <a:gd name="adj1" fmla="val 50000"/>
-            </a:avLst>
-          </a:prstGeom>
-          <a:ln w="19050">
-            <a:tailEnd type="arrow"/>
-          </a:ln>
-        </p:spPr>
-        <p:style>
-          <a:lnRef idx="1">
-            <a:schemeClr val="accent1"/>
-          </a:lnRef>
-          <a:fillRef idx="0">
-            <a:schemeClr val="accent1"/>
-          </a:fillRef>
-          <a:effectRef idx="0">
-            <a:schemeClr val="accent1"/>
-          </a:effectRef>
-          <a:fontRef idx="minor">
-            <a:schemeClr val="tx1"/>
-          </a:fontRef>
-        </p:style>
-      </p:cxnSp>
-      <p:sp>
-        <p:nvSpPr>
-          <p:cNvPr id="527" name="Прямоугольник 526">
-            <a:extLst>
-              <a:ext uri="{FF2B5EF4-FFF2-40B4-BE49-F238E27FC236}">
-                <a16:creationId xmlns:a16="http://schemas.microsoft.com/office/drawing/2014/main" id="{7BE6B12E-2FC5-4352-A850-0061360A1EEE}"/>
-              </a:ext>
-            </a:extLst>
-          </p:cNvPr>
-          <p:cNvSpPr/>
-          <p:nvPr/>
-        </p:nvSpPr>
-        <p:spPr>
-          <a:xfrm>
-            <a:off x="12150141" y="20306733"/>
-            <a:ext cx="926325" cy="540000"/>
-          </a:xfrm>
-          <a:prstGeom prst="rect">
-            <a:avLst/>
-          </a:prstGeom>
-          <a:solidFill>
-            <a:schemeClr val="accent2">
-              <a:lumMod val="75000"/>
-            </a:schemeClr>
-          </a:solidFill>
-          <a:ln w="19050"/>
-        </p:spPr>
-        <p:style>
-          <a:lnRef idx="2">
-            <a:schemeClr val="accent1"/>
-          </a:lnRef>
-          <a:fillRef idx="1">
-            <a:schemeClr val="lt1"/>
-          </a:fillRef>
-          <a:effectRef idx="0">
-            <a:schemeClr val="accent1"/>
-          </a:effectRef>
-          <a:fontRef idx="minor">
-            <a:schemeClr val="dk1"/>
-          </a:fontRef>
-        </p:style>
-        <p:txBody>
-          <a:bodyPr lIns="124733" tIns="62367" rIns="124733" bIns="62367" rtlCol="0" anchor="ctr"/>
-          <a:lstStyle/>
-          <a:p>
-            <a:pPr algn="ctr"/>
-            <a:r>
-              <a:rPr lang="ru-RU" sz="700" dirty="0"/>
-              <a:t>Создание вертикального профсоюза</a:t>
-            </a:r>
-          </a:p>
-        </p:txBody>
-      </p:sp>
-      <p:sp>
-        <p:nvSpPr>
-          <p:cNvPr id="530" name="Прямоугольник 529">
-            <a:extLst>
-              <a:ext uri="{FF2B5EF4-FFF2-40B4-BE49-F238E27FC236}">
-                <a16:creationId xmlns:a16="http://schemas.microsoft.com/office/drawing/2014/main" id="{2A82F62F-8395-4C99-9757-DE13F85A4E30}"/>
-              </a:ext>
-            </a:extLst>
-          </p:cNvPr>
-          <p:cNvSpPr/>
-          <p:nvPr/>
-        </p:nvSpPr>
-        <p:spPr>
-          <a:xfrm>
-            <a:off x="12752200" y="21032646"/>
-            <a:ext cx="926325" cy="540000"/>
-          </a:xfrm>
-          <a:prstGeom prst="rect">
-            <a:avLst/>
-          </a:prstGeom>
-          <a:solidFill>
-            <a:schemeClr val="accent2">
-              <a:lumMod val="75000"/>
-            </a:schemeClr>
-          </a:solidFill>
-          <a:ln w="19050"/>
-        </p:spPr>
-        <p:style>
-          <a:lnRef idx="2">
-            <a:schemeClr val="accent1"/>
-          </a:lnRef>
-          <a:fillRef idx="1">
-            <a:schemeClr val="lt1"/>
-          </a:fillRef>
-          <a:effectRef idx="0">
-            <a:schemeClr val="accent1"/>
-          </a:effectRef>
-          <a:fontRef idx="minor">
-            <a:schemeClr val="dk1"/>
-          </a:fontRef>
-        </p:style>
-        <p:txBody>
-          <a:bodyPr lIns="124733" tIns="62367" rIns="124733" bIns="62367" rtlCol="0" anchor="ctr"/>
-          <a:lstStyle/>
-          <a:p>
-            <a:pPr algn="ctr"/>
-            <a:r>
-              <a:rPr lang="ru-RU" sz="700" dirty="0"/>
-              <a:t>Объединение рабочих и работодателей по отраслям</a:t>
-            </a:r>
-          </a:p>
-        </p:txBody>
-      </p:sp>
-      <p:cxnSp>
-        <p:nvCxnSpPr>
-          <p:cNvPr id="531" name="Соединительная линия уступом 620">
-            <a:extLst>
-              <a:ext uri="{FF2B5EF4-FFF2-40B4-BE49-F238E27FC236}">
-                <a16:creationId xmlns:a16="http://schemas.microsoft.com/office/drawing/2014/main" id="{249B645A-AC76-46A7-A83B-C0F9A7D5B865}"/>
-              </a:ext>
-            </a:extLst>
-          </p:cNvPr>
-          <p:cNvCxnSpPr>
-            <a:cxnSpLocks/>
-            <a:stCxn id="286" idx="2"/>
-            <a:endCxn id="527" idx="0"/>
-          </p:cNvCxnSpPr>
-          <p:nvPr/>
-        </p:nvCxnSpPr>
-        <p:spPr>
-          <a:xfrm rot="16200000" flipH="1">
-            <a:off x="12165056" y="19858485"/>
-            <a:ext cx="259104" cy="637392"/>
-          </a:xfrm>
-          <a:prstGeom prst="bentConnector3">
-            <a:avLst>
-              <a:gd name="adj1" fmla="val 50000"/>
-            </a:avLst>
-          </a:prstGeom>
-          <a:ln w="19050">
-            <a:tailEnd type="arrow"/>
-          </a:ln>
-        </p:spPr>
-        <p:style>
-          <a:lnRef idx="1">
-            <a:schemeClr val="accent1"/>
-          </a:lnRef>
-          <a:fillRef idx="0">
-            <a:schemeClr val="accent1"/>
-          </a:fillRef>
-          <a:effectRef idx="0">
-            <a:schemeClr val="accent1"/>
-          </a:effectRef>
-          <a:fontRef idx="minor">
-            <a:schemeClr val="tx1"/>
-          </a:fontRef>
-        </p:style>
-      </p:cxnSp>
-      <p:sp>
-        <p:nvSpPr>
-          <p:cNvPr id="533" name="Прямоугольник 532">
-            <a:extLst>
-              <a:ext uri="{FF2B5EF4-FFF2-40B4-BE49-F238E27FC236}">
-                <a16:creationId xmlns:a16="http://schemas.microsoft.com/office/drawing/2014/main" id="{07F1E05F-B285-4962-8AFC-85A9CE71C5DE}"/>
-              </a:ext>
-            </a:extLst>
-          </p:cNvPr>
-          <p:cNvSpPr/>
-          <p:nvPr/>
-        </p:nvSpPr>
-        <p:spPr>
-          <a:xfrm>
-            <a:off x="11512747" y="22654770"/>
-            <a:ext cx="926325" cy="540000"/>
-          </a:xfrm>
-          <a:prstGeom prst="rect">
-            <a:avLst/>
-          </a:prstGeom>
-          <a:solidFill>
-            <a:schemeClr val="accent2">
-              <a:lumMod val="75000"/>
-            </a:schemeClr>
-          </a:solidFill>
-          <a:ln w="19050"/>
-        </p:spPr>
-        <p:style>
-          <a:lnRef idx="2">
-            <a:schemeClr val="accent1"/>
-          </a:lnRef>
-          <a:fillRef idx="1">
-            <a:schemeClr val="lt1"/>
-          </a:fillRef>
-          <a:effectRef idx="0">
-            <a:schemeClr val="accent1"/>
-          </a:effectRef>
-          <a:fontRef idx="minor">
-            <a:schemeClr val="dk1"/>
-          </a:fontRef>
-        </p:style>
-        <p:txBody>
-          <a:bodyPr lIns="124733" tIns="62367" rIns="124733" bIns="62367" rtlCol="0" anchor="ctr"/>
-          <a:lstStyle/>
-          <a:p>
-            <a:pPr algn="ctr"/>
-            <a:r>
-              <a:rPr lang="ru-RU" sz="700" dirty="0"/>
-              <a:t>Создать культ личности</a:t>
-            </a:r>
-          </a:p>
-        </p:txBody>
-      </p:sp>
-      <p:sp>
-        <p:nvSpPr>
-          <p:cNvPr id="534" name="Прямоугольник 533">
-            <a:extLst>
-              <a:ext uri="{FF2B5EF4-FFF2-40B4-BE49-F238E27FC236}">
-                <a16:creationId xmlns:a16="http://schemas.microsoft.com/office/drawing/2014/main" id="{439679E5-8F70-4C51-996F-EC7F24AA5DDE}"/>
-              </a:ext>
-            </a:extLst>
-          </p:cNvPr>
-          <p:cNvSpPr/>
-          <p:nvPr/>
-        </p:nvSpPr>
-        <p:spPr>
-          <a:xfrm>
-            <a:off x="12752201" y="21847388"/>
-            <a:ext cx="926325" cy="540000"/>
-          </a:xfrm>
-          <a:prstGeom prst="rect">
-            <a:avLst/>
-          </a:prstGeom>
-          <a:solidFill>
-            <a:schemeClr val="accent2">
-              <a:lumMod val="75000"/>
-            </a:schemeClr>
-          </a:solidFill>
-          <a:ln w="19050"/>
-        </p:spPr>
-        <p:style>
-          <a:lnRef idx="2">
-            <a:schemeClr val="accent1"/>
-          </a:lnRef>
-          <a:fillRef idx="1">
-            <a:schemeClr val="lt1"/>
-          </a:fillRef>
-          <a:effectRef idx="0">
-            <a:schemeClr val="accent1"/>
-          </a:effectRef>
-          <a:fontRef idx="minor">
-            <a:schemeClr val="dk1"/>
-          </a:fontRef>
-        </p:style>
-        <p:txBody>
-          <a:bodyPr lIns="124733" tIns="62367" rIns="124733" bIns="62367" rtlCol="0" anchor="ctr"/>
-          <a:lstStyle/>
-          <a:p>
-            <a:pPr algn="ctr"/>
-            <a:r>
-              <a:rPr lang="ru-RU" sz="700" dirty="0"/>
-              <a:t>Передача прав собственности и средств производства в профсоюзы</a:t>
-            </a:r>
-          </a:p>
-        </p:txBody>
-      </p:sp>
-      <p:cxnSp>
-        <p:nvCxnSpPr>
-          <p:cNvPr id="538" name="Соединительная линия уступом 620">
-            <a:extLst>
-              <a:ext uri="{FF2B5EF4-FFF2-40B4-BE49-F238E27FC236}">
-                <a16:creationId xmlns:a16="http://schemas.microsoft.com/office/drawing/2014/main" id="{AB0C856A-015A-4250-A7F2-0CEE1A7AE3D8}"/>
-              </a:ext>
-            </a:extLst>
-          </p:cNvPr>
-          <p:cNvCxnSpPr>
-            <a:cxnSpLocks/>
-            <a:stCxn id="520" idx="2"/>
-            <a:endCxn id="533" idx="0"/>
-          </p:cNvCxnSpPr>
-          <p:nvPr/>
-        </p:nvCxnSpPr>
-        <p:spPr>
-          <a:xfrm rot="5400000">
-            <a:off x="11434849" y="22113708"/>
-            <a:ext cx="1082124" cy="1"/>
-          </a:xfrm>
-          <a:prstGeom prst="bentConnector3">
-            <a:avLst>
-              <a:gd name="adj1" fmla="val 50000"/>
-            </a:avLst>
-          </a:prstGeom>
-          <a:ln w="19050">
-            <a:tailEnd type="arrow"/>
-          </a:ln>
-        </p:spPr>
-        <p:style>
-          <a:lnRef idx="1">
-            <a:schemeClr val="accent1"/>
-          </a:lnRef>
-          <a:fillRef idx="0">
-            <a:schemeClr val="accent1"/>
-          </a:fillRef>
-          <a:effectRef idx="0">
-            <a:schemeClr val="accent1"/>
-          </a:effectRef>
-          <a:fontRef idx="minor">
-            <a:schemeClr val="tx1"/>
-          </a:fontRef>
-        </p:style>
-      </p:cxnSp>
-      <p:cxnSp>
-        <p:nvCxnSpPr>
-          <p:cNvPr id="540" name="Соединительная линия уступом 620">
-            <a:extLst>
-              <a:ext uri="{FF2B5EF4-FFF2-40B4-BE49-F238E27FC236}">
-                <a16:creationId xmlns:a16="http://schemas.microsoft.com/office/drawing/2014/main" id="{89AE2EBF-E461-4885-8EBB-A725AAD7537D}"/>
-              </a:ext>
-            </a:extLst>
-          </p:cNvPr>
-          <p:cNvCxnSpPr>
-            <a:cxnSpLocks/>
-            <a:stCxn id="527" idx="2"/>
-            <a:endCxn id="530" idx="0"/>
-          </p:cNvCxnSpPr>
-          <p:nvPr/>
-        </p:nvCxnSpPr>
-        <p:spPr>
-          <a:xfrm rot="16200000" flipH="1">
-            <a:off x="12821377" y="20638659"/>
-            <a:ext cx="185913" cy="602059"/>
-          </a:xfrm>
-          <a:prstGeom prst="bentConnector3">
-            <a:avLst>
-              <a:gd name="adj1" fmla="val 50000"/>
-            </a:avLst>
-          </a:prstGeom>
-          <a:ln w="19050">
-            <a:tailEnd type="arrow"/>
-          </a:ln>
-        </p:spPr>
-        <p:style>
-          <a:lnRef idx="1">
-            <a:schemeClr val="accent1"/>
-          </a:lnRef>
-          <a:fillRef idx="0">
-            <a:schemeClr val="accent1"/>
-          </a:fillRef>
-          <a:effectRef idx="0">
-            <a:schemeClr val="accent1"/>
-          </a:effectRef>
-          <a:fontRef idx="minor">
-            <a:schemeClr val="tx1"/>
-          </a:fontRef>
-        </p:style>
-      </p:cxnSp>
-      <p:cxnSp>
-        <p:nvCxnSpPr>
-          <p:cNvPr id="541" name="Соединительная линия уступом 620">
-            <a:extLst>
-              <a:ext uri="{FF2B5EF4-FFF2-40B4-BE49-F238E27FC236}">
-                <a16:creationId xmlns:a16="http://schemas.microsoft.com/office/drawing/2014/main" id="{BB42ABE2-7B27-4605-A3C2-923A7B99A9F8}"/>
-              </a:ext>
-            </a:extLst>
-          </p:cNvPr>
-          <p:cNvCxnSpPr>
-            <a:cxnSpLocks/>
-            <a:stCxn id="530" idx="2"/>
-            <a:endCxn id="534" idx="0"/>
-          </p:cNvCxnSpPr>
-          <p:nvPr/>
-        </p:nvCxnSpPr>
-        <p:spPr>
-          <a:xfrm rot="16200000" flipH="1">
-            <a:off x="13077992" y="21710016"/>
-            <a:ext cx="274742" cy="1"/>
+            <a:off x="10877336" y="23085883"/>
+            <a:ext cx="277928" cy="1691823"/>
           </a:xfrm>
           <a:prstGeom prst="bentConnector3">
             <a:avLst>

--- a/Наработки/диздоки/Марокко/Марокко.pptx
+++ b/Наработки/диздоки/Марокко/Марокко.pptx
@@ -209,7 +209,7 @@
             <a:fld id="{33E3D7F9-E251-484C-A6FF-FA958879DF69}" type="datetimeFigureOut">
               <a:rPr lang="ru-RU" smtClean="0"/>
               <a:pPr/>
-              <a:t>08.07.2026</a:t>
+              <a:t>09.07.2026</a:t>
             </a:fld>
             <a:endParaRPr lang="ru-RU"/>
           </a:p>
@@ -699,7 +699,7 @@
             <a:fld id="{85A5DE44-605B-4D3B-B2B7-94543DF81A36}" type="datetimeFigureOut">
               <a:rPr lang="ru-RU" smtClean="0"/>
               <a:pPr/>
-              <a:t>08.07.2026</a:t>
+              <a:t>09.07.2026</a:t>
             </a:fld>
             <a:endParaRPr lang="ru-RU"/>
           </a:p>
@@ -871,7 +871,7 @@
             <a:fld id="{85A5DE44-605B-4D3B-B2B7-94543DF81A36}" type="datetimeFigureOut">
               <a:rPr lang="ru-RU" smtClean="0"/>
               <a:pPr/>
-              <a:t>08.07.2026</a:t>
+              <a:t>09.07.2026</a:t>
             </a:fld>
             <a:endParaRPr lang="ru-RU"/>
           </a:p>
@@ -1053,7 +1053,7 @@
             <a:fld id="{85A5DE44-605B-4D3B-B2B7-94543DF81A36}" type="datetimeFigureOut">
               <a:rPr lang="ru-RU" smtClean="0"/>
               <a:pPr/>
-              <a:t>08.07.2026</a:t>
+              <a:t>09.07.2026</a:t>
             </a:fld>
             <a:endParaRPr lang="ru-RU"/>
           </a:p>
@@ -1225,7 +1225,7 @@
             <a:fld id="{85A5DE44-605B-4D3B-B2B7-94543DF81A36}" type="datetimeFigureOut">
               <a:rPr lang="ru-RU" smtClean="0"/>
               <a:pPr/>
-              <a:t>08.07.2026</a:t>
+              <a:t>09.07.2026</a:t>
             </a:fld>
             <a:endParaRPr lang="ru-RU"/>
           </a:p>
@@ -1473,7 +1473,7 @@
             <a:fld id="{85A5DE44-605B-4D3B-B2B7-94543DF81A36}" type="datetimeFigureOut">
               <a:rPr lang="ru-RU" smtClean="0"/>
               <a:pPr/>
-              <a:t>08.07.2026</a:t>
+              <a:t>09.07.2026</a:t>
             </a:fld>
             <a:endParaRPr lang="ru-RU"/>
           </a:p>
@@ -1707,7 +1707,7 @@
             <a:fld id="{85A5DE44-605B-4D3B-B2B7-94543DF81A36}" type="datetimeFigureOut">
               <a:rPr lang="ru-RU" smtClean="0"/>
               <a:pPr/>
-              <a:t>08.07.2026</a:t>
+              <a:t>09.07.2026</a:t>
             </a:fld>
             <a:endParaRPr lang="ru-RU"/>
           </a:p>
@@ -2076,7 +2076,7 @@
             <a:fld id="{85A5DE44-605B-4D3B-B2B7-94543DF81A36}" type="datetimeFigureOut">
               <a:rPr lang="ru-RU" smtClean="0"/>
               <a:pPr/>
-              <a:t>08.07.2026</a:t>
+              <a:t>09.07.2026</a:t>
             </a:fld>
             <a:endParaRPr lang="ru-RU"/>
           </a:p>
@@ -2196,7 +2196,7 @@
             <a:fld id="{85A5DE44-605B-4D3B-B2B7-94543DF81A36}" type="datetimeFigureOut">
               <a:rPr lang="ru-RU" smtClean="0"/>
               <a:pPr/>
-              <a:t>08.07.2026</a:t>
+              <a:t>09.07.2026</a:t>
             </a:fld>
             <a:endParaRPr lang="ru-RU"/>
           </a:p>
@@ -2293,7 +2293,7 @@
             <a:fld id="{85A5DE44-605B-4D3B-B2B7-94543DF81A36}" type="datetimeFigureOut">
               <a:rPr lang="ru-RU" smtClean="0"/>
               <a:pPr/>
-              <a:t>08.07.2026</a:t>
+              <a:t>09.07.2026</a:t>
             </a:fld>
             <a:endParaRPr lang="ru-RU"/>
           </a:p>
@@ -2572,7 +2572,7 @@
             <a:fld id="{85A5DE44-605B-4D3B-B2B7-94543DF81A36}" type="datetimeFigureOut">
               <a:rPr lang="ru-RU" smtClean="0"/>
               <a:pPr/>
-              <a:t>08.07.2026</a:t>
+              <a:t>09.07.2026</a:t>
             </a:fld>
             <a:endParaRPr lang="ru-RU"/>
           </a:p>
@@ -2831,7 +2831,7 @@
             <a:fld id="{85A5DE44-605B-4D3B-B2B7-94543DF81A36}" type="datetimeFigureOut">
               <a:rPr lang="ru-RU" smtClean="0"/>
               <a:pPr/>
-              <a:t>08.07.2026</a:t>
+              <a:t>09.07.2026</a:t>
             </a:fld>
             <a:endParaRPr lang="ru-RU"/>
           </a:p>
@@ -3046,7 +3046,7 @@
             <a:fld id="{85A5DE44-605B-4D3B-B2B7-94543DF81A36}" type="datetimeFigureOut">
               <a:rPr lang="ru-RU" smtClean="0"/>
               <a:pPr/>
-              <a:t>08.07.2026</a:t>
+              <a:t>09.07.2026</a:t>
             </a:fld>
             <a:endParaRPr lang="ru-RU"/>
           </a:p>
@@ -3460,7 +3460,7 @@
         </p:nvSpPr>
         <p:spPr>
           <a:xfrm>
-            <a:off x="12486430" y="14550013"/>
+            <a:off x="11789141" y="14480625"/>
             <a:ext cx="926325" cy="540000"/>
           </a:xfrm>
           <a:prstGeom prst="rect">
@@ -3515,7 +3515,7 @@
         </p:nvCxnSpPr>
         <p:spPr>
           <a:xfrm rot="5400000">
-            <a:off x="12157322" y="14635688"/>
+            <a:off x="11460033" y="14566300"/>
             <a:ext cx="337946" cy="1246596"/>
           </a:xfrm>
           <a:prstGeom prst="bentConnector3">
@@ -3560,7 +3560,7 @@
         </p:nvCxnSpPr>
         <p:spPr>
           <a:xfrm rot="16200000" flipH="1">
-            <a:off x="13392867" y="14646739"/>
+            <a:off x="12695578" y="14577351"/>
             <a:ext cx="337947" cy="1224494"/>
           </a:xfrm>
           <a:prstGeom prst="bentConnector3">
@@ -3601,7 +3601,7 @@
         </p:nvSpPr>
         <p:spPr>
           <a:xfrm>
-            <a:off x="13105572" y="16235209"/>
+            <a:off x="12408283" y="16165821"/>
             <a:ext cx="926325" cy="540000"/>
           </a:xfrm>
           <a:prstGeom prst="rect">
@@ -3652,7 +3652,7 @@
         </p:nvSpPr>
         <p:spPr>
           <a:xfrm>
-            <a:off x="11239834" y="15427959"/>
+            <a:off x="10542545" y="15358571"/>
             <a:ext cx="926325" cy="540000"/>
           </a:xfrm>
           <a:prstGeom prst="rect">
@@ -3703,7 +3703,7 @@
         </p:nvSpPr>
         <p:spPr>
           <a:xfrm>
-            <a:off x="13710924" y="15427960"/>
+            <a:off x="13013635" y="15358572"/>
             <a:ext cx="926325" cy="540000"/>
           </a:xfrm>
           <a:prstGeom prst="rect">
@@ -3758,7 +3758,7 @@
         </p:nvCxnSpPr>
         <p:spPr>
           <a:xfrm flipH="1" flipV="1">
-            <a:off x="12166159" y="15697959"/>
+            <a:off x="11468870" y="15628571"/>
             <a:ext cx="1544765" cy="1"/>
           </a:xfrm>
           <a:prstGeom prst="line">
@@ -3803,7 +3803,7 @@
         </p:nvCxnSpPr>
         <p:spPr>
           <a:xfrm rot="5400000">
-            <a:off x="13737787" y="15798908"/>
+            <a:off x="13040498" y="15729520"/>
             <a:ext cx="267249" cy="605352"/>
           </a:xfrm>
           <a:prstGeom prst="bentConnector3">
@@ -3849,7 +3849,7 @@
         </p:nvCxnSpPr>
         <p:spPr>
           <a:xfrm rot="16200000" flipH="1">
-            <a:off x="12502241" y="15168715"/>
+            <a:off x="11804952" y="15099327"/>
             <a:ext cx="267250" cy="1865738"/>
           </a:xfrm>
           <a:prstGeom prst="bentConnector3">
@@ -3895,7 +3895,7 @@
         </p:nvCxnSpPr>
         <p:spPr>
           <a:xfrm rot="5400000">
-            <a:off x="11261317" y="15791149"/>
+            <a:off x="10564028" y="15721761"/>
             <a:ext cx="264871" cy="618491"/>
           </a:xfrm>
           <a:prstGeom prst="bentConnector3">
@@ -3936,7 +3936,7 @@
         </p:nvSpPr>
         <p:spPr>
           <a:xfrm>
-            <a:off x="14328231" y="16232124"/>
+            <a:off x="13630942" y="16162736"/>
             <a:ext cx="926325" cy="540000"/>
           </a:xfrm>
           <a:prstGeom prst="rect">
@@ -3987,7 +3987,7 @@
         </p:nvSpPr>
         <p:spPr>
           <a:xfrm>
-            <a:off x="10621343" y="16232830"/>
+            <a:off x="9924054" y="16163442"/>
             <a:ext cx="926325" cy="540000"/>
           </a:xfrm>
           <a:prstGeom prst="rect">
@@ -4046,7 +4046,7 @@
         </p:nvSpPr>
         <p:spPr>
           <a:xfrm>
-            <a:off x="10620695" y="17050759"/>
+            <a:off x="9923406" y="16981371"/>
             <a:ext cx="926325" cy="540000"/>
           </a:xfrm>
           <a:prstGeom prst="rect">
@@ -4102,7 +4102,7 @@
         </p:nvSpPr>
         <p:spPr>
           <a:xfrm>
-            <a:off x="9378311" y="16232124"/>
+            <a:off x="8681022" y="16162736"/>
             <a:ext cx="926325" cy="540000"/>
           </a:xfrm>
           <a:prstGeom prst="rect">
@@ -4153,7 +4153,7 @@
         </p:nvSpPr>
         <p:spPr>
           <a:xfrm>
-            <a:off x="11862540" y="16237957"/>
+            <a:off x="11165251" y="16168569"/>
             <a:ext cx="926325" cy="540000"/>
           </a:xfrm>
           <a:prstGeom prst="rect">
@@ -4208,7 +4208,7 @@
         </p:nvCxnSpPr>
         <p:spPr>
           <a:xfrm rot="5400000">
-            <a:off x="10640154" y="15169280"/>
+            <a:off x="9942865" y="15099892"/>
             <a:ext cx="264165" cy="1861523"/>
           </a:xfrm>
           <a:prstGeom prst="bentConnector3">
@@ -4253,7 +4253,7 @@
         </p:nvCxnSpPr>
         <p:spPr>
           <a:xfrm rot="5400000">
-            <a:off x="10945218" y="16911470"/>
+            <a:off x="10247929" y="16842082"/>
             <a:ext cx="277929" cy="648"/>
           </a:xfrm>
           <a:prstGeom prst="bentConnector3">
@@ -4294,7 +4294,7 @@
         </p:nvSpPr>
         <p:spPr>
           <a:xfrm>
-            <a:off x="11862539" y="17050759"/>
+            <a:off x="11165250" y="16981371"/>
             <a:ext cx="926325" cy="540000"/>
           </a:xfrm>
           <a:prstGeom prst="rect">
@@ -4349,7 +4349,7 @@
         </p:nvCxnSpPr>
         <p:spPr>
           <a:xfrm rot="5400000">
-            <a:off x="12189302" y="16914358"/>
+            <a:off x="11492013" y="16844970"/>
             <a:ext cx="272802" cy="1"/>
           </a:xfrm>
           <a:prstGeom prst="bentConnector3">
@@ -4390,7 +4390,7 @@
         </p:nvSpPr>
         <p:spPr>
           <a:xfrm>
-            <a:off x="13103738" y="17053021"/>
+            <a:off x="12406449" y="16983633"/>
             <a:ext cx="926325" cy="540000"/>
           </a:xfrm>
           <a:prstGeom prst="rect">
@@ -4446,7 +4446,7 @@
         </p:nvSpPr>
         <p:spPr>
           <a:xfrm>
-            <a:off x="13105571" y="17870833"/>
+            <a:off x="12408282" y="17801445"/>
             <a:ext cx="926325" cy="540000"/>
           </a:xfrm>
           <a:prstGeom prst="rect">
@@ -4501,7 +4501,7 @@
         </p:nvCxnSpPr>
         <p:spPr>
           <a:xfrm rot="5400000">
-            <a:off x="13428912" y="16913198"/>
+            <a:off x="12731623" y="16843810"/>
             <a:ext cx="277812" cy="1834"/>
           </a:xfrm>
           <a:prstGeom prst="bentConnector3">
@@ -4546,7 +4546,7 @@
         </p:nvCxnSpPr>
         <p:spPr>
           <a:xfrm rot="16200000" flipH="1">
-            <a:off x="13428911" y="17731010"/>
+            <a:off x="12731622" y="17661622"/>
             <a:ext cx="277812" cy="1833"/>
           </a:xfrm>
           <a:prstGeom prst="bentConnector3">
@@ -4591,7 +4591,7 @@
         </p:nvCxnSpPr>
         <p:spPr>
           <a:xfrm rot="16200000" flipH="1">
-            <a:off x="11879351" y="15791605"/>
+            <a:off x="11182062" y="15722217"/>
             <a:ext cx="269998" cy="622706"/>
           </a:xfrm>
           <a:prstGeom prst="bentConnector3">
@@ -4637,7 +4637,7 @@
         </p:nvCxnSpPr>
         <p:spPr>
           <a:xfrm rot="5400000">
-            <a:off x="13114897" y="15178766"/>
+            <a:off x="12417608" y="15109378"/>
             <a:ext cx="269997" cy="1848384"/>
           </a:xfrm>
           <a:prstGeom prst="bentConnector3">
@@ -4679,7 +4679,7 @@
         </p:nvSpPr>
         <p:spPr>
           <a:xfrm>
-            <a:off x="12486430" y="18672689"/>
+            <a:off x="11789141" y="18603301"/>
             <a:ext cx="926325" cy="540000"/>
           </a:xfrm>
           <a:prstGeom prst="rect">
@@ -4734,7 +4734,7 @@
         </p:nvCxnSpPr>
         <p:spPr>
           <a:xfrm rot="5400000">
-            <a:off x="12209476" y="16708077"/>
+            <a:off x="11512187" y="16638689"/>
             <a:ext cx="2704729" cy="1224494"/>
           </a:xfrm>
           <a:prstGeom prst="bentConnector3">
@@ -4780,7 +4780,7 @@
         </p:nvCxnSpPr>
         <p:spPr>
           <a:xfrm rot="16200000" flipH="1">
-            <a:off x="10973930" y="16697026"/>
+            <a:off x="10276641" y="16627638"/>
             <a:ext cx="2704730" cy="1246596"/>
           </a:xfrm>
           <a:prstGeom prst="bentConnector3">
@@ -4826,7 +4826,7 @@
         </p:nvCxnSpPr>
         <p:spPr>
           <a:xfrm rot="5400000">
-            <a:off x="9702510" y="16911088"/>
+            <a:off x="9005221" y="16841700"/>
             <a:ext cx="277929" cy="1"/>
           </a:xfrm>
           <a:prstGeom prst="bentConnector3">
@@ -4867,7 +4867,7 @@
         </p:nvSpPr>
         <p:spPr>
           <a:xfrm>
-            <a:off x="11862538" y="17870833"/>
+            <a:off x="11165249" y="17801445"/>
             <a:ext cx="926325" cy="540000"/>
           </a:xfrm>
           <a:prstGeom prst="rect">
@@ -4918,7 +4918,7 @@
         </p:nvSpPr>
         <p:spPr>
           <a:xfrm>
-            <a:off x="10006377" y="17868688"/>
+            <a:off x="9309088" y="17799300"/>
             <a:ext cx="926325" cy="540000"/>
           </a:xfrm>
           <a:prstGeom prst="rect">
@@ -4973,7 +4973,7 @@
         </p:nvCxnSpPr>
         <p:spPr>
           <a:xfrm rot="5400000">
-            <a:off x="10637735" y="17422564"/>
+            <a:off x="9940446" y="17353176"/>
             <a:ext cx="277929" cy="614318"/>
           </a:xfrm>
           <a:prstGeom prst="bentConnector3">
@@ -5018,7 +5018,7 @@
         </p:nvCxnSpPr>
         <p:spPr>
           <a:xfrm rot="16200000" flipH="1">
-            <a:off x="10016189" y="17415336"/>
+            <a:off x="9318900" y="17345948"/>
             <a:ext cx="278635" cy="628067"/>
           </a:xfrm>
           <a:prstGeom prst="bentConnector3">
@@ -5063,7 +5063,7 @@
         </p:nvCxnSpPr>
         <p:spPr>
           <a:xfrm rot="5400000">
-            <a:off x="12185665" y="17730796"/>
+            <a:off x="11488376" y="17661408"/>
             <a:ext cx="280074" cy="1"/>
           </a:xfrm>
           <a:prstGeom prst="bentConnector3">
@@ -5108,7 +5108,7 @@
         </p:nvCxnSpPr>
         <p:spPr>
           <a:xfrm rot="16200000" flipH="1">
-            <a:off x="14350658" y="15791388"/>
+            <a:off x="13653369" y="15722000"/>
             <a:ext cx="264164" cy="617307"/>
           </a:xfrm>
           <a:prstGeom prst="bentConnector3">
@@ -5149,7 +5149,7 @@
         </p:nvSpPr>
         <p:spPr>
           <a:xfrm>
-            <a:off x="15567082" y="16232124"/>
+            <a:off x="14869793" y="16162736"/>
             <a:ext cx="926325" cy="540000"/>
           </a:xfrm>
           <a:prstGeom prst="rect">
@@ -5204,7 +5204,7 @@
         </p:nvCxnSpPr>
         <p:spPr>
           <a:xfrm rot="16200000" flipH="1">
-            <a:off x="14970084" y="15171963"/>
+            <a:off x="14272795" y="15102575"/>
             <a:ext cx="264164" cy="1856158"/>
           </a:xfrm>
           <a:prstGeom prst="bentConnector3">
@@ -5245,7 +5245,7 @@
         </p:nvSpPr>
         <p:spPr>
           <a:xfrm>
-            <a:off x="13103738" y="19693286"/>
+            <a:off x="12406449" y="19623898"/>
             <a:ext cx="926325" cy="540000"/>
           </a:xfrm>
           <a:prstGeom prst="rect">
@@ -5296,7 +5296,7 @@
         </p:nvSpPr>
         <p:spPr>
           <a:xfrm>
-            <a:off x="9378310" y="17050053"/>
+            <a:off x="8681021" y="16980665"/>
             <a:ext cx="926325" cy="540000"/>
           </a:xfrm>
           <a:prstGeom prst="rect">
@@ -5351,7 +5351,7 @@
         </p:nvCxnSpPr>
         <p:spPr>
           <a:xfrm rot="16200000" flipH="1">
-            <a:off x="13017949" y="19144333"/>
+            <a:off x="12320660" y="19074945"/>
             <a:ext cx="480597" cy="617308"/>
           </a:xfrm>
           <a:prstGeom prst="bentConnector3">
@@ -5392,7 +5392,7 @@
         </p:nvSpPr>
         <p:spPr>
           <a:xfrm>
-            <a:off x="9382120" y="18672689"/>
+            <a:off x="8684831" y="18603301"/>
             <a:ext cx="926325" cy="540000"/>
           </a:xfrm>
           <a:prstGeom prst="rect">
@@ -5447,7 +5447,7 @@
         </p:nvCxnSpPr>
         <p:spPr>
           <a:xfrm rot="16200000" flipH="1">
-            <a:off x="9302060" y="18129466"/>
+            <a:off x="8604771" y="18060078"/>
             <a:ext cx="1082636" cy="3810"/>
           </a:xfrm>
           <a:prstGeom prst="bentConnector3">
@@ -5488,7 +5488,7 @@
         </p:nvSpPr>
         <p:spPr>
           <a:xfrm>
-            <a:off x="15567081" y="17050053"/>
+            <a:off x="14869792" y="16980665"/>
             <a:ext cx="926325" cy="540000"/>
           </a:xfrm>
           <a:prstGeom prst="rect">
@@ -5543,7 +5543,7 @@
         </p:nvCxnSpPr>
         <p:spPr>
           <a:xfrm rot="5400000">
-            <a:off x="15891281" y="16911088"/>
+            <a:off x="15193992" y="16841700"/>
             <a:ext cx="277929" cy="1"/>
           </a:xfrm>
           <a:prstGeom prst="bentConnector3">
@@ -5584,7 +5584,7 @@
         </p:nvSpPr>
         <p:spPr>
           <a:xfrm>
-            <a:off x="14330326" y="17868688"/>
+            <a:off x="13633037" y="17799300"/>
             <a:ext cx="926325" cy="540000"/>
           </a:xfrm>
           <a:prstGeom prst="rect">
@@ -5647,7 +5647,7 @@
         </p:nvCxnSpPr>
         <p:spPr>
           <a:xfrm rot="5400000">
-            <a:off x="13537896" y="18437693"/>
+            <a:off x="12840607" y="18368305"/>
             <a:ext cx="1284598" cy="1226588"/>
           </a:xfrm>
           <a:prstGeom prst="bentConnector3">
@@ -5688,7 +5688,7 @@
         </p:nvSpPr>
         <p:spPr>
           <a:xfrm>
-            <a:off x="11862537" y="19693285"/>
+            <a:off x="11165248" y="19623897"/>
             <a:ext cx="926325" cy="540000"/>
           </a:xfrm>
           <a:prstGeom prst="rect">
@@ -5743,7 +5743,7 @@
         </p:nvCxnSpPr>
         <p:spPr>
           <a:xfrm rot="16200000" flipH="1">
-            <a:off x="14244159" y="17319358"/>
+            <a:off x="13546870" y="17249970"/>
             <a:ext cx="1096564" cy="2095"/>
           </a:xfrm>
           <a:prstGeom prst="bentConnector3">
@@ -5788,7 +5788,7 @@
         </p:nvCxnSpPr>
         <p:spPr>
           <a:xfrm rot="5400000">
-            <a:off x="12397349" y="19141041"/>
+            <a:off x="11700060" y="19071653"/>
             <a:ext cx="480596" cy="623893"/>
           </a:xfrm>
           <a:prstGeom prst="bentConnector3">
@@ -5829,7 +5829,7 @@
         </p:nvSpPr>
         <p:spPr>
           <a:xfrm>
-            <a:off x="11862537" y="20626736"/>
+            <a:off x="11165248" y="20557348"/>
             <a:ext cx="926325" cy="540000"/>
           </a:xfrm>
           <a:prstGeom prst="rect">
@@ -5880,7 +5880,7 @@
         </p:nvSpPr>
         <p:spPr>
           <a:xfrm>
-            <a:off x="14322402" y="20626333"/>
+            <a:off x="13625113" y="20556945"/>
             <a:ext cx="926325" cy="540000"/>
           </a:xfrm>
           <a:prstGeom prst="rect">
@@ -5935,7 +5935,7 @@
         </p:nvCxnSpPr>
         <p:spPr>
           <a:xfrm rot="5400000">
-            <a:off x="12749576" y="19809411"/>
+            <a:off x="12052287" y="19740023"/>
             <a:ext cx="393450" cy="1241201"/>
           </a:xfrm>
           <a:prstGeom prst="bentConnector3">
@@ -5980,7 +5980,7 @@
         </p:nvCxnSpPr>
         <p:spPr>
           <a:xfrm rot="16200000" flipH="1">
-            <a:off x="13979710" y="19820477"/>
+            <a:off x="13282421" y="19751089"/>
             <a:ext cx="393047" cy="1218664"/>
           </a:xfrm>
           <a:prstGeom prst="bentConnector3">
@@ -6021,7 +6021,7 @@
         </p:nvSpPr>
         <p:spPr>
           <a:xfrm>
-            <a:off x="12637898" y="21570720"/>
+            <a:off x="21587346" y="15305183"/>
             <a:ext cx="926325" cy="540000"/>
           </a:xfrm>
           <a:prstGeom prst="rect">
@@ -6072,7 +6072,7 @@
         </p:nvSpPr>
         <p:spPr>
           <a:xfrm>
-            <a:off x="13873795" y="23252830"/>
+            <a:off x="22823243" y="16987293"/>
             <a:ext cx="926325" cy="540000"/>
           </a:xfrm>
           <a:prstGeom prst="rect">
@@ -6123,7 +6123,7 @@
         </p:nvSpPr>
         <p:spPr>
           <a:xfrm>
-            <a:off x="12637899" y="23252830"/>
+            <a:off x="21587347" y="16987293"/>
             <a:ext cx="926325" cy="540000"/>
           </a:xfrm>
           <a:prstGeom prst="rect">
@@ -6174,7 +6174,7 @@
         </p:nvSpPr>
         <p:spPr>
           <a:xfrm>
-            <a:off x="13246909" y="22448667"/>
+            <a:off x="22196357" y="16183130"/>
             <a:ext cx="926325" cy="540000"/>
           </a:xfrm>
           <a:prstGeom prst="rect">
@@ -6233,7 +6233,7 @@
         </p:nvSpPr>
         <p:spPr>
           <a:xfrm>
-            <a:off x="11399048" y="23252830"/>
+            <a:off x="20348496" y="16987293"/>
             <a:ext cx="926325" cy="540000"/>
           </a:xfrm>
           <a:prstGeom prst="rect">
@@ -6284,7 +6284,7 @@
         </p:nvSpPr>
         <p:spPr>
           <a:xfrm>
-            <a:off x="12008058" y="22448667"/>
+            <a:off x="20957506" y="16183130"/>
             <a:ext cx="926325" cy="540000"/>
           </a:xfrm>
           <a:prstGeom prst="rect">
@@ -6347,7 +6347,7 @@
         </p:nvCxnSpPr>
         <p:spPr>
           <a:xfrm rot="5400000">
-            <a:off x="12617168" y="21964773"/>
+            <a:off x="21566616" y="15699236"/>
             <a:ext cx="337947" cy="629840"/>
           </a:xfrm>
           <a:prstGeom prst="bentConnector3">
@@ -6392,7 +6392,7 @@
         </p:nvCxnSpPr>
         <p:spPr>
           <a:xfrm rot="16200000" flipH="1">
-            <a:off x="13236593" y="21975187"/>
+            <a:off x="22186041" y="15709650"/>
             <a:ext cx="337947" cy="609011"/>
           </a:xfrm>
           <a:prstGeom prst="bentConnector3">
@@ -6437,7 +6437,7 @@
         </p:nvCxnSpPr>
         <p:spPr>
           <a:xfrm rot="16200000" flipH="1">
-            <a:off x="12654060" y="22805827"/>
+            <a:off x="21603508" y="16540290"/>
             <a:ext cx="264163" cy="629841"/>
           </a:xfrm>
           <a:prstGeom prst="bentConnector3">
@@ -6483,7 +6483,7 @@
         </p:nvCxnSpPr>
         <p:spPr>
           <a:xfrm rot="5400000">
-            <a:off x="13273486" y="22816243"/>
+            <a:off x="22222934" y="16550706"/>
             <a:ext cx="264163" cy="609010"/>
           </a:xfrm>
           <a:prstGeom prst="bentConnector3">
@@ -6529,7 +6529,7 @@
         </p:nvCxnSpPr>
         <p:spPr>
           <a:xfrm rot="16200000" flipH="1">
-            <a:off x="13891434" y="22807305"/>
+            <a:off x="22840882" y="16541768"/>
             <a:ext cx="264163" cy="626886"/>
           </a:xfrm>
           <a:prstGeom prst="bentConnector3">
@@ -6574,7 +6574,7 @@
         </p:nvCxnSpPr>
         <p:spPr>
           <a:xfrm rot="5400000">
-            <a:off x="12034635" y="22816243"/>
+            <a:off x="20984083" y="16550706"/>
             <a:ext cx="264163" cy="609010"/>
           </a:xfrm>
           <a:prstGeom prst="bentConnector3">
@@ -6620,7 +6620,7 @@
         </p:nvCxnSpPr>
         <p:spPr>
           <a:xfrm rot="5400000">
-            <a:off x="12654061" y="22196818"/>
+            <a:off x="21603509" y="15931281"/>
             <a:ext cx="264163" cy="1847861"/>
           </a:xfrm>
           <a:prstGeom prst="bentConnector3">
@@ -6666,7 +6666,7 @@
         </p:nvCxnSpPr>
         <p:spPr>
           <a:xfrm flipH="1">
-            <a:off x="12325373" y="23522830"/>
+            <a:off x="21274821" y="17257293"/>
             <a:ext cx="312526" cy="0"/>
           </a:xfrm>
           <a:prstGeom prst="line">
@@ -6707,7 +6707,7 @@
         </p:nvSpPr>
         <p:spPr>
           <a:xfrm>
-            <a:off x="12639430" y="24070759"/>
+            <a:off x="21588878" y="17805222"/>
             <a:ext cx="926325" cy="540000"/>
           </a:xfrm>
           <a:prstGeom prst="rect">
@@ -6758,7 +6758,7 @@
         </p:nvSpPr>
         <p:spPr>
           <a:xfrm>
-            <a:off x="13875836" y="24070760"/>
+            <a:off x="22825284" y="17805223"/>
             <a:ext cx="926325" cy="540000"/>
           </a:xfrm>
           <a:prstGeom prst="rect">
@@ -6813,7 +6813,7 @@
         </p:nvCxnSpPr>
         <p:spPr>
           <a:xfrm rot="16200000" flipH="1">
-            <a:off x="12962863" y="23931028"/>
+            <a:off x="21912311" y="17665491"/>
             <a:ext cx="277929" cy="1531"/>
           </a:xfrm>
           <a:prstGeom prst="bentConnector3">
@@ -6858,7 +6858,7 @@
         </p:nvCxnSpPr>
         <p:spPr>
           <a:xfrm rot="16200000" flipH="1">
-            <a:off x="14199013" y="23930774"/>
+            <a:off x="23148461" y="17665237"/>
             <a:ext cx="277930" cy="2041"/>
           </a:xfrm>
           <a:prstGeom prst="bentConnector3">
@@ -6899,7 +6899,7 @@
         </p:nvSpPr>
         <p:spPr>
           <a:xfrm>
-            <a:off x="13874267" y="24844586"/>
+            <a:off x="22823715" y="18579049"/>
             <a:ext cx="926325" cy="540000"/>
           </a:xfrm>
           <a:prstGeom prst="rect">
@@ -6954,7 +6954,7 @@
         </p:nvCxnSpPr>
         <p:spPr>
           <a:xfrm rot="5400000">
-            <a:off x="14221302" y="24726889"/>
+            <a:off x="23170750" y="18461352"/>
             <a:ext cx="233826" cy="1569"/>
           </a:xfrm>
           <a:prstGeom prst="bentConnector3">
@@ -6995,7 +6995,7 @@
         </p:nvSpPr>
         <p:spPr>
           <a:xfrm>
-            <a:off x="7037300" y="17848340"/>
+            <a:off x="6340011" y="17778952"/>
             <a:ext cx="926325" cy="540000"/>
           </a:xfrm>
           <a:prstGeom prst="rect">
@@ -7046,7 +7046,7 @@
         </p:nvSpPr>
         <p:spPr>
           <a:xfrm>
-            <a:off x="7037299" y="19449149"/>
+            <a:off x="6340010" y="19379761"/>
             <a:ext cx="926325" cy="540000"/>
           </a:xfrm>
           <a:prstGeom prst="rect">
@@ -7097,7 +7097,7 @@
         </p:nvSpPr>
         <p:spPr>
           <a:xfrm>
-            <a:off x="6420079" y="18648440"/>
+            <a:off x="5722790" y="18579052"/>
             <a:ext cx="926325" cy="540000"/>
           </a:xfrm>
           <a:prstGeom prst="rect">
@@ -7148,7 +7148,7 @@
         </p:nvSpPr>
         <p:spPr>
           <a:xfrm>
-            <a:off x="7662139" y="18648440"/>
+            <a:off x="6964850" y="18579052"/>
             <a:ext cx="926325" cy="540000"/>
           </a:xfrm>
           <a:prstGeom prst="rect">
@@ -7203,7 +7203,7 @@
         </p:nvCxnSpPr>
         <p:spPr>
           <a:xfrm rot="5400000">
-            <a:off x="7061803" y="18209780"/>
+            <a:off x="6364514" y="18140392"/>
             <a:ext cx="260100" cy="617221"/>
           </a:xfrm>
           <a:prstGeom prst="bentConnector3">
@@ -7248,7 +7248,7 @@
         </p:nvCxnSpPr>
         <p:spPr>
           <a:xfrm rot="16200000" flipH="1">
-            <a:off x="7682832" y="18205970"/>
+            <a:off x="6985543" y="18136582"/>
             <a:ext cx="260100" cy="624839"/>
           </a:xfrm>
           <a:prstGeom prst="bentConnector3">
@@ -7289,7 +7289,7 @@
         </p:nvSpPr>
         <p:spPr>
           <a:xfrm>
-            <a:off x="8290308" y="20256529"/>
+            <a:off x="7593019" y="20187141"/>
             <a:ext cx="926325" cy="540000"/>
           </a:xfrm>
           <a:prstGeom prst="rect">
@@ -7340,7 +7340,7 @@
         </p:nvSpPr>
         <p:spPr>
           <a:xfrm>
-            <a:off x="8290309" y="19455819"/>
+            <a:off x="7593020" y="19386431"/>
             <a:ext cx="926325" cy="540000"/>
           </a:xfrm>
           <a:prstGeom prst="rect">
@@ -7395,7 +7395,7 @@
         </p:nvCxnSpPr>
         <p:spPr>
           <a:xfrm rot="16200000" flipH="1">
-            <a:off x="7593228" y="18295574"/>
+            <a:off x="6895939" y="18226186"/>
             <a:ext cx="1067479" cy="1253009"/>
           </a:xfrm>
           <a:prstGeom prst="bentConnector3">
@@ -7440,7 +7440,7 @@
         </p:nvCxnSpPr>
         <p:spPr>
           <a:xfrm rot="5400000">
-            <a:off x="8623117" y="20126174"/>
+            <a:off x="7925828" y="20056786"/>
             <a:ext cx="260710" cy="1"/>
           </a:xfrm>
           <a:prstGeom prst="bentConnector3">
@@ -7481,7 +7481,7 @@
         </p:nvSpPr>
         <p:spPr>
           <a:xfrm>
-            <a:off x="5178019" y="18648438"/>
+            <a:off x="4480730" y="18579050"/>
             <a:ext cx="926325" cy="540000"/>
           </a:xfrm>
           <a:prstGeom prst="rect">
@@ -7536,7 +7536,7 @@
         </p:nvCxnSpPr>
         <p:spPr>
           <a:xfrm rot="5400000">
-            <a:off x="6440774" y="17588749"/>
+            <a:off x="5743485" y="17519361"/>
             <a:ext cx="260098" cy="1859281"/>
           </a:xfrm>
           <a:prstGeom prst="bentConnector3">
@@ -7577,7 +7577,7 @@
         </p:nvSpPr>
         <p:spPr>
           <a:xfrm>
-            <a:off x="5180447" y="19449149"/>
+            <a:off x="4483158" y="19379761"/>
             <a:ext cx="926325" cy="540000"/>
           </a:xfrm>
           <a:prstGeom prst="rect">
@@ -7632,7 +7632,7 @@
         </p:nvCxnSpPr>
         <p:spPr>
           <a:xfrm rot="16200000" flipH="1">
-            <a:off x="5512041" y="19317579"/>
+            <a:off x="4814752" y="19248191"/>
             <a:ext cx="260711" cy="2428"/>
           </a:xfrm>
           <a:prstGeom prst="bentConnector3">
@@ -7673,7 +7673,7 @@
         </p:nvSpPr>
         <p:spPr>
           <a:xfrm>
-            <a:off x="7662139" y="15445563"/>
+            <a:off x="6964850" y="15376175"/>
             <a:ext cx="926325" cy="540000"/>
           </a:xfrm>
           <a:prstGeom prst="rect">
@@ -7724,7 +7724,7 @@
         </p:nvSpPr>
         <p:spPr>
           <a:xfrm>
-            <a:off x="7037298" y="16246906"/>
+            <a:off x="6340009" y="16177518"/>
             <a:ext cx="926325" cy="540000"/>
           </a:xfrm>
           <a:prstGeom prst="rect">
@@ -7775,7 +7775,7 @@
         </p:nvSpPr>
         <p:spPr>
           <a:xfrm>
-            <a:off x="7037298" y="20249858"/>
+            <a:off x="6340009" y="20180470"/>
             <a:ext cx="926325" cy="540000"/>
           </a:xfrm>
           <a:prstGeom prst="rect">
@@ -7831,7 +7831,7 @@
         </p:nvSpPr>
         <p:spPr>
           <a:xfrm>
-            <a:off x="6419302" y="14629750"/>
+            <a:off x="5722013" y="14560362"/>
             <a:ext cx="926325" cy="540000"/>
           </a:xfrm>
           <a:prstGeom prst="rect">
@@ -7882,7 +7882,7 @@
         </p:nvSpPr>
         <p:spPr>
           <a:xfrm>
-            <a:off x="7037299" y="17047623"/>
+            <a:off x="6340010" y="16978235"/>
             <a:ext cx="926325" cy="540000"/>
           </a:xfrm>
           <a:prstGeom prst="rect">
@@ -7938,7 +7938,7 @@
         </p:nvSpPr>
         <p:spPr>
           <a:xfrm>
-            <a:off x="8279358" y="17047620"/>
+            <a:off x="7582069" y="16978232"/>
             <a:ext cx="926325" cy="540000"/>
           </a:xfrm>
           <a:prstGeom prst="rect">
@@ -7990,7 +7990,7 @@
         </p:nvSpPr>
         <p:spPr>
           <a:xfrm>
-            <a:off x="8279359" y="16246906"/>
+            <a:off x="7582070" y="16177518"/>
             <a:ext cx="926325" cy="540000"/>
           </a:xfrm>
           <a:prstGeom prst="rect">
@@ -8041,7 +8041,7 @@
         </p:nvSpPr>
         <p:spPr>
           <a:xfrm>
-            <a:off x="6419303" y="15446188"/>
+            <a:off x="5722014" y="15376800"/>
             <a:ext cx="926325" cy="540000"/>
           </a:xfrm>
           <a:prstGeom prst="rect">
@@ -8092,7 +8092,7 @@
         </p:nvSpPr>
         <p:spPr>
           <a:xfrm>
-            <a:off x="5793358" y="16246905"/>
+            <a:off x="5096069" y="16177517"/>
             <a:ext cx="926325" cy="540000"/>
           </a:xfrm>
           <a:prstGeom prst="rect">
@@ -8143,7 +8143,7 @@
         </p:nvSpPr>
         <p:spPr>
           <a:xfrm>
-            <a:off x="5793359" y="17843906"/>
+            <a:off x="5096070" y="17774518"/>
             <a:ext cx="926325" cy="540000"/>
           </a:xfrm>
           <a:prstGeom prst="rect">
@@ -8194,7 +8194,7 @@
         </p:nvSpPr>
         <p:spPr>
           <a:xfrm>
-            <a:off x="5793358" y="17047620"/>
+            <a:off x="5096069" y="16978232"/>
             <a:ext cx="926325" cy="540000"/>
           </a:xfrm>
           <a:prstGeom prst="rect">
@@ -8245,7 +8245,7 @@
         </p:nvSpPr>
         <p:spPr>
           <a:xfrm>
-            <a:off x="5184370" y="15450619"/>
+            <a:off x="4487081" y="15381231"/>
             <a:ext cx="926325" cy="540000"/>
           </a:xfrm>
           <a:prstGeom prst="rect">
@@ -8394,7 +8394,7 @@
         </p:nvSpPr>
         <p:spPr>
           <a:xfrm>
-            <a:off x="8279357" y="17848337"/>
+            <a:off x="7582068" y="17778949"/>
             <a:ext cx="926325" cy="540000"/>
           </a:xfrm>
           <a:prstGeom prst="rect">
@@ -8462,7 +8462,7 @@
         </p:nvCxnSpPr>
         <p:spPr>
           <a:xfrm rot="16200000" flipH="1">
-            <a:off x="6128378" y="17715762"/>
+            <a:off x="5431089" y="17646374"/>
             <a:ext cx="256286" cy="1"/>
           </a:xfrm>
           <a:prstGeom prst="bentConnector3">
@@ -8507,7 +8507,7 @@
         </p:nvCxnSpPr>
         <p:spPr>
           <a:xfrm rot="5400000">
-            <a:off x="8612165" y="16917263"/>
+            <a:off x="7914876" y="16847875"/>
             <a:ext cx="260714" cy="1"/>
           </a:xfrm>
           <a:prstGeom prst="bentConnector3">
@@ -8552,7 +8552,7 @@
         </p:nvCxnSpPr>
         <p:spPr>
           <a:xfrm rot="5400000">
-            <a:off x="8612163" y="17717978"/>
+            <a:off x="7914874" y="17648590"/>
             <a:ext cx="260717" cy="1"/>
           </a:xfrm>
           <a:prstGeom prst="bentConnector3">
@@ -8597,7 +8597,7 @@
         </p:nvCxnSpPr>
         <p:spPr>
           <a:xfrm rot="16200000" flipH="1">
-            <a:off x="7370103" y="16917263"/>
+            <a:off x="6672814" y="16847875"/>
             <a:ext cx="260717" cy="1"/>
           </a:xfrm>
           <a:prstGeom prst="bentConnector3">
@@ -8643,7 +8643,7 @@
         </p:nvCxnSpPr>
         <p:spPr>
           <a:xfrm rot="5400000">
-            <a:off x="7991134" y="16296234"/>
+            <a:off x="7293845" y="16226846"/>
             <a:ext cx="260717" cy="1242060"/>
           </a:xfrm>
           <a:prstGeom prst="bentConnector3">
@@ -8689,7 +8689,7 @@
         </p:nvCxnSpPr>
         <p:spPr>
           <a:xfrm rot="5400000">
-            <a:off x="7991132" y="17096951"/>
+            <a:off x="7293843" y="17027563"/>
             <a:ext cx="260720" cy="1242058"/>
           </a:xfrm>
           <a:prstGeom prst="bentConnector3">
@@ -8735,7 +8735,7 @@
         </p:nvCxnSpPr>
         <p:spPr>
           <a:xfrm rot="16200000" flipH="1">
-            <a:off x="7370104" y="17717980"/>
+            <a:off x="6672815" y="17648592"/>
             <a:ext cx="260717" cy="1"/>
           </a:xfrm>
           <a:prstGeom prst="bentConnector3">
@@ -8777,7 +8777,7 @@
         </p:nvSpPr>
         <p:spPr>
           <a:xfrm>
-            <a:off x="4549418" y="16246905"/>
+            <a:off x="3852129" y="16177517"/>
             <a:ext cx="926325" cy="540000"/>
           </a:xfrm>
           <a:prstGeom prst="rect">
@@ -8832,7 +8832,7 @@
         </p:nvCxnSpPr>
         <p:spPr>
           <a:xfrm flipH="1">
-            <a:off x="5475743" y="16516905"/>
+            <a:off x="4778454" y="16447517"/>
             <a:ext cx="317615" cy="0"/>
           </a:xfrm>
           <a:prstGeom prst="line">
@@ -8873,7 +8873,7 @@
         </p:nvSpPr>
         <p:spPr>
           <a:xfrm>
-            <a:off x="4549417" y="17048029"/>
+            <a:off x="3852128" y="16978641"/>
             <a:ext cx="926325" cy="540000"/>
           </a:xfrm>
           <a:prstGeom prst="rect">
@@ -8928,7 +8928,7 @@
         </p:nvCxnSpPr>
         <p:spPr>
           <a:xfrm rot="5400000">
-            <a:off x="5201914" y="15801286"/>
+            <a:off x="4504625" y="15731898"/>
             <a:ext cx="256286" cy="634952"/>
           </a:xfrm>
           <a:prstGeom prst="bentConnector3">
@@ -8973,7 +8973,7 @@
         </p:nvCxnSpPr>
         <p:spPr>
           <a:xfrm rot="16200000" flipH="1">
-            <a:off x="5823884" y="15814268"/>
+            <a:off x="5126595" y="15744880"/>
             <a:ext cx="256286" cy="608988"/>
           </a:xfrm>
           <a:prstGeom prst="bentConnector3">
@@ -9018,7 +9018,7 @@
         </p:nvCxnSpPr>
         <p:spPr>
           <a:xfrm rot="5400000">
-            <a:off x="5503989" y="16295497"/>
+            <a:off x="4806700" y="16226109"/>
             <a:ext cx="261124" cy="1243941"/>
           </a:xfrm>
           <a:prstGeom prst="bentConnector3">
@@ -9064,7 +9064,7 @@
         </p:nvCxnSpPr>
         <p:spPr>
           <a:xfrm rot="5400000">
-            <a:off x="4882019" y="16917467"/>
+            <a:off x="4184730" y="16848079"/>
             <a:ext cx="261124" cy="1"/>
           </a:xfrm>
           <a:prstGeom prst="bentConnector3">
@@ -9110,7 +9110,7 @@
         </p:nvCxnSpPr>
         <p:spPr>
           <a:xfrm rot="16200000" flipH="1">
-            <a:off x="5504194" y="16295292"/>
+            <a:off x="4806905" y="16225904"/>
             <a:ext cx="260715" cy="1243940"/>
           </a:xfrm>
           <a:prstGeom prst="bentConnector3">
@@ -9156,7 +9156,7 @@
         </p:nvCxnSpPr>
         <p:spPr>
           <a:xfrm rot="5400000">
-            <a:off x="6126164" y="16917262"/>
+            <a:off x="5428875" y="16847874"/>
             <a:ext cx="260715" cy="12700"/>
           </a:xfrm>
           <a:prstGeom prst="bentConnector3">
@@ -9202,7 +9202,7 @@
         </p:nvCxnSpPr>
         <p:spPr>
           <a:xfrm rot="16200000" flipH="1">
-            <a:off x="6744246" y="15307968"/>
+            <a:off x="6046957" y="15238580"/>
             <a:ext cx="276438" cy="1"/>
           </a:xfrm>
           <a:prstGeom prst="bentConnector3">
@@ -9248,7 +9248,7 @@
         </p:nvCxnSpPr>
         <p:spPr>
           <a:xfrm rot="16200000" flipH="1">
-            <a:off x="7061104" y="15807549"/>
+            <a:off x="6363815" y="15738161"/>
             <a:ext cx="260718" cy="617995"/>
           </a:xfrm>
           <a:prstGeom prst="bentConnector3">
@@ -9294,7 +9294,7 @@
         </p:nvCxnSpPr>
         <p:spPr>
           <a:xfrm rot="16200000" flipH="1">
-            <a:off x="8303241" y="15807624"/>
+            <a:off x="7605952" y="15738236"/>
             <a:ext cx="261343" cy="617220"/>
           </a:xfrm>
           <a:prstGeom prst="bentConnector3">
@@ -9339,7 +9339,7 @@
         </p:nvCxnSpPr>
         <p:spPr>
           <a:xfrm rot="16200000" flipH="1">
-            <a:off x="5017144" y="16782341"/>
+            <a:off x="4319855" y="16712953"/>
             <a:ext cx="1861535" cy="1870661"/>
           </a:xfrm>
           <a:prstGeom prst="bentConnector3">
@@ -9385,7 +9385,7 @@
         </p:nvCxnSpPr>
         <p:spPr>
           <a:xfrm rot="16200000" flipH="1">
-            <a:off x="5639114" y="17404311"/>
+            <a:off x="4941825" y="17334923"/>
             <a:ext cx="1861535" cy="626721"/>
           </a:xfrm>
           <a:prstGeom prst="bentConnector3">
@@ -9431,7 +9431,7 @@
         </p:nvCxnSpPr>
         <p:spPr>
           <a:xfrm rot="16200000" flipH="1">
-            <a:off x="5638174" y="16161311"/>
+            <a:off x="4940885" y="16091923"/>
             <a:ext cx="1861535" cy="3112721"/>
           </a:xfrm>
           <a:prstGeom prst="bentConnector3">
@@ -9477,7 +9477,7 @@
         </p:nvCxnSpPr>
         <p:spPr>
           <a:xfrm rot="16200000" flipH="1">
-            <a:off x="6260144" y="16783281"/>
+            <a:off x="5562855" y="16713893"/>
             <a:ext cx="1861535" cy="1868781"/>
           </a:xfrm>
           <a:prstGeom prst="bentConnector3">
@@ -9523,7 +9523,7 @@
         </p:nvCxnSpPr>
         <p:spPr>
           <a:xfrm rot="5400000">
-            <a:off x="7370108" y="20119503"/>
+            <a:off x="6672819" y="20050115"/>
             <a:ext cx="260709" cy="1"/>
           </a:xfrm>
           <a:prstGeom prst="bentConnector3">
@@ -9609,7 +9609,7 @@
         </p:nvSpPr>
         <p:spPr>
           <a:xfrm>
-            <a:off x="4549416" y="17838438"/>
+            <a:off x="3852127" y="17769050"/>
             <a:ext cx="926325" cy="540000"/>
           </a:xfrm>
           <a:prstGeom prst="rect">
@@ -9665,7 +9665,7 @@
         </p:nvCxnSpPr>
         <p:spPr>
           <a:xfrm rot="5400000">
-            <a:off x="5509141" y="17091058"/>
+            <a:off x="4811852" y="17021670"/>
             <a:ext cx="250818" cy="1243942"/>
           </a:xfrm>
           <a:prstGeom prst="bentConnector3">
@@ -9710,7 +9710,7 @@
         </p:nvCxnSpPr>
         <p:spPr>
           <a:xfrm rot="5400000">
-            <a:off x="6124565" y="14692718"/>
+            <a:off x="5427276" y="14623330"/>
             <a:ext cx="280869" cy="1234932"/>
           </a:xfrm>
           <a:prstGeom prst="bentConnector3">
@@ -9756,7 +9756,7 @@
         </p:nvCxnSpPr>
         <p:spPr>
           <a:xfrm rot="16200000" flipH="1">
-            <a:off x="7365977" y="14686237"/>
+            <a:off x="6668688" y="14616849"/>
             <a:ext cx="275813" cy="1242837"/>
           </a:xfrm>
           <a:prstGeom prst="bentConnector3">
@@ -9983,7 +9983,7 @@
             <a:pPr algn="ctr"/>
             <a:r>
               <a:rPr lang="ru-RU" sz="700" dirty="0"/>
-              <a:t>Провести «взрывные работы» шахтёров</a:t>
+              <a:t>Подготовить «взрывные работы» шахтёров</a:t>
             </a:r>
           </a:p>
         </p:txBody>
@@ -10085,7 +10085,7 @@
             <a:pPr algn="ctr"/>
             <a:r>
               <a:rPr lang="ru-RU" sz="700" dirty="0"/>
-              <a:t>Мобилизовать племена Атласа</a:t>
+              <a:t>Заручиться поддержкой племён Атласа</a:t>
             </a:r>
           </a:p>
         </p:txBody>
@@ -10374,7 +10374,7 @@
         </p:nvSpPr>
         <p:spPr>
           <a:xfrm>
-            <a:off x="15900594" y="4237653"/>
+            <a:off x="15309318" y="4237653"/>
             <a:ext cx="926325" cy="540000"/>
           </a:xfrm>
           <a:prstGeom prst="rect">
@@ -10425,7 +10425,7 @@
         </p:nvSpPr>
         <p:spPr>
           <a:xfrm>
-            <a:off x="17087897" y="4237653"/>
+            <a:off x="17686865" y="4243562"/>
             <a:ext cx="926325" cy="540000"/>
           </a:xfrm>
           <a:prstGeom prst="rect">
@@ -10661,8 +10661,8 @@
         </p:nvCxnSpPr>
         <p:spPr>
           <a:xfrm rot="16200000" flipH="1">
-            <a:off x="17121893" y="3808486"/>
-            <a:ext cx="269998" cy="588335"/>
+            <a:off x="17418423" y="3511956"/>
+            <a:ext cx="275907" cy="1187303"/>
           </a:xfrm>
           <a:prstGeom prst="bentConnector3">
             <a:avLst>
@@ -10707,8 +10707,8 @@
         </p:nvCxnSpPr>
         <p:spPr>
           <a:xfrm rot="5400000">
-            <a:off x="17716431" y="3802284"/>
-            <a:ext cx="269998" cy="600740"/>
+            <a:off x="18012961" y="4104722"/>
+            <a:ext cx="275907" cy="1772"/>
           </a:xfrm>
           <a:prstGeom prst="bentConnector3">
             <a:avLst>
@@ -10753,8 +10753,8 @@
         </p:nvCxnSpPr>
         <p:spPr>
           <a:xfrm rot="16200000" flipH="1">
-            <a:off x="16527356" y="3213948"/>
-            <a:ext cx="269999" cy="1777410"/>
+            <a:off x="16823885" y="2917419"/>
+            <a:ext cx="275908" cy="2376378"/>
           </a:xfrm>
           <a:prstGeom prst="bentConnector3">
             <a:avLst>
@@ -10798,9 +10798,9 @@
           <p:nvPr/>
         </p:nvCxnSpPr>
         <p:spPr>
-          <a:xfrm rot="16200000" flipH="1">
-            <a:off x="15933704" y="3807599"/>
-            <a:ext cx="269999" cy="590107"/>
+          <a:xfrm rot="5400000">
+            <a:off x="15638067" y="4102069"/>
+            <a:ext cx="269999" cy="1169"/>
           </a:xfrm>
           <a:prstGeom prst="bentConnector3">
             <a:avLst>
@@ -10845,8 +10845,8 @@
         </p:nvCxnSpPr>
         <p:spPr>
           <a:xfrm rot="5400000">
-            <a:off x="16528242" y="3803170"/>
-            <a:ext cx="269998" cy="598968"/>
+            <a:off x="16232604" y="3507532"/>
+            <a:ext cx="269998" cy="1190244"/>
           </a:xfrm>
           <a:prstGeom prst="bentConnector3">
             <a:avLst>
@@ -10891,8 +10891,8 @@
         </p:nvCxnSpPr>
         <p:spPr>
           <a:xfrm rot="5400000">
-            <a:off x="17122780" y="3208633"/>
-            <a:ext cx="269998" cy="1788043"/>
+            <a:off x="16827142" y="2912995"/>
+            <a:ext cx="269998" cy="2379319"/>
           </a:xfrm>
           <a:prstGeom prst="bentConnector3">
             <a:avLst>
@@ -10965,7 +10965,7 @@
             <a:pPr algn="ctr"/>
             <a:r>
               <a:rPr lang="ru-RU" sz="700" dirty="0"/>
-              <a:t>Согласовать новое правительство Марокко</a:t>
+              <a:t>Новое правительство Марокко согласовано</a:t>
             </a:r>
           </a:p>
         </p:txBody>
@@ -13291,7 +13291,7 @@
         </p:nvSpPr>
         <p:spPr>
           <a:xfrm>
-            <a:off x="11395711" y="24068112"/>
+            <a:off x="20345159" y="17802575"/>
             <a:ext cx="926325" cy="540000"/>
           </a:xfrm>
           <a:prstGeom prst="rect">
@@ -13348,7 +13348,7 @@
         </p:nvSpPr>
         <p:spPr>
           <a:xfrm>
-            <a:off x="8225732" y="22442205"/>
+            <a:off x="17379316" y="16176668"/>
             <a:ext cx="926325" cy="540000"/>
           </a:xfrm>
           <a:prstGeom prst="rect">
@@ -13404,7 +13404,7 @@
         </p:nvSpPr>
         <p:spPr>
           <a:xfrm>
-            <a:off x="5782025" y="22446287"/>
+            <a:off x="16237141" y="16183130"/>
             <a:ext cx="926325" cy="540000"/>
           </a:xfrm>
           <a:prstGeom prst="rect">
@@ -13455,7 +13455,7 @@
         </p:nvSpPr>
         <p:spPr>
           <a:xfrm>
-            <a:off x="6983007" y="21568340"/>
+            <a:off x="16789451" y="15325030"/>
             <a:ext cx="926325" cy="540000"/>
           </a:xfrm>
           <a:prstGeom prst="rect">
@@ -13506,7 +13506,7 @@
         </p:nvSpPr>
         <p:spPr>
           <a:xfrm>
-            <a:off x="10895421" y="22446287"/>
+            <a:off x="19844869" y="16180750"/>
             <a:ext cx="926325" cy="540000"/>
           </a:xfrm>
           <a:prstGeom prst="rect">
@@ -13557,7 +13557,7 @@
         </p:nvSpPr>
         <p:spPr>
           <a:xfrm>
-            <a:off x="10279833" y="21568340"/>
+            <a:off x="19229281" y="15302803"/>
             <a:ext cx="926325" cy="540000"/>
           </a:xfrm>
           <a:prstGeom prst="rect">
@@ -13608,7 +13608,7 @@
         </p:nvSpPr>
         <p:spPr>
           <a:xfrm>
-            <a:off x="9709105" y="22446287"/>
+            <a:off x="18658553" y="16180750"/>
             <a:ext cx="926325" cy="540000"/>
           </a:xfrm>
           <a:prstGeom prst="rect">
@@ -13664,7 +13664,7 @@
         </p:nvSpPr>
         <p:spPr>
           <a:xfrm>
-            <a:off x="8903901" y="23252830"/>
+            <a:off x="18013349" y="17802575"/>
             <a:ext cx="926325" cy="540000"/>
           </a:xfrm>
           <a:prstGeom prst="rect">
@@ -13719,12 +13719,12 @@
         </p:nvCxnSpPr>
         <p:spPr>
           <a:xfrm rot="5400000">
-            <a:off x="10663008" y="20814777"/>
-            <a:ext cx="1142110" cy="3733997"/>
+            <a:off x="19284815" y="15036881"/>
+            <a:ext cx="1957392" cy="3573997"/>
           </a:xfrm>
           <a:prstGeom prst="bentConnector3">
             <a:avLst>
-              <a:gd name="adj1" fmla="val 14417"/>
+              <a:gd name="adj1" fmla="val 8475"/>
             </a:avLst>
           </a:prstGeom>
           <a:ln w="19050">
@@ -13764,12 +13764,12 @@
         </p:nvCxnSpPr>
         <p:spPr>
           <a:xfrm rot="16200000" flipH="1">
-            <a:off x="7834372" y="21720138"/>
-            <a:ext cx="1144490" cy="1920894"/>
+            <a:off x="16895791" y="16221853"/>
+            <a:ext cx="1937545" cy="1223898"/>
           </a:xfrm>
           <a:prstGeom prst="bentConnector3">
             <a:avLst>
-              <a:gd name="adj1" fmla="val 14490"/>
+              <a:gd name="adj1" fmla="val 8050"/>
             </a:avLst>
           </a:prstGeom>
           <a:ln w="19050">
@@ -13809,12 +13809,12 @@
         </p:nvCxnSpPr>
         <p:spPr>
           <a:xfrm rot="5400000">
-            <a:off x="9482785" y="21992619"/>
-            <a:ext cx="1144490" cy="1375932"/>
+            <a:off x="18104592" y="16214723"/>
+            <a:ext cx="1959772" cy="1215932"/>
           </a:xfrm>
           <a:prstGeom prst="bentConnector3">
             <a:avLst>
-              <a:gd name="adj1" fmla="val 14491"/>
+              <a:gd name="adj1" fmla="val 8850"/>
             </a:avLst>
           </a:prstGeom>
           <a:ln w="19050">
@@ -16811,7 +16811,7 @@
         </p:nvCxnSpPr>
         <p:spPr>
           <a:xfrm rot="5400000">
-            <a:off x="7682528" y="19006374"/>
+            <a:off x="6985239" y="18936986"/>
             <a:ext cx="260709" cy="624840"/>
           </a:xfrm>
           <a:prstGeom prst="bentConnector3">
@@ -16856,7 +16856,7 @@
         </p:nvCxnSpPr>
         <p:spPr>
           <a:xfrm rot="16200000" flipH="1">
-            <a:off x="7061498" y="19010184"/>
+            <a:off x="6364209" y="18940796"/>
             <a:ext cx="260709" cy="617220"/>
           </a:xfrm>
           <a:prstGeom prst="bentConnector3">
@@ -17101,7 +17101,7 @@
         </p:nvSpPr>
         <p:spPr>
           <a:xfrm>
-            <a:off x="10895420" y="24844586"/>
+            <a:off x="19844868" y="18579049"/>
             <a:ext cx="926325" cy="540000"/>
           </a:xfrm>
           <a:prstGeom prst="rect">
@@ -17156,7 +17156,7 @@
         </p:nvCxnSpPr>
         <p:spPr>
           <a:xfrm rot="5400000">
-            <a:off x="11084519" y="24066894"/>
+            <a:off x="20033967" y="17801357"/>
             <a:ext cx="1051756" cy="503628"/>
           </a:xfrm>
           <a:prstGeom prst="bentConnector3">
@@ -17200,7 +17200,7 @@
         </p:nvCxnSpPr>
         <p:spPr>
           <a:xfrm rot="16200000" flipH="1">
-            <a:off x="11723996" y="23931045"/>
+            <a:off x="20673444" y="17665508"/>
             <a:ext cx="277929" cy="1498"/>
           </a:xfrm>
           <a:prstGeom prst="bentConnector3">
@@ -17295,7 +17295,7 @@
         </p:nvSpPr>
         <p:spPr>
           <a:xfrm>
-            <a:off x="9707225" y="24070758"/>
+            <a:off x="19223009" y="17802575"/>
             <a:ext cx="926325" cy="540000"/>
           </a:xfrm>
           <a:prstGeom prst="rect">
@@ -17344,7 +17344,7 @@
         </p:nvSpPr>
         <p:spPr>
           <a:xfrm>
-            <a:off x="9707450" y="24844586"/>
+            <a:off x="18656898" y="18579049"/>
             <a:ext cx="926325" cy="540000"/>
           </a:xfrm>
           <a:prstGeom prst="rect">
@@ -17396,9 +17396,9 @@
           <p:nvPr/>
         </p:nvCxnSpPr>
         <p:spPr>
-          <a:xfrm rot="16200000" flipH="1">
-            <a:off x="10053586" y="24727559"/>
-            <a:ext cx="233828" cy="225"/>
+          <a:xfrm rot="5400000">
+            <a:off x="19284880" y="18177757"/>
+            <a:ext cx="236474" cy="566111"/>
           </a:xfrm>
           <a:prstGeom prst="bentConnector3">
             <a:avLst>
@@ -19995,12 +19995,8 @@
           <a:p>
             <a:pPr algn="ctr"/>
             <a:r>
-              <a:rPr lang="ru-RU" sz="700" dirty="0" err="1"/>
-              <a:t>Мароккансая</a:t>
-            </a:r>
-            <a:r>
               <a:rPr lang="ru-RU" sz="700" dirty="0"/>
-              <a:t> молодёжная коммунистическая партия</a:t>
+              <a:t>Марокканская молодёжная коммунистическая партия</a:t>
             </a:r>
           </a:p>
         </p:txBody>
@@ -23272,7 +23268,7 @@
         </p:nvCxnSpPr>
         <p:spPr>
           <a:xfrm rot="5400000">
-            <a:off x="10288659" y="21991949"/>
+            <a:off x="19238107" y="15726412"/>
             <a:ext cx="337947" cy="570728"/>
           </a:xfrm>
           <a:prstGeom prst="bentConnector3">
@@ -23317,7 +23313,7 @@
         </p:nvCxnSpPr>
         <p:spPr>
           <a:xfrm rot="16200000" flipH="1">
-            <a:off x="10881817" y="21969519"/>
+            <a:off x="19831265" y="15703982"/>
             <a:ext cx="337947" cy="615588"/>
           </a:xfrm>
           <a:prstGeom prst="bentConnector3">
@@ -23362,8 +23358,8 @@
         </p:nvCxnSpPr>
         <p:spPr>
           <a:xfrm rot="5400000">
-            <a:off x="6676706" y="21676822"/>
-            <a:ext cx="337947" cy="1200982"/>
+            <a:off x="16817409" y="15747925"/>
+            <a:ext cx="318100" cy="552310"/>
           </a:xfrm>
           <a:prstGeom prst="bentConnector3">
             <a:avLst>
@@ -23407,8 +23403,8 @@
         </p:nvCxnSpPr>
         <p:spPr>
           <a:xfrm rot="16200000" flipH="1">
-            <a:off x="7900600" y="21653909"/>
-            <a:ext cx="333865" cy="1242725"/>
+            <a:off x="17391727" y="15725916"/>
+            <a:ext cx="311638" cy="589865"/>
           </a:xfrm>
           <a:prstGeom prst="bentConnector3">
             <a:avLst>
@@ -23448,7 +23444,7 @@
         </p:nvSpPr>
         <p:spPr>
           <a:xfrm>
-            <a:off x="6979136" y="23246997"/>
+            <a:off x="17379317" y="16970475"/>
             <a:ext cx="926325" cy="540000"/>
           </a:xfrm>
           <a:prstGeom prst="rect">
@@ -23506,9 +23502,9 @@
           <p:nvPr/>
         </p:nvCxnSpPr>
         <p:spPr>
-          <a:xfrm rot="5400000">
-            <a:off x="7933201" y="22491303"/>
-            <a:ext cx="264792" cy="1246596"/>
+          <a:xfrm rot="16200000" flipH="1">
+            <a:off x="17715576" y="16843570"/>
+            <a:ext cx="253807" cy="1"/>
           </a:xfrm>
           <a:prstGeom prst="bentConnector3">
             <a:avLst>
@@ -23552,8 +23548,8 @@
         </p:nvCxnSpPr>
         <p:spPr>
           <a:xfrm rot="16200000" flipH="1">
-            <a:off x="6713388" y="22518086"/>
-            <a:ext cx="260710" cy="1197111"/>
+            <a:off x="17147720" y="16275714"/>
+            <a:ext cx="247345" cy="1142176"/>
           </a:xfrm>
           <a:prstGeom prst="bentConnector3">
             <a:avLst>
@@ -23593,7 +23589,7 @@
         </p:nvSpPr>
         <p:spPr>
           <a:xfrm>
-            <a:off x="5781537" y="24073729"/>
+            <a:off x="16235643" y="16970473"/>
             <a:ext cx="926325" cy="540000"/>
           </a:xfrm>
           <a:prstGeom prst="rect">
@@ -23652,8 +23648,8 @@
         </p:nvCxnSpPr>
         <p:spPr>
           <a:xfrm rot="5400000">
-            <a:off x="5701223" y="23529764"/>
-            <a:ext cx="1087442" cy="488"/>
+            <a:off x="16575884" y="16846052"/>
+            <a:ext cx="247343" cy="1498"/>
           </a:xfrm>
           <a:prstGeom prst="bentConnector3">
             <a:avLst>
@@ -23697,7 +23693,7 @@
         </p:nvCxnSpPr>
         <p:spPr>
           <a:xfrm rot="5400000">
-            <a:off x="7682211" y="15803814"/>
+            <a:off x="6984922" y="15734426"/>
             <a:ext cx="261343" cy="624841"/>
           </a:xfrm>
           <a:prstGeom prst="bentConnector3">
@@ -23742,7 +23738,7 @@
         </p:nvCxnSpPr>
         <p:spPr>
           <a:xfrm rot="16200000" flipH="1">
-            <a:off x="7991134" y="17096951"/>
+            <a:off x="7293845" y="17027563"/>
             <a:ext cx="260714" cy="1242058"/>
           </a:xfrm>
           <a:prstGeom prst="bentConnector3">
@@ -24075,8 +24071,8 @@
         </p:nvCxnSpPr>
         <p:spPr>
           <a:xfrm rot="5400000">
-            <a:off x="10877336" y="23085883"/>
-            <a:ext cx="277928" cy="1691823"/>
+            <a:off x="20111275" y="17102191"/>
+            <a:ext cx="275282" cy="1125487"/>
           </a:xfrm>
           <a:prstGeom prst="bentConnector3">
             <a:avLst>
@@ -24084,6 +24080,338 @@
             </a:avLst>
           </a:prstGeom>
           <a:ln w="19050">
+            <a:tailEnd type="arrow"/>
+          </a:ln>
+        </p:spPr>
+        <p:style>
+          <a:lnRef idx="1">
+            <a:schemeClr val="accent1"/>
+          </a:lnRef>
+          <a:fillRef idx="0">
+            <a:schemeClr val="accent1"/>
+          </a:fillRef>
+          <a:effectRef idx="0">
+            <a:schemeClr val="accent1"/>
+          </a:effectRef>
+          <a:fontRef idx="minor">
+            <a:schemeClr val="tx1"/>
+          </a:fontRef>
+        </p:style>
+      </p:cxnSp>
+      <p:sp>
+        <p:nvSpPr>
+          <p:cNvPr id="463" name="Прямоугольник 462">
+            <a:extLst>
+              <a:ext uri="{FF2B5EF4-FFF2-40B4-BE49-F238E27FC236}">
+                <a16:creationId xmlns:a16="http://schemas.microsoft.com/office/drawing/2014/main" id="{1928A585-78DB-4152-8382-87127146FBBB}"/>
+              </a:ext>
+            </a:extLst>
+          </p:cNvPr>
+          <p:cNvSpPr/>
+          <p:nvPr/>
+        </p:nvSpPr>
+        <p:spPr>
+          <a:xfrm>
+            <a:off x="18285833" y="9922511"/>
+            <a:ext cx="926325" cy="540000"/>
+          </a:xfrm>
+          <a:prstGeom prst="rect">
+            <a:avLst/>
+          </a:prstGeom>
+          <a:solidFill>
+            <a:srgbClr val="FF0000"/>
+          </a:solidFill>
+          <a:ln w="19050"/>
+        </p:spPr>
+        <p:style>
+          <a:lnRef idx="2">
+            <a:schemeClr val="accent1"/>
+          </a:lnRef>
+          <a:fillRef idx="1">
+            <a:schemeClr val="lt1"/>
+          </a:fillRef>
+          <a:effectRef idx="0">
+            <a:schemeClr val="accent1"/>
+          </a:effectRef>
+          <a:fontRef idx="minor">
+            <a:schemeClr val="dk1"/>
+          </a:fontRef>
+        </p:style>
+        <p:txBody>
+          <a:bodyPr lIns="124733" tIns="62367" rIns="124733" bIns="62367" rtlCol="0" anchor="ctr"/>
+          <a:lstStyle/>
+          <a:p>
+            <a:pPr algn="ctr"/>
+            <a:r>
+              <a:rPr lang="ru-RU" sz="700" dirty="0"/>
+              <a:t>Аннексировать Танжер</a:t>
+            </a:r>
+          </a:p>
+        </p:txBody>
+      </p:sp>
+      <p:sp>
+        <p:nvSpPr>
+          <p:cNvPr id="501" name="Прямоугольник 500">
+            <a:extLst>
+              <a:ext uri="{FF2B5EF4-FFF2-40B4-BE49-F238E27FC236}">
+                <a16:creationId xmlns:a16="http://schemas.microsoft.com/office/drawing/2014/main" id="{649F8C28-D048-4EDB-A3A4-294B15A3C87F}"/>
+              </a:ext>
+            </a:extLst>
+          </p:cNvPr>
+          <p:cNvSpPr/>
+          <p:nvPr/>
+        </p:nvSpPr>
+        <p:spPr>
+          <a:xfrm>
+            <a:off x="16499561" y="4241395"/>
+            <a:ext cx="926325" cy="540000"/>
+          </a:xfrm>
+          <a:prstGeom prst="rect">
+            <a:avLst/>
+          </a:prstGeom>
+          <a:solidFill>
+            <a:srgbClr val="FF0000"/>
+          </a:solidFill>
+          <a:ln w="19050"/>
+        </p:spPr>
+        <p:style>
+          <a:lnRef idx="2">
+            <a:schemeClr val="accent1"/>
+          </a:lnRef>
+          <a:fillRef idx="1">
+            <a:schemeClr val="lt1"/>
+          </a:fillRef>
+          <a:effectRef idx="0">
+            <a:schemeClr val="accent1"/>
+          </a:effectRef>
+          <a:fontRef idx="minor">
+            <a:schemeClr val="dk1"/>
+          </a:fontRef>
+        </p:style>
+        <p:txBody>
+          <a:bodyPr lIns="124733" tIns="62367" rIns="124733" bIns="62367" rtlCol="0" anchor="ctr"/>
+          <a:lstStyle/>
+          <a:p>
+            <a:pPr algn="ctr"/>
+            <a:r>
+              <a:rPr lang="ru-RU" sz="700" dirty="0"/>
+              <a:t>Заявить о претензиях на бывшие территории</a:t>
+            </a:r>
+          </a:p>
+        </p:txBody>
+      </p:sp>
+      <p:cxnSp>
+        <p:nvCxnSpPr>
+          <p:cNvPr id="502" name="Соединительная линия уступом 620">
+            <a:extLst>
+              <a:ext uri="{FF2B5EF4-FFF2-40B4-BE49-F238E27FC236}">
+                <a16:creationId xmlns:a16="http://schemas.microsoft.com/office/drawing/2014/main" id="{F38D5ED2-F819-4BDE-AAB4-7D5A045218A0}"/>
+              </a:ext>
+            </a:extLst>
+          </p:cNvPr>
+          <p:cNvCxnSpPr>
+            <a:cxnSpLocks/>
+            <a:stCxn id="184" idx="2"/>
+            <a:endCxn id="501" idx="0"/>
+          </p:cNvCxnSpPr>
+          <p:nvPr/>
+        </p:nvCxnSpPr>
+        <p:spPr>
+          <a:xfrm rot="5400000">
+            <a:off x="17420392" y="3509987"/>
+            <a:ext cx="273740" cy="1189076"/>
+          </a:xfrm>
+          <a:prstGeom prst="bentConnector3">
+            <a:avLst>
+              <a:gd name="adj1" fmla="val 50000"/>
+            </a:avLst>
+          </a:prstGeom>
+          <a:ln w="19050">
+            <a:prstDash val="dash"/>
+            <a:tailEnd type="arrow"/>
+          </a:ln>
+        </p:spPr>
+        <p:style>
+          <a:lnRef idx="1">
+            <a:schemeClr val="accent1"/>
+          </a:lnRef>
+          <a:fillRef idx="0">
+            <a:schemeClr val="accent1"/>
+          </a:fillRef>
+          <a:effectRef idx="0">
+            <a:schemeClr val="accent1"/>
+          </a:effectRef>
+          <a:fontRef idx="minor">
+            <a:schemeClr val="tx1"/>
+          </a:fontRef>
+        </p:style>
+      </p:cxnSp>
+      <p:cxnSp>
+        <p:nvCxnSpPr>
+          <p:cNvPr id="520" name="Соединительная линия уступом 620">
+            <a:extLst>
+              <a:ext uri="{FF2B5EF4-FFF2-40B4-BE49-F238E27FC236}">
+                <a16:creationId xmlns:a16="http://schemas.microsoft.com/office/drawing/2014/main" id="{E26421C7-9095-459B-AAF7-DC9A8E9F2A7D}"/>
+              </a:ext>
+            </a:extLst>
+          </p:cNvPr>
+          <p:cNvCxnSpPr>
+            <a:cxnSpLocks/>
+            <a:stCxn id="183" idx="2"/>
+            <a:endCxn id="501" idx="0"/>
+          </p:cNvCxnSpPr>
+          <p:nvPr/>
+        </p:nvCxnSpPr>
+        <p:spPr>
+          <a:xfrm rot="5400000">
+            <a:off x="16825855" y="4104525"/>
+            <a:ext cx="273740" cy="1"/>
+          </a:xfrm>
+          <a:prstGeom prst="bentConnector3">
+            <a:avLst>
+              <a:gd name="adj1" fmla="val 50000"/>
+            </a:avLst>
+          </a:prstGeom>
+          <a:ln w="19050">
+            <a:prstDash val="dash"/>
+            <a:tailEnd type="arrow"/>
+          </a:ln>
+        </p:spPr>
+        <p:style>
+          <a:lnRef idx="1">
+            <a:schemeClr val="accent1"/>
+          </a:lnRef>
+          <a:fillRef idx="0">
+            <a:schemeClr val="accent1"/>
+          </a:fillRef>
+          <a:effectRef idx="0">
+            <a:schemeClr val="accent1"/>
+          </a:effectRef>
+          <a:fontRef idx="minor">
+            <a:schemeClr val="tx1"/>
+          </a:fontRef>
+        </p:style>
+      </p:cxnSp>
+      <p:cxnSp>
+        <p:nvCxnSpPr>
+          <p:cNvPr id="521" name="Соединительная линия уступом 620">
+            <a:extLst>
+              <a:ext uri="{FF2B5EF4-FFF2-40B4-BE49-F238E27FC236}">
+                <a16:creationId xmlns:a16="http://schemas.microsoft.com/office/drawing/2014/main" id="{96A584EB-0D31-408E-B540-1D97D896076F}"/>
+              </a:ext>
+            </a:extLst>
+          </p:cNvPr>
+          <p:cNvCxnSpPr>
+            <a:cxnSpLocks/>
+            <a:stCxn id="185" idx="2"/>
+            <a:endCxn id="501" idx="0"/>
+          </p:cNvCxnSpPr>
+          <p:nvPr/>
+        </p:nvCxnSpPr>
+        <p:spPr>
+          <a:xfrm rot="16200000" flipH="1">
+            <a:off x="16231317" y="3509987"/>
+            <a:ext cx="273741" cy="1189074"/>
+          </a:xfrm>
+          <a:prstGeom prst="bentConnector3">
+            <a:avLst>
+              <a:gd name="adj1" fmla="val 50000"/>
+            </a:avLst>
+          </a:prstGeom>
+          <a:ln w="19050">
+            <a:prstDash val="dash"/>
+            <a:tailEnd type="arrow"/>
+          </a:ln>
+        </p:spPr>
+        <p:style>
+          <a:lnRef idx="1">
+            <a:schemeClr val="accent1"/>
+          </a:lnRef>
+          <a:fillRef idx="0">
+            <a:schemeClr val="accent1"/>
+          </a:fillRef>
+          <a:effectRef idx="0">
+            <a:schemeClr val="accent1"/>
+          </a:effectRef>
+          <a:fontRef idx="minor">
+            <a:schemeClr val="tx1"/>
+          </a:fontRef>
+        </p:style>
+      </p:cxnSp>
+      <p:cxnSp>
+        <p:nvCxnSpPr>
+          <p:cNvPr id="525" name="Соединительная линия уступом 620">
+            <a:extLst>
+              <a:ext uri="{FF2B5EF4-FFF2-40B4-BE49-F238E27FC236}">
+                <a16:creationId xmlns:a16="http://schemas.microsoft.com/office/drawing/2014/main" id="{C95797ED-9477-4446-B74B-869565F2769D}"/>
+              </a:ext>
+            </a:extLst>
+          </p:cNvPr>
+          <p:cNvCxnSpPr>
+            <a:cxnSpLocks/>
+            <a:stCxn id="289" idx="2"/>
+            <a:endCxn id="463" idx="0"/>
+          </p:cNvCxnSpPr>
+          <p:nvPr/>
+        </p:nvCxnSpPr>
+        <p:spPr>
+          <a:xfrm rot="5400000">
+            <a:off x="19731130" y="8639672"/>
+            <a:ext cx="300706" cy="2264973"/>
+          </a:xfrm>
+          <a:prstGeom prst="bentConnector3">
+            <a:avLst>
+              <a:gd name="adj1" fmla="val 50000"/>
+            </a:avLst>
+          </a:prstGeom>
+          <a:ln w="19050">
+            <a:prstDash val="dash"/>
+            <a:tailEnd type="arrow"/>
+          </a:ln>
+        </p:spPr>
+        <p:style>
+          <a:lnRef idx="1">
+            <a:schemeClr val="accent1"/>
+          </a:lnRef>
+          <a:fillRef idx="0">
+            <a:schemeClr val="accent1"/>
+          </a:fillRef>
+          <a:effectRef idx="0">
+            <a:schemeClr val="accent1"/>
+          </a:effectRef>
+          <a:fontRef idx="minor">
+            <a:schemeClr val="tx1"/>
+          </a:fontRef>
+        </p:style>
+      </p:cxnSp>
+      <p:cxnSp>
+        <p:nvCxnSpPr>
+          <p:cNvPr id="527" name="Соединительная линия уступом 620">
+            <a:extLst>
+              <a:ext uri="{FF2B5EF4-FFF2-40B4-BE49-F238E27FC236}">
+                <a16:creationId xmlns:a16="http://schemas.microsoft.com/office/drawing/2014/main" id="{A61F8C33-8532-4666-A068-67A2AC769C9D}"/>
+              </a:ext>
+            </a:extLst>
+          </p:cNvPr>
+          <p:cNvCxnSpPr>
+            <a:cxnSpLocks/>
+            <a:stCxn id="672" idx="2"/>
+            <a:endCxn id="463" idx="0"/>
+          </p:cNvCxnSpPr>
+          <p:nvPr/>
+        </p:nvCxnSpPr>
+        <p:spPr>
+          <a:xfrm rot="16200000" flipH="1">
+            <a:off x="16235070" y="7408585"/>
+            <a:ext cx="300706" cy="4727145"/>
+          </a:xfrm>
+          <a:prstGeom prst="bentConnector3">
+            <a:avLst>
+              <a:gd name="adj1" fmla="val 50000"/>
+            </a:avLst>
+          </a:prstGeom>
+          <a:ln w="19050">
+            <a:prstDash val="dash"/>
             <a:tailEnd type="arrow"/>
           </a:ln>
         </p:spPr>

--- a/Наработки/диздоки/Марокко/Марокко.pptx
+++ b/Наработки/диздоки/Марокко/Марокко.pptx
@@ -10034,7 +10034,7 @@
             <a:pPr algn="ctr"/>
             <a:r>
               <a:rPr lang="ru-RU" sz="700" dirty="0"/>
-              <a:t>Вооружить отряды красной гвардии</a:t>
+              <a:t>Вооружить отряды Красной гвардии</a:t>
             </a:r>
           </a:p>
         </p:txBody>
@@ -10406,7 +10406,7 @@
             <a:pPr algn="ctr"/>
             <a:r>
               <a:rPr lang="ru-RU" sz="700" dirty="0"/>
-              <a:t>Искать помощи среди националистов</a:t>
+              <a:t>Искать помощь среди националистов</a:t>
             </a:r>
           </a:p>
         </p:txBody>

--- a/Наработки/диздоки/Марокко/Марокко.pptx
+++ b/Наработки/диздоки/Марокко/Марокко.pptx
@@ -209,7 +209,7 @@
             <a:fld id="{33E3D7F9-E251-484C-A6FF-FA958879DF69}" type="datetimeFigureOut">
               <a:rPr lang="ru-RU" smtClean="0"/>
               <a:pPr/>
-              <a:t>09.07.2026</a:t>
+              <a:t>14.07.2026</a:t>
             </a:fld>
             <a:endParaRPr lang="ru-RU"/>
           </a:p>
@@ -699,7 +699,7 @@
             <a:fld id="{85A5DE44-605B-4D3B-B2B7-94543DF81A36}" type="datetimeFigureOut">
               <a:rPr lang="ru-RU" smtClean="0"/>
               <a:pPr/>
-              <a:t>09.07.2026</a:t>
+              <a:t>14.07.2026</a:t>
             </a:fld>
             <a:endParaRPr lang="ru-RU"/>
           </a:p>
@@ -871,7 +871,7 @@
             <a:fld id="{85A5DE44-605B-4D3B-B2B7-94543DF81A36}" type="datetimeFigureOut">
               <a:rPr lang="ru-RU" smtClean="0"/>
               <a:pPr/>
-              <a:t>09.07.2026</a:t>
+              <a:t>14.07.2026</a:t>
             </a:fld>
             <a:endParaRPr lang="ru-RU"/>
           </a:p>
@@ -1053,7 +1053,7 @@
             <a:fld id="{85A5DE44-605B-4D3B-B2B7-94543DF81A36}" type="datetimeFigureOut">
               <a:rPr lang="ru-RU" smtClean="0"/>
               <a:pPr/>
-              <a:t>09.07.2026</a:t>
+              <a:t>14.07.2026</a:t>
             </a:fld>
             <a:endParaRPr lang="ru-RU"/>
           </a:p>
@@ -1225,7 +1225,7 @@
             <a:fld id="{85A5DE44-605B-4D3B-B2B7-94543DF81A36}" type="datetimeFigureOut">
               <a:rPr lang="ru-RU" smtClean="0"/>
               <a:pPr/>
-              <a:t>09.07.2026</a:t>
+              <a:t>14.07.2026</a:t>
             </a:fld>
             <a:endParaRPr lang="ru-RU"/>
           </a:p>
@@ -1473,7 +1473,7 @@
             <a:fld id="{85A5DE44-605B-4D3B-B2B7-94543DF81A36}" type="datetimeFigureOut">
               <a:rPr lang="ru-RU" smtClean="0"/>
               <a:pPr/>
-              <a:t>09.07.2026</a:t>
+              <a:t>14.07.2026</a:t>
             </a:fld>
             <a:endParaRPr lang="ru-RU"/>
           </a:p>
@@ -1707,7 +1707,7 @@
             <a:fld id="{85A5DE44-605B-4D3B-B2B7-94543DF81A36}" type="datetimeFigureOut">
               <a:rPr lang="ru-RU" smtClean="0"/>
               <a:pPr/>
-              <a:t>09.07.2026</a:t>
+              <a:t>14.07.2026</a:t>
             </a:fld>
             <a:endParaRPr lang="ru-RU"/>
           </a:p>
@@ -2076,7 +2076,7 @@
             <a:fld id="{85A5DE44-605B-4D3B-B2B7-94543DF81A36}" type="datetimeFigureOut">
               <a:rPr lang="ru-RU" smtClean="0"/>
               <a:pPr/>
-              <a:t>09.07.2026</a:t>
+              <a:t>14.07.2026</a:t>
             </a:fld>
             <a:endParaRPr lang="ru-RU"/>
           </a:p>
@@ -2196,7 +2196,7 @@
             <a:fld id="{85A5DE44-605B-4D3B-B2B7-94543DF81A36}" type="datetimeFigureOut">
               <a:rPr lang="ru-RU" smtClean="0"/>
               <a:pPr/>
-              <a:t>09.07.2026</a:t>
+              <a:t>14.07.2026</a:t>
             </a:fld>
             <a:endParaRPr lang="ru-RU"/>
           </a:p>
@@ -2293,7 +2293,7 @@
             <a:fld id="{85A5DE44-605B-4D3B-B2B7-94543DF81A36}" type="datetimeFigureOut">
               <a:rPr lang="ru-RU" smtClean="0"/>
               <a:pPr/>
-              <a:t>09.07.2026</a:t>
+              <a:t>14.07.2026</a:t>
             </a:fld>
             <a:endParaRPr lang="ru-RU"/>
           </a:p>
@@ -2572,7 +2572,7 @@
             <a:fld id="{85A5DE44-605B-4D3B-B2B7-94543DF81A36}" type="datetimeFigureOut">
               <a:rPr lang="ru-RU" smtClean="0"/>
               <a:pPr/>
-              <a:t>09.07.2026</a:t>
+              <a:t>14.07.2026</a:t>
             </a:fld>
             <a:endParaRPr lang="ru-RU"/>
           </a:p>
@@ -2831,7 +2831,7 @@
             <a:fld id="{85A5DE44-605B-4D3B-B2B7-94543DF81A36}" type="datetimeFigureOut">
               <a:rPr lang="ru-RU" smtClean="0"/>
               <a:pPr/>
-              <a:t>09.07.2026</a:t>
+              <a:t>14.07.2026</a:t>
             </a:fld>
             <a:endParaRPr lang="ru-RU"/>
           </a:p>
@@ -3046,7 +3046,7 @@
             <a:fld id="{85A5DE44-605B-4D3B-B2B7-94543DF81A36}" type="datetimeFigureOut">
               <a:rPr lang="ru-RU" smtClean="0"/>
               <a:pPr/>
-              <a:t>09.07.2026</a:t>
+              <a:t>14.07.2026</a:t>
             </a:fld>
             <a:endParaRPr lang="ru-RU"/>
           </a:p>

--- a/Наработки/диздоки/Марокко/Марокко.pptx
+++ b/Наработки/диздоки/Марокко/Марокко.pptx
@@ -209,7 +209,7 @@
             <a:fld id="{33E3D7F9-E251-484C-A6FF-FA958879DF69}" type="datetimeFigureOut">
               <a:rPr lang="ru-RU" smtClean="0"/>
               <a:pPr/>
-              <a:t>14.07.2026</a:t>
+              <a:t>16.07.2026</a:t>
             </a:fld>
             <a:endParaRPr lang="ru-RU"/>
           </a:p>
@@ -699,7 +699,7 @@
             <a:fld id="{85A5DE44-605B-4D3B-B2B7-94543DF81A36}" type="datetimeFigureOut">
               <a:rPr lang="ru-RU" smtClean="0"/>
               <a:pPr/>
-              <a:t>14.07.2026</a:t>
+              <a:t>16.07.2026</a:t>
             </a:fld>
             <a:endParaRPr lang="ru-RU"/>
           </a:p>
@@ -871,7 +871,7 @@
             <a:fld id="{85A5DE44-605B-4D3B-B2B7-94543DF81A36}" type="datetimeFigureOut">
               <a:rPr lang="ru-RU" smtClean="0"/>
               <a:pPr/>
-              <a:t>14.07.2026</a:t>
+              <a:t>16.07.2026</a:t>
             </a:fld>
             <a:endParaRPr lang="ru-RU"/>
           </a:p>
@@ -1053,7 +1053,7 @@
             <a:fld id="{85A5DE44-605B-4D3B-B2B7-94543DF81A36}" type="datetimeFigureOut">
               <a:rPr lang="ru-RU" smtClean="0"/>
               <a:pPr/>
-              <a:t>14.07.2026</a:t>
+              <a:t>16.07.2026</a:t>
             </a:fld>
             <a:endParaRPr lang="ru-RU"/>
           </a:p>
@@ -1225,7 +1225,7 @@
             <a:fld id="{85A5DE44-605B-4D3B-B2B7-94543DF81A36}" type="datetimeFigureOut">
               <a:rPr lang="ru-RU" smtClean="0"/>
               <a:pPr/>
-              <a:t>14.07.2026</a:t>
+              <a:t>16.07.2026</a:t>
             </a:fld>
             <a:endParaRPr lang="ru-RU"/>
           </a:p>
@@ -1473,7 +1473,7 @@
             <a:fld id="{85A5DE44-605B-4D3B-B2B7-94543DF81A36}" type="datetimeFigureOut">
               <a:rPr lang="ru-RU" smtClean="0"/>
               <a:pPr/>
-              <a:t>14.07.2026</a:t>
+              <a:t>16.07.2026</a:t>
             </a:fld>
             <a:endParaRPr lang="ru-RU"/>
           </a:p>
@@ -1707,7 +1707,7 @@
             <a:fld id="{85A5DE44-605B-4D3B-B2B7-94543DF81A36}" type="datetimeFigureOut">
               <a:rPr lang="ru-RU" smtClean="0"/>
               <a:pPr/>
-              <a:t>14.07.2026</a:t>
+              <a:t>16.07.2026</a:t>
             </a:fld>
             <a:endParaRPr lang="ru-RU"/>
           </a:p>
@@ -2076,7 +2076,7 @@
             <a:fld id="{85A5DE44-605B-4D3B-B2B7-94543DF81A36}" type="datetimeFigureOut">
               <a:rPr lang="ru-RU" smtClean="0"/>
               <a:pPr/>
-              <a:t>14.07.2026</a:t>
+              <a:t>16.07.2026</a:t>
             </a:fld>
             <a:endParaRPr lang="ru-RU"/>
           </a:p>
@@ -2196,7 +2196,7 @@
             <a:fld id="{85A5DE44-605B-4D3B-B2B7-94543DF81A36}" type="datetimeFigureOut">
               <a:rPr lang="ru-RU" smtClean="0"/>
               <a:pPr/>
-              <a:t>14.07.2026</a:t>
+              <a:t>16.07.2026</a:t>
             </a:fld>
             <a:endParaRPr lang="ru-RU"/>
           </a:p>
@@ -2293,7 +2293,7 @@
             <a:fld id="{85A5DE44-605B-4D3B-B2B7-94543DF81A36}" type="datetimeFigureOut">
               <a:rPr lang="ru-RU" smtClean="0"/>
               <a:pPr/>
-              <a:t>14.07.2026</a:t>
+              <a:t>16.07.2026</a:t>
             </a:fld>
             <a:endParaRPr lang="ru-RU"/>
           </a:p>
@@ -2572,7 +2572,7 @@
             <a:fld id="{85A5DE44-605B-4D3B-B2B7-94543DF81A36}" type="datetimeFigureOut">
               <a:rPr lang="ru-RU" smtClean="0"/>
               <a:pPr/>
-              <a:t>14.07.2026</a:t>
+              <a:t>16.07.2026</a:t>
             </a:fld>
             <a:endParaRPr lang="ru-RU"/>
           </a:p>
@@ -2831,7 +2831,7 @@
             <a:fld id="{85A5DE44-605B-4D3B-B2B7-94543DF81A36}" type="datetimeFigureOut">
               <a:rPr lang="ru-RU" smtClean="0"/>
               <a:pPr/>
-              <a:t>14.07.2026</a:t>
+              <a:t>16.07.2026</a:t>
             </a:fld>
             <a:endParaRPr lang="ru-RU"/>
           </a:p>
@@ -3046,7 +3046,7 @@
             <a:fld id="{85A5DE44-605B-4D3B-B2B7-94543DF81A36}" type="datetimeFigureOut">
               <a:rPr lang="ru-RU" smtClean="0"/>
               <a:pPr/>
-              <a:t>14.07.2026</a:t>
+              <a:t>16.07.2026</a:t>
             </a:fld>
             <a:endParaRPr lang="ru-RU"/>
           </a:p>
@@ -20784,7 +20784,7 @@
             <a:pPr algn="ctr"/>
             <a:r>
               <a:rPr lang="ru-RU" sz="700" dirty="0"/>
-              <a:t>Союзом женщин Марокко</a:t>
+              <a:t>Союз женщин Марокко</a:t>
             </a:r>
             <a:br>
               <a:rPr lang="ru-RU" sz="700" dirty="0"/>

--- a/Наработки/диздоки/Марокко/Марокко.pptx
+++ b/Наработки/диздоки/Марокко/Марокко.pptx
@@ -209,7 +209,7 @@
             <a:fld id="{33E3D7F9-E251-484C-A6FF-FA958879DF69}" type="datetimeFigureOut">
               <a:rPr lang="ru-RU" smtClean="0"/>
               <a:pPr/>
-              <a:t>16.07.2026</a:t>
+              <a:t>28.07.2026</a:t>
             </a:fld>
             <a:endParaRPr lang="ru-RU"/>
           </a:p>
@@ -699,7 +699,7 @@
             <a:fld id="{85A5DE44-605B-4D3B-B2B7-94543DF81A36}" type="datetimeFigureOut">
               <a:rPr lang="ru-RU" smtClean="0"/>
               <a:pPr/>
-              <a:t>16.07.2026</a:t>
+              <a:t>28.07.2026</a:t>
             </a:fld>
             <a:endParaRPr lang="ru-RU"/>
           </a:p>
@@ -871,7 +871,7 @@
             <a:fld id="{85A5DE44-605B-4D3B-B2B7-94543DF81A36}" type="datetimeFigureOut">
               <a:rPr lang="ru-RU" smtClean="0"/>
               <a:pPr/>
-              <a:t>16.07.2026</a:t>
+              <a:t>28.07.2026</a:t>
             </a:fld>
             <a:endParaRPr lang="ru-RU"/>
           </a:p>
@@ -1053,7 +1053,7 @@
             <a:fld id="{85A5DE44-605B-4D3B-B2B7-94543DF81A36}" type="datetimeFigureOut">
               <a:rPr lang="ru-RU" smtClean="0"/>
               <a:pPr/>
-              <a:t>16.07.2026</a:t>
+              <a:t>28.07.2026</a:t>
             </a:fld>
             <a:endParaRPr lang="ru-RU"/>
           </a:p>
@@ -1225,7 +1225,7 @@
             <a:fld id="{85A5DE44-605B-4D3B-B2B7-94543DF81A36}" type="datetimeFigureOut">
               <a:rPr lang="ru-RU" smtClean="0"/>
               <a:pPr/>
-              <a:t>16.07.2026</a:t>
+              <a:t>28.07.2026</a:t>
             </a:fld>
             <a:endParaRPr lang="ru-RU"/>
           </a:p>
@@ -1473,7 +1473,7 @@
             <a:fld id="{85A5DE44-605B-4D3B-B2B7-94543DF81A36}" type="datetimeFigureOut">
               <a:rPr lang="ru-RU" smtClean="0"/>
               <a:pPr/>
-              <a:t>16.07.2026</a:t>
+              <a:t>28.07.2026</a:t>
             </a:fld>
             <a:endParaRPr lang="ru-RU"/>
           </a:p>
@@ -1707,7 +1707,7 @@
             <a:fld id="{85A5DE44-605B-4D3B-B2B7-94543DF81A36}" type="datetimeFigureOut">
               <a:rPr lang="ru-RU" smtClean="0"/>
               <a:pPr/>
-              <a:t>16.07.2026</a:t>
+              <a:t>28.07.2026</a:t>
             </a:fld>
             <a:endParaRPr lang="ru-RU"/>
           </a:p>
@@ -2076,7 +2076,7 @@
             <a:fld id="{85A5DE44-605B-4D3B-B2B7-94543DF81A36}" type="datetimeFigureOut">
               <a:rPr lang="ru-RU" smtClean="0"/>
               <a:pPr/>
-              <a:t>16.07.2026</a:t>
+              <a:t>28.07.2026</a:t>
             </a:fld>
             <a:endParaRPr lang="ru-RU"/>
           </a:p>
@@ -2196,7 +2196,7 @@
             <a:fld id="{85A5DE44-605B-4D3B-B2B7-94543DF81A36}" type="datetimeFigureOut">
               <a:rPr lang="ru-RU" smtClean="0"/>
               <a:pPr/>
-              <a:t>16.07.2026</a:t>
+              <a:t>28.07.2026</a:t>
             </a:fld>
             <a:endParaRPr lang="ru-RU"/>
           </a:p>
@@ -2293,7 +2293,7 @@
             <a:fld id="{85A5DE44-605B-4D3B-B2B7-94543DF81A36}" type="datetimeFigureOut">
               <a:rPr lang="ru-RU" smtClean="0"/>
               <a:pPr/>
-              <a:t>16.07.2026</a:t>
+              <a:t>28.07.2026</a:t>
             </a:fld>
             <a:endParaRPr lang="ru-RU"/>
           </a:p>
@@ -2572,7 +2572,7 @@
             <a:fld id="{85A5DE44-605B-4D3B-B2B7-94543DF81A36}" type="datetimeFigureOut">
               <a:rPr lang="ru-RU" smtClean="0"/>
               <a:pPr/>
-              <a:t>16.07.2026</a:t>
+              <a:t>28.07.2026</a:t>
             </a:fld>
             <a:endParaRPr lang="ru-RU"/>
           </a:p>
@@ -2831,7 +2831,7 @@
             <a:fld id="{85A5DE44-605B-4D3B-B2B7-94543DF81A36}" type="datetimeFigureOut">
               <a:rPr lang="ru-RU" smtClean="0"/>
               <a:pPr/>
-              <a:t>16.07.2026</a:t>
+              <a:t>28.07.2026</a:t>
             </a:fld>
             <a:endParaRPr lang="ru-RU"/>
           </a:p>
@@ -3046,7 +3046,7 @@
             <a:fld id="{85A5DE44-605B-4D3B-B2B7-94543DF81A36}" type="datetimeFigureOut">
               <a:rPr lang="ru-RU" smtClean="0"/>
               <a:pPr/>
-              <a:t>16.07.2026</a:t>
+              <a:t>28.07.2026</a:t>
             </a:fld>
             <a:endParaRPr lang="ru-RU"/>
           </a:p>
@@ -10600,46 +10600,6 @@
               <a:rPr lang="ru-RU" sz="700" dirty="0"/>
               <a:t>Судьба султана?</a:t>
             </a:r>
-            <a:br>
-              <a:rPr lang="ru-RU" sz="700" dirty="0"/>
-            </a:br>
-            <a:r>
-              <a:rPr lang="ru-RU" sz="200" dirty="0"/>
-              <a:t>Ликвидатор феодализма (</a:t>
-            </a:r>
-            <a:r>
-              <a:rPr lang="ru-RU" sz="200" dirty="0" err="1"/>
-              <a:t>Liquidator</a:t>
-            </a:r>
-            <a:r>
-              <a:rPr lang="ru-RU" sz="200" dirty="0"/>
-              <a:t> </a:t>
-            </a:r>
-            <a:r>
-              <a:rPr lang="ru-RU" sz="200" dirty="0" err="1"/>
-              <a:t>of</a:t>
-            </a:r>
-            <a:r>
-              <a:rPr lang="ru-RU" sz="200" dirty="0"/>
-              <a:t> </a:t>
-            </a:r>
-            <a:r>
-              <a:rPr lang="ru-RU" sz="200" dirty="0" err="1"/>
-              <a:t>Feudalism</a:t>
-            </a:r>
-            <a:r>
-              <a:rPr lang="ru-RU" sz="200" dirty="0"/>
-              <a:t>)Активируется через фокус «Упразднить </a:t>
-            </a:r>
-            <a:r>
-              <a:rPr lang="ru-RU" sz="200" dirty="0" err="1"/>
-              <a:t>Махзен</a:t>
-            </a:r>
-            <a:r>
-              <a:rPr lang="ru-RU" sz="200" dirty="0"/>
-              <a:t> и Султанат».🛑 Популярность нейтральной (монархической) идеологии: -0.05 в день.🛠️ Скорость конверсии гражданских фабрик в военные заводы: +15%📉 Краткосрочный штраф к стабильности: -5.00% (из-за сопротивления роялистов). В конце 1950-х — начале 1990-х годов видные марокканские евреи отвергали определенные политические решения монархии и ее поворот к авторитаризму. Однако они не оспаривали легитимность самой монархии. Они боролись за идеализированное видение Марокко, в то время как большинство марокканских евреев покидали страну.¬</a:t>
-            </a:r>
-            <a:endParaRPr lang="ru-RU" sz="700" dirty="0"/>
           </a:p>
         </p:txBody>
       </p:sp>
@@ -12356,7 +12316,7 @@
         </p:nvSpPr>
         <p:spPr>
           <a:xfrm>
-            <a:off x="17688637" y="6640229"/>
+            <a:off x="17696257" y="6640229"/>
             <a:ext cx="926325" cy="540000"/>
           </a:xfrm>
           <a:prstGeom prst="rect">
@@ -20167,78 +20127,6 @@
               <a:rPr lang="ru-RU" sz="700" dirty="0"/>
               <a:t>Легализовать Антифашистский комитет</a:t>
             </a:r>
-            <a:br>
-              <a:rPr lang="ru-RU" sz="700" dirty="0"/>
-            </a:br>
-            <a:r>
-              <a:rPr lang="ru-RU" sz="100" dirty="0"/>
-              <a:t>(В июне 1935 года в Марокко был создан официальный «Антифашистский комитет», члены которого уже предпринимали значительные действия. Будучи предшественником Марокканского народного фронта (официально основанного в марте 1936 года), Антифашистский комитет включал в себя многочисленные организации «</a:t>
-            </a:r>
-            <a:r>
-              <a:rPr lang="ru-RU" sz="100" dirty="0" err="1"/>
-              <a:t>Амикале</a:t>
-            </a:r>
-            <a:r>
-              <a:rPr lang="ru-RU" sz="100" dirty="0"/>
-              <a:t>» и профессиональные федерации, созданные европейцами до того, как было разрешено создание профсоюзов, Марокканскую федерацию Лиги за права человека, Федерацию борцов за мир, SFIO и Молодежную социалистическую организацию, Федерацию республиканских борцов, секции группы «Свободная мысль», группу «Друзья СССР» и другие левые организации, которые чиновники протектората назвали «экстремистскими». К комитету также присоединились видные деятели марокканских мусульманских националистических организаций, в том числе Хасан </a:t>
-            </a:r>
-            <a:r>
-              <a:rPr lang="ru-RU" sz="100" dirty="0" err="1"/>
-              <a:t>Уаззани</a:t>
-            </a:r>
-            <a:r>
-              <a:rPr lang="ru-RU" sz="100" dirty="0"/>
-              <a:t>, Мухаммад </a:t>
-            </a:r>
-            <a:r>
-              <a:rPr lang="ru-RU" sz="100" dirty="0" err="1"/>
-              <a:t>Холти</a:t>
-            </a:r>
-            <a:r>
-              <a:rPr lang="ru-RU" sz="100" dirty="0"/>
-              <a:t>, Омар бен </a:t>
-            </a:r>
-            <a:r>
-              <a:rPr lang="ru-RU" sz="100" dirty="0" err="1"/>
-              <a:t>Абдельджелил</a:t>
-            </a:r>
-            <a:r>
-              <a:rPr lang="ru-RU" sz="100" dirty="0"/>
-              <a:t>, Ахмед </a:t>
-            </a:r>
-            <a:r>
-              <a:rPr lang="ru-RU" sz="100" dirty="0" err="1"/>
-              <a:t>Балафредж</a:t>
-            </a:r>
-            <a:r>
-              <a:rPr lang="ru-RU" sz="100" dirty="0"/>
-              <a:t>, Мухаммад аль-</a:t>
-            </a:r>
-            <a:r>
-              <a:rPr lang="ru-RU" sz="100" dirty="0" err="1"/>
-              <a:t>Фасси</a:t>
-            </a:r>
-            <a:r>
-              <a:rPr lang="ru-RU" sz="100" dirty="0"/>
-              <a:t> и Ахмед </a:t>
-            </a:r>
-            <a:r>
-              <a:rPr lang="ru-RU" sz="100" dirty="0" err="1"/>
-              <a:t>Уаззани</a:t>
-            </a:r>
-            <a:r>
-              <a:rPr lang="ru-RU" sz="100" dirty="0"/>
-              <a:t>. Представитель ведомства подверг критике европейские правительства за их «слабость» и инертность перед лицом коммунистической и революционной активности в Северной Африке, жалуясь на то, что «все используется» в революционных целях, от антисемитизма до «очевидного неравенства между расами». Он предупредил, что такие тенденции, если их не остановить, приведут к «психическому заражению» и «ненависти» среди колониальных подданных Французской Северной Африки к Франции, их «защитнику». Несмотря на все попытки предотвратить левую </a:t>
-            </a:r>
-            <a:r>
-              <a:rPr lang="ru-RU" sz="100" dirty="0" err="1"/>
-              <a:t>марокканско</a:t>
-            </a:r>
-            <a:r>
-              <a:rPr lang="ru-RU" sz="100" dirty="0"/>
-              <a:t>-европейскую солидарность и мусульманско-еврейскую организацию, власти Французского протектората с растущей тревогой отмечали быстрый рост числа марокканских евреев и мусульман среди членов таких организаций, как «Друзья СССР» и других «радикальных» организаций европейского происхождения.111)</a:t>
-            </a:r>
-            <a:endParaRPr lang="ru-RU" sz="700" dirty="0"/>
           </a:p>
         </p:txBody>
       </p:sp>
@@ -20712,29 +20600,8 @@
             <a:pPr algn="ctr"/>
             <a:r>
               <a:rPr lang="ru-RU" sz="700" dirty="0"/>
-              <a:t>Коммунистические ассоциации </a:t>
-            </a:r>
-            <a:r>
-              <a:rPr lang="ru-RU" sz="300" dirty="0"/>
-              <a:t>(создав в 1945 году «Коммунистические ассоциации» (</a:t>
-            </a:r>
-            <a:r>
-              <a:rPr lang="ru-RU" sz="300" dirty="0" err="1"/>
-              <a:t>Amicales</a:t>
-            </a:r>
-            <a:r>
-              <a:rPr lang="ru-RU" sz="300" dirty="0"/>
-              <a:t> </a:t>
-            </a:r>
-            <a:r>
-              <a:rPr lang="ru-RU" sz="300" dirty="0" err="1"/>
-              <a:t>Communistes</a:t>
-            </a:r>
-            <a:r>
-              <a:rPr lang="ru-RU" sz="300" dirty="0"/>
-              <a:t>) с целью вербовки в сельской местности.)</a:t>
-            </a:r>
-            <a:endParaRPr lang="ru-RU" sz="700" dirty="0"/>
+              <a:t>Коммунистические ассоциации</a:t>
+            </a:r>
           </a:p>
         </p:txBody>
       </p:sp>
@@ -20786,78 +20653,6 @@
               <a:rPr lang="ru-RU" sz="700" dirty="0"/>
               <a:t>Союз женщин Марокко</a:t>
             </a:r>
-            <a:br>
-              <a:rPr lang="ru-RU" sz="700" dirty="0"/>
-            </a:br>
-            <a:r>
-              <a:rPr lang="ru-RU" sz="200" dirty="0"/>
-              <a:t>(во главе с мадам Фортуне Султан (женой Леона Султана), </a:t>
-            </a:r>
-            <a:r>
-              <a:rPr lang="ru-RU" sz="200" dirty="0" err="1"/>
-              <a:t>Люсетт</a:t>
-            </a:r>
-            <a:r>
-              <a:rPr lang="ru-RU" sz="200" dirty="0"/>
-              <a:t> </a:t>
-            </a:r>
-            <a:r>
-              <a:rPr lang="ru-RU" sz="200" dirty="0" err="1"/>
-              <a:t>Мазелла</a:t>
-            </a:r>
-            <a:r>
-              <a:rPr lang="ru-RU" sz="200" dirty="0"/>
-              <a:t> (женой Мишеля </a:t>
-            </a:r>
-            <a:r>
-              <a:rPr lang="ru-RU" sz="200" dirty="0" err="1"/>
-              <a:t>Мазеллы</a:t>
-            </a:r>
-            <a:r>
-              <a:rPr lang="ru-RU" sz="200" dirty="0"/>
-              <a:t>) и </a:t>
-            </a:r>
-            <a:r>
-              <a:rPr lang="ru-RU" sz="200" dirty="0" err="1"/>
-              <a:t>Фреей</a:t>
-            </a:r>
-            <a:r>
-              <a:rPr lang="ru-RU" sz="200" dirty="0"/>
-              <a:t> </a:t>
-            </a:r>
-            <a:r>
-              <a:rPr lang="ru-RU" sz="200" dirty="0" err="1"/>
-              <a:t>Айаш</a:t>
-            </a:r>
-            <a:r>
-              <a:rPr lang="ru-RU" sz="200" dirty="0"/>
-              <a:t> (женой </a:t>
-            </a:r>
-            <a:r>
-              <a:rPr lang="ru-RU" sz="200" dirty="0" err="1"/>
-              <a:t>Жермена</a:t>
-            </a:r>
-            <a:r>
-              <a:rPr lang="ru-RU" sz="200" dirty="0"/>
-              <a:t> </a:t>
-            </a:r>
-            <a:r>
-              <a:rPr lang="ru-RU" sz="200" dirty="0" err="1"/>
-              <a:t>Айаша</a:t>
-            </a:r>
-            <a:r>
-              <a:rPr lang="ru-RU" sz="200" dirty="0"/>
-              <a:t>, марокканской еврейкой из Сале) — работали с «</a:t>
-            </a:r>
-            <a:r>
-              <a:rPr lang="ru-RU" sz="200" dirty="0" err="1"/>
-              <a:t>Амикалес</a:t>
-            </a:r>
-            <a:r>
-              <a:rPr lang="ru-RU" sz="200" dirty="0"/>
-              <a:t>» над расширением вербовки как в городских, так и в сельских общинах.)</a:t>
-            </a:r>
-            <a:endParaRPr lang="ru-RU" sz="700" dirty="0"/>
           </a:p>
         </p:txBody>
       </p:sp>
@@ -20875,7 +20670,7 @@
         </p:nvSpPr>
         <p:spPr>
           <a:xfrm>
-            <a:off x="16494244" y="6640229"/>
+            <a:off x="16501864" y="6640229"/>
             <a:ext cx="926325" cy="540000"/>
           </a:xfrm>
           <a:prstGeom prst="rect">
@@ -20909,30 +20704,6 @@
               <a:rPr lang="ru-RU" sz="700" dirty="0"/>
               <a:t>Программы повышения грамотности</a:t>
             </a:r>
-            <a:br>
-              <a:rPr lang="ru-RU" sz="700" dirty="0"/>
-            </a:br>
-            <a:r>
-              <a:rPr lang="ru-RU" sz="100" dirty="0"/>
-              <a:t>(Помимо не совсем эффективных программ повышения грамотности, проводимых МКМ, участие в деятельности МКМ само по себе представляло собой своего рода «школу», как писал Саймон Леви.&lt;</a:t>
-            </a:r>
-            <a:r>
-              <a:rPr lang="ru-RU" sz="100" dirty="0" err="1"/>
-              <a:t>sup</a:t>
-            </a:r>
-            <a:r>
-              <a:rPr lang="ru-RU" sz="100" dirty="0"/>
-              <a:t>&gt;167&lt;/</a:t>
-            </a:r>
-            <a:r>
-              <a:rPr lang="ru-RU" sz="100" dirty="0" err="1"/>
-              <a:t>sup</a:t>
-            </a:r>
-            <a:r>
-              <a:rPr lang="ru-RU" sz="100" dirty="0"/>
-              <a:t>&gt; Леви писал: «Для многих евреев [МКМ] была плавильным котлом солидарности в борьбе. Демократический призыв после войны привел в движение скрытые силы. Когда независимость стала конкретной целью, МКМ предложила четкие ответы для меньшинств и вовлекла их в трудовую и политическую деятельность».)</a:t>
-            </a:r>
-            <a:endParaRPr lang="ru-RU" sz="700" dirty="0"/>
           </a:p>
         </p:txBody>
       </p:sp>
@@ -21097,8 +20868,8 @@
         </p:nvCxnSpPr>
         <p:spPr>
           <a:xfrm rot="5400000">
-            <a:off x="17426545" y="5914974"/>
-            <a:ext cx="256118" cy="1194393"/>
+            <a:off x="17430355" y="5918784"/>
+            <a:ext cx="256118" cy="1186773"/>
           </a:xfrm>
           <a:prstGeom prst="bentConnector3">
             <a:avLst>
@@ -21270,15 +21041,15 @@
           </p:cNvPr>
           <p:cNvCxnSpPr>
             <a:cxnSpLocks/>
-            <a:stCxn id="219" idx="2"/>
+            <a:stCxn id="250" idx="2"/>
             <a:endCxn id="270" idx="0"/>
           </p:cNvCxnSpPr>
           <p:nvPr/>
         </p:nvCxnSpPr>
         <p:spPr>
           <a:xfrm rot="16200000" flipH="1">
-            <a:off x="15208129" y="7745242"/>
-            <a:ext cx="1147915" cy="1633"/>
+            <a:off x="15325856" y="7862970"/>
+            <a:ext cx="305760" cy="608334"/>
           </a:xfrm>
           <a:prstGeom prst="bentConnector3">
             <a:avLst>
@@ -21322,8 +21093,8 @@
         </p:nvCxnSpPr>
         <p:spPr>
           <a:xfrm rot="5400000">
-            <a:off x="16512991" y="7029841"/>
-            <a:ext cx="294028" cy="594804"/>
+            <a:off x="16516801" y="7026031"/>
+            <a:ext cx="294028" cy="602424"/>
           </a:xfrm>
           <a:prstGeom prst="bentConnector3">
             <a:avLst>
@@ -21366,9 +21137,9 @@
           <p:nvPr/>
         </p:nvCxnSpPr>
         <p:spPr>
-          <a:xfrm rot="16200000" flipH="1">
-            <a:off x="16393194" y="7744441"/>
-            <a:ext cx="1136045" cy="7619"/>
+          <a:xfrm rot="5400000">
+            <a:off x="16397005" y="7748251"/>
+            <a:ext cx="1136045" cy="1"/>
           </a:xfrm>
           <a:prstGeom prst="bentConnector3">
             <a:avLst>
@@ -21457,12 +21228,12 @@
         </p:nvCxnSpPr>
         <p:spPr>
           <a:xfrm rot="5400000">
-            <a:off x="16990391" y="7154864"/>
-            <a:ext cx="1136045" cy="1186774"/>
+            <a:off x="16994201" y="7151054"/>
+            <a:ext cx="1136045" cy="1194394"/>
           </a:xfrm>
           <a:prstGeom prst="bentConnector3">
             <a:avLst>
-              <a:gd name="adj1" fmla="val 12885"/>
+              <a:gd name="adj1" fmla="val 12438"/>
             </a:avLst>
           </a:prstGeom>
           <a:ln w="19050">
@@ -21502,8 +21273,8 @@
         </p:nvCxnSpPr>
         <p:spPr>
           <a:xfrm rot="5400000">
-            <a:off x="17705998" y="7024713"/>
-            <a:ext cx="290286" cy="601318"/>
+            <a:off x="17709808" y="7020903"/>
+            <a:ext cx="290286" cy="608938"/>
           </a:xfrm>
           <a:prstGeom prst="bentConnector3">
             <a:avLst>
@@ -21547,8 +21318,8 @@
         </p:nvCxnSpPr>
         <p:spPr>
           <a:xfrm rot="16200000" flipH="1">
-            <a:off x="18299393" y="7032636"/>
-            <a:ext cx="286296" cy="581482"/>
+            <a:off x="18303203" y="7036446"/>
+            <a:ext cx="286296" cy="573862"/>
           </a:xfrm>
           <a:prstGeom prst="bentConnector3">
             <a:avLst>
@@ -21591,9 +21362,9 @@
           <p:nvPr/>
         </p:nvCxnSpPr>
         <p:spPr>
-          <a:xfrm rot="16200000" flipH="1">
-            <a:off x="17584447" y="7747582"/>
-            <a:ext cx="1139787" cy="5080"/>
+          <a:xfrm rot="5400000">
+            <a:off x="17588257" y="7748852"/>
+            <a:ext cx="1139787" cy="2540"/>
           </a:xfrm>
           <a:prstGeom prst="bentConnector3">
             <a:avLst>
@@ -24412,6 +24183,96 @@
           </a:prstGeom>
           <a:ln w="19050">
             <a:prstDash val="dash"/>
+            <a:tailEnd type="arrow"/>
+          </a:ln>
+        </p:spPr>
+        <p:style>
+          <a:lnRef idx="1">
+            <a:schemeClr val="accent1"/>
+          </a:lnRef>
+          <a:fillRef idx="0">
+            <a:schemeClr val="accent1"/>
+          </a:fillRef>
+          <a:effectRef idx="0">
+            <a:schemeClr val="accent1"/>
+          </a:effectRef>
+          <a:fontRef idx="minor">
+            <a:schemeClr val="tx1"/>
+          </a:fontRef>
+        </p:style>
+      </p:cxnSp>
+      <p:cxnSp>
+        <p:nvCxnSpPr>
+          <p:cNvPr id="428" name="Соединительная линия уступом 620">
+            <a:extLst>
+              <a:ext uri="{FF2B5EF4-FFF2-40B4-BE49-F238E27FC236}">
+                <a16:creationId xmlns:a16="http://schemas.microsoft.com/office/drawing/2014/main" id="{850CEAB0-C21E-434F-A849-1523750D7F53}"/>
+              </a:ext>
+            </a:extLst>
+          </p:cNvPr>
+          <p:cNvCxnSpPr>
+            <a:cxnSpLocks/>
+            <a:stCxn id="257" idx="2"/>
+            <a:endCxn id="270" idx="0"/>
+          </p:cNvCxnSpPr>
+          <p:nvPr/>
+        </p:nvCxnSpPr>
+        <p:spPr>
+          <a:xfrm rot="5400000">
+            <a:off x="15919873" y="7877287"/>
+            <a:ext cx="305760" cy="579700"/>
+          </a:xfrm>
+          <a:prstGeom prst="bentConnector3">
+            <a:avLst>
+              <a:gd name="adj1" fmla="val 50000"/>
+            </a:avLst>
+          </a:prstGeom>
+          <a:ln w="19050">
+            <a:tailEnd type="arrow"/>
+          </a:ln>
+        </p:spPr>
+        <p:style>
+          <a:lnRef idx="1">
+            <a:schemeClr val="accent1"/>
+          </a:lnRef>
+          <a:fillRef idx="0">
+            <a:schemeClr val="accent1"/>
+          </a:fillRef>
+          <a:effectRef idx="0">
+            <a:schemeClr val="accent1"/>
+          </a:effectRef>
+          <a:fontRef idx="minor">
+            <a:schemeClr val="tx1"/>
+          </a:fontRef>
+        </p:style>
+      </p:cxnSp>
+      <p:cxnSp>
+        <p:nvCxnSpPr>
+          <p:cNvPr id="429" name="Соединительная линия уступом 620">
+            <a:extLst>
+              <a:ext uri="{FF2B5EF4-FFF2-40B4-BE49-F238E27FC236}">
+                <a16:creationId xmlns:a16="http://schemas.microsoft.com/office/drawing/2014/main" id="{98090CA8-8804-4169-9EAB-2F6B87A7C768}"/>
+              </a:ext>
+            </a:extLst>
+          </p:cNvPr>
+          <p:cNvCxnSpPr>
+            <a:cxnSpLocks/>
+            <a:stCxn id="447" idx="2"/>
+            <a:endCxn id="202" idx="0"/>
+          </p:cNvCxnSpPr>
+          <p:nvPr/>
+        </p:nvCxnSpPr>
+        <p:spPr>
+          <a:xfrm rot="16200000" flipH="1">
+            <a:off x="18027551" y="6508360"/>
+            <a:ext cx="256118" cy="7620"/>
+          </a:xfrm>
+          <a:prstGeom prst="bentConnector3">
+            <a:avLst>
+              <a:gd name="adj1" fmla="val 50000"/>
+            </a:avLst>
+          </a:prstGeom>
+          <a:ln w="19050">
             <a:tailEnd type="arrow"/>
           </a:ln>
         </p:spPr>

--- a/Наработки/диздоки/Марокко/Марокко.pptx
+++ b/Наработки/диздоки/Марокко/Марокко.pptx
@@ -209,7 +209,7 @@
             <a:fld id="{33E3D7F9-E251-484C-A6FF-FA958879DF69}" type="datetimeFigureOut">
               <a:rPr lang="ru-RU" smtClean="0"/>
               <a:pPr/>
-              <a:t>28.07.2026</a:t>
+              <a:t>29.07.2026</a:t>
             </a:fld>
             <a:endParaRPr lang="ru-RU"/>
           </a:p>
@@ -699,7 +699,7 @@
             <a:fld id="{85A5DE44-605B-4D3B-B2B7-94543DF81A36}" type="datetimeFigureOut">
               <a:rPr lang="ru-RU" smtClean="0"/>
               <a:pPr/>
-              <a:t>28.07.2026</a:t>
+              <a:t>29.07.2026</a:t>
             </a:fld>
             <a:endParaRPr lang="ru-RU"/>
           </a:p>
@@ -871,7 +871,7 @@
             <a:fld id="{85A5DE44-605B-4D3B-B2B7-94543DF81A36}" type="datetimeFigureOut">
               <a:rPr lang="ru-RU" smtClean="0"/>
               <a:pPr/>
-              <a:t>28.07.2026</a:t>
+              <a:t>29.07.2026</a:t>
             </a:fld>
             <a:endParaRPr lang="ru-RU"/>
           </a:p>
@@ -1053,7 +1053,7 @@
             <a:fld id="{85A5DE44-605B-4D3B-B2B7-94543DF81A36}" type="datetimeFigureOut">
               <a:rPr lang="ru-RU" smtClean="0"/>
               <a:pPr/>
-              <a:t>28.07.2026</a:t>
+              <a:t>29.07.2026</a:t>
             </a:fld>
             <a:endParaRPr lang="ru-RU"/>
           </a:p>
@@ -1225,7 +1225,7 @@
             <a:fld id="{85A5DE44-605B-4D3B-B2B7-94543DF81A36}" type="datetimeFigureOut">
               <a:rPr lang="ru-RU" smtClean="0"/>
               <a:pPr/>
-              <a:t>28.07.2026</a:t>
+              <a:t>29.07.2026</a:t>
             </a:fld>
             <a:endParaRPr lang="ru-RU"/>
           </a:p>
@@ -1473,7 +1473,7 @@
             <a:fld id="{85A5DE44-605B-4D3B-B2B7-94543DF81A36}" type="datetimeFigureOut">
               <a:rPr lang="ru-RU" smtClean="0"/>
               <a:pPr/>
-              <a:t>28.07.2026</a:t>
+              <a:t>29.07.2026</a:t>
             </a:fld>
             <a:endParaRPr lang="ru-RU"/>
           </a:p>
@@ -1707,7 +1707,7 @@
             <a:fld id="{85A5DE44-605B-4D3B-B2B7-94543DF81A36}" type="datetimeFigureOut">
               <a:rPr lang="ru-RU" smtClean="0"/>
               <a:pPr/>
-              <a:t>28.07.2026</a:t>
+              <a:t>29.07.2026</a:t>
             </a:fld>
             <a:endParaRPr lang="ru-RU"/>
           </a:p>
@@ -2076,7 +2076,7 @@
             <a:fld id="{85A5DE44-605B-4D3B-B2B7-94543DF81A36}" type="datetimeFigureOut">
               <a:rPr lang="ru-RU" smtClean="0"/>
               <a:pPr/>
-              <a:t>28.07.2026</a:t>
+              <a:t>29.07.2026</a:t>
             </a:fld>
             <a:endParaRPr lang="ru-RU"/>
           </a:p>
@@ -2196,7 +2196,7 @@
             <a:fld id="{85A5DE44-605B-4D3B-B2B7-94543DF81A36}" type="datetimeFigureOut">
               <a:rPr lang="ru-RU" smtClean="0"/>
               <a:pPr/>
-              <a:t>28.07.2026</a:t>
+              <a:t>29.07.2026</a:t>
             </a:fld>
             <a:endParaRPr lang="ru-RU"/>
           </a:p>
@@ -2293,7 +2293,7 @@
             <a:fld id="{85A5DE44-605B-4D3B-B2B7-94543DF81A36}" type="datetimeFigureOut">
               <a:rPr lang="ru-RU" smtClean="0"/>
               <a:pPr/>
-              <a:t>28.07.2026</a:t>
+              <a:t>29.07.2026</a:t>
             </a:fld>
             <a:endParaRPr lang="ru-RU"/>
           </a:p>
@@ -2572,7 +2572,7 @@
             <a:fld id="{85A5DE44-605B-4D3B-B2B7-94543DF81A36}" type="datetimeFigureOut">
               <a:rPr lang="ru-RU" smtClean="0"/>
               <a:pPr/>
-              <a:t>28.07.2026</a:t>
+              <a:t>29.07.2026</a:t>
             </a:fld>
             <a:endParaRPr lang="ru-RU"/>
           </a:p>
@@ -2831,7 +2831,7 @@
             <a:fld id="{85A5DE44-605B-4D3B-B2B7-94543DF81A36}" type="datetimeFigureOut">
               <a:rPr lang="ru-RU" smtClean="0"/>
               <a:pPr/>
-              <a:t>28.07.2026</a:t>
+              <a:t>29.07.2026</a:t>
             </a:fld>
             <a:endParaRPr lang="ru-RU"/>
           </a:p>
@@ -3046,7 +3046,7 @@
             <a:fld id="{85A5DE44-605B-4D3B-B2B7-94543DF81A36}" type="datetimeFigureOut">
               <a:rPr lang="ru-RU" smtClean="0"/>
               <a:pPr/>
-              <a:t>28.07.2026</a:t>
+              <a:t>29.07.2026</a:t>
             </a:fld>
             <a:endParaRPr lang="ru-RU"/>
           </a:p>
@@ -8337,46 +8337,6 @@
               <a:rPr lang="ru-RU" sz="700" dirty="0"/>
               <a:t>Провести трудовые реформы</a:t>
             </a:r>
-          </a:p>
-          <a:p>
-            <a:pPr algn="ctr"/>
-            <a:r>
-              <a:rPr lang="ru-RU" sz="100" dirty="0"/>
-              <a:t>(После прихода к власти левых во Франции летом 1936 года по всему Марокко прокатилась волна рабочих протестов. Крупнейшие забастовки вспыхнули на фосфатных рудниках </a:t>
-            </a:r>
-            <a:r>
-              <a:rPr lang="ru-RU" sz="100" dirty="0" err="1"/>
-              <a:t>Хурибги</a:t>
-            </a:r>
-            <a:r>
-              <a:rPr lang="ru-RU" sz="100" dirty="0"/>
-              <a:t>. Французский генеральный резидент Шарль </a:t>
-            </a:r>
-            <a:r>
-              <a:rPr lang="ru-RU" sz="100" dirty="0" err="1"/>
-              <a:t>Ногес</a:t>
-            </a:r>
-            <a:r>
-              <a:rPr lang="ru-RU" sz="100" dirty="0"/>
-              <a:t> был вынужден пойти на экономические уступки местному </a:t>
-            </a:r>
-            <a:r>
-              <a:rPr lang="ru-RU" sz="100" dirty="0" err="1"/>
-              <a:t>населению:Была</a:t>
-            </a:r>
-            <a:r>
-              <a:rPr lang="ru-RU" sz="100" dirty="0"/>
-              <a:t> законодательно увеличена минимальная заработная плата для марокканских </a:t>
-            </a:r>
-            <a:r>
-              <a:rPr lang="ru-RU" sz="100" dirty="0" err="1"/>
-              <a:t>рабочих.Была</a:t>
-            </a:r>
-            <a:r>
-              <a:rPr lang="ru-RU" sz="100" dirty="0"/>
-              <a:t> введена официальная 40-часовая рабочая неделя (для европейских специалистов) и сокращен рабочий день для местных шахтеров.)</a:t>
-            </a:r>
-            <a:endParaRPr lang="ru-RU" sz="600" dirty="0"/>
           </a:p>
         </p:txBody>
       </p:sp>

--- a/Наработки/диздоки/Марокко/Марокко.pptx
+++ b/Наработки/диздоки/Марокко/Марокко.pptx
@@ -209,7 +209,7 @@
             <a:fld id="{33E3D7F9-E251-484C-A6FF-FA958879DF69}" type="datetimeFigureOut">
               <a:rPr lang="ru-RU" smtClean="0"/>
               <a:pPr/>
-              <a:t>29.07.2026</a:t>
+              <a:t>30.07.2026</a:t>
             </a:fld>
             <a:endParaRPr lang="ru-RU"/>
           </a:p>
@@ -699,7 +699,7 @@
             <a:fld id="{85A5DE44-605B-4D3B-B2B7-94543DF81A36}" type="datetimeFigureOut">
               <a:rPr lang="ru-RU" smtClean="0"/>
               <a:pPr/>
-              <a:t>29.07.2026</a:t>
+              <a:t>30.07.2026</a:t>
             </a:fld>
             <a:endParaRPr lang="ru-RU"/>
           </a:p>
@@ -871,7 +871,7 @@
             <a:fld id="{85A5DE44-605B-4D3B-B2B7-94543DF81A36}" type="datetimeFigureOut">
               <a:rPr lang="ru-RU" smtClean="0"/>
               <a:pPr/>
-              <a:t>29.07.2026</a:t>
+              <a:t>30.07.2026</a:t>
             </a:fld>
             <a:endParaRPr lang="ru-RU"/>
           </a:p>
@@ -1053,7 +1053,7 @@
             <a:fld id="{85A5DE44-605B-4D3B-B2B7-94543DF81A36}" type="datetimeFigureOut">
               <a:rPr lang="ru-RU" smtClean="0"/>
               <a:pPr/>
-              <a:t>29.07.2026</a:t>
+              <a:t>30.07.2026</a:t>
             </a:fld>
             <a:endParaRPr lang="ru-RU"/>
           </a:p>
@@ -1225,7 +1225,7 @@
             <a:fld id="{85A5DE44-605B-4D3B-B2B7-94543DF81A36}" type="datetimeFigureOut">
               <a:rPr lang="ru-RU" smtClean="0"/>
               <a:pPr/>
-              <a:t>29.07.2026</a:t>
+              <a:t>30.07.2026</a:t>
             </a:fld>
             <a:endParaRPr lang="ru-RU"/>
           </a:p>
@@ -1473,7 +1473,7 @@
             <a:fld id="{85A5DE44-605B-4D3B-B2B7-94543DF81A36}" type="datetimeFigureOut">
               <a:rPr lang="ru-RU" smtClean="0"/>
               <a:pPr/>
-              <a:t>29.07.2026</a:t>
+              <a:t>30.07.2026</a:t>
             </a:fld>
             <a:endParaRPr lang="ru-RU"/>
           </a:p>
@@ -1707,7 +1707,7 @@
             <a:fld id="{85A5DE44-605B-4D3B-B2B7-94543DF81A36}" type="datetimeFigureOut">
               <a:rPr lang="ru-RU" smtClean="0"/>
               <a:pPr/>
-              <a:t>29.07.2026</a:t>
+              <a:t>30.07.2026</a:t>
             </a:fld>
             <a:endParaRPr lang="ru-RU"/>
           </a:p>
@@ -2076,7 +2076,7 @@
             <a:fld id="{85A5DE44-605B-4D3B-B2B7-94543DF81A36}" type="datetimeFigureOut">
               <a:rPr lang="ru-RU" smtClean="0"/>
               <a:pPr/>
-              <a:t>29.07.2026</a:t>
+              <a:t>30.07.2026</a:t>
             </a:fld>
             <a:endParaRPr lang="ru-RU"/>
           </a:p>
@@ -2196,7 +2196,7 @@
             <a:fld id="{85A5DE44-605B-4D3B-B2B7-94543DF81A36}" type="datetimeFigureOut">
               <a:rPr lang="ru-RU" smtClean="0"/>
               <a:pPr/>
-              <a:t>29.07.2026</a:t>
+              <a:t>30.07.2026</a:t>
             </a:fld>
             <a:endParaRPr lang="ru-RU"/>
           </a:p>
@@ -2293,7 +2293,7 @@
             <a:fld id="{85A5DE44-605B-4D3B-B2B7-94543DF81A36}" type="datetimeFigureOut">
               <a:rPr lang="ru-RU" smtClean="0"/>
               <a:pPr/>
-              <a:t>29.07.2026</a:t>
+              <a:t>30.07.2026</a:t>
             </a:fld>
             <a:endParaRPr lang="ru-RU"/>
           </a:p>
@@ -2572,7 +2572,7 @@
             <a:fld id="{85A5DE44-605B-4D3B-B2B7-94543DF81A36}" type="datetimeFigureOut">
               <a:rPr lang="ru-RU" smtClean="0"/>
               <a:pPr/>
-              <a:t>29.07.2026</a:t>
+              <a:t>30.07.2026</a:t>
             </a:fld>
             <a:endParaRPr lang="ru-RU"/>
           </a:p>
@@ -2831,7 +2831,7 @@
             <a:fld id="{85A5DE44-605B-4D3B-B2B7-94543DF81A36}" type="datetimeFigureOut">
               <a:rPr lang="ru-RU" smtClean="0"/>
               <a:pPr/>
-              <a:t>29.07.2026</a:t>
+              <a:t>30.07.2026</a:t>
             </a:fld>
             <a:endParaRPr lang="ru-RU"/>
           </a:p>
@@ -3046,7 +3046,7 @@
             <a:fld id="{85A5DE44-605B-4D3B-B2B7-94543DF81A36}" type="datetimeFigureOut">
               <a:rPr lang="ru-RU" smtClean="0"/>
               <a:pPr/>
-              <a:t>29.07.2026</a:t>
+              <a:t>30.07.2026</a:t>
             </a:fld>
             <a:endParaRPr lang="ru-RU"/>
           </a:p>
@@ -19969,14 +19969,6 @@
               <a:rPr lang="ru-RU" sz="600" dirty="0"/>
               <a:t>Продвигать арабо-мусульманскую марокканскую национальную идентичность</a:t>
             </a:r>
-            <a:br>
-              <a:rPr lang="ru-RU" sz="100" dirty="0"/>
-            </a:br>
-            <a:r>
-              <a:rPr lang="ru-RU" sz="100" dirty="0"/>
-              <a:t>В ходе своего выступления Султан утверждал, что для победы над фашизмом необходимо «единство французского и марокканского народов, независимо от религии, которое является частным и личным».136 Действительно, Султан однажды заявил, что в Коране нет ничего, что препятствовало бы мусульманам участвовать в коммунистической или профсоюзной деятельности, потому что, в конце концов, «в 600 году Сиди Мухаммад не думал ни о Всеобщей конфедерации труда, ни о Коммунистической партии»)</a:t>
-            </a:r>
-            <a:endParaRPr lang="ru-RU" sz="600" dirty="0"/>
           </a:p>
         </p:txBody>
       </p:sp>
@@ -20028,14 +20020,6 @@
               <a:rPr lang="ru-RU" sz="700" dirty="0"/>
               <a:t>Идеальное Марокко</a:t>
             </a:r>
-            <a:br>
-              <a:rPr lang="ru-RU" sz="700" dirty="0"/>
-            </a:br>
-            <a:r>
-              <a:rPr lang="ru-RU" sz="300" dirty="0"/>
-              <a:t>(Марокканские еврейские коммунисты боролись за идеализированное Марокко, которое так и не воплотилось в жизнь.)</a:t>
-            </a:r>
-            <a:endParaRPr lang="ru-RU" sz="700" dirty="0"/>
           </a:p>
         </p:txBody>
       </p:sp>
@@ -20299,14 +20283,6 @@
               <a:rPr lang="ru-RU" sz="700" dirty="0"/>
               <a:t>Связи с мировыми сионистскими движениями</a:t>
             </a:r>
-            <a:br>
-              <a:rPr lang="ru-RU" sz="700" dirty="0"/>
-            </a:br>
-            <a:r>
-              <a:rPr lang="ru-RU" sz="200" dirty="0"/>
-              <a:t>(быстрый рост числа марокканских евреев и мусульман среди членов таких организаций, как «Друзья СССР» и других «радикальных» организаций европейского происхождения.)</a:t>
-            </a:r>
-            <a:endParaRPr lang="ru-RU" sz="700" dirty="0"/>
           </a:p>
         </p:txBody>
       </p:sp>
@@ -21682,53 +21658,8 @@
             </a:r>
             <a:r>
               <a:rPr lang="ru-RU" sz="700" dirty="0"/>
-              <a:t>» </a:t>
-            </a:r>
-            <a:r>
-              <a:rPr lang="ru-RU" sz="100" dirty="0"/>
-              <a:t>(то ключевая идеологическая доктрина израильского коммунистического движения в XX веке. Она служила главным противовесом как сионистскому, так и арабскому национализму.🎯 Суть </a:t>
-            </a:r>
-            <a:r>
-              <a:rPr lang="ru-RU" sz="100" dirty="0" err="1"/>
-              <a:t>концепцииВ</a:t>
-            </a:r>
-            <a:r>
-              <a:rPr lang="ru-RU" sz="100" dirty="0"/>
-              <a:t> основе «</a:t>
-            </a:r>
-            <a:r>
-              <a:rPr lang="ru-RU" sz="100" dirty="0" err="1"/>
-              <a:t>Ахуват</a:t>
-            </a:r>
-            <a:r>
-              <a:rPr lang="ru-RU" sz="100" dirty="0"/>
-              <a:t> </a:t>
-            </a:r>
-            <a:r>
-              <a:rPr lang="ru-RU" sz="100" dirty="0" err="1"/>
-              <a:t>амим</a:t>
-            </a:r>
-            <a:r>
-              <a:rPr lang="ru-RU" sz="100" dirty="0"/>
-              <a:t>» лежит классический марксистский тезис: главное разделение между людьми — классовое, а не </a:t>
-            </a:r>
-            <a:r>
-              <a:rPr lang="ru-RU" sz="100" dirty="0" err="1"/>
-              <a:t>национальное.Движение</a:t>
-            </a:r>
-            <a:r>
-              <a:rPr lang="ru-RU" sz="100" dirty="0"/>
-              <a:t> утверждало, что у арабских и еврейских трудящихся один враг — крупный капитал и </a:t>
-            </a:r>
-            <a:r>
-              <a:rPr lang="ru-RU" sz="100" dirty="0" err="1"/>
-              <a:t>империализм.Концепция</a:t>
-            </a:r>
-            <a:r>
-              <a:rPr lang="ru-RU" sz="100" dirty="0"/>
-              <a:t> требовала полного отказа от шовинизма. Арабские коммунисты боролись с антисемитизмом и призывами «сбросить евреев в море», а еврейские коммунисты — с расизмом, дискриминацией арабов и идеей «трансфера» (выселения) коренного населения.)</a:t>
-            </a:r>
-            <a:endParaRPr lang="ru-RU" sz="700" dirty="0"/>
+              <a:t>»</a:t>
+            </a:r>
           </a:p>
         </p:txBody>
       </p:sp>
